--- a/tasktide/docs/Diagrams/Diagrams.pptx
+++ b/tasktide/docs/Diagrams/Diagrams.pptx
@@ -3082,12 +3082,8 @@
           <a:p>
             <a:pPr algn="ctr"/>
             <a:r>
-              <a:rPr lang="en-IE" sz="3600" b="1" dirty="0" err="1"/>
-              <a:t>TaskTide</a:t>
-            </a:r>
-            <a:r>
               <a:rPr lang="en-IE" sz="3600" b="1" dirty="0"/>
-              <a:t> Client</a:t>
+              <a:t>TaskTide Client</a:t>
             </a:r>
           </a:p>
         </p:txBody>
@@ -3164,7 +3160,7 @@
           <a:p>
             <a:pPr algn="ctr"/>
             <a:r>
-              <a:rPr lang="en-IE" sz="4000" b="1" dirty="0" err="1"/>
+              <a:rPr lang="en-IE" sz="4000" b="1" dirty="0"/>
               <a:t>ManagerClient</a:t>
             </a:r>
             <a:endParaRPr lang="en-IE" sz="3600" b="1" dirty="0"/>
@@ -3243,10 +3239,9 @@
           <a:p>
             <a:pPr algn="ctr"/>
             <a:r>
-              <a:rPr lang="en-IE" sz="4000" b="1" dirty="0" err="1"/>
+              <a:rPr lang="en-IE" sz="4000" b="1" dirty="0"/>
               <a:t>EngineClient</a:t>
             </a:r>
-            <a:endParaRPr lang="en-IE" sz="4000" b="1" dirty="0"/>
           </a:p>
         </p:txBody>
       </p:sp>
@@ -3322,10 +3317,9 @@
           <a:p>
             <a:pPr algn="ctr"/>
             <a:r>
-              <a:rPr lang="en-IE" sz="4000" b="1" dirty="0" err="1"/>
+              <a:rPr lang="en-IE" sz="4000" b="1" dirty="0"/>
               <a:t>TaskTideService</a:t>
             </a:r>
-            <a:endParaRPr lang="en-IE" sz="4000" b="1" dirty="0"/>
           </a:p>
         </p:txBody>
       </p:sp>
@@ -3401,10 +3395,9 @@
           <a:p>
             <a:pPr algn="ctr"/>
             <a:r>
-              <a:rPr lang="en-IE" sz="4000" b="1" dirty="0" err="1"/>
+              <a:rPr lang="en-IE" sz="4000" b="1" dirty="0"/>
               <a:t>TaskTideRepository</a:t>
             </a:r>
-            <a:endParaRPr lang="en-IE" sz="4000" b="1" dirty="0"/>
           </a:p>
         </p:txBody>
       </p:sp>
@@ -3480,7 +3473,7 @@
           <a:p>
             <a:pPr algn="ctr"/>
             <a:r>
-              <a:rPr lang="en-IE" sz="4000" b="1" dirty="0" err="1"/>
+              <a:rPr lang="en-IE" sz="4000" b="1" dirty="0"/>
               <a:t>TemplateRepository</a:t>
             </a:r>
             <a:endParaRPr lang="en-IE" sz="3200" b="1" dirty="0"/>
@@ -3559,10 +3552,9 @@
           <a:p>
             <a:pPr algn="ctr"/>
             <a:r>
-              <a:rPr lang="en-IE" sz="4000" b="1" dirty="0" err="1"/>
+              <a:rPr lang="en-IE" sz="4000" b="1" dirty="0"/>
               <a:t>ItemStoreRepository</a:t>
             </a:r>
-            <a:endParaRPr lang="en-IE" sz="4000" b="1" dirty="0"/>
           </a:p>
         </p:txBody>
       </p:sp>
@@ -4047,10 +4039,9 @@
           <a:p>
             <a:pPr algn="ctr"/>
             <a:r>
-              <a:rPr lang="en-IE" sz="4000" b="1" dirty="0" err="1"/>
+              <a:rPr lang="en-IE" sz="4000" b="1" dirty="0"/>
               <a:t>TaskTideEngine</a:t>
             </a:r>
-            <a:endParaRPr lang="en-IE" sz="4000" b="1" dirty="0"/>
           </a:p>
         </p:txBody>
       </p:sp>
@@ -4162,10 +4153,9 @@
           <a:p>
             <a:pPr algn="ctr"/>
             <a:r>
-              <a:rPr lang="en-IE" sz="4000" b="1" dirty="0" err="1"/>
+              <a:rPr lang="en-IE" sz="4000" b="1" dirty="0"/>
               <a:t>TaskTideModel</a:t>
             </a:r>
-            <a:endParaRPr lang="en-IE" sz="4000" b="1" dirty="0"/>
           </a:p>
         </p:txBody>
       </p:sp>
@@ -4397,10 +4387,9 @@
           <a:p>
             <a:pPr algn="ctr"/>
             <a:r>
-              <a:rPr lang="en-IE" sz="3200" b="1" dirty="0" err="1"/>
+              <a:rPr lang="en-IE" sz="3200" b="1" dirty="0"/>
               <a:t>WorkItem</a:t>
             </a:r>
-            <a:endParaRPr lang="en-IE" sz="3200" b="1" dirty="0"/>
           </a:p>
         </p:txBody>
       </p:sp>
@@ -4959,12 +4948,8 @@
           <a:p>
             <a:pPr algn="ctr"/>
             <a:r>
-              <a:rPr lang="en-IE" sz="3600" b="1" dirty="0" err="1"/>
-              <a:t>TaskTide</a:t>
-            </a:r>
-            <a:r>
               <a:rPr lang="en-IE" sz="3600" b="1" dirty="0"/>
-              <a:t> Client</a:t>
+              <a:t>TaskTide Client</a:t>
             </a:r>
           </a:p>
         </p:txBody>
@@ -5041,7 +5026,7 @@
           <a:p>
             <a:pPr algn="ctr"/>
             <a:r>
-              <a:rPr lang="en-IE" sz="4000" b="1" dirty="0" err="1"/>
+              <a:rPr lang="en-IE" sz="4000" b="1" dirty="0"/>
               <a:t>ManagerClient</a:t>
             </a:r>
             <a:endParaRPr lang="en-IE" sz="3600" b="1" dirty="0"/>
@@ -5120,10 +5105,9 @@
           <a:p>
             <a:pPr algn="ctr"/>
             <a:r>
-              <a:rPr lang="en-IE" sz="4000" b="1" dirty="0" err="1"/>
+              <a:rPr lang="en-IE" sz="4000" b="1" dirty="0"/>
               <a:t>EngineClient</a:t>
             </a:r>
-            <a:endParaRPr lang="en-IE" sz="4000" b="1" dirty="0"/>
           </a:p>
         </p:txBody>
       </p:sp>
@@ -5199,10 +5183,9 @@
           <a:p>
             <a:pPr algn="ctr"/>
             <a:r>
-              <a:rPr lang="en-IE" sz="4000" b="1" dirty="0" err="1"/>
+              <a:rPr lang="en-IE" sz="4000" b="1" dirty="0"/>
               <a:t>TaskTideService</a:t>
             </a:r>
-            <a:endParaRPr lang="en-IE" sz="4000" b="1" dirty="0"/>
           </a:p>
         </p:txBody>
       </p:sp>
@@ -5278,10 +5261,9 @@
           <a:p>
             <a:pPr algn="ctr"/>
             <a:r>
-              <a:rPr lang="en-IE" sz="4000" b="1" dirty="0" err="1"/>
+              <a:rPr lang="en-IE" sz="4000" b="1" dirty="0"/>
               <a:t>TaskTideRepository</a:t>
             </a:r>
-            <a:endParaRPr lang="en-IE" sz="4000" b="1" dirty="0"/>
           </a:p>
         </p:txBody>
       </p:sp>
@@ -5357,7 +5339,7 @@
           <a:p>
             <a:pPr algn="ctr"/>
             <a:r>
-              <a:rPr lang="en-IE" sz="4000" b="1" dirty="0" err="1"/>
+              <a:rPr lang="en-IE" sz="4000" b="1" dirty="0"/>
               <a:t>TemplateRepository</a:t>
             </a:r>
             <a:endParaRPr lang="en-IE" sz="3200" b="1" dirty="0"/>
@@ -5436,10 +5418,9 @@
           <a:p>
             <a:pPr algn="ctr"/>
             <a:r>
-              <a:rPr lang="en-IE" sz="4000" b="1" dirty="0" err="1"/>
+              <a:rPr lang="en-IE" sz="4000" b="1" dirty="0"/>
               <a:t>ItemStoreRepository</a:t>
             </a:r>
-            <a:endParaRPr lang="en-IE" sz="4000" b="1" dirty="0"/>
           </a:p>
         </p:txBody>
       </p:sp>
@@ -5804,10 +5785,9 @@
           <a:p>
             <a:pPr algn="ctr"/>
             <a:r>
-              <a:rPr lang="en-IE" sz="4000" b="1" dirty="0" err="1"/>
+              <a:rPr lang="en-IE" sz="4000" b="1" dirty="0"/>
               <a:t>TaskTideEngine</a:t>
             </a:r>
-            <a:endParaRPr lang="en-IE" sz="4000" b="1" dirty="0"/>
           </a:p>
         </p:txBody>
       </p:sp>
@@ -5919,10 +5899,9 @@
           <a:p>
             <a:pPr algn="ctr"/>
             <a:r>
-              <a:rPr lang="en-IE" sz="4000" b="1" dirty="0" err="1"/>
+              <a:rPr lang="en-IE" sz="4000" b="1" dirty="0"/>
               <a:t>TaskTideModel</a:t>
             </a:r>
-            <a:endParaRPr lang="en-IE" sz="4000" b="1" dirty="0"/>
           </a:p>
         </p:txBody>
       </p:sp>
@@ -6154,10 +6133,9 @@
           <a:p>
             <a:pPr algn="ctr"/>
             <a:r>
-              <a:rPr lang="en-IE" sz="3200" b="1" dirty="0" err="1"/>
+              <a:rPr lang="en-IE" sz="3200" b="1" dirty="0"/>
               <a:t>WorkItem</a:t>
             </a:r>
-            <a:endParaRPr lang="en-IE" sz="3200" b="1" dirty="0"/>
           </a:p>
         </p:txBody>
       </p:sp>

--- a/tasktide/docs/Diagrams/Diagrams.pptx
+++ b/tasktide/docs/Diagrams/Diagrams.pptx
@@ -6,7 +6,8 @@
   </p:sldMasterIdLst>
   <p:sldIdLst>
     <p:sldId id="256" r:id="rId2"/>
-    <p:sldId id="257" r:id="rId3"/>
+    <p:sldId id="258" r:id="rId3"/>
+    <p:sldId id="257" r:id="rId4"/>
   </p:sldIdLst>
   <p:sldSz cx="18000663" cy="16200438"/>
   <p:notesSz cx="6858000" cy="9144000"/>
@@ -244,7 +245,7 @@
           <a:p>
             <a:fld id="{79C0705B-4870-4470-A32F-307AEE1697AB}" type="datetimeFigureOut">
               <a:rPr lang="en-IE" smtClean="0"/>
-              <a:t>22/07/2025</a:t>
+              <a:t>25/07/2025</a:t>
             </a:fld>
             <a:endParaRPr lang="en-IE"/>
           </a:p>
@@ -414,7 +415,7 @@
           <a:p>
             <a:fld id="{79C0705B-4870-4470-A32F-307AEE1697AB}" type="datetimeFigureOut">
               <a:rPr lang="en-IE" smtClean="0"/>
-              <a:t>22/07/2025</a:t>
+              <a:t>25/07/2025</a:t>
             </a:fld>
             <a:endParaRPr lang="en-IE"/>
           </a:p>
@@ -594,7 +595,7 @@
           <a:p>
             <a:fld id="{79C0705B-4870-4470-A32F-307AEE1697AB}" type="datetimeFigureOut">
               <a:rPr lang="en-IE" smtClean="0"/>
-              <a:t>22/07/2025</a:t>
+              <a:t>25/07/2025</a:t>
             </a:fld>
             <a:endParaRPr lang="en-IE"/>
           </a:p>
@@ -764,7 +765,7 @@
           <a:p>
             <a:fld id="{79C0705B-4870-4470-A32F-307AEE1697AB}" type="datetimeFigureOut">
               <a:rPr lang="en-IE" smtClean="0"/>
-              <a:t>22/07/2025</a:t>
+              <a:t>25/07/2025</a:t>
             </a:fld>
             <a:endParaRPr lang="en-IE"/>
           </a:p>
@@ -1010,7 +1011,7 @@
           <a:p>
             <a:fld id="{79C0705B-4870-4470-A32F-307AEE1697AB}" type="datetimeFigureOut">
               <a:rPr lang="en-IE" smtClean="0"/>
-              <a:t>22/07/2025</a:t>
+              <a:t>25/07/2025</a:t>
             </a:fld>
             <a:endParaRPr lang="en-IE"/>
           </a:p>
@@ -1242,7 +1243,7 @@
           <a:p>
             <a:fld id="{79C0705B-4870-4470-A32F-307AEE1697AB}" type="datetimeFigureOut">
               <a:rPr lang="en-IE" smtClean="0"/>
-              <a:t>22/07/2025</a:t>
+              <a:t>25/07/2025</a:t>
             </a:fld>
             <a:endParaRPr lang="en-IE"/>
           </a:p>
@@ -1609,7 +1610,7 @@
           <a:p>
             <a:fld id="{79C0705B-4870-4470-A32F-307AEE1697AB}" type="datetimeFigureOut">
               <a:rPr lang="en-IE" smtClean="0"/>
-              <a:t>22/07/2025</a:t>
+              <a:t>25/07/2025</a:t>
             </a:fld>
             <a:endParaRPr lang="en-IE"/>
           </a:p>
@@ -1727,7 +1728,7 @@
           <a:p>
             <a:fld id="{79C0705B-4870-4470-A32F-307AEE1697AB}" type="datetimeFigureOut">
               <a:rPr lang="en-IE" smtClean="0"/>
-              <a:t>22/07/2025</a:t>
+              <a:t>25/07/2025</a:t>
             </a:fld>
             <a:endParaRPr lang="en-IE"/>
           </a:p>
@@ -1822,7 +1823,7 @@
           <a:p>
             <a:fld id="{79C0705B-4870-4470-A32F-307AEE1697AB}" type="datetimeFigureOut">
               <a:rPr lang="en-IE" smtClean="0"/>
-              <a:t>22/07/2025</a:t>
+              <a:t>25/07/2025</a:t>
             </a:fld>
             <a:endParaRPr lang="en-IE"/>
           </a:p>
@@ -2099,7 +2100,7 @@
           <a:p>
             <a:fld id="{79C0705B-4870-4470-A32F-307AEE1697AB}" type="datetimeFigureOut">
               <a:rPr lang="en-IE" smtClean="0"/>
-              <a:t>22/07/2025</a:t>
+              <a:t>25/07/2025</a:t>
             </a:fld>
             <a:endParaRPr lang="en-IE"/>
           </a:p>
@@ -2356,7 +2357,7 @@
           <a:p>
             <a:fld id="{79C0705B-4870-4470-A32F-307AEE1697AB}" type="datetimeFigureOut">
               <a:rPr lang="en-IE" smtClean="0"/>
-              <a:t>22/07/2025</a:t>
+              <a:t>25/07/2025</a:t>
             </a:fld>
             <a:endParaRPr lang="en-IE"/>
           </a:p>
@@ -2569,7 +2570,7 @@
           <a:p>
             <a:fld id="{79C0705B-4870-4470-A32F-307AEE1697AB}" type="datetimeFigureOut">
               <a:rPr lang="en-IE" smtClean="0"/>
-              <a:t>22/07/2025</a:t>
+              <a:t>25/07/2025</a:t>
             </a:fld>
             <a:endParaRPr lang="en-IE"/>
           </a:p>
@@ -3630,10 +3631,9 @@
           <a:p>
             <a:pPr algn="ctr"/>
             <a:r>
-              <a:rPr lang="en-IE" sz="4000" b="1" dirty="0" err="1"/>
-              <a:t>JsonRepository</a:t>
-            </a:r>
-            <a:endParaRPr lang="en-IE" sz="4000" b="1" dirty="0"/>
+              <a:rPr lang="en-IE" sz="4000" b="1" dirty="0"/>
+              <a:t>JpaRepository</a:t>
+            </a:r>
           </a:p>
         </p:txBody>
       </p:sp>
@@ -4804,6 +4804,176 @@
           </a:fontRef>
         </p:style>
       </p:cxnSp>
+      <p:cxnSp>
+        <p:nvCxnSpPr>
+          <p:cNvPr id="2" name="Straight Arrow Connector 1">
+            <a:extLst>
+              <a:ext uri="{FF2B5EF4-FFF2-40B4-BE49-F238E27FC236}">
+                <a16:creationId xmlns:a16="http://schemas.microsoft.com/office/drawing/2014/main" id="{B63FC61A-B064-0C71-D47B-6087923E9AA1}"/>
+              </a:ext>
+            </a:extLst>
+          </p:cNvPr>
+          <p:cNvCxnSpPr>
+            <a:cxnSpLocks/>
+          </p:cNvCxnSpPr>
+          <p:nvPr/>
+        </p:nvCxnSpPr>
+        <p:spPr>
+          <a:xfrm>
+            <a:off x="7446025" y="11818336"/>
+            <a:ext cx="0" cy="912134"/>
+          </a:xfrm>
+          <a:prstGeom prst="straightConnector1">
+            <a:avLst/>
+          </a:prstGeom>
+          <a:ln w="76200">
+            <a:tailEnd type="triangle"/>
+          </a:ln>
+        </p:spPr>
+        <p:style>
+          <a:lnRef idx="3">
+            <a:schemeClr val="accent6"/>
+          </a:lnRef>
+          <a:fillRef idx="0">
+            <a:schemeClr val="accent6"/>
+          </a:fillRef>
+          <a:effectRef idx="2">
+            <a:schemeClr val="accent6"/>
+          </a:effectRef>
+          <a:fontRef idx="minor">
+            <a:schemeClr val="tx1"/>
+          </a:fontRef>
+        </p:style>
+      </p:cxnSp>
+      <p:grpSp>
+        <p:nvGrpSpPr>
+          <p:cNvPr id="20" name="Group 19">
+            <a:extLst>
+              <a:ext uri="{FF2B5EF4-FFF2-40B4-BE49-F238E27FC236}">
+                <a16:creationId xmlns:a16="http://schemas.microsoft.com/office/drawing/2014/main" id="{A1788FC1-D1D9-FCA0-8AA7-E335A3FB44E0}"/>
+              </a:ext>
+            </a:extLst>
+          </p:cNvPr>
+          <p:cNvGrpSpPr/>
+          <p:nvPr/>
+        </p:nvGrpSpPr>
+        <p:grpSpPr>
+          <a:xfrm>
+            <a:off x="5759895" y="12730470"/>
+            <a:ext cx="3317123" cy="2907635"/>
+            <a:chOff x="5722573" y="12674487"/>
+            <a:chExt cx="3317123" cy="2907635"/>
+          </a:xfrm>
+        </p:grpSpPr>
+        <p:pic>
+          <p:nvPicPr>
+            <p:cNvPr id="4" name="Picture 3" descr="A blue circle with white text and a dolphin&#10;&#10;AI-generated content may be incorrect.">
+              <a:extLst>
+                <a:ext uri="{FF2B5EF4-FFF2-40B4-BE49-F238E27FC236}">
+                  <a16:creationId xmlns:a16="http://schemas.microsoft.com/office/drawing/2014/main" id="{4317112C-5E93-13F6-DEEF-8EAA6FDD088F}"/>
+                </a:ext>
+              </a:extLst>
+            </p:cNvPr>
+            <p:cNvPicPr>
+              <a:picLocks noChangeAspect="1"/>
+            </p:cNvPicPr>
+            <p:nvPr/>
+          </p:nvPicPr>
+          <p:blipFill>
+            <a:blip r:embed="rId6">
+              <a:extLst>
+                <a:ext uri="{28A0092B-C50C-407E-A947-70E740481C1C}">
+                  <a14:useLocalDpi xmlns:a14="http://schemas.microsoft.com/office/drawing/2010/main" val="0"/>
+                </a:ext>
+              </a:extLst>
+            </a:blip>
+            <a:stretch>
+              <a:fillRect/>
+            </a:stretch>
+          </p:blipFill>
+          <p:spPr>
+            <a:xfrm>
+              <a:off x="5722573" y="12674487"/>
+              <a:ext cx="1409700" cy="1409700"/>
+            </a:xfrm>
+            <a:prstGeom prst="rect">
+              <a:avLst/>
+            </a:prstGeom>
+          </p:spPr>
+        </p:pic>
+        <p:pic>
+          <p:nvPicPr>
+            <p:cNvPr id="15" name="Picture 14" descr="A logo for a company&#10;&#10;AI-generated content may be incorrect.">
+              <a:extLst>
+                <a:ext uri="{FF2B5EF4-FFF2-40B4-BE49-F238E27FC236}">
+                  <a16:creationId xmlns:a16="http://schemas.microsoft.com/office/drawing/2014/main" id="{B03A0ABC-098B-C812-3DA4-0300D71075D1}"/>
+                </a:ext>
+              </a:extLst>
+            </p:cNvPr>
+            <p:cNvPicPr>
+              <a:picLocks noChangeAspect="1"/>
+            </p:cNvPicPr>
+            <p:nvPr/>
+          </p:nvPicPr>
+          <p:blipFill>
+            <a:blip r:embed="rId7">
+              <a:extLst>
+                <a:ext uri="{28A0092B-C50C-407E-A947-70E740481C1C}">
+                  <a14:useLocalDpi xmlns:a14="http://schemas.microsoft.com/office/drawing/2010/main" val="0"/>
+                </a:ext>
+              </a:extLst>
+            </a:blip>
+            <a:stretch>
+              <a:fillRect/>
+            </a:stretch>
+          </p:blipFill>
+          <p:spPr>
+            <a:xfrm>
+              <a:off x="6647452" y="14381372"/>
+              <a:ext cx="1590182" cy="1200750"/>
+            </a:xfrm>
+            <a:prstGeom prst="rect">
+              <a:avLst/>
+            </a:prstGeom>
+          </p:spPr>
+        </p:pic>
+        <p:pic>
+          <p:nvPicPr>
+            <p:cNvPr id="19" name="Picture 18" descr="A blue elephant logo with white text&#10;&#10;AI-generated content may be incorrect.">
+              <a:extLst>
+                <a:ext uri="{FF2B5EF4-FFF2-40B4-BE49-F238E27FC236}">
+                  <a16:creationId xmlns:a16="http://schemas.microsoft.com/office/drawing/2014/main" id="{33994AF6-0DEF-2EBD-E76A-01617A7F53A2}"/>
+                </a:ext>
+              </a:extLst>
+            </p:cNvPr>
+            <p:cNvPicPr>
+              <a:picLocks noChangeAspect="1"/>
+            </p:cNvPicPr>
+            <p:nvPr/>
+          </p:nvPicPr>
+          <p:blipFill>
+            <a:blip r:embed="rId8">
+              <a:extLst>
+                <a:ext uri="{28A0092B-C50C-407E-A947-70E740481C1C}">
+                  <a14:useLocalDpi xmlns:a14="http://schemas.microsoft.com/office/drawing/2010/main" val="0"/>
+                </a:ext>
+              </a:extLst>
+            </a:blip>
+            <a:stretch>
+              <a:fillRect/>
+            </a:stretch>
+          </p:blipFill>
+          <p:spPr>
+            <a:xfrm>
+              <a:off x="7688502" y="12732993"/>
+              <a:ext cx="1351194" cy="1351194"/>
+            </a:xfrm>
+            <a:prstGeom prst="rect">
+              <a:avLst/>
+            </a:prstGeom>
+          </p:spPr>
+        </p:pic>
+      </p:grpSp>
     </p:spTree>
     <p:extLst>
       <p:ext uri="{BB962C8B-B14F-4D97-AF65-F5344CB8AC3E}">
@@ -4818,6 +4988,1948 @@
 </file>
 
 <file path=ppt/slides/slide2.xml><?xml version="1.0" encoding="utf-8"?>
+<p:sld xmlns:a="http://schemas.openxmlformats.org/drawingml/2006/main" xmlns:r="http://schemas.openxmlformats.org/officeDocument/2006/relationships" xmlns:p="http://schemas.openxmlformats.org/presentationml/2006/main">
+  <p:cSld>
+    <p:spTree>
+      <p:nvGrpSpPr>
+        <p:cNvPr id="1" name="">
+          <a:extLst>
+            <a:ext uri="{FF2B5EF4-FFF2-40B4-BE49-F238E27FC236}">
+              <a16:creationId xmlns:a16="http://schemas.microsoft.com/office/drawing/2014/main" id="{5353CE86-7161-A9BD-45FD-6F22304D5B3A}"/>
+            </a:ext>
+          </a:extLst>
+        </p:cNvPr>
+        <p:cNvGrpSpPr/>
+        <p:nvPr/>
+      </p:nvGrpSpPr>
+      <p:grpSpPr>
+        <a:xfrm>
+          <a:off x="0" y="0"/>
+          <a:ext cx="0" cy="0"/>
+          <a:chOff x="0" y="0"/>
+          <a:chExt cx="0" cy="0"/>
+        </a:xfrm>
+      </p:grpSpPr>
+      <p:pic>
+        <p:nvPicPr>
+          <p:cNvPr id="5" name="Picture 4" descr="A logo with waves and text&#10;&#10;AI-generated content may be incorrect.">
+            <a:extLst>
+              <a:ext uri="{FF2B5EF4-FFF2-40B4-BE49-F238E27FC236}">
+                <a16:creationId xmlns:a16="http://schemas.microsoft.com/office/drawing/2014/main" id="{4D49C95C-FB72-FA1E-BEA8-0066A49008F3}"/>
+              </a:ext>
+            </a:extLst>
+          </p:cNvPr>
+          <p:cNvPicPr>
+            <a:picLocks noChangeAspect="1"/>
+          </p:cNvPicPr>
+          <p:nvPr/>
+        </p:nvPicPr>
+        <p:blipFill>
+          <a:blip r:embed="rId2">
+            <a:extLst>
+              <a:ext uri="{28A0092B-C50C-407E-A947-70E740481C1C}">
+                <a14:useLocalDpi xmlns:a14="http://schemas.microsoft.com/office/drawing/2010/main" val="0"/>
+              </a:ext>
+            </a:extLst>
+          </a:blip>
+          <a:stretch>
+            <a:fillRect/>
+          </a:stretch>
+        </p:blipFill>
+        <p:spPr>
+          <a:xfrm>
+            <a:off x="3710306" y="94762"/>
+            <a:ext cx="5368986" cy="4774210"/>
+          </a:xfrm>
+          <a:prstGeom prst="rect">
+            <a:avLst/>
+          </a:prstGeom>
+        </p:spPr>
+      </p:pic>
+      <p:sp>
+        <p:nvSpPr>
+          <p:cNvPr id="7" name="Flowchart: Alternate Process 6">
+            <a:extLst>
+              <a:ext uri="{FF2B5EF4-FFF2-40B4-BE49-F238E27FC236}">
+                <a16:creationId xmlns:a16="http://schemas.microsoft.com/office/drawing/2014/main" id="{A0D5D681-EC19-52DB-E992-0E57F0AEFD3A}"/>
+              </a:ext>
+            </a:extLst>
+          </p:cNvPr>
+          <p:cNvSpPr/>
+          <p:nvPr/>
+        </p:nvSpPr>
+        <p:spPr>
+          <a:xfrm>
+            <a:off x="3853559" y="4166755"/>
+            <a:ext cx="5147728" cy="846667"/>
+          </a:xfrm>
+          <a:prstGeom prst="flowChartAlternateProcess">
+            <a:avLst/>
+          </a:prstGeom>
+          <a:gradFill flip="none" rotWithShape="1">
+            <a:gsLst>
+              <a:gs pos="0">
+                <a:schemeClr val="accent1">
+                  <a:shade val="30000"/>
+                  <a:satMod val="115000"/>
+                </a:schemeClr>
+              </a:gs>
+              <a:gs pos="50000">
+                <a:schemeClr val="accent1">
+                  <a:shade val="67500"/>
+                  <a:satMod val="115000"/>
+                </a:schemeClr>
+              </a:gs>
+              <a:gs pos="100000">
+                <a:schemeClr val="accent1">
+                  <a:shade val="100000"/>
+                  <a:satMod val="115000"/>
+                </a:schemeClr>
+              </a:gs>
+            </a:gsLst>
+            <a:lin ang="5400000" scaled="1"/>
+            <a:tileRect/>
+          </a:gradFill>
+          <a:ln w="57150">
+            <a:solidFill>
+              <a:schemeClr val="tx1"/>
+            </a:solidFill>
+          </a:ln>
+        </p:spPr>
+        <p:style>
+          <a:lnRef idx="2">
+            <a:schemeClr val="accent1">
+              <a:shade val="15000"/>
+            </a:schemeClr>
+          </a:lnRef>
+          <a:fillRef idx="1">
+            <a:schemeClr val="accent1"/>
+          </a:fillRef>
+          <a:effectRef idx="0">
+            <a:schemeClr val="accent1"/>
+          </a:effectRef>
+          <a:fontRef idx="minor">
+            <a:schemeClr val="lt1"/>
+          </a:fontRef>
+        </p:style>
+        <p:txBody>
+          <a:bodyPr rtlCol="0" anchor="ctr"/>
+          <a:lstStyle/>
+          <a:p>
+            <a:pPr algn="ctr"/>
+            <a:r>
+              <a:rPr lang="en-IE" sz="3600" b="1" dirty="0"/>
+              <a:t>TaskTide Client</a:t>
+            </a:r>
+          </a:p>
+        </p:txBody>
+      </p:sp>
+      <p:sp>
+        <p:nvSpPr>
+          <p:cNvPr id="8" name="Flowchart: Alternate Process 7">
+            <a:extLst>
+              <a:ext uri="{FF2B5EF4-FFF2-40B4-BE49-F238E27FC236}">
+                <a16:creationId xmlns:a16="http://schemas.microsoft.com/office/drawing/2014/main" id="{C9B222C9-BBBA-0888-EF26-AA904B46F6C6}"/>
+              </a:ext>
+            </a:extLst>
+          </p:cNvPr>
+          <p:cNvSpPr/>
+          <p:nvPr/>
+        </p:nvSpPr>
+        <p:spPr>
+          <a:xfrm>
+            <a:off x="1156997" y="5941276"/>
+            <a:ext cx="3806883" cy="1040497"/>
+          </a:xfrm>
+          <a:prstGeom prst="flowChartAlternateProcess">
+            <a:avLst/>
+          </a:prstGeom>
+          <a:gradFill flip="none" rotWithShape="1">
+            <a:gsLst>
+              <a:gs pos="0">
+                <a:schemeClr val="accent1">
+                  <a:shade val="30000"/>
+                  <a:satMod val="115000"/>
+                </a:schemeClr>
+              </a:gs>
+              <a:gs pos="50000">
+                <a:schemeClr val="accent1">
+                  <a:shade val="67500"/>
+                  <a:satMod val="115000"/>
+                </a:schemeClr>
+              </a:gs>
+              <a:gs pos="100000">
+                <a:schemeClr val="accent1">
+                  <a:shade val="100000"/>
+                  <a:satMod val="115000"/>
+                </a:schemeClr>
+              </a:gs>
+            </a:gsLst>
+            <a:lin ang="5400000" scaled="1"/>
+            <a:tileRect/>
+          </a:gradFill>
+          <a:ln w="57150">
+            <a:solidFill>
+              <a:schemeClr val="tx1"/>
+            </a:solidFill>
+          </a:ln>
+        </p:spPr>
+        <p:style>
+          <a:lnRef idx="2">
+            <a:schemeClr val="accent1">
+              <a:shade val="15000"/>
+            </a:schemeClr>
+          </a:lnRef>
+          <a:fillRef idx="1">
+            <a:schemeClr val="accent1"/>
+          </a:fillRef>
+          <a:effectRef idx="0">
+            <a:schemeClr val="accent1"/>
+          </a:effectRef>
+          <a:fontRef idx="minor">
+            <a:schemeClr val="lt1"/>
+          </a:fontRef>
+        </p:style>
+        <p:txBody>
+          <a:bodyPr rtlCol="0" anchor="ctr"/>
+          <a:lstStyle/>
+          <a:p>
+            <a:pPr algn="ctr"/>
+            <a:r>
+              <a:rPr lang="en-IE" sz="4000" b="1" dirty="0"/>
+              <a:t>ManagerClient</a:t>
+            </a:r>
+            <a:endParaRPr lang="en-IE" sz="3600" b="1" dirty="0"/>
+          </a:p>
+        </p:txBody>
+      </p:sp>
+      <p:sp>
+        <p:nvSpPr>
+          <p:cNvPr id="9" name="Flowchart: Alternate Process 8">
+            <a:extLst>
+              <a:ext uri="{FF2B5EF4-FFF2-40B4-BE49-F238E27FC236}">
+                <a16:creationId xmlns:a16="http://schemas.microsoft.com/office/drawing/2014/main" id="{0088A710-20B0-2142-B5AA-A176FCC79125}"/>
+              </a:ext>
+            </a:extLst>
+          </p:cNvPr>
+          <p:cNvSpPr/>
+          <p:nvPr/>
+        </p:nvSpPr>
+        <p:spPr>
+          <a:xfrm>
+            <a:off x="7274333" y="5951364"/>
+            <a:ext cx="3454567" cy="1034688"/>
+          </a:xfrm>
+          <a:prstGeom prst="flowChartAlternateProcess">
+            <a:avLst/>
+          </a:prstGeom>
+          <a:gradFill flip="none" rotWithShape="1">
+            <a:gsLst>
+              <a:gs pos="0">
+                <a:schemeClr val="accent1">
+                  <a:shade val="30000"/>
+                  <a:satMod val="115000"/>
+                </a:schemeClr>
+              </a:gs>
+              <a:gs pos="50000">
+                <a:schemeClr val="accent1">
+                  <a:shade val="67500"/>
+                  <a:satMod val="115000"/>
+                </a:schemeClr>
+              </a:gs>
+              <a:gs pos="100000">
+                <a:schemeClr val="accent1">
+                  <a:shade val="100000"/>
+                  <a:satMod val="115000"/>
+                </a:schemeClr>
+              </a:gs>
+            </a:gsLst>
+            <a:lin ang="5400000" scaled="1"/>
+            <a:tileRect/>
+          </a:gradFill>
+          <a:ln w="57150">
+            <a:solidFill>
+              <a:schemeClr val="tx1"/>
+            </a:solidFill>
+          </a:ln>
+        </p:spPr>
+        <p:style>
+          <a:lnRef idx="2">
+            <a:schemeClr val="accent1">
+              <a:shade val="15000"/>
+            </a:schemeClr>
+          </a:lnRef>
+          <a:fillRef idx="1">
+            <a:schemeClr val="accent1"/>
+          </a:fillRef>
+          <a:effectRef idx="0">
+            <a:schemeClr val="accent1"/>
+          </a:effectRef>
+          <a:fontRef idx="minor">
+            <a:schemeClr val="lt1"/>
+          </a:fontRef>
+        </p:style>
+        <p:txBody>
+          <a:bodyPr rtlCol="0" anchor="ctr"/>
+          <a:lstStyle/>
+          <a:p>
+            <a:pPr algn="ctr"/>
+            <a:r>
+              <a:rPr lang="en-IE" sz="4000" b="1" dirty="0"/>
+              <a:t>EngineClient</a:t>
+            </a:r>
+          </a:p>
+        </p:txBody>
+      </p:sp>
+      <p:sp>
+        <p:nvSpPr>
+          <p:cNvPr id="10" name="Flowchart: Alternate Process 9">
+            <a:extLst>
+              <a:ext uri="{FF2B5EF4-FFF2-40B4-BE49-F238E27FC236}">
+                <a16:creationId xmlns:a16="http://schemas.microsoft.com/office/drawing/2014/main" id="{C175F32A-56DF-9F7C-9A94-1E7802433A90}"/>
+              </a:ext>
+            </a:extLst>
+          </p:cNvPr>
+          <p:cNvSpPr/>
+          <p:nvPr/>
+        </p:nvSpPr>
+        <p:spPr>
+          <a:xfrm>
+            <a:off x="3579676" y="7662740"/>
+            <a:ext cx="5421603" cy="1040497"/>
+          </a:xfrm>
+          <a:prstGeom prst="flowChartAlternateProcess">
+            <a:avLst/>
+          </a:prstGeom>
+          <a:gradFill flip="none" rotWithShape="1">
+            <a:gsLst>
+              <a:gs pos="0">
+                <a:schemeClr val="accent1">
+                  <a:shade val="30000"/>
+                  <a:satMod val="115000"/>
+                </a:schemeClr>
+              </a:gs>
+              <a:gs pos="50000">
+                <a:schemeClr val="accent1">
+                  <a:shade val="67500"/>
+                  <a:satMod val="115000"/>
+                </a:schemeClr>
+              </a:gs>
+              <a:gs pos="100000">
+                <a:schemeClr val="accent1">
+                  <a:shade val="100000"/>
+                  <a:satMod val="115000"/>
+                </a:schemeClr>
+              </a:gs>
+            </a:gsLst>
+            <a:lin ang="5400000" scaled="1"/>
+            <a:tileRect/>
+          </a:gradFill>
+          <a:ln w="57150">
+            <a:solidFill>
+              <a:schemeClr val="tx1"/>
+            </a:solidFill>
+          </a:ln>
+        </p:spPr>
+        <p:style>
+          <a:lnRef idx="2">
+            <a:schemeClr val="accent1">
+              <a:shade val="15000"/>
+            </a:schemeClr>
+          </a:lnRef>
+          <a:fillRef idx="1">
+            <a:schemeClr val="accent1"/>
+          </a:fillRef>
+          <a:effectRef idx="0">
+            <a:schemeClr val="accent1"/>
+          </a:effectRef>
+          <a:fontRef idx="minor">
+            <a:schemeClr val="lt1"/>
+          </a:fontRef>
+        </p:style>
+        <p:txBody>
+          <a:bodyPr rtlCol="0" anchor="ctr"/>
+          <a:lstStyle/>
+          <a:p>
+            <a:pPr algn="ctr"/>
+            <a:r>
+              <a:rPr lang="en-IE" sz="4000" b="1" dirty="0"/>
+              <a:t>TaskTideService</a:t>
+            </a:r>
+          </a:p>
+        </p:txBody>
+      </p:sp>
+      <p:sp>
+        <p:nvSpPr>
+          <p:cNvPr id="11" name="Flowchart: Alternate Process 10">
+            <a:extLst>
+              <a:ext uri="{FF2B5EF4-FFF2-40B4-BE49-F238E27FC236}">
+                <a16:creationId xmlns:a16="http://schemas.microsoft.com/office/drawing/2014/main" id="{BB1892BD-1701-A0BD-82BF-2DE970D0462F}"/>
+              </a:ext>
+            </a:extLst>
+          </p:cNvPr>
+          <p:cNvSpPr/>
+          <p:nvPr/>
+        </p:nvSpPr>
+        <p:spPr>
+          <a:xfrm>
+            <a:off x="3760249" y="9393847"/>
+            <a:ext cx="5147734" cy="846667"/>
+          </a:xfrm>
+          <a:prstGeom prst="flowChartAlternateProcess">
+            <a:avLst/>
+          </a:prstGeom>
+          <a:gradFill flip="none" rotWithShape="1">
+            <a:gsLst>
+              <a:gs pos="0">
+                <a:schemeClr val="accent1">
+                  <a:shade val="30000"/>
+                  <a:satMod val="115000"/>
+                </a:schemeClr>
+              </a:gs>
+              <a:gs pos="50000">
+                <a:schemeClr val="accent1">
+                  <a:shade val="67500"/>
+                  <a:satMod val="115000"/>
+                </a:schemeClr>
+              </a:gs>
+              <a:gs pos="100000">
+                <a:schemeClr val="accent1">
+                  <a:shade val="100000"/>
+                  <a:satMod val="115000"/>
+                </a:schemeClr>
+              </a:gs>
+            </a:gsLst>
+            <a:lin ang="5400000" scaled="1"/>
+            <a:tileRect/>
+          </a:gradFill>
+          <a:ln w="57150">
+            <a:solidFill>
+              <a:schemeClr val="tx1"/>
+            </a:solidFill>
+          </a:ln>
+        </p:spPr>
+        <p:style>
+          <a:lnRef idx="2">
+            <a:schemeClr val="accent1">
+              <a:shade val="15000"/>
+            </a:schemeClr>
+          </a:lnRef>
+          <a:fillRef idx="1">
+            <a:schemeClr val="accent1"/>
+          </a:fillRef>
+          <a:effectRef idx="0">
+            <a:schemeClr val="accent1"/>
+          </a:effectRef>
+          <a:fontRef idx="minor">
+            <a:schemeClr val="lt1"/>
+          </a:fontRef>
+        </p:style>
+        <p:txBody>
+          <a:bodyPr rtlCol="0" anchor="ctr"/>
+          <a:lstStyle/>
+          <a:p>
+            <a:pPr algn="ctr"/>
+            <a:r>
+              <a:rPr lang="en-IE" sz="4000" b="1" dirty="0"/>
+              <a:t>TaskTideRepository</a:t>
+            </a:r>
+          </a:p>
+        </p:txBody>
+      </p:sp>
+      <p:sp>
+        <p:nvSpPr>
+          <p:cNvPr id="12" name="Flowchart: Alternate Process 11">
+            <a:extLst>
+              <a:ext uri="{FF2B5EF4-FFF2-40B4-BE49-F238E27FC236}">
+                <a16:creationId xmlns:a16="http://schemas.microsoft.com/office/drawing/2014/main" id="{96FC22DE-6644-4604-5F43-438B9F4B6E59}"/>
+              </a:ext>
+            </a:extLst>
+          </p:cNvPr>
+          <p:cNvSpPr/>
+          <p:nvPr/>
+        </p:nvSpPr>
+        <p:spPr>
+          <a:xfrm>
+            <a:off x="286029" y="12290092"/>
+            <a:ext cx="4964451" cy="846667"/>
+          </a:xfrm>
+          <a:prstGeom prst="flowChartAlternateProcess">
+            <a:avLst/>
+          </a:prstGeom>
+          <a:gradFill flip="none" rotWithShape="1">
+            <a:gsLst>
+              <a:gs pos="0">
+                <a:schemeClr val="accent1">
+                  <a:shade val="30000"/>
+                  <a:satMod val="115000"/>
+                </a:schemeClr>
+              </a:gs>
+              <a:gs pos="50000">
+                <a:schemeClr val="accent1">
+                  <a:shade val="67500"/>
+                  <a:satMod val="115000"/>
+                </a:schemeClr>
+              </a:gs>
+              <a:gs pos="100000">
+                <a:schemeClr val="accent1">
+                  <a:shade val="100000"/>
+                  <a:satMod val="115000"/>
+                </a:schemeClr>
+              </a:gs>
+            </a:gsLst>
+            <a:lin ang="5400000" scaled="1"/>
+            <a:tileRect/>
+          </a:gradFill>
+          <a:ln w="57150">
+            <a:solidFill>
+              <a:schemeClr val="tx1"/>
+            </a:solidFill>
+          </a:ln>
+        </p:spPr>
+        <p:style>
+          <a:lnRef idx="2">
+            <a:schemeClr val="accent1">
+              <a:shade val="15000"/>
+            </a:schemeClr>
+          </a:lnRef>
+          <a:fillRef idx="1">
+            <a:schemeClr val="accent1"/>
+          </a:fillRef>
+          <a:effectRef idx="0">
+            <a:schemeClr val="accent1"/>
+          </a:effectRef>
+          <a:fontRef idx="minor">
+            <a:schemeClr val="lt1"/>
+          </a:fontRef>
+        </p:style>
+        <p:txBody>
+          <a:bodyPr rtlCol="0" anchor="ctr"/>
+          <a:lstStyle/>
+          <a:p>
+            <a:pPr algn="ctr"/>
+            <a:r>
+              <a:rPr lang="en-IE" sz="4000" b="1" dirty="0"/>
+              <a:t>TemplateRepository</a:t>
+            </a:r>
+            <a:endParaRPr lang="en-IE" sz="3200" b="1" dirty="0"/>
+          </a:p>
+        </p:txBody>
+      </p:sp>
+      <p:sp>
+        <p:nvSpPr>
+          <p:cNvPr id="13" name="Flowchart: Alternate Process 12">
+            <a:extLst>
+              <a:ext uri="{FF2B5EF4-FFF2-40B4-BE49-F238E27FC236}">
+                <a16:creationId xmlns:a16="http://schemas.microsoft.com/office/drawing/2014/main" id="{D8992BE9-744B-1CD2-6A96-DB2DD3646F8C}"/>
+              </a:ext>
+            </a:extLst>
+          </p:cNvPr>
+          <p:cNvSpPr/>
+          <p:nvPr/>
+        </p:nvSpPr>
+        <p:spPr>
+          <a:xfrm>
+            <a:off x="9595925" y="12251154"/>
+            <a:ext cx="5147731" cy="846667"/>
+          </a:xfrm>
+          <a:prstGeom prst="flowChartAlternateProcess">
+            <a:avLst/>
+          </a:prstGeom>
+          <a:gradFill flip="none" rotWithShape="1">
+            <a:gsLst>
+              <a:gs pos="0">
+                <a:schemeClr val="accent1">
+                  <a:shade val="30000"/>
+                  <a:satMod val="115000"/>
+                </a:schemeClr>
+              </a:gs>
+              <a:gs pos="50000">
+                <a:schemeClr val="accent1">
+                  <a:shade val="67500"/>
+                  <a:satMod val="115000"/>
+                </a:schemeClr>
+              </a:gs>
+              <a:gs pos="100000">
+                <a:schemeClr val="accent1">
+                  <a:shade val="100000"/>
+                  <a:satMod val="115000"/>
+                </a:schemeClr>
+              </a:gs>
+            </a:gsLst>
+            <a:lin ang="5400000" scaled="1"/>
+            <a:tileRect/>
+          </a:gradFill>
+          <a:ln w="57150">
+            <a:solidFill>
+              <a:schemeClr val="tx1"/>
+            </a:solidFill>
+          </a:ln>
+        </p:spPr>
+        <p:style>
+          <a:lnRef idx="2">
+            <a:schemeClr val="accent1">
+              <a:shade val="15000"/>
+            </a:schemeClr>
+          </a:lnRef>
+          <a:fillRef idx="1">
+            <a:schemeClr val="accent1"/>
+          </a:fillRef>
+          <a:effectRef idx="0">
+            <a:schemeClr val="accent1"/>
+          </a:effectRef>
+          <a:fontRef idx="minor">
+            <a:schemeClr val="lt1"/>
+          </a:fontRef>
+        </p:style>
+        <p:txBody>
+          <a:bodyPr rtlCol="0" anchor="ctr"/>
+          <a:lstStyle/>
+          <a:p>
+            <a:pPr algn="ctr"/>
+            <a:r>
+              <a:rPr lang="en-IE" sz="4000" b="1" dirty="0"/>
+              <a:t>ItemStoreRepository</a:t>
+            </a:r>
+          </a:p>
+        </p:txBody>
+      </p:sp>
+      <p:sp>
+        <p:nvSpPr>
+          <p:cNvPr id="14" name="Flowchart: Alternate Process 13">
+            <a:extLst>
+              <a:ext uri="{FF2B5EF4-FFF2-40B4-BE49-F238E27FC236}">
+                <a16:creationId xmlns:a16="http://schemas.microsoft.com/office/drawing/2014/main" id="{8CC51A4A-40B6-E63F-1196-E1FC3D71AF33}"/>
+              </a:ext>
+            </a:extLst>
+          </p:cNvPr>
+          <p:cNvSpPr/>
+          <p:nvPr/>
+        </p:nvSpPr>
+        <p:spPr>
+          <a:xfrm>
+            <a:off x="5446220" y="11627080"/>
+            <a:ext cx="4010563" cy="846667"/>
+          </a:xfrm>
+          <a:prstGeom prst="flowChartAlternateProcess">
+            <a:avLst/>
+          </a:prstGeom>
+          <a:gradFill flip="none" rotWithShape="1">
+            <a:gsLst>
+              <a:gs pos="0">
+                <a:schemeClr val="accent1">
+                  <a:shade val="30000"/>
+                  <a:satMod val="115000"/>
+                </a:schemeClr>
+              </a:gs>
+              <a:gs pos="50000">
+                <a:schemeClr val="accent1">
+                  <a:shade val="67500"/>
+                  <a:satMod val="115000"/>
+                </a:schemeClr>
+              </a:gs>
+              <a:gs pos="100000">
+                <a:schemeClr val="accent1">
+                  <a:shade val="100000"/>
+                  <a:satMod val="115000"/>
+                </a:schemeClr>
+              </a:gs>
+            </a:gsLst>
+            <a:lin ang="5400000" scaled="1"/>
+            <a:tileRect/>
+          </a:gradFill>
+          <a:ln w="57150">
+            <a:solidFill>
+              <a:schemeClr val="tx1"/>
+            </a:solidFill>
+          </a:ln>
+        </p:spPr>
+        <p:style>
+          <a:lnRef idx="2">
+            <a:schemeClr val="accent1">
+              <a:shade val="15000"/>
+            </a:schemeClr>
+          </a:lnRef>
+          <a:fillRef idx="1">
+            <a:schemeClr val="accent1"/>
+          </a:fillRef>
+          <a:effectRef idx="0">
+            <a:schemeClr val="accent1"/>
+          </a:effectRef>
+          <a:fontRef idx="minor">
+            <a:schemeClr val="lt1"/>
+          </a:fontRef>
+        </p:style>
+        <p:txBody>
+          <a:bodyPr rtlCol="0" anchor="ctr"/>
+          <a:lstStyle/>
+          <a:p>
+            <a:pPr algn="ctr"/>
+            <a:r>
+              <a:rPr lang="en-IE" sz="4000" b="1" dirty="0"/>
+              <a:t>JpaRepository</a:t>
+            </a:r>
+          </a:p>
+        </p:txBody>
+      </p:sp>
+      <p:pic>
+        <p:nvPicPr>
+          <p:cNvPr id="16" name="Picture 15" descr="A logo of a white tooth with a red ball and bow and arrow&#10;&#10;AI-generated content may be incorrect.">
+            <a:extLst>
+              <a:ext uri="{FF2B5EF4-FFF2-40B4-BE49-F238E27FC236}">
+                <a16:creationId xmlns:a16="http://schemas.microsoft.com/office/drawing/2014/main" id="{E1FE6B74-6CAE-A5DB-C447-6DF730DC7628}"/>
+              </a:ext>
+            </a:extLst>
+          </p:cNvPr>
+          <p:cNvPicPr>
+            <a:picLocks noChangeAspect="1"/>
+          </p:cNvPicPr>
+          <p:nvPr/>
+        </p:nvPicPr>
+        <p:blipFill>
+          <a:blip r:embed="rId3">
+            <a:extLst>
+              <a:ext uri="{28A0092B-C50C-407E-A947-70E740481C1C}">
+                <a14:useLocalDpi xmlns:a14="http://schemas.microsoft.com/office/drawing/2010/main" val="0"/>
+              </a:ext>
+            </a:extLst>
+          </a:blip>
+          <a:stretch>
+            <a:fillRect/>
+          </a:stretch>
+        </p:blipFill>
+        <p:spPr>
+          <a:xfrm>
+            <a:off x="1455575" y="13910704"/>
+            <a:ext cx="2990162" cy="1880368"/>
+          </a:xfrm>
+          <a:prstGeom prst="rect">
+            <a:avLst/>
+          </a:prstGeom>
+        </p:spPr>
+      </p:pic>
+      <p:grpSp>
+        <p:nvGrpSpPr>
+          <p:cNvPr id="42" name="Group 41">
+            <a:extLst>
+              <a:ext uri="{FF2B5EF4-FFF2-40B4-BE49-F238E27FC236}">
+                <a16:creationId xmlns:a16="http://schemas.microsoft.com/office/drawing/2014/main" id="{64A8C982-B01F-7D8D-B23D-07252774B370}"/>
+              </a:ext>
+            </a:extLst>
+          </p:cNvPr>
+          <p:cNvGrpSpPr/>
+          <p:nvPr/>
+        </p:nvGrpSpPr>
+        <p:grpSpPr>
+          <a:xfrm>
+            <a:off x="10419761" y="13755141"/>
+            <a:ext cx="4323877" cy="2162882"/>
+            <a:chOff x="7840081" y="11304872"/>
+            <a:chExt cx="3773478" cy="1545522"/>
+          </a:xfrm>
+        </p:grpSpPr>
+        <p:pic>
+          <p:nvPicPr>
+            <p:cNvPr id="18" name="Picture 17" descr="A logo with a feather&#10;&#10;AI-generated content may be incorrect.">
+              <a:extLst>
+                <a:ext uri="{FF2B5EF4-FFF2-40B4-BE49-F238E27FC236}">
+                  <a16:creationId xmlns:a16="http://schemas.microsoft.com/office/drawing/2014/main" id="{D166C88F-651A-24E5-32CC-193FBA75BD9A}"/>
+                </a:ext>
+              </a:extLst>
+            </p:cNvPr>
+            <p:cNvPicPr>
+              <a:picLocks noChangeAspect="1"/>
+            </p:cNvPicPr>
+            <p:nvPr/>
+          </p:nvPicPr>
+          <p:blipFill>
+            <a:blip r:embed="rId4">
+              <a:extLst>
+                <a:ext uri="{28A0092B-C50C-407E-A947-70E740481C1C}">
+                  <a14:useLocalDpi xmlns:a14="http://schemas.microsoft.com/office/drawing/2010/main" val="0"/>
+                </a:ext>
+              </a:extLst>
+            </a:blip>
+            <a:stretch>
+              <a:fillRect/>
+            </a:stretch>
+          </p:blipFill>
+          <p:spPr>
+            <a:xfrm>
+              <a:off x="7840081" y="11304872"/>
+              <a:ext cx="1552575" cy="733425"/>
+            </a:xfrm>
+            <a:prstGeom prst="rect">
+              <a:avLst/>
+            </a:prstGeom>
+          </p:spPr>
+        </p:pic>
+        <p:pic>
+          <p:nvPicPr>
+            <p:cNvPr id="22" name="Picture 21" descr="A yellow leopard jumping in a folder&#10;&#10;AI-generated content may be incorrect.">
+              <a:extLst>
+                <a:ext uri="{FF2B5EF4-FFF2-40B4-BE49-F238E27FC236}">
+                  <a16:creationId xmlns:a16="http://schemas.microsoft.com/office/drawing/2014/main" id="{51A207A8-6E9F-F4A9-834A-7B02AE0759D8}"/>
+                </a:ext>
+              </a:extLst>
+            </p:cNvPr>
+            <p:cNvPicPr>
+              <a:picLocks noChangeAspect="1"/>
+            </p:cNvPicPr>
+            <p:nvPr/>
+          </p:nvPicPr>
+          <p:blipFill>
+            <a:blip r:embed="rId5">
+              <a:extLst>
+                <a:ext uri="{28A0092B-C50C-407E-A947-70E740481C1C}">
+                  <a14:useLocalDpi xmlns:a14="http://schemas.microsoft.com/office/drawing/2010/main" val="0"/>
+                </a:ext>
+              </a:extLst>
+            </a:blip>
+            <a:stretch>
+              <a:fillRect/>
+            </a:stretch>
+          </p:blipFill>
+          <p:spPr>
+            <a:xfrm>
+              <a:off x="9779476" y="11933352"/>
+              <a:ext cx="1834083" cy="917042"/>
+            </a:xfrm>
+            <a:prstGeom prst="rect">
+              <a:avLst/>
+            </a:prstGeom>
+          </p:spPr>
+        </p:pic>
+        <p:cxnSp>
+          <p:nvCxnSpPr>
+            <p:cNvPr id="24" name="Straight Connector 23">
+              <a:extLst>
+                <a:ext uri="{FF2B5EF4-FFF2-40B4-BE49-F238E27FC236}">
+                  <a16:creationId xmlns:a16="http://schemas.microsoft.com/office/drawing/2014/main" id="{69F910E2-88BD-CE09-B520-B2E23EE50AB1}"/>
+                </a:ext>
+              </a:extLst>
+            </p:cNvPr>
+            <p:cNvCxnSpPr/>
+            <p:nvPr/>
+          </p:nvCxnSpPr>
+          <p:spPr>
+            <a:xfrm flipH="1">
+              <a:off x="8817871" y="11325318"/>
+              <a:ext cx="1765738" cy="1525076"/>
+            </a:xfrm>
+            <a:prstGeom prst="line">
+              <a:avLst/>
+            </a:prstGeom>
+            <a:ln w="38100"/>
+          </p:spPr>
+          <p:style>
+            <a:lnRef idx="2">
+              <a:schemeClr val="dk1"/>
+            </a:lnRef>
+            <a:fillRef idx="0">
+              <a:schemeClr val="dk1"/>
+            </a:fillRef>
+            <a:effectRef idx="1">
+              <a:schemeClr val="dk1"/>
+            </a:effectRef>
+            <a:fontRef idx="minor">
+              <a:schemeClr val="tx1"/>
+            </a:fontRef>
+          </p:style>
+        </p:cxnSp>
+      </p:grpSp>
+      <p:cxnSp>
+        <p:nvCxnSpPr>
+          <p:cNvPr id="26" name="Straight Arrow Connector 25">
+            <a:extLst>
+              <a:ext uri="{FF2B5EF4-FFF2-40B4-BE49-F238E27FC236}">
+                <a16:creationId xmlns:a16="http://schemas.microsoft.com/office/drawing/2014/main" id="{43D0CB47-95C9-9287-B513-23AE7CF501B2}"/>
+              </a:ext>
+            </a:extLst>
+          </p:cNvPr>
+          <p:cNvCxnSpPr>
+            <a:cxnSpLocks/>
+          </p:cNvCxnSpPr>
+          <p:nvPr/>
+        </p:nvCxnSpPr>
+        <p:spPr>
+          <a:xfrm>
+            <a:off x="4277935" y="5024762"/>
+            <a:ext cx="0" cy="909510"/>
+          </a:xfrm>
+          <a:prstGeom prst="straightConnector1">
+            <a:avLst/>
+          </a:prstGeom>
+          <a:ln w="76200">
+            <a:tailEnd type="triangle"/>
+          </a:ln>
+        </p:spPr>
+        <p:style>
+          <a:lnRef idx="3">
+            <a:schemeClr val="accent6"/>
+          </a:lnRef>
+          <a:fillRef idx="0">
+            <a:schemeClr val="accent6"/>
+          </a:fillRef>
+          <a:effectRef idx="2">
+            <a:schemeClr val="accent6"/>
+          </a:effectRef>
+          <a:fontRef idx="minor">
+            <a:schemeClr val="tx1"/>
+          </a:fontRef>
+        </p:style>
+      </p:cxnSp>
+      <p:cxnSp>
+        <p:nvCxnSpPr>
+          <p:cNvPr id="32" name="Straight Arrow Connector 31">
+            <a:extLst>
+              <a:ext uri="{FF2B5EF4-FFF2-40B4-BE49-F238E27FC236}">
+                <a16:creationId xmlns:a16="http://schemas.microsoft.com/office/drawing/2014/main" id="{03503602-132C-5126-AC48-8B5C00F51FA5}"/>
+              </a:ext>
+            </a:extLst>
+          </p:cNvPr>
+          <p:cNvCxnSpPr>
+            <a:cxnSpLocks/>
+          </p:cNvCxnSpPr>
+          <p:nvPr/>
+        </p:nvCxnSpPr>
+        <p:spPr>
+          <a:xfrm>
+            <a:off x="7371381" y="10316491"/>
+            <a:ext cx="0" cy="1310589"/>
+          </a:xfrm>
+          <a:prstGeom prst="straightConnector1">
+            <a:avLst/>
+          </a:prstGeom>
+          <a:ln w="76200">
+            <a:tailEnd type="triangle"/>
+          </a:ln>
+        </p:spPr>
+        <p:style>
+          <a:lnRef idx="3">
+            <a:schemeClr val="accent6"/>
+          </a:lnRef>
+          <a:fillRef idx="0">
+            <a:schemeClr val="accent6"/>
+          </a:fillRef>
+          <a:effectRef idx="2">
+            <a:schemeClr val="accent6"/>
+          </a:effectRef>
+          <a:fontRef idx="minor">
+            <a:schemeClr val="tx1"/>
+          </a:fontRef>
+        </p:style>
+      </p:cxnSp>
+      <p:cxnSp>
+        <p:nvCxnSpPr>
+          <p:cNvPr id="43" name="Straight Arrow Connector 42">
+            <a:extLst>
+              <a:ext uri="{FF2B5EF4-FFF2-40B4-BE49-F238E27FC236}">
+                <a16:creationId xmlns:a16="http://schemas.microsoft.com/office/drawing/2014/main" id="{27D1C97E-F6A7-6691-F346-63827B0E733B}"/>
+              </a:ext>
+            </a:extLst>
+          </p:cNvPr>
+          <p:cNvCxnSpPr>
+            <a:cxnSpLocks/>
+          </p:cNvCxnSpPr>
+          <p:nvPr/>
+        </p:nvCxnSpPr>
+        <p:spPr>
+          <a:xfrm>
+            <a:off x="2891186" y="13207680"/>
+            <a:ext cx="0" cy="550214"/>
+          </a:xfrm>
+          <a:prstGeom prst="straightConnector1">
+            <a:avLst/>
+          </a:prstGeom>
+          <a:ln w="76200">
+            <a:tailEnd type="triangle"/>
+          </a:ln>
+        </p:spPr>
+        <p:style>
+          <a:lnRef idx="3">
+            <a:schemeClr val="accent6"/>
+          </a:lnRef>
+          <a:fillRef idx="0">
+            <a:schemeClr val="accent6"/>
+          </a:fillRef>
+          <a:effectRef idx="2">
+            <a:schemeClr val="accent6"/>
+          </a:effectRef>
+          <a:fontRef idx="minor">
+            <a:schemeClr val="tx1"/>
+          </a:fontRef>
+        </p:style>
+      </p:cxnSp>
+      <p:cxnSp>
+        <p:nvCxnSpPr>
+          <p:cNvPr id="44" name="Straight Arrow Connector 43">
+            <a:extLst>
+              <a:ext uri="{FF2B5EF4-FFF2-40B4-BE49-F238E27FC236}">
+                <a16:creationId xmlns:a16="http://schemas.microsoft.com/office/drawing/2014/main" id="{5027E634-66C4-03B1-4E47-DE591C9A779D}"/>
+              </a:ext>
+            </a:extLst>
+          </p:cNvPr>
+          <p:cNvCxnSpPr>
+            <a:cxnSpLocks/>
+          </p:cNvCxnSpPr>
+          <p:nvPr/>
+        </p:nvCxnSpPr>
+        <p:spPr>
+          <a:xfrm>
+            <a:off x="12097033" y="13136759"/>
+            <a:ext cx="0" cy="550214"/>
+          </a:xfrm>
+          <a:prstGeom prst="straightConnector1">
+            <a:avLst/>
+          </a:prstGeom>
+          <a:ln w="76200">
+            <a:tailEnd type="triangle"/>
+          </a:ln>
+        </p:spPr>
+        <p:style>
+          <a:lnRef idx="3">
+            <a:schemeClr val="accent6"/>
+          </a:lnRef>
+          <a:fillRef idx="0">
+            <a:schemeClr val="accent6"/>
+          </a:fillRef>
+          <a:effectRef idx="2">
+            <a:schemeClr val="accent6"/>
+          </a:effectRef>
+          <a:fontRef idx="minor">
+            <a:schemeClr val="tx1"/>
+          </a:fontRef>
+        </p:style>
+      </p:cxnSp>
+      <p:sp>
+        <p:nvSpPr>
+          <p:cNvPr id="48" name="Flowchart: Alternate Process 47">
+            <a:extLst>
+              <a:ext uri="{FF2B5EF4-FFF2-40B4-BE49-F238E27FC236}">
+                <a16:creationId xmlns:a16="http://schemas.microsoft.com/office/drawing/2014/main" id="{48609721-8B1B-69B1-984D-5BB20FDBBDEE}"/>
+              </a:ext>
+            </a:extLst>
+          </p:cNvPr>
+          <p:cNvSpPr/>
+          <p:nvPr/>
+        </p:nvSpPr>
+        <p:spPr>
+          <a:xfrm>
+            <a:off x="9470064" y="7774941"/>
+            <a:ext cx="3904789" cy="846667"/>
+          </a:xfrm>
+          <a:prstGeom prst="flowChartAlternateProcess">
+            <a:avLst/>
+          </a:prstGeom>
+          <a:gradFill flip="none" rotWithShape="1">
+            <a:gsLst>
+              <a:gs pos="0">
+                <a:schemeClr val="accent1">
+                  <a:shade val="30000"/>
+                  <a:satMod val="115000"/>
+                </a:schemeClr>
+              </a:gs>
+              <a:gs pos="50000">
+                <a:schemeClr val="accent1">
+                  <a:shade val="67500"/>
+                  <a:satMod val="115000"/>
+                </a:schemeClr>
+              </a:gs>
+              <a:gs pos="100000">
+                <a:schemeClr val="accent1">
+                  <a:shade val="100000"/>
+                  <a:satMod val="115000"/>
+                </a:schemeClr>
+              </a:gs>
+            </a:gsLst>
+            <a:lin ang="5400000" scaled="1"/>
+            <a:tileRect/>
+          </a:gradFill>
+          <a:ln w="57150">
+            <a:solidFill>
+              <a:schemeClr val="tx1"/>
+            </a:solidFill>
+          </a:ln>
+        </p:spPr>
+        <p:style>
+          <a:lnRef idx="2">
+            <a:schemeClr val="accent1">
+              <a:shade val="15000"/>
+            </a:schemeClr>
+          </a:lnRef>
+          <a:fillRef idx="1">
+            <a:schemeClr val="accent1"/>
+          </a:fillRef>
+          <a:effectRef idx="0">
+            <a:schemeClr val="accent1"/>
+          </a:effectRef>
+          <a:fontRef idx="minor">
+            <a:schemeClr val="lt1"/>
+          </a:fontRef>
+        </p:style>
+        <p:txBody>
+          <a:bodyPr rtlCol="0" anchor="ctr"/>
+          <a:lstStyle/>
+          <a:p>
+            <a:pPr algn="ctr"/>
+            <a:r>
+              <a:rPr lang="en-IE" sz="4000" b="1" dirty="0"/>
+              <a:t>TaskTideEngine</a:t>
+            </a:r>
+          </a:p>
+        </p:txBody>
+      </p:sp>
+      <p:cxnSp>
+        <p:nvCxnSpPr>
+          <p:cNvPr id="49" name="Straight Arrow Connector 48">
+            <a:extLst>
+              <a:ext uri="{FF2B5EF4-FFF2-40B4-BE49-F238E27FC236}">
+                <a16:creationId xmlns:a16="http://schemas.microsoft.com/office/drawing/2014/main" id="{1291F7EB-C9AA-46EE-6925-A606E5C11666}"/>
+              </a:ext>
+            </a:extLst>
+          </p:cNvPr>
+          <p:cNvCxnSpPr>
+            <a:cxnSpLocks/>
+          </p:cNvCxnSpPr>
+          <p:nvPr/>
+        </p:nvCxnSpPr>
+        <p:spPr>
+          <a:xfrm rot="16200000">
+            <a:off x="9212164" y="9619807"/>
+            <a:ext cx="0" cy="518030"/>
+          </a:xfrm>
+          <a:prstGeom prst="straightConnector1">
+            <a:avLst/>
+          </a:prstGeom>
+          <a:ln w="76200">
+            <a:tailEnd type="triangle"/>
+          </a:ln>
+        </p:spPr>
+        <p:style>
+          <a:lnRef idx="3">
+            <a:schemeClr val="accent6"/>
+          </a:lnRef>
+          <a:fillRef idx="0">
+            <a:schemeClr val="accent6"/>
+          </a:fillRef>
+          <a:effectRef idx="2">
+            <a:schemeClr val="accent6"/>
+          </a:effectRef>
+          <a:fontRef idx="minor">
+            <a:schemeClr val="tx1"/>
+          </a:fontRef>
+        </p:style>
+      </p:cxnSp>
+      <p:sp>
+        <p:nvSpPr>
+          <p:cNvPr id="50" name="Flowchart: Alternate Process 49">
+            <a:extLst>
+              <a:ext uri="{FF2B5EF4-FFF2-40B4-BE49-F238E27FC236}">
+                <a16:creationId xmlns:a16="http://schemas.microsoft.com/office/drawing/2014/main" id="{8B86FAB3-9839-C40F-481E-72C28CB9B5B7}"/>
+              </a:ext>
+            </a:extLst>
+          </p:cNvPr>
+          <p:cNvSpPr/>
+          <p:nvPr/>
+        </p:nvSpPr>
+        <p:spPr>
+          <a:xfrm>
+            <a:off x="9508503" y="9420124"/>
+            <a:ext cx="3904789" cy="860826"/>
+          </a:xfrm>
+          <a:prstGeom prst="flowChartAlternateProcess">
+            <a:avLst/>
+          </a:prstGeom>
+          <a:gradFill flip="none" rotWithShape="1">
+            <a:gsLst>
+              <a:gs pos="0">
+                <a:schemeClr val="accent1">
+                  <a:shade val="30000"/>
+                  <a:satMod val="115000"/>
+                </a:schemeClr>
+              </a:gs>
+              <a:gs pos="50000">
+                <a:schemeClr val="accent1">
+                  <a:shade val="67500"/>
+                  <a:satMod val="115000"/>
+                </a:schemeClr>
+              </a:gs>
+              <a:gs pos="100000">
+                <a:schemeClr val="accent1">
+                  <a:shade val="100000"/>
+                  <a:satMod val="115000"/>
+                </a:schemeClr>
+              </a:gs>
+            </a:gsLst>
+            <a:lin ang="5400000" scaled="1"/>
+            <a:tileRect/>
+          </a:gradFill>
+        </p:spPr>
+        <p:style>
+          <a:lnRef idx="2">
+            <a:schemeClr val="accent1">
+              <a:shade val="15000"/>
+            </a:schemeClr>
+          </a:lnRef>
+          <a:fillRef idx="1">
+            <a:schemeClr val="accent1"/>
+          </a:fillRef>
+          <a:effectRef idx="0">
+            <a:schemeClr val="accent1"/>
+          </a:effectRef>
+          <a:fontRef idx="minor">
+            <a:schemeClr val="lt1"/>
+          </a:fontRef>
+        </p:style>
+        <p:txBody>
+          <a:bodyPr rtlCol="0" anchor="ctr"/>
+          <a:lstStyle/>
+          <a:p>
+            <a:pPr algn="ctr"/>
+            <a:r>
+              <a:rPr lang="en-IE" sz="4000" b="1" dirty="0"/>
+              <a:t>TaskTideModel</a:t>
+            </a:r>
+          </a:p>
+        </p:txBody>
+      </p:sp>
+      <p:sp>
+        <p:nvSpPr>
+          <p:cNvPr id="51" name="Flowchart: Alternate Process 50">
+            <a:extLst>
+              <a:ext uri="{FF2B5EF4-FFF2-40B4-BE49-F238E27FC236}">
+                <a16:creationId xmlns:a16="http://schemas.microsoft.com/office/drawing/2014/main" id="{93C3476F-BECE-5A31-EBB9-99B1E6D1940C}"/>
+              </a:ext>
+            </a:extLst>
+          </p:cNvPr>
+          <p:cNvSpPr/>
+          <p:nvPr/>
+        </p:nvSpPr>
+        <p:spPr>
+          <a:xfrm>
+            <a:off x="14534289" y="8379011"/>
+            <a:ext cx="3121717" cy="846667"/>
+          </a:xfrm>
+          <a:prstGeom prst="flowChartAlternateProcess">
+            <a:avLst/>
+          </a:prstGeom>
+          <a:gradFill flip="none" rotWithShape="1">
+            <a:gsLst>
+              <a:gs pos="0">
+                <a:schemeClr val="accent1">
+                  <a:shade val="30000"/>
+                  <a:satMod val="115000"/>
+                </a:schemeClr>
+              </a:gs>
+              <a:gs pos="50000">
+                <a:schemeClr val="accent1">
+                  <a:shade val="67500"/>
+                  <a:satMod val="115000"/>
+                </a:schemeClr>
+              </a:gs>
+              <a:gs pos="100000">
+                <a:schemeClr val="accent1">
+                  <a:shade val="100000"/>
+                  <a:satMod val="115000"/>
+                </a:schemeClr>
+              </a:gs>
+            </a:gsLst>
+            <a:lin ang="5400000" scaled="1"/>
+            <a:tileRect/>
+          </a:gradFill>
+          <a:ln w="57150">
+            <a:solidFill>
+              <a:schemeClr val="tx1"/>
+            </a:solidFill>
+          </a:ln>
+        </p:spPr>
+        <p:style>
+          <a:lnRef idx="2">
+            <a:schemeClr val="accent1">
+              <a:shade val="15000"/>
+            </a:schemeClr>
+          </a:lnRef>
+          <a:fillRef idx="1">
+            <a:schemeClr val="accent1"/>
+          </a:fillRef>
+          <a:effectRef idx="0">
+            <a:schemeClr val="accent1"/>
+          </a:effectRef>
+          <a:fontRef idx="minor">
+            <a:schemeClr val="lt1"/>
+          </a:fontRef>
+        </p:style>
+        <p:txBody>
+          <a:bodyPr rtlCol="0" anchor="ctr"/>
+          <a:lstStyle/>
+          <a:p>
+            <a:pPr algn="ctr"/>
+            <a:r>
+              <a:rPr lang="en-IE" sz="3200" b="1" dirty="0"/>
+              <a:t>Workflow</a:t>
+            </a:r>
+          </a:p>
+        </p:txBody>
+      </p:sp>
+      <p:sp>
+        <p:nvSpPr>
+          <p:cNvPr id="52" name="Flowchart: Alternate Process 51">
+            <a:extLst>
+              <a:ext uri="{FF2B5EF4-FFF2-40B4-BE49-F238E27FC236}">
+                <a16:creationId xmlns:a16="http://schemas.microsoft.com/office/drawing/2014/main" id="{6D5BD79C-6023-5DD8-A46C-0D202E17ADC3}"/>
+              </a:ext>
+            </a:extLst>
+          </p:cNvPr>
+          <p:cNvSpPr/>
+          <p:nvPr/>
+        </p:nvSpPr>
+        <p:spPr>
+          <a:xfrm>
+            <a:off x="14532171" y="9469824"/>
+            <a:ext cx="3121717" cy="846667"/>
+          </a:xfrm>
+          <a:prstGeom prst="flowChartAlternateProcess">
+            <a:avLst/>
+          </a:prstGeom>
+          <a:gradFill flip="none" rotWithShape="1">
+            <a:gsLst>
+              <a:gs pos="0">
+                <a:schemeClr val="accent1">
+                  <a:shade val="30000"/>
+                  <a:satMod val="115000"/>
+                </a:schemeClr>
+              </a:gs>
+              <a:gs pos="50000">
+                <a:schemeClr val="accent1">
+                  <a:shade val="67500"/>
+                  <a:satMod val="115000"/>
+                </a:schemeClr>
+              </a:gs>
+              <a:gs pos="100000">
+                <a:schemeClr val="accent1">
+                  <a:shade val="100000"/>
+                  <a:satMod val="115000"/>
+                </a:schemeClr>
+              </a:gs>
+            </a:gsLst>
+            <a:lin ang="5400000" scaled="1"/>
+            <a:tileRect/>
+          </a:gradFill>
+          <a:ln w="57150">
+            <a:solidFill>
+              <a:schemeClr val="tx1"/>
+            </a:solidFill>
+          </a:ln>
+        </p:spPr>
+        <p:style>
+          <a:lnRef idx="2">
+            <a:schemeClr val="accent1">
+              <a:shade val="15000"/>
+            </a:schemeClr>
+          </a:lnRef>
+          <a:fillRef idx="1">
+            <a:schemeClr val="accent1"/>
+          </a:fillRef>
+          <a:effectRef idx="0">
+            <a:schemeClr val="accent1"/>
+          </a:effectRef>
+          <a:fontRef idx="minor">
+            <a:schemeClr val="lt1"/>
+          </a:fontRef>
+        </p:style>
+        <p:txBody>
+          <a:bodyPr rtlCol="0" anchor="ctr"/>
+          <a:lstStyle/>
+          <a:p>
+            <a:pPr algn="ctr"/>
+            <a:r>
+              <a:rPr lang="en-IE" sz="3200" b="1" dirty="0"/>
+              <a:t>Step</a:t>
+            </a:r>
+          </a:p>
+        </p:txBody>
+      </p:sp>
+      <p:sp>
+        <p:nvSpPr>
+          <p:cNvPr id="53" name="Flowchart: Alternate Process 52">
+            <a:extLst>
+              <a:ext uri="{FF2B5EF4-FFF2-40B4-BE49-F238E27FC236}">
+                <a16:creationId xmlns:a16="http://schemas.microsoft.com/office/drawing/2014/main" id="{B0AF4BAB-8A23-C95C-6BC3-FB64F87E4C32}"/>
+              </a:ext>
+            </a:extLst>
+          </p:cNvPr>
+          <p:cNvSpPr/>
+          <p:nvPr/>
+        </p:nvSpPr>
+        <p:spPr>
+          <a:xfrm>
+            <a:off x="14519301" y="10539441"/>
+            <a:ext cx="3121717" cy="846667"/>
+          </a:xfrm>
+          <a:prstGeom prst="flowChartAlternateProcess">
+            <a:avLst/>
+          </a:prstGeom>
+          <a:gradFill flip="none" rotWithShape="1">
+            <a:gsLst>
+              <a:gs pos="0">
+                <a:schemeClr val="accent1">
+                  <a:shade val="30000"/>
+                  <a:satMod val="115000"/>
+                </a:schemeClr>
+              </a:gs>
+              <a:gs pos="50000">
+                <a:schemeClr val="accent1">
+                  <a:shade val="67500"/>
+                  <a:satMod val="115000"/>
+                </a:schemeClr>
+              </a:gs>
+              <a:gs pos="100000">
+                <a:schemeClr val="accent1">
+                  <a:shade val="100000"/>
+                  <a:satMod val="115000"/>
+                </a:schemeClr>
+              </a:gs>
+            </a:gsLst>
+            <a:lin ang="5400000" scaled="1"/>
+            <a:tileRect/>
+          </a:gradFill>
+          <a:ln w="57150">
+            <a:solidFill>
+              <a:schemeClr val="tx1"/>
+            </a:solidFill>
+          </a:ln>
+        </p:spPr>
+        <p:style>
+          <a:lnRef idx="2">
+            <a:schemeClr val="accent1">
+              <a:shade val="15000"/>
+            </a:schemeClr>
+          </a:lnRef>
+          <a:fillRef idx="1">
+            <a:schemeClr val="accent1"/>
+          </a:fillRef>
+          <a:effectRef idx="0">
+            <a:schemeClr val="accent1"/>
+          </a:effectRef>
+          <a:fontRef idx="minor">
+            <a:schemeClr val="lt1"/>
+          </a:fontRef>
+        </p:style>
+        <p:txBody>
+          <a:bodyPr rtlCol="0" anchor="ctr"/>
+          <a:lstStyle/>
+          <a:p>
+            <a:pPr algn="ctr"/>
+            <a:r>
+              <a:rPr lang="en-IE" sz="3200" b="1" dirty="0"/>
+              <a:t>WorkItem</a:t>
+            </a:r>
+          </a:p>
+        </p:txBody>
+      </p:sp>
+      <p:cxnSp>
+        <p:nvCxnSpPr>
+          <p:cNvPr id="55" name="Straight Arrow Connector 54">
+            <a:extLst>
+              <a:ext uri="{FF2B5EF4-FFF2-40B4-BE49-F238E27FC236}">
+                <a16:creationId xmlns:a16="http://schemas.microsoft.com/office/drawing/2014/main" id="{64076E49-55B1-A2B0-BEFA-D6A05A2329E8}"/>
+              </a:ext>
+            </a:extLst>
+          </p:cNvPr>
+          <p:cNvCxnSpPr>
+            <a:cxnSpLocks/>
+          </p:cNvCxnSpPr>
+          <p:nvPr/>
+        </p:nvCxnSpPr>
+        <p:spPr>
+          <a:xfrm>
+            <a:off x="8359074" y="5041854"/>
+            <a:ext cx="0" cy="909510"/>
+          </a:xfrm>
+          <a:prstGeom prst="straightConnector1">
+            <a:avLst/>
+          </a:prstGeom>
+          <a:ln w="76200">
+            <a:tailEnd type="triangle"/>
+          </a:ln>
+        </p:spPr>
+        <p:style>
+          <a:lnRef idx="3">
+            <a:schemeClr val="accent6"/>
+          </a:lnRef>
+          <a:fillRef idx="0">
+            <a:schemeClr val="accent6"/>
+          </a:fillRef>
+          <a:effectRef idx="2">
+            <a:schemeClr val="accent6"/>
+          </a:effectRef>
+          <a:fontRef idx="minor">
+            <a:schemeClr val="tx1"/>
+          </a:fontRef>
+        </p:style>
+      </p:cxnSp>
+      <p:cxnSp>
+        <p:nvCxnSpPr>
+          <p:cNvPr id="56" name="Straight Arrow Connector 55">
+            <a:extLst>
+              <a:ext uri="{FF2B5EF4-FFF2-40B4-BE49-F238E27FC236}">
+                <a16:creationId xmlns:a16="http://schemas.microsoft.com/office/drawing/2014/main" id="{9B5D0FB4-8766-54ED-E1E9-22B3DD32B981}"/>
+              </a:ext>
+            </a:extLst>
+          </p:cNvPr>
+          <p:cNvCxnSpPr>
+            <a:cxnSpLocks/>
+          </p:cNvCxnSpPr>
+          <p:nvPr/>
+        </p:nvCxnSpPr>
+        <p:spPr>
+          <a:xfrm>
+            <a:off x="4277935" y="6981843"/>
+            <a:ext cx="0" cy="662236"/>
+          </a:xfrm>
+          <a:prstGeom prst="straightConnector1">
+            <a:avLst/>
+          </a:prstGeom>
+          <a:ln w="76200">
+            <a:tailEnd type="triangle"/>
+          </a:ln>
+        </p:spPr>
+        <p:style>
+          <a:lnRef idx="3">
+            <a:schemeClr val="accent6"/>
+          </a:lnRef>
+          <a:fillRef idx="0">
+            <a:schemeClr val="accent6"/>
+          </a:fillRef>
+          <a:effectRef idx="2">
+            <a:schemeClr val="accent6"/>
+          </a:effectRef>
+          <a:fontRef idx="minor">
+            <a:schemeClr val="tx1"/>
+          </a:fontRef>
+        </p:style>
+      </p:cxnSp>
+      <p:cxnSp>
+        <p:nvCxnSpPr>
+          <p:cNvPr id="58" name="Straight Arrow Connector 57">
+            <a:extLst>
+              <a:ext uri="{FF2B5EF4-FFF2-40B4-BE49-F238E27FC236}">
+                <a16:creationId xmlns:a16="http://schemas.microsoft.com/office/drawing/2014/main" id="{AEBCAA57-D7A6-1D1B-285B-726ADA57EB72}"/>
+              </a:ext>
+            </a:extLst>
+          </p:cNvPr>
+          <p:cNvCxnSpPr>
+            <a:cxnSpLocks/>
+          </p:cNvCxnSpPr>
+          <p:nvPr/>
+        </p:nvCxnSpPr>
+        <p:spPr>
+          <a:xfrm>
+            <a:off x="8405177" y="7022277"/>
+            <a:ext cx="0" cy="662236"/>
+          </a:xfrm>
+          <a:prstGeom prst="straightConnector1">
+            <a:avLst/>
+          </a:prstGeom>
+          <a:ln w="76200">
+            <a:tailEnd type="triangle"/>
+          </a:ln>
+        </p:spPr>
+        <p:style>
+          <a:lnRef idx="3">
+            <a:schemeClr val="accent6"/>
+          </a:lnRef>
+          <a:fillRef idx="0">
+            <a:schemeClr val="accent6"/>
+          </a:fillRef>
+          <a:effectRef idx="2">
+            <a:schemeClr val="accent6"/>
+          </a:effectRef>
+          <a:fontRef idx="minor">
+            <a:schemeClr val="tx1"/>
+          </a:fontRef>
+        </p:style>
+      </p:cxnSp>
+      <p:cxnSp>
+        <p:nvCxnSpPr>
+          <p:cNvPr id="59" name="Straight Arrow Connector 58">
+            <a:extLst>
+              <a:ext uri="{FF2B5EF4-FFF2-40B4-BE49-F238E27FC236}">
+                <a16:creationId xmlns:a16="http://schemas.microsoft.com/office/drawing/2014/main" id="{0F58DA43-F38B-0B4A-C3B4-BB4B0A4E9EE2}"/>
+              </a:ext>
+            </a:extLst>
+          </p:cNvPr>
+          <p:cNvCxnSpPr>
+            <a:cxnSpLocks/>
+          </p:cNvCxnSpPr>
+          <p:nvPr/>
+        </p:nvCxnSpPr>
+        <p:spPr>
+          <a:xfrm>
+            <a:off x="6240474" y="8739227"/>
+            <a:ext cx="0" cy="662236"/>
+          </a:xfrm>
+          <a:prstGeom prst="straightConnector1">
+            <a:avLst/>
+          </a:prstGeom>
+          <a:ln w="76200">
+            <a:tailEnd type="triangle"/>
+          </a:ln>
+        </p:spPr>
+        <p:style>
+          <a:lnRef idx="3">
+            <a:schemeClr val="accent6"/>
+          </a:lnRef>
+          <a:fillRef idx="0">
+            <a:schemeClr val="accent6"/>
+          </a:fillRef>
+          <a:effectRef idx="2">
+            <a:schemeClr val="accent6"/>
+          </a:effectRef>
+          <a:fontRef idx="minor">
+            <a:schemeClr val="tx1"/>
+          </a:fontRef>
+        </p:style>
+      </p:cxnSp>
+      <p:cxnSp>
+        <p:nvCxnSpPr>
+          <p:cNvPr id="60" name="Straight Arrow Connector 59">
+            <a:extLst>
+              <a:ext uri="{FF2B5EF4-FFF2-40B4-BE49-F238E27FC236}">
+                <a16:creationId xmlns:a16="http://schemas.microsoft.com/office/drawing/2014/main" id="{AF4A330A-7534-79EC-F357-B91BEED4D649}"/>
+              </a:ext>
+            </a:extLst>
+          </p:cNvPr>
+          <p:cNvCxnSpPr>
+            <a:cxnSpLocks/>
+          </p:cNvCxnSpPr>
+          <p:nvPr/>
+        </p:nvCxnSpPr>
+        <p:spPr>
+          <a:xfrm rot="16200000">
+            <a:off x="9245002" y="7957089"/>
+            <a:ext cx="0" cy="518030"/>
+          </a:xfrm>
+          <a:prstGeom prst="straightConnector1">
+            <a:avLst/>
+          </a:prstGeom>
+          <a:ln w="76200">
+            <a:tailEnd type="triangle"/>
+          </a:ln>
+        </p:spPr>
+        <p:style>
+          <a:lnRef idx="3">
+            <a:schemeClr val="accent6"/>
+          </a:lnRef>
+          <a:fillRef idx="0">
+            <a:schemeClr val="accent6"/>
+          </a:fillRef>
+          <a:effectRef idx="2">
+            <a:schemeClr val="accent6"/>
+          </a:effectRef>
+          <a:fontRef idx="minor">
+            <a:schemeClr val="tx1"/>
+          </a:fontRef>
+        </p:style>
+      </p:cxnSp>
+      <p:cxnSp>
+        <p:nvCxnSpPr>
+          <p:cNvPr id="61" name="Straight Arrow Connector 60">
+            <a:extLst>
+              <a:ext uri="{FF2B5EF4-FFF2-40B4-BE49-F238E27FC236}">
+                <a16:creationId xmlns:a16="http://schemas.microsoft.com/office/drawing/2014/main" id="{85DEC262-1AE3-204D-EB04-7473F4578BE5}"/>
+              </a:ext>
+            </a:extLst>
+          </p:cNvPr>
+          <p:cNvCxnSpPr>
+            <a:cxnSpLocks/>
+          </p:cNvCxnSpPr>
+          <p:nvPr/>
+        </p:nvCxnSpPr>
+        <p:spPr>
+          <a:xfrm>
+            <a:off x="13492023" y="9897480"/>
+            <a:ext cx="1064600" cy="14338"/>
+          </a:xfrm>
+          <a:prstGeom prst="straightConnector1">
+            <a:avLst/>
+          </a:prstGeom>
+          <a:ln w="76200">
+            <a:tailEnd type="triangle"/>
+          </a:ln>
+        </p:spPr>
+        <p:style>
+          <a:lnRef idx="3">
+            <a:schemeClr val="accent6"/>
+          </a:lnRef>
+          <a:fillRef idx="0">
+            <a:schemeClr val="accent6"/>
+          </a:fillRef>
+          <a:effectRef idx="2">
+            <a:schemeClr val="accent6"/>
+          </a:effectRef>
+          <a:fontRef idx="minor">
+            <a:schemeClr val="tx1"/>
+          </a:fontRef>
+        </p:style>
+      </p:cxnSp>
+      <p:cxnSp>
+        <p:nvCxnSpPr>
+          <p:cNvPr id="63" name="Straight Arrow Connector 62">
+            <a:extLst>
+              <a:ext uri="{FF2B5EF4-FFF2-40B4-BE49-F238E27FC236}">
+                <a16:creationId xmlns:a16="http://schemas.microsoft.com/office/drawing/2014/main" id="{732FD0A3-1DCF-0EEE-3198-2E002B0C1CF2}"/>
+              </a:ext>
+            </a:extLst>
+          </p:cNvPr>
+          <p:cNvCxnSpPr>
+            <a:cxnSpLocks/>
+          </p:cNvCxnSpPr>
+          <p:nvPr/>
+        </p:nvCxnSpPr>
+        <p:spPr>
+          <a:xfrm flipV="1">
+            <a:off x="13412175" y="8938727"/>
+            <a:ext cx="1012951" cy="984185"/>
+          </a:xfrm>
+          <a:prstGeom prst="straightConnector1">
+            <a:avLst/>
+          </a:prstGeom>
+          <a:ln w="76200">
+            <a:tailEnd type="triangle"/>
+          </a:ln>
+        </p:spPr>
+        <p:style>
+          <a:lnRef idx="3">
+            <a:schemeClr val="accent6"/>
+          </a:lnRef>
+          <a:fillRef idx="0">
+            <a:schemeClr val="accent6"/>
+          </a:fillRef>
+          <a:effectRef idx="2">
+            <a:schemeClr val="accent6"/>
+          </a:effectRef>
+          <a:fontRef idx="minor">
+            <a:schemeClr val="tx1"/>
+          </a:fontRef>
+        </p:style>
+      </p:cxnSp>
+      <p:cxnSp>
+        <p:nvCxnSpPr>
+          <p:cNvPr id="65" name="Straight Arrow Connector 64">
+            <a:extLst>
+              <a:ext uri="{FF2B5EF4-FFF2-40B4-BE49-F238E27FC236}">
+                <a16:creationId xmlns:a16="http://schemas.microsoft.com/office/drawing/2014/main" id="{ABBF4229-DE4C-521E-83D4-B150C1247918}"/>
+              </a:ext>
+            </a:extLst>
+          </p:cNvPr>
+          <p:cNvCxnSpPr>
+            <a:cxnSpLocks/>
+          </p:cNvCxnSpPr>
+          <p:nvPr/>
+        </p:nvCxnSpPr>
+        <p:spPr>
+          <a:xfrm rot="5400000" flipV="1">
+            <a:off x="13452609" y="9930881"/>
+            <a:ext cx="1012951" cy="984185"/>
+          </a:xfrm>
+          <a:prstGeom prst="straightConnector1">
+            <a:avLst/>
+          </a:prstGeom>
+          <a:ln w="76200">
+            <a:tailEnd type="triangle"/>
+          </a:ln>
+        </p:spPr>
+        <p:style>
+          <a:lnRef idx="3">
+            <a:schemeClr val="accent6"/>
+          </a:lnRef>
+          <a:fillRef idx="0">
+            <a:schemeClr val="accent6"/>
+          </a:fillRef>
+          <a:effectRef idx="2">
+            <a:schemeClr val="accent6"/>
+          </a:effectRef>
+          <a:fontRef idx="minor">
+            <a:schemeClr val="tx1"/>
+          </a:fontRef>
+        </p:style>
+      </p:cxnSp>
+      <p:cxnSp>
+        <p:nvCxnSpPr>
+          <p:cNvPr id="66" name="Straight Arrow Connector 65">
+            <a:extLst>
+              <a:ext uri="{FF2B5EF4-FFF2-40B4-BE49-F238E27FC236}">
+                <a16:creationId xmlns:a16="http://schemas.microsoft.com/office/drawing/2014/main" id="{AC0456FA-F655-8574-5ED7-E37812288102}"/>
+              </a:ext>
+            </a:extLst>
+          </p:cNvPr>
+          <p:cNvCxnSpPr>
+            <a:cxnSpLocks/>
+          </p:cNvCxnSpPr>
+          <p:nvPr/>
+        </p:nvCxnSpPr>
+        <p:spPr>
+          <a:xfrm flipH="1">
+            <a:off x="4277935" y="10316491"/>
+            <a:ext cx="194" cy="1973601"/>
+          </a:xfrm>
+          <a:prstGeom prst="straightConnector1">
+            <a:avLst/>
+          </a:prstGeom>
+          <a:ln w="76200">
+            <a:tailEnd type="triangle"/>
+          </a:ln>
+        </p:spPr>
+        <p:style>
+          <a:lnRef idx="3">
+            <a:schemeClr val="accent6"/>
+          </a:lnRef>
+          <a:fillRef idx="0">
+            <a:schemeClr val="accent6"/>
+          </a:fillRef>
+          <a:effectRef idx="2">
+            <a:schemeClr val="accent6"/>
+          </a:effectRef>
+          <a:fontRef idx="minor">
+            <a:schemeClr val="tx1"/>
+          </a:fontRef>
+        </p:style>
+      </p:cxnSp>
+      <p:cxnSp>
+        <p:nvCxnSpPr>
+          <p:cNvPr id="68" name="Straight Arrow Connector 67">
+            <a:extLst>
+              <a:ext uri="{FF2B5EF4-FFF2-40B4-BE49-F238E27FC236}">
+                <a16:creationId xmlns:a16="http://schemas.microsoft.com/office/drawing/2014/main" id="{CD1BE198-26FE-5274-F102-FE3EBDC0655C}"/>
+              </a:ext>
+            </a:extLst>
+          </p:cNvPr>
+          <p:cNvCxnSpPr>
+            <a:cxnSpLocks/>
+            <a:endCxn id="13" idx="0"/>
+          </p:cNvCxnSpPr>
+          <p:nvPr/>
+        </p:nvCxnSpPr>
+        <p:spPr>
+          <a:xfrm>
+            <a:off x="8908177" y="10240514"/>
+            <a:ext cx="3261614" cy="2010640"/>
+          </a:xfrm>
+          <a:prstGeom prst="straightConnector1">
+            <a:avLst/>
+          </a:prstGeom>
+          <a:ln w="76200">
+            <a:tailEnd type="triangle"/>
+          </a:ln>
+        </p:spPr>
+        <p:style>
+          <a:lnRef idx="3">
+            <a:schemeClr val="accent6"/>
+          </a:lnRef>
+          <a:fillRef idx="0">
+            <a:schemeClr val="accent6"/>
+          </a:fillRef>
+          <a:effectRef idx="2">
+            <a:schemeClr val="accent6"/>
+          </a:effectRef>
+          <a:fontRef idx="minor">
+            <a:schemeClr val="tx1"/>
+          </a:fontRef>
+        </p:style>
+      </p:cxnSp>
+      <p:cxnSp>
+        <p:nvCxnSpPr>
+          <p:cNvPr id="2" name="Straight Arrow Connector 1">
+            <a:extLst>
+              <a:ext uri="{FF2B5EF4-FFF2-40B4-BE49-F238E27FC236}">
+                <a16:creationId xmlns:a16="http://schemas.microsoft.com/office/drawing/2014/main" id="{DD7FEEE1-2571-A927-F403-D3F4FACDFA4F}"/>
+              </a:ext>
+            </a:extLst>
+          </p:cNvPr>
+          <p:cNvCxnSpPr>
+            <a:cxnSpLocks/>
+          </p:cNvCxnSpPr>
+          <p:nvPr/>
+        </p:nvCxnSpPr>
+        <p:spPr>
+          <a:xfrm>
+            <a:off x="7390042" y="12574705"/>
+            <a:ext cx="0" cy="1093607"/>
+          </a:xfrm>
+          <a:prstGeom prst="straightConnector1">
+            <a:avLst/>
+          </a:prstGeom>
+          <a:ln w="76200">
+            <a:tailEnd type="triangle"/>
+          </a:ln>
+        </p:spPr>
+        <p:style>
+          <a:lnRef idx="3">
+            <a:schemeClr val="accent6"/>
+          </a:lnRef>
+          <a:fillRef idx="0">
+            <a:schemeClr val="accent6"/>
+          </a:fillRef>
+          <a:effectRef idx="2">
+            <a:schemeClr val="accent6"/>
+          </a:effectRef>
+          <a:fontRef idx="minor">
+            <a:schemeClr val="tx1"/>
+          </a:fontRef>
+        </p:style>
+      </p:cxnSp>
+      <p:pic>
+        <p:nvPicPr>
+          <p:cNvPr id="6" name="Picture 5" descr="A close-up of a logo&#10;&#10;AI-generated content may be incorrect.">
+            <a:extLst>
+              <a:ext uri="{FF2B5EF4-FFF2-40B4-BE49-F238E27FC236}">
+                <a16:creationId xmlns:a16="http://schemas.microsoft.com/office/drawing/2014/main" id="{06C3043E-52E1-11EF-906B-59D487C0724F}"/>
+              </a:ext>
+            </a:extLst>
+          </p:cNvPr>
+          <p:cNvPicPr>
+            <a:picLocks noChangeAspect="1"/>
+          </p:cNvPicPr>
+          <p:nvPr/>
+        </p:nvPicPr>
+        <p:blipFill>
+          <a:blip r:embed="rId6">
+            <a:extLst>
+              <a:ext uri="{28A0092B-C50C-407E-A947-70E740481C1C}">
+                <a14:useLocalDpi xmlns:a14="http://schemas.microsoft.com/office/drawing/2010/main" val="0"/>
+              </a:ext>
+            </a:extLst>
+          </a:blip>
+          <a:stretch>
+            <a:fillRect/>
+          </a:stretch>
+        </p:blipFill>
+        <p:spPr>
+          <a:xfrm>
+            <a:off x="6037174" y="13766430"/>
+            <a:ext cx="2876550" cy="1590675"/>
+          </a:xfrm>
+          <a:prstGeom prst="rect">
+            <a:avLst/>
+          </a:prstGeom>
+        </p:spPr>
+      </p:pic>
+    </p:spTree>
+    <p:extLst>
+      <p:ext uri="{BB962C8B-B14F-4D97-AF65-F5344CB8AC3E}">
+        <p14:creationId xmlns:p14="http://schemas.microsoft.com/office/powerpoint/2010/main" val="3965816641"/>
+      </p:ext>
+    </p:extLst>
+  </p:cSld>
+  <p:clrMapOvr>
+    <a:masterClrMapping/>
+  </p:clrMapOvr>
+</p:sld>
+</file>
+
+<file path=ppt/slides/slide3.xml><?xml version="1.0" encoding="utf-8"?>
 <p:sld xmlns:a="http://schemas.openxmlformats.org/drawingml/2006/main" xmlns:r="http://schemas.openxmlformats.org/officeDocument/2006/relationships" xmlns:p="http://schemas.openxmlformats.org/presentationml/2006/main">
   <p:cSld>
     <p:spTree>

--- a/tasktide/docs/Diagrams/Diagrams.pptx
+++ b/tasktide/docs/Diagrams/Diagrams.pptx
@@ -245,7 +245,7 @@
           <a:p>
             <a:fld id="{79C0705B-4870-4470-A32F-307AEE1697AB}" type="datetimeFigureOut">
               <a:rPr lang="en-IE" smtClean="0"/>
-              <a:t>25/07/2025</a:t>
+              <a:t>31/07/2025</a:t>
             </a:fld>
             <a:endParaRPr lang="en-IE"/>
           </a:p>
@@ -415,7 +415,7 @@
           <a:p>
             <a:fld id="{79C0705B-4870-4470-A32F-307AEE1697AB}" type="datetimeFigureOut">
               <a:rPr lang="en-IE" smtClean="0"/>
-              <a:t>25/07/2025</a:t>
+              <a:t>31/07/2025</a:t>
             </a:fld>
             <a:endParaRPr lang="en-IE"/>
           </a:p>
@@ -595,7 +595,7 @@
           <a:p>
             <a:fld id="{79C0705B-4870-4470-A32F-307AEE1697AB}" type="datetimeFigureOut">
               <a:rPr lang="en-IE" smtClean="0"/>
-              <a:t>25/07/2025</a:t>
+              <a:t>31/07/2025</a:t>
             </a:fld>
             <a:endParaRPr lang="en-IE"/>
           </a:p>
@@ -765,7 +765,7 @@
           <a:p>
             <a:fld id="{79C0705B-4870-4470-A32F-307AEE1697AB}" type="datetimeFigureOut">
               <a:rPr lang="en-IE" smtClean="0"/>
-              <a:t>25/07/2025</a:t>
+              <a:t>31/07/2025</a:t>
             </a:fld>
             <a:endParaRPr lang="en-IE"/>
           </a:p>
@@ -1011,7 +1011,7 @@
           <a:p>
             <a:fld id="{79C0705B-4870-4470-A32F-307AEE1697AB}" type="datetimeFigureOut">
               <a:rPr lang="en-IE" smtClean="0"/>
-              <a:t>25/07/2025</a:t>
+              <a:t>31/07/2025</a:t>
             </a:fld>
             <a:endParaRPr lang="en-IE"/>
           </a:p>
@@ -1243,7 +1243,7 @@
           <a:p>
             <a:fld id="{79C0705B-4870-4470-A32F-307AEE1697AB}" type="datetimeFigureOut">
               <a:rPr lang="en-IE" smtClean="0"/>
-              <a:t>25/07/2025</a:t>
+              <a:t>31/07/2025</a:t>
             </a:fld>
             <a:endParaRPr lang="en-IE"/>
           </a:p>
@@ -1610,7 +1610,7 @@
           <a:p>
             <a:fld id="{79C0705B-4870-4470-A32F-307AEE1697AB}" type="datetimeFigureOut">
               <a:rPr lang="en-IE" smtClean="0"/>
-              <a:t>25/07/2025</a:t>
+              <a:t>31/07/2025</a:t>
             </a:fld>
             <a:endParaRPr lang="en-IE"/>
           </a:p>
@@ -1728,7 +1728,7 @@
           <a:p>
             <a:fld id="{79C0705B-4870-4470-A32F-307AEE1697AB}" type="datetimeFigureOut">
               <a:rPr lang="en-IE" smtClean="0"/>
-              <a:t>25/07/2025</a:t>
+              <a:t>31/07/2025</a:t>
             </a:fld>
             <a:endParaRPr lang="en-IE"/>
           </a:p>
@@ -1823,7 +1823,7 @@
           <a:p>
             <a:fld id="{79C0705B-4870-4470-A32F-307AEE1697AB}" type="datetimeFigureOut">
               <a:rPr lang="en-IE" smtClean="0"/>
-              <a:t>25/07/2025</a:t>
+              <a:t>31/07/2025</a:t>
             </a:fld>
             <a:endParaRPr lang="en-IE"/>
           </a:p>
@@ -2100,7 +2100,7 @@
           <a:p>
             <a:fld id="{79C0705B-4870-4470-A32F-307AEE1697AB}" type="datetimeFigureOut">
               <a:rPr lang="en-IE" smtClean="0"/>
-              <a:t>25/07/2025</a:t>
+              <a:t>31/07/2025</a:t>
             </a:fld>
             <a:endParaRPr lang="en-IE"/>
           </a:p>
@@ -2357,7 +2357,7 @@
           <a:p>
             <a:fld id="{79C0705B-4870-4470-A32F-307AEE1697AB}" type="datetimeFigureOut">
               <a:rPr lang="en-IE" smtClean="0"/>
-              <a:t>25/07/2025</a:t>
+              <a:t>31/07/2025</a:t>
             </a:fld>
             <a:endParaRPr lang="en-IE"/>
           </a:p>
@@ -2570,7 +2570,7 @@
           <a:p>
             <a:fld id="{79C0705B-4870-4470-A32F-307AEE1697AB}" type="datetimeFigureOut">
               <a:rPr lang="en-IE" smtClean="0"/>
-              <a:t>25/07/2025</a:t>
+              <a:t>31/07/2025</a:t>
             </a:fld>
             <a:endParaRPr lang="en-IE"/>
           </a:p>
@@ -3416,7 +3416,7 @@
         </p:nvSpPr>
         <p:spPr>
           <a:xfrm>
-            <a:off x="286029" y="12290092"/>
+            <a:off x="286029" y="11692932"/>
             <a:ext cx="4964451" cy="846667"/>
           </a:xfrm>
           <a:prstGeom prst="flowChartAlternateProcess">
@@ -3637,42 +3637,6 @@
           </a:p>
         </p:txBody>
       </p:sp>
-      <p:pic>
-        <p:nvPicPr>
-          <p:cNvPr id="16" name="Picture 15" descr="A logo of a white tooth with a red ball and bow and arrow&#10;&#10;AI-generated content may be incorrect.">
-            <a:extLst>
-              <a:ext uri="{FF2B5EF4-FFF2-40B4-BE49-F238E27FC236}">
-                <a16:creationId xmlns:a16="http://schemas.microsoft.com/office/drawing/2014/main" id="{72C5EF99-8CDD-6E29-4BC5-E2E54A6F0002}"/>
-              </a:ext>
-            </a:extLst>
-          </p:cNvPr>
-          <p:cNvPicPr>
-            <a:picLocks noChangeAspect="1"/>
-          </p:cNvPicPr>
-          <p:nvPr/>
-        </p:nvPicPr>
-        <p:blipFill>
-          <a:blip r:embed="rId3">
-            <a:extLst>
-              <a:ext uri="{28A0092B-C50C-407E-A947-70E740481C1C}">
-                <a14:useLocalDpi xmlns:a14="http://schemas.microsoft.com/office/drawing/2010/main" val="0"/>
-              </a:ext>
-            </a:extLst>
-          </a:blip>
-          <a:stretch>
-            <a:fillRect/>
-          </a:stretch>
-        </p:blipFill>
-        <p:spPr>
-          <a:xfrm>
-            <a:off x="1455575" y="13910704"/>
-            <a:ext cx="2990162" cy="1880368"/>
-          </a:xfrm>
-          <a:prstGeom prst="rect">
-            <a:avLst/>
-          </a:prstGeom>
-        </p:spPr>
-      </p:pic>
       <p:grpSp>
         <p:nvGrpSpPr>
           <p:cNvPr id="42" name="Group 41">
@@ -3708,7 +3672,7 @@
             <p:nvPr/>
           </p:nvPicPr>
           <p:blipFill>
-            <a:blip r:embed="rId4">
+            <a:blip r:embed="rId3">
               <a:extLst>
                 <a:ext uri="{28A0092B-C50C-407E-A947-70E740481C1C}">
                   <a14:useLocalDpi xmlns:a14="http://schemas.microsoft.com/office/drawing/2010/main" val="0"/>
@@ -3744,7 +3708,7 @@
             <p:nvPr/>
           </p:nvPicPr>
           <p:blipFill>
-            <a:blip r:embed="rId5">
+            <a:blip r:embed="rId4">
               <a:extLst>
                 <a:ext uri="{28A0092B-C50C-407E-A947-70E740481C1C}">
                   <a14:useLocalDpi xmlns:a14="http://schemas.microsoft.com/office/drawing/2010/main" val="0"/>
@@ -3887,10 +3851,10 @@
       </p:cxnSp>
       <p:cxnSp>
         <p:nvCxnSpPr>
-          <p:cNvPr id="43" name="Straight Arrow Connector 42">
-            <a:extLst>
-              <a:ext uri="{FF2B5EF4-FFF2-40B4-BE49-F238E27FC236}">
-                <a16:creationId xmlns:a16="http://schemas.microsoft.com/office/drawing/2014/main" id="{79DC3E09-C608-48EF-34B8-A8C2CC14E4C6}"/>
+          <p:cNvPr id="44" name="Straight Arrow Connector 43">
+            <a:extLst>
+              <a:ext uri="{FF2B5EF4-FFF2-40B4-BE49-F238E27FC236}">
+                <a16:creationId xmlns:a16="http://schemas.microsoft.com/office/drawing/2014/main" id="{119E524B-4AAF-85A1-2D4B-FCC8F7BBC7CD}"/>
               </a:ext>
             </a:extLst>
           </p:cNvPr>
@@ -3901,7 +3865,7 @@
         </p:nvCxnSpPr>
         <p:spPr>
           <a:xfrm>
-            <a:off x="2891186" y="13207680"/>
+            <a:off x="12097033" y="13136759"/>
             <a:ext cx="0" cy="550214"/>
           </a:xfrm>
           <a:prstGeom prst="straightConnector1">
@@ -3926,47 +3890,6 @@
           </a:fontRef>
         </p:style>
       </p:cxnSp>
-      <p:cxnSp>
-        <p:nvCxnSpPr>
-          <p:cNvPr id="44" name="Straight Arrow Connector 43">
-            <a:extLst>
-              <a:ext uri="{FF2B5EF4-FFF2-40B4-BE49-F238E27FC236}">
-                <a16:creationId xmlns:a16="http://schemas.microsoft.com/office/drawing/2014/main" id="{119E524B-4AAF-85A1-2D4B-FCC8F7BBC7CD}"/>
-              </a:ext>
-            </a:extLst>
-          </p:cNvPr>
-          <p:cNvCxnSpPr>
-            <a:cxnSpLocks/>
-          </p:cNvCxnSpPr>
-          <p:nvPr/>
-        </p:nvCxnSpPr>
-        <p:spPr>
-          <a:xfrm>
-            <a:off x="12097033" y="13136759"/>
-            <a:ext cx="0" cy="550214"/>
-          </a:xfrm>
-          <a:prstGeom prst="straightConnector1">
-            <a:avLst/>
-          </a:prstGeom>
-          <a:ln w="76200">
-            <a:tailEnd type="triangle"/>
-          </a:ln>
-        </p:spPr>
-        <p:style>
-          <a:lnRef idx="3">
-            <a:schemeClr val="accent6"/>
-          </a:lnRef>
-          <a:fillRef idx="0">
-            <a:schemeClr val="accent6"/>
-          </a:fillRef>
-          <a:effectRef idx="2">
-            <a:schemeClr val="accent6"/>
-          </a:effectRef>
-          <a:fontRef idx="minor">
-            <a:schemeClr val="tx1"/>
-          </a:fontRef>
-        </p:style>
-      </p:cxnSp>
       <p:sp>
         <p:nvSpPr>
           <p:cNvPr id="48" name="Flowchart: Alternate Process 47">
@@ -3981,7 +3904,7 @@
         </p:nvSpPr>
         <p:spPr>
           <a:xfrm>
-            <a:off x="9470064" y="7774941"/>
+            <a:off x="11278284" y="6056524"/>
             <a:ext cx="3904789" cy="846667"/>
           </a:xfrm>
           <a:prstGeom prst="flowChartAlternateProcess">
@@ -4573,7 +4496,7 @@
         </p:nvCxnSpPr>
         <p:spPr>
           <a:xfrm rot="16200000">
-            <a:off x="9245002" y="7957089"/>
+            <a:off x="11053222" y="6238672"/>
             <a:ext cx="0" cy="518030"/>
           </a:xfrm>
           <a:prstGeom prst="straightConnector1">
@@ -4736,9 +4659,9 @@
           <p:nvPr/>
         </p:nvCxnSpPr>
         <p:spPr>
-          <a:xfrm flipH="1">
-            <a:off x="4277935" y="10316491"/>
-            <a:ext cx="194" cy="1973601"/>
+          <a:xfrm>
+            <a:off x="4278129" y="10316491"/>
+            <a:ext cx="0" cy="1422461"/>
           </a:xfrm>
           <a:prstGeom prst="straightConnector1">
             <a:avLst/>
@@ -4880,7 +4803,7 @@
             <p:nvPr/>
           </p:nvPicPr>
           <p:blipFill>
-            <a:blip r:embed="rId6">
+            <a:blip r:embed="rId5">
               <a:extLst>
                 <a:ext uri="{28A0092B-C50C-407E-A947-70E740481C1C}">
                   <a14:useLocalDpi xmlns:a14="http://schemas.microsoft.com/office/drawing/2010/main" val="0"/>
@@ -4916,7 +4839,7 @@
             <p:nvPr/>
           </p:nvPicPr>
           <p:blipFill>
-            <a:blip r:embed="rId7">
+            <a:blip r:embed="rId6">
               <a:extLst>
                 <a:ext uri="{28A0092B-C50C-407E-A947-70E740481C1C}">
                   <a14:useLocalDpi xmlns:a14="http://schemas.microsoft.com/office/drawing/2010/main" val="0"/>
@@ -4952,7 +4875,7 @@
             <p:nvPr/>
           </p:nvPicPr>
           <p:blipFill>
-            <a:blip r:embed="rId8">
+            <a:blip r:embed="rId7">
               <a:extLst>
                 <a:ext uri="{28A0092B-C50C-407E-A947-70E740481C1C}">
                   <a14:useLocalDpi xmlns:a14="http://schemas.microsoft.com/office/drawing/2010/main" val="0"/>
@@ -4974,6 +4897,83 @@
           </p:spPr>
         </p:pic>
       </p:grpSp>
+      <p:pic>
+        <p:nvPicPr>
+          <p:cNvPr id="25" name="Picture 24" descr="A group of logos on a white background&#10;&#10;AI-generated content may be incorrect.">
+            <a:extLst>
+              <a:ext uri="{FF2B5EF4-FFF2-40B4-BE49-F238E27FC236}">
+                <a16:creationId xmlns:a16="http://schemas.microsoft.com/office/drawing/2014/main" id="{ABB203D0-3D97-1EDE-DC6D-B67CAA1D37D9}"/>
+              </a:ext>
+            </a:extLst>
+          </p:cNvPr>
+          <p:cNvPicPr>
+            <a:picLocks noChangeAspect="1"/>
+          </p:cNvPicPr>
+          <p:nvPr/>
+        </p:nvPicPr>
+        <p:blipFill>
+          <a:blip r:embed="rId8">
+            <a:extLst>
+              <a:ext uri="{28A0092B-C50C-407E-A947-70E740481C1C}">
+                <a14:useLocalDpi xmlns:a14="http://schemas.microsoft.com/office/drawing/2010/main" val="0"/>
+              </a:ext>
+            </a:extLst>
+          </a:blip>
+          <a:stretch>
+            <a:fillRect/>
+          </a:stretch>
+        </p:blipFill>
+        <p:spPr>
+          <a:xfrm>
+            <a:off x="286030" y="13097822"/>
+            <a:ext cx="5116008" cy="3108274"/>
+          </a:xfrm>
+          <a:prstGeom prst="rect">
+            <a:avLst/>
+          </a:prstGeom>
+        </p:spPr>
+      </p:pic>
+      <p:cxnSp>
+        <p:nvCxnSpPr>
+          <p:cNvPr id="28" name="Straight Arrow Connector 27">
+            <a:extLst>
+              <a:ext uri="{FF2B5EF4-FFF2-40B4-BE49-F238E27FC236}">
+                <a16:creationId xmlns:a16="http://schemas.microsoft.com/office/drawing/2014/main" id="{79DC3E09-C608-48EF-34B8-A8C2CC14E4C6}"/>
+              </a:ext>
+            </a:extLst>
+          </p:cNvPr>
+          <p:cNvCxnSpPr>
+            <a:cxnSpLocks/>
+          </p:cNvCxnSpPr>
+          <p:nvPr/>
+        </p:nvCxnSpPr>
+        <p:spPr>
+          <a:xfrm>
+            <a:off x="2499300" y="12726732"/>
+            <a:ext cx="0" cy="550214"/>
+          </a:xfrm>
+          <a:prstGeom prst="straightConnector1">
+            <a:avLst/>
+          </a:prstGeom>
+          <a:ln w="76200">
+            <a:tailEnd type="triangle"/>
+          </a:ln>
+        </p:spPr>
+        <p:style>
+          <a:lnRef idx="3">
+            <a:schemeClr val="accent6"/>
+          </a:lnRef>
+          <a:fillRef idx="0">
+            <a:schemeClr val="accent6"/>
+          </a:fillRef>
+          <a:effectRef idx="2">
+            <a:schemeClr val="accent6"/>
+          </a:effectRef>
+          <a:fontRef idx="minor">
+            <a:schemeClr val="tx1"/>
+          </a:fontRef>
+        </p:style>
+      </p:cxnSp>
     </p:spTree>
     <p:extLst>
       <p:ext uri="{BB962C8B-B14F-4D97-AF65-F5344CB8AC3E}">
@@ -6016,7 +6016,7 @@
         </p:nvSpPr>
         <p:spPr>
           <a:xfrm>
-            <a:off x="9470064" y="7774941"/>
+            <a:off x="11198924" y="6084534"/>
             <a:ext cx="3904789" cy="846667"/>
           </a:xfrm>
           <a:prstGeom prst="flowChartAlternateProcess">
@@ -6608,7 +6608,7 @@
         </p:nvCxnSpPr>
         <p:spPr>
           <a:xfrm rot="16200000">
-            <a:off x="9245002" y="7957089"/>
+            <a:off x="10973862" y="6266682"/>
             <a:ext cx="0" cy="518030"/>
           </a:xfrm>
           <a:prstGeom prst="straightConnector1">

--- a/tasktide/docs/Diagrams/Diagrams.pptx
+++ b/tasktide/docs/Diagrams/Diagrams.pptx
@@ -6,10 +6,11 @@
   </p:sldMasterIdLst>
   <p:sldIdLst>
     <p:sldId id="259" r:id="rId2"/>
-    <p:sldId id="260" r:id="rId3"/>
-    <p:sldId id="261" r:id="rId4"/>
-    <p:sldId id="258" r:id="rId5"/>
-    <p:sldId id="256" r:id="rId6"/>
+    <p:sldId id="262" r:id="rId3"/>
+    <p:sldId id="260" r:id="rId4"/>
+    <p:sldId id="261" r:id="rId5"/>
+    <p:sldId id="258" r:id="rId6"/>
+    <p:sldId id="256" r:id="rId7"/>
   </p:sldIdLst>
   <p:sldSz cx="18000663" cy="16200438"/>
   <p:notesSz cx="6858000" cy="9144000"/>
@@ -1039,7 +1040,7 @@
 <dgm:dataModel xmlns:dgm="http://schemas.openxmlformats.org/drawingml/2006/diagram" xmlns:a="http://schemas.openxmlformats.org/drawingml/2006/main">
   <dgm:ptLst>
     <dgm:pt modelId="{AD77AFE8-5B80-4FD9-ACBE-C7D752115AD9}" type="doc">
-      <dgm:prSet loTypeId="urn:microsoft.com/office/officeart/2009/layout/CircleArrowProcess" loCatId="cycle" qsTypeId="urn:microsoft.com/office/officeart/2005/8/quickstyle/simple1" qsCatId="simple" csTypeId="urn:microsoft.com/office/officeart/2005/8/colors/colorful1" csCatId="colorful" phldr="1"/>
+      <dgm:prSet loTypeId="urn:microsoft.com/office/officeart/2009/layout/CircleArrowProcess" loCatId="cycle" qsTypeId="urn:microsoft.com/office/officeart/2005/8/quickstyle/3d1" qsCatId="3D" csTypeId="urn:microsoft.com/office/officeart/2005/8/colors/colorful1" csCatId="colorful" phldr="1"/>
       <dgm:spPr/>
       <dgm:t>
         <a:bodyPr/>
@@ -1267,8 +1268,8 @@
       </dsp:nvSpPr>
       <dsp:spPr>
         <a:xfrm>
-          <a:off x="2968998" y="0"/>
-          <a:ext cx="3679265" cy="3679824"/>
+          <a:off x="3312283" y="0"/>
+          <a:ext cx="4444852" cy="4445529"/>
         </a:xfrm>
         <a:prstGeom prst="circularArrow">
           <a:avLst>
@@ -1279,36 +1280,65 @@
             <a:gd name="adj5" fmla="val 12500"/>
           </a:avLst>
         </a:prstGeom>
-        <a:solidFill>
-          <a:schemeClr val="accent2">
-            <a:hueOff val="0"/>
-            <a:satOff val="0"/>
-            <a:lumOff val="0"/>
-            <a:alphaOff val="0"/>
-          </a:schemeClr>
-        </a:solidFill>
-        <a:ln w="19050" cap="flat" cmpd="sng" algn="ctr">
-          <a:solidFill>
-            <a:schemeClr val="lt1">
-              <a:hueOff val="0"/>
-              <a:satOff val="0"/>
-              <a:lumOff val="0"/>
-              <a:alphaOff val="0"/>
-            </a:schemeClr>
-          </a:solidFill>
-          <a:prstDash val="solid"/>
-          <a:miter lim="800000"/>
+        <a:gradFill rotWithShape="0">
+          <a:gsLst>
+            <a:gs pos="0">
+              <a:schemeClr val="accent2">
+                <a:hueOff val="0"/>
+                <a:satOff val="0"/>
+                <a:lumOff val="0"/>
+                <a:alphaOff val="0"/>
+                <a:satMod val="103000"/>
+                <a:lumMod val="102000"/>
+                <a:tint val="94000"/>
+              </a:schemeClr>
+            </a:gs>
+            <a:gs pos="50000">
+              <a:schemeClr val="accent2">
+                <a:hueOff val="0"/>
+                <a:satOff val="0"/>
+                <a:lumOff val="0"/>
+                <a:alphaOff val="0"/>
+                <a:satMod val="110000"/>
+                <a:lumMod val="100000"/>
+                <a:shade val="100000"/>
+              </a:schemeClr>
+            </a:gs>
+            <a:gs pos="100000">
+              <a:schemeClr val="accent2">
+                <a:hueOff val="0"/>
+                <a:satOff val="0"/>
+                <a:lumOff val="0"/>
+                <a:alphaOff val="0"/>
+                <a:lumMod val="99000"/>
+                <a:satMod val="120000"/>
+                <a:shade val="78000"/>
+              </a:schemeClr>
+            </a:gs>
+          </a:gsLst>
+          <a:lin ang="5400000" scaled="0"/>
+        </a:gradFill>
+        <a:ln>
+          <a:noFill/>
         </a:ln>
         <a:effectLst/>
+        <a:scene3d>
+          <a:camera prst="orthographicFront"/>
+          <a:lightRig rig="flat" dir="t"/>
+        </a:scene3d>
+        <a:sp3d prstMaterial="plastic">
+          <a:bevelT w="120900" h="88900"/>
+          <a:bevelB w="88900" h="31750" prst="angle"/>
+        </a:sp3d>
       </dsp:spPr>
       <dsp:style>
-        <a:lnRef idx="2">
+        <a:lnRef idx="0">
           <a:scrgbClr r="0" g="0" b="0"/>
         </a:lnRef>
-        <a:fillRef idx="1">
+        <a:fillRef idx="3">
           <a:scrgbClr r="0" g="0" b="0"/>
         </a:fillRef>
-        <a:effectRef idx="0">
+        <a:effectRef idx="2">
           <a:scrgbClr r="0" g="0" b="0"/>
         </a:effectRef>
         <a:fontRef idx="minor">
@@ -1323,8 +1353,8 @@
       </dsp:nvSpPr>
       <dsp:spPr>
         <a:xfrm>
-          <a:off x="3782237" y="1328528"/>
-          <a:ext cx="2044496" cy="1022003"/>
+          <a:off x="4294742" y="1604970"/>
+          <a:ext cx="2469919" cy="1234664"/>
         </a:xfrm>
         <a:prstGeom prst="rect">
           <a:avLst/>
@@ -1373,8 +1403,8 @@
         </a:p>
       </dsp:txBody>
       <dsp:txXfrm>
-        <a:off x="3782237" y="1328528"/>
-        <a:ext cx="2044496" cy="1022003"/>
+        <a:off x="4294742" y="1604970"/>
+        <a:ext cx="2469919" cy="1234664"/>
       </dsp:txXfrm>
     </dsp:sp>
     <dsp:sp modelId="{668DC389-6720-4236-8011-BFAB07D2AE6E}">
@@ -1384,8 +1414,8 @@
       </dsp:nvSpPr>
       <dsp:spPr>
         <a:xfrm>
-          <a:off x="1947096" y="2114332"/>
-          <a:ext cx="3679265" cy="3679824"/>
+          <a:off x="2077741" y="2554286"/>
+          <a:ext cx="4444852" cy="4445529"/>
         </a:xfrm>
         <a:prstGeom prst="leftCircularArrow">
           <a:avLst>
@@ -1396,36 +1426,65 @@
             <a:gd name="adj5" fmla="val 12500"/>
           </a:avLst>
         </a:prstGeom>
-        <a:solidFill>
-          <a:schemeClr val="accent3">
-            <a:hueOff val="0"/>
-            <a:satOff val="0"/>
-            <a:lumOff val="0"/>
-            <a:alphaOff val="0"/>
-          </a:schemeClr>
-        </a:solidFill>
-        <a:ln w="19050" cap="flat" cmpd="sng" algn="ctr">
-          <a:solidFill>
-            <a:schemeClr val="lt1">
-              <a:hueOff val="0"/>
-              <a:satOff val="0"/>
-              <a:lumOff val="0"/>
-              <a:alphaOff val="0"/>
-            </a:schemeClr>
-          </a:solidFill>
-          <a:prstDash val="solid"/>
-          <a:miter lim="800000"/>
+        <a:gradFill rotWithShape="0">
+          <a:gsLst>
+            <a:gs pos="0">
+              <a:schemeClr val="accent3">
+                <a:hueOff val="0"/>
+                <a:satOff val="0"/>
+                <a:lumOff val="0"/>
+                <a:alphaOff val="0"/>
+                <a:satMod val="103000"/>
+                <a:lumMod val="102000"/>
+                <a:tint val="94000"/>
+              </a:schemeClr>
+            </a:gs>
+            <a:gs pos="50000">
+              <a:schemeClr val="accent3">
+                <a:hueOff val="0"/>
+                <a:satOff val="0"/>
+                <a:lumOff val="0"/>
+                <a:alphaOff val="0"/>
+                <a:satMod val="110000"/>
+                <a:lumMod val="100000"/>
+                <a:shade val="100000"/>
+              </a:schemeClr>
+            </a:gs>
+            <a:gs pos="100000">
+              <a:schemeClr val="accent3">
+                <a:hueOff val="0"/>
+                <a:satOff val="0"/>
+                <a:lumOff val="0"/>
+                <a:alphaOff val="0"/>
+                <a:lumMod val="99000"/>
+                <a:satMod val="120000"/>
+                <a:shade val="78000"/>
+              </a:schemeClr>
+            </a:gs>
+          </a:gsLst>
+          <a:lin ang="5400000" scaled="0"/>
+        </a:gradFill>
+        <a:ln>
+          <a:noFill/>
         </a:ln>
         <a:effectLst/>
+        <a:scene3d>
+          <a:camera prst="orthographicFront"/>
+          <a:lightRig rig="flat" dir="t"/>
+        </a:scene3d>
+        <a:sp3d prstMaterial="plastic">
+          <a:bevelT w="120900" h="88900"/>
+          <a:bevelB w="88900" h="31750" prst="angle"/>
+        </a:sp3d>
       </dsp:spPr>
       <dsp:style>
-        <a:lnRef idx="2">
+        <a:lnRef idx="0">
           <a:scrgbClr r="0" g="0" b="0"/>
         </a:lnRef>
-        <a:fillRef idx="1">
+        <a:fillRef idx="3">
           <a:scrgbClr r="0" g="0" b="0"/>
         </a:fillRef>
-        <a:effectRef idx="0">
+        <a:effectRef idx="2">
           <a:scrgbClr r="0" g="0" b="0"/>
         </a:effectRef>
         <a:fontRef idx="minor">
@@ -1440,8 +1499,8 @@
       </dsp:nvSpPr>
       <dsp:spPr>
         <a:xfrm>
-          <a:off x="2764480" y="3455091"/>
-          <a:ext cx="2044496" cy="1022003"/>
+          <a:off x="3065208" y="4174032"/>
+          <a:ext cx="2469919" cy="1234664"/>
         </a:xfrm>
         <a:prstGeom prst="rect">
           <a:avLst/>
@@ -1489,8 +1548,8 @@
         </a:p>
       </dsp:txBody>
       <dsp:txXfrm>
-        <a:off x="2764480" y="3455091"/>
-        <a:ext cx="2044496" cy="1022003"/>
+        <a:off x="3065208" y="4174032"/>
+        <a:ext cx="2469919" cy="1234664"/>
       </dsp:txXfrm>
     </dsp:sp>
     <dsp:sp modelId="{19D1F821-3860-4F77-A074-BB6401E6326E}">
@@ -1500,8 +1559,8 @@
       </dsp:nvSpPr>
       <dsp:spPr>
         <a:xfrm>
-          <a:off x="3230865" y="4481681"/>
-          <a:ext cx="3161058" cy="3162325"/>
+          <a:off x="3628640" y="5414237"/>
+          <a:ext cx="3818817" cy="3820347"/>
         </a:xfrm>
         <a:prstGeom prst="blockArc">
           <a:avLst>
@@ -1510,36 +1569,65 @@
             <a:gd name="adj3" fmla="val 12740"/>
           </a:avLst>
         </a:prstGeom>
-        <a:solidFill>
-          <a:schemeClr val="accent4">
-            <a:hueOff val="0"/>
-            <a:satOff val="0"/>
-            <a:lumOff val="0"/>
-            <a:alphaOff val="0"/>
-          </a:schemeClr>
-        </a:solidFill>
-        <a:ln w="19050" cap="flat" cmpd="sng" algn="ctr">
-          <a:solidFill>
-            <a:schemeClr val="lt1">
-              <a:hueOff val="0"/>
-              <a:satOff val="0"/>
-              <a:lumOff val="0"/>
-              <a:alphaOff val="0"/>
-            </a:schemeClr>
-          </a:solidFill>
-          <a:prstDash val="solid"/>
-          <a:miter lim="800000"/>
+        <a:gradFill rotWithShape="0">
+          <a:gsLst>
+            <a:gs pos="0">
+              <a:schemeClr val="accent4">
+                <a:hueOff val="0"/>
+                <a:satOff val="0"/>
+                <a:lumOff val="0"/>
+                <a:alphaOff val="0"/>
+                <a:satMod val="103000"/>
+                <a:lumMod val="102000"/>
+                <a:tint val="94000"/>
+              </a:schemeClr>
+            </a:gs>
+            <a:gs pos="50000">
+              <a:schemeClr val="accent4">
+                <a:hueOff val="0"/>
+                <a:satOff val="0"/>
+                <a:lumOff val="0"/>
+                <a:alphaOff val="0"/>
+                <a:satMod val="110000"/>
+                <a:lumMod val="100000"/>
+                <a:shade val="100000"/>
+              </a:schemeClr>
+            </a:gs>
+            <a:gs pos="100000">
+              <a:schemeClr val="accent4">
+                <a:hueOff val="0"/>
+                <a:satOff val="0"/>
+                <a:lumOff val="0"/>
+                <a:alphaOff val="0"/>
+                <a:lumMod val="99000"/>
+                <a:satMod val="120000"/>
+                <a:shade val="78000"/>
+              </a:schemeClr>
+            </a:gs>
+          </a:gsLst>
+          <a:lin ang="5400000" scaled="0"/>
+        </a:gradFill>
+        <a:ln>
+          <a:noFill/>
         </a:ln>
         <a:effectLst/>
+        <a:scene3d>
+          <a:camera prst="orthographicFront"/>
+          <a:lightRig rig="flat" dir="t"/>
+        </a:scene3d>
+        <a:sp3d prstMaterial="plastic">
+          <a:bevelT w="120900" h="88900"/>
+          <a:bevelB w="88900" h="31750" prst="angle"/>
+        </a:sp3d>
       </dsp:spPr>
       <dsp:style>
-        <a:lnRef idx="2">
+        <a:lnRef idx="0">
           <a:scrgbClr r="0" g="0" b="0"/>
         </a:lnRef>
-        <a:fillRef idx="1">
+        <a:fillRef idx="3">
           <a:scrgbClr r="0" g="0" b="0"/>
         </a:fillRef>
-        <a:effectRef idx="0">
+        <a:effectRef idx="2">
           <a:scrgbClr r="0" g="0" b="0"/>
         </a:effectRef>
         <a:fontRef idx="minor">
@@ -1554,8 +1642,8 @@
       </dsp:nvSpPr>
       <dsp:spPr>
         <a:xfrm>
-          <a:off x="3787074" y="5584711"/>
-          <a:ext cx="2044496" cy="1022003"/>
+          <a:off x="4300585" y="6746787"/>
+          <a:ext cx="2469919" cy="1234664"/>
         </a:xfrm>
         <a:prstGeom prst="rect">
           <a:avLst/>
@@ -1603,8 +1691,8 @@
         </a:p>
       </dsp:txBody>
       <dsp:txXfrm>
-        <a:off x="3787074" y="5584711"/>
-        <a:ext cx="2044496" cy="1022003"/>
+        <a:off x="4300585" y="6746787"/>
+        <a:ext cx="2469919" cy="1234664"/>
       </dsp:txXfrm>
     </dsp:sp>
   </dsp:spTree>
@@ -3688,11 +3776,11 @@
 </file>
 
 <file path=ppt/diagrams/quickStyle1.xml><?xml version="1.0" encoding="utf-8"?>
-<dgm:styleDef xmlns:dgm="http://schemas.openxmlformats.org/drawingml/2006/diagram" xmlns:a="http://schemas.openxmlformats.org/drawingml/2006/main" uniqueId="urn:microsoft.com/office/officeart/2005/8/quickstyle/simple1">
+<dgm:styleDef xmlns:dgm="http://schemas.openxmlformats.org/drawingml/2006/diagram" xmlns:a="http://schemas.openxmlformats.org/drawingml/2006/main" uniqueId="urn:microsoft.com/office/officeart/2005/8/quickstyle/3d1">
   <dgm:title val=""/>
   <dgm:desc val=""/>
   <dgm:catLst>
-    <dgm:cat type="simple" pri="10100"/>
+    <dgm:cat type="3D" pri="11100"/>
   </dgm:catLst>
   <dgm:scene3d>
     <a:camera prst="orthographicFront"/>
@@ -3701,18 +3789,21 @@
   <dgm:styleLbl name="node0">
     <dgm:scene3d>
       <a:camera prst="orthographicFront"/>
-      <a:lightRig rig="threePt" dir="t"/>
+      <a:lightRig rig="flat" dir="t"/>
     </dgm:scene3d>
-    <dgm:sp3d/>
+    <dgm:sp3d prstMaterial="plastic">
+      <a:bevelT w="120900" h="88900"/>
+      <a:bevelB w="88900" h="31750" prst="angle"/>
+    </dgm:sp3d>
     <dgm:txPr/>
     <dgm:style>
-      <a:lnRef idx="2">
+      <a:lnRef idx="0">
         <a:scrgbClr r="0" g="0" b="0"/>
       </a:lnRef>
-      <a:fillRef idx="1">
+      <a:fillRef idx="3">
         <a:scrgbClr r="0" g="0" b="0"/>
       </a:fillRef>
-      <a:effectRef idx="0">
+      <a:effectRef idx="2">
         <a:scrgbClr r="0" g="0" b="0"/>
       </a:effectRef>
       <a:fontRef idx="minor">
@@ -3723,18 +3814,21 @@
   <dgm:styleLbl name="lnNode1">
     <dgm:scene3d>
       <a:camera prst="orthographicFront"/>
-      <a:lightRig rig="threePt" dir="t"/>
+      <a:lightRig rig="flat" dir="t"/>
     </dgm:scene3d>
-    <dgm:sp3d/>
+    <dgm:sp3d prstMaterial="plastic">
+      <a:bevelT w="120900" h="88900"/>
+      <a:bevelB w="88900" h="31750" prst="angle"/>
+    </dgm:sp3d>
     <dgm:txPr/>
     <dgm:style>
-      <a:lnRef idx="2">
+      <a:lnRef idx="0">
         <a:scrgbClr r="0" g="0" b="0"/>
       </a:lnRef>
-      <a:fillRef idx="1">
+      <a:fillRef idx="3">
         <a:scrgbClr r="0" g="0" b="0"/>
       </a:fillRef>
-      <a:effectRef idx="0">
+      <a:effectRef idx="1">
         <a:scrgbClr r="0" g="0" b="0"/>
       </a:effectRef>
       <a:fontRef idx="minor">
@@ -3745,18 +3839,21 @@
   <dgm:styleLbl name="vennNode1">
     <dgm:scene3d>
       <a:camera prst="orthographicFront"/>
-      <a:lightRig rig="threePt" dir="t"/>
+      <a:lightRig rig="flat" dir="t"/>
     </dgm:scene3d>
-    <dgm:sp3d/>
+    <dgm:sp3d prstMaterial="plastic">
+      <a:bevelT w="120900" h="88900"/>
+      <a:bevelB w="88900" h="31750" prst="angle"/>
+    </dgm:sp3d>
     <dgm:txPr/>
     <dgm:style>
-      <a:lnRef idx="2">
+      <a:lnRef idx="0">
         <a:scrgbClr r="0" g="0" b="0"/>
       </a:lnRef>
       <a:fillRef idx="1">
         <a:scrgbClr r="0" g="0" b="0"/>
       </a:fillRef>
-      <a:effectRef idx="0">
+      <a:effectRef idx="1">
         <a:scrgbClr r="0" g="0" b="0"/>
       </a:effectRef>
       <a:fontRef idx="minor">
@@ -3767,18 +3864,21 @@
   <dgm:styleLbl name="alignNode1">
     <dgm:scene3d>
       <a:camera prst="orthographicFront"/>
-      <a:lightRig rig="threePt" dir="t"/>
+      <a:lightRig rig="flat" dir="t"/>
     </dgm:scene3d>
-    <dgm:sp3d/>
+    <dgm:sp3d prstMaterial="plastic">
+      <a:bevelT w="120900" h="88900"/>
+      <a:bevelB w="88900" h="31750" prst="angle"/>
+    </dgm:sp3d>
     <dgm:txPr/>
     <dgm:style>
-      <a:lnRef idx="2">
+      <a:lnRef idx="1">
         <a:scrgbClr r="0" g="0" b="0"/>
       </a:lnRef>
-      <a:fillRef idx="1">
+      <a:fillRef idx="3">
         <a:scrgbClr r="0" g="0" b="0"/>
       </a:fillRef>
-      <a:effectRef idx="0">
+      <a:effectRef idx="2">
         <a:scrgbClr r="0" g="0" b="0"/>
       </a:effectRef>
       <a:fontRef idx="minor">
@@ -3789,18 +3889,21 @@
   <dgm:styleLbl name="node1">
     <dgm:scene3d>
       <a:camera prst="orthographicFront"/>
-      <a:lightRig rig="threePt" dir="t"/>
+      <a:lightRig rig="flat" dir="t"/>
     </dgm:scene3d>
-    <dgm:sp3d/>
+    <dgm:sp3d prstMaterial="plastic">
+      <a:bevelT w="120900" h="88900"/>
+      <a:bevelB w="88900" h="31750" prst="angle"/>
+    </dgm:sp3d>
     <dgm:txPr/>
     <dgm:style>
-      <a:lnRef idx="2">
+      <a:lnRef idx="0">
         <a:scrgbClr r="0" g="0" b="0"/>
       </a:lnRef>
-      <a:fillRef idx="1">
+      <a:fillRef idx="3">
         <a:scrgbClr r="0" g="0" b="0"/>
       </a:fillRef>
-      <a:effectRef idx="0">
+      <a:effectRef idx="2">
         <a:scrgbClr r="0" g="0" b="0"/>
       </a:effectRef>
       <a:fontRef idx="minor">
@@ -3811,18 +3914,21 @@
   <dgm:styleLbl name="node2">
     <dgm:scene3d>
       <a:camera prst="orthographicFront"/>
-      <a:lightRig rig="threePt" dir="t"/>
+      <a:lightRig rig="flat" dir="t"/>
     </dgm:scene3d>
-    <dgm:sp3d/>
+    <dgm:sp3d prstMaterial="plastic">
+      <a:bevelT w="120900" h="88900"/>
+      <a:bevelB w="88900" h="31750" prst="angle"/>
+    </dgm:sp3d>
     <dgm:txPr/>
     <dgm:style>
-      <a:lnRef idx="2">
+      <a:lnRef idx="0">
         <a:scrgbClr r="0" g="0" b="0"/>
       </a:lnRef>
-      <a:fillRef idx="1">
+      <a:fillRef idx="3">
         <a:scrgbClr r="0" g="0" b="0"/>
       </a:fillRef>
-      <a:effectRef idx="0">
+      <a:effectRef idx="1">
         <a:scrgbClr r="0" g="0" b="0"/>
       </a:effectRef>
       <a:fontRef idx="minor">
@@ -3833,18 +3939,21 @@
   <dgm:styleLbl name="node3">
     <dgm:scene3d>
       <a:camera prst="orthographicFront"/>
-      <a:lightRig rig="threePt" dir="t"/>
+      <a:lightRig rig="flat" dir="t"/>
     </dgm:scene3d>
-    <dgm:sp3d/>
+    <dgm:sp3d prstMaterial="plastic">
+      <a:bevelT w="120900" h="88900"/>
+      <a:bevelB w="88900" h="31750" prst="angle"/>
+    </dgm:sp3d>
     <dgm:txPr/>
     <dgm:style>
-      <a:lnRef idx="2">
+      <a:lnRef idx="0">
         <a:scrgbClr r="0" g="0" b="0"/>
       </a:lnRef>
-      <a:fillRef idx="1">
+      <a:fillRef idx="3">
         <a:scrgbClr r="0" g="0" b="0"/>
       </a:fillRef>
-      <a:effectRef idx="0">
+      <a:effectRef idx="1">
         <a:scrgbClr r="0" g="0" b="0"/>
       </a:effectRef>
       <a:fontRef idx="minor">
@@ -3855,18 +3964,21 @@
   <dgm:styleLbl name="node4">
     <dgm:scene3d>
       <a:camera prst="orthographicFront"/>
-      <a:lightRig rig="threePt" dir="t"/>
+      <a:lightRig rig="flat" dir="t"/>
     </dgm:scene3d>
-    <dgm:sp3d/>
+    <dgm:sp3d prstMaterial="plastic">
+      <a:bevelT w="120900" h="88900"/>
+      <a:bevelB w="88900" h="31750" prst="angle"/>
+    </dgm:sp3d>
     <dgm:txPr/>
     <dgm:style>
-      <a:lnRef idx="2">
+      <a:lnRef idx="0">
         <a:scrgbClr r="0" g="0" b="0"/>
       </a:lnRef>
-      <a:fillRef idx="1">
+      <a:fillRef idx="3">
         <a:scrgbClr r="0" g="0" b="0"/>
       </a:fillRef>
-      <a:effectRef idx="0">
+      <a:effectRef idx="1">
         <a:scrgbClr r="0" g="0" b="0"/>
       </a:effectRef>
       <a:fontRef idx="minor">
@@ -3877,18 +3989,21 @@
   <dgm:styleLbl name="fgImgPlace1">
     <dgm:scene3d>
       <a:camera prst="orthographicFront"/>
-      <a:lightRig rig="threePt" dir="t"/>
+      <a:lightRig rig="flat" dir="t"/>
     </dgm:scene3d>
-    <dgm:sp3d/>
+    <dgm:sp3d z="127000" prstMaterial="plastic">
+      <a:bevelT w="88900" h="88900"/>
+      <a:bevelB w="88900" h="31750" prst="angle"/>
+    </dgm:sp3d>
     <dgm:txPr/>
     <dgm:style>
-      <a:lnRef idx="2">
+      <a:lnRef idx="0">
         <a:scrgbClr r="0" g="0" b="0"/>
       </a:lnRef>
-      <a:fillRef idx="1">
+      <a:fillRef idx="3">
         <a:scrgbClr r="0" g="0" b="0"/>
       </a:fillRef>
-      <a:effectRef idx="0">
+      <a:effectRef idx="2">
         <a:scrgbClr r="0" g="0" b="0"/>
       </a:effectRef>
       <a:fontRef idx="minor"/>
@@ -3897,18 +4012,21 @@
   <dgm:styleLbl name="alignImgPlace1">
     <dgm:scene3d>
       <a:camera prst="orthographicFront"/>
-      <a:lightRig rig="threePt" dir="t"/>
+      <a:lightRig rig="flat" dir="t"/>
     </dgm:scene3d>
-    <dgm:sp3d/>
+    <dgm:sp3d prstMaterial="plastic">
+      <a:bevelT w="88900" h="88900"/>
+      <a:bevelB w="88900" h="31750" prst="angle"/>
+    </dgm:sp3d>
     <dgm:txPr/>
     <dgm:style>
-      <a:lnRef idx="2">
+      <a:lnRef idx="0">
         <a:scrgbClr r="0" g="0" b="0"/>
       </a:lnRef>
-      <a:fillRef idx="1">
+      <a:fillRef idx="3">
         <a:scrgbClr r="0" g="0" b="0"/>
       </a:fillRef>
-      <a:effectRef idx="0">
+      <a:effectRef idx="2">
         <a:scrgbClr r="0" g="0" b="0"/>
       </a:effectRef>
       <a:fontRef idx="minor"/>
@@ -3917,18 +4035,21 @@
   <dgm:styleLbl name="bgImgPlace1">
     <dgm:scene3d>
       <a:camera prst="orthographicFront"/>
-      <a:lightRig rig="threePt" dir="t"/>
+      <a:lightRig rig="flat" dir="t"/>
     </dgm:scene3d>
-    <dgm:sp3d/>
+    <dgm:sp3d z="-190500" prstMaterial="plastic">
+      <a:bevelT w="88900" h="88900"/>
+      <a:bevelB w="88900" h="31750" prst="angle"/>
+    </dgm:sp3d>
     <dgm:txPr/>
     <dgm:style>
-      <a:lnRef idx="2">
+      <a:lnRef idx="0">
         <a:scrgbClr r="0" g="0" b="0"/>
       </a:lnRef>
-      <a:fillRef idx="1">
+      <a:fillRef idx="3">
         <a:scrgbClr r="0" g="0" b="0"/>
       </a:fillRef>
-      <a:effectRef idx="0">
+      <a:effectRef idx="2">
         <a:scrgbClr r="0" g="0" b="0"/>
       </a:effectRef>
       <a:fontRef idx="minor"/>
@@ -3937,18 +4058,21 @@
   <dgm:styleLbl name="sibTrans2D1">
     <dgm:scene3d>
       <a:camera prst="orthographicFront"/>
-      <a:lightRig rig="threePt" dir="t"/>
+      <a:lightRig rig="flat" dir="t"/>
     </dgm:scene3d>
-    <dgm:sp3d/>
+    <dgm:sp3d z="-80000" prstMaterial="plastic">
+      <a:bevelT w="50800" h="50800"/>
+      <a:bevelB w="25400" h="25400" prst="angle"/>
+    </dgm:sp3d>
     <dgm:txPr/>
     <dgm:style>
       <a:lnRef idx="0">
         <a:scrgbClr r="0" g="0" b="0"/>
       </a:lnRef>
-      <a:fillRef idx="1">
+      <a:fillRef idx="3">
         <a:scrgbClr r="0" g="0" b="0"/>
       </a:fillRef>
-      <a:effectRef idx="0">
+      <a:effectRef idx="2">
         <a:scrgbClr r="0" g="0" b="0"/>
       </a:effectRef>
       <a:fontRef idx="minor">
@@ -3959,18 +4083,21 @@
   <dgm:styleLbl name="fgSibTrans2D1">
     <dgm:scene3d>
       <a:camera prst="orthographicFront"/>
-      <a:lightRig rig="threePt" dir="t"/>
+      <a:lightRig rig="flat" dir="t"/>
     </dgm:scene3d>
-    <dgm:sp3d/>
+    <dgm:sp3d z="127000" prstMaterial="plastic">
+      <a:bevelT w="50800" h="50800"/>
+      <a:bevelB w="25400" h="25400" prst="angle"/>
+    </dgm:sp3d>
     <dgm:txPr/>
     <dgm:style>
       <a:lnRef idx="0">
         <a:scrgbClr r="0" g="0" b="0"/>
       </a:lnRef>
-      <a:fillRef idx="1">
+      <a:fillRef idx="3">
         <a:scrgbClr r="0" g="0" b="0"/>
       </a:fillRef>
-      <a:effectRef idx="0">
+      <a:effectRef idx="2">
         <a:scrgbClr r="0" g="0" b="0"/>
       </a:effectRef>
       <a:fontRef idx="minor">
@@ -3981,18 +4108,21 @@
   <dgm:styleLbl name="bgSibTrans2D1">
     <dgm:scene3d>
       <a:camera prst="orthographicFront"/>
-      <a:lightRig rig="threePt" dir="t"/>
+      <a:lightRig rig="flat" dir="t"/>
     </dgm:scene3d>
-    <dgm:sp3d/>
+    <dgm:sp3d z="-190500" prstMaterial="plastic">
+      <a:bevelT w="50800" h="50800"/>
+      <a:bevelB w="25400" h="25400" prst="angle"/>
+    </dgm:sp3d>
     <dgm:txPr/>
     <dgm:style>
       <a:lnRef idx="0">
         <a:scrgbClr r="0" g="0" b="0"/>
       </a:lnRef>
-      <a:fillRef idx="1">
+      <a:fillRef idx="3">
         <a:scrgbClr r="0" g="0" b="0"/>
       </a:fillRef>
-      <a:effectRef idx="0">
+      <a:effectRef idx="2">
         <a:scrgbClr r="0" g="0" b="0"/>
       </a:effectRef>
       <a:fontRef idx="minor">
@@ -4003,9 +4133,9 @@
   <dgm:styleLbl name="sibTrans1D1">
     <dgm:scene3d>
       <a:camera prst="orthographicFront"/>
-      <a:lightRig rig="threePt" dir="t"/>
+      <a:lightRig rig="flat" dir="t"/>
     </dgm:scene3d>
-    <dgm:sp3d/>
+    <dgm:sp3d z="-40000" prstMaterial="matte"/>
     <dgm:txPr/>
     <dgm:style>
       <a:lnRef idx="1">
@@ -4025,7 +4155,7 @@
       <a:camera prst="orthographicFront"/>
       <a:lightRig rig="threePt" dir="t"/>
     </dgm:scene3d>
-    <dgm:sp3d/>
+    <dgm:sp3d z="127000" prstMaterial="matte"/>
     <dgm:txPr/>
     <dgm:style>
       <a:lnRef idx="2">
@@ -4043,18 +4173,21 @@
   <dgm:styleLbl name="asst0">
     <dgm:scene3d>
       <a:camera prst="orthographicFront"/>
-      <a:lightRig rig="threePt" dir="t"/>
+      <a:lightRig rig="flat" dir="t"/>
     </dgm:scene3d>
-    <dgm:sp3d/>
+    <dgm:sp3d prstMaterial="plastic">
+      <a:bevelT w="120900" h="88900"/>
+      <a:bevelB w="88900" h="31750" prst="angle"/>
+    </dgm:sp3d>
     <dgm:txPr/>
     <dgm:style>
-      <a:lnRef idx="2">
+      <a:lnRef idx="0">
         <a:scrgbClr r="0" g="0" b="0"/>
       </a:lnRef>
-      <a:fillRef idx="1">
+      <a:fillRef idx="3">
         <a:scrgbClr r="0" g="0" b="0"/>
       </a:fillRef>
-      <a:effectRef idx="0">
+      <a:effectRef idx="1">
         <a:scrgbClr r="0" g="0" b="0"/>
       </a:effectRef>
       <a:fontRef idx="minor">
@@ -4065,18 +4198,21 @@
   <dgm:styleLbl name="asst1">
     <dgm:scene3d>
       <a:camera prst="orthographicFront"/>
-      <a:lightRig rig="threePt" dir="t"/>
+      <a:lightRig rig="flat" dir="t"/>
     </dgm:scene3d>
-    <dgm:sp3d/>
+    <dgm:sp3d prstMaterial="plastic">
+      <a:bevelT w="120900" h="88900"/>
+      <a:bevelB w="88900" h="31750" prst="angle"/>
+    </dgm:sp3d>
     <dgm:txPr/>
     <dgm:style>
-      <a:lnRef idx="2">
+      <a:lnRef idx="0">
         <a:scrgbClr r="0" g="0" b="0"/>
       </a:lnRef>
-      <a:fillRef idx="1">
+      <a:fillRef idx="3">
         <a:scrgbClr r="0" g="0" b="0"/>
       </a:fillRef>
-      <a:effectRef idx="0">
+      <a:effectRef idx="1">
         <a:scrgbClr r="0" g="0" b="0"/>
       </a:effectRef>
       <a:fontRef idx="minor">
@@ -4087,18 +4223,21 @@
   <dgm:styleLbl name="asst2">
     <dgm:scene3d>
       <a:camera prst="orthographicFront"/>
-      <a:lightRig rig="threePt" dir="t"/>
+      <a:lightRig rig="flat" dir="t"/>
     </dgm:scene3d>
-    <dgm:sp3d/>
+    <dgm:sp3d prstMaterial="plastic">
+      <a:bevelT w="120900" h="88900"/>
+      <a:bevelB w="88900" h="31750" prst="angle"/>
+    </dgm:sp3d>
     <dgm:txPr/>
     <dgm:style>
-      <a:lnRef idx="2">
+      <a:lnRef idx="0">
         <a:scrgbClr r="0" g="0" b="0"/>
       </a:lnRef>
-      <a:fillRef idx="1">
+      <a:fillRef idx="3">
         <a:scrgbClr r="0" g="0" b="0"/>
       </a:fillRef>
-      <a:effectRef idx="0">
+      <a:effectRef idx="1">
         <a:scrgbClr r="0" g="0" b="0"/>
       </a:effectRef>
       <a:fontRef idx="minor">
@@ -4109,40 +4248,21 @@
   <dgm:styleLbl name="asst3">
     <dgm:scene3d>
       <a:camera prst="orthographicFront"/>
-      <a:lightRig rig="threePt" dir="t"/>
+      <a:lightRig rig="flat" dir="t"/>
     </dgm:scene3d>
-    <dgm:sp3d/>
+    <dgm:sp3d prstMaterial="plastic">
+      <a:bevelT w="120900" h="88900"/>
+      <a:bevelB w="88900" h="31750" prst="angle"/>
+    </dgm:sp3d>
     <dgm:txPr/>
     <dgm:style>
-      <a:lnRef idx="2">
+      <a:lnRef idx="0">
         <a:scrgbClr r="0" g="0" b="0"/>
       </a:lnRef>
-      <a:fillRef idx="1">
+      <a:fillRef idx="3">
         <a:scrgbClr r="0" g="0" b="0"/>
       </a:fillRef>
-      <a:effectRef idx="0">
-        <a:scrgbClr r="0" g="0" b="0"/>
-      </a:effectRef>
-      <a:fontRef idx="minor">
-        <a:schemeClr val="lt1"/>
-      </a:fontRef>
-    </dgm:style>
-  </dgm:styleLbl>
-  <dgm:styleLbl name="asst4">
-    <dgm:scene3d>
-      <a:camera prst="orthographicFront"/>
-      <a:lightRig rig="threePt" dir="t"/>
-    </dgm:scene3d>
-    <dgm:sp3d/>
-    <dgm:txPr/>
-    <dgm:style>
-      <a:lnRef idx="2">
-        <a:scrgbClr r="0" g="0" b="0"/>
-      </a:lnRef>
-      <a:fillRef idx="1">
-        <a:scrgbClr r="0" g="0" b="0"/>
-      </a:fillRef>
-      <a:effectRef idx="0">
+      <a:effectRef idx="1">
         <a:scrgbClr r="0" g="0" b="0"/>
       </a:effectRef>
       <a:fontRef idx="minor">
@@ -4153,18 +4273,21 @@
   <dgm:styleLbl name="parChTrans2D1">
     <dgm:scene3d>
       <a:camera prst="orthographicFront"/>
-      <a:lightRig rig="threePt" dir="t"/>
+      <a:lightRig rig="flat" dir="t"/>
     </dgm:scene3d>
-    <dgm:sp3d/>
+    <dgm:sp3d z="-100000" prstMaterial="plastic">
+      <a:bevelT w="120900" h="88900"/>
+      <a:bevelB w="88900" h="31750" prst="angle"/>
+    </dgm:sp3d>
     <dgm:txPr/>
     <dgm:style>
-      <a:lnRef idx="2">
+      <a:lnRef idx="0">
         <a:scrgbClr r="0" g="0" b="0"/>
       </a:lnRef>
-      <a:fillRef idx="1">
+      <a:fillRef idx="3">
         <a:scrgbClr r="0" g="0" b="0"/>
       </a:fillRef>
-      <a:effectRef idx="0">
+      <a:effectRef idx="1">
         <a:scrgbClr r="0" g="0" b="0"/>
       </a:effectRef>
       <a:fontRef idx="minor">
@@ -4175,18 +4298,21 @@
   <dgm:styleLbl name="parChTrans2D2">
     <dgm:scene3d>
       <a:camera prst="orthographicFront"/>
-      <a:lightRig rig="threePt" dir="t"/>
+      <a:lightRig rig="flat" dir="t"/>
     </dgm:scene3d>
-    <dgm:sp3d/>
+    <dgm:sp3d z="-60000" prstMaterial="plastic">
+      <a:bevelT w="120900" h="88900"/>
+      <a:bevelB w="88900" h="31750" prst="angle"/>
+    </dgm:sp3d>
     <dgm:txPr/>
     <dgm:style>
-      <a:lnRef idx="2">
+      <a:lnRef idx="0">
         <a:scrgbClr r="0" g="0" b="0"/>
       </a:lnRef>
-      <a:fillRef idx="1">
+      <a:fillRef idx="3">
         <a:scrgbClr r="0" g="0" b="0"/>
       </a:fillRef>
-      <a:effectRef idx="0">
+      <a:effectRef idx="1">
         <a:scrgbClr r="0" g="0" b="0"/>
       </a:effectRef>
       <a:fontRef idx="minor">
@@ -4197,18 +4323,21 @@
   <dgm:styleLbl name="parChTrans2D3">
     <dgm:scene3d>
       <a:camera prst="orthographicFront"/>
-      <a:lightRig rig="threePt" dir="t"/>
+      <a:lightRig rig="flat" dir="t"/>
     </dgm:scene3d>
-    <dgm:sp3d/>
+    <dgm:sp3d z="-60000" prstMaterial="plastic">
+      <a:bevelT w="120900" h="88900"/>
+      <a:bevelB w="88900" h="31750" prst="angle"/>
+    </dgm:sp3d>
     <dgm:txPr/>
     <dgm:style>
-      <a:lnRef idx="2">
+      <a:lnRef idx="0">
         <a:scrgbClr r="0" g="0" b="0"/>
       </a:lnRef>
-      <a:fillRef idx="1">
+      <a:fillRef idx="3">
         <a:scrgbClr r="0" g="0" b="0"/>
       </a:fillRef>
-      <a:effectRef idx="0">
+      <a:effectRef idx="1">
         <a:scrgbClr r="0" g="0" b="0"/>
       </a:effectRef>
       <a:fontRef idx="minor">
@@ -4219,18 +4348,21 @@
   <dgm:styleLbl name="parChTrans2D4">
     <dgm:scene3d>
       <a:camera prst="orthographicFront"/>
-      <a:lightRig rig="threePt" dir="t"/>
+      <a:lightRig rig="flat" dir="t"/>
     </dgm:scene3d>
-    <dgm:sp3d/>
+    <dgm:sp3d z="-60000" prstMaterial="plastic">
+      <a:bevelT w="120900" h="88900"/>
+      <a:bevelB w="88900" h="31750" prst="angle"/>
+    </dgm:sp3d>
     <dgm:txPr/>
     <dgm:style>
-      <a:lnRef idx="2">
+      <a:lnRef idx="0">
         <a:scrgbClr r="0" g="0" b="0"/>
       </a:lnRef>
-      <a:fillRef idx="1">
+      <a:fillRef idx="3">
         <a:scrgbClr r="0" g="0" b="0"/>
       </a:fillRef>
-      <a:effectRef idx="0">
+      <a:effectRef idx="1">
         <a:scrgbClr r="0" g="0" b="0"/>
       </a:effectRef>
       <a:fontRef idx="minor">
@@ -4241,9 +4373,9 @@
   <dgm:styleLbl name="parChTrans1D1">
     <dgm:scene3d>
       <a:camera prst="orthographicFront"/>
-      <a:lightRig rig="threePt" dir="t"/>
+      <a:lightRig rig="flat" dir="t"/>
     </dgm:scene3d>
-    <dgm:sp3d/>
+    <dgm:sp3d prstMaterial="matte"/>
     <dgm:txPr/>
     <dgm:style>
       <a:lnRef idx="2">
@@ -4261,9 +4393,9 @@
   <dgm:styleLbl name="parChTrans1D2">
     <dgm:scene3d>
       <a:camera prst="orthographicFront"/>
-      <a:lightRig rig="threePt" dir="t"/>
+      <a:lightRig rig="flat" dir="t"/>
     </dgm:scene3d>
-    <dgm:sp3d/>
+    <dgm:sp3d prstMaterial="matte"/>
     <dgm:txPr/>
     <dgm:style>
       <a:lnRef idx="2">
@@ -4281,9 +4413,9 @@
   <dgm:styleLbl name="parChTrans1D3">
     <dgm:scene3d>
       <a:camera prst="orthographicFront"/>
-      <a:lightRig rig="threePt" dir="t"/>
+      <a:lightRig rig="flat" dir="t"/>
     </dgm:scene3d>
-    <dgm:sp3d/>
+    <dgm:sp3d prstMaterial="matte"/>
     <dgm:txPr/>
     <dgm:style>
       <a:lnRef idx="2">
@@ -4301,9 +4433,9 @@
   <dgm:styleLbl name="parChTrans1D4">
     <dgm:scene3d>
       <a:camera prst="orthographicFront"/>
-      <a:lightRig rig="threePt" dir="t"/>
+      <a:lightRig rig="flat" dir="t"/>
     </dgm:scene3d>
-    <dgm:sp3d/>
+    <dgm:sp3d prstMaterial="matte"/>
     <dgm:txPr/>
     <dgm:style>
       <a:lnRef idx="2">
@@ -4321,18 +4453,20 @@
   <dgm:styleLbl name="fgAcc1">
     <dgm:scene3d>
       <a:camera prst="orthographicFront"/>
-      <a:lightRig rig="threePt" dir="t"/>
+      <a:lightRig rig="flat" dir="t"/>
     </dgm:scene3d>
-    <dgm:sp3d/>
+    <dgm:sp3d z="190500" extrusionH="12700" prstMaterial="plastic">
+      <a:bevelT w="50800" h="50800"/>
+    </dgm:sp3d>
     <dgm:txPr/>
     <dgm:style>
-      <a:lnRef idx="2">
+      <a:lnRef idx="1">
         <a:scrgbClr r="0" g="0" b="0"/>
       </a:lnRef>
       <a:fillRef idx="1">
         <a:scrgbClr r="0" g="0" b="0"/>
       </a:fillRef>
-      <a:effectRef idx="0">
+      <a:effectRef idx="2">
         <a:scrgbClr r="0" g="0" b="0"/>
       </a:effectRef>
       <a:fontRef idx="minor"/>
@@ -4341,18 +4475,20 @@
   <dgm:styleLbl name="conFgAcc1">
     <dgm:scene3d>
       <a:camera prst="orthographicFront"/>
-      <a:lightRig rig="threePt" dir="t"/>
+      <a:lightRig rig="flat" dir="t"/>
     </dgm:scene3d>
-    <dgm:sp3d/>
+    <dgm:sp3d z="190500" extrusionH="12700" prstMaterial="plastic">
+      <a:bevelT w="50800" h="50800"/>
+    </dgm:sp3d>
     <dgm:txPr/>
     <dgm:style>
-      <a:lnRef idx="2">
+      <a:lnRef idx="1">
         <a:scrgbClr r="0" g="0" b="0"/>
       </a:lnRef>
       <a:fillRef idx="1">
         <a:scrgbClr r="0" g="0" b="0"/>
       </a:fillRef>
-      <a:effectRef idx="0">
+      <a:effectRef idx="2">
         <a:scrgbClr r="0" g="0" b="0"/>
       </a:effectRef>
       <a:fontRef idx="minor"/>
@@ -4361,18 +4497,20 @@
   <dgm:styleLbl name="alignAcc1">
     <dgm:scene3d>
       <a:camera prst="orthographicFront"/>
-      <a:lightRig rig="threePt" dir="t"/>
+      <a:lightRig rig="flat" dir="t"/>
     </dgm:scene3d>
-    <dgm:sp3d/>
+    <dgm:sp3d extrusionH="12700" prstMaterial="plastic">
+      <a:bevelT w="50800" h="50800"/>
+    </dgm:sp3d>
     <dgm:txPr/>
     <dgm:style>
-      <a:lnRef idx="2">
+      <a:lnRef idx="1">
         <a:scrgbClr r="0" g="0" b="0"/>
       </a:lnRef>
       <a:fillRef idx="1">
         <a:scrgbClr r="0" g="0" b="0"/>
       </a:fillRef>
-      <a:effectRef idx="0">
+      <a:effectRef idx="2">
         <a:scrgbClr r="0" g="0" b="0"/>
       </a:effectRef>
       <a:fontRef idx="minor"/>
@@ -4381,9 +4519,11 @@
   <dgm:styleLbl name="trAlignAcc1">
     <dgm:scene3d>
       <a:camera prst="orthographicFront"/>
-      <a:lightRig rig="threePt" dir="t"/>
+      <a:lightRig rig="flat" dir="t"/>
     </dgm:scene3d>
-    <dgm:sp3d/>
+    <dgm:sp3d extrusionH="12700" prstMaterial="plastic">
+      <a:bevelT w="50800" h="50800"/>
+    </dgm:sp3d>
     <dgm:txPr/>
     <dgm:style>
       <a:lnRef idx="1">
@@ -4392,7 +4532,7 @@
       <a:fillRef idx="1">
         <a:scrgbClr r="0" g="0" b="0"/>
       </a:fillRef>
-      <a:effectRef idx="0">
+      <a:effectRef idx="2">
         <a:scrgbClr r="0" g="0" b="0"/>
       </a:effectRef>
       <a:fontRef idx="minor"/>
@@ -4401,18 +4541,20 @@
   <dgm:styleLbl name="bgAcc1">
     <dgm:scene3d>
       <a:camera prst="orthographicFront"/>
-      <a:lightRig rig="threePt" dir="t"/>
+      <a:lightRig rig="flat" dir="t"/>
     </dgm:scene3d>
-    <dgm:sp3d/>
+    <dgm:sp3d z="-190500" extrusionH="12700" prstMaterial="plastic">
+      <a:bevelT w="50800" h="50800"/>
+    </dgm:sp3d>
     <dgm:txPr/>
     <dgm:style>
-      <a:lnRef idx="2">
+      <a:lnRef idx="1">
         <a:scrgbClr r="0" g="0" b="0"/>
       </a:lnRef>
       <a:fillRef idx="1">
         <a:scrgbClr r="0" g="0" b="0"/>
       </a:fillRef>
-      <a:effectRef idx="0">
+      <a:effectRef idx="2">
         <a:scrgbClr r="0" g="0" b="0"/>
       </a:effectRef>
       <a:fontRef idx="minor"/>
@@ -4421,18 +4563,20 @@
   <dgm:styleLbl name="solidFgAcc1">
     <dgm:scene3d>
       <a:camera prst="orthographicFront"/>
-      <a:lightRig rig="threePt" dir="t"/>
+      <a:lightRig rig="flat" dir="t"/>
     </dgm:scene3d>
-    <dgm:sp3d/>
+    <dgm:sp3d z="190500" extrusionH="12700" prstMaterial="plastic">
+      <a:bevelT w="50800" h="50800"/>
+    </dgm:sp3d>
     <dgm:txPr/>
     <dgm:style>
-      <a:lnRef idx="2">
+      <a:lnRef idx="1">
         <a:scrgbClr r="0" g="0" b="0"/>
       </a:lnRef>
       <a:fillRef idx="1">
         <a:scrgbClr r="0" g="0" b="0"/>
       </a:fillRef>
-      <a:effectRef idx="0">
+      <a:effectRef idx="2">
         <a:scrgbClr r="0" g="0" b="0"/>
       </a:effectRef>
       <a:fontRef idx="minor"/>
@@ -4441,18 +4585,20 @@
   <dgm:styleLbl name="solidAlignAcc1">
     <dgm:scene3d>
       <a:camera prst="orthographicFront"/>
-      <a:lightRig rig="threePt" dir="t"/>
+      <a:lightRig rig="flat" dir="t"/>
     </dgm:scene3d>
-    <dgm:sp3d/>
+    <dgm:sp3d extrusionH="12700" prstMaterial="plastic">
+      <a:bevelT w="50800" h="50800"/>
+    </dgm:sp3d>
     <dgm:txPr/>
     <dgm:style>
-      <a:lnRef idx="2">
+      <a:lnRef idx="1">
         <a:scrgbClr r="0" g="0" b="0"/>
       </a:lnRef>
       <a:fillRef idx="1">
         <a:scrgbClr r="0" g="0" b="0"/>
       </a:fillRef>
-      <a:effectRef idx="0">
+      <a:effectRef idx="2">
         <a:scrgbClr r="0" g="0" b="0"/>
       </a:effectRef>
       <a:fontRef idx="minor"/>
@@ -4461,18 +4607,20 @@
   <dgm:styleLbl name="solidBgAcc1">
     <dgm:scene3d>
       <a:camera prst="orthographicFront"/>
-      <a:lightRig rig="threePt" dir="t"/>
+      <a:lightRig rig="flat" dir="t"/>
     </dgm:scene3d>
-    <dgm:sp3d/>
+    <dgm:sp3d z="-190500" extrusionH="12700" prstMaterial="plastic">
+      <a:bevelT w="50800" h="50800"/>
+    </dgm:sp3d>
     <dgm:txPr/>
     <dgm:style>
-      <a:lnRef idx="2">
+      <a:lnRef idx="1">
         <a:scrgbClr r="0" g="0" b="0"/>
       </a:lnRef>
       <a:fillRef idx="1">
         <a:scrgbClr r="0" g="0" b="0"/>
       </a:fillRef>
-      <a:effectRef idx="0">
+      <a:effectRef idx="2">
         <a:scrgbClr r="0" g="0" b="0"/>
       </a:effectRef>
       <a:fontRef idx="minor"/>
@@ -4481,18 +4629,20 @@
   <dgm:styleLbl name="fgAccFollowNode1">
     <dgm:scene3d>
       <a:camera prst="orthographicFront"/>
-      <a:lightRig rig="threePt" dir="t"/>
+      <a:lightRig rig="flat" dir="t"/>
     </dgm:scene3d>
-    <dgm:sp3d/>
+    <dgm:sp3d z="190500" extrusionH="12700" prstMaterial="plastic">
+      <a:bevelT w="50800" h="50800"/>
+    </dgm:sp3d>
     <dgm:txPr/>
     <dgm:style>
-      <a:lnRef idx="2">
+      <a:lnRef idx="1">
         <a:scrgbClr r="0" g="0" b="0"/>
       </a:lnRef>
       <a:fillRef idx="1">
         <a:scrgbClr r="0" g="0" b="0"/>
       </a:fillRef>
-      <a:effectRef idx="0">
+      <a:effectRef idx="2">
         <a:scrgbClr r="0" g="0" b="0"/>
       </a:effectRef>
       <a:fontRef idx="minor"/>
@@ -4501,18 +4651,20 @@
   <dgm:styleLbl name="alignAccFollowNode1">
     <dgm:scene3d>
       <a:camera prst="orthographicFront"/>
-      <a:lightRig rig="threePt" dir="t"/>
+      <a:lightRig rig="flat" dir="t"/>
     </dgm:scene3d>
-    <dgm:sp3d/>
+    <dgm:sp3d extrusionH="12700" prstMaterial="plastic">
+      <a:bevelT w="50800" h="50800"/>
+    </dgm:sp3d>
     <dgm:txPr/>
     <dgm:style>
-      <a:lnRef idx="2">
+      <a:lnRef idx="1">
         <a:scrgbClr r="0" g="0" b="0"/>
       </a:lnRef>
       <a:fillRef idx="1">
         <a:scrgbClr r="0" g="0" b="0"/>
       </a:fillRef>
-      <a:effectRef idx="0">
+      <a:effectRef idx="2">
         <a:scrgbClr r="0" g="0" b="0"/>
       </a:effectRef>
       <a:fontRef idx="minor"/>
@@ -4521,18 +4673,20 @@
   <dgm:styleLbl name="bgAccFollowNode1">
     <dgm:scene3d>
       <a:camera prst="orthographicFront"/>
-      <a:lightRig rig="threePt" dir="t"/>
+      <a:lightRig rig="flat" dir="t"/>
     </dgm:scene3d>
-    <dgm:sp3d/>
+    <dgm:sp3d z="-190500" extrusionH="12700" prstMaterial="plastic">
+      <a:bevelT w="50800" h="50800"/>
+    </dgm:sp3d>
     <dgm:txPr/>
     <dgm:style>
-      <a:lnRef idx="2">
+      <a:lnRef idx="1">
         <a:scrgbClr r="0" g="0" b="0"/>
       </a:lnRef>
       <a:fillRef idx="1">
         <a:scrgbClr r="0" g="0" b="0"/>
       </a:fillRef>
-      <a:effectRef idx="0">
+      <a:effectRef idx="2">
         <a:scrgbClr r="0" g="0" b="0"/>
       </a:effectRef>
       <a:fontRef idx="minor"/>
@@ -4541,18 +4695,20 @@
   <dgm:styleLbl name="fgAcc0">
     <dgm:scene3d>
       <a:camera prst="orthographicFront"/>
-      <a:lightRig rig="threePt" dir="t"/>
+      <a:lightRig rig="flat" dir="t"/>
     </dgm:scene3d>
-    <dgm:sp3d/>
+    <dgm:sp3d z="190500" extrusionH="12700" prstMaterial="plastic">
+      <a:bevelT w="50800" h="50800"/>
+    </dgm:sp3d>
     <dgm:txPr/>
     <dgm:style>
-      <a:lnRef idx="2">
+      <a:lnRef idx="1">
         <a:scrgbClr r="0" g="0" b="0"/>
       </a:lnRef>
       <a:fillRef idx="1">
         <a:scrgbClr r="0" g="0" b="0"/>
       </a:fillRef>
-      <a:effectRef idx="0">
+      <a:effectRef idx="2">
         <a:scrgbClr r="0" g="0" b="0"/>
       </a:effectRef>
       <a:fontRef idx="minor"/>
@@ -4561,18 +4717,20 @@
   <dgm:styleLbl name="fgAcc2">
     <dgm:scene3d>
       <a:camera prst="orthographicFront"/>
-      <a:lightRig rig="threePt" dir="t"/>
+      <a:lightRig rig="flat" dir="t"/>
     </dgm:scene3d>
-    <dgm:sp3d/>
+    <dgm:sp3d z="190500" extrusionH="12700" prstMaterial="plastic">
+      <a:bevelT w="50800" h="50800"/>
+    </dgm:sp3d>
     <dgm:txPr/>
     <dgm:style>
-      <a:lnRef idx="2">
+      <a:lnRef idx="1">
         <a:scrgbClr r="0" g="0" b="0"/>
       </a:lnRef>
       <a:fillRef idx="1">
         <a:scrgbClr r="0" g="0" b="0"/>
       </a:fillRef>
-      <a:effectRef idx="0">
+      <a:effectRef idx="2">
         <a:scrgbClr r="0" g="0" b="0"/>
       </a:effectRef>
       <a:fontRef idx="minor"/>
@@ -4581,18 +4739,20 @@
   <dgm:styleLbl name="fgAcc3">
     <dgm:scene3d>
       <a:camera prst="orthographicFront"/>
-      <a:lightRig rig="threePt" dir="t"/>
+      <a:lightRig rig="flat" dir="t"/>
     </dgm:scene3d>
-    <dgm:sp3d/>
+    <dgm:sp3d z="190500" extrusionH="12700" prstMaterial="plastic">
+      <a:bevelT w="50800" h="50800"/>
+    </dgm:sp3d>
     <dgm:txPr/>
     <dgm:style>
-      <a:lnRef idx="2">
+      <a:lnRef idx="1">
         <a:scrgbClr r="0" g="0" b="0"/>
       </a:lnRef>
       <a:fillRef idx="1">
         <a:scrgbClr r="0" g="0" b="0"/>
       </a:fillRef>
-      <a:effectRef idx="0">
+      <a:effectRef idx="2">
         <a:scrgbClr r="0" g="0" b="0"/>
       </a:effectRef>
       <a:fontRef idx="minor"/>
@@ -4601,18 +4761,20 @@
   <dgm:styleLbl name="fgAcc4">
     <dgm:scene3d>
       <a:camera prst="orthographicFront"/>
-      <a:lightRig rig="threePt" dir="t"/>
+      <a:lightRig rig="flat" dir="t"/>
     </dgm:scene3d>
-    <dgm:sp3d/>
+    <dgm:sp3d z="190500" extrusionH="12700" prstMaterial="plastic">
+      <a:bevelT w="50800" h="50800"/>
+    </dgm:sp3d>
     <dgm:txPr/>
     <dgm:style>
-      <a:lnRef idx="2">
+      <a:lnRef idx="1">
         <a:scrgbClr r="0" g="0" b="0"/>
       </a:lnRef>
       <a:fillRef idx="1">
         <a:scrgbClr r="0" g="0" b="0"/>
       </a:fillRef>
-      <a:effectRef idx="0">
+      <a:effectRef idx="2">
         <a:scrgbClr r="0" g="0" b="0"/>
       </a:effectRef>
       <a:fontRef idx="minor"/>
@@ -4621,15 +4783,17 @@
   <dgm:styleLbl name="bgShp">
     <dgm:scene3d>
       <a:camera prst="orthographicFront"/>
-      <a:lightRig rig="threePt" dir="t"/>
+      <a:lightRig rig="flat" dir="t"/>
     </dgm:scene3d>
-    <dgm:sp3d/>
+    <dgm:sp3d z="-190500" extrusionH="12700" prstMaterial="plastic">
+      <a:bevelT w="50800" h="50800"/>
+    </dgm:sp3d>
     <dgm:txPr/>
     <dgm:style>
       <a:lnRef idx="0">
         <a:scrgbClr r="0" g="0" b="0"/>
       </a:lnRef>
-      <a:fillRef idx="1">
+      <a:fillRef idx="3">
         <a:scrgbClr r="0" g="0" b="0"/>
       </a:fillRef>
       <a:effectRef idx="0">
@@ -4641,15 +4805,17 @@
   <dgm:styleLbl name="dkBgShp">
     <dgm:scene3d>
       <a:camera prst="orthographicFront"/>
-      <a:lightRig rig="threePt" dir="t"/>
+      <a:lightRig rig="flat" dir="t"/>
     </dgm:scene3d>
-    <dgm:sp3d/>
+    <dgm:sp3d z="-190500" extrusionH="12700" prstMaterial="plastic">
+      <a:bevelT w="50800" h="50800"/>
+    </dgm:sp3d>
     <dgm:txPr/>
     <dgm:style>
       <a:lnRef idx="0">
         <a:scrgbClr r="0" g="0" b="0"/>
       </a:lnRef>
-      <a:fillRef idx="1">
+      <a:fillRef idx="2">
         <a:scrgbClr r="0" g="0" b="0"/>
       </a:fillRef>
       <a:effectRef idx="0">
@@ -4661,9 +4827,9 @@
   <dgm:styleLbl name="trBgShp">
     <dgm:scene3d>
       <a:camera prst="orthographicFront"/>
-      <a:lightRig rig="threePt" dir="t"/>
+      <a:lightRig rig="flat" dir="t"/>
     </dgm:scene3d>
-    <dgm:sp3d/>
+    <dgm:sp3d z="-190500" extrusionH="12700" prstMaterial="matte"/>
     <dgm:txPr/>
     <dgm:style>
       <a:lnRef idx="0">
@@ -4681,21 +4847,26 @@
   <dgm:styleLbl name="fgShp">
     <dgm:scene3d>
       <a:camera prst="orthographicFront"/>
-      <a:lightRig rig="threePt" dir="t"/>
+      <a:lightRig rig="flat" dir="t"/>
     </dgm:scene3d>
-    <dgm:sp3d/>
+    <dgm:sp3d z="190500" prstMaterial="plastic">
+      <a:bevelT w="120900" h="88900"/>
+      <a:bevelB w="88900" h="31750" prst="angle"/>
+    </dgm:sp3d>
     <dgm:txPr/>
     <dgm:style>
-      <a:lnRef idx="2">
+      <a:lnRef idx="0">
         <a:scrgbClr r="0" g="0" b="0"/>
       </a:lnRef>
       <a:fillRef idx="1">
         <a:scrgbClr r="0" g="0" b="0"/>
       </a:fillRef>
-      <a:effectRef idx="0">
+      <a:effectRef idx="3">
         <a:scrgbClr r="0" g="0" b="0"/>
       </a:effectRef>
-      <a:fontRef idx="minor"/>
+      <a:fontRef idx="minor">
+        <a:schemeClr val="lt1"/>
+      </a:fontRef>
     </dgm:style>
   </dgm:styleLbl>
   <dgm:styleLbl name="revTx">
@@ -7696,20 +7867,12 @@
           <a:p>
             <a:pPr algn="ctr"/>
             <a:r>
-              <a:rPr lang="en-IE" sz="3200" b="1" i="1" dirty="0" err="1">
-                <a:solidFill>
-                  <a:schemeClr val="bg1"/>
-                </a:solidFill>
-              </a:rPr>
-              <a:t>TaskTide</a:t>
-            </a:r>
-            <a:r>
               <a:rPr lang="en-IE" sz="3200" b="1" i="1" dirty="0">
                 <a:solidFill>
                   <a:schemeClr val="bg1"/>
                 </a:solidFill>
               </a:rPr>
-              <a:t> DB Coordinated Clients</a:t>
+              <a:t>TaskTide DB Coordinated Clients</a:t>
             </a:r>
           </a:p>
           <a:p>
@@ -7984,6 +8147,764 @@
           <a:chExt cx="0" cy="0"/>
         </a:xfrm>
       </p:grpSpPr>
+      <p:pic>
+        <p:nvPicPr>
+          <p:cNvPr id="5" name="Picture 4" descr="A logo of a white tooth with a red ball and bow and arrow&#10;&#10;AI-generated content may be incorrect.">
+            <a:extLst>
+              <a:ext uri="{FF2B5EF4-FFF2-40B4-BE49-F238E27FC236}">
+                <a16:creationId xmlns:a16="http://schemas.microsoft.com/office/drawing/2014/main" id="{73E130C7-F43E-218E-CFA0-2E472A9883D9}"/>
+              </a:ext>
+            </a:extLst>
+          </p:cNvPr>
+          <p:cNvPicPr>
+            <a:picLocks noChangeAspect="1"/>
+          </p:cNvPicPr>
+          <p:nvPr/>
+        </p:nvPicPr>
+        <p:blipFill>
+          <a:blip r:embed="rId2">
+            <a:extLst>
+              <a:ext uri="{28A0092B-C50C-407E-A947-70E740481C1C}">
+                <a14:useLocalDpi xmlns:a14="http://schemas.microsoft.com/office/drawing/2010/main" val="0"/>
+              </a:ext>
+            </a:extLst>
+          </a:blip>
+          <a:stretch>
+            <a:fillRect/>
+          </a:stretch>
+        </p:blipFill>
+        <p:spPr>
+          <a:xfrm>
+            <a:off x="13210843" y="5771452"/>
+            <a:ext cx="3585819" cy="2254948"/>
+          </a:xfrm>
+          <a:prstGeom prst="rect">
+            <a:avLst/>
+          </a:prstGeom>
+        </p:spPr>
+      </p:pic>
+      <p:pic>
+        <p:nvPicPr>
+          <p:cNvPr id="6" name="Picture 5" descr="A close-up of a logo&#10;&#10;AI-generated content may be incorrect.">
+            <a:extLst>
+              <a:ext uri="{FF2B5EF4-FFF2-40B4-BE49-F238E27FC236}">
+                <a16:creationId xmlns:a16="http://schemas.microsoft.com/office/drawing/2014/main" id="{3B2EDDBA-81FB-2174-1909-4135281C0833}"/>
+              </a:ext>
+            </a:extLst>
+          </p:cNvPr>
+          <p:cNvPicPr>
+            <a:picLocks noChangeAspect="1"/>
+          </p:cNvPicPr>
+          <p:nvPr/>
+        </p:nvPicPr>
+        <p:blipFill>
+          <a:blip r:embed="rId3">
+            <a:extLst>
+              <a:ext uri="{28A0092B-C50C-407E-A947-70E740481C1C}">
+                <a14:useLocalDpi xmlns:a14="http://schemas.microsoft.com/office/drawing/2010/main" val="0"/>
+              </a:ext>
+            </a:extLst>
+          </a:blip>
+          <a:stretch>
+            <a:fillRect/>
+          </a:stretch>
+        </p:blipFill>
+        <p:spPr>
+          <a:xfrm>
+            <a:off x="3007139" y="6145315"/>
+            <a:ext cx="3585454" cy="1982685"/>
+          </a:xfrm>
+          <a:prstGeom prst="rect">
+            <a:avLst/>
+          </a:prstGeom>
+        </p:spPr>
+      </p:pic>
+      <p:pic>
+        <p:nvPicPr>
+          <p:cNvPr id="1026" name="Picture 2">
+            <a:extLst>
+              <a:ext uri="{FF2B5EF4-FFF2-40B4-BE49-F238E27FC236}">
+                <a16:creationId xmlns:a16="http://schemas.microsoft.com/office/drawing/2014/main" id="{CCDAD23B-55A5-E907-1F02-B4E40AB999A3}"/>
+              </a:ext>
+            </a:extLst>
+          </p:cNvPr>
+          <p:cNvPicPr>
+            <a:picLocks noChangeAspect="1" noChangeArrowheads="1"/>
+          </p:cNvPicPr>
+          <p:nvPr/>
+        </p:nvPicPr>
+        <p:blipFill>
+          <a:blip r:embed="rId4">
+            <a:extLst>
+              <a:ext uri="{28A0092B-C50C-407E-A947-70E740481C1C}">
+                <a14:useLocalDpi xmlns:a14="http://schemas.microsoft.com/office/drawing/2010/main" val="0"/>
+              </a:ext>
+            </a:extLst>
+          </a:blip>
+          <a:srcRect/>
+          <a:stretch>
+            <a:fillRect/>
+          </a:stretch>
+        </p:blipFill>
+        <p:spPr bwMode="auto">
+          <a:xfrm>
+            <a:off x="7844101" y="2325720"/>
+            <a:ext cx="4115234" cy="2139922"/>
+          </a:xfrm>
+          <a:prstGeom prst="rect">
+            <a:avLst/>
+          </a:prstGeom>
+          <a:noFill/>
+          <a:extLst>
+            <a:ext uri="{909E8E84-426E-40DD-AFC4-6F175D3DCCD1}">
+              <a14:hiddenFill xmlns:a14="http://schemas.microsoft.com/office/drawing/2010/main">
+                <a:solidFill>
+                  <a:srgbClr val="FFFFFF"/>
+                </a:solidFill>
+              </a14:hiddenFill>
+            </a:ext>
+          </a:extLst>
+        </p:spPr>
+      </p:pic>
+      <p:pic>
+        <p:nvPicPr>
+          <p:cNvPr id="1028" name="Picture 4">
+            <a:extLst>
+              <a:ext uri="{FF2B5EF4-FFF2-40B4-BE49-F238E27FC236}">
+                <a16:creationId xmlns:a16="http://schemas.microsoft.com/office/drawing/2014/main" id="{F536A531-ACB6-9D4D-412A-8B43D77767FF}"/>
+              </a:ext>
+            </a:extLst>
+          </p:cNvPr>
+          <p:cNvPicPr>
+            <a:picLocks noChangeAspect="1" noChangeArrowheads="1"/>
+          </p:cNvPicPr>
+          <p:nvPr/>
+        </p:nvPicPr>
+        <p:blipFill>
+          <a:blip r:embed="rId5">
+            <a:extLst>
+              <a:ext uri="{28A0092B-C50C-407E-A947-70E740481C1C}">
+                <a14:useLocalDpi xmlns:a14="http://schemas.microsoft.com/office/drawing/2010/main" val="0"/>
+              </a:ext>
+            </a:extLst>
+          </a:blip>
+          <a:srcRect/>
+          <a:stretch>
+            <a:fillRect/>
+          </a:stretch>
+        </p:blipFill>
+        <p:spPr bwMode="auto">
+          <a:xfrm>
+            <a:off x="8331200" y="542940"/>
+            <a:ext cx="2435749" cy="1567352"/>
+          </a:xfrm>
+          <a:prstGeom prst="rect">
+            <a:avLst/>
+          </a:prstGeom>
+          <a:noFill/>
+          <a:extLst>
+            <a:ext uri="{909E8E84-426E-40DD-AFC4-6F175D3DCCD1}">
+              <a14:hiddenFill xmlns:a14="http://schemas.microsoft.com/office/drawing/2010/main">
+                <a:solidFill>
+                  <a:srgbClr val="FFFFFF"/>
+                </a:solidFill>
+              </a14:hiddenFill>
+            </a:ext>
+          </a:extLst>
+        </p:spPr>
+      </p:pic>
+      <p:pic>
+        <p:nvPicPr>
+          <p:cNvPr id="1034" name="Picture 10" descr="Slurm Workload Manager - Wikipedia">
+            <a:extLst>
+              <a:ext uri="{FF2B5EF4-FFF2-40B4-BE49-F238E27FC236}">
+                <a16:creationId xmlns:a16="http://schemas.microsoft.com/office/drawing/2014/main" id="{B310FE77-77EC-EC3C-705C-C79EAD29B838}"/>
+              </a:ext>
+            </a:extLst>
+          </p:cNvPr>
+          <p:cNvPicPr>
+            <a:picLocks noChangeAspect="1" noChangeArrowheads="1"/>
+          </p:cNvPicPr>
+          <p:nvPr/>
+        </p:nvPicPr>
+        <p:blipFill>
+          <a:blip r:embed="rId6">
+            <a:extLst>
+              <a:ext uri="{28A0092B-C50C-407E-A947-70E740481C1C}">
+                <a14:useLocalDpi xmlns:a14="http://schemas.microsoft.com/office/drawing/2010/main" val="0"/>
+              </a:ext>
+            </a:extLst>
+          </a:blip>
+          <a:srcRect/>
+          <a:stretch>
+            <a:fillRect/>
+          </a:stretch>
+        </p:blipFill>
+        <p:spPr bwMode="auto">
+          <a:xfrm>
+            <a:off x="2734852" y="11067701"/>
+            <a:ext cx="3908804" cy="3579813"/>
+          </a:xfrm>
+          <a:prstGeom prst="rect">
+            <a:avLst/>
+          </a:prstGeom>
+          <a:noFill/>
+          <a:extLst>
+            <a:ext uri="{909E8E84-426E-40DD-AFC4-6F175D3DCCD1}">
+              <a14:hiddenFill xmlns:a14="http://schemas.microsoft.com/office/drawing/2010/main">
+                <a:solidFill>
+                  <a:srgbClr val="FFFFFF"/>
+                </a:solidFill>
+              </a14:hiddenFill>
+            </a:ext>
+          </a:extLst>
+        </p:spPr>
+      </p:pic>
+      <p:pic>
+        <p:nvPicPr>
+          <p:cNvPr id="1036" name="Picture 12" descr="Hadoop Consulting and Support Services 🐘">
+            <a:extLst>
+              <a:ext uri="{FF2B5EF4-FFF2-40B4-BE49-F238E27FC236}">
+                <a16:creationId xmlns:a16="http://schemas.microsoft.com/office/drawing/2014/main" id="{CF53062D-BC41-1A84-6CCE-94958EE1D6EE}"/>
+              </a:ext>
+            </a:extLst>
+          </p:cNvPr>
+          <p:cNvPicPr>
+            <a:picLocks noChangeAspect="1" noChangeArrowheads="1"/>
+          </p:cNvPicPr>
+          <p:nvPr/>
+        </p:nvPicPr>
+        <p:blipFill>
+          <a:blip r:embed="rId7">
+            <a:extLst>
+              <a:ext uri="{28A0092B-C50C-407E-A947-70E740481C1C}">
+                <a14:useLocalDpi xmlns:a14="http://schemas.microsoft.com/office/drawing/2010/main" val="0"/>
+              </a:ext>
+            </a:extLst>
+          </a:blip>
+          <a:srcRect/>
+          <a:stretch>
+            <a:fillRect/>
+          </a:stretch>
+        </p:blipFill>
+        <p:spPr bwMode="auto">
+          <a:xfrm>
+            <a:off x="7966021" y="12792478"/>
+            <a:ext cx="4872885" cy="2789194"/>
+          </a:xfrm>
+          <a:prstGeom prst="rect">
+            <a:avLst/>
+          </a:prstGeom>
+          <a:noFill/>
+          <a:extLst>
+            <a:ext uri="{909E8E84-426E-40DD-AFC4-6F175D3DCCD1}">
+              <a14:hiddenFill xmlns:a14="http://schemas.microsoft.com/office/drawing/2010/main">
+                <a:solidFill>
+                  <a:srgbClr val="FFFFFF"/>
+                </a:solidFill>
+              </a14:hiddenFill>
+            </a:ext>
+          </a:extLst>
+        </p:spPr>
+      </p:pic>
+      <p:pic>
+        <p:nvPicPr>
+          <p:cNvPr id="1038" name="Picture 14" descr="Kubernetes Logo and Wordmark Sticker ...">
+            <a:extLst>
+              <a:ext uri="{FF2B5EF4-FFF2-40B4-BE49-F238E27FC236}">
+                <a16:creationId xmlns:a16="http://schemas.microsoft.com/office/drawing/2014/main" id="{15AB4257-9B6F-5A87-7CEA-CC7E2C01453E}"/>
+              </a:ext>
+            </a:extLst>
+          </p:cNvPr>
+          <p:cNvPicPr>
+            <a:picLocks noChangeAspect="1" noChangeArrowheads="1"/>
+          </p:cNvPicPr>
+          <p:nvPr/>
+        </p:nvPicPr>
+        <p:blipFill>
+          <a:blip r:embed="rId8">
+            <a:extLst>
+              <a:ext uri="{28A0092B-C50C-407E-A947-70E740481C1C}">
+                <a14:useLocalDpi xmlns:a14="http://schemas.microsoft.com/office/drawing/2010/main" val="0"/>
+              </a:ext>
+            </a:extLst>
+          </a:blip>
+          <a:srcRect/>
+          <a:stretch>
+            <a:fillRect/>
+          </a:stretch>
+        </p:blipFill>
+        <p:spPr bwMode="auto">
+          <a:xfrm>
+            <a:off x="13871688" y="11093020"/>
+            <a:ext cx="3371614" cy="3371614"/>
+          </a:xfrm>
+          <a:prstGeom prst="rect">
+            <a:avLst/>
+          </a:prstGeom>
+          <a:noFill/>
+          <a:extLst>
+            <a:ext uri="{909E8E84-426E-40DD-AFC4-6F175D3DCCD1}">
+              <a14:hiddenFill xmlns:a14="http://schemas.microsoft.com/office/drawing/2010/main">
+                <a:solidFill>
+                  <a:srgbClr val="FFFFFF"/>
+                </a:solidFill>
+              </a14:hiddenFill>
+            </a:ext>
+          </a:extLst>
+        </p:spPr>
+      </p:pic>
+      <p:pic>
+        <p:nvPicPr>
+          <p:cNvPr id="1042" name="Picture 18" descr="Python Logo PNG Vector (SVG) Free Download">
+            <a:extLst>
+              <a:ext uri="{FF2B5EF4-FFF2-40B4-BE49-F238E27FC236}">
+                <a16:creationId xmlns:a16="http://schemas.microsoft.com/office/drawing/2014/main" id="{62B89B67-4639-4806-8F38-BF34A527733A}"/>
+              </a:ext>
+            </a:extLst>
+          </p:cNvPr>
+          <p:cNvPicPr>
+            <a:picLocks noChangeAspect="1" noChangeArrowheads="1"/>
+          </p:cNvPicPr>
+          <p:nvPr/>
+        </p:nvPicPr>
+        <p:blipFill>
+          <a:blip r:embed="rId9">
+            <a:extLst>
+              <a:ext uri="{28A0092B-C50C-407E-A947-70E740481C1C}">
+                <a14:useLocalDpi xmlns:a14="http://schemas.microsoft.com/office/drawing/2010/main" val="0"/>
+              </a:ext>
+            </a:extLst>
+          </a:blip>
+          <a:srcRect/>
+          <a:stretch>
+            <a:fillRect/>
+          </a:stretch>
+        </p:blipFill>
+        <p:spPr bwMode="auto">
+          <a:xfrm>
+            <a:off x="3109214" y="825415"/>
+            <a:ext cx="3227499" cy="3227499"/>
+          </a:xfrm>
+          <a:prstGeom prst="rect">
+            <a:avLst/>
+          </a:prstGeom>
+          <a:noFill/>
+          <a:extLst>
+            <a:ext uri="{909E8E84-426E-40DD-AFC4-6F175D3DCCD1}">
+              <a14:hiddenFill xmlns:a14="http://schemas.microsoft.com/office/drawing/2010/main">
+                <a:solidFill>
+                  <a:srgbClr val="FFFFFF"/>
+                </a:solidFill>
+              </a14:hiddenFill>
+            </a:ext>
+          </a:extLst>
+        </p:spPr>
+      </p:pic>
+      <p:sp>
+        <p:nvSpPr>
+          <p:cNvPr id="10" name="Rectangle: Rounded Corners 9">
+            <a:extLst>
+              <a:ext uri="{FF2B5EF4-FFF2-40B4-BE49-F238E27FC236}">
+                <a16:creationId xmlns:a16="http://schemas.microsoft.com/office/drawing/2014/main" id="{5A815DD6-CF85-CA76-C8C9-BE2CB88C0BC0}"/>
+              </a:ext>
+            </a:extLst>
+          </p:cNvPr>
+          <p:cNvSpPr/>
+          <p:nvPr/>
+        </p:nvSpPr>
+        <p:spPr>
+          <a:xfrm>
+            <a:off x="2052320" y="243840"/>
+            <a:ext cx="15544800" cy="4470400"/>
+          </a:xfrm>
+          <a:prstGeom prst="roundRect">
+            <a:avLst/>
+          </a:prstGeom>
+          <a:noFill/>
+          <a:ln w="76200">
+            <a:solidFill>
+              <a:srgbClr val="2A2A72"/>
+            </a:solidFill>
+          </a:ln>
+          <a:effectLst>
+            <a:outerShdw blurRad="50800" dist="38100" dir="2700000" algn="tl" rotWithShape="0">
+              <a:prstClr val="black">
+                <a:alpha val="40000"/>
+              </a:prstClr>
+            </a:outerShdw>
+          </a:effectLst>
+        </p:spPr>
+        <p:style>
+          <a:lnRef idx="2">
+            <a:schemeClr val="accent1">
+              <a:shade val="15000"/>
+            </a:schemeClr>
+          </a:lnRef>
+          <a:fillRef idx="1">
+            <a:schemeClr val="accent1"/>
+          </a:fillRef>
+          <a:effectRef idx="0">
+            <a:schemeClr val="accent1"/>
+          </a:effectRef>
+          <a:fontRef idx="minor">
+            <a:schemeClr val="lt1"/>
+          </a:fontRef>
+        </p:style>
+        <p:txBody>
+          <a:bodyPr rtlCol="0" anchor="ctr"/>
+          <a:lstStyle/>
+          <a:p>
+            <a:pPr algn="ctr"/>
+            <a:endParaRPr lang="en-IE"/>
+          </a:p>
+        </p:txBody>
+      </p:sp>
+      <p:sp>
+        <p:nvSpPr>
+          <p:cNvPr id="11" name="Rectangle: Rounded Corners 10">
+            <a:extLst>
+              <a:ext uri="{FF2B5EF4-FFF2-40B4-BE49-F238E27FC236}">
+                <a16:creationId xmlns:a16="http://schemas.microsoft.com/office/drawing/2014/main" id="{93361AE9-7B9B-9BA8-B967-A09704AB0BCC}"/>
+              </a:ext>
+            </a:extLst>
+          </p:cNvPr>
+          <p:cNvSpPr/>
+          <p:nvPr/>
+        </p:nvSpPr>
+        <p:spPr>
+          <a:xfrm>
+            <a:off x="2082800" y="5207856"/>
+            <a:ext cx="15544800" cy="4909804"/>
+          </a:xfrm>
+          <a:prstGeom prst="roundRect">
+            <a:avLst/>
+          </a:prstGeom>
+          <a:noFill/>
+          <a:ln w="76200">
+            <a:solidFill>
+              <a:srgbClr val="800020"/>
+            </a:solidFill>
+          </a:ln>
+          <a:effectLst>
+            <a:outerShdw blurRad="50800" dist="38100" dir="2700000" algn="tl" rotWithShape="0">
+              <a:prstClr val="black">
+                <a:alpha val="40000"/>
+              </a:prstClr>
+            </a:outerShdw>
+          </a:effectLst>
+        </p:spPr>
+        <p:style>
+          <a:lnRef idx="2">
+            <a:schemeClr val="accent1">
+              <a:shade val="15000"/>
+            </a:schemeClr>
+          </a:lnRef>
+          <a:fillRef idx="1">
+            <a:schemeClr val="accent1"/>
+          </a:fillRef>
+          <a:effectRef idx="0">
+            <a:schemeClr val="accent1"/>
+          </a:effectRef>
+          <a:fontRef idx="minor">
+            <a:schemeClr val="lt1"/>
+          </a:fontRef>
+        </p:style>
+        <p:txBody>
+          <a:bodyPr rtlCol="0" anchor="ctr"/>
+          <a:lstStyle/>
+          <a:p>
+            <a:pPr algn="ctr"/>
+            <a:endParaRPr lang="en-IE"/>
+          </a:p>
+        </p:txBody>
+      </p:sp>
+      <p:sp>
+        <p:nvSpPr>
+          <p:cNvPr id="12" name="Rectangle: Rounded Corners 11">
+            <a:extLst>
+              <a:ext uri="{FF2B5EF4-FFF2-40B4-BE49-F238E27FC236}">
+                <a16:creationId xmlns:a16="http://schemas.microsoft.com/office/drawing/2014/main" id="{1E4D2371-C54A-9C5B-B216-E076192FB328}"/>
+              </a:ext>
+            </a:extLst>
+          </p:cNvPr>
+          <p:cNvSpPr/>
+          <p:nvPr/>
+        </p:nvSpPr>
+        <p:spPr>
+          <a:xfrm>
+            <a:off x="2113280" y="10586720"/>
+            <a:ext cx="15544800" cy="5332300"/>
+          </a:xfrm>
+          <a:prstGeom prst="roundRect">
+            <a:avLst/>
+          </a:prstGeom>
+          <a:noFill/>
+          <a:ln w="76200">
+            <a:solidFill>
+              <a:srgbClr val="3B3B98"/>
+            </a:solidFill>
+          </a:ln>
+          <a:effectLst>
+            <a:outerShdw blurRad="50800" dist="38100" dir="2700000" algn="tl" rotWithShape="0">
+              <a:prstClr val="black">
+                <a:alpha val="40000"/>
+              </a:prstClr>
+            </a:outerShdw>
+          </a:effectLst>
+        </p:spPr>
+        <p:style>
+          <a:lnRef idx="2">
+            <a:schemeClr val="accent1">
+              <a:shade val="15000"/>
+            </a:schemeClr>
+          </a:lnRef>
+          <a:fillRef idx="1">
+            <a:schemeClr val="accent1"/>
+          </a:fillRef>
+          <a:effectRef idx="0">
+            <a:schemeClr val="accent1"/>
+          </a:effectRef>
+          <a:fontRef idx="minor">
+            <a:schemeClr val="lt1"/>
+          </a:fontRef>
+        </p:style>
+        <p:txBody>
+          <a:bodyPr rtlCol="0" anchor="ctr"/>
+          <a:lstStyle/>
+          <a:p>
+            <a:pPr algn="ctr"/>
+            <a:endParaRPr lang="en-IE"/>
+          </a:p>
+        </p:txBody>
+      </p:sp>
+      <p:pic>
+        <p:nvPicPr>
+          <p:cNvPr id="1046" name="Picture 22" descr="R Meets Hardware | R-bloggers">
+            <a:extLst>
+              <a:ext uri="{FF2B5EF4-FFF2-40B4-BE49-F238E27FC236}">
+                <a16:creationId xmlns:a16="http://schemas.microsoft.com/office/drawing/2014/main" id="{A71FA59A-7421-FA14-8B69-A08ECC946178}"/>
+              </a:ext>
+            </a:extLst>
+          </p:cNvPr>
+          <p:cNvPicPr>
+            <a:picLocks noChangeAspect="1" noChangeArrowheads="1"/>
+          </p:cNvPicPr>
+          <p:nvPr/>
+        </p:nvPicPr>
+        <p:blipFill>
+          <a:blip r:embed="rId10">
+            <a:extLst>
+              <a:ext uri="{28A0092B-C50C-407E-A947-70E740481C1C}">
+                <a14:useLocalDpi xmlns:a14="http://schemas.microsoft.com/office/drawing/2010/main" val="0"/>
+              </a:ext>
+            </a:extLst>
+          </a:blip>
+          <a:srcRect/>
+          <a:stretch>
+            <a:fillRect/>
+          </a:stretch>
+        </p:blipFill>
+        <p:spPr bwMode="auto">
+          <a:xfrm>
+            <a:off x="13318408" y="679142"/>
+            <a:ext cx="3478254" cy="3478254"/>
+          </a:xfrm>
+          <a:prstGeom prst="rect">
+            <a:avLst/>
+          </a:prstGeom>
+          <a:noFill/>
+          <a:extLst>
+            <a:ext uri="{909E8E84-426E-40DD-AFC4-6F175D3DCCD1}">
+              <a14:hiddenFill xmlns:a14="http://schemas.microsoft.com/office/drawing/2010/main">
+                <a:solidFill>
+                  <a:srgbClr val="FFFFFF"/>
+                </a:solidFill>
+              </a14:hiddenFill>
+            </a:ext>
+          </a:extLst>
+        </p:spPr>
+      </p:pic>
+      <p:sp>
+        <p:nvSpPr>
+          <p:cNvPr id="13" name="TextBox 12">
+            <a:extLst>
+              <a:ext uri="{FF2B5EF4-FFF2-40B4-BE49-F238E27FC236}">
+                <a16:creationId xmlns:a16="http://schemas.microsoft.com/office/drawing/2014/main" id="{982E426D-90DF-9E70-8E8B-8220C5D9CE9B}"/>
+              </a:ext>
+            </a:extLst>
+          </p:cNvPr>
+          <p:cNvSpPr txBox="1"/>
+          <p:nvPr/>
+        </p:nvSpPr>
+        <p:spPr>
+          <a:xfrm rot="16200000">
+            <a:off x="-732238" y="1689187"/>
+            <a:ext cx="4035097" cy="1077218"/>
+          </a:xfrm>
+          <a:prstGeom prst="rect">
+            <a:avLst/>
+          </a:prstGeom>
+          <a:noFill/>
+        </p:spPr>
+        <p:txBody>
+          <a:bodyPr wrap="square" rtlCol="0">
+            <a:spAutoFit/>
+          </a:bodyPr>
+          <a:lstStyle/>
+          <a:p>
+            <a:pPr algn="ctr"/>
+            <a:r>
+              <a:rPr lang="en-IE" sz="3200" b="1" i="1" dirty="0">
+                <a:solidFill>
+                  <a:srgbClr val="2A2A72"/>
+                </a:solidFill>
+              </a:rPr>
+              <a:t>Data Application Layer</a:t>
+            </a:r>
+          </a:p>
+        </p:txBody>
+      </p:sp>
+      <p:sp>
+        <p:nvSpPr>
+          <p:cNvPr id="14" name="TextBox 13">
+            <a:extLst>
+              <a:ext uri="{FF2B5EF4-FFF2-40B4-BE49-F238E27FC236}">
+                <a16:creationId xmlns:a16="http://schemas.microsoft.com/office/drawing/2014/main" id="{7A1024C1-7776-2129-C309-C8FF5AE68EEE}"/>
+              </a:ext>
+            </a:extLst>
+          </p:cNvPr>
+          <p:cNvSpPr txBox="1"/>
+          <p:nvPr/>
+        </p:nvSpPr>
+        <p:spPr>
+          <a:xfrm rot="16200000">
+            <a:off x="-722078" y="6962227"/>
+            <a:ext cx="4035097" cy="1077218"/>
+          </a:xfrm>
+          <a:prstGeom prst="rect">
+            <a:avLst/>
+          </a:prstGeom>
+          <a:noFill/>
+        </p:spPr>
+        <p:txBody>
+          <a:bodyPr wrap="square" rtlCol="0">
+            <a:spAutoFit/>
+          </a:bodyPr>
+          <a:lstStyle/>
+          <a:p>
+            <a:pPr algn="ctr"/>
+            <a:r>
+              <a:rPr lang="en-IE" sz="3200" b="1" i="1" dirty="0">
+                <a:solidFill>
+                  <a:srgbClr val="800020"/>
+                </a:solidFill>
+              </a:rPr>
+              <a:t>Orchestration    Layer</a:t>
+            </a:r>
+          </a:p>
+        </p:txBody>
+      </p:sp>
+      <p:sp>
+        <p:nvSpPr>
+          <p:cNvPr id="15" name="TextBox 14">
+            <a:extLst>
+              <a:ext uri="{FF2B5EF4-FFF2-40B4-BE49-F238E27FC236}">
+                <a16:creationId xmlns:a16="http://schemas.microsoft.com/office/drawing/2014/main" id="{8B442966-5C09-8D5B-777A-DC9B15E129F1}"/>
+              </a:ext>
+            </a:extLst>
+          </p:cNvPr>
+          <p:cNvSpPr txBox="1"/>
+          <p:nvPr/>
+        </p:nvSpPr>
+        <p:spPr>
+          <a:xfrm rot="16200000">
+            <a:off x="-610318" y="12621347"/>
+            <a:ext cx="4035097" cy="1077218"/>
+          </a:xfrm>
+          <a:prstGeom prst="rect">
+            <a:avLst/>
+          </a:prstGeom>
+          <a:noFill/>
+        </p:spPr>
+        <p:txBody>
+          <a:bodyPr wrap="square" rtlCol="0">
+            <a:spAutoFit/>
+          </a:bodyPr>
+          <a:lstStyle/>
+          <a:p>
+            <a:pPr algn="ctr"/>
+            <a:r>
+              <a:rPr lang="en-IE" sz="3200" b="1" i="1" dirty="0">
+                <a:solidFill>
+                  <a:srgbClr val="3B3B98"/>
+                </a:solidFill>
+              </a:rPr>
+              <a:t>Infrastructure    Layer</a:t>
+            </a:r>
+          </a:p>
+        </p:txBody>
+      </p:sp>
+      <p:pic>
+        <p:nvPicPr>
+          <p:cNvPr id="17" name="Picture 16">
+            <a:extLst>
+              <a:ext uri="{FF2B5EF4-FFF2-40B4-BE49-F238E27FC236}">
+                <a16:creationId xmlns:a16="http://schemas.microsoft.com/office/drawing/2014/main" id="{30CB8691-6939-E709-3301-C6197E8637E5}"/>
+              </a:ext>
+            </a:extLst>
+          </p:cNvPr>
+          <p:cNvPicPr>
+            <a:picLocks noChangeAspect="1"/>
+          </p:cNvPicPr>
+          <p:nvPr/>
+        </p:nvPicPr>
+        <p:blipFill>
+          <a:blip r:embed="rId11"/>
+          <a:stretch>
+            <a:fillRect/>
+          </a:stretch>
+        </p:blipFill>
+        <p:spPr>
+          <a:xfrm>
+            <a:off x="7463180" y="5501394"/>
+            <a:ext cx="4877076" cy="4359810"/>
+          </a:xfrm>
+          <a:prstGeom prst="rect">
+            <a:avLst/>
+          </a:prstGeom>
+        </p:spPr>
+      </p:pic>
+    </p:spTree>
+    <p:extLst>
+      <p:ext uri="{BB962C8B-B14F-4D97-AF65-F5344CB8AC3E}">
+        <p14:creationId xmlns:p14="http://schemas.microsoft.com/office/powerpoint/2010/main" val="2635011521"/>
+      </p:ext>
+    </p:extLst>
+  </p:cSld>
+  <p:clrMapOvr>
+    <a:masterClrMapping/>
+  </p:clrMapOvr>
+</p:sld>
+</file>
+
+<file path=ppt/slides/slide3.xml><?xml version="1.0" encoding="utf-8"?>
+<p:sld xmlns:a="http://schemas.openxmlformats.org/drawingml/2006/main" xmlns:r="http://schemas.openxmlformats.org/officeDocument/2006/relationships" xmlns:p="http://schemas.openxmlformats.org/presentationml/2006/main">
+  <p:cSld>
+    <p:spTree>
+      <p:nvGrpSpPr>
+        <p:cNvPr id="1" name=""/>
+        <p:cNvGrpSpPr/>
+        <p:nvPr/>
+      </p:nvGrpSpPr>
+      <p:grpSpPr>
+        <a:xfrm>
+          <a:off x="0" y="0"/>
+          <a:ext cx="0" cy="0"/>
+          <a:chOff x="0" y="0"/>
+          <a:chExt cx="0" cy="0"/>
+        </a:xfrm>
+      </p:grpSpPr>
       <p:sp>
         <p:nvSpPr>
           <p:cNvPr id="4" name="Title 1">
@@ -8015,15 +8936,7 @@
             <a:pPr algn="ctr"/>
             <a:r>
               <a:rPr lang="en-IE" b="1" dirty="0"/>
-              <a:t>Mapping of </a:t>
-            </a:r>
-            <a:r>
-              <a:rPr lang="en-IE" b="1" dirty="0" err="1"/>
-              <a:t>TaskTide</a:t>
-            </a:r>
-            <a:r>
-              <a:rPr lang="en-IE" b="1" dirty="0"/>
-              <a:t> Components to Pilot Job Model</a:t>
+              <a:t>Mapping of TaskTide Components to Pilot Job Model</a:t>
             </a:r>
           </a:p>
         </p:txBody>
@@ -8335,12 +9248,8 @@
           <a:p>
             <a:pPr algn="ctr"/>
             <a:r>
-              <a:rPr lang="en-IE" sz="4000" b="1" i="1" dirty="0" err="1"/>
-              <a:t>TaskTide</a:t>
-            </a:r>
-            <a:r>
               <a:rPr lang="en-IE" sz="4000" b="1" i="1" dirty="0"/>
-              <a:t> Manager</a:t>
+              <a:t>TaskTide Manager</a:t>
             </a:r>
           </a:p>
           <a:p>
@@ -8353,12 +9262,8 @@
           <a:p>
             <a:pPr algn="ctr"/>
             <a:r>
-              <a:rPr lang="en-IE" sz="4000" b="1" i="1" dirty="0" err="1"/>
-              <a:t>TaskTide</a:t>
-            </a:r>
-            <a:r>
               <a:rPr lang="en-IE" sz="4000" b="1" i="1" dirty="0"/>
-              <a:t> Repository</a:t>
+              <a:t>TaskTide Repository</a:t>
             </a:r>
             <a:endParaRPr lang="en-IE" sz="3600" b="1" i="1" dirty="0"/>
           </a:p>
@@ -8511,12 +9416,8 @@
           <a:p>
             <a:pPr algn="ctr"/>
             <a:r>
-              <a:rPr lang="en-IE" sz="4000" b="1" i="1" dirty="0" err="1"/>
-              <a:t>TaskTide</a:t>
-            </a:r>
-            <a:r>
               <a:rPr lang="en-IE" sz="4000" b="1" i="1" dirty="0"/>
-              <a:t> Client</a:t>
+              <a:t>TaskTide Client</a:t>
             </a:r>
           </a:p>
           <a:p>
@@ -8529,12 +9430,8 @@
           <a:p>
             <a:pPr algn="ctr"/>
             <a:r>
-              <a:rPr lang="en-IE" sz="4000" b="1" i="1" dirty="0" err="1"/>
-              <a:t>TaskTide</a:t>
-            </a:r>
-            <a:r>
               <a:rPr lang="en-IE" sz="4000" b="1" i="1" dirty="0"/>
-              <a:t> Engine</a:t>
+              <a:t>TaskTide Engine</a:t>
             </a:r>
             <a:endParaRPr lang="en-IE" sz="3600" b="1" i="1" dirty="0"/>
           </a:p>
@@ -8554,7 +9451,7 @@
         </p:nvSpPr>
         <p:spPr>
           <a:xfrm>
-            <a:off x="2275840" y="7924801"/>
+            <a:off x="2275840" y="7904481"/>
             <a:ext cx="1178560" cy="3891280"/>
           </a:xfrm>
           <a:prstGeom prst="downArrow">
@@ -8568,6 +9465,13 @@
               <a:schemeClr val="tx1"/>
             </a:solidFill>
           </a:ln>
+          <a:scene3d>
+            <a:camera prst="orthographicFront"/>
+            <a:lightRig rig="threePt" dir="t"/>
+          </a:scene3d>
+          <a:sp3d>
+            <a:bevelT w="152400" h="50800" prst="softRound"/>
+          </a:sp3d>
         </p:spPr>
         <p:style>
           <a:lnRef idx="2">
@@ -8608,7 +9512,7 @@
         </p:nvSpPr>
         <p:spPr>
           <a:xfrm>
-            <a:off x="8300720" y="7914640"/>
+            <a:off x="8300720" y="7894320"/>
             <a:ext cx="1178560" cy="3901440"/>
           </a:xfrm>
           <a:prstGeom prst="downArrow">
@@ -8622,6 +9526,13 @@
               <a:schemeClr val="tx1"/>
             </a:solidFill>
           </a:ln>
+          <a:scene3d>
+            <a:camera prst="orthographicFront"/>
+            <a:lightRig rig="threePt" dir="t"/>
+          </a:scene3d>
+          <a:sp3d>
+            <a:bevelT w="152400" h="50800" prst="softRound"/>
+          </a:sp3d>
         </p:spPr>
         <p:style>
           <a:lnRef idx="2">
@@ -8662,7 +9573,7 @@
         </p:nvSpPr>
         <p:spPr>
           <a:xfrm>
-            <a:off x="14406880" y="7945120"/>
+            <a:off x="14406880" y="7904480"/>
             <a:ext cx="1178560" cy="3901440"/>
           </a:xfrm>
           <a:prstGeom prst="downArrow">
@@ -8676,6 +9587,13 @@
               <a:schemeClr val="tx1"/>
             </a:solidFill>
           </a:ln>
+          <a:scene3d>
+            <a:camera prst="orthographicFront"/>
+            <a:lightRig rig="threePt" dir="t"/>
+          </a:scene3d>
+          <a:sp3d>
+            <a:bevelT w="152400" h="50800" prst="softRound"/>
+          </a:sp3d>
         </p:spPr>
         <p:style>
           <a:lnRef idx="2">
@@ -8715,7 +9633,7 @@
 </p:sld>
 </file>
 
-<file path=ppt/slides/slide3.xml><?xml version="1.0" encoding="utf-8"?>
+<file path=ppt/slides/slide4.xml><?xml version="1.0" encoding="utf-8"?>
 <p:sld xmlns:a="http://schemas.openxmlformats.org/drawingml/2006/main" xmlns:r="http://schemas.openxmlformats.org/officeDocument/2006/relationships" xmlns:p="http://schemas.openxmlformats.org/presentationml/2006/main">
   <p:cSld>
     <p:spTree>
@@ -8742,11 +9660,17 @@
             </a:extLst>
           </p:cNvPr>
           <p:cNvGraphicFramePr/>
-          <p:nvPr/>
+          <p:nvPr>
+            <p:extLst>
+              <p:ext uri="{D42A27DB-BD31-4B8C-83A1-F6EECF244321}">
+                <p14:modId xmlns:p14="http://schemas.microsoft.com/office/powerpoint/2010/main" val="3174936920"/>
+              </p:ext>
+            </p:extLst>
+          </p:nvPr>
         </p:nvGraphicFramePr>
         <p:xfrm>
-          <a:off x="-1320800" y="4278215"/>
-          <a:ext cx="8595360" cy="7644007"/>
+          <a:off x="-2113278" y="3993735"/>
+          <a:ext cx="9834878" cy="9234585"/>
         </p:xfrm>
         <a:graphic>
           <a:graphicData uri="http://schemas.openxmlformats.org/drawingml/2006/diagram">
@@ -8768,7 +9692,7 @@
         </p:nvCxnSpPr>
         <p:spPr>
           <a:xfrm>
-            <a:off x="5831840" y="3169920"/>
+            <a:off x="5831840" y="2743200"/>
             <a:ext cx="0" cy="11988800"/>
           </a:xfrm>
           <a:prstGeom prst="line">
@@ -8812,7 +9736,7 @@
         </p:nvSpPr>
         <p:spPr>
           <a:xfrm>
-            <a:off x="10911847" y="2540001"/>
+            <a:off x="10789927" y="2113281"/>
             <a:ext cx="2153905" cy="2022695"/>
           </a:xfrm>
           <a:prstGeom prst="can">
@@ -8823,6 +9747,13 @@
               <a:schemeClr val="tx1"/>
             </a:solidFill>
           </a:ln>
+          <a:effectLst>
+            <a:outerShdw blurRad="50800" dist="38100" algn="l" rotWithShape="0">
+              <a:prstClr val="black">
+                <a:alpha val="40000"/>
+              </a:prstClr>
+            </a:outerShdw>
+          </a:effectLst>
         </p:spPr>
         <p:style>
           <a:lnRef idx="2">
@@ -8846,10 +9777,9 @@
           <a:p>
             <a:pPr algn="ctr"/>
             <a:r>
-              <a:rPr lang="en-IE" sz="2800" b="1" dirty="0" err="1"/>
+              <a:rPr lang="en-IE" sz="2800" b="1" dirty="0"/>
               <a:t>TaskTide</a:t>
             </a:r>
-            <a:endParaRPr lang="en-IE" sz="2800" b="1" dirty="0"/>
           </a:p>
           <a:p>
             <a:pPr algn="ctr"/>
@@ -8874,7 +9804,7 @@
         </p:nvSpPr>
         <p:spPr>
           <a:xfrm>
-            <a:off x="6583687" y="5852161"/>
+            <a:off x="6461767" y="5425441"/>
             <a:ext cx="11155674" cy="9384150"/>
           </a:xfrm>
           <a:prstGeom prst="roundRect">
@@ -8932,9 +9862,9 @@
           <p:nvPr/>
         </p:nvCxnSpPr>
         <p:spPr>
-          <a:xfrm flipH="1">
-            <a:off x="9078905" y="4772895"/>
-            <a:ext cx="2413040" cy="1648226"/>
+          <a:xfrm>
+            <a:off x="11532585" y="4346175"/>
+            <a:ext cx="0" cy="968362"/>
           </a:xfrm>
           <a:prstGeom prst="straightConnector1">
             <a:avLst/>
@@ -8977,8 +9907,8 @@
         </p:nvCxnSpPr>
         <p:spPr>
           <a:xfrm flipH="1" flipV="1">
-            <a:off x="12039600" y="4673600"/>
-            <a:ext cx="2619852" cy="3426619"/>
+            <a:off x="11998960" y="4287520"/>
+            <a:ext cx="1" cy="954107"/>
           </a:xfrm>
           <a:prstGeom prst="straightConnector1">
             <a:avLst/>
@@ -9019,7 +9949,7 @@
         </p:nvSpPr>
         <p:spPr>
           <a:xfrm>
-            <a:off x="10952480" y="7100986"/>
+            <a:off x="10830560" y="6674266"/>
             <a:ext cx="1767841" cy="6797894"/>
           </a:xfrm>
           <a:prstGeom prst="rightBrace">
@@ -9068,7 +9998,7 @@
         </p:nvCxnSpPr>
         <p:spPr>
           <a:xfrm>
-            <a:off x="8991600" y="8517637"/>
+            <a:off x="8869680" y="8090917"/>
             <a:ext cx="0" cy="1036320"/>
           </a:xfrm>
           <a:prstGeom prst="straightConnector1">
@@ -9110,7 +10040,7 @@
         </p:nvCxnSpPr>
         <p:spPr>
           <a:xfrm>
-            <a:off x="9013346" y="11700606"/>
+            <a:off x="8891426" y="11273886"/>
             <a:ext cx="0" cy="1036320"/>
           </a:xfrm>
           <a:prstGeom prst="straightConnector1">
@@ -9154,7 +10084,7 @@
         </p:nvCxnSpPr>
         <p:spPr>
           <a:xfrm flipH="1">
-            <a:off x="13414054" y="10271270"/>
+            <a:off x="13292134" y="9844550"/>
             <a:ext cx="1284683" cy="904731"/>
           </a:xfrm>
           <a:prstGeom prst="straightConnector1">
@@ -9198,7 +10128,7 @@
         </p:nvCxnSpPr>
         <p:spPr>
           <a:xfrm>
-            <a:off x="13358654" y="12717426"/>
+            <a:off x="13236734" y="12290706"/>
             <a:ext cx="1340082" cy="1026324"/>
           </a:xfrm>
           <a:prstGeom prst="straightConnector1">
@@ -9242,7 +10172,7 @@
         </p:nvCxnSpPr>
         <p:spPr>
           <a:xfrm flipV="1">
-            <a:off x="15039647" y="12731753"/>
+            <a:off x="14917727" y="12305033"/>
             <a:ext cx="1282078" cy="978690"/>
           </a:xfrm>
           <a:prstGeom prst="straightConnector1">
@@ -9284,17 +10214,33 @@
         </p:nvSpPr>
         <p:spPr>
           <a:xfrm>
-            <a:off x="7492516" y="6543040"/>
+            <a:off x="7370596" y="6116320"/>
             <a:ext cx="3152458" cy="1852676"/>
           </a:xfrm>
           <a:prstGeom prst="roundRect">
             <a:avLst/>
           </a:prstGeom>
           <a:ln w="38100">
-            <a:solidFill>
-              <a:schemeClr val="tx1"/>
-            </a:solidFill>
+            <a:noFill/>
           </a:ln>
+          <a:effectLst>
+            <a:outerShdw blurRad="190500" dist="228600" dir="2700000" algn="ctr">
+              <a:srgbClr val="000000">
+                <a:alpha val="30000"/>
+              </a:srgbClr>
+            </a:outerShdw>
+          </a:effectLst>
+          <a:scene3d>
+            <a:camera prst="orthographicFront">
+              <a:rot lat="0" lon="0" rev="0"/>
+            </a:camera>
+            <a:lightRig rig="glow" dir="t">
+              <a:rot lat="0" lon="0" rev="4800000"/>
+            </a:lightRig>
+          </a:scene3d>
+          <a:sp3d prstMaterial="matte">
+            <a:bevelT w="127000" h="63500"/>
+          </a:sp3d>
         </p:spPr>
         <p:style>
           <a:lnRef idx="2">
@@ -9319,7 +10265,7 @@
             <a:pPr algn="ctr"/>
             <a:r>
               <a:rPr lang="en-IE" sz="2800" b="1" dirty="0"/>
-              <a:t>Tasks Fetched</a:t>
+              <a:t>Fetch Tasks</a:t>
             </a:r>
           </a:p>
         </p:txBody>
@@ -9338,17 +10284,33 @@
         </p:nvSpPr>
         <p:spPr>
           <a:xfrm>
-            <a:off x="7502677" y="9662160"/>
+            <a:off x="7380757" y="9235440"/>
             <a:ext cx="3152458" cy="1852676"/>
           </a:xfrm>
           <a:prstGeom prst="roundRect">
             <a:avLst/>
           </a:prstGeom>
           <a:ln w="38100">
-            <a:solidFill>
-              <a:schemeClr val="tx1"/>
-            </a:solidFill>
+            <a:noFill/>
           </a:ln>
+          <a:effectLst>
+            <a:outerShdw blurRad="190500" dist="228600" dir="2700000" algn="ctr">
+              <a:srgbClr val="000000">
+                <a:alpha val="30000"/>
+              </a:srgbClr>
+            </a:outerShdw>
+          </a:effectLst>
+          <a:scene3d>
+            <a:camera prst="orthographicFront">
+              <a:rot lat="0" lon="0" rev="0"/>
+            </a:camera>
+            <a:lightRig rig="glow" dir="t">
+              <a:rot lat="0" lon="0" rev="4800000"/>
+            </a:lightRig>
+          </a:scene3d>
+          <a:sp3d prstMaterial="matte">
+            <a:bevelT w="127000" h="63500"/>
+          </a:sp3d>
         </p:spPr>
         <p:style>
           <a:lnRef idx="2">
@@ -9392,17 +10354,33 @@
         </p:nvSpPr>
         <p:spPr>
           <a:xfrm>
-            <a:off x="7502677" y="12872720"/>
+            <a:off x="7380757" y="12446000"/>
             <a:ext cx="3152458" cy="1852676"/>
           </a:xfrm>
           <a:prstGeom prst="roundRect">
             <a:avLst/>
           </a:prstGeom>
           <a:ln w="38100">
-            <a:solidFill>
-              <a:schemeClr val="tx1"/>
-            </a:solidFill>
+            <a:noFill/>
           </a:ln>
+          <a:effectLst>
+            <a:outerShdw blurRad="190500" dist="228600" dir="2700000" algn="ctr">
+              <a:srgbClr val="000000">
+                <a:alpha val="30000"/>
+              </a:srgbClr>
+            </a:outerShdw>
+          </a:effectLst>
+          <a:scene3d>
+            <a:camera prst="orthographicFront">
+              <a:rot lat="0" lon="0" rev="0"/>
+            </a:camera>
+            <a:lightRig rig="glow" dir="t">
+              <a:rot lat="0" lon="0" rev="4800000"/>
+            </a:lightRig>
+          </a:scene3d>
+          <a:sp3d prstMaterial="matte">
+            <a:bevelT w="127000" h="63500"/>
+          </a:sp3d>
         </p:spPr>
         <p:style>
           <a:lnRef idx="2">
@@ -9446,17 +10424,33 @@
         </p:nvSpPr>
         <p:spPr>
           <a:xfrm>
-            <a:off x="13159348" y="8274065"/>
+            <a:off x="13037428" y="7847345"/>
             <a:ext cx="3152458" cy="1852676"/>
           </a:xfrm>
           <a:prstGeom prst="roundRect">
             <a:avLst/>
           </a:prstGeom>
           <a:ln w="38100">
-            <a:solidFill>
-              <a:schemeClr val="tx1"/>
-            </a:solidFill>
+            <a:noFill/>
           </a:ln>
+          <a:effectLst>
+            <a:outerShdw blurRad="190500" dist="228600" dir="2700000" algn="ctr">
+              <a:srgbClr val="000000">
+                <a:alpha val="30000"/>
+              </a:srgbClr>
+            </a:outerShdw>
+          </a:effectLst>
+          <a:scene3d>
+            <a:camera prst="orthographicFront">
+              <a:rot lat="0" lon="0" rev="0"/>
+            </a:camera>
+            <a:lightRig rig="glow" dir="t">
+              <a:rot lat="0" lon="0" rev="4800000"/>
+            </a:lightRig>
+          </a:scene3d>
+          <a:sp3d prstMaterial="matte">
+            <a:bevelT w="127000" h="63500"/>
+          </a:sp3d>
         </p:spPr>
         <p:style>
           <a:lnRef idx="2">
@@ -9500,17 +10494,33 @@
         </p:nvSpPr>
         <p:spPr>
           <a:xfrm>
-            <a:off x="12248432" y="11343102"/>
+            <a:off x="12126512" y="10916382"/>
             <a:ext cx="2220444" cy="1158240"/>
           </a:xfrm>
           <a:prstGeom prst="roundRect">
             <a:avLst/>
           </a:prstGeom>
           <a:ln w="38100">
-            <a:solidFill>
-              <a:schemeClr val="tx1"/>
-            </a:solidFill>
+            <a:noFill/>
           </a:ln>
+          <a:effectLst>
+            <a:outerShdw blurRad="190500" dist="228600" dir="2700000" algn="ctr">
+              <a:srgbClr val="000000">
+                <a:alpha val="30000"/>
+              </a:srgbClr>
+            </a:outerShdw>
+          </a:effectLst>
+          <a:scene3d>
+            <a:camera prst="orthographicFront">
+              <a:rot lat="0" lon="0" rev="0"/>
+            </a:camera>
+            <a:lightRig rig="glow" dir="t">
+              <a:rot lat="0" lon="0" rev="4800000"/>
+            </a:lightRig>
+          </a:scene3d>
+          <a:sp3d prstMaterial="matte">
+            <a:bevelT w="127000" h="63500"/>
+          </a:sp3d>
         </p:spPr>
         <p:style>
           <a:lnRef idx="2">
@@ -9558,17 +10568,33 @@
         </p:nvSpPr>
         <p:spPr>
           <a:xfrm>
-            <a:off x="13414053" y="13872088"/>
+            <a:off x="13292133" y="13445368"/>
             <a:ext cx="2897752" cy="1158240"/>
           </a:xfrm>
           <a:prstGeom prst="roundRect">
             <a:avLst/>
           </a:prstGeom>
           <a:ln w="38100">
-            <a:solidFill>
-              <a:schemeClr val="tx1"/>
-            </a:solidFill>
+            <a:noFill/>
           </a:ln>
+          <a:effectLst>
+            <a:outerShdw blurRad="190500" dist="228600" dir="2700000" algn="ctr">
+              <a:srgbClr val="000000">
+                <a:alpha val="30000"/>
+              </a:srgbClr>
+            </a:outerShdw>
+          </a:effectLst>
+          <a:scene3d>
+            <a:camera prst="orthographicFront">
+              <a:rot lat="0" lon="0" rev="0"/>
+            </a:camera>
+            <a:lightRig rig="glow" dir="t">
+              <a:rot lat="0" lon="0" rev="4800000"/>
+            </a:lightRig>
+          </a:scene3d>
+          <a:sp3d prstMaterial="matte">
+            <a:bevelT w="127000" h="63500"/>
+          </a:sp3d>
         </p:spPr>
         <p:style>
           <a:lnRef idx="2">
@@ -9616,17 +10642,33 @@
         </p:nvSpPr>
         <p:spPr>
           <a:xfrm>
-            <a:off x="15201583" y="11344147"/>
+            <a:off x="15079663" y="10917427"/>
             <a:ext cx="2220444" cy="1158240"/>
           </a:xfrm>
           <a:prstGeom prst="roundRect">
             <a:avLst/>
           </a:prstGeom>
           <a:ln w="38100">
-            <a:solidFill>
-              <a:schemeClr val="tx1"/>
-            </a:solidFill>
+            <a:noFill/>
           </a:ln>
+          <a:effectLst>
+            <a:outerShdw blurRad="190500" dist="228600" dir="2700000" algn="ctr">
+              <a:srgbClr val="000000">
+                <a:alpha val="30000"/>
+              </a:srgbClr>
+            </a:outerShdw>
+          </a:effectLst>
+          <a:scene3d>
+            <a:camera prst="orthographicFront">
+              <a:rot lat="0" lon="0" rev="0"/>
+            </a:camera>
+            <a:lightRig rig="glow" dir="t">
+              <a:rot lat="0" lon="0" rev="4800000"/>
+            </a:lightRig>
+          </a:scene3d>
+          <a:sp3d prstMaterial="matte">
+            <a:bevelT w="127000" h="63500"/>
+          </a:sp3d>
         </p:spPr>
         <p:style>
           <a:lnRef idx="2">
@@ -9709,7 +10751,7 @@
         </p:nvSpPr>
         <p:spPr>
           <a:xfrm>
-            <a:off x="13701784" y="5368177"/>
+            <a:off x="7604971" y="4942861"/>
             <a:ext cx="2960616" cy="523220"/>
           </a:xfrm>
           <a:prstGeom prst="rect">
@@ -9724,12 +10766,8 @@
           <a:lstStyle/>
           <a:p>
             <a:r>
-              <a:rPr lang="en-IE" sz="2800" b="1" dirty="0" err="1"/>
-              <a:t>TaskTide</a:t>
-            </a:r>
-            <a:r>
               <a:rPr lang="en-IE" sz="2800" b="1" dirty="0"/>
-              <a:t> Engine</a:t>
+              <a:t>TaskTide Engine</a:t>
             </a:r>
           </a:p>
         </p:txBody>
@@ -9748,7 +10786,7 @@
         </p:nvSpPr>
         <p:spPr>
           <a:xfrm>
-            <a:off x="13929706" y="6741324"/>
+            <a:off x="13807786" y="6314604"/>
             <a:ext cx="2960616" cy="954107"/>
           </a:xfrm>
           <a:prstGeom prst="rect">
@@ -9766,6 +10804,41 @@
             <a:r>
               <a:rPr lang="en-IE" sz="2800" b="1" dirty="0"/>
               <a:t>Commits task updates</a:t>
+            </a:r>
+          </a:p>
+        </p:txBody>
+      </p:sp>
+      <p:sp>
+        <p:nvSpPr>
+          <p:cNvPr id="8" name="TextBox 7">
+            <a:extLst>
+              <a:ext uri="{FF2B5EF4-FFF2-40B4-BE49-F238E27FC236}">
+                <a16:creationId xmlns:a16="http://schemas.microsoft.com/office/drawing/2014/main" id="{4A83F73D-D09F-B45C-DA3C-EF859F32AFF6}"/>
+              </a:ext>
+            </a:extLst>
+          </p:cNvPr>
+          <p:cNvSpPr txBox="1"/>
+          <p:nvPr/>
+        </p:nvSpPr>
+        <p:spPr>
+          <a:xfrm>
+            <a:off x="12296651" y="4630079"/>
+            <a:ext cx="2546293" cy="523220"/>
+          </a:xfrm>
+          <a:prstGeom prst="rect">
+            <a:avLst/>
+          </a:prstGeom>
+          <a:noFill/>
+        </p:spPr>
+        <p:txBody>
+          <a:bodyPr wrap="square" rtlCol="0">
+            <a:spAutoFit/>
+          </a:bodyPr>
+          <a:lstStyle/>
+          <a:p>
+            <a:r>
+              <a:rPr lang="en-IE" sz="2800" b="1" dirty="0"/>
+              <a:t>Task Updates</a:t>
             </a:r>
           </a:p>
         </p:txBody>
@@ -9783,7 +10856,7 @@
 </p:sld>
 </file>
 
-<file path=ppt/slides/slide4.xml><?xml version="1.0" encoding="utf-8"?>
+<file path=ppt/slides/slide5.xml><?xml version="1.0" encoding="utf-8"?>
 <p:sld xmlns:a="http://schemas.openxmlformats.org/drawingml/2006/main" xmlns:r="http://schemas.openxmlformats.org/officeDocument/2006/relationships" xmlns:p="http://schemas.openxmlformats.org/presentationml/2006/main">
   <p:cSld>
     <p:spTree>
@@ -11725,7 +12798,7 @@
 </p:sld>
 </file>
 
-<file path=ppt/slides/slide5.xml><?xml version="1.0" encoding="utf-8"?>
+<file path=ppt/slides/slide6.xml><?xml version="1.0" encoding="utf-8"?>
 <p:sld xmlns:a="http://schemas.openxmlformats.org/drawingml/2006/main" xmlns:r="http://schemas.openxmlformats.org/officeDocument/2006/relationships" xmlns:p="http://schemas.openxmlformats.org/presentationml/2006/main">
   <p:cSld>
     <p:spTree>

--- a/tasktide/docs/Diagrams/Diagrams.pptx
+++ b/tasktide/docs/Diagrams/Diagrams.pptx
@@ -9,8 +9,9 @@
     <p:sldId id="262" r:id="rId3"/>
     <p:sldId id="260" r:id="rId4"/>
     <p:sldId id="261" r:id="rId5"/>
-    <p:sldId id="258" r:id="rId6"/>
-    <p:sldId id="256" r:id="rId7"/>
+    <p:sldId id="263" r:id="rId6"/>
+    <p:sldId id="258" r:id="rId7"/>
+    <p:sldId id="256" r:id="rId8"/>
   </p:sldIdLst>
   <p:sldSz cx="18000663" cy="16200438"/>
   <p:notesSz cx="6858000" cy="9144000"/>
@@ -1003,6 +1004,753 @@
     <dgm:fillClrLst meth="repeat">
       <a:schemeClr val="accent2">
         <a:tint val="40000"/>
+      </a:schemeClr>
+    </dgm:fillClrLst>
+    <dgm:linClrLst meth="repeat">
+      <a:schemeClr val="lt1"/>
+    </dgm:linClrLst>
+    <dgm:effectClrLst/>
+    <dgm:txLinClrLst/>
+    <dgm:txFillClrLst meth="repeat">
+      <a:schemeClr val="dk1"/>
+    </dgm:txFillClrLst>
+    <dgm:txEffectClrLst/>
+  </dgm:styleLbl>
+  <dgm:styleLbl name="revTx">
+    <dgm:fillClrLst meth="repeat">
+      <a:schemeClr val="lt1">
+        <a:alpha val="0"/>
+      </a:schemeClr>
+    </dgm:fillClrLst>
+    <dgm:linClrLst meth="repeat">
+      <a:schemeClr val="dk1">
+        <a:alpha val="0"/>
+      </a:schemeClr>
+    </dgm:linClrLst>
+    <dgm:effectClrLst/>
+    <dgm:txLinClrLst/>
+    <dgm:txFillClrLst meth="repeat">
+      <a:schemeClr val="tx1"/>
+    </dgm:txFillClrLst>
+    <dgm:txEffectClrLst/>
+  </dgm:styleLbl>
+</dgm:colorsDef>
+</file>
+
+<file path=ppt/diagrams/colors2.xml><?xml version="1.0" encoding="utf-8"?>
+<dgm:colorsDef xmlns:dgm="http://schemas.openxmlformats.org/drawingml/2006/diagram" xmlns:a="http://schemas.openxmlformats.org/drawingml/2006/main" uniqueId="urn:microsoft.com/office/officeart/2005/8/colors/accent1_2">
+  <dgm:title val=""/>
+  <dgm:desc val=""/>
+  <dgm:catLst>
+    <dgm:cat type="accent1" pri="11200"/>
+  </dgm:catLst>
+  <dgm:styleLbl name="node0">
+    <dgm:fillClrLst meth="repeat">
+      <a:schemeClr val="accent1"/>
+    </dgm:fillClrLst>
+    <dgm:linClrLst meth="repeat">
+      <a:schemeClr val="lt1"/>
+    </dgm:linClrLst>
+    <dgm:effectClrLst/>
+    <dgm:txLinClrLst/>
+    <dgm:txFillClrLst/>
+    <dgm:txEffectClrLst/>
+  </dgm:styleLbl>
+  <dgm:styleLbl name="alignNode1">
+    <dgm:fillClrLst meth="repeat">
+      <a:schemeClr val="accent1"/>
+    </dgm:fillClrLst>
+    <dgm:linClrLst meth="repeat">
+      <a:schemeClr val="accent1"/>
+    </dgm:linClrLst>
+    <dgm:effectClrLst/>
+    <dgm:txLinClrLst/>
+    <dgm:txFillClrLst/>
+    <dgm:txEffectClrLst/>
+  </dgm:styleLbl>
+  <dgm:styleLbl name="node1">
+    <dgm:fillClrLst meth="repeat">
+      <a:schemeClr val="accent1"/>
+    </dgm:fillClrLst>
+    <dgm:linClrLst meth="repeat">
+      <a:schemeClr val="lt1"/>
+    </dgm:linClrLst>
+    <dgm:effectClrLst/>
+    <dgm:txLinClrLst/>
+    <dgm:txFillClrLst/>
+    <dgm:txEffectClrLst/>
+  </dgm:styleLbl>
+  <dgm:styleLbl name="lnNode1">
+    <dgm:fillClrLst meth="repeat">
+      <a:schemeClr val="accent1"/>
+    </dgm:fillClrLst>
+    <dgm:linClrLst meth="repeat">
+      <a:schemeClr val="lt1"/>
+    </dgm:linClrLst>
+    <dgm:effectClrLst/>
+    <dgm:txLinClrLst/>
+    <dgm:txFillClrLst/>
+    <dgm:txEffectClrLst/>
+  </dgm:styleLbl>
+  <dgm:styleLbl name="vennNode1">
+    <dgm:fillClrLst meth="repeat">
+      <a:schemeClr val="accent1">
+        <a:alpha val="50000"/>
+      </a:schemeClr>
+    </dgm:fillClrLst>
+    <dgm:linClrLst meth="repeat">
+      <a:schemeClr val="lt1"/>
+    </dgm:linClrLst>
+    <dgm:effectClrLst/>
+    <dgm:txLinClrLst/>
+    <dgm:txFillClrLst/>
+    <dgm:txEffectClrLst/>
+  </dgm:styleLbl>
+  <dgm:styleLbl name="node2">
+    <dgm:fillClrLst meth="repeat">
+      <a:schemeClr val="accent1"/>
+    </dgm:fillClrLst>
+    <dgm:linClrLst meth="repeat">
+      <a:schemeClr val="lt1"/>
+    </dgm:linClrLst>
+    <dgm:effectClrLst/>
+    <dgm:txLinClrLst/>
+    <dgm:txFillClrLst/>
+    <dgm:txEffectClrLst/>
+  </dgm:styleLbl>
+  <dgm:styleLbl name="node3">
+    <dgm:fillClrLst meth="repeat">
+      <a:schemeClr val="accent1"/>
+    </dgm:fillClrLst>
+    <dgm:linClrLst meth="repeat">
+      <a:schemeClr val="lt1"/>
+    </dgm:linClrLst>
+    <dgm:effectClrLst/>
+    <dgm:txLinClrLst/>
+    <dgm:txFillClrLst/>
+    <dgm:txEffectClrLst/>
+  </dgm:styleLbl>
+  <dgm:styleLbl name="node4">
+    <dgm:fillClrLst meth="repeat">
+      <a:schemeClr val="accent1"/>
+    </dgm:fillClrLst>
+    <dgm:linClrLst meth="repeat">
+      <a:schemeClr val="lt1"/>
+    </dgm:linClrLst>
+    <dgm:effectClrLst/>
+    <dgm:txLinClrLst/>
+    <dgm:txFillClrLst/>
+    <dgm:txEffectClrLst/>
+  </dgm:styleLbl>
+  <dgm:styleLbl name="fgImgPlace1">
+    <dgm:fillClrLst meth="repeat">
+      <a:schemeClr val="accent1">
+        <a:tint val="50000"/>
+      </a:schemeClr>
+    </dgm:fillClrLst>
+    <dgm:linClrLst meth="repeat">
+      <a:schemeClr val="lt1"/>
+    </dgm:linClrLst>
+    <dgm:effectClrLst/>
+    <dgm:txLinClrLst/>
+    <dgm:txFillClrLst meth="repeat">
+      <a:schemeClr val="lt1"/>
+    </dgm:txFillClrLst>
+    <dgm:txEffectClrLst/>
+  </dgm:styleLbl>
+  <dgm:styleLbl name="alignImgPlace1">
+    <dgm:fillClrLst meth="repeat">
+      <a:schemeClr val="accent1">
+        <a:tint val="50000"/>
+      </a:schemeClr>
+    </dgm:fillClrLst>
+    <dgm:linClrLst meth="repeat">
+      <a:schemeClr val="lt1"/>
+    </dgm:linClrLst>
+    <dgm:effectClrLst/>
+    <dgm:txLinClrLst/>
+    <dgm:txFillClrLst meth="repeat">
+      <a:schemeClr val="lt1"/>
+    </dgm:txFillClrLst>
+    <dgm:txEffectClrLst/>
+  </dgm:styleLbl>
+  <dgm:styleLbl name="bgImgPlace1">
+    <dgm:fillClrLst meth="repeat">
+      <a:schemeClr val="accent1">
+        <a:tint val="50000"/>
+      </a:schemeClr>
+    </dgm:fillClrLst>
+    <dgm:linClrLst meth="repeat">
+      <a:schemeClr val="lt1"/>
+    </dgm:linClrLst>
+    <dgm:effectClrLst/>
+    <dgm:txLinClrLst/>
+    <dgm:txFillClrLst meth="repeat">
+      <a:schemeClr val="lt1"/>
+    </dgm:txFillClrLst>
+    <dgm:txEffectClrLst/>
+  </dgm:styleLbl>
+  <dgm:styleLbl name="sibTrans2D1">
+    <dgm:fillClrLst meth="repeat">
+      <a:schemeClr val="accent1">
+        <a:tint val="60000"/>
+      </a:schemeClr>
+    </dgm:fillClrLst>
+    <dgm:linClrLst meth="repeat">
+      <a:schemeClr val="accent1">
+        <a:tint val="60000"/>
+      </a:schemeClr>
+    </dgm:linClrLst>
+    <dgm:effectClrLst/>
+    <dgm:txLinClrLst/>
+    <dgm:txFillClrLst/>
+    <dgm:txEffectClrLst/>
+  </dgm:styleLbl>
+  <dgm:styleLbl name="fgSibTrans2D1">
+    <dgm:fillClrLst meth="repeat">
+      <a:schemeClr val="accent1">
+        <a:tint val="60000"/>
+      </a:schemeClr>
+    </dgm:fillClrLst>
+    <dgm:linClrLst meth="repeat">
+      <a:schemeClr val="accent1">
+        <a:tint val="60000"/>
+      </a:schemeClr>
+    </dgm:linClrLst>
+    <dgm:effectClrLst/>
+    <dgm:txLinClrLst/>
+    <dgm:txFillClrLst/>
+    <dgm:txEffectClrLst/>
+  </dgm:styleLbl>
+  <dgm:styleLbl name="bgSibTrans2D1">
+    <dgm:fillClrLst meth="repeat">
+      <a:schemeClr val="accent1">
+        <a:tint val="60000"/>
+      </a:schemeClr>
+    </dgm:fillClrLst>
+    <dgm:linClrLst meth="repeat">
+      <a:schemeClr val="accent1">
+        <a:tint val="60000"/>
+      </a:schemeClr>
+    </dgm:linClrLst>
+    <dgm:effectClrLst/>
+    <dgm:txLinClrLst/>
+    <dgm:txFillClrLst/>
+    <dgm:txEffectClrLst/>
+  </dgm:styleLbl>
+  <dgm:styleLbl name="sibTrans1D1">
+    <dgm:fillClrLst meth="repeat">
+      <a:schemeClr val="accent1"/>
+    </dgm:fillClrLst>
+    <dgm:linClrLst meth="repeat">
+      <a:schemeClr val="accent1"/>
+    </dgm:linClrLst>
+    <dgm:effectClrLst/>
+    <dgm:txLinClrLst/>
+    <dgm:txFillClrLst meth="repeat">
+      <a:schemeClr val="tx1"/>
+    </dgm:txFillClrLst>
+    <dgm:txEffectClrLst/>
+  </dgm:styleLbl>
+  <dgm:styleLbl name="callout">
+    <dgm:fillClrLst meth="repeat">
+      <a:schemeClr val="accent1"/>
+    </dgm:fillClrLst>
+    <dgm:linClrLst meth="repeat">
+      <a:schemeClr val="accent1">
+        <a:tint val="50000"/>
+      </a:schemeClr>
+    </dgm:linClrLst>
+    <dgm:effectClrLst/>
+    <dgm:txLinClrLst/>
+    <dgm:txFillClrLst meth="repeat">
+      <a:schemeClr val="tx1"/>
+    </dgm:txFillClrLst>
+    <dgm:txEffectClrLst/>
+  </dgm:styleLbl>
+  <dgm:styleLbl name="asst0">
+    <dgm:fillClrLst meth="repeat">
+      <a:schemeClr val="accent1"/>
+    </dgm:fillClrLst>
+    <dgm:linClrLst meth="repeat">
+      <a:schemeClr val="lt1"/>
+    </dgm:linClrLst>
+    <dgm:effectClrLst/>
+    <dgm:txLinClrLst/>
+    <dgm:txFillClrLst/>
+    <dgm:txEffectClrLst/>
+  </dgm:styleLbl>
+  <dgm:styleLbl name="asst1">
+    <dgm:fillClrLst meth="repeat">
+      <a:schemeClr val="accent1"/>
+    </dgm:fillClrLst>
+    <dgm:linClrLst meth="repeat">
+      <a:schemeClr val="lt1"/>
+    </dgm:linClrLst>
+    <dgm:effectClrLst/>
+    <dgm:txLinClrLst/>
+    <dgm:txFillClrLst/>
+    <dgm:txEffectClrLst/>
+  </dgm:styleLbl>
+  <dgm:styleLbl name="asst2">
+    <dgm:fillClrLst meth="repeat">
+      <a:schemeClr val="accent1"/>
+    </dgm:fillClrLst>
+    <dgm:linClrLst meth="repeat">
+      <a:schemeClr val="lt1"/>
+    </dgm:linClrLst>
+    <dgm:effectClrLst/>
+    <dgm:txLinClrLst/>
+    <dgm:txFillClrLst/>
+    <dgm:txEffectClrLst/>
+  </dgm:styleLbl>
+  <dgm:styleLbl name="asst3">
+    <dgm:fillClrLst meth="repeat">
+      <a:schemeClr val="accent1"/>
+    </dgm:fillClrLst>
+    <dgm:linClrLst meth="repeat">
+      <a:schemeClr val="lt1"/>
+    </dgm:linClrLst>
+    <dgm:effectClrLst/>
+    <dgm:txLinClrLst/>
+    <dgm:txFillClrLst/>
+    <dgm:txEffectClrLst/>
+  </dgm:styleLbl>
+  <dgm:styleLbl name="asst4">
+    <dgm:fillClrLst meth="repeat">
+      <a:schemeClr val="accent1"/>
+    </dgm:fillClrLst>
+    <dgm:linClrLst meth="repeat">
+      <a:schemeClr val="lt1"/>
+    </dgm:linClrLst>
+    <dgm:effectClrLst/>
+    <dgm:txLinClrLst/>
+    <dgm:txFillClrLst/>
+    <dgm:txEffectClrLst/>
+  </dgm:styleLbl>
+  <dgm:styleLbl name="parChTrans2D1">
+    <dgm:fillClrLst meth="repeat">
+      <a:schemeClr val="accent1">
+        <a:tint val="60000"/>
+      </a:schemeClr>
+    </dgm:fillClrLst>
+    <dgm:linClrLst meth="repeat">
+      <a:schemeClr val="accent1">
+        <a:tint val="60000"/>
+      </a:schemeClr>
+    </dgm:linClrLst>
+    <dgm:effectClrLst/>
+    <dgm:txLinClrLst/>
+    <dgm:txFillClrLst meth="repeat">
+      <a:schemeClr val="lt1"/>
+    </dgm:txFillClrLst>
+    <dgm:txEffectClrLst/>
+  </dgm:styleLbl>
+  <dgm:styleLbl name="parChTrans2D2">
+    <dgm:fillClrLst meth="repeat">
+      <a:schemeClr val="accent1"/>
+    </dgm:fillClrLst>
+    <dgm:linClrLst meth="repeat">
+      <a:schemeClr val="accent1"/>
+    </dgm:linClrLst>
+    <dgm:effectClrLst/>
+    <dgm:txLinClrLst/>
+    <dgm:txFillClrLst meth="repeat">
+      <a:schemeClr val="lt1"/>
+    </dgm:txFillClrLst>
+    <dgm:txEffectClrLst/>
+  </dgm:styleLbl>
+  <dgm:styleLbl name="parChTrans2D3">
+    <dgm:fillClrLst meth="repeat">
+      <a:schemeClr val="accent1"/>
+    </dgm:fillClrLst>
+    <dgm:linClrLst meth="repeat">
+      <a:schemeClr val="accent1"/>
+    </dgm:linClrLst>
+    <dgm:effectClrLst/>
+    <dgm:txLinClrLst/>
+    <dgm:txFillClrLst meth="repeat">
+      <a:schemeClr val="lt1"/>
+    </dgm:txFillClrLst>
+    <dgm:txEffectClrLst/>
+  </dgm:styleLbl>
+  <dgm:styleLbl name="parChTrans2D4">
+    <dgm:fillClrLst meth="repeat">
+      <a:schemeClr val="accent1"/>
+    </dgm:fillClrLst>
+    <dgm:linClrLst meth="repeat">
+      <a:schemeClr val="accent1"/>
+    </dgm:linClrLst>
+    <dgm:effectClrLst/>
+    <dgm:txLinClrLst/>
+    <dgm:txFillClrLst meth="repeat">
+      <a:schemeClr val="lt1"/>
+    </dgm:txFillClrLst>
+    <dgm:txEffectClrLst/>
+  </dgm:styleLbl>
+  <dgm:styleLbl name="parChTrans1D1">
+    <dgm:fillClrLst meth="repeat">
+      <a:schemeClr val="accent1"/>
+    </dgm:fillClrLst>
+    <dgm:linClrLst meth="repeat">
+      <a:schemeClr val="accent1">
+        <a:shade val="60000"/>
+      </a:schemeClr>
+    </dgm:linClrLst>
+    <dgm:effectClrLst/>
+    <dgm:txLinClrLst/>
+    <dgm:txFillClrLst meth="repeat">
+      <a:schemeClr val="tx1"/>
+    </dgm:txFillClrLst>
+    <dgm:txEffectClrLst/>
+  </dgm:styleLbl>
+  <dgm:styleLbl name="parChTrans1D2">
+    <dgm:fillClrLst meth="repeat">
+      <a:schemeClr val="accent1"/>
+    </dgm:fillClrLst>
+    <dgm:linClrLst meth="repeat">
+      <a:schemeClr val="accent1">
+        <a:shade val="60000"/>
+      </a:schemeClr>
+    </dgm:linClrLst>
+    <dgm:effectClrLst/>
+    <dgm:txLinClrLst/>
+    <dgm:txFillClrLst meth="repeat">
+      <a:schemeClr val="tx1"/>
+    </dgm:txFillClrLst>
+    <dgm:txEffectClrLst/>
+  </dgm:styleLbl>
+  <dgm:styleLbl name="parChTrans1D3">
+    <dgm:fillClrLst meth="repeat">
+      <a:schemeClr val="accent1"/>
+    </dgm:fillClrLst>
+    <dgm:linClrLst meth="repeat">
+      <a:schemeClr val="accent1">
+        <a:shade val="80000"/>
+      </a:schemeClr>
+    </dgm:linClrLst>
+    <dgm:effectClrLst/>
+    <dgm:txLinClrLst/>
+    <dgm:txFillClrLst meth="repeat">
+      <a:schemeClr val="tx1"/>
+    </dgm:txFillClrLst>
+    <dgm:txEffectClrLst/>
+  </dgm:styleLbl>
+  <dgm:styleLbl name="parChTrans1D4">
+    <dgm:fillClrLst meth="repeat">
+      <a:schemeClr val="accent1"/>
+    </dgm:fillClrLst>
+    <dgm:linClrLst meth="repeat">
+      <a:schemeClr val="accent1">
+        <a:shade val="80000"/>
+      </a:schemeClr>
+    </dgm:linClrLst>
+    <dgm:effectClrLst/>
+    <dgm:txLinClrLst/>
+    <dgm:txFillClrLst meth="repeat">
+      <a:schemeClr val="tx1"/>
+    </dgm:txFillClrLst>
+    <dgm:txEffectClrLst/>
+  </dgm:styleLbl>
+  <dgm:styleLbl name="fgAcc1">
+    <dgm:fillClrLst meth="repeat">
+      <a:schemeClr val="lt1">
+        <a:alpha val="90000"/>
+      </a:schemeClr>
+    </dgm:fillClrLst>
+    <dgm:linClrLst meth="repeat">
+      <a:schemeClr val="accent1"/>
+    </dgm:linClrLst>
+    <dgm:effectClrLst/>
+    <dgm:txLinClrLst/>
+    <dgm:txFillClrLst meth="repeat">
+      <a:schemeClr val="dk1"/>
+    </dgm:txFillClrLst>
+    <dgm:txEffectClrLst/>
+  </dgm:styleLbl>
+  <dgm:styleLbl name="conFgAcc1">
+    <dgm:fillClrLst meth="repeat">
+      <a:schemeClr val="lt1">
+        <a:alpha val="90000"/>
+      </a:schemeClr>
+    </dgm:fillClrLst>
+    <dgm:linClrLst meth="repeat">
+      <a:schemeClr val="accent1"/>
+    </dgm:linClrLst>
+    <dgm:effectClrLst/>
+    <dgm:txLinClrLst/>
+    <dgm:txFillClrLst meth="repeat">
+      <a:schemeClr val="dk1"/>
+    </dgm:txFillClrLst>
+    <dgm:txEffectClrLst/>
+  </dgm:styleLbl>
+  <dgm:styleLbl name="alignAcc1">
+    <dgm:fillClrLst meth="repeat">
+      <a:schemeClr val="lt1">
+        <a:alpha val="90000"/>
+      </a:schemeClr>
+    </dgm:fillClrLst>
+    <dgm:linClrLst meth="repeat">
+      <a:schemeClr val="accent1"/>
+    </dgm:linClrLst>
+    <dgm:effectClrLst/>
+    <dgm:txLinClrLst/>
+    <dgm:txFillClrLst meth="repeat">
+      <a:schemeClr val="dk1"/>
+    </dgm:txFillClrLst>
+    <dgm:txEffectClrLst/>
+  </dgm:styleLbl>
+  <dgm:styleLbl name="trAlignAcc1">
+    <dgm:fillClrLst meth="repeat">
+      <a:schemeClr val="lt1">
+        <a:alpha val="40000"/>
+      </a:schemeClr>
+    </dgm:fillClrLst>
+    <dgm:linClrLst meth="repeat">
+      <a:schemeClr val="accent1"/>
+    </dgm:linClrLst>
+    <dgm:effectClrLst/>
+    <dgm:txLinClrLst/>
+    <dgm:txFillClrLst meth="repeat">
+      <a:schemeClr val="dk1"/>
+    </dgm:txFillClrLst>
+    <dgm:txEffectClrLst/>
+  </dgm:styleLbl>
+  <dgm:styleLbl name="bgAcc1">
+    <dgm:fillClrLst meth="repeat">
+      <a:schemeClr val="lt1">
+        <a:alpha val="90000"/>
+      </a:schemeClr>
+    </dgm:fillClrLst>
+    <dgm:linClrLst meth="repeat">
+      <a:schemeClr val="accent1"/>
+    </dgm:linClrLst>
+    <dgm:effectClrLst/>
+    <dgm:txLinClrLst/>
+    <dgm:txFillClrLst meth="repeat">
+      <a:schemeClr val="dk1"/>
+    </dgm:txFillClrLst>
+    <dgm:txEffectClrLst/>
+  </dgm:styleLbl>
+  <dgm:styleLbl name="solidFgAcc1">
+    <dgm:fillClrLst meth="repeat">
+      <a:schemeClr val="lt1"/>
+    </dgm:fillClrLst>
+    <dgm:linClrLst meth="repeat">
+      <a:schemeClr val="accent1"/>
+    </dgm:linClrLst>
+    <dgm:effectClrLst/>
+    <dgm:txLinClrLst/>
+    <dgm:txFillClrLst meth="repeat">
+      <a:schemeClr val="dk1"/>
+    </dgm:txFillClrLst>
+    <dgm:txEffectClrLst/>
+  </dgm:styleLbl>
+  <dgm:styleLbl name="solidAlignAcc1">
+    <dgm:fillClrLst meth="repeat">
+      <a:schemeClr val="lt1"/>
+    </dgm:fillClrLst>
+    <dgm:linClrLst meth="repeat">
+      <a:schemeClr val="accent1"/>
+    </dgm:linClrLst>
+    <dgm:effectClrLst/>
+    <dgm:txLinClrLst/>
+    <dgm:txFillClrLst meth="repeat">
+      <a:schemeClr val="dk1"/>
+    </dgm:txFillClrLst>
+    <dgm:txEffectClrLst/>
+  </dgm:styleLbl>
+  <dgm:styleLbl name="solidBgAcc1">
+    <dgm:fillClrLst meth="repeat">
+      <a:schemeClr val="lt1"/>
+    </dgm:fillClrLst>
+    <dgm:linClrLst meth="repeat">
+      <a:schemeClr val="accent1"/>
+    </dgm:linClrLst>
+    <dgm:effectClrLst/>
+    <dgm:txLinClrLst/>
+    <dgm:txFillClrLst meth="repeat">
+      <a:schemeClr val="dk1"/>
+    </dgm:txFillClrLst>
+    <dgm:txEffectClrLst/>
+  </dgm:styleLbl>
+  <dgm:styleLbl name="fgAccFollowNode1">
+    <dgm:fillClrLst meth="repeat">
+      <a:schemeClr val="accent1">
+        <a:alpha val="90000"/>
+        <a:tint val="40000"/>
+      </a:schemeClr>
+    </dgm:fillClrLst>
+    <dgm:linClrLst meth="repeat">
+      <a:schemeClr val="accent1">
+        <a:alpha val="90000"/>
+        <a:tint val="40000"/>
+      </a:schemeClr>
+    </dgm:linClrLst>
+    <dgm:effectClrLst/>
+    <dgm:txLinClrLst/>
+    <dgm:txFillClrLst meth="repeat">
+      <a:schemeClr val="dk1"/>
+    </dgm:txFillClrLst>
+    <dgm:txEffectClrLst/>
+  </dgm:styleLbl>
+  <dgm:styleLbl name="alignAccFollowNode1">
+    <dgm:fillClrLst meth="repeat">
+      <a:schemeClr val="accent1">
+        <a:alpha val="90000"/>
+        <a:tint val="40000"/>
+      </a:schemeClr>
+    </dgm:fillClrLst>
+    <dgm:linClrLst meth="repeat">
+      <a:schemeClr val="accent1">
+        <a:alpha val="90000"/>
+        <a:tint val="40000"/>
+      </a:schemeClr>
+    </dgm:linClrLst>
+    <dgm:effectClrLst/>
+    <dgm:txLinClrLst/>
+    <dgm:txFillClrLst meth="repeat">
+      <a:schemeClr val="dk1"/>
+    </dgm:txFillClrLst>
+    <dgm:txEffectClrLst/>
+  </dgm:styleLbl>
+  <dgm:styleLbl name="bgAccFollowNode1">
+    <dgm:fillClrLst meth="repeat">
+      <a:schemeClr val="accent1">
+        <a:alpha val="90000"/>
+        <a:tint val="40000"/>
+      </a:schemeClr>
+    </dgm:fillClrLst>
+    <dgm:linClrLst meth="repeat">
+      <a:schemeClr val="accent1">
+        <a:alpha val="90000"/>
+        <a:tint val="40000"/>
+      </a:schemeClr>
+    </dgm:linClrLst>
+    <dgm:effectClrLst/>
+    <dgm:txLinClrLst/>
+    <dgm:txFillClrLst meth="repeat">
+      <a:schemeClr val="dk1"/>
+    </dgm:txFillClrLst>
+    <dgm:txEffectClrLst/>
+  </dgm:styleLbl>
+  <dgm:styleLbl name="fgAcc0">
+    <dgm:fillClrLst meth="repeat">
+      <a:schemeClr val="lt1">
+        <a:alpha val="90000"/>
+      </a:schemeClr>
+    </dgm:fillClrLst>
+    <dgm:linClrLst meth="repeat">
+      <a:schemeClr val="accent1"/>
+    </dgm:linClrLst>
+    <dgm:effectClrLst/>
+    <dgm:txLinClrLst/>
+    <dgm:txFillClrLst meth="repeat">
+      <a:schemeClr val="dk1"/>
+    </dgm:txFillClrLst>
+    <dgm:txEffectClrLst/>
+  </dgm:styleLbl>
+  <dgm:styleLbl name="fgAcc2">
+    <dgm:fillClrLst meth="repeat">
+      <a:schemeClr val="lt1">
+        <a:alpha val="90000"/>
+      </a:schemeClr>
+    </dgm:fillClrLst>
+    <dgm:linClrLst meth="repeat">
+      <a:schemeClr val="accent1"/>
+    </dgm:linClrLst>
+    <dgm:effectClrLst/>
+    <dgm:txLinClrLst/>
+    <dgm:txFillClrLst meth="repeat">
+      <a:schemeClr val="dk1"/>
+    </dgm:txFillClrLst>
+    <dgm:txEffectClrLst/>
+  </dgm:styleLbl>
+  <dgm:styleLbl name="fgAcc3">
+    <dgm:fillClrLst meth="repeat">
+      <a:schemeClr val="lt1">
+        <a:alpha val="90000"/>
+      </a:schemeClr>
+    </dgm:fillClrLst>
+    <dgm:linClrLst meth="repeat">
+      <a:schemeClr val="accent1"/>
+    </dgm:linClrLst>
+    <dgm:effectClrLst/>
+    <dgm:txLinClrLst/>
+    <dgm:txFillClrLst meth="repeat">
+      <a:schemeClr val="dk1"/>
+    </dgm:txFillClrLst>
+    <dgm:txEffectClrLst/>
+  </dgm:styleLbl>
+  <dgm:styleLbl name="fgAcc4">
+    <dgm:fillClrLst meth="repeat">
+      <a:schemeClr val="lt1">
+        <a:alpha val="90000"/>
+      </a:schemeClr>
+    </dgm:fillClrLst>
+    <dgm:linClrLst meth="repeat">
+      <a:schemeClr val="accent1"/>
+    </dgm:linClrLst>
+    <dgm:effectClrLst/>
+    <dgm:txLinClrLst/>
+    <dgm:txFillClrLst meth="repeat">
+      <a:schemeClr val="dk1"/>
+    </dgm:txFillClrLst>
+    <dgm:txEffectClrLst/>
+  </dgm:styleLbl>
+  <dgm:styleLbl name="bgShp">
+    <dgm:fillClrLst meth="repeat">
+      <a:schemeClr val="accent1">
+        <a:tint val="40000"/>
+      </a:schemeClr>
+    </dgm:fillClrLst>
+    <dgm:linClrLst meth="repeat">
+      <a:schemeClr val="accent1"/>
+    </dgm:linClrLst>
+    <dgm:effectClrLst/>
+    <dgm:txLinClrLst/>
+    <dgm:txFillClrLst meth="repeat">
+      <a:schemeClr val="dk1"/>
+    </dgm:txFillClrLst>
+    <dgm:txEffectClrLst/>
+  </dgm:styleLbl>
+  <dgm:styleLbl name="dkBgShp">
+    <dgm:fillClrLst meth="repeat">
+      <a:schemeClr val="accent1">
+        <a:shade val="80000"/>
+      </a:schemeClr>
+    </dgm:fillClrLst>
+    <dgm:linClrLst meth="repeat">
+      <a:schemeClr val="accent1"/>
+    </dgm:linClrLst>
+    <dgm:effectClrLst/>
+    <dgm:txLinClrLst/>
+    <dgm:txFillClrLst meth="repeat">
+      <a:schemeClr val="lt1"/>
+    </dgm:txFillClrLst>
+    <dgm:txEffectClrLst/>
+  </dgm:styleLbl>
+  <dgm:styleLbl name="trBgShp">
+    <dgm:fillClrLst meth="repeat">
+      <a:schemeClr val="accent1">
+        <a:tint val="50000"/>
+        <a:alpha val="40000"/>
+      </a:schemeClr>
+    </dgm:fillClrLst>
+    <dgm:linClrLst meth="repeat">
+      <a:schemeClr val="accent1"/>
+    </dgm:linClrLst>
+    <dgm:effectClrLst/>
+    <dgm:txLinClrLst/>
+    <dgm:txFillClrLst meth="repeat">
+      <a:schemeClr val="lt1"/>
+    </dgm:txFillClrLst>
+    <dgm:txEffectClrLst/>
+  </dgm:styleLbl>
+  <dgm:styleLbl name="fgShp">
+    <dgm:fillClrLst meth="repeat">
+      <a:schemeClr val="accent1">
+        <a:tint val="60000"/>
       </a:schemeClr>
     </dgm:fillClrLst>
     <dgm:linClrLst meth="repeat">
@@ -1176,7 +1924,13 @@
     </dgm:pt>
     <dgm:pt modelId="{30AB2770-B492-48AD-84C5-695BDA28E134}" type="pres">
       <dgm:prSet presAssocID="{4725363A-B69F-4FF0-AC74-23D7A1D4A150}" presName="Accent" presStyleLbl="node1" presStyleIdx="0" presStyleCnt="3"/>
-      <dgm:spPr/>
+      <dgm:spPr>
+        <a:ln>
+          <a:solidFill>
+            <a:schemeClr val="tx1"/>
+          </a:solidFill>
+        </a:ln>
+      </dgm:spPr>
     </dgm:pt>
     <dgm:pt modelId="{37706D51-2842-4F8A-80D2-54D86E34456B}" type="pres">
       <dgm:prSet presAssocID="{4725363A-B69F-4FF0-AC74-23D7A1D4A150}" presName="Parent1" presStyleLbl="revTx" presStyleIdx="0" presStyleCnt="3">
@@ -1194,7 +1948,13 @@
     </dgm:pt>
     <dgm:pt modelId="{668DC389-6720-4236-8011-BFAB07D2AE6E}" type="pres">
       <dgm:prSet presAssocID="{DFC53582-58F9-4F3D-B75A-A00A5F4DA501}" presName="Accent" presStyleLbl="node1" presStyleIdx="1" presStyleCnt="3"/>
-      <dgm:spPr/>
+      <dgm:spPr>
+        <a:ln>
+          <a:solidFill>
+            <a:schemeClr val="tx1"/>
+          </a:solidFill>
+        </a:ln>
+      </dgm:spPr>
     </dgm:pt>
     <dgm:pt modelId="{1EF67315-41CD-4E1F-B065-C474DA2F6D76}" type="pres">
       <dgm:prSet presAssocID="{DFC53582-58F9-4F3D-B75A-A00A5F4DA501}" presName="Parent2" presStyleLbl="revTx" presStyleIdx="1" presStyleCnt="3">
@@ -1212,7 +1972,13 @@
     </dgm:pt>
     <dgm:pt modelId="{19D1F821-3860-4F77-A074-BB6401E6326E}" type="pres">
       <dgm:prSet presAssocID="{82B2E3DA-6C6C-4017-BB49-39C721A45AC6}" presName="Accent" presStyleLbl="node1" presStyleIdx="2" presStyleCnt="3"/>
-      <dgm:spPr/>
+      <dgm:spPr>
+        <a:ln>
+          <a:solidFill>
+            <a:schemeClr val="tx1"/>
+          </a:solidFill>
+        </a:ln>
+      </dgm:spPr>
     </dgm:pt>
     <dgm:pt modelId="{FA32A094-D9B4-4A76-8D4C-335142121065}" type="pres">
       <dgm:prSet presAssocID="{82B2E3DA-6C6C-4017-BB49-39C721A45AC6}" presName="Parent3" presStyleLbl="revTx" presStyleIdx="2" presStyleCnt="3">
@@ -1245,6 +2011,725 @@
   </dgm:cxnLst>
   <dgm:bg/>
   <dgm:whole/>
+  <dgm:extLst>
+    <a:ext uri="http://schemas.microsoft.com/office/drawing/2008/diagram">
+      <dsp:dataModelExt xmlns:dsp="http://schemas.microsoft.com/office/drawing/2008/diagram" relId="rId6" minVer="http://schemas.openxmlformats.org/drawingml/2006/diagram"/>
+    </a:ext>
+  </dgm:extLst>
+</dgm:dataModel>
+</file>
+
+<file path=ppt/diagrams/data2.xml><?xml version="1.0" encoding="utf-8"?>
+<dgm:dataModel xmlns:dgm="http://schemas.openxmlformats.org/drawingml/2006/diagram" xmlns:a="http://schemas.openxmlformats.org/drawingml/2006/main">
+  <dgm:ptLst>
+    <dgm:pt modelId="{7536D2AB-18D2-4540-86EF-97DAA68F47BD}" type="doc">
+      <dgm:prSet loTypeId="urn:microsoft.com/office/officeart/2005/8/layout/process4" loCatId="process" qsTypeId="urn:microsoft.com/office/officeart/2005/8/quickstyle/3d1" qsCatId="3D" csTypeId="urn:microsoft.com/office/officeart/2005/8/colors/accent1_2" csCatId="accent1" phldr="1"/>
+      <dgm:spPr/>
+      <dgm:t>
+        <a:bodyPr/>
+        <a:lstStyle/>
+        <a:p>
+          <a:endParaRPr lang="en-IE"/>
+        </a:p>
+      </dgm:t>
+    </dgm:pt>
+    <dgm:pt modelId="{A147FCF5-872C-402E-8FFA-7F62F8AEC165}">
+      <dgm:prSet phldrT="[Text]" custT="1"/>
+      <dgm:spPr/>
+      <dgm:t>
+        <a:bodyPr/>
+        <a:lstStyle/>
+        <a:p>
+          <a:r>
+            <a:rPr lang="en-IE" sz="4800" b="1" dirty="0"/>
+            <a:t>Workflow Orchestration</a:t>
+          </a:r>
+        </a:p>
+      </dgm:t>
+    </dgm:pt>
+    <dgm:pt modelId="{023FA848-FBA0-4C53-878C-D0304385935A}" type="parTrans" cxnId="{8B432C63-7580-4035-9DEC-014222462859}">
+      <dgm:prSet/>
+      <dgm:spPr/>
+      <dgm:t>
+        <a:bodyPr/>
+        <a:lstStyle/>
+        <a:p>
+          <a:endParaRPr lang="en-IE"/>
+        </a:p>
+      </dgm:t>
+    </dgm:pt>
+    <dgm:pt modelId="{A9E9F8DD-5CCA-40F8-A82E-6599C0DAC405}" type="sibTrans" cxnId="{8B432C63-7580-4035-9DEC-014222462859}">
+      <dgm:prSet/>
+      <dgm:spPr/>
+      <dgm:t>
+        <a:bodyPr/>
+        <a:lstStyle/>
+        <a:p>
+          <a:endParaRPr lang="en-IE"/>
+        </a:p>
+      </dgm:t>
+    </dgm:pt>
+    <dgm:pt modelId="{C9D27329-5219-4575-8C28-F198FA7C7E21}">
+      <dgm:prSet phldrT="[Text]" custT="1"/>
+      <dgm:spPr>
+        <a:ln>
+          <a:solidFill>
+            <a:schemeClr val="tx1"/>
+          </a:solidFill>
+        </a:ln>
+      </dgm:spPr>
+      <dgm:t>
+        <a:bodyPr/>
+        <a:lstStyle/>
+        <a:p>
+          <a:r>
+            <a:rPr lang="en-IE" sz="2800" dirty="0"/>
+            <a:t>Bioinformatic workflow</a:t>
+          </a:r>
+        </a:p>
+      </dgm:t>
+    </dgm:pt>
+    <dgm:pt modelId="{4DC991F5-7EAA-42B5-9763-B81A6440FC1D}" type="parTrans" cxnId="{93CA0631-D0E1-4549-B58F-5AEAAB69B0A6}">
+      <dgm:prSet/>
+      <dgm:spPr/>
+      <dgm:t>
+        <a:bodyPr/>
+        <a:lstStyle/>
+        <a:p>
+          <a:endParaRPr lang="en-IE"/>
+        </a:p>
+      </dgm:t>
+    </dgm:pt>
+    <dgm:pt modelId="{11CC70F2-8FA3-4E4E-83A1-23C4FE696FBD}" type="sibTrans" cxnId="{93CA0631-D0E1-4549-B58F-5AEAAB69B0A6}">
+      <dgm:prSet/>
+      <dgm:spPr/>
+      <dgm:t>
+        <a:bodyPr/>
+        <a:lstStyle/>
+        <a:p>
+          <a:endParaRPr lang="en-IE"/>
+        </a:p>
+      </dgm:t>
+    </dgm:pt>
+    <dgm:pt modelId="{0E7A854B-37EA-407C-A97F-3A739191418A}">
+      <dgm:prSet phldrT="[Text]" custT="1"/>
+      <dgm:spPr>
+        <a:ln>
+          <a:solidFill>
+            <a:schemeClr val="tx1"/>
+          </a:solidFill>
+        </a:ln>
+      </dgm:spPr>
+      <dgm:t>
+        <a:bodyPr/>
+        <a:lstStyle/>
+        <a:p>
+          <a:r>
+            <a:rPr lang="en-IE" sz="2800" dirty="0"/>
+            <a:t>Validates workflow orchestration across generic pilots</a:t>
+          </a:r>
+        </a:p>
+      </dgm:t>
+    </dgm:pt>
+    <dgm:pt modelId="{AF30101B-D9D7-4112-A369-FBA7968528B2}" type="parTrans" cxnId="{BCDBDB62-C3B5-49C6-97FA-E967A4F76A6C}">
+      <dgm:prSet/>
+      <dgm:spPr/>
+      <dgm:t>
+        <a:bodyPr/>
+        <a:lstStyle/>
+        <a:p>
+          <a:endParaRPr lang="en-IE"/>
+        </a:p>
+      </dgm:t>
+    </dgm:pt>
+    <dgm:pt modelId="{711A1785-5017-41F7-B6D5-1B80308B8FF2}" type="sibTrans" cxnId="{BCDBDB62-C3B5-49C6-97FA-E967A4F76A6C}">
+      <dgm:prSet/>
+      <dgm:spPr/>
+      <dgm:t>
+        <a:bodyPr/>
+        <a:lstStyle/>
+        <a:p>
+          <a:endParaRPr lang="en-IE"/>
+        </a:p>
+      </dgm:t>
+    </dgm:pt>
+    <dgm:pt modelId="{4D999CEA-99A2-40B3-ACFE-2DDA830830D4}">
+      <dgm:prSet phldrT="[Text]" custT="1"/>
+      <dgm:spPr>
+        <a:ln>
+          <a:solidFill>
+            <a:schemeClr val="tx1"/>
+          </a:solidFill>
+        </a:ln>
+      </dgm:spPr>
+      <dgm:t>
+        <a:bodyPr/>
+        <a:lstStyle/>
+        <a:p>
+          <a:r>
+            <a:rPr lang="en-IE" sz="4800" b="1" dirty="0"/>
+            <a:t>Task Binding</a:t>
+          </a:r>
+        </a:p>
+      </dgm:t>
+    </dgm:pt>
+    <dgm:pt modelId="{63D0C301-A3D8-4900-A21C-4D4CA4636897}" type="parTrans" cxnId="{666E48F8-172A-4B9D-8257-4FB3F5D02377}">
+      <dgm:prSet/>
+      <dgm:spPr/>
+      <dgm:t>
+        <a:bodyPr/>
+        <a:lstStyle/>
+        <a:p>
+          <a:endParaRPr lang="en-IE"/>
+        </a:p>
+      </dgm:t>
+    </dgm:pt>
+    <dgm:pt modelId="{F78658CE-FCEA-4831-A7C9-BF133CDED4D9}" type="sibTrans" cxnId="{666E48F8-172A-4B9D-8257-4FB3F5D02377}">
+      <dgm:prSet/>
+      <dgm:spPr/>
+      <dgm:t>
+        <a:bodyPr/>
+        <a:lstStyle/>
+        <a:p>
+          <a:endParaRPr lang="en-IE"/>
+        </a:p>
+      </dgm:t>
+    </dgm:pt>
+    <dgm:pt modelId="{475C2055-1A5C-4F93-BCF0-4362192FEDE2}">
+      <dgm:prSet phldrT="[Text]" custT="1"/>
+      <dgm:spPr>
+        <a:ln>
+          <a:solidFill>
+            <a:schemeClr val="tx1"/>
+          </a:solidFill>
+        </a:ln>
+      </dgm:spPr>
+      <dgm:t>
+        <a:bodyPr/>
+        <a:lstStyle/>
+        <a:p>
+          <a:r>
+            <a:rPr lang="en-IE" sz="2800" dirty="0"/>
+            <a:t>Serialized function runner</a:t>
+          </a:r>
+        </a:p>
+      </dgm:t>
+    </dgm:pt>
+    <dgm:pt modelId="{57C885D4-B9D5-44AF-BA3E-95F85B0C4C85}" type="parTrans" cxnId="{B95C229C-BFA4-4E7F-809D-E96E94AB46B1}">
+      <dgm:prSet/>
+      <dgm:spPr/>
+      <dgm:t>
+        <a:bodyPr/>
+        <a:lstStyle/>
+        <a:p>
+          <a:endParaRPr lang="en-IE"/>
+        </a:p>
+      </dgm:t>
+    </dgm:pt>
+    <dgm:pt modelId="{B58CF49D-66C4-492C-A689-EEBD464FF5AB}" type="sibTrans" cxnId="{B95C229C-BFA4-4E7F-809D-E96E94AB46B1}">
+      <dgm:prSet/>
+      <dgm:spPr/>
+      <dgm:t>
+        <a:bodyPr/>
+        <a:lstStyle/>
+        <a:p>
+          <a:endParaRPr lang="en-IE"/>
+        </a:p>
+      </dgm:t>
+    </dgm:pt>
+    <dgm:pt modelId="{4F50E452-5834-4018-8DFF-B75D124C036A}">
+      <dgm:prSet phldrT="[Text]" custT="1"/>
+      <dgm:spPr>
+        <a:ln>
+          <a:solidFill>
+            <a:schemeClr val="tx1"/>
+          </a:solidFill>
+        </a:ln>
+      </dgm:spPr>
+      <dgm:t>
+        <a:bodyPr/>
+        <a:lstStyle/>
+        <a:p>
+          <a:r>
+            <a:rPr lang="en-IE" sz="2800" dirty="0"/>
+            <a:t>Validates explicit binding semantics (early vs late)</a:t>
+          </a:r>
+        </a:p>
+      </dgm:t>
+    </dgm:pt>
+    <dgm:pt modelId="{DB41BBB4-9AA8-49FB-AEE9-BDB37221A1CC}" type="parTrans" cxnId="{660948F6-410D-460D-81D5-714AFD1D381D}">
+      <dgm:prSet/>
+      <dgm:spPr/>
+      <dgm:t>
+        <a:bodyPr/>
+        <a:lstStyle/>
+        <a:p>
+          <a:endParaRPr lang="en-IE"/>
+        </a:p>
+      </dgm:t>
+    </dgm:pt>
+    <dgm:pt modelId="{2B9FE0FB-368C-4C11-8492-76D40C878944}" type="sibTrans" cxnId="{660948F6-410D-460D-81D5-714AFD1D381D}">
+      <dgm:prSet/>
+      <dgm:spPr/>
+      <dgm:t>
+        <a:bodyPr/>
+        <a:lstStyle/>
+        <a:p>
+          <a:endParaRPr lang="en-IE"/>
+        </a:p>
+      </dgm:t>
+    </dgm:pt>
+    <dgm:pt modelId="{A50E33B6-DC31-4625-B7FA-95FFDF7345DB}">
+      <dgm:prSet phldrT="[Text]" custT="1"/>
+      <dgm:spPr>
+        <a:ln>
+          <a:solidFill>
+            <a:schemeClr val="tx1"/>
+          </a:solidFill>
+        </a:ln>
+      </dgm:spPr>
+      <dgm:t>
+        <a:bodyPr/>
+        <a:lstStyle/>
+        <a:p>
+          <a:r>
+            <a:rPr lang="en-IE" sz="4800" b="1" dirty="0"/>
+            <a:t>Deployment</a:t>
+          </a:r>
+          <a:endParaRPr lang="en-IE" sz="4000" b="1" dirty="0"/>
+        </a:p>
+      </dgm:t>
+    </dgm:pt>
+    <dgm:pt modelId="{A7AB8128-93C5-4A74-8036-EF7B01CFFEE9}" type="parTrans" cxnId="{959C6A08-27DF-47D6-9B66-DA641F7D940E}">
+      <dgm:prSet/>
+      <dgm:spPr/>
+      <dgm:t>
+        <a:bodyPr/>
+        <a:lstStyle/>
+        <a:p>
+          <a:endParaRPr lang="en-IE"/>
+        </a:p>
+      </dgm:t>
+    </dgm:pt>
+    <dgm:pt modelId="{736A49DB-336A-4637-ACEC-4A4F70A87822}" type="sibTrans" cxnId="{959C6A08-27DF-47D6-9B66-DA641F7D940E}">
+      <dgm:prSet/>
+      <dgm:spPr/>
+      <dgm:t>
+        <a:bodyPr/>
+        <a:lstStyle/>
+        <a:p>
+          <a:endParaRPr lang="en-IE"/>
+        </a:p>
+      </dgm:t>
+    </dgm:pt>
+    <dgm:pt modelId="{1550EBB1-3E8A-4444-A1CB-728671E739D9}">
+      <dgm:prSet phldrT="[Text]" custT="1"/>
+      <dgm:spPr>
+        <a:ln>
+          <a:solidFill>
+            <a:schemeClr val="tx1"/>
+          </a:solidFill>
+        </a:ln>
+      </dgm:spPr>
+      <dgm:t>
+        <a:bodyPr/>
+        <a:lstStyle/>
+        <a:p>
+          <a:r>
+            <a:rPr lang="en-IE" sz="2800" dirty="0"/>
+            <a:t>AI play time optimizer</a:t>
+          </a:r>
+        </a:p>
+      </dgm:t>
+    </dgm:pt>
+    <dgm:pt modelId="{32899119-31C1-4B31-8ECF-4586BABA58D4}" type="parTrans" cxnId="{ED435997-8F2D-4DBD-ABF8-B74B739979B0}">
+      <dgm:prSet/>
+      <dgm:spPr/>
+      <dgm:t>
+        <a:bodyPr/>
+        <a:lstStyle/>
+        <a:p>
+          <a:endParaRPr lang="en-IE"/>
+        </a:p>
+      </dgm:t>
+    </dgm:pt>
+    <dgm:pt modelId="{9B5E1A06-E163-4B01-A622-E03D5AFA8104}" type="sibTrans" cxnId="{ED435997-8F2D-4DBD-ABF8-B74B739979B0}">
+      <dgm:prSet/>
+      <dgm:spPr/>
+      <dgm:t>
+        <a:bodyPr/>
+        <a:lstStyle/>
+        <a:p>
+          <a:endParaRPr lang="en-IE"/>
+        </a:p>
+      </dgm:t>
+    </dgm:pt>
+    <dgm:pt modelId="{F87B134D-0DC2-4772-90D6-BABD7BD5BC76}">
+      <dgm:prSet phldrT="[Text]" custT="1"/>
+      <dgm:spPr>
+        <a:ln>
+          <a:solidFill>
+            <a:schemeClr val="tx1"/>
+          </a:solidFill>
+        </a:ln>
+      </dgm:spPr>
+      <dgm:t>
+        <a:bodyPr/>
+        <a:lstStyle/>
+        <a:p>
+          <a:r>
+            <a:rPr lang="en-IE" sz="2800" dirty="0"/>
+            <a:t>Validate containerized workloads</a:t>
+          </a:r>
+        </a:p>
+      </dgm:t>
+    </dgm:pt>
+    <dgm:pt modelId="{2E6F75F3-F662-4A68-9323-758B5EFFF8B7}" type="parTrans" cxnId="{C12C3EC6-91DA-4D90-BA1A-0D2BDB5392CD}">
+      <dgm:prSet/>
+      <dgm:spPr/>
+      <dgm:t>
+        <a:bodyPr/>
+        <a:lstStyle/>
+        <a:p>
+          <a:endParaRPr lang="en-IE"/>
+        </a:p>
+      </dgm:t>
+    </dgm:pt>
+    <dgm:pt modelId="{0A75DA54-DE29-44C8-8B8A-7569270B07DC}" type="sibTrans" cxnId="{C12C3EC6-91DA-4D90-BA1A-0D2BDB5392CD}">
+      <dgm:prSet/>
+      <dgm:spPr/>
+      <dgm:t>
+        <a:bodyPr/>
+        <a:lstStyle/>
+        <a:p>
+          <a:endParaRPr lang="en-IE"/>
+        </a:p>
+      </dgm:t>
+    </dgm:pt>
+    <dgm:pt modelId="{28E7254B-914D-454C-9420-190BF7BC8B3F}">
+      <dgm:prSet phldrT="[Text]" custT="1"/>
+      <dgm:spPr>
+        <a:ln>
+          <a:solidFill>
+            <a:schemeClr val="tx1"/>
+          </a:solidFill>
+        </a:ln>
+      </dgm:spPr>
+      <dgm:t>
+        <a:bodyPr/>
+        <a:lstStyle/>
+        <a:p>
+          <a:r>
+            <a:rPr lang="en-IE" sz="2800" dirty="0"/>
+            <a:t>Job environment attached             to tasks</a:t>
+          </a:r>
+        </a:p>
+      </dgm:t>
+    </dgm:pt>
+    <dgm:pt modelId="{8F0A91F8-582C-4A33-8B33-F4735279C0A7}" type="parTrans" cxnId="{39BC804A-82BB-4A5F-A919-C53DC23D8C15}">
+      <dgm:prSet/>
+      <dgm:spPr/>
+      <dgm:t>
+        <a:bodyPr/>
+        <a:lstStyle/>
+        <a:p>
+          <a:endParaRPr lang="en-IE"/>
+        </a:p>
+      </dgm:t>
+    </dgm:pt>
+    <dgm:pt modelId="{8D5BCE3D-5A36-461F-ABB5-D2E303C418C4}" type="sibTrans" cxnId="{39BC804A-82BB-4A5F-A919-C53DC23D8C15}">
+      <dgm:prSet/>
+      <dgm:spPr/>
+      <dgm:t>
+        <a:bodyPr/>
+        <a:lstStyle/>
+        <a:p>
+          <a:endParaRPr lang="en-IE"/>
+        </a:p>
+      </dgm:t>
+    </dgm:pt>
+    <dgm:pt modelId="{A68E66D0-FC3E-4696-AEE9-FA917CE8B43F}">
+      <dgm:prSet phldrT="[Text]" custT="1"/>
+      <dgm:spPr>
+        <a:ln>
+          <a:solidFill>
+            <a:schemeClr val="tx1"/>
+          </a:solidFill>
+        </a:ln>
+      </dgm:spPr>
+      <dgm:t>
+        <a:bodyPr/>
+        <a:lstStyle/>
+        <a:p>
+          <a:r>
+            <a:rPr lang="en-IE" sz="2800" dirty="0"/>
+            <a:t>Node label constraints</a:t>
+          </a:r>
+        </a:p>
+      </dgm:t>
+    </dgm:pt>
+    <dgm:pt modelId="{0BC1C561-C6CF-4EE1-9459-E0E77208A87F}" type="parTrans" cxnId="{F50111F6-A6EB-47CE-8260-B7A1AB99D369}">
+      <dgm:prSet/>
+      <dgm:spPr/>
+      <dgm:t>
+        <a:bodyPr/>
+        <a:lstStyle/>
+        <a:p>
+          <a:endParaRPr lang="en-IE"/>
+        </a:p>
+      </dgm:t>
+    </dgm:pt>
+    <dgm:pt modelId="{979997D5-F373-4E06-9823-A469297F2E86}" type="sibTrans" cxnId="{F50111F6-A6EB-47CE-8260-B7A1AB99D369}">
+      <dgm:prSet/>
+      <dgm:spPr/>
+      <dgm:t>
+        <a:bodyPr/>
+        <a:lstStyle/>
+        <a:p>
+          <a:endParaRPr lang="en-IE"/>
+        </a:p>
+      </dgm:t>
+    </dgm:pt>
+    <dgm:pt modelId="{51E22944-1523-458B-8828-B060A21B0734}">
+      <dgm:prSet phldrT="[Text]" custT="1"/>
+      <dgm:spPr>
+        <a:ln>
+          <a:solidFill>
+            <a:schemeClr val="tx1"/>
+          </a:solidFill>
+        </a:ln>
+      </dgm:spPr>
+      <dgm:t>
+        <a:bodyPr/>
+        <a:lstStyle/>
+        <a:p>
+          <a:r>
+            <a:rPr lang="en-IE" sz="2800" dirty="0"/>
+            <a:t>Operational across relational        &amp; non-relational databases</a:t>
+          </a:r>
+        </a:p>
+      </dgm:t>
+    </dgm:pt>
+    <dgm:pt modelId="{3DF91E0F-97D3-4C63-8906-8F506DA31CAE}" type="parTrans" cxnId="{313B8469-A1FD-4F09-887E-E3142279E0D5}">
+      <dgm:prSet/>
+      <dgm:spPr/>
+      <dgm:t>
+        <a:bodyPr/>
+        <a:lstStyle/>
+        <a:p>
+          <a:endParaRPr lang="en-IE"/>
+        </a:p>
+      </dgm:t>
+    </dgm:pt>
+    <dgm:pt modelId="{56CDA8DD-B1A5-4AB8-AF97-E4AD7080C76E}" type="sibTrans" cxnId="{313B8469-A1FD-4F09-887E-E3142279E0D5}">
+      <dgm:prSet/>
+      <dgm:spPr/>
+      <dgm:t>
+        <a:bodyPr/>
+        <a:lstStyle/>
+        <a:p>
+          <a:endParaRPr lang="en-IE"/>
+        </a:p>
+      </dgm:t>
+    </dgm:pt>
+    <dgm:pt modelId="{A6E38CAE-DC8A-4A4F-BC73-1AEC372FC167}" type="pres">
+      <dgm:prSet presAssocID="{7536D2AB-18D2-4540-86EF-97DAA68F47BD}" presName="Name0" presStyleCnt="0">
+        <dgm:presLayoutVars>
+          <dgm:dir/>
+          <dgm:animLvl val="lvl"/>
+          <dgm:resizeHandles val="exact"/>
+        </dgm:presLayoutVars>
+      </dgm:prSet>
+      <dgm:spPr/>
+    </dgm:pt>
+    <dgm:pt modelId="{555A3F28-1E25-47B1-AA96-93AB9EB21F31}" type="pres">
+      <dgm:prSet presAssocID="{A50E33B6-DC31-4625-B7FA-95FFDF7345DB}" presName="boxAndChildren" presStyleCnt="0"/>
+      <dgm:spPr/>
+    </dgm:pt>
+    <dgm:pt modelId="{C38CF6F9-DC53-4200-9C30-5EC6A4B6A3DD}" type="pres">
+      <dgm:prSet presAssocID="{A50E33B6-DC31-4625-B7FA-95FFDF7345DB}" presName="parentTextBox" presStyleLbl="node1" presStyleIdx="0" presStyleCnt="3"/>
+      <dgm:spPr/>
+    </dgm:pt>
+    <dgm:pt modelId="{32DFF38E-0B8C-4811-8E25-D1D460553EEF}" type="pres">
+      <dgm:prSet presAssocID="{A50E33B6-DC31-4625-B7FA-95FFDF7345DB}" presName="entireBox" presStyleLbl="node1" presStyleIdx="0" presStyleCnt="3"/>
+      <dgm:spPr/>
+    </dgm:pt>
+    <dgm:pt modelId="{2D9853DB-9952-41DA-9459-C0F92D4048FC}" type="pres">
+      <dgm:prSet presAssocID="{A50E33B6-DC31-4625-B7FA-95FFDF7345DB}" presName="descendantBox" presStyleCnt="0"/>
+      <dgm:spPr/>
+    </dgm:pt>
+    <dgm:pt modelId="{2147C4C3-E4ED-44EA-8A74-5AB07B9224C6}" type="pres">
+      <dgm:prSet presAssocID="{1550EBB1-3E8A-4444-A1CB-728671E739D9}" presName="childTextBox" presStyleLbl="fgAccFollowNode1" presStyleIdx="0" presStyleCnt="9" custLinFactNeighborX="-364" custLinFactNeighborY="4503">
+        <dgm:presLayoutVars>
+          <dgm:bulletEnabled val="1"/>
+        </dgm:presLayoutVars>
+      </dgm:prSet>
+      <dgm:spPr/>
+    </dgm:pt>
+    <dgm:pt modelId="{EF0D8E2E-611F-48CE-B1FC-FF5FEBAA646D}" type="pres">
+      <dgm:prSet presAssocID="{F87B134D-0DC2-4772-90D6-BABD7BD5BC76}" presName="childTextBox" presStyleLbl="fgAccFollowNode1" presStyleIdx="1" presStyleCnt="9" custLinFactNeighborX="-364" custLinFactNeighborY="4503">
+        <dgm:presLayoutVars>
+          <dgm:bulletEnabled val="1"/>
+        </dgm:presLayoutVars>
+      </dgm:prSet>
+      <dgm:spPr/>
+    </dgm:pt>
+    <dgm:pt modelId="{A26E17A3-6ADC-4207-BAA9-6F37A7025026}" type="pres">
+      <dgm:prSet presAssocID="{A68E66D0-FC3E-4696-AEE9-FA917CE8B43F}" presName="childTextBox" presStyleLbl="fgAccFollowNode1" presStyleIdx="2" presStyleCnt="9" custLinFactNeighborX="0" custLinFactNeighborY="4503">
+        <dgm:presLayoutVars>
+          <dgm:bulletEnabled val="1"/>
+        </dgm:presLayoutVars>
+      </dgm:prSet>
+      <dgm:spPr/>
+    </dgm:pt>
+    <dgm:pt modelId="{1316DF51-73D5-42A2-A129-8BE6AE24E91D}" type="pres">
+      <dgm:prSet presAssocID="{F78658CE-FCEA-4831-A7C9-BF133CDED4D9}" presName="sp" presStyleCnt="0"/>
+      <dgm:spPr/>
+    </dgm:pt>
+    <dgm:pt modelId="{B8F9DB49-CD09-45A9-B2C9-CE22CE971DE6}" type="pres">
+      <dgm:prSet presAssocID="{4D999CEA-99A2-40B3-ACFE-2DDA830830D4}" presName="arrowAndChildren" presStyleCnt="0"/>
+      <dgm:spPr/>
+    </dgm:pt>
+    <dgm:pt modelId="{EC217E12-E4E2-4324-9106-BE0B637A87F8}" type="pres">
+      <dgm:prSet presAssocID="{4D999CEA-99A2-40B3-ACFE-2DDA830830D4}" presName="parentTextArrow" presStyleLbl="node1" presStyleIdx="0" presStyleCnt="3"/>
+      <dgm:spPr/>
+    </dgm:pt>
+    <dgm:pt modelId="{B5901160-2EED-4BC1-9CD9-CBC7C725C48E}" type="pres">
+      <dgm:prSet presAssocID="{4D999CEA-99A2-40B3-ACFE-2DDA830830D4}" presName="arrow" presStyleLbl="node1" presStyleIdx="1" presStyleCnt="3"/>
+      <dgm:spPr/>
+    </dgm:pt>
+    <dgm:pt modelId="{E6E30F24-75D5-41DC-BD30-BCEEDAB3EDA1}" type="pres">
+      <dgm:prSet presAssocID="{4D999CEA-99A2-40B3-ACFE-2DDA830830D4}" presName="descendantArrow" presStyleCnt="0"/>
+      <dgm:spPr/>
+    </dgm:pt>
+    <dgm:pt modelId="{9CE9A027-D096-4DBA-9F41-ACB337DEDCA0}" type="pres">
+      <dgm:prSet presAssocID="{475C2055-1A5C-4F93-BCF0-4362192FEDE2}" presName="childTextArrow" presStyleLbl="fgAccFollowNode1" presStyleIdx="3" presStyleCnt="9">
+        <dgm:presLayoutVars>
+          <dgm:bulletEnabled val="1"/>
+        </dgm:presLayoutVars>
+      </dgm:prSet>
+      <dgm:spPr/>
+    </dgm:pt>
+    <dgm:pt modelId="{87C3872B-7E02-4085-B647-9CD9B06A0313}" type="pres">
+      <dgm:prSet presAssocID="{4F50E452-5834-4018-8DFF-B75D124C036A}" presName="childTextArrow" presStyleLbl="fgAccFollowNode1" presStyleIdx="4" presStyleCnt="9">
+        <dgm:presLayoutVars>
+          <dgm:bulletEnabled val="1"/>
+        </dgm:presLayoutVars>
+      </dgm:prSet>
+      <dgm:spPr/>
+    </dgm:pt>
+    <dgm:pt modelId="{6A9F14BE-80C0-4B02-B21C-6C233AACAF51}" type="pres">
+      <dgm:prSet presAssocID="{28E7254B-914D-454C-9420-190BF7BC8B3F}" presName="childTextArrow" presStyleLbl="fgAccFollowNode1" presStyleIdx="5" presStyleCnt="9">
+        <dgm:presLayoutVars>
+          <dgm:bulletEnabled val="1"/>
+        </dgm:presLayoutVars>
+      </dgm:prSet>
+      <dgm:spPr/>
+    </dgm:pt>
+    <dgm:pt modelId="{9CE618A8-6BAD-4BC3-A55A-3B35D7AC190A}" type="pres">
+      <dgm:prSet presAssocID="{A9E9F8DD-5CCA-40F8-A82E-6599C0DAC405}" presName="sp" presStyleCnt="0"/>
+      <dgm:spPr/>
+    </dgm:pt>
+    <dgm:pt modelId="{84BC15C4-57C2-4215-B051-1FC12DE4D56A}" type="pres">
+      <dgm:prSet presAssocID="{A147FCF5-872C-402E-8FFA-7F62F8AEC165}" presName="arrowAndChildren" presStyleCnt="0"/>
+      <dgm:spPr/>
+    </dgm:pt>
+    <dgm:pt modelId="{821BB53C-F789-4FDF-A619-F676C9DAFA47}" type="pres">
+      <dgm:prSet presAssocID="{A147FCF5-872C-402E-8FFA-7F62F8AEC165}" presName="parentTextArrow" presStyleLbl="node1" presStyleIdx="1" presStyleCnt="3"/>
+      <dgm:spPr/>
+    </dgm:pt>
+    <dgm:pt modelId="{452ACE0D-CF1A-4DE8-8E3E-A45C514F1149}" type="pres">
+      <dgm:prSet presAssocID="{A147FCF5-872C-402E-8FFA-7F62F8AEC165}" presName="arrow" presStyleLbl="node1" presStyleIdx="2" presStyleCnt="3" custLinFactNeighborY="-504"/>
+      <dgm:spPr/>
+    </dgm:pt>
+    <dgm:pt modelId="{1A7D03B3-E5DC-4BF8-BC0E-673BE8094F20}" type="pres">
+      <dgm:prSet presAssocID="{A147FCF5-872C-402E-8FFA-7F62F8AEC165}" presName="descendantArrow" presStyleCnt="0"/>
+      <dgm:spPr/>
+    </dgm:pt>
+    <dgm:pt modelId="{07763EBB-4274-4F86-A670-BA07EE7CCAD5}" type="pres">
+      <dgm:prSet presAssocID="{C9D27329-5219-4575-8C28-F198FA7C7E21}" presName="childTextArrow" presStyleLbl="fgAccFollowNode1" presStyleIdx="6" presStyleCnt="9" custLinFactNeighborX="364">
+        <dgm:presLayoutVars>
+          <dgm:bulletEnabled val="1"/>
+        </dgm:presLayoutVars>
+      </dgm:prSet>
+      <dgm:spPr/>
+    </dgm:pt>
+    <dgm:pt modelId="{A5384461-3C55-409F-A76C-DC6C5CADCFE8}" type="pres">
+      <dgm:prSet presAssocID="{0E7A854B-37EA-407C-A97F-3A739191418A}" presName="childTextArrow" presStyleLbl="fgAccFollowNode1" presStyleIdx="7" presStyleCnt="9">
+        <dgm:presLayoutVars>
+          <dgm:bulletEnabled val="1"/>
+        </dgm:presLayoutVars>
+      </dgm:prSet>
+      <dgm:spPr/>
+    </dgm:pt>
+    <dgm:pt modelId="{1CEB22B1-9A7E-4A91-AF0C-26B893E69FA6}" type="pres">
+      <dgm:prSet presAssocID="{51E22944-1523-458B-8828-B060A21B0734}" presName="childTextArrow" presStyleLbl="fgAccFollowNode1" presStyleIdx="8" presStyleCnt="9">
+        <dgm:presLayoutVars>
+          <dgm:bulletEnabled val="1"/>
+        </dgm:presLayoutVars>
+      </dgm:prSet>
+      <dgm:spPr/>
+    </dgm:pt>
+  </dgm:ptLst>
+  <dgm:cxnLst>
+    <dgm:cxn modelId="{959C6A08-27DF-47D6-9B66-DA641F7D940E}" srcId="{7536D2AB-18D2-4540-86EF-97DAA68F47BD}" destId="{A50E33B6-DC31-4625-B7FA-95FFDF7345DB}" srcOrd="2" destOrd="0" parTransId="{A7AB8128-93C5-4A74-8036-EF7B01CFFEE9}" sibTransId="{736A49DB-336A-4637-ACEC-4A4F70A87822}"/>
+    <dgm:cxn modelId="{12163709-F225-4219-8EF0-7EA41899A9C2}" type="presOf" srcId="{475C2055-1A5C-4F93-BCF0-4362192FEDE2}" destId="{9CE9A027-D096-4DBA-9F41-ACB337DEDCA0}" srcOrd="0" destOrd="0" presId="urn:microsoft.com/office/officeart/2005/8/layout/process4"/>
+    <dgm:cxn modelId="{E30C4A24-E267-4C49-B2EA-BD4355E628F6}" type="presOf" srcId="{51E22944-1523-458B-8828-B060A21B0734}" destId="{1CEB22B1-9A7E-4A91-AF0C-26B893E69FA6}" srcOrd="0" destOrd="0" presId="urn:microsoft.com/office/officeart/2005/8/layout/process4"/>
+    <dgm:cxn modelId="{93CA0631-D0E1-4549-B58F-5AEAAB69B0A6}" srcId="{A147FCF5-872C-402E-8FFA-7F62F8AEC165}" destId="{C9D27329-5219-4575-8C28-F198FA7C7E21}" srcOrd="0" destOrd="0" parTransId="{4DC991F5-7EAA-42B5-9763-B81A6440FC1D}" sibTransId="{11CC70F2-8FA3-4E4E-83A1-23C4FE696FBD}"/>
+    <dgm:cxn modelId="{16669A5B-C315-4A49-AD9C-FC4AE7CA3AC5}" type="presOf" srcId="{4D999CEA-99A2-40B3-ACFE-2DDA830830D4}" destId="{B5901160-2EED-4BC1-9CD9-CBC7C725C48E}" srcOrd="1" destOrd="0" presId="urn:microsoft.com/office/officeart/2005/8/layout/process4"/>
+    <dgm:cxn modelId="{BCDBDB62-C3B5-49C6-97FA-E967A4F76A6C}" srcId="{A147FCF5-872C-402E-8FFA-7F62F8AEC165}" destId="{0E7A854B-37EA-407C-A97F-3A739191418A}" srcOrd="1" destOrd="0" parTransId="{AF30101B-D9D7-4112-A369-FBA7968528B2}" sibTransId="{711A1785-5017-41F7-B6D5-1B80308B8FF2}"/>
+    <dgm:cxn modelId="{8B432C63-7580-4035-9DEC-014222462859}" srcId="{7536D2AB-18D2-4540-86EF-97DAA68F47BD}" destId="{A147FCF5-872C-402E-8FFA-7F62F8AEC165}" srcOrd="0" destOrd="0" parTransId="{023FA848-FBA0-4C53-878C-D0304385935A}" sibTransId="{A9E9F8DD-5CCA-40F8-A82E-6599C0DAC405}"/>
+    <dgm:cxn modelId="{41D48A64-64D5-4DB1-98B7-64FE88C60DA6}" type="presOf" srcId="{7536D2AB-18D2-4540-86EF-97DAA68F47BD}" destId="{A6E38CAE-DC8A-4A4F-BC73-1AEC372FC167}" srcOrd="0" destOrd="0" presId="urn:microsoft.com/office/officeart/2005/8/layout/process4"/>
+    <dgm:cxn modelId="{313B8469-A1FD-4F09-887E-E3142279E0D5}" srcId="{A147FCF5-872C-402E-8FFA-7F62F8AEC165}" destId="{51E22944-1523-458B-8828-B060A21B0734}" srcOrd="2" destOrd="0" parTransId="{3DF91E0F-97D3-4C63-8906-8F506DA31CAE}" sibTransId="{56CDA8DD-B1A5-4AB8-AF97-E4AD7080C76E}"/>
+    <dgm:cxn modelId="{39BC804A-82BB-4A5F-A919-C53DC23D8C15}" srcId="{4D999CEA-99A2-40B3-ACFE-2DDA830830D4}" destId="{28E7254B-914D-454C-9420-190BF7BC8B3F}" srcOrd="2" destOrd="0" parTransId="{8F0A91F8-582C-4A33-8B33-F4735279C0A7}" sibTransId="{8D5BCE3D-5A36-461F-ABB5-D2E303C418C4}"/>
+    <dgm:cxn modelId="{2BE09C6B-550C-492B-8123-E3285DA6B775}" type="presOf" srcId="{A147FCF5-872C-402E-8FFA-7F62F8AEC165}" destId="{452ACE0D-CF1A-4DE8-8E3E-A45C514F1149}" srcOrd="1" destOrd="0" presId="urn:microsoft.com/office/officeart/2005/8/layout/process4"/>
+    <dgm:cxn modelId="{2D83546D-26B6-42FC-B911-10B6CB990C14}" type="presOf" srcId="{C9D27329-5219-4575-8C28-F198FA7C7E21}" destId="{07763EBB-4274-4F86-A670-BA07EE7CCAD5}" srcOrd="0" destOrd="0" presId="urn:microsoft.com/office/officeart/2005/8/layout/process4"/>
+    <dgm:cxn modelId="{F8E64681-1CD5-4238-A571-0145A84B3E4B}" type="presOf" srcId="{A68E66D0-FC3E-4696-AEE9-FA917CE8B43F}" destId="{A26E17A3-6ADC-4207-BAA9-6F37A7025026}" srcOrd="0" destOrd="0" presId="urn:microsoft.com/office/officeart/2005/8/layout/process4"/>
+    <dgm:cxn modelId="{6039E883-BBA3-4D37-ADEA-76FE6305AADF}" type="presOf" srcId="{1550EBB1-3E8A-4444-A1CB-728671E739D9}" destId="{2147C4C3-E4ED-44EA-8A74-5AB07B9224C6}" srcOrd="0" destOrd="0" presId="urn:microsoft.com/office/officeart/2005/8/layout/process4"/>
+    <dgm:cxn modelId="{14DE1086-4CC0-4962-9121-4BC99060A682}" type="presOf" srcId="{28E7254B-914D-454C-9420-190BF7BC8B3F}" destId="{6A9F14BE-80C0-4B02-B21C-6C233AACAF51}" srcOrd="0" destOrd="0" presId="urn:microsoft.com/office/officeart/2005/8/layout/process4"/>
+    <dgm:cxn modelId="{CA60A795-0B56-4B32-B4B8-258A44CDB63B}" type="presOf" srcId="{A50E33B6-DC31-4625-B7FA-95FFDF7345DB}" destId="{C38CF6F9-DC53-4200-9C30-5EC6A4B6A3DD}" srcOrd="0" destOrd="0" presId="urn:microsoft.com/office/officeart/2005/8/layout/process4"/>
+    <dgm:cxn modelId="{ED435997-8F2D-4DBD-ABF8-B74B739979B0}" srcId="{A50E33B6-DC31-4625-B7FA-95FFDF7345DB}" destId="{1550EBB1-3E8A-4444-A1CB-728671E739D9}" srcOrd="0" destOrd="0" parTransId="{32899119-31C1-4B31-8ECF-4586BABA58D4}" sibTransId="{9B5E1A06-E163-4B01-A622-E03D5AFA8104}"/>
+    <dgm:cxn modelId="{720C1299-B139-4C79-A3E3-1C02E6A91DA5}" type="presOf" srcId="{F87B134D-0DC2-4772-90D6-BABD7BD5BC76}" destId="{EF0D8E2E-611F-48CE-B1FC-FF5FEBAA646D}" srcOrd="0" destOrd="0" presId="urn:microsoft.com/office/officeart/2005/8/layout/process4"/>
+    <dgm:cxn modelId="{A5CA2F99-6DF3-4AD4-A7D6-6EFAB4350F10}" type="presOf" srcId="{4D999CEA-99A2-40B3-ACFE-2DDA830830D4}" destId="{EC217E12-E4E2-4324-9106-BE0B637A87F8}" srcOrd="0" destOrd="0" presId="urn:microsoft.com/office/officeart/2005/8/layout/process4"/>
+    <dgm:cxn modelId="{B95C229C-BFA4-4E7F-809D-E96E94AB46B1}" srcId="{4D999CEA-99A2-40B3-ACFE-2DDA830830D4}" destId="{475C2055-1A5C-4F93-BCF0-4362192FEDE2}" srcOrd="0" destOrd="0" parTransId="{57C885D4-B9D5-44AF-BA3E-95F85B0C4C85}" sibTransId="{B58CF49D-66C4-492C-A689-EEBD464FF5AB}"/>
+    <dgm:cxn modelId="{A71FA0A9-9EA9-4D0E-81E7-802814729BD8}" type="presOf" srcId="{A50E33B6-DC31-4625-B7FA-95FFDF7345DB}" destId="{32DFF38E-0B8C-4811-8E25-D1D460553EEF}" srcOrd="1" destOrd="0" presId="urn:microsoft.com/office/officeart/2005/8/layout/process4"/>
+    <dgm:cxn modelId="{0189B1B2-08AA-492D-A891-BCF750032056}" type="presOf" srcId="{4F50E452-5834-4018-8DFF-B75D124C036A}" destId="{87C3872B-7E02-4085-B647-9CD9B06A0313}" srcOrd="0" destOrd="0" presId="urn:microsoft.com/office/officeart/2005/8/layout/process4"/>
+    <dgm:cxn modelId="{C12C3EC6-91DA-4D90-BA1A-0D2BDB5392CD}" srcId="{A50E33B6-DC31-4625-B7FA-95FFDF7345DB}" destId="{F87B134D-0DC2-4772-90D6-BABD7BD5BC76}" srcOrd="1" destOrd="0" parTransId="{2E6F75F3-F662-4A68-9323-758B5EFFF8B7}" sibTransId="{0A75DA54-DE29-44C8-8B8A-7569270B07DC}"/>
+    <dgm:cxn modelId="{F67826D6-125C-4FAA-89F2-D7906452C10C}" type="presOf" srcId="{0E7A854B-37EA-407C-A97F-3A739191418A}" destId="{A5384461-3C55-409F-A76C-DC6C5CADCFE8}" srcOrd="0" destOrd="0" presId="urn:microsoft.com/office/officeart/2005/8/layout/process4"/>
+    <dgm:cxn modelId="{F50111F6-A6EB-47CE-8260-B7A1AB99D369}" srcId="{A50E33B6-DC31-4625-B7FA-95FFDF7345DB}" destId="{A68E66D0-FC3E-4696-AEE9-FA917CE8B43F}" srcOrd="2" destOrd="0" parTransId="{0BC1C561-C6CF-4EE1-9459-E0E77208A87F}" sibTransId="{979997D5-F373-4E06-9823-A469297F2E86}"/>
+    <dgm:cxn modelId="{660948F6-410D-460D-81D5-714AFD1D381D}" srcId="{4D999CEA-99A2-40B3-ACFE-2DDA830830D4}" destId="{4F50E452-5834-4018-8DFF-B75D124C036A}" srcOrd="1" destOrd="0" parTransId="{DB41BBB4-9AA8-49FB-AEE9-BDB37221A1CC}" sibTransId="{2B9FE0FB-368C-4C11-8492-76D40C878944}"/>
+    <dgm:cxn modelId="{666E48F8-172A-4B9D-8257-4FB3F5D02377}" srcId="{7536D2AB-18D2-4540-86EF-97DAA68F47BD}" destId="{4D999CEA-99A2-40B3-ACFE-2DDA830830D4}" srcOrd="1" destOrd="0" parTransId="{63D0C301-A3D8-4900-A21C-4D4CA4636897}" sibTransId="{F78658CE-FCEA-4831-A7C9-BF133CDED4D9}"/>
+    <dgm:cxn modelId="{77511BFA-3A7A-4DD5-9466-9D66AAFC594F}" type="presOf" srcId="{A147FCF5-872C-402E-8FFA-7F62F8AEC165}" destId="{821BB53C-F789-4FDF-A619-F676C9DAFA47}" srcOrd="0" destOrd="0" presId="urn:microsoft.com/office/officeart/2005/8/layout/process4"/>
+    <dgm:cxn modelId="{D3DB6E62-DFBD-4849-ACB6-0DA7456D2DB4}" type="presParOf" srcId="{A6E38CAE-DC8A-4A4F-BC73-1AEC372FC167}" destId="{555A3F28-1E25-47B1-AA96-93AB9EB21F31}" srcOrd="0" destOrd="0" presId="urn:microsoft.com/office/officeart/2005/8/layout/process4"/>
+    <dgm:cxn modelId="{3F8B5A89-03C3-4D81-8F2C-FBBBF27CF382}" type="presParOf" srcId="{555A3F28-1E25-47B1-AA96-93AB9EB21F31}" destId="{C38CF6F9-DC53-4200-9C30-5EC6A4B6A3DD}" srcOrd="0" destOrd="0" presId="urn:microsoft.com/office/officeart/2005/8/layout/process4"/>
+    <dgm:cxn modelId="{4A483FA8-E5CF-490F-BC91-DBCA94C56442}" type="presParOf" srcId="{555A3F28-1E25-47B1-AA96-93AB9EB21F31}" destId="{32DFF38E-0B8C-4811-8E25-D1D460553EEF}" srcOrd="1" destOrd="0" presId="urn:microsoft.com/office/officeart/2005/8/layout/process4"/>
+    <dgm:cxn modelId="{8D63AA43-4DC4-4374-87B6-4906CA589DA2}" type="presParOf" srcId="{555A3F28-1E25-47B1-AA96-93AB9EB21F31}" destId="{2D9853DB-9952-41DA-9459-C0F92D4048FC}" srcOrd="2" destOrd="0" presId="urn:microsoft.com/office/officeart/2005/8/layout/process4"/>
+    <dgm:cxn modelId="{CA24DF2C-D47C-46FB-B9D8-0ABA8186D3B4}" type="presParOf" srcId="{2D9853DB-9952-41DA-9459-C0F92D4048FC}" destId="{2147C4C3-E4ED-44EA-8A74-5AB07B9224C6}" srcOrd="0" destOrd="0" presId="urn:microsoft.com/office/officeart/2005/8/layout/process4"/>
+    <dgm:cxn modelId="{0AE411B4-978E-47BE-B187-3D95F8996E49}" type="presParOf" srcId="{2D9853DB-9952-41DA-9459-C0F92D4048FC}" destId="{EF0D8E2E-611F-48CE-B1FC-FF5FEBAA646D}" srcOrd="1" destOrd="0" presId="urn:microsoft.com/office/officeart/2005/8/layout/process4"/>
+    <dgm:cxn modelId="{96B76070-C592-4228-9154-2864F64B9493}" type="presParOf" srcId="{2D9853DB-9952-41DA-9459-C0F92D4048FC}" destId="{A26E17A3-6ADC-4207-BAA9-6F37A7025026}" srcOrd="2" destOrd="0" presId="urn:microsoft.com/office/officeart/2005/8/layout/process4"/>
+    <dgm:cxn modelId="{DB157B07-9425-49BA-A7C8-AE225FE1570E}" type="presParOf" srcId="{A6E38CAE-DC8A-4A4F-BC73-1AEC372FC167}" destId="{1316DF51-73D5-42A2-A129-8BE6AE24E91D}" srcOrd="1" destOrd="0" presId="urn:microsoft.com/office/officeart/2005/8/layout/process4"/>
+    <dgm:cxn modelId="{CA4A4CFA-A831-4296-AC4D-3DDF660E58E9}" type="presParOf" srcId="{A6E38CAE-DC8A-4A4F-BC73-1AEC372FC167}" destId="{B8F9DB49-CD09-45A9-B2C9-CE22CE971DE6}" srcOrd="2" destOrd="0" presId="urn:microsoft.com/office/officeart/2005/8/layout/process4"/>
+    <dgm:cxn modelId="{F51A94F5-CE02-4611-9497-6D87BAFAB1A4}" type="presParOf" srcId="{B8F9DB49-CD09-45A9-B2C9-CE22CE971DE6}" destId="{EC217E12-E4E2-4324-9106-BE0B637A87F8}" srcOrd="0" destOrd="0" presId="urn:microsoft.com/office/officeart/2005/8/layout/process4"/>
+    <dgm:cxn modelId="{4369B197-F0E5-4BAC-8E93-B51E319C50E7}" type="presParOf" srcId="{B8F9DB49-CD09-45A9-B2C9-CE22CE971DE6}" destId="{B5901160-2EED-4BC1-9CD9-CBC7C725C48E}" srcOrd="1" destOrd="0" presId="urn:microsoft.com/office/officeart/2005/8/layout/process4"/>
+    <dgm:cxn modelId="{7790F057-101D-4FEE-B4BB-416F03A87FB7}" type="presParOf" srcId="{B8F9DB49-CD09-45A9-B2C9-CE22CE971DE6}" destId="{E6E30F24-75D5-41DC-BD30-BCEEDAB3EDA1}" srcOrd="2" destOrd="0" presId="urn:microsoft.com/office/officeart/2005/8/layout/process4"/>
+    <dgm:cxn modelId="{993589D6-6D1B-4049-8C42-FA528C4C35A8}" type="presParOf" srcId="{E6E30F24-75D5-41DC-BD30-BCEEDAB3EDA1}" destId="{9CE9A027-D096-4DBA-9F41-ACB337DEDCA0}" srcOrd="0" destOrd="0" presId="urn:microsoft.com/office/officeart/2005/8/layout/process4"/>
+    <dgm:cxn modelId="{39F09CA2-B8E7-4E42-897E-90CF66D3532C}" type="presParOf" srcId="{E6E30F24-75D5-41DC-BD30-BCEEDAB3EDA1}" destId="{87C3872B-7E02-4085-B647-9CD9B06A0313}" srcOrd="1" destOrd="0" presId="urn:microsoft.com/office/officeart/2005/8/layout/process4"/>
+    <dgm:cxn modelId="{71AA1812-61D8-4BF1-A8D2-E9050EAD9FE1}" type="presParOf" srcId="{E6E30F24-75D5-41DC-BD30-BCEEDAB3EDA1}" destId="{6A9F14BE-80C0-4B02-B21C-6C233AACAF51}" srcOrd="2" destOrd="0" presId="urn:microsoft.com/office/officeart/2005/8/layout/process4"/>
+    <dgm:cxn modelId="{7EFA4A68-72FA-4B77-BFB8-C53D4BE233E4}" type="presParOf" srcId="{A6E38CAE-DC8A-4A4F-BC73-1AEC372FC167}" destId="{9CE618A8-6BAD-4BC3-A55A-3B35D7AC190A}" srcOrd="3" destOrd="0" presId="urn:microsoft.com/office/officeart/2005/8/layout/process4"/>
+    <dgm:cxn modelId="{1C48AD57-6CD6-4967-8CFA-6FFCC9231B70}" type="presParOf" srcId="{A6E38CAE-DC8A-4A4F-BC73-1AEC372FC167}" destId="{84BC15C4-57C2-4215-B051-1FC12DE4D56A}" srcOrd="4" destOrd="0" presId="urn:microsoft.com/office/officeart/2005/8/layout/process4"/>
+    <dgm:cxn modelId="{0DA12771-6498-4822-8CC7-337E76EFAFF9}" type="presParOf" srcId="{84BC15C4-57C2-4215-B051-1FC12DE4D56A}" destId="{821BB53C-F789-4FDF-A619-F676C9DAFA47}" srcOrd="0" destOrd="0" presId="urn:microsoft.com/office/officeart/2005/8/layout/process4"/>
+    <dgm:cxn modelId="{81944EEE-575C-49F5-87B3-304C559B6FD7}" type="presParOf" srcId="{84BC15C4-57C2-4215-B051-1FC12DE4D56A}" destId="{452ACE0D-CF1A-4DE8-8E3E-A45C514F1149}" srcOrd="1" destOrd="0" presId="urn:microsoft.com/office/officeart/2005/8/layout/process4"/>
+    <dgm:cxn modelId="{00BF2E83-C8E4-4AFC-9414-CFBEE0587C81}" type="presParOf" srcId="{84BC15C4-57C2-4215-B051-1FC12DE4D56A}" destId="{1A7D03B3-E5DC-4BF8-BC0E-673BE8094F20}" srcOrd="2" destOrd="0" presId="urn:microsoft.com/office/officeart/2005/8/layout/process4"/>
+    <dgm:cxn modelId="{5A10022A-D741-429A-8603-EA0CFA5A5EFC}" type="presParOf" srcId="{1A7D03B3-E5DC-4BF8-BC0E-673BE8094F20}" destId="{07763EBB-4274-4F86-A670-BA07EE7CCAD5}" srcOrd="0" destOrd="0" presId="urn:microsoft.com/office/officeart/2005/8/layout/process4"/>
+    <dgm:cxn modelId="{47EC8A92-A198-4820-84FC-7D7E7CC646FB}" type="presParOf" srcId="{1A7D03B3-E5DC-4BF8-BC0E-673BE8094F20}" destId="{A5384461-3C55-409F-A76C-DC6C5CADCFE8}" srcOrd="1" destOrd="0" presId="urn:microsoft.com/office/officeart/2005/8/layout/process4"/>
+    <dgm:cxn modelId="{F7544B4B-402A-4829-A5D4-71EFE4283CE2}" type="presParOf" srcId="{1A7D03B3-E5DC-4BF8-BC0E-673BE8094F20}" destId="{1CEB22B1-9A7E-4A91-AF0C-26B893E69FA6}" srcOrd="2" destOrd="0" presId="urn:microsoft.com/office/officeart/2005/8/layout/process4"/>
+  </dgm:cxnLst>
+  <dgm:bg/>
+  <dgm:whole>
+    <a:ln>
+      <a:noFill/>
+    </a:ln>
+  </dgm:whole>
   <dgm:extLst>
     <a:ext uri="http://schemas.microsoft.com/office/drawing/2008/diagram">
       <dsp:dataModelExt xmlns:dsp="http://schemas.microsoft.com/office/drawing/2008/diagram" relId="rId6" minVer="http://schemas.openxmlformats.org/drawingml/2006/diagram"/>
@@ -1319,7 +2804,9 @@
           <a:lin ang="5400000" scaled="0"/>
         </a:gradFill>
         <a:ln>
-          <a:noFill/>
+          <a:solidFill>
+            <a:schemeClr val="tx1"/>
+          </a:solidFill>
         </a:ln>
         <a:effectLst/>
         <a:scene3d>
@@ -1465,7 +2952,9 @@
           <a:lin ang="5400000" scaled="0"/>
         </a:gradFill>
         <a:ln>
-          <a:noFill/>
+          <a:solidFill>
+            <a:schemeClr val="tx1"/>
+          </a:solidFill>
         </a:ln>
         <a:effectLst/>
         <a:scene3d>
@@ -1608,7 +3097,9 @@
           <a:lin ang="5400000" scaled="0"/>
         </a:gradFill>
         <a:ln>
-          <a:noFill/>
+          <a:solidFill>
+            <a:schemeClr val="tx1"/>
+          </a:solidFill>
         </a:ln>
         <a:effectLst/>
         <a:scene3d>
@@ -1693,6 +3184,1064 @@
       <dsp:txXfrm>
         <a:off x="4300585" y="6746787"/>
         <a:ext cx="2469919" cy="1234664"/>
+      </dsp:txXfrm>
+    </dsp:sp>
+  </dsp:spTree>
+</dsp:drawing>
+</file>
+
+<file path=ppt/diagrams/drawing2.xml><?xml version="1.0" encoding="utf-8"?>
+<dsp:drawing xmlns:dgm="http://schemas.openxmlformats.org/drawingml/2006/diagram" xmlns:dsp="http://schemas.microsoft.com/office/drawing/2008/diagram" xmlns:a="http://schemas.openxmlformats.org/drawingml/2006/main">
+  <dsp:spTree>
+    <dsp:nvGrpSpPr>
+      <dsp:cNvPr id="0" name=""/>
+      <dsp:cNvGrpSpPr/>
+    </dsp:nvGrpSpPr>
+    <dsp:grpSpPr/>
+    <dsp:sp modelId="{32DFF38E-0B8C-4811-8E25-D1D460553EEF}">
+      <dsp:nvSpPr>
+        <dsp:cNvPr id="0" name=""/>
+        <dsp:cNvSpPr/>
+      </dsp:nvSpPr>
+      <dsp:spPr>
+        <a:xfrm>
+          <a:off x="0" y="8791101"/>
+          <a:ext cx="16775589" cy="2885435"/>
+        </a:xfrm>
+        <a:prstGeom prst="rect">
+          <a:avLst/>
+        </a:prstGeom>
+        <a:gradFill rotWithShape="0">
+          <a:gsLst>
+            <a:gs pos="0">
+              <a:schemeClr val="accent1">
+                <a:hueOff val="0"/>
+                <a:satOff val="0"/>
+                <a:lumOff val="0"/>
+                <a:alphaOff val="0"/>
+                <a:satMod val="103000"/>
+                <a:lumMod val="102000"/>
+                <a:tint val="94000"/>
+              </a:schemeClr>
+            </a:gs>
+            <a:gs pos="50000">
+              <a:schemeClr val="accent1">
+                <a:hueOff val="0"/>
+                <a:satOff val="0"/>
+                <a:lumOff val="0"/>
+                <a:alphaOff val="0"/>
+                <a:satMod val="110000"/>
+                <a:lumMod val="100000"/>
+                <a:shade val="100000"/>
+              </a:schemeClr>
+            </a:gs>
+            <a:gs pos="100000">
+              <a:schemeClr val="accent1">
+                <a:hueOff val="0"/>
+                <a:satOff val="0"/>
+                <a:lumOff val="0"/>
+                <a:alphaOff val="0"/>
+                <a:lumMod val="99000"/>
+                <a:satMod val="120000"/>
+                <a:shade val="78000"/>
+              </a:schemeClr>
+            </a:gs>
+          </a:gsLst>
+          <a:lin ang="5400000" scaled="0"/>
+        </a:gradFill>
+        <a:ln>
+          <a:solidFill>
+            <a:schemeClr val="tx1"/>
+          </a:solidFill>
+        </a:ln>
+        <a:effectLst/>
+        <a:scene3d>
+          <a:camera prst="orthographicFront"/>
+          <a:lightRig rig="flat" dir="t"/>
+        </a:scene3d>
+        <a:sp3d prstMaterial="plastic">
+          <a:bevelT w="120900" h="88900"/>
+          <a:bevelB w="88900" h="31750" prst="angle"/>
+        </a:sp3d>
+      </dsp:spPr>
+      <dsp:style>
+        <a:lnRef idx="0">
+          <a:scrgbClr r="0" g="0" b="0"/>
+        </a:lnRef>
+        <a:fillRef idx="3">
+          <a:scrgbClr r="0" g="0" b="0"/>
+        </a:fillRef>
+        <a:effectRef idx="2">
+          <a:scrgbClr r="0" g="0" b="0"/>
+        </a:effectRef>
+        <a:fontRef idx="minor">
+          <a:schemeClr val="lt1"/>
+        </a:fontRef>
+      </dsp:style>
+      <dsp:txBody>
+        <a:bodyPr spcFirstLastPara="0" vert="horz" wrap="square" lIns="341376" tIns="341376" rIns="341376" bIns="341376" numCol="1" spcCol="1270" anchor="ctr" anchorCtr="0">
+          <a:noAutofit/>
+        </a:bodyPr>
+        <a:lstStyle/>
+        <a:p>
+          <a:pPr marL="0" lvl="0" indent="0" algn="ctr" defTabSz="2133600">
+            <a:lnSpc>
+              <a:spcPct val="90000"/>
+            </a:lnSpc>
+            <a:spcBef>
+              <a:spcPct val="0"/>
+            </a:spcBef>
+            <a:spcAft>
+              <a:spcPct val="35000"/>
+            </a:spcAft>
+            <a:buNone/>
+          </a:pPr>
+          <a:r>
+            <a:rPr lang="en-IE" sz="4800" b="1" kern="1200" dirty="0"/>
+            <a:t>Deployment</a:t>
+          </a:r>
+          <a:endParaRPr lang="en-IE" sz="4000" b="1" kern="1200" dirty="0"/>
+        </a:p>
+      </dsp:txBody>
+      <dsp:txXfrm>
+        <a:off x="0" y="8791101"/>
+        <a:ext cx="16775589" cy="1558135"/>
+      </dsp:txXfrm>
+    </dsp:sp>
+    <dsp:sp modelId="{2147C4C3-E4ED-44EA-8A74-5AB07B9224C6}">
+      <dsp:nvSpPr>
+        <dsp:cNvPr id="0" name=""/>
+        <dsp:cNvSpPr/>
+      </dsp:nvSpPr>
+      <dsp:spPr>
+        <a:xfrm>
+          <a:off x="0" y="10351295"/>
+          <a:ext cx="5586402" cy="1327300"/>
+        </a:xfrm>
+        <a:prstGeom prst="rect">
+          <a:avLst/>
+        </a:prstGeom>
+        <a:solidFill>
+          <a:schemeClr val="accent1">
+            <a:alpha val="90000"/>
+            <a:tint val="40000"/>
+            <a:hueOff val="0"/>
+            <a:satOff val="0"/>
+            <a:lumOff val="0"/>
+            <a:alphaOff val="0"/>
+          </a:schemeClr>
+        </a:solidFill>
+        <a:ln w="12700" cap="flat" cmpd="sng" algn="ctr">
+          <a:solidFill>
+            <a:schemeClr val="tx1"/>
+          </a:solidFill>
+          <a:prstDash val="solid"/>
+          <a:miter lim="800000"/>
+        </a:ln>
+        <a:effectLst/>
+        <a:scene3d>
+          <a:camera prst="orthographicFront"/>
+          <a:lightRig rig="flat" dir="t"/>
+        </a:scene3d>
+        <a:sp3d z="190500" extrusionH="12700" prstMaterial="plastic">
+          <a:bevelT w="50800" h="50800"/>
+        </a:sp3d>
+      </dsp:spPr>
+      <dsp:style>
+        <a:lnRef idx="1">
+          <a:scrgbClr r="0" g="0" b="0"/>
+        </a:lnRef>
+        <a:fillRef idx="1">
+          <a:scrgbClr r="0" g="0" b="0"/>
+        </a:fillRef>
+        <a:effectRef idx="2">
+          <a:scrgbClr r="0" g="0" b="0"/>
+        </a:effectRef>
+        <a:fontRef idx="minor"/>
+      </dsp:style>
+      <dsp:txBody>
+        <a:bodyPr spcFirstLastPara="0" vert="horz" wrap="square" lIns="199136" tIns="35560" rIns="199136" bIns="35560" numCol="1" spcCol="1270" anchor="ctr" anchorCtr="0">
+          <a:noAutofit/>
+        </a:bodyPr>
+        <a:lstStyle/>
+        <a:p>
+          <a:pPr marL="0" lvl="0" indent="0" algn="ctr" defTabSz="1244600">
+            <a:lnSpc>
+              <a:spcPct val="90000"/>
+            </a:lnSpc>
+            <a:spcBef>
+              <a:spcPct val="0"/>
+            </a:spcBef>
+            <a:spcAft>
+              <a:spcPct val="35000"/>
+            </a:spcAft>
+            <a:buNone/>
+          </a:pPr>
+          <a:r>
+            <a:rPr lang="en-IE" sz="2800" kern="1200" dirty="0"/>
+            <a:t>AI play time optimizer</a:t>
+          </a:r>
+        </a:p>
+      </dsp:txBody>
+      <dsp:txXfrm>
+        <a:off x="0" y="10351295"/>
+        <a:ext cx="5586402" cy="1327300"/>
+      </dsp:txXfrm>
+    </dsp:sp>
+    <dsp:sp modelId="{EF0D8E2E-611F-48CE-B1FC-FF5FEBAA646D}">
+      <dsp:nvSpPr>
+        <dsp:cNvPr id="0" name=""/>
+        <dsp:cNvSpPr/>
+      </dsp:nvSpPr>
+      <dsp:spPr>
+        <a:xfrm>
+          <a:off x="5574258" y="10351295"/>
+          <a:ext cx="5586402" cy="1327300"/>
+        </a:xfrm>
+        <a:prstGeom prst="rect">
+          <a:avLst/>
+        </a:prstGeom>
+        <a:solidFill>
+          <a:schemeClr val="accent1">
+            <a:alpha val="90000"/>
+            <a:tint val="40000"/>
+            <a:hueOff val="0"/>
+            <a:satOff val="0"/>
+            <a:lumOff val="0"/>
+            <a:alphaOff val="0"/>
+          </a:schemeClr>
+        </a:solidFill>
+        <a:ln w="12700" cap="flat" cmpd="sng" algn="ctr">
+          <a:solidFill>
+            <a:schemeClr val="tx1"/>
+          </a:solidFill>
+          <a:prstDash val="solid"/>
+          <a:miter lim="800000"/>
+        </a:ln>
+        <a:effectLst/>
+        <a:scene3d>
+          <a:camera prst="orthographicFront"/>
+          <a:lightRig rig="flat" dir="t"/>
+        </a:scene3d>
+        <a:sp3d z="190500" extrusionH="12700" prstMaterial="plastic">
+          <a:bevelT w="50800" h="50800"/>
+        </a:sp3d>
+      </dsp:spPr>
+      <dsp:style>
+        <a:lnRef idx="1">
+          <a:scrgbClr r="0" g="0" b="0"/>
+        </a:lnRef>
+        <a:fillRef idx="1">
+          <a:scrgbClr r="0" g="0" b="0"/>
+        </a:fillRef>
+        <a:effectRef idx="2">
+          <a:scrgbClr r="0" g="0" b="0"/>
+        </a:effectRef>
+        <a:fontRef idx="minor"/>
+      </dsp:style>
+      <dsp:txBody>
+        <a:bodyPr spcFirstLastPara="0" vert="horz" wrap="square" lIns="199136" tIns="35560" rIns="199136" bIns="35560" numCol="1" spcCol="1270" anchor="ctr" anchorCtr="0">
+          <a:noAutofit/>
+        </a:bodyPr>
+        <a:lstStyle/>
+        <a:p>
+          <a:pPr marL="0" lvl="0" indent="0" algn="ctr" defTabSz="1244600">
+            <a:lnSpc>
+              <a:spcPct val="90000"/>
+            </a:lnSpc>
+            <a:spcBef>
+              <a:spcPct val="0"/>
+            </a:spcBef>
+            <a:spcAft>
+              <a:spcPct val="35000"/>
+            </a:spcAft>
+            <a:buNone/>
+          </a:pPr>
+          <a:r>
+            <a:rPr lang="en-IE" sz="2800" kern="1200" dirty="0"/>
+            <a:t>Validate containerized workloads</a:t>
+          </a:r>
+        </a:p>
+      </dsp:txBody>
+      <dsp:txXfrm>
+        <a:off x="5574258" y="10351295"/>
+        <a:ext cx="5586402" cy="1327300"/>
+      </dsp:txXfrm>
+    </dsp:sp>
+    <dsp:sp modelId="{A26E17A3-6ADC-4207-BAA9-6F37A7025026}">
+      <dsp:nvSpPr>
+        <dsp:cNvPr id="0" name=""/>
+        <dsp:cNvSpPr/>
+      </dsp:nvSpPr>
+      <dsp:spPr>
+        <a:xfrm>
+          <a:off x="11180995" y="10351295"/>
+          <a:ext cx="5586402" cy="1327300"/>
+        </a:xfrm>
+        <a:prstGeom prst="rect">
+          <a:avLst/>
+        </a:prstGeom>
+        <a:solidFill>
+          <a:schemeClr val="accent1">
+            <a:alpha val="90000"/>
+            <a:tint val="40000"/>
+            <a:hueOff val="0"/>
+            <a:satOff val="0"/>
+            <a:lumOff val="0"/>
+            <a:alphaOff val="0"/>
+          </a:schemeClr>
+        </a:solidFill>
+        <a:ln w="12700" cap="flat" cmpd="sng" algn="ctr">
+          <a:solidFill>
+            <a:schemeClr val="tx1"/>
+          </a:solidFill>
+          <a:prstDash val="solid"/>
+          <a:miter lim="800000"/>
+        </a:ln>
+        <a:effectLst/>
+        <a:scene3d>
+          <a:camera prst="orthographicFront"/>
+          <a:lightRig rig="flat" dir="t"/>
+        </a:scene3d>
+        <a:sp3d z="190500" extrusionH="12700" prstMaterial="plastic">
+          <a:bevelT w="50800" h="50800"/>
+        </a:sp3d>
+      </dsp:spPr>
+      <dsp:style>
+        <a:lnRef idx="1">
+          <a:scrgbClr r="0" g="0" b="0"/>
+        </a:lnRef>
+        <a:fillRef idx="1">
+          <a:scrgbClr r="0" g="0" b="0"/>
+        </a:fillRef>
+        <a:effectRef idx="2">
+          <a:scrgbClr r="0" g="0" b="0"/>
+        </a:effectRef>
+        <a:fontRef idx="minor"/>
+      </dsp:style>
+      <dsp:txBody>
+        <a:bodyPr spcFirstLastPara="0" vert="horz" wrap="square" lIns="199136" tIns="35560" rIns="199136" bIns="35560" numCol="1" spcCol="1270" anchor="ctr" anchorCtr="0">
+          <a:noAutofit/>
+        </a:bodyPr>
+        <a:lstStyle/>
+        <a:p>
+          <a:pPr marL="0" lvl="0" indent="0" algn="ctr" defTabSz="1244600">
+            <a:lnSpc>
+              <a:spcPct val="90000"/>
+            </a:lnSpc>
+            <a:spcBef>
+              <a:spcPct val="0"/>
+            </a:spcBef>
+            <a:spcAft>
+              <a:spcPct val="35000"/>
+            </a:spcAft>
+            <a:buNone/>
+          </a:pPr>
+          <a:r>
+            <a:rPr lang="en-IE" sz="2800" kern="1200" dirty="0"/>
+            <a:t>Node label constraints</a:t>
+          </a:r>
+        </a:p>
+      </dsp:txBody>
+      <dsp:txXfrm>
+        <a:off x="11180995" y="10351295"/>
+        <a:ext cx="5586402" cy="1327300"/>
+      </dsp:txXfrm>
+    </dsp:sp>
+    <dsp:sp modelId="{B5901160-2EED-4BC1-9CD9-CBC7C725C48E}">
+      <dsp:nvSpPr>
+        <dsp:cNvPr id="0" name=""/>
+        <dsp:cNvSpPr/>
+      </dsp:nvSpPr>
+      <dsp:spPr>
+        <a:xfrm rot="10800000">
+          <a:off x="0" y="4396582"/>
+          <a:ext cx="16775589" cy="4437799"/>
+        </a:xfrm>
+        <a:prstGeom prst="upArrowCallout">
+          <a:avLst/>
+        </a:prstGeom>
+        <a:gradFill rotWithShape="0">
+          <a:gsLst>
+            <a:gs pos="0">
+              <a:schemeClr val="accent1">
+                <a:hueOff val="0"/>
+                <a:satOff val="0"/>
+                <a:lumOff val="0"/>
+                <a:alphaOff val="0"/>
+                <a:satMod val="103000"/>
+                <a:lumMod val="102000"/>
+                <a:tint val="94000"/>
+              </a:schemeClr>
+            </a:gs>
+            <a:gs pos="50000">
+              <a:schemeClr val="accent1">
+                <a:hueOff val="0"/>
+                <a:satOff val="0"/>
+                <a:lumOff val="0"/>
+                <a:alphaOff val="0"/>
+                <a:satMod val="110000"/>
+                <a:lumMod val="100000"/>
+                <a:shade val="100000"/>
+              </a:schemeClr>
+            </a:gs>
+            <a:gs pos="100000">
+              <a:schemeClr val="accent1">
+                <a:hueOff val="0"/>
+                <a:satOff val="0"/>
+                <a:lumOff val="0"/>
+                <a:alphaOff val="0"/>
+                <a:lumMod val="99000"/>
+                <a:satMod val="120000"/>
+                <a:shade val="78000"/>
+              </a:schemeClr>
+            </a:gs>
+          </a:gsLst>
+          <a:lin ang="5400000" scaled="0"/>
+        </a:gradFill>
+        <a:ln>
+          <a:solidFill>
+            <a:schemeClr val="tx1"/>
+          </a:solidFill>
+        </a:ln>
+        <a:effectLst/>
+        <a:scene3d>
+          <a:camera prst="orthographicFront"/>
+          <a:lightRig rig="flat" dir="t"/>
+        </a:scene3d>
+        <a:sp3d prstMaterial="plastic">
+          <a:bevelT w="120900" h="88900"/>
+          <a:bevelB w="88900" h="31750" prst="angle"/>
+        </a:sp3d>
+      </dsp:spPr>
+      <dsp:style>
+        <a:lnRef idx="0">
+          <a:scrgbClr r="0" g="0" b="0"/>
+        </a:lnRef>
+        <a:fillRef idx="3">
+          <a:scrgbClr r="0" g="0" b="0"/>
+        </a:fillRef>
+        <a:effectRef idx="2">
+          <a:scrgbClr r="0" g="0" b="0"/>
+        </a:effectRef>
+        <a:fontRef idx="minor">
+          <a:schemeClr val="lt1"/>
+        </a:fontRef>
+      </dsp:style>
+      <dsp:txBody>
+        <a:bodyPr spcFirstLastPara="0" vert="horz" wrap="square" lIns="341376" tIns="341376" rIns="341376" bIns="341376" numCol="1" spcCol="1270" anchor="ctr" anchorCtr="0">
+          <a:noAutofit/>
+        </a:bodyPr>
+        <a:lstStyle/>
+        <a:p>
+          <a:pPr marL="0" lvl="0" indent="0" algn="ctr" defTabSz="2133600">
+            <a:lnSpc>
+              <a:spcPct val="90000"/>
+            </a:lnSpc>
+            <a:spcBef>
+              <a:spcPct val="0"/>
+            </a:spcBef>
+            <a:spcAft>
+              <a:spcPct val="35000"/>
+            </a:spcAft>
+            <a:buNone/>
+          </a:pPr>
+          <a:r>
+            <a:rPr lang="en-IE" sz="4800" b="1" kern="1200" dirty="0"/>
+            <a:t>Task Binding</a:t>
+          </a:r>
+        </a:p>
+      </dsp:txBody>
+      <dsp:txXfrm rot="-10800000">
+        <a:off x="0" y="4396582"/>
+        <a:ext cx="16775589" cy="1557667"/>
+      </dsp:txXfrm>
+    </dsp:sp>
+    <dsp:sp modelId="{9CE9A027-D096-4DBA-9F41-ACB337DEDCA0}">
+      <dsp:nvSpPr>
+        <dsp:cNvPr id="0" name=""/>
+        <dsp:cNvSpPr/>
+      </dsp:nvSpPr>
+      <dsp:spPr>
+        <a:xfrm>
+          <a:off x="8191" y="5954250"/>
+          <a:ext cx="5586402" cy="1326902"/>
+        </a:xfrm>
+        <a:prstGeom prst="rect">
+          <a:avLst/>
+        </a:prstGeom>
+        <a:solidFill>
+          <a:schemeClr val="accent1">
+            <a:alpha val="90000"/>
+            <a:tint val="40000"/>
+            <a:hueOff val="0"/>
+            <a:satOff val="0"/>
+            <a:lumOff val="0"/>
+            <a:alphaOff val="0"/>
+          </a:schemeClr>
+        </a:solidFill>
+        <a:ln w="12700" cap="flat" cmpd="sng" algn="ctr">
+          <a:solidFill>
+            <a:schemeClr val="tx1"/>
+          </a:solidFill>
+          <a:prstDash val="solid"/>
+          <a:miter lim="800000"/>
+        </a:ln>
+        <a:effectLst/>
+        <a:scene3d>
+          <a:camera prst="orthographicFront"/>
+          <a:lightRig rig="flat" dir="t"/>
+        </a:scene3d>
+        <a:sp3d z="190500" extrusionH="12700" prstMaterial="plastic">
+          <a:bevelT w="50800" h="50800"/>
+        </a:sp3d>
+      </dsp:spPr>
+      <dsp:style>
+        <a:lnRef idx="1">
+          <a:scrgbClr r="0" g="0" b="0"/>
+        </a:lnRef>
+        <a:fillRef idx="1">
+          <a:scrgbClr r="0" g="0" b="0"/>
+        </a:fillRef>
+        <a:effectRef idx="2">
+          <a:scrgbClr r="0" g="0" b="0"/>
+        </a:effectRef>
+        <a:fontRef idx="minor"/>
+      </dsp:style>
+      <dsp:txBody>
+        <a:bodyPr spcFirstLastPara="0" vert="horz" wrap="square" lIns="199136" tIns="35560" rIns="199136" bIns="35560" numCol="1" spcCol="1270" anchor="ctr" anchorCtr="0">
+          <a:noAutofit/>
+        </a:bodyPr>
+        <a:lstStyle/>
+        <a:p>
+          <a:pPr marL="0" lvl="0" indent="0" algn="ctr" defTabSz="1244600">
+            <a:lnSpc>
+              <a:spcPct val="90000"/>
+            </a:lnSpc>
+            <a:spcBef>
+              <a:spcPct val="0"/>
+            </a:spcBef>
+            <a:spcAft>
+              <a:spcPct val="35000"/>
+            </a:spcAft>
+            <a:buNone/>
+          </a:pPr>
+          <a:r>
+            <a:rPr lang="en-IE" sz="2800" kern="1200" dirty="0"/>
+            <a:t>Serialized function runner</a:t>
+          </a:r>
+        </a:p>
+      </dsp:txBody>
+      <dsp:txXfrm>
+        <a:off x="8191" y="5954250"/>
+        <a:ext cx="5586402" cy="1326902"/>
+      </dsp:txXfrm>
+    </dsp:sp>
+    <dsp:sp modelId="{87C3872B-7E02-4085-B647-9CD9B06A0313}">
+      <dsp:nvSpPr>
+        <dsp:cNvPr id="0" name=""/>
+        <dsp:cNvSpPr/>
+      </dsp:nvSpPr>
+      <dsp:spPr>
+        <a:xfrm>
+          <a:off x="5594593" y="5954250"/>
+          <a:ext cx="5586402" cy="1326902"/>
+        </a:xfrm>
+        <a:prstGeom prst="rect">
+          <a:avLst/>
+        </a:prstGeom>
+        <a:solidFill>
+          <a:schemeClr val="accent1">
+            <a:alpha val="90000"/>
+            <a:tint val="40000"/>
+            <a:hueOff val="0"/>
+            <a:satOff val="0"/>
+            <a:lumOff val="0"/>
+            <a:alphaOff val="0"/>
+          </a:schemeClr>
+        </a:solidFill>
+        <a:ln w="12700" cap="flat" cmpd="sng" algn="ctr">
+          <a:solidFill>
+            <a:schemeClr val="tx1"/>
+          </a:solidFill>
+          <a:prstDash val="solid"/>
+          <a:miter lim="800000"/>
+        </a:ln>
+        <a:effectLst/>
+        <a:scene3d>
+          <a:camera prst="orthographicFront"/>
+          <a:lightRig rig="flat" dir="t"/>
+        </a:scene3d>
+        <a:sp3d z="190500" extrusionH="12700" prstMaterial="plastic">
+          <a:bevelT w="50800" h="50800"/>
+        </a:sp3d>
+      </dsp:spPr>
+      <dsp:style>
+        <a:lnRef idx="1">
+          <a:scrgbClr r="0" g="0" b="0"/>
+        </a:lnRef>
+        <a:fillRef idx="1">
+          <a:scrgbClr r="0" g="0" b="0"/>
+        </a:fillRef>
+        <a:effectRef idx="2">
+          <a:scrgbClr r="0" g="0" b="0"/>
+        </a:effectRef>
+        <a:fontRef idx="minor"/>
+      </dsp:style>
+      <dsp:txBody>
+        <a:bodyPr spcFirstLastPara="0" vert="horz" wrap="square" lIns="199136" tIns="35560" rIns="199136" bIns="35560" numCol="1" spcCol="1270" anchor="ctr" anchorCtr="0">
+          <a:noAutofit/>
+        </a:bodyPr>
+        <a:lstStyle/>
+        <a:p>
+          <a:pPr marL="0" lvl="0" indent="0" algn="ctr" defTabSz="1244600">
+            <a:lnSpc>
+              <a:spcPct val="90000"/>
+            </a:lnSpc>
+            <a:spcBef>
+              <a:spcPct val="0"/>
+            </a:spcBef>
+            <a:spcAft>
+              <a:spcPct val="35000"/>
+            </a:spcAft>
+            <a:buNone/>
+          </a:pPr>
+          <a:r>
+            <a:rPr lang="en-IE" sz="2800" kern="1200" dirty="0"/>
+            <a:t>Validates explicit binding semantics (early vs late)</a:t>
+          </a:r>
+        </a:p>
+      </dsp:txBody>
+      <dsp:txXfrm>
+        <a:off x="5594593" y="5954250"/>
+        <a:ext cx="5586402" cy="1326902"/>
+      </dsp:txXfrm>
+    </dsp:sp>
+    <dsp:sp modelId="{6A9F14BE-80C0-4B02-B21C-6C233AACAF51}">
+      <dsp:nvSpPr>
+        <dsp:cNvPr id="0" name=""/>
+        <dsp:cNvSpPr/>
+      </dsp:nvSpPr>
+      <dsp:spPr>
+        <a:xfrm>
+          <a:off x="11180995" y="5954250"/>
+          <a:ext cx="5586402" cy="1326902"/>
+        </a:xfrm>
+        <a:prstGeom prst="rect">
+          <a:avLst/>
+        </a:prstGeom>
+        <a:solidFill>
+          <a:schemeClr val="accent1">
+            <a:alpha val="90000"/>
+            <a:tint val="40000"/>
+            <a:hueOff val="0"/>
+            <a:satOff val="0"/>
+            <a:lumOff val="0"/>
+            <a:alphaOff val="0"/>
+          </a:schemeClr>
+        </a:solidFill>
+        <a:ln w="12700" cap="flat" cmpd="sng" algn="ctr">
+          <a:solidFill>
+            <a:schemeClr val="tx1"/>
+          </a:solidFill>
+          <a:prstDash val="solid"/>
+          <a:miter lim="800000"/>
+        </a:ln>
+        <a:effectLst/>
+        <a:scene3d>
+          <a:camera prst="orthographicFront"/>
+          <a:lightRig rig="flat" dir="t"/>
+        </a:scene3d>
+        <a:sp3d z="190500" extrusionH="12700" prstMaterial="plastic">
+          <a:bevelT w="50800" h="50800"/>
+        </a:sp3d>
+      </dsp:spPr>
+      <dsp:style>
+        <a:lnRef idx="1">
+          <a:scrgbClr r="0" g="0" b="0"/>
+        </a:lnRef>
+        <a:fillRef idx="1">
+          <a:scrgbClr r="0" g="0" b="0"/>
+        </a:fillRef>
+        <a:effectRef idx="2">
+          <a:scrgbClr r="0" g="0" b="0"/>
+        </a:effectRef>
+        <a:fontRef idx="minor"/>
+      </dsp:style>
+      <dsp:txBody>
+        <a:bodyPr spcFirstLastPara="0" vert="horz" wrap="square" lIns="199136" tIns="35560" rIns="199136" bIns="35560" numCol="1" spcCol="1270" anchor="ctr" anchorCtr="0">
+          <a:noAutofit/>
+        </a:bodyPr>
+        <a:lstStyle/>
+        <a:p>
+          <a:pPr marL="0" lvl="0" indent="0" algn="ctr" defTabSz="1244600">
+            <a:lnSpc>
+              <a:spcPct val="90000"/>
+            </a:lnSpc>
+            <a:spcBef>
+              <a:spcPct val="0"/>
+            </a:spcBef>
+            <a:spcAft>
+              <a:spcPct val="35000"/>
+            </a:spcAft>
+            <a:buNone/>
+          </a:pPr>
+          <a:r>
+            <a:rPr lang="en-IE" sz="2800" kern="1200" dirty="0"/>
+            <a:t>Job environment attached             to tasks</a:t>
+          </a:r>
+        </a:p>
+      </dsp:txBody>
+      <dsp:txXfrm>
+        <a:off x="11180995" y="5954250"/>
+        <a:ext cx="5586402" cy="1326902"/>
+      </dsp:txXfrm>
+    </dsp:sp>
+    <dsp:sp modelId="{452ACE0D-CF1A-4DE8-8E3E-A45C514F1149}">
+      <dsp:nvSpPr>
+        <dsp:cNvPr id="0" name=""/>
+        <dsp:cNvSpPr/>
+      </dsp:nvSpPr>
+      <dsp:spPr>
+        <a:xfrm rot="10800000">
+          <a:off x="0" y="0"/>
+          <a:ext cx="16775589" cy="4437799"/>
+        </a:xfrm>
+        <a:prstGeom prst="upArrowCallout">
+          <a:avLst/>
+        </a:prstGeom>
+        <a:gradFill rotWithShape="0">
+          <a:gsLst>
+            <a:gs pos="0">
+              <a:schemeClr val="accent1">
+                <a:hueOff val="0"/>
+                <a:satOff val="0"/>
+                <a:lumOff val="0"/>
+                <a:alphaOff val="0"/>
+                <a:satMod val="103000"/>
+                <a:lumMod val="102000"/>
+                <a:tint val="94000"/>
+              </a:schemeClr>
+            </a:gs>
+            <a:gs pos="50000">
+              <a:schemeClr val="accent1">
+                <a:hueOff val="0"/>
+                <a:satOff val="0"/>
+                <a:lumOff val="0"/>
+                <a:alphaOff val="0"/>
+                <a:satMod val="110000"/>
+                <a:lumMod val="100000"/>
+                <a:shade val="100000"/>
+              </a:schemeClr>
+            </a:gs>
+            <a:gs pos="100000">
+              <a:schemeClr val="accent1">
+                <a:hueOff val="0"/>
+                <a:satOff val="0"/>
+                <a:lumOff val="0"/>
+                <a:alphaOff val="0"/>
+                <a:lumMod val="99000"/>
+                <a:satMod val="120000"/>
+                <a:shade val="78000"/>
+              </a:schemeClr>
+            </a:gs>
+          </a:gsLst>
+          <a:lin ang="5400000" scaled="0"/>
+        </a:gradFill>
+        <a:ln>
+          <a:noFill/>
+        </a:ln>
+        <a:effectLst/>
+        <a:scene3d>
+          <a:camera prst="orthographicFront"/>
+          <a:lightRig rig="flat" dir="t"/>
+        </a:scene3d>
+        <a:sp3d prstMaterial="plastic">
+          <a:bevelT w="120900" h="88900"/>
+          <a:bevelB w="88900" h="31750" prst="angle"/>
+        </a:sp3d>
+      </dsp:spPr>
+      <dsp:style>
+        <a:lnRef idx="0">
+          <a:scrgbClr r="0" g="0" b="0"/>
+        </a:lnRef>
+        <a:fillRef idx="3">
+          <a:scrgbClr r="0" g="0" b="0"/>
+        </a:fillRef>
+        <a:effectRef idx="2">
+          <a:scrgbClr r="0" g="0" b="0"/>
+        </a:effectRef>
+        <a:fontRef idx="minor">
+          <a:schemeClr val="lt1"/>
+        </a:fontRef>
+      </dsp:style>
+      <dsp:txBody>
+        <a:bodyPr spcFirstLastPara="0" vert="horz" wrap="square" lIns="341376" tIns="341376" rIns="341376" bIns="341376" numCol="1" spcCol="1270" anchor="ctr" anchorCtr="0">
+          <a:noAutofit/>
+        </a:bodyPr>
+        <a:lstStyle/>
+        <a:p>
+          <a:pPr marL="0" lvl="0" indent="0" algn="ctr" defTabSz="2133600">
+            <a:lnSpc>
+              <a:spcPct val="90000"/>
+            </a:lnSpc>
+            <a:spcBef>
+              <a:spcPct val="0"/>
+            </a:spcBef>
+            <a:spcAft>
+              <a:spcPct val="35000"/>
+            </a:spcAft>
+            <a:buNone/>
+          </a:pPr>
+          <a:r>
+            <a:rPr lang="en-IE" sz="4800" b="1" kern="1200" dirty="0"/>
+            <a:t>Workflow Orchestration</a:t>
+          </a:r>
+        </a:p>
+      </dsp:txBody>
+      <dsp:txXfrm rot="-10800000">
+        <a:off x="0" y="0"/>
+        <a:ext cx="16775589" cy="1557667"/>
+      </dsp:txXfrm>
+    </dsp:sp>
+    <dsp:sp modelId="{07763EBB-4274-4F86-A670-BA07EE7CCAD5}">
+      <dsp:nvSpPr>
+        <dsp:cNvPr id="0" name=""/>
+        <dsp:cNvSpPr/>
+      </dsp:nvSpPr>
+      <dsp:spPr>
+        <a:xfrm>
+          <a:off x="28525" y="1559732"/>
+          <a:ext cx="5586402" cy="1326902"/>
+        </a:xfrm>
+        <a:prstGeom prst="rect">
+          <a:avLst/>
+        </a:prstGeom>
+        <a:solidFill>
+          <a:schemeClr val="accent1">
+            <a:alpha val="90000"/>
+            <a:tint val="40000"/>
+            <a:hueOff val="0"/>
+            <a:satOff val="0"/>
+            <a:lumOff val="0"/>
+            <a:alphaOff val="0"/>
+          </a:schemeClr>
+        </a:solidFill>
+        <a:ln w="12700" cap="flat" cmpd="sng" algn="ctr">
+          <a:solidFill>
+            <a:schemeClr val="tx1"/>
+          </a:solidFill>
+          <a:prstDash val="solid"/>
+          <a:miter lim="800000"/>
+        </a:ln>
+        <a:effectLst/>
+        <a:scene3d>
+          <a:camera prst="orthographicFront"/>
+          <a:lightRig rig="flat" dir="t"/>
+        </a:scene3d>
+        <a:sp3d z="190500" extrusionH="12700" prstMaterial="plastic">
+          <a:bevelT w="50800" h="50800"/>
+        </a:sp3d>
+      </dsp:spPr>
+      <dsp:style>
+        <a:lnRef idx="1">
+          <a:scrgbClr r="0" g="0" b="0"/>
+        </a:lnRef>
+        <a:fillRef idx="1">
+          <a:scrgbClr r="0" g="0" b="0"/>
+        </a:fillRef>
+        <a:effectRef idx="2">
+          <a:scrgbClr r="0" g="0" b="0"/>
+        </a:effectRef>
+        <a:fontRef idx="minor"/>
+      </dsp:style>
+      <dsp:txBody>
+        <a:bodyPr spcFirstLastPara="0" vert="horz" wrap="square" lIns="199136" tIns="35560" rIns="199136" bIns="35560" numCol="1" spcCol="1270" anchor="ctr" anchorCtr="0">
+          <a:noAutofit/>
+        </a:bodyPr>
+        <a:lstStyle/>
+        <a:p>
+          <a:pPr marL="0" lvl="0" indent="0" algn="ctr" defTabSz="1244600">
+            <a:lnSpc>
+              <a:spcPct val="90000"/>
+            </a:lnSpc>
+            <a:spcBef>
+              <a:spcPct val="0"/>
+            </a:spcBef>
+            <a:spcAft>
+              <a:spcPct val="35000"/>
+            </a:spcAft>
+            <a:buNone/>
+          </a:pPr>
+          <a:r>
+            <a:rPr lang="en-IE" sz="2800" kern="1200" dirty="0"/>
+            <a:t>Bioinformatic workflow</a:t>
+          </a:r>
+        </a:p>
+      </dsp:txBody>
+      <dsp:txXfrm>
+        <a:off x="28525" y="1559732"/>
+        <a:ext cx="5586402" cy="1326902"/>
+      </dsp:txXfrm>
+    </dsp:sp>
+    <dsp:sp modelId="{A5384461-3C55-409F-A76C-DC6C5CADCFE8}">
+      <dsp:nvSpPr>
+        <dsp:cNvPr id="0" name=""/>
+        <dsp:cNvSpPr/>
+      </dsp:nvSpPr>
+      <dsp:spPr>
+        <a:xfrm>
+          <a:off x="5594593" y="1559732"/>
+          <a:ext cx="5586402" cy="1326902"/>
+        </a:xfrm>
+        <a:prstGeom prst="rect">
+          <a:avLst/>
+        </a:prstGeom>
+        <a:solidFill>
+          <a:schemeClr val="accent1">
+            <a:alpha val="90000"/>
+            <a:tint val="40000"/>
+            <a:hueOff val="0"/>
+            <a:satOff val="0"/>
+            <a:lumOff val="0"/>
+            <a:alphaOff val="0"/>
+          </a:schemeClr>
+        </a:solidFill>
+        <a:ln w="12700" cap="flat" cmpd="sng" algn="ctr">
+          <a:solidFill>
+            <a:schemeClr val="tx1"/>
+          </a:solidFill>
+          <a:prstDash val="solid"/>
+          <a:miter lim="800000"/>
+        </a:ln>
+        <a:effectLst/>
+        <a:scene3d>
+          <a:camera prst="orthographicFront"/>
+          <a:lightRig rig="flat" dir="t"/>
+        </a:scene3d>
+        <a:sp3d z="190500" extrusionH="12700" prstMaterial="plastic">
+          <a:bevelT w="50800" h="50800"/>
+        </a:sp3d>
+      </dsp:spPr>
+      <dsp:style>
+        <a:lnRef idx="1">
+          <a:scrgbClr r="0" g="0" b="0"/>
+        </a:lnRef>
+        <a:fillRef idx="1">
+          <a:scrgbClr r="0" g="0" b="0"/>
+        </a:fillRef>
+        <a:effectRef idx="2">
+          <a:scrgbClr r="0" g="0" b="0"/>
+        </a:effectRef>
+        <a:fontRef idx="minor"/>
+      </dsp:style>
+      <dsp:txBody>
+        <a:bodyPr spcFirstLastPara="0" vert="horz" wrap="square" lIns="199136" tIns="35560" rIns="199136" bIns="35560" numCol="1" spcCol="1270" anchor="ctr" anchorCtr="0">
+          <a:noAutofit/>
+        </a:bodyPr>
+        <a:lstStyle/>
+        <a:p>
+          <a:pPr marL="0" lvl="0" indent="0" algn="ctr" defTabSz="1244600">
+            <a:lnSpc>
+              <a:spcPct val="90000"/>
+            </a:lnSpc>
+            <a:spcBef>
+              <a:spcPct val="0"/>
+            </a:spcBef>
+            <a:spcAft>
+              <a:spcPct val="35000"/>
+            </a:spcAft>
+            <a:buNone/>
+          </a:pPr>
+          <a:r>
+            <a:rPr lang="en-IE" sz="2800" kern="1200" dirty="0"/>
+            <a:t>Validates workflow orchestration across generic pilots</a:t>
+          </a:r>
+        </a:p>
+      </dsp:txBody>
+      <dsp:txXfrm>
+        <a:off x="5594593" y="1559732"/>
+        <a:ext cx="5586402" cy="1326902"/>
+      </dsp:txXfrm>
+    </dsp:sp>
+    <dsp:sp modelId="{1CEB22B1-9A7E-4A91-AF0C-26B893E69FA6}">
+      <dsp:nvSpPr>
+        <dsp:cNvPr id="0" name=""/>
+        <dsp:cNvSpPr/>
+      </dsp:nvSpPr>
+      <dsp:spPr>
+        <a:xfrm>
+          <a:off x="11180995" y="1559732"/>
+          <a:ext cx="5586402" cy="1326902"/>
+        </a:xfrm>
+        <a:prstGeom prst="rect">
+          <a:avLst/>
+        </a:prstGeom>
+        <a:solidFill>
+          <a:schemeClr val="accent1">
+            <a:alpha val="90000"/>
+            <a:tint val="40000"/>
+            <a:hueOff val="0"/>
+            <a:satOff val="0"/>
+            <a:lumOff val="0"/>
+            <a:alphaOff val="0"/>
+          </a:schemeClr>
+        </a:solidFill>
+        <a:ln w="12700" cap="flat" cmpd="sng" algn="ctr">
+          <a:solidFill>
+            <a:schemeClr val="tx1"/>
+          </a:solidFill>
+          <a:prstDash val="solid"/>
+          <a:miter lim="800000"/>
+        </a:ln>
+        <a:effectLst/>
+        <a:scene3d>
+          <a:camera prst="orthographicFront"/>
+          <a:lightRig rig="flat" dir="t"/>
+        </a:scene3d>
+        <a:sp3d z="190500" extrusionH="12700" prstMaterial="plastic">
+          <a:bevelT w="50800" h="50800"/>
+        </a:sp3d>
+      </dsp:spPr>
+      <dsp:style>
+        <a:lnRef idx="1">
+          <a:scrgbClr r="0" g="0" b="0"/>
+        </a:lnRef>
+        <a:fillRef idx="1">
+          <a:scrgbClr r="0" g="0" b="0"/>
+        </a:fillRef>
+        <a:effectRef idx="2">
+          <a:scrgbClr r="0" g="0" b="0"/>
+        </a:effectRef>
+        <a:fontRef idx="minor"/>
+      </dsp:style>
+      <dsp:txBody>
+        <a:bodyPr spcFirstLastPara="0" vert="horz" wrap="square" lIns="199136" tIns="35560" rIns="199136" bIns="35560" numCol="1" spcCol="1270" anchor="ctr" anchorCtr="0">
+          <a:noAutofit/>
+        </a:bodyPr>
+        <a:lstStyle/>
+        <a:p>
+          <a:pPr marL="0" lvl="0" indent="0" algn="ctr" defTabSz="1244600">
+            <a:lnSpc>
+              <a:spcPct val="90000"/>
+            </a:lnSpc>
+            <a:spcBef>
+              <a:spcPct val="0"/>
+            </a:spcBef>
+            <a:spcAft>
+              <a:spcPct val="35000"/>
+            </a:spcAft>
+            <a:buNone/>
+          </a:pPr>
+          <a:r>
+            <a:rPr lang="en-IE" sz="2800" kern="1200" dirty="0"/>
+            <a:t>Operational across relational        &amp; non-relational databases</a:t>
+          </a:r>
+        </a:p>
+      </dsp:txBody>
+      <dsp:txXfrm>
+        <a:off x="11180995" y="1559732"/>
+        <a:ext cx="5586402" cy="1326902"/>
       </dsp:txXfrm>
     </dsp:sp>
   </dsp:spTree>
@@ -3775,7 +6324,1477 @@
 </dgm:layoutDef>
 </file>
 
+<file path=ppt/diagrams/layout2.xml><?xml version="1.0" encoding="utf-8"?>
+<dgm:layoutDef xmlns:dgm="http://schemas.openxmlformats.org/drawingml/2006/diagram" xmlns:a="http://schemas.openxmlformats.org/drawingml/2006/main" uniqueId="urn:microsoft.com/office/officeart/2005/8/layout/process4">
+  <dgm:title val=""/>
+  <dgm:desc val=""/>
+  <dgm:catLst>
+    <dgm:cat type="process" pri="16000"/>
+    <dgm:cat type="list" pri="20000"/>
+  </dgm:catLst>
+  <dgm:sampData>
+    <dgm:dataModel>
+      <dgm:ptLst>
+        <dgm:pt modelId="0" type="doc"/>
+        <dgm:pt modelId="1">
+          <dgm:prSet phldr="1"/>
+        </dgm:pt>
+        <dgm:pt modelId="11">
+          <dgm:prSet phldr="1"/>
+        </dgm:pt>
+        <dgm:pt modelId="12">
+          <dgm:prSet phldr="1"/>
+        </dgm:pt>
+        <dgm:pt modelId="2">
+          <dgm:prSet phldr="1"/>
+        </dgm:pt>
+        <dgm:pt modelId="21">
+          <dgm:prSet phldr="1"/>
+        </dgm:pt>
+        <dgm:pt modelId="22">
+          <dgm:prSet phldr="1"/>
+        </dgm:pt>
+        <dgm:pt modelId="3">
+          <dgm:prSet phldr="1"/>
+        </dgm:pt>
+        <dgm:pt modelId="31">
+          <dgm:prSet phldr="1"/>
+        </dgm:pt>
+        <dgm:pt modelId="32">
+          <dgm:prSet phldr="1"/>
+        </dgm:pt>
+      </dgm:ptLst>
+      <dgm:cxnLst>
+        <dgm:cxn modelId="4" srcId="0" destId="1" srcOrd="0" destOrd="0"/>
+        <dgm:cxn modelId="5" srcId="0" destId="2" srcOrd="1" destOrd="0"/>
+        <dgm:cxn modelId="6" srcId="0" destId="3" srcOrd="2" destOrd="0"/>
+        <dgm:cxn modelId="13" srcId="1" destId="11" srcOrd="0" destOrd="0"/>
+        <dgm:cxn modelId="14" srcId="1" destId="12" srcOrd="1" destOrd="0"/>
+        <dgm:cxn modelId="23" srcId="2" destId="21" srcOrd="0" destOrd="0"/>
+        <dgm:cxn modelId="24" srcId="2" destId="22" srcOrd="1" destOrd="0"/>
+        <dgm:cxn modelId="33" srcId="3" destId="31" srcOrd="0" destOrd="0"/>
+        <dgm:cxn modelId="34" srcId="3" destId="32" srcOrd="1" destOrd="0"/>
+      </dgm:cxnLst>
+      <dgm:bg/>
+      <dgm:whole/>
+    </dgm:dataModel>
+  </dgm:sampData>
+  <dgm:styleData>
+    <dgm:dataModel>
+      <dgm:ptLst>
+        <dgm:pt modelId="0" type="doc"/>
+        <dgm:pt modelId="1"/>
+        <dgm:pt modelId="11"/>
+        <dgm:pt modelId="2"/>
+        <dgm:pt modelId="21"/>
+      </dgm:ptLst>
+      <dgm:cxnLst>
+        <dgm:cxn modelId="4" srcId="0" destId="1" srcOrd="0" destOrd="0"/>
+        <dgm:cxn modelId="5" srcId="0" destId="2" srcOrd="1" destOrd="0"/>
+        <dgm:cxn modelId="13" srcId="1" destId="11" srcOrd="0" destOrd="0"/>
+        <dgm:cxn modelId="23" srcId="2" destId="21" srcOrd="0" destOrd="0"/>
+      </dgm:cxnLst>
+      <dgm:bg/>
+      <dgm:whole/>
+    </dgm:dataModel>
+  </dgm:styleData>
+  <dgm:clrData>
+    <dgm:dataModel>
+      <dgm:ptLst>
+        <dgm:pt modelId="0" type="doc"/>
+        <dgm:pt modelId="1"/>
+        <dgm:pt modelId="11"/>
+        <dgm:pt modelId="2"/>
+        <dgm:pt modelId="21"/>
+        <dgm:pt modelId="3"/>
+        <dgm:pt modelId="31"/>
+        <dgm:pt modelId="4"/>
+        <dgm:pt modelId="41"/>
+      </dgm:ptLst>
+      <dgm:cxnLst>
+        <dgm:cxn modelId="5" srcId="0" destId="1" srcOrd="0" destOrd="0"/>
+        <dgm:cxn modelId="6" srcId="0" destId="2" srcOrd="1" destOrd="0"/>
+        <dgm:cxn modelId="7" srcId="0" destId="3" srcOrd="2" destOrd="0"/>
+        <dgm:cxn modelId="8" srcId="0" destId="4" srcOrd="3" destOrd="0"/>
+        <dgm:cxn modelId="13" srcId="1" destId="11" srcOrd="0" destOrd="0"/>
+        <dgm:cxn modelId="23" srcId="2" destId="21" srcOrd="0" destOrd="0"/>
+        <dgm:cxn modelId="33" srcId="3" destId="31" srcOrd="0" destOrd="0"/>
+        <dgm:cxn modelId="43" srcId="4" destId="41" srcOrd="0" destOrd="0"/>
+      </dgm:cxnLst>
+      <dgm:bg/>
+      <dgm:whole/>
+    </dgm:dataModel>
+  </dgm:clrData>
+  <dgm:layoutNode name="Name0">
+    <dgm:varLst>
+      <dgm:dir/>
+      <dgm:animLvl val="lvl"/>
+      <dgm:resizeHandles val="exact"/>
+    </dgm:varLst>
+    <dgm:alg type="lin">
+      <dgm:param type="linDir" val="fromB"/>
+    </dgm:alg>
+    <dgm:shape xmlns:r="http://schemas.openxmlformats.org/officeDocument/2006/relationships" r:blip="">
+      <dgm:adjLst/>
+    </dgm:shape>
+    <dgm:presOf/>
+    <dgm:constrLst>
+      <dgm:constr type="h" for="ch" forName="boxAndChildren" refType="h"/>
+      <dgm:constr type="h" for="ch" forName="arrowAndChildren" refType="h" refFor="ch" refForName="boxAndChildren" op="equ" fact="1.538"/>
+      <dgm:constr type="w" for="ch" forName="arrowAndChildren" refType="w"/>
+      <dgm:constr type="w" for="ch" forName="boxAndChildren" refType="w"/>
+      <dgm:constr type="h" for="ch" forName="sp" refType="h" fact="-0.015"/>
+      <dgm:constr type="primFontSz" for="des" forName="parentTextBox" val="65"/>
+      <dgm:constr type="primFontSz" for="des" forName="parentTextArrow" refType="primFontSz" refFor="des" refForName="parentTextBox" op="equ"/>
+      <dgm:constr type="primFontSz" for="des" forName="childTextArrow" val="65"/>
+      <dgm:constr type="primFontSz" for="des" forName="childTextBox" refType="primFontSz" refFor="des" refForName="childTextArrow" op="equ"/>
+    </dgm:constrLst>
+    <dgm:ruleLst/>
+    <dgm:forEach name="Name1" axis="ch" ptType="node" st="-1" step="-1">
+      <dgm:choose name="Name2">
+        <dgm:if name="Name3" axis="self" ptType="node" func="revPos" op="equ" val="1">
+          <dgm:layoutNode name="boxAndChildren">
+            <dgm:alg type="composite"/>
+            <dgm:shape xmlns:r="http://schemas.openxmlformats.org/officeDocument/2006/relationships" r:blip="">
+              <dgm:adjLst/>
+            </dgm:shape>
+            <dgm:presOf/>
+            <dgm:choose name="Name4">
+              <dgm:if name="Name5" axis="ch" ptType="node" func="cnt" op="gte" val="1">
+                <dgm:constrLst>
+                  <dgm:constr type="w" for="ch" forName="parentTextBox" refType="w"/>
+                  <dgm:constr type="h" for="ch" forName="parentTextBox" refType="h" fact="0.54"/>
+                  <dgm:constr type="t" for="ch" forName="parentTextBox"/>
+                  <dgm:constr type="w" for="ch" forName="entireBox" refType="w"/>
+                  <dgm:constr type="h" for="ch" forName="entireBox" refType="h"/>
+                  <dgm:constr type="w" for="ch" forName="descendantBox" refType="w"/>
+                  <dgm:constr type="b" for="ch" forName="descendantBox" refType="h" fact="0.98"/>
+                  <dgm:constr type="h" for="ch" forName="descendantBox" refType="h" fact="0.46"/>
+                </dgm:constrLst>
+              </dgm:if>
+              <dgm:else name="Name6">
+                <dgm:constrLst>
+                  <dgm:constr type="w" for="ch" forName="parentTextBox" refType="w"/>
+                  <dgm:constr type="h" for="ch" forName="parentTextBox" refType="h"/>
+                </dgm:constrLst>
+              </dgm:else>
+            </dgm:choose>
+            <dgm:ruleLst/>
+            <dgm:layoutNode name="parentTextBox">
+              <dgm:alg type="tx"/>
+              <dgm:choose name="Name7">
+                <dgm:if name="Name8" axis="ch" ptType="node" func="cnt" op="gte" val="1">
+                  <dgm:shape xmlns:r="http://schemas.openxmlformats.org/officeDocument/2006/relationships" type="rect" r:blip="" zOrderOff="1" hideGeom="1">
+                    <dgm:adjLst/>
+                  </dgm:shape>
+                </dgm:if>
+                <dgm:else name="Name9">
+                  <dgm:shape xmlns:r="http://schemas.openxmlformats.org/officeDocument/2006/relationships" type="rect" r:blip="">
+                    <dgm:adjLst/>
+                  </dgm:shape>
+                </dgm:else>
+              </dgm:choose>
+              <dgm:presOf axis="self"/>
+              <dgm:constrLst/>
+              <dgm:ruleLst>
+                <dgm:rule type="primFontSz" val="5" fact="NaN" max="NaN"/>
+              </dgm:ruleLst>
+            </dgm:layoutNode>
+            <dgm:choose name="Name10">
+              <dgm:if name="Name11" axis="ch" ptType="node" func="cnt" op="gte" val="1">
+                <dgm:layoutNode name="entireBox">
+                  <dgm:alg type="sp"/>
+                  <dgm:shape xmlns:r="http://schemas.openxmlformats.org/officeDocument/2006/relationships" type="rect" r:blip="">
+                    <dgm:adjLst/>
+                  </dgm:shape>
+                  <dgm:presOf axis="self"/>
+                  <dgm:constrLst/>
+                  <dgm:ruleLst/>
+                </dgm:layoutNode>
+                <dgm:layoutNode name="descendantBox" styleLbl="fgAccFollowNode1">
+                  <dgm:choose name="Name12">
+                    <dgm:if name="Name13" func="var" arg="dir" op="equ" val="norm">
+                      <dgm:alg type="lin"/>
+                    </dgm:if>
+                    <dgm:else name="Name14">
+                      <dgm:alg type="lin">
+                        <dgm:param type="linDir" val="fromR"/>
+                      </dgm:alg>
+                    </dgm:else>
+                  </dgm:choose>
+                  <dgm:shape xmlns:r="http://schemas.openxmlformats.org/officeDocument/2006/relationships" r:blip="">
+                    <dgm:adjLst/>
+                  </dgm:shape>
+                  <dgm:presOf/>
+                  <dgm:constrLst>
+                    <dgm:constr type="w" for="ch" forName="childTextBox" refType="w"/>
+                    <dgm:constr type="h" for="ch" forName="childTextBox" refType="h"/>
+                  </dgm:constrLst>
+                  <dgm:ruleLst/>
+                  <dgm:forEach name="Name15" axis="ch" ptType="node">
+                    <dgm:layoutNode name="childTextBox" styleLbl="fgAccFollowNode1">
+                      <dgm:varLst>
+                        <dgm:bulletEnabled val="1"/>
+                      </dgm:varLst>
+                      <dgm:alg type="tx"/>
+                      <dgm:shape xmlns:r="http://schemas.openxmlformats.org/officeDocument/2006/relationships" type="rect" r:blip="">
+                        <dgm:adjLst/>
+                      </dgm:shape>
+                      <dgm:presOf axis="desOrSelf" ptType="node"/>
+                      <dgm:constrLst>
+                        <dgm:constr type="tMarg" refType="primFontSz" fact="0.1"/>
+                        <dgm:constr type="bMarg" refType="primFontSz" fact="0.1"/>
+                      </dgm:constrLst>
+                      <dgm:ruleLst>
+                        <dgm:rule type="primFontSz" val="5" fact="NaN" max="NaN"/>
+                      </dgm:ruleLst>
+                    </dgm:layoutNode>
+                  </dgm:forEach>
+                </dgm:layoutNode>
+              </dgm:if>
+              <dgm:else name="Name16"/>
+            </dgm:choose>
+          </dgm:layoutNode>
+        </dgm:if>
+        <dgm:else name="Name17">
+          <dgm:layoutNode name="arrowAndChildren">
+            <dgm:alg type="composite"/>
+            <dgm:shape xmlns:r="http://schemas.openxmlformats.org/officeDocument/2006/relationships" r:blip="">
+              <dgm:adjLst/>
+            </dgm:shape>
+            <dgm:presOf/>
+            <dgm:choose name="Name18">
+              <dgm:if name="Name19" axis="ch" ptType="node" func="cnt" op="gte" val="1">
+                <dgm:constrLst>
+                  <dgm:constr type="w" for="ch" forName="parentTextArrow" refType="w"/>
+                  <dgm:constr type="t" for="ch" forName="parentTextArrow"/>
+                  <dgm:constr type="h" for="ch" forName="parentTextArrow" refType="h" fact="0.351"/>
+                  <dgm:constr type="w" for="ch" forName="arrow" refType="w"/>
+                  <dgm:constr type="h" for="ch" forName="arrow" refType="h"/>
+                  <dgm:constr type="w" for="ch" forName="descendantArrow" refType="w"/>
+                  <dgm:constr type="b" for="ch" forName="descendantArrow" refType="h" fact="0.65"/>
+                  <dgm:constr type="h" for="ch" forName="descendantArrow" refType="h" fact="0.299"/>
+                </dgm:constrLst>
+              </dgm:if>
+              <dgm:else name="Name20">
+                <dgm:constrLst>
+                  <dgm:constr type="w" for="ch" forName="parentTextArrow" refType="w"/>
+                  <dgm:constr type="h" for="ch" forName="parentTextArrow" refType="h"/>
+                </dgm:constrLst>
+              </dgm:else>
+            </dgm:choose>
+            <dgm:ruleLst/>
+            <dgm:layoutNode name="parentTextArrow">
+              <dgm:alg type="tx"/>
+              <dgm:choose name="Name21">
+                <dgm:if name="Name22" axis="ch" ptType="node" func="cnt" op="gte" val="1">
+                  <dgm:shape xmlns:r="http://schemas.openxmlformats.org/officeDocument/2006/relationships" type="rect" r:blip="" zOrderOff="1" hideGeom="1">
+                    <dgm:adjLst/>
+                  </dgm:shape>
+                </dgm:if>
+                <dgm:else name="Name23">
+                  <dgm:shape xmlns:r="http://schemas.openxmlformats.org/officeDocument/2006/relationships" rot="180" type="upArrowCallout" r:blip="">
+                    <dgm:adjLst/>
+                  </dgm:shape>
+                </dgm:else>
+              </dgm:choose>
+              <dgm:presOf axis="self"/>
+              <dgm:constrLst/>
+              <dgm:ruleLst>
+                <dgm:rule type="primFontSz" val="5" fact="NaN" max="NaN"/>
+              </dgm:ruleLst>
+            </dgm:layoutNode>
+            <dgm:choose name="Name24">
+              <dgm:if name="Name25" axis="ch" ptType="node" func="cnt" op="gte" val="1">
+                <dgm:layoutNode name="arrow">
+                  <dgm:alg type="sp"/>
+                  <dgm:shape xmlns:r="http://schemas.openxmlformats.org/officeDocument/2006/relationships" rot="180" type="upArrowCallout" r:blip="">
+                    <dgm:adjLst/>
+                  </dgm:shape>
+                  <dgm:presOf axis="self"/>
+                  <dgm:constrLst/>
+                  <dgm:ruleLst/>
+                </dgm:layoutNode>
+                <dgm:layoutNode name="descendantArrow">
+                  <dgm:choose name="Name26">
+                    <dgm:if name="Name27" func="var" arg="dir" op="equ" val="norm">
+                      <dgm:alg type="lin"/>
+                    </dgm:if>
+                    <dgm:else name="Name28">
+                      <dgm:alg type="lin">
+                        <dgm:param type="linDir" val="fromR"/>
+                      </dgm:alg>
+                    </dgm:else>
+                  </dgm:choose>
+                  <dgm:shape xmlns:r="http://schemas.openxmlformats.org/officeDocument/2006/relationships" r:blip="">
+                    <dgm:adjLst/>
+                  </dgm:shape>
+                  <dgm:presOf/>
+                  <dgm:constrLst>
+                    <dgm:constr type="w" for="ch" forName="childTextArrow" refType="w"/>
+                    <dgm:constr type="h" for="ch" forName="childTextArrow" refType="h"/>
+                  </dgm:constrLst>
+                  <dgm:ruleLst/>
+                  <dgm:forEach name="Name29" axis="ch" ptType="node">
+                    <dgm:layoutNode name="childTextArrow" styleLbl="fgAccFollowNode1">
+                      <dgm:varLst>
+                        <dgm:bulletEnabled val="1"/>
+                      </dgm:varLst>
+                      <dgm:alg type="tx"/>
+                      <dgm:shape xmlns:r="http://schemas.openxmlformats.org/officeDocument/2006/relationships" type="rect" r:blip="">
+                        <dgm:adjLst/>
+                      </dgm:shape>
+                      <dgm:presOf axis="desOrSelf" ptType="node"/>
+                      <dgm:constrLst>
+                        <dgm:constr type="tMarg" refType="primFontSz" fact="0.1"/>
+                        <dgm:constr type="bMarg" refType="primFontSz" fact="0.1"/>
+                      </dgm:constrLst>
+                      <dgm:ruleLst>
+                        <dgm:rule type="primFontSz" val="5" fact="NaN" max="NaN"/>
+                      </dgm:ruleLst>
+                    </dgm:layoutNode>
+                  </dgm:forEach>
+                </dgm:layoutNode>
+              </dgm:if>
+              <dgm:else name="Name30"/>
+            </dgm:choose>
+          </dgm:layoutNode>
+        </dgm:else>
+      </dgm:choose>
+      <dgm:forEach name="Name31" axis="precedSib" ptType="sibTrans" st="-1" cnt="1">
+        <dgm:layoutNode name="sp">
+          <dgm:alg type="sp"/>
+          <dgm:shape xmlns:r="http://schemas.openxmlformats.org/officeDocument/2006/relationships" r:blip="">
+            <dgm:adjLst/>
+          </dgm:shape>
+          <dgm:presOf axis="self"/>
+          <dgm:constrLst/>
+          <dgm:ruleLst/>
+        </dgm:layoutNode>
+      </dgm:forEach>
+    </dgm:forEach>
+  </dgm:layoutNode>
+</dgm:layoutDef>
+</file>
+
 <file path=ppt/diagrams/quickStyle1.xml><?xml version="1.0" encoding="utf-8"?>
+<dgm:styleDef xmlns:dgm="http://schemas.openxmlformats.org/drawingml/2006/diagram" xmlns:a="http://schemas.openxmlformats.org/drawingml/2006/main" uniqueId="urn:microsoft.com/office/officeart/2005/8/quickstyle/3d1">
+  <dgm:title val=""/>
+  <dgm:desc val=""/>
+  <dgm:catLst>
+    <dgm:cat type="3D" pri="11100"/>
+  </dgm:catLst>
+  <dgm:scene3d>
+    <a:camera prst="orthographicFront"/>
+    <a:lightRig rig="threePt" dir="t"/>
+  </dgm:scene3d>
+  <dgm:styleLbl name="node0">
+    <dgm:scene3d>
+      <a:camera prst="orthographicFront"/>
+      <a:lightRig rig="flat" dir="t"/>
+    </dgm:scene3d>
+    <dgm:sp3d prstMaterial="plastic">
+      <a:bevelT w="120900" h="88900"/>
+      <a:bevelB w="88900" h="31750" prst="angle"/>
+    </dgm:sp3d>
+    <dgm:txPr/>
+    <dgm:style>
+      <a:lnRef idx="0">
+        <a:scrgbClr r="0" g="0" b="0"/>
+      </a:lnRef>
+      <a:fillRef idx="3">
+        <a:scrgbClr r="0" g="0" b="0"/>
+      </a:fillRef>
+      <a:effectRef idx="2">
+        <a:scrgbClr r="0" g="0" b="0"/>
+      </a:effectRef>
+      <a:fontRef idx="minor">
+        <a:schemeClr val="lt1"/>
+      </a:fontRef>
+    </dgm:style>
+  </dgm:styleLbl>
+  <dgm:styleLbl name="lnNode1">
+    <dgm:scene3d>
+      <a:camera prst="orthographicFront"/>
+      <a:lightRig rig="flat" dir="t"/>
+    </dgm:scene3d>
+    <dgm:sp3d prstMaterial="plastic">
+      <a:bevelT w="120900" h="88900"/>
+      <a:bevelB w="88900" h="31750" prst="angle"/>
+    </dgm:sp3d>
+    <dgm:txPr/>
+    <dgm:style>
+      <a:lnRef idx="0">
+        <a:scrgbClr r="0" g="0" b="0"/>
+      </a:lnRef>
+      <a:fillRef idx="3">
+        <a:scrgbClr r="0" g="0" b="0"/>
+      </a:fillRef>
+      <a:effectRef idx="1">
+        <a:scrgbClr r="0" g="0" b="0"/>
+      </a:effectRef>
+      <a:fontRef idx="minor">
+        <a:schemeClr val="lt1"/>
+      </a:fontRef>
+    </dgm:style>
+  </dgm:styleLbl>
+  <dgm:styleLbl name="vennNode1">
+    <dgm:scene3d>
+      <a:camera prst="orthographicFront"/>
+      <a:lightRig rig="flat" dir="t"/>
+    </dgm:scene3d>
+    <dgm:sp3d prstMaterial="plastic">
+      <a:bevelT w="120900" h="88900"/>
+      <a:bevelB w="88900" h="31750" prst="angle"/>
+    </dgm:sp3d>
+    <dgm:txPr/>
+    <dgm:style>
+      <a:lnRef idx="0">
+        <a:scrgbClr r="0" g="0" b="0"/>
+      </a:lnRef>
+      <a:fillRef idx="1">
+        <a:scrgbClr r="0" g="0" b="0"/>
+      </a:fillRef>
+      <a:effectRef idx="1">
+        <a:scrgbClr r="0" g="0" b="0"/>
+      </a:effectRef>
+      <a:fontRef idx="minor">
+        <a:schemeClr val="tx1"/>
+      </a:fontRef>
+    </dgm:style>
+  </dgm:styleLbl>
+  <dgm:styleLbl name="alignNode1">
+    <dgm:scene3d>
+      <a:camera prst="orthographicFront"/>
+      <a:lightRig rig="flat" dir="t"/>
+    </dgm:scene3d>
+    <dgm:sp3d prstMaterial="plastic">
+      <a:bevelT w="120900" h="88900"/>
+      <a:bevelB w="88900" h="31750" prst="angle"/>
+    </dgm:sp3d>
+    <dgm:txPr/>
+    <dgm:style>
+      <a:lnRef idx="1">
+        <a:scrgbClr r="0" g="0" b="0"/>
+      </a:lnRef>
+      <a:fillRef idx="3">
+        <a:scrgbClr r="0" g="0" b="0"/>
+      </a:fillRef>
+      <a:effectRef idx="2">
+        <a:scrgbClr r="0" g="0" b="0"/>
+      </a:effectRef>
+      <a:fontRef idx="minor">
+        <a:schemeClr val="lt1"/>
+      </a:fontRef>
+    </dgm:style>
+  </dgm:styleLbl>
+  <dgm:styleLbl name="node1">
+    <dgm:scene3d>
+      <a:camera prst="orthographicFront"/>
+      <a:lightRig rig="flat" dir="t"/>
+    </dgm:scene3d>
+    <dgm:sp3d prstMaterial="plastic">
+      <a:bevelT w="120900" h="88900"/>
+      <a:bevelB w="88900" h="31750" prst="angle"/>
+    </dgm:sp3d>
+    <dgm:txPr/>
+    <dgm:style>
+      <a:lnRef idx="0">
+        <a:scrgbClr r="0" g="0" b="0"/>
+      </a:lnRef>
+      <a:fillRef idx="3">
+        <a:scrgbClr r="0" g="0" b="0"/>
+      </a:fillRef>
+      <a:effectRef idx="2">
+        <a:scrgbClr r="0" g="0" b="0"/>
+      </a:effectRef>
+      <a:fontRef idx="minor">
+        <a:schemeClr val="lt1"/>
+      </a:fontRef>
+    </dgm:style>
+  </dgm:styleLbl>
+  <dgm:styleLbl name="node2">
+    <dgm:scene3d>
+      <a:camera prst="orthographicFront"/>
+      <a:lightRig rig="flat" dir="t"/>
+    </dgm:scene3d>
+    <dgm:sp3d prstMaterial="plastic">
+      <a:bevelT w="120900" h="88900"/>
+      <a:bevelB w="88900" h="31750" prst="angle"/>
+    </dgm:sp3d>
+    <dgm:txPr/>
+    <dgm:style>
+      <a:lnRef idx="0">
+        <a:scrgbClr r="0" g="0" b="0"/>
+      </a:lnRef>
+      <a:fillRef idx="3">
+        <a:scrgbClr r="0" g="0" b="0"/>
+      </a:fillRef>
+      <a:effectRef idx="1">
+        <a:scrgbClr r="0" g="0" b="0"/>
+      </a:effectRef>
+      <a:fontRef idx="minor">
+        <a:schemeClr val="lt1"/>
+      </a:fontRef>
+    </dgm:style>
+  </dgm:styleLbl>
+  <dgm:styleLbl name="node3">
+    <dgm:scene3d>
+      <a:camera prst="orthographicFront"/>
+      <a:lightRig rig="flat" dir="t"/>
+    </dgm:scene3d>
+    <dgm:sp3d prstMaterial="plastic">
+      <a:bevelT w="120900" h="88900"/>
+      <a:bevelB w="88900" h="31750" prst="angle"/>
+    </dgm:sp3d>
+    <dgm:txPr/>
+    <dgm:style>
+      <a:lnRef idx="0">
+        <a:scrgbClr r="0" g="0" b="0"/>
+      </a:lnRef>
+      <a:fillRef idx="3">
+        <a:scrgbClr r="0" g="0" b="0"/>
+      </a:fillRef>
+      <a:effectRef idx="1">
+        <a:scrgbClr r="0" g="0" b="0"/>
+      </a:effectRef>
+      <a:fontRef idx="minor">
+        <a:schemeClr val="lt1"/>
+      </a:fontRef>
+    </dgm:style>
+  </dgm:styleLbl>
+  <dgm:styleLbl name="node4">
+    <dgm:scene3d>
+      <a:camera prst="orthographicFront"/>
+      <a:lightRig rig="flat" dir="t"/>
+    </dgm:scene3d>
+    <dgm:sp3d prstMaterial="plastic">
+      <a:bevelT w="120900" h="88900"/>
+      <a:bevelB w="88900" h="31750" prst="angle"/>
+    </dgm:sp3d>
+    <dgm:txPr/>
+    <dgm:style>
+      <a:lnRef idx="0">
+        <a:scrgbClr r="0" g="0" b="0"/>
+      </a:lnRef>
+      <a:fillRef idx="3">
+        <a:scrgbClr r="0" g="0" b="0"/>
+      </a:fillRef>
+      <a:effectRef idx="1">
+        <a:scrgbClr r="0" g="0" b="0"/>
+      </a:effectRef>
+      <a:fontRef idx="minor">
+        <a:schemeClr val="lt1"/>
+      </a:fontRef>
+    </dgm:style>
+  </dgm:styleLbl>
+  <dgm:styleLbl name="fgImgPlace1">
+    <dgm:scene3d>
+      <a:camera prst="orthographicFront"/>
+      <a:lightRig rig="flat" dir="t"/>
+    </dgm:scene3d>
+    <dgm:sp3d z="127000" prstMaterial="plastic">
+      <a:bevelT w="88900" h="88900"/>
+      <a:bevelB w="88900" h="31750" prst="angle"/>
+    </dgm:sp3d>
+    <dgm:txPr/>
+    <dgm:style>
+      <a:lnRef idx="0">
+        <a:scrgbClr r="0" g="0" b="0"/>
+      </a:lnRef>
+      <a:fillRef idx="3">
+        <a:scrgbClr r="0" g="0" b="0"/>
+      </a:fillRef>
+      <a:effectRef idx="2">
+        <a:scrgbClr r="0" g="0" b="0"/>
+      </a:effectRef>
+      <a:fontRef idx="minor"/>
+    </dgm:style>
+  </dgm:styleLbl>
+  <dgm:styleLbl name="alignImgPlace1">
+    <dgm:scene3d>
+      <a:camera prst="orthographicFront"/>
+      <a:lightRig rig="flat" dir="t"/>
+    </dgm:scene3d>
+    <dgm:sp3d prstMaterial="plastic">
+      <a:bevelT w="88900" h="88900"/>
+      <a:bevelB w="88900" h="31750" prst="angle"/>
+    </dgm:sp3d>
+    <dgm:txPr/>
+    <dgm:style>
+      <a:lnRef idx="0">
+        <a:scrgbClr r="0" g="0" b="0"/>
+      </a:lnRef>
+      <a:fillRef idx="3">
+        <a:scrgbClr r="0" g="0" b="0"/>
+      </a:fillRef>
+      <a:effectRef idx="2">
+        <a:scrgbClr r="0" g="0" b="0"/>
+      </a:effectRef>
+      <a:fontRef idx="minor"/>
+    </dgm:style>
+  </dgm:styleLbl>
+  <dgm:styleLbl name="bgImgPlace1">
+    <dgm:scene3d>
+      <a:camera prst="orthographicFront"/>
+      <a:lightRig rig="flat" dir="t"/>
+    </dgm:scene3d>
+    <dgm:sp3d z="-190500" prstMaterial="plastic">
+      <a:bevelT w="88900" h="88900"/>
+      <a:bevelB w="88900" h="31750" prst="angle"/>
+    </dgm:sp3d>
+    <dgm:txPr/>
+    <dgm:style>
+      <a:lnRef idx="0">
+        <a:scrgbClr r="0" g="0" b="0"/>
+      </a:lnRef>
+      <a:fillRef idx="3">
+        <a:scrgbClr r="0" g="0" b="0"/>
+      </a:fillRef>
+      <a:effectRef idx="2">
+        <a:scrgbClr r="0" g="0" b="0"/>
+      </a:effectRef>
+      <a:fontRef idx="minor"/>
+    </dgm:style>
+  </dgm:styleLbl>
+  <dgm:styleLbl name="sibTrans2D1">
+    <dgm:scene3d>
+      <a:camera prst="orthographicFront"/>
+      <a:lightRig rig="flat" dir="t"/>
+    </dgm:scene3d>
+    <dgm:sp3d z="-80000" prstMaterial="plastic">
+      <a:bevelT w="50800" h="50800"/>
+      <a:bevelB w="25400" h="25400" prst="angle"/>
+    </dgm:sp3d>
+    <dgm:txPr/>
+    <dgm:style>
+      <a:lnRef idx="0">
+        <a:scrgbClr r="0" g="0" b="0"/>
+      </a:lnRef>
+      <a:fillRef idx="3">
+        <a:scrgbClr r="0" g="0" b="0"/>
+      </a:fillRef>
+      <a:effectRef idx="2">
+        <a:scrgbClr r="0" g="0" b="0"/>
+      </a:effectRef>
+      <a:fontRef idx="minor">
+        <a:schemeClr val="lt1"/>
+      </a:fontRef>
+    </dgm:style>
+  </dgm:styleLbl>
+  <dgm:styleLbl name="fgSibTrans2D1">
+    <dgm:scene3d>
+      <a:camera prst="orthographicFront"/>
+      <a:lightRig rig="flat" dir="t"/>
+    </dgm:scene3d>
+    <dgm:sp3d z="127000" prstMaterial="plastic">
+      <a:bevelT w="50800" h="50800"/>
+      <a:bevelB w="25400" h="25400" prst="angle"/>
+    </dgm:sp3d>
+    <dgm:txPr/>
+    <dgm:style>
+      <a:lnRef idx="0">
+        <a:scrgbClr r="0" g="0" b="0"/>
+      </a:lnRef>
+      <a:fillRef idx="3">
+        <a:scrgbClr r="0" g="0" b="0"/>
+      </a:fillRef>
+      <a:effectRef idx="2">
+        <a:scrgbClr r="0" g="0" b="0"/>
+      </a:effectRef>
+      <a:fontRef idx="minor">
+        <a:schemeClr val="lt1"/>
+      </a:fontRef>
+    </dgm:style>
+  </dgm:styleLbl>
+  <dgm:styleLbl name="bgSibTrans2D1">
+    <dgm:scene3d>
+      <a:camera prst="orthographicFront"/>
+      <a:lightRig rig="flat" dir="t"/>
+    </dgm:scene3d>
+    <dgm:sp3d z="-190500" prstMaterial="plastic">
+      <a:bevelT w="50800" h="50800"/>
+      <a:bevelB w="25400" h="25400" prst="angle"/>
+    </dgm:sp3d>
+    <dgm:txPr/>
+    <dgm:style>
+      <a:lnRef idx="0">
+        <a:scrgbClr r="0" g="0" b="0"/>
+      </a:lnRef>
+      <a:fillRef idx="3">
+        <a:scrgbClr r="0" g="0" b="0"/>
+      </a:fillRef>
+      <a:effectRef idx="2">
+        <a:scrgbClr r="0" g="0" b="0"/>
+      </a:effectRef>
+      <a:fontRef idx="minor">
+        <a:schemeClr val="lt1"/>
+      </a:fontRef>
+    </dgm:style>
+  </dgm:styleLbl>
+  <dgm:styleLbl name="sibTrans1D1">
+    <dgm:scene3d>
+      <a:camera prst="orthographicFront"/>
+      <a:lightRig rig="flat" dir="t"/>
+    </dgm:scene3d>
+    <dgm:sp3d z="-40000" prstMaterial="matte"/>
+    <dgm:txPr/>
+    <dgm:style>
+      <a:lnRef idx="1">
+        <a:scrgbClr r="0" g="0" b="0"/>
+      </a:lnRef>
+      <a:fillRef idx="0">
+        <a:scrgbClr r="0" g="0" b="0"/>
+      </a:fillRef>
+      <a:effectRef idx="0">
+        <a:scrgbClr r="0" g="0" b="0"/>
+      </a:effectRef>
+      <a:fontRef idx="minor"/>
+    </dgm:style>
+  </dgm:styleLbl>
+  <dgm:styleLbl name="callout">
+    <dgm:scene3d>
+      <a:camera prst="orthographicFront"/>
+      <a:lightRig rig="threePt" dir="t"/>
+    </dgm:scene3d>
+    <dgm:sp3d z="127000" prstMaterial="matte"/>
+    <dgm:txPr/>
+    <dgm:style>
+      <a:lnRef idx="2">
+        <a:scrgbClr r="0" g="0" b="0"/>
+      </a:lnRef>
+      <a:fillRef idx="1">
+        <a:scrgbClr r="0" g="0" b="0"/>
+      </a:fillRef>
+      <a:effectRef idx="0">
+        <a:scrgbClr r="0" g="0" b="0"/>
+      </a:effectRef>
+      <a:fontRef idx="minor"/>
+    </dgm:style>
+  </dgm:styleLbl>
+  <dgm:styleLbl name="asst0">
+    <dgm:scene3d>
+      <a:camera prst="orthographicFront"/>
+      <a:lightRig rig="flat" dir="t"/>
+    </dgm:scene3d>
+    <dgm:sp3d prstMaterial="plastic">
+      <a:bevelT w="120900" h="88900"/>
+      <a:bevelB w="88900" h="31750" prst="angle"/>
+    </dgm:sp3d>
+    <dgm:txPr/>
+    <dgm:style>
+      <a:lnRef idx="0">
+        <a:scrgbClr r="0" g="0" b="0"/>
+      </a:lnRef>
+      <a:fillRef idx="3">
+        <a:scrgbClr r="0" g="0" b="0"/>
+      </a:fillRef>
+      <a:effectRef idx="1">
+        <a:scrgbClr r="0" g="0" b="0"/>
+      </a:effectRef>
+      <a:fontRef idx="minor">
+        <a:schemeClr val="lt1"/>
+      </a:fontRef>
+    </dgm:style>
+  </dgm:styleLbl>
+  <dgm:styleLbl name="asst1">
+    <dgm:scene3d>
+      <a:camera prst="orthographicFront"/>
+      <a:lightRig rig="flat" dir="t"/>
+    </dgm:scene3d>
+    <dgm:sp3d prstMaterial="plastic">
+      <a:bevelT w="120900" h="88900"/>
+      <a:bevelB w="88900" h="31750" prst="angle"/>
+    </dgm:sp3d>
+    <dgm:txPr/>
+    <dgm:style>
+      <a:lnRef idx="0">
+        <a:scrgbClr r="0" g="0" b="0"/>
+      </a:lnRef>
+      <a:fillRef idx="3">
+        <a:scrgbClr r="0" g="0" b="0"/>
+      </a:fillRef>
+      <a:effectRef idx="1">
+        <a:scrgbClr r="0" g="0" b="0"/>
+      </a:effectRef>
+      <a:fontRef idx="minor">
+        <a:schemeClr val="lt1"/>
+      </a:fontRef>
+    </dgm:style>
+  </dgm:styleLbl>
+  <dgm:styleLbl name="asst2">
+    <dgm:scene3d>
+      <a:camera prst="orthographicFront"/>
+      <a:lightRig rig="flat" dir="t"/>
+    </dgm:scene3d>
+    <dgm:sp3d prstMaterial="plastic">
+      <a:bevelT w="120900" h="88900"/>
+      <a:bevelB w="88900" h="31750" prst="angle"/>
+    </dgm:sp3d>
+    <dgm:txPr/>
+    <dgm:style>
+      <a:lnRef idx="0">
+        <a:scrgbClr r="0" g="0" b="0"/>
+      </a:lnRef>
+      <a:fillRef idx="3">
+        <a:scrgbClr r="0" g="0" b="0"/>
+      </a:fillRef>
+      <a:effectRef idx="1">
+        <a:scrgbClr r="0" g="0" b="0"/>
+      </a:effectRef>
+      <a:fontRef idx="minor">
+        <a:schemeClr val="lt1"/>
+      </a:fontRef>
+    </dgm:style>
+  </dgm:styleLbl>
+  <dgm:styleLbl name="asst3">
+    <dgm:scene3d>
+      <a:camera prst="orthographicFront"/>
+      <a:lightRig rig="flat" dir="t"/>
+    </dgm:scene3d>
+    <dgm:sp3d prstMaterial="plastic">
+      <a:bevelT w="120900" h="88900"/>
+      <a:bevelB w="88900" h="31750" prst="angle"/>
+    </dgm:sp3d>
+    <dgm:txPr/>
+    <dgm:style>
+      <a:lnRef idx="0">
+        <a:scrgbClr r="0" g="0" b="0"/>
+      </a:lnRef>
+      <a:fillRef idx="3">
+        <a:scrgbClr r="0" g="0" b="0"/>
+      </a:fillRef>
+      <a:effectRef idx="1">
+        <a:scrgbClr r="0" g="0" b="0"/>
+      </a:effectRef>
+      <a:fontRef idx="minor">
+        <a:schemeClr val="lt1"/>
+      </a:fontRef>
+    </dgm:style>
+  </dgm:styleLbl>
+  <dgm:styleLbl name="parChTrans2D1">
+    <dgm:scene3d>
+      <a:camera prst="orthographicFront"/>
+      <a:lightRig rig="flat" dir="t"/>
+    </dgm:scene3d>
+    <dgm:sp3d z="-100000" prstMaterial="plastic">
+      <a:bevelT w="120900" h="88900"/>
+      <a:bevelB w="88900" h="31750" prst="angle"/>
+    </dgm:sp3d>
+    <dgm:txPr/>
+    <dgm:style>
+      <a:lnRef idx="0">
+        <a:scrgbClr r="0" g="0" b="0"/>
+      </a:lnRef>
+      <a:fillRef idx="3">
+        <a:scrgbClr r="0" g="0" b="0"/>
+      </a:fillRef>
+      <a:effectRef idx="1">
+        <a:scrgbClr r="0" g="0" b="0"/>
+      </a:effectRef>
+      <a:fontRef idx="minor">
+        <a:schemeClr val="lt1"/>
+      </a:fontRef>
+    </dgm:style>
+  </dgm:styleLbl>
+  <dgm:styleLbl name="parChTrans2D2">
+    <dgm:scene3d>
+      <a:camera prst="orthographicFront"/>
+      <a:lightRig rig="flat" dir="t"/>
+    </dgm:scene3d>
+    <dgm:sp3d z="-60000" prstMaterial="plastic">
+      <a:bevelT w="120900" h="88900"/>
+      <a:bevelB w="88900" h="31750" prst="angle"/>
+    </dgm:sp3d>
+    <dgm:txPr/>
+    <dgm:style>
+      <a:lnRef idx="0">
+        <a:scrgbClr r="0" g="0" b="0"/>
+      </a:lnRef>
+      <a:fillRef idx="3">
+        <a:scrgbClr r="0" g="0" b="0"/>
+      </a:fillRef>
+      <a:effectRef idx="1">
+        <a:scrgbClr r="0" g="0" b="0"/>
+      </a:effectRef>
+      <a:fontRef idx="minor">
+        <a:schemeClr val="lt1"/>
+      </a:fontRef>
+    </dgm:style>
+  </dgm:styleLbl>
+  <dgm:styleLbl name="parChTrans2D3">
+    <dgm:scene3d>
+      <a:camera prst="orthographicFront"/>
+      <a:lightRig rig="flat" dir="t"/>
+    </dgm:scene3d>
+    <dgm:sp3d z="-60000" prstMaterial="plastic">
+      <a:bevelT w="120900" h="88900"/>
+      <a:bevelB w="88900" h="31750" prst="angle"/>
+    </dgm:sp3d>
+    <dgm:txPr/>
+    <dgm:style>
+      <a:lnRef idx="0">
+        <a:scrgbClr r="0" g="0" b="0"/>
+      </a:lnRef>
+      <a:fillRef idx="3">
+        <a:scrgbClr r="0" g="0" b="0"/>
+      </a:fillRef>
+      <a:effectRef idx="1">
+        <a:scrgbClr r="0" g="0" b="0"/>
+      </a:effectRef>
+      <a:fontRef idx="minor">
+        <a:schemeClr val="lt1"/>
+      </a:fontRef>
+    </dgm:style>
+  </dgm:styleLbl>
+  <dgm:styleLbl name="parChTrans2D4">
+    <dgm:scene3d>
+      <a:camera prst="orthographicFront"/>
+      <a:lightRig rig="flat" dir="t"/>
+    </dgm:scene3d>
+    <dgm:sp3d z="-60000" prstMaterial="plastic">
+      <a:bevelT w="120900" h="88900"/>
+      <a:bevelB w="88900" h="31750" prst="angle"/>
+    </dgm:sp3d>
+    <dgm:txPr/>
+    <dgm:style>
+      <a:lnRef idx="0">
+        <a:scrgbClr r="0" g="0" b="0"/>
+      </a:lnRef>
+      <a:fillRef idx="3">
+        <a:scrgbClr r="0" g="0" b="0"/>
+      </a:fillRef>
+      <a:effectRef idx="1">
+        <a:scrgbClr r="0" g="0" b="0"/>
+      </a:effectRef>
+      <a:fontRef idx="minor">
+        <a:schemeClr val="lt1"/>
+      </a:fontRef>
+    </dgm:style>
+  </dgm:styleLbl>
+  <dgm:styleLbl name="parChTrans1D1">
+    <dgm:scene3d>
+      <a:camera prst="orthographicFront"/>
+      <a:lightRig rig="flat" dir="t"/>
+    </dgm:scene3d>
+    <dgm:sp3d prstMaterial="matte"/>
+    <dgm:txPr/>
+    <dgm:style>
+      <a:lnRef idx="2">
+        <a:scrgbClr r="0" g="0" b="0"/>
+      </a:lnRef>
+      <a:fillRef idx="0">
+        <a:scrgbClr r="0" g="0" b="0"/>
+      </a:fillRef>
+      <a:effectRef idx="0">
+        <a:scrgbClr r="0" g="0" b="0"/>
+      </a:effectRef>
+      <a:fontRef idx="minor"/>
+    </dgm:style>
+  </dgm:styleLbl>
+  <dgm:styleLbl name="parChTrans1D2">
+    <dgm:scene3d>
+      <a:camera prst="orthographicFront"/>
+      <a:lightRig rig="flat" dir="t"/>
+    </dgm:scene3d>
+    <dgm:sp3d prstMaterial="matte"/>
+    <dgm:txPr/>
+    <dgm:style>
+      <a:lnRef idx="2">
+        <a:scrgbClr r="0" g="0" b="0"/>
+      </a:lnRef>
+      <a:fillRef idx="0">
+        <a:scrgbClr r="0" g="0" b="0"/>
+      </a:fillRef>
+      <a:effectRef idx="0">
+        <a:scrgbClr r="0" g="0" b="0"/>
+      </a:effectRef>
+      <a:fontRef idx="minor"/>
+    </dgm:style>
+  </dgm:styleLbl>
+  <dgm:styleLbl name="parChTrans1D3">
+    <dgm:scene3d>
+      <a:camera prst="orthographicFront"/>
+      <a:lightRig rig="flat" dir="t"/>
+    </dgm:scene3d>
+    <dgm:sp3d prstMaterial="matte"/>
+    <dgm:txPr/>
+    <dgm:style>
+      <a:lnRef idx="2">
+        <a:scrgbClr r="0" g="0" b="0"/>
+      </a:lnRef>
+      <a:fillRef idx="0">
+        <a:scrgbClr r="0" g="0" b="0"/>
+      </a:fillRef>
+      <a:effectRef idx="0">
+        <a:scrgbClr r="0" g="0" b="0"/>
+      </a:effectRef>
+      <a:fontRef idx="minor"/>
+    </dgm:style>
+  </dgm:styleLbl>
+  <dgm:styleLbl name="parChTrans1D4">
+    <dgm:scene3d>
+      <a:camera prst="orthographicFront"/>
+      <a:lightRig rig="flat" dir="t"/>
+    </dgm:scene3d>
+    <dgm:sp3d prstMaterial="matte"/>
+    <dgm:txPr/>
+    <dgm:style>
+      <a:lnRef idx="2">
+        <a:scrgbClr r="0" g="0" b="0"/>
+      </a:lnRef>
+      <a:fillRef idx="0">
+        <a:scrgbClr r="0" g="0" b="0"/>
+      </a:fillRef>
+      <a:effectRef idx="0">
+        <a:scrgbClr r="0" g="0" b="0"/>
+      </a:effectRef>
+      <a:fontRef idx="minor"/>
+    </dgm:style>
+  </dgm:styleLbl>
+  <dgm:styleLbl name="fgAcc1">
+    <dgm:scene3d>
+      <a:camera prst="orthographicFront"/>
+      <a:lightRig rig="flat" dir="t"/>
+    </dgm:scene3d>
+    <dgm:sp3d z="190500" extrusionH="12700" prstMaterial="plastic">
+      <a:bevelT w="50800" h="50800"/>
+    </dgm:sp3d>
+    <dgm:txPr/>
+    <dgm:style>
+      <a:lnRef idx="1">
+        <a:scrgbClr r="0" g="0" b="0"/>
+      </a:lnRef>
+      <a:fillRef idx="1">
+        <a:scrgbClr r="0" g="0" b="0"/>
+      </a:fillRef>
+      <a:effectRef idx="2">
+        <a:scrgbClr r="0" g="0" b="0"/>
+      </a:effectRef>
+      <a:fontRef idx="minor"/>
+    </dgm:style>
+  </dgm:styleLbl>
+  <dgm:styleLbl name="conFgAcc1">
+    <dgm:scene3d>
+      <a:camera prst="orthographicFront"/>
+      <a:lightRig rig="flat" dir="t"/>
+    </dgm:scene3d>
+    <dgm:sp3d z="190500" extrusionH="12700" prstMaterial="plastic">
+      <a:bevelT w="50800" h="50800"/>
+    </dgm:sp3d>
+    <dgm:txPr/>
+    <dgm:style>
+      <a:lnRef idx="1">
+        <a:scrgbClr r="0" g="0" b="0"/>
+      </a:lnRef>
+      <a:fillRef idx="1">
+        <a:scrgbClr r="0" g="0" b="0"/>
+      </a:fillRef>
+      <a:effectRef idx="2">
+        <a:scrgbClr r="0" g="0" b="0"/>
+      </a:effectRef>
+      <a:fontRef idx="minor"/>
+    </dgm:style>
+  </dgm:styleLbl>
+  <dgm:styleLbl name="alignAcc1">
+    <dgm:scene3d>
+      <a:camera prst="orthographicFront"/>
+      <a:lightRig rig="flat" dir="t"/>
+    </dgm:scene3d>
+    <dgm:sp3d extrusionH="12700" prstMaterial="plastic">
+      <a:bevelT w="50800" h="50800"/>
+    </dgm:sp3d>
+    <dgm:txPr/>
+    <dgm:style>
+      <a:lnRef idx="1">
+        <a:scrgbClr r="0" g="0" b="0"/>
+      </a:lnRef>
+      <a:fillRef idx="1">
+        <a:scrgbClr r="0" g="0" b="0"/>
+      </a:fillRef>
+      <a:effectRef idx="2">
+        <a:scrgbClr r="0" g="0" b="0"/>
+      </a:effectRef>
+      <a:fontRef idx="minor"/>
+    </dgm:style>
+  </dgm:styleLbl>
+  <dgm:styleLbl name="trAlignAcc1">
+    <dgm:scene3d>
+      <a:camera prst="orthographicFront"/>
+      <a:lightRig rig="flat" dir="t"/>
+    </dgm:scene3d>
+    <dgm:sp3d extrusionH="12700" prstMaterial="plastic">
+      <a:bevelT w="50800" h="50800"/>
+    </dgm:sp3d>
+    <dgm:txPr/>
+    <dgm:style>
+      <a:lnRef idx="1">
+        <a:scrgbClr r="0" g="0" b="0"/>
+      </a:lnRef>
+      <a:fillRef idx="1">
+        <a:scrgbClr r="0" g="0" b="0"/>
+      </a:fillRef>
+      <a:effectRef idx="2">
+        <a:scrgbClr r="0" g="0" b="0"/>
+      </a:effectRef>
+      <a:fontRef idx="minor"/>
+    </dgm:style>
+  </dgm:styleLbl>
+  <dgm:styleLbl name="bgAcc1">
+    <dgm:scene3d>
+      <a:camera prst="orthographicFront"/>
+      <a:lightRig rig="flat" dir="t"/>
+    </dgm:scene3d>
+    <dgm:sp3d z="-190500" extrusionH="12700" prstMaterial="plastic">
+      <a:bevelT w="50800" h="50800"/>
+    </dgm:sp3d>
+    <dgm:txPr/>
+    <dgm:style>
+      <a:lnRef idx="1">
+        <a:scrgbClr r="0" g="0" b="0"/>
+      </a:lnRef>
+      <a:fillRef idx="1">
+        <a:scrgbClr r="0" g="0" b="0"/>
+      </a:fillRef>
+      <a:effectRef idx="2">
+        <a:scrgbClr r="0" g="0" b="0"/>
+      </a:effectRef>
+      <a:fontRef idx="minor"/>
+    </dgm:style>
+  </dgm:styleLbl>
+  <dgm:styleLbl name="solidFgAcc1">
+    <dgm:scene3d>
+      <a:camera prst="orthographicFront"/>
+      <a:lightRig rig="flat" dir="t"/>
+    </dgm:scene3d>
+    <dgm:sp3d z="190500" extrusionH="12700" prstMaterial="plastic">
+      <a:bevelT w="50800" h="50800"/>
+    </dgm:sp3d>
+    <dgm:txPr/>
+    <dgm:style>
+      <a:lnRef idx="1">
+        <a:scrgbClr r="0" g="0" b="0"/>
+      </a:lnRef>
+      <a:fillRef idx="1">
+        <a:scrgbClr r="0" g="0" b="0"/>
+      </a:fillRef>
+      <a:effectRef idx="2">
+        <a:scrgbClr r="0" g="0" b="0"/>
+      </a:effectRef>
+      <a:fontRef idx="minor"/>
+    </dgm:style>
+  </dgm:styleLbl>
+  <dgm:styleLbl name="solidAlignAcc1">
+    <dgm:scene3d>
+      <a:camera prst="orthographicFront"/>
+      <a:lightRig rig="flat" dir="t"/>
+    </dgm:scene3d>
+    <dgm:sp3d extrusionH="12700" prstMaterial="plastic">
+      <a:bevelT w="50800" h="50800"/>
+    </dgm:sp3d>
+    <dgm:txPr/>
+    <dgm:style>
+      <a:lnRef idx="1">
+        <a:scrgbClr r="0" g="0" b="0"/>
+      </a:lnRef>
+      <a:fillRef idx="1">
+        <a:scrgbClr r="0" g="0" b="0"/>
+      </a:fillRef>
+      <a:effectRef idx="2">
+        <a:scrgbClr r="0" g="0" b="0"/>
+      </a:effectRef>
+      <a:fontRef idx="minor"/>
+    </dgm:style>
+  </dgm:styleLbl>
+  <dgm:styleLbl name="solidBgAcc1">
+    <dgm:scene3d>
+      <a:camera prst="orthographicFront"/>
+      <a:lightRig rig="flat" dir="t"/>
+    </dgm:scene3d>
+    <dgm:sp3d z="-190500" extrusionH="12700" prstMaterial="plastic">
+      <a:bevelT w="50800" h="50800"/>
+    </dgm:sp3d>
+    <dgm:txPr/>
+    <dgm:style>
+      <a:lnRef idx="1">
+        <a:scrgbClr r="0" g="0" b="0"/>
+      </a:lnRef>
+      <a:fillRef idx="1">
+        <a:scrgbClr r="0" g="0" b="0"/>
+      </a:fillRef>
+      <a:effectRef idx="2">
+        <a:scrgbClr r="0" g="0" b="0"/>
+      </a:effectRef>
+      <a:fontRef idx="minor"/>
+    </dgm:style>
+  </dgm:styleLbl>
+  <dgm:styleLbl name="fgAccFollowNode1">
+    <dgm:scene3d>
+      <a:camera prst="orthographicFront"/>
+      <a:lightRig rig="flat" dir="t"/>
+    </dgm:scene3d>
+    <dgm:sp3d z="190500" extrusionH="12700" prstMaterial="plastic">
+      <a:bevelT w="50800" h="50800"/>
+    </dgm:sp3d>
+    <dgm:txPr/>
+    <dgm:style>
+      <a:lnRef idx="1">
+        <a:scrgbClr r="0" g="0" b="0"/>
+      </a:lnRef>
+      <a:fillRef idx="1">
+        <a:scrgbClr r="0" g="0" b="0"/>
+      </a:fillRef>
+      <a:effectRef idx="2">
+        <a:scrgbClr r="0" g="0" b="0"/>
+      </a:effectRef>
+      <a:fontRef idx="minor"/>
+    </dgm:style>
+  </dgm:styleLbl>
+  <dgm:styleLbl name="alignAccFollowNode1">
+    <dgm:scene3d>
+      <a:camera prst="orthographicFront"/>
+      <a:lightRig rig="flat" dir="t"/>
+    </dgm:scene3d>
+    <dgm:sp3d extrusionH="12700" prstMaterial="plastic">
+      <a:bevelT w="50800" h="50800"/>
+    </dgm:sp3d>
+    <dgm:txPr/>
+    <dgm:style>
+      <a:lnRef idx="1">
+        <a:scrgbClr r="0" g="0" b="0"/>
+      </a:lnRef>
+      <a:fillRef idx="1">
+        <a:scrgbClr r="0" g="0" b="0"/>
+      </a:fillRef>
+      <a:effectRef idx="2">
+        <a:scrgbClr r="0" g="0" b="0"/>
+      </a:effectRef>
+      <a:fontRef idx="minor"/>
+    </dgm:style>
+  </dgm:styleLbl>
+  <dgm:styleLbl name="bgAccFollowNode1">
+    <dgm:scene3d>
+      <a:camera prst="orthographicFront"/>
+      <a:lightRig rig="flat" dir="t"/>
+    </dgm:scene3d>
+    <dgm:sp3d z="-190500" extrusionH="12700" prstMaterial="plastic">
+      <a:bevelT w="50800" h="50800"/>
+    </dgm:sp3d>
+    <dgm:txPr/>
+    <dgm:style>
+      <a:lnRef idx="1">
+        <a:scrgbClr r="0" g="0" b="0"/>
+      </a:lnRef>
+      <a:fillRef idx="1">
+        <a:scrgbClr r="0" g="0" b="0"/>
+      </a:fillRef>
+      <a:effectRef idx="2">
+        <a:scrgbClr r="0" g="0" b="0"/>
+      </a:effectRef>
+      <a:fontRef idx="minor"/>
+    </dgm:style>
+  </dgm:styleLbl>
+  <dgm:styleLbl name="fgAcc0">
+    <dgm:scene3d>
+      <a:camera prst="orthographicFront"/>
+      <a:lightRig rig="flat" dir="t"/>
+    </dgm:scene3d>
+    <dgm:sp3d z="190500" extrusionH="12700" prstMaterial="plastic">
+      <a:bevelT w="50800" h="50800"/>
+    </dgm:sp3d>
+    <dgm:txPr/>
+    <dgm:style>
+      <a:lnRef idx="1">
+        <a:scrgbClr r="0" g="0" b="0"/>
+      </a:lnRef>
+      <a:fillRef idx="1">
+        <a:scrgbClr r="0" g="0" b="0"/>
+      </a:fillRef>
+      <a:effectRef idx="2">
+        <a:scrgbClr r="0" g="0" b="0"/>
+      </a:effectRef>
+      <a:fontRef idx="minor"/>
+    </dgm:style>
+  </dgm:styleLbl>
+  <dgm:styleLbl name="fgAcc2">
+    <dgm:scene3d>
+      <a:camera prst="orthographicFront"/>
+      <a:lightRig rig="flat" dir="t"/>
+    </dgm:scene3d>
+    <dgm:sp3d z="190500" extrusionH="12700" prstMaterial="plastic">
+      <a:bevelT w="50800" h="50800"/>
+    </dgm:sp3d>
+    <dgm:txPr/>
+    <dgm:style>
+      <a:lnRef idx="1">
+        <a:scrgbClr r="0" g="0" b="0"/>
+      </a:lnRef>
+      <a:fillRef idx="1">
+        <a:scrgbClr r="0" g="0" b="0"/>
+      </a:fillRef>
+      <a:effectRef idx="2">
+        <a:scrgbClr r="0" g="0" b="0"/>
+      </a:effectRef>
+      <a:fontRef idx="minor"/>
+    </dgm:style>
+  </dgm:styleLbl>
+  <dgm:styleLbl name="fgAcc3">
+    <dgm:scene3d>
+      <a:camera prst="orthographicFront"/>
+      <a:lightRig rig="flat" dir="t"/>
+    </dgm:scene3d>
+    <dgm:sp3d z="190500" extrusionH="12700" prstMaterial="plastic">
+      <a:bevelT w="50800" h="50800"/>
+    </dgm:sp3d>
+    <dgm:txPr/>
+    <dgm:style>
+      <a:lnRef idx="1">
+        <a:scrgbClr r="0" g="0" b="0"/>
+      </a:lnRef>
+      <a:fillRef idx="1">
+        <a:scrgbClr r="0" g="0" b="0"/>
+      </a:fillRef>
+      <a:effectRef idx="2">
+        <a:scrgbClr r="0" g="0" b="0"/>
+      </a:effectRef>
+      <a:fontRef idx="minor"/>
+    </dgm:style>
+  </dgm:styleLbl>
+  <dgm:styleLbl name="fgAcc4">
+    <dgm:scene3d>
+      <a:camera prst="orthographicFront"/>
+      <a:lightRig rig="flat" dir="t"/>
+    </dgm:scene3d>
+    <dgm:sp3d z="190500" extrusionH="12700" prstMaterial="plastic">
+      <a:bevelT w="50800" h="50800"/>
+    </dgm:sp3d>
+    <dgm:txPr/>
+    <dgm:style>
+      <a:lnRef idx="1">
+        <a:scrgbClr r="0" g="0" b="0"/>
+      </a:lnRef>
+      <a:fillRef idx="1">
+        <a:scrgbClr r="0" g="0" b="0"/>
+      </a:fillRef>
+      <a:effectRef idx="2">
+        <a:scrgbClr r="0" g="0" b="0"/>
+      </a:effectRef>
+      <a:fontRef idx="minor"/>
+    </dgm:style>
+  </dgm:styleLbl>
+  <dgm:styleLbl name="bgShp">
+    <dgm:scene3d>
+      <a:camera prst="orthographicFront"/>
+      <a:lightRig rig="flat" dir="t"/>
+    </dgm:scene3d>
+    <dgm:sp3d z="-190500" extrusionH="12700" prstMaterial="plastic">
+      <a:bevelT w="50800" h="50800"/>
+    </dgm:sp3d>
+    <dgm:txPr/>
+    <dgm:style>
+      <a:lnRef idx="0">
+        <a:scrgbClr r="0" g="0" b="0"/>
+      </a:lnRef>
+      <a:fillRef idx="3">
+        <a:scrgbClr r="0" g="0" b="0"/>
+      </a:fillRef>
+      <a:effectRef idx="0">
+        <a:scrgbClr r="0" g="0" b="0"/>
+      </a:effectRef>
+      <a:fontRef idx="minor"/>
+    </dgm:style>
+  </dgm:styleLbl>
+  <dgm:styleLbl name="dkBgShp">
+    <dgm:scene3d>
+      <a:camera prst="orthographicFront"/>
+      <a:lightRig rig="flat" dir="t"/>
+    </dgm:scene3d>
+    <dgm:sp3d z="-190500" extrusionH="12700" prstMaterial="plastic">
+      <a:bevelT w="50800" h="50800"/>
+    </dgm:sp3d>
+    <dgm:txPr/>
+    <dgm:style>
+      <a:lnRef idx="0">
+        <a:scrgbClr r="0" g="0" b="0"/>
+      </a:lnRef>
+      <a:fillRef idx="2">
+        <a:scrgbClr r="0" g="0" b="0"/>
+      </a:fillRef>
+      <a:effectRef idx="0">
+        <a:scrgbClr r="0" g="0" b="0"/>
+      </a:effectRef>
+      <a:fontRef idx="minor"/>
+    </dgm:style>
+  </dgm:styleLbl>
+  <dgm:styleLbl name="trBgShp">
+    <dgm:scene3d>
+      <a:camera prst="orthographicFront"/>
+      <a:lightRig rig="flat" dir="t"/>
+    </dgm:scene3d>
+    <dgm:sp3d z="-190500" extrusionH="12700" prstMaterial="matte"/>
+    <dgm:txPr/>
+    <dgm:style>
+      <a:lnRef idx="0">
+        <a:scrgbClr r="0" g="0" b="0"/>
+      </a:lnRef>
+      <a:fillRef idx="1">
+        <a:scrgbClr r="0" g="0" b="0"/>
+      </a:fillRef>
+      <a:effectRef idx="0">
+        <a:scrgbClr r="0" g="0" b="0"/>
+      </a:effectRef>
+      <a:fontRef idx="minor"/>
+    </dgm:style>
+  </dgm:styleLbl>
+  <dgm:styleLbl name="fgShp">
+    <dgm:scene3d>
+      <a:camera prst="orthographicFront"/>
+      <a:lightRig rig="flat" dir="t"/>
+    </dgm:scene3d>
+    <dgm:sp3d z="190500" prstMaterial="plastic">
+      <a:bevelT w="120900" h="88900"/>
+      <a:bevelB w="88900" h="31750" prst="angle"/>
+    </dgm:sp3d>
+    <dgm:txPr/>
+    <dgm:style>
+      <a:lnRef idx="0">
+        <a:scrgbClr r="0" g="0" b="0"/>
+      </a:lnRef>
+      <a:fillRef idx="1">
+        <a:scrgbClr r="0" g="0" b="0"/>
+      </a:fillRef>
+      <a:effectRef idx="3">
+        <a:scrgbClr r="0" g="0" b="0"/>
+      </a:effectRef>
+      <a:fontRef idx="minor">
+        <a:schemeClr val="lt1"/>
+      </a:fontRef>
+    </dgm:style>
+  </dgm:styleLbl>
+  <dgm:styleLbl name="revTx">
+    <dgm:scene3d>
+      <a:camera prst="orthographicFront"/>
+      <a:lightRig rig="threePt" dir="t"/>
+    </dgm:scene3d>
+    <dgm:sp3d/>
+    <dgm:txPr/>
+    <dgm:style>
+      <a:lnRef idx="0">
+        <a:scrgbClr r="0" g="0" b="0"/>
+      </a:lnRef>
+      <a:fillRef idx="0">
+        <a:scrgbClr r="0" g="0" b="0"/>
+      </a:fillRef>
+      <a:effectRef idx="0">
+        <a:scrgbClr r="0" g="0" b="0"/>
+      </a:effectRef>
+      <a:fontRef idx="minor"/>
+    </dgm:style>
+  </dgm:styleLbl>
+</dgm:styleDef>
+</file>
+
+<file path=ppt/diagrams/quickStyle2.xml><?xml version="1.0" encoding="utf-8"?>
 <dgm:styleDef xmlns:dgm="http://schemas.openxmlformats.org/drawingml/2006/diagram" xmlns:a="http://schemas.openxmlformats.org/drawingml/2006/main" uniqueId="urn:microsoft.com/office/officeart/2005/8/quickstyle/3d1">
   <dgm:title val=""/>
   <dgm:desc val=""/>
@@ -5023,7 +9042,7 @@
           <a:p>
             <a:fld id="{79C0705B-4870-4470-A32F-307AEE1697AB}" type="datetimeFigureOut">
               <a:rPr lang="en-IE" smtClean="0"/>
-              <a:t>05/09/2025</a:t>
+              <a:t>18/09/2025</a:t>
             </a:fld>
             <a:endParaRPr lang="en-IE"/>
           </a:p>
@@ -5193,7 +9212,7 @@
           <a:p>
             <a:fld id="{79C0705B-4870-4470-A32F-307AEE1697AB}" type="datetimeFigureOut">
               <a:rPr lang="en-IE" smtClean="0"/>
-              <a:t>05/09/2025</a:t>
+              <a:t>18/09/2025</a:t>
             </a:fld>
             <a:endParaRPr lang="en-IE"/>
           </a:p>
@@ -5373,7 +9392,7 @@
           <a:p>
             <a:fld id="{79C0705B-4870-4470-A32F-307AEE1697AB}" type="datetimeFigureOut">
               <a:rPr lang="en-IE" smtClean="0"/>
-              <a:t>05/09/2025</a:t>
+              <a:t>18/09/2025</a:t>
             </a:fld>
             <a:endParaRPr lang="en-IE"/>
           </a:p>
@@ -5543,7 +9562,7 @@
           <a:p>
             <a:fld id="{79C0705B-4870-4470-A32F-307AEE1697AB}" type="datetimeFigureOut">
               <a:rPr lang="en-IE" smtClean="0"/>
-              <a:t>05/09/2025</a:t>
+              <a:t>18/09/2025</a:t>
             </a:fld>
             <a:endParaRPr lang="en-IE"/>
           </a:p>
@@ -5789,7 +9808,7 @@
           <a:p>
             <a:fld id="{79C0705B-4870-4470-A32F-307AEE1697AB}" type="datetimeFigureOut">
               <a:rPr lang="en-IE" smtClean="0"/>
-              <a:t>05/09/2025</a:t>
+              <a:t>18/09/2025</a:t>
             </a:fld>
             <a:endParaRPr lang="en-IE"/>
           </a:p>
@@ -6021,7 +10040,7 @@
           <a:p>
             <a:fld id="{79C0705B-4870-4470-A32F-307AEE1697AB}" type="datetimeFigureOut">
               <a:rPr lang="en-IE" smtClean="0"/>
-              <a:t>05/09/2025</a:t>
+              <a:t>18/09/2025</a:t>
             </a:fld>
             <a:endParaRPr lang="en-IE"/>
           </a:p>
@@ -6388,7 +10407,7 @@
           <a:p>
             <a:fld id="{79C0705B-4870-4470-A32F-307AEE1697AB}" type="datetimeFigureOut">
               <a:rPr lang="en-IE" smtClean="0"/>
-              <a:t>05/09/2025</a:t>
+              <a:t>18/09/2025</a:t>
             </a:fld>
             <a:endParaRPr lang="en-IE"/>
           </a:p>
@@ -6506,7 +10525,7 @@
           <a:p>
             <a:fld id="{79C0705B-4870-4470-A32F-307AEE1697AB}" type="datetimeFigureOut">
               <a:rPr lang="en-IE" smtClean="0"/>
-              <a:t>05/09/2025</a:t>
+              <a:t>18/09/2025</a:t>
             </a:fld>
             <a:endParaRPr lang="en-IE"/>
           </a:p>
@@ -6601,7 +10620,7 @@
           <a:p>
             <a:fld id="{79C0705B-4870-4470-A32F-307AEE1697AB}" type="datetimeFigureOut">
               <a:rPr lang="en-IE" smtClean="0"/>
-              <a:t>05/09/2025</a:t>
+              <a:t>18/09/2025</a:t>
             </a:fld>
             <a:endParaRPr lang="en-IE"/>
           </a:p>
@@ -6878,7 +10897,7 @@
           <a:p>
             <a:fld id="{79C0705B-4870-4470-A32F-307AEE1697AB}" type="datetimeFigureOut">
               <a:rPr lang="en-IE" smtClean="0"/>
-              <a:t>05/09/2025</a:t>
+              <a:t>18/09/2025</a:t>
             </a:fld>
             <a:endParaRPr lang="en-IE"/>
           </a:p>
@@ -7135,7 +11154,7 @@
           <a:p>
             <a:fld id="{79C0705B-4870-4470-A32F-307AEE1697AB}" type="datetimeFigureOut">
               <a:rPr lang="en-IE" smtClean="0"/>
-              <a:t>05/09/2025</a:t>
+              <a:t>18/09/2025</a:t>
             </a:fld>
             <a:endParaRPr lang="en-IE"/>
           </a:p>
@@ -7348,7 +11367,7 @@
           <a:p>
             <a:fld id="{79C0705B-4870-4470-A32F-307AEE1697AB}" type="datetimeFigureOut">
               <a:rPr lang="en-IE" smtClean="0"/>
-              <a:t>05/09/2025</a:t>
+              <a:t>18/09/2025</a:t>
             </a:fld>
             <a:endParaRPr lang="en-IE"/>
           </a:p>
@@ -7813,7 +11832,9 @@
             <a:srgbClr val="800020"/>
           </a:solidFill>
           <a:ln w="38100">
-            <a:noFill/>
+            <a:solidFill>
+              <a:schemeClr val="tx1"/>
+            </a:solidFill>
           </a:ln>
           <a:effectLst>
             <a:outerShdw blurRad="190500" dist="228600" dir="2700000" algn="ctr">
@@ -7917,7 +11938,9 @@
             <a:srgbClr val="3B3B98"/>
           </a:solidFill>
           <a:ln w="38100">
-            <a:noFill/>
+            <a:solidFill>
+              <a:schemeClr val="tx1"/>
+            </a:solidFill>
           </a:ln>
           <a:effectLst>
             <a:outerShdw blurRad="190500" dist="228600" dir="2700000" algn="ctr">
@@ -8037,7 +12060,9 @@
             <a:srgbClr val="2A2A72"/>
           </a:solidFill>
           <a:ln w="38100">
-            <a:noFill/>
+            <a:solidFill>
+              <a:schemeClr val="tx1"/>
+            </a:solidFill>
           </a:ln>
           <a:effectLst>
             <a:outerShdw blurRad="190500" dist="228600" dir="2700000" algn="ctr">
@@ -8965,7 +12990,9 @@
             <a:srgbClr val="B56576"/>
           </a:solidFill>
           <a:ln w="38100">
-            <a:noFill/>
+            <a:solidFill>
+              <a:schemeClr val="tx1"/>
+            </a:solidFill>
           </a:ln>
           <a:effectLst>
             <a:outerShdw blurRad="44450" dist="27940" dir="5400000" algn="ctr">
@@ -9045,7 +13072,9 @@
             <a:srgbClr val="B56576"/>
           </a:solidFill>
           <a:ln w="38100">
-            <a:noFill/>
+            <a:solidFill>
+              <a:schemeClr val="tx1"/>
+            </a:solidFill>
           </a:ln>
           <a:effectLst>
             <a:outerShdw blurRad="44450" dist="27940" dir="5400000" algn="ctr">
@@ -9125,7 +13154,9 @@
             <a:srgbClr val="4A4E69"/>
           </a:solidFill>
           <a:ln w="38100">
-            <a:noFill/>
+            <a:solidFill>
+              <a:schemeClr val="tx1"/>
+            </a:solidFill>
           </a:ln>
           <a:effectLst>
             <a:outerShdw blurRad="44450" dist="27940" dir="5400000" algn="ctr">
@@ -9205,7 +13236,9 @@
             <a:srgbClr val="4A4E69"/>
           </a:solidFill>
           <a:ln w="38100">
-            <a:noFill/>
+            <a:solidFill>
+              <a:schemeClr val="tx1"/>
+            </a:solidFill>
           </a:ln>
           <a:effectLst>
             <a:outerShdw blurRad="44450" dist="27940" dir="5400000" algn="ctr">
@@ -9293,7 +13326,9 @@
             <a:srgbClr val="6B5B95"/>
           </a:solidFill>
           <a:ln w="38100">
-            <a:noFill/>
+            <a:solidFill>
+              <a:schemeClr val="tx1"/>
+            </a:solidFill>
           </a:ln>
           <a:effectLst>
             <a:outerShdw blurRad="44450" dist="27940" dir="5400000" algn="ctr">
@@ -9373,7 +13408,9 @@
             <a:srgbClr val="6B5B95"/>
           </a:solidFill>
           <a:ln w="38100">
-            <a:noFill/>
+            <a:solidFill>
+              <a:schemeClr val="tx1"/>
+            </a:solidFill>
           </a:ln>
           <a:effectLst>
             <a:outerShdw blurRad="44450" dist="27940" dir="5400000" algn="ctr">
@@ -9663,7 +13700,7 @@
           <p:nvPr>
             <p:extLst>
               <p:ext uri="{D42A27DB-BD31-4B8C-83A1-F6EECF244321}">
-                <p14:modId xmlns:p14="http://schemas.microsoft.com/office/powerpoint/2010/main" val="3174936920"/>
+                <p14:modId xmlns:p14="http://schemas.microsoft.com/office/powerpoint/2010/main" val="3440689850"/>
               </p:ext>
             </p:extLst>
           </p:nvPr>
@@ -10221,7 +14258,9 @@
             <a:avLst/>
           </a:prstGeom>
           <a:ln w="38100">
-            <a:noFill/>
+            <a:solidFill>
+              <a:schemeClr val="tx1"/>
+            </a:solidFill>
           </a:ln>
           <a:effectLst>
             <a:outerShdw blurRad="190500" dist="228600" dir="2700000" algn="ctr">
@@ -10291,7 +14330,9 @@
             <a:avLst/>
           </a:prstGeom>
           <a:ln w="38100">
-            <a:noFill/>
+            <a:solidFill>
+              <a:schemeClr val="tx1"/>
+            </a:solidFill>
           </a:ln>
           <a:effectLst>
             <a:outerShdw blurRad="190500" dist="228600" dir="2700000" algn="ctr">
@@ -10361,7 +14402,9 @@
             <a:avLst/>
           </a:prstGeom>
           <a:ln w="38100">
-            <a:noFill/>
+            <a:solidFill>
+              <a:schemeClr val="tx1"/>
+            </a:solidFill>
           </a:ln>
           <a:effectLst>
             <a:outerShdw blurRad="190500" dist="228600" dir="2700000" algn="ctr">
@@ -10431,7 +14474,9 @@
             <a:avLst/>
           </a:prstGeom>
           <a:ln w="38100">
-            <a:noFill/>
+            <a:solidFill>
+              <a:schemeClr val="tx1"/>
+            </a:solidFill>
           </a:ln>
           <a:effectLst>
             <a:outerShdw blurRad="190500" dist="228600" dir="2700000" algn="ctr">
@@ -10501,7 +14546,9 @@
             <a:avLst/>
           </a:prstGeom>
           <a:ln w="38100">
-            <a:noFill/>
+            <a:solidFill>
+              <a:schemeClr val="tx1"/>
+            </a:solidFill>
           </a:ln>
           <a:effectLst>
             <a:outerShdw blurRad="190500" dist="228600" dir="2700000" algn="ctr">
@@ -10575,7 +14622,9 @@
             <a:avLst/>
           </a:prstGeom>
           <a:ln w="38100">
-            <a:noFill/>
+            <a:solidFill>
+              <a:schemeClr val="tx1"/>
+            </a:solidFill>
           </a:ln>
           <a:effectLst>
             <a:outerShdw blurRad="190500" dist="228600" dir="2700000" algn="ctr">
@@ -10649,7 +14698,9 @@
             <a:avLst/>
           </a:prstGeom>
           <a:ln w="38100">
-            <a:noFill/>
+            <a:solidFill>
+              <a:schemeClr val="tx1"/>
+            </a:solidFill>
           </a:ln>
           <a:effectLst>
             <a:outerShdw blurRad="190500" dist="228600" dir="2700000" algn="ctr">
@@ -10857,6 +14908,100 @@
 </file>
 
 <file path=ppt/slides/slide5.xml><?xml version="1.0" encoding="utf-8"?>
+<p:sld xmlns:a="http://schemas.openxmlformats.org/drawingml/2006/main" xmlns:r="http://schemas.openxmlformats.org/officeDocument/2006/relationships" xmlns:p="http://schemas.openxmlformats.org/presentationml/2006/main">
+  <p:cSld>
+    <p:spTree>
+      <p:nvGrpSpPr>
+        <p:cNvPr id="1" name=""/>
+        <p:cNvGrpSpPr/>
+        <p:nvPr/>
+      </p:nvGrpSpPr>
+      <p:grpSpPr>
+        <a:xfrm>
+          <a:off x="0" y="0"/>
+          <a:ext cx="0" cy="0"/>
+          <a:chOff x="0" y="0"/>
+          <a:chExt cx="0" cy="0"/>
+        </a:xfrm>
+      </p:grpSpPr>
+      <p:sp>
+        <p:nvSpPr>
+          <p:cNvPr id="4" name="Title 1">
+            <a:extLst>
+              <a:ext uri="{FF2B5EF4-FFF2-40B4-BE49-F238E27FC236}">
+                <a16:creationId xmlns:a16="http://schemas.microsoft.com/office/drawing/2014/main" id="{B7025FF1-2EE4-12D9-7F37-8AD7AD049012}"/>
+              </a:ext>
+            </a:extLst>
+          </p:cNvPr>
+          <p:cNvSpPr>
+            <a:spLocks noGrp="1"/>
+          </p:cNvSpPr>
+          <p:nvPr>
+            <p:ph type="title"/>
+          </p:nvPr>
+        </p:nvSpPr>
+        <p:spPr>
+          <a:xfrm>
+            <a:off x="1237545" y="628847"/>
+            <a:ext cx="15525572" cy="1489831"/>
+          </a:xfrm>
+        </p:spPr>
+        <p:txBody>
+          <a:bodyPr>
+            <a:normAutofit fontScale="90000"/>
+          </a:bodyPr>
+          <a:lstStyle/>
+          <a:p>
+            <a:pPr algn="ctr"/>
+            <a:r>
+              <a:rPr lang="en-IE" b="1" dirty="0"/>
+              <a:t>High Level Development Approach</a:t>
+            </a:r>
+          </a:p>
+        </p:txBody>
+      </p:sp>
+      <p:graphicFrame>
+        <p:nvGraphicFramePr>
+          <p:cNvPr id="5" name="Diagram 4">
+            <a:extLst>
+              <a:ext uri="{FF2B5EF4-FFF2-40B4-BE49-F238E27FC236}">
+                <a16:creationId xmlns:a16="http://schemas.microsoft.com/office/drawing/2014/main" id="{4D9ACF76-073C-44F3-C456-69DA6124BA89}"/>
+              </a:ext>
+            </a:extLst>
+          </p:cNvPr>
+          <p:cNvGraphicFramePr/>
+          <p:nvPr>
+            <p:extLst>
+              <p:ext uri="{D42A27DB-BD31-4B8C-83A1-F6EECF244321}">
+                <p14:modId xmlns:p14="http://schemas.microsoft.com/office/powerpoint/2010/main" val="1334874910"/>
+              </p:ext>
+            </p:extLst>
+          </p:nvPr>
+        </p:nvGraphicFramePr>
+        <p:xfrm>
+          <a:off x="612536" y="2748599"/>
+          <a:ext cx="16775589" cy="11678601"/>
+        </p:xfrm>
+        <a:graphic>
+          <a:graphicData uri="http://schemas.openxmlformats.org/drawingml/2006/diagram">
+            <dgm:relIds xmlns:dgm="http://schemas.openxmlformats.org/drawingml/2006/diagram" xmlns:r="http://schemas.openxmlformats.org/officeDocument/2006/relationships" r:dm="rId2" r:lo="rId3" r:qs="rId4" r:cs="rId5"/>
+          </a:graphicData>
+        </a:graphic>
+      </p:graphicFrame>
+    </p:spTree>
+    <p:extLst>
+      <p:ext uri="{BB962C8B-B14F-4D97-AF65-F5344CB8AC3E}">
+        <p14:creationId xmlns:p14="http://schemas.microsoft.com/office/powerpoint/2010/main" val="813586131"/>
+      </p:ext>
+    </p:extLst>
+  </p:cSld>
+  <p:clrMapOvr>
+    <a:masterClrMapping/>
+  </p:clrMapOvr>
+</p:sld>
+</file>
+
+<file path=ppt/slides/slide6.xml><?xml version="1.0" encoding="utf-8"?>
 <p:sld xmlns:a="http://schemas.openxmlformats.org/drawingml/2006/main" xmlns:r="http://schemas.openxmlformats.org/officeDocument/2006/relationships" xmlns:p="http://schemas.openxmlformats.org/presentationml/2006/main">
   <p:cSld>
     <p:spTree>
@@ -12798,7 +16943,7 @@
 </p:sld>
 </file>
 
-<file path=ppt/slides/slide6.xml><?xml version="1.0" encoding="utf-8"?>
+<file path=ppt/slides/slide7.xml><?xml version="1.0" encoding="utf-8"?>
 <p:sld xmlns:a="http://schemas.openxmlformats.org/drawingml/2006/main" xmlns:r="http://schemas.openxmlformats.org/officeDocument/2006/relationships" xmlns:p="http://schemas.openxmlformats.org/presentationml/2006/main">
   <p:cSld>
     <p:spTree>

--- a/tasktide/docs/Diagrams/Diagrams.pptx
+++ b/tasktide/docs/Diagrams/Diagrams.pptx
@@ -9042,7 +9042,7 @@
           <a:p>
             <a:fld id="{79C0705B-4870-4470-A32F-307AEE1697AB}" type="datetimeFigureOut">
               <a:rPr lang="en-IE" smtClean="0"/>
-              <a:t>18/09/2025</a:t>
+              <a:t>14/10/2025</a:t>
             </a:fld>
             <a:endParaRPr lang="en-IE"/>
           </a:p>
@@ -9212,7 +9212,7 @@
           <a:p>
             <a:fld id="{79C0705B-4870-4470-A32F-307AEE1697AB}" type="datetimeFigureOut">
               <a:rPr lang="en-IE" smtClean="0"/>
-              <a:t>18/09/2025</a:t>
+              <a:t>14/10/2025</a:t>
             </a:fld>
             <a:endParaRPr lang="en-IE"/>
           </a:p>
@@ -9392,7 +9392,7 @@
           <a:p>
             <a:fld id="{79C0705B-4870-4470-A32F-307AEE1697AB}" type="datetimeFigureOut">
               <a:rPr lang="en-IE" smtClean="0"/>
-              <a:t>18/09/2025</a:t>
+              <a:t>14/10/2025</a:t>
             </a:fld>
             <a:endParaRPr lang="en-IE"/>
           </a:p>
@@ -9562,7 +9562,7 @@
           <a:p>
             <a:fld id="{79C0705B-4870-4470-A32F-307AEE1697AB}" type="datetimeFigureOut">
               <a:rPr lang="en-IE" smtClean="0"/>
-              <a:t>18/09/2025</a:t>
+              <a:t>14/10/2025</a:t>
             </a:fld>
             <a:endParaRPr lang="en-IE"/>
           </a:p>
@@ -9808,7 +9808,7 @@
           <a:p>
             <a:fld id="{79C0705B-4870-4470-A32F-307AEE1697AB}" type="datetimeFigureOut">
               <a:rPr lang="en-IE" smtClean="0"/>
-              <a:t>18/09/2025</a:t>
+              <a:t>14/10/2025</a:t>
             </a:fld>
             <a:endParaRPr lang="en-IE"/>
           </a:p>
@@ -10040,7 +10040,7 @@
           <a:p>
             <a:fld id="{79C0705B-4870-4470-A32F-307AEE1697AB}" type="datetimeFigureOut">
               <a:rPr lang="en-IE" smtClean="0"/>
-              <a:t>18/09/2025</a:t>
+              <a:t>14/10/2025</a:t>
             </a:fld>
             <a:endParaRPr lang="en-IE"/>
           </a:p>
@@ -10407,7 +10407,7 @@
           <a:p>
             <a:fld id="{79C0705B-4870-4470-A32F-307AEE1697AB}" type="datetimeFigureOut">
               <a:rPr lang="en-IE" smtClean="0"/>
-              <a:t>18/09/2025</a:t>
+              <a:t>14/10/2025</a:t>
             </a:fld>
             <a:endParaRPr lang="en-IE"/>
           </a:p>
@@ -10525,7 +10525,7 @@
           <a:p>
             <a:fld id="{79C0705B-4870-4470-A32F-307AEE1697AB}" type="datetimeFigureOut">
               <a:rPr lang="en-IE" smtClean="0"/>
-              <a:t>18/09/2025</a:t>
+              <a:t>14/10/2025</a:t>
             </a:fld>
             <a:endParaRPr lang="en-IE"/>
           </a:p>
@@ -10620,7 +10620,7 @@
           <a:p>
             <a:fld id="{79C0705B-4870-4470-A32F-307AEE1697AB}" type="datetimeFigureOut">
               <a:rPr lang="en-IE" smtClean="0"/>
-              <a:t>18/09/2025</a:t>
+              <a:t>14/10/2025</a:t>
             </a:fld>
             <a:endParaRPr lang="en-IE"/>
           </a:p>
@@ -10897,7 +10897,7 @@
           <a:p>
             <a:fld id="{79C0705B-4870-4470-A32F-307AEE1697AB}" type="datetimeFigureOut">
               <a:rPr lang="en-IE" smtClean="0"/>
-              <a:t>18/09/2025</a:t>
+              <a:t>14/10/2025</a:t>
             </a:fld>
             <a:endParaRPr lang="en-IE"/>
           </a:p>
@@ -11154,7 +11154,7 @@
           <a:p>
             <a:fld id="{79C0705B-4870-4470-A32F-307AEE1697AB}" type="datetimeFigureOut">
               <a:rPr lang="en-IE" smtClean="0"/>
-              <a:t>18/09/2025</a:t>
+              <a:t>14/10/2025</a:t>
             </a:fld>
             <a:endParaRPr lang="en-IE"/>
           </a:p>
@@ -11367,7 +11367,7 @@
           <a:p>
             <a:fld id="{79C0705B-4870-4470-A32F-307AEE1697AB}" type="datetimeFigureOut">
               <a:rPr lang="en-IE" smtClean="0"/>
-              <a:t>18/09/2025</a:t>
+              <a:t>14/10/2025</a:t>
             </a:fld>
             <a:endParaRPr lang="en-IE"/>
           </a:p>
@@ -14105,138 +14105,6 @@
           </a:fontRef>
         </p:style>
       </p:cxnSp>
-      <p:cxnSp>
-        <p:nvCxnSpPr>
-          <p:cNvPr id="47" name="Straight Arrow Connector 46">
-            <a:extLst>
-              <a:ext uri="{FF2B5EF4-FFF2-40B4-BE49-F238E27FC236}">
-                <a16:creationId xmlns:a16="http://schemas.microsoft.com/office/drawing/2014/main" id="{6BBE23F6-3E62-EEA6-9EC5-A37AB8CCE7C9}"/>
-              </a:ext>
-            </a:extLst>
-          </p:cNvPr>
-          <p:cNvCxnSpPr>
-            <a:cxnSpLocks/>
-          </p:cNvCxnSpPr>
-          <p:nvPr/>
-        </p:nvCxnSpPr>
-        <p:spPr>
-          <a:xfrm flipH="1">
-            <a:off x="13292134" y="9844550"/>
-            <a:ext cx="1284683" cy="904731"/>
-          </a:xfrm>
-          <a:prstGeom prst="straightConnector1">
-            <a:avLst/>
-          </a:prstGeom>
-          <a:ln w="76200">
-            <a:solidFill>
-              <a:srgbClr val="006400"/>
-            </a:solidFill>
-            <a:tailEnd type="triangle"/>
-          </a:ln>
-        </p:spPr>
-        <p:style>
-          <a:lnRef idx="2">
-            <a:schemeClr val="accent1"/>
-          </a:lnRef>
-          <a:fillRef idx="0">
-            <a:schemeClr val="accent1"/>
-          </a:fillRef>
-          <a:effectRef idx="1">
-            <a:schemeClr val="accent1"/>
-          </a:effectRef>
-          <a:fontRef idx="minor">
-            <a:schemeClr val="tx1"/>
-          </a:fontRef>
-        </p:style>
-      </p:cxnSp>
-      <p:cxnSp>
-        <p:nvCxnSpPr>
-          <p:cNvPr id="50" name="Straight Arrow Connector 49">
-            <a:extLst>
-              <a:ext uri="{FF2B5EF4-FFF2-40B4-BE49-F238E27FC236}">
-                <a16:creationId xmlns:a16="http://schemas.microsoft.com/office/drawing/2014/main" id="{01FBED5D-201B-FA8F-D00F-68E2D09F3003}"/>
-              </a:ext>
-            </a:extLst>
-          </p:cNvPr>
-          <p:cNvCxnSpPr>
-            <a:cxnSpLocks/>
-          </p:cNvCxnSpPr>
-          <p:nvPr/>
-        </p:nvCxnSpPr>
-        <p:spPr>
-          <a:xfrm>
-            <a:off x="13236734" y="12290706"/>
-            <a:ext cx="1340082" cy="1026324"/>
-          </a:xfrm>
-          <a:prstGeom prst="straightConnector1">
-            <a:avLst/>
-          </a:prstGeom>
-          <a:ln w="76200">
-            <a:solidFill>
-              <a:srgbClr val="006400"/>
-            </a:solidFill>
-            <a:tailEnd type="triangle"/>
-          </a:ln>
-        </p:spPr>
-        <p:style>
-          <a:lnRef idx="2">
-            <a:schemeClr val="accent1"/>
-          </a:lnRef>
-          <a:fillRef idx="0">
-            <a:schemeClr val="accent1"/>
-          </a:fillRef>
-          <a:effectRef idx="1">
-            <a:schemeClr val="accent1"/>
-          </a:effectRef>
-          <a:fontRef idx="minor">
-            <a:schemeClr val="tx1"/>
-          </a:fontRef>
-        </p:style>
-      </p:cxnSp>
-      <p:cxnSp>
-        <p:nvCxnSpPr>
-          <p:cNvPr id="51" name="Straight Arrow Connector 50">
-            <a:extLst>
-              <a:ext uri="{FF2B5EF4-FFF2-40B4-BE49-F238E27FC236}">
-                <a16:creationId xmlns:a16="http://schemas.microsoft.com/office/drawing/2014/main" id="{EA609447-70C2-50CB-DC4B-87DAD8A21A89}"/>
-              </a:ext>
-            </a:extLst>
-          </p:cNvPr>
-          <p:cNvCxnSpPr>
-            <a:cxnSpLocks/>
-          </p:cNvCxnSpPr>
-          <p:nvPr/>
-        </p:nvCxnSpPr>
-        <p:spPr>
-          <a:xfrm flipV="1">
-            <a:off x="14917727" y="12305033"/>
-            <a:ext cx="1282078" cy="978690"/>
-          </a:xfrm>
-          <a:prstGeom prst="straightConnector1">
-            <a:avLst/>
-          </a:prstGeom>
-          <a:ln w="76200">
-            <a:solidFill>
-              <a:srgbClr val="006400"/>
-            </a:solidFill>
-            <a:tailEnd type="triangle"/>
-          </a:ln>
-        </p:spPr>
-        <p:style>
-          <a:lnRef idx="2">
-            <a:schemeClr val="accent1"/>
-          </a:lnRef>
-          <a:fillRef idx="0">
-            <a:schemeClr val="accent1"/>
-          </a:fillRef>
-          <a:effectRef idx="1">
-            <a:schemeClr val="accent1"/>
-          </a:effectRef>
-          <a:fontRef idx="minor">
-            <a:schemeClr val="tx1"/>
-          </a:fontRef>
-        </p:style>
-      </p:cxnSp>
       <p:sp>
         <p:nvSpPr>
           <p:cNvPr id="57" name="Rectangle: Rounded Corners 56">
@@ -14467,7 +14335,7 @@
         </p:nvSpPr>
         <p:spPr>
           <a:xfrm>
-            <a:off x="13037428" y="7847345"/>
+            <a:off x="13228327" y="7793068"/>
             <a:ext cx="3152458" cy="1852676"/>
           </a:xfrm>
           <a:prstGeom prst="roundRect">
@@ -14520,235 +14388,7 @@
             <a:pPr algn="ctr"/>
             <a:r>
               <a:rPr lang="en-IE" sz="2800" b="1" dirty="0"/>
-              <a:t>Observer chain monitors &amp; validates processing</a:t>
-            </a:r>
-          </a:p>
-        </p:txBody>
-      </p:sp>
-      <p:sp>
-        <p:nvSpPr>
-          <p:cNvPr id="61" name="Rectangle: Rounded Corners 60">
-            <a:extLst>
-              <a:ext uri="{FF2B5EF4-FFF2-40B4-BE49-F238E27FC236}">
-                <a16:creationId xmlns:a16="http://schemas.microsoft.com/office/drawing/2014/main" id="{79F64589-FDB2-FFA2-2E31-78535D5A4CBB}"/>
-              </a:ext>
-            </a:extLst>
-          </p:cNvPr>
-          <p:cNvSpPr/>
-          <p:nvPr/>
-        </p:nvSpPr>
-        <p:spPr>
-          <a:xfrm>
-            <a:off x="12126512" y="10916382"/>
-            <a:ext cx="2220444" cy="1158240"/>
-          </a:xfrm>
-          <a:prstGeom prst="roundRect">
-            <a:avLst/>
-          </a:prstGeom>
-          <a:ln w="38100">
-            <a:solidFill>
-              <a:schemeClr val="tx1"/>
-            </a:solidFill>
-          </a:ln>
-          <a:effectLst>
-            <a:outerShdw blurRad="190500" dist="228600" dir="2700000" algn="ctr">
-              <a:srgbClr val="000000">
-                <a:alpha val="30000"/>
-              </a:srgbClr>
-            </a:outerShdw>
-          </a:effectLst>
-          <a:scene3d>
-            <a:camera prst="orthographicFront">
-              <a:rot lat="0" lon="0" rev="0"/>
-            </a:camera>
-            <a:lightRig rig="glow" dir="t">
-              <a:rot lat="0" lon="0" rev="4800000"/>
-            </a:lightRig>
-          </a:scene3d>
-          <a:sp3d prstMaterial="matte">
-            <a:bevelT w="127000" h="63500"/>
-          </a:sp3d>
-        </p:spPr>
-        <p:style>
-          <a:lnRef idx="2">
-            <a:schemeClr val="accent1">
-              <a:shade val="15000"/>
-            </a:schemeClr>
-          </a:lnRef>
-          <a:fillRef idx="1">
-            <a:schemeClr val="accent1"/>
-          </a:fillRef>
-          <a:effectRef idx="0">
-            <a:schemeClr val="accent1"/>
-          </a:effectRef>
-          <a:fontRef idx="minor">
-            <a:schemeClr val="lt1"/>
-          </a:fontRef>
-        </p:style>
-        <p:txBody>
-          <a:bodyPr rtlCol="0" anchor="ctr"/>
-          <a:lstStyle/>
-          <a:p>
-            <a:pPr algn="ctr"/>
-            <a:r>
-              <a:rPr lang="en-IE" sz="2400" b="1" dirty="0" err="1"/>
-              <a:t>onTaskStart</a:t>
-            </a:r>
-            <a:r>
-              <a:rPr lang="en-IE" sz="2400" b="1" dirty="0"/>
-              <a:t> subscription</a:t>
-            </a:r>
-          </a:p>
-        </p:txBody>
-      </p:sp>
-      <p:sp>
-        <p:nvSpPr>
-          <p:cNvPr id="62" name="Rectangle: Rounded Corners 61">
-            <a:extLst>
-              <a:ext uri="{FF2B5EF4-FFF2-40B4-BE49-F238E27FC236}">
-                <a16:creationId xmlns:a16="http://schemas.microsoft.com/office/drawing/2014/main" id="{0126D41A-8577-F29D-5055-C0DABEB861D7}"/>
-              </a:ext>
-            </a:extLst>
-          </p:cNvPr>
-          <p:cNvSpPr/>
-          <p:nvPr/>
-        </p:nvSpPr>
-        <p:spPr>
-          <a:xfrm>
-            <a:off x="13292133" y="13445368"/>
-            <a:ext cx="2897752" cy="1158240"/>
-          </a:xfrm>
-          <a:prstGeom prst="roundRect">
-            <a:avLst/>
-          </a:prstGeom>
-          <a:ln w="38100">
-            <a:solidFill>
-              <a:schemeClr val="tx1"/>
-            </a:solidFill>
-          </a:ln>
-          <a:effectLst>
-            <a:outerShdw blurRad="190500" dist="228600" dir="2700000" algn="ctr">
-              <a:srgbClr val="000000">
-                <a:alpha val="30000"/>
-              </a:srgbClr>
-            </a:outerShdw>
-          </a:effectLst>
-          <a:scene3d>
-            <a:camera prst="orthographicFront">
-              <a:rot lat="0" lon="0" rev="0"/>
-            </a:camera>
-            <a:lightRig rig="glow" dir="t">
-              <a:rot lat="0" lon="0" rev="4800000"/>
-            </a:lightRig>
-          </a:scene3d>
-          <a:sp3d prstMaterial="matte">
-            <a:bevelT w="127000" h="63500"/>
-          </a:sp3d>
-        </p:spPr>
-        <p:style>
-          <a:lnRef idx="2">
-            <a:schemeClr val="accent1">
-              <a:shade val="15000"/>
-            </a:schemeClr>
-          </a:lnRef>
-          <a:fillRef idx="1">
-            <a:schemeClr val="accent1"/>
-          </a:fillRef>
-          <a:effectRef idx="0">
-            <a:schemeClr val="accent1"/>
-          </a:effectRef>
-          <a:fontRef idx="minor">
-            <a:schemeClr val="lt1"/>
-          </a:fontRef>
-        </p:style>
-        <p:txBody>
-          <a:bodyPr rtlCol="0" anchor="ctr"/>
-          <a:lstStyle/>
-          <a:p>
-            <a:pPr algn="ctr"/>
-            <a:r>
-              <a:rPr lang="en-IE" sz="2400" b="1" dirty="0" err="1"/>
-              <a:t>onTaskProcessing</a:t>
-            </a:r>
-            <a:r>
-              <a:rPr lang="en-IE" sz="2400" b="1" dirty="0"/>
-              <a:t> subscription</a:t>
-            </a:r>
-          </a:p>
-        </p:txBody>
-      </p:sp>
-      <p:sp>
-        <p:nvSpPr>
-          <p:cNvPr id="63" name="Rectangle: Rounded Corners 62">
-            <a:extLst>
-              <a:ext uri="{FF2B5EF4-FFF2-40B4-BE49-F238E27FC236}">
-                <a16:creationId xmlns:a16="http://schemas.microsoft.com/office/drawing/2014/main" id="{15A5339F-07AD-32CF-9AED-29D280649A1E}"/>
-              </a:ext>
-            </a:extLst>
-          </p:cNvPr>
-          <p:cNvSpPr/>
-          <p:nvPr/>
-        </p:nvSpPr>
-        <p:spPr>
-          <a:xfrm>
-            <a:off x="15079663" y="10917427"/>
-            <a:ext cx="2220444" cy="1158240"/>
-          </a:xfrm>
-          <a:prstGeom prst="roundRect">
-            <a:avLst/>
-          </a:prstGeom>
-          <a:ln w="38100">
-            <a:solidFill>
-              <a:schemeClr val="tx1"/>
-            </a:solidFill>
-          </a:ln>
-          <a:effectLst>
-            <a:outerShdw blurRad="190500" dist="228600" dir="2700000" algn="ctr">
-              <a:srgbClr val="000000">
-                <a:alpha val="30000"/>
-              </a:srgbClr>
-            </a:outerShdw>
-          </a:effectLst>
-          <a:scene3d>
-            <a:camera prst="orthographicFront">
-              <a:rot lat="0" lon="0" rev="0"/>
-            </a:camera>
-            <a:lightRig rig="glow" dir="t">
-              <a:rot lat="0" lon="0" rev="4800000"/>
-            </a:lightRig>
-          </a:scene3d>
-          <a:sp3d prstMaterial="matte">
-            <a:bevelT w="127000" h="63500"/>
-          </a:sp3d>
-        </p:spPr>
-        <p:style>
-          <a:lnRef idx="2">
-            <a:schemeClr val="accent1">
-              <a:shade val="15000"/>
-            </a:schemeClr>
-          </a:lnRef>
-          <a:fillRef idx="1">
-            <a:schemeClr val="accent1"/>
-          </a:fillRef>
-          <a:effectRef idx="0">
-            <a:schemeClr val="accent1"/>
-          </a:effectRef>
-          <a:fontRef idx="minor">
-            <a:schemeClr val="lt1"/>
-          </a:fontRef>
-        </p:style>
-        <p:txBody>
-          <a:bodyPr rtlCol="0" anchor="ctr"/>
-          <a:lstStyle/>
-          <a:p>
-            <a:pPr algn="ctr"/>
-            <a:r>
-              <a:rPr lang="en-IE" sz="2400" b="1" dirty="0" err="1"/>
-              <a:t>onTaskEnd</a:t>
-            </a:r>
-            <a:r>
-              <a:rPr lang="en-IE" sz="2400" b="1" dirty="0"/>
-              <a:t> subscription</a:t>
+              <a:t>Observer Chain</a:t>
             </a:r>
           </a:p>
         </p:txBody>
@@ -14825,42 +14465,6 @@
       </p:sp>
       <p:sp>
         <p:nvSpPr>
-          <p:cNvPr id="71" name="TextBox 70">
-            <a:extLst>
-              <a:ext uri="{FF2B5EF4-FFF2-40B4-BE49-F238E27FC236}">
-                <a16:creationId xmlns:a16="http://schemas.microsoft.com/office/drawing/2014/main" id="{39D0EACC-283C-9CE1-7867-92E543D131B1}"/>
-              </a:ext>
-            </a:extLst>
-          </p:cNvPr>
-          <p:cNvSpPr txBox="1"/>
-          <p:nvPr/>
-        </p:nvSpPr>
-        <p:spPr>
-          <a:xfrm>
-            <a:off x="13807786" y="6314604"/>
-            <a:ext cx="2960616" cy="954107"/>
-          </a:xfrm>
-          <a:prstGeom prst="rect">
-            <a:avLst/>
-          </a:prstGeom>
-          <a:noFill/>
-        </p:spPr>
-        <p:txBody>
-          <a:bodyPr wrap="square" rtlCol="0">
-            <a:spAutoFit/>
-          </a:bodyPr>
-          <a:lstStyle/>
-          <a:p>
-            <a:pPr algn="ctr"/>
-            <a:r>
-              <a:rPr lang="en-IE" sz="2800" b="1" dirty="0"/>
-              <a:t>Commits task updates</a:t>
-            </a:r>
-          </a:p>
-        </p:txBody>
-      </p:sp>
-      <p:sp>
-        <p:nvSpPr>
           <p:cNvPr id="8" name="TextBox 7">
             <a:extLst>
               <a:ext uri="{FF2B5EF4-FFF2-40B4-BE49-F238E27FC236}">
@@ -14890,6 +14494,222 @@
             <a:r>
               <a:rPr lang="en-IE" sz="2800" b="1" dirty="0"/>
               <a:t>Task Updates</a:t>
+            </a:r>
+          </a:p>
+        </p:txBody>
+      </p:sp>
+      <p:sp>
+        <p:nvSpPr>
+          <p:cNvPr id="17" name="Rectangle: Rounded Corners 16">
+            <a:extLst>
+              <a:ext uri="{FF2B5EF4-FFF2-40B4-BE49-F238E27FC236}">
+                <a16:creationId xmlns:a16="http://schemas.microsoft.com/office/drawing/2014/main" id="{85A324E4-797D-C81C-D94D-9A1161D8568F}"/>
+              </a:ext>
+            </a:extLst>
+          </p:cNvPr>
+          <p:cNvSpPr/>
+          <p:nvPr/>
+        </p:nvSpPr>
+        <p:spPr>
+          <a:xfrm>
+            <a:off x="11993568" y="10323008"/>
+            <a:ext cx="2543966" cy="1222090"/>
+          </a:xfrm>
+          <a:prstGeom prst="roundRect">
+            <a:avLst/>
+          </a:prstGeom>
+          <a:ln w="38100">
+            <a:solidFill>
+              <a:schemeClr val="tx1"/>
+            </a:solidFill>
+          </a:ln>
+          <a:effectLst>
+            <a:outerShdw blurRad="190500" dist="228600" dir="2700000" algn="ctr">
+              <a:srgbClr val="000000">
+                <a:alpha val="30000"/>
+              </a:srgbClr>
+            </a:outerShdw>
+          </a:effectLst>
+          <a:scene3d>
+            <a:camera prst="orthographicFront">
+              <a:rot lat="0" lon="0" rev="0"/>
+            </a:camera>
+            <a:lightRig rig="glow" dir="t">
+              <a:rot lat="0" lon="0" rev="4800000"/>
+            </a:lightRig>
+          </a:scene3d>
+          <a:sp3d prstMaterial="matte">
+            <a:bevelT w="127000" h="63500"/>
+          </a:sp3d>
+        </p:spPr>
+        <p:style>
+          <a:lnRef idx="2">
+            <a:schemeClr val="accent1">
+              <a:shade val="15000"/>
+            </a:schemeClr>
+          </a:lnRef>
+          <a:fillRef idx="1">
+            <a:schemeClr val="accent1"/>
+          </a:fillRef>
+          <a:effectRef idx="0">
+            <a:schemeClr val="accent1"/>
+          </a:effectRef>
+          <a:fontRef idx="minor">
+            <a:schemeClr val="lt1"/>
+          </a:fontRef>
+        </p:style>
+        <p:txBody>
+          <a:bodyPr rtlCol="0" anchor="ctr"/>
+          <a:lstStyle/>
+          <a:p>
+            <a:pPr algn="ctr"/>
+            <a:r>
+              <a:rPr lang="en-IE" sz="2800" b="1" dirty="0"/>
+              <a:t>Event Subscription</a:t>
+            </a:r>
+          </a:p>
+        </p:txBody>
+      </p:sp>
+      <p:sp>
+        <p:nvSpPr>
+          <p:cNvPr id="18" name="Rectangle: Rounded Corners 17">
+            <a:extLst>
+              <a:ext uri="{FF2B5EF4-FFF2-40B4-BE49-F238E27FC236}">
+                <a16:creationId xmlns:a16="http://schemas.microsoft.com/office/drawing/2014/main" id="{42060813-E48E-35FE-9699-20F5CFE266C0}"/>
+              </a:ext>
+            </a:extLst>
+          </p:cNvPr>
+          <p:cNvSpPr/>
+          <p:nvPr/>
+        </p:nvSpPr>
+        <p:spPr>
+          <a:xfrm>
+            <a:off x="14878057" y="10323008"/>
+            <a:ext cx="2543966" cy="1222090"/>
+          </a:xfrm>
+          <a:prstGeom prst="roundRect">
+            <a:avLst/>
+          </a:prstGeom>
+          <a:ln w="38100">
+            <a:solidFill>
+              <a:schemeClr val="tx1"/>
+            </a:solidFill>
+          </a:ln>
+          <a:effectLst>
+            <a:outerShdw blurRad="190500" dist="228600" dir="2700000" algn="ctr">
+              <a:srgbClr val="000000">
+                <a:alpha val="30000"/>
+              </a:srgbClr>
+            </a:outerShdw>
+          </a:effectLst>
+          <a:scene3d>
+            <a:camera prst="orthographicFront">
+              <a:rot lat="0" lon="0" rev="0"/>
+            </a:camera>
+            <a:lightRig rig="glow" dir="t">
+              <a:rot lat="0" lon="0" rev="4800000"/>
+            </a:lightRig>
+          </a:scene3d>
+          <a:sp3d prstMaterial="matte">
+            <a:bevelT w="127000" h="63500"/>
+          </a:sp3d>
+        </p:spPr>
+        <p:style>
+          <a:lnRef idx="2">
+            <a:schemeClr val="accent1">
+              <a:shade val="15000"/>
+            </a:schemeClr>
+          </a:lnRef>
+          <a:fillRef idx="1">
+            <a:schemeClr val="accent1"/>
+          </a:fillRef>
+          <a:effectRef idx="0">
+            <a:schemeClr val="accent1"/>
+          </a:effectRef>
+          <a:fontRef idx="minor">
+            <a:schemeClr val="lt1"/>
+          </a:fontRef>
+        </p:style>
+        <p:txBody>
+          <a:bodyPr rtlCol="0" anchor="ctr"/>
+          <a:lstStyle/>
+          <a:p>
+            <a:pPr algn="ctr"/>
+            <a:r>
+              <a:rPr lang="en-IE" sz="2800" b="1" dirty="0"/>
+              <a:t>Commit Task Updates</a:t>
+            </a:r>
+          </a:p>
+        </p:txBody>
+      </p:sp>
+      <p:sp>
+        <p:nvSpPr>
+          <p:cNvPr id="19" name="Rectangle: Rounded Corners 18">
+            <a:extLst>
+              <a:ext uri="{FF2B5EF4-FFF2-40B4-BE49-F238E27FC236}">
+                <a16:creationId xmlns:a16="http://schemas.microsoft.com/office/drawing/2014/main" id="{3414C8E5-F857-D9DC-2E6E-E2A94A962D91}"/>
+              </a:ext>
+            </a:extLst>
+          </p:cNvPr>
+          <p:cNvSpPr/>
+          <p:nvPr/>
+        </p:nvSpPr>
+        <p:spPr>
+          <a:xfrm>
+            <a:off x="13532573" y="11996185"/>
+            <a:ext cx="2543966" cy="1222090"/>
+          </a:xfrm>
+          <a:prstGeom prst="roundRect">
+            <a:avLst/>
+          </a:prstGeom>
+          <a:ln w="38100">
+            <a:solidFill>
+              <a:schemeClr val="tx1"/>
+            </a:solidFill>
+          </a:ln>
+          <a:effectLst>
+            <a:outerShdw blurRad="190500" dist="228600" dir="2700000" algn="ctr">
+              <a:srgbClr val="000000">
+                <a:alpha val="30000"/>
+              </a:srgbClr>
+            </a:outerShdw>
+          </a:effectLst>
+          <a:scene3d>
+            <a:camera prst="orthographicFront">
+              <a:rot lat="0" lon="0" rev="0"/>
+            </a:camera>
+            <a:lightRig rig="glow" dir="t">
+              <a:rot lat="0" lon="0" rev="4800000"/>
+            </a:lightRig>
+          </a:scene3d>
+          <a:sp3d prstMaterial="matte">
+            <a:bevelT w="127000" h="63500"/>
+          </a:sp3d>
+        </p:spPr>
+        <p:style>
+          <a:lnRef idx="2">
+            <a:schemeClr val="accent1">
+              <a:shade val="15000"/>
+            </a:schemeClr>
+          </a:lnRef>
+          <a:fillRef idx="1">
+            <a:schemeClr val="accent1"/>
+          </a:fillRef>
+          <a:effectRef idx="0">
+            <a:schemeClr val="accent1"/>
+          </a:effectRef>
+          <a:fontRef idx="minor">
+            <a:schemeClr val="lt1"/>
+          </a:fontRef>
+        </p:style>
+        <p:txBody>
+          <a:bodyPr rtlCol="0" anchor="ctr"/>
+          <a:lstStyle/>
+          <a:p>
+            <a:pPr algn="ctr"/>
+            <a:r>
+              <a:rPr lang="en-IE" sz="2800" b="1" dirty="0"/>
+              <a:t>Process Registry</a:t>
             </a:r>
           </a:p>
         </p:txBody>

--- a/tasktide/docs/Diagrams/Diagrams.pptx
+++ b/tasktide/docs/Diagrams/Diagrams.pptx
@@ -6,12 +6,13 @@
   </p:sldMasterIdLst>
   <p:sldIdLst>
     <p:sldId id="259" r:id="rId2"/>
-    <p:sldId id="262" r:id="rId3"/>
-    <p:sldId id="260" r:id="rId4"/>
-    <p:sldId id="261" r:id="rId5"/>
-    <p:sldId id="263" r:id="rId6"/>
-    <p:sldId id="258" r:id="rId7"/>
-    <p:sldId id="256" r:id="rId8"/>
+    <p:sldId id="264" r:id="rId3"/>
+    <p:sldId id="262" r:id="rId4"/>
+    <p:sldId id="260" r:id="rId5"/>
+    <p:sldId id="261" r:id="rId6"/>
+    <p:sldId id="263" r:id="rId7"/>
+    <p:sldId id="258" r:id="rId8"/>
+    <p:sldId id="256" r:id="rId9"/>
   </p:sldIdLst>
   <p:sldSz cx="18000663" cy="16200438"/>
   <p:notesSz cx="6858000" cy="9144000"/>
@@ -1806,7 +1807,7 @@
         <a:lstStyle/>
         <a:p>
           <a:r>
-            <a:rPr lang="en-IE" sz="3600" b="1" dirty="0" err="1"/>
+            <a:rPr lang="en-IE" sz="3200" b="1" dirty="0" err="1"/>
             <a:t>ToDo</a:t>
           </a:r>
           <a:endParaRPr lang="en-IE" sz="3600" b="1" dirty="0"/>
@@ -1843,9 +1844,10 @@
         <a:lstStyle/>
         <a:p>
           <a:r>
-            <a:rPr lang="en-IE" sz="3600" b="1" dirty="0"/>
+            <a:rPr lang="en-IE" sz="3200" b="1" dirty="0"/>
             <a:t>Locked</a:t>
           </a:r>
+          <a:endParaRPr lang="en-IE" sz="3600" b="1" dirty="0"/>
         </a:p>
       </dgm:t>
     </dgm:pt>
@@ -1879,8 +1881,8 @@
         <a:lstStyle/>
         <a:p>
           <a:r>
-            <a:rPr lang="en-IE" sz="3600" b="1" dirty="0"/>
-            <a:t>Done / Error</a:t>
+            <a:rPr lang="en-IE" sz="3200" b="1" dirty="0"/>
+            <a:t>Done/Error</a:t>
           </a:r>
         </a:p>
       </dgm:t>
@@ -1925,7 +1927,7 @@
     <dgm:pt modelId="{30AB2770-B492-48AD-84C5-695BDA28E134}" type="pres">
       <dgm:prSet presAssocID="{4725363A-B69F-4FF0-AC74-23D7A1D4A150}" presName="Accent" presStyleLbl="node1" presStyleIdx="0" presStyleCnt="3"/>
       <dgm:spPr>
-        <a:ln>
+        <a:ln w="57150">
           <a:solidFill>
             <a:schemeClr val="tx1"/>
           </a:solidFill>
@@ -1949,7 +1951,7 @@
     <dgm:pt modelId="{668DC389-6720-4236-8011-BFAB07D2AE6E}" type="pres">
       <dgm:prSet presAssocID="{DFC53582-58F9-4F3D-B75A-A00A5F4DA501}" presName="Accent" presStyleLbl="node1" presStyleIdx="1" presStyleCnt="3"/>
       <dgm:spPr>
-        <a:ln>
+        <a:ln w="57150">
           <a:solidFill>
             <a:schemeClr val="tx1"/>
           </a:solidFill>
@@ -1973,7 +1975,7 @@
     <dgm:pt modelId="{19D1F821-3860-4F77-A074-BB6401E6326E}" type="pres">
       <dgm:prSet presAssocID="{82B2E3DA-6C6C-4017-BB49-39C721A45AC6}" presName="Accent" presStyleLbl="node1" presStyleIdx="2" presStyleCnt="3"/>
       <dgm:spPr>
-        <a:ln>
+        <a:ln w="57150">
           <a:solidFill>
             <a:schemeClr val="tx1"/>
           </a:solidFill>
@@ -2035,7 +2037,13 @@
     </dgm:pt>
     <dgm:pt modelId="{A147FCF5-872C-402E-8FFA-7F62F8AEC165}">
       <dgm:prSet phldrT="[Text]" custT="1"/>
-      <dgm:spPr/>
+      <dgm:spPr>
+        <a:ln w="38100">
+          <a:solidFill>
+            <a:schemeClr val="tx1"/>
+          </a:solidFill>
+        </a:ln>
+      </dgm:spPr>
       <dgm:t>
         <a:bodyPr/>
         <a:lstStyle/>
@@ -2072,7 +2080,7 @@
     <dgm:pt modelId="{C9D27329-5219-4575-8C28-F198FA7C7E21}">
       <dgm:prSet phldrT="[Text]" custT="1"/>
       <dgm:spPr>
-        <a:ln>
+        <a:ln w="38100">
           <a:solidFill>
             <a:schemeClr val="tx1"/>
           </a:solidFill>
@@ -2083,7 +2091,7 @@
         <a:lstStyle/>
         <a:p>
           <a:r>
-            <a:rPr lang="en-IE" sz="2800" dirty="0"/>
+            <a:rPr lang="en-IE" sz="2800" b="1" dirty="0"/>
             <a:t>Bioinformatic workflow</a:t>
           </a:r>
         </a:p>
@@ -2114,7 +2122,7 @@
     <dgm:pt modelId="{0E7A854B-37EA-407C-A97F-3A739191418A}">
       <dgm:prSet phldrT="[Text]" custT="1"/>
       <dgm:spPr>
-        <a:ln>
+        <a:ln w="38100">
           <a:solidFill>
             <a:schemeClr val="tx1"/>
           </a:solidFill>
@@ -2125,8 +2133,8 @@
         <a:lstStyle/>
         <a:p>
           <a:r>
-            <a:rPr lang="en-IE" sz="2800" dirty="0"/>
-            <a:t>Validates workflow orchestration across generic pilots</a:t>
+            <a:rPr lang="en-IE" sz="2800" b="1" dirty="0"/>
+            <a:t>Validates workflow orchestration across pilots</a:t>
           </a:r>
         </a:p>
       </dgm:t>
@@ -2156,7 +2164,7 @@
     <dgm:pt modelId="{4D999CEA-99A2-40B3-ACFE-2DDA830830D4}">
       <dgm:prSet phldrT="[Text]" custT="1"/>
       <dgm:spPr>
-        <a:ln>
+        <a:ln w="38100">
           <a:solidFill>
             <a:schemeClr val="tx1"/>
           </a:solidFill>
@@ -2198,7 +2206,7 @@
     <dgm:pt modelId="{475C2055-1A5C-4F93-BCF0-4362192FEDE2}">
       <dgm:prSet phldrT="[Text]" custT="1"/>
       <dgm:spPr>
-        <a:ln>
+        <a:ln w="38100">
           <a:solidFill>
             <a:schemeClr val="tx1"/>
           </a:solidFill>
@@ -2209,7 +2217,7 @@
         <a:lstStyle/>
         <a:p>
           <a:r>
-            <a:rPr lang="en-IE" sz="2800" dirty="0"/>
+            <a:rPr lang="en-IE" sz="2800" b="1" dirty="0"/>
             <a:t>Serialized function runner</a:t>
           </a:r>
         </a:p>
@@ -2240,7 +2248,7 @@
     <dgm:pt modelId="{4F50E452-5834-4018-8DFF-B75D124C036A}">
       <dgm:prSet phldrT="[Text]" custT="1"/>
       <dgm:spPr>
-        <a:ln>
+        <a:ln w="38100">
           <a:solidFill>
             <a:schemeClr val="tx1"/>
           </a:solidFill>
@@ -2251,7 +2259,7 @@
         <a:lstStyle/>
         <a:p>
           <a:r>
-            <a:rPr lang="en-IE" sz="2800" dirty="0"/>
+            <a:rPr lang="en-IE" sz="2800" b="1" dirty="0"/>
             <a:t>Validates explicit binding semantics (early vs late)</a:t>
           </a:r>
         </a:p>
@@ -2282,7 +2290,7 @@
     <dgm:pt modelId="{A50E33B6-DC31-4625-B7FA-95FFDF7345DB}">
       <dgm:prSet phldrT="[Text]" custT="1"/>
       <dgm:spPr>
-        <a:ln>
+        <a:ln w="38100">
           <a:solidFill>
             <a:schemeClr val="tx1"/>
           </a:solidFill>
@@ -2325,7 +2333,7 @@
     <dgm:pt modelId="{1550EBB1-3E8A-4444-A1CB-728671E739D9}">
       <dgm:prSet phldrT="[Text]" custT="1"/>
       <dgm:spPr>
-        <a:ln>
+        <a:ln w="38100">
           <a:solidFill>
             <a:schemeClr val="tx1"/>
           </a:solidFill>
@@ -2336,7 +2344,7 @@
         <a:lstStyle/>
         <a:p>
           <a:r>
-            <a:rPr lang="en-IE" sz="2800" dirty="0"/>
+            <a:rPr lang="en-IE" sz="2800" b="1" dirty="0"/>
             <a:t>AI play time optimizer</a:t>
           </a:r>
         </a:p>
@@ -2367,7 +2375,7 @@
     <dgm:pt modelId="{F87B134D-0DC2-4772-90D6-BABD7BD5BC76}">
       <dgm:prSet phldrT="[Text]" custT="1"/>
       <dgm:spPr>
-        <a:ln>
+        <a:ln w="38100">
           <a:solidFill>
             <a:schemeClr val="tx1"/>
           </a:solidFill>
@@ -2378,7 +2386,7 @@
         <a:lstStyle/>
         <a:p>
           <a:r>
-            <a:rPr lang="en-IE" sz="2800" dirty="0"/>
+            <a:rPr lang="en-IE" sz="2800" b="1" dirty="0"/>
             <a:t>Validate containerized workloads</a:t>
           </a:r>
         </a:p>
@@ -2409,7 +2417,7 @@
     <dgm:pt modelId="{28E7254B-914D-454C-9420-190BF7BC8B3F}">
       <dgm:prSet phldrT="[Text]" custT="1"/>
       <dgm:spPr>
-        <a:ln>
+        <a:ln w="38100">
           <a:solidFill>
             <a:schemeClr val="tx1"/>
           </a:solidFill>
@@ -2420,8 +2428,8 @@
         <a:lstStyle/>
         <a:p>
           <a:r>
-            <a:rPr lang="en-IE" sz="2800" dirty="0"/>
-            <a:t>Job environment attached             to tasks</a:t>
+            <a:rPr lang="en-IE" sz="2800" b="1" dirty="0"/>
+            <a:t>Job environment               attached to tasks</a:t>
           </a:r>
         </a:p>
       </dgm:t>
@@ -2451,7 +2459,7 @@
     <dgm:pt modelId="{A68E66D0-FC3E-4696-AEE9-FA917CE8B43F}">
       <dgm:prSet phldrT="[Text]" custT="1"/>
       <dgm:spPr>
-        <a:ln>
+        <a:ln w="38100">
           <a:solidFill>
             <a:schemeClr val="tx1"/>
           </a:solidFill>
@@ -2462,7 +2470,7 @@
         <a:lstStyle/>
         <a:p>
           <a:r>
-            <a:rPr lang="en-IE" sz="2800" dirty="0"/>
+            <a:rPr lang="en-IE" sz="2800" b="1" dirty="0"/>
             <a:t>Node label constraints</a:t>
           </a:r>
         </a:p>
@@ -2493,7 +2501,7 @@
     <dgm:pt modelId="{51E22944-1523-458B-8828-B060A21B0734}">
       <dgm:prSet phldrT="[Text]" custT="1"/>
       <dgm:spPr>
-        <a:ln>
+        <a:ln w="38100">
           <a:solidFill>
             <a:schemeClr val="tx1"/>
           </a:solidFill>
@@ -2504,7 +2512,7 @@
         <a:lstStyle/>
         <a:p>
           <a:r>
-            <a:rPr lang="en-IE" sz="2800" dirty="0"/>
+            <a:rPr lang="en-IE" sz="2800" b="1" dirty="0"/>
             <a:t>Operational across relational        &amp; non-relational databases</a:t>
           </a:r>
         </a:p>
@@ -2551,7 +2559,7 @@
       <dgm:spPr/>
     </dgm:pt>
     <dgm:pt modelId="{32DFF38E-0B8C-4811-8E25-D1D460553EEF}" type="pres">
-      <dgm:prSet presAssocID="{A50E33B6-DC31-4625-B7FA-95FFDF7345DB}" presName="entireBox" presStyleLbl="node1" presStyleIdx="0" presStyleCnt="3"/>
+      <dgm:prSet presAssocID="{A50E33B6-DC31-4625-B7FA-95FFDF7345DB}" presName="entireBox" presStyleLbl="node1" presStyleIdx="0" presStyleCnt="3" custLinFactNeighborY="5353"/>
       <dgm:spPr/>
     </dgm:pt>
     <dgm:pt modelId="{2D9853DB-9952-41DA-9459-C0F92D4048FC}" type="pres">
@@ -2559,7 +2567,7 @@
       <dgm:spPr/>
     </dgm:pt>
     <dgm:pt modelId="{2147C4C3-E4ED-44EA-8A74-5AB07B9224C6}" type="pres">
-      <dgm:prSet presAssocID="{1550EBB1-3E8A-4444-A1CB-728671E739D9}" presName="childTextBox" presStyleLbl="fgAccFollowNode1" presStyleIdx="0" presStyleCnt="9" custLinFactNeighborX="-364" custLinFactNeighborY="4503">
+      <dgm:prSet presAssocID="{1550EBB1-3E8A-4444-A1CB-728671E739D9}" presName="childTextBox" presStyleLbl="fgAccFollowNode1" presStyleIdx="0" presStyleCnt="9" custLinFactNeighborX="-147" custLinFactNeighborY="6417">
         <dgm:presLayoutVars>
           <dgm:bulletEnabled val="1"/>
         </dgm:presLayoutVars>
@@ -2567,7 +2575,7 @@
       <dgm:spPr/>
     </dgm:pt>
     <dgm:pt modelId="{EF0D8E2E-611F-48CE-B1FC-FF5FEBAA646D}" type="pres">
-      <dgm:prSet presAssocID="{F87B134D-0DC2-4772-90D6-BABD7BD5BC76}" presName="childTextBox" presStyleLbl="fgAccFollowNode1" presStyleIdx="1" presStyleCnt="9" custLinFactNeighborX="-364" custLinFactNeighborY="4503">
+      <dgm:prSet presAssocID="{F87B134D-0DC2-4772-90D6-BABD7BD5BC76}" presName="childTextBox" presStyleLbl="fgAccFollowNode1" presStyleIdx="1" presStyleCnt="9" custLinFactNeighborX="-364" custLinFactNeighborY="6417">
         <dgm:presLayoutVars>
           <dgm:bulletEnabled val="1"/>
         </dgm:presLayoutVars>
@@ -2575,7 +2583,7 @@
       <dgm:spPr/>
     </dgm:pt>
     <dgm:pt modelId="{A26E17A3-6ADC-4207-BAA9-6F37A7025026}" type="pres">
-      <dgm:prSet presAssocID="{A68E66D0-FC3E-4696-AEE9-FA917CE8B43F}" presName="childTextBox" presStyleLbl="fgAccFollowNode1" presStyleIdx="2" presStyleCnt="9" custLinFactNeighborX="0" custLinFactNeighborY="4503">
+      <dgm:prSet presAssocID="{A68E66D0-FC3E-4696-AEE9-FA917CE8B43F}" presName="childTextBox" presStyleLbl="fgAccFollowNode1" presStyleIdx="2" presStyleCnt="9" custLinFactNeighborY="6026">
         <dgm:presLayoutVars>
           <dgm:bulletEnabled val="1"/>
         </dgm:presLayoutVars>
@@ -2603,7 +2611,7 @@
       <dgm:spPr/>
     </dgm:pt>
     <dgm:pt modelId="{9CE9A027-D096-4DBA-9F41-ACB337DEDCA0}" type="pres">
-      <dgm:prSet presAssocID="{475C2055-1A5C-4F93-BCF0-4362192FEDE2}" presName="childTextArrow" presStyleLbl="fgAccFollowNode1" presStyleIdx="3" presStyleCnt="9">
+      <dgm:prSet presAssocID="{475C2055-1A5C-4F93-BCF0-4362192FEDE2}" presName="childTextArrow" presStyleLbl="fgAccFollowNode1" presStyleIdx="3" presStyleCnt="9" custLinFactNeighborX="65" custLinFactNeighborY="1914">
         <dgm:presLayoutVars>
           <dgm:bulletEnabled val="1"/>
         </dgm:presLayoutVars>
@@ -2611,7 +2619,7 @@
       <dgm:spPr/>
     </dgm:pt>
     <dgm:pt modelId="{87C3872B-7E02-4085-B647-9CD9B06A0313}" type="pres">
-      <dgm:prSet presAssocID="{4F50E452-5834-4018-8DFF-B75D124C036A}" presName="childTextArrow" presStyleLbl="fgAccFollowNode1" presStyleIdx="4" presStyleCnt="9">
+      <dgm:prSet presAssocID="{4F50E452-5834-4018-8DFF-B75D124C036A}" presName="childTextArrow" presStyleLbl="fgAccFollowNode1" presStyleIdx="4" presStyleCnt="9" custLinFactNeighborY="1914">
         <dgm:presLayoutVars>
           <dgm:bulletEnabled val="1"/>
         </dgm:presLayoutVars>
@@ -2619,7 +2627,7 @@
       <dgm:spPr/>
     </dgm:pt>
     <dgm:pt modelId="{6A9F14BE-80C0-4B02-B21C-6C233AACAF51}" type="pres">
-      <dgm:prSet presAssocID="{28E7254B-914D-454C-9420-190BF7BC8B3F}" presName="childTextArrow" presStyleLbl="fgAccFollowNode1" presStyleIdx="5" presStyleCnt="9">
+      <dgm:prSet presAssocID="{28E7254B-914D-454C-9420-190BF7BC8B3F}" presName="childTextArrow" presStyleLbl="fgAccFollowNode1" presStyleIdx="5" presStyleCnt="9" custLinFactNeighborX="455" custLinFactNeighborY="1914">
         <dgm:presLayoutVars>
           <dgm:bulletEnabled val="1"/>
         </dgm:presLayoutVars>
@@ -2647,7 +2655,7 @@
       <dgm:spPr/>
     </dgm:pt>
     <dgm:pt modelId="{07763EBB-4274-4F86-A670-BA07EE7CCAD5}" type="pres">
-      <dgm:prSet presAssocID="{C9D27329-5219-4575-8C28-F198FA7C7E21}" presName="childTextArrow" presStyleLbl="fgAccFollowNode1" presStyleIdx="6" presStyleCnt="9" custLinFactNeighborX="364">
+      <dgm:prSet presAssocID="{C9D27329-5219-4575-8C28-F198FA7C7E21}" presName="childTextArrow" presStyleLbl="fgAccFollowNode1" presStyleIdx="6" presStyleCnt="9" custLinFactNeighborX="-82">
         <dgm:presLayoutVars>
           <dgm:bulletEnabled val="1"/>
         </dgm:presLayoutVars>
@@ -2663,7 +2671,7 @@
       <dgm:spPr/>
     </dgm:pt>
     <dgm:pt modelId="{1CEB22B1-9A7E-4A91-AF0C-26B893E69FA6}" type="pres">
-      <dgm:prSet presAssocID="{51E22944-1523-458B-8828-B060A21B0734}" presName="childTextArrow" presStyleLbl="fgAccFollowNode1" presStyleIdx="8" presStyleCnt="9">
+      <dgm:prSet presAssocID="{51E22944-1523-458B-8828-B060A21B0734}" presName="childTextArrow" presStyleLbl="fgAccFollowNode1" presStyleIdx="8" presStyleCnt="9" custLinFactNeighborX="390">
         <dgm:presLayoutVars>
           <dgm:bulletEnabled val="1"/>
         </dgm:presLayoutVars>
@@ -2803,7 +2811,7 @@
           </a:gsLst>
           <a:lin ang="5400000" scaled="0"/>
         </a:gradFill>
-        <a:ln>
+        <a:ln w="57150">
           <a:solidFill>
             <a:schemeClr val="tx1"/>
           </a:solidFill>
@@ -2865,12 +2873,12 @@
         <a:fontRef idx="minor"/>
       </dsp:style>
       <dsp:txBody>
-        <a:bodyPr spcFirstLastPara="0" vert="horz" wrap="square" lIns="22860" tIns="22860" rIns="22860" bIns="22860" numCol="1" spcCol="1270" anchor="ctr" anchorCtr="0">
+        <a:bodyPr spcFirstLastPara="0" vert="horz" wrap="square" lIns="20320" tIns="20320" rIns="20320" bIns="20320" numCol="1" spcCol="1270" anchor="ctr" anchorCtr="0">
           <a:noAutofit/>
         </a:bodyPr>
         <a:lstStyle/>
         <a:p>
-          <a:pPr marL="0" lvl="0" indent="0" algn="ctr" defTabSz="1600200">
+          <a:pPr marL="0" lvl="0" indent="0" algn="ctr" defTabSz="1422400">
             <a:lnSpc>
               <a:spcPct val="90000"/>
             </a:lnSpc>
@@ -2883,7 +2891,7 @@
             <a:buNone/>
           </a:pPr>
           <a:r>
-            <a:rPr lang="en-IE" sz="3600" b="1" kern="1200" dirty="0" err="1"/>
+            <a:rPr lang="en-IE" sz="3200" b="1" kern="1200" dirty="0" err="1"/>
             <a:t>ToDo</a:t>
           </a:r>
           <a:endParaRPr lang="en-IE" sz="3600" b="1" kern="1200" dirty="0"/>
@@ -2951,7 +2959,7 @@
           </a:gsLst>
           <a:lin ang="5400000" scaled="0"/>
         </a:gradFill>
-        <a:ln>
+        <a:ln w="57150">
           <a:solidFill>
             <a:schemeClr val="tx1"/>
           </a:solidFill>
@@ -3013,12 +3021,12 @@
         <a:fontRef idx="minor"/>
       </dsp:style>
       <dsp:txBody>
-        <a:bodyPr spcFirstLastPara="0" vert="horz" wrap="square" lIns="22860" tIns="22860" rIns="22860" bIns="22860" numCol="1" spcCol="1270" anchor="ctr" anchorCtr="0">
+        <a:bodyPr spcFirstLastPara="0" vert="horz" wrap="square" lIns="20320" tIns="20320" rIns="20320" bIns="20320" numCol="1" spcCol="1270" anchor="ctr" anchorCtr="0">
           <a:noAutofit/>
         </a:bodyPr>
         <a:lstStyle/>
         <a:p>
-          <a:pPr marL="0" lvl="0" indent="0" algn="ctr" defTabSz="1600200">
+          <a:pPr marL="0" lvl="0" indent="0" algn="ctr" defTabSz="1422400">
             <a:lnSpc>
               <a:spcPct val="90000"/>
             </a:lnSpc>
@@ -3031,9 +3039,10 @@
             <a:buNone/>
           </a:pPr>
           <a:r>
-            <a:rPr lang="en-IE" sz="3600" b="1" kern="1200" dirty="0"/>
+            <a:rPr lang="en-IE" sz="3200" b="1" kern="1200" dirty="0"/>
             <a:t>Locked</a:t>
           </a:r>
+          <a:endParaRPr lang="en-IE" sz="3600" b="1" kern="1200" dirty="0"/>
         </a:p>
       </dsp:txBody>
       <dsp:txXfrm>
@@ -3096,7 +3105,7 @@
           </a:gsLst>
           <a:lin ang="5400000" scaled="0"/>
         </a:gradFill>
-        <a:ln>
+        <a:ln w="57150">
           <a:solidFill>
             <a:schemeClr val="tx1"/>
           </a:solidFill>
@@ -3158,12 +3167,12 @@
         <a:fontRef idx="minor"/>
       </dsp:style>
       <dsp:txBody>
-        <a:bodyPr spcFirstLastPara="0" vert="horz" wrap="square" lIns="22860" tIns="22860" rIns="22860" bIns="22860" numCol="1" spcCol="1270" anchor="ctr" anchorCtr="0">
+        <a:bodyPr spcFirstLastPara="0" vert="horz" wrap="square" lIns="20320" tIns="20320" rIns="20320" bIns="20320" numCol="1" spcCol="1270" anchor="ctr" anchorCtr="0">
           <a:noAutofit/>
         </a:bodyPr>
         <a:lstStyle/>
         <a:p>
-          <a:pPr marL="0" lvl="0" indent="0" algn="ctr" defTabSz="1600200">
+          <a:pPr marL="0" lvl="0" indent="0" algn="ctr" defTabSz="1422400">
             <a:lnSpc>
               <a:spcPct val="90000"/>
             </a:lnSpc>
@@ -3176,8 +3185,8 @@
             <a:buNone/>
           </a:pPr>
           <a:r>
-            <a:rPr lang="en-IE" sz="3600" b="1" kern="1200" dirty="0"/>
-            <a:t>Done / Error</a:t>
+            <a:rPr lang="en-IE" sz="3200" b="1" kern="1200" dirty="0"/>
+            <a:t>Done/Error</a:t>
           </a:r>
         </a:p>
       </dsp:txBody>
@@ -3205,8 +3214,8 @@
       </dsp:nvSpPr>
       <dsp:spPr>
         <a:xfrm>
-          <a:off x="0" y="8791101"/>
-          <a:ext cx="16775589" cy="2885435"/>
+          <a:off x="0" y="9470716"/>
+          <a:ext cx="16775589" cy="3107770"/>
         </a:xfrm>
         <a:prstGeom prst="rect">
           <a:avLst/>
@@ -3249,7 +3258,7 @@
           </a:gsLst>
           <a:lin ang="5400000" scaled="0"/>
         </a:gradFill>
-        <a:ln>
+        <a:ln w="38100">
           <a:solidFill>
             <a:schemeClr val="tx1"/>
           </a:solidFill>
@@ -3304,8 +3313,8 @@
         </a:p>
       </dsp:txBody>
       <dsp:txXfrm>
-        <a:off x="0" y="8791101"/>
-        <a:ext cx="16775589" cy="1558135"/>
+        <a:off x="0" y="9470716"/>
+        <a:ext cx="16775589" cy="1678196"/>
       </dsp:txXfrm>
     </dsp:sp>
     <dsp:sp modelId="{2147C4C3-E4ED-44EA-8A74-5AB07B9224C6}">
@@ -3315,8 +3324,8 @@
       </dsp:nvSpPr>
       <dsp:spPr>
         <a:xfrm>
-          <a:off x="0" y="10351295"/>
-          <a:ext cx="5586402" cy="1327300"/>
+          <a:off x="0" y="11148912"/>
+          <a:ext cx="5586402" cy="1429574"/>
         </a:xfrm>
         <a:prstGeom prst="rect">
           <a:avLst/>
@@ -3331,7 +3340,7 @@
             <a:alphaOff val="0"/>
           </a:schemeClr>
         </a:solidFill>
-        <a:ln w="12700" cap="flat" cmpd="sng" algn="ctr">
+        <a:ln w="38100" cap="flat" cmpd="sng" algn="ctr">
           <a:solidFill>
             <a:schemeClr val="tx1"/>
           </a:solidFill>
@@ -3378,14 +3387,14 @@
             <a:buNone/>
           </a:pPr>
           <a:r>
-            <a:rPr lang="en-IE" sz="2800" kern="1200" dirty="0"/>
+            <a:rPr lang="en-IE" sz="2800" b="1" kern="1200" dirty="0"/>
             <a:t>AI play time optimizer</a:t>
           </a:r>
         </a:p>
       </dsp:txBody>
       <dsp:txXfrm>
-        <a:off x="0" y="10351295"/>
-        <a:ext cx="5586402" cy="1327300"/>
+        <a:off x="0" y="11148912"/>
+        <a:ext cx="5586402" cy="1429574"/>
       </dsp:txXfrm>
     </dsp:sp>
     <dsp:sp modelId="{EF0D8E2E-611F-48CE-B1FC-FF5FEBAA646D}">
@@ -3395,8 +3404,8 @@
       </dsp:nvSpPr>
       <dsp:spPr>
         <a:xfrm>
-          <a:off x="5574258" y="10351295"/>
-          <a:ext cx="5586402" cy="1327300"/>
+          <a:off x="5574258" y="11148912"/>
+          <a:ext cx="5586402" cy="1429574"/>
         </a:xfrm>
         <a:prstGeom prst="rect">
           <a:avLst/>
@@ -3411,7 +3420,7 @@
             <a:alphaOff val="0"/>
           </a:schemeClr>
         </a:solidFill>
-        <a:ln w="12700" cap="flat" cmpd="sng" algn="ctr">
+        <a:ln w="38100" cap="flat" cmpd="sng" algn="ctr">
           <a:solidFill>
             <a:schemeClr val="tx1"/>
           </a:solidFill>
@@ -3458,14 +3467,14 @@
             <a:buNone/>
           </a:pPr>
           <a:r>
-            <a:rPr lang="en-IE" sz="2800" kern="1200" dirty="0"/>
+            <a:rPr lang="en-IE" sz="2800" b="1" kern="1200" dirty="0"/>
             <a:t>Validate containerized workloads</a:t>
           </a:r>
         </a:p>
       </dsp:txBody>
       <dsp:txXfrm>
-        <a:off x="5574258" y="10351295"/>
-        <a:ext cx="5586402" cy="1327300"/>
+        <a:off x="5574258" y="11148912"/>
+        <a:ext cx="5586402" cy="1429574"/>
       </dsp:txXfrm>
     </dsp:sp>
     <dsp:sp modelId="{A26E17A3-6ADC-4207-BAA9-6F37A7025026}">
@@ -3475,8 +3484,8 @@
       </dsp:nvSpPr>
       <dsp:spPr>
         <a:xfrm>
-          <a:off x="11180995" y="10351295"/>
-          <a:ext cx="5586402" cy="1327300"/>
+          <a:off x="11180995" y="11148912"/>
+          <a:ext cx="5586402" cy="1429574"/>
         </a:xfrm>
         <a:prstGeom prst="rect">
           <a:avLst/>
@@ -3491,7 +3500,7 @@
             <a:alphaOff val="0"/>
           </a:schemeClr>
         </a:solidFill>
-        <a:ln w="12700" cap="flat" cmpd="sng" algn="ctr">
+        <a:ln w="38100" cap="flat" cmpd="sng" algn="ctr">
           <a:solidFill>
             <a:schemeClr val="tx1"/>
           </a:solidFill>
@@ -3538,14 +3547,14 @@
             <a:buNone/>
           </a:pPr>
           <a:r>
-            <a:rPr lang="en-IE" sz="2800" kern="1200" dirty="0"/>
+            <a:rPr lang="en-IE" sz="2800" b="1" kern="1200" dirty="0"/>
             <a:t>Node label constraints</a:t>
           </a:r>
         </a:p>
       </dsp:txBody>
       <dsp:txXfrm>
-        <a:off x="11180995" y="10351295"/>
-        <a:ext cx="5586402" cy="1327300"/>
+        <a:off x="11180995" y="11148912"/>
+        <a:ext cx="5586402" cy="1429574"/>
       </dsp:txXfrm>
     </dsp:sp>
     <dsp:sp modelId="{B5901160-2EED-4BC1-9CD9-CBC7C725C48E}">
@@ -3555,8 +3564,8 @@
       </dsp:nvSpPr>
       <dsp:spPr>
         <a:xfrm rot="10800000">
-          <a:off x="0" y="4396582"/>
-          <a:ext cx="16775589" cy="4437799"/>
+          <a:off x="0" y="4735358"/>
+          <a:ext cx="16775589" cy="4779751"/>
         </a:xfrm>
         <a:prstGeom prst="upArrowCallout">
           <a:avLst/>
@@ -3599,7 +3608,7 @@
           </a:gsLst>
           <a:lin ang="5400000" scaled="0"/>
         </a:gradFill>
-        <a:ln>
+        <a:ln w="38100">
           <a:solidFill>
             <a:schemeClr val="tx1"/>
           </a:solidFill>
@@ -3653,8 +3662,8 @@
         </a:p>
       </dsp:txBody>
       <dsp:txXfrm rot="-10800000">
-        <a:off x="0" y="4396582"/>
-        <a:ext cx="16775589" cy="1557667"/>
+        <a:off x="0" y="4735358"/>
+        <a:ext cx="16775589" cy="1677692"/>
       </dsp:txXfrm>
     </dsp:sp>
     <dsp:sp modelId="{9CE9A027-D096-4DBA-9F41-ACB337DEDCA0}">
@@ -3664,8 +3673,8 @@
       </dsp:nvSpPr>
       <dsp:spPr>
         <a:xfrm>
-          <a:off x="8191" y="5954250"/>
-          <a:ext cx="5586402" cy="1326902"/>
+          <a:off x="11822" y="6440404"/>
+          <a:ext cx="5586402" cy="1429145"/>
         </a:xfrm>
         <a:prstGeom prst="rect">
           <a:avLst/>
@@ -3680,7 +3689,7 @@
             <a:alphaOff val="0"/>
           </a:schemeClr>
         </a:solidFill>
-        <a:ln w="12700" cap="flat" cmpd="sng" algn="ctr">
+        <a:ln w="38100" cap="flat" cmpd="sng" algn="ctr">
           <a:solidFill>
             <a:schemeClr val="tx1"/>
           </a:solidFill>
@@ -3727,14 +3736,14 @@
             <a:buNone/>
           </a:pPr>
           <a:r>
-            <a:rPr lang="en-IE" sz="2800" kern="1200" dirty="0"/>
+            <a:rPr lang="en-IE" sz="2800" b="1" kern="1200" dirty="0"/>
             <a:t>Serialized function runner</a:t>
           </a:r>
         </a:p>
       </dsp:txBody>
       <dsp:txXfrm>
-        <a:off x="8191" y="5954250"/>
-        <a:ext cx="5586402" cy="1326902"/>
+        <a:off x="11822" y="6440404"/>
+        <a:ext cx="5586402" cy="1429145"/>
       </dsp:txXfrm>
     </dsp:sp>
     <dsp:sp modelId="{87C3872B-7E02-4085-B647-9CD9B06A0313}">
@@ -3744,8 +3753,8 @@
       </dsp:nvSpPr>
       <dsp:spPr>
         <a:xfrm>
-          <a:off x="5594593" y="5954250"/>
-          <a:ext cx="5586402" cy="1326902"/>
+          <a:off x="5594593" y="6440404"/>
+          <a:ext cx="5586402" cy="1429145"/>
         </a:xfrm>
         <a:prstGeom prst="rect">
           <a:avLst/>
@@ -3760,7 +3769,7 @@
             <a:alphaOff val="0"/>
           </a:schemeClr>
         </a:solidFill>
-        <a:ln w="12700" cap="flat" cmpd="sng" algn="ctr">
+        <a:ln w="38100" cap="flat" cmpd="sng" algn="ctr">
           <a:solidFill>
             <a:schemeClr val="tx1"/>
           </a:solidFill>
@@ -3807,14 +3816,14 @@
             <a:buNone/>
           </a:pPr>
           <a:r>
-            <a:rPr lang="en-IE" sz="2800" kern="1200" dirty="0"/>
+            <a:rPr lang="en-IE" sz="2800" b="1" kern="1200" dirty="0"/>
             <a:t>Validates explicit binding semantics (early vs late)</a:t>
           </a:r>
         </a:p>
       </dsp:txBody>
       <dsp:txXfrm>
-        <a:off x="5594593" y="5954250"/>
-        <a:ext cx="5586402" cy="1326902"/>
+        <a:off x="5594593" y="6440404"/>
+        <a:ext cx="5586402" cy="1429145"/>
       </dsp:txXfrm>
     </dsp:sp>
     <dsp:sp modelId="{6A9F14BE-80C0-4B02-B21C-6C233AACAF51}">
@@ -3824,8 +3833,8 @@
       </dsp:nvSpPr>
       <dsp:spPr>
         <a:xfrm>
-          <a:off x="11180995" y="5954250"/>
-          <a:ext cx="5586402" cy="1326902"/>
+          <a:off x="11189186" y="6440404"/>
+          <a:ext cx="5586402" cy="1429145"/>
         </a:xfrm>
         <a:prstGeom prst="rect">
           <a:avLst/>
@@ -3840,7 +3849,7 @@
             <a:alphaOff val="0"/>
           </a:schemeClr>
         </a:solidFill>
-        <a:ln w="12700" cap="flat" cmpd="sng" algn="ctr">
+        <a:ln w="38100" cap="flat" cmpd="sng" algn="ctr">
           <a:solidFill>
             <a:schemeClr val="tx1"/>
           </a:solidFill>
@@ -3887,14 +3896,14 @@
             <a:buNone/>
           </a:pPr>
           <a:r>
-            <a:rPr lang="en-IE" sz="2800" kern="1200" dirty="0"/>
-            <a:t>Job environment attached             to tasks</a:t>
+            <a:rPr lang="en-IE" sz="2800" b="1" kern="1200" dirty="0"/>
+            <a:t>Job environment               attached to tasks</a:t>
           </a:r>
         </a:p>
       </dsp:txBody>
       <dsp:txXfrm>
-        <a:off x="11180995" y="5954250"/>
-        <a:ext cx="5586402" cy="1326902"/>
+        <a:off x="11189186" y="6440404"/>
+        <a:ext cx="5586402" cy="1429145"/>
       </dsp:txXfrm>
     </dsp:sp>
     <dsp:sp modelId="{452ACE0D-CF1A-4DE8-8E3E-A45C514F1149}">
@@ -3905,7 +3914,7 @@
       <dsp:spPr>
         <a:xfrm rot="10800000">
           <a:off x="0" y="0"/>
-          <a:ext cx="16775589" cy="4437799"/>
+          <a:ext cx="16775589" cy="4779751"/>
         </a:xfrm>
         <a:prstGeom prst="upArrowCallout">
           <a:avLst/>
@@ -3948,8 +3957,10 @@
           </a:gsLst>
           <a:lin ang="5400000" scaled="0"/>
         </a:gradFill>
-        <a:ln>
-          <a:noFill/>
+        <a:ln w="38100">
+          <a:solidFill>
+            <a:schemeClr val="tx1"/>
+          </a:solidFill>
         </a:ln>
         <a:effectLst/>
         <a:scene3d>
@@ -4001,7 +4012,7 @@
       </dsp:txBody>
       <dsp:txXfrm rot="-10800000">
         <a:off x="0" y="0"/>
-        <a:ext cx="16775589" cy="1557667"/>
+        <a:ext cx="16775589" cy="1677692"/>
       </dsp:txXfrm>
     </dsp:sp>
     <dsp:sp modelId="{07763EBB-4274-4F86-A670-BA07EE7CCAD5}">
@@ -4011,8 +4022,8 @@
       </dsp:nvSpPr>
       <dsp:spPr>
         <a:xfrm>
-          <a:off x="28525" y="1559732"/>
-          <a:ext cx="5586402" cy="1326902"/>
+          <a:off x="3610" y="1679916"/>
+          <a:ext cx="5586402" cy="1429145"/>
         </a:xfrm>
         <a:prstGeom prst="rect">
           <a:avLst/>
@@ -4027,7 +4038,7 @@
             <a:alphaOff val="0"/>
           </a:schemeClr>
         </a:solidFill>
-        <a:ln w="12700" cap="flat" cmpd="sng" algn="ctr">
+        <a:ln w="38100" cap="flat" cmpd="sng" algn="ctr">
           <a:solidFill>
             <a:schemeClr val="tx1"/>
           </a:solidFill>
@@ -4074,14 +4085,14 @@
             <a:buNone/>
           </a:pPr>
           <a:r>
-            <a:rPr lang="en-IE" sz="2800" kern="1200" dirty="0"/>
+            <a:rPr lang="en-IE" sz="2800" b="1" kern="1200" dirty="0"/>
             <a:t>Bioinformatic workflow</a:t>
           </a:r>
         </a:p>
       </dsp:txBody>
       <dsp:txXfrm>
-        <a:off x="28525" y="1559732"/>
-        <a:ext cx="5586402" cy="1326902"/>
+        <a:off x="3610" y="1679916"/>
+        <a:ext cx="5586402" cy="1429145"/>
       </dsp:txXfrm>
     </dsp:sp>
     <dsp:sp modelId="{A5384461-3C55-409F-A76C-DC6C5CADCFE8}">
@@ -4091,8 +4102,8 @@
       </dsp:nvSpPr>
       <dsp:spPr>
         <a:xfrm>
-          <a:off x="5594593" y="1559732"/>
-          <a:ext cx="5586402" cy="1326902"/>
+          <a:off x="5594593" y="1679916"/>
+          <a:ext cx="5586402" cy="1429145"/>
         </a:xfrm>
         <a:prstGeom prst="rect">
           <a:avLst/>
@@ -4107,7 +4118,7 @@
             <a:alphaOff val="0"/>
           </a:schemeClr>
         </a:solidFill>
-        <a:ln w="12700" cap="flat" cmpd="sng" algn="ctr">
+        <a:ln w="38100" cap="flat" cmpd="sng" algn="ctr">
           <a:solidFill>
             <a:schemeClr val="tx1"/>
           </a:solidFill>
@@ -4154,14 +4165,14 @@
             <a:buNone/>
           </a:pPr>
           <a:r>
-            <a:rPr lang="en-IE" sz="2800" kern="1200" dirty="0"/>
-            <a:t>Validates workflow orchestration across generic pilots</a:t>
+            <a:rPr lang="en-IE" sz="2800" b="1" kern="1200" dirty="0"/>
+            <a:t>Validates workflow orchestration across pilots</a:t>
           </a:r>
         </a:p>
       </dsp:txBody>
       <dsp:txXfrm>
-        <a:off x="5594593" y="1559732"/>
-        <a:ext cx="5586402" cy="1326902"/>
+        <a:off x="5594593" y="1679916"/>
+        <a:ext cx="5586402" cy="1429145"/>
       </dsp:txXfrm>
     </dsp:sp>
     <dsp:sp modelId="{1CEB22B1-9A7E-4A91-AF0C-26B893E69FA6}">
@@ -4171,8 +4182,8 @@
       </dsp:nvSpPr>
       <dsp:spPr>
         <a:xfrm>
-          <a:off x="11180995" y="1559732"/>
-          <a:ext cx="5586402" cy="1326902"/>
+          <a:off x="11189186" y="1679916"/>
+          <a:ext cx="5586402" cy="1429145"/>
         </a:xfrm>
         <a:prstGeom prst="rect">
           <a:avLst/>
@@ -4187,7 +4198,7 @@
             <a:alphaOff val="0"/>
           </a:schemeClr>
         </a:solidFill>
-        <a:ln w="12700" cap="flat" cmpd="sng" algn="ctr">
+        <a:ln w="38100" cap="flat" cmpd="sng" algn="ctr">
           <a:solidFill>
             <a:schemeClr val="tx1"/>
           </a:solidFill>
@@ -4234,14 +4245,14 @@
             <a:buNone/>
           </a:pPr>
           <a:r>
-            <a:rPr lang="en-IE" sz="2800" kern="1200" dirty="0"/>
+            <a:rPr lang="en-IE" sz="2800" b="1" kern="1200" dirty="0"/>
             <a:t>Operational across relational        &amp; non-relational databases</a:t>
           </a:r>
         </a:p>
       </dsp:txBody>
       <dsp:txXfrm>
-        <a:off x="11180995" y="1559732"/>
-        <a:ext cx="5586402" cy="1326902"/>
+        <a:off x="11189186" y="1679916"/>
+        <a:ext cx="5586402" cy="1429145"/>
       </dsp:txXfrm>
     </dsp:sp>
   </dsp:spTree>
@@ -9042,7 +9053,7 @@
           <a:p>
             <a:fld id="{79C0705B-4870-4470-A32F-307AEE1697AB}" type="datetimeFigureOut">
               <a:rPr lang="en-IE" smtClean="0"/>
-              <a:t>14/10/2025</a:t>
+              <a:t>13/11/2025</a:t>
             </a:fld>
             <a:endParaRPr lang="en-IE"/>
           </a:p>
@@ -9212,7 +9223,7 @@
           <a:p>
             <a:fld id="{79C0705B-4870-4470-A32F-307AEE1697AB}" type="datetimeFigureOut">
               <a:rPr lang="en-IE" smtClean="0"/>
-              <a:t>14/10/2025</a:t>
+              <a:t>13/11/2025</a:t>
             </a:fld>
             <a:endParaRPr lang="en-IE"/>
           </a:p>
@@ -9392,7 +9403,7 @@
           <a:p>
             <a:fld id="{79C0705B-4870-4470-A32F-307AEE1697AB}" type="datetimeFigureOut">
               <a:rPr lang="en-IE" smtClean="0"/>
-              <a:t>14/10/2025</a:t>
+              <a:t>13/11/2025</a:t>
             </a:fld>
             <a:endParaRPr lang="en-IE"/>
           </a:p>
@@ -9562,7 +9573,7 @@
           <a:p>
             <a:fld id="{79C0705B-4870-4470-A32F-307AEE1697AB}" type="datetimeFigureOut">
               <a:rPr lang="en-IE" smtClean="0"/>
-              <a:t>14/10/2025</a:t>
+              <a:t>13/11/2025</a:t>
             </a:fld>
             <a:endParaRPr lang="en-IE"/>
           </a:p>
@@ -9808,7 +9819,7 @@
           <a:p>
             <a:fld id="{79C0705B-4870-4470-A32F-307AEE1697AB}" type="datetimeFigureOut">
               <a:rPr lang="en-IE" smtClean="0"/>
-              <a:t>14/10/2025</a:t>
+              <a:t>13/11/2025</a:t>
             </a:fld>
             <a:endParaRPr lang="en-IE"/>
           </a:p>
@@ -10040,7 +10051,7 @@
           <a:p>
             <a:fld id="{79C0705B-4870-4470-A32F-307AEE1697AB}" type="datetimeFigureOut">
               <a:rPr lang="en-IE" smtClean="0"/>
-              <a:t>14/10/2025</a:t>
+              <a:t>13/11/2025</a:t>
             </a:fld>
             <a:endParaRPr lang="en-IE"/>
           </a:p>
@@ -10407,7 +10418,7 @@
           <a:p>
             <a:fld id="{79C0705B-4870-4470-A32F-307AEE1697AB}" type="datetimeFigureOut">
               <a:rPr lang="en-IE" smtClean="0"/>
-              <a:t>14/10/2025</a:t>
+              <a:t>13/11/2025</a:t>
             </a:fld>
             <a:endParaRPr lang="en-IE"/>
           </a:p>
@@ -10525,7 +10536,7 @@
           <a:p>
             <a:fld id="{79C0705B-4870-4470-A32F-307AEE1697AB}" type="datetimeFigureOut">
               <a:rPr lang="en-IE" smtClean="0"/>
-              <a:t>14/10/2025</a:t>
+              <a:t>13/11/2025</a:t>
             </a:fld>
             <a:endParaRPr lang="en-IE"/>
           </a:p>
@@ -10620,7 +10631,7 @@
           <a:p>
             <a:fld id="{79C0705B-4870-4470-A32F-307AEE1697AB}" type="datetimeFigureOut">
               <a:rPr lang="en-IE" smtClean="0"/>
-              <a:t>14/10/2025</a:t>
+              <a:t>13/11/2025</a:t>
             </a:fld>
             <a:endParaRPr lang="en-IE"/>
           </a:p>
@@ -10897,7 +10908,7 @@
           <a:p>
             <a:fld id="{79C0705B-4870-4470-A32F-307AEE1697AB}" type="datetimeFigureOut">
               <a:rPr lang="en-IE" smtClean="0"/>
-              <a:t>14/10/2025</a:t>
+              <a:t>13/11/2025</a:t>
             </a:fld>
             <a:endParaRPr lang="en-IE"/>
           </a:p>
@@ -11154,7 +11165,7 @@
           <a:p>
             <a:fld id="{79C0705B-4870-4470-A32F-307AEE1697AB}" type="datetimeFigureOut">
               <a:rPr lang="en-IE" smtClean="0"/>
-              <a:t>14/10/2025</a:t>
+              <a:t>13/11/2025</a:t>
             </a:fld>
             <a:endParaRPr lang="en-IE"/>
           </a:p>
@@ -11367,7 +11378,7 @@
           <a:p>
             <a:fld id="{79C0705B-4870-4470-A32F-307AEE1697AB}" type="datetimeFigureOut">
               <a:rPr lang="en-IE" smtClean="0"/>
-              <a:t>14/10/2025</a:t>
+              <a:t>13/11/2025</a:t>
             </a:fld>
             <a:endParaRPr lang="en-IE"/>
           </a:p>
@@ -11774,10 +11785,1076 @@
       </p:grpSpPr>
       <p:sp>
         <p:nvSpPr>
+          <p:cNvPr id="3" name="Rectangle: Rounded Corners 2">
+            <a:extLst>
+              <a:ext uri="{FF2B5EF4-FFF2-40B4-BE49-F238E27FC236}">
+                <a16:creationId xmlns:a16="http://schemas.microsoft.com/office/drawing/2014/main" id="{5C593204-5C51-61CB-9B93-20CA3CC9130B}"/>
+              </a:ext>
+            </a:extLst>
+          </p:cNvPr>
+          <p:cNvSpPr/>
+          <p:nvPr/>
+        </p:nvSpPr>
+        <p:spPr>
+          <a:xfrm>
+            <a:off x="6675840" y="3248049"/>
+            <a:ext cx="4303049" cy="4136823"/>
+          </a:xfrm>
+          <a:prstGeom prst="roundRect">
+            <a:avLst/>
+          </a:prstGeom>
+          <a:solidFill>
+            <a:schemeClr val="bg1"/>
+          </a:solidFill>
+          <a:ln w="76200">
+            <a:solidFill>
+              <a:schemeClr val="tx1"/>
+            </a:solidFill>
+          </a:ln>
+          <a:effectLst>
+            <a:outerShdw blurRad="190500" dist="228600" dir="2700000" algn="ctr">
+              <a:srgbClr val="000000">
+                <a:alpha val="30000"/>
+              </a:srgbClr>
+            </a:outerShdw>
+          </a:effectLst>
+          <a:scene3d>
+            <a:camera prst="orthographicFront">
+              <a:rot lat="0" lon="0" rev="0"/>
+            </a:camera>
+            <a:lightRig rig="glow" dir="t">
+              <a:rot lat="0" lon="0" rev="4800000"/>
+            </a:lightRig>
+          </a:scene3d>
+          <a:sp3d prstMaterial="matte">
+            <a:bevelT w="127000" h="63500"/>
+          </a:sp3d>
+        </p:spPr>
+        <p:style>
+          <a:lnRef idx="2">
+            <a:schemeClr val="accent1">
+              <a:shade val="15000"/>
+            </a:schemeClr>
+          </a:lnRef>
+          <a:fillRef idx="1">
+            <a:schemeClr val="accent1"/>
+          </a:fillRef>
+          <a:effectRef idx="0">
+            <a:schemeClr val="accent1"/>
+          </a:effectRef>
+          <a:fontRef idx="minor">
+            <a:schemeClr val="lt1"/>
+          </a:fontRef>
+        </p:style>
+        <p:txBody>
+          <a:bodyPr rtlCol="0" anchor="ctr"/>
+          <a:lstStyle/>
+          <a:p>
+            <a:pPr algn="ctr"/>
+            <a:endParaRPr lang="en-IE" sz="4000" b="1" i="1" dirty="0">
+              <a:solidFill>
+                <a:schemeClr val="bg1"/>
+              </a:solidFill>
+            </a:endParaRPr>
+          </a:p>
+        </p:txBody>
+      </p:sp>
+      <p:grpSp>
+        <p:nvGrpSpPr>
+          <p:cNvPr id="13" name="Group 12">
+            <a:extLst>
+              <a:ext uri="{FF2B5EF4-FFF2-40B4-BE49-F238E27FC236}">
+                <a16:creationId xmlns:a16="http://schemas.microsoft.com/office/drawing/2014/main" id="{2A483FD1-2ED0-F4AB-A3F3-2BA1245E818F}"/>
+              </a:ext>
+            </a:extLst>
+          </p:cNvPr>
+          <p:cNvGrpSpPr/>
+          <p:nvPr/>
+        </p:nvGrpSpPr>
+        <p:grpSpPr>
+          <a:xfrm>
+            <a:off x="448776" y="10890061"/>
+            <a:ext cx="6156256" cy="4800796"/>
+            <a:chOff x="403269" y="9141619"/>
+            <a:chExt cx="5730786" cy="4281540"/>
+          </a:xfrm>
+        </p:grpSpPr>
+        <p:sp>
+          <p:nvSpPr>
+            <p:cNvPr id="6" name="Rectangle: Rounded Corners 5">
+              <a:extLst>
+                <a:ext uri="{FF2B5EF4-FFF2-40B4-BE49-F238E27FC236}">
+                  <a16:creationId xmlns:a16="http://schemas.microsoft.com/office/drawing/2014/main" id="{8B1E6658-9A50-53B7-522A-B91C6DE4A836}"/>
+                </a:ext>
+              </a:extLst>
+            </p:cNvPr>
+            <p:cNvSpPr/>
+            <p:nvPr/>
+          </p:nvSpPr>
+          <p:spPr>
+            <a:xfrm>
+              <a:off x="990600" y="9141619"/>
+              <a:ext cx="4114801" cy="3578116"/>
+            </a:xfrm>
+            <a:prstGeom prst="roundRect">
+              <a:avLst/>
+            </a:prstGeom>
+            <a:solidFill>
+              <a:schemeClr val="bg1"/>
+            </a:solidFill>
+            <a:ln w="76200">
+              <a:solidFill>
+                <a:schemeClr val="tx1"/>
+              </a:solidFill>
+            </a:ln>
+            <a:effectLst>
+              <a:outerShdw blurRad="190500" dist="228600" dir="2700000" algn="ctr">
+                <a:srgbClr val="000000">
+                  <a:alpha val="30000"/>
+                </a:srgbClr>
+              </a:outerShdw>
+            </a:effectLst>
+            <a:scene3d>
+              <a:camera prst="orthographicFront">
+                <a:rot lat="0" lon="0" rev="0"/>
+              </a:camera>
+              <a:lightRig rig="glow" dir="t">
+                <a:rot lat="0" lon="0" rev="4800000"/>
+              </a:lightRig>
+            </a:scene3d>
+            <a:sp3d prstMaterial="matte">
+              <a:bevelT w="127000" h="63500"/>
+            </a:sp3d>
+          </p:spPr>
+          <p:style>
+            <a:lnRef idx="2">
+              <a:schemeClr val="accent1">
+                <a:shade val="15000"/>
+              </a:schemeClr>
+            </a:lnRef>
+            <a:fillRef idx="1">
+              <a:schemeClr val="accent1"/>
+            </a:fillRef>
+            <a:effectRef idx="0">
+              <a:schemeClr val="accent1"/>
+            </a:effectRef>
+            <a:fontRef idx="minor">
+              <a:schemeClr val="lt1"/>
+            </a:fontRef>
+          </p:style>
+          <p:txBody>
+            <a:bodyPr rtlCol="0" anchor="ctr"/>
+            <a:lstStyle/>
+            <a:p>
+              <a:pPr algn="ctr"/>
+              <a:endParaRPr lang="en-IE" sz="4000" b="1" i="1" dirty="0">
+                <a:solidFill>
+                  <a:schemeClr val="bg1"/>
+                </a:solidFill>
+              </a:endParaRPr>
+            </a:p>
+          </p:txBody>
+        </p:sp>
+        <p:sp>
+          <p:nvSpPr>
+            <p:cNvPr id="12" name="TextBox 11">
+              <a:extLst>
+                <a:ext uri="{FF2B5EF4-FFF2-40B4-BE49-F238E27FC236}">
+                  <a16:creationId xmlns:a16="http://schemas.microsoft.com/office/drawing/2014/main" id="{053DC12C-8069-DABB-86FA-74E7D28D8B99}"/>
+                </a:ext>
+              </a:extLst>
+            </p:cNvPr>
+            <p:cNvSpPr txBox="1"/>
+            <p:nvPr/>
+          </p:nvSpPr>
+          <p:spPr>
+            <a:xfrm>
+              <a:off x="403269" y="12846735"/>
+              <a:ext cx="5730786" cy="576424"/>
+            </a:xfrm>
+            <a:prstGeom prst="rect">
+              <a:avLst/>
+            </a:prstGeom>
+            <a:noFill/>
+          </p:spPr>
+          <p:txBody>
+            <a:bodyPr wrap="square" rtlCol="0">
+              <a:spAutoFit/>
+            </a:bodyPr>
+            <a:lstStyle/>
+            <a:p>
+              <a:pPr algn="ctr"/>
+              <a:r>
+                <a:rPr lang="en-IE" sz="3600" b="1" dirty="0">
+                  <a:solidFill>
+                    <a:srgbClr val="4A4A69"/>
+                  </a:solidFill>
+                </a:rPr>
+                <a:t>TaskTide Manager Client</a:t>
+              </a:r>
+            </a:p>
+          </p:txBody>
+        </p:sp>
+      </p:grpSp>
+      <p:sp>
+        <p:nvSpPr>
+          <p:cNvPr id="14" name="Cylinder 13">
+            <a:extLst>
+              <a:ext uri="{FF2B5EF4-FFF2-40B4-BE49-F238E27FC236}">
+                <a16:creationId xmlns:a16="http://schemas.microsoft.com/office/drawing/2014/main" id="{D0BBDB7D-B1CF-0BD7-3CC6-E05CC1245F0F}"/>
+              </a:ext>
+            </a:extLst>
+          </p:cNvPr>
+          <p:cNvSpPr/>
+          <p:nvPr/>
+        </p:nvSpPr>
+        <p:spPr>
+          <a:xfrm>
+            <a:off x="7482943" y="3894380"/>
+            <a:ext cx="2726479" cy="2646489"/>
+          </a:xfrm>
+          <a:prstGeom prst="can">
+            <a:avLst/>
+          </a:prstGeom>
+          <a:solidFill>
+            <a:srgbClr val="400020"/>
+          </a:solidFill>
+          <a:ln w="38100">
+            <a:solidFill>
+              <a:schemeClr val="tx1">
+                <a:lumMod val="65000"/>
+                <a:lumOff val="35000"/>
+              </a:schemeClr>
+            </a:solidFill>
+          </a:ln>
+          <a:effectLst>
+            <a:outerShdw blurRad="50800" dist="38100" algn="l" rotWithShape="0">
+              <a:prstClr val="black">
+                <a:alpha val="40000"/>
+              </a:prstClr>
+            </a:outerShdw>
+          </a:effectLst>
+        </p:spPr>
+        <p:style>
+          <a:lnRef idx="2">
+            <a:schemeClr val="accent1">
+              <a:shade val="15000"/>
+            </a:schemeClr>
+          </a:lnRef>
+          <a:fillRef idx="1">
+            <a:schemeClr val="accent1"/>
+          </a:fillRef>
+          <a:effectRef idx="0">
+            <a:schemeClr val="accent1"/>
+          </a:effectRef>
+          <a:fontRef idx="minor">
+            <a:schemeClr val="lt1"/>
+          </a:fontRef>
+        </p:style>
+        <p:txBody>
+          <a:bodyPr rtlCol="0" anchor="ctr"/>
+          <a:lstStyle/>
+          <a:p>
+            <a:pPr algn="ctr"/>
+            <a:r>
+              <a:rPr lang="en-IE" sz="3600" b="1" dirty="0"/>
+              <a:t>Database</a:t>
+            </a:r>
+            <a:endParaRPr lang="en-IE" sz="2800" b="1" dirty="0"/>
+          </a:p>
+        </p:txBody>
+      </p:sp>
+      <p:sp>
+        <p:nvSpPr>
+          <p:cNvPr id="15" name="TextBox 14">
+            <a:extLst>
+              <a:ext uri="{FF2B5EF4-FFF2-40B4-BE49-F238E27FC236}">
+                <a16:creationId xmlns:a16="http://schemas.microsoft.com/office/drawing/2014/main" id="{081669E7-28FA-74AB-AAF2-D15F49FDBFDA}"/>
+              </a:ext>
+            </a:extLst>
+          </p:cNvPr>
+          <p:cNvSpPr txBox="1"/>
+          <p:nvPr/>
+        </p:nvSpPr>
+        <p:spPr>
+          <a:xfrm>
+            <a:off x="5961972" y="2601718"/>
+            <a:ext cx="5730786" cy="646331"/>
+          </a:xfrm>
+          <a:prstGeom prst="rect">
+            <a:avLst/>
+          </a:prstGeom>
+          <a:noFill/>
+        </p:spPr>
+        <p:txBody>
+          <a:bodyPr wrap="square" rtlCol="0">
+            <a:spAutoFit/>
+          </a:bodyPr>
+          <a:lstStyle/>
+          <a:p>
+            <a:pPr algn="ctr"/>
+            <a:r>
+              <a:rPr lang="en-IE" sz="3600" b="1" dirty="0">
+                <a:solidFill>
+                  <a:srgbClr val="400020"/>
+                </a:solidFill>
+              </a:rPr>
+              <a:t>TaskTide Repository</a:t>
+            </a:r>
+          </a:p>
+        </p:txBody>
+      </p:sp>
+      <p:grpSp>
+        <p:nvGrpSpPr>
+          <p:cNvPr id="32" name="Group 31">
+            <a:extLst>
+              <a:ext uri="{FF2B5EF4-FFF2-40B4-BE49-F238E27FC236}">
+                <a16:creationId xmlns:a16="http://schemas.microsoft.com/office/drawing/2014/main" id="{DC64E6B9-19FD-0A28-C46A-500411995680}"/>
+              </a:ext>
+            </a:extLst>
+          </p:cNvPr>
+          <p:cNvGrpSpPr/>
+          <p:nvPr/>
+        </p:nvGrpSpPr>
+        <p:grpSpPr>
+          <a:xfrm>
+            <a:off x="11760425" y="10816934"/>
+            <a:ext cx="6156256" cy="4881482"/>
+            <a:chOff x="11825746" y="9246292"/>
+            <a:chExt cx="6156256" cy="4881482"/>
+          </a:xfrm>
+        </p:grpSpPr>
+        <p:grpSp>
+          <p:nvGrpSpPr>
+            <p:cNvPr id="31" name="Group 30">
+              <a:extLst>
+                <a:ext uri="{FF2B5EF4-FFF2-40B4-BE49-F238E27FC236}">
+                  <a16:creationId xmlns:a16="http://schemas.microsoft.com/office/drawing/2014/main" id="{5B4C2370-9AAF-48EF-E4FD-131500998CB2}"/>
+                </a:ext>
+              </a:extLst>
+            </p:cNvPr>
+            <p:cNvGrpSpPr/>
+            <p:nvPr/>
+          </p:nvGrpSpPr>
+          <p:grpSpPr>
+            <a:xfrm>
+              <a:off x="12475012" y="9246292"/>
+              <a:ext cx="4432254" cy="4040981"/>
+              <a:chOff x="11866610" y="9319419"/>
+              <a:chExt cx="4432254" cy="4040981"/>
+            </a:xfrm>
+          </p:grpSpPr>
+          <p:sp>
+            <p:nvSpPr>
+              <p:cNvPr id="7" name="Rectangle: Rounded Corners 6">
+                <a:extLst>
+                  <a:ext uri="{FF2B5EF4-FFF2-40B4-BE49-F238E27FC236}">
+                    <a16:creationId xmlns:a16="http://schemas.microsoft.com/office/drawing/2014/main" id="{208A7A84-1774-C912-AB85-F801B08D27F6}"/>
+                  </a:ext>
+                </a:extLst>
+              </p:cNvPr>
+              <p:cNvSpPr/>
+              <p:nvPr/>
+            </p:nvSpPr>
+            <p:spPr>
+              <a:xfrm>
+                <a:off x="11866610" y="9319419"/>
+                <a:ext cx="4432254" cy="4040981"/>
+              </a:xfrm>
+              <a:prstGeom prst="roundRect">
+                <a:avLst/>
+              </a:prstGeom>
+              <a:solidFill>
+                <a:schemeClr val="bg1"/>
+              </a:solidFill>
+              <a:ln w="76200">
+                <a:solidFill>
+                  <a:schemeClr val="tx1"/>
+                </a:solidFill>
+              </a:ln>
+              <a:effectLst>
+                <a:outerShdw blurRad="190500" dist="228600" dir="2700000" algn="ctr">
+                  <a:srgbClr val="000000">
+                    <a:alpha val="30000"/>
+                  </a:srgbClr>
+                </a:outerShdw>
+              </a:effectLst>
+              <a:scene3d>
+                <a:camera prst="orthographicFront">
+                  <a:rot lat="0" lon="0" rev="0"/>
+                </a:camera>
+                <a:lightRig rig="glow" dir="t">
+                  <a:rot lat="0" lon="0" rev="4800000"/>
+                </a:lightRig>
+              </a:scene3d>
+              <a:sp3d prstMaterial="matte">
+                <a:bevelT w="127000" h="63500"/>
+              </a:sp3d>
+            </p:spPr>
+            <p:style>
+              <a:lnRef idx="2">
+                <a:schemeClr val="accent1">
+                  <a:shade val="15000"/>
+                </a:schemeClr>
+              </a:lnRef>
+              <a:fillRef idx="1">
+                <a:schemeClr val="accent1"/>
+              </a:fillRef>
+              <a:effectRef idx="0">
+                <a:schemeClr val="accent1"/>
+              </a:effectRef>
+              <a:fontRef idx="minor">
+                <a:schemeClr val="lt1"/>
+              </a:fontRef>
+            </p:style>
+            <p:txBody>
+              <a:bodyPr rtlCol="0" anchor="ctr"/>
+              <a:lstStyle/>
+              <a:p>
+                <a:pPr algn="ctr"/>
+                <a:endParaRPr lang="en-IE" sz="4000" b="1" i="1" dirty="0">
+                  <a:solidFill>
+                    <a:schemeClr val="bg1"/>
+                  </a:solidFill>
+                </a:endParaRPr>
+              </a:p>
+            </p:txBody>
+          </p:sp>
+          <p:pic>
+            <p:nvPicPr>
+              <p:cNvPr id="29" name="Graphic 28" descr="Server with solid fill">
+                <a:extLst>
+                  <a:ext uri="{FF2B5EF4-FFF2-40B4-BE49-F238E27FC236}">
+                    <a16:creationId xmlns:a16="http://schemas.microsoft.com/office/drawing/2014/main" id="{8316283D-7B25-8065-9774-0C00AB121ACD}"/>
+                  </a:ext>
+                </a:extLst>
+              </p:cNvPr>
+              <p:cNvPicPr>
+                <a:picLocks noChangeAspect="1"/>
+              </p:cNvPicPr>
+              <p:nvPr/>
+            </p:nvPicPr>
+            <p:blipFill>
+              <a:blip r:embed="rId2">
+                <a:extLst>
+                  <a:ext uri="{96DAC541-7B7A-43D3-8B79-37D633B846F1}">
+                    <asvg:svgBlip xmlns:asvg="http://schemas.microsoft.com/office/drawing/2016/SVG/main" r:embed="rId3"/>
+                  </a:ext>
+                </a:extLst>
+              </a:blip>
+              <a:stretch>
+                <a:fillRect/>
+              </a:stretch>
+            </p:blipFill>
+            <p:spPr>
+              <a:xfrm>
+                <a:off x="12372602" y="9457606"/>
+                <a:ext cx="3420270" cy="3420270"/>
+              </a:xfrm>
+              <a:prstGeom prst="rect">
+                <a:avLst/>
+              </a:prstGeom>
+              <a:effectLst>
+                <a:outerShdw blurRad="50800" dist="38100" dir="5400000" algn="t" rotWithShape="0">
+                  <a:prstClr val="black">
+                    <a:alpha val="40000"/>
+                  </a:prstClr>
+                </a:outerShdw>
+              </a:effectLst>
+            </p:spPr>
+          </p:pic>
+        </p:grpSp>
+        <p:sp>
+          <p:nvSpPr>
+            <p:cNvPr id="30" name="TextBox 29">
+              <a:extLst>
+                <a:ext uri="{FF2B5EF4-FFF2-40B4-BE49-F238E27FC236}">
+                  <a16:creationId xmlns:a16="http://schemas.microsoft.com/office/drawing/2014/main" id="{5C0BC1BF-385F-CF2F-0C38-6F357B388D21}"/>
+                </a:ext>
+              </a:extLst>
+            </p:cNvPr>
+            <p:cNvSpPr txBox="1"/>
+            <p:nvPr/>
+          </p:nvSpPr>
+          <p:spPr>
+            <a:xfrm>
+              <a:off x="11825746" y="13481443"/>
+              <a:ext cx="6156256" cy="646331"/>
+            </a:xfrm>
+            <a:prstGeom prst="rect">
+              <a:avLst/>
+            </a:prstGeom>
+            <a:noFill/>
+          </p:spPr>
+          <p:txBody>
+            <a:bodyPr wrap="square" rtlCol="0">
+              <a:spAutoFit/>
+            </a:bodyPr>
+            <a:lstStyle/>
+            <a:p>
+              <a:pPr algn="ctr"/>
+              <a:r>
+                <a:rPr lang="en-IE" sz="3600" b="1" dirty="0">
+                  <a:solidFill>
+                    <a:srgbClr val="2A2A72"/>
+                  </a:solidFill>
+                </a:rPr>
+                <a:t>TaskTide Engine Client</a:t>
+              </a:r>
+            </a:p>
+          </p:txBody>
+        </p:sp>
+      </p:grpSp>
+      <p:grpSp>
+        <p:nvGrpSpPr>
+          <p:cNvPr id="38" name="Group 37">
+            <a:extLst>
+              <a:ext uri="{FF2B5EF4-FFF2-40B4-BE49-F238E27FC236}">
+                <a16:creationId xmlns:a16="http://schemas.microsoft.com/office/drawing/2014/main" id="{36F9FCBA-4E1C-7234-C161-8A6523B5DD34}"/>
+              </a:ext>
+            </a:extLst>
+          </p:cNvPr>
+          <p:cNvGrpSpPr/>
+          <p:nvPr/>
+        </p:nvGrpSpPr>
+        <p:grpSpPr>
+          <a:xfrm>
+            <a:off x="1696857" y="11312831"/>
+            <a:ext cx="3161011" cy="3215018"/>
+            <a:chOff x="1594225" y="9742189"/>
+            <a:chExt cx="3161011" cy="3215018"/>
+          </a:xfrm>
+          <a:effectLst/>
+        </p:grpSpPr>
+        <p:pic>
+          <p:nvPicPr>
+            <p:cNvPr id="27" name="Graphic 26" descr="Users with solid fill">
+              <a:extLst>
+                <a:ext uri="{FF2B5EF4-FFF2-40B4-BE49-F238E27FC236}">
+                  <a16:creationId xmlns:a16="http://schemas.microsoft.com/office/drawing/2014/main" id="{C595667A-372A-C4AB-5F8D-E34128647CAC}"/>
+                </a:ext>
+              </a:extLst>
+            </p:cNvPr>
+            <p:cNvPicPr>
+              <a:picLocks noChangeAspect="1"/>
+            </p:cNvPicPr>
+            <p:nvPr/>
+          </p:nvPicPr>
+          <p:blipFill>
+            <a:blip r:embed="rId4">
+              <a:extLst>
+                <a:ext uri="{96DAC541-7B7A-43D3-8B79-37D633B846F1}">
+                  <asvg:svgBlip xmlns:asvg="http://schemas.microsoft.com/office/drawing/2016/SVG/main" r:embed="rId5"/>
+                </a:ext>
+              </a:extLst>
+            </a:blip>
+            <a:stretch>
+              <a:fillRect/>
+            </a:stretch>
+          </p:blipFill>
+          <p:spPr>
+            <a:xfrm>
+              <a:off x="1594225" y="9742189"/>
+              <a:ext cx="3161011" cy="3161011"/>
+            </a:xfrm>
+            <a:prstGeom prst="rect">
+              <a:avLst/>
+            </a:prstGeom>
+            <a:ln>
+              <a:noFill/>
+            </a:ln>
+            <a:effectLst>
+              <a:outerShdw blurRad="50800" dist="38100" dir="18900000" algn="bl" rotWithShape="0">
+                <a:prstClr val="black">
+                  <a:alpha val="40000"/>
+                </a:prstClr>
+              </a:outerShdw>
+            </a:effectLst>
+          </p:spPr>
+        </p:pic>
+        <p:sp>
+          <p:nvSpPr>
+            <p:cNvPr id="37" name="TextBox 36">
+              <a:extLst>
+                <a:ext uri="{FF2B5EF4-FFF2-40B4-BE49-F238E27FC236}">
+                  <a16:creationId xmlns:a16="http://schemas.microsoft.com/office/drawing/2014/main" id="{182D307F-6BEB-7D2A-6BA7-2370D2763BDE}"/>
+                </a:ext>
+              </a:extLst>
+            </p:cNvPr>
+            <p:cNvSpPr txBox="1"/>
+            <p:nvPr/>
+          </p:nvSpPr>
+          <p:spPr>
+            <a:xfrm>
+              <a:off x="2044096" y="12310876"/>
+              <a:ext cx="2229323" cy="646331"/>
+            </a:xfrm>
+            <a:prstGeom prst="rect">
+              <a:avLst/>
+            </a:prstGeom>
+            <a:noFill/>
+            <a:ln>
+              <a:noFill/>
+            </a:ln>
+          </p:spPr>
+          <p:txBody>
+            <a:bodyPr wrap="square" rtlCol="0">
+              <a:spAutoFit/>
+            </a:bodyPr>
+            <a:lstStyle/>
+            <a:p>
+              <a:pPr algn="ctr"/>
+              <a:r>
+                <a:rPr lang="en-IE" sz="3600" b="1" dirty="0">
+                  <a:solidFill>
+                    <a:srgbClr val="4A4A69"/>
+                  </a:solidFill>
+                </a:rPr>
+                <a:t>Users</a:t>
+              </a:r>
+            </a:p>
+          </p:txBody>
+        </p:sp>
+      </p:grpSp>
+      <p:cxnSp>
+        <p:nvCxnSpPr>
+          <p:cNvPr id="42" name="Straight Arrow Connector 41">
+            <a:extLst>
+              <a:ext uri="{FF2B5EF4-FFF2-40B4-BE49-F238E27FC236}">
+                <a16:creationId xmlns:a16="http://schemas.microsoft.com/office/drawing/2014/main" id="{E7CFD93B-E941-33F7-5042-967656AE3163}"/>
+              </a:ext>
+            </a:extLst>
+          </p:cNvPr>
+          <p:cNvCxnSpPr>
+            <a:cxnSpLocks/>
+          </p:cNvCxnSpPr>
+          <p:nvPr/>
+        </p:nvCxnSpPr>
+        <p:spPr>
+          <a:xfrm flipV="1">
+            <a:off x="3599412" y="7430272"/>
+            <a:ext cx="2997323" cy="3139776"/>
+          </a:xfrm>
+          <a:prstGeom prst="straightConnector1">
+            <a:avLst/>
+          </a:prstGeom>
+          <a:ln w="57150">
+            <a:solidFill>
+              <a:schemeClr val="tx1"/>
+            </a:solidFill>
+            <a:tailEnd type="triangle"/>
+          </a:ln>
+        </p:spPr>
+        <p:style>
+          <a:lnRef idx="2">
+            <a:schemeClr val="accent1"/>
+          </a:lnRef>
+          <a:fillRef idx="0">
+            <a:schemeClr val="accent1"/>
+          </a:fillRef>
+          <a:effectRef idx="1">
+            <a:schemeClr val="accent1"/>
+          </a:effectRef>
+          <a:fontRef idx="minor">
+            <a:schemeClr val="tx1"/>
+          </a:fontRef>
+        </p:style>
+      </p:cxnSp>
+      <p:cxnSp>
+        <p:nvCxnSpPr>
+          <p:cNvPr id="50" name="Straight Arrow Connector 49">
+            <a:extLst>
+              <a:ext uri="{FF2B5EF4-FFF2-40B4-BE49-F238E27FC236}">
+                <a16:creationId xmlns:a16="http://schemas.microsoft.com/office/drawing/2014/main" id="{2101EE2E-D242-5A1D-0B22-F09ED2102BB8}"/>
+              </a:ext>
+            </a:extLst>
+          </p:cNvPr>
+          <p:cNvCxnSpPr>
+            <a:cxnSpLocks/>
+          </p:cNvCxnSpPr>
+          <p:nvPr/>
+        </p:nvCxnSpPr>
+        <p:spPr>
+          <a:xfrm flipH="1">
+            <a:off x="3778893" y="7635543"/>
+            <a:ext cx="2960525" cy="3112115"/>
+          </a:xfrm>
+          <a:prstGeom prst="straightConnector1">
+            <a:avLst/>
+          </a:prstGeom>
+          <a:ln w="57150">
+            <a:solidFill>
+              <a:schemeClr val="tx1"/>
+            </a:solidFill>
+            <a:tailEnd type="triangle"/>
+          </a:ln>
+        </p:spPr>
+        <p:style>
+          <a:lnRef idx="2">
+            <a:schemeClr val="accent1"/>
+          </a:lnRef>
+          <a:fillRef idx="0">
+            <a:schemeClr val="accent1"/>
+          </a:fillRef>
+          <a:effectRef idx="1">
+            <a:schemeClr val="accent1"/>
+          </a:effectRef>
+          <a:fontRef idx="minor">
+            <a:schemeClr val="tx1"/>
+          </a:fontRef>
+        </p:style>
+      </p:cxnSp>
+      <p:sp>
+        <p:nvSpPr>
+          <p:cNvPr id="55" name="TextBox 54">
+            <a:extLst>
+              <a:ext uri="{FF2B5EF4-FFF2-40B4-BE49-F238E27FC236}">
+                <a16:creationId xmlns:a16="http://schemas.microsoft.com/office/drawing/2014/main" id="{0A64FC3B-2231-AB00-0114-7D3B3E4D57AC}"/>
+              </a:ext>
+            </a:extLst>
+          </p:cNvPr>
+          <p:cNvSpPr txBox="1"/>
+          <p:nvPr/>
+        </p:nvSpPr>
+        <p:spPr>
+          <a:xfrm rot="18828662">
+            <a:off x="3331480" y="8582309"/>
+            <a:ext cx="3109915" cy="523220"/>
+          </a:xfrm>
+          <a:prstGeom prst="rect">
+            <a:avLst/>
+          </a:prstGeom>
+          <a:noFill/>
+        </p:spPr>
+        <p:txBody>
+          <a:bodyPr wrap="square" rtlCol="0">
+            <a:spAutoFit/>
+          </a:bodyPr>
+          <a:lstStyle/>
+          <a:p>
+            <a:pPr algn="ctr"/>
+            <a:r>
+              <a:rPr lang="en-IE" sz="2800" b="1" dirty="0"/>
+              <a:t>Register Tasks</a:t>
+            </a:r>
+          </a:p>
+        </p:txBody>
+      </p:sp>
+      <p:sp>
+        <p:nvSpPr>
+          <p:cNvPr id="56" name="TextBox 55">
+            <a:extLst>
+              <a:ext uri="{FF2B5EF4-FFF2-40B4-BE49-F238E27FC236}">
+                <a16:creationId xmlns:a16="http://schemas.microsoft.com/office/drawing/2014/main" id="{02CC0E93-2FC7-E32C-8A01-598038EDD30E}"/>
+              </a:ext>
+            </a:extLst>
+          </p:cNvPr>
+          <p:cNvSpPr txBox="1"/>
+          <p:nvPr/>
+        </p:nvSpPr>
+        <p:spPr>
+          <a:xfrm rot="18828662">
+            <a:off x="3979422" y="9005230"/>
+            <a:ext cx="3109915" cy="523220"/>
+          </a:xfrm>
+          <a:prstGeom prst="rect">
+            <a:avLst/>
+          </a:prstGeom>
+          <a:noFill/>
+        </p:spPr>
+        <p:txBody>
+          <a:bodyPr wrap="square" rtlCol="0">
+            <a:spAutoFit/>
+          </a:bodyPr>
+          <a:lstStyle/>
+          <a:p>
+            <a:pPr algn="ctr"/>
+            <a:r>
+              <a:rPr lang="en-IE" sz="2800" b="1" dirty="0"/>
+              <a:t>Query Tasks</a:t>
+            </a:r>
+          </a:p>
+        </p:txBody>
+      </p:sp>
+      <p:cxnSp>
+        <p:nvCxnSpPr>
+          <p:cNvPr id="58" name="Straight Arrow Connector 57">
+            <a:extLst>
+              <a:ext uri="{FF2B5EF4-FFF2-40B4-BE49-F238E27FC236}">
+                <a16:creationId xmlns:a16="http://schemas.microsoft.com/office/drawing/2014/main" id="{E870012A-93A9-A141-B3C1-9A921F3801D6}"/>
+              </a:ext>
+            </a:extLst>
+          </p:cNvPr>
+          <p:cNvCxnSpPr>
+            <a:cxnSpLocks/>
+          </p:cNvCxnSpPr>
+          <p:nvPr/>
+        </p:nvCxnSpPr>
+        <p:spPr>
+          <a:xfrm flipH="1" flipV="1">
+            <a:off x="10793786" y="7598222"/>
+            <a:ext cx="2719222" cy="3077462"/>
+          </a:xfrm>
+          <a:prstGeom prst="straightConnector1">
+            <a:avLst/>
+          </a:prstGeom>
+          <a:ln w="57150">
+            <a:solidFill>
+              <a:schemeClr val="tx1"/>
+            </a:solidFill>
+            <a:tailEnd type="triangle"/>
+          </a:ln>
+        </p:spPr>
+        <p:style>
+          <a:lnRef idx="2">
+            <a:schemeClr val="accent1"/>
+          </a:lnRef>
+          <a:fillRef idx="0">
+            <a:schemeClr val="accent1"/>
+          </a:fillRef>
+          <a:effectRef idx="1">
+            <a:schemeClr val="accent1"/>
+          </a:effectRef>
+          <a:fontRef idx="minor">
+            <a:schemeClr val="tx1"/>
+          </a:fontRef>
+        </p:style>
+      </p:cxnSp>
+      <p:sp>
+        <p:nvSpPr>
+          <p:cNvPr id="65" name="TextBox 64">
+            <a:extLst>
+              <a:ext uri="{FF2B5EF4-FFF2-40B4-BE49-F238E27FC236}">
+                <a16:creationId xmlns:a16="http://schemas.microsoft.com/office/drawing/2014/main" id="{7BA893D8-ADC2-1C69-849B-ACBFE36CE7F6}"/>
+              </a:ext>
+            </a:extLst>
+          </p:cNvPr>
+          <p:cNvSpPr txBox="1"/>
+          <p:nvPr/>
+        </p:nvSpPr>
+        <p:spPr>
+          <a:xfrm rot="2935289">
+            <a:off x="10939397" y="8519780"/>
+            <a:ext cx="3109915" cy="523220"/>
+          </a:xfrm>
+          <a:prstGeom prst="rect">
+            <a:avLst/>
+          </a:prstGeom>
+          <a:noFill/>
+        </p:spPr>
+        <p:txBody>
+          <a:bodyPr wrap="square" rtlCol="0">
+            <a:spAutoFit/>
+          </a:bodyPr>
+          <a:lstStyle/>
+          <a:p>
+            <a:pPr algn="ctr"/>
+            <a:r>
+              <a:rPr lang="en-IE" sz="2800" b="1" dirty="0"/>
+              <a:t>Consume Tasks</a:t>
+            </a:r>
+          </a:p>
+        </p:txBody>
+      </p:sp>
+      <p:cxnSp>
+        <p:nvCxnSpPr>
+          <p:cNvPr id="66" name="Straight Arrow Connector 65">
+            <a:extLst>
+              <a:ext uri="{FF2B5EF4-FFF2-40B4-BE49-F238E27FC236}">
+                <a16:creationId xmlns:a16="http://schemas.microsoft.com/office/drawing/2014/main" id="{F9934AA2-464E-7C46-F454-9C4F19C44E45}"/>
+              </a:ext>
+            </a:extLst>
+          </p:cNvPr>
+          <p:cNvCxnSpPr>
+            <a:cxnSpLocks/>
+          </p:cNvCxnSpPr>
+          <p:nvPr/>
+        </p:nvCxnSpPr>
+        <p:spPr>
+          <a:xfrm>
+            <a:off x="11053533" y="7542238"/>
+            <a:ext cx="2772793" cy="3138997"/>
+          </a:xfrm>
+          <a:prstGeom prst="straightConnector1">
+            <a:avLst/>
+          </a:prstGeom>
+          <a:ln w="57150">
+            <a:solidFill>
+              <a:schemeClr val="tx1"/>
+            </a:solidFill>
+            <a:tailEnd type="triangle"/>
+          </a:ln>
+        </p:spPr>
+        <p:style>
+          <a:lnRef idx="2">
+            <a:schemeClr val="accent1"/>
+          </a:lnRef>
+          <a:fillRef idx="0">
+            <a:schemeClr val="accent1"/>
+          </a:fillRef>
+          <a:effectRef idx="1">
+            <a:schemeClr val="accent1"/>
+          </a:effectRef>
+          <a:fontRef idx="minor">
+            <a:schemeClr val="tx1"/>
+          </a:fontRef>
+        </p:style>
+      </p:cxnSp>
+      <p:sp>
+        <p:nvSpPr>
+          <p:cNvPr id="71" name="TextBox 70">
+            <a:extLst>
+              <a:ext uri="{FF2B5EF4-FFF2-40B4-BE49-F238E27FC236}">
+                <a16:creationId xmlns:a16="http://schemas.microsoft.com/office/drawing/2014/main" id="{3D550E53-A724-EDEC-286E-FCB879197398}"/>
+              </a:ext>
+            </a:extLst>
+          </p:cNvPr>
+          <p:cNvSpPr txBox="1"/>
+          <p:nvPr/>
+        </p:nvSpPr>
+        <p:spPr>
+          <a:xfrm rot="2912262">
+            <a:off x="10259202" y="9061958"/>
+            <a:ext cx="3423398" cy="523220"/>
+          </a:xfrm>
+          <a:prstGeom prst="rect">
+            <a:avLst/>
+          </a:prstGeom>
+          <a:noFill/>
+        </p:spPr>
+        <p:txBody>
+          <a:bodyPr wrap="square" rtlCol="0">
+            <a:spAutoFit/>
+          </a:bodyPr>
+          <a:lstStyle/>
+          <a:p>
+            <a:pPr algn="ctr"/>
+            <a:r>
+              <a:rPr lang="en-IE" sz="2800" b="1" dirty="0"/>
+              <a:t>Update Task States</a:t>
+            </a:r>
+          </a:p>
+        </p:txBody>
+      </p:sp>
+      <p:sp>
+        <p:nvSpPr>
+          <p:cNvPr id="73" name="TextBox 72">
+            <a:extLst>
+              <a:ext uri="{FF2B5EF4-FFF2-40B4-BE49-F238E27FC236}">
+                <a16:creationId xmlns:a16="http://schemas.microsoft.com/office/drawing/2014/main" id="{9962488A-2419-8503-18D0-7ACC535DDBA1}"/>
+              </a:ext>
+            </a:extLst>
+          </p:cNvPr>
+          <p:cNvSpPr txBox="1"/>
+          <p:nvPr/>
+        </p:nvSpPr>
+        <p:spPr>
+          <a:xfrm>
+            <a:off x="13782784" y="14122192"/>
+            <a:ext cx="1802445" cy="646331"/>
+          </a:xfrm>
+          <a:prstGeom prst="rect">
+            <a:avLst/>
+          </a:prstGeom>
+          <a:noFill/>
+        </p:spPr>
+        <p:txBody>
+          <a:bodyPr wrap="square">
+            <a:spAutoFit/>
+          </a:bodyPr>
+          <a:lstStyle/>
+          <a:p>
+            <a:pPr algn="ctr"/>
+            <a:r>
+              <a:rPr lang="en-IE" sz="3600" b="1" dirty="0">
+                <a:solidFill>
+                  <a:srgbClr val="2A2A72"/>
+                </a:solidFill>
+              </a:rPr>
+              <a:t>Server </a:t>
+            </a:r>
+            <a:endParaRPr lang="en-IE" sz="3600" dirty="0"/>
+          </a:p>
+        </p:txBody>
+      </p:sp>
+      <p:sp>
+        <p:nvSpPr>
+          <p:cNvPr id="77" name="Title 1">
+            <a:extLst>
+              <a:ext uri="{FF2B5EF4-FFF2-40B4-BE49-F238E27FC236}">
+                <a16:creationId xmlns:a16="http://schemas.microsoft.com/office/drawing/2014/main" id="{EF357E12-E983-D424-5A83-D4123F5617B1}"/>
+              </a:ext>
+            </a:extLst>
+          </p:cNvPr>
+          <p:cNvSpPr>
+            <a:spLocks noGrp="1"/>
+          </p:cNvSpPr>
+          <p:nvPr>
+            <p:ph type="title"/>
+          </p:nvPr>
+        </p:nvSpPr>
+        <p:spPr>
+          <a:xfrm>
+            <a:off x="1237545" y="790795"/>
+            <a:ext cx="15525572" cy="1128833"/>
+          </a:xfrm>
+        </p:spPr>
+        <p:txBody>
+          <a:bodyPr>
+            <a:normAutofit fontScale="90000"/>
+          </a:bodyPr>
+          <a:lstStyle/>
+          <a:p>
+            <a:pPr algn="ctr"/>
+            <a:r>
+              <a:rPr lang="en-IE" b="1" dirty="0"/>
+              <a:t>TaskTide Workflow Engine</a:t>
+            </a:r>
+          </a:p>
+        </p:txBody>
+      </p:sp>
+    </p:spTree>
+    <p:extLst>
+      <p:ext uri="{BB962C8B-B14F-4D97-AF65-F5344CB8AC3E}">
+        <p14:creationId xmlns:p14="http://schemas.microsoft.com/office/powerpoint/2010/main" val="1200443951"/>
+      </p:ext>
+    </p:extLst>
+  </p:cSld>
+  <p:clrMapOvr>
+    <a:masterClrMapping/>
+  </p:clrMapOvr>
+</p:sld>
+</file>
+
+<file path=ppt/slides/slide2.xml><?xml version="1.0" encoding="utf-8"?>
+<p:sld xmlns:a="http://schemas.openxmlformats.org/drawingml/2006/main" xmlns:r="http://schemas.openxmlformats.org/officeDocument/2006/relationships" xmlns:p="http://schemas.openxmlformats.org/presentationml/2006/main">
+  <p:cSld>
+    <p:spTree>
+      <p:nvGrpSpPr>
+        <p:cNvPr id="1" name="">
+          <a:extLst>
+            <a:ext uri="{FF2B5EF4-FFF2-40B4-BE49-F238E27FC236}">
+              <a16:creationId xmlns:a16="http://schemas.microsoft.com/office/drawing/2014/main" id="{D0B426BC-1520-2BF1-B7B3-52FCEB9AEA89}"/>
+            </a:ext>
+          </a:extLst>
+        </p:cNvPr>
+        <p:cNvGrpSpPr/>
+        <p:nvPr/>
+      </p:nvGrpSpPr>
+      <p:grpSpPr>
+        <a:xfrm>
+          <a:off x="0" y="0"/>
+          <a:ext cx="0" cy="0"/>
+          <a:chOff x="0" y="0"/>
+          <a:chExt cx="0" cy="0"/>
+        </a:xfrm>
+      </p:grpSpPr>
+      <p:sp>
+        <p:nvSpPr>
           <p:cNvPr id="2" name="Title 1">
             <a:extLst>
               <a:ext uri="{FF2B5EF4-FFF2-40B4-BE49-F238E27FC236}">
-                <a16:creationId xmlns:a16="http://schemas.microsoft.com/office/drawing/2014/main" id="{D1A8A3C1-2870-92B1-5CC6-E638ED55326C}"/>
+                <a16:creationId xmlns:a16="http://schemas.microsoft.com/office/drawing/2014/main" id="{08B1318C-DBE3-415F-7E83-983D6F2FC4E4}"/>
               </a:ext>
             </a:extLst>
           </p:cNvPr>
@@ -11813,7 +12890,7 @@
           <p:cNvPr id="4" name="Rectangle: Rounded Corners 3">
             <a:extLst>
               <a:ext uri="{FF2B5EF4-FFF2-40B4-BE49-F238E27FC236}">
-                <a16:creationId xmlns:a16="http://schemas.microsoft.com/office/drawing/2014/main" id="{5A1C6F3C-673D-4567-143B-2DE6272FFD6C}"/>
+                <a16:creationId xmlns:a16="http://schemas.microsoft.com/office/drawing/2014/main" id="{38AD5DC9-A2B0-E248-2339-42B3ED605801}"/>
               </a:ext>
             </a:extLst>
           </p:cNvPr>
@@ -11831,7 +12908,7 @@
           <a:solidFill>
             <a:srgbClr val="800020"/>
           </a:solidFill>
-          <a:ln w="38100">
+          <a:ln w="76200">
             <a:solidFill>
               <a:schemeClr val="tx1"/>
             </a:solidFill>
@@ -11919,7 +12996,7 @@
           <p:cNvPr id="5" name="Rectangle: Rounded Corners 4">
             <a:extLst>
               <a:ext uri="{FF2B5EF4-FFF2-40B4-BE49-F238E27FC236}">
-                <a16:creationId xmlns:a16="http://schemas.microsoft.com/office/drawing/2014/main" id="{AB15261D-C021-2C0A-C8D9-E644EBC71F8F}"/>
+                <a16:creationId xmlns:a16="http://schemas.microsoft.com/office/drawing/2014/main" id="{50D624A0-53B8-21B1-C12C-899AF45DC6E2}"/>
               </a:ext>
             </a:extLst>
           </p:cNvPr>
@@ -11937,7 +13014,7 @@
           <a:solidFill>
             <a:srgbClr val="3B3B98"/>
           </a:solidFill>
-          <a:ln w="38100">
+          <a:ln w="76200">
             <a:solidFill>
               <a:schemeClr val="tx1"/>
             </a:solidFill>
@@ -12041,7 +13118,7 @@
           <p:cNvPr id="6" name="Rectangle: Rounded Corners 5">
             <a:extLst>
               <a:ext uri="{FF2B5EF4-FFF2-40B4-BE49-F238E27FC236}">
-                <a16:creationId xmlns:a16="http://schemas.microsoft.com/office/drawing/2014/main" id="{8B1E6658-9A50-53B7-522A-B91C6DE4A836}"/>
+                <a16:creationId xmlns:a16="http://schemas.microsoft.com/office/drawing/2014/main" id="{27F0153C-F87B-D4B9-028C-456E925B336A}"/>
               </a:ext>
             </a:extLst>
           </p:cNvPr>
@@ -12059,7 +13136,7 @@
           <a:solidFill>
             <a:srgbClr val="2A2A72"/>
           </a:solidFill>
-          <a:ln w="38100">
+          <a:ln w="76200">
             <a:solidFill>
               <a:schemeClr val="tx1"/>
             </a:solidFill>
@@ -12145,7 +13222,7 @@
     </p:spTree>
     <p:extLst>
       <p:ext uri="{BB962C8B-B14F-4D97-AF65-F5344CB8AC3E}">
-        <p14:creationId xmlns:p14="http://schemas.microsoft.com/office/powerpoint/2010/main" val="1200443951"/>
+        <p14:creationId xmlns:p14="http://schemas.microsoft.com/office/powerpoint/2010/main" val="4213433505"/>
       </p:ext>
     </p:extLst>
   </p:cSld>
@@ -12155,7 +13232,7 @@
 </p:sld>
 </file>
 
-<file path=ppt/slides/slide2.xml><?xml version="1.0" encoding="utf-8"?>
+<file path=ppt/slides/slide3.xml><?xml version="1.0" encoding="utf-8"?>
 <p:sld xmlns:a="http://schemas.openxmlformats.org/drawingml/2006/main" xmlns:r="http://schemas.openxmlformats.org/officeDocument/2006/relationships" xmlns:p="http://schemas.openxmlformats.org/presentationml/2006/main">
   <p:cSld>
     <p:spTree>
@@ -12913,7 +13990,7 @@
 </p:sld>
 </file>
 
-<file path=ppt/slides/slide3.xml><?xml version="1.0" encoding="utf-8"?>
+<file path=ppt/slides/slide4.xml><?xml version="1.0" encoding="utf-8"?>
 <p:sld xmlns:a="http://schemas.openxmlformats.org/drawingml/2006/main" xmlns:r="http://schemas.openxmlformats.org/officeDocument/2006/relationships" xmlns:p="http://schemas.openxmlformats.org/presentationml/2006/main">
   <p:cSld>
     <p:spTree>
@@ -12989,7 +14066,7 @@
           <a:solidFill>
             <a:srgbClr val="B56576"/>
           </a:solidFill>
-          <a:ln w="38100">
+          <a:ln w="76200">
             <a:solidFill>
               <a:schemeClr val="tx1"/>
             </a:solidFill>
@@ -13071,7 +14148,7 @@
           <a:solidFill>
             <a:srgbClr val="B56576"/>
           </a:solidFill>
-          <a:ln w="38100">
+          <a:ln w="76200">
             <a:solidFill>
               <a:schemeClr val="tx1"/>
             </a:solidFill>
@@ -13153,7 +14230,7 @@
           <a:solidFill>
             <a:srgbClr val="4A4E69"/>
           </a:solidFill>
-          <a:ln w="38100">
+          <a:ln w="76200">
             <a:solidFill>
               <a:schemeClr val="tx1"/>
             </a:solidFill>
@@ -13235,7 +14312,7 @@
           <a:solidFill>
             <a:srgbClr val="4A4E69"/>
           </a:solidFill>
-          <a:ln w="38100">
+          <a:ln w="76200">
             <a:solidFill>
               <a:schemeClr val="tx1"/>
             </a:solidFill>
@@ -13325,7 +14402,7 @@
           <a:solidFill>
             <a:srgbClr val="6B5B95"/>
           </a:solidFill>
-          <a:ln w="38100">
+          <a:ln w="76200">
             <a:solidFill>
               <a:schemeClr val="tx1"/>
             </a:solidFill>
@@ -13407,7 +14484,7 @@
           <a:solidFill>
             <a:srgbClr val="6B5B95"/>
           </a:solidFill>
-          <a:ln w="38100">
+          <a:ln w="76200">
             <a:solidFill>
               <a:schemeClr val="tx1"/>
             </a:solidFill>
@@ -13488,7 +14565,7 @@
         </p:nvSpPr>
         <p:spPr>
           <a:xfrm>
-            <a:off x="2275840" y="7904481"/>
+            <a:off x="2275840" y="7926252"/>
             <a:ext cx="1178560" cy="3891280"/>
           </a:xfrm>
           <a:prstGeom prst="downArrow">
@@ -13497,7 +14574,7 @@
           <a:solidFill>
             <a:srgbClr val="4A6FA5"/>
           </a:solidFill>
-          <a:ln>
+          <a:ln w="57150">
             <a:solidFill>
               <a:schemeClr val="tx1"/>
             </a:solidFill>
@@ -13549,7 +14626,7 @@
         </p:nvSpPr>
         <p:spPr>
           <a:xfrm>
-            <a:off x="8300720" y="7894320"/>
+            <a:off x="8300720" y="7916091"/>
             <a:ext cx="1178560" cy="3901440"/>
           </a:xfrm>
           <a:prstGeom prst="downArrow">
@@ -13558,7 +14635,7 @@
           <a:solidFill>
             <a:srgbClr val="4A6FA5"/>
           </a:solidFill>
-          <a:ln>
+          <a:ln w="57150">
             <a:solidFill>
               <a:schemeClr val="tx1"/>
             </a:solidFill>
@@ -13610,7 +14687,7 @@
         </p:nvSpPr>
         <p:spPr>
           <a:xfrm>
-            <a:off x="14406880" y="7904480"/>
+            <a:off x="14406880" y="7926251"/>
             <a:ext cx="1178560" cy="3901440"/>
           </a:xfrm>
           <a:prstGeom prst="downArrow">
@@ -13619,7 +14696,7 @@
           <a:solidFill>
             <a:srgbClr val="4A6FA5"/>
           </a:solidFill>
-          <a:ln>
+          <a:ln w="57150">
             <a:solidFill>
               <a:schemeClr val="tx1"/>
             </a:solidFill>
@@ -13670,7 +14747,7 @@
 </p:sld>
 </file>
 
-<file path=ppt/slides/slide4.xml><?xml version="1.0" encoding="utf-8"?>
+<file path=ppt/slides/slide5.xml><?xml version="1.0" encoding="utf-8"?>
 <p:sld xmlns:a="http://schemas.openxmlformats.org/drawingml/2006/main" xmlns:r="http://schemas.openxmlformats.org/officeDocument/2006/relationships" xmlns:p="http://schemas.openxmlformats.org/presentationml/2006/main">
   <p:cSld>
     <p:spTree>
@@ -13700,13 +14777,13 @@
           <p:nvPr>
             <p:extLst>
               <p:ext uri="{D42A27DB-BD31-4B8C-83A1-F6EECF244321}">
-                <p14:modId xmlns:p14="http://schemas.microsoft.com/office/powerpoint/2010/main" val="3440689850"/>
+                <p14:modId xmlns:p14="http://schemas.microsoft.com/office/powerpoint/2010/main" val="4160423314"/>
               </p:ext>
             </p:extLst>
           </p:nvPr>
         </p:nvGraphicFramePr>
         <p:xfrm>
-          <a:off x="-2113278" y="3993735"/>
+          <a:off x="-2316478" y="3993735"/>
           <a:ext cx="9834878" cy="9234585"/>
         </p:xfrm>
         <a:graphic>
@@ -13729,7 +14806,7 @@
         </p:nvCxnSpPr>
         <p:spPr>
           <a:xfrm>
-            <a:off x="5831840" y="2743200"/>
+            <a:off x="5374640" y="2743200"/>
             <a:ext cx="0" cy="11988800"/>
           </a:xfrm>
           <a:prstGeom prst="line">
@@ -13737,10 +14814,7 @@
           </a:prstGeom>
           <a:ln w="76200">
             <a:solidFill>
-              <a:schemeClr val="tx1">
-                <a:lumMod val="65000"/>
-                <a:lumOff val="35000"/>
-              </a:schemeClr>
+              <a:schemeClr val="tx1"/>
             </a:solidFill>
           </a:ln>
         </p:spPr>
@@ -13773,7 +14847,7 @@
         </p:nvSpPr>
         <p:spPr>
           <a:xfrm>
-            <a:off x="10789927" y="2113281"/>
+            <a:off x="10459727" y="1402081"/>
             <a:ext cx="2153905" cy="2022695"/>
           </a:xfrm>
           <a:prstGeom prst="can">
@@ -13841,8 +14915,8 @@
         </p:nvSpPr>
         <p:spPr>
           <a:xfrm>
-            <a:off x="6461767" y="5425441"/>
-            <a:ext cx="11155674" cy="9384150"/>
+            <a:off x="5689602" y="4606002"/>
+            <a:ext cx="12115789" cy="10781636"/>
           </a:xfrm>
           <a:prstGeom prst="roundRect">
             <a:avLst/>
@@ -13900,7 +14974,7 @@
         </p:nvCxnSpPr>
         <p:spPr>
           <a:xfrm>
-            <a:off x="11532585" y="4346175"/>
+            <a:off x="11380185" y="3558775"/>
             <a:ext cx="0" cy="968362"/>
           </a:xfrm>
           <a:prstGeom prst="straightConnector1">
@@ -13908,7 +14982,9 @@
           </a:prstGeom>
           <a:ln w="76200">
             <a:solidFill>
-              <a:schemeClr val="tx1"/>
+              <a:schemeClr val="accent5">
+                <a:lumMod val="75000"/>
+              </a:schemeClr>
             </a:solidFill>
             <a:tailEnd type="triangle"/>
           </a:ln>
@@ -13944,7 +15020,7 @@
         </p:nvCxnSpPr>
         <p:spPr>
           <a:xfrm flipH="1" flipV="1">
-            <a:off x="11998960" y="4287520"/>
+            <a:off x="11668760" y="3500120"/>
             <a:ext cx="1" cy="954107"/>
           </a:xfrm>
           <a:prstGeom prst="straightConnector1">
@@ -13952,7 +15028,9 @@
           </a:prstGeom>
           <a:ln w="76200">
             <a:solidFill>
-              <a:schemeClr val="tx1"/>
+              <a:schemeClr val="accent5">
+                <a:lumMod val="75000"/>
+              </a:schemeClr>
             </a:solidFill>
             <a:tailEnd type="triangle"/>
           </a:ln>
@@ -13972,55 +15050,6 @@
           </a:fontRef>
         </p:style>
       </p:cxnSp>
-      <p:sp>
-        <p:nvSpPr>
-          <p:cNvPr id="25" name="Right Brace 24">
-            <a:extLst>
-              <a:ext uri="{FF2B5EF4-FFF2-40B4-BE49-F238E27FC236}">
-                <a16:creationId xmlns:a16="http://schemas.microsoft.com/office/drawing/2014/main" id="{D824E922-C84C-7CA7-48D4-0D4C189A40F0}"/>
-              </a:ext>
-            </a:extLst>
-          </p:cNvPr>
-          <p:cNvSpPr/>
-          <p:nvPr/>
-        </p:nvSpPr>
-        <p:spPr>
-          <a:xfrm>
-            <a:off x="10830560" y="6674266"/>
-            <a:ext cx="1767841" cy="6797894"/>
-          </a:xfrm>
-          <a:prstGeom prst="rightBrace">
-            <a:avLst/>
-          </a:prstGeom>
-          <a:ln w="38100">
-            <a:solidFill>
-              <a:srgbClr val="8B0000"/>
-            </a:solidFill>
-          </a:ln>
-        </p:spPr>
-        <p:style>
-          <a:lnRef idx="2">
-            <a:schemeClr val="accent1"/>
-          </a:lnRef>
-          <a:fillRef idx="0">
-            <a:schemeClr val="accent1"/>
-          </a:fillRef>
-          <a:effectRef idx="1">
-            <a:schemeClr val="accent1"/>
-          </a:effectRef>
-          <a:fontRef idx="minor">
-            <a:schemeClr val="tx1"/>
-          </a:fontRef>
-        </p:style>
-        <p:txBody>
-          <a:bodyPr rtlCol="0" anchor="ctr"/>
-          <a:lstStyle/>
-          <a:p>
-            <a:pPr algn="ctr"/>
-            <a:endParaRPr lang="en-IE"/>
-          </a:p>
-        </p:txBody>
-      </p:sp>
       <p:cxnSp>
         <p:nvCxnSpPr>
           <p:cNvPr id="45" name="Straight Arrow Connector 44">
@@ -14035,7 +15064,7 @@
         </p:nvCxnSpPr>
         <p:spPr>
           <a:xfrm>
-            <a:off x="8869680" y="8090917"/>
+            <a:off x="7987186" y="7889090"/>
             <a:ext cx="0" cy="1036320"/>
           </a:xfrm>
           <a:prstGeom prst="straightConnector1">
@@ -14077,7 +15106,7 @@
         </p:nvCxnSpPr>
         <p:spPr>
           <a:xfrm>
-            <a:off x="8891426" y="11273886"/>
+            <a:off x="8012586" y="11170383"/>
             <a:ext cx="0" cy="1036320"/>
           </a:xfrm>
           <a:prstGeom prst="straightConnector1">
@@ -14119,7 +15148,7 @@
         </p:nvSpPr>
         <p:spPr>
           <a:xfrm>
-            <a:off x="7370596" y="6116320"/>
+            <a:off x="6456196" y="5836920"/>
             <a:ext cx="3152458" cy="1852676"/>
           </a:xfrm>
           <a:prstGeom prst="roundRect">
@@ -14172,7 +15201,7 @@
             <a:pPr algn="ctr"/>
             <a:r>
               <a:rPr lang="en-IE" sz="2800" b="1" dirty="0"/>
-              <a:t>Fetch Tasks</a:t>
+              <a:t>Receives      Tasks</a:t>
             </a:r>
           </a:p>
         </p:txBody>
@@ -14191,7 +15220,7 @@
         </p:nvSpPr>
         <p:spPr>
           <a:xfrm>
-            <a:off x="7380757" y="9235440"/>
+            <a:off x="6466357" y="9057640"/>
             <a:ext cx="3152458" cy="1852676"/>
           </a:xfrm>
           <a:prstGeom prst="roundRect">
@@ -14263,7 +15292,7 @@
         </p:nvSpPr>
         <p:spPr>
           <a:xfrm>
-            <a:off x="7380757" y="12446000"/>
+            <a:off x="6466357" y="12319000"/>
             <a:ext cx="3152458" cy="1852676"/>
           </a:xfrm>
           <a:prstGeom prst="roundRect">
@@ -14323,78 +15352,6 @@
       </p:sp>
       <p:sp>
         <p:nvSpPr>
-          <p:cNvPr id="60" name="Rectangle: Rounded Corners 59">
-            <a:extLst>
-              <a:ext uri="{FF2B5EF4-FFF2-40B4-BE49-F238E27FC236}">
-                <a16:creationId xmlns:a16="http://schemas.microsoft.com/office/drawing/2014/main" id="{DE0071F6-BA5F-3FEC-E3DE-D2CC750CF257}"/>
-              </a:ext>
-            </a:extLst>
-          </p:cNvPr>
-          <p:cNvSpPr/>
-          <p:nvPr/>
-        </p:nvSpPr>
-        <p:spPr>
-          <a:xfrm>
-            <a:off x="13228327" y="7793068"/>
-            <a:ext cx="3152458" cy="1852676"/>
-          </a:xfrm>
-          <a:prstGeom prst="roundRect">
-            <a:avLst/>
-          </a:prstGeom>
-          <a:ln w="38100">
-            <a:solidFill>
-              <a:schemeClr val="tx1"/>
-            </a:solidFill>
-          </a:ln>
-          <a:effectLst>
-            <a:outerShdw blurRad="190500" dist="228600" dir="2700000" algn="ctr">
-              <a:srgbClr val="000000">
-                <a:alpha val="30000"/>
-              </a:srgbClr>
-            </a:outerShdw>
-          </a:effectLst>
-          <a:scene3d>
-            <a:camera prst="orthographicFront">
-              <a:rot lat="0" lon="0" rev="0"/>
-            </a:camera>
-            <a:lightRig rig="glow" dir="t">
-              <a:rot lat="0" lon="0" rev="4800000"/>
-            </a:lightRig>
-          </a:scene3d>
-          <a:sp3d prstMaterial="matte">
-            <a:bevelT w="127000" h="63500"/>
-          </a:sp3d>
-        </p:spPr>
-        <p:style>
-          <a:lnRef idx="2">
-            <a:schemeClr val="accent1">
-              <a:shade val="15000"/>
-            </a:schemeClr>
-          </a:lnRef>
-          <a:fillRef idx="1">
-            <a:schemeClr val="accent1"/>
-          </a:fillRef>
-          <a:effectRef idx="0">
-            <a:schemeClr val="accent1"/>
-          </a:effectRef>
-          <a:fontRef idx="minor">
-            <a:schemeClr val="lt1"/>
-          </a:fontRef>
-        </p:style>
-        <p:txBody>
-          <a:bodyPr rtlCol="0" anchor="ctr"/>
-          <a:lstStyle/>
-          <a:p>
-            <a:pPr algn="ctr"/>
-            <a:r>
-              <a:rPr lang="en-IE" sz="2800" b="1" dirty="0"/>
-              <a:t>Observer Chain</a:t>
-            </a:r>
-          </a:p>
-        </p:txBody>
-      </p:sp>
-      <p:sp>
-        <p:nvSpPr>
           <p:cNvPr id="66" name="TextBox 65">
             <a:extLst>
               <a:ext uri="{FF2B5EF4-FFF2-40B4-BE49-F238E27FC236}">
@@ -14442,7 +15399,7 @@
         </p:nvSpPr>
         <p:spPr>
           <a:xfrm>
-            <a:off x="7604971" y="4942861"/>
+            <a:off x="7401771" y="4155461"/>
             <a:ext cx="2960616" cy="523220"/>
           </a:xfrm>
           <a:prstGeom prst="rect">
@@ -14457,7 +15414,7 @@
           <a:lstStyle/>
           <a:p>
             <a:r>
-              <a:rPr lang="en-IE" sz="2800" b="1" dirty="0"/>
+              <a:rPr lang="en-IE" sz="2800" b="1" i="1" dirty="0"/>
               <a:t>TaskTide Engine</a:t>
             </a:r>
           </a:p>
@@ -14477,7 +15434,7 @@
         </p:nvSpPr>
         <p:spPr>
           <a:xfrm>
-            <a:off x="12296651" y="4630079"/>
+            <a:off x="11763251" y="3766479"/>
             <a:ext cx="2546293" cy="523220"/>
           </a:xfrm>
           <a:prstGeom prst="rect">
@@ -14492,7 +15449,13 @@
           <a:lstStyle/>
           <a:p>
             <a:r>
-              <a:rPr lang="en-IE" sz="2800" b="1" dirty="0"/>
+              <a:rPr lang="en-IE" sz="2800" b="1" dirty="0">
+                <a:solidFill>
+                  <a:schemeClr val="accent5">
+                    <a:lumMod val="75000"/>
+                  </a:schemeClr>
+                </a:solidFill>
+              </a:rPr>
               <a:t>Task Updates</a:t>
             </a:r>
           </a:p>
@@ -14512,7 +15475,7 @@
         </p:nvSpPr>
         <p:spPr>
           <a:xfrm>
-            <a:off x="11993568" y="10323008"/>
+            <a:off x="11968168" y="8367208"/>
             <a:ext cx="2543966" cy="1222090"/>
           </a:xfrm>
           <a:prstGeom prst="roundRect">
@@ -14584,7 +15547,7 @@
         </p:nvSpPr>
         <p:spPr>
           <a:xfrm>
-            <a:off x="14878057" y="10323008"/>
+            <a:off x="14852657" y="8367208"/>
             <a:ext cx="2543966" cy="1222090"/>
           </a:xfrm>
           <a:prstGeom prst="roundRect">
@@ -14656,7 +15619,7 @@
         </p:nvSpPr>
         <p:spPr>
           <a:xfrm>
-            <a:off x="13532573" y="11996185"/>
+            <a:off x="13456373" y="10040385"/>
             <a:ext cx="2543966" cy="1222090"/>
           </a:xfrm>
           <a:prstGeom prst="roundRect">
@@ -14714,6 +15677,263 @@
           </a:p>
         </p:txBody>
       </p:sp>
+      <p:sp>
+        <p:nvSpPr>
+          <p:cNvPr id="11" name="Rectangle: Rounded Corners 10">
+            <a:extLst>
+              <a:ext uri="{FF2B5EF4-FFF2-40B4-BE49-F238E27FC236}">
+                <a16:creationId xmlns:a16="http://schemas.microsoft.com/office/drawing/2014/main" id="{C1FD7A45-07A6-2A0A-0A15-386687226289}"/>
+              </a:ext>
+            </a:extLst>
+          </p:cNvPr>
+          <p:cNvSpPr/>
+          <p:nvPr/>
+        </p:nvSpPr>
+        <p:spPr>
+          <a:xfrm>
+            <a:off x="11744960" y="7963917"/>
+            <a:ext cx="5872474" cy="3643883"/>
+          </a:xfrm>
+          <a:prstGeom prst="roundRect">
+            <a:avLst/>
+          </a:prstGeom>
+          <a:noFill/>
+          <a:ln w="38100"/>
+        </p:spPr>
+        <p:style>
+          <a:lnRef idx="2">
+            <a:schemeClr val="accent1">
+              <a:shade val="15000"/>
+            </a:schemeClr>
+          </a:lnRef>
+          <a:fillRef idx="1">
+            <a:schemeClr val="accent1"/>
+          </a:fillRef>
+          <a:effectRef idx="0">
+            <a:schemeClr val="accent1"/>
+          </a:effectRef>
+          <a:fontRef idx="minor">
+            <a:schemeClr val="lt1"/>
+          </a:fontRef>
+        </p:style>
+        <p:txBody>
+          <a:bodyPr rtlCol="0" anchor="ctr"/>
+          <a:lstStyle/>
+          <a:p>
+            <a:pPr algn="ctr"/>
+            <a:endParaRPr lang="en-IE"/>
+          </a:p>
+        </p:txBody>
+      </p:sp>
+      <p:sp>
+        <p:nvSpPr>
+          <p:cNvPr id="12" name="TextBox 11">
+            <a:extLst>
+              <a:ext uri="{FF2B5EF4-FFF2-40B4-BE49-F238E27FC236}">
+                <a16:creationId xmlns:a16="http://schemas.microsoft.com/office/drawing/2014/main" id="{2BDCD5EB-E56D-7692-3FCD-FB91F1955FC4}"/>
+              </a:ext>
+            </a:extLst>
+          </p:cNvPr>
+          <p:cNvSpPr txBox="1"/>
+          <p:nvPr/>
+        </p:nvSpPr>
+        <p:spPr>
+          <a:xfrm>
+            <a:off x="12623800" y="7528430"/>
+            <a:ext cx="4521191" cy="523220"/>
+          </a:xfrm>
+          <a:prstGeom prst="rect">
+            <a:avLst/>
+          </a:prstGeom>
+          <a:noFill/>
+        </p:spPr>
+        <p:txBody>
+          <a:bodyPr wrap="square" rtlCol="0">
+            <a:spAutoFit/>
+          </a:bodyPr>
+          <a:lstStyle/>
+          <a:p>
+            <a:r>
+              <a:rPr lang="en-IE" sz="2800" b="1" i="1" dirty="0"/>
+              <a:t>TaskTide Observer Chain</a:t>
+            </a:r>
+          </a:p>
+        </p:txBody>
+      </p:sp>
+      <p:sp>
+        <p:nvSpPr>
+          <p:cNvPr id="3" name="Rectangle: Rounded Corners 2">
+            <a:extLst>
+              <a:ext uri="{FF2B5EF4-FFF2-40B4-BE49-F238E27FC236}">
+                <a16:creationId xmlns:a16="http://schemas.microsoft.com/office/drawing/2014/main" id="{62314848-3CAF-6E78-7D60-BEA85E354477}"/>
+              </a:ext>
+            </a:extLst>
+          </p:cNvPr>
+          <p:cNvSpPr/>
+          <p:nvPr/>
+        </p:nvSpPr>
+        <p:spPr>
+          <a:xfrm>
+            <a:off x="6112479" y="5562600"/>
+            <a:ext cx="3835958" cy="9042400"/>
+          </a:xfrm>
+          <a:prstGeom prst="roundRect">
+            <a:avLst/>
+          </a:prstGeom>
+          <a:noFill/>
+          <a:ln w="38100">
+            <a:solidFill>
+              <a:schemeClr val="tx1"/>
+            </a:solidFill>
+          </a:ln>
+        </p:spPr>
+        <p:style>
+          <a:lnRef idx="2">
+            <a:schemeClr val="accent1">
+              <a:shade val="15000"/>
+            </a:schemeClr>
+          </a:lnRef>
+          <a:fillRef idx="1">
+            <a:schemeClr val="accent1"/>
+          </a:fillRef>
+          <a:effectRef idx="0">
+            <a:schemeClr val="accent1"/>
+          </a:effectRef>
+          <a:fontRef idx="minor">
+            <a:schemeClr val="lt1"/>
+          </a:fontRef>
+        </p:style>
+        <p:txBody>
+          <a:bodyPr rtlCol="0" anchor="ctr"/>
+          <a:lstStyle/>
+          <a:p>
+            <a:pPr algn="ctr"/>
+            <a:endParaRPr lang="en-IE"/>
+          </a:p>
+        </p:txBody>
+      </p:sp>
+      <p:sp>
+        <p:nvSpPr>
+          <p:cNvPr id="13" name="TextBox 12">
+            <a:extLst>
+              <a:ext uri="{FF2B5EF4-FFF2-40B4-BE49-F238E27FC236}">
+                <a16:creationId xmlns:a16="http://schemas.microsoft.com/office/drawing/2014/main" id="{279C2CD7-F3A6-A2A4-D43D-69A67E73918A}"/>
+              </a:ext>
+            </a:extLst>
+          </p:cNvPr>
+          <p:cNvSpPr txBox="1"/>
+          <p:nvPr/>
+        </p:nvSpPr>
+        <p:spPr>
+          <a:xfrm>
+            <a:off x="6937492" y="14622217"/>
+            <a:ext cx="3360051" cy="523220"/>
+          </a:xfrm>
+          <a:prstGeom prst="rect">
+            <a:avLst/>
+          </a:prstGeom>
+          <a:noFill/>
+        </p:spPr>
+        <p:txBody>
+          <a:bodyPr wrap="square" rtlCol="0">
+            <a:spAutoFit/>
+          </a:bodyPr>
+          <a:lstStyle/>
+          <a:p>
+            <a:r>
+              <a:rPr lang="en-IE" sz="2800" b="1" i="1" dirty="0"/>
+              <a:t>TaskTide Processor</a:t>
+            </a:r>
+          </a:p>
+        </p:txBody>
+      </p:sp>
+      <p:cxnSp>
+        <p:nvCxnSpPr>
+          <p:cNvPr id="16" name="Straight Arrow Connector 15">
+            <a:extLst>
+              <a:ext uri="{FF2B5EF4-FFF2-40B4-BE49-F238E27FC236}">
+                <a16:creationId xmlns:a16="http://schemas.microsoft.com/office/drawing/2014/main" id="{1B90DD8D-EC71-89A9-DA38-FE6DCDD8BED5}"/>
+              </a:ext>
+            </a:extLst>
+          </p:cNvPr>
+          <p:cNvCxnSpPr>
+            <a:cxnSpLocks/>
+          </p:cNvCxnSpPr>
+          <p:nvPr/>
+        </p:nvCxnSpPr>
+        <p:spPr>
+          <a:xfrm flipH="1">
+            <a:off x="9975465" y="9735585"/>
+            <a:ext cx="1693295" cy="0"/>
+          </a:xfrm>
+          <a:prstGeom prst="straightConnector1">
+            <a:avLst/>
+          </a:prstGeom>
+          <a:ln w="76200">
+            <a:solidFill>
+              <a:schemeClr val="accent5">
+                <a:lumMod val="75000"/>
+              </a:schemeClr>
+            </a:solidFill>
+            <a:tailEnd type="triangle"/>
+          </a:ln>
+        </p:spPr>
+        <p:style>
+          <a:lnRef idx="2">
+            <a:schemeClr val="accent1"/>
+          </a:lnRef>
+          <a:fillRef idx="0">
+            <a:schemeClr val="accent1"/>
+          </a:fillRef>
+          <a:effectRef idx="1">
+            <a:schemeClr val="accent1"/>
+          </a:effectRef>
+          <a:fontRef idx="minor">
+            <a:schemeClr val="tx1"/>
+          </a:fontRef>
+        </p:style>
+      </p:cxnSp>
+      <p:sp>
+        <p:nvSpPr>
+          <p:cNvPr id="24" name="TextBox 23">
+            <a:extLst>
+              <a:ext uri="{FF2B5EF4-FFF2-40B4-BE49-F238E27FC236}">
+                <a16:creationId xmlns:a16="http://schemas.microsoft.com/office/drawing/2014/main" id="{90D5D47F-B164-01B3-7D34-6665223CAF89}"/>
+              </a:ext>
+            </a:extLst>
+          </p:cNvPr>
+          <p:cNvSpPr txBox="1"/>
+          <p:nvPr/>
+        </p:nvSpPr>
+        <p:spPr>
+          <a:xfrm>
+            <a:off x="10208639" y="9338994"/>
+            <a:ext cx="1495206" cy="461665"/>
+          </a:xfrm>
+          <a:prstGeom prst="rect">
+            <a:avLst/>
+          </a:prstGeom>
+          <a:noFill/>
+        </p:spPr>
+        <p:txBody>
+          <a:bodyPr wrap="square" rtlCol="0">
+            <a:spAutoFit/>
+          </a:bodyPr>
+          <a:lstStyle/>
+          <a:p>
+            <a:r>
+              <a:rPr lang="en-IE" sz="2400" b="1" dirty="0">
+                <a:solidFill>
+                  <a:schemeClr val="accent5">
+                    <a:lumMod val="75000"/>
+                  </a:schemeClr>
+                </a:solidFill>
+              </a:rPr>
+              <a:t>Validates</a:t>
+            </a:r>
+          </a:p>
+        </p:txBody>
+      </p:sp>
     </p:spTree>
     <p:extLst>
       <p:ext uri="{BB962C8B-B14F-4D97-AF65-F5344CB8AC3E}">
@@ -14727,7 +15947,7 @@
 </p:sld>
 </file>
 
-<file path=ppt/slides/slide5.xml><?xml version="1.0" encoding="utf-8"?>
+<file path=ppt/slides/slide6.xml><?xml version="1.0" encoding="utf-8"?>
 <p:sld xmlns:a="http://schemas.openxmlformats.org/drawingml/2006/main" xmlns:r="http://schemas.openxmlformats.org/officeDocument/2006/relationships" xmlns:p="http://schemas.openxmlformats.org/presentationml/2006/main">
   <p:cSld>
     <p:spTree>
@@ -14793,14 +16013,14 @@
           <p:nvPr>
             <p:extLst>
               <p:ext uri="{D42A27DB-BD31-4B8C-83A1-F6EECF244321}">
-                <p14:modId xmlns:p14="http://schemas.microsoft.com/office/powerpoint/2010/main" val="1334874910"/>
+                <p14:modId xmlns:p14="http://schemas.microsoft.com/office/powerpoint/2010/main" val="1414130534"/>
               </p:ext>
             </p:extLst>
           </p:nvPr>
         </p:nvGraphicFramePr>
         <p:xfrm>
           <a:off x="612536" y="2748599"/>
-          <a:ext cx="16775589" cy="11678601"/>
+          <a:ext cx="16775589" cy="12578487"/>
         </p:xfrm>
         <a:graphic>
           <a:graphicData uri="http://schemas.openxmlformats.org/drawingml/2006/diagram">
@@ -14821,7 +16041,7 @@
 </p:sld>
 </file>
 
-<file path=ppt/slides/slide6.xml><?xml version="1.0" encoding="utf-8"?>
+<file path=ppt/slides/slide7.xml><?xml version="1.0" encoding="utf-8"?>
 <p:sld xmlns:a="http://schemas.openxmlformats.org/drawingml/2006/main" xmlns:r="http://schemas.openxmlformats.org/officeDocument/2006/relationships" xmlns:p="http://schemas.openxmlformats.org/presentationml/2006/main">
   <p:cSld>
     <p:spTree>
@@ -15729,7 +16949,7 @@
         </p:nvCxnSpPr>
         <p:spPr>
           <a:xfrm>
-            <a:off x="7371381" y="10316492"/>
+            <a:off x="7371381" y="10251179"/>
             <a:ext cx="0" cy="1310589"/>
           </a:xfrm>
           <a:prstGeom prst="straightConnector1">
@@ -15770,7 +16990,7 @@
         </p:nvCxnSpPr>
         <p:spPr>
           <a:xfrm>
-            <a:off x="2891186" y="13207680"/>
+            <a:off x="2891186" y="13142367"/>
             <a:ext cx="0" cy="550214"/>
           </a:xfrm>
           <a:prstGeom prst="straightConnector1">
@@ -15850,7 +17070,7 @@
         </p:nvSpPr>
         <p:spPr>
           <a:xfrm>
-            <a:off x="11198925" y="6084535"/>
+            <a:off x="11503719" y="6084535"/>
             <a:ext cx="3904789" cy="846667"/>
           </a:xfrm>
           <a:prstGeom prst="flowChartAlternateProcess">
@@ -16441,9 +17661,9 @@
           <p:nvPr/>
         </p:nvCxnSpPr>
         <p:spPr>
-          <a:xfrm rot="16200000">
-            <a:off x="10973862" y="6266682"/>
-            <a:ext cx="0" cy="518030"/>
+          <a:xfrm>
+            <a:off x="10758389" y="6525697"/>
+            <a:ext cx="636475" cy="0"/>
           </a:xfrm>
           <a:prstGeom prst="straightConnector1">
             <a:avLst/>
@@ -16484,7 +17704,7 @@
         <p:spPr>
           <a:xfrm>
             <a:off x="13492023" y="9897480"/>
-            <a:ext cx="1064600" cy="14338"/>
+            <a:ext cx="933104" cy="0"/>
           </a:xfrm>
           <a:prstGeom prst="straightConnector1">
             <a:avLst/>
@@ -16606,7 +17826,7 @@
         </p:nvCxnSpPr>
         <p:spPr>
           <a:xfrm flipH="1">
-            <a:off x="4277936" y="10316492"/>
+            <a:off x="4277936" y="10251179"/>
             <a:ext cx="194" cy="1973601"/>
           </a:xfrm>
           <a:prstGeom prst="straightConnector1">
@@ -16642,13 +17862,12 @@
           </p:cNvPr>
           <p:cNvCxnSpPr>
             <a:cxnSpLocks/>
-            <a:endCxn id="13" idx="0"/>
           </p:cNvCxnSpPr>
           <p:nvPr/>
         </p:nvCxnSpPr>
         <p:spPr>
           <a:xfrm>
-            <a:off x="8908178" y="10240514"/>
+            <a:off x="8886407" y="10218743"/>
             <a:ext cx="3261614" cy="2010640"/>
           </a:xfrm>
           <a:prstGeom prst="straightConnector1">
@@ -16689,7 +17908,7 @@
         </p:nvCxnSpPr>
         <p:spPr>
           <a:xfrm>
-            <a:off x="7390042" y="12574706"/>
+            <a:off x="7390042" y="12487622"/>
             <a:ext cx="0" cy="1093607"/>
           </a:xfrm>
           <a:prstGeom prst="straightConnector1">
@@ -16763,7 +17982,7 @@
 </p:sld>
 </file>
 
-<file path=ppt/slides/slide7.xml><?xml version="1.0" encoding="utf-8"?>
+<file path=ppt/slides/slide8.xml><?xml version="1.0" encoding="utf-8"?>
 <p:sld xmlns:a="http://schemas.openxmlformats.org/drawingml/2006/main" xmlns:r="http://schemas.openxmlformats.org/officeDocument/2006/relationships" xmlns:p="http://schemas.openxmlformats.org/presentationml/2006/main">
   <p:cSld>
     <p:spTree>

--- a/tasktide/docs/Diagrams/Diagrams.pptx
+++ b/tasktide/docs/Diagrams/Diagrams.pptx
@@ -2567,7 +2567,7 @@
       <dgm:spPr/>
     </dgm:pt>
     <dgm:pt modelId="{2147C4C3-E4ED-44EA-8A74-5AB07B9224C6}" type="pres">
-      <dgm:prSet presAssocID="{1550EBB1-3E8A-4444-A1CB-728671E739D9}" presName="childTextBox" presStyleLbl="fgAccFollowNode1" presStyleIdx="0" presStyleCnt="9" custLinFactNeighborX="-147" custLinFactNeighborY="6417">
+      <dgm:prSet presAssocID="{1550EBB1-3E8A-4444-A1CB-728671E739D9}" presName="childTextBox" presStyleLbl="fgAccFollowNode1" presStyleIdx="0" presStyleCnt="9" custLinFactNeighborX="-536" custLinFactNeighborY="4503">
         <dgm:presLayoutVars>
           <dgm:bulletEnabled val="1"/>
         </dgm:presLayoutVars>
@@ -2575,7 +2575,7 @@
       <dgm:spPr/>
     </dgm:pt>
     <dgm:pt modelId="{EF0D8E2E-611F-48CE-B1FC-FF5FEBAA646D}" type="pres">
-      <dgm:prSet presAssocID="{F87B134D-0DC2-4772-90D6-BABD7BD5BC76}" presName="childTextBox" presStyleLbl="fgAccFollowNode1" presStyleIdx="1" presStyleCnt="9" custLinFactNeighborX="-364" custLinFactNeighborY="6417">
+      <dgm:prSet presAssocID="{F87B134D-0DC2-4772-90D6-BABD7BD5BC76}" presName="childTextBox" presStyleLbl="fgAccFollowNode1" presStyleIdx="1" presStyleCnt="9" custLinFactNeighborX="-364" custLinFactNeighborY="6026">
         <dgm:presLayoutVars>
           <dgm:bulletEnabled val="1"/>
         </dgm:presLayoutVars>
@@ -2583,7 +2583,7 @@
       <dgm:spPr/>
     </dgm:pt>
     <dgm:pt modelId="{A26E17A3-6ADC-4207-BAA9-6F37A7025026}" type="pres">
-      <dgm:prSet presAssocID="{A68E66D0-FC3E-4696-AEE9-FA917CE8B43F}" presName="childTextBox" presStyleLbl="fgAccFollowNode1" presStyleIdx="2" presStyleCnt="9" custLinFactNeighborY="6026">
+      <dgm:prSet presAssocID="{A68E66D0-FC3E-4696-AEE9-FA917CE8B43F}" presName="childTextBox" presStyleLbl="fgAccFollowNode1" presStyleIdx="2" presStyleCnt="9" custLinFactNeighborX="0" custLinFactNeighborY="4503">
         <dgm:presLayoutVars>
           <dgm:bulletEnabled val="1"/>
         </dgm:presLayoutVars>
@@ -2627,7 +2627,7 @@
       <dgm:spPr/>
     </dgm:pt>
     <dgm:pt modelId="{6A9F14BE-80C0-4B02-B21C-6C233AACAF51}" type="pres">
-      <dgm:prSet presAssocID="{28E7254B-914D-454C-9420-190BF7BC8B3F}" presName="childTextArrow" presStyleLbl="fgAccFollowNode1" presStyleIdx="5" presStyleCnt="9" custLinFactNeighborX="455" custLinFactNeighborY="1914">
+      <dgm:prSet presAssocID="{28E7254B-914D-454C-9420-190BF7BC8B3F}" presName="childTextArrow" presStyleLbl="fgAccFollowNode1" presStyleIdx="5" presStyleCnt="9" custLinFactNeighborX="147" custLinFactNeighborY="1914">
         <dgm:presLayoutVars>
           <dgm:bulletEnabled val="1"/>
         </dgm:presLayoutVars>
@@ -2655,7 +2655,7 @@
       <dgm:spPr/>
     </dgm:pt>
     <dgm:pt modelId="{07763EBB-4274-4F86-A670-BA07EE7CCAD5}" type="pres">
-      <dgm:prSet presAssocID="{C9D27329-5219-4575-8C28-F198FA7C7E21}" presName="childTextArrow" presStyleLbl="fgAccFollowNode1" presStyleIdx="6" presStyleCnt="9" custLinFactNeighborX="-82">
+      <dgm:prSet presAssocID="{C9D27329-5219-4575-8C28-F198FA7C7E21}" presName="childTextArrow" presStyleLbl="fgAccFollowNode1" presStyleIdx="6" presStyleCnt="9" custLinFactNeighborX="-82" custLinFactNeighborY="1523">
         <dgm:presLayoutVars>
           <dgm:bulletEnabled val="1"/>
         </dgm:presLayoutVars>
@@ -2663,7 +2663,7 @@
       <dgm:spPr/>
     </dgm:pt>
     <dgm:pt modelId="{A5384461-3C55-409F-A76C-DC6C5CADCFE8}" type="pres">
-      <dgm:prSet presAssocID="{0E7A854B-37EA-407C-A97F-3A739191418A}" presName="childTextArrow" presStyleLbl="fgAccFollowNode1" presStyleIdx="7" presStyleCnt="9">
+      <dgm:prSet presAssocID="{0E7A854B-37EA-407C-A97F-3A739191418A}" presName="childTextArrow" presStyleLbl="fgAccFollowNode1" presStyleIdx="7" presStyleCnt="9" custLinFactNeighborY="1523">
         <dgm:presLayoutVars>
           <dgm:bulletEnabled val="1"/>
         </dgm:presLayoutVars>
@@ -2671,7 +2671,7 @@
       <dgm:spPr/>
     </dgm:pt>
     <dgm:pt modelId="{1CEB22B1-9A7E-4A91-AF0C-26B893E69FA6}" type="pres">
-      <dgm:prSet presAssocID="{51E22944-1523-458B-8828-B060A21B0734}" presName="childTextArrow" presStyleLbl="fgAccFollowNode1" presStyleIdx="8" presStyleCnt="9" custLinFactNeighborX="390">
+      <dgm:prSet presAssocID="{51E22944-1523-458B-8828-B060A21B0734}" presName="childTextArrow" presStyleLbl="fgAccFollowNode1" presStyleIdx="8" presStyleCnt="9" custLinFactNeighborX="147" custLinFactNeighborY="1523">
         <dgm:presLayoutVars>
           <dgm:bulletEnabled val="1"/>
         </dgm:presLayoutVars>
@@ -3324,7 +3324,7 @@
       </dsp:nvSpPr>
       <dsp:spPr>
         <a:xfrm>
-          <a:off x="0" y="11148912"/>
+          <a:off x="0" y="11148907"/>
           <a:ext cx="5586402" cy="1429574"/>
         </a:xfrm>
         <a:prstGeom prst="rect">
@@ -3393,7 +3393,7 @@
         </a:p>
       </dsp:txBody>
       <dsp:txXfrm>
-        <a:off x="0" y="11148912"/>
+        <a:off x="0" y="11148907"/>
         <a:ext cx="5586402" cy="1429574"/>
       </dsp:txXfrm>
     </dsp:sp>
@@ -3484,7 +3484,7 @@
       </dsp:nvSpPr>
       <dsp:spPr>
         <a:xfrm>
-          <a:off x="11180995" y="11148912"/>
+          <a:off x="11180995" y="11148907"/>
           <a:ext cx="5586402" cy="1429574"/>
         </a:xfrm>
         <a:prstGeom prst="rect">
@@ -3553,7 +3553,7 @@
         </a:p>
       </dsp:txBody>
       <dsp:txXfrm>
-        <a:off x="11180995" y="11148912"/>
+        <a:off x="11180995" y="11148907"/>
         <a:ext cx="5586402" cy="1429574"/>
       </dsp:txXfrm>
     </dsp:sp>
@@ -4022,7 +4022,7 @@
       </dsp:nvSpPr>
       <dsp:spPr>
         <a:xfrm>
-          <a:off x="3610" y="1679916"/>
+          <a:off x="3610" y="1701681"/>
           <a:ext cx="5586402" cy="1429145"/>
         </a:xfrm>
         <a:prstGeom prst="rect">
@@ -4091,7 +4091,7 @@
         </a:p>
       </dsp:txBody>
       <dsp:txXfrm>
-        <a:off x="3610" y="1679916"/>
+        <a:off x="3610" y="1701681"/>
         <a:ext cx="5586402" cy="1429145"/>
       </dsp:txXfrm>
     </dsp:sp>
@@ -4102,7 +4102,7 @@
       </dsp:nvSpPr>
       <dsp:spPr>
         <a:xfrm>
-          <a:off x="5594593" y="1679916"/>
+          <a:off x="5594593" y="1701681"/>
           <a:ext cx="5586402" cy="1429145"/>
         </a:xfrm>
         <a:prstGeom prst="rect">
@@ -4171,7 +4171,7 @@
         </a:p>
       </dsp:txBody>
       <dsp:txXfrm>
-        <a:off x="5594593" y="1679916"/>
+        <a:off x="5594593" y="1701681"/>
         <a:ext cx="5586402" cy="1429145"/>
       </dsp:txXfrm>
     </dsp:sp>
@@ -4182,7 +4182,7 @@
       </dsp:nvSpPr>
       <dsp:spPr>
         <a:xfrm>
-          <a:off x="11189186" y="1679916"/>
+          <a:off x="11189186" y="1701681"/>
           <a:ext cx="5586402" cy="1429145"/>
         </a:xfrm>
         <a:prstGeom prst="rect">
@@ -4251,7 +4251,7 @@
         </a:p>
       </dsp:txBody>
       <dsp:txXfrm>
-        <a:off x="11189186" y="1679916"/>
+        <a:off x="11189186" y="1701681"/>
         <a:ext cx="5586402" cy="1429145"/>
       </dsp:txXfrm>
     </dsp:sp>
@@ -9053,7 +9053,7 @@
           <a:p>
             <a:fld id="{79C0705B-4870-4470-A32F-307AEE1697AB}" type="datetimeFigureOut">
               <a:rPr lang="en-IE" smtClean="0"/>
-              <a:t>13/11/2025</a:t>
+              <a:t>14/11/2025</a:t>
             </a:fld>
             <a:endParaRPr lang="en-IE"/>
           </a:p>
@@ -9223,7 +9223,7 @@
           <a:p>
             <a:fld id="{79C0705B-4870-4470-A32F-307AEE1697AB}" type="datetimeFigureOut">
               <a:rPr lang="en-IE" smtClean="0"/>
-              <a:t>13/11/2025</a:t>
+              <a:t>14/11/2025</a:t>
             </a:fld>
             <a:endParaRPr lang="en-IE"/>
           </a:p>
@@ -9403,7 +9403,7 @@
           <a:p>
             <a:fld id="{79C0705B-4870-4470-A32F-307AEE1697AB}" type="datetimeFigureOut">
               <a:rPr lang="en-IE" smtClean="0"/>
-              <a:t>13/11/2025</a:t>
+              <a:t>14/11/2025</a:t>
             </a:fld>
             <a:endParaRPr lang="en-IE"/>
           </a:p>
@@ -9573,7 +9573,7 @@
           <a:p>
             <a:fld id="{79C0705B-4870-4470-A32F-307AEE1697AB}" type="datetimeFigureOut">
               <a:rPr lang="en-IE" smtClean="0"/>
-              <a:t>13/11/2025</a:t>
+              <a:t>14/11/2025</a:t>
             </a:fld>
             <a:endParaRPr lang="en-IE"/>
           </a:p>
@@ -9819,7 +9819,7 @@
           <a:p>
             <a:fld id="{79C0705B-4870-4470-A32F-307AEE1697AB}" type="datetimeFigureOut">
               <a:rPr lang="en-IE" smtClean="0"/>
-              <a:t>13/11/2025</a:t>
+              <a:t>14/11/2025</a:t>
             </a:fld>
             <a:endParaRPr lang="en-IE"/>
           </a:p>
@@ -10051,7 +10051,7 @@
           <a:p>
             <a:fld id="{79C0705B-4870-4470-A32F-307AEE1697AB}" type="datetimeFigureOut">
               <a:rPr lang="en-IE" smtClean="0"/>
-              <a:t>13/11/2025</a:t>
+              <a:t>14/11/2025</a:t>
             </a:fld>
             <a:endParaRPr lang="en-IE"/>
           </a:p>
@@ -10418,7 +10418,7 @@
           <a:p>
             <a:fld id="{79C0705B-4870-4470-A32F-307AEE1697AB}" type="datetimeFigureOut">
               <a:rPr lang="en-IE" smtClean="0"/>
-              <a:t>13/11/2025</a:t>
+              <a:t>14/11/2025</a:t>
             </a:fld>
             <a:endParaRPr lang="en-IE"/>
           </a:p>
@@ -10536,7 +10536,7 @@
           <a:p>
             <a:fld id="{79C0705B-4870-4470-A32F-307AEE1697AB}" type="datetimeFigureOut">
               <a:rPr lang="en-IE" smtClean="0"/>
-              <a:t>13/11/2025</a:t>
+              <a:t>14/11/2025</a:t>
             </a:fld>
             <a:endParaRPr lang="en-IE"/>
           </a:p>
@@ -10631,7 +10631,7 @@
           <a:p>
             <a:fld id="{79C0705B-4870-4470-A32F-307AEE1697AB}" type="datetimeFigureOut">
               <a:rPr lang="en-IE" smtClean="0"/>
-              <a:t>13/11/2025</a:t>
+              <a:t>14/11/2025</a:t>
             </a:fld>
             <a:endParaRPr lang="en-IE"/>
           </a:p>
@@ -10908,7 +10908,7 @@
           <a:p>
             <a:fld id="{79C0705B-4870-4470-A32F-307AEE1697AB}" type="datetimeFigureOut">
               <a:rPr lang="en-IE" smtClean="0"/>
-              <a:t>13/11/2025</a:t>
+              <a:t>14/11/2025</a:t>
             </a:fld>
             <a:endParaRPr lang="en-IE"/>
           </a:p>
@@ -11165,7 +11165,7 @@
           <a:p>
             <a:fld id="{79C0705B-4870-4470-A32F-307AEE1697AB}" type="datetimeFigureOut">
               <a:rPr lang="en-IE" smtClean="0"/>
-              <a:t>13/11/2025</a:t>
+              <a:t>14/11/2025</a:t>
             </a:fld>
             <a:endParaRPr lang="en-IE"/>
           </a:p>
@@ -11378,7 +11378,7 @@
           <a:p>
             <a:fld id="{79C0705B-4870-4470-A32F-307AEE1697AB}" type="datetimeFigureOut">
               <a:rPr lang="en-IE" smtClean="0"/>
-              <a:t>13/11/2025</a:t>
+              <a:t>14/11/2025</a:t>
             </a:fld>
             <a:endParaRPr lang="en-IE"/>
           </a:p>
@@ -11996,74 +11996,6 @@
           </p:txBody>
         </p:sp>
       </p:grpSp>
-      <p:sp>
-        <p:nvSpPr>
-          <p:cNvPr id="14" name="Cylinder 13">
-            <a:extLst>
-              <a:ext uri="{FF2B5EF4-FFF2-40B4-BE49-F238E27FC236}">
-                <a16:creationId xmlns:a16="http://schemas.microsoft.com/office/drawing/2014/main" id="{D0BBDB7D-B1CF-0BD7-3CC6-E05CC1245F0F}"/>
-              </a:ext>
-            </a:extLst>
-          </p:cNvPr>
-          <p:cNvSpPr/>
-          <p:nvPr/>
-        </p:nvSpPr>
-        <p:spPr>
-          <a:xfrm>
-            <a:off x="7482943" y="3894380"/>
-            <a:ext cx="2726479" cy="2646489"/>
-          </a:xfrm>
-          <a:prstGeom prst="can">
-            <a:avLst/>
-          </a:prstGeom>
-          <a:solidFill>
-            <a:srgbClr val="400020"/>
-          </a:solidFill>
-          <a:ln w="38100">
-            <a:solidFill>
-              <a:schemeClr val="tx1">
-                <a:lumMod val="65000"/>
-                <a:lumOff val="35000"/>
-              </a:schemeClr>
-            </a:solidFill>
-          </a:ln>
-          <a:effectLst>
-            <a:outerShdw blurRad="50800" dist="38100" algn="l" rotWithShape="0">
-              <a:prstClr val="black">
-                <a:alpha val="40000"/>
-              </a:prstClr>
-            </a:outerShdw>
-          </a:effectLst>
-        </p:spPr>
-        <p:style>
-          <a:lnRef idx="2">
-            <a:schemeClr val="accent1">
-              <a:shade val="15000"/>
-            </a:schemeClr>
-          </a:lnRef>
-          <a:fillRef idx="1">
-            <a:schemeClr val="accent1"/>
-          </a:fillRef>
-          <a:effectRef idx="0">
-            <a:schemeClr val="accent1"/>
-          </a:effectRef>
-          <a:fontRef idx="minor">
-            <a:schemeClr val="lt1"/>
-          </a:fontRef>
-        </p:style>
-        <p:txBody>
-          <a:bodyPr rtlCol="0" anchor="ctr"/>
-          <a:lstStyle/>
-          <a:p>
-            <a:pPr algn="ctr"/>
-            <a:r>
-              <a:rPr lang="en-IE" sz="3600" b="1" dirty="0"/>
-              <a:t>Database</a:t>
-            </a:r>
-            <a:endParaRPr lang="en-IE" sz="2800" b="1" dirty="0"/>
-          </a:p>
-        </p:txBody>
-      </p:sp>
       <p:sp>
         <p:nvSpPr>
           <p:cNvPr id="15" name="TextBox 14">
@@ -12813,6 +12745,82 @@
           </a:p>
         </p:txBody>
       </p:sp>
+      <p:pic>
+        <p:nvPicPr>
+          <p:cNvPr id="8" name="Graphic 7" descr="Database with solid fill">
+            <a:extLst>
+              <a:ext uri="{FF2B5EF4-FFF2-40B4-BE49-F238E27FC236}">
+                <a16:creationId xmlns:a16="http://schemas.microsoft.com/office/drawing/2014/main" id="{ED8D8A1C-43A2-F999-B330-E1B3A6D4568B}"/>
+              </a:ext>
+            </a:extLst>
+          </p:cNvPr>
+          <p:cNvPicPr>
+            <a:picLocks noChangeAspect="1"/>
+          </p:cNvPicPr>
+          <p:nvPr/>
+        </p:nvPicPr>
+        <p:blipFill>
+          <a:blip r:embed="rId6">
+            <a:extLst>
+              <a:ext uri="{96DAC541-7B7A-43D3-8B79-37D633B846F1}">
+                <asvg:svgBlip xmlns:asvg="http://schemas.microsoft.com/office/drawing/2016/SVG/main" r:embed="rId7"/>
+              </a:ext>
+            </a:extLst>
+          </a:blip>
+          <a:stretch>
+            <a:fillRect/>
+          </a:stretch>
+        </p:blipFill>
+        <p:spPr>
+          <a:xfrm>
+            <a:off x="6858873" y="3406574"/>
+            <a:ext cx="3893439" cy="3477750"/>
+          </a:xfrm>
+          <a:prstGeom prst="rect">
+            <a:avLst/>
+          </a:prstGeom>
+        </p:spPr>
+      </p:pic>
+      <p:sp>
+        <p:nvSpPr>
+          <p:cNvPr id="9" name="TextBox 8">
+            <a:extLst>
+              <a:ext uri="{FF2B5EF4-FFF2-40B4-BE49-F238E27FC236}">
+                <a16:creationId xmlns:a16="http://schemas.microsoft.com/office/drawing/2014/main" id="{357A4EB6-B6C0-EE2C-43D3-54A695091B52}"/>
+              </a:ext>
+            </a:extLst>
+          </p:cNvPr>
+          <p:cNvSpPr txBox="1"/>
+          <p:nvPr/>
+        </p:nvSpPr>
+        <p:spPr>
+          <a:xfrm>
+            <a:off x="7466555" y="6626837"/>
+            <a:ext cx="2766018" cy="646331"/>
+          </a:xfrm>
+          <a:prstGeom prst="rect">
+            <a:avLst/>
+          </a:prstGeom>
+          <a:noFill/>
+        </p:spPr>
+        <p:txBody>
+          <a:bodyPr wrap="square" rtlCol="0">
+            <a:spAutoFit/>
+          </a:bodyPr>
+          <a:lstStyle/>
+          <a:p>
+            <a:pPr algn="ctr"/>
+            <a:r>
+              <a:rPr lang="en-IE" sz="3600" b="1" dirty="0">
+                <a:solidFill>
+                  <a:srgbClr val="400020"/>
+                </a:solidFill>
+              </a:rPr>
+              <a:t>Database</a:t>
+            </a:r>
+          </a:p>
+        </p:txBody>
+      </p:sp>
     </p:spTree>
     <p:extLst>
       <p:ext uri="{BB962C8B-B14F-4D97-AF65-F5344CB8AC3E}">
@@ -13103,7 +13111,7 @@
                   <a:schemeClr val="bg1"/>
                 </a:solidFill>
               </a:rPr>
-              <a:t>, Kubernetes, Cloud)</a:t>
+              <a:t>, Kubernetes)</a:t>
             </a:r>
             <a:endParaRPr lang="en-IE" sz="4000" b="1" i="1" dirty="0">
               <a:solidFill>
@@ -14777,13 +14785,13 @@
           <p:nvPr>
             <p:extLst>
               <p:ext uri="{D42A27DB-BD31-4B8C-83A1-F6EECF244321}">
-                <p14:modId xmlns:p14="http://schemas.microsoft.com/office/powerpoint/2010/main" val="4160423314"/>
+                <p14:modId xmlns:p14="http://schemas.microsoft.com/office/powerpoint/2010/main" val="1281753465"/>
               </p:ext>
             </p:extLst>
           </p:nvPr>
         </p:nvGraphicFramePr>
         <p:xfrm>
-          <a:off x="-2316478" y="3993735"/>
+          <a:off x="-2229392" y="3993735"/>
           <a:ext cx="9834878" cy="9234585"/>
         </p:xfrm>
         <a:graphic>
@@ -14806,7 +14814,7 @@
         </p:nvCxnSpPr>
         <p:spPr>
           <a:xfrm>
-            <a:off x="5374640" y="2743200"/>
+            <a:off x="5418182" y="2743200"/>
             <a:ext cx="0" cy="11988800"/>
           </a:xfrm>
           <a:prstGeom prst="line">
@@ -15154,6 +15162,29 @@
           <a:prstGeom prst="roundRect">
             <a:avLst/>
           </a:prstGeom>
+          <a:gradFill>
+            <a:gsLst>
+              <a:gs pos="0">
+                <a:schemeClr val="accent1">
+                  <a:shade val="30000"/>
+                  <a:satMod val="115000"/>
+                </a:schemeClr>
+              </a:gs>
+              <a:gs pos="50000">
+                <a:schemeClr val="accent1">
+                  <a:shade val="67500"/>
+                  <a:satMod val="115000"/>
+                </a:schemeClr>
+              </a:gs>
+              <a:gs pos="100000">
+                <a:schemeClr val="accent1">
+                  <a:shade val="100000"/>
+                  <a:satMod val="115000"/>
+                </a:schemeClr>
+              </a:gs>
+            </a:gsLst>
+            <a:lin ang="5400000" scaled="1"/>
+          </a:gradFill>
           <a:ln w="38100">
             <a:solidFill>
               <a:schemeClr val="tx1"/>
@@ -15226,6 +15257,29 @@
           <a:prstGeom prst="roundRect">
             <a:avLst/>
           </a:prstGeom>
+          <a:gradFill>
+            <a:gsLst>
+              <a:gs pos="0">
+                <a:schemeClr val="accent1">
+                  <a:shade val="30000"/>
+                  <a:satMod val="115000"/>
+                </a:schemeClr>
+              </a:gs>
+              <a:gs pos="50000">
+                <a:schemeClr val="accent1">
+                  <a:shade val="67500"/>
+                  <a:satMod val="115000"/>
+                </a:schemeClr>
+              </a:gs>
+              <a:gs pos="100000">
+                <a:schemeClr val="accent1">
+                  <a:shade val="100000"/>
+                  <a:satMod val="115000"/>
+                </a:schemeClr>
+              </a:gs>
+            </a:gsLst>
+            <a:lin ang="5400000" scaled="1"/>
+          </a:gradFill>
           <a:ln w="38100">
             <a:solidFill>
               <a:schemeClr val="tx1"/>
@@ -15298,6 +15352,29 @@
           <a:prstGeom prst="roundRect">
             <a:avLst/>
           </a:prstGeom>
+          <a:gradFill>
+            <a:gsLst>
+              <a:gs pos="0">
+                <a:schemeClr val="accent1">
+                  <a:shade val="30000"/>
+                  <a:satMod val="115000"/>
+                </a:schemeClr>
+              </a:gs>
+              <a:gs pos="50000">
+                <a:schemeClr val="accent1">
+                  <a:shade val="67500"/>
+                  <a:satMod val="115000"/>
+                </a:schemeClr>
+              </a:gs>
+              <a:gs pos="100000">
+                <a:schemeClr val="accent1">
+                  <a:shade val="100000"/>
+                  <a:satMod val="115000"/>
+                </a:schemeClr>
+              </a:gs>
+            </a:gsLst>
+            <a:lin ang="5400000" scaled="1"/>
+          </a:gradFill>
           <a:ln w="38100">
             <a:solidFill>
               <a:schemeClr val="tx1"/>
@@ -15481,6 +15558,29 @@
           <a:prstGeom prst="roundRect">
             <a:avLst/>
           </a:prstGeom>
+          <a:gradFill>
+            <a:gsLst>
+              <a:gs pos="0">
+                <a:schemeClr val="accent1">
+                  <a:shade val="30000"/>
+                  <a:satMod val="115000"/>
+                </a:schemeClr>
+              </a:gs>
+              <a:gs pos="50000">
+                <a:schemeClr val="accent1">
+                  <a:shade val="67500"/>
+                  <a:satMod val="115000"/>
+                </a:schemeClr>
+              </a:gs>
+              <a:gs pos="100000">
+                <a:schemeClr val="accent1">
+                  <a:shade val="100000"/>
+                  <a:satMod val="115000"/>
+                </a:schemeClr>
+              </a:gs>
+            </a:gsLst>
+            <a:lin ang="5400000" scaled="1"/>
+          </a:gradFill>
           <a:ln w="38100">
             <a:solidFill>
               <a:schemeClr val="tx1"/>
@@ -15553,6 +15653,29 @@
           <a:prstGeom prst="roundRect">
             <a:avLst/>
           </a:prstGeom>
+          <a:gradFill>
+            <a:gsLst>
+              <a:gs pos="0">
+                <a:schemeClr val="accent1">
+                  <a:shade val="30000"/>
+                  <a:satMod val="115000"/>
+                </a:schemeClr>
+              </a:gs>
+              <a:gs pos="50000">
+                <a:schemeClr val="accent1">
+                  <a:shade val="67500"/>
+                  <a:satMod val="115000"/>
+                </a:schemeClr>
+              </a:gs>
+              <a:gs pos="100000">
+                <a:schemeClr val="accent1">
+                  <a:shade val="100000"/>
+                  <a:satMod val="115000"/>
+                </a:schemeClr>
+              </a:gs>
+            </a:gsLst>
+            <a:lin ang="5400000" scaled="1"/>
+          </a:gradFill>
           <a:ln w="38100">
             <a:solidFill>
               <a:schemeClr val="tx1"/>
@@ -15625,6 +15748,29 @@
           <a:prstGeom prst="roundRect">
             <a:avLst/>
           </a:prstGeom>
+          <a:gradFill>
+            <a:gsLst>
+              <a:gs pos="0">
+                <a:schemeClr val="accent1">
+                  <a:shade val="30000"/>
+                  <a:satMod val="115000"/>
+                </a:schemeClr>
+              </a:gs>
+              <a:gs pos="50000">
+                <a:schemeClr val="accent1">
+                  <a:shade val="67500"/>
+                  <a:satMod val="115000"/>
+                </a:schemeClr>
+              </a:gs>
+              <a:gs pos="100000">
+                <a:schemeClr val="accent1">
+                  <a:shade val="100000"/>
+                  <a:satMod val="115000"/>
+                </a:schemeClr>
+              </a:gs>
+            </a:gsLst>
+            <a:lin ang="5400000" scaled="1"/>
+          </a:gradFill>
           <a:ln w="38100">
             <a:solidFill>
               <a:schemeClr val="tx1"/>
@@ -16013,7 +16159,7 @@
           <p:nvPr>
             <p:extLst>
               <p:ext uri="{D42A27DB-BD31-4B8C-83A1-F6EECF244321}">
-                <p14:modId xmlns:p14="http://schemas.microsoft.com/office/powerpoint/2010/main" val="1414130534"/>
+                <p14:modId xmlns:p14="http://schemas.microsoft.com/office/powerpoint/2010/main" val="1521909535"/>
               </p:ext>
             </p:extLst>
           </p:nvPr>

--- a/tasktide/docs/Diagrams/Diagrams.pptx
+++ b/tasktide/docs/Diagrams/Diagrams.pptx
@@ -9055,7 +9055,7 @@
           <a:p>
             <a:fld id="{79C0705B-4870-4470-A32F-307AEE1697AB}" type="datetimeFigureOut">
               <a:rPr lang="en-IE" smtClean="0"/>
-              <a:t>19/11/2025</a:t>
+              <a:t>20/11/2025</a:t>
             </a:fld>
             <a:endParaRPr lang="en-IE"/>
           </a:p>
@@ -9225,7 +9225,7 @@
           <a:p>
             <a:fld id="{79C0705B-4870-4470-A32F-307AEE1697AB}" type="datetimeFigureOut">
               <a:rPr lang="en-IE" smtClean="0"/>
-              <a:t>19/11/2025</a:t>
+              <a:t>20/11/2025</a:t>
             </a:fld>
             <a:endParaRPr lang="en-IE"/>
           </a:p>
@@ -9405,7 +9405,7 @@
           <a:p>
             <a:fld id="{79C0705B-4870-4470-A32F-307AEE1697AB}" type="datetimeFigureOut">
               <a:rPr lang="en-IE" smtClean="0"/>
-              <a:t>19/11/2025</a:t>
+              <a:t>20/11/2025</a:t>
             </a:fld>
             <a:endParaRPr lang="en-IE"/>
           </a:p>
@@ -9575,7 +9575,7 @@
           <a:p>
             <a:fld id="{79C0705B-4870-4470-A32F-307AEE1697AB}" type="datetimeFigureOut">
               <a:rPr lang="en-IE" smtClean="0"/>
-              <a:t>19/11/2025</a:t>
+              <a:t>20/11/2025</a:t>
             </a:fld>
             <a:endParaRPr lang="en-IE"/>
           </a:p>
@@ -9821,7 +9821,7 @@
           <a:p>
             <a:fld id="{79C0705B-4870-4470-A32F-307AEE1697AB}" type="datetimeFigureOut">
               <a:rPr lang="en-IE" smtClean="0"/>
-              <a:t>19/11/2025</a:t>
+              <a:t>20/11/2025</a:t>
             </a:fld>
             <a:endParaRPr lang="en-IE"/>
           </a:p>
@@ -10053,7 +10053,7 @@
           <a:p>
             <a:fld id="{79C0705B-4870-4470-A32F-307AEE1697AB}" type="datetimeFigureOut">
               <a:rPr lang="en-IE" smtClean="0"/>
-              <a:t>19/11/2025</a:t>
+              <a:t>20/11/2025</a:t>
             </a:fld>
             <a:endParaRPr lang="en-IE"/>
           </a:p>
@@ -10420,7 +10420,7 @@
           <a:p>
             <a:fld id="{79C0705B-4870-4470-A32F-307AEE1697AB}" type="datetimeFigureOut">
               <a:rPr lang="en-IE" smtClean="0"/>
-              <a:t>19/11/2025</a:t>
+              <a:t>20/11/2025</a:t>
             </a:fld>
             <a:endParaRPr lang="en-IE"/>
           </a:p>
@@ -10538,7 +10538,7 @@
           <a:p>
             <a:fld id="{79C0705B-4870-4470-A32F-307AEE1697AB}" type="datetimeFigureOut">
               <a:rPr lang="en-IE" smtClean="0"/>
-              <a:t>19/11/2025</a:t>
+              <a:t>20/11/2025</a:t>
             </a:fld>
             <a:endParaRPr lang="en-IE"/>
           </a:p>
@@ -10633,7 +10633,7 @@
           <a:p>
             <a:fld id="{79C0705B-4870-4470-A32F-307AEE1697AB}" type="datetimeFigureOut">
               <a:rPr lang="en-IE" smtClean="0"/>
-              <a:t>19/11/2025</a:t>
+              <a:t>20/11/2025</a:t>
             </a:fld>
             <a:endParaRPr lang="en-IE"/>
           </a:p>
@@ -10910,7 +10910,7 @@
           <a:p>
             <a:fld id="{79C0705B-4870-4470-A32F-307AEE1697AB}" type="datetimeFigureOut">
               <a:rPr lang="en-IE" smtClean="0"/>
-              <a:t>19/11/2025</a:t>
+              <a:t>20/11/2025</a:t>
             </a:fld>
             <a:endParaRPr lang="en-IE"/>
           </a:p>
@@ -11167,7 +11167,7 @@
           <a:p>
             <a:fld id="{79C0705B-4870-4470-A32F-307AEE1697AB}" type="datetimeFigureOut">
               <a:rPr lang="en-IE" smtClean="0"/>
-              <a:t>19/11/2025</a:t>
+              <a:t>20/11/2025</a:t>
             </a:fld>
             <a:endParaRPr lang="en-IE"/>
           </a:p>
@@ -11380,7 +11380,7 @@
           <a:p>
             <a:fld id="{79C0705B-4870-4470-A32F-307AEE1697AB}" type="datetimeFigureOut">
               <a:rPr lang="en-IE" smtClean="0"/>
-              <a:t>19/11/2025</a:t>
+              <a:t>20/11/2025</a:t>
             </a:fld>
             <a:endParaRPr lang="en-IE"/>
           </a:p>
@@ -15994,14 +15994,14 @@
           <p:nvPr>
             <p:extLst>
               <p:ext uri="{D42A27DB-BD31-4B8C-83A1-F6EECF244321}">
-                <p14:modId xmlns:p14="http://schemas.microsoft.com/office/powerpoint/2010/main" val="3138679781"/>
+                <p14:modId xmlns:p14="http://schemas.microsoft.com/office/powerpoint/2010/main" val="1064419877"/>
               </p:ext>
             </p:extLst>
           </p:nvPr>
         </p:nvGraphicFramePr>
         <p:xfrm>
-          <a:off x="124849" y="2472659"/>
-          <a:ext cx="29988439" cy="11015888"/>
+          <a:off x="124849" y="1863059"/>
+          <a:ext cx="29988439" cy="12157741"/>
         </p:xfrm>
         <a:graphic>
           <a:graphicData uri="http://schemas.openxmlformats.org/drawingml/2006/table">
@@ -16010,21 +16010,21 @@
                 <a:tableStyleId>{5C22544A-7EE6-4342-B048-85BDC9FD1C3A}</a:tableStyleId>
               </a:tblPr>
               <a:tblGrid>
-                <a:gridCol w="5860335">
+                <a:gridCol w="5666351">
                   <a:extLst>
                     <a:ext uri="{9D8B030D-6E8A-4147-A177-3AD203B41FA5}">
                       <a16:colId xmlns:a16="http://schemas.microsoft.com/office/drawing/2014/main" val="1828399440"/>
                     </a:ext>
                   </a:extLst>
                 </a:gridCol>
-                <a:gridCol w="7416990">
+                <a:gridCol w="7264400">
                   <a:extLst>
                     <a:ext uri="{9D8B030D-6E8A-4147-A177-3AD203B41FA5}">
                       <a16:colId xmlns:a16="http://schemas.microsoft.com/office/drawing/2014/main" val="2244831700"/>
                     </a:ext>
                   </a:extLst>
                 </a:gridCol>
-                <a:gridCol w="8126639">
+                <a:gridCol w="8473213">
                   <a:extLst>
                     <a:ext uri="{9D8B030D-6E8A-4147-A177-3AD203B41FA5}">
                       <a16:colId xmlns:a16="http://schemas.microsoft.com/office/drawing/2014/main" val="3426773098"/>
@@ -16151,7 +16151,7 @@
                   </a:ext>
                 </a:extLst>
               </a:tr>
-              <a:tr h="1595650">
+              <a:tr h="1980279">
                 <a:tc>
                   <a:txBody>
                     <a:bodyPr/>
@@ -16364,7 +16364,7 @@
                   </a:ext>
                 </a:extLst>
               </a:tr>
-              <a:tr h="2365588">
+              <a:tr h="2823029">
                 <a:tc>
                   <a:txBody>
                     <a:bodyPr/>
@@ -16424,14 +16424,14 @@
                       <a:pPr lvl="0" algn="ctr"/>
                       <a:r>
                         <a:rPr lang="en-IE" sz="3600" dirty="0"/>
-                        <a:t> Defines TaskTide data model,</a:t>
+                        <a:t> Defines data model,</a:t>
                       </a:r>
                     </a:p>
                     <a:p>
                       <a:pPr lvl="0" algn="ctr"/>
                       <a:r>
                         <a:rPr lang="en-IE" sz="3600" dirty="0"/>
-                        <a:t>and CRUD operations via the Manager Command interface</a:t>
+                        <a:t>and CRUD operations</a:t>
                       </a:r>
                     </a:p>
                   </a:txBody>
@@ -16482,7 +16482,7 @@
                       <a:pPr lvl="0" algn="ctr"/>
                       <a:r>
                         <a:rPr lang="en-IE" sz="3600" dirty="0"/>
-                        <a:t>Backend agnostic data model; Maps workflow &amp; execution contexts; SQL/NoSQL/File DB Support.</a:t>
+                        <a:t>Backend agnostic; Standardized data model; Custom data fields;          Workflow-Execution context mapping</a:t>
                       </a:r>
                     </a:p>
                   </a:txBody>
@@ -16533,7 +16533,7 @@
                       <a:pPr lvl="0" algn="ctr"/>
                       <a:r>
                         <a:rPr lang="en-IE" sz="3600" dirty="0"/>
-                        <a:t>Workflow reproducibility &amp; portability; Heterogenous deployment</a:t>
+                        <a:t>Workflow reproducibility &amp; portability; Flexible workflow introspection;          Heterogenous deployment</a:t>
                       </a:r>
                     </a:p>
                   </a:txBody>
@@ -16590,10 +16590,9 @@
                     <a:p>
                       <a:pPr algn="ctr"/>
                       <a:r>
-                        <a:rPr lang="en-IE" sz="5600" b="1"/>
+                        <a:rPr lang="en-IE" sz="5600" b="1" dirty="0"/>
                         <a:t>Engine Library</a:t>
                       </a:r>
-                      <a:endParaRPr lang="en-IE" sz="5600" b="1" dirty="0"/>
                     </a:p>
                   </a:txBody>
                   <a:tcPr anchor="ctr">
@@ -16701,7 +16700,7 @@
                       <a:pPr lvl="0" algn="ctr"/>
                       <a:r>
                         <a:rPr lang="en-IE" sz="3600" dirty="0"/>
-                        <a:t>Pilot-Job semantics; Multi-Level parallelism; Real-time introspection.</a:t>
+                        <a:t>Pilot-Job semantics; Multi-Level parallelism; Real-time monitoring.</a:t>
                       </a:r>
                     </a:p>
                   </a:txBody>
@@ -16801,7 +16800,7 @@
                   </a:ext>
                 </a:extLst>
               </a:tr>
-              <a:tr h="2388988">
+              <a:tr h="2688771">
                 <a:tc>
                   <a:txBody>
                     <a:bodyPr/>
@@ -16810,7 +16809,7 @@
                       <a:pPr algn="ctr"/>
                       <a:r>
                         <a:rPr lang="en-IE" sz="5600" b="1" dirty="0"/>
-                        <a:t>Client Application</a:t>
+                        <a:t>Client   Application</a:t>
                       </a:r>
                     </a:p>
                   </a:txBody>
@@ -16963,7 +16962,7 @@
                       <a:pPr lvl="0" algn="ctr"/>
                       <a:r>
                         <a:rPr lang="en-IE" sz="3600" dirty="0"/>
-                        <a:t>Low-friction adoption; Automation; Multi disciplinary application</a:t>
+                        <a:t>Low-friction adoption; Automation;      Multi disciplinary application</a:t>
                       </a:r>
                     </a:p>
                   </a:txBody>

--- a/tasktide/docs/Diagrams/Diagrams.pptx
+++ b/tasktide/docs/Diagrams/Diagrams.pptx
@@ -2,8 +2,11 @@
 <file path=ppt/presentation.xml><?xml version="1.0" encoding="utf-8"?>
 <p:presentation xmlns:a="http://schemas.openxmlformats.org/drawingml/2006/main" xmlns:r="http://schemas.openxmlformats.org/officeDocument/2006/relationships" xmlns:p="http://schemas.openxmlformats.org/presentationml/2006/main" saveSubsetFonts="1">
   <p:sldMasterIdLst>
-    <p:sldMasterId id="2147483768" r:id="rId1"/>
+    <p:sldMasterId id="2147483792" r:id="rId1"/>
   </p:sldMasterIdLst>
+  <p:notesMasterIdLst>
+    <p:notesMasterId r:id="rId13"/>
+  </p:notesMasterIdLst>
   <p:sldIdLst>
     <p:sldId id="264" r:id="rId2"/>
     <p:sldId id="262" r:id="rId3"/>
@@ -13,10 +16,11 @@
     <p:sldId id="261" r:id="rId7"/>
     <p:sldId id="265" r:id="rId8"/>
     <p:sldId id="263" r:id="rId9"/>
-    <p:sldId id="260" r:id="rId10"/>
-    <p:sldId id="258" r:id="rId11"/>
+    <p:sldId id="267" r:id="rId10"/>
+    <p:sldId id="260" r:id="rId11"/>
+    <p:sldId id="258" r:id="rId12"/>
   </p:sldIdLst>
-  <p:sldSz cx="30240288" cy="16200438"/>
+  <p:sldSz cx="30240288" cy="23399750"/>
   <p:notesSz cx="6858000" cy="9144000"/>
   <p:defaultTextStyle>
     <a:defPPr>
@@ -8924,6 +8928,461 @@
 </dgm:styleDef>
 </file>
 
+<file path=ppt/notesMasters/notesMaster1.xml><?xml version="1.0" encoding="utf-8"?>
+<p:notesMaster xmlns:a="http://schemas.openxmlformats.org/drawingml/2006/main" xmlns:r="http://schemas.openxmlformats.org/officeDocument/2006/relationships" xmlns:p="http://schemas.openxmlformats.org/presentationml/2006/main">
+  <p:cSld>
+    <p:bg>
+      <p:bgRef idx="1001">
+        <a:schemeClr val="bg1"/>
+      </p:bgRef>
+    </p:bg>
+    <p:spTree>
+      <p:nvGrpSpPr>
+        <p:cNvPr id="1" name=""/>
+        <p:cNvGrpSpPr/>
+        <p:nvPr/>
+      </p:nvGrpSpPr>
+      <p:grpSpPr>
+        <a:xfrm>
+          <a:off x="0" y="0"/>
+          <a:ext cx="0" cy="0"/>
+          <a:chOff x="0" y="0"/>
+          <a:chExt cx="0" cy="0"/>
+        </a:xfrm>
+      </p:grpSpPr>
+      <p:sp>
+        <p:nvSpPr>
+          <p:cNvPr id="2" name="Header Placeholder 1"/>
+          <p:cNvSpPr>
+            <a:spLocks noGrp="1"/>
+          </p:cNvSpPr>
+          <p:nvPr>
+            <p:ph type="hdr" sz="quarter"/>
+          </p:nvPr>
+        </p:nvSpPr>
+        <p:spPr>
+          <a:xfrm>
+            <a:off x="0" y="0"/>
+            <a:ext cx="2971800" cy="458788"/>
+          </a:xfrm>
+          <a:prstGeom prst="rect">
+            <a:avLst/>
+          </a:prstGeom>
+        </p:spPr>
+        <p:txBody>
+          <a:bodyPr vert="horz" lIns="91440" tIns="45720" rIns="91440" bIns="45720" rtlCol="0"/>
+          <a:lstStyle>
+            <a:lvl1pPr algn="l">
+              <a:defRPr sz="1200"/>
+            </a:lvl1pPr>
+          </a:lstStyle>
+          <a:p>
+            <a:endParaRPr lang="en-IE"/>
+          </a:p>
+        </p:txBody>
+      </p:sp>
+      <p:sp>
+        <p:nvSpPr>
+          <p:cNvPr id="3" name="Date Placeholder 2"/>
+          <p:cNvSpPr>
+            <a:spLocks noGrp="1"/>
+          </p:cNvSpPr>
+          <p:nvPr>
+            <p:ph type="dt" idx="1"/>
+          </p:nvPr>
+        </p:nvSpPr>
+        <p:spPr>
+          <a:xfrm>
+            <a:off x="3884613" y="0"/>
+            <a:ext cx="2971800" cy="458788"/>
+          </a:xfrm>
+          <a:prstGeom prst="rect">
+            <a:avLst/>
+          </a:prstGeom>
+        </p:spPr>
+        <p:txBody>
+          <a:bodyPr vert="horz" lIns="91440" tIns="45720" rIns="91440" bIns="45720" rtlCol="0"/>
+          <a:lstStyle>
+            <a:lvl1pPr algn="r">
+              <a:defRPr sz="1200"/>
+            </a:lvl1pPr>
+          </a:lstStyle>
+          <a:p>
+            <a:fld id="{CB18BCE7-0017-4B0C-A2FB-E6F7885367AC}" type="datetimeFigureOut">
+              <a:rPr lang="en-IE" smtClean="0"/>
+              <a:t>30/01/2026</a:t>
+            </a:fld>
+            <a:endParaRPr lang="en-IE"/>
+          </a:p>
+        </p:txBody>
+      </p:sp>
+      <p:sp>
+        <p:nvSpPr>
+          <p:cNvPr id="4" name="Slide Image Placeholder 3"/>
+          <p:cNvSpPr>
+            <a:spLocks noGrp="1" noRot="1" noChangeAspect="1"/>
+          </p:cNvSpPr>
+          <p:nvPr>
+            <p:ph type="sldImg" idx="2"/>
+          </p:nvPr>
+        </p:nvSpPr>
+        <p:spPr>
+          <a:xfrm>
+            <a:off x="1435100" y="1143000"/>
+            <a:ext cx="3987800" cy="3086100"/>
+          </a:xfrm>
+          <a:prstGeom prst="rect">
+            <a:avLst/>
+          </a:prstGeom>
+          <a:noFill/>
+          <a:ln w="12700">
+            <a:solidFill>
+              <a:prstClr val="black"/>
+            </a:solidFill>
+          </a:ln>
+        </p:spPr>
+        <p:txBody>
+          <a:bodyPr vert="horz" lIns="91440" tIns="45720" rIns="91440" bIns="45720" rtlCol="0" anchor="ctr"/>
+          <a:lstStyle/>
+          <a:p>
+            <a:endParaRPr lang="en-IE"/>
+          </a:p>
+        </p:txBody>
+      </p:sp>
+      <p:sp>
+        <p:nvSpPr>
+          <p:cNvPr id="5" name="Notes Placeholder 4"/>
+          <p:cNvSpPr>
+            <a:spLocks noGrp="1"/>
+          </p:cNvSpPr>
+          <p:nvPr>
+            <p:ph type="body" sz="quarter" idx="3"/>
+          </p:nvPr>
+        </p:nvSpPr>
+        <p:spPr>
+          <a:xfrm>
+            <a:off x="685800" y="4400550"/>
+            <a:ext cx="5486400" cy="3600450"/>
+          </a:xfrm>
+          <a:prstGeom prst="rect">
+            <a:avLst/>
+          </a:prstGeom>
+        </p:spPr>
+        <p:txBody>
+          <a:bodyPr vert="horz" lIns="91440" tIns="45720" rIns="91440" bIns="45720" rtlCol="0"/>
+          <a:lstStyle/>
+          <a:p>
+            <a:pPr lvl="0"/>
+            <a:r>
+              <a:rPr lang="en-US"/>
+              <a:t>Click to edit Master text styles</a:t>
+            </a:r>
+          </a:p>
+          <a:p>
+            <a:pPr lvl="1"/>
+            <a:r>
+              <a:rPr lang="en-US"/>
+              <a:t>Second level</a:t>
+            </a:r>
+          </a:p>
+          <a:p>
+            <a:pPr lvl="2"/>
+            <a:r>
+              <a:rPr lang="en-US"/>
+              <a:t>Third level</a:t>
+            </a:r>
+          </a:p>
+          <a:p>
+            <a:pPr lvl="3"/>
+            <a:r>
+              <a:rPr lang="en-US"/>
+              <a:t>Fourth level</a:t>
+            </a:r>
+          </a:p>
+          <a:p>
+            <a:pPr lvl="4"/>
+            <a:r>
+              <a:rPr lang="en-US"/>
+              <a:t>Fifth level</a:t>
+            </a:r>
+            <a:endParaRPr lang="en-IE"/>
+          </a:p>
+        </p:txBody>
+      </p:sp>
+      <p:sp>
+        <p:nvSpPr>
+          <p:cNvPr id="6" name="Footer Placeholder 5"/>
+          <p:cNvSpPr>
+            <a:spLocks noGrp="1"/>
+          </p:cNvSpPr>
+          <p:nvPr>
+            <p:ph type="ftr" sz="quarter" idx="4"/>
+          </p:nvPr>
+        </p:nvSpPr>
+        <p:spPr>
+          <a:xfrm>
+            <a:off x="0" y="8685213"/>
+            <a:ext cx="2971800" cy="458787"/>
+          </a:xfrm>
+          <a:prstGeom prst="rect">
+            <a:avLst/>
+          </a:prstGeom>
+        </p:spPr>
+        <p:txBody>
+          <a:bodyPr vert="horz" lIns="91440" tIns="45720" rIns="91440" bIns="45720" rtlCol="0" anchor="b"/>
+          <a:lstStyle>
+            <a:lvl1pPr algn="l">
+              <a:defRPr sz="1200"/>
+            </a:lvl1pPr>
+          </a:lstStyle>
+          <a:p>
+            <a:endParaRPr lang="en-IE"/>
+          </a:p>
+        </p:txBody>
+      </p:sp>
+      <p:sp>
+        <p:nvSpPr>
+          <p:cNvPr id="7" name="Slide Number Placeholder 6"/>
+          <p:cNvSpPr>
+            <a:spLocks noGrp="1"/>
+          </p:cNvSpPr>
+          <p:nvPr>
+            <p:ph type="sldNum" sz="quarter" idx="5"/>
+          </p:nvPr>
+        </p:nvSpPr>
+        <p:spPr>
+          <a:xfrm>
+            <a:off x="3884613" y="8685213"/>
+            <a:ext cx="2971800" cy="458787"/>
+          </a:xfrm>
+          <a:prstGeom prst="rect">
+            <a:avLst/>
+          </a:prstGeom>
+        </p:spPr>
+        <p:txBody>
+          <a:bodyPr vert="horz" lIns="91440" tIns="45720" rIns="91440" bIns="45720" rtlCol="0" anchor="b"/>
+          <a:lstStyle>
+            <a:lvl1pPr algn="r">
+              <a:defRPr sz="1200"/>
+            </a:lvl1pPr>
+          </a:lstStyle>
+          <a:p>
+            <a:fld id="{CA4F6FBF-C1CE-4F54-B4F6-DD96A3A70649}" type="slidenum">
+              <a:rPr lang="en-IE" smtClean="0"/>
+              <a:t>‹#›</a:t>
+            </a:fld>
+            <a:endParaRPr lang="en-IE"/>
+          </a:p>
+        </p:txBody>
+      </p:sp>
+    </p:spTree>
+    <p:extLst>
+      <p:ext uri="{BB962C8B-B14F-4D97-AF65-F5344CB8AC3E}">
+        <p14:creationId xmlns:p14="http://schemas.microsoft.com/office/powerpoint/2010/main" val="2469364452"/>
+      </p:ext>
+    </p:extLst>
+  </p:cSld>
+  <p:clrMap bg1="lt1" tx1="dk1" bg2="lt2" tx2="dk2" accent1="accent1" accent2="accent2" accent3="accent3" accent4="accent4" accent5="accent5" accent6="accent6" hlink="hlink" folHlink="folHlink"/>
+  <p:notesStyle>
+    <a:lvl1pPr marL="0" algn="l" defTabSz="914400" rtl="0" eaLnBrk="1" latinLnBrk="0" hangingPunct="1">
+      <a:defRPr sz="1200" kern="1200">
+        <a:solidFill>
+          <a:schemeClr val="tx1"/>
+        </a:solidFill>
+        <a:latin typeface="+mn-lt"/>
+        <a:ea typeface="+mn-ea"/>
+        <a:cs typeface="+mn-cs"/>
+      </a:defRPr>
+    </a:lvl1pPr>
+    <a:lvl2pPr marL="457200" algn="l" defTabSz="914400" rtl="0" eaLnBrk="1" latinLnBrk="0" hangingPunct="1">
+      <a:defRPr sz="1200" kern="1200">
+        <a:solidFill>
+          <a:schemeClr val="tx1"/>
+        </a:solidFill>
+        <a:latin typeface="+mn-lt"/>
+        <a:ea typeface="+mn-ea"/>
+        <a:cs typeface="+mn-cs"/>
+      </a:defRPr>
+    </a:lvl2pPr>
+    <a:lvl3pPr marL="914400" algn="l" defTabSz="914400" rtl="0" eaLnBrk="1" latinLnBrk="0" hangingPunct="1">
+      <a:defRPr sz="1200" kern="1200">
+        <a:solidFill>
+          <a:schemeClr val="tx1"/>
+        </a:solidFill>
+        <a:latin typeface="+mn-lt"/>
+        <a:ea typeface="+mn-ea"/>
+        <a:cs typeface="+mn-cs"/>
+      </a:defRPr>
+    </a:lvl3pPr>
+    <a:lvl4pPr marL="1371600" algn="l" defTabSz="914400" rtl="0" eaLnBrk="1" latinLnBrk="0" hangingPunct="1">
+      <a:defRPr sz="1200" kern="1200">
+        <a:solidFill>
+          <a:schemeClr val="tx1"/>
+        </a:solidFill>
+        <a:latin typeface="+mn-lt"/>
+        <a:ea typeface="+mn-ea"/>
+        <a:cs typeface="+mn-cs"/>
+      </a:defRPr>
+    </a:lvl4pPr>
+    <a:lvl5pPr marL="1828800" algn="l" defTabSz="914400" rtl="0" eaLnBrk="1" latinLnBrk="0" hangingPunct="1">
+      <a:defRPr sz="1200" kern="1200">
+        <a:solidFill>
+          <a:schemeClr val="tx1"/>
+        </a:solidFill>
+        <a:latin typeface="+mn-lt"/>
+        <a:ea typeface="+mn-ea"/>
+        <a:cs typeface="+mn-cs"/>
+      </a:defRPr>
+    </a:lvl5pPr>
+    <a:lvl6pPr marL="2286000" algn="l" defTabSz="914400" rtl="0" eaLnBrk="1" latinLnBrk="0" hangingPunct="1">
+      <a:defRPr sz="1200" kern="1200">
+        <a:solidFill>
+          <a:schemeClr val="tx1"/>
+        </a:solidFill>
+        <a:latin typeface="+mn-lt"/>
+        <a:ea typeface="+mn-ea"/>
+        <a:cs typeface="+mn-cs"/>
+      </a:defRPr>
+    </a:lvl6pPr>
+    <a:lvl7pPr marL="2743200" algn="l" defTabSz="914400" rtl="0" eaLnBrk="1" latinLnBrk="0" hangingPunct="1">
+      <a:defRPr sz="1200" kern="1200">
+        <a:solidFill>
+          <a:schemeClr val="tx1"/>
+        </a:solidFill>
+        <a:latin typeface="+mn-lt"/>
+        <a:ea typeface="+mn-ea"/>
+        <a:cs typeface="+mn-cs"/>
+      </a:defRPr>
+    </a:lvl7pPr>
+    <a:lvl8pPr marL="3200400" algn="l" defTabSz="914400" rtl="0" eaLnBrk="1" latinLnBrk="0" hangingPunct="1">
+      <a:defRPr sz="1200" kern="1200">
+        <a:solidFill>
+          <a:schemeClr val="tx1"/>
+        </a:solidFill>
+        <a:latin typeface="+mn-lt"/>
+        <a:ea typeface="+mn-ea"/>
+        <a:cs typeface="+mn-cs"/>
+      </a:defRPr>
+    </a:lvl8pPr>
+    <a:lvl9pPr marL="3657600" algn="l" defTabSz="914400" rtl="0" eaLnBrk="1" latinLnBrk="0" hangingPunct="1">
+      <a:defRPr sz="1200" kern="1200">
+        <a:solidFill>
+          <a:schemeClr val="tx1"/>
+        </a:solidFill>
+        <a:latin typeface="+mn-lt"/>
+        <a:ea typeface="+mn-ea"/>
+        <a:cs typeface="+mn-cs"/>
+      </a:defRPr>
+    </a:lvl9pPr>
+  </p:notesStyle>
+</p:notesMaster>
+</file>
+
+<file path=ppt/notesSlides/notesSlide1.xml><?xml version="1.0" encoding="utf-8"?>
+<p:notes xmlns:a="http://schemas.openxmlformats.org/drawingml/2006/main" xmlns:r="http://schemas.openxmlformats.org/officeDocument/2006/relationships" xmlns:p="http://schemas.openxmlformats.org/presentationml/2006/main">
+  <p:cSld>
+    <p:spTree>
+      <p:nvGrpSpPr>
+        <p:cNvPr id="1" name=""/>
+        <p:cNvGrpSpPr/>
+        <p:nvPr/>
+      </p:nvGrpSpPr>
+      <p:grpSpPr>
+        <a:xfrm>
+          <a:off x="0" y="0"/>
+          <a:ext cx="0" cy="0"/>
+          <a:chOff x="0" y="0"/>
+          <a:chExt cx="0" cy="0"/>
+        </a:xfrm>
+      </p:grpSpPr>
+      <p:sp>
+        <p:nvSpPr>
+          <p:cNvPr id="2" name="Slide Image Placeholder 1"/>
+          <p:cNvSpPr>
+            <a:spLocks noGrp="1" noRot="1" noChangeAspect="1"/>
+          </p:cNvSpPr>
+          <p:nvPr>
+            <p:ph type="sldImg"/>
+          </p:nvPr>
+        </p:nvSpPr>
+        <p:spPr>
+          <a:xfrm>
+            <a:off x="1435100" y="1143000"/>
+            <a:ext cx="3987800" cy="3086100"/>
+          </a:xfrm>
+        </p:spPr>
+        <p:txBody>
+          <a:bodyPr/>
+          <a:lstStyle/>
+          <a:p>
+            <a:endParaRPr lang="en-IE"/>
+          </a:p>
+        </p:txBody>
+      </p:sp>
+      <p:sp>
+        <p:nvSpPr>
+          <p:cNvPr id="3" name="Notes Placeholder 2"/>
+          <p:cNvSpPr>
+            <a:spLocks noGrp="1"/>
+          </p:cNvSpPr>
+          <p:nvPr>
+            <p:ph type="body" idx="1"/>
+          </p:nvPr>
+        </p:nvSpPr>
+        <p:spPr/>
+        <p:txBody>
+          <a:bodyPr/>
+          <a:lstStyle/>
+          <a:p>
+            <a:r>
+              <a:rPr lang="en-IE" dirty="0"/>
+              <a:t>#e6eaed</a:t>
+            </a:r>
+          </a:p>
+          <a:p>
+            <a:r>
+              <a:rPr lang="en-IE" dirty="0"/>
+              <a:t>#cdd2d8</a:t>
+            </a:r>
+          </a:p>
+        </p:txBody>
+      </p:sp>
+      <p:sp>
+        <p:nvSpPr>
+          <p:cNvPr id="4" name="Slide Number Placeholder 3"/>
+          <p:cNvSpPr>
+            <a:spLocks noGrp="1"/>
+          </p:cNvSpPr>
+          <p:nvPr>
+            <p:ph type="sldNum" sz="quarter" idx="5"/>
+          </p:nvPr>
+        </p:nvSpPr>
+        <p:spPr/>
+        <p:txBody>
+          <a:bodyPr/>
+          <a:lstStyle/>
+          <a:p>
+            <a:fld id="{CA4F6FBF-C1CE-4F54-B4F6-DD96A3A70649}" type="slidenum">
+              <a:rPr lang="en-IE" smtClean="0"/>
+              <a:t>9</a:t>
+            </a:fld>
+            <a:endParaRPr lang="en-IE"/>
+          </a:p>
+        </p:txBody>
+      </p:sp>
+    </p:spTree>
+    <p:extLst>
+      <p:ext uri="{BB962C8B-B14F-4D97-AF65-F5344CB8AC3E}">
+        <p14:creationId xmlns:p14="http://schemas.microsoft.com/office/powerpoint/2010/main" val="1994012949"/>
+      </p:ext>
+    </p:extLst>
+  </p:cSld>
+  <p:clrMapOvr>
+    <a:masterClrMapping/>
+  </p:clrMapOvr>
+</p:notes>
+</file>
+
 <file path=ppt/slideLayouts/slideLayout1.xml><?xml version="1.0" encoding="utf-8"?>
 <p:sldLayout xmlns:a="http://schemas.openxmlformats.org/drawingml/2006/main" xmlns:r="http://schemas.openxmlformats.org/officeDocument/2006/relationships" xmlns:p="http://schemas.openxmlformats.org/presentationml/2006/main" type="title" preserve="1">
   <p:cSld name="Title Slide">
@@ -8953,15 +9412,15 @@
         </p:nvSpPr>
         <p:spPr>
           <a:xfrm>
-            <a:off x="3780036" y="2651323"/>
-            <a:ext cx="22680216" cy="5640152"/>
+            <a:off x="2268022" y="3829544"/>
+            <a:ext cx="25704245" cy="8146580"/>
           </a:xfrm>
         </p:spPr>
         <p:txBody>
           <a:bodyPr anchor="b"/>
           <a:lstStyle>
             <a:lvl1pPr algn="ctr">
-              <a:defRPr sz="14174"/>
+              <a:defRPr sz="19843"/>
             </a:lvl1pPr>
           </a:lstStyle>
           <a:p>
@@ -8985,8 +9444,8 @@
         </p:nvSpPr>
         <p:spPr>
           <a:xfrm>
-            <a:off x="3780036" y="8508981"/>
-            <a:ext cx="22680216" cy="3911355"/>
+            <a:off x="3780036" y="12290287"/>
+            <a:ext cx="22680216" cy="5649521"/>
           </a:xfrm>
         </p:spPr>
         <p:txBody>
@@ -8994,39 +9453,39 @@
           <a:lstStyle>
             <a:lvl1pPr marL="0" indent="0" algn="ctr">
               <a:buNone/>
-              <a:defRPr sz="5670"/>
+              <a:defRPr sz="7937"/>
             </a:lvl1pPr>
-            <a:lvl2pPr marL="1080044" indent="0" algn="ctr">
+            <a:lvl2pPr marL="1512006" indent="0" algn="ctr">
               <a:buNone/>
-              <a:defRPr sz="4725"/>
+              <a:defRPr sz="6614"/>
             </a:lvl2pPr>
-            <a:lvl3pPr marL="2160087" indent="0" algn="ctr">
+            <a:lvl3pPr marL="3024012" indent="0" algn="ctr">
               <a:buNone/>
-              <a:defRPr sz="4252"/>
+              <a:defRPr sz="5953"/>
             </a:lvl3pPr>
-            <a:lvl4pPr marL="3240131" indent="0" algn="ctr">
+            <a:lvl4pPr marL="4536018" indent="0" algn="ctr">
               <a:buNone/>
-              <a:defRPr sz="3780"/>
+              <a:defRPr sz="5291"/>
             </a:lvl4pPr>
-            <a:lvl5pPr marL="4320174" indent="0" algn="ctr">
+            <a:lvl5pPr marL="6048024" indent="0" algn="ctr">
               <a:buNone/>
-              <a:defRPr sz="3780"/>
+              <a:defRPr sz="5291"/>
             </a:lvl5pPr>
-            <a:lvl6pPr marL="5400218" indent="0" algn="ctr">
+            <a:lvl6pPr marL="7560031" indent="0" algn="ctr">
               <a:buNone/>
-              <a:defRPr sz="3780"/>
+              <a:defRPr sz="5291"/>
             </a:lvl6pPr>
-            <a:lvl7pPr marL="6480261" indent="0" algn="ctr">
+            <a:lvl7pPr marL="9072037" indent="0" algn="ctr">
               <a:buNone/>
-              <a:defRPr sz="3780"/>
+              <a:defRPr sz="5291"/>
             </a:lvl7pPr>
-            <a:lvl8pPr marL="7560305" indent="0" algn="ctr">
+            <a:lvl8pPr marL="10584043" indent="0" algn="ctr">
               <a:buNone/>
-              <a:defRPr sz="3780"/>
+              <a:defRPr sz="5291"/>
             </a:lvl8pPr>
-            <a:lvl9pPr marL="8640348" indent="0" algn="ctr">
+            <a:lvl9pPr marL="12096049" indent="0" algn="ctr">
               <a:buNone/>
-              <a:defRPr sz="3780"/>
+              <a:defRPr sz="5291"/>
             </a:lvl9pPr>
           </a:lstStyle>
           <a:p>
@@ -9055,7 +9514,7 @@
           <a:p>
             <a:fld id="{79C0705B-4870-4470-A32F-307AEE1697AB}" type="datetimeFigureOut">
               <a:rPr lang="en-IE" smtClean="0"/>
-              <a:t>20/11/2025</a:t>
+              <a:t>30/01/2026</a:t>
             </a:fld>
             <a:endParaRPr lang="en-IE"/>
           </a:p>
@@ -9106,7 +9565,7 @@
     </p:spTree>
     <p:extLst>
       <p:ext uri="{BB962C8B-B14F-4D97-AF65-F5344CB8AC3E}">
-        <p14:creationId xmlns:p14="http://schemas.microsoft.com/office/powerpoint/2010/main" val="3426889692"/>
+        <p14:creationId xmlns:p14="http://schemas.microsoft.com/office/powerpoint/2010/main" val="2431198491"/>
       </p:ext>
     </p:extLst>
   </p:cSld>
@@ -9225,7 +9684,7 @@
           <a:p>
             <a:fld id="{79C0705B-4870-4470-A32F-307AEE1697AB}" type="datetimeFigureOut">
               <a:rPr lang="en-IE" smtClean="0"/>
-              <a:t>20/11/2025</a:t>
+              <a:t>30/01/2026</a:t>
             </a:fld>
             <a:endParaRPr lang="en-IE"/>
           </a:p>
@@ -9276,7 +9735,7 @@
     </p:spTree>
     <p:extLst>
       <p:ext uri="{BB962C8B-B14F-4D97-AF65-F5344CB8AC3E}">
-        <p14:creationId xmlns:p14="http://schemas.microsoft.com/office/powerpoint/2010/main" val="3471210168"/>
+        <p14:creationId xmlns:p14="http://schemas.microsoft.com/office/powerpoint/2010/main" val="2033804883"/>
       </p:ext>
     </p:extLst>
   </p:cSld>
@@ -9315,8 +9774,8 @@
         </p:nvSpPr>
         <p:spPr>
           <a:xfrm>
-            <a:off x="21640706" y="862524"/>
-            <a:ext cx="6520562" cy="13729122"/>
+            <a:off x="21640708" y="1245820"/>
+            <a:ext cx="6520562" cy="19830207"/>
           </a:xfrm>
         </p:spPr>
         <p:txBody>
@@ -9343,8 +9802,8 @@
         </p:nvSpPr>
         <p:spPr>
           <a:xfrm>
-            <a:off x="2079020" y="862524"/>
-            <a:ext cx="19183683" cy="13729122"/>
+            <a:off x="2079021" y="1245820"/>
+            <a:ext cx="19183683" cy="19830207"/>
           </a:xfrm>
         </p:spPr>
         <p:txBody>
@@ -9405,7 +9864,7 @@
           <a:p>
             <a:fld id="{79C0705B-4870-4470-A32F-307AEE1697AB}" type="datetimeFigureOut">
               <a:rPr lang="en-IE" smtClean="0"/>
-              <a:t>20/11/2025</a:t>
+              <a:t>30/01/2026</a:t>
             </a:fld>
             <a:endParaRPr lang="en-IE"/>
           </a:p>
@@ -9456,7 +9915,7 @@
     </p:spTree>
     <p:extLst>
       <p:ext uri="{BB962C8B-B14F-4D97-AF65-F5344CB8AC3E}">
-        <p14:creationId xmlns:p14="http://schemas.microsoft.com/office/powerpoint/2010/main" val="2822365910"/>
+        <p14:creationId xmlns:p14="http://schemas.microsoft.com/office/powerpoint/2010/main" val="76672276"/>
       </p:ext>
     </p:extLst>
   </p:cSld>
@@ -9575,7 +10034,7 @@
           <a:p>
             <a:fld id="{79C0705B-4870-4470-A32F-307AEE1697AB}" type="datetimeFigureOut">
               <a:rPr lang="en-IE" smtClean="0"/>
-              <a:t>20/11/2025</a:t>
+              <a:t>30/01/2026</a:t>
             </a:fld>
             <a:endParaRPr lang="en-IE"/>
           </a:p>
@@ -9626,7 +10085,7 @@
     </p:spTree>
     <p:extLst>
       <p:ext uri="{BB962C8B-B14F-4D97-AF65-F5344CB8AC3E}">
-        <p14:creationId xmlns:p14="http://schemas.microsoft.com/office/powerpoint/2010/main" val="3231120234"/>
+        <p14:creationId xmlns:p14="http://schemas.microsoft.com/office/powerpoint/2010/main" val="525453984"/>
       </p:ext>
     </p:extLst>
   </p:cSld>
@@ -9665,15 +10124,15 @@
         </p:nvSpPr>
         <p:spPr>
           <a:xfrm>
-            <a:off x="2063270" y="4038862"/>
-            <a:ext cx="26082248" cy="6738931"/>
+            <a:off x="2063272" y="5833695"/>
+            <a:ext cx="26082248" cy="9733644"/>
           </a:xfrm>
         </p:spPr>
         <p:txBody>
           <a:bodyPr anchor="b"/>
           <a:lstStyle>
             <a:lvl1pPr>
-              <a:defRPr sz="14174"/>
+              <a:defRPr sz="19843"/>
             </a:lvl1pPr>
           </a:lstStyle>
           <a:p>
@@ -9697,8 +10156,8 @@
         </p:nvSpPr>
         <p:spPr>
           <a:xfrm>
-            <a:off x="2063270" y="10841545"/>
-            <a:ext cx="26082248" cy="3543845"/>
+            <a:off x="2063272" y="15659423"/>
+            <a:ext cx="26082248" cy="5118694"/>
           </a:xfrm>
         </p:spPr>
         <p:txBody>
@@ -9706,7 +10165,7 @@
           <a:lstStyle>
             <a:lvl1pPr marL="0" indent="0">
               <a:buNone/>
-              <a:defRPr sz="5670">
+              <a:defRPr sz="7937">
                 <a:solidFill>
                   <a:schemeClr val="tx1">
                     <a:tint val="82000"/>
@@ -9714,9 +10173,9 @@
                 </a:solidFill>
               </a:defRPr>
             </a:lvl1pPr>
-            <a:lvl2pPr marL="1080044" indent="0">
+            <a:lvl2pPr marL="1512006" indent="0">
               <a:buNone/>
-              <a:defRPr sz="4725">
+              <a:defRPr sz="6614">
                 <a:solidFill>
                   <a:schemeClr val="tx1">
                     <a:tint val="82000"/>
@@ -9724,9 +10183,9 @@
                 </a:solidFill>
               </a:defRPr>
             </a:lvl2pPr>
-            <a:lvl3pPr marL="2160087" indent="0">
+            <a:lvl3pPr marL="3024012" indent="0">
               <a:buNone/>
-              <a:defRPr sz="4252">
+              <a:defRPr sz="5953">
                 <a:solidFill>
                   <a:schemeClr val="tx1">
                     <a:tint val="82000"/>
@@ -9734,9 +10193,9 @@
                 </a:solidFill>
               </a:defRPr>
             </a:lvl3pPr>
-            <a:lvl4pPr marL="3240131" indent="0">
+            <a:lvl4pPr marL="4536018" indent="0">
               <a:buNone/>
-              <a:defRPr sz="3780">
+              <a:defRPr sz="5291">
                 <a:solidFill>
                   <a:schemeClr val="tx1">
                     <a:tint val="82000"/>
@@ -9744,9 +10203,9 @@
                 </a:solidFill>
               </a:defRPr>
             </a:lvl4pPr>
-            <a:lvl5pPr marL="4320174" indent="0">
+            <a:lvl5pPr marL="6048024" indent="0">
               <a:buNone/>
-              <a:defRPr sz="3780">
+              <a:defRPr sz="5291">
                 <a:solidFill>
                   <a:schemeClr val="tx1">
                     <a:tint val="82000"/>
@@ -9754,9 +10213,9 @@
                 </a:solidFill>
               </a:defRPr>
             </a:lvl5pPr>
-            <a:lvl6pPr marL="5400218" indent="0">
+            <a:lvl6pPr marL="7560031" indent="0">
               <a:buNone/>
-              <a:defRPr sz="3780">
+              <a:defRPr sz="5291">
                 <a:solidFill>
                   <a:schemeClr val="tx1">
                     <a:tint val="82000"/>
@@ -9764,9 +10223,9 @@
                 </a:solidFill>
               </a:defRPr>
             </a:lvl6pPr>
-            <a:lvl7pPr marL="6480261" indent="0">
+            <a:lvl7pPr marL="9072037" indent="0">
               <a:buNone/>
-              <a:defRPr sz="3780">
+              <a:defRPr sz="5291">
                 <a:solidFill>
                   <a:schemeClr val="tx1">
                     <a:tint val="82000"/>
@@ -9774,9 +10233,9 @@
                 </a:solidFill>
               </a:defRPr>
             </a:lvl7pPr>
-            <a:lvl8pPr marL="7560305" indent="0">
+            <a:lvl8pPr marL="10584043" indent="0">
               <a:buNone/>
-              <a:defRPr sz="3780">
+              <a:defRPr sz="5291">
                 <a:solidFill>
                   <a:schemeClr val="tx1">
                     <a:tint val="82000"/>
@@ -9784,9 +10243,9 @@
                 </a:solidFill>
               </a:defRPr>
             </a:lvl8pPr>
-            <a:lvl9pPr marL="8640348" indent="0">
+            <a:lvl9pPr marL="12096049" indent="0">
               <a:buNone/>
-              <a:defRPr sz="3780">
+              <a:defRPr sz="5291">
                 <a:solidFill>
                   <a:schemeClr val="tx1">
                     <a:tint val="82000"/>
@@ -9821,7 +10280,7 @@
           <a:p>
             <a:fld id="{79C0705B-4870-4470-A32F-307AEE1697AB}" type="datetimeFigureOut">
               <a:rPr lang="en-IE" smtClean="0"/>
-              <a:t>20/11/2025</a:t>
+              <a:t>30/01/2026</a:t>
             </a:fld>
             <a:endParaRPr lang="en-IE"/>
           </a:p>
@@ -9872,7 +10331,7 @@
     </p:spTree>
     <p:extLst>
       <p:ext uri="{BB962C8B-B14F-4D97-AF65-F5344CB8AC3E}">
-        <p14:creationId xmlns:p14="http://schemas.microsoft.com/office/powerpoint/2010/main" val="507492246"/>
+        <p14:creationId xmlns:p14="http://schemas.microsoft.com/office/powerpoint/2010/main" val="4163403327"/>
       </p:ext>
     </p:extLst>
   </p:cSld>
@@ -9934,8 +10393,8 @@
         </p:nvSpPr>
         <p:spPr>
           <a:xfrm>
-            <a:off x="2079020" y="4312617"/>
-            <a:ext cx="12852122" cy="10279029"/>
+            <a:off x="2079020" y="6229100"/>
+            <a:ext cx="12852122" cy="14846926"/>
           </a:xfrm>
         </p:spPr>
         <p:txBody>
@@ -9991,8 +10450,8 @@
         </p:nvSpPr>
         <p:spPr>
           <a:xfrm>
-            <a:off x="15309146" y="4312617"/>
-            <a:ext cx="12852122" cy="10279029"/>
+            <a:off x="15309146" y="6229100"/>
+            <a:ext cx="12852122" cy="14846926"/>
           </a:xfrm>
         </p:spPr>
         <p:txBody>
@@ -10053,7 +10512,7 @@
           <a:p>
             <a:fld id="{79C0705B-4870-4470-A32F-307AEE1697AB}" type="datetimeFigureOut">
               <a:rPr lang="en-IE" smtClean="0"/>
-              <a:t>20/11/2025</a:t>
+              <a:t>30/01/2026</a:t>
             </a:fld>
             <a:endParaRPr lang="en-IE"/>
           </a:p>
@@ -10104,7 +10563,7 @@
     </p:spTree>
     <p:extLst>
       <p:ext uri="{BB962C8B-B14F-4D97-AF65-F5344CB8AC3E}">
-        <p14:creationId xmlns:p14="http://schemas.microsoft.com/office/powerpoint/2010/main" val="3665584406"/>
+        <p14:creationId xmlns:p14="http://schemas.microsoft.com/office/powerpoint/2010/main" val="455347430"/>
       </p:ext>
     </p:extLst>
   </p:cSld>
@@ -10143,8 +10602,8 @@
         </p:nvSpPr>
         <p:spPr>
           <a:xfrm>
-            <a:off x="2082959" y="862524"/>
-            <a:ext cx="26082248" cy="3131336"/>
+            <a:off x="2082959" y="1245825"/>
+            <a:ext cx="26082248" cy="4522870"/>
           </a:xfrm>
         </p:spPr>
         <p:txBody>
@@ -10171,8 +10630,8 @@
         </p:nvSpPr>
         <p:spPr>
           <a:xfrm>
-            <a:off x="2082960" y="3971359"/>
-            <a:ext cx="12793058" cy="1946301"/>
+            <a:off x="2082962" y="5736191"/>
+            <a:ext cx="12793057" cy="2811218"/>
           </a:xfrm>
         </p:spPr>
         <p:txBody>
@@ -10180,39 +10639,39 @@
           <a:lstStyle>
             <a:lvl1pPr marL="0" indent="0">
               <a:buNone/>
-              <a:defRPr sz="5670" b="1"/>
+              <a:defRPr sz="7937" b="1"/>
             </a:lvl1pPr>
-            <a:lvl2pPr marL="1080044" indent="0">
+            <a:lvl2pPr marL="1512006" indent="0">
               <a:buNone/>
-              <a:defRPr sz="4725" b="1"/>
+              <a:defRPr sz="6614" b="1"/>
             </a:lvl2pPr>
-            <a:lvl3pPr marL="2160087" indent="0">
+            <a:lvl3pPr marL="3024012" indent="0">
               <a:buNone/>
-              <a:defRPr sz="4252" b="1"/>
+              <a:defRPr sz="5953" b="1"/>
             </a:lvl3pPr>
-            <a:lvl4pPr marL="3240131" indent="0">
+            <a:lvl4pPr marL="4536018" indent="0">
               <a:buNone/>
-              <a:defRPr sz="3780" b="1"/>
+              <a:defRPr sz="5291" b="1"/>
             </a:lvl4pPr>
-            <a:lvl5pPr marL="4320174" indent="0">
+            <a:lvl5pPr marL="6048024" indent="0">
               <a:buNone/>
-              <a:defRPr sz="3780" b="1"/>
+              <a:defRPr sz="5291" b="1"/>
             </a:lvl5pPr>
-            <a:lvl6pPr marL="5400218" indent="0">
+            <a:lvl6pPr marL="7560031" indent="0">
               <a:buNone/>
-              <a:defRPr sz="3780" b="1"/>
+              <a:defRPr sz="5291" b="1"/>
             </a:lvl6pPr>
-            <a:lvl7pPr marL="6480261" indent="0">
+            <a:lvl7pPr marL="9072037" indent="0">
               <a:buNone/>
-              <a:defRPr sz="3780" b="1"/>
+              <a:defRPr sz="5291" b="1"/>
             </a:lvl7pPr>
-            <a:lvl8pPr marL="7560305" indent="0">
+            <a:lvl8pPr marL="10584043" indent="0">
               <a:buNone/>
-              <a:defRPr sz="3780" b="1"/>
+              <a:defRPr sz="5291" b="1"/>
             </a:lvl8pPr>
-            <a:lvl9pPr marL="8640348" indent="0">
+            <a:lvl9pPr marL="12096049" indent="0">
               <a:buNone/>
-              <a:defRPr sz="3780" b="1"/>
+              <a:defRPr sz="5291" b="1"/>
             </a:lvl9pPr>
           </a:lstStyle>
           <a:p>
@@ -10236,8 +10695,8 @@
         </p:nvSpPr>
         <p:spPr>
           <a:xfrm>
-            <a:off x="2082960" y="5917660"/>
-            <a:ext cx="12793058" cy="8703987"/>
+            <a:off x="2082962" y="8547409"/>
+            <a:ext cx="12793057" cy="12571951"/>
           </a:xfrm>
         </p:spPr>
         <p:txBody>
@@ -10293,8 +10752,8 @@
         </p:nvSpPr>
         <p:spPr>
           <a:xfrm>
-            <a:off x="15309146" y="3971359"/>
-            <a:ext cx="12856061" cy="1946301"/>
+            <a:off x="15309148" y="5736191"/>
+            <a:ext cx="12856061" cy="2811218"/>
           </a:xfrm>
         </p:spPr>
         <p:txBody>
@@ -10302,39 +10761,39 @@
           <a:lstStyle>
             <a:lvl1pPr marL="0" indent="0">
               <a:buNone/>
-              <a:defRPr sz="5670" b="1"/>
+              <a:defRPr sz="7937" b="1"/>
             </a:lvl1pPr>
-            <a:lvl2pPr marL="1080044" indent="0">
+            <a:lvl2pPr marL="1512006" indent="0">
               <a:buNone/>
-              <a:defRPr sz="4725" b="1"/>
+              <a:defRPr sz="6614" b="1"/>
             </a:lvl2pPr>
-            <a:lvl3pPr marL="2160087" indent="0">
+            <a:lvl3pPr marL="3024012" indent="0">
               <a:buNone/>
-              <a:defRPr sz="4252" b="1"/>
+              <a:defRPr sz="5953" b="1"/>
             </a:lvl3pPr>
-            <a:lvl4pPr marL="3240131" indent="0">
+            <a:lvl4pPr marL="4536018" indent="0">
               <a:buNone/>
-              <a:defRPr sz="3780" b="1"/>
+              <a:defRPr sz="5291" b="1"/>
             </a:lvl4pPr>
-            <a:lvl5pPr marL="4320174" indent="0">
+            <a:lvl5pPr marL="6048024" indent="0">
               <a:buNone/>
-              <a:defRPr sz="3780" b="1"/>
+              <a:defRPr sz="5291" b="1"/>
             </a:lvl5pPr>
-            <a:lvl6pPr marL="5400218" indent="0">
+            <a:lvl6pPr marL="7560031" indent="0">
               <a:buNone/>
-              <a:defRPr sz="3780" b="1"/>
+              <a:defRPr sz="5291" b="1"/>
             </a:lvl6pPr>
-            <a:lvl7pPr marL="6480261" indent="0">
+            <a:lvl7pPr marL="9072037" indent="0">
               <a:buNone/>
-              <a:defRPr sz="3780" b="1"/>
+              <a:defRPr sz="5291" b="1"/>
             </a:lvl7pPr>
-            <a:lvl8pPr marL="7560305" indent="0">
+            <a:lvl8pPr marL="10584043" indent="0">
               <a:buNone/>
-              <a:defRPr sz="3780" b="1"/>
+              <a:defRPr sz="5291" b="1"/>
             </a:lvl8pPr>
-            <a:lvl9pPr marL="8640348" indent="0">
+            <a:lvl9pPr marL="12096049" indent="0">
               <a:buNone/>
-              <a:defRPr sz="3780" b="1"/>
+              <a:defRPr sz="5291" b="1"/>
             </a:lvl9pPr>
           </a:lstStyle>
           <a:p>
@@ -10358,8 +10817,8 @@
         </p:nvSpPr>
         <p:spPr>
           <a:xfrm>
-            <a:off x="15309146" y="5917660"/>
-            <a:ext cx="12856061" cy="8703987"/>
+            <a:off x="15309148" y="8547409"/>
+            <a:ext cx="12856061" cy="12571951"/>
           </a:xfrm>
         </p:spPr>
         <p:txBody>
@@ -10420,7 +10879,7 @@
           <a:p>
             <a:fld id="{79C0705B-4870-4470-A32F-307AEE1697AB}" type="datetimeFigureOut">
               <a:rPr lang="en-IE" smtClean="0"/>
-              <a:t>20/11/2025</a:t>
+              <a:t>30/01/2026</a:t>
             </a:fld>
             <a:endParaRPr lang="en-IE"/>
           </a:p>
@@ -10471,7 +10930,7 @@
     </p:spTree>
     <p:extLst>
       <p:ext uri="{BB962C8B-B14F-4D97-AF65-F5344CB8AC3E}">
-        <p14:creationId xmlns:p14="http://schemas.microsoft.com/office/powerpoint/2010/main" val="3114479972"/>
+        <p14:creationId xmlns:p14="http://schemas.microsoft.com/office/powerpoint/2010/main" val="489652630"/>
       </p:ext>
     </p:extLst>
   </p:cSld>
@@ -10538,7 +10997,7 @@
           <a:p>
             <a:fld id="{79C0705B-4870-4470-A32F-307AEE1697AB}" type="datetimeFigureOut">
               <a:rPr lang="en-IE" smtClean="0"/>
-              <a:t>20/11/2025</a:t>
+              <a:t>30/01/2026</a:t>
             </a:fld>
             <a:endParaRPr lang="en-IE"/>
           </a:p>
@@ -10589,7 +11048,7 @@
     </p:spTree>
     <p:extLst>
       <p:ext uri="{BB962C8B-B14F-4D97-AF65-F5344CB8AC3E}">
-        <p14:creationId xmlns:p14="http://schemas.microsoft.com/office/powerpoint/2010/main" val="3836411632"/>
+        <p14:creationId xmlns:p14="http://schemas.microsoft.com/office/powerpoint/2010/main" val="314400458"/>
       </p:ext>
     </p:extLst>
   </p:cSld>
@@ -10633,7 +11092,7 @@
           <a:p>
             <a:fld id="{79C0705B-4870-4470-A32F-307AEE1697AB}" type="datetimeFigureOut">
               <a:rPr lang="en-IE" smtClean="0"/>
-              <a:t>20/11/2025</a:t>
+              <a:t>30/01/2026</a:t>
             </a:fld>
             <a:endParaRPr lang="en-IE"/>
           </a:p>
@@ -10684,7 +11143,7 @@
     </p:spTree>
     <p:extLst>
       <p:ext uri="{BB962C8B-B14F-4D97-AF65-F5344CB8AC3E}">
-        <p14:creationId xmlns:p14="http://schemas.microsoft.com/office/powerpoint/2010/main" val="2727468015"/>
+        <p14:creationId xmlns:p14="http://schemas.microsoft.com/office/powerpoint/2010/main" val="2912556126"/>
       </p:ext>
     </p:extLst>
   </p:cSld>
@@ -10723,15 +11182,15 @@
         </p:nvSpPr>
         <p:spPr>
           <a:xfrm>
-            <a:off x="2082960" y="1080029"/>
-            <a:ext cx="9753279" cy="3780102"/>
+            <a:off x="2082959" y="1559983"/>
+            <a:ext cx="9753280" cy="5459942"/>
           </a:xfrm>
         </p:spPr>
         <p:txBody>
           <a:bodyPr anchor="b"/>
           <a:lstStyle>
             <a:lvl1pPr>
-              <a:defRPr sz="7559"/>
+              <a:defRPr sz="10583"/>
             </a:lvl1pPr>
           </a:lstStyle>
           <a:p>
@@ -10755,39 +11214,39 @@
         </p:nvSpPr>
         <p:spPr>
           <a:xfrm>
-            <a:off x="12856061" y="2332564"/>
-            <a:ext cx="15309146" cy="11512811"/>
+            <a:off x="12856061" y="3369136"/>
+            <a:ext cx="15309146" cy="16628989"/>
           </a:xfrm>
         </p:spPr>
         <p:txBody>
           <a:bodyPr/>
           <a:lstStyle>
             <a:lvl1pPr>
-              <a:defRPr sz="7559"/>
+              <a:defRPr sz="10583"/>
             </a:lvl1pPr>
             <a:lvl2pPr>
-              <a:defRPr sz="6614"/>
+              <a:defRPr sz="9260"/>
             </a:lvl2pPr>
             <a:lvl3pPr>
-              <a:defRPr sz="5670"/>
+              <a:defRPr sz="7937"/>
             </a:lvl3pPr>
             <a:lvl4pPr>
-              <a:defRPr sz="4725"/>
+              <a:defRPr sz="6614"/>
             </a:lvl4pPr>
             <a:lvl5pPr>
-              <a:defRPr sz="4725"/>
+              <a:defRPr sz="6614"/>
             </a:lvl5pPr>
             <a:lvl6pPr>
-              <a:defRPr sz="4725"/>
+              <a:defRPr sz="6614"/>
             </a:lvl6pPr>
             <a:lvl7pPr>
-              <a:defRPr sz="4725"/>
+              <a:defRPr sz="6614"/>
             </a:lvl7pPr>
             <a:lvl8pPr>
-              <a:defRPr sz="4725"/>
+              <a:defRPr sz="6614"/>
             </a:lvl8pPr>
             <a:lvl9pPr>
-              <a:defRPr sz="4725"/>
+              <a:defRPr sz="6614"/>
             </a:lvl9pPr>
           </a:lstStyle>
           <a:p>
@@ -10840,8 +11299,8 @@
         </p:nvSpPr>
         <p:spPr>
           <a:xfrm>
-            <a:off x="2082960" y="4860131"/>
-            <a:ext cx="9753279" cy="9003995"/>
+            <a:off x="2082959" y="7019925"/>
+            <a:ext cx="9753280" cy="13005279"/>
           </a:xfrm>
         </p:spPr>
         <p:txBody>
@@ -10849,39 +11308,39 @@
           <a:lstStyle>
             <a:lvl1pPr marL="0" indent="0">
               <a:buNone/>
-              <a:defRPr sz="3780"/>
+              <a:defRPr sz="5291"/>
             </a:lvl1pPr>
-            <a:lvl2pPr marL="1080044" indent="0">
+            <a:lvl2pPr marL="1512006" indent="0">
+              <a:buNone/>
+              <a:defRPr sz="4630"/>
+            </a:lvl2pPr>
+            <a:lvl3pPr marL="3024012" indent="0">
+              <a:buNone/>
+              <a:defRPr sz="3969"/>
+            </a:lvl3pPr>
+            <a:lvl4pPr marL="4536018" indent="0">
               <a:buNone/>
               <a:defRPr sz="3307"/>
-            </a:lvl2pPr>
-            <a:lvl3pPr marL="2160087" indent="0">
+            </a:lvl4pPr>
+            <a:lvl5pPr marL="6048024" indent="0">
               <a:buNone/>
-              <a:defRPr sz="2835"/>
-            </a:lvl3pPr>
-            <a:lvl4pPr marL="3240131" indent="0">
+              <a:defRPr sz="3307"/>
+            </a:lvl5pPr>
+            <a:lvl6pPr marL="7560031" indent="0">
               <a:buNone/>
-              <a:defRPr sz="2362"/>
-            </a:lvl4pPr>
-            <a:lvl5pPr marL="4320174" indent="0">
+              <a:defRPr sz="3307"/>
+            </a:lvl6pPr>
+            <a:lvl7pPr marL="9072037" indent="0">
               <a:buNone/>
-              <a:defRPr sz="2362"/>
-            </a:lvl5pPr>
-            <a:lvl6pPr marL="5400218" indent="0">
+              <a:defRPr sz="3307"/>
+            </a:lvl7pPr>
+            <a:lvl8pPr marL="10584043" indent="0">
               <a:buNone/>
-              <a:defRPr sz="2362"/>
-            </a:lvl6pPr>
-            <a:lvl7pPr marL="6480261" indent="0">
+              <a:defRPr sz="3307"/>
+            </a:lvl8pPr>
+            <a:lvl9pPr marL="12096049" indent="0">
               <a:buNone/>
-              <a:defRPr sz="2362"/>
-            </a:lvl7pPr>
-            <a:lvl8pPr marL="7560305" indent="0">
-              <a:buNone/>
-              <a:defRPr sz="2362"/>
-            </a:lvl8pPr>
-            <a:lvl9pPr marL="8640348" indent="0">
-              <a:buNone/>
-              <a:defRPr sz="2362"/>
+              <a:defRPr sz="3307"/>
             </a:lvl9pPr>
           </a:lstStyle>
           <a:p>
@@ -10910,7 +11369,7 @@
           <a:p>
             <a:fld id="{79C0705B-4870-4470-A32F-307AEE1697AB}" type="datetimeFigureOut">
               <a:rPr lang="en-IE" smtClean="0"/>
-              <a:t>20/11/2025</a:t>
+              <a:t>30/01/2026</a:t>
             </a:fld>
             <a:endParaRPr lang="en-IE"/>
           </a:p>
@@ -10961,7 +11420,7 @@
     </p:spTree>
     <p:extLst>
       <p:ext uri="{BB962C8B-B14F-4D97-AF65-F5344CB8AC3E}">
-        <p14:creationId xmlns:p14="http://schemas.microsoft.com/office/powerpoint/2010/main" val="2362085525"/>
+        <p14:creationId xmlns:p14="http://schemas.microsoft.com/office/powerpoint/2010/main" val="1924624946"/>
       </p:ext>
     </p:extLst>
   </p:cSld>
@@ -11000,15 +11459,15 @@
         </p:nvSpPr>
         <p:spPr>
           <a:xfrm>
-            <a:off x="2082960" y="1080029"/>
-            <a:ext cx="9753279" cy="3780102"/>
+            <a:off x="2082959" y="1559983"/>
+            <a:ext cx="9753280" cy="5459942"/>
           </a:xfrm>
         </p:spPr>
         <p:txBody>
           <a:bodyPr anchor="b"/>
           <a:lstStyle>
             <a:lvl1pPr>
-              <a:defRPr sz="7559"/>
+              <a:defRPr sz="10583"/>
             </a:lvl1pPr>
           </a:lstStyle>
           <a:p>
@@ -11032,8 +11491,8 @@
         </p:nvSpPr>
         <p:spPr>
           <a:xfrm>
-            <a:off x="12856061" y="2332564"/>
-            <a:ext cx="15309146" cy="11512811"/>
+            <a:off x="12856061" y="3369136"/>
+            <a:ext cx="15309146" cy="16628989"/>
           </a:xfrm>
         </p:spPr>
         <p:txBody>
@@ -11041,39 +11500,39 @@
           <a:lstStyle>
             <a:lvl1pPr marL="0" indent="0">
               <a:buNone/>
-              <a:defRPr sz="7559"/>
+              <a:defRPr sz="10583"/>
             </a:lvl1pPr>
-            <a:lvl2pPr marL="1080044" indent="0">
+            <a:lvl2pPr marL="1512006" indent="0">
+              <a:buNone/>
+              <a:defRPr sz="9260"/>
+            </a:lvl2pPr>
+            <a:lvl3pPr marL="3024012" indent="0">
+              <a:buNone/>
+              <a:defRPr sz="7937"/>
+            </a:lvl3pPr>
+            <a:lvl4pPr marL="4536018" indent="0">
               <a:buNone/>
               <a:defRPr sz="6614"/>
-            </a:lvl2pPr>
-            <a:lvl3pPr marL="2160087" indent="0">
+            </a:lvl4pPr>
+            <a:lvl5pPr marL="6048024" indent="0">
               <a:buNone/>
-              <a:defRPr sz="5670"/>
-            </a:lvl3pPr>
-            <a:lvl4pPr marL="3240131" indent="0">
+              <a:defRPr sz="6614"/>
+            </a:lvl5pPr>
+            <a:lvl6pPr marL="7560031" indent="0">
               <a:buNone/>
-              <a:defRPr sz="4725"/>
-            </a:lvl4pPr>
-            <a:lvl5pPr marL="4320174" indent="0">
+              <a:defRPr sz="6614"/>
+            </a:lvl6pPr>
+            <a:lvl7pPr marL="9072037" indent="0">
               <a:buNone/>
-              <a:defRPr sz="4725"/>
-            </a:lvl5pPr>
-            <a:lvl6pPr marL="5400218" indent="0">
+              <a:defRPr sz="6614"/>
+            </a:lvl7pPr>
+            <a:lvl8pPr marL="10584043" indent="0">
               <a:buNone/>
-              <a:defRPr sz="4725"/>
-            </a:lvl6pPr>
-            <a:lvl7pPr marL="6480261" indent="0">
+              <a:defRPr sz="6614"/>
+            </a:lvl8pPr>
+            <a:lvl9pPr marL="12096049" indent="0">
               <a:buNone/>
-              <a:defRPr sz="4725"/>
-            </a:lvl7pPr>
-            <a:lvl8pPr marL="7560305" indent="0">
-              <a:buNone/>
-              <a:defRPr sz="4725"/>
-            </a:lvl8pPr>
-            <a:lvl9pPr marL="8640348" indent="0">
-              <a:buNone/>
-              <a:defRPr sz="4725"/>
+              <a:defRPr sz="6614"/>
             </a:lvl9pPr>
           </a:lstStyle>
           <a:p>
@@ -11097,8 +11556,8 @@
         </p:nvSpPr>
         <p:spPr>
           <a:xfrm>
-            <a:off x="2082960" y="4860131"/>
-            <a:ext cx="9753279" cy="9003995"/>
+            <a:off x="2082959" y="7019925"/>
+            <a:ext cx="9753280" cy="13005279"/>
           </a:xfrm>
         </p:spPr>
         <p:txBody>
@@ -11106,39 +11565,39 @@
           <a:lstStyle>
             <a:lvl1pPr marL="0" indent="0">
               <a:buNone/>
-              <a:defRPr sz="3780"/>
+              <a:defRPr sz="5291"/>
             </a:lvl1pPr>
-            <a:lvl2pPr marL="1080044" indent="0">
+            <a:lvl2pPr marL="1512006" indent="0">
+              <a:buNone/>
+              <a:defRPr sz="4630"/>
+            </a:lvl2pPr>
+            <a:lvl3pPr marL="3024012" indent="0">
+              <a:buNone/>
+              <a:defRPr sz="3969"/>
+            </a:lvl3pPr>
+            <a:lvl4pPr marL="4536018" indent="0">
               <a:buNone/>
               <a:defRPr sz="3307"/>
-            </a:lvl2pPr>
-            <a:lvl3pPr marL="2160087" indent="0">
+            </a:lvl4pPr>
+            <a:lvl5pPr marL="6048024" indent="0">
               <a:buNone/>
-              <a:defRPr sz="2835"/>
-            </a:lvl3pPr>
-            <a:lvl4pPr marL="3240131" indent="0">
+              <a:defRPr sz="3307"/>
+            </a:lvl5pPr>
+            <a:lvl6pPr marL="7560031" indent="0">
               <a:buNone/>
-              <a:defRPr sz="2362"/>
-            </a:lvl4pPr>
-            <a:lvl5pPr marL="4320174" indent="0">
+              <a:defRPr sz="3307"/>
+            </a:lvl6pPr>
+            <a:lvl7pPr marL="9072037" indent="0">
               <a:buNone/>
-              <a:defRPr sz="2362"/>
-            </a:lvl5pPr>
-            <a:lvl6pPr marL="5400218" indent="0">
+              <a:defRPr sz="3307"/>
+            </a:lvl7pPr>
+            <a:lvl8pPr marL="10584043" indent="0">
               <a:buNone/>
-              <a:defRPr sz="2362"/>
-            </a:lvl6pPr>
-            <a:lvl7pPr marL="6480261" indent="0">
+              <a:defRPr sz="3307"/>
+            </a:lvl8pPr>
+            <a:lvl9pPr marL="12096049" indent="0">
               <a:buNone/>
-              <a:defRPr sz="2362"/>
-            </a:lvl7pPr>
-            <a:lvl8pPr marL="7560305" indent="0">
-              <a:buNone/>
-              <a:defRPr sz="2362"/>
-            </a:lvl8pPr>
-            <a:lvl9pPr marL="8640348" indent="0">
-              <a:buNone/>
-              <a:defRPr sz="2362"/>
+              <a:defRPr sz="3307"/>
             </a:lvl9pPr>
           </a:lstStyle>
           <a:p>
@@ -11167,7 +11626,7 @@
           <a:p>
             <a:fld id="{79C0705B-4870-4470-A32F-307AEE1697AB}" type="datetimeFigureOut">
               <a:rPr lang="en-IE" smtClean="0"/>
-              <a:t>20/11/2025</a:t>
+              <a:t>30/01/2026</a:t>
             </a:fld>
             <a:endParaRPr lang="en-IE"/>
           </a:p>
@@ -11218,7 +11677,7 @@
     </p:spTree>
     <p:extLst>
       <p:ext uri="{BB962C8B-B14F-4D97-AF65-F5344CB8AC3E}">
-        <p14:creationId xmlns:p14="http://schemas.microsoft.com/office/powerpoint/2010/main" val="1091661984"/>
+        <p14:creationId xmlns:p14="http://schemas.microsoft.com/office/powerpoint/2010/main" val="1911520353"/>
       </p:ext>
     </p:extLst>
   </p:cSld>
@@ -11262,8 +11721,8 @@
         </p:nvSpPr>
         <p:spPr>
           <a:xfrm>
-            <a:off x="2079020" y="862524"/>
-            <a:ext cx="26082248" cy="3131336"/>
+            <a:off x="2079020" y="1245825"/>
+            <a:ext cx="26082248" cy="4522870"/>
           </a:xfrm>
           <a:prstGeom prst="rect">
             <a:avLst/>
@@ -11295,8 +11754,8 @@
         </p:nvSpPr>
         <p:spPr>
           <a:xfrm>
-            <a:off x="2079020" y="4312617"/>
-            <a:ext cx="26082248" cy="10279029"/>
+            <a:off x="2079020" y="6229100"/>
+            <a:ext cx="26082248" cy="14846926"/>
           </a:xfrm>
           <a:prstGeom prst="rect">
             <a:avLst/>
@@ -11357,8 +11816,8 @@
         </p:nvSpPr>
         <p:spPr>
           <a:xfrm>
-            <a:off x="2079020" y="15015407"/>
-            <a:ext cx="6804065" cy="862523"/>
+            <a:off x="2079020" y="21688107"/>
+            <a:ext cx="6804065" cy="1245820"/>
           </a:xfrm>
           <a:prstGeom prst="rect">
             <a:avLst/>
@@ -11368,7 +11827,7 @@
           <a:bodyPr vert="horz" lIns="91440" tIns="45720" rIns="91440" bIns="45720" rtlCol="0" anchor="ctr"/>
           <a:lstStyle>
             <a:lvl1pPr algn="l">
-              <a:defRPr sz="2835">
+              <a:defRPr sz="3969">
                 <a:solidFill>
                   <a:schemeClr val="tx1">
                     <a:tint val="82000"/>
@@ -11380,7 +11839,7 @@
           <a:p>
             <a:fld id="{79C0705B-4870-4470-A32F-307AEE1697AB}" type="datetimeFigureOut">
               <a:rPr lang="en-IE" smtClean="0"/>
-              <a:t>20/11/2025</a:t>
+              <a:t>30/01/2026</a:t>
             </a:fld>
             <a:endParaRPr lang="en-IE"/>
           </a:p>
@@ -11398,8 +11857,8 @@
         </p:nvSpPr>
         <p:spPr>
           <a:xfrm>
-            <a:off x="10017096" y="15015407"/>
-            <a:ext cx="10206097" cy="862523"/>
+            <a:off x="10017096" y="21688107"/>
+            <a:ext cx="10206097" cy="1245820"/>
           </a:xfrm>
           <a:prstGeom prst="rect">
             <a:avLst/>
@@ -11409,7 +11868,7 @@
           <a:bodyPr vert="horz" lIns="91440" tIns="45720" rIns="91440" bIns="45720" rtlCol="0" anchor="ctr"/>
           <a:lstStyle>
             <a:lvl1pPr algn="ctr">
-              <a:defRPr sz="2835">
+              <a:defRPr sz="3969">
                 <a:solidFill>
                   <a:schemeClr val="tx1">
                     <a:tint val="82000"/>
@@ -11435,8 +11894,8 @@
         </p:nvSpPr>
         <p:spPr>
           <a:xfrm>
-            <a:off x="21357203" y="15015407"/>
-            <a:ext cx="6804065" cy="862523"/>
+            <a:off x="21357203" y="21688107"/>
+            <a:ext cx="6804065" cy="1245820"/>
           </a:xfrm>
           <a:prstGeom prst="rect">
             <a:avLst/>
@@ -11446,7 +11905,7 @@
           <a:bodyPr vert="horz" lIns="91440" tIns="45720" rIns="91440" bIns="45720" rtlCol="0" anchor="ctr"/>
           <a:lstStyle>
             <a:lvl1pPr algn="r">
-              <a:defRPr sz="2835">
+              <a:defRPr sz="3969">
                 <a:solidFill>
                   <a:schemeClr val="tx1">
                     <a:tint val="82000"/>
@@ -11467,27 +11926,27 @@
     </p:spTree>
     <p:extLst>
       <p:ext uri="{BB962C8B-B14F-4D97-AF65-F5344CB8AC3E}">
-        <p14:creationId xmlns:p14="http://schemas.microsoft.com/office/powerpoint/2010/main" val="2468879720"/>
+        <p14:creationId xmlns:p14="http://schemas.microsoft.com/office/powerpoint/2010/main" val="302102168"/>
       </p:ext>
     </p:extLst>
   </p:cSld>
   <p:clrMap bg1="lt1" tx1="dk1" bg2="lt2" tx2="dk2" accent1="accent1" accent2="accent2" accent3="accent3" accent4="accent4" accent5="accent5" accent6="accent6" hlink="hlink" folHlink="folHlink"/>
   <p:sldLayoutIdLst>
-    <p:sldLayoutId id="2147483769" r:id="rId1"/>
-    <p:sldLayoutId id="2147483770" r:id="rId2"/>
-    <p:sldLayoutId id="2147483771" r:id="rId3"/>
-    <p:sldLayoutId id="2147483772" r:id="rId4"/>
-    <p:sldLayoutId id="2147483773" r:id="rId5"/>
-    <p:sldLayoutId id="2147483774" r:id="rId6"/>
-    <p:sldLayoutId id="2147483775" r:id="rId7"/>
-    <p:sldLayoutId id="2147483776" r:id="rId8"/>
-    <p:sldLayoutId id="2147483777" r:id="rId9"/>
-    <p:sldLayoutId id="2147483778" r:id="rId10"/>
-    <p:sldLayoutId id="2147483779" r:id="rId11"/>
+    <p:sldLayoutId id="2147483793" r:id="rId1"/>
+    <p:sldLayoutId id="2147483794" r:id="rId2"/>
+    <p:sldLayoutId id="2147483795" r:id="rId3"/>
+    <p:sldLayoutId id="2147483796" r:id="rId4"/>
+    <p:sldLayoutId id="2147483797" r:id="rId5"/>
+    <p:sldLayoutId id="2147483798" r:id="rId6"/>
+    <p:sldLayoutId id="2147483799" r:id="rId7"/>
+    <p:sldLayoutId id="2147483800" r:id="rId8"/>
+    <p:sldLayoutId id="2147483801" r:id="rId9"/>
+    <p:sldLayoutId id="2147483802" r:id="rId10"/>
+    <p:sldLayoutId id="2147483803" r:id="rId11"/>
   </p:sldLayoutIdLst>
   <p:txStyles>
     <p:titleStyle>
-      <a:lvl1pPr algn="l" defTabSz="2160087" rtl="0" eaLnBrk="1" latinLnBrk="0" hangingPunct="1">
+      <a:lvl1pPr algn="l" defTabSz="3024012" rtl="0" eaLnBrk="1" latinLnBrk="0" hangingPunct="1">
         <a:lnSpc>
           <a:spcPct val="90000"/>
         </a:lnSpc>
@@ -11495,7 +11954,7 @@
           <a:spcPct val="0"/>
         </a:spcBef>
         <a:buNone/>
-        <a:defRPr sz="10394" kern="1200">
+        <a:defRPr sz="14551" kern="1200">
           <a:solidFill>
             <a:schemeClr val="tx1"/>
           </a:solidFill>
@@ -11506,12 +11965,48 @@
       </a:lvl1pPr>
     </p:titleStyle>
     <p:bodyStyle>
-      <a:lvl1pPr marL="540022" indent="-540022" algn="l" defTabSz="2160087" rtl="0" eaLnBrk="1" latinLnBrk="0" hangingPunct="1">
+      <a:lvl1pPr marL="756003" indent="-756003" algn="l" defTabSz="3024012" rtl="0" eaLnBrk="1" latinLnBrk="0" hangingPunct="1">
         <a:lnSpc>
           <a:spcPct val="90000"/>
         </a:lnSpc>
         <a:spcBef>
-          <a:spcPts val="2362"/>
+          <a:spcPts val="3307"/>
+        </a:spcBef>
+        <a:buFont typeface="Arial" panose="020B0604020202020204" pitchFamily="34" charset="0"/>
+        <a:buChar char="•"/>
+        <a:defRPr sz="9260" kern="1200">
+          <a:solidFill>
+            <a:schemeClr val="tx1"/>
+          </a:solidFill>
+          <a:latin typeface="+mn-lt"/>
+          <a:ea typeface="+mn-ea"/>
+          <a:cs typeface="+mn-cs"/>
+        </a:defRPr>
+      </a:lvl1pPr>
+      <a:lvl2pPr marL="2268009" indent="-756003" algn="l" defTabSz="3024012" rtl="0" eaLnBrk="1" latinLnBrk="0" hangingPunct="1">
+        <a:lnSpc>
+          <a:spcPct val="90000"/>
+        </a:lnSpc>
+        <a:spcBef>
+          <a:spcPts val="1654"/>
+        </a:spcBef>
+        <a:buFont typeface="Arial" panose="020B0604020202020204" pitchFamily="34" charset="0"/>
+        <a:buChar char="•"/>
+        <a:defRPr sz="7937" kern="1200">
+          <a:solidFill>
+            <a:schemeClr val="tx1"/>
+          </a:solidFill>
+          <a:latin typeface="+mn-lt"/>
+          <a:ea typeface="+mn-ea"/>
+          <a:cs typeface="+mn-cs"/>
+        </a:defRPr>
+      </a:lvl2pPr>
+      <a:lvl3pPr marL="3780015" indent="-756003" algn="l" defTabSz="3024012" rtl="0" eaLnBrk="1" latinLnBrk="0" hangingPunct="1">
+        <a:lnSpc>
+          <a:spcPct val="90000"/>
+        </a:lnSpc>
+        <a:spcBef>
+          <a:spcPts val="1654"/>
         </a:spcBef>
         <a:buFont typeface="Arial" panose="020B0604020202020204" pitchFamily="34" charset="0"/>
         <a:buChar char="•"/>
@@ -11523,53 +12018,17 @@
           <a:ea typeface="+mn-ea"/>
           <a:cs typeface="+mn-cs"/>
         </a:defRPr>
-      </a:lvl1pPr>
-      <a:lvl2pPr marL="1620065" indent="-540022" algn="l" defTabSz="2160087" rtl="0" eaLnBrk="1" latinLnBrk="0" hangingPunct="1">
+      </a:lvl3pPr>
+      <a:lvl4pPr marL="5292021" indent="-756003" algn="l" defTabSz="3024012" rtl="0" eaLnBrk="1" latinLnBrk="0" hangingPunct="1">
         <a:lnSpc>
           <a:spcPct val="90000"/>
         </a:lnSpc>
         <a:spcBef>
-          <a:spcPts val="1181"/>
+          <a:spcPts val="1654"/>
         </a:spcBef>
         <a:buFont typeface="Arial" panose="020B0604020202020204" pitchFamily="34" charset="0"/>
         <a:buChar char="•"/>
-        <a:defRPr sz="5670" kern="1200">
-          <a:solidFill>
-            <a:schemeClr val="tx1"/>
-          </a:solidFill>
-          <a:latin typeface="+mn-lt"/>
-          <a:ea typeface="+mn-ea"/>
-          <a:cs typeface="+mn-cs"/>
-        </a:defRPr>
-      </a:lvl2pPr>
-      <a:lvl3pPr marL="2700109" indent="-540022" algn="l" defTabSz="2160087" rtl="0" eaLnBrk="1" latinLnBrk="0" hangingPunct="1">
-        <a:lnSpc>
-          <a:spcPct val="90000"/>
-        </a:lnSpc>
-        <a:spcBef>
-          <a:spcPts val="1181"/>
-        </a:spcBef>
-        <a:buFont typeface="Arial" panose="020B0604020202020204" pitchFamily="34" charset="0"/>
-        <a:buChar char="•"/>
-        <a:defRPr sz="4725" kern="1200">
-          <a:solidFill>
-            <a:schemeClr val="tx1"/>
-          </a:solidFill>
-          <a:latin typeface="+mn-lt"/>
-          <a:ea typeface="+mn-ea"/>
-          <a:cs typeface="+mn-cs"/>
-        </a:defRPr>
-      </a:lvl3pPr>
-      <a:lvl4pPr marL="3780152" indent="-540022" algn="l" defTabSz="2160087" rtl="0" eaLnBrk="1" latinLnBrk="0" hangingPunct="1">
-        <a:lnSpc>
-          <a:spcPct val="90000"/>
-        </a:lnSpc>
-        <a:spcBef>
-          <a:spcPts val="1181"/>
-        </a:spcBef>
-        <a:buFont typeface="Arial" panose="020B0604020202020204" pitchFamily="34" charset="0"/>
-        <a:buChar char="•"/>
-        <a:defRPr sz="4252" kern="1200">
+        <a:defRPr sz="5953" kern="1200">
           <a:solidFill>
             <a:schemeClr val="tx1"/>
           </a:solidFill>
@@ -11578,16 +12037,16 @@
           <a:cs typeface="+mn-cs"/>
         </a:defRPr>
       </a:lvl4pPr>
-      <a:lvl5pPr marL="4860196" indent="-540022" algn="l" defTabSz="2160087" rtl="0" eaLnBrk="1" latinLnBrk="0" hangingPunct="1">
+      <a:lvl5pPr marL="6804028" indent="-756003" algn="l" defTabSz="3024012" rtl="0" eaLnBrk="1" latinLnBrk="0" hangingPunct="1">
         <a:lnSpc>
           <a:spcPct val="90000"/>
         </a:lnSpc>
         <a:spcBef>
-          <a:spcPts val="1181"/>
+          <a:spcPts val="1654"/>
         </a:spcBef>
         <a:buFont typeface="Arial" panose="020B0604020202020204" pitchFamily="34" charset="0"/>
         <a:buChar char="•"/>
-        <a:defRPr sz="4252" kern="1200">
+        <a:defRPr sz="5953" kern="1200">
           <a:solidFill>
             <a:schemeClr val="tx1"/>
           </a:solidFill>
@@ -11596,16 +12055,16 @@
           <a:cs typeface="+mn-cs"/>
         </a:defRPr>
       </a:lvl5pPr>
-      <a:lvl6pPr marL="5940240" indent="-540022" algn="l" defTabSz="2160087" rtl="0" eaLnBrk="1" latinLnBrk="0" hangingPunct="1">
+      <a:lvl6pPr marL="8316034" indent="-756003" algn="l" defTabSz="3024012" rtl="0" eaLnBrk="1" latinLnBrk="0" hangingPunct="1">
         <a:lnSpc>
           <a:spcPct val="90000"/>
         </a:lnSpc>
         <a:spcBef>
-          <a:spcPts val="1181"/>
+          <a:spcPts val="1654"/>
         </a:spcBef>
         <a:buFont typeface="Arial" panose="020B0604020202020204" pitchFamily="34" charset="0"/>
         <a:buChar char="•"/>
-        <a:defRPr sz="4252" kern="1200">
+        <a:defRPr sz="5953" kern="1200">
           <a:solidFill>
             <a:schemeClr val="tx1"/>
           </a:solidFill>
@@ -11614,16 +12073,16 @@
           <a:cs typeface="+mn-cs"/>
         </a:defRPr>
       </a:lvl6pPr>
-      <a:lvl7pPr marL="7020283" indent="-540022" algn="l" defTabSz="2160087" rtl="0" eaLnBrk="1" latinLnBrk="0" hangingPunct="1">
+      <a:lvl7pPr marL="9828040" indent="-756003" algn="l" defTabSz="3024012" rtl="0" eaLnBrk="1" latinLnBrk="0" hangingPunct="1">
         <a:lnSpc>
           <a:spcPct val="90000"/>
         </a:lnSpc>
         <a:spcBef>
-          <a:spcPts val="1181"/>
+          <a:spcPts val="1654"/>
         </a:spcBef>
         <a:buFont typeface="Arial" panose="020B0604020202020204" pitchFamily="34" charset="0"/>
         <a:buChar char="•"/>
-        <a:defRPr sz="4252" kern="1200">
+        <a:defRPr sz="5953" kern="1200">
           <a:solidFill>
             <a:schemeClr val="tx1"/>
           </a:solidFill>
@@ -11632,16 +12091,16 @@
           <a:cs typeface="+mn-cs"/>
         </a:defRPr>
       </a:lvl7pPr>
-      <a:lvl8pPr marL="8100327" indent="-540022" algn="l" defTabSz="2160087" rtl="0" eaLnBrk="1" latinLnBrk="0" hangingPunct="1">
+      <a:lvl8pPr marL="11340046" indent="-756003" algn="l" defTabSz="3024012" rtl="0" eaLnBrk="1" latinLnBrk="0" hangingPunct="1">
         <a:lnSpc>
           <a:spcPct val="90000"/>
         </a:lnSpc>
         <a:spcBef>
-          <a:spcPts val="1181"/>
+          <a:spcPts val="1654"/>
         </a:spcBef>
         <a:buFont typeface="Arial" panose="020B0604020202020204" pitchFamily="34" charset="0"/>
         <a:buChar char="•"/>
-        <a:defRPr sz="4252" kern="1200">
+        <a:defRPr sz="5953" kern="1200">
           <a:solidFill>
             <a:schemeClr val="tx1"/>
           </a:solidFill>
@@ -11650,16 +12109,16 @@
           <a:cs typeface="+mn-cs"/>
         </a:defRPr>
       </a:lvl8pPr>
-      <a:lvl9pPr marL="9180370" indent="-540022" algn="l" defTabSz="2160087" rtl="0" eaLnBrk="1" latinLnBrk="0" hangingPunct="1">
+      <a:lvl9pPr marL="12852052" indent="-756003" algn="l" defTabSz="3024012" rtl="0" eaLnBrk="1" latinLnBrk="0" hangingPunct="1">
         <a:lnSpc>
           <a:spcPct val="90000"/>
         </a:lnSpc>
         <a:spcBef>
-          <a:spcPts val="1181"/>
+          <a:spcPts val="1654"/>
         </a:spcBef>
         <a:buFont typeface="Arial" panose="020B0604020202020204" pitchFamily="34" charset="0"/>
         <a:buChar char="•"/>
-        <a:defRPr sz="4252" kern="1200">
+        <a:defRPr sz="5953" kern="1200">
           <a:solidFill>
             <a:schemeClr val="tx1"/>
           </a:solidFill>
@@ -11673,8 +12132,8 @@
       <a:defPPr>
         <a:defRPr lang="en-US"/>
       </a:defPPr>
-      <a:lvl1pPr marL="0" algn="l" defTabSz="2160087" rtl="0" eaLnBrk="1" latinLnBrk="0" hangingPunct="1">
-        <a:defRPr sz="4252" kern="1200">
+      <a:lvl1pPr marL="0" algn="l" defTabSz="3024012" rtl="0" eaLnBrk="1" latinLnBrk="0" hangingPunct="1">
+        <a:defRPr sz="5953" kern="1200">
           <a:solidFill>
             <a:schemeClr val="tx1"/>
           </a:solidFill>
@@ -11683,8 +12142,8 @@
           <a:cs typeface="+mn-cs"/>
         </a:defRPr>
       </a:lvl1pPr>
-      <a:lvl2pPr marL="1080044" algn="l" defTabSz="2160087" rtl="0" eaLnBrk="1" latinLnBrk="0" hangingPunct="1">
-        <a:defRPr sz="4252" kern="1200">
+      <a:lvl2pPr marL="1512006" algn="l" defTabSz="3024012" rtl="0" eaLnBrk="1" latinLnBrk="0" hangingPunct="1">
+        <a:defRPr sz="5953" kern="1200">
           <a:solidFill>
             <a:schemeClr val="tx1"/>
           </a:solidFill>
@@ -11693,8 +12152,8 @@
           <a:cs typeface="+mn-cs"/>
         </a:defRPr>
       </a:lvl2pPr>
-      <a:lvl3pPr marL="2160087" algn="l" defTabSz="2160087" rtl="0" eaLnBrk="1" latinLnBrk="0" hangingPunct="1">
-        <a:defRPr sz="4252" kern="1200">
+      <a:lvl3pPr marL="3024012" algn="l" defTabSz="3024012" rtl="0" eaLnBrk="1" latinLnBrk="0" hangingPunct="1">
+        <a:defRPr sz="5953" kern="1200">
           <a:solidFill>
             <a:schemeClr val="tx1"/>
           </a:solidFill>
@@ -11703,8 +12162,8 @@
           <a:cs typeface="+mn-cs"/>
         </a:defRPr>
       </a:lvl3pPr>
-      <a:lvl4pPr marL="3240131" algn="l" defTabSz="2160087" rtl="0" eaLnBrk="1" latinLnBrk="0" hangingPunct="1">
-        <a:defRPr sz="4252" kern="1200">
+      <a:lvl4pPr marL="4536018" algn="l" defTabSz="3024012" rtl="0" eaLnBrk="1" latinLnBrk="0" hangingPunct="1">
+        <a:defRPr sz="5953" kern="1200">
           <a:solidFill>
             <a:schemeClr val="tx1"/>
           </a:solidFill>
@@ -11713,8 +12172,8 @@
           <a:cs typeface="+mn-cs"/>
         </a:defRPr>
       </a:lvl4pPr>
-      <a:lvl5pPr marL="4320174" algn="l" defTabSz="2160087" rtl="0" eaLnBrk="1" latinLnBrk="0" hangingPunct="1">
-        <a:defRPr sz="4252" kern="1200">
+      <a:lvl5pPr marL="6048024" algn="l" defTabSz="3024012" rtl="0" eaLnBrk="1" latinLnBrk="0" hangingPunct="1">
+        <a:defRPr sz="5953" kern="1200">
           <a:solidFill>
             <a:schemeClr val="tx1"/>
           </a:solidFill>
@@ -11723,8 +12182,8 @@
           <a:cs typeface="+mn-cs"/>
         </a:defRPr>
       </a:lvl5pPr>
-      <a:lvl6pPr marL="5400218" algn="l" defTabSz="2160087" rtl="0" eaLnBrk="1" latinLnBrk="0" hangingPunct="1">
-        <a:defRPr sz="4252" kern="1200">
+      <a:lvl6pPr marL="7560031" algn="l" defTabSz="3024012" rtl="0" eaLnBrk="1" latinLnBrk="0" hangingPunct="1">
+        <a:defRPr sz="5953" kern="1200">
           <a:solidFill>
             <a:schemeClr val="tx1"/>
           </a:solidFill>
@@ -11733,8 +12192,8 @@
           <a:cs typeface="+mn-cs"/>
         </a:defRPr>
       </a:lvl6pPr>
-      <a:lvl7pPr marL="6480261" algn="l" defTabSz="2160087" rtl="0" eaLnBrk="1" latinLnBrk="0" hangingPunct="1">
-        <a:defRPr sz="4252" kern="1200">
+      <a:lvl7pPr marL="9072037" algn="l" defTabSz="3024012" rtl="0" eaLnBrk="1" latinLnBrk="0" hangingPunct="1">
+        <a:defRPr sz="5953" kern="1200">
           <a:solidFill>
             <a:schemeClr val="tx1"/>
           </a:solidFill>
@@ -11743,8 +12202,8 @@
           <a:cs typeface="+mn-cs"/>
         </a:defRPr>
       </a:lvl7pPr>
-      <a:lvl8pPr marL="7560305" algn="l" defTabSz="2160087" rtl="0" eaLnBrk="1" latinLnBrk="0" hangingPunct="1">
-        <a:defRPr sz="4252" kern="1200">
+      <a:lvl8pPr marL="10584043" algn="l" defTabSz="3024012" rtl="0" eaLnBrk="1" latinLnBrk="0" hangingPunct="1">
+        <a:defRPr sz="5953" kern="1200">
           <a:solidFill>
             <a:schemeClr val="tx1"/>
           </a:solidFill>
@@ -11753,8 +12212,8 @@
           <a:cs typeface="+mn-cs"/>
         </a:defRPr>
       </a:lvl8pPr>
-      <a:lvl9pPr marL="8640348" algn="l" defTabSz="2160087" rtl="0" eaLnBrk="1" latinLnBrk="0" hangingPunct="1">
-        <a:defRPr sz="4252" kern="1200">
+      <a:lvl9pPr marL="12096049" algn="l" defTabSz="3024012" rtl="0" eaLnBrk="1" latinLnBrk="0" hangingPunct="1">
+        <a:defRPr sz="5953" kern="1200">
           <a:solidFill>
             <a:schemeClr val="tx1"/>
           </a:solidFill>
@@ -11809,7 +12268,7 @@
         </p:nvSpPr>
         <p:spPr>
           <a:xfrm>
-            <a:off x="5622132" y="1313313"/>
+            <a:off x="5622132" y="4912971"/>
             <a:ext cx="19380200" cy="1128833"/>
           </a:xfrm>
         </p:spPr>
@@ -11841,7 +12300,7 @@
         </p:nvSpPr>
         <p:spPr>
           <a:xfrm>
-            <a:off x="8233094" y="7593261"/>
+            <a:off x="8233094" y="11192917"/>
             <a:ext cx="13370560" cy="2316480"/>
           </a:xfrm>
           <a:prstGeom prst="roundRect">
@@ -11947,7 +12406,7 @@
         </p:nvSpPr>
         <p:spPr>
           <a:xfrm>
-            <a:off x="8222933" y="11403261"/>
+            <a:off x="8222933" y="15002917"/>
             <a:ext cx="13370560" cy="2316480"/>
           </a:xfrm>
           <a:prstGeom prst="roundRect">
@@ -12069,7 +12528,7 @@
         </p:nvSpPr>
         <p:spPr>
           <a:xfrm>
-            <a:off x="8233094" y="3691820"/>
+            <a:off x="8233094" y="7291476"/>
             <a:ext cx="13370560" cy="2316480"/>
           </a:xfrm>
           <a:prstGeom prst="roundRect">
@@ -12179,6 +12638,763 @@
   <p:cSld>
     <p:spTree>
       <p:nvGrpSpPr>
+        <p:cNvPr id="1" name=""/>
+        <p:cNvGrpSpPr/>
+        <p:nvPr/>
+      </p:nvGrpSpPr>
+      <p:grpSpPr>
+        <a:xfrm>
+          <a:off x="0" y="0"/>
+          <a:ext cx="0" cy="0"/>
+          <a:chOff x="0" y="0"/>
+          <a:chExt cx="0" cy="0"/>
+        </a:xfrm>
+      </p:grpSpPr>
+      <p:sp>
+        <p:nvSpPr>
+          <p:cNvPr id="4" name="Title 1">
+            <a:extLst>
+              <a:ext uri="{FF2B5EF4-FFF2-40B4-BE49-F238E27FC236}">
+                <a16:creationId xmlns:a16="http://schemas.microsoft.com/office/drawing/2014/main" id="{058B3095-0260-7A2F-3594-5D20E6B23DF2}"/>
+              </a:ext>
+            </a:extLst>
+          </p:cNvPr>
+          <p:cNvSpPr>
+            <a:spLocks noGrp="1"/>
+          </p:cNvSpPr>
+          <p:nvPr>
+            <p:ph type="title"/>
+          </p:nvPr>
+        </p:nvSpPr>
+        <p:spPr>
+          <a:xfrm>
+            <a:off x="5012535" y="4336577"/>
+            <a:ext cx="19521399" cy="2378513"/>
+          </a:xfrm>
+        </p:spPr>
+        <p:txBody>
+          <a:bodyPr>
+            <a:normAutofit fontScale="90000"/>
+          </a:bodyPr>
+          <a:lstStyle/>
+          <a:p>
+            <a:pPr algn="ctr"/>
+            <a:r>
+              <a:rPr lang="en-IE" b="1" dirty="0"/>
+              <a:t>Mapping of TaskTide Components      to Pilot Job Model</a:t>
+            </a:r>
+          </a:p>
+        </p:txBody>
+      </p:sp>
+      <p:sp>
+        <p:nvSpPr>
+          <p:cNvPr id="5" name="Rectangle: Rounded Corners 4">
+            <a:extLst>
+              <a:ext uri="{FF2B5EF4-FFF2-40B4-BE49-F238E27FC236}">
+                <a16:creationId xmlns:a16="http://schemas.microsoft.com/office/drawing/2014/main" id="{7A3B5530-C2C5-432B-8650-01D5F92A1DA7}"/>
+              </a:ext>
+            </a:extLst>
+          </p:cNvPr>
+          <p:cNvSpPr/>
+          <p:nvPr/>
+        </p:nvSpPr>
+        <p:spPr>
+          <a:xfrm>
+            <a:off x="6404293" y="7562056"/>
+            <a:ext cx="5303520" cy="3962400"/>
+          </a:xfrm>
+          <a:prstGeom prst="roundRect">
+            <a:avLst/>
+          </a:prstGeom>
+          <a:solidFill>
+            <a:srgbClr val="B56576"/>
+          </a:solidFill>
+          <a:ln w="76200">
+            <a:solidFill>
+              <a:schemeClr val="tx1"/>
+            </a:solidFill>
+          </a:ln>
+          <a:effectLst>
+            <a:outerShdw blurRad="44450" dist="27940" dir="5400000" algn="ctr">
+              <a:srgbClr val="000000">
+                <a:alpha val="32000"/>
+              </a:srgbClr>
+            </a:outerShdw>
+          </a:effectLst>
+          <a:scene3d>
+            <a:camera prst="orthographicFront">
+              <a:rot lat="0" lon="0" rev="0"/>
+            </a:camera>
+            <a:lightRig rig="balanced" dir="t">
+              <a:rot lat="0" lon="0" rev="8700000"/>
+            </a:lightRig>
+          </a:scene3d>
+          <a:sp3d>
+            <a:bevelT w="190500" h="38100"/>
+          </a:sp3d>
+        </p:spPr>
+        <p:style>
+          <a:lnRef idx="2">
+            <a:schemeClr val="accent1">
+              <a:shade val="15000"/>
+            </a:schemeClr>
+          </a:lnRef>
+          <a:fillRef idx="1">
+            <a:schemeClr val="accent1"/>
+          </a:fillRef>
+          <a:effectRef idx="0">
+            <a:schemeClr val="accent1"/>
+          </a:effectRef>
+          <a:fontRef idx="minor">
+            <a:schemeClr val="lt1"/>
+          </a:fontRef>
+        </p:style>
+        <p:txBody>
+          <a:bodyPr rtlCol="0" anchor="ctr"/>
+          <a:lstStyle/>
+          <a:p>
+            <a:pPr algn="ctr"/>
+            <a:r>
+              <a:rPr lang="en-IE" sz="4400" b="1" dirty="0"/>
+              <a:t>Pilot Manager</a:t>
+            </a:r>
+          </a:p>
+          <a:p>
+            <a:pPr algn="ctr"/>
+            <a:r>
+              <a:rPr lang="en-IE" sz="3600" b="1" i="1" dirty="0"/>
+              <a:t>(Provisioning)</a:t>
+            </a:r>
+          </a:p>
+        </p:txBody>
+      </p:sp>
+      <p:sp>
+        <p:nvSpPr>
+          <p:cNvPr id="8" name="Rectangle: Rounded Corners 7">
+            <a:extLst>
+              <a:ext uri="{FF2B5EF4-FFF2-40B4-BE49-F238E27FC236}">
+                <a16:creationId xmlns:a16="http://schemas.microsoft.com/office/drawing/2014/main" id="{32C7CA26-DC3F-D8BF-1823-0FC5B1F42429}"/>
+              </a:ext>
+            </a:extLst>
+          </p:cNvPr>
+          <p:cNvSpPr/>
+          <p:nvPr/>
+        </p:nvSpPr>
+        <p:spPr>
+          <a:xfrm>
+            <a:off x="6404293" y="14846776"/>
+            <a:ext cx="5303520" cy="3962400"/>
+          </a:xfrm>
+          <a:prstGeom prst="roundRect">
+            <a:avLst/>
+          </a:prstGeom>
+          <a:solidFill>
+            <a:srgbClr val="B56576"/>
+          </a:solidFill>
+          <a:ln w="76200">
+            <a:solidFill>
+              <a:schemeClr val="tx1"/>
+            </a:solidFill>
+          </a:ln>
+          <a:effectLst>
+            <a:outerShdw blurRad="44450" dist="27940" dir="5400000" algn="ctr">
+              <a:srgbClr val="000000">
+                <a:alpha val="32000"/>
+              </a:srgbClr>
+            </a:outerShdw>
+          </a:effectLst>
+          <a:scene3d>
+            <a:camera prst="orthographicFront">
+              <a:rot lat="0" lon="0" rev="0"/>
+            </a:camera>
+            <a:lightRig rig="balanced" dir="t">
+              <a:rot lat="0" lon="0" rev="8700000"/>
+            </a:lightRig>
+          </a:scene3d>
+          <a:sp3d>
+            <a:bevelT w="190500" h="38100"/>
+          </a:sp3d>
+        </p:spPr>
+        <p:style>
+          <a:lnRef idx="2">
+            <a:schemeClr val="accent1">
+              <a:shade val="15000"/>
+            </a:schemeClr>
+          </a:lnRef>
+          <a:fillRef idx="1">
+            <a:schemeClr val="accent1"/>
+          </a:fillRef>
+          <a:effectRef idx="0">
+            <a:schemeClr val="accent1"/>
+          </a:effectRef>
+          <a:fontRef idx="minor">
+            <a:schemeClr val="lt1"/>
+          </a:fontRef>
+        </p:style>
+        <p:txBody>
+          <a:bodyPr rtlCol="0" anchor="ctr"/>
+          <a:lstStyle/>
+          <a:p>
+            <a:pPr algn="ctr"/>
+            <a:r>
+              <a:rPr lang="en-IE" sz="4000" b="1" dirty="0"/>
+              <a:t>Delegate to Schedulers</a:t>
+            </a:r>
+          </a:p>
+          <a:p>
+            <a:pPr algn="ctr"/>
+            <a:r>
+              <a:rPr lang="en-IE" sz="3600" b="1" i="1" dirty="0"/>
+              <a:t>(SLURM, K8s etc)</a:t>
+            </a:r>
+          </a:p>
+        </p:txBody>
+      </p:sp>
+      <p:sp>
+        <p:nvSpPr>
+          <p:cNvPr id="10" name="Rectangle: Rounded Corners 9">
+            <a:extLst>
+              <a:ext uri="{FF2B5EF4-FFF2-40B4-BE49-F238E27FC236}">
+                <a16:creationId xmlns:a16="http://schemas.microsoft.com/office/drawing/2014/main" id="{C61EACF5-381B-A801-9C56-2B9AA25037CB}"/>
+              </a:ext>
+            </a:extLst>
+          </p:cNvPr>
+          <p:cNvSpPr/>
+          <p:nvPr/>
+        </p:nvSpPr>
+        <p:spPr>
+          <a:xfrm>
+            <a:off x="12449493" y="7551896"/>
+            <a:ext cx="5303520" cy="3962400"/>
+          </a:xfrm>
+          <a:prstGeom prst="roundRect">
+            <a:avLst/>
+          </a:prstGeom>
+          <a:solidFill>
+            <a:srgbClr val="4A4E69"/>
+          </a:solidFill>
+          <a:ln w="76200">
+            <a:solidFill>
+              <a:schemeClr val="tx1"/>
+            </a:solidFill>
+          </a:ln>
+          <a:effectLst>
+            <a:outerShdw blurRad="44450" dist="27940" dir="5400000" algn="ctr">
+              <a:srgbClr val="000000">
+                <a:alpha val="32000"/>
+              </a:srgbClr>
+            </a:outerShdw>
+          </a:effectLst>
+          <a:scene3d>
+            <a:camera prst="orthographicFront">
+              <a:rot lat="0" lon="0" rev="0"/>
+            </a:camera>
+            <a:lightRig rig="balanced" dir="t">
+              <a:rot lat="0" lon="0" rev="8700000"/>
+            </a:lightRig>
+          </a:scene3d>
+          <a:sp3d>
+            <a:bevelT w="190500" h="38100"/>
+          </a:sp3d>
+        </p:spPr>
+        <p:style>
+          <a:lnRef idx="2">
+            <a:schemeClr val="accent1">
+              <a:shade val="15000"/>
+            </a:schemeClr>
+          </a:lnRef>
+          <a:fillRef idx="1">
+            <a:schemeClr val="accent1"/>
+          </a:fillRef>
+          <a:effectRef idx="0">
+            <a:schemeClr val="accent1"/>
+          </a:effectRef>
+          <a:fontRef idx="minor">
+            <a:schemeClr val="lt1"/>
+          </a:fontRef>
+        </p:style>
+        <p:txBody>
+          <a:bodyPr rtlCol="0" anchor="ctr"/>
+          <a:lstStyle/>
+          <a:p>
+            <a:pPr algn="ctr"/>
+            <a:r>
+              <a:rPr lang="en-IE" sz="4400" b="1" dirty="0"/>
+              <a:t>Workload Manager</a:t>
+            </a:r>
+          </a:p>
+          <a:p>
+            <a:pPr algn="ctr"/>
+            <a:r>
+              <a:rPr lang="en-IE" sz="3600" b="1" i="1" dirty="0"/>
+              <a:t>(Dispatching)</a:t>
+            </a:r>
+          </a:p>
+        </p:txBody>
+      </p:sp>
+      <p:sp>
+        <p:nvSpPr>
+          <p:cNvPr id="11" name="Rectangle: Rounded Corners 10">
+            <a:extLst>
+              <a:ext uri="{FF2B5EF4-FFF2-40B4-BE49-F238E27FC236}">
+                <a16:creationId xmlns:a16="http://schemas.microsoft.com/office/drawing/2014/main" id="{BF4E2FC9-AA1E-2152-1294-D9B20D8F0939}"/>
+              </a:ext>
+            </a:extLst>
+          </p:cNvPr>
+          <p:cNvSpPr/>
+          <p:nvPr/>
+        </p:nvSpPr>
+        <p:spPr>
+          <a:xfrm>
+            <a:off x="12449493" y="14836616"/>
+            <a:ext cx="5303520" cy="3962400"/>
+          </a:xfrm>
+          <a:prstGeom prst="roundRect">
+            <a:avLst/>
+          </a:prstGeom>
+          <a:solidFill>
+            <a:srgbClr val="4A4E69"/>
+          </a:solidFill>
+          <a:ln w="76200">
+            <a:solidFill>
+              <a:schemeClr val="tx1"/>
+            </a:solidFill>
+          </a:ln>
+          <a:effectLst>
+            <a:outerShdw blurRad="44450" dist="27940" dir="5400000" algn="ctr">
+              <a:srgbClr val="000000">
+                <a:alpha val="32000"/>
+              </a:srgbClr>
+            </a:outerShdw>
+          </a:effectLst>
+          <a:scene3d>
+            <a:camera prst="orthographicFront">
+              <a:rot lat="0" lon="0" rev="0"/>
+            </a:camera>
+            <a:lightRig rig="balanced" dir="t">
+              <a:rot lat="0" lon="0" rev="8700000"/>
+            </a:lightRig>
+          </a:scene3d>
+          <a:sp3d>
+            <a:bevelT w="190500" h="38100"/>
+          </a:sp3d>
+        </p:spPr>
+        <p:style>
+          <a:lnRef idx="2">
+            <a:schemeClr val="accent1">
+              <a:shade val="15000"/>
+            </a:schemeClr>
+          </a:lnRef>
+          <a:fillRef idx="1">
+            <a:schemeClr val="accent1"/>
+          </a:fillRef>
+          <a:effectRef idx="0">
+            <a:schemeClr val="accent1"/>
+          </a:effectRef>
+          <a:fontRef idx="minor">
+            <a:schemeClr val="lt1"/>
+          </a:fontRef>
+        </p:style>
+        <p:txBody>
+          <a:bodyPr rtlCol="0" anchor="ctr"/>
+          <a:lstStyle/>
+          <a:p>
+            <a:pPr algn="ctr"/>
+            <a:r>
+              <a:rPr lang="en-IE" sz="4000" b="1" i="1" dirty="0"/>
+              <a:t>TaskTide Manager</a:t>
+            </a:r>
+          </a:p>
+          <a:p>
+            <a:pPr algn="ctr"/>
+            <a:r>
+              <a:rPr lang="en-IE" sz="4000" b="1" i="1" dirty="0"/>
+              <a:t>&amp;</a:t>
+            </a:r>
+          </a:p>
+          <a:p>
+            <a:pPr algn="ctr"/>
+            <a:r>
+              <a:rPr lang="en-IE" sz="4000" b="1" i="1" dirty="0"/>
+              <a:t>TaskTide Repository</a:t>
+            </a:r>
+            <a:endParaRPr lang="en-IE" sz="3600" b="1" i="1" dirty="0"/>
+          </a:p>
+        </p:txBody>
+      </p:sp>
+      <p:sp>
+        <p:nvSpPr>
+          <p:cNvPr id="13" name="Rectangle: Rounded Corners 12">
+            <a:extLst>
+              <a:ext uri="{FF2B5EF4-FFF2-40B4-BE49-F238E27FC236}">
+                <a16:creationId xmlns:a16="http://schemas.microsoft.com/office/drawing/2014/main" id="{9C59B431-D851-B80B-F782-CD4578C86502}"/>
+              </a:ext>
+            </a:extLst>
+          </p:cNvPr>
+          <p:cNvSpPr/>
+          <p:nvPr/>
+        </p:nvSpPr>
+        <p:spPr>
+          <a:xfrm>
+            <a:off x="18515013" y="7562056"/>
+            <a:ext cx="5303520" cy="3962400"/>
+          </a:xfrm>
+          <a:prstGeom prst="roundRect">
+            <a:avLst/>
+          </a:prstGeom>
+          <a:solidFill>
+            <a:srgbClr val="6B5B95"/>
+          </a:solidFill>
+          <a:ln w="76200">
+            <a:solidFill>
+              <a:schemeClr val="tx1"/>
+            </a:solidFill>
+          </a:ln>
+          <a:effectLst>
+            <a:outerShdw blurRad="44450" dist="27940" dir="5400000" algn="ctr">
+              <a:srgbClr val="000000">
+                <a:alpha val="32000"/>
+              </a:srgbClr>
+            </a:outerShdw>
+          </a:effectLst>
+          <a:scene3d>
+            <a:camera prst="orthographicFront">
+              <a:rot lat="0" lon="0" rev="0"/>
+            </a:camera>
+            <a:lightRig rig="balanced" dir="t">
+              <a:rot lat="0" lon="0" rev="8700000"/>
+            </a:lightRig>
+          </a:scene3d>
+          <a:sp3d>
+            <a:bevelT w="190500" h="38100"/>
+          </a:sp3d>
+        </p:spPr>
+        <p:style>
+          <a:lnRef idx="2">
+            <a:schemeClr val="accent1">
+              <a:shade val="15000"/>
+            </a:schemeClr>
+          </a:lnRef>
+          <a:fillRef idx="1">
+            <a:schemeClr val="accent1"/>
+          </a:fillRef>
+          <a:effectRef idx="0">
+            <a:schemeClr val="accent1"/>
+          </a:effectRef>
+          <a:fontRef idx="minor">
+            <a:schemeClr val="lt1"/>
+          </a:fontRef>
+        </p:style>
+        <p:txBody>
+          <a:bodyPr rtlCol="0" anchor="ctr"/>
+          <a:lstStyle/>
+          <a:p>
+            <a:pPr algn="ctr"/>
+            <a:r>
+              <a:rPr lang="en-IE" sz="4400" b="1" dirty="0"/>
+              <a:t>Task Manager</a:t>
+            </a:r>
+          </a:p>
+          <a:p>
+            <a:pPr algn="ctr"/>
+            <a:r>
+              <a:rPr lang="en-IE" sz="3600" b="1" i="1" dirty="0"/>
+              <a:t>(Execution)</a:t>
+            </a:r>
+          </a:p>
+        </p:txBody>
+      </p:sp>
+      <p:sp>
+        <p:nvSpPr>
+          <p:cNvPr id="14" name="Rectangle: Rounded Corners 13">
+            <a:extLst>
+              <a:ext uri="{FF2B5EF4-FFF2-40B4-BE49-F238E27FC236}">
+                <a16:creationId xmlns:a16="http://schemas.microsoft.com/office/drawing/2014/main" id="{B7D5B73F-21AD-3A0B-09DF-443A8870625A}"/>
+              </a:ext>
+            </a:extLst>
+          </p:cNvPr>
+          <p:cNvSpPr/>
+          <p:nvPr/>
+        </p:nvSpPr>
+        <p:spPr>
+          <a:xfrm>
+            <a:off x="18515013" y="14846776"/>
+            <a:ext cx="5303520" cy="3962400"/>
+          </a:xfrm>
+          <a:prstGeom prst="roundRect">
+            <a:avLst/>
+          </a:prstGeom>
+          <a:solidFill>
+            <a:srgbClr val="6B5B95"/>
+          </a:solidFill>
+          <a:ln w="76200">
+            <a:solidFill>
+              <a:schemeClr val="tx1"/>
+            </a:solidFill>
+          </a:ln>
+          <a:effectLst>
+            <a:outerShdw blurRad="44450" dist="27940" dir="5400000" algn="ctr">
+              <a:srgbClr val="000000">
+                <a:alpha val="32000"/>
+              </a:srgbClr>
+            </a:outerShdw>
+          </a:effectLst>
+          <a:scene3d>
+            <a:camera prst="orthographicFront">
+              <a:rot lat="0" lon="0" rev="0"/>
+            </a:camera>
+            <a:lightRig rig="balanced" dir="t">
+              <a:rot lat="0" lon="0" rev="8700000"/>
+            </a:lightRig>
+          </a:scene3d>
+          <a:sp3d>
+            <a:bevelT w="190500" h="38100"/>
+          </a:sp3d>
+        </p:spPr>
+        <p:style>
+          <a:lnRef idx="2">
+            <a:schemeClr val="accent1">
+              <a:shade val="15000"/>
+            </a:schemeClr>
+          </a:lnRef>
+          <a:fillRef idx="1">
+            <a:schemeClr val="accent1"/>
+          </a:fillRef>
+          <a:effectRef idx="0">
+            <a:schemeClr val="accent1"/>
+          </a:effectRef>
+          <a:fontRef idx="minor">
+            <a:schemeClr val="lt1"/>
+          </a:fontRef>
+        </p:style>
+        <p:txBody>
+          <a:bodyPr rtlCol="0" anchor="ctr"/>
+          <a:lstStyle/>
+          <a:p>
+            <a:pPr algn="ctr"/>
+            <a:r>
+              <a:rPr lang="en-IE" sz="4000" b="1" i="1" dirty="0"/>
+              <a:t>TaskTide Client</a:t>
+            </a:r>
+          </a:p>
+          <a:p>
+            <a:pPr algn="ctr"/>
+            <a:r>
+              <a:rPr lang="en-IE" sz="4000" b="1" i="1" dirty="0"/>
+              <a:t>&amp;</a:t>
+            </a:r>
+          </a:p>
+          <a:p>
+            <a:pPr algn="ctr"/>
+            <a:r>
+              <a:rPr lang="en-IE" sz="4000" b="1" i="1" dirty="0"/>
+              <a:t>TaskTide Engine</a:t>
+            </a:r>
+            <a:endParaRPr lang="en-IE" sz="3600" b="1" i="1" dirty="0"/>
+          </a:p>
+        </p:txBody>
+      </p:sp>
+      <p:sp>
+        <p:nvSpPr>
+          <p:cNvPr id="16" name="Arrow: Down 15">
+            <a:extLst>
+              <a:ext uri="{FF2B5EF4-FFF2-40B4-BE49-F238E27FC236}">
+                <a16:creationId xmlns:a16="http://schemas.microsoft.com/office/drawing/2014/main" id="{9E8F5C0A-A32A-C17F-9A9A-2B3977313AA9}"/>
+              </a:ext>
+            </a:extLst>
+          </p:cNvPr>
+          <p:cNvSpPr/>
+          <p:nvPr/>
+        </p:nvSpPr>
+        <p:spPr>
+          <a:xfrm>
+            <a:off x="8395653" y="11525909"/>
+            <a:ext cx="1178560" cy="3891280"/>
+          </a:xfrm>
+          <a:prstGeom prst="downArrow">
+            <a:avLst/>
+          </a:prstGeom>
+          <a:solidFill>
+            <a:srgbClr val="4A6FA5"/>
+          </a:solidFill>
+          <a:ln w="57150">
+            <a:solidFill>
+              <a:schemeClr val="tx1"/>
+            </a:solidFill>
+          </a:ln>
+          <a:scene3d>
+            <a:camera prst="orthographicFront"/>
+            <a:lightRig rig="threePt" dir="t"/>
+          </a:scene3d>
+          <a:sp3d>
+            <a:bevelT w="152400" h="50800" prst="softRound"/>
+          </a:sp3d>
+        </p:spPr>
+        <p:style>
+          <a:lnRef idx="2">
+            <a:schemeClr val="accent1">
+              <a:shade val="15000"/>
+            </a:schemeClr>
+          </a:lnRef>
+          <a:fillRef idx="1">
+            <a:schemeClr val="accent1"/>
+          </a:fillRef>
+          <a:effectRef idx="0">
+            <a:schemeClr val="accent1"/>
+          </a:effectRef>
+          <a:fontRef idx="minor">
+            <a:schemeClr val="lt1"/>
+          </a:fontRef>
+        </p:style>
+        <p:txBody>
+          <a:bodyPr rtlCol="0" anchor="ctr"/>
+          <a:lstStyle/>
+          <a:p>
+            <a:pPr algn="ctr"/>
+            <a:endParaRPr lang="en-IE"/>
+          </a:p>
+        </p:txBody>
+      </p:sp>
+      <p:sp>
+        <p:nvSpPr>
+          <p:cNvPr id="17" name="Arrow: Down 16">
+            <a:extLst>
+              <a:ext uri="{FF2B5EF4-FFF2-40B4-BE49-F238E27FC236}">
+                <a16:creationId xmlns:a16="http://schemas.microsoft.com/office/drawing/2014/main" id="{627699BF-8C58-A803-0A60-513BDDC3A7C0}"/>
+              </a:ext>
+            </a:extLst>
+          </p:cNvPr>
+          <p:cNvSpPr/>
+          <p:nvPr/>
+        </p:nvSpPr>
+        <p:spPr>
+          <a:xfrm>
+            <a:off x="14420534" y="11537012"/>
+            <a:ext cx="1178560" cy="3901440"/>
+          </a:xfrm>
+          <a:prstGeom prst="downArrow">
+            <a:avLst/>
+          </a:prstGeom>
+          <a:solidFill>
+            <a:srgbClr val="4A6FA5"/>
+          </a:solidFill>
+          <a:ln w="57150">
+            <a:solidFill>
+              <a:schemeClr val="tx1"/>
+            </a:solidFill>
+          </a:ln>
+          <a:scene3d>
+            <a:camera prst="orthographicFront"/>
+            <a:lightRig rig="threePt" dir="t"/>
+          </a:scene3d>
+          <a:sp3d>
+            <a:bevelT w="152400" h="50800" prst="softRound"/>
+          </a:sp3d>
+        </p:spPr>
+        <p:style>
+          <a:lnRef idx="2">
+            <a:schemeClr val="accent1">
+              <a:shade val="15000"/>
+            </a:schemeClr>
+          </a:lnRef>
+          <a:fillRef idx="1">
+            <a:schemeClr val="accent1"/>
+          </a:fillRef>
+          <a:effectRef idx="0">
+            <a:schemeClr val="accent1"/>
+          </a:effectRef>
+          <a:fontRef idx="minor">
+            <a:schemeClr val="lt1"/>
+          </a:fontRef>
+        </p:style>
+        <p:txBody>
+          <a:bodyPr rtlCol="0" anchor="ctr"/>
+          <a:lstStyle/>
+          <a:p>
+            <a:pPr algn="ctr"/>
+            <a:endParaRPr lang="en-IE"/>
+          </a:p>
+        </p:txBody>
+      </p:sp>
+      <p:sp>
+        <p:nvSpPr>
+          <p:cNvPr id="18" name="Arrow: Down 17">
+            <a:extLst>
+              <a:ext uri="{FF2B5EF4-FFF2-40B4-BE49-F238E27FC236}">
+                <a16:creationId xmlns:a16="http://schemas.microsoft.com/office/drawing/2014/main" id="{588DFD7E-825B-38AA-50A1-48C819D883EB}"/>
+              </a:ext>
+            </a:extLst>
+          </p:cNvPr>
+          <p:cNvSpPr/>
+          <p:nvPr/>
+        </p:nvSpPr>
+        <p:spPr>
+          <a:xfrm>
+            <a:off x="20526694" y="11525907"/>
+            <a:ext cx="1178560" cy="3901440"/>
+          </a:xfrm>
+          <a:prstGeom prst="downArrow">
+            <a:avLst/>
+          </a:prstGeom>
+          <a:solidFill>
+            <a:srgbClr val="4A6FA5"/>
+          </a:solidFill>
+          <a:ln w="57150">
+            <a:solidFill>
+              <a:schemeClr val="tx1"/>
+            </a:solidFill>
+          </a:ln>
+          <a:scene3d>
+            <a:camera prst="orthographicFront"/>
+            <a:lightRig rig="threePt" dir="t"/>
+          </a:scene3d>
+          <a:sp3d>
+            <a:bevelT w="152400" h="50800" prst="softRound"/>
+          </a:sp3d>
+        </p:spPr>
+        <p:style>
+          <a:lnRef idx="2">
+            <a:schemeClr val="accent1">
+              <a:shade val="15000"/>
+            </a:schemeClr>
+          </a:lnRef>
+          <a:fillRef idx="1">
+            <a:schemeClr val="accent1"/>
+          </a:fillRef>
+          <a:effectRef idx="0">
+            <a:schemeClr val="accent1"/>
+          </a:effectRef>
+          <a:fontRef idx="minor">
+            <a:schemeClr val="lt1"/>
+          </a:fontRef>
+        </p:style>
+        <p:txBody>
+          <a:bodyPr rtlCol="0" anchor="ctr"/>
+          <a:lstStyle/>
+          <a:p>
+            <a:pPr algn="ctr"/>
+            <a:endParaRPr lang="en-IE"/>
+          </a:p>
+        </p:txBody>
+      </p:sp>
+    </p:spTree>
+    <p:extLst>
+      <p:ext uri="{BB962C8B-B14F-4D97-AF65-F5344CB8AC3E}">
+        <p14:creationId xmlns:p14="http://schemas.microsoft.com/office/powerpoint/2010/main" val="1340470097"/>
+      </p:ext>
+    </p:extLst>
+  </p:cSld>
+  <p:clrMapOvr>
+    <a:masterClrMapping/>
+  </p:clrMapOvr>
+</p:sld>
+</file>
+
+<file path=ppt/slides/slide11.xml><?xml version="1.0" encoding="utf-8"?>
+<p:sld xmlns:a="http://schemas.openxmlformats.org/drawingml/2006/main" xmlns:r="http://schemas.openxmlformats.org/officeDocument/2006/relationships" xmlns:p="http://schemas.openxmlformats.org/presentationml/2006/main">
+  <p:cSld>
+    <p:spTree>
+      <p:nvGrpSpPr>
         <p:cNvPr id="1" name="">
           <a:extLst>
             <a:ext uri="{FF2B5EF4-FFF2-40B4-BE49-F238E27FC236}">
@@ -12225,7 +13441,7 @@
         </p:blipFill>
         <p:spPr>
           <a:xfrm>
-            <a:off x="16377461" y="29463"/>
+            <a:off x="16377461" y="3629119"/>
             <a:ext cx="5368986" cy="4774210"/>
           </a:xfrm>
           <a:prstGeom prst="rect">
@@ -12247,7 +13463,7 @@
         </p:nvGrpSpPr>
         <p:grpSpPr>
           <a:xfrm>
-            <a:off x="6405849" y="3165275"/>
+            <a:off x="6405851" y="6764933"/>
             <a:ext cx="17369977" cy="11751267"/>
             <a:chOff x="286030" y="2947559"/>
             <a:chExt cx="17369977" cy="11751267"/>
@@ -14181,7 +15397,7 @@
         </p:blipFill>
         <p:spPr>
           <a:xfrm>
-            <a:off x="19330662" y="5771452"/>
+            <a:off x="19330664" y="9371108"/>
             <a:ext cx="3585819" cy="2254948"/>
           </a:xfrm>
           <a:prstGeom prst="rect">
@@ -14217,7 +15433,7 @@
         </p:blipFill>
         <p:spPr>
           <a:xfrm>
-            <a:off x="9126952" y="6145321"/>
+            <a:off x="9126952" y="9744979"/>
             <a:ext cx="3585454" cy="1982685"/>
           </a:xfrm>
           <a:prstGeom prst="rect">
@@ -14254,7 +15470,7 @@
         </p:blipFill>
         <p:spPr bwMode="auto">
           <a:xfrm>
-            <a:off x="13963915" y="2325720"/>
+            <a:off x="13963915" y="5925376"/>
             <a:ext cx="4115234" cy="2139922"/>
           </a:xfrm>
           <a:prstGeom prst="rect">
@@ -14301,7 +15517,7 @@
         </p:blipFill>
         <p:spPr bwMode="auto">
           <a:xfrm>
-            <a:off x="14451018" y="542940"/>
+            <a:off x="14451020" y="4142596"/>
             <a:ext cx="2435749" cy="1567352"/>
           </a:xfrm>
           <a:prstGeom prst="rect">
@@ -14348,7 +15564,7 @@
         </p:blipFill>
         <p:spPr bwMode="auto">
           <a:xfrm>
-            <a:off x="8854665" y="11067707"/>
+            <a:off x="8854665" y="14667365"/>
             <a:ext cx="3908804" cy="3579813"/>
           </a:xfrm>
           <a:prstGeom prst="rect">
@@ -14395,7 +15611,7 @@
         </p:blipFill>
         <p:spPr bwMode="auto">
           <a:xfrm>
-            <a:off x="14085840" y="12792478"/>
+            <a:off x="14085842" y="16392134"/>
             <a:ext cx="4872885" cy="2789194"/>
           </a:xfrm>
           <a:prstGeom prst="rect">
@@ -14442,7 +15658,7 @@
         </p:blipFill>
         <p:spPr bwMode="auto">
           <a:xfrm>
-            <a:off x="19991501" y="11093020"/>
+            <a:off x="19991501" y="14692676"/>
             <a:ext cx="3371614" cy="3371614"/>
           </a:xfrm>
           <a:prstGeom prst="rect">
@@ -14489,7 +15705,7 @@
         </p:blipFill>
         <p:spPr bwMode="auto">
           <a:xfrm>
-            <a:off x="9229033" y="825421"/>
+            <a:off x="9229035" y="4425079"/>
             <a:ext cx="3227499" cy="3227499"/>
           </a:xfrm>
           <a:prstGeom prst="rect">
@@ -14521,7 +15737,7 @@
         </p:nvSpPr>
         <p:spPr>
           <a:xfrm>
-            <a:off x="8172133" y="243840"/>
+            <a:off x="8172133" y="3843496"/>
             <a:ext cx="15544800" cy="4470400"/>
           </a:xfrm>
           <a:prstGeom prst="roundRect">
@@ -14580,7 +15796,7 @@
         </p:nvSpPr>
         <p:spPr>
           <a:xfrm>
-            <a:off x="8202614" y="5207856"/>
+            <a:off x="8202614" y="8807512"/>
             <a:ext cx="15544800" cy="4909804"/>
           </a:xfrm>
           <a:prstGeom prst="roundRect">
@@ -14639,7 +15855,7 @@
         </p:nvSpPr>
         <p:spPr>
           <a:xfrm>
-            <a:off x="8233093" y="10586721"/>
+            <a:off x="8233093" y="14186377"/>
             <a:ext cx="15544800" cy="5332300"/>
           </a:xfrm>
           <a:prstGeom prst="roundRect">
@@ -14713,7 +15929,7 @@
         </p:blipFill>
         <p:spPr bwMode="auto">
           <a:xfrm>
-            <a:off x="19438221" y="679142"/>
+            <a:off x="19438221" y="4278798"/>
             <a:ext cx="3478254" cy="3478254"/>
           </a:xfrm>
           <a:prstGeom prst="rect">
@@ -14745,7 +15961,7 @@
         </p:nvSpPr>
         <p:spPr>
           <a:xfrm rot="16200000">
-            <a:off x="5387581" y="1689187"/>
+            <a:off x="5387583" y="5288843"/>
             <a:ext cx="4035097" cy="1077218"/>
           </a:xfrm>
           <a:prstGeom prst="rect">
@@ -14785,7 +16001,7 @@
         </p:nvSpPr>
         <p:spPr>
           <a:xfrm rot="16200000">
-            <a:off x="5397740" y="6962227"/>
+            <a:off x="5397742" y="10561883"/>
             <a:ext cx="4035097" cy="1077218"/>
           </a:xfrm>
           <a:prstGeom prst="rect">
@@ -14825,7 +16041,7 @@
         </p:nvSpPr>
         <p:spPr>
           <a:xfrm rot="16200000">
-            <a:off x="5509500" y="12621347"/>
+            <a:off x="5509502" y="16221003"/>
             <a:ext cx="4035097" cy="1077218"/>
           </a:xfrm>
           <a:prstGeom prst="rect">
@@ -14873,7 +16089,7 @@
         </p:blipFill>
         <p:spPr>
           <a:xfrm>
-            <a:off x="13582994" y="5501394"/>
+            <a:off x="13582994" y="9101050"/>
             <a:ext cx="4877076" cy="4359810"/>
           </a:xfrm>
           <a:prstGeom prst="rect">
@@ -14925,7 +16141,7 @@
         </p:nvSpPr>
         <p:spPr>
           <a:xfrm>
-            <a:off x="12795659" y="3248054"/>
+            <a:off x="12795661" y="6847712"/>
             <a:ext cx="4303049" cy="4136823"/>
           </a:xfrm>
           <a:prstGeom prst="roundRect">
@@ -15001,7 +16217,7 @@
         </p:nvGrpSpPr>
         <p:grpSpPr>
           <a:xfrm>
-            <a:off x="6377204" y="10890064"/>
+            <a:off x="6377204" y="14489722"/>
             <a:ext cx="6156256" cy="4800795"/>
             <a:chOff x="225113" y="9141619"/>
             <a:chExt cx="5730786" cy="4281540"/>
@@ -15138,7 +16354,7 @@
         </p:nvSpPr>
         <p:spPr>
           <a:xfrm>
-            <a:off x="12039255" y="2580459"/>
+            <a:off x="12039255" y="6180117"/>
             <a:ext cx="5730786" cy="646331"/>
           </a:xfrm>
           <a:prstGeom prst="rect">
@@ -15178,7 +16394,7 @@
         </p:nvGrpSpPr>
         <p:grpSpPr>
           <a:xfrm>
-            <a:off x="17646323" y="10816938"/>
+            <a:off x="17646323" y="14416596"/>
             <a:ext cx="6156256" cy="4881483"/>
             <a:chOff x="11591831" y="9246292"/>
             <a:chExt cx="6156256" cy="4881482"/>
@@ -15379,7 +16595,7 @@
         </p:nvGrpSpPr>
         <p:grpSpPr>
           <a:xfrm>
-            <a:off x="7816675" y="11312831"/>
+            <a:off x="7816677" y="14912487"/>
             <a:ext cx="3161011" cy="3215018"/>
             <a:chOff x="1594225" y="9742189"/>
             <a:chExt cx="3161011" cy="3215018"/>
@@ -15492,7 +16708,7 @@
         </p:nvCxnSpPr>
         <p:spPr>
           <a:xfrm flipV="1">
-            <a:off x="9719230" y="7430272"/>
+            <a:off x="9719232" y="11029928"/>
             <a:ext cx="2997323" cy="3139776"/>
           </a:xfrm>
           <a:prstGeom prst="straightConnector1">
@@ -15536,7 +16752,7 @@
         </p:nvCxnSpPr>
         <p:spPr>
           <a:xfrm flipH="1">
-            <a:off x="9898712" y="7635549"/>
+            <a:off x="9898714" y="11235207"/>
             <a:ext cx="2960525" cy="3112115"/>
           </a:xfrm>
           <a:prstGeom prst="straightConnector1">
@@ -15578,7 +16794,7 @@
         </p:nvSpPr>
         <p:spPr>
           <a:xfrm rot="18828662">
-            <a:off x="9451298" y="8582309"/>
+            <a:off x="9451300" y="12181965"/>
             <a:ext cx="3109915" cy="523220"/>
           </a:xfrm>
           <a:prstGeom prst="rect">
@@ -15614,7 +16830,7 @@
         </p:nvSpPr>
         <p:spPr>
           <a:xfrm rot="18828662">
-            <a:off x="10099241" y="9005230"/>
+            <a:off x="10099243" y="12604886"/>
             <a:ext cx="3109915" cy="523220"/>
           </a:xfrm>
           <a:prstGeom prst="rect">
@@ -15652,7 +16868,7 @@
         </p:nvCxnSpPr>
         <p:spPr>
           <a:xfrm flipH="1" flipV="1">
-            <a:off x="16913599" y="7598222"/>
+            <a:off x="16913599" y="11197878"/>
             <a:ext cx="2719222" cy="3077462"/>
           </a:xfrm>
           <a:prstGeom prst="straightConnector1">
@@ -15694,7 +16910,7 @@
         </p:nvSpPr>
         <p:spPr>
           <a:xfrm rot="2935289">
-            <a:off x="17059215" y="8519780"/>
+            <a:off x="17059217" y="12119436"/>
             <a:ext cx="3109915" cy="523220"/>
           </a:xfrm>
           <a:prstGeom prst="rect">
@@ -15732,7 +16948,7 @@
         </p:nvCxnSpPr>
         <p:spPr>
           <a:xfrm>
-            <a:off x="17173351" y="7542244"/>
+            <a:off x="17173353" y="11141902"/>
             <a:ext cx="2772793" cy="3138997"/>
           </a:xfrm>
           <a:prstGeom prst="straightConnector1">
@@ -15774,7 +16990,7 @@
         </p:nvSpPr>
         <p:spPr>
           <a:xfrm rot="2912262">
-            <a:off x="16379015" y="9061958"/>
+            <a:off x="16379015" y="12661614"/>
             <a:ext cx="3423398" cy="523220"/>
           </a:xfrm>
           <a:prstGeom prst="rect">
@@ -15810,7 +17026,7 @@
         </p:nvSpPr>
         <p:spPr>
           <a:xfrm>
-            <a:off x="19902603" y="14122198"/>
+            <a:off x="19902605" y="17721856"/>
             <a:ext cx="1802445" cy="646331"/>
           </a:xfrm>
           <a:prstGeom prst="rect">
@@ -15855,13 +17071,13 @@
         </p:nvSpPr>
         <p:spPr>
           <a:xfrm>
-            <a:off x="6612733" y="533401"/>
+            <a:off x="6612735" y="4133059"/>
             <a:ext cx="17189847" cy="1665633"/>
           </a:xfrm>
         </p:spPr>
         <p:txBody>
           <a:bodyPr>
-            <a:normAutofit/>
+            <a:normAutofit fontScale="90000"/>
           </a:bodyPr>
           <a:lstStyle/>
           <a:p>
@@ -15901,7 +17117,7 @@
         </p:blipFill>
         <p:spPr>
           <a:xfrm>
-            <a:off x="12978692" y="3406574"/>
+            <a:off x="12978694" y="7006230"/>
             <a:ext cx="3893439" cy="3477750"/>
           </a:xfrm>
           <a:prstGeom prst="rect">
@@ -15923,7 +17139,7 @@
         </p:nvSpPr>
         <p:spPr>
           <a:xfrm>
-            <a:off x="13586368" y="6626843"/>
+            <a:off x="13586368" y="10226501"/>
             <a:ext cx="2766018" cy="646331"/>
           </a:xfrm>
           <a:prstGeom prst="rect">
@@ -16000,7 +17216,7 @@
           </p:nvPr>
         </p:nvGraphicFramePr>
         <p:xfrm>
-          <a:off x="124849" y="1863059"/>
+          <a:off x="124851" y="5462717"/>
           <a:ext cx="29988439" cy="12157741"/>
         </p:xfrm>
         <a:graphic>
@@ -17073,7 +18289,7 @@
         </p:blipFill>
         <p:spPr>
           <a:xfrm>
-            <a:off x="16327073" y="75134"/>
+            <a:off x="16327075" y="3674792"/>
             <a:ext cx="6537343" cy="5813137"/>
           </a:xfrm>
           <a:prstGeom prst="rect">
@@ -17095,7 +18311,7 @@
         </p:nvGrpSpPr>
         <p:grpSpPr>
           <a:xfrm>
-            <a:off x="6253710" y="3173631"/>
+            <a:off x="6253710" y="6773287"/>
             <a:ext cx="17669120" cy="12166530"/>
             <a:chOff x="133892" y="2759406"/>
             <a:chExt cx="17669120" cy="12166530"/>
@@ -19118,7 +20334,7 @@
           </p:nvPr>
         </p:nvGraphicFramePr>
         <p:xfrm>
-          <a:off x="2954252" y="3993740"/>
+          <a:off x="2954252" y="7593398"/>
           <a:ext cx="9834878" cy="9234585"/>
         </p:xfrm>
         <a:graphic>
@@ -19141,7 +20357,7 @@
         </p:nvCxnSpPr>
         <p:spPr>
           <a:xfrm>
-            <a:off x="11625080" y="2830284"/>
+            <a:off x="11625080" y="6429940"/>
             <a:ext cx="0" cy="11988800"/>
           </a:xfrm>
           <a:prstGeom prst="line">
@@ -19182,7 +20398,7 @@
         </p:nvSpPr>
         <p:spPr>
           <a:xfrm>
-            <a:off x="4546470" y="812806"/>
+            <a:off x="4546472" y="4412464"/>
             <a:ext cx="17035943" cy="1015663"/>
           </a:xfrm>
           <a:prstGeom prst="rect">
@@ -19217,7 +20433,7 @@
         </p:nvGrpSpPr>
         <p:grpSpPr>
           <a:xfrm>
-            <a:off x="12985070" y="1402083"/>
+            <a:off x="12985072" y="5001739"/>
             <a:ext cx="12115789" cy="13985556"/>
             <a:chOff x="7489828" y="1402082"/>
             <a:chExt cx="12115789" cy="13985556"/>
@@ -20479,7 +21695,7 @@
           </p:nvPr>
         </p:nvGraphicFramePr>
         <p:xfrm>
-          <a:off x="2929732" y="2808518"/>
+          <a:off x="2929732" y="6408176"/>
           <a:ext cx="24993600" cy="11457037"/>
         </p:xfrm>
         <a:graphic>
@@ -22695,7 +23911,7 @@
         </p:nvSpPr>
         <p:spPr>
           <a:xfrm>
-            <a:off x="4733132" y="628853"/>
+            <a:off x="4733132" y="4228511"/>
             <a:ext cx="20523200" cy="1489831"/>
           </a:xfrm>
         </p:spPr>
@@ -22732,7 +23948,7 @@
           </p:nvPr>
         </p:nvGraphicFramePr>
         <p:xfrm>
-          <a:off x="6732355" y="2748605"/>
+          <a:off x="6732357" y="6348263"/>
           <a:ext cx="16775589" cy="12578487"/>
         </p:xfrm>
         <a:graphic>
@@ -22773,10 +23989,10 @@
       </p:grpSpPr>
       <p:sp>
         <p:nvSpPr>
-          <p:cNvPr id="4" name="Title 1">
+          <p:cNvPr id="2" name="Title 1">
             <a:extLst>
               <a:ext uri="{FF2B5EF4-FFF2-40B4-BE49-F238E27FC236}">
-                <a16:creationId xmlns:a16="http://schemas.microsoft.com/office/drawing/2014/main" id="{058B3095-0260-7A2F-3594-5D20E6B23DF2}"/>
+                <a16:creationId xmlns:a16="http://schemas.microsoft.com/office/drawing/2014/main" id="{CF74D0AD-7D60-F80E-532B-CE9F849C1363}"/>
               </a:ext>
             </a:extLst>
           </p:cNvPr>
@@ -22789,8 +24005,8 @@
         </p:nvSpPr>
         <p:spPr>
           <a:xfrm>
-            <a:off x="5012533" y="736919"/>
-            <a:ext cx="19521399" cy="2378513"/>
+            <a:off x="2116326" y="522668"/>
+            <a:ext cx="26082248" cy="1674936"/>
           </a:xfrm>
         </p:spPr>
         <p:txBody>
@@ -22801,18 +24017,18 @@
           <a:p>
             <a:pPr algn="ctr"/>
             <a:r>
-              <a:rPr lang="en-IE" b="1" dirty="0"/>
-              <a:t>Mapping of TaskTide Components      to Pilot Job Model</a:t>
+              <a:rPr lang="en-IE" b="1" i="1" dirty="0"/>
+              <a:t>Distributed Mutex Workflow</a:t>
             </a:r>
           </a:p>
         </p:txBody>
       </p:sp>
       <p:sp>
         <p:nvSpPr>
-          <p:cNvPr id="5" name="Rectangle: Rounded Corners 4">
+          <p:cNvPr id="4" name="Rectangle: Rounded Corners 3">
             <a:extLst>
               <a:ext uri="{FF2B5EF4-FFF2-40B4-BE49-F238E27FC236}">
-                <a16:creationId xmlns:a16="http://schemas.microsoft.com/office/drawing/2014/main" id="{7A3B5530-C2C5-432B-8650-01D5F92A1DA7}"/>
+                <a16:creationId xmlns:a16="http://schemas.microsoft.com/office/drawing/2014/main" id="{6C7AF9FA-7438-5E00-C10B-5BDCEAA71E27}"/>
               </a:ext>
             </a:extLst>
           </p:cNvPr>
@@ -22821,38 +24037,20 @@
         </p:nvSpPr>
         <p:spPr>
           <a:xfrm>
-            <a:off x="6404293" y="3962400"/>
-            <a:ext cx="5303520" cy="3962400"/>
+            <a:off x="190500" y="3825969"/>
+            <a:ext cx="29851350" cy="6923211"/>
           </a:xfrm>
           <a:prstGeom prst="roundRect">
             <a:avLst/>
           </a:prstGeom>
           <a:solidFill>
-            <a:srgbClr val="B56576"/>
+            <a:srgbClr val="E6EAED"/>
           </a:solidFill>
-          <a:ln w="76200">
+          <a:ln w="57150">
             <a:solidFill>
               <a:schemeClr val="tx1"/>
             </a:solidFill>
           </a:ln>
-          <a:effectLst>
-            <a:outerShdw blurRad="44450" dist="27940" dir="5400000" algn="ctr">
-              <a:srgbClr val="000000">
-                <a:alpha val="32000"/>
-              </a:srgbClr>
-            </a:outerShdw>
-          </a:effectLst>
-          <a:scene3d>
-            <a:camera prst="orthographicFront">
-              <a:rot lat="0" lon="0" rev="0"/>
-            </a:camera>
-            <a:lightRig rig="balanced" dir="t">
-              <a:rot lat="0" lon="0" rev="8700000"/>
-            </a:lightRig>
-          </a:scene3d>
-          <a:sp3d>
-            <a:bevelT w="190500" h="38100"/>
-          </a:sp3d>
         </p:spPr>
         <p:style>
           <a:lnRef idx="2">
@@ -22875,26 +24073,333 @@
           <a:lstStyle/>
           <a:p>
             <a:pPr algn="ctr"/>
-            <a:r>
-              <a:rPr lang="en-IE" sz="4400" b="1" dirty="0"/>
-              <a:t>Pilot Manager</a:t>
-            </a:r>
+            <a:endParaRPr lang="en-IE" b="1" dirty="0"/>
           </a:p>
+        </p:txBody>
+      </p:sp>
+      <p:sp>
+        <p:nvSpPr>
+          <p:cNvPr id="7" name="TextBox 6">
+            <a:extLst>
+              <a:ext uri="{FF2B5EF4-FFF2-40B4-BE49-F238E27FC236}">
+                <a16:creationId xmlns:a16="http://schemas.microsoft.com/office/drawing/2014/main" id="{D9CDF24C-6E41-99FF-7335-D2539468AD92}"/>
+              </a:ext>
+            </a:extLst>
+          </p:cNvPr>
+          <p:cNvSpPr txBox="1"/>
+          <p:nvPr/>
+        </p:nvSpPr>
+        <p:spPr>
+          <a:xfrm>
+            <a:off x="423801" y="4198046"/>
+            <a:ext cx="9277350" cy="830997"/>
+          </a:xfrm>
+          <a:prstGeom prst="rect">
+            <a:avLst/>
+          </a:prstGeom>
+          <a:noFill/>
+        </p:spPr>
+        <p:txBody>
+          <a:bodyPr wrap="square" rtlCol="0">
+            <a:spAutoFit/>
+          </a:bodyPr>
+          <a:lstStyle/>
           <a:p>
             <a:pPr algn="ctr"/>
             <a:r>
-              <a:rPr lang="en-IE" sz="3600" b="1" i="1" dirty="0"/>
-              <a:t>(Provisioning)</a:t>
+              <a:rPr lang="en-IE" sz="4800" b="1" i="1" dirty="0"/>
+              <a:t>1). Enqueue Election Ballot</a:t>
+            </a:r>
+          </a:p>
+        </p:txBody>
+      </p:sp>
+      <p:grpSp>
+        <p:nvGrpSpPr>
+          <p:cNvPr id="22" name="Group 21">
+            <a:extLst>
+              <a:ext uri="{FF2B5EF4-FFF2-40B4-BE49-F238E27FC236}">
+                <a16:creationId xmlns:a16="http://schemas.microsoft.com/office/drawing/2014/main" id="{10E05E10-B54C-55AA-F4C5-B5805511BA2C}"/>
+              </a:ext>
+            </a:extLst>
+          </p:cNvPr>
+          <p:cNvGrpSpPr/>
+          <p:nvPr/>
+        </p:nvGrpSpPr>
+        <p:grpSpPr>
+          <a:xfrm>
+            <a:off x="495300" y="5132799"/>
+            <a:ext cx="9277350" cy="5044882"/>
+            <a:chOff x="609600" y="4232468"/>
+            <a:chExt cx="9277350" cy="5044882"/>
+          </a:xfrm>
+        </p:grpSpPr>
+        <p:sp>
+          <p:nvSpPr>
+            <p:cNvPr id="6" name="Rectangle: Rounded Corners 5">
+              <a:extLst>
+                <a:ext uri="{FF2B5EF4-FFF2-40B4-BE49-F238E27FC236}">
+                  <a16:creationId xmlns:a16="http://schemas.microsoft.com/office/drawing/2014/main" id="{A98F1016-6507-D524-42D1-7AB16F226F63}"/>
+                </a:ext>
+              </a:extLst>
+            </p:cNvPr>
+            <p:cNvSpPr/>
+            <p:nvPr/>
+          </p:nvSpPr>
+          <p:spPr>
+            <a:xfrm>
+              <a:off x="609600" y="4232468"/>
+              <a:ext cx="9277350" cy="5044882"/>
+            </a:xfrm>
+            <a:prstGeom prst="roundRect">
+              <a:avLst/>
+            </a:prstGeom>
+            <a:gradFill flip="none" rotWithShape="1">
+              <a:gsLst>
+                <a:gs pos="0">
+                  <a:schemeClr val="accent1">
+                    <a:shade val="30000"/>
+                    <a:satMod val="115000"/>
+                  </a:schemeClr>
+                </a:gs>
+                <a:gs pos="50000">
+                  <a:schemeClr val="accent1">
+                    <a:shade val="67500"/>
+                    <a:satMod val="115000"/>
+                  </a:schemeClr>
+                </a:gs>
+                <a:gs pos="100000">
+                  <a:schemeClr val="accent1">
+                    <a:shade val="100000"/>
+                    <a:satMod val="115000"/>
+                  </a:schemeClr>
+                </a:gs>
+              </a:gsLst>
+              <a:lin ang="13500000" scaled="1"/>
+              <a:tileRect/>
+            </a:gradFill>
+            <a:ln w="57150">
+              <a:solidFill>
+                <a:schemeClr val="tx1"/>
+              </a:solidFill>
+            </a:ln>
+          </p:spPr>
+          <p:style>
+            <a:lnRef idx="2">
+              <a:schemeClr val="accent1">
+                <a:shade val="15000"/>
+              </a:schemeClr>
+            </a:lnRef>
+            <a:fillRef idx="1">
+              <a:schemeClr val="accent1"/>
+            </a:fillRef>
+            <a:effectRef idx="0">
+              <a:schemeClr val="accent1"/>
+            </a:effectRef>
+            <a:fontRef idx="minor">
+              <a:schemeClr val="lt1"/>
+            </a:fontRef>
+          </p:style>
+          <p:txBody>
+            <a:bodyPr rtlCol="0" anchor="ctr"/>
+            <a:lstStyle/>
+            <a:p>
+              <a:endParaRPr lang="en-IE" sz="3200" b="1" dirty="0"/>
+            </a:p>
+            <a:p>
+              <a:r>
+                <a:rPr lang="en-IE" sz="3200" b="1" dirty="0"/>
+                <a:t>  Mutex {</a:t>
+              </a:r>
+            </a:p>
+            <a:p>
+              <a:r>
+                <a:rPr lang="en-IE" sz="3200" b="1" dirty="0"/>
+                <a:t>         Id: &lt;Random UUID&gt;,</a:t>
+              </a:r>
+            </a:p>
+            <a:p>
+              <a:r>
+                <a:rPr lang="en-IE" sz="3200" b="1" dirty="0"/>
+                <a:t>         Time Stamp: &lt; EPOCH Time&gt;,</a:t>
+              </a:r>
+            </a:p>
+            <a:p>
+              <a:r>
+                <a:rPr lang="en-IE" sz="3200" b="1" dirty="0"/>
+                <a:t>         Lock File: &lt;Full File Path&gt;,</a:t>
+              </a:r>
+            </a:p>
+            <a:p>
+              <a:r>
+                <a:rPr lang="en-IE" sz="3200" b="1" dirty="0"/>
+                <a:t>         Election File: &lt;Full File Path&gt;,</a:t>
+              </a:r>
+            </a:p>
+            <a:p>
+              <a:r>
+                <a:rPr lang="en-IE" sz="3200" b="1" dirty="0"/>
+                <a:t>         Mutex State: &lt;INIT | WAIT | LOCKED&gt;</a:t>
+              </a:r>
+            </a:p>
+            <a:p>
+              <a:r>
+                <a:rPr lang="en-IE" sz="3200" b="1" dirty="0"/>
+                <a:t>  }</a:t>
+              </a:r>
+            </a:p>
+          </p:txBody>
+        </p:sp>
+        <p:grpSp>
+          <p:nvGrpSpPr>
+            <p:cNvPr id="13" name="Group 12">
+              <a:extLst>
+                <a:ext uri="{FF2B5EF4-FFF2-40B4-BE49-F238E27FC236}">
+                  <a16:creationId xmlns:a16="http://schemas.microsoft.com/office/drawing/2014/main" id="{865AB9DE-E928-5C65-E445-AC34F60D20B4}"/>
+                </a:ext>
+              </a:extLst>
+            </p:cNvPr>
+            <p:cNvGrpSpPr/>
+            <p:nvPr/>
+          </p:nvGrpSpPr>
+          <p:grpSpPr>
+            <a:xfrm>
+              <a:off x="609600" y="4385666"/>
+              <a:ext cx="9048750" cy="529234"/>
+              <a:chOff x="914400" y="4442816"/>
+              <a:chExt cx="9048750" cy="529234"/>
+            </a:xfrm>
+          </p:grpSpPr>
+          <p:sp>
+            <p:nvSpPr>
+              <p:cNvPr id="9" name="TextBox 8">
+                <a:extLst>
+                  <a:ext uri="{FF2B5EF4-FFF2-40B4-BE49-F238E27FC236}">
+                    <a16:creationId xmlns:a16="http://schemas.microsoft.com/office/drawing/2014/main" id="{9D526A3C-335E-5F13-5100-FB52658BE261}"/>
+                  </a:ext>
+                </a:extLst>
+              </p:cNvPr>
+              <p:cNvSpPr txBox="1"/>
+              <p:nvPr/>
+            </p:nvSpPr>
+            <p:spPr>
+              <a:xfrm>
+                <a:off x="914400" y="4442816"/>
+                <a:ext cx="9048750" cy="523220"/>
+              </a:xfrm>
+              <a:prstGeom prst="rect">
+                <a:avLst/>
+              </a:prstGeom>
+              <a:noFill/>
+            </p:spPr>
+            <p:txBody>
+              <a:bodyPr wrap="square">
+                <a:spAutoFit/>
+              </a:bodyPr>
+              <a:lstStyle/>
+              <a:p>
+                <a:pPr algn="ctr"/>
+                <a:r>
+                  <a:rPr lang="en-IE" sz="2800" b="1" dirty="0">
+                    <a:solidFill>
+                      <a:schemeClr val="bg1"/>
+                    </a:solidFill>
+                  </a:rPr>
+                  <a:t>1769689749-HostA-InstanceA.json</a:t>
+                </a:r>
+              </a:p>
+            </p:txBody>
+          </p:sp>
+          <p:cxnSp>
+            <p:nvCxnSpPr>
+              <p:cNvPr id="11" name="Straight Connector 10">
+                <a:extLst>
+                  <a:ext uri="{FF2B5EF4-FFF2-40B4-BE49-F238E27FC236}">
+                    <a16:creationId xmlns:a16="http://schemas.microsoft.com/office/drawing/2014/main" id="{794C1588-459B-325B-CB2C-AF92EF1C09F6}"/>
+                  </a:ext>
+                </a:extLst>
+              </p:cNvPr>
+              <p:cNvCxnSpPr>
+                <a:cxnSpLocks/>
+              </p:cNvCxnSpPr>
+              <p:nvPr/>
+            </p:nvCxnSpPr>
+            <p:spPr>
+              <a:xfrm>
+                <a:off x="1412270" y="4972050"/>
+                <a:ext cx="8112730" cy="0"/>
+              </a:xfrm>
+              <a:prstGeom prst="line">
+                <a:avLst/>
+              </a:prstGeom>
+              <a:ln w="19050" cap="flat" cmpd="sng" algn="ctr">
+                <a:solidFill>
+                  <a:schemeClr val="bg1"/>
+                </a:solidFill>
+                <a:prstDash val="dash"/>
+                <a:round/>
+                <a:headEnd type="none" w="med" len="med"/>
+                <a:tailEnd type="none" w="med" len="med"/>
+              </a:ln>
+            </p:spPr>
+            <p:style>
+              <a:lnRef idx="0">
+                <a:scrgbClr r="0" g="0" b="0"/>
+              </a:lnRef>
+              <a:fillRef idx="0">
+                <a:scrgbClr r="0" g="0" b="0"/>
+              </a:fillRef>
+              <a:effectRef idx="0">
+                <a:scrgbClr r="0" g="0" b="0"/>
+              </a:effectRef>
+              <a:fontRef idx="minor">
+                <a:schemeClr val="tx1"/>
+              </a:fontRef>
+            </p:style>
+          </p:cxnSp>
+        </p:grpSp>
+      </p:grpSp>
+      <p:sp>
+        <p:nvSpPr>
+          <p:cNvPr id="15" name="TextBox 14">
+            <a:extLst>
+              <a:ext uri="{FF2B5EF4-FFF2-40B4-BE49-F238E27FC236}">
+                <a16:creationId xmlns:a16="http://schemas.microsoft.com/office/drawing/2014/main" id="{BBF690E4-2BAC-371E-4F36-F3BB9D5CB4E8}"/>
+              </a:ext>
+            </a:extLst>
+          </p:cNvPr>
+          <p:cNvSpPr txBox="1"/>
+          <p:nvPr/>
+        </p:nvSpPr>
+        <p:spPr>
+          <a:xfrm>
+            <a:off x="11316463" y="4198046"/>
+            <a:ext cx="9277350" cy="830997"/>
+          </a:xfrm>
+          <a:prstGeom prst="rect">
+            <a:avLst/>
+          </a:prstGeom>
+          <a:noFill/>
+        </p:spPr>
+        <p:txBody>
+          <a:bodyPr wrap="square" rtlCol="0">
+            <a:spAutoFit/>
+          </a:bodyPr>
+          <a:lstStyle/>
+          <a:p>
+            <a:pPr algn="ctr"/>
+            <a:r>
+              <a:rPr lang="en-IE" sz="4800" b="1" i="1" dirty="0"/>
+              <a:t>2). Discover FIFO Position</a:t>
             </a:r>
           </a:p>
         </p:txBody>
       </p:sp>
       <p:sp>
         <p:nvSpPr>
-          <p:cNvPr id="8" name="Rectangle: Rounded Corners 7">
+          <p:cNvPr id="14" name="Rectangle: Rounded Corners 13">
             <a:extLst>
               <a:ext uri="{FF2B5EF4-FFF2-40B4-BE49-F238E27FC236}">
-                <a16:creationId xmlns:a16="http://schemas.microsoft.com/office/drawing/2014/main" id="{32C7CA26-DC3F-D8BF-1823-0FC5B1F42429}"/>
+                <a16:creationId xmlns:a16="http://schemas.microsoft.com/office/drawing/2014/main" id="{6C6F972B-C4A3-ADE2-9B28-D6F6A4C141B6}"/>
               </a:ext>
             </a:extLst>
           </p:cNvPr>
@@ -22903,38 +24408,41 @@
         </p:nvSpPr>
         <p:spPr>
           <a:xfrm>
-            <a:off x="6404293" y="11247120"/>
-            <a:ext cx="5303520" cy="3962400"/>
+            <a:off x="11887200" y="5501099"/>
+            <a:ext cx="7905750" cy="4037241"/>
           </a:xfrm>
           <a:prstGeom prst="roundRect">
             <a:avLst/>
           </a:prstGeom>
-          <a:solidFill>
-            <a:srgbClr val="B56576"/>
-          </a:solidFill>
-          <a:ln w="76200">
+          <a:gradFill flip="none" rotWithShape="1">
+            <a:gsLst>
+              <a:gs pos="0">
+                <a:schemeClr val="accent1">
+                  <a:shade val="30000"/>
+                  <a:satMod val="115000"/>
+                </a:schemeClr>
+              </a:gs>
+              <a:gs pos="50000">
+                <a:schemeClr val="accent1">
+                  <a:shade val="67500"/>
+                  <a:satMod val="115000"/>
+                </a:schemeClr>
+              </a:gs>
+              <a:gs pos="100000">
+                <a:schemeClr val="accent1">
+                  <a:shade val="100000"/>
+                  <a:satMod val="115000"/>
+                </a:schemeClr>
+              </a:gs>
+            </a:gsLst>
+            <a:lin ang="13500000" scaled="1"/>
+            <a:tileRect/>
+          </a:gradFill>
+          <a:ln w="57150">
             <a:solidFill>
               <a:schemeClr val="tx1"/>
             </a:solidFill>
           </a:ln>
-          <a:effectLst>
-            <a:outerShdw blurRad="44450" dist="27940" dir="5400000" algn="ctr">
-              <a:srgbClr val="000000">
-                <a:alpha val="32000"/>
-              </a:srgbClr>
-            </a:outerShdw>
-          </a:effectLst>
-          <a:scene3d>
-            <a:camera prst="orthographicFront">
-              <a:rot lat="0" lon="0" rev="0"/>
-            </a:camera>
-            <a:lightRig rig="balanced" dir="t">
-              <a:rot lat="0" lon="0" rev="8700000"/>
-            </a:lightRig>
-          </a:scene3d>
-          <a:sp3d>
-            <a:bevelT w="190500" h="38100"/>
-          </a:sp3d>
         </p:spPr>
         <p:style>
           <a:lnRef idx="2">
@@ -22957,26 +24465,124 @@
           <a:lstStyle/>
           <a:p>
             <a:pPr algn="ctr"/>
-            <a:r>
-              <a:rPr lang="en-IE" sz="4000" b="1" dirty="0"/>
-              <a:t>Delegate to Schedulers</a:t>
-            </a:r>
-          </a:p>
-          <a:p>
-            <a:pPr algn="ctr"/>
-            <a:r>
-              <a:rPr lang="en-IE" sz="3600" b="1" i="1" dirty="0"/>
-              <a:t>(SLURM, K8s etc)</a:t>
-            </a:r>
+            <a:endParaRPr lang="en-IE" sz="3200" b="1" dirty="0"/>
           </a:p>
         </p:txBody>
       </p:sp>
+      <p:grpSp>
+        <p:nvGrpSpPr>
+          <p:cNvPr id="16" name="Group 15">
+            <a:extLst>
+              <a:ext uri="{FF2B5EF4-FFF2-40B4-BE49-F238E27FC236}">
+                <a16:creationId xmlns:a16="http://schemas.microsoft.com/office/drawing/2014/main" id="{64CC6A90-C0EB-A4B6-BC65-86380C1FB3C9}"/>
+              </a:ext>
+            </a:extLst>
+          </p:cNvPr>
+          <p:cNvGrpSpPr/>
+          <p:nvPr/>
+        </p:nvGrpSpPr>
+        <p:grpSpPr>
+          <a:xfrm>
+            <a:off x="12017069" y="5623699"/>
+            <a:ext cx="7710947" cy="499728"/>
+            <a:chOff x="914400" y="4442816"/>
+            <a:chExt cx="9048750" cy="624453"/>
+          </a:xfrm>
+        </p:grpSpPr>
+        <p:sp>
+          <p:nvSpPr>
+            <p:cNvPr id="17" name="TextBox 16">
+              <a:extLst>
+                <a:ext uri="{FF2B5EF4-FFF2-40B4-BE49-F238E27FC236}">
+                  <a16:creationId xmlns:a16="http://schemas.microsoft.com/office/drawing/2014/main" id="{69019241-98B9-86DF-7A70-BAC7C03C6376}"/>
+                </a:ext>
+              </a:extLst>
+            </p:cNvPr>
+            <p:cNvSpPr txBox="1"/>
+            <p:nvPr/>
+          </p:nvSpPr>
+          <p:spPr>
+            <a:xfrm>
+              <a:off x="914400" y="4442816"/>
+              <a:ext cx="9048750" cy="554636"/>
+            </a:xfrm>
+            <a:prstGeom prst="rect">
+              <a:avLst/>
+            </a:prstGeom>
+            <a:noFill/>
+          </p:spPr>
+          <p:txBody>
+            <a:bodyPr wrap="square">
+              <a:spAutoFit/>
+            </a:bodyPr>
+            <a:lstStyle/>
+            <a:p>
+              <a:pPr algn="ctr"/>
+              <a:r>
+                <a:rPr lang="en-IE" sz="2800" b="1" dirty="0">
+                  <a:solidFill>
+                    <a:schemeClr val="bg1"/>
+                  </a:solidFill>
+                </a:rPr>
+                <a:t>Configured Election Directory</a:t>
+              </a:r>
+            </a:p>
+          </p:txBody>
+        </p:sp>
+        <p:cxnSp>
+          <p:nvCxnSpPr>
+            <p:cNvPr id="18" name="Straight Connector 17">
+              <a:extLst>
+                <a:ext uri="{FF2B5EF4-FFF2-40B4-BE49-F238E27FC236}">
+                  <a16:creationId xmlns:a16="http://schemas.microsoft.com/office/drawing/2014/main" id="{B1DE96AB-CD56-E5FA-7030-6F555209E755}"/>
+                </a:ext>
+              </a:extLst>
+            </p:cNvPr>
+            <p:cNvCxnSpPr>
+              <a:cxnSpLocks/>
+            </p:cNvCxnSpPr>
+            <p:nvPr/>
+          </p:nvCxnSpPr>
+          <p:spPr>
+            <a:xfrm>
+              <a:off x="1412270" y="5067269"/>
+              <a:ext cx="8112730" cy="0"/>
+            </a:xfrm>
+            <a:prstGeom prst="line">
+              <a:avLst/>
+            </a:prstGeom>
+            <a:ln w="19050" cap="flat" cmpd="sng" algn="ctr">
+              <a:solidFill>
+                <a:schemeClr val="bg1"/>
+              </a:solidFill>
+              <a:prstDash val="dash"/>
+              <a:round/>
+              <a:headEnd type="none" w="med" len="med"/>
+              <a:tailEnd type="none" w="med" len="med"/>
+            </a:ln>
+          </p:spPr>
+          <p:style>
+            <a:lnRef idx="0">
+              <a:scrgbClr r="0" g="0" b="0"/>
+            </a:lnRef>
+            <a:fillRef idx="0">
+              <a:scrgbClr r="0" g="0" b="0"/>
+            </a:fillRef>
+            <a:effectRef idx="0">
+              <a:scrgbClr r="0" g="0" b="0"/>
+            </a:effectRef>
+            <a:fontRef idx="minor">
+              <a:schemeClr val="tx1"/>
+            </a:fontRef>
+          </p:style>
+        </p:cxnSp>
+      </p:grpSp>
       <p:sp>
         <p:nvSpPr>
-          <p:cNvPr id="10" name="Rectangle: Rounded Corners 9">
+          <p:cNvPr id="19" name="Arrow: Right 18">
             <a:extLst>
               <a:ext uri="{FF2B5EF4-FFF2-40B4-BE49-F238E27FC236}">
-                <a16:creationId xmlns:a16="http://schemas.microsoft.com/office/drawing/2014/main" id="{C61EACF5-381B-A801-9C56-2B9AA25037CB}"/>
+                <a16:creationId xmlns:a16="http://schemas.microsoft.com/office/drawing/2014/main" id="{B34B9CB4-2681-327E-1546-41998D4C06E8}"/>
               </a:ext>
             </a:extLst>
           </p:cNvPr>
@@ -22985,371 +24591,41 @@
         </p:nvSpPr>
         <p:spPr>
           <a:xfrm>
-            <a:off x="12449493" y="3952240"/>
-            <a:ext cx="5303520" cy="3962400"/>
+            <a:off x="10063163" y="6792275"/>
+            <a:ext cx="1619250" cy="1413703"/>
           </a:xfrm>
-          <a:prstGeom prst="roundRect">
+          <a:prstGeom prst="rightArrow">
             <a:avLst/>
           </a:prstGeom>
-          <a:solidFill>
-            <a:srgbClr val="4A4E69"/>
-          </a:solidFill>
-          <a:ln w="76200">
-            <a:solidFill>
-              <a:schemeClr val="tx1"/>
-            </a:solidFill>
-          </a:ln>
-          <a:effectLst>
-            <a:outerShdw blurRad="44450" dist="27940" dir="5400000" algn="ctr">
-              <a:srgbClr val="000000">
-                <a:alpha val="32000"/>
-              </a:srgbClr>
-            </a:outerShdw>
-          </a:effectLst>
-          <a:scene3d>
-            <a:camera prst="orthographicFront">
-              <a:rot lat="0" lon="0" rev="0"/>
-            </a:camera>
-            <a:lightRig rig="balanced" dir="t">
-              <a:rot lat="0" lon="0" rev="8700000"/>
-            </a:lightRig>
-          </a:scene3d>
-          <a:sp3d>
-            <a:bevelT w="190500" h="38100"/>
-          </a:sp3d>
-        </p:spPr>
-        <p:style>
-          <a:lnRef idx="2">
-            <a:schemeClr val="accent1">
-              <a:shade val="15000"/>
-            </a:schemeClr>
-          </a:lnRef>
-          <a:fillRef idx="1">
-            <a:schemeClr val="accent1"/>
-          </a:fillRef>
-          <a:effectRef idx="0">
-            <a:schemeClr val="accent1"/>
-          </a:effectRef>
-          <a:fontRef idx="minor">
-            <a:schemeClr val="lt1"/>
-          </a:fontRef>
-        </p:style>
-        <p:txBody>
-          <a:bodyPr rtlCol="0" anchor="ctr"/>
-          <a:lstStyle/>
-          <a:p>
-            <a:pPr algn="ctr"/>
-            <a:r>
-              <a:rPr lang="en-IE" sz="4400" b="1" dirty="0"/>
-              <a:t>Workload Manager</a:t>
-            </a:r>
-          </a:p>
-          <a:p>
-            <a:pPr algn="ctr"/>
-            <a:r>
-              <a:rPr lang="en-IE" sz="3600" b="1" i="1" dirty="0"/>
-              <a:t>(Dispatching)</a:t>
-            </a:r>
-          </a:p>
-        </p:txBody>
-      </p:sp>
-      <p:sp>
-        <p:nvSpPr>
-          <p:cNvPr id="11" name="Rectangle: Rounded Corners 10">
-            <a:extLst>
-              <a:ext uri="{FF2B5EF4-FFF2-40B4-BE49-F238E27FC236}">
-                <a16:creationId xmlns:a16="http://schemas.microsoft.com/office/drawing/2014/main" id="{BF4E2FC9-AA1E-2152-1294-D9B20D8F0939}"/>
-              </a:ext>
-            </a:extLst>
-          </p:cNvPr>
-          <p:cNvSpPr/>
-          <p:nvPr/>
-        </p:nvSpPr>
-        <p:spPr>
-          <a:xfrm>
-            <a:off x="12449493" y="11236960"/>
-            <a:ext cx="5303520" cy="3962400"/>
-          </a:xfrm>
-          <a:prstGeom prst="roundRect">
-            <a:avLst/>
-          </a:prstGeom>
-          <a:solidFill>
-            <a:srgbClr val="4A4E69"/>
-          </a:solidFill>
-          <a:ln w="76200">
-            <a:solidFill>
-              <a:schemeClr val="tx1"/>
-            </a:solidFill>
-          </a:ln>
-          <a:effectLst>
-            <a:outerShdw blurRad="44450" dist="27940" dir="5400000" algn="ctr">
-              <a:srgbClr val="000000">
-                <a:alpha val="32000"/>
-              </a:srgbClr>
-            </a:outerShdw>
-          </a:effectLst>
-          <a:scene3d>
-            <a:camera prst="orthographicFront">
-              <a:rot lat="0" lon="0" rev="0"/>
-            </a:camera>
-            <a:lightRig rig="balanced" dir="t">
-              <a:rot lat="0" lon="0" rev="8700000"/>
-            </a:lightRig>
-          </a:scene3d>
-          <a:sp3d>
-            <a:bevelT w="190500" h="38100"/>
-          </a:sp3d>
-        </p:spPr>
-        <p:style>
-          <a:lnRef idx="2">
-            <a:schemeClr val="accent1">
-              <a:shade val="15000"/>
-            </a:schemeClr>
-          </a:lnRef>
-          <a:fillRef idx="1">
-            <a:schemeClr val="accent1"/>
-          </a:fillRef>
-          <a:effectRef idx="0">
-            <a:schemeClr val="accent1"/>
-          </a:effectRef>
-          <a:fontRef idx="minor">
-            <a:schemeClr val="lt1"/>
-          </a:fontRef>
-        </p:style>
-        <p:txBody>
-          <a:bodyPr rtlCol="0" anchor="ctr"/>
-          <a:lstStyle/>
-          <a:p>
-            <a:pPr algn="ctr"/>
-            <a:r>
-              <a:rPr lang="en-IE" sz="4000" b="1" i="1" dirty="0"/>
-              <a:t>TaskTide Manager</a:t>
-            </a:r>
-          </a:p>
-          <a:p>
-            <a:pPr algn="ctr"/>
-            <a:r>
-              <a:rPr lang="en-IE" sz="4000" b="1" i="1" dirty="0"/>
-              <a:t>&amp;</a:t>
-            </a:r>
-          </a:p>
-          <a:p>
-            <a:pPr algn="ctr"/>
-            <a:r>
-              <a:rPr lang="en-IE" sz="4000" b="1" i="1" dirty="0"/>
-              <a:t>TaskTide Repository</a:t>
-            </a:r>
-            <a:endParaRPr lang="en-IE" sz="3600" b="1" i="1" dirty="0"/>
-          </a:p>
-        </p:txBody>
-      </p:sp>
-      <p:sp>
-        <p:nvSpPr>
-          <p:cNvPr id="13" name="Rectangle: Rounded Corners 12">
-            <a:extLst>
-              <a:ext uri="{FF2B5EF4-FFF2-40B4-BE49-F238E27FC236}">
-                <a16:creationId xmlns:a16="http://schemas.microsoft.com/office/drawing/2014/main" id="{9C59B431-D851-B80B-F782-CD4578C86502}"/>
-              </a:ext>
-            </a:extLst>
-          </p:cNvPr>
-          <p:cNvSpPr/>
-          <p:nvPr/>
-        </p:nvSpPr>
-        <p:spPr>
-          <a:xfrm>
-            <a:off x="18515013" y="3962400"/>
-            <a:ext cx="5303520" cy="3962400"/>
-          </a:xfrm>
-          <a:prstGeom prst="roundRect">
-            <a:avLst/>
-          </a:prstGeom>
-          <a:solidFill>
-            <a:srgbClr val="6B5B95"/>
-          </a:solidFill>
-          <a:ln w="76200">
-            <a:solidFill>
-              <a:schemeClr val="tx1"/>
-            </a:solidFill>
-          </a:ln>
-          <a:effectLst>
-            <a:outerShdw blurRad="44450" dist="27940" dir="5400000" algn="ctr">
-              <a:srgbClr val="000000">
-                <a:alpha val="32000"/>
-              </a:srgbClr>
-            </a:outerShdw>
-          </a:effectLst>
-          <a:scene3d>
-            <a:camera prst="orthographicFront">
-              <a:rot lat="0" lon="0" rev="0"/>
-            </a:camera>
-            <a:lightRig rig="balanced" dir="t">
-              <a:rot lat="0" lon="0" rev="8700000"/>
-            </a:lightRig>
-          </a:scene3d>
-          <a:sp3d>
-            <a:bevelT w="190500" h="38100"/>
-          </a:sp3d>
-        </p:spPr>
-        <p:style>
-          <a:lnRef idx="2">
-            <a:schemeClr val="accent1">
-              <a:shade val="15000"/>
-            </a:schemeClr>
-          </a:lnRef>
-          <a:fillRef idx="1">
-            <a:schemeClr val="accent1"/>
-          </a:fillRef>
-          <a:effectRef idx="0">
-            <a:schemeClr val="accent1"/>
-          </a:effectRef>
-          <a:fontRef idx="minor">
-            <a:schemeClr val="lt1"/>
-          </a:fontRef>
-        </p:style>
-        <p:txBody>
-          <a:bodyPr rtlCol="0" anchor="ctr"/>
-          <a:lstStyle/>
-          <a:p>
-            <a:pPr algn="ctr"/>
-            <a:r>
-              <a:rPr lang="en-IE" sz="4400" b="1" dirty="0"/>
-              <a:t>Task Manager</a:t>
-            </a:r>
-          </a:p>
-          <a:p>
-            <a:pPr algn="ctr"/>
-            <a:r>
-              <a:rPr lang="en-IE" sz="3600" b="1" i="1" dirty="0"/>
-              <a:t>(Execution)</a:t>
-            </a:r>
-          </a:p>
-        </p:txBody>
-      </p:sp>
-      <p:sp>
-        <p:nvSpPr>
-          <p:cNvPr id="14" name="Rectangle: Rounded Corners 13">
-            <a:extLst>
-              <a:ext uri="{FF2B5EF4-FFF2-40B4-BE49-F238E27FC236}">
-                <a16:creationId xmlns:a16="http://schemas.microsoft.com/office/drawing/2014/main" id="{B7D5B73F-21AD-3A0B-09DF-443A8870625A}"/>
-              </a:ext>
-            </a:extLst>
-          </p:cNvPr>
-          <p:cNvSpPr/>
-          <p:nvPr/>
-        </p:nvSpPr>
-        <p:spPr>
-          <a:xfrm>
-            <a:off x="18515013" y="11247120"/>
-            <a:ext cx="5303520" cy="3962400"/>
-          </a:xfrm>
-          <a:prstGeom prst="roundRect">
-            <a:avLst/>
-          </a:prstGeom>
-          <a:solidFill>
-            <a:srgbClr val="6B5B95"/>
-          </a:solidFill>
-          <a:ln w="76200">
-            <a:solidFill>
-              <a:schemeClr val="tx1"/>
-            </a:solidFill>
-          </a:ln>
-          <a:effectLst>
-            <a:outerShdw blurRad="44450" dist="27940" dir="5400000" algn="ctr">
-              <a:srgbClr val="000000">
-                <a:alpha val="32000"/>
-              </a:srgbClr>
-            </a:outerShdw>
-          </a:effectLst>
-          <a:scene3d>
-            <a:camera prst="orthographicFront">
-              <a:rot lat="0" lon="0" rev="0"/>
-            </a:camera>
-            <a:lightRig rig="balanced" dir="t">
-              <a:rot lat="0" lon="0" rev="8700000"/>
-            </a:lightRig>
-          </a:scene3d>
-          <a:sp3d>
-            <a:bevelT w="190500" h="38100"/>
-          </a:sp3d>
-        </p:spPr>
-        <p:style>
-          <a:lnRef idx="2">
-            <a:schemeClr val="accent1">
-              <a:shade val="15000"/>
-            </a:schemeClr>
-          </a:lnRef>
-          <a:fillRef idx="1">
-            <a:schemeClr val="accent1"/>
-          </a:fillRef>
-          <a:effectRef idx="0">
-            <a:schemeClr val="accent1"/>
-          </a:effectRef>
-          <a:fontRef idx="minor">
-            <a:schemeClr val="lt1"/>
-          </a:fontRef>
-        </p:style>
-        <p:txBody>
-          <a:bodyPr rtlCol="0" anchor="ctr"/>
-          <a:lstStyle/>
-          <a:p>
-            <a:pPr algn="ctr"/>
-            <a:r>
-              <a:rPr lang="en-IE" sz="4000" b="1" i="1" dirty="0"/>
-              <a:t>TaskTide Client</a:t>
-            </a:r>
-          </a:p>
-          <a:p>
-            <a:pPr algn="ctr"/>
-            <a:r>
-              <a:rPr lang="en-IE" sz="4000" b="1" i="1" dirty="0"/>
-              <a:t>&amp;</a:t>
-            </a:r>
-          </a:p>
-          <a:p>
-            <a:pPr algn="ctr"/>
-            <a:r>
-              <a:rPr lang="en-IE" sz="4000" b="1" i="1" dirty="0"/>
-              <a:t>TaskTide Engine</a:t>
-            </a:r>
-            <a:endParaRPr lang="en-IE" sz="3600" b="1" i="1" dirty="0"/>
-          </a:p>
-        </p:txBody>
-      </p:sp>
-      <p:sp>
-        <p:nvSpPr>
-          <p:cNvPr id="16" name="Arrow: Down 15">
-            <a:extLst>
-              <a:ext uri="{FF2B5EF4-FFF2-40B4-BE49-F238E27FC236}">
-                <a16:creationId xmlns:a16="http://schemas.microsoft.com/office/drawing/2014/main" id="{9E8F5C0A-A32A-C17F-9A9A-2B3977313AA9}"/>
-              </a:ext>
-            </a:extLst>
-          </p:cNvPr>
-          <p:cNvSpPr/>
-          <p:nvPr/>
-        </p:nvSpPr>
-        <p:spPr>
-          <a:xfrm>
-            <a:off x="8395653" y="7926253"/>
-            <a:ext cx="1178560" cy="3891280"/>
-          </a:xfrm>
-          <a:prstGeom prst="downArrow">
-            <a:avLst/>
-          </a:prstGeom>
-          <a:solidFill>
-            <a:srgbClr val="4A6FA5"/>
-          </a:solidFill>
+          <a:gradFill flip="none" rotWithShape="1">
+            <a:gsLst>
+              <a:gs pos="0">
+                <a:schemeClr val="accent1">
+                  <a:shade val="30000"/>
+                  <a:satMod val="115000"/>
+                </a:schemeClr>
+              </a:gs>
+              <a:gs pos="50000">
+                <a:schemeClr val="accent1">
+                  <a:shade val="67500"/>
+                  <a:satMod val="115000"/>
+                </a:schemeClr>
+              </a:gs>
+              <a:gs pos="100000">
+                <a:schemeClr val="accent1">
+                  <a:shade val="100000"/>
+                  <a:satMod val="115000"/>
+                </a:schemeClr>
+              </a:gs>
+            </a:gsLst>
+            <a:lin ang="13500000" scaled="1"/>
+            <a:tileRect/>
+          </a:gradFill>
           <a:ln w="57150">
             <a:solidFill>
               <a:schemeClr val="tx1"/>
             </a:solidFill>
           </a:ln>
-          <a:scene3d>
-            <a:camera prst="orthographicFront"/>
-            <a:lightRig rig="threePt" dir="t"/>
-          </a:scene3d>
-          <a:sp3d>
-            <a:bevelT w="152400" h="50800" prst="softRound"/>
-          </a:sp3d>
         </p:spPr>
         <p:style>
           <a:lnRef idx="2">
@@ -23378,10 +24654,10 @@
       </p:sp>
       <p:sp>
         <p:nvSpPr>
-          <p:cNvPr id="17" name="Arrow: Down 16">
+          <p:cNvPr id="20" name="Arrow: Right 19">
             <a:extLst>
               <a:ext uri="{FF2B5EF4-FFF2-40B4-BE49-F238E27FC236}">
-                <a16:creationId xmlns:a16="http://schemas.microsoft.com/office/drawing/2014/main" id="{627699BF-8C58-A803-0A60-513BDDC3A7C0}"/>
+                <a16:creationId xmlns:a16="http://schemas.microsoft.com/office/drawing/2014/main" id="{0A4E8B60-330B-1FB5-0943-17C11E0380CE}"/>
               </a:ext>
             </a:extLst>
           </p:cNvPr>
@@ -23390,27 +24666,41 @@
         </p:nvSpPr>
         <p:spPr>
           <a:xfrm>
-            <a:off x="14420534" y="7937356"/>
-            <a:ext cx="1178560" cy="3901440"/>
+            <a:off x="20059650" y="6765384"/>
+            <a:ext cx="1619250" cy="1440594"/>
           </a:xfrm>
-          <a:prstGeom prst="downArrow">
+          <a:prstGeom prst="rightArrow">
             <a:avLst/>
           </a:prstGeom>
-          <a:solidFill>
-            <a:srgbClr val="4A6FA5"/>
-          </a:solidFill>
+          <a:gradFill flip="none" rotWithShape="1">
+            <a:gsLst>
+              <a:gs pos="0">
+                <a:schemeClr val="accent1">
+                  <a:shade val="30000"/>
+                  <a:satMod val="115000"/>
+                </a:schemeClr>
+              </a:gs>
+              <a:gs pos="50000">
+                <a:schemeClr val="accent1">
+                  <a:shade val="67500"/>
+                  <a:satMod val="115000"/>
+                </a:schemeClr>
+              </a:gs>
+              <a:gs pos="100000">
+                <a:schemeClr val="accent1">
+                  <a:shade val="100000"/>
+                  <a:satMod val="115000"/>
+                </a:schemeClr>
+              </a:gs>
+            </a:gsLst>
+            <a:lin ang="13500000" scaled="1"/>
+            <a:tileRect/>
+          </a:gradFill>
           <a:ln w="57150">
             <a:solidFill>
               <a:schemeClr val="tx1"/>
             </a:solidFill>
           </a:ln>
-          <a:scene3d>
-            <a:camera prst="orthographicFront"/>
-            <a:lightRig rig="threePt" dir="t"/>
-          </a:scene3d>
-          <a:sp3d>
-            <a:bevelT w="152400" h="50800" prst="softRound"/>
-          </a:sp3d>
         </p:spPr>
         <p:style>
           <a:lnRef idx="2">
@@ -23439,10 +24729,322 @@
       </p:sp>
       <p:sp>
         <p:nvSpPr>
-          <p:cNvPr id="18" name="Arrow: Down 17">
+          <p:cNvPr id="23" name="TextBox 22">
             <a:extLst>
               <a:ext uri="{FF2B5EF4-FFF2-40B4-BE49-F238E27FC236}">
-                <a16:creationId xmlns:a16="http://schemas.microsoft.com/office/drawing/2014/main" id="{588DFD7E-825B-38AA-50A1-48C819D883EB}"/>
+                <a16:creationId xmlns:a16="http://schemas.microsoft.com/office/drawing/2014/main" id="{5E2DD160-6B4C-56D8-D2E7-C83E10664427}"/>
+              </a:ext>
+            </a:extLst>
+          </p:cNvPr>
+          <p:cNvSpPr txBox="1"/>
+          <p:nvPr/>
+        </p:nvSpPr>
+        <p:spPr>
+          <a:xfrm>
+            <a:off x="22412325" y="4217096"/>
+            <a:ext cx="6657975" cy="830997"/>
+          </a:xfrm>
+          <a:prstGeom prst="rect">
+            <a:avLst/>
+          </a:prstGeom>
+          <a:noFill/>
+        </p:spPr>
+        <p:txBody>
+          <a:bodyPr wrap="square" rtlCol="0">
+            <a:spAutoFit/>
+          </a:bodyPr>
+          <a:lstStyle/>
+          <a:p>
+            <a:pPr algn="ctr"/>
+            <a:r>
+              <a:rPr lang="en-IE" sz="4800" b="1" i="1" dirty="0"/>
+              <a:t>3). Wait Until Leader</a:t>
+            </a:r>
+          </a:p>
+        </p:txBody>
+      </p:sp>
+      <p:grpSp>
+        <p:nvGrpSpPr>
+          <p:cNvPr id="29" name="Group 28">
+            <a:extLst>
+              <a:ext uri="{FF2B5EF4-FFF2-40B4-BE49-F238E27FC236}">
+                <a16:creationId xmlns:a16="http://schemas.microsoft.com/office/drawing/2014/main" id="{4A6E0309-BA76-2C37-BF97-83DA109EC708}"/>
+              </a:ext>
+            </a:extLst>
+          </p:cNvPr>
+          <p:cNvGrpSpPr/>
+          <p:nvPr/>
+        </p:nvGrpSpPr>
+        <p:grpSpPr>
+          <a:xfrm>
+            <a:off x="21839238" y="5539998"/>
+            <a:ext cx="7905750" cy="3770158"/>
+            <a:chOff x="12363450" y="4232467"/>
+            <a:chExt cx="9277350" cy="5044882"/>
+          </a:xfrm>
+        </p:grpSpPr>
+        <p:sp>
+          <p:nvSpPr>
+            <p:cNvPr id="30" name="Rectangle: Rounded Corners 29">
+              <a:extLst>
+                <a:ext uri="{FF2B5EF4-FFF2-40B4-BE49-F238E27FC236}">
+                  <a16:creationId xmlns:a16="http://schemas.microsoft.com/office/drawing/2014/main" id="{62E450F5-1EAF-54A9-2874-39442B8A056D}"/>
+                </a:ext>
+              </a:extLst>
+            </p:cNvPr>
+            <p:cNvSpPr/>
+            <p:nvPr/>
+          </p:nvSpPr>
+          <p:spPr>
+            <a:xfrm>
+              <a:off x="12363450" y="4232467"/>
+              <a:ext cx="9277350" cy="5044882"/>
+            </a:xfrm>
+            <a:prstGeom prst="roundRect">
+              <a:avLst/>
+            </a:prstGeom>
+            <a:gradFill flip="none" rotWithShape="1">
+              <a:gsLst>
+                <a:gs pos="0">
+                  <a:schemeClr val="accent1">
+                    <a:shade val="30000"/>
+                    <a:satMod val="115000"/>
+                  </a:schemeClr>
+                </a:gs>
+                <a:gs pos="50000">
+                  <a:schemeClr val="accent1">
+                    <a:shade val="67500"/>
+                    <a:satMod val="115000"/>
+                  </a:schemeClr>
+                </a:gs>
+                <a:gs pos="100000">
+                  <a:schemeClr val="accent1">
+                    <a:shade val="100000"/>
+                    <a:satMod val="115000"/>
+                  </a:schemeClr>
+                </a:gs>
+              </a:gsLst>
+              <a:lin ang="13500000" scaled="1"/>
+              <a:tileRect/>
+            </a:gradFill>
+            <a:ln w="57150">
+              <a:solidFill>
+                <a:schemeClr val="tx1"/>
+              </a:solidFill>
+            </a:ln>
+          </p:spPr>
+          <p:style>
+            <a:lnRef idx="2">
+              <a:schemeClr val="accent1">
+                <a:shade val="15000"/>
+              </a:schemeClr>
+            </a:lnRef>
+            <a:fillRef idx="1">
+              <a:schemeClr val="accent1"/>
+            </a:fillRef>
+            <a:effectRef idx="0">
+              <a:schemeClr val="accent1"/>
+            </a:effectRef>
+            <a:fontRef idx="minor">
+              <a:schemeClr val="lt1"/>
+            </a:fontRef>
+          </p:style>
+          <p:txBody>
+            <a:bodyPr rtlCol="0" anchor="ctr"/>
+            <a:lstStyle/>
+            <a:p>
+              <a:pPr algn="ctr"/>
+              <a:endParaRPr lang="en-IE" sz="3200" b="1" dirty="0"/>
+            </a:p>
+          </p:txBody>
+        </p:sp>
+        <p:grpSp>
+          <p:nvGrpSpPr>
+            <p:cNvPr id="31" name="Group 30">
+              <a:extLst>
+                <a:ext uri="{FF2B5EF4-FFF2-40B4-BE49-F238E27FC236}">
+                  <a16:creationId xmlns:a16="http://schemas.microsoft.com/office/drawing/2014/main" id="{1E3BF374-E77C-233B-E92F-4758AAD130B1}"/>
+                </a:ext>
+              </a:extLst>
+            </p:cNvPr>
+            <p:cNvGrpSpPr/>
+            <p:nvPr/>
+          </p:nvGrpSpPr>
+          <p:grpSpPr>
+            <a:xfrm>
+              <a:off x="12515850" y="4385666"/>
+              <a:ext cx="9048750" cy="665187"/>
+              <a:chOff x="914400" y="4442816"/>
+              <a:chExt cx="9048750" cy="665187"/>
+            </a:xfrm>
+          </p:grpSpPr>
+          <p:sp>
+            <p:nvSpPr>
+              <p:cNvPr id="32" name="TextBox 31">
+                <a:extLst>
+                  <a:ext uri="{FF2B5EF4-FFF2-40B4-BE49-F238E27FC236}">
+                    <a16:creationId xmlns:a16="http://schemas.microsoft.com/office/drawing/2014/main" id="{6381B058-26BE-BAB2-79EA-A327C72E9DF2}"/>
+                  </a:ext>
+                </a:extLst>
+              </p:cNvPr>
+              <p:cNvSpPr txBox="1"/>
+              <p:nvPr/>
+            </p:nvSpPr>
+            <p:spPr>
+              <a:xfrm>
+                <a:off x="914400" y="4442816"/>
+                <a:ext cx="9048750" cy="554636"/>
+              </a:xfrm>
+              <a:prstGeom prst="rect">
+                <a:avLst/>
+              </a:prstGeom>
+              <a:noFill/>
+            </p:spPr>
+            <p:txBody>
+              <a:bodyPr wrap="square">
+                <a:spAutoFit/>
+              </a:bodyPr>
+              <a:lstStyle/>
+              <a:p>
+                <a:pPr algn="ctr"/>
+                <a:r>
+                  <a:rPr lang="en-IE" sz="2800" b="1" dirty="0">
+                    <a:solidFill>
+                      <a:schemeClr val="bg1"/>
+                    </a:solidFill>
+                  </a:rPr>
+                  <a:t>Wait &amp; Retry</a:t>
+                </a:r>
+              </a:p>
+            </p:txBody>
+          </p:sp>
+          <p:cxnSp>
+            <p:nvCxnSpPr>
+              <p:cNvPr id="33" name="Straight Connector 32">
+                <a:extLst>
+                  <a:ext uri="{FF2B5EF4-FFF2-40B4-BE49-F238E27FC236}">
+                    <a16:creationId xmlns:a16="http://schemas.microsoft.com/office/drawing/2014/main" id="{69B4F2D9-FA43-58DF-241A-59FC646CE50B}"/>
+                  </a:ext>
+                </a:extLst>
+              </p:cNvPr>
+              <p:cNvCxnSpPr>
+                <a:cxnSpLocks/>
+              </p:cNvCxnSpPr>
+              <p:nvPr/>
+            </p:nvCxnSpPr>
+            <p:spPr>
+              <a:xfrm>
+                <a:off x="1412270" y="5108003"/>
+                <a:ext cx="8112730" cy="0"/>
+              </a:xfrm>
+              <a:prstGeom prst="line">
+                <a:avLst/>
+              </a:prstGeom>
+              <a:ln w="19050" cap="flat" cmpd="sng" algn="ctr">
+                <a:solidFill>
+                  <a:schemeClr val="bg1"/>
+                </a:solidFill>
+                <a:prstDash val="dash"/>
+                <a:round/>
+                <a:headEnd type="none" w="med" len="med"/>
+                <a:tailEnd type="none" w="med" len="med"/>
+              </a:ln>
+            </p:spPr>
+            <p:style>
+              <a:lnRef idx="0">
+                <a:scrgbClr r="0" g="0" b="0"/>
+              </a:lnRef>
+              <a:fillRef idx="0">
+                <a:scrgbClr r="0" g="0" b="0"/>
+              </a:fillRef>
+              <a:effectRef idx="0">
+                <a:scrgbClr r="0" g="0" b="0"/>
+              </a:effectRef>
+              <a:fontRef idx="minor">
+                <a:schemeClr val="tx1"/>
+              </a:fontRef>
+            </p:style>
+          </p:cxnSp>
+        </p:grpSp>
+      </p:grpSp>
+      <p:pic>
+        <p:nvPicPr>
+          <p:cNvPr id="39" name="Graphic 38" descr="Alarm Ringing outline">
+            <a:extLst>
+              <a:ext uri="{FF2B5EF4-FFF2-40B4-BE49-F238E27FC236}">
+                <a16:creationId xmlns:a16="http://schemas.microsoft.com/office/drawing/2014/main" id="{A06521CE-5F19-1FCB-0285-A48FE6ADAEA9}"/>
+              </a:ext>
+            </a:extLst>
+          </p:cNvPr>
+          <p:cNvPicPr>
+            <a:picLocks noChangeAspect="1"/>
+          </p:cNvPicPr>
+          <p:nvPr/>
+        </p:nvPicPr>
+        <p:blipFill>
+          <a:blip r:embed="rId3">
+            <a:extLst>
+              <a:ext uri="{96DAC541-7B7A-43D3-8B79-37D633B846F1}">
+                <asvg:svgBlip xmlns:asvg="http://schemas.microsoft.com/office/drawing/2016/SVG/main" r:embed="rId4"/>
+              </a:ext>
+            </a:extLst>
+          </a:blip>
+          <a:stretch>
+            <a:fillRect/>
+          </a:stretch>
+        </p:blipFill>
+        <p:spPr>
+          <a:xfrm>
+            <a:off x="27117170" y="6637894"/>
+            <a:ext cx="2105025" cy="2105025"/>
+          </a:xfrm>
+          <a:prstGeom prst="rect">
+            <a:avLst/>
+          </a:prstGeom>
+        </p:spPr>
+      </p:pic>
+      <p:pic>
+        <p:nvPicPr>
+          <p:cNvPr id="41" name="Graphic 40" descr="Snooze outline">
+            <a:extLst>
+              <a:ext uri="{FF2B5EF4-FFF2-40B4-BE49-F238E27FC236}">
+                <a16:creationId xmlns:a16="http://schemas.microsoft.com/office/drawing/2014/main" id="{05D21A47-FEE5-33CD-5150-CCD8C98322C0}"/>
+              </a:ext>
+            </a:extLst>
+          </p:cNvPr>
+          <p:cNvPicPr>
+            <a:picLocks noChangeAspect="1"/>
+          </p:cNvPicPr>
+          <p:nvPr/>
+        </p:nvPicPr>
+        <p:blipFill>
+          <a:blip r:embed="rId5">
+            <a:extLst>
+              <a:ext uri="{96DAC541-7B7A-43D3-8B79-37D633B846F1}">
+                <asvg:svgBlip xmlns:asvg="http://schemas.microsoft.com/office/drawing/2016/SVG/main" r:embed="rId6"/>
+              </a:ext>
+            </a:extLst>
+          </a:blip>
+          <a:stretch>
+            <a:fillRect/>
+          </a:stretch>
+        </p:blipFill>
+        <p:spPr>
+          <a:xfrm>
+            <a:off x="22468970" y="6390244"/>
+            <a:ext cx="2105025" cy="2105025"/>
+          </a:xfrm>
+          <a:prstGeom prst="rect">
+            <a:avLst/>
+          </a:prstGeom>
+        </p:spPr>
+      </p:pic>
+      <p:sp>
+        <p:nvSpPr>
+          <p:cNvPr id="43" name="Arrow: Right 42">
+            <a:extLst>
+              <a:ext uri="{FF2B5EF4-FFF2-40B4-BE49-F238E27FC236}">
+                <a16:creationId xmlns:a16="http://schemas.microsoft.com/office/drawing/2014/main" id="{A2F234AD-9CCE-B2A5-133D-DF97E9659C03}"/>
               </a:ext>
             </a:extLst>
           </p:cNvPr>
@@ -23451,27 +25053,20 @@
         </p:nvSpPr>
         <p:spPr>
           <a:xfrm>
-            <a:off x="20526694" y="7926251"/>
-            <a:ext cx="1178560" cy="3901440"/>
+            <a:off x="24806275" y="7142286"/>
+            <a:ext cx="1828800" cy="981939"/>
           </a:xfrm>
-          <a:prstGeom prst="downArrow">
+          <a:prstGeom prst="rightArrow">
             <a:avLst/>
           </a:prstGeom>
           <a:solidFill>
-            <a:srgbClr val="4A6FA5"/>
+            <a:schemeClr val="accent2"/>
           </a:solidFill>
           <a:ln w="57150">
             <a:solidFill>
               <a:schemeClr val="tx1"/>
             </a:solidFill>
           </a:ln>
-          <a:scene3d>
-            <a:camera prst="orthographicFront"/>
-            <a:lightRig rig="threePt" dir="t"/>
-          </a:scene3d>
-          <a:sp3d>
-            <a:bevelT w="152400" h="50800" prst="softRound"/>
-          </a:sp3d>
         </p:spPr>
         <p:style>
           <a:lnRef idx="2">
@@ -23498,10 +25093,2004 @@
           </a:p>
         </p:txBody>
       </p:sp>
+      <p:grpSp>
+        <p:nvGrpSpPr>
+          <p:cNvPr id="55" name="Group 54">
+            <a:extLst>
+              <a:ext uri="{FF2B5EF4-FFF2-40B4-BE49-F238E27FC236}">
+                <a16:creationId xmlns:a16="http://schemas.microsoft.com/office/drawing/2014/main" id="{8438DC7B-472C-B3E3-A01D-765CC1D09460}"/>
+              </a:ext>
+            </a:extLst>
+          </p:cNvPr>
+          <p:cNvGrpSpPr/>
+          <p:nvPr/>
+        </p:nvGrpSpPr>
+        <p:grpSpPr>
+          <a:xfrm>
+            <a:off x="5122141" y="2606098"/>
+            <a:ext cx="20817737" cy="1143120"/>
+            <a:chOff x="4899243" y="2108980"/>
+            <a:chExt cx="18821400" cy="1107996"/>
+          </a:xfrm>
+        </p:grpSpPr>
+        <p:cxnSp>
+          <p:nvCxnSpPr>
+            <p:cNvPr id="50" name="Straight Connector 49">
+              <a:extLst>
+                <a:ext uri="{FF2B5EF4-FFF2-40B4-BE49-F238E27FC236}">
+                  <a16:creationId xmlns:a16="http://schemas.microsoft.com/office/drawing/2014/main" id="{4F17CA91-6386-7A67-939A-4EBB6125772E}"/>
+                </a:ext>
+              </a:extLst>
+            </p:cNvPr>
+            <p:cNvCxnSpPr>
+              <a:cxnSpLocks/>
+            </p:cNvCxnSpPr>
+            <p:nvPr/>
+          </p:nvCxnSpPr>
+          <p:spPr>
+            <a:xfrm>
+              <a:off x="4953000" y="3108744"/>
+              <a:ext cx="18649794" cy="0"/>
+            </a:xfrm>
+            <a:prstGeom prst="line">
+              <a:avLst/>
+            </a:prstGeom>
+            <a:ln w="57150">
+              <a:solidFill>
+                <a:schemeClr val="tx1">
+                  <a:lumMod val="65000"/>
+                  <a:lumOff val="35000"/>
+                </a:schemeClr>
+              </a:solidFill>
+              <a:prstDash val="dash"/>
+            </a:ln>
+          </p:spPr>
+          <p:style>
+            <a:lnRef idx="2">
+              <a:schemeClr val="dk1"/>
+            </a:lnRef>
+            <a:fillRef idx="0">
+              <a:schemeClr val="dk1"/>
+            </a:fillRef>
+            <a:effectRef idx="1">
+              <a:schemeClr val="dk1"/>
+            </a:effectRef>
+            <a:fontRef idx="minor">
+              <a:schemeClr val="tx1"/>
+            </a:fontRef>
+          </p:style>
+        </p:cxnSp>
+        <p:sp>
+          <p:nvSpPr>
+            <p:cNvPr id="54" name="TextBox 53">
+              <a:extLst>
+                <a:ext uri="{FF2B5EF4-FFF2-40B4-BE49-F238E27FC236}">
+                  <a16:creationId xmlns:a16="http://schemas.microsoft.com/office/drawing/2014/main" id="{914435C2-F2C9-4CB1-DFE2-178BD5F92F20}"/>
+                </a:ext>
+              </a:extLst>
+            </p:cNvPr>
+            <p:cNvSpPr txBox="1"/>
+            <p:nvPr/>
+          </p:nvSpPr>
+          <p:spPr>
+            <a:xfrm>
+              <a:off x="4899243" y="2108980"/>
+              <a:ext cx="18821400" cy="1107996"/>
+            </a:xfrm>
+            <a:prstGeom prst="rect">
+              <a:avLst/>
+            </a:prstGeom>
+            <a:noFill/>
+          </p:spPr>
+          <p:txBody>
+            <a:bodyPr wrap="square" rtlCol="0">
+              <a:spAutoFit/>
+            </a:bodyPr>
+            <a:lstStyle/>
+            <a:p>
+              <a:pPr algn="ctr"/>
+              <a:r>
+                <a:rPr lang="en-IE" sz="6600" b="1" i="1" dirty="0">
+                  <a:solidFill>
+                    <a:schemeClr val="tx1">
+                      <a:lumMod val="65000"/>
+                      <a:lumOff val="35000"/>
+                    </a:schemeClr>
+                  </a:solidFill>
+                </a:rPr>
+                <a:t>i). Leader Election Coordinated Across HPC Jobs</a:t>
+              </a:r>
+            </a:p>
+          </p:txBody>
+        </p:sp>
+      </p:grpSp>
+      <p:grpSp>
+        <p:nvGrpSpPr>
+          <p:cNvPr id="56" name="Group 55">
+            <a:extLst>
+              <a:ext uri="{FF2B5EF4-FFF2-40B4-BE49-F238E27FC236}">
+                <a16:creationId xmlns:a16="http://schemas.microsoft.com/office/drawing/2014/main" id="{B415DE28-1A6C-8362-F4F8-741555000F08}"/>
+              </a:ext>
+            </a:extLst>
+          </p:cNvPr>
+          <p:cNvGrpSpPr/>
+          <p:nvPr/>
+        </p:nvGrpSpPr>
+        <p:grpSpPr>
+          <a:xfrm>
+            <a:off x="5280891" y="14747296"/>
+            <a:ext cx="18859500" cy="1107996"/>
+            <a:chOff x="4953000" y="2082800"/>
+            <a:chExt cx="18859500" cy="1107996"/>
+          </a:xfrm>
+        </p:grpSpPr>
+        <p:cxnSp>
+          <p:nvCxnSpPr>
+            <p:cNvPr id="57" name="Straight Connector 56">
+              <a:extLst>
+                <a:ext uri="{FF2B5EF4-FFF2-40B4-BE49-F238E27FC236}">
+                  <a16:creationId xmlns:a16="http://schemas.microsoft.com/office/drawing/2014/main" id="{2A8FEBA9-B1C8-76B3-0138-002F653CAB81}"/>
+                </a:ext>
+              </a:extLst>
+            </p:cNvPr>
+            <p:cNvCxnSpPr>
+              <a:cxnSpLocks/>
+            </p:cNvCxnSpPr>
+            <p:nvPr/>
+          </p:nvCxnSpPr>
+          <p:spPr>
+            <a:xfrm>
+              <a:off x="4953000" y="3108744"/>
+              <a:ext cx="18649794" cy="0"/>
+            </a:xfrm>
+            <a:prstGeom prst="line">
+              <a:avLst/>
+            </a:prstGeom>
+            <a:ln w="57150">
+              <a:solidFill>
+                <a:schemeClr val="tx1">
+                  <a:lumMod val="65000"/>
+                  <a:lumOff val="35000"/>
+                </a:schemeClr>
+              </a:solidFill>
+              <a:prstDash val="dash"/>
+            </a:ln>
+          </p:spPr>
+          <p:style>
+            <a:lnRef idx="2">
+              <a:schemeClr val="dk1"/>
+            </a:lnRef>
+            <a:fillRef idx="0">
+              <a:schemeClr val="dk1"/>
+            </a:fillRef>
+            <a:effectRef idx="1">
+              <a:schemeClr val="dk1"/>
+            </a:effectRef>
+            <a:fontRef idx="minor">
+              <a:schemeClr val="tx1"/>
+            </a:fontRef>
+          </p:style>
+        </p:cxnSp>
+        <p:sp>
+          <p:nvSpPr>
+            <p:cNvPr id="58" name="TextBox 57">
+              <a:extLst>
+                <a:ext uri="{FF2B5EF4-FFF2-40B4-BE49-F238E27FC236}">
+                  <a16:creationId xmlns:a16="http://schemas.microsoft.com/office/drawing/2014/main" id="{FC04D604-5EE5-1D96-7D9A-76504BC438EE}"/>
+                </a:ext>
+              </a:extLst>
+            </p:cNvPr>
+            <p:cNvSpPr txBox="1"/>
+            <p:nvPr/>
+          </p:nvSpPr>
+          <p:spPr>
+            <a:xfrm>
+              <a:off x="4991100" y="2082800"/>
+              <a:ext cx="18821400" cy="1107996"/>
+            </a:xfrm>
+            <a:prstGeom prst="rect">
+              <a:avLst/>
+            </a:prstGeom>
+            <a:noFill/>
+          </p:spPr>
+          <p:txBody>
+            <a:bodyPr wrap="square" rtlCol="0">
+              <a:spAutoFit/>
+            </a:bodyPr>
+            <a:lstStyle/>
+            <a:p>
+              <a:pPr algn="ctr"/>
+              <a:r>
+                <a:rPr lang="en-IE" sz="6600" b="1" i="1" dirty="0">
+                  <a:solidFill>
+                    <a:schemeClr val="tx1">
+                      <a:lumMod val="65000"/>
+                      <a:lumOff val="35000"/>
+                    </a:schemeClr>
+                  </a:solidFill>
+                </a:rPr>
+                <a:t>ii). Hosting Node of Leader Owns the OS Lock</a:t>
+              </a:r>
+            </a:p>
+          </p:txBody>
+        </p:sp>
+      </p:grpSp>
+      <p:sp>
+        <p:nvSpPr>
+          <p:cNvPr id="87" name="Rectangle: Rounded Corners 86">
+            <a:extLst>
+              <a:ext uri="{FF2B5EF4-FFF2-40B4-BE49-F238E27FC236}">
+                <a16:creationId xmlns:a16="http://schemas.microsoft.com/office/drawing/2014/main" id="{9F6B5165-62F2-45C5-C2B0-48352441AE46}"/>
+              </a:ext>
+            </a:extLst>
+          </p:cNvPr>
+          <p:cNvSpPr/>
+          <p:nvPr/>
+        </p:nvSpPr>
+        <p:spPr>
+          <a:xfrm>
+            <a:off x="188191" y="15944275"/>
+            <a:ext cx="29851350" cy="5918192"/>
+          </a:xfrm>
+          <a:prstGeom prst="roundRect">
+            <a:avLst/>
+          </a:prstGeom>
+          <a:solidFill>
+            <a:srgbClr val="E6EAED"/>
+          </a:solidFill>
+          <a:ln w="57150">
+            <a:solidFill>
+              <a:schemeClr val="tx1"/>
+            </a:solidFill>
+          </a:ln>
+        </p:spPr>
+        <p:style>
+          <a:lnRef idx="2">
+            <a:schemeClr val="accent1">
+              <a:shade val="15000"/>
+            </a:schemeClr>
+          </a:lnRef>
+          <a:fillRef idx="1">
+            <a:schemeClr val="accent1"/>
+          </a:fillRef>
+          <a:effectRef idx="0">
+            <a:schemeClr val="accent1"/>
+          </a:effectRef>
+          <a:fontRef idx="minor">
+            <a:schemeClr val="lt1"/>
+          </a:fontRef>
+        </p:style>
+        <p:txBody>
+          <a:bodyPr rtlCol="0" anchor="ctr"/>
+          <a:lstStyle/>
+          <a:p>
+            <a:pPr algn="ctr"/>
+            <a:endParaRPr lang="en-IE" b="1" dirty="0"/>
+          </a:p>
+        </p:txBody>
+      </p:sp>
+      <p:sp>
+        <p:nvSpPr>
+          <p:cNvPr id="88" name="TextBox 87">
+            <a:extLst>
+              <a:ext uri="{FF2B5EF4-FFF2-40B4-BE49-F238E27FC236}">
+                <a16:creationId xmlns:a16="http://schemas.microsoft.com/office/drawing/2014/main" id="{1A58CC51-694B-6303-6B7E-1DE40BCD20AB}"/>
+              </a:ext>
+            </a:extLst>
+          </p:cNvPr>
+          <p:cNvSpPr txBox="1"/>
+          <p:nvPr/>
+        </p:nvSpPr>
+        <p:spPr>
+          <a:xfrm>
+            <a:off x="-289708" y="16186844"/>
+            <a:ext cx="9277350" cy="830997"/>
+          </a:xfrm>
+          <a:prstGeom prst="rect">
+            <a:avLst/>
+          </a:prstGeom>
+          <a:noFill/>
+        </p:spPr>
+        <p:txBody>
+          <a:bodyPr wrap="square" rtlCol="0">
+            <a:spAutoFit/>
+          </a:bodyPr>
+          <a:lstStyle/>
+          <a:p>
+            <a:pPr algn="ctr"/>
+            <a:r>
+              <a:rPr lang="en-IE" sz="4800" b="1" i="1" dirty="0"/>
+              <a:t>4). Acquire File Lock</a:t>
+            </a:r>
+          </a:p>
+        </p:txBody>
+      </p:sp>
+      <p:sp>
+        <p:nvSpPr>
+          <p:cNvPr id="90" name="TextBox 89">
+            <a:extLst>
+              <a:ext uri="{FF2B5EF4-FFF2-40B4-BE49-F238E27FC236}">
+                <a16:creationId xmlns:a16="http://schemas.microsoft.com/office/drawing/2014/main" id="{3304CF6E-B326-E521-B77C-B4D210C04B06}"/>
+              </a:ext>
+            </a:extLst>
+          </p:cNvPr>
+          <p:cNvSpPr txBox="1"/>
+          <p:nvPr/>
+        </p:nvSpPr>
+        <p:spPr>
+          <a:xfrm>
+            <a:off x="10337075" y="16186844"/>
+            <a:ext cx="9277350" cy="830997"/>
+          </a:xfrm>
+          <a:prstGeom prst="rect">
+            <a:avLst/>
+          </a:prstGeom>
+          <a:noFill/>
+        </p:spPr>
+        <p:txBody>
+          <a:bodyPr wrap="square" rtlCol="0">
+            <a:spAutoFit/>
+          </a:bodyPr>
+          <a:lstStyle/>
+          <a:p>
+            <a:pPr algn="ctr"/>
+            <a:r>
+              <a:rPr lang="en-IE" sz="4800" b="1" i="1" dirty="0"/>
+              <a:t>5). Execute Work Under Lock</a:t>
+            </a:r>
+          </a:p>
+        </p:txBody>
+      </p:sp>
+      <p:sp>
+        <p:nvSpPr>
+          <p:cNvPr id="92" name="Arrow: Right 91">
+            <a:extLst>
+              <a:ext uri="{FF2B5EF4-FFF2-40B4-BE49-F238E27FC236}">
+                <a16:creationId xmlns:a16="http://schemas.microsoft.com/office/drawing/2014/main" id="{AE345429-4113-2B59-9FBD-F7FEC818DA28}"/>
+              </a:ext>
+            </a:extLst>
+          </p:cNvPr>
+          <p:cNvSpPr/>
+          <p:nvPr/>
+        </p:nvSpPr>
+        <p:spPr>
+          <a:xfrm>
+            <a:off x="8768936" y="18429630"/>
+            <a:ext cx="1979305" cy="1413703"/>
+          </a:xfrm>
+          <a:prstGeom prst="rightArrow">
+            <a:avLst/>
+          </a:prstGeom>
+          <a:gradFill flip="none" rotWithShape="1">
+            <a:gsLst>
+              <a:gs pos="0">
+                <a:schemeClr val="accent1">
+                  <a:shade val="30000"/>
+                  <a:satMod val="115000"/>
+                </a:schemeClr>
+              </a:gs>
+              <a:gs pos="50000">
+                <a:schemeClr val="accent1">
+                  <a:shade val="67500"/>
+                  <a:satMod val="115000"/>
+                </a:schemeClr>
+              </a:gs>
+              <a:gs pos="100000">
+                <a:schemeClr val="accent1">
+                  <a:shade val="100000"/>
+                  <a:satMod val="115000"/>
+                </a:schemeClr>
+              </a:gs>
+            </a:gsLst>
+            <a:lin ang="13500000" scaled="1"/>
+            <a:tileRect/>
+          </a:gradFill>
+          <a:ln w="57150">
+            <a:solidFill>
+              <a:schemeClr val="tx1"/>
+            </a:solidFill>
+          </a:ln>
+        </p:spPr>
+        <p:style>
+          <a:lnRef idx="2">
+            <a:schemeClr val="accent1">
+              <a:shade val="15000"/>
+            </a:schemeClr>
+          </a:lnRef>
+          <a:fillRef idx="1">
+            <a:schemeClr val="accent1"/>
+          </a:fillRef>
+          <a:effectRef idx="0">
+            <a:schemeClr val="accent1"/>
+          </a:effectRef>
+          <a:fontRef idx="minor">
+            <a:schemeClr val="lt1"/>
+          </a:fontRef>
+        </p:style>
+        <p:txBody>
+          <a:bodyPr rtlCol="0" anchor="ctr"/>
+          <a:lstStyle/>
+          <a:p>
+            <a:pPr algn="ctr"/>
+            <a:endParaRPr lang="en-IE"/>
+          </a:p>
+        </p:txBody>
+      </p:sp>
+      <p:sp>
+        <p:nvSpPr>
+          <p:cNvPr id="93" name="Arrow: Right 92">
+            <a:extLst>
+              <a:ext uri="{FF2B5EF4-FFF2-40B4-BE49-F238E27FC236}">
+                <a16:creationId xmlns:a16="http://schemas.microsoft.com/office/drawing/2014/main" id="{9A92287C-9ADC-C5E8-F927-2ABB19F06159}"/>
+              </a:ext>
+            </a:extLst>
+          </p:cNvPr>
+          <p:cNvSpPr/>
+          <p:nvPr/>
+        </p:nvSpPr>
+        <p:spPr>
+          <a:xfrm>
+            <a:off x="18640529" y="18322382"/>
+            <a:ext cx="2242312" cy="1440594"/>
+          </a:xfrm>
+          <a:prstGeom prst="rightArrow">
+            <a:avLst/>
+          </a:prstGeom>
+          <a:gradFill flip="none" rotWithShape="1">
+            <a:gsLst>
+              <a:gs pos="0">
+                <a:schemeClr val="accent1">
+                  <a:shade val="30000"/>
+                  <a:satMod val="115000"/>
+                </a:schemeClr>
+              </a:gs>
+              <a:gs pos="50000">
+                <a:schemeClr val="accent1">
+                  <a:shade val="67500"/>
+                  <a:satMod val="115000"/>
+                </a:schemeClr>
+              </a:gs>
+              <a:gs pos="100000">
+                <a:schemeClr val="accent1">
+                  <a:shade val="100000"/>
+                  <a:satMod val="115000"/>
+                </a:schemeClr>
+              </a:gs>
+            </a:gsLst>
+            <a:lin ang="13500000" scaled="1"/>
+            <a:tileRect/>
+          </a:gradFill>
+          <a:ln w="57150">
+            <a:solidFill>
+              <a:schemeClr val="tx1"/>
+            </a:solidFill>
+          </a:ln>
+        </p:spPr>
+        <p:style>
+          <a:lnRef idx="2">
+            <a:schemeClr val="accent1">
+              <a:shade val="15000"/>
+            </a:schemeClr>
+          </a:lnRef>
+          <a:fillRef idx="1">
+            <a:schemeClr val="accent1"/>
+          </a:fillRef>
+          <a:effectRef idx="0">
+            <a:schemeClr val="accent1"/>
+          </a:effectRef>
+          <a:fontRef idx="minor">
+            <a:schemeClr val="lt1"/>
+          </a:fontRef>
+        </p:style>
+        <p:txBody>
+          <a:bodyPr rtlCol="0" anchor="ctr"/>
+          <a:lstStyle/>
+          <a:p>
+            <a:pPr algn="ctr"/>
+            <a:endParaRPr lang="en-IE"/>
+          </a:p>
+        </p:txBody>
+      </p:sp>
+      <p:sp>
+        <p:nvSpPr>
+          <p:cNvPr id="94" name="TextBox 93">
+            <a:extLst>
+              <a:ext uri="{FF2B5EF4-FFF2-40B4-BE49-F238E27FC236}">
+                <a16:creationId xmlns:a16="http://schemas.microsoft.com/office/drawing/2014/main" id="{DC31B3FA-AD41-3E67-4907-5195F0A775AF}"/>
+              </a:ext>
+            </a:extLst>
+          </p:cNvPr>
+          <p:cNvSpPr txBox="1"/>
+          <p:nvPr/>
+        </p:nvSpPr>
+        <p:spPr>
+          <a:xfrm>
+            <a:off x="22365661" y="16186844"/>
+            <a:ext cx="6657975" cy="830997"/>
+          </a:xfrm>
+          <a:prstGeom prst="rect">
+            <a:avLst/>
+          </a:prstGeom>
+          <a:noFill/>
+        </p:spPr>
+        <p:txBody>
+          <a:bodyPr wrap="square" rtlCol="0">
+            <a:spAutoFit/>
+          </a:bodyPr>
+          <a:lstStyle/>
+          <a:p>
+            <a:pPr algn="ctr"/>
+            <a:r>
+              <a:rPr lang="en-IE" sz="4800" b="1" i="1" dirty="0"/>
+              <a:t>6). Dequeue Mutex</a:t>
+            </a:r>
+          </a:p>
+        </p:txBody>
+      </p:sp>
+      <p:grpSp>
+        <p:nvGrpSpPr>
+          <p:cNvPr id="96" name="Group 95">
+            <a:extLst>
+              <a:ext uri="{FF2B5EF4-FFF2-40B4-BE49-F238E27FC236}">
+                <a16:creationId xmlns:a16="http://schemas.microsoft.com/office/drawing/2014/main" id="{BEB964F5-01B5-3919-71C3-72F33580F0AB}"/>
+              </a:ext>
+            </a:extLst>
+          </p:cNvPr>
+          <p:cNvGrpSpPr/>
+          <p:nvPr/>
+        </p:nvGrpSpPr>
+        <p:grpSpPr>
+          <a:xfrm>
+            <a:off x="21325242" y="17001638"/>
+            <a:ext cx="8392038" cy="4236049"/>
+            <a:chOff x="12363450" y="4232467"/>
+            <a:chExt cx="9277350" cy="5044882"/>
+          </a:xfrm>
+        </p:grpSpPr>
+        <p:sp>
+          <p:nvSpPr>
+            <p:cNvPr id="100" name="Rectangle: Rounded Corners 99">
+              <a:extLst>
+                <a:ext uri="{FF2B5EF4-FFF2-40B4-BE49-F238E27FC236}">
+                  <a16:creationId xmlns:a16="http://schemas.microsoft.com/office/drawing/2014/main" id="{D1D4EDCD-A5D1-874D-2060-507433C888D5}"/>
+                </a:ext>
+              </a:extLst>
+            </p:cNvPr>
+            <p:cNvSpPr/>
+            <p:nvPr/>
+          </p:nvSpPr>
+          <p:spPr>
+            <a:xfrm>
+              <a:off x="12363450" y="4232467"/>
+              <a:ext cx="9277350" cy="5044882"/>
+            </a:xfrm>
+            <a:prstGeom prst="roundRect">
+              <a:avLst/>
+            </a:prstGeom>
+            <a:gradFill flip="none" rotWithShape="1">
+              <a:gsLst>
+                <a:gs pos="0">
+                  <a:schemeClr val="accent1">
+                    <a:shade val="30000"/>
+                    <a:satMod val="115000"/>
+                  </a:schemeClr>
+                </a:gs>
+                <a:gs pos="50000">
+                  <a:schemeClr val="accent1">
+                    <a:shade val="67500"/>
+                    <a:satMod val="115000"/>
+                  </a:schemeClr>
+                </a:gs>
+                <a:gs pos="100000">
+                  <a:schemeClr val="accent1">
+                    <a:shade val="100000"/>
+                    <a:satMod val="115000"/>
+                  </a:schemeClr>
+                </a:gs>
+              </a:gsLst>
+              <a:lin ang="13500000" scaled="1"/>
+              <a:tileRect/>
+            </a:gradFill>
+            <a:ln w="57150">
+              <a:solidFill>
+                <a:schemeClr val="tx1"/>
+              </a:solidFill>
+            </a:ln>
+          </p:spPr>
+          <p:style>
+            <a:lnRef idx="2">
+              <a:schemeClr val="accent1">
+                <a:shade val="15000"/>
+              </a:schemeClr>
+            </a:lnRef>
+            <a:fillRef idx="1">
+              <a:schemeClr val="accent1"/>
+            </a:fillRef>
+            <a:effectRef idx="0">
+              <a:schemeClr val="accent1"/>
+            </a:effectRef>
+            <a:fontRef idx="minor">
+              <a:schemeClr val="lt1"/>
+            </a:fontRef>
+          </p:style>
+          <p:txBody>
+            <a:bodyPr rtlCol="0" anchor="ctr"/>
+            <a:lstStyle/>
+            <a:p>
+              <a:pPr algn="ctr"/>
+              <a:endParaRPr lang="en-IE" sz="3200" b="1" dirty="0"/>
+            </a:p>
+          </p:txBody>
+        </p:sp>
+        <p:grpSp>
+          <p:nvGrpSpPr>
+            <p:cNvPr id="101" name="Group 100">
+              <a:extLst>
+                <a:ext uri="{FF2B5EF4-FFF2-40B4-BE49-F238E27FC236}">
+                  <a16:creationId xmlns:a16="http://schemas.microsoft.com/office/drawing/2014/main" id="{0C38E234-E7AC-FB28-218C-CCAB9770B5A1}"/>
+                </a:ext>
+              </a:extLst>
+            </p:cNvPr>
+            <p:cNvGrpSpPr/>
+            <p:nvPr/>
+          </p:nvGrpSpPr>
+          <p:grpSpPr>
+            <a:xfrm>
+              <a:off x="12515850" y="4385666"/>
+              <a:ext cx="9048750" cy="680484"/>
+              <a:chOff x="914400" y="4442816"/>
+              <a:chExt cx="9048750" cy="680484"/>
+            </a:xfrm>
+          </p:grpSpPr>
+          <p:sp>
+            <p:nvSpPr>
+              <p:cNvPr id="102" name="TextBox 101">
+                <a:extLst>
+                  <a:ext uri="{FF2B5EF4-FFF2-40B4-BE49-F238E27FC236}">
+                    <a16:creationId xmlns:a16="http://schemas.microsoft.com/office/drawing/2014/main" id="{6D892C4A-C8B2-E3B3-2102-90A87CEA6E3D}"/>
+                  </a:ext>
+                </a:extLst>
+              </p:cNvPr>
+              <p:cNvSpPr txBox="1"/>
+              <p:nvPr/>
+            </p:nvSpPr>
+            <p:spPr>
+              <a:xfrm>
+                <a:off x="914400" y="4442816"/>
+                <a:ext cx="9048750" cy="554636"/>
+              </a:xfrm>
+              <a:prstGeom prst="rect">
+                <a:avLst/>
+              </a:prstGeom>
+              <a:noFill/>
+            </p:spPr>
+            <p:txBody>
+              <a:bodyPr wrap="square">
+                <a:spAutoFit/>
+              </a:bodyPr>
+              <a:lstStyle/>
+              <a:p>
+                <a:pPr algn="ctr"/>
+                <a:r>
+                  <a:rPr lang="en-IE" sz="2800" b="1" dirty="0">
+                    <a:solidFill>
+                      <a:schemeClr val="bg1"/>
+                    </a:solidFill>
+                  </a:rPr>
+                  <a:t>Clear Central then Election Lock</a:t>
+                </a:r>
+              </a:p>
+            </p:txBody>
+          </p:sp>
+          <p:cxnSp>
+            <p:nvCxnSpPr>
+              <p:cNvPr id="103" name="Straight Connector 102">
+                <a:extLst>
+                  <a:ext uri="{FF2B5EF4-FFF2-40B4-BE49-F238E27FC236}">
+                    <a16:creationId xmlns:a16="http://schemas.microsoft.com/office/drawing/2014/main" id="{8F177FCE-694E-26FC-3BDF-DA48A7D41C49}"/>
+                  </a:ext>
+                </a:extLst>
+              </p:cNvPr>
+              <p:cNvCxnSpPr>
+                <a:cxnSpLocks/>
+              </p:cNvCxnSpPr>
+              <p:nvPr/>
+            </p:nvCxnSpPr>
+            <p:spPr>
+              <a:xfrm>
+                <a:off x="1412270" y="5123300"/>
+                <a:ext cx="8112730" cy="0"/>
+              </a:xfrm>
+              <a:prstGeom prst="line">
+                <a:avLst/>
+              </a:prstGeom>
+              <a:ln w="19050" cap="flat" cmpd="sng" algn="ctr">
+                <a:solidFill>
+                  <a:schemeClr val="bg1"/>
+                </a:solidFill>
+                <a:prstDash val="dash"/>
+                <a:round/>
+                <a:headEnd type="none" w="med" len="med"/>
+                <a:tailEnd type="none" w="med" len="med"/>
+              </a:ln>
+            </p:spPr>
+            <p:style>
+              <a:lnRef idx="0">
+                <a:scrgbClr r="0" g="0" b="0"/>
+              </a:lnRef>
+              <a:fillRef idx="0">
+                <a:scrgbClr r="0" g="0" b="0"/>
+              </a:fillRef>
+              <a:effectRef idx="0">
+                <a:scrgbClr r="0" g="0" b="0"/>
+              </a:effectRef>
+              <a:fontRef idx="minor">
+                <a:schemeClr val="tx1"/>
+              </a:fontRef>
+            </p:style>
+          </p:cxnSp>
+        </p:grpSp>
+      </p:grpSp>
+      <p:sp>
+        <p:nvSpPr>
+          <p:cNvPr id="113" name="Arrow: Right 112">
+            <a:extLst>
+              <a:ext uri="{FF2B5EF4-FFF2-40B4-BE49-F238E27FC236}">
+                <a16:creationId xmlns:a16="http://schemas.microsoft.com/office/drawing/2014/main" id="{5235A552-AB28-96C9-9D25-FE98C601670A}"/>
+              </a:ext>
+            </a:extLst>
+          </p:cNvPr>
+          <p:cNvSpPr/>
+          <p:nvPr/>
+        </p:nvSpPr>
+        <p:spPr>
+          <a:xfrm rot="5400000">
+            <a:off x="13797988" y="11983555"/>
+            <a:ext cx="2656859" cy="1619250"/>
+          </a:xfrm>
+          <a:prstGeom prst="rightArrow">
+            <a:avLst/>
+          </a:prstGeom>
+          <a:gradFill flip="none" rotWithShape="1">
+            <a:gsLst>
+              <a:gs pos="0">
+                <a:schemeClr val="accent1">
+                  <a:shade val="30000"/>
+                  <a:satMod val="115000"/>
+                </a:schemeClr>
+              </a:gs>
+              <a:gs pos="50000">
+                <a:schemeClr val="accent1">
+                  <a:shade val="67500"/>
+                  <a:satMod val="115000"/>
+                </a:schemeClr>
+              </a:gs>
+              <a:gs pos="100000">
+                <a:schemeClr val="accent1">
+                  <a:shade val="100000"/>
+                  <a:satMod val="115000"/>
+                </a:schemeClr>
+              </a:gs>
+            </a:gsLst>
+            <a:lin ang="13500000" scaled="1"/>
+            <a:tileRect/>
+          </a:gradFill>
+          <a:ln w="57150">
+            <a:solidFill>
+              <a:schemeClr val="tx1"/>
+            </a:solidFill>
+          </a:ln>
+        </p:spPr>
+        <p:style>
+          <a:lnRef idx="2">
+            <a:schemeClr val="accent1">
+              <a:shade val="15000"/>
+            </a:schemeClr>
+          </a:lnRef>
+          <a:fillRef idx="1">
+            <a:schemeClr val="accent1"/>
+          </a:fillRef>
+          <a:effectRef idx="0">
+            <a:schemeClr val="accent1"/>
+          </a:effectRef>
+          <a:fontRef idx="minor">
+            <a:schemeClr val="lt1"/>
+          </a:fontRef>
+        </p:style>
+        <p:txBody>
+          <a:bodyPr rtlCol="0" anchor="ctr"/>
+          <a:lstStyle/>
+          <a:p>
+            <a:pPr algn="ctr"/>
+            <a:endParaRPr lang="en-IE"/>
+          </a:p>
+        </p:txBody>
+      </p:sp>
+      <p:grpSp>
+        <p:nvGrpSpPr>
+          <p:cNvPr id="89" name="Group 88">
+            <a:extLst>
+              <a:ext uri="{FF2B5EF4-FFF2-40B4-BE49-F238E27FC236}">
+                <a16:creationId xmlns:a16="http://schemas.microsoft.com/office/drawing/2014/main" id="{3824AFED-603D-7D8E-5651-3778581935FE}"/>
+              </a:ext>
+            </a:extLst>
+          </p:cNvPr>
+          <p:cNvGrpSpPr/>
+          <p:nvPr/>
+        </p:nvGrpSpPr>
+        <p:grpSpPr>
+          <a:xfrm>
+            <a:off x="734291" y="17127947"/>
+            <a:ext cx="7521575" cy="3842943"/>
+            <a:chOff x="609600" y="4232468"/>
+            <a:chExt cx="9277350" cy="5044882"/>
+          </a:xfrm>
+        </p:grpSpPr>
+        <p:sp>
+          <p:nvSpPr>
+            <p:cNvPr id="108" name="Rectangle: Rounded Corners 107">
+              <a:extLst>
+                <a:ext uri="{FF2B5EF4-FFF2-40B4-BE49-F238E27FC236}">
+                  <a16:creationId xmlns:a16="http://schemas.microsoft.com/office/drawing/2014/main" id="{63642D35-62E7-4F25-2914-F20F10C76A8C}"/>
+                </a:ext>
+              </a:extLst>
+            </p:cNvPr>
+            <p:cNvSpPr/>
+            <p:nvPr/>
+          </p:nvSpPr>
+          <p:spPr>
+            <a:xfrm>
+              <a:off x="609600" y="4232468"/>
+              <a:ext cx="9277350" cy="5044882"/>
+            </a:xfrm>
+            <a:prstGeom prst="roundRect">
+              <a:avLst/>
+            </a:prstGeom>
+            <a:gradFill flip="none" rotWithShape="1">
+              <a:gsLst>
+                <a:gs pos="0">
+                  <a:schemeClr val="accent1">
+                    <a:shade val="30000"/>
+                    <a:satMod val="115000"/>
+                  </a:schemeClr>
+                </a:gs>
+                <a:gs pos="50000">
+                  <a:schemeClr val="accent1">
+                    <a:shade val="67500"/>
+                    <a:satMod val="115000"/>
+                  </a:schemeClr>
+                </a:gs>
+                <a:gs pos="100000">
+                  <a:schemeClr val="accent1">
+                    <a:shade val="100000"/>
+                    <a:satMod val="115000"/>
+                  </a:schemeClr>
+                </a:gs>
+              </a:gsLst>
+              <a:lin ang="13500000" scaled="1"/>
+              <a:tileRect/>
+            </a:gradFill>
+            <a:ln w="57150">
+              <a:solidFill>
+                <a:schemeClr val="tx1"/>
+              </a:solidFill>
+            </a:ln>
+          </p:spPr>
+          <p:style>
+            <a:lnRef idx="2">
+              <a:schemeClr val="accent1">
+                <a:shade val="15000"/>
+              </a:schemeClr>
+            </a:lnRef>
+            <a:fillRef idx="1">
+              <a:schemeClr val="accent1"/>
+            </a:fillRef>
+            <a:effectRef idx="0">
+              <a:schemeClr val="accent1"/>
+            </a:effectRef>
+            <a:fontRef idx="minor">
+              <a:schemeClr val="lt1"/>
+            </a:fontRef>
+          </p:style>
+          <p:txBody>
+            <a:bodyPr rtlCol="0" anchor="ctr"/>
+            <a:lstStyle/>
+            <a:p>
+              <a:endParaRPr lang="en-IE" sz="3200" b="1" dirty="0"/>
+            </a:p>
+          </p:txBody>
+        </p:sp>
+        <p:grpSp>
+          <p:nvGrpSpPr>
+            <p:cNvPr id="109" name="Group 108">
+              <a:extLst>
+                <a:ext uri="{FF2B5EF4-FFF2-40B4-BE49-F238E27FC236}">
+                  <a16:creationId xmlns:a16="http://schemas.microsoft.com/office/drawing/2014/main" id="{4C706FEC-6D43-6EF3-8962-CE9C89EDB1A5}"/>
+                </a:ext>
+              </a:extLst>
+            </p:cNvPr>
+            <p:cNvGrpSpPr/>
+            <p:nvPr/>
+          </p:nvGrpSpPr>
+          <p:grpSpPr>
+            <a:xfrm>
+              <a:off x="609600" y="4385666"/>
+              <a:ext cx="9048750" cy="689940"/>
+              <a:chOff x="914400" y="4442816"/>
+              <a:chExt cx="9048750" cy="689940"/>
+            </a:xfrm>
+          </p:grpSpPr>
+          <p:sp>
+            <p:nvSpPr>
+              <p:cNvPr id="110" name="TextBox 109">
+                <a:extLst>
+                  <a:ext uri="{FF2B5EF4-FFF2-40B4-BE49-F238E27FC236}">
+                    <a16:creationId xmlns:a16="http://schemas.microsoft.com/office/drawing/2014/main" id="{5FB26764-FE71-E2BA-81BD-1A41BC916065}"/>
+                  </a:ext>
+                </a:extLst>
+              </p:cNvPr>
+              <p:cNvSpPr txBox="1"/>
+              <p:nvPr/>
+            </p:nvSpPr>
+            <p:spPr>
+              <a:xfrm>
+                <a:off x="914400" y="4442816"/>
+                <a:ext cx="9048750" cy="523220"/>
+              </a:xfrm>
+              <a:prstGeom prst="rect">
+                <a:avLst/>
+              </a:prstGeom>
+              <a:noFill/>
+            </p:spPr>
+            <p:txBody>
+              <a:bodyPr wrap="square">
+                <a:spAutoFit/>
+              </a:bodyPr>
+              <a:lstStyle/>
+              <a:p>
+                <a:pPr algn="ctr"/>
+                <a:r>
+                  <a:rPr lang="en-IE" sz="2800" b="1" dirty="0">
+                    <a:solidFill>
+                      <a:schemeClr val="bg1"/>
+                    </a:solidFill>
+                  </a:rPr>
+                  <a:t>FileChannel Lock on Central LockFile</a:t>
+                </a:r>
+              </a:p>
+            </p:txBody>
+          </p:sp>
+          <p:cxnSp>
+            <p:nvCxnSpPr>
+              <p:cNvPr id="111" name="Straight Connector 110">
+                <a:extLst>
+                  <a:ext uri="{FF2B5EF4-FFF2-40B4-BE49-F238E27FC236}">
+                    <a16:creationId xmlns:a16="http://schemas.microsoft.com/office/drawing/2014/main" id="{D438D6CE-796E-F0D7-2297-DD9F25BC0390}"/>
+                  </a:ext>
+                </a:extLst>
+              </p:cNvPr>
+              <p:cNvCxnSpPr>
+                <a:cxnSpLocks/>
+              </p:cNvCxnSpPr>
+              <p:nvPr/>
+            </p:nvCxnSpPr>
+            <p:spPr>
+              <a:xfrm>
+                <a:off x="1497160" y="5132756"/>
+                <a:ext cx="8032762" cy="0"/>
+              </a:xfrm>
+              <a:prstGeom prst="line">
+                <a:avLst/>
+              </a:prstGeom>
+              <a:ln w="19050" cap="flat" cmpd="sng" algn="ctr">
+                <a:solidFill>
+                  <a:schemeClr val="bg1"/>
+                </a:solidFill>
+                <a:prstDash val="dash"/>
+                <a:round/>
+                <a:headEnd type="none" w="med" len="med"/>
+                <a:tailEnd type="none" w="med" len="med"/>
+              </a:ln>
+            </p:spPr>
+            <p:style>
+              <a:lnRef idx="0">
+                <a:scrgbClr r="0" g="0" b="0"/>
+              </a:lnRef>
+              <a:fillRef idx="0">
+                <a:scrgbClr r="0" g="0" b="0"/>
+              </a:fillRef>
+              <a:effectRef idx="0">
+                <a:scrgbClr r="0" g="0" b="0"/>
+              </a:effectRef>
+              <a:fontRef idx="minor">
+                <a:schemeClr val="tx1"/>
+              </a:fontRef>
+            </p:style>
+          </p:cxnSp>
+        </p:grpSp>
+      </p:grpSp>
+      <p:grpSp>
+        <p:nvGrpSpPr>
+          <p:cNvPr id="122" name="Group 121">
+            <a:extLst>
+              <a:ext uri="{FF2B5EF4-FFF2-40B4-BE49-F238E27FC236}">
+                <a16:creationId xmlns:a16="http://schemas.microsoft.com/office/drawing/2014/main" id="{2E5359AA-2A23-D204-F4FF-03D4CC2A86B1}"/>
+              </a:ext>
+            </a:extLst>
+          </p:cNvPr>
+          <p:cNvGrpSpPr/>
+          <p:nvPr/>
+        </p:nvGrpSpPr>
+        <p:grpSpPr>
+          <a:xfrm>
+            <a:off x="2801215" y="17976379"/>
+            <a:ext cx="3140911" cy="2301407"/>
+            <a:chOff x="1939924" y="18109350"/>
+            <a:chExt cx="3573819" cy="2536825"/>
+          </a:xfrm>
+        </p:grpSpPr>
+        <p:pic>
+          <p:nvPicPr>
+            <p:cNvPr id="120" name="Graphic 119" descr="Lock outline">
+              <a:extLst>
+                <a:ext uri="{FF2B5EF4-FFF2-40B4-BE49-F238E27FC236}">
+                  <a16:creationId xmlns:a16="http://schemas.microsoft.com/office/drawing/2014/main" id="{7B630FEC-92E0-4756-D730-8992B212194C}"/>
+                </a:ext>
+              </a:extLst>
+            </p:cNvPr>
+            <p:cNvPicPr>
+              <a:picLocks noChangeAspect="1"/>
+            </p:cNvPicPr>
+            <p:nvPr/>
+          </p:nvPicPr>
+          <p:blipFill>
+            <a:blip r:embed="rId7">
+              <a:extLst>
+                <a:ext uri="{96DAC541-7B7A-43D3-8B79-37D633B846F1}">
+                  <asvg:svgBlip xmlns:asvg="http://schemas.microsoft.com/office/drawing/2016/SVG/main" r:embed="rId8"/>
+                </a:ext>
+              </a:extLst>
+            </a:blip>
+            <a:stretch>
+              <a:fillRect/>
+            </a:stretch>
+          </p:blipFill>
+          <p:spPr>
+            <a:xfrm>
+              <a:off x="3836986" y="18584802"/>
+              <a:ext cx="1676757" cy="1676757"/>
+            </a:xfrm>
+            <a:prstGeom prst="rect">
+              <a:avLst/>
+            </a:prstGeom>
+          </p:spPr>
+        </p:pic>
+        <p:pic>
+          <p:nvPicPr>
+            <p:cNvPr id="121" name="Graphic 120" descr="Document with solid fill">
+              <a:extLst>
+                <a:ext uri="{FF2B5EF4-FFF2-40B4-BE49-F238E27FC236}">
+                  <a16:creationId xmlns:a16="http://schemas.microsoft.com/office/drawing/2014/main" id="{9A7FF259-FA79-C04A-27C7-5666BA552DE4}"/>
+                </a:ext>
+              </a:extLst>
+            </p:cNvPr>
+            <p:cNvPicPr>
+              <a:picLocks noChangeAspect="1"/>
+            </p:cNvPicPr>
+            <p:nvPr/>
+          </p:nvPicPr>
+          <p:blipFill>
+            <a:blip r:embed="rId9">
+              <a:extLst>
+                <a:ext uri="{96DAC541-7B7A-43D3-8B79-37D633B846F1}">
+                  <asvg:svgBlip xmlns:asvg="http://schemas.microsoft.com/office/drawing/2016/SVG/main" r:embed="rId10"/>
+                </a:ext>
+              </a:extLst>
+            </a:blip>
+            <a:stretch>
+              <a:fillRect/>
+            </a:stretch>
+          </p:blipFill>
+          <p:spPr>
+            <a:xfrm>
+              <a:off x="1939924" y="18109350"/>
+              <a:ext cx="2536825" cy="2536825"/>
+            </a:xfrm>
+            <a:prstGeom prst="rect">
+              <a:avLst/>
+            </a:prstGeom>
+          </p:spPr>
+        </p:pic>
+      </p:grpSp>
+      <p:grpSp>
+        <p:nvGrpSpPr>
+          <p:cNvPr id="91" name="Group 90">
+            <a:extLst>
+              <a:ext uri="{FF2B5EF4-FFF2-40B4-BE49-F238E27FC236}">
+                <a16:creationId xmlns:a16="http://schemas.microsoft.com/office/drawing/2014/main" id="{58AADD96-942D-E95B-B1E7-25F4E2905E02}"/>
+              </a:ext>
+            </a:extLst>
+          </p:cNvPr>
+          <p:cNvGrpSpPr/>
+          <p:nvPr/>
+        </p:nvGrpSpPr>
+        <p:grpSpPr>
+          <a:xfrm>
+            <a:off x="11122891" y="17127947"/>
+            <a:ext cx="7023100" cy="3919143"/>
+            <a:chOff x="12363450" y="4232467"/>
+            <a:chExt cx="9277350" cy="5044882"/>
+          </a:xfrm>
+        </p:grpSpPr>
+        <p:sp>
+          <p:nvSpPr>
+            <p:cNvPr id="104" name="Rectangle: Rounded Corners 103">
+              <a:extLst>
+                <a:ext uri="{FF2B5EF4-FFF2-40B4-BE49-F238E27FC236}">
+                  <a16:creationId xmlns:a16="http://schemas.microsoft.com/office/drawing/2014/main" id="{8CE5F9D7-906C-B109-E9C5-E0D38401E58F}"/>
+                </a:ext>
+              </a:extLst>
+            </p:cNvPr>
+            <p:cNvSpPr/>
+            <p:nvPr/>
+          </p:nvSpPr>
+          <p:spPr>
+            <a:xfrm>
+              <a:off x="12363450" y="4232467"/>
+              <a:ext cx="9277350" cy="5044882"/>
+            </a:xfrm>
+            <a:prstGeom prst="roundRect">
+              <a:avLst/>
+            </a:prstGeom>
+            <a:gradFill flip="none" rotWithShape="1">
+              <a:gsLst>
+                <a:gs pos="0">
+                  <a:schemeClr val="accent1">
+                    <a:shade val="30000"/>
+                    <a:satMod val="115000"/>
+                  </a:schemeClr>
+                </a:gs>
+                <a:gs pos="50000">
+                  <a:schemeClr val="accent1">
+                    <a:shade val="67500"/>
+                    <a:satMod val="115000"/>
+                  </a:schemeClr>
+                </a:gs>
+                <a:gs pos="100000">
+                  <a:schemeClr val="accent1">
+                    <a:shade val="100000"/>
+                    <a:satMod val="115000"/>
+                  </a:schemeClr>
+                </a:gs>
+              </a:gsLst>
+              <a:lin ang="13500000" scaled="1"/>
+              <a:tileRect/>
+            </a:gradFill>
+            <a:ln w="57150">
+              <a:solidFill>
+                <a:schemeClr val="tx1"/>
+              </a:solidFill>
+            </a:ln>
+          </p:spPr>
+          <p:style>
+            <a:lnRef idx="2">
+              <a:schemeClr val="accent1">
+                <a:shade val="15000"/>
+              </a:schemeClr>
+            </a:lnRef>
+            <a:fillRef idx="1">
+              <a:schemeClr val="accent1"/>
+            </a:fillRef>
+            <a:effectRef idx="0">
+              <a:schemeClr val="accent1"/>
+            </a:effectRef>
+            <a:fontRef idx="minor">
+              <a:schemeClr val="lt1"/>
+            </a:fontRef>
+          </p:style>
+          <p:txBody>
+            <a:bodyPr rtlCol="0" anchor="ctr"/>
+            <a:lstStyle/>
+            <a:p>
+              <a:pPr algn="ctr"/>
+              <a:endParaRPr lang="en-IE" sz="3200" b="1" dirty="0"/>
+            </a:p>
+          </p:txBody>
+        </p:sp>
+        <p:grpSp>
+          <p:nvGrpSpPr>
+            <p:cNvPr id="105" name="Group 104">
+              <a:extLst>
+                <a:ext uri="{FF2B5EF4-FFF2-40B4-BE49-F238E27FC236}">
+                  <a16:creationId xmlns:a16="http://schemas.microsoft.com/office/drawing/2014/main" id="{EFB25828-2711-D2B1-17B2-15EC5A261F83}"/>
+                </a:ext>
+              </a:extLst>
+            </p:cNvPr>
+            <p:cNvGrpSpPr/>
+            <p:nvPr/>
+          </p:nvGrpSpPr>
+          <p:grpSpPr>
+            <a:xfrm>
+              <a:off x="12515850" y="4385666"/>
+              <a:ext cx="9048750" cy="692714"/>
+              <a:chOff x="914400" y="4442816"/>
+              <a:chExt cx="9048750" cy="692714"/>
+            </a:xfrm>
+          </p:grpSpPr>
+          <p:sp>
+            <p:nvSpPr>
+              <p:cNvPr id="106" name="TextBox 105">
+                <a:extLst>
+                  <a:ext uri="{FF2B5EF4-FFF2-40B4-BE49-F238E27FC236}">
+                    <a16:creationId xmlns:a16="http://schemas.microsoft.com/office/drawing/2014/main" id="{401BD3F1-B161-5045-06D8-A48535812444}"/>
+                  </a:ext>
+                </a:extLst>
+              </p:cNvPr>
+              <p:cNvSpPr txBox="1"/>
+              <p:nvPr/>
+            </p:nvSpPr>
+            <p:spPr>
+              <a:xfrm>
+                <a:off x="914400" y="4442816"/>
+                <a:ext cx="9048750" cy="554636"/>
+              </a:xfrm>
+              <a:prstGeom prst="rect">
+                <a:avLst/>
+              </a:prstGeom>
+              <a:noFill/>
+            </p:spPr>
+            <p:txBody>
+              <a:bodyPr wrap="square">
+                <a:spAutoFit/>
+              </a:bodyPr>
+              <a:lstStyle/>
+              <a:p>
+                <a:pPr algn="ctr"/>
+                <a:r>
+                  <a:rPr lang="en-IE" sz="2800" b="1" dirty="0">
+                    <a:solidFill>
+                      <a:schemeClr val="bg1"/>
+                    </a:solidFill>
+                  </a:rPr>
+                  <a:t>Run Job</a:t>
+                </a:r>
+              </a:p>
+            </p:txBody>
+          </p:sp>
+          <p:cxnSp>
+            <p:nvCxnSpPr>
+              <p:cNvPr id="107" name="Straight Connector 106">
+                <a:extLst>
+                  <a:ext uri="{FF2B5EF4-FFF2-40B4-BE49-F238E27FC236}">
+                    <a16:creationId xmlns:a16="http://schemas.microsoft.com/office/drawing/2014/main" id="{F6133D7E-94E1-7137-40DE-0C6131EF1123}"/>
+                  </a:ext>
+                </a:extLst>
+              </p:cNvPr>
+              <p:cNvCxnSpPr>
+                <a:cxnSpLocks/>
+              </p:cNvCxnSpPr>
+              <p:nvPr/>
+            </p:nvCxnSpPr>
+            <p:spPr>
+              <a:xfrm>
+                <a:off x="1412269" y="5135530"/>
+                <a:ext cx="8112730" cy="0"/>
+              </a:xfrm>
+              <a:prstGeom prst="line">
+                <a:avLst/>
+              </a:prstGeom>
+              <a:ln w="19050" cap="flat" cmpd="sng" algn="ctr">
+                <a:solidFill>
+                  <a:schemeClr val="bg1"/>
+                </a:solidFill>
+                <a:prstDash val="dash"/>
+                <a:round/>
+                <a:headEnd type="none" w="med" len="med"/>
+                <a:tailEnd type="none" w="med" len="med"/>
+              </a:ln>
+            </p:spPr>
+            <p:style>
+              <a:lnRef idx="0">
+                <a:scrgbClr r="0" g="0" b="0"/>
+              </a:lnRef>
+              <a:fillRef idx="0">
+                <a:scrgbClr r="0" g="0" b="0"/>
+              </a:fillRef>
+              <a:effectRef idx="0">
+                <a:scrgbClr r="0" g="0" b="0"/>
+              </a:effectRef>
+              <a:fontRef idx="minor">
+                <a:schemeClr val="tx1"/>
+              </a:fontRef>
+            </p:style>
+          </p:cxnSp>
+        </p:grpSp>
+      </p:grpSp>
+      <p:grpSp>
+        <p:nvGrpSpPr>
+          <p:cNvPr id="132" name="Group 131">
+            <a:extLst>
+              <a:ext uri="{FF2B5EF4-FFF2-40B4-BE49-F238E27FC236}">
+                <a16:creationId xmlns:a16="http://schemas.microsoft.com/office/drawing/2014/main" id="{5D7E449F-558E-2A82-83D0-0DD18C718BCB}"/>
+              </a:ext>
+            </a:extLst>
+          </p:cNvPr>
+          <p:cNvGrpSpPr/>
+          <p:nvPr/>
+        </p:nvGrpSpPr>
+        <p:grpSpPr>
+          <a:xfrm>
+            <a:off x="12985467" y="17813790"/>
+            <a:ext cx="4074674" cy="2638970"/>
+            <a:chOff x="15089626" y="18117665"/>
+            <a:chExt cx="2911547" cy="2214581"/>
+          </a:xfrm>
+        </p:grpSpPr>
+        <p:pic>
+          <p:nvPicPr>
+            <p:cNvPr id="130" name="Graphic 129" descr="Database outline">
+              <a:extLst>
+                <a:ext uri="{FF2B5EF4-FFF2-40B4-BE49-F238E27FC236}">
+                  <a16:creationId xmlns:a16="http://schemas.microsoft.com/office/drawing/2014/main" id="{A1B2ADF8-6F5C-75F1-C094-9E6AE9F71215}"/>
+                </a:ext>
+              </a:extLst>
+            </p:cNvPr>
+            <p:cNvPicPr>
+              <a:picLocks noChangeAspect="1"/>
+            </p:cNvPicPr>
+            <p:nvPr/>
+          </p:nvPicPr>
+          <p:blipFill>
+            <a:blip r:embed="rId11">
+              <a:extLst>
+                <a:ext uri="{96DAC541-7B7A-43D3-8B79-37D633B846F1}">
+                  <asvg:svgBlip xmlns:asvg="http://schemas.microsoft.com/office/drawing/2016/SVG/main" r:embed="rId12"/>
+                </a:ext>
+              </a:extLst>
+            </a:blip>
+            <a:stretch>
+              <a:fillRect/>
+            </a:stretch>
+          </p:blipFill>
+          <p:spPr>
+            <a:xfrm>
+              <a:off x="15089626" y="18117665"/>
+              <a:ext cx="2214581" cy="2214581"/>
+            </a:xfrm>
+            <a:prstGeom prst="rect">
+              <a:avLst/>
+            </a:prstGeom>
+          </p:spPr>
+        </p:pic>
+        <p:pic>
+          <p:nvPicPr>
+            <p:cNvPr id="131" name="Graphic 130" descr="Gears outline">
+              <a:extLst>
+                <a:ext uri="{FF2B5EF4-FFF2-40B4-BE49-F238E27FC236}">
+                  <a16:creationId xmlns:a16="http://schemas.microsoft.com/office/drawing/2014/main" id="{728D8DAC-7377-4510-7121-8CD0C52F6925}"/>
+                </a:ext>
+              </a:extLst>
+            </p:cNvPr>
+            <p:cNvPicPr>
+              <a:picLocks noChangeAspect="1"/>
+            </p:cNvPicPr>
+            <p:nvPr/>
+          </p:nvPicPr>
+          <p:blipFill>
+            <a:blip r:embed="rId13">
+              <a:extLst>
+                <a:ext uri="{96DAC541-7B7A-43D3-8B79-37D633B846F1}">
+                  <asvg:svgBlip xmlns:asvg="http://schemas.microsoft.com/office/drawing/2016/SVG/main" r:embed="rId14"/>
+                </a:ext>
+              </a:extLst>
+            </a:blip>
+            <a:stretch>
+              <a:fillRect/>
+            </a:stretch>
+          </p:blipFill>
+          <p:spPr>
+            <a:xfrm>
+              <a:off x="16511777" y="18356709"/>
+              <a:ext cx="1489396" cy="1489396"/>
+            </a:xfrm>
+            <a:prstGeom prst="rect">
+              <a:avLst/>
+            </a:prstGeom>
+          </p:spPr>
+        </p:pic>
+      </p:grpSp>
+      <p:sp>
+        <p:nvSpPr>
+          <p:cNvPr id="138" name="Minus Sign 137">
+            <a:extLst>
+              <a:ext uri="{FF2B5EF4-FFF2-40B4-BE49-F238E27FC236}">
+                <a16:creationId xmlns:a16="http://schemas.microsoft.com/office/drawing/2014/main" id="{C48D16BE-8A2E-3ACD-419B-BB62C0A67363}"/>
+              </a:ext>
+            </a:extLst>
+          </p:cNvPr>
+          <p:cNvSpPr/>
+          <p:nvPr/>
+        </p:nvSpPr>
+        <p:spPr>
+          <a:xfrm rot="2461338">
+            <a:off x="25800995" y="18867001"/>
+            <a:ext cx="4601827" cy="763631"/>
+          </a:xfrm>
+          <a:prstGeom prst="mathMinus">
+            <a:avLst/>
+          </a:prstGeom>
+          <a:solidFill>
+            <a:schemeClr val="accent6">
+              <a:lumMod val="60000"/>
+              <a:lumOff val="40000"/>
+            </a:schemeClr>
+          </a:solidFill>
+          <a:ln>
+            <a:solidFill>
+              <a:schemeClr val="accent6">
+                <a:lumMod val="60000"/>
+                <a:lumOff val="40000"/>
+              </a:schemeClr>
+            </a:solidFill>
+          </a:ln>
+        </p:spPr>
+        <p:style>
+          <a:lnRef idx="2">
+            <a:schemeClr val="accent1">
+              <a:shade val="15000"/>
+            </a:schemeClr>
+          </a:lnRef>
+          <a:fillRef idx="1">
+            <a:schemeClr val="accent1"/>
+          </a:fillRef>
+          <a:effectRef idx="0">
+            <a:schemeClr val="accent1"/>
+          </a:effectRef>
+          <a:fontRef idx="minor">
+            <a:schemeClr val="lt1"/>
+          </a:fontRef>
+        </p:style>
+        <p:txBody>
+          <a:bodyPr rtlCol="0" anchor="ctr"/>
+          <a:lstStyle/>
+          <a:p>
+            <a:pPr algn="ctr"/>
+            <a:endParaRPr lang="en-IE"/>
+          </a:p>
+        </p:txBody>
+      </p:sp>
+      <p:grpSp>
+        <p:nvGrpSpPr>
+          <p:cNvPr id="148" name="Group 147">
+            <a:extLst>
+              <a:ext uri="{FF2B5EF4-FFF2-40B4-BE49-F238E27FC236}">
+                <a16:creationId xmlns:a16="http://schemas.microsoft.com/office/drawing/2014/main" id="{FE2729AB-7D31-09EC-B6D4-DD02446E99F7}"/>
+              </a:ext>
+            </a:extLst>
+          </p:cNvPr>
+          <p:cNvGrpSpPr/>
+          <p:nvPr/>
+        </p:nvGrpSpPr>
+        <p:grpSpPr>
+          <a:xfrm>
+            <a:off x="20892445" y="18258842"/>
+            <a:ext cx="8251657" cy="2105025"/>
+            <a:chOff x="20920154" y="17681571"/>
+            <a:chExt cx="8251657" cy="2105025"/>
+          </a:xfrm>
+        </p:grpSpPr>
+        <p:sp>
+          <p:nvSpPr>
+            <p:cNvPr id="99" name="Arrow: Right 98">
+              <a:extLst>
+                <a:ext uri="{FF2B5EF4-FFF2-40B4-BE49-F238E27FC236}">
+                  <a16:creationId xmlns:a16="http://schemas.microsoft.com/office/drawing/2014/main" id="{9BFB6834-0C7D-E9A4-ED0F-4C588162AC49}"/>
+                </a:ext>
+              </a:extLst>
+            </p:cNvPr>
+            <p:cNvSpPr/>
+            <p:nvPr/>
+          </p:nvSpPr>
+          <p:spPr>
+            <a:xfrm>
+              <a:off x="24851915" y="18210209"/>
+              <a:ext cx="1828800" cy="981939"/>
+            </a:xfrm>
+            <a:prstGeom prst="rightArrow">
+              <a:avLst/>
+            </a:prstGeom>
+            <a:solidFill>
+              <a:schemeClr val="accent2"/>
+            </a:solidFill>
+            <a:ln w="57150">
+              <a:solidFill>
+                <a:schemeClr val="tx1"/>
+              </a:solidFill>
+            </a:ln>
+          </p:spPr>
+          <p:style>
+            <a:lnRef idx="2">
+              <a:schemeClr val="accent1">
+                <a:shade val="15000"/>
+              </a:schemeClr>
+            </a:lnRef>
+            <a:fillRef idx="1">
+              <a:schemeClr val="accent1"/>
+            </a:fillRef>
+            <a:effectRef idx="0">
+              <a:schemeClr val="accent1"/>
+            </a:effectRef>
+            <a:fontRef idx="minor">
+              <a:schemeClr val="lt1"/>
+            </a:fontRef>
+          </p:style>
+          <p:txBody>
+            <a:bodyPr rtlCol="0" anchor="ctr"/>
+            <a:lstStyle/>
+            <a:p>
+              <a:pPr algn="ctr"/>
+              <a:endParaRPr lang="en-IE"/>
+            </a:p>
+          </p:txBody>
+        </p:sp>
+        <p:grpSp>
+          <p:nvGrpSpPr>
+            <p:cNvPr id="135" name="Group 134">
+              <a:extLst>
+                <a:ext uri="{FF2B5EF4-FFF2-40B4-BE49-F238E27FC236}">
+                  <a16:creationId xmlns:a16="http://schemas.microsoft.com/office/drawing/2014/main" id="{8D3338D0-9143-5ED2-2FAA-962AD88F8957}"/>
+                </a:ext>
+              </a:extLst>
+            </p:cNvPr>
+            <p:cNvGrpSpPr/>
+            <p:nvPr/>
+          </p:nvGrpSpPr>
+          <p:grpSpPr>
+            <a:xfrm>
+              <a:off x="21995031" y="17702978"/>
+              <a:ext cx="2427822" cy="1996402"/>
+              <a:chOff x="26375777" y="17930059"/>
+              <a:chExt cx="3573819" cy="2536825"/>
+            </a:xfrm>
+          </p:grpSpPr>
+          <p:pic>
+            <p:nvPicPr>
+              <p:cNvPr id="133" name="Graphic 132" descr="Lock outline">
+                <a:extLst>
+                  <a:ext uri="{FF2B5EF4-FFF2-40B4-BE49-F238E27FC236}">
+                    <a16:creationId xmlns:a16="http://schemas.microsoft.com/office/drawing/2014/main" id="{A193D7A6-EA2C-4556-C775-0E301B707948}"/>
+                  </a:ext>
+                </a:extLst>
+              </p:cNvPr>
+              <p:cNvPicPr>
+                <a:picLocks noChangeAspect="1"/>
+              </p:cNvPicPr>
+              <p:nvPr/>
+            </p:nvPicPr>
+            <p:blipFill>
+              <a:blip r:embed="rId7">
+                <a:extLst>
+                  <a:ext uri="{96DAC541-7B7A-43D3-8B79-37D633B846F1}">
+                    <asvg:svgBlip xmlns:asvg="http://schemas.microsoft.com/office/drawing/2016/SVG/main" r:embed="rId8"/>
+                  </a:ext>
+                </a:extLst>
+              </a:blip>
+              <a:stretch>
+                <a:fillRect/>
+              </a:stretch>
+            </p:blipFill>
+            <p:spPr>
+              <a:xfrm>
+                <a:off x="28272839" y="18405511"/>
+                <a:ext cx="1676757" cy="1676757"/>
+              </a:xfrm>
+              <a:prstGeom prst="rect">
+                <a:avLst/>
+              </a:prstGeom>
+            </p:spPr>
+          </p:pic>
+          <p:pic>
+            <p:nvPicPr>
+              <p:cNvPr id="134" name="Graphic 133" descr="Document with solid fill">
+                <a:extLst>
+                  <a:ext uri="{FF2B5EF4-FFF2-40B4-BE49-F238E27FC236}">
+                    <a16:creationId xmlns:a16="http://schemas.microsoft.com/office/drawing/2014/main" id="{45B2C3B3-84ED-56A1-57A4-39CBF959ED92}"/>
+                  </a:ext>
+                </a:extLst>
+              </p:cNvPr>
+              <p:cNvPicPr>
+                <a:picLocks noChangeAspect="1"/>
+              </p:cNvPicPr>
+              <p:nvPr/>
+            </p:nvPicPr>
+            <p:blipFill>
+              <a:blip r:embed="rId9">
+                <a:extLst>
+                  <a:ext uri="{96DAC541-7B7A-43D3-8B79-37D633B846F1}">
+                    <asvg:svgBlip xmlns:asvg="http://schemas.microsoft.com/office/drawing/2016/SVG/main" r:embed="rId10"/>
+                  </a:ext>
+                </a:extLst>
+              </a:blip>
+              <a:stretch>
+                <a:fillRect/>
+              </a:stretch>
+            </p:blipFill>
+            <p:spPr>
+              <a:xfrm>
+                <a:off x="26375777" y="17930059"/>
+                <a:ext cx="2536825" cy="2536825"/>
+              </a:xfrm>
+              <a:prstGeom prst="rect">
+                <a:avLst/>
+              </a:prstGeom>
+            </p:spPr>
+          </p:pic>
+        </p:grpSp>
+        <p:pic>
+          <p:nvPicPr>
+            <p:cNvPr id="97" name="Graphic 96" descr="Alarm Ringing outline">
+              <a:extLst>
+                <a:ext uri="{FF2B5EF4-FFF2-40B4-BE49-F238E27FC236}">
+                  <a16:creationId xmlns:a16="http://schemas.microsoft.com/office/drawing/2014/main" id="{7DD1699D-8A5C-2C89-E485-D1DE7EA636B5}"/>
+                </a:ext>
+              </a:extLst>
+            </p:cNvPr>
+            <p:cNvPicPr>
+              <a:picLocks noChangeAspect="1"/>
+            </p:cNvPicPr>
+            <p:nvPr/>
+          </p:nvPicPr>
+          <p:blipFill>
+            <a:blip r:embed="rId3">
+              <a:extLst>
+                <a:ext uri="{96DAC541-7B7A-43D3-8B79-37D633B846F1}">
+                  <asvg:svgBlip xmlns:asvg="http://schemas.microsoft.com/office/drawing/2016/SVG/main" r:embed="rId15"/>
+                </a:ext>
+              </a:extLst>
+            </a:blip>
+            <a:stretch>
+              <a:fillRect/>
+            </a:stretch>
+          </p:blipFill>
+          <p:spPr>
+            <a:xfrm>
+              <a:off x="27066786" y="17681571"/>
+              <a:ext cx="2105025" cy="2105025"/>
+            </a:xfrm>
+            <a:prstGeom prst="rect">
+              <a:avLst/>
+            </a:prstGeom>
+          </p:spPr>
+        </p:pic>
+        <p:sp>
+          <p:nvSpPr>
+            <p:cNvPr id="141" name="Minus Sign 140">
+              <a:extLst>
+                <a:ext uri="{FF2B5EF4-FFF2-40B4-BE49-F238E27FC236}">
+                  <a16:creationId xmlns:a16="http://schemas.microsoft.com/office/drawing/2014/main" id="{D1BB6AE0-ED32-E388-CB7C-69E78586C5B7}"/>
+                </a:ext>
+              </a:extLst>
+            </p:cNvPr>
+            <p:cNvSpPr/>
+            <p:nvPr/>
+          </p:nvSpPr>
+          <p:spPr>
+            <a:xfrm rot="2461338">
+              <a:off x="20920154" y="18264330"/>
+              <a:ext cx="4601827" cy="763631"/>
+            </a:xfrm>
+            <a:prstGeom prst="mathMinus">
+              <a:avLst/>
+            </a:prstGeom>
+            <a:solidFill>
+              <a:schemeClr val="accent6">
+                <a:lumMod val="60000"/>
+                <a:lumOff val="40000"/>
+              </a:schemeClr>
+            </a:solidFill>
+            <a:ln>
+              <a:solidFill>
+                <a:schemeClr val="accent6">
+                  <a:lumMod val="60000"/>
+                  <a:lumOff val="40000"/>
+                </a:schemeClr>
+              </a:solidFill>
+            </a:ln>
+          </p:spPr>
+          <p:style>
+            <a:lnRef idx="2">
+              <a:schemeClr val="accent1">
+                <a:shade val="15000"/>
+              </a:schemeClr>
+            </a:lnRef>
+            <a:fillRef idx="1">
+              <a:schemeClr val="accent1"/>
+            </a:fillRef>
+            <a:effectRef idx="0">
+              <a:schemeClr val="accent1"/>
+            </a:effectRef>
+            <a:fontRef idx="minor">
+              <a:schemeClr val="lt1"/>
+            </a:fontRef>
+          </p:style>
+          <p:txBody>
+            <a:bodyPr rtlCol="0" anchor="ctr"/>
+            <a:lstStyle/>
+            <a:p>
+              <a:pPr algn="ctr"/>
+              <a:endParaRPr lang="en-IE"/>
+            </a:p>
+          </p:txBody>
+        </p:sp>
+      </p:grpSp>
+      <p:sp>
+        <p:nvSpPr>
+          <p:cNvPr id="143" name="TextBox 142">
+            <a:extLst>
+              <a:ext uri="{FF2B5EF4-FFF2-40B4-BE49-F238E27FC236}">
+                <a16:creationId xmlns:a16="http://schemas.microsoft.com/office/drawing/2014/main" id="{779D6EF5-6E71-750C-C968-275F246CB369}"/>
+              </a:ext>
+            </a:extLst>
+          </p:cNvPr>
+          <p:cNvSpPr txBox="1"/>
+          <p:nvPr/>
+        </p:nvSpPr>
+        <p:spPr>
+          <a:xfrm>
+            <a:off x="13082300" y="20477304"/>
+            <a:ext cx="3099279" cy="400110"/>
+          </a:xfrm>
+          <a:prstGeom prst="rect">
+            <a:avLst/>
+          </a:prstGeom>
+          <a:noFill/>
+        </p:spPr>
+        <p:txBody>
+          <a:bodyPr wrap="square">
+            <a:spAutoFit/>
+          </a:bodyPr>
+          <a:lstStyle/>
+          <a:p>
+            <a:pPr algn="ctr"/>
+            <a:r>
+              <a:rPr lang="en-IE" sz="2000" b="1" dirty="0">
+                <a:solidFill>
+                  <a:schemeClr val="bg1"/>
+                </a:solidFill>
+              </a:rPr>
+              <a:t>Read/Write ItemStore</a:t>
+            </a:r>
+            <a:endParaRPr lang="en-IE" sz="2800" b="1" dirty="0">
+              <a:solidFill>
+                <a:schemeClr val="bg1"/>
+              </a:solidFill>
+            </a:endParaRPr>
+          </a:p>
+        </p:txBody>
+      </p:sp>
+      <p:sp>
+        <p:nvSpPr>
+          <p:cNvPr id="144" name="TextBox 143">
+            <a:extLst>
+              <a:ext uri="{FF2B5EF4-FFF2-40B4-BE49-F238E27FC236}">
+                <a16:creationId xmlns:a16="http://schemas.microsoft.com/office/drawing/2014/main" id="{0163D558-D9CF-EB15-A543-67E9B490F9E6}"/>
+              </a:ext>
+            </a:extLst>
+          </p:cNvPr>
+          <p:cNvSpPr txBox="1"/>
+          <p:nvPr/>
+        </p:nvSpPr>
+        <p:spPr>
+          <a:xfrm>
+            <a:off x="24093343" y="8718149"/>
+            <a:ext cx="3099279" cy="400110"/>
+          </a:xfrm>
+          <a:prstGeom prst="rect">
+            <a:avLst/>
+          </a:prstGeom>
+          <a:noFill/>
+        </p:spPr>
+        <p:txBody>
+          <a:bodyPr wrap="square">
+            <a:spAutoFit/>
+          </a:bodyPr>
+          <a:lstStyle/>
+          <a:p>
+            <a:pPr algn="ctr"/>
+            <a:r>
+              <a:rPr lang="en-IE" sz="2000" b="1" dirty="0">
+                <a:solidFill>
+                  <a:schemeClr val="bg1"/>
+                </a:solidFill>
+              </a:rPr>
+              <a:t>Commits HostLock File</a:t>
+            </a:r>
+            <a:endParaRPr lang="en-IE" sz="2800" b="1" dirty="0">
+              <a:solidFill>
+                <a:schemeClr val="bg1"/>
+              </a:solidFill>
+            </a:endParaRPr>
+          </a:p>
+        </p:txBody>
+      </p:sp>
+      <p:sp>
+        <p:nvSpPr>
+          <p:cNvPr id="145" name="TextBox 144">
+            <a:extLst>
+              <a:ext uri="{FF2B5EF4-FFF2-40B4-BE49-F238E27FC236}">
+                <a16:creationId xmlns:a16="http://schemas.microsoft.com/office/drawing/2014/main" id="{488BA0E4-2698-AA4F-33BC-437205A939A7}"/>
+              </a:ext>
+            </a:extLst>
+          </p:cNvPr>
+          <p:cNvSpPr txBox="1"/>
+          <p:nvPr/>
+        </p:nvSpPr>
+        <p:spPr>
+          <a:xfrm>
+            <a:off x="22975262" y="20665264"/>
+            <a:ext cx="5526310" cy="400110"/>
+          </a:xfrm>
+          <a:prstGeom prst="rect">
+            <a:avLst/>
+          </a:prstGeom>
+          <a:noFill/>
+        </p:spPr>
+        <p:txBody>
+          <a:bodyPr wrap="square">
+            <a:spAutoFit/>
+          </a:bodyPr>
+          <a:lstStyle/>
+          <a:p>
+            <a:pPr algn="ctr"/>
+            <a:r>
+              <a:rPr lang="en-IE" sz="2000" b="1" dirty="0">
+                <a:solidFill>
+                  <a:schemeClr val="bg1"/>
+                </a:solidFill>
+              </a:rPr>
+              <a:t>Clears lock files for the next elected leader</a:t>
+            </a:r>
+            <a:endParaRPr lang="en-IE" sz="2800" b="1" dirty="0">
+              <a:solidFill>
+                <a:schemeClr val="bg1"/>
+              </a:solidFill>
+            </a:endParaRPr>
+          </a:p>
+        </p:txBody>
+      </p:sp>
+      <p:sp>
+        <p:nvSpPr>
+          <p:cNvPr id="146" name="TextBox 145">
+            <a:extLst>
+              <a:ext uri="{FF2B5EF4-FFF2-40B4-BE49-F238E27FC236}">
+                <a16:creationId xmlns:a16="http://schemas.microsoft.com/office/drawing/2014/main" id="{3B8E43E1-7436-194E-48AB-E1CA8307367E}"/>
+              </a:ext>
+            </a:extLst>
+          </p:cNvPr>
+          <p:cNvSpPr txBox="1"/>
+          <p:nvPr/>
+        </p:nvSpPr>
+        <p:spPr>
+          <a:xfrm>
+            <a:off x="2527706" y="20340796"/>
+            <a:ext cx="3099279" cy="400110"/>
+          </a:xfrm>
+          <a:prstGeom prst="rect">
+            <a:avLst/>
+          </a:prstGeom>
+          <a:noFill/>
+        </p:spPr>
+        <p:txBody>
+          <a:bodyPr wrap="square">
+            <a:spAutoFit/>
+          </a:bodyPr>
+          <a:lstStyle/>
+          <a:p>
+            <a:pPr algn="ctr"/>
+            <a:r>
+              <a:rPr lang="en-IE" sz="2000" b="1" dirty="0">
+                <a:solidFill>
+                  <a:schemeClr val="bg1"/>
+                </a:solidFill>
+              </a:rPr>
+              <a:t>Host holds OS lock</a:t>
+            </a:r>
+            <a:endParaRPr lang="en-IE" sz="2800" b="1" dirty="0">
+              <a:solidFill>
+                <a:schemeClr val="bg1"/>
+              </a:solidFill>
+            </a:endParaRPr>
+          </a:p>
+        </p:txBody>
+      </p:sp>
+      <p:sp>
+        <p:nvSpPr>
+          <p:cNvPr id="147" name="TextBox 146">
+            <a:extLst>
+              <a:ext uri="{FF2B5EF4-FFF2-40B4-BE49-F238E27FC236}">
+                <a16:creationId xmlns:a16="http://schemas.microsoft.com/office/drawing/2014/main" id="{D60B3236-5E5F-740E-7BF1-6307428B9C13}"/>
+              </a:ext>
+            </a:extLst>
+          </p:cNvPr>
+          <p:cNvSpPr txBox="1"/>
+          <p:nvPr/>
+        </p:nvSpPr>
+        <p:spPr>
+          <a:xfrm>
+            <a:off x="12017069" y="6390244"/>
+            <a:ext cx="7519788" cy="2708434"/>
+          </a:xfrm>
+          <a:prstGeom prst="rect">
+            <a:avLst/>
+          </a:prstGeom>
+          <a:noFill/>
+        </p:spPr>
+        <p:txBody>
+          <a:bodyPr wrap="square" rtlCol="0">
+            <a:spAutoFit/>
+          </a:bodyPr>
+          <a:lstStyle/>
+          <a:p>
+            <a:pPr algn="ctr"/>
+            <a:r>
+              <a:rPr lang="en-IE" sz="3400" b="1" dirty="0">
+                <a:solidFill>
+                  <a:schemeClr val="bg1"/>
+                </a:solidFill>
+              </a:rPr>
+              <a:t>1769689749.HostA-InstanceA.json</a:t>
+            </a:r>
+          </a:p>
+          <a:p>
+            <a:pPr algn="ctr"/>
+            <a:r>
+              <a:rPr lang="en-IE" sz="3400" b="1" dirty="0">
+                <a:solidFill>
+                  <a:schemeClr val="bg1"/>
+                </a:solidFill>
+              </a:rPr>
+              <a:t>1769689809.HostA-InstanceB.json</a:t>
+            </a:r>
+          </a:p>
+          <a:p>
+            <a:pPr algn="ctr"/>
+            <a:r>
+              <a:rPr lang="en-IE" sz="3400" b="1" dirty="0">
+                <a:solidFill>
+                  <a:schemeClr val="bg1"/>
+                </a:solidFill>
+              </a:rPr>
+              <a:t>1769689869.HostB-InstanceZ.json</a:t>
+            </a:r>
+          </a:p>
+          <a:p>
+            <a:pPr algn="ctr"/>
+            <a:r>
+              <a:rPr lang="en-IE" sz="3400" b="1" dirty="0">
+                <a:solidFill>
+                  <a:schemeClr val="bg1"/>
+                </a:solidFill>
+              </a:rPr>
+              <a:t>1769689929.HostR-InstanceG.json</a:t>
+            </a:r>
+          </a:p>
+          <a:p>
+            <a:pPr algn="ctr"/>
+            <a:r>
+              <a:rPr lang="en-IE" sz="3400" b="1" dirty="0">
+                <a:solidFill>
+                  <a:schemeClr val="bg1"/>
+                </a:solidFill>
+              </a:rPr>
+              <a:t>1769689989.HostA-InstanceF.json</a:t>
+            </a:r>
+          </a:p>
+        </p:txBody>
+      </p:sp>
     </p:spTree>
     <p:extLst>
       <p:ext uri="{BB962C8B-B14F-4D97-AF65-F5344CB8AC3E}">
-        <p14:creationId xmlns:p14="http://schemas.microsoft.com/office/powerpoint/2010/main" val="1340470097"/>
+        <p14:creationId xmlns:p14="http://schemas.microsoft.com/office/powerpoint/2010/main" val="4175615422"/>
       </p:ext>
     </p:extLst>
   </p:cSld>
@@ -23824,4 +27413,319 @@
     </a:ext>
   </a:extLst>
 </a:theme>
+</file>
+
+<file path=ppt/theme/theme2.xml><?xml version="1.0" encoding="utf-8"?>
+<a:theme xmlns:a="http://schemas.openxmlformats.org/drawingml/2006/main" name="Office Theme">
+  <a:themeElements>
+    <a:clrScheme name="Office">
+      <a:dk1>
+        <a:sysClr val="windowText" lastClr="000000"/>
+      </a:dk1>
+      <a:lt1>
+        <a:sysClr val="window" lastClr="FFFFFF"/>
+      </a:lt1>
+      <a:dk2>
+        <a:srgbClr val="0E2841"/>
+      </a:dk2>
+      <a:lt2>
+        <a:srgbClr val="E8E8E8"/>
+      </a:lt2>
+      <a:accent1>
+        <a:srgbClr val="156082"/>
+      </a:accent1>
+      <a:accent2>
+        <a:srgbClr val="E97132"/>
+      </a:accent2>
+      <a:accent3>
+        <a:srgbClr val="196B24"/>
+      </a:accent3>
+      <a:accent4>
+        <a:srgbClr val="0F9ED5"/>
+      </a:accent4>
+      <a:accent5>
+        <a:srgbClr val="A02B93"/>
+      </a:accent5>
+      <a:accent6>
+        <a:srgbClr val="4EA72E"/>
+      </a:accent6>
+      <a:hlink>
+        <a:srgbClr val="467886"/>
+      </a:hlink>
+      <a:folHlink>
+        <a:srgbClr val="96607D"/>
+      </a:folHlink>
+    </a:clrScheme>
+    <a:fontScheme name="Office">
+      <a:majorFont>
+        <a:latin typeface="Aptos Display" panose="02110004020202020204"/>
+        <a:ea typeface=""/>
+        <a:cs typeface=""/>
+        <a:font script="Jpan" typeface="游ゴシック Light"/>
+        <a:font script="Hang" typeface="맑은 고딕"/>
+        <a:font script="Hans" typeface="等线 Light"/>
+        <a:font script="Hant" typeface="新細明體"/>
+        <a:font script="Arab" typeface="Times New Roman"/>
+        <a:font script="Hebr" typeface="Times New Roman"/>
+        <a:font script="Thai" typeface="Angsana New"/>
+        <a:font script="Ethi" typeface="Nyala"/>
+        <a:font script="Beng" typeface="Vrinda"/>
+        <a:font script="Gujr" typeface="Shruti"/>
+        <a:font script="Khmr" typeface="MoolBoran"/>
+        <a:font script="Knda" typeface="Tunga"/>
+        <a:font script="Guru" typeface="Raavi"/>
+        <a:font script="Cans" typeface="Euphemia"/>
+        <a:font script="Cher" typeface="Plantagenet Cherokee"/>
+        <a:font script="Yiii" typeface="Microsoft Yi Baiti"/>
+        <a:font script="Tibt" typeface="Microsoft Himalaya"/>
+        <a:font script="Thaa" typeface="MV Boli"/>
+        <a:font script="Deva" typeface="Mangal"/>
+        <a:font script="Telu" typeface="Gautami"/>
+        <a:font script="Taml" typeface="Latha"/>
+        <a:font script="Syrc" typeface="Estrangelo Edessa"/>
+        <a:font script="Orya" typeface="Kalinga"/>
+        <a:font script="Mlym" typeface="Kartika"/>
+        <a:font script="Laoo" typeface="DokChampa"/>
+        <a:font script="Sinh" typeface="Iskoola Pota"/>
+        <a:font script="Mong" typeface="Mongolian Baiti"/>
+        <a:font script="Viet" typeface="Times New Roman"/>
+        <a:font script="Uigh" typeface="Microsoft Uighur"/>
+        <a:font script="Geor" typeface="Sylfaen"/>
+        <a:font script="Armn" typeface="Arial"/>
+        <a:font script="Bugi" typeface="Leelawadee UI"/>
+        <a:font script="Bopo" typeface="Microsoft JhengHei"/>
+        <a:font script="Java" typeface="Javanese Text"/>
+        <a:font script="Lisu" typeface="Segoe UI"/>
+        <a:font script="Mymr" typeface="Myanmar Text"/>
+        <a:font script="Nkoo" typeface="Ebrima"/>
+        <a:font script="Olck" typeface="Nirmala UI"/>
+        <a:font script="Osma" typeface="Ebrima"/>
+        <a:font script="Phag" typeface="Phagspa"/>
+        <a:font script="Syrn" typeface="Estrangelo Edessa"/>
+        <a:font script="Syrj" typeface="Estrangelo Edessa"/>
+        <a:font script="Syre" typeface="Estrangelo Edessa"/>
+        <a:font script="Sora" typeface="Nirmala UI"/>
+        <a:font script="Tale" typeface="Microsoft Tai Le"/>
+        <a:font script="Talu" typeface="Microsoft New Tai Lue"/>
+        <a:font script="Tfng" typeface="Ebrima"/>
+      </a:majorFont>
+      <a:minorFont>
+        <a:latin typeface="Aptos" panose="02110004020202020204"/>
+        <a:ea typeface=""/>
+        <a:cs typeface=""/>
+        <a:font script="Jpan" typeface="游ゴシック"/>
+        <a:font script="Hang" typeface="맑은 고딕"/>
+        <a:font script="Hans" typeface="等线"/>
+        <a:font script="Hant" typeface="新細明體"/>
+        <a:font script="Arab" typeface="Arial"/>
+        <a:font script="Hebr" typeface="Arial"/>
+        <a:font script="Thai" typeface="Cordia New"/>
+        <a:font script="Ethi" typeface="Nyala"/>
+        <a:font script="Beng" typeface="Vrinda"/>
+        <a:font script="Gujr" typeface="Shruti"/>
+        <a:font script="Khmr" typeface="DaunPenh"/>
+        <a:font script="Knda" typeface="Tunga"/>
+        <a:font script="Guru" typeface="Raavi"/>
+        <a:font script="Cans" typeface="Euphemia"/>
+        <a:font script="Cher" typeface="Plantagenet Cherokee"/>
+        <a:font script="Yiii" typeface="Microsoft Yi Baiti"/>
+        <a:font script="Tibt" typeface="Microsoft Himalaya"/>
+        <a:font script="Thaa" typeface="MV Boli"/>
+        <a:font script="Deva" typeface="Mangal"/>
+        <a:font script="Telu" typeface="Gautami"/>
+        <a:font script="Taml" typeface="Latha"/>
+        <a:font script="Syrc" typeface="Estrangelo Edessa"/>
+        <a:font script="Orya" typeface="Kalinga"/>
+        <a:font script="Mlym" typeface="Kartika"/>
+        <a:font script="Laoo" typeface="DokChampa"/>
+        <a:font script="Sinh" typeface="Iskoola Pota"/>
+        <a:font script="Mong" typeface="Mongolian Baiti"/>
+        <a:font script="Viet" typeface="Arial"/>
+        <a:font script="Uigh" typeface="Microsoft Uighur"/>
+        <a:font script="Geor" typeface="Sylfaen"/>
+        <a:font script="Armn" typeface="Arial"/>
+        <a:font script="Bugi" typeface="Leelawadee UI"/>
+        <a:font script="Bopo" typeface="Microsoft JhengHei"/>
+        <a:font script="Java" typeface="Javanese Text"/>
+        <a:font script="Lisu" typeface="Segoe UI"/>
+        <a:font script="Mymr" typeface="Myanmar Text"/>
+        <a:font script="Nkoo" typeface="Ebrima"/>
+        <a:font script="Olck" typeface="Nirmala UI"/>
+        <a:font script="Osma" typeface="Ebrima"/>
+        <a:font script="Phag" typeface="Phagspa"/>
+        <a:font script="Syrn" typeface="Estrangelo Edessa"/>
+        <a:font script="Syrj" typeface="Estrangelo Edessa"/>
+        <a:font script="Syre" typeface="Estrangelo Edessa"/>
+        <a:font script="Sora" typeface="Nirmala UI"/>
+        <a:font script="Tale" typeface="Microsoft Tai Le"/>
+        <a:font script="Talu" typeface="Microsoft New Tai Lue"/>
+        <a:font script="Tfng" typeface="Ebrima"/>
+      </a:minorFont>
+    </a:fontScheme>
+    <a:fmtScheme name="Office">
+      <a:fillStyleLst>
+        <a:solidFill>
+          <a:schemeClr val="phClr"/>
+        </a:solidFill>
+        <a:gradFill rotWithShape="1">
+          <a:gsLst>
+            <a:gs pos="0">
+              <a:schemeClr val="phClr">
+                <a:lumMod val="110000"/>
+                <a:satMod val="105000"/>
+                <a:tint val="67000"/>
+              </a:schemeClr>
+            </a:gs>
+            <a:gs pos="50000">
+              <a:schemeClr val="phClr">
+                <a:lumMod val="105000"/>
+                <a:satMod val="103000"/>
+                <a:tint val="73000"/>
+              </a:schemeClr>
+            </a:gs>
+            <a:gs pos="100000">
+              <a:schemeClr val="phClr">
+                <a:lumMod val="105000"/>
+                <a:satMod val="109000"/>
+                <a:tint val="81000"/>
+              </a:schemeClr>
+            </a:gs>
+          </a:gsLst>
+          <a:lin ang="5400000" scaled="0"/>
+        </a:gradFill>
+        <a:gradFill rotWithShape="1">
+          <a:gsLst>
+            <a:gs pos="0">
+              <a:schemeClr val="phClr">
+                <a:satMod val="103000"/>
+                <a:lumMod val="102000"/>
+                <a:tint val="94000"/>
+              </a:schemeClr>
+            </a:gs>
+            <a:gs pos="50000">
+              <a:schemeClr val="phClr">
+                <a:satMod val="110000"/>
+                <a:lumMod val="100000"/>
+                <a:shade val="100000"/>
+              </a:schemeClr>
+            </a:gs>
+            <a:gs pos="100000">
+              <a:schemeClr val="phClr">
+                <a:lumMod val="99000"/>
+                <a:satMod val="120000"/>
+                <a:shade val="78000"/>
+              </a:schemeClr>
+            </a:gs>
+          </a:gsLst>
+          <a:lin ang="5400000" scaled="0"/>
+        </a:gradFill>
+      </a:fillStyleLst>
+      <a:lnStyleLst>
+        <a:ln w="12700" cap="flat" cmpd="sng" algn="ctr">
+          <a:solidFill>
+            <a:schemeClr val="phClr"/>
+          </a:solidFill>
+          <a:prstDash val="solid"/>
+          <a:miter lim="800000"/>
+        </a:ln>
+        <a:ln w="19050" cap="flat" cmpd="sng" algn="ctr">
+          <a:solidFill>
+            <a:schemeClr val="phClr"/>
+          </a:solidFill>
+          <a:prstDash val="solid"/>
+          <a:miter lim="800000"/>
+        </a:ln>
+        <a:ln w="25400" cap="flat" cmpd="sng" algn="ctr">
+          <a:solidFill>
+            <a:schemeClr val="phClr"/>
+          </a:solidFill>
+          <a:prstDash val="solid"/>
+          <a:miter lim="800000"/>
+        </a:ln>
+      </a:lnStyleLst>
+      <a:effectStyleLst>
+        <a:effectStyle>
+          <a:effectLst/>
+        </a:effectStyle>
+        <a:effectStyle>
+          <a:effectLst/>
+        </a:effectStyle>
+        <a:effectStyle>
+          <a:effectLst>
+            <a:outerShdw blurRad="57150" dist="19050" dir="5400000" algn="ctr" rotWithShape="0">
+              <a:srgbClr val="000000">
+                <a:alpha val="63000"/>
+              </a:srgbClr>
+            </a:outerShdw>
+          </a:effectLst>
+        </a:effectStyle>
+      </a:effectStyleLst>
+      <a:bgFillStyleLst>
+        <a:solidFill>
+          <a:schemeClr val="phClr"/>
+        </a:solidFill>
+        <a:solidFill>
+          <a:schemeClr val="phClr">
+            <a:tint val="95000"/>
+            <a:satMod val="170000"/>
+          </a:schemeClr>
+        </a:solidFill>
+        <a:gradFill rotWithShape="1">
+          <a:gsLst>
+            <a:gs pos="0">
+              <a:schemeClr val="phClr">
+                <a:tint val="93000"/>
+                <a:satMod val="150000"/>
+                <a:shade val="98000"/>
+                <a:lumMod val="102000"/>
+              </a:schemeClr>
+            </a:gs>
+            <a:gs pos="50000">
+              <a:schemeClr val="phClr">
+                <a:tint val="98000"/>
+                <a:satMod val="130000"/>
+                <a:shade val="90000"/>
+                <a:lumMod val="103000"/>
+              </a:schemeClr>
+            </a:gs>
+            <a:gs pos="100000">
+              <a:schemeClr val="phClr">
+                <a:shade val="63000"/>
+                <a:satMod val="120000"/>
+              </a:schemeClr>
+            </a:gs>
+          </a:gsLst>
+          <a:lin ang="5400000" scaled="0"/>
+        </a:gradFill>
+      </a:bgFillStyleLst>
+    </a:fmtScheme>
+  </a:themeElements>
+  <a:objectDefaults>
+    <a:lnDef>
+      <a:spPr/>
+      <a:bodyPr/>
+      <a:lstStyle/>
+      <a:style>
+        <a:lnRef idx="2">
+          <a:schemeClr val="accent1"/>
+        </a:lnRef>
+        <a:fillRef idx="0">
+          <a:schemeClr val="accent1"/>
+        </a:fillRef>
+        <a:effectRef idx="1">
+          <a:schemeClr val="accent1"/>
+        </a:effectRef>
+        <a:fontRef idx="minor">
+          <a:schemeClr val="tx1"/>
+        </a:fontRef>
+      </a:style>
+    </a:lnDef>
+  </a:objectDefaults>
+  <a:extraClrSchemeLst/>
+  <a:extLst>
+    <a:ext uri="{05A4C25C-085E-4340-85A3-A5531E510DB2}">
+      <thm15:themeFamily xmlns:thm15="http://schemas.microsoft.com/office/thememl/2012/main" name="Office Theme" id="{2E142A2C-CD16-42D6-873A-C26D2A0506FA}" vid="{1BDDFF52-6CD6-40A5-AB3C-68EB2F1E4D0A}"/>
+    </a:ext>
+  </a:extLst>
+</a:theme>
 </file>
--- a/tasktide/docs/Diagrams/Diagrams.pptx
+++ b/tasktide/docs/Diagrams/Diagrams.pptx
@@ -24037,7 +24037,7 @@
         </p:nvSpPr>
         <p:spPr>
           <a:xfrm>
-            <a:off x="190500" y="3825969"/>
+            <a:off x="190500" y="3853678"/>
             <a:ext cx="29851350" cy="6923211"/>
           </a:xfrm>
           <a:prstGeom prst="roundRect">
@@ -24091,7 +24091,7 @@
         </p:nvSpPr>
         <p:spPr>
           <a:xfrm>
-            <a:off x="423801" y="4198046"/>
+            <a:off x="423801" y="4225755"/>
             <a:ext cx="9277350" cy="830997"/>
           </a:xfrm>
           <a:prstGeom prst="rect">
@@ -24127,7 +24127,7 @@
         </p:nvGrpSpPr>
         <p:grpSpPr>
           <a:xfrm>
-            <a:off x="495300" y="5132799"/>
+            <a:off x="495300" y="5160508"/>
             <a:ext cx="9277350" cy="5044882"/>
             <a:chOff x="609600" y="4232468"/>
             <a:chExt cx="9277350" cy="5044882"/>
@@ -24372,7 +24372,7 @@
         </p:nvSpPr>
         <p:spPr>
           <a:xfrm>
-            <a:off x="11316463" y="4198046"/>
+            <a:off x="11316463" y="4225755"/>
             <a:ext cx="9277350" cy="830997"/>
           </a:xfrm>
           <a:prstGeom prst="rect">
@@ -24408,7 +24408,7 @@
         </p:nvSpPr>
         <p:spPr>
           <a:xfrm>
-            <a:off x="11887200" y="5501099"/>
+            <a:off x="11887200" y="5528808"/>
             <a:ext cx="7905750" cy="4037241"/>
           </a:xfrm>
           <a:prstGeom prst="roundRect">
@@ -24483,7 +24483,7 @@
         </p:nvGrpSpPr>
         <p:grpSpPr>
           <a:xfrm>
-            <a:off x="12017069" y="5623699"/>
+            <a:off x="12017069" y="5651408"/>
             <a:ext cx="7710947" cy="499728"/>
             <a:chOff x="914400" y="4442816"/>
             <a:chExt cx="9048750" cy="624453"/>
@@ -24591,7 +24591,7 @@
         </p:nvSpPr>
         <p:spPr>
           <a:xfrm>
-            <a:off x="10063163" y="6792275"/>
+            <a:off x="10063163" y="6819984"/>
             <a:ext cx="1619250" cy="1413703"/>
           </a:xfrm>
           <a:prstGeom prst="rightArrow">
@@ -24666,7 +24666,7 @@
         </p:nvSpPr>
         <p:spPr>
           <a:xfrm>
-            <a:off x="20059650" y="6765384"/>
+            <a:off x="20059650" y="6793093"/>
             <a:ext cx="1619250" cy="1440594"/>
           </a:xfrm>
           <a:prstGeom prst="rightArrow">
@@ -24741,7 +24741,7 @@
         </p:nvSpPr>
         <p:spPr>
           <a:xfrm>
-            <a:off x="22412325" y="4217096"/>
+            <a:off x="22412325" y="4244805"/>
             <a:ext cx="6657975" cy="830997"/>
           </a:xfrm>
           <a:prstGeom prst="rect">
@@ -24777,7 +24777,7 @@
         </p:nvGrpSpPr>
         <p:grpSpPr>
           <a:xfrm>
-            <a:off x="21839238" y="5539998"/>
+            <a:off x="21839238" y="5567707"/>
             <a:ext cx="7905750" cy="3770158"/>
             <a:chOff x="12363450" y="4232467"/>
             <a:chExt cx="9277350" cy="5044882"/>
@@ -24995,7 +24995,7 @@
         </p:blipFill>
         <p:spPr>
           <a:xfrm>
-            <a:off x="27117170" y="6637894"/>
+            <a:off x="27117170" y="6665603"/>
             <a:ext cx="2105025" cy="2105025"/>
           </a:xfrm>
           <a:prstGeom prst="rect">
@@ -25031,7 +25031,7 @@
         </p:blipFill>
         <p:spPr>
           <a:xfrm>
-            <a:off x="22468970" y="6390244"/>
+            <a:off x="22468970" y="6417953"/>
             <a:ext cx="2105025" cy="2105025"/>
           </a:xfrm>
           <a:prstGeom prst="rect">
@@ -25053,7 +25053,7 @@
         </p:nvSpPr>
         <p:spPr>
           <a:xfrm>
-            <a:off x="24806275" y="7142286"/>
+            <a:off x="24806275" y="7169995"/>
             <a:ext cx="1828800" cy="981939"/>
           </a:xfrm>
           <a:prstGeom prst="rightArrow">
@@ -25107,7 +25107,7 @@
         </p:nvGrpSpPr>
         <p:grpSpPr>
           <a:xfrm>
-            <a:off x="5122141" y="2606098"/>
+            <a:off x="5122141" y="2633807"/>
             <a:ext cx="20817737" cy="1143120"/>
             <a:chOff x="4899243" y="2108980"/>
             <a:chExt cx="18821400" cy="1107996"/>
@@ -25218,7 +25218,7 @@
         </p:nvGrpSpPr>
         <p:grpSpPr>
           <a:xfrm>
-            <a:off x="5280891" y="14747296"/>
+            <a:off x="5280891" y="14525624"/>
             <a:ext cx="18859500" cy="1107996"/>
             <a:chOff x="4953000" y="2082800"/>
             <a:chExt cx="18859500" cy="1107996"/>
@@ -25329,7 +25329,7 @@
         </p:nvSpPr>
         <p:spPr>
           <a:xfrm>
-            <a:off x="188191" y="15944275"/>
+            <a:off x="188191" y="15722603"/>
             <a:ext cx="29851350" cy="5918192"/>
           </a:xfrm>
           <a:prstGeom prst="roundRect">
@@ -25383,7 +25383,7 @@
         </p:nvSpPr>
         <p:spPr>
           <a:xfrm>
-            <a:off x="-289708" y="16186844"/>
+            <a:off x="-289708" y="15965172"/>
             <a:ext cx="9277350" cy="830997"/>
           </a:xfrm>
           <a:prstGeom prst="rect">
@@ -25419,7 +25419,7 @@
         </p:nvSpPr>
         <p:spPr>
           <a:xfrm>
-            <a:off x="10337075" y="16186844"/>
+            <a:off x="10337075" y="15965172"/>
             <a:ext cx="9277350" cy="830997"/>
           </a:xfrm>
           <a:prstGeom prst="rect">
@@ -25455,7 +25455,7 @@
         </p:nvSpPr>
         <p:spPr>
           <a:xfrm>
-            <a:off x="8768936" y="18429630"/>
+            <a:off x="8768936" y="18207958"/>
             <a:ext cx="1979305" cy="1413703"/>
           </a:xfrm>
           <a:prstGeom prst="rightArrow">
@@ -25530,7 +25530,7 @@
         </p:nvSpPr>
         <p:spPr>
           <a:xfrm>
-            <a:off x="18640529" y="18322382"/>
+            <a:off x="18640529" y="18100710"/>
             <a:ext cx="2242312" cy="1440594"/>
           </a:xfrm>
           <a:prstGeom prst="rightArrow">
@@ -25605,7 +25605,7 @@
         </p:nvSpPr>
         <p:spPr>
           <a:xfrm>
-            <a:off x="22365661" y="16186844"/>
+            <a:off x="22365661" y="15965172"/>
             <a:ext cx="6657975" cy="830997"/>
           </a:xfrm>
           <a:prstGeom prst="rect">
@@ -25641,7 +25641,7 @@
         </p:nvGrpSpPr>
         <p:grpSpPr>
           <a:xfrm>
-            <a:off x="21325242" y="17001638"/>
+            <a:off x="21325242" y="16779966"/>
             <a:ext cx="8392038" cy="4236049"/>
             <a:chOff x="12363450" y="4232467"/>
             <a:chExt cx="9277350" cy="5044882"/>
@@ -25845,7 +25845,7 @@
         </p:nvSpPr>
         <p:spPr>
           <a:xfrm rot="5400000">
-            <a:off x="13797988" y="11983555"/>
+            <a:off x="13797988" y="12011264"/>
             <a:ext cx="2656859" cy="1619250"/>
           </a:xfrm>
           <a:prstGeom prst="rightArrow">
@@ -25920,7 +25920,7 @@
         </p:nvGrpSpPr>
         <p:grpSpPr>
           <a:xfrm>
-            <a:off x="734291" y="17127947"/>
+            <a:off x="734291" y="16906275"/>
             <a:ext cx="7521575" cy="3842943"/>
             <a:chOff x="609600" y="4232468"/>
             <a:chExt cx="9277350" cy="5044882"/>
@@ -26123,7 +26123,7 @@
         </p:nvGrpSpPr>
         <p:grpSpPr>
           <a:xfrm>
-            <a:off x="2801215" y="17976379"/>
+            <a:off x="2801215" y="17754707"/>
             <a:ext cx="3140911" cy="2301407"/>
             <a:chOff x="1939924" y="18109350"/>
             <a:chExt cx="3573819" cy="2536825"/>
@@ -26216,7 +26216,7 @@
         </p:nvGrpSpPr>
         <p:grpSpPr>
           <a:xfrm>
-            <a:off x="11122891" y="17127947"/>
+            <a:off x="11122891" y="16906275"/>
             <a:ext cx="7023100" cy="3919143"/>
             <a:chOff x="12363450" y="4232467"/>
             <a:chExt cx="9277350" cy="5044882"/>
@@ -26420,7 +26420,7 @@
         </p:nvGrpSpPr>
         <p:grpSpPr>
           <a:xfrm>
-            <a:off x="12985467" y="17813790"/>
+            <a:off x="12985467" y="17592118"/>
             <a:ext cx="4074674" cy="2638970"/>
             <a:chOff x="15089626" y="18117665"/>
             <a:chExt cx="2911547" cy="2214581"/>
@@ -26513,7 +26513,7 @@
         </p:nvSpPr>
         <p:spPr>
           <a:xfrm rot="2461338">
-            <a:off x="25800995" y="18867001"/>
+            <a:off x="25800995" y="18645329"/>
             <a:ext cx="4601827" cy="763631"/>
           </a:xfrm>
           <a:prstGeom prst="mathMinus">
@@ -26573,7 +26573,7 @@
         </p:nvGrpSpPr>
         <p:grpSpPr>
           <a:xfrm>
-            <a:off x="20892445" y="18258842"/>
+            <a:off x="20892445" y="18037170"/>
             <a:ext cx="8251657" cy="2105025"/>
             <a:chOff x="20920154" y="17681571"/>
             <a:chExt cx="8251657" cy="2105025"/>
@@ -26837,7 +26837,7 @@
         </p:nvSpPr>
         <p:spPr>
           <a:xfrm>
-            <a:off x="13082300" y="20477304"/>
+            <a:off x="13082300" y="20255632"/>
             <a:ext cx="3099279" cy="400110"/>
           </a:xfrm>
           <a:prstGeom prst="rect">
@@ -26882,7 +26882,7 @@
         </p:nvSpPr>
         <p:spPr>
           <a:xfrm>
-            <a:off x="24093343" y="8718149"/>
+            <a:off x="24093343" y="8745858"/>
             <a:ext cx="3099279" cy="400110"/>
           </a:xfrm>
           <a:prstGeom prst="rect">
@@ -26927,7 +26927,7 @@
         </p:nvSpPr>
         <p:spPr>
           <a:xfrm>
-            <a:off x="22975262" y="20665264"/>
+            <a:off x="22975262" y="20443592"/>
             <a:ext cx="5526310" cy="400110"/>
           </a:xfrm>
           <a:prstGeom prst="rect">
@@ -26972,7 +26972,7 @@
         </p:nvSpPr>
         <p:spPr>
           <a:xfrm>
-            <a:off x="2527706" y="20340796"/>
+            <a:off x="2527706" y="20119124"/>
             <a:ext cx="3099279" cy="400110"/>
           </a:xfrm>
           <a:prstGeom prst="rect">
@@ -27017,7 +27017,7 @@
         </p:nvSpPr>
         <p:spPr>
           <a:xfrm>
-            <a:off x="12017069" y="6390244"/>
+            <a:off x="12017069" y="6417953"/>
             <a:ext cx="7519788" cy="2708434"/>
           </a:xfrm>
           <a:prstGeom prst="rect">

--- a/tasktide/docs/Diagrams/Diagrams.pptx
+++ b/tasktide/docs/Diagrams/Diagrams.pptx
@@ -9010,7 +9010,7 @@
           <a:p>
             <a:fld id="{CB18BCE7-0017-4B0C-A2FB-E6F7885367AC}" type="datetimeFigureOut">
               <a:rPr lang="en-IE" smtClean="0"/>
-              <a:t>30/01/2026</a:t>
+              <a:t>11/02/2026</a:t>
             </a:fld>
             <a:endParaRPr lang="en-IE"/>
           </a:p>
@@ -9514,7 +9514,7 @@
           <a:p>
             <a:fld id="{79C0705B-4870-4470-A32F-307AEE1697AB}" type="datetimeFigureOut">
               <a:rPr lang="en-IE" smtClean="0"/>
-              <a:t>30/01/2026</a:t>
+              <a:t>11/02/2026</a:t>
             </a:fld>
             <a:endParaRPr lang="en-IE"/>
           </a:p>
@@ -9684,7 +9684,7 @@
           <a:p>
             <a:fld id="{79C0705B-4870-4470-A32F-307AEE1697AB}" type="datetimeFigureOut">
               <a:rPr lang="en-IE" smtClean="0"/>
-              <a:t>30/01/2026</a:t>
+              <a:t>11/02/2026</a:t>
             </a:fld>
             <a:endParaRPr lang="en-IE"/>
           </a:p>
@@ -9864,7 +9864,7 @@
           <a:p>
             <a:fld id="{79C0705B-4870-4470-A32F-307AEE1697AB}" type="datetimeFigureOut">
               <a:rPr lang="en-IE" smtClean="0"/>
-              <a:t>30/01/2026</a:t>
+              <a:t>11/02/2026</a:t>
             </a:fld>
             <a:endParaRPr lang="en-IE"/>
           </a:p>
@@ -10034,7 +10034,7 @@
           <a:p>
             <a:fld id="{79C0705B-4870-4470-A32F-307AEE1697AB}" type="datetimeFigureOut">
               <a:rPr lang="en-IE" smtClean="0"/>
-              <a:t>30/01/2026</a:t>
+              <a:t>11/02/2026</a:t>
             </a:fld>
             <a:endParaRPr lang="en-IE"/>
           </a:p>
@@ -10280,7 +10280,7 @@
           <a:p>
             <a:fld id="{79C0705B-4870-4470-A32F-307AEE1697AB}" type="datetimeFigureOut">
               <a:rPr lang="en-IE" smtClean="0"/>
-              <a:t>30/01/2026</a:t>
+              <a:t>11/02/2026</a:t>
             </a:fld>
             <a:endParaRPr lang="en-IE"/>
           </a:p>
@@ -10512,7 +10512,7 @@
           <a:p>
             <a:fld id="{79C0705B-4870-4470-A32F-307AEE1697AB}" type="datetimeFigureOut">
               <a:rPr lang="en-IE" smtClean="0"/>
-              <a:t>30/01/2026</a:t>
+              <a:t>11/02/2026</a:t>
             </a:fld>
             <a:endParaRPr lang="en-IE"/>
           </a:p>
@@ -10879,7 +10879,7 @@
           <a:p>
             <a:fld id="{79C0705B-4870-4470-A32F-307AEE1697AB}" type="datetimeFigureOut">
               <a:rPr lang="en-IE" smtClean="0"/>
-              <a:t>30/01/2026</a:t>
+              <a:t>11/02/2026</a:t>
             </a:fld>
             <a:endParaRPr lang="en-IE"/>
           </a:p>
@@ -10997,7 +10997,7 @@
           <a:p>
             <a:fld id="{79C0705B-4870-4470-A32F-307AEE1697AB}" type="datetimeFigureOut">
               <a:rPr lang="en-IE" smtClean="0"/>
-              <a:t>30/01/2026</a:t>
+              <a:t>11/02/2026</a:t>
             </a:fld>
             <a:endParaRPr lang="en-IE"/>
           </a:p>
@@ -11092,7 +11092,7 @@
           <a:p>
             <a:fld id="{79C0705B-4870-4470-A32F-307AEE1697AB}" type="datetimeFigureOut">
               <a:rPr lang="en-IE" smtClean="0"/>
-              <a:t>30/01/2026</a:t>
+              <a:t>11/02/2026</a:t>
             </a:fld>
             <a:endParaRPr lang="en-IE"/>
           </a:p>
@@ -11369,7 +11369,7 @@
           <a:p>
             <a:fld id="{79C0705B-4870-4470-A32F-307AEE1697AB}" type="datetimeFigureOut">
               <a:rPr lang="en-IE" smtClean="0"/>
-              <a:t>30/01/2026</a:t>
+              <a:t>11/02/2026</a:t>
             </a:fld>
             <a:endParaRPr lang="en-IE"/>
           </a:p>
@@ -11626,7 +11626,7 @@
           <a:p>
             <a:fld id="{79C0705B-4870-4470-A32F-307AEE1697AB}" type="datetimeFigureOut">
               <a:rPr lang="en-IE" smtClean="0"/>
-              <a:t>30/01/2026</a:t>
+              <a:t>11/02/2026</a:t>
             </a:fld>
             <a:endParaRPr lang="en-IE"/>
           </a:p>
@@ -11839,7 +11839,7 @@
           <a:p>
             <a:fld id="{79C0705B-4870-4470-A32F-307AEE1697AB}" type="datetimeFigureOut">
               <a:rPr lang="en-IE" smtClean="0"/>
-              <a:t>30/01/2026</a:t>
+              <a:t>11/02/2026</a:t>
             </a:fld>
             <a:endParaRPr lang="en-IE"/>
           </a:p>
@@ -24091,7 +24091,7 @@
         </p:nvSpPr>
         <p:spPr>
           <a:xfrm>
-            <a:off x="423801" y="4225755"/>
+            <a:off x="423801" y="4004083"/>
             <a:ext cx="9277350" cy="830997"/>
           </a:xfrm>
           <a:prstGeom prst="rect">
@@ -24372,7 +24372,7 @@
         </p:nvSpPr>
         <p:spPr>
           <a:xfrm>
-            <a:off x="11316463" y="4225755"/>
+            <a:off x="11316463" y="3976374"/>
             <a:ext cx="9277350" cy="830997"/>
           </a:xfrm>
           <a:prstGeom prst="rect">
@@ -24741,7 +24741,7 @@
         </p:nvSpPr>
         <p:spPr>
           <a:xfrm>
-            <a:off x="22412325" y="4244805"/>
+            <a:off x="22412325" y="3995424"/>
             <a:ext cx="6657975" cy="830997"/>
           </a:xfrm>
           <a:prstGeom prst="rect">
@@ -25383,7 +25383,7 @@
         </p:nvSpPr>
         <p:spPr>
           <a:xfrm>
-            <a:off x="-289708" y="15965172"/>
+            <a:off x="-289708" y="15798918"/>
             <a:ext cx="9277350" cy="830997"/>
           </a:xfrm>
           <a:prstGeom prst="rect">
@@ -25419,7 +25419,7 @@
         </p:nvSpPr>
         <p:spPr>
           <a:xfrm>
-            <a:off x="10337075" y="15965172"/>
+            <a:off x="10337075" y="15798918"/>
             <a:ext cx="9277350" cy="830997"/>
           </a:xfrm>
           <a:prstGeom prst="rect">
@@ -25605,7 +25605,7 @@
         </p:nvSpPr>
         <p:spPr>
           <a:xfrm>
-            <a:off x="22365661" y="15965172"/>
+            <a:off x="22365661" y="15798918"/>
             <a:ext cx="6657975" cy="830997"/>
           </a:xfrm>
           <a:prstGeom prst="rect">

--- a/tasktide/docs/Diagrams/Diagrams.pptx
+++ b/tasktide/docs/Diagrams/Diagrams.pptx
@@ -9010,7 +9010,7 @@
           <a:p>
             <a:fld id="{CB18BCE7-0017-4B0C-A2FB-E6F7885367AC}" type="datetimeFigureOut">
               <a:rPr lang="en-IE" smtClean="0"/>
-              <a:t>11/02/2026</a:t>
+              <a:t>12/02/2026</a:t>
             </a:fld>
             <a:endParaRPr lang="en-IE"/>
           </a:p>
@@ -9514,7 +9514,7 @@
           <a:p>
             <a:fld id="{79C0705B-4870-4470-A32F-307AEE1697AB}" type="datetimeFigureOut">
               <a:rPr lang="en-IE" smtClean="0"/>
-              <a:t>11/02/2026</a:t>
+              <a:t>12/02/2026</a:t>
             </a:fld>
             <a:endParaRPr lang="en-IE"/>
           </a:p>
@@ -9684,7 +9684,7 @@
           <a:p>
             <a:fld id="{79C0705B-4870-4470-A32F-307AEE1697AB}" type="datetimeFigureOut">
               <a:rPr lang="en-IE" smtClean="0"/>
-              <a:t>11/02/2026</a:t>
+              <a:t>12/02/2026</a:t>
             </a:fld>
             <a:endParaRPr lang="en-IE"/>
           </a:p>
@@ -9864,7 +9864,7 @@
           <a:p>
             <a:fld id="{79C0705B-4870-4470-A32F-307AEE1697AB}" type="datetimeFigureOut">
               <a:rPr lang="en-IE" smtClean="0"/>
-              <a:t>11/02/2026</a:t>
+              <a:t>12/02/2026</a:t>
             </a:fld>
             <a:endParaRPr lang="en-IE"/>
           </a:p>
@@ -10034,7 +10034,7 @@
           <a:p>
             <a:fld id="{79C0705B-4870-4470-A32F-307AEE1697AB}" type="datetimeFigureOut">
               <a:rPr lang="en-IE" smtClean="0"/>
-              <a:t>11/02/2026</a:t>
+              <a:t>12/02/2026</a:t>
             </a:fld>
             <a:endParaRPr lang="en-IE"/>
           </a:p>
@@ -10280,7 +10280,7 @@
           <a:p>
             <a:fld id="{79C0705B-4870-4470-A32F-307AEE1697AB}" type="datetimeFigureOut">
               <a:rPr lang="en-IE" smtClean="0"/>
-              <a:t>11/02/2026</a:t>
+              <a:t>12/02/2026</a:t>
             </a:fld>
             <a:endParaRPr lang="en-IE"/>
           </a:p>
@@ -10512,7 +10512,7 @@
           <a:p>
             <a:fld id="{79C0705B-4870-4470-A32F-307AEE1697AB}" type="datetimeFigureOut">
               <a:rPr lang="en-IE" smtClean="0"/>
-              <a:t>11/02/2026</a:t>
+              <a:t>12/02/2026</a:t>
             </a:fld>
             <a:endParaRPr lang="en-IE"/>
           </a:p>
@@ -10879,7 +10879,7 @@
           <a:p>
             <a:fld id="{79C0705B-4870-4470-A32F-307AEE1697AB}" type="datetimeFigureOut">
               <a:rPr lang="en-IE" smtClean="0"/>
-              <a:t>11/02/2026</a:t>
+              <a:t>12/02/2026</a:t>
             </a:fld>
             <a:endParaRPr lang="en-IE"/>
           </a:p>
@@ -10997,7 +10997,7 @@
           <a:p>
             <a:fld id="{79C0705B-4870-4470-A32F-307AEE1697AB}" type="datetimeFigureOut">
               <a:rPr lang="en-IE" smtClean="0"/>
-              <a:t>11/02/2026</a:t>
+              <a:t>12/02/2026</a:t>
             </a:fld>
             <a:endParaRPr lang="en-IE"/>
           </a:p>
@@ -11092,7 +11092,7 @@
           <a:p>
             <a:fld id="{79C0705B-4870-4470-A32F-307AEE1697AB}" type="datetimeFigureOut">
               <a:rPr lang="en-IE" smtClean="0"/>
-              <a:t>11/02/2026</a:t>
+              <a:t>12/02/2026</a:t>
             </a:fld>
             <a:endParaRPr lang="en-IE"/>
           </a:p>
@@ -11369,7 +11369,7 @@
           <a:p>
             <a:fld id="{79C0705B-4870-4470-A32F-307AEE1697AB}" type="datetimeFigureOut">
               <a:rPr lang="en-IE" smtClean="0"/>
-              <a:t>11/02/2026</a:t>
+              <a:t>12/02/2026</a:t>
             </a:fld>
             <a:endParaRPr lang="en-IE"/>
           </a:p>
@@ -11626,7 +11626,7 @@
           <a:p>
             <a:fld id="{79C0705B-4870-4470-A32F-307AEE1697AB}" type="datetimeFigureOut">
               <a:rPr lang="en-IE" smtClean="0"/>
-              <a:t>11/02/2026</a:t>
+              <a:t>12/02/2026</a:t>
             </a:fld>
             <a:endParaRPr lang="en-IE"/>
           </a:p>
@@ -11839,7 +11839,7 @@
           <a:p>
             <a:fld id="{79C0705B-4870-4470-A32F-307AEE1697AB}" type="datetimeFigureOut">
               <a:rPr lang="en-IE" smtClean="0"/>
-              <a:t>11/02/2026</a:t>
+              <a:t>12/02/2026</a:t>
             </a:fld>
             <a:endParaRPr lang="en-IE"/>
           </a:p>
@@ -12268,7 +12268,7 @@
         </p:nvSpPr>
         <p:spPr>
           <a:xfrm>
-            <a:off x="2247900" y="1371600"/>
+            <a:off x="2247900" y="928256"/>
             <a:ext cx="25641300" cy="4670205"/>
           </a:xfrm>
         </p:spPr>
@@ -12689,7 +12689,7 @@
         </p:nvSpPr>
         <p:spPr>
           <a:xfrm>
-            <a:off x="1333501" y="800101"/>
+            <a:off x="1333501" y="245921"/>
             <a:ext cx="27203400" cy="5914990"/>
           </a:xfrm>
         </p:spPr>
@@ -16694,7 +16694,7 @@
         </p:nvSpPr>
         <p:spPr>
           <a:xfrm>
-            <a:off x="3200400" y="1757712"/>
+            <a:off x="2840183" y="787897"/>
             <a:ext cx="25184099" cy="2688090"/>
           </a:xfrm>
         </p:spPr>
@@ -16726,7 +16726,7 @@
         </p:nvGrpSpPr>
         <p:grpSpPr>
           <a:xfrm>
-            <a:off x="3390900" y="4618016"/>
+            <a:off x="3030683" y="4562598"/>
             <a:ext cx="23964900" cy="17603804"/>
             <a:chOff x="6181099" y="6093585"/>
             <a:chExt cx="17621480" cy="13327077"/>
@@ -25550,102 +25550,12 @@
           </a:p>
         </p:txBody>
       </p:sp>
-      <p:sp>
-        <p:nvSpPr>
-          <p:cNvPr id="4" name="Rectangle: Rounded Corners 3">
+      <p:grpSp>
+        <p:nvGrpSpPr>
+          <p:cNvPr id="3" name="Group 2">
             <a:extLst>
               <a:ext uri="{FF2B5EF4-FFF2-40B4-BE49-F238E27FC236}">
-                <a16:creationId xmlns:a16="http://schemas.microsoft.com/office/drawing/2014/main" id="{6C7AF9FA-7438-5E00-C10B-5BDCEAA71E27}"/>
-              </a:ext>
-            </a:extLst>
-          </p:cNvPr>
-          <p:cNvSpPr/>
-          <p:nvPr/>
-        </p:nvSpPr>
-        <p:spPr>
-          <a:xfrm>
-            <a:off x="190500" y="3853678"/>
-            <a:ext cx="29851350" cy="6923211"/>
-          </a:xfrm>
-          <a:prstGeom prst="roundRect">
-            <a:avLst/>
-          </a:prstGeom>
-          <a:solidFill>
-            <a:srgbClr val="E6EAED"/>
-          </a:solidFill>
-          <a:ln w="57150">
-            <a:solidFill>
-              <a:schemeClr val="tx1"/>
-            </a:solidFill>
-          </a:ln>
-        </p:spPr>
-        <p:style>
-          <a:lnRef idx="2">
-            <a:schemeClr val="accent1">
-              <a:shade val="15000"/>
-            </a:schemeClr>
-          </a:lnRef>
-          <a:fillRef idx="1">
-            <a:schemeClr val="accent1"/>
-          </a:fillRef>
-          <a:effectRef idx="0">
-            <a:schemeClr val="accent1"/>
-          </a:effectRef>
-          <a:fontRef idx="minor">
-            <a:schemeClr val="lt1"/>
-          </a:fontRef>
-        </p:style>
-        <p:txBody>
-          <a:bodyPr rtlCol="0" anchor="ctr"/>
-          <a:lstStyle/>
-          <a:p>
-            <a:pPr algn="ctr"/>
-            <a:endParaRPr lang="en-IE" b="1" dirty="0"/>
-          </a:p>
-        </p:txBody>
-      </p:sp>
-      <p:sp>
-        <p:nvSpPr>
-          <p:cNvPr id="7" name="TextBox 6">
-            <a:extLst>
-              <a:ext uri="{FF2B5EF4-FFF2-40B4-BE49-F238E27FC236}">
-                <a16:creationId xmlns:a16="http://schemas.microsoft.com/office/drawing/2014/main" id="{D9CDF24C-6E41-99FF-7335-D2539468AD92}"/>
-              </a:ext>
-            </a:extLst>
-          </p:cNvPr>
-          <p:cNvSpPr txBox="1"/>
-          <p:nvPr/>
-        </p:nvSpPr>
-        <p:spPr>
-          <a:xfrm>
-            <a:off x="423801" y="4004083"/>
-            <a:ext cx="9277350" cy="830997"/>
-          </a:xfrm>
-          <a:prstGeom prst="rect">
-            <a:avLst/>
-          </a:prstGeom>
-          <a:noFill/>
-        </p:spPr>
-        <p:txBody>
-          <a:bodyPr wrap="square" rtlCol="0">
-            <a:spAutoFit/>
-          </a:bodyPr>
-          <a:lstStyle/>
-          <a:p>
-            <a:pPr algn="ctr"/>
-            <a:r>
-              <a:rPr lang="en-IE" sz="4800" b="1" i="1" dirty="0"/>
-              <a:t>1). Enqueue Election Ballot</a:t>
-            </a:r>
-          </a:p>
-        </p:txBody>
-      </p:sp>
-      <p:grpSp>
-        <p:nvGrpSpPr>
-          <p:cNvPr id="22" name="Group 21">
-            <a:extLst>
-              <a:ext uri="{FF2B5EF4-FFF2-40B4-BE49-F238E27FC236}">
-                <a16:creationId xmlns:a16="http://schemas.microsoft.com/office/drawing/2014/main" id="{10E05E10-B54C-55AA-F4C5-B5805511BA2C}"/>
+                <a16:creationId xmlns:a16="http://schemas.microsoft.com/office/drawing/2014/main" id="{E8319FDD-F96C-C6AC-4001-C3929F1ADE3A}"/>
               </a:ext>
             </a:extLst>
           </p:cNvPr>
@@ -25654,18 +25564,18 @@
         </p:nvGrpSpPr>
         <p:grpSpPr>
           <a:xfrm>
-            <a:off x="495300" y="5160508"/>
-            <a:ext cx="9277350" cy="5044882"/>
-            <a:chOff x="609600" y="4232468"/>
-            <a:chExt cx="9277350" cy="5044882"/>
+            <a:off x="-289708" y="3104860"/>
+            <a:ext cx="30692530" cy="19006988"/>
+            <a:chOff x="-289708" y="2633807"/>
+            <a:chExt cx="30692530" cy="19006988"/>
           </a:xfrm>
         </p:grpSpPr>
         <p:sp>
           <p:nvSpPr>
-            <p:cNvPr id="6" name="Rectangle: Rounded Corners 5">
+            <p:cNvPr id="4" name="Rectangle: Rounded Corners 3">
               <a:extLst>
                 <a:ext uri="{FF2B5EF4-FFF2-40B4-BE49-F238E27FC236}">
-                  <a16:creationId xmlns:a16="http://schemas.microsoft.com/office/drawing/2014/main" id="{A98F1016-6507-D524-42D1-7AB16F226F63}"/>
+                  <a16:creationId xmlns:a16="http://schemas.microsoft.com/office/drawing/2014/main" id="{6C7AF9FA-7438-5E00-C10B-5BDCEAA71E27}"/>
                 </a:ext>
               </a:extLst>
             </p:cNvPr>
@@ -25674,36 +25584,15 @@
           </p:nvSpPr>
           <p:spPr>
             <a:xfrm>
-              <a:off x="609600" y="4232468"/>
-              <a:ext cx="9277350" cy="5044882"/>
+              <a:off x="190500" y="3853678"/>
+              <a:ext cx="29851350" cy="6923211"/>
             </a:xfrm>
             <a:prstGeom prst="roundRect">
               <a:avLst/>
             </a:prstGeom>
-            <a:gradFill flip="none" rotWithShape="1">
-              <a:gsLst>
-                <a:gs pos="0">
-                  <a:schemeClr val="accent1">
-                    <a:shade val="30000"/>
-                    <a:satMod val="115000"/>
-                  </a:schemeClr>
-                </a:gs>
-                <a:gs pos="50000">
-                  <a:schemeClr val="accent1">
-                    <a:shade val="67500"/>
-                    <a:satMod val="115000"/>
-                  </a:schemeClr>
-                </a:gs>
-                <a:gs pos="100000">
-                  <a:schemeClr val="accent1">
-                    <a:shade val="100000"/>
-                    <a:satMod val="115000"/>
-                  </a:schemeClr>
-                </a:gs>
-              </a:gsLst>
-              <a:lin ang="13500000" scaled="1"/>
-              <a:tileRect/>
-            </a:gradFill>
+            <a:solidFill>
+              <a:srgbClr val="E6EAED"/>
+            </a:solidFill>
             <a:ln w="57150">
               <a:solidFill>
                 <a:schemeClr val="tx1"/>
@@ -25730,58 +25619,53 @@
             <a:bodyPr rtlCol="0" anchor="ctr"/>
             <a:lstStyle/>
             <a:p>
-              <a:endParaRPr lang="en-IE" sz="3200" b="1" dirty="0"/>
+              <a:pPr algn="ctr"/>
+              <a:endParaRPr lang="en-IE" b="1" dirty="0"/>
             </a:p>
+          </p:txBody>
+        </p:sp>
+        <p:sp>
+          <p:nvSpPr>
+            <p:cNvPr id="7" name="TextBox 6">
+              <a:extLst>
+                <a:ext uri="{FF2B5EF4-FFF2-40B4-BE49-F238E27FC236}">
+                  <a16:creationId xmlns:a16="http://schemas.microsoft.com/office/drawing/2014/main" id="{D9CDF24C-6E41-99FF-7335-D2539468AD92}"/>
+                </a:ext>
+              </a:extLst>
+            </p:cNvPr>
+            <p:cNvSpPr txBox="1"/>
+            <p:nvPr/>
+          </p:nvSpPr>
+          <p:spPr>
+            <a:xfrm>
+              <a:off x="423801" y="4004083"/>
+              <a:ext cx="9277350" cy="830997"/>
+            </a:xfrm>
+            <a:prstGeom prst="rect">
+              <a:avLst/>
+            </a:prstGeom>
+            <a:noFill/>
+          </p:spPr>
+          <p:txBody>
+            <a:bodyPr wrap="square" rtlCol="0">
+              <a:spAutoFit/>
+            </a:bodyPr>
+            <a:lstStyle/>
             <a:p>
+              <a:pPr algn="ctr"/>
               <a:r>
-                <a:rPr lang="en-IE" sz="3200" b="1" dirty="0"/>
-                <a:t>  Mutex {</a:t>
-              </a:r>
-            </a:p>
-            <a:p>
-              <a:r>
-                <a:rPr lang="en-IE" sz="3200" b="1" dirty="0"/>
-                <a:t>         Id: &lt;Random UUID&gt;,</a:t>
-              </a:r>
-            </a:p>
-            <a:p>
-              <a:r>
-                <a:rPr lang="en-IE" sz="3200" b="1" dirty="0"/>
-                <a:t>         Time Stamp: &lt; EPOCH Time&gt;,</a:t>
-              </a:r>
-            </a:p>
-            <a:p>
-              <a:r>
-                <a:rPr lang="en-IE" sz="3200" b="1" dirty="0"/>
-                <a:t>         Lock File: &lt;Full File Path&gt;,</a:t>
-              </a:r>
-            </a:p>
-            <a:p>
-              <a:r>
-                <a:rPr lang="en-IE" sz="3200" b="1" dirty="0"/>
-                <a:t>         Election File: &lt;Full File Path&gt;,</a:t>
-              </a:r>
-            </a:p>
-            <a:p>
-              <a:r>
-                <a:rPr lang="en-IE" sz="3200" b="1" dirty="0"/>
-                <a:t>         Mutex State: &lt;INIT | WAIT | LOCKED&gt;</a:t>
-              </a:r>
-            </a:p>
-            <a:p>
-              <a:r>
-                <a:rPr lang="en-IE" sz="3200" b="1" dirty="0"/>
-                <a:t>  }</a:t>
+                <a:rPr lang="en-IE" sz="4800" b="1" i="1" dirty="0"/>
+                <a:t>1). Enqueue Election Ballot</a:t>
               </a:r>
             </a:p>
           </p:txBody>
         </p:sp>
         <p:grpSp>
           <p:nvGrpSpPr>
-            <p:cNvPr id="13" name="Group 12">
+            <p:cNvPr id="22" name="Group 21">
               <a:extLst>
                 <a:ext uri="{FF2B5EF4-FFF2-40B4-BE49-F238E27FC236}">
-                  <a16:creationId xmlns:a16="http://schemas.microsoft.com/office/drawing/2014/main" id="{865AB9DE-E928-5C65-E445-AC34F60D20B4}"/>
+                  <a16:creationId xmlns:a16="http://schemas.microsoft.com/office/drawing/2014/main" id="{10E05E10-B54C-55AA-F4C5-B5805511BA2C}"/>
                 </a:ext>
               </a:extLst>
             </p:cNvPr>
@@ -25790,238 +25674,243 @@
           </p:nvGrpSpPr>
           <p:grpSpPr>
             <a:xfrm>
-              <a:off x="609600" y="4385666"/>
-              <a:ext cx="9048750" cy="529234"/>
-              <a:chOff x="914400" y="4442816"/>
-              <a:chExt cx="9048750" cy="529234"/>
+              <a:off x="495300" y="5160508"/>
+              <a:ext cx="9277350" cy="5044882"/>
+              <a:chOff x="609600" y="4232468"/>
+              <a:chExt cx="9277350" cy="5044882"/>
             </a:xfrm>
           </p:grpSpPr>
           <p:sp>
             <p:nvSpPr>
-              <p:cNvPr id="9" name="TextBox 8">
+              <p:cNvPr id="6" name="Rectangle: Rounded Corners 5">
                 <a:extLst>
                   <a:ext uri="{FF2B5EF4-FFF2-40B4-BE49-F238E27FC236}">
-                    <a16:creationId xmlns:a16="http://schemas.microsoft.com/office/drawing/2014/main" id="{9D526A3C-335E-5F13-5100-FB52658BE261}"/>
+                    <a16:creationId xmlns:a16="http://schemas.microsoft.com/office/drawing/2014/main" id="{A98F1016-6507-D524-42D1-7AB16F226F63}"/>
                   </a:ext>
                 </a:extLst>
               </p:cNvPr>
-              <p:cNvSpPr txBox="1"/>
+              <p:cNvSpPr/>
               <p:nvPr/>
             </p:nvSpPr>
             <p:spPr>
               <a:xfrm>
-                <a:off x="914400" y="4442816"/>
-                <a:ext cx="9048750" cy="523220"/>
+                <a:off x="609600" y="4232468"/>
+                <a:ext cx="9277350" cy="5044882"/>
               </a:xfrm>
-              <a:prstGeom prst="rect">
+              <a:prstGeom prst="roundRect">
                 <a:avLst/>
               </a:prstGeom>
-              <a:noFill/>
+              <a:gradFill flip="none" rotWithShape="1">
+                <a:gsLst>
+                  <a:gs pos="0">
+                    <a:schemeClr val="accent1">
+                      <a:shade val="30000"/>
+                      <a:satMod val="115000"/>
+                    </a:schemeClr>
+                  </a:gs>
+                  <a:gs pos="50000">
+                    <a:schemeClr val="accent1">
+                      <a:shade val="67500"/>
+                      <a:satMod val="115000"/>
+                    </a:schemeClr>
+                  </a:gs>
+                  <a:gs pos="100000">
+                    <a:schemeClr val="accent1">
+                      <a:shade val="100000"/>
+                      <a:satMod val="115000"/>
+                    </a:schemeClr>
+                  </a:gs>
+                </a:gsLst>
+                <a:lin ang="13500000" scaled="1"/>
+                <a:tileRect/>
+              </a:gradFill>
+              <a:ln w="57150">
+                <a:solidFill>
+                  <a:schemeClr val="tx1"/>
+                </a:solidFill>
+              </a:ln>
             </p:spPr>
+            <p:style>
+              <a:lnRef idx="2">
+                <a:schemeClr val="accent1">
+                  <a:shade val="15000"/>
+                </a:schemeClr>
+              </a:lnRef>
+              <a:fillRef idx="1">
+                <a:schemeClr val="accent1"/>
+              </a:fillRef>
+              <a:effectRef idx="0">
+                <a:schemeClr val="accent1"/>
+              </a:effectRef>
+              <a:fontRef idx="minor">
+                <a:schemeClr val="lt1"/>
+              </a:fontRef>
+            </p:style>
             <p:txBody>
-              <a:bodyPr wrap="square">
-                <a:spAutoFit/>
-              </a:bodyPr>
+              <a:bodyPr rtlCol="0" anchor="ctr"/>
               <a:lstStyle/>
               <a:p>
-                <a:pPr algn="ctr"/>
+                <a:endParaRPr lang="en-IE" sz="3200" b="1" dirty="0"/>
+              </a:p>
+              <a:p>
                 <a:r>
-                  <a:rPr lang="en-IE" sz="2800" b="1" dirty="0">
-                    <a:solidFill>
-                      <a:schemeClr val="bg1"/>
-                    </a:solidFill>
-                  </a:rPr>
-                  <a:t>1769689749-HostA-InstanceA.json</a:t>
+                  <a:rPr lang="en-IE" sz="3200" b="1" dirty="0"/>
+                  <a:t>  Mutex {</a:t>
+                </a:r>
+              </a:p>
+              <a:p>
+                <a:r>
+                  <a:rPr lang="en-IE" sz="3200" b="1" dirty="0"/>
+                  <a:t>         Id: &lt;Random UUID&gt;,</a:t>
+                </a:r>
+              </a:p>
+              <a:p>
+                <a:r>
+                  <a:rPr lang="en-IE" sz="3200" b="1" dirty="0"/>
+                  <a:t>         Time Stamp: &lt; EPOCH Time&gt;,</a:t>
+                </a:r>
+              </a:p>
+              <a:p>
+                <a:r>
+                  <a:rPr lang="en-IE" sz="3200" b="1" dirty="0"/>
+                  <a:t>         Lock File: &lt;Full File Path&gt;,</a:t>
+                </a:r>
+              </a:p>
+              <a:p>
+                <a:r>
+                  <a:rPr lang="en-IE" sz="3200" b="1" dirty="0"/>
+                  <a:t>         Election File: &lt;Full File Path&gt;,</a:t>
+                </a:r>
+              </a:p>
+              <a:p>
+                <a:r>
+                  <a:rPr lang="en-IE" sz="3200" b="1" dirty="0"/>
+                  <a:t>         Mutex State: &lt;INIT | WAIT | LOCKED&gt;</a:t>
+                </a:r>
+              </a:p>
+              <a:p>
+                <a:r>
+                  <a:rPr lang="en-IE" sz="3200" b="1" dirty="0"/>
+                  <a:t>  }</a:t>
                 </a:r>
               </a:p>
             </p:txBody>
           </p:sp>
-          <p:cxnSp>
-            <p:nvCxnSpPr>
-              <p:cNvPr id="11" name="Straight Connector 10">
+          <p:grpSp>
+            <p:nvGrpSpPr>
+              <p:cNvPr id="13" name="Group 12">
                 <a:extLst>
                   <a:ext uri="{FF2B5EF4-FFF2-40B4-BE49-F238E27FC236}">
-                    <a16:creationId xmlns:a16="http://schemas.microsoft.com/office/drawing/2014/main" id="{794C1588-459B-325B-CB2C-AF92EF1C09F6}"/>
+                    <a16:creationId xmlns:a16="http://schemas.microsoft.com/office/drawing/2014/main" id="{865AB9DE-E928-5C65-E445-AC34F60D20B4}"/>
                   </a:ext>
                 </a:extLst>
               </p:cNvPr>
-              <p:cNvCxnSpPr>
-                <a:cxnSpLocks/>
-              </p:cNvCxnSpPr>
+              <p:cNvGrpSpPr/>
               <p:nvPr/>
-            </p:nvCxnSpPr>
-            <p:spPr>
+            </p:nvGrpSpPr>
+            <p:grpSpPr>
               <a:xfrm>
-                <a:off x="1412270" y="4972050"/>
-                <a:ext cx="8112730" cy="0"/>
+                <a:off x="609600" y="4385666"/>
+                <a:ext cx="9048750" cy="529234"/>
+                <a:chOff x="914400" y="4442816"/>
+                <a:chExt cx="9048750" cy="529234"/>
               </a:xfrm>
-              <a:prstGeom prst="line">
-                <a:avLst/>
-              </a:prstGeom>
-              <a:ln w="19050" cap="flat" cmpd="sng" algn="ctr">
-                <a:solidFill>
-                  <a:schemeClr val="bg1"/>
-                </a:solidFill>
-                <a:prstDash val="dash"/>
-                <a:round/>
-                <a:headEnd type="none" w="med" len="med"/>
-                <a:tailEnd type="none" w="med" len="med"/>
-              </a:ln>
-            </p:spPr>
-            <p:style>
-              <a:lnRef idx="0">
-                <a:scrgbClr r="0" g="0" b="0"/>
-              </a:lnRef>
-              <a:fillRef idx="0">
-                <a:scrgbClr r="0" g="0" b="0"/>
-              </a:fillRef>
-              <a:effectRef idx="0">
-                <a:scrgbClr r="0" g="0" b="0"/>
-              </a:effectRef>
-              <a:fontRef idx="minor">
-                <a:schemeClr val="tx1"/>
-              </a:fontRef>
-            </p:style>
-          </p:cxnSp>
+            </p:grpSpPr>
+            <p:sp>
+              <p:nvSpPr>
+                <p:cNvPr id="9" name="TextBox 8">
+                  <a:extLst>
+                    <a:ext uri="{FF2B5EF4-FFF2-40B4-BE49-F238E27FC236}">
+                      <a16:creationId xmlns:a16="http://schemas.microsoft.com/office/drawing/2014/main" id="{9D526A3C-335E-5F13-5100-FB52658BE261}"/>
+                    </a:ext>
+                  </a:extLst>
+                </p:cNvPr>
+                <p:cNvSpPr txBox="1"/>
+                <p:nvPr/>
+              </p:nvSpPr>
+              <p:spPr>
+                <a:xfrm>
+                  <a:off x="914400" y="4442816"/>
+                  <a:ext cx="9048750" cy="523220"/>
+                </a:xfrm>
+                <a:prstGeom prst="rect">
+                  <a:avLst/>
+                </a:prstGeom>
+                <a:noFill/>
+              </p:spPr>
+              <p:txBody>
+                <a:bodyPr wrap="square">
+                  <a:spAutoFit/>
+                </a:bodyPr>
+                <a:lstStyle/>
+                <a:p>
+                  <a:pPr algn="ctr"/>
+                  <a:r>
+                    <a:rPr lang="en-IE" sz="2800" b="1" dirty="0">
+                      <a:solidFill>
+                        <a:schemeClr val="bg1"/>
+                      </a:solidFill>
+                    </a:rPr>
+                    <a:t>1769689749-HostA-InstanceA.json</a:t>
+                  </a:r>
+                </a:p>
+              </p:txBody>
+            </p:sp>
+            <p:cxnSp>
+              <p:nvCxnSpPr>
+                <p:cNvPr id="11" name="Straight Connector 10">
+                  <a:extLst>
+                    <a:ext uri="{FF2B5EF4-FFF2-40B4-BE49-F238E27FC236}">
+                      <a16:creationId xmlns:a16="http://schemas.microsoft.com/office/drawing/2014/main" id="{794C1588-459B-325B-CB2C-AF92EF1C09F6}"/>
+                    </a:ext>
+                  </a:extLst>
+                </p:cNvPr>
+                <p:cNvCxnSpPr>
+                  <a:cxnSpLocks/>
+                </p:cNvCxnSpPr>
+                <p:nvPr/>
+              </p:nvCxnSpPr>
+              <p:spPr>
+                <a:xfrm>
+                  <a:off x="1412270" y="4972050"/>
+                  <a:ext cx="8112730" cy="0"/>
+                </a:xfrm>
+                <a:prstGeom prst="line">
+                  <a:avLst/>
+                </a:prstGeom>
+                <a:ln w="19050" cap="flat" cmpd="sng" algn="ctr">
+                  <a:solidFill>
+                    <a:schemeClr val="bg1"/>
+                  </a:solidFill>
+                  <a:prstDash val="dash"/>
+                  <a:round/>
+                  <a:headEnd type="none" w="med" len="med"/>
+                  <a:tailEnd type="none" w="med" len="med"/>
+                </a:ln>
+              </p:spPr>
+              <p:style>
+                <a:lnRef idx="0">
+                  <a:scrgbClr r="0" g="0" b="0"/>
+                </a:lnRef>
+                <a:fillRef idx="0">
+                  <a:scrgbClr r="0" g="0" b="0"/>
+                </a:fillRef>
+                <a:effectRef idx="0">
+                  <a:scrgbClr r="0" g="0" b="0"/>
+                </a:effectRef>
+                <a:fontRef idx="minor">
+                  <a:schemeClr val="tx1"/>
+                </a:fontRef>
+              </p:style>
+            </p:cxnSp>
+          </p:grpSp>
         </p:grpSp>
-      </p:grpSp>
-      <p:sp>
-        <p:nvSpPr>
-          <p:cNvPr id="15" name="TextBox 14">
-            <a:extLst>
-              <a:ext uri="{FF2B5EF4-FFF2-40B4-BE49-F238E27FC236}">
-                <a16:creationId xmlns:a16="http://schemas.microsoft.com/office/drawing/2014/main" id="{BBF690E4-2BAC-371E-4F36-F3BB9D5CB4E8}"/>
-              </a:ext>
-            </a:extLst>
-          </p:cNvPr>
-          <p:cNvSpPr txBox="1"/>
-          <p:nvPr/>
-        </p:nvSpPr>
-        <p:spPr>
-          <a:xfrm>
-            <a:off x="11316463" y="3976374"/>
-            <a:ext cx="9277350" cy="830997"/>
-          </a:xfrm>
-          <a:prstGeom prst="rect">
-            <a:avLst/>
-          </a:prstGeom>
-          <a:noFill/>
-        </p:spPr>
-        <p:txBody>
-          <a:bodyPr wrap="square" rtlCol="0">
-            <a:spAutoFit/>
-          </a:bodyPr>
-          <a:lstStyle/>
-          <a:p>
-            <a:pPr algn="ctr"/>
-            <a:r>
-              <a:rPr lang="en-IE" sz="4800" b="1" i="1" dirty="0"/>
-              <a:t>2). Discover FIFO Position</a:t>
-            </a:r>
-          </a:p>
-        </p:txBody>
-      </p:sp>
-      <p:sp>
-        <p:nvSpPr>
-          <p:cNvPr id="14" name="Rectangle: Rounded Corners 13">
-            <a:extLst>
-              <a:ext uri="{FF2B5EF4-FFF2-40B4-BE49-F238E27FC236}">
-                <a16:creationId xmlns:a16="http://schemas.microsoft.com/office/drawing/2014/main" id="{6C6F972B-C4A3-ADE2-9B28-D6F6A4C141B6}"/>
-              </a:ext>
-            </a:extLst>
-          </p:cNvPr>
-          <p:cNvSpPr/>
-          <p:nvPr/>
-        </p:nvSpPr>
-        <p:spPr>
-          <a:xfrm>
-            <a:off x="11887200" y="5528808"/>
-            <a:ext cx="7905750" cy="4037241"/>
-          </a:xfrm>
-          <a:prstGeom prst="roundRect">
-            <a:avLst/>
-          </a:prstGeom>
-          <a:gradFill flip="none" rotWithShape="1">
-            <a:gsLst>
-              <a:gs pos="0">
-                <a:schemeClr val="accent1">
-                  <a:shade val="30000"/>
-                  <a:satMod val="115000"/>
-                </a:schemeClr>
-              </a:gs>
-              <a:gs pos="50000">
-                <a:schemeClr val="accent1">
-                  <a:shade val="67500"/>
-                  <a:satMod val="115000"/>
-                </a:schemeClr>
-              </a:gs>
-              <a:gs pos="100000">
-                <a:schemeClr val="accent1">
-                  <a:shade val="100000"/>
-                  <a:satMod val="115000"/>
-                </a:schemeClr>
-              </a:gs>
-            </a:gsLst>
-            <a:lin ang="13500000" scaled="1"/>
-            <a:tileRect/>
-          </a:gradFill>
-          <a:ln w="57150">
-            <a:solidFill>
-              <a:schemeClr val="tx1"/>
-            </a:solidFill>
-          </a:ln>
-        </p:spPr>
-        <p:style>
-          <a:lnRef idx="2">
-            <a:schemeClr val="accent1">
-              <a:shade val="15000"/>
-            </a:schemeClr>
-          </a:lnRef>
-          <a:fillRef idx="1">
-            <a:schemeClr val="accent1"/>
-          </a:fillRef>
-          <a:effectRef idx="0">
-            <a:schemeClr val="accent1"/>
-          </a:effectRef>
-          <a:fontRef idx="minor">
-            <a:schemeClr val="lt1"/>
-          </a:fontRef>
-        </p:style>
-        <p:txBody>
-          <a:bodyPr rtlCol="0" anchor="ctr"/>
-          <a:lstStyle/>
-          <a:p>
-            <a:pPr algn="ctr"/>
-            <a:endParaRPr lang="en-IE" sz="3200" b="1" dirty="0"/>
-          </a:p>
-        </p:txBody>
-      </p:sp>
-      <p:grpSp>
-        <p:nvGrpSpPr>
-          <p:cNvPr id="16" name="Group 15">
-            <a:extLst>
-              <a:ext uri="{FF2B5EF4-FFF2-40B4-BE49-F238E27FC236}">
-                <a16:creationId xmlns:a16="http://schemas.microsoft.com/office/drawing/2014/main" id="{64CC6A90-C0EB-A4B6-BC65-86380C1FB3C9}"/>
-              </a:ext>
-            </a:extLst>
-          </p:cNvPr>
-          <p:cNvGrpSpPr/>
-          <p:nvPr/>
-        </p:nvGrpSpPr>
-        <p:grpSpPr>
-          <a:xfrm>
-            <a:off x="12017069" y="5651408"/>
-            <a:ext cx="7710947" cy="499728"/>
-            <a:chOff x="914400" y="4442816"/>
-            <a:chExt cx="9048750" cy="624453"/>
-          </a:xfrm>
-        </p:grpSpPr>
         <p:sp>
           <p:nvSpPr>
-            <p:cNvPr id="17" name="TextBox 16">
+            <p:cNvPr id="15" name="TextBox 14">
               <a:extLst>
                 <a:ext uri="{FF2B5EF4-FFF2-40B4-BE49-F238E27FC236}">
-                  <a16:creationId xmlns:a16="http://schemas.microsoft.com/office/drawing/2014/main" id="{69019241-98B9-86DF-7A70-BAC7C03C6376}"/>
+                  <a16:creationId xmlns:a16="http://schemas.microsoft.com/office/drawing/2014/main" id="{BBF690E4-2BAC-371E-4F36-F3BB9D5CB4E8}"/>
                 </a:ext>
               </a:extLst>
             </p:cNvPr>
@@ -26030,8 +25919,8 @@
           </p:nvSpPr>
           <p:spPr>
             <a:xfrm>
-              <a:off x="914400" y="4442816"/>
-              <a:ext cx="9048750" cy="554636"/>
+              <a:off x="11316463" y="3976374"/>
+              <a:ext cx="9277350" cy="830997"/>
             </a:xfrm>
             <a:prstGeom prst="rect">
               <a:avLst/>
@@ -26039,283 +25928,25 @@
             <a:noFill/>
           </p:spPr>
           <p:txBody>
-            <a:bodyPr wrap="square">
+            <a:bodyPr wrap="square" rtlCol="0">
               <a:spAutoFit/>
             </a:bodyPr>
             <a:lstStyle/>
             <a:p>
               <a:pPr algn="ctr"/>
               <a:r>
-                <a:rPr lang="en-IE" sz="2800" b="1" dirty="0">
-                  <a:solidFill>
-                    <a:schemeClr val="bg1"/>
-                  </a:solidFill>
-                </a:rPr>
-                <a:t>Configured Election Directory</a:t>
+                <a:rPr lang="en-IE" sz="4800" b="1" i="1" dirty="0"/>
+                <a:t>2). Discover FIFO Position</a:t>
               </a:r>
             </a:p>
           </p:txBody>
         </p:sp>
-        <p:cxnSp>
-          <p:nvCxnSpPr>
-            <p:cNvPr id="18" name="Straight Connector 17">
+        <p:sp>
+          <p:nvSpPr>
+            <p:cNvPr id="14" name="Rectangle: Rounded Corners 13">
               <a:extLst>
                 <a:ext uri="{FF2B5EF4-FFF2-40B4-BE49-F238E27FC236}">
-                  <a16:creationId xmlns:a16="http://schemas.microsoft.com/office/drawing/2014/main" id="{B1DE96AB-CD56-E5FA-7030-6F555209E755}"/>
-                </a:ext>
-              </a:extLst>
-            </p:cNvPr>
-            <p:cNvCxnSpPr>
-              <a:cxnSpLocks/>
-            </p:cNvCxnSpPr>
-            <p:nvPr/>
-          </p:nvCxnSpPr>
-          <p:spPr>
-            <a:xfrm>
-              <a:off x="1412270" y="5067269"/>
-              <a:ext cx="8112730" cy="0"/>
-            </a:xfrm>
-            <a:prstGeom prst="line">
-              <a:avLst/>
-            </a:prstGeom>
-            <a:ln w="19050" cap="flat" cmpd="sng" algn="ctr">
-              <a:solidFill>
-                <a:schemeClr val="bg1"/>
-              </a:solidFill>
-              <a:prstDash val="dash"/>
-              <a:round/>
-              <a:headEnd type="none" w="med" len="med"/>
-              <a:tailEnd type="none" w="med" len="med"/>
-            </a:ln>
-          </p:spPr>
-          <p:style>
-            <a:lnRef idx="0">
-              <a:scrgbClr r="0" g="0" b="0"/>
-            </a:lnRef>
-            <a:fillRef idx="0">
-              <a:scrgbClr r="0" g="0" b="0"/>
-            </a:fillRef>
-            <a:effectRef idx="0">
-              <a:scrgbClr r="0" g="0" b="0"/>
-            </a:effectRef>
-            <a:fontRef idx="minor">
-              <a:schemeClr val="tx1"/>
-            </a:fontRef>
-          </p:style>
-        </p:cxnSp>
-      </p:grpSp>
-      <p:sp>
-        <p:nvSpPr>
-          <p:cNvPr id="19" name="Arrow: Right 18">
-            <a:extLst>
-              <a:ext uri="{FF2B5EF4-FFF2-40B4-BE49-F238E27FC236}">
-                <a16:creationId xmlns:a16="http://schemas.microsoft.com/office/drawing/2014/main" id="{B34B9CB4-2681-327E-1546-41998D4C06E8}"/>
-              </a:ext>
-            </a:extLst>
-          </p:cNvPr>
-          <p:cNvSpPr/>
-          <p:nvPr/>
-        </p:nvSpPr>
-        <p:spPr>
-          <a:xfrm>
-            <a:off x="10063163" y="6819984"/>
-            <a:ext cx="1619250" cy="1413703"/>
-          </a:xfrm>
-          <a:prstGeom prst="rightArrow">
-            <a:avLst/>
-          </a:prstGeom>
-          <a:gradFill flip="none" rotWithShape="1">
-            <a:gsLst>
-              <a:gs pos="0">
-                <a:schemeClr val="accent1">
-                  <a:shade val="30000"/>
-                  <a:satMod val="115000"/>
-                </a:schemeClr>
-              </a:gs>
-              <a:gs pos="50000">
-                <a:schemeClr val="accent1">
-                  <a:shade val="67500"/>
-                  <a:satMod val="115000"/>
-                </a:schemeClr>
-              </a:gs>
-              <a:gs pos="100000">
-                <a:schemeClr val="accent1">
-                  <a:shade val="100000"/>
-                  <a:satMod val="115000"/>
-                </a:schemeClr>
-              </a:gs>
-            </a:gsLst>
-            <a:lin ang="13500000" scaled="1"/>
-            <a:tileRect/>
-          </a:gradFill>
-          <a:ln w="57150">
-            <a:solidFill>
-              <a:schemeClr val="tx1"/>
-            </a:solidFill>
-          </a:ln>
-        </p:spPr>
-        <p:style>
-          <a:lnRef idx="2">
-            <a:schemeClr val="accent1">
-              <a:shade val="15000"/>
-            </a:schemeClr>
-          </a:lnRef>
-          <a:fillRef idx="1">
-            <a:schemeClr val="accent1"/>
-          </a:fillRef>
-          <a:effectRef idx="0">
-            <a:schemeClr val="accent1"/>
-          </a:effectRef>
-          <a:fontRef idx="minor">
-            <a:schemeClr val="lt1"/>
-          </a:fontRef>
-        </p:style>
-        <p:txBody>
-          <a:bodyPr rtlCol="0" anchor="ctr"/>
-          <a:lstStyle/>
-          <a:p>
-            <a:pPr algn="ctr"/>
-            <a:endParaRPr lang="en-IE"/>
-          </a:p>
-        </p:txBody>
-      </p:sp>
-      <p:sp>
-        <p:nvSpPr>
-          <p:cNvPr id="20" name="Arrow: Right 19">
-            <a:extLst>
-              <a:ext uri="{FF2B5EF4-FFF2-40B4-BE49-F238E27FC236}">
-                <a16:creationId xmlns:a16="http://schemas.microsoft.com/office/drawing/2014/main" id="{0A4E8B60-330B-1FB5-0943-17C11E0380CE}"/>
-              </a:ext>
-            </a:extLst>
-          </p:cNvPr>
-          <p:cNvSpPr/>
-          <p:nvPr/>
-        </p:nvSpPr>
-        <p:spPr>
-          <a:xfrm>
-            <a:off x="20059650" y="6793093"/>
-            <a:ext cx="1619250" cy="1440594"/>
-          </a:xfrm>
-          <a:prstGeom prst="rightArrow">
-            <a:avLst/>
-          </a:prstGeom>
-          <a:gradFill flip="none" rotWithShape="1">
-            <a:gsLst>
-              <a:gs pos="0">
-                <a:schemeClr val="accent1">
-                  <a:shade val="30000"/>
-                  <a:satMod val="115000"/>
-                </a:schemeClr>
-              </a:gs>
-              <a:gs pos="50000">
-                <a:schemeClr val="accent1">
-                  <a:shade val="67500"/>
-                  <a:satMod val="115000"/>
-                </a:schemeClr>
-              </a:gs>
-              <a:gs pos="100000">
-                <a:schemeClr val="accent1">
-                  <a:shade val="100000"/>
-                  <a:satMod val="115000"/>
-                </a:schemeClr>
-              </a:gs>
-            </a:gsLst>
-            <a:lin ang="13500000" scaled="1"/>
-            <a:tileRect/>
-          </a:gradFill>
-          <a:ln w="57150">
-            <a:solidFill>
-              <a:schemeClr val="tx1"/>
-            </a:solidFill>
-          </a:ln>
-        </p:spPr>
-        <p:style>
-          <a:lnRef idx="2">
-            <a:schemeClr val="accent1">
-              <a:shade val="15000"/>
-            </a:schemeClr>
-          </a:lnRef>
-          <a:fillRef idx="1">
-            <a:schemeClr val="accent1"/>
-          </a:fillRef>
-          <a:effectRef idx="0">
-            <a:schemeClr val="accent1"/>
-          </a:effectRef>
-          <a:fontRef idx="minor">
-            <a:schemeClr val="lt1"/>
-          </a:fontRef>
-        </p:style>
-        <p:txBody>
-          <a:bodyPr rtlCol="0" anchor="ctr"/>
-          <a:lstStyle/>
-          <a:p>
-            <a:pPr algn="ctr"/>
-            <a:endParaRPr lang="en-IE"/>
-          </a:p>
-        </p:txBody>
-      </p:sp>
-      <p:sp>
-        <p:nvSpPr>
-          <p:cNvPr id="23" name="TextBox 22">
-            <a:extLst>
-              <a:ext uri="{FF2B5EF4-FFF2-40B4-BE49-F238E27FC236}">
-                <a16:creationId xmlns:a16="http://schemas.microsoft.com/office/drawing/2014/main" id="{5E2DD160-6B4C-56D8-D2E7-C83E10664427}"/>
-              </a:ext>
-            </a:extLst>
-          </p:cNvPr>
-          <p:cNvSpPr txBox="1"/>
-          <p:nvPr/>
-        </p:nvSpPr>
-        <p:spPr>
-          <a:xfrm>
-            <a:off x="22412325" y="3995424"/>
-            <a:ext cx="6657975" cy="830997"/>
-          </a:xfrm>
-          <a:prstGeom prst="rect">
-            <a:avLst/>
-          </a:prstGeom>
-          <a:noFill/>
-        </p:spPr>
-        <p:txBody>
-          <a:bodyPr wrap="square" rtlCol="0">
-            <a:spAutoFit/>
-          </a:bodyPr>
-          <a:lstStyle/>
-          <a:p>
-            <a:pPr algn="ctr"/>
-            <a:r>
-              <a:rPr lang="en-IE" sz="4800" b="1" i="1" dirty="0"/>
-              <a:t>3). Wait Until Leader</a:t>
-            </a:r>
-          </a:p>
-        </p:txBody>
-      </p:sp>
-      <p:grpSp>
-        <p:nvGrpSpPr>
-          <p:cNvPr id="29" name="Group 28">
-            <a:extLst>
-              <a:ext uri="{FF2B5EF4-FFF2-40B4-BE49-F238E27FC236}">
-                <a16:creationId xmlns:a16="http://schemas.microsoft.com/office/drawing/2014/main" id="{4A6E0309-BA76-2C37-BF97-83DA109EC708}"/>
-              </a:ext>
-            </a:extLst>
-          </p:cNvPr>
-          <p:cNvGrpSpPr/>
-          <p:nvPr/>
-        </p:nvGrpSpPr>
-        <p:grpSpPr>
-          <a:xfrm>
-            <a:off x="21839238" y="5567707"/>
-            <a:ext cx="7905750" cy="3770158"/>
-            <a:chOff x="12363450" y="4232467"/>
-            <a:chExt cx="9277350" cy="5044882"/>
-          </a:xfrm>
-        </p:grpSpPr>
-        <p:sp>
-          <p:nvSpPr>
-            <p:cNvPr id="30" name="Rectangle: Rounded Corners 29">
-              <a:extLst>
-                <a:ext uri="{FF2B5EF4-FFF2-40B4-BE49-F238E27FC236}">
-                  <a16:creationId xmlns:a16="http://schemas.microsoft.com/office/drawing/2014/main" id="{62E450F5-1EAF-54A9-2874-39442B8A056D}"/>
+                  <a16:creationId xmlns:a16="http://schemas.microsoft.com/office/drawing/2014/main" id="{6C6F972B-C4A3-ADE2-9B28-D6F6A4C141B6}"/>
                 </a:ext>
               </a:extLst>
             </p:cNvPr>
@@ -26324,8 +25955,8 @@
           </p:nvSpPr>
           <p:spPr>
             <a:xfrm>
-              <a:off x="12363450" y="4232467"/>
-              <a:ext cx="9277350" cy="5044882"/>
+              <a:off x="11887200" y="5528808"/>
+              <a:ext cx="7905750" cy="4037241"/>
             </a:xfrm>
             <a:prstGeom prst="roundRect">
               <a:avLst/>
@@ -26387,10 +26018,10 @@
         </p:sp>
         <p:grpSp>
           <p:nvGrpSpPr>
-            <p:cNvPr id="31" name="Group 30">
+            <p:cNvPr id="16" name="Group 15">
               <a:extLst>
                 <a:ext uri="{FF2B5EF4-FFF2-40B4-BE49-F238E27FC236}">
-                  <a16:creationId xmlns:a16="http://schemas.microsoft.com/office/drawing/2014/main" id="{1E3BF374-E77C-233B-E92F-4758AAD130B1}"/>
+                  <a16:creationId xmlns:a16="http://schemas.microsoft.com/office/drawing/2014/main" id="{64CC6A90-C0EB-A4B6-BC65-86380C1FB3C9}"/>
                 </a:ext>
               </a:extLst>
             </p:cNvPr>
@@ -26399,18 +26030,18 @@
           </p:nvGrpSpPr>
           <p:grpSpPr>
             <a:xfrm>
-              <a:off x="12515850" y="4385666"/>
-              <a:ext cx="9048750" cy="665187"/>
+              <a:off x="12017069" y="5651408"/>
+              <a:ext cx="7710947" cy="499728"/>
               <a:chOff x="914400" y="4442816"/>
-              <a:chExt cx="9048750" cy="665187"/>
+              <a:chExt cx="9048750" cy="624453"/>
             </a:xfrm>
           </p:grpSpPr>
           <p:sp>
             <p:nvSpPr>
-              <p:cNvPr id="32" name="TextBox 31">
+              <p:cNvPr id="17" name="TextBox 16">
                 <a:extLst>
                   <a:ext uri="{FF2B5EF4-FFF2-40B4-BE49-F238E27FC236}">
-                    <a16:creationId xmlns:a16="http://schemas.microsoft.com/office/drawing/2014/main" id="{6381B058-26BE-BAB2-79EA-A327C72E9DF2}"/>
+                    <a16:creationId xmlns:a16="http://schemas.microsoft.com/office/drawing/2014/main" id="{69019241-98B9-86DF-7A70-BAC7C03C6376}"/>
                   </a:ext>
                 </a:extLst>
               </p:cNvPr>
@@ -26440,17 +26071,17 @@
                       <a:schemeClr val="bg1"/>
                     </a:solidFill>
                   </a:rPr>
-                  <a:t>Wait &amp; Retry</a:t>
+                  <a:t>Configured Election Directory</a:t>
                 </a:r>
               </a:p>
             </p:txBody>
           </p:sp>
           <p:cxnSp>
             <p:nvCxnSpPr>
-              <p:cNvPr id="33" name="Straight Connector 32">
+              <p:cNvPr id="18" name="Straight Connector 17">
                 <a:extLst>
                   <a:ext uri="{FF2B5EF4-FFF2-40B4-BE49-F238E27FC236}">
-                    <a16:creationId xmlns:a16="http://schemas.microsoft.com/office/drawing/2014/main" id="{69B4F2D9-FA43-58DF-241A-59FC646CE50B}"/>
+                    <a16:creationId xmlns:a16="http://schemas.microsoft.com/office/drawing/2014/main" id="{B1DE96AB-CD56-E5FA-7030-6F555209E755}"/>
                   </a:ext>
                 </a:extLst>
               </p:cNvPr>
@@ -26461,7 +26092,7 @@
             </p:nvCxnSpPr>
             <p:spPr>
               <a:xfrm>
-                <a:off x="1412270" y="5108003"/>
+                <a:off x="1412270" y="5067269"/>
                 <a:ext cx="8112730" cy="0"/>
               </a:xfrm>
               <a:prstGeom prst="line">
@@ -26493,693 +26124,12 @@
             </p:style>
           </p:cxnSp>
         </p:grpSp>
-      </p:grpSp>
-      <p:pic>
-        <p:nvPicPr>
-          <p:cNvPr id="39" name="Graphic 38" descr="Alarm Ringing outline">
-            <a:extLst>
-              <a:ext uri="{FF2B5EF4-FFF2-40B4-BE49-F238E27FC236}">
-                <a16:creationId xmlns:a16="http://schemas.microsoft.com/office/drawing/2014/main" id="{A06521CE-5F19-1FCB-0285-A48FE6ADAEA9}"/>
-              </a:ext>
-            </a:extLst>
-          </p:cNvPr>
-          <p:cNvPicPr>
-            <a:picLocks noChangeAspect="1"/>
-          </p:cNvPicPr>
-          <p:nvPr/>
-        </p:nvPicPr>
-        <p:blipFill>
-          <a:blip r:embed="rId3">
-            <a:extLst>
-              <a:ext uri="{96DAC541-7B7A-43D3-8B79-37D633B846F1}">
-                <asvg:svgBlip xmlns:asvg="http://schemas.microsoft.com/office/drawing/2016/SVG/main" r:embed="rId4"/>
-              </a:ext>
-            </a:extLst>
-          </a:blip>
-          <a:stretch>
-            <a:fillRect/>
-          </a:stretch>
-        </p:blipFill>
-        <p:spPr>
-          <a:xfrm>
-            <a:off x="27117170" y="6665603"/>
-            <a:ext cx="2105025" cy="2105025"/>
-          </a:xfrm>
-          <a:prstGeom prst="rect">
-            <a:avLst/>
-          </a:prstGeom>
-        </p:spPr>
-      </p:pic>
-      <p:pic>
-        <p:nvPicPr>
-          <p:cNvPr id="41" name="Graphic 40" descr="Snooze outline">
-            <a:extLst>
-              <a:ext uri="{FF2B5EF4-FFF2-40B4-BE49-F238E27FC236}">
-                <a16:creationId xmlns:a16="http://schemas.microsoft.com/office/drawing/2014/main" id="{05D21A47-FEE5-33CD-5150-CCD8C98322C0}"/>
-              </a:ext>
-            </a:extLst>
-          </p:cNvPr>
-          <p:cNvPicPr>
-            <a:picLocks noChangeAspect="1"/>
-          </p:cNvPicPr>
-          <p:nvPr/>
-        </p:nvPicPr>
-        <p:blipFill>
-          <a:blip r:embed="rId5">
-            <a:extLst>
-              <a:ext uri="{96DAC541-7B7A-43D3-8B79-37D633B846F1}">
-                <asvg:svgBlip xmlns:asvg="http://schemas.microsoft.com/office/drawing/2016/SVG/main" r:embed="rId6"/>
-              </a:ext>
-            </a:extLst>
-          </a:blip>
-          <a:stretch>
-            <a:fillRect/>
-          </a:stretch>
-        </p:blipFill>
-        <p:spPr>
-          <a:xfrm>
-            <a:off x="22468970" y="6417953"/>
-            <a:ext cx="2105025" cy="2105025"/>
-          </a:xfrm>
-          <a:prstGeom prst="rect">
-            <a:avLst/>
-          </a:prstGeom>
-        </p:spPr>
-      </p:pic>
-      <p:sp>
-        <p:nvSpPr>
-          <p:cNvPr id="43" name="Arrow: Right 42">
-            <a:extLst>
-              <a:ext uri="{FF2B5EF4-FFF2-40B4-BE49-F238E27FC236}">
-                <a16:creationId xmlns:a16="http://schemas.microsoft.com/office/drawing/2014/main" id="{A2F234AD-9CCE-B2A5-133D-DF97E9659C03}"/>
-              </a:ext>
-            </a:extLst>
-          </p:cNvPr>
-          <p:cNvSpPr/>
-          <p:nvPr/>
-        </p:nvSpPr>
-        <p:spPr>
-          <a:xfrm>
-            <a:off x="24806275" y="7169995"/>
-            <a:ext cx="1828800" cy="981939"/>
-          </a:xfrm>
-          <a:prstGeom prst="rightArrow">
-            <a:avLst/>
-          </a:prstGeom>
-          <a:solidFill>
-            <a:schemeClr val="accent2"/>
-          </a:solidFill>
-          <a:ln w="57150">
-            <a:solidFill>
-              <a:schemeClr val="tx1"/>
-            </a:solidFill>
-          </a:ln>
-        </p:spPr>
-        <p:style>
-          <a:lnRef idx="2">
-            <a:schemeClr val="accent1">
-              <a:shade val="15000"/>
-            </a:schemeClr>
-          </a:lnRef>
-          <a:fillRef idx="1">
-            <a:schemeClr val="accent1"/>
-          </a:fillRef>
-          <a:effectRef idx="0">
-            <a:schemeClr val="accent1"/>
-          </a:effectRef>
-          <a:fontRef idx="minor">
-            <a:schemeClr val="lt1"/>
-          </a:fontRef>
-        </p:style>
-        <p:txBody>
-          <a:bodyPr rtlCol="0" anchor="ctr"/>
-          <a:lstStyle/>
-          <a:p>
-            <a:pPr algn="ctr"/>
-            <a:endParaRPr lang="en-IE"/>
-          </a:p>
-        </p:txBody>
-      </p:sp>
-      <p:grpSp>
-        <p:nvGrpSpPr>
-          <p:cNvPr id="55" name="Group 54">
-            <a:extLst>
-              <a:ext uri="{FF2B5EF4-FFF2-40B4-BE49-F238E27FC236}">
-                <a16:creationId xmlns:a16="http://schemas.microsoft.com/office/drawing/2014/main" id="{8438DC7B-472C-B3E3-A01D-765CC1D09460}"/>
-              </a:ext>
-            </a:extLst>
-          </p:cNvPr>
-          <p:cNvGrpSpPr/>
-          <p:nvPr/>
-        </p:nvGrpSpPr>
-        <p:grpSpPr>
-          <a:xfrm>
-            <a:off x="5122141" y="2633807"/>
-            <a:ext cx="20817737" cy="1143120"/>
-            <a:chOff x="4899243" y="2108980"/>
-            <a:chExt cx="18821400" cy="1107996"/>
-          </a:xfrm>
-        </p:grpSpPr>
-        <p:cxnSp>
-          <p:nvCxnSpPr>
-            <p:cNvPr id="50" name="Straight Connector 49">
+        <p:sp>
+          <p:nvSpPr>
+            <p:cNvPr id="19" name="Arrow: Right 18">
               <a:extLst>
                 <a:ext uri="{FF2B5EF4-FFF2-40B4-BE49-F238E27FC236}">
-                  <a16:creationId xmlns:a16="http://schemas.microsoft.com/office/drawing/2014/main" id="{4F17CA91-6386-7A67-939A-4EBB6125772E}"/>
-                </a:ext>
-              </a:extLst>
-            </p:cNvPr>
-            <p:cNvCxnSpPr>
-              <a:cxnSpLocks/>
-            </p:cNvCxnSpPr>
-            <p:nvPr/>
-          </p:nvCxnSpPr>
-          <p:spPr>
-            <a:xfrm>
-              <a:off x="4953000" y="3108744"/>
-              <a:ext cx="18649794" cy="0"/>
-            </a:xfrm>
-            <a:prstGeom prst="line">
-              <a:avLst/>
-            </a:prstGeom>
-            <a:ln w="57150">
-              <a:solidFill>
-                <a:schemeClr val="tx1">
-                  <a:lumMod val="65000"/>
-                  <a:lumOff val="35000"/>
-                </a:schemeClr>
-              </a:solidFill>
-              <a:prstDash val="dash"/>
-            </a:ln>
-          </p:spPr>
-          <p:style>
-            <a:lnRef idx="2">
-              <a:schemeClr val="dk1"/>
-            </a:lnRef>
-            <a:fillRef idx="0">
-              <a:schemeClr val="dk1"/>
-            </a:fillRef>
-            <a:effectRef idx="1">
-              <a:schemeClr val="dk1"/>
-            </a:effectRef>
-            <a:fontRef idx="minor">
-              <a:schemeClr val="tx1"/>
-            </a:fontRef>
-          </p:style>
-        </p:cxnSp>
-        <p:sp>
-          <p:nvSpPr>
-            <p:cNvPr id="54" name="TextBox 53">
-              <a:extLst>
-                <a:ext uri="{FF2B5EF4-FFF2-40B4-BE49-F238E27FC236}">
-                  <a16:creationId xmlns:a16="http://schemas.microsoft.com/office/drawing/2014/main" id="{914435C2-F2C9-4CB1-DFE2-178BD5F92F20}"/>
-                </a:ext>
-              </a:extLst>
-            </p:cNvPr>
-            <p:cNvSpPr txBox="1"/>
-            <p:nvPr/>
-          </p:nvSpPr>
-          <p:spPr>
-            <a:xfrm>
-              <a:off x="4899243" y="2108980"/>
-              <a:ext cx="18821400" cy="1107996"/>
-            </a:xfrm>
-            <a:prstGeom prst="rect">
-              <a:avLst/>
-            </a:prstGeom>
-            <a:noFill/>
-          </p:spPr>
-          <p:txBody>
-            <a:bodyPr wrap="square" rtlCol="0">
-              <a:spAutoFit/>
-            </a:bodyPr>
-            <a:lstStyle/>
-            <a:p>
-              <a:pPr algn="ctr"/>
-              <a:r>
-                <a:rPr lang="en-IE" sz="6600" b="1" i="1" dirty="0">
-                  <a:solidFill>
-                    <a:schemeClr val="tx1">
-                      <a:lumMod val="65000"/>
-                      <a:lumOff val="35000"/>
-                    </a:schemeClr>
-                  </a:solidFill>
-                </a:rPr>
-                <a:t>i). Leader Election Coordinated Across HPC Jobs</a:t>
-              </a:r>
-            </a:p>
-          </p:txBody>
-        </p:sp>
-      </p:grpSp>
-      <p:grpSp>
-        <p:nvGrpSpPr>
-          <p:cNvPr id="56" name="Group 55">
-            <a:extLst>
-              <a:ext uri="{FF2B5EF4-FFF2-40B4-BE49-F238E27FC236}">
-                <a16:creationId xmlns:a16="http://schemas.microsoft.com/office/drawing/2014/main" id="{B415DE28-1A6C-8362-F4F8-741555000F08}"/>
-              </a:ext>
-            </a:extLst>
-          </p:cNvPr>
-          <p:cNvGrpSpPr/>
-          <p:nvPr/>
-        </p:nvGrpSpPr>
-        <p:grpSpPr>
-          <a:xfrm>
-            <a:off x="5280891" y="14525624"/>
-            <a:ext cx="18859500" cy="1107996"/>
-            <a:chOff x="4953000" y="2082800"/>
-            <a:chExt cx="18859500" cy="1107996"/>
-          </a:xfrm>
-        </p:grpSpPr>
-        <p:cxnSp>
-          <p:nvCxnSpPr>
-            <p:cNvPr id="57" name="Straight Connector 56">
-              <a:extLst>
-                <a:ext uri="{FF2B5EF4-FFF2-40B4-BE49-F238E27FC236}">
-                  <a16:creationId xmlns:a16="http://schemas.microsoft.com/office/drawing/2014/main" id="{2A8FEBA9-B1C8-76B3-0138-002F653CAB81}"/>
-                </a:ext>
-              </a:extLst>
-            </p:cNvPr>
-            <p:cNvCxnSpPr>
-              <a:cxnSpLocks/>
-            </p:cNvCxnSpPr>
-            <p:nvPr/>
-          </p:nvCxnSpPr>
-          <p:spPr>
-            <a:xfrm>
-              <a:off x="4953000" y="3108744"/>
-              <a:ext cx="18649794" cy="0"/>
-            </a:xfrm>
-            <a:prstGeom prst="line">
-              <a:avLst/>
-            </a:prstGeom>
-            <a:ln w="57150">
-              <a:solidFill>
-                <a:schemeClr val="tx1">
-                  <a:lumMod val="65000"/>
-                  <a:lumOff val="35000"/>
-                </a:schemeClr>
-              </a:solidFill>
-              <a:prstDash val="dash"/>
-            </a:ln>
-          </p:spPr>
-          <p:style>
-            <a:lnRef idx="2">
-              <a:schemeClr val="dk1"/>
-            </a:lnRef>
-            <a:fillRef idx="0">
-              <a:schemeClr val="dk1"/>
-            </a:fillRef>
-            <a:effectRef idx="1">
-              <a:schemeClr val="dk1"/>
-            </a:effectRef>
-            <a:fontRef idx="minor">
-              <a:schemeClr val="tx1"/>
-            </a:fontRef>
-          </p:style>
-        </p:cxnSp>
-        <p:sp>
-          <p:nvSpPr>
-            <p:cNvPr id="58" name="TextBox 57">
-              <a:extLst>
-                <a:ext uri="{FF2B5EF4-FFF2-40B4-BE49-F238E27FC236}">
-                  <a16:creationId xmlns:a16="http://schemas.microsoft.com/office/drawing/2014/main" id="{FC04D604-5EE5-1D96-7D9A-76504BC438EE}"/>
-                </a:ext>
-              </a:extLst>
-            </p:cNvPr>
-            <p:cNvSpPr txBox="1"/>
-            <p:nvPr/>
-          </p:nvSpPr>
-          <p:spPr>
-            <a:xfrm>
-              <a:off x="4991100" y="2082800"/>
-              <a:ext cx="18821400" cy="1107996"/>
-            </a:xfrm>
-            <a:prstGeom prst="rect">
-              <a:avLst/>
-            </a:prstGeom>
-            <a:noFill/>
-          </p:spPr>
-          <p:txBody>
-            <a:bodyPr wrap="square" rtlCol="0">
-              <a:spAutoFit/>
-            </a:bodyPr>
-            <a:lstStyle/>
-            <a:p>
-              <a:pPr algn="ctr"/>
-              <a:r>
-                <a:rPr lang="en-IE" sz="6600" b="1" i="1" dirty="0">
-                  <a:solidFill>
-                    <a:schemeClr val="tx1">
-                      <a:lumMod val="65000"/>
-                      <a:lumOff val="35000"/>
-                    </a:schemeClr>
-                  </a:solidFill>
-                </a:rPr>
-                <a:t>ii). Hosting Node of Leader Owns the OS Lock</a:t>
-              </a:r>
-            </a:p>
-          </p:txBody>
-        </p:sp>
-      </p:grpSp>
-      <p:sp>
-        <p:nvSpPr>
-          <p:cNvPr id="87" name="Rectangle: Rounded Corners 86">
-            <a:extLst>
-              <a:ext uri="{FF2B5EF4-FFF2-40B4-BE49-F238E27FC236}">
-                <a16:creationId xmlns:a16="http://schemas.microsoft.com/office/drawing/2014/main" id="{9F6B5165-62F2-45C5-C2B0-48352441AE46}"/>
-              </a:ext>
-            </a:extLst>
-          </p:cNvPr>
-          <p:cNvSpPr/>
-          <p:nvPr/>
-        </p:nvSpPr>
-        <p:spPr>
-          <a:xfrm>
-            <a:off x="188191" y="15722603"/>
-            <a:ext cx="29851350" cy="5918192"/>
-          </a:xfrm>
-          <a:prstGeom prst="roundRect">
-            <a:avLst/>
-          </a:prstGeom>
-          <a:solidFill>
-            <a:srgbClr val="E6EAED"/>
-          </a:solidFill>
-          <a:ln w="57150">
-            <a:solidFill>
-              <a:schemeClr val="tx1"/>
-            </a:solidFill>
-          </a:ln>
-        </p:spPr>
-        <p:style>
-          <a:lnRef idx="2">
-            <a:schemeClr val="accent1">
-              <a:shade val="15000"/>
-            </a:schemeClr>
-          </a:lnRef>
-          <a:fillRef idx="1">
-            <a:schemeClr val="accent1"/>
-          </a:fillRef>
-          <a:effectRef idx="0">
-            <a:schemeClr val="accent1"/>
-          </a:effectRef>
-          <a:fontRef idx="minor">
-            <a:schemeClr val="lt1"/>
-          </a:fontRef>
-        </p:style>
-        <p:txBody>
-          <a:bodyPr rtlCol="0" anchor="ctr"/>
-          <a:lstStyle/>
-          <a:p>
-            <a:pPr algn="ctr"/>
-            <a:endParaRPr lang="en-IE" b="1" dirty="0"/>
-          </a:p>
-        </p:txBody>
-      </p:sp>
-      <p:sp>
-        <p:nvSpPr>
-          <p:cNvPr id="88" name="TextBox 87">
-            <a:extLst>
-              <a:ext uri="{FF2B5EF4-FFF2-40B4-BE49-F238E27FC236}">
-                <a16:creationId xmlns:a16="http://schemas.microsoft.com/office/drawing/2014/main" id="{1A58CC51-694B-6303-6B7E-1DE40BCD20AB}"/>
-              </a:ext>
-            </a:extLst>
-          </p:cNvPr>
-          <p:cNvSpPr txBox="1"/>
-          <p:nvPr/>
-        </p:nvSpPr>
-        <p:spPr>
-          <a:xfrm>
-            <a:off x="-289708" y="15798918"/>
-            <a:ext cx="9277350" cy="830997"/>
-          </a:xfrm>
-          <a:prstGeom prst="rect">
-            <a:avLst/>
-          </a:prstGeom>
-          <a:noFill/>
-        </p:spPr>
-        <p:txBody>
-          <a:bodyPr wrap="square" rtlCol="0">
-            <a:spAutoFit/>
-          </a:bodyPr>
-          <a:lstStyle/>
-          <a:p>
-            <a:pPr algn="ctr"/>
-            <a:r>
-              <a:rPr lang="en-IE" sz="4800" b="1" i="1" dirty="0"/>
-              <a:t>4). Acquire File Lock</a:t>
-            </a:r>
-          </a:p>
-        </p:txBody>
-      </p:sp>
-      <p:sp>
-        <p:nvSpPr>
-          <p:cNvPr id="90" name="TextBox 89">
-            <a:extLst>
-              <a:ext uri="{FF2B5EF4-FFF2-40B4-BE49-F238E27FC236}">
-                <a16:creationId xmlns:a16="http://schemas.microsoft.com/office/drawing/2014/main" id="{3304CF6E-B326-E521-B77C-B4D210C04B06}"/>
-              </a:ext>
-            </a:extLst>
-          </p:cNvPr>
-          <p:cNvSpPr txBox="1"/>
-          <p:nvPr/>
-        </p:nvSpPr>
-        <p:spPr>
-          <a:xfrm>
-            <a:off x="10337075" y="15798918"/>
-            <a:ext cx="9277350" cy="830997"/>
-          </a:xfrm>
-          <a:prstGeom prst="rect">
-            <a:avLst/>
-          </a:prstGeom>
-          <a:noFill/>
-        </p:spPr>
-        <p:txBody>
-          <a:bodyPr wrap="square" rtlCol="0">
-            <a:spAutoFit/>
-          </a:bodyPr>
-          <a:lstStyle/>
-          <a:p>
-            <a:pPr algn="ctr"/>
-            <a:r>
-              <a:rPr lang="en-IE" sz="4800" b="1" i="1" dirty="0"/>
-              <a:t>5). Execute Work Under Lock</a:t>
-            </a:r>
-          </a:p>
-        </p:txBody>
-      </p:sp>
-      <p:sp>
-        <p:nvSpPr>
-          <p:cNvPr id="92" name="Arrow: Right 91">
-            <a:extLst>
-              <a:ext uri="{FF2B5EF4-FFF2-40B4-BE49-F238E27FC236}">
-                <a16:creationId xmlns:a16="http://schemas.microsoft.com/office/drawing/2014/main" id="{AE345429-4113-2B59-9FBD-F7FEC818DA28}"/>
-              </a:ext>
-            </a:extLst>
-          </p:cNvPr>
-          <p:cNvSpPr/>
-          <p:nvPr/>
-        </p:nvSpPr>
-        <p:spPr>
-          <a:xfrm>
-            <a:off x="8768936" y="18207958"/>
-            <a:ext cx="1979305" cy="1413703"/>
-          </a:xfrm>
-          <a:prstGeom prst="rightArrow">
-            <a:avLst/>
-          </a:prstGeom>
-          <a:gradFill flip="none" rotWithShape="1">
-            <a:gsLst>
-              <a:gs pos="0">
-                <a:schemeClr val="accent1">
-                  <a:shade val="30000"/>
-                  <a:satMod val="115000"/>
-                </a:schemeClr>
-              </a:gs>
-              <a:gs pos="50000">
-                <a:schemeClr val="accent1">
-                  <a:shade val="67500"/>
-                  <a:satMod val="115000"/>
-                </a:schemeClr>
-              </a:gs>
-              <a:gs pos="100000">
-                <a:schemeClr val="accent1">
-                  <a:shade val="100000"/>
-                  <a:satMod val="115000"/>
-                </a:schemeClr>
-              </a:gs>
-            </a:gsLst>
-            <a:lin ang="13500000" scaled="1"/>
-            <a:tileRect/>
-          </a:gradFill>
-          <a:ln w="57150">
-            <a:solidFill>
-              <a:schemeClr val="tx1"/>
-            </a:solidFill>
-          </a:ln>
-        </p:spPr>
-        <p:style>
-          <a:lnRef idx="2">
-            <a:schemeClr val="accent1">
-              <a:shade val="15000"/>
-            </a:schemeClr>
-          </a:lnRef>
-          <a:fillRef idx="1">
-            <a:schemeClr val="accent1"/>
-          </a:fillRef>
-          <a:effectRef idx="0">
-            <a:schemeClr val="accent1"/>
-          </a:effectRef>
-          <a:fontRef idx="minor">
-            <a:schemeClr val="lt1"/>
-          </a:fontRef>
-        </p:style>
-        <p:txBody>
-          <a:bodyPr rtlCol="0" anchor="ctr"/>
-          <a:lstStyle/>
-          <a:p>
-            <a:pPr algn="ctr"/>
-            <a:endParaRPr lang="en-IE"/>
-          </a:p>
-        </p:txBody>
-      </p:sp>
-      <p:sp>
-        <p:nvSpPr>
-          <p:cNvPr id="93" name="Arrow: Right 92">
-            <a:extLst>
-              <a:ext uri="{FF2B5EF4-FFF2-40B4-BE49-F238E27FC236}">
-                <a16:creationId xmlns:a16="http://schemas.microsoft.com/office/drawing/2014/main" id="{9A92287C-9ADC-C5E8-F927-2ABB19F06159}"/>
-              </a:ext>
-            </a:extLst>
-          </p:cNvPr>
-          <p:cNvSpPr/>
-          <p:nvPr/>
-        </p:nvSpPr>
-        <p:spPr>
-          <a:xfrm>
-            <a:off x="18640529" y="18100710"/>
-            <a:ext cx="2242312" cy="1440594"/>
-          </a:xfrm>
-          <a:prstGeom prst="rightArrow">
-            <a:avLst/>
-          </a:prstGeom>
-          <a:gradFill flip="none" rotWithShape="1">
-            <a:gsLst>
-              <a:gs pos="0">
-                <a:schemeClr val="accent1">
-                  <a:shade val="30000"/>
-                  <a:satMod val="115000"/>
-                </a:schemeClr>
-              </a:gs>
-              <a:gs pos="50000">
-                <a:schemeClr val="accent1">
-                  <a:shade val="67500"/>
-                  <a:satMod val="115000"/>
-                </a:schemeClr>
-              </a:gs>
-              <a:gs pos="100000">
-                <a:schemeClr val="accent1">
-                  <a:shade val="100000"/>
-                  <a:satMod val="115000"/>
-                </a:schemeClr>
-              </a:gs>
-            </a:gsLst>
-            <a:lin ang="13500000" scaled="1"/>
-            <a:tileRect/>
-          </a:gradFill>
-          <a:ln w="57150">
-            <a:solidFill>
-              <a:schemeClr val="tx1"/>
-            </a:solidFill>
-          </a:ln>
-        </p:spPr>
-        <p:style>
-          <a:lnRef idx="2">
-            <a:schemeClr val="accent1">
-              <a:shade val="15000"/>
-            </a:schemeClr>
-          </a:lnRef>
-          <a:fillRef idx="1">
-            <a:schemeClr val="accent1"/>
-          </a:fillRef>
-          <a:effectRef idx="0">
-            <a:schemeClr val="accent1"/>
-          </a:effectRef>
-          <a:fontRef idx="minor">
-            <a:schemeClr val="lt1"/>
-          </a:fontRef>
-        </p:style>
-        <p:txBody>
-          <a:bodyPr rtlCol="0" anchor="ctr"/>
-          <a:lstStyle/>
-          <a:p>
-            <a:pPr algn="ctr"/>
-            <a:endParaRPr lang="en-IE"/>
-          </a:p>
-        </p:txBody>
-      </p:sp>
-      <p:sp>
-        <p:nvSpPr>
-          <p:cNvPr id="94" name="TextBox 93">
-            <a:extLst>
-              <a:ext uri="{FF2B5EF4-FFF2-40B4-BE49-F238E27FC236}">
-                <a16:creationId xmlns:a16="http://schemas.microsoft.com/office/drawing/2014/main" id="{DC31B3FA-AD41-3E67-4907-5195F0A775AF}"/>
-              </a:ext>
-            </a:extLst>
-          </p:cNvPr>
-          <p:cNvSpPr txBox="1"/>
-          <p:nvPr/>
-        </p:nvSpPr>
-        <p:spPr>
-          <a:xfrm>
-            <a:off x="22365661" y="15798918"/>
-            <a:ext cx="6657975" cy="830997"/>
-          </a:xfrm>
-          <a:prstGeom prst="rect">
-            <a:avLst/>
-          </a:prstGeom>
-          <a:noFill/>
-        </p:spPr>
-        <p:txBody>
-          <a:bodyPr wrap="square" rtlCol="0">
-            <a:spAutoFit/>
-          </a:bodyPr>
-          <a:lstStyle/>
-          <a:p>
-            <a:pPr algn="ctr"/>
-            <a:r>
-              <a:rPr lang="en-IE" sz="4800" b="1" i="1" dirty="0"/>
-              <a:t>6). Dequeue Mutex</a:t>
-            </a:r>
-          </a:p>
-        </p:txBody>
-      </p:sp>
-      <p:grpSp>
-        <p:nvGrpSpPr>
-          <p:cNvPr id="96" name="Group 95">
-            <a:extLst>
-              <a:ext uri="{FF2B5EF4-FFF2-40B4-BE49-F238E27FC236}">
-                <a16:creationId xmlns:a16="http://schemas.microsoft.com/office/drawing/2014/main" id="{BEB964F5-01B5-3919-71C3-72F33580F0AB}"/>
-              </a:ext>
-            </a:extLst>
-          </p:cNvPr>
-          <p:cNvGrpSpPr/>
-          <p:nvPr/>
-        </p:nvGrpSpPr>
-        <p:grpSpPr>
-          <a:xfrm>
-            <a:off x="21325242" y="16779966"/>
-            <a:ext cx="8392038" cy="4236049"/>
-            <a:chOff x="12363450" y="4232467"/>
-            <a:chExt cx="9277350" cy="5044882"/>
-          </a:xfrm>
-        </p:grpSpPr>
-        <p:sp>
-          <p:nvSpPr>
-            <p:cNvPr id="100" name="Rectangle: Rounded Corners 99">
-              <a:extLst>
-                <a:ext uri="{FF2B5EF4-FFF2-40B4-BE49-F238E27FC236}">
-                  <a16:creationId xmlns:a16="http://schemas.microsoft.com/office/drawing/2014/main" id="{D1D4EDCD-A5D1-874D-2060-507433C888D5}"/>
+                  <a16:creationId xmlns:a16="http://schemas.microsoft.com/office/drawing/2014/main" id="{B34B9CB4-2681-327E-1546-41998D4C06E8}"/>
                 </a:ext>
               </a:extLst>
             </p:cNvPr>
@@ -27188,10 +26138,10 @@
           </p:nvSpPr>
           <p:spPr>
             <a:xfrm>
-              <a:off x="12363450" y="4232467"/>
-              <a:ext cx="9277350" cy="5044882"/>
+              <a:off x="10063163" y="6819984"/>
+              <a:ext cx="1619250" cy="1413703"/>
             </a:xfrm>
-            <a:prstGeom prst="roundRect">
+            <a:prstGeom prst="rightArrow">
               <a:avLst/>
             </a:prstGeom>
             <a:gradFill flip="none" rotWithShape="1">
@@ -27245,220 +26195,16 @@
             <a:lstStyle/>
             <a:p>
               <a:pPr algn="ctr"/>
-              <a:endParaRPr lang="en-IE" sz="3200" b="1" dirty="0"/>
+              <a:endParaRPr lang="en-IE"/>
             </a:p>
           </p:txBody>
         </p:sp>
-        <p:grpSp>
-          <p:nvGrpSpPr>
-            <p:cNvPr id="101" name="Group 100">
+        <p:sp>
+          <p:nvSpPr>
+            <p:cNvPr id="20" name="Arrow: Right 19">
               <a:extLst>
                 <a:ext uri="{FF2B5EF4-FFF2-40B4-BE49-F238E27FC236}">
-                  <a16:creationId xmlns:a16="http://schemas.microsoft.com/office/drawing/2014/main" id="{0C38E234-E7AC-FB28-218C-CCAB9770B5A1}"/>
-                </a:ext>
-              </a:extLst>
-            </p:cNvPr>
-            <p:cNvGrpSpPr/>
-            <p:nvPr/>
-          </p:nvGrpSpPr>
-          <p:grpSpPr>
-            <a:xfrm>
-              <a:off x="12515850" y="4385666"/>
-              <a:ext cx="9048750" cy="680484"/>
-              <a:chOff x="914400" y="4442816"/>
-              <a:chExt cx="9048750" cy="680484"/>
-            </a:xfrm>
-          </p:grpSpPr>
-          <p:sp>
-            <p:nvSpPr>
-              <p:cNvPr id="102" name="TextBox 101">
-                <a:extLst>
-                  <a:ext uri="{FF2B5EF4-FFF2-40B4-BE49-F238E27FC236}">
-                    <a16:creationId xmlns:a16="http://schemas.microsoft.com/office/drawing/2014/main" id="{6D892C4A-C8B2-E3B3-2102-90A87CEA6E3D}"/>
-                  </a:ext>
-                </a:extLst>
-              </p:cNvPr>
-              <p:cNvSpPr txBox="1"/>
-              <p:nvPr/>
-            </p:nvSpPr>
-            <p:spPr>
-              <a:xfrm>
-                <a:off x="914400" y="4442816"/>
-                <a:ext cx="9048750" cy="554636"/>
-              </a:xfrm>
-              <a:prstGeom prst="rect">
-                <a:avLst/>
-              </a:prstGeom>
-              <a:noFill/>
-            </p:spPr>
-            <p:txBody>
-              <a:bodyPr wrap="square">
-                <a:spAutoFit/>
-              </a:bodyPr>
-              <a:lstStyle/>
-              <a:p>
-                <a:pPr algn="ctr"/>
-                <a:r>
-                  <a:rPr lang="en-IE" sz="2800" b="1" dirty="0">
-                    <a:solidFill>
-                      <a:schemeClr val="bg1"/>
-                    </a:solidFill>
-                  </a:rPr>
-                  <a:t>Clear Central then Election Lock</a:t>
-                </a:r>
-              </a:p>
-            </p:txBody>
-          </p:sp>
-          <p:cxnSp>
-            <p:nvCxnSpPr>
-              <p:cNvPr id="103" name="Straight Connector 102">
-                <a:extLst>
-                  <a:ext uri="{FF2B5EF4-FFF2-40B4-BE49-F238E27FC236}">
-                    <a16:creationId xmlns:a16="http://schemas.microsoft.com/office/drawing/2014/main" id="{8F177FCE-694E-26FC-3BDF-DA48A7D41C49}"/>
-                  </a:ext>
-                </a:extLst>
-              </p:cNvPr>
-              <p:cNvCxnSpPr>
-                <a:cxnSpLocks/>
-              </p:cNvCxnSpPr>
-              <p:nvPr/>
-            </p:nvCxnSpPr>
-            <p:spPr>
-              <a:xfrm>
-                <a:off x="1412270" y="5123300"/>
-                <a:ext cx="8112730" cy="0"/>
-              </a:xfrm>
-              <a:prstGeom prst="line">
-                <a:avLst/>
-              </a:prstGeom>
-              <a:ln w="19050" cap="flat" cmpd="sng" algn="ctr">
-                <a:solidFill>
-                  <a:schemeClr val="bg1"/>
-                </a:solidFill>
-                <a:prstDash val="dash"/>
-                <a:round/>
-                <a:headEnd type="none" w="med" len="med"/>
-                <a:tailEnd type="none" w="med" len="med"/>
-              </a:ln>
-            </p:spPr>
-            <p:style>
-              <a:lnRef idx="0">
-                <a:scrgbClr r="0" g="0" b="0"/>
-              </a:lnRef>
-              <a:fillRef idx="0">
-                <a:scrgbClr r="0" g="0" b="0"/>
-              </a:fillRef>
-              <a:effectRef idx="0">
-                <a:scrgbClr r="0" g="0" b="0"/>
-              </a:effectRef>
-              <a:fontRef idx="minor">
-                <a:schemeClr val="tx1"/>
-              </a:fontRef>
-            </p:style>
-          </p:cxnSp>
-        </p:grpSp>
-      </p:grpSp>
-      <p:sp>
-        <p:nvSpPr>
-          <p:cNvPr id="113" name="Arrow: Right 112">
-            <a:extLst>
-              <a:ext uri="{FF2B5EF4-FFF2-40B4-BE49-F238E27FC236}">
-                <a16:creationId xmlns:a16="http://schemas.microsoft.com/office/drawing/2014/main" id="{5235A552-AB28-96C9-9D25-FE98C601670A}"/>
-              </a:ext>
-            </a:extLst>
-          </p:cNvPr>
-          <p:cNvSpPr/>
-          <p:nvPr/>
-        </p:nvSpPr>
-        <p:spPr>
-          <a:xfrm rot="5400000">
-            <a:off x="13797988" y="12011264"/>
-            <a:ext cx="2656859" cy="1619250"/>
-          </a:xfrm>
-          <a:prstGeom prst="rightArrow">
-            <a:avLst/>
-          </a:prstGeom>
-          <a:gradFill flip="none" rotWithShape="1">
-            <a:gsLst>
-              <a:gs pos="0">
-                <a:schemeClr val="accent1">
-                  <a:shade val="30000"/>
-                  <a:satMod val="115000"/>
-                </a:schemeClr>
-              </a:gs>
-              <a:gs pos="50000">
-                <a:schemeClr val="accent1">
-                  <a:shade val="67500"/>
-                  <a:satMod val="115000"/>
-                </a:schemeClr>
-              </a:gs>
-              <a:gs pos="100000">
-                <a:schemeClr val="accent1">
-                  <a:shade val="100000"/>
-                  <a:satMod val="115000"/>
-                </a:schemeClr>
-              </a:gs>
-            </a:gsLst>
-            <a:lin ang="13500000" scaled="1"/>
-            <a:tileRect/>
-          </a:gradFill>
-          <a:ln w="57150">
-            <a:solidFill>
-              <a:schemeClr val="tx1"/>
-            </a:solidFill>
-          </a:ln>
-        </p:spPr>
-        <p:style>
-          <a:lnRef idx="2">
-            <a:schemeClr val="accent1">
-              <a:shade val="15000"/>
-            </a:schemeClr>
-          </a:lnRef>
-          <a:fillRef idx="1">
-            <a:schemeClr val="accent1"/>
-          </a:fillRef>
-          <a:effectRef idx="0">
-            <a:schemeClr val="accent1"/>
-          </a:effectRef>
-          <a:fontRef idx="minor">
-            <a:schemeClr val="lt1"/>
-          </a:fontRef>
-        </p:style>
-        <p:txBody>
-          <a:bodyPr rtlCol="0" anchor="ctr"/>
-          <a:lstStyle/>
-          <a:p>
-            <a:pPr algn="ctr"/>
-            <a:endParaRPr lang="en-IE"/>
-          </a:p>
-        </p:txBody>
-      </p:sp>
-      <p:grpSp>
-        <p:nvGrpSpPr>
-          <p:cNvPr id="89" name="Group 88">
-            <a:extLst>
-              <a:ext uri="{FF2B5EF4-FFF2-40B4-BE49-F238E27FC236}">
-                <a16:creationId xmlns:a16="http://schemas.microsoft.com/office/drawing/2014/main" id="{3824AFED-603D-7D8E-5651-3778581935FE}"/>
-              </a:ext>
-            </a:extLst>
-          </p:cNvPr>
-          <p:cNvGrpSpPr/>
-          <p:nvPr/>
-        </p:nvGrpSpPr>
-        <p:grpSpPr>
-          <a:xfrm>
-            <a:off x="734291" y="16906275"/>
-            <a:ext cx="7521575" cy="3842943"/>
-            <a:chOff x="609600" y="4232468"/>
-            <a:chExt cx="9277350" cy="5044882"/>
-          </a:xfrm>
-        </p:grpSpPr>
-        <p:sp>
-          <p:nvSpPr>
-            <p:cNvPr id="108" name="Rectangle: Rounded Corners 107">
-              <a:extLst>
-                <a:ext uri="{FF2B5EF4-FFF2-40B4-BE49-F238E27FC236}">
-                  <a16:creationId xmlns:a16="http://schemas.microsoft.com/office/drawing/2014/main" id="{63642D35-62E7-4F25-2914-F20F10C76A8C}"/>
+                  <a16:creationId xmlns:a16="http://schemas.microsoft.com/office/drawing/2014/main" id="{0A4E8B60-330B-1FB5-0943-17C11E0380CE}"/>
                 </a:ext>
               </a:extLst>
             </p:cNvPr>
@@ -27467,306 +26213,10 @@
           </p:nvSpPr>
           <p:spPr>
             <a:xfrm>
-              <a:off x="609600" y="4232468"/>
-              <a:ext cx="9277350" cy="5044882"/>
+              <a:off x="20059650" y="6793093"/>
+              <a:ext cx="1619250" cy="1440594"/>
             </a:xfrm>
-            <a:prstGeom prst="roundRect">
-              <a:avLst/>
-            </a:prstGeom>
-            <a:gradFill flip="none" rotWithShape="1">
-              <a:gsLst>
-                <a:gs pos="0">
-                  <a:schemeClr val="accent1">
-                    <a:shade val="30000"/>
-                    <a:satMod val="115000"/>
-                  </a:schemeClr>
-                </a:gs>
-                <a:gs pos="50000">
-                  <a:schemeClr val="accent1">
-                    <a:shade val="67500"/>
-                    <a:satMod val="115000"/>
-                  </a:schemeClr>
-                </a:gs>
-                <a:gs pos="100000">
-                  <a:schemeClr val="accent1">
-                    <a:shade val="100000"/>
-                    <a:satMod val="115000"/>
-                  </a:schemeClr>
-                </a:gs>
-              </a:gsLst>
-              <a:lin ang="13500000" scaled="1"/>
-              <a:tileRect/>
-            </a:gradFill>
-            <a:ln w="57150">
-              <a:solidFill>
-                <a:schemeClr val="tx1"/>
-              </a:solidFill>
-            </a:ln>
-          </p:spPr>
-          <p:style>
-            <a:lnRef idx="2">
-              <a:schemeClr val="accent1">
-                <a:shade val="15000"/>
-              </a:schemeClr>
-            </a:lnRef>
-            <a:fillRef idx="1">
-              <a:schemeClr val="accent1"/>
-            </a:fillRef>
-            <a:effectRef idx="0">
-              <a:schemeClr val="accent1"/>
-            </a:effectRef>
-            <a:fontRef idx="minor">
-              <a:schemeClr val="lt1"/>
-            </a:fontRef>
-          </p:style>
-          <p:txBody>
-            <a:bodyPr rtlCol="0" anchor="ctr"/>
-            <a:lstStyle/>
-            <a:p>
-              <a:endParaRPr lang="en-IE" sz="3200" b="1" dirty="0"/>
-            </a:p>
-          </p:txBody>
-        </p:sp>
-        <p:grpSp>
-          <p:nvGrpSpPr>
-            <p:cNvPr id="109" name="Group 108">
-              <a:extLst>
-                <a:ext uri="{FF2B5EF4-FFF2-40B4-BE49-F238E27FC236}">
-                  <a16:creationId xmlns:a16="http://schemas.microsoft.com/office/drawing/2014/main" id="{4C706FEC-6D43-6EF3-8962-CE9C89EDB1A5}"/>
-                </a:ext>
-              </a:extLst>
-            </p:cNvPr>
-            <p:cNvGrpSpPr/>
-            <p:nvPr/>
-          </p:nvGrpSpPr>
-          <p:grpSpPr>
-            <a:xfrm>
-              <a:off x="609600" y="4385666"/>
-              <a:ext cx="9048750" cy="689940"/>
-              <a:chOff x="914400" y="4442816"/>
-              <a:chExt cx="9048750" cy="689940"/>
-            </a:xfrm>
-          </p:grpSpPr>
-          <p:sp>
-            <p:nvSpPr>
-              <p:cNvPr id="110" name="TextBox 109">
-                <a:extLst>
-                  <a:ext uri="{FF2B5EF4-FFF2-40B4-BE49-F238E27FC236}">
-                    <a16:creationId xmlns:a16="http://schemas.microsoft.com/office/drawing/2014/main" id="{5FB26764-FE71-E2BA-81BD-1A41BC916065}"/>
-                  </a:ext>
-                </a:extLst>
-              </p:cNvPr>
-              <p:cNvSpPr txBox="1"/>
-              <p:nvPr/>
-            </p:nvSpPr>
-            <p:spPr>
-              <a:xfrm>
-                <a:off x="914400" y="4442816"/>
-                <a:ext cx="9048750" cy="523220"/>
-              </a:xfrm>
-              <a:prstGeom prst="rect">
-                <a:avLst/>
-              </a:prstGeom>
-              <a:noFill/>
-            </p:spPr>
-            <p:txBody>
-              <a:bodyPr wrap="square">
-                <a:spAutoFit/>
-              </a:bodyPr>
-              <a:lstStyle/>
-              <a:p>
-                <a:pPr algn="ctr"/>
-                <a:r>
-                  <a:rPr lang="en-IE" sz="2800" b="1" dirty="0">
-                    <a:solidFill>
-                      <a:schemeClr val="bg1"/>
-                    </a:solidFill>
-                  </a:rPr>
-                  <a:t>FileChannel Lock on Central LockFile</a:t>
-                </a:r>
-              </a:p>
-            </p:txBody>
-          </p:sp>
-          <p:cxnSp>
-            <p:nvCxnSpPr>
-              <p:cNvPr id="111" name="Straight Connector 110">
-                <a:extLst>
-                  <a:ext uri="{FF2B5EF4-FFF2-40B4-BE49-F238E27FC236}">
-                    <a16:creationId xmlns:a16="http://schemas.microsoft.com/office/drawing/2014/main" id="{D438D6CE-796E-F0D7-2297-DD9F25BC0390}"/>
-                  </a:ext>
-                </a:extLst>
-              </p:cNvPr>
-              <p:cNvCxnSpPr>
-                <a:cxnSpLocks/>
-              </p:cNvCxnSpPr>
-              <p:nvPr/>
-            </p:nvCxnSpPr>
-            <p:spPr>
-              <a:xfrm>
-                <a:off x="1497160" y="5132756"/>
-                <a:ext cx="8032762" cy="0"/>
-              </a:xfrm>
-              <a:prstGeom prst="line">
-                <a:avLst/>
-              </a:prstGeom>
-              <a:ln w="19050" cap="flat" cmpd="sng" algn="ctr">
-                <a:solidFill>
-                  <a:schemeClr val="bg1"/>
-                </a:solidFill>
-                <a:prstDash val="dash"/>
-                <a:round/>
-                <a:headEnd type="none" w="med" len="med"/>
-                <a:tailEnd type="none" w="med" len="med"/>
-              </a:ln>
-            </p:spPr>
-            <p:style>
-              <a:lnRef idx="0">
-                <a:scrgbClr r="0" g="0" b="0"/>
-              </a:lnRef>
-              <a:fillRef idx="0">
-                <a:scrgbClr r="0" g="0" b="0"/>
-              </a:fillRef>
-              <a:effectRef idx="0">
-                <a:scrgbClr r="0" g="0" b="0"/>
-              </a:effectRef>
-              <a:fontRef idx="minor">
-                <a:schemeClr val="tx1"/>
-              </a:fontRef>
-            </p:style>
-          </p:cxnSp>
-        </p:grpSp>
-      </p:grpSp>
-      <p:grpSp>
-        <p:nvGrpSpPr>
-          <p:cNvPr id="122" name="Group 121">
-            <a:extLst>
-              <a:ext uri="{FF2B5EF4-FFF2-40B4-BE49-F238E27FC236}">
-                <a16:creationId xmlns:a16="http://schemas.microsoft.com/office/drawing/2014/main" id="{2E5359AA-2A23-D204-F4FF-03D4CC2A86B1}"/>
-              </a:ext>
-            </a:extLst>
-          </p:cNvPr>
-          <p:cNvGrpSpPr/>
-          <p:nvPr/>
-        </p:nvGrpSpPr>
-        <p:grpSpPr>
-          <a:xfrm>
-            <a:off x="2801215" y="17754707"/>
-            <a:ext cx="3140911" cy="2301407"/>
-            <a:chOff x="1939924" y="18109350"/>
-            <a:chExt cx="3573819" cy="2536825"/>
-          </a:xfrm>
-        </p:grpSpPr>
-        <p:pic>
-          <p:nvPicPr>
-            <p:cNvPr id="120" name="Graphic 119" descr="Lock outline">
-              <a:extLst>
-                <a:ext uri="{FF2B5EF4-FFF2-40B4-BE49-F238E27FC236}">
-                  <a16:creationId xmlns:a16="http://schemas.microsoft.com/office/drawing/2014/main" id="{7B630FEC-92E0-4756-D730-8992B212194C}"/>
-                </a:ext>
-              </a:extLst>
-            </p:cNvPr>
-            <p:cNvPicPr>
-              <a:picLocks noChangeAspect="1"/>
-            </p:cNvPicPr>
-            <p:nvPr/>
-          </p:nvPicPr>
-          <p:blipFill>
-            <a:blip r:embed="rId7">
-              <a:extLst>
-                <a:ext uri="{96DAC541-7B7A-43D3-8B79-37D633B846F1}">
-                  <asvg:svgBlip xmlns:asvg="http://schemas.microsoft.com/office/drawing/2016/SVG/main" r:embed="rId8"/>
-                </a:ext>
-              </a:extLst>
-            </a:blip>
-            <a:stretch>
-              <a:fillRect/>
-            </a:stretch>
-          </p:blipFill>
-          <p:spPr>
-            <a:xfrm>
-              <a:off x="3836986" y="18584802"/>
-              <a:ext cx="1676757" cy="1676757"/>
-            </a:xfrm>
-            <a:prstGeom prst="rect">
-              <a:avLst/>
-            </a:prstGeom>
-          </p:spPr>
-        </p:pic>
-        <p:pic>
-          <p:nvPicPr>
-            <p:cNvPr id="121" name="Graphic 120" descr="Document with solid fill">
-              <a:extLst>
-                <a:ext uri="{FF2B5EF4-FFF2-40B4-BE49-F238E27FC236}">
-                  <a16:creationId xmlns:a16="http://schemas.microsoft.com/office/drawing/2014/main" id="{9A7FF259-FA79-C04A-27C7-5666BA552DE4}"/>
-                </a:ext>
-              </a:extLst>
-            </p:cNvPr>
-            <p:cNvPicPr>
-              <a:picLocks noChangeAspect="1"/>
-            </p:cNvPicPr>
-            <p:nvPr/>
-          </p:nvPicPr>
-          <p:blipFill>
-            <a:blip r:embed="rId9">
-              <a:extLst>
-                <a:ext uri="{96DAC541-7B7A-43D3-8B79-37D633B846F1}">
-                  <asvg:svgBlip xmlns:asvg="http://schemas.microsoft.com/office/drawing/2016/SVG/main" r:embed="rId10"/>
-                </a:ext>
-              </a:extLst>
-            </a:blip>
-            <a:stretch>
-              <a:fillRect/>
-            </a:stretch>
-          </p:blipFill>
-          <p:spPr>
-            <a:xfrm>
-              <a:off x="1939924" y="18109350"/>
-              <a:ext cx="2536825" cy="2536825"/>
-            </a:xfrm>
-            <a:prstGeom prst="rect">
-              <a:avLst/>
-            </a:prstGeom>
-          </p:spPr>
-        </p:pic>
-      </p:grpSp>
-      <p:grpSp>
-        <p:nvGrpSpPr>
-          <p:cNvPr id="91" name="Group 90">
-            <a:extLst>
-              <a:ext uri="{FF2B5EF4-FFF2-40B4-BE49-F238E27FC236}">
-                <a16:creationId xmlns:a16="http://schemas.microsoft.com/office/drawing/2014/main" id="{58AADD96-942D-E95B-B1E7-25F4E2905E02}"/>
-              </a:ext>
-            </a:extLst>
-          </p:cNvPr>
-          <p:cNvGrpSpPr/>
-          <p:nvPr/>
-        </p:nvGrpSpPr>
-        <p:grpSpPr>
-          <a:xfrm>
-            <a:off x="11122891" y="16906275"/>
-            <a:ext cx="7023100" cy="3919143"/>
-            <a:chOff x="12363450" y="4232467"/>
-            <a:chExt cx="9277350" cy="5044882"/>
-          </a:xfrm>
-        </p:grpSpPr>
-        <p:sp>
-          <p:nvSpPr>
-            <p:cNvPr id="104" name="Rectangle: Rounded Corners 103">
-              <a:extLst>
-                <a:ext uri="{FF2B5EF4-FFF2-40B4-BE49-F238E27FC236}">
-                  <a16:creationId xmlns:a16="http://schemas.microsoft.com/office/drawing/2014/main" id="{8CE5F9D7-906C-B109-E9C5-E0D38401E58F}"/>
-                </a:ext>
-              </a:extLst>
-            </p:cNvPr>
-            <p:cNvSpPr/>
-            <p:nvPr/>
-          </p:nvSpPr>
-          <p:spPr>
-            <a:xfrm>
-              <a:off x="12363450" y="4232467"/>
-              <a:ext cx="9277350" cy="5044882"/>
-            </a:xfrm>
-            <a:prstGeom prst="roundRect">
+            <a:prstGeom prst="rightArrow">
               <a:avLst/>
             </a:prstGeom>
             <a:gradFill flip="none" rotWithShape="1">
@@ -27820,16 +26270,52 @@
             <a:lstStyle/>
             <a:p>
               <a:pPr algn="ctr"/>
-              <a:endParaRPr lang="en-IE" sz="3200" b="1" dirty="0"/>
+              <a:endParaRPr lang="en-IE"/>
+            </a:p>
+          </p:txBody>
+        </p:sp>
+        <p:sp>
+          <p:nvSpPr>
+            <p:cNvPr id="23" name="TextBox 22">
+              <a:extLst>
+                <a:ext uri="{FF2B5EF4-FFF2-40B4-BE49-F238E27FC236}">
+                  <a16:creationId xmlns:a16="http://schemas.microsoft.com/office/drawing/2014/main" id="{5E2DD160-6B4C-56D8-D2E7-C83E10664427}"/>
+                </a:ext>
+              </a:extLst>
+            </p:cNvPr>
+            <p:cNvSpPr txBox="1"/>
+            <p:nvPr/>
+          </p:nvSpPr>
+          <p:spPr>
+            <a:xfrm>
+              <a:off x="22412325" y="3995424"/>
+              <a:ext cx="6657975" cy="830997"/>
+            </a:xfrm>
+            <a:prstGeom prst="rect">
+              <a:avLst/>
+            </a:prstGeom>
+            <a:noFill/>
+          </p:spPr>
+          <p:txBody>
+            <a:bodyPr wrap="square" rtlCol="0">
+              <a:spAutoFit/>
+            </a:bodyPr>
+            <a:lstStyle/>
+            <a:p>
+              <a:pPr algn="ctr"/>
+              <a:r>
+                <a:rPr lang="en-IE" sz="4800" b="1" i="1" dirty="0"/>
+                <a:t>3). Wait Until Leader</a:t>
+              </a:r>
             </a:p>
           </p:txBody>
         </p:sp>
         <p:grpSp>
           <p:nvGrpSpPr>
-            <p:cNvPr id="105" name="Group 104">
+            <p:cNvPr id="29" name="Group 28">
               <a:extLst>
                 <a:ext uri="{FF2B5EF4-FFF2-40B4-BE49-F238E27FC236}">
-                  <a16:creationId xmlns:a16="http://schemas.microsoft.com/office/drawing/2014/main" id="{EFB25828-2711-D2B1-17B2-15EC5A261F83}"/>
+                  <a16:creationId xmlns:a16="http://schemas.microsoft.com/office/drawing/2014/main" id="{4A6E0309-BA76-2C37-BF97-83DA109EC708}"/>
                 </a:ext>
               </a:extLst>
             </p:cNvPr>
@@ -27838,127 +26324,202 @@
           </p:nvGrpSpPr>
           <p:grpSpPr>
             <a:xfrm>
-              <a:off x="12515850" y="4385666"/>
-              <a:ext cx="9048750" cy="692714"/>
-              <a:chOff x="914400" y="4442816"/>
-              <a:chExt cx="9048750" cy="692714"/>
+              <a:off x="21839238" y="5567707"/>
+              <a:ext cx="7905750" cy="3770158"/>
+              <a:chOff x="12363450" y="4232467"/>
+              <a:chExt cx="9277350" cy="5044882"/>
             </a:xfrm>
           </p:grpSpPr>
           <p:sp>
             <p:nvSpPr>
-              <p:cNvPr id="106" name="TextBox 105">
+              <p:cNvPr id="30" name="Rectangle: Rounded Corners 29">
                 <a:extLst>
                   <a:ext uri="{FF2B5EF4-FFF2-40B4-BE49-F238E27FC236}">
-                    <a16:creationId xmlns:a16="http://schemas.microsoft.com/office/drawing/2014/main" id="{401BD3F1-B161-5045-06D8-A48535812444}"/>
+                    <a16:creationId xmlns:a16="http://schemas.microsoft.com/office/drawing/2014/main" id="{62E450F5-1EAF-54A9-2874-39442B8A056D}"/>
                   </a:ext>
                 </a:extLst>
               </p:cNvPr>
-              <p:cNvSpPr txBox="1"/>
+              <p:cNvSpPr/>
               <p:nvPr/>
             </p:nvSpPr>
             <p:spPr>
               <a:xfrm>
-                <a:off x="914400" y="4442816"/>
-                <a:ext cx="9048750" cy="554636"/>
+                <a:off x="12363450" y="4232467"/>
+                <a:ext cx="9277350" cy="5044882"/>
               </a:xfrm>
-              <a:prstGeom prst="rect">
+              <a:prstGeom prst="roundRect">
                 <a:avLst/>
               </a:prstGeom>
-              <a:noFill/>
+              <a:gradFill flip="none" rotWithShape="1">
+                <a:gsLst>
+                  <a:gs pos="0">
+                    <a:schemeClr val="accent1">
+                      <a:shade val="30000"/>
+                      <a:satMod val="115000"/>
+                    </a:schemeClr>
+                  </a:gs>
+                  <a:gs pos="50000">
+                    <a:schemeClr val="accent1">
+                      <a:shade val="67500"/>
+                      <a:satMod val="115000"/>
+                    </a:schemeClr>
+                  </a:gs>
+                  <a:gs pos="100000">
+                    <a:schemeClr val="accent1">
+                      <a:shade val="100000"/>
+                      <a:satMod val="115000"/>
+                    </a:schemeClr>
+                  </a:gs>
+                </a:gsLst>
+                <a:lin ang="13500000" scaled="1"/>
+                <a:tileRect/>
+              </a:gradFill>
+              <a:ln w="57150">
+                <a:solidFill>
+                  <a:schemeClr val="tx1"/>
+                </a:solidFill>
+              </a:ln>
             </p:spPr>
+            <p:style>
+              <a:lnRef idx="2">
+                <a:schemeClr val="accent1">
+                  <a:shade val="15000"/>
+                </a:schemeClr>
+              </a:lnRef>
+              <a:fillRef idx="1">
+                <a:schemeClr val="accent1"/>
+              </a:fillRef>
+              <a:effectRef idx="0">
+                <a:schemeClr val="accent1"/>
+              </a:effectRef>
+              <a:fontRef idx="minor">
+                <a:schemeClr val="lt1"/>
+              </a:fontRef>
+            </p:style>
             <p:txBody>
-              <a:bodyPr wrap="square">
-                <a:spAutoFit/>
-              </a:bodyPr>
+              <a:bodyPr rtlCol="0" anchor="ctr"/>
               <a:lstStyle/>
               <a:p>
                 <a:pPr algn="ctr"/>
-                <a:r>
-                  <a:rPr lang="en-IE" sz="2800" b="1" dirty="0">
-                    <a:solidFill>
-                      <a:schemeClr val="bg1"/>
-                    </a:solidFill>
-                  </a:rPr>
-                  <a:t>Run Job</a:t>
-                </a:r>
+                <a:endParaRPr lang="en-IE" sz="3200" b="1" dirty="0"/>
               </a:p>
             </p:txBody>
           </p:sp>
-          <p:cxnSp>
-            <p:nvCxnSpPr>
-              <p:cNvPr id="107" name="Straight Connector 106">
+          <p:grpSp>
+            <p:nvGrpSpPr>
+              <p:cNvPr id="31" name="Group 30">
                 <a:extLst>
                   <a:ext uri="{FF2B5EF4-FFF2-40B4-BE49-F238E27FC236}">
-                    <a16:creationId xmlns:a16="http://schemas.microsoft.com/office/drawing/2014/main" id="{F6133D7E-94E1-7137-40DE-0C6131EF1123}"/>
+                    <a16:creationId xmlns:a16="http://schemas.microsoft.com/office/drawing/2014/main" id="{1E3BF374-E77C-233B-E92F-4758AAD130B1}"/>
                   </a:ext>
                 </a:extLst>
               </p:cNvPr>
-              <p:cNvCxnSpPr>
-                <a:cxnSpLocks/>
-              </p:cNvCxnSpPr>
+              <p:cNvGrpSpPr/>
               <p:nvPr/>
-            </p:nvCxnSpPr>
-            <p:spPr>
+            </p:nvGrpSpPr>
+            <p:grpSpPr>
               <a:xfrm>
-                <a:off x="1412269" y="5135530"/>
-                <a:ext cx="8112730" cy="0"/>
+                <a:off x="12515850" y="4385666"/>
+                <a:ext cx="9048750" cy="665187"/>
+                <a:chOff x="914400" y="4442816"/>
+                <a:chExt cx="9048750" cy="665187"/>
               </a:xfrm>
-              <a:prstGeom prst="line">
-                <a:avLst/>
-              </a:prstGeom>
-              <a:ln w="19050" cap="flat" cmpd="sng" algn="ctr">
-                <a:solidFill>
-                  <a:schemeClr val="bg1"/>
-                </a:solidFill>
-                <a:prstDash val="dash"/>
-                <a:round/>
-                <a:headEnd type="none" w="med" len="med"/>
-                <a:tailEnd type="none" w="med" len="med"/>
-              </a:ln>
-            </p:spPr>
-            <p:style>
-              <a:lnRef idx="0">
-                <a:scrgbClr r="0" g="0" b="0"/>
-              </a:lnRef>
-              <a:fillRef idx="0">
-                <a:scrgbClr r="0" g="0" b="0"/>
-              </a:fillRef>
-              <a:effectRef idx="0">
-                <a:scrgbClr r="0" g="0" b="0"/>
-              </a:effectRef>
-              <a:fontRef idx="minor">
-                <a:schemeClr val="tx1"/>
-              </a:fontRef>
-            </p:style>
-          </p:cxnSp>
+            </p:grpSpPr>
+            <p:sp>
+              <p:nvSpPr>
+                <p:cNvPr id="32" name="TextBox 31">
+                  <a:extLst>
+                    <a:ext uri="{FF2B5EF4-FFF2-40B4-BE49-F238E27FC236}">
+                      <a16:creationId xmlns:a16="http://schemas.microsoft.com/office/drawing/2014/main" id="{6381B058-26BE-BAB2-79EA-A327C72E9DF2}"/>
+                    </a:ext>
+                  </a:extLst>
+                </p:cNvPr>
+                <p:cNvSpPr txBox="1"/>
+                <p:nvPr/>
+              </p:nvSpPr>
+              <p:spPr>
+                <a:xfrm>
+                  <a:off x="914400" y="4442816"/>
+                  <a:ext cx="9048750" cy="554636"/>
+                </a:xfrm>
+                <a:prstGeom prst="rect">
+                  <a:avLst/>
+                </a:prstGeom>
+                <a:noFill/>
+              </p:spPr>
+              <p:txBody>
+                <a:bodyPr wrap="square">
+                  <a:spAutoFit/>
+                </a:bodyPr>
+                <a:lstStyle/>
+                <a:p>
+                  <a:pPr algn="ctr"/>
+                  <a:r>
+                    <a:rPr lang="en-IE" sz="2800" b="1" dirty="0">
+                      <a:solidFill>
+                        <a:schemeClr val="bg1"/>
+                      </a:solidFill>
+                    </a:rPr>
+                    <a:t>Wait &amp; Retry</a:t>
+                  </a:r>
+                </a:p>
+              </p:txBody>
+            </p:sp>
+            <p:cxnSp>
+              <p:nvCxnSpPr>
+                <p:cNvPr id="33" name="Straight Connector 32">
+                  <a:extLst>
+                    <a:ext uri="{FF2B5EF4-FFF2-40B4-BE49-F238E27FC236}">
+                      <a16:creationId xmlns:a16="http://schemas.microsoft.com/office/drawing/2014/main" id="{69B4F2D9-FA43-58DF-241A-59FC646CE50B}"/>
+                    </a:ext>
+                  </a:extLst>
+                </p:cNvPr>
+                <p:cNvCxnSpPr>
+                  <a:cxnSpLocks/>
+                </p:cNvCxnSpPr>
+                <p:nvPr/>
+              </p:nvCxnSpPr>
+              <p:spPr>
+                <a:xfrm>
+                  <a:off x="1412270" y="5108003"/>
+                  <a:ext cx="8112730" cy="0"/>
+                </a:xfrm>
+                <a:prstGeom prst="line">
+                  <a:avLst/>
+                </a:prstGeom>
+                <a:ln w="19050" cap="flat" cmpd="sng" algn="ctr">
+                  <a:solidFill>
+                    <a:schemeClr val="bg1"/>
+                  </a:solidFill>
+                  <a:prstDash val="dash"/>
+                  <a:round/>
+                  <a:headEnd type="none" w="med" len="med"/>
+                  <a:tailEnd type="none" w="med" len="med"/>
+                </a:ln>
+              </p:spPr>
+              <p:style>
+                <a:lnRef idx="0">
+                  <a:scrgbClr r="0" g="0" b="0"/>
+                </a:lnRef>
+                <a:fillRef idx="0">
+                  <a:scrgbClr r="0" g="0" b="0"/>
+                </a:fillRef>
+                <a:effectRef idx="0">
+                  <a:scrgbClr r="0" g="0" b="0"/>
+                </a:effectRef>
+                <a:fontRef idx="minor">
+                  <a:schemeClr val="tx1"/>
+                </a:fontRef>
+              </p:style>
+            </p:cxnSp>
+          </p:grpSp>
         </p:grpSp>
-      </p:grpSp>
-      <p:grpSp>
-        <p:nvGrpSpPr>
-          <p:cNvPr id="132" name="Group 131">
-            <a:extLst>
-              <a:ext uri="{FF2B5EF4-FFF2-40B4-BE49-F238E27FC236}">
-                <a16:creationId xmlns:a16="http://schemas.microsoft.com/office/drawing/2014/main" id="{5D7E449F-558E-2A82-83D0-0DD18C718BCB}"/>
-              </a:ext>
-            </a:extLst>
-          </p:cNvPr>
-          <p:cNvGrpSpPr/>
-          <p:nvPr/>
-        </p:nvGrpSpPr>
-        <p:grpSpPr>
-          <a:xfrm>
-            <a:off x="12985467" y="17592118"/>
-            <a:ext cx="4074674" cy="2638970"/>
-            <a:chOff x="15089626" y="18117665"/>
-            <a:chExt cx="2911547" cy="2214581"/>
-          </a:xfrm>
-        </p:grpSpPr>
         <p:pic>
           <p:nvPicPr>
-            <p:cNvPr id="130" name="Graphic 129" descr="Database outline">
+            <p:cNvPr id="39" name="Graphic 38" descr="Alarm Ringing outline">
               <a:extLst>
                 <a:ext uri="{FF2B5EF4-FFF2-40B4-BE49-F238E27FC236}">
-                  <a16:creationId xmlns:a16="http://schemas.microsoft.com/office/drawing/2014/main" id="{A1B2ADF8-6F5C-75F1-C094-9E6AE9F71215}"/>
+                  <a16:creationId xmlns:a16="http://schemas.microsoft.com/office/drawing/2014/main" id="{A06521CE-5F19-1FCB-0285-A48FE6ADAEA9}"/>
                 </a:ext>
               </a:extLst>
             </p:cNvPr>
@@ -27968,10 +26529,10 @@
             <p:nvPr/>
           </p:nvPicPr>
           <p:blipFill>
-            <a:blip r:embed="rId11">
+            <a:blip r:embed="rId3">
               <a:extLst>
                 <a:ext uri="{96DAC541-7B7A-43D3-8B79-37D633B846F1}">
-                  <asvg:svgBlip xmlns:asvg="http://schemas.microsoft.com/office/drawing/2016/SVG/main" r:embed="rId12"/>
+                  <asvg:svgBlip xmlns:asvg="http://schemas.microsoft.com/office/drawing/2016/SVG/main" r:embed="rId4"/>
                 </a:ext>
               </a:extLst>
             </a:blip>
@@ -27981,8 +26542,8 @@
           </p:blipFill>
           <p:spPr>
             <a:xfrm>
-              <a:off x="15089626" y="18117665"/>
-              <a:ext cx="2214581" cy="2214581"/>
+              <a:off x="27117170" y="6665603"/>
+              <a:ext cx="2105025" cy="2105025"/>
             </a:xfrm>
             <a:prstGeom prst="rect">
               <a:avLst/>
@@ -27991,10 +26552,10 @@
         </p:pic>
         <p:pic>
           <p:nvPicPr>
-            <p:cNvPr id="131" name="Graphic 130" descr="Gears outline">
+            <p:cNvPr id="41" name="Graphic 40" descr="Snooze outline">
               <a:extLst>
                 <a:ext uri="{FF2B5EF4-FFF2-40B4-BE49-F238E27FC236}">
-                  <a16:creationId xmlns:a16="http://schemas.microsoft.com/office/drawing/2014/main" id="{728D8DAC-7377-4510-7121-8CD0C52F6925}"/>
+                  <a16:creationId xmlns:a16="http://schemas.microsoft.com/office/drawing/2014/main" id="{05D21A47-FEE5-33CD-5150-CCD8C98322C0}"/>
                 </a:ext>
               </a:extLst>
             </p:cNvPr>
@@ -28004,10 +26565,10 @@
             <p:nvPr/>
           </p:nvPicPr>
           <p:blipFill>
-            <a:blip r:embed="rId13">
+            <a:blip r:embed="rId5">
               <a:extLst>
                 <a:ext uri="{96DAC541-7B7A-43D3-8B79-37D633B846F1}">
-                  <asvg:svgBlip xmlns:asvg="http://schemas.microsoft.com/office/drawing/2016/SVG/main" r:embed="rId14"/>
+                  <asvg:svgBlip xmlns:asvg="http://schemas.microsoft.com/office/drawing/2016/SVG/main" r:embed="rId6"/>
                 </a:ext>
               </a:extLst>
             </a:blip>
@@ -28017,101 +26578,20 @@
           </p:blipFill>
           <p:spPr>
             <a:xfrm>
-              <a:off x="16511777" y="18356709"/>
-              <a:ext cx="1489396" cy="1489396"/>
+              <a:off x="22468970" y="6417953"/>
+              <a:ext cx="2105025" cy="2105025"/>
             </a:xfrm>
             <a:prstGeom prst="rect">
               <a:avLst/>
             </a:prstGeom>
           </p:spPr>
         </p:pic>
-      </p:grpSp>
-      <p:sp>
-        <p:nvSpPr>
-          <p:cNvPr id="138" name="Minus Sign 137">
-            <a:extLst>
-              <a:ext uri="{FF2B5EF4-FFF2-40B4-BE49-F238E27FC236}">
-                <a16:creationId xmlns:a16="http://schemas.microsoft.com/office/drawing/2014/main" id="{C48D16BE-8A2E-3ACD-419B-BB62C0A67363}"/>
-              </a:ext>
-            </a:extLst>
-          </p:cNvPr>
-          <p:cNvSpPr/>
-          <p:nvPr/>
-        </p:nvSpPr>
-        <p:spPr>
-          <a:xfrm rot="2461338">
-            <a:off x="25800995" y="18645329"/>
-            <a:ext cx="4601827" cy="763631"/>
-          </a:xfrm>
-          <a:prstGeom prst="mathMinus">
-            <a:avLst/>
-          </a:prstGeom>
-          <a:solidFill>
-            <a:schemeClr val="accent6">
-              <a:lumMod val="60000"/>
-              <a:lumOff val="40000"/>
-            </a:schemeClr>
-          </a:solidFill>
-          <a:ln>
-            <a:solidFill>
-              <a:schemeClr val="accent6">
-                <a:lumMod val="60000"/>
-                <a:lumOff val="40000"/>
-              </a:schemeClr>
-            </a:solidFill>
-          </a:ln>
-        </p:spPr>
-        <p:style>
-          <a:lnRef idx="2">
-            <a:schemeClr val="accent1">
-              <a:shade val="15000"/>
-            </a:schemeClr>
-          </a:lnRef>
-          <a:fillRef idx="1">
-            <a:schemeClr val="accent1"/>
-          </a:fillRef>
-          <a:effectRef idx="0">
-            <a:schemeClr val="accent1"/>
-          </a:effectRef>
-          <a:fontRef idx="minor">
-            <a:schemeClr val="lt1"/>
-          </a:fontRef>
-        </p:style>
-        <p:txBody>
-          <a:bodyPr rtlCol="0" anchor="ctr"/>
-          <a:lstStyle/>
-          <a:p>
-            <a:pPr algn="ctr"/>
-            <a:endParaRPr lang="en-IE"/>
-          </a:p>
-        </p:txBody>
-      </p:sp>
-      <p:grpSp>
-        <p:nvGrpSpPr>
-          <p:cNvPr id="148" name="Group 147">
-            <a:extLst>
-              <a:ext uri="{FF2B5EF4-FFF2-40B4-BE49-F238E27FC236}">
-                <a16:creationId xmlns:a16="http://schemas.microsoft.com/office/drawing/2014/main" id="{FE2729AB-7D31-09EC-B6D4-DD02446E99F7}"/>
-              </a:ext>
-            </a:extLst>
-          </p:cNvPr>
-          <p:cNvGrpSpPr/>
-          <p:nvPr/>
-        </p:nvGrpSpPr>
-        <p:grpSpPr>
-          <a:xfrm>
-            <a:off x="20892445" y="18037170"/>
-            <a:ext cx="8251657" cy="2105025"/>
-            <a:chOff x="20920154" y="17681571"/>
-            <a:chExt cx="8251657" cy="2105025"/>
-          </a:xfrm>
-        </p:grpSpPr>
         <p:sp>
           <p:nvSpPr>
-            <p:cNvPr id="99" name="Arrow: Right 98">
+            <p:cNvPr id="43" name="Arrow: Right 42">
               <a:extLst>
                 <a:ext uri="{FF2B5EF4-FFF2-40B4-BE49-F238E27FC236}">
-                  <a16:creationId xmlns:a16="http://schemas.microsoft.com/office/drawing/2014/main" id="{9BFB6834-0C7D-E9A4-ED0F-4C588162AC49}"/>
+                  <a16:creationId xmlns:a16="http://schemas.microsoft.com/office/drawing/2014/main" id="{A2F234AD-9CCE-B2A5-133D-DF97E9659C03}"/>
                 </a:ext>
               </a:extLst>
             </p:cNvPr>
@@ -28120,7 +26600,7 @@
           </p:nvSpPr>
           <p:spPr>
             <a:xfrm>
-              <a:off x="24851915" y="18210209"/>
+              <a:off x="24806275" y="7169995"/>
               <a:ext cx="1828800" cy="981939"/>
             </a:xfrm>
             <a:prstGeom prst="rightArrow">
@@ -28162,10 +26642,10 @@
         </p:sp>
         <p:grpSp>
           <p:nvGrpSpPr>
-            <p:cNvPr id="135" name="Group 134">
+            <p:cNvPr id="55" name="Group 54">
               <a:extLst>
                 <a:ext uri="{FF2B5EF4-FFF2-40B4-BE49-F238E27FC236}">
-                  <a16:creationId xmlns:a16="http://schemas.microsoft.com/office/drawing/2014/main" id="{8D3338D0-9143-5ED2-2FAA-962AD88F8957}"/>
+                  <a16:creationId xmlns:a16="http://schemas.microsoft.com/office/drawing/2014/main" id="{8438DC7B-472C-B3E3-A01D-765CC1D09460}"/>
                 </a:ext>
               </a:extLst>
             </p:cNvPr>
@@ -28174,18 +26654,1034 @@
           </p:nvGrpSpPr>
           <p:grpSpPr>
             <a:xfrm>
-              <a:off x="21995031" y="17702978"/>
-              <a:ext cx="2427822" cy="1996402"/>
-              <a:chOff x="26375777" y="17930059"/>
+              <a:off x="5122141" y="2633807"/>
+              <a:ext cx="20817737" cy="1143120"/>
+              <a:chOff x="4899243" y="2108980"/>
+              <a:chExt cx="18821400" cy="1107996"/>
+            </a:xfrm>
+          </p:grpSpPr>
+          <p:cxnSp>
+            <p:nvCxnSpPr>
+              <p:cNvPr id="50" name="Straight Connector 49">
+                <a:extLst>
+                  <a:ext uri="{FF2B5EF4-FFF2-40B4-BE49-F238E27FC236}">
+                    <a16:creationId xmlns:a16="http://schemas.microsoft.com/office/drawing/2014/main" id="{4F17CA91-6386-7A67-939A-4EBB6125772E}"/>
+                  </a:ext>
+                </a:extLst>
+              </p:cNvPr>
+              <p:cNvCxnSpPr>
+                <a:cxnSpLocks/>
+              </p:cNvCxnSpPr>
+              <p:nvPr/>
+            </p:nvCxnSpPr>
+            <p:spPr>
+              <a:xfrm>
+                <a:off x="4953000" y="3108744"/>
+                <a:ext cx="18649794" cy="0"/>
+              </a:xfrm>
+              <a:prstGeom prst="line">
+                <a:avLst/>
+              </a:prstGeom>
+              <a:ln w="57150">
+                <a:solidFill>
+                  <a:schemeClr val="tx1">
+                    <a:lumMod val="65000"/>
+                    <a:lumOff val="35000"/>
+                  </a:schemeClr>
+                </a:solidFill>
+                <a:prstDash val="dash"/>
+              </a:ln>
+            </p:spPr>
+            <p:style>
+              <a:lnRef idx="2">
+                <a:schemeClr val="dk1"/>
+              </a:lnRef>
+              <a:fillRef idx="0">
+                <a:schemeClr val="dk1"/>
+              </a:fillRef>
+              <a:effectRef idx="1">
+                <a:schemeClr val="dk1"/>
+              </a:effectRef>
+              <a:fontRef idx="minor">
+                <a:schemeClr val="tx1"/>
+              </a:fontRef>
+            </p:style>
+          </p:cxnSp>
+          <p:sp>
+            <p:nvSpPr>
+              <p:cNvPr id="54" name="TextBox 53">
+                <a:extLst>
+                  <a:ext uri="{FF2B5EF4-FFF2-40B4-BE49-F238E27FC236}">
+                    <a16:creationId xmlns:a16="http://schemas.microsoft.com/office/drawing/2014/main" id="{914435C2-F2C9-4CB1-DFE2-178BD5F92F20}"/>
+                  </a:ext>
+                </a:extLst>
+              </p:cNvPr>
+              <p:cNvSpPr txBox="1"/>
+              <p:nvPr/>
+            </p:nvSpPr>
+            <p:spPr>
+              <a:xfrm>
+                <a:off x="4899243" y="2108980"/>
+                <a:ext cx="18821400" cy="1107996"/>
+              </a:xfrm>
+              <a:prstGeom prst="rect">
+                <a:avLst/>
+              </a:prstGeom>
+              <a:noFill/>
+            </p:spPr>
+            <p:txBody>
+              <a:bodyPr wrap="square" rtlCol="0">
+                <a:spAutoFit/>
+              </a:bodyPr>
+              <a:lstStyle/>
+              <a:p>
+                <a:pPr algn="ctr"/>
+                <a:r>
+                  <a:rPr lang="en-IE" sz="6600" b="1" i="1" dirty="0">
+                    <a:solidFill>
+                      <a:schemeClr val="tx1">
+                        <a:lumMod val="65000"/>
+                        <a:lumOff val="35000"/>
+                      </a:schemeClr>
+                    </a:solidFill>
+                  </a:rPr>
+                  <a:t>i). Leader Election Coordinated Across HPC Jobs</a:t>
+                </a:r>
+              </a:p>
+            </p:txBody>
+          </p:sp>
+        </p:grpSp>
+        <p:grpSp>
+          <p:nvGrpSpPr>
+            <p:cNvPr id="56" name="Group 55">
+              <a:extLst>
+                <a:ext uri="{FF2B5EF4-FFF2-40B4-BE49-F238E27FC236}">
+                  <a16:creationId xmlns:a16="http://schemas.microsoft.com/office/drawing/2014/main" id="{B415DE28-1A6C-8362-F4F8-741555000F08}"/>
+                </a:ext>
+              </a:extLst>
+            </p:cNvPr>
+            <p:cNvGrpSpPr/>
+            <p:nvPr/>
+          </p:nvGrpSpPr>
+          <p:grpSpPr>
+            <a:xfrm>
+              <a:off x="5280891" y="14525624"/>
+              <a:ext cx="18859500" cy="1107996"/>
+              <a:chOff x="4953000" y="2082800"/>
+              <a:chExt cx="18859500" cy="1107996"/>
+            </a:xfrm>
+          </p:grpSpPr>
+          <p:cxnSp>
+            <p:nvCxnSpPr>
+              <p:cNvPr id="57" name="Straight Connector 56">
+                <a:extLst>
+                  <a:ext uri="{FF2B5EF4-FFF2-40B4-BE49-F238E27FC236}">
+                    <a16:creationId xmlns:a16="http://schemas.microsoft.com/office/drawing/2014/main" id="{2A8FEBA9-B1C8-76B3-0138-002F653CAB81}"/>
+                  </a:ext>
+                </a:extLst>
+              </p:cNvPr>
+              <p:cNvCxnSpPr>
+                <a:cxnSpLocks/>
+              </p:cNvCxnSpPr>
+              <p:nvPr/>
+            </p:nvCxnSpPr>
+            <p:spPr>
+              <a:xfrm>
+                <a:off x="4953000" y="3108744"/>
+                <a:ext cx="18649794" cy="0"/>
+              </a:xfrm>
+              <a:prstGeom prst="line">
+                <a:avLst/>
+              </a:prstGeom>
+              <a:ln w="57150">
+                <a:solidFill>
+                  <a:schemeClr val="tx1">
+                    <a:lumMod val="65000"/>
+                    <a:lumOff val="35000"/>
+                  </a:schemeClr>
+                </a:solidFill>
+                <a:prstDash val="dash"/>
+              </a:ln>
+            </p:spPr>
+            <p:style>
+              <a:lnRef idx="2">
+                <a:schemeClr val="dk1"/>
+              </a:lnRef>
+              <a:fillRef idx="0">
+                <a:schemeClr val="dk1"/>
+              </a:fillRef>
+              <a:effectRef idx="1">
+                <a:schemeClr val="dk1"/>
+              </a:effectRef>
+              <a:fontRef idx="minor">
+                <a:schemeClr val="tx1"/>
+              </a:fontRef>
+            </p:style>
+          </p:cxnSp>
+          <p:sp>
+            <p:nvSpPr>
+              <p:cNvPr id="58" name="TextBox 57">
+                <a:extLst>
+                  <a:ext uri="{FF2B5EF4-FFF2-40B4-BE49-F238E27FC236}">
+                    <a16:creationId xmlns:a16="http://schemas.microsoft.com/office/drawing/2014/main" id="{FC04D604-5EE5-1D96-7D9A-76504BC438EE}"/>
+                  </a:ext>
+                </a:extLst>
+              </p:cNvPr>
+              <p:cNvSpPr txBox="1"/>
+              <p:nvPr/>
+            </p:nvSpPr>
+            <p:spPr>
+              <a:xfrm>
+                <a:off x="4991100" y="2082800"/>
+                <a:ext cx="18821400" cy="1107996"/>
+              </a:xfrm>
+              <a:prstGeom prst="rect">
+                <a:avLst/>
+              </a:prstGeom>
+              <a:noFill/>
+            </p:spPr>
+            <p:txBody>
+              <a:bodyPr wrap="square" rtlCol="0">
+                <a:spAutoFit/>
+              </a:bodyPr>
+              <a:lstStyle/>
+              <a:p>
+                <a:pPr algn="ctr"/>
+                <a:r>
+                  <a:rPr lang="en-IE" sz="6600" b="1" i="1" dirty="0">
+                    <a:solidFill>
+                      <a:schemeClr val="tx1">
+                        <a:lumMod val="65000"/>
+                        <a:lumOff val="35000"/>
+                      </a:schemeClr>
+                    </a:solidFill>
+                  </a:rPr>
+                  <a:t>ii). Hosting Node of Leader Owns the OS Lock</a:t>
+                </a:r>
+              </a:p>
+            </p:txBody>
+          </p:sp>
+        </p:grpSp>
+        <p:sp>
+          <p:nvSpPr>
+            <p:cNvPr id="87" name="Rectangle: Rounded Corners 86">
+              <a:extLst>
+                <a:ext uri="{FF2B5EF4-FFF2-40B4-BE49-F238E27FC236}">
+                  <a16:creationId xmlns:a16="http://schemas.microsoft.com/office/drawing/2014/main" id="{9F6B5165-62F2-45C5-C2B0-48352441AE46}"/>
+                </a:ext>
+              </a:extLst>
+            </p:cNvPr>
+            <p:cNvSpPr/>
+            <p:nvPr/>
+          </p:nvSpPr>
+          <p:spPr>
+            <a:xfrm>
+              <a:off x="188191" y="15722603"/>
+              <a:ext cx="29851350" cy="5918192"/>
+            </a:xfrm>
+            <a:prstGeom prst="roundRect">
+              <a:avLst/>
+            </a:prstGeom>
+            <a:solidFill>
+              <a:srgbClr val="E6EAED"/>
+            </a:solidFill>
+            <a:ln w="57150">
+              <a:solidFill>
+                <a:schemeClr val="tx1"/>
+              </a:solidFill>
+            </a:ln>
+          </p:spPr>
+          <p:style>
+            <a:lnRef idx="2">
+              <a:schemeClr val="accent1">
+                <a:shade val="15000"/>
+              </a:schemeClr>
+            </a:lnRef>
+            <a:fillRef idx="1">
+              <a:schemeClr val="accent1"/>
+            </a:fillRef>
+            <a:effectRef idx="0">
+              <a:schemeClr val="accent1"/>
+            </a:effectRef>
+            <a:fontRef idx="minor">
+              <a:schemeClr val="lt1"/>
+            </a:fontRef>
+          </p:style>
+          <p:txBody>
+            <a:bodyPr rtlCol="0" anchor="ctr"/>
+            <a:lstStyle/>
+            <a:p>
+              <a:pPr algn="ctr"/>
+              <a:endParaRPr lang="en-IE" b="1" dirty="0"/>
+            </a:p>
+          </p:txBody>
+        </p:sp>
+        <p:sp>
+          <p:nvSpPr>
+            <p:cNvPr id="88" name="TextBox 87">
+              <a:extLst>
+                <a:ext uri="{FF2B5EF4-FFF2-40B4-BE49-F238E27FC236}">
+                  <a16:creationId xmlns:a16="http://schemas.microsoft.com/office/drawing/2014/main" id="{1A58CC51-694B-6303-6B7E-1DE40BCD20AB}"/>
+                </a:ext>
+              </a:extLst>
+            </p:cNvPr>
+            <p:cNvSpPr txBox="1"/>
+            <p:nvPr/>
+          </p:nvSpPr>
+          <p:spPr>
+            <a:xfrm>
+              <a:off x="-289708" y="15798918"/>
+              <a:ext cx="9277350" cy="830997"/>
+            </a:xfrm>
+            <a:prstGeom prst="rect">
+              <a:avLst/>
+            </a:prstGeom>
+            <a:noFill/>
+          </p:spPr>
+          <p:txBody>
+            <a:bodyPr wrap="square" rtlCol="0">
+              <a:spAutoFit/>
+            </a:bodyPr>
+            <a:lstStyle/>
+            <a:p>
+              <a:pPr algn="ctr"/>
+              <a:r>
+                <a:rPr lang="en-IE" sz="4800" b="1" i="1" dirty="0"/>
+                <a:t>4). Acquire File Lock</a:t>
+              </a:r>
+            </a:p>
+          </p:txBody>
+        </p:sp>
+        <p:sp>
+          <p:nvSpPr>
+            <p:cNvPr id="90" name="TextBox 89">
+              <a:extLst>
+                <a:ext uri="{FF2B5EF4-FFF2-40B4-BE49-F238E27FC236}">
+                  <a16:creationId xmlns:a16="http://schemas.microsoft.com/office/drawing/2014/main" id="{3304CF6E-B326-E521-B77C-B4D210C04B06}"/>
+                </a:ext>
+              </a:extLst>
+            </p:cNvPr>
+            <p:cNvSpPr txBox="1"/>
+            <p:nvPr/>
+          </p:nvSpPr>
+          <p:spPr>
+            <a:xfrm>
+              <a:off x="10337075" y="15798918"/>
+              <a:ext cx="9277350" cy="830997"/>
+            </a:xfrm>
+            <a:prstGeom prst="rect">
+              <a:avLst/>
+            </a:prstGeom>
+            <a:noFill/>
+          </p:spPr>
+          <p:txBody>
+            <a:bodyPr wrap="square" rtlCol="0">
+              <a:spAutoFit/>
+            </a:bodyPr>
+            <a:lstStyle/>
+            <a:p>
+              <a:pPr algn="ctr"/>
+              <a:r>
+                <a:rPr lang="en-IE" sz="4800" b="1" i="1" dirty="0"/>
+                <a:t>5). Execute Work Under Lock</a:t>
+              </a:r>
+            </a:p>
+          </p:txBody>
+        </p:sp>
+        <p:sp>
+          <p:nvSpPr>
+            <p:cNvPr id="92" name="Arrow: Right 91">
+              <a:extLst>
+                <a:ext uri="{FF2B5EF4-FFF2-40B4-BE49-F238E27FC236}">
+                  <a16:creationId xmlns:a16="http://schemas.microsoft.com/office/drawing/2014/main" id="{AE345429-4113-2B59-9FBD-F7FEC818DA28}"/>
+                </a:ext>
+              </a:extLst>
+            </p:cNvPr>
+            <p:cNvSpPr/>
+            <p:nvPr/>
+          </p:nvSpPr>
+          <p:spPr>
+            <a:xfrm>
+              <a:off x="8768936" y="18207958"/>
+              <a:ext cx="1979305" cy="1413703"/>
+            </a:xfrm>
+            <a:prstGeom prst="rightArrow">
+              <a:avLst/>
+            </a:prstGeom>
+            <a:gradFill flip="none" rotWithShape="1">
+              <a:gsLst>
+                <a:gs pos="0">
+                  <a:schemeClr val="accent1">
+                    <a:shade val="30000"/>
+                    <a:satMod val="115000"/>
+                  </a:schemeClr>
+                </a:gs>
+                <a:gs pos="50000">
+                  <a:schemeClr val="accent1">
+                    <a:shade val="67500"/>
+                    <a:satMod val="115000"/>
+                  </a:schemeClr>
+                </a:gs>
+                <a:gs pos="100000">
+                  <a:schemeClr val="accent1">
+                    <a:shade val="100000"/>
+                    <a:satMod val="115000"/>
+                  </a:schemeClr>
+                </a:gs>
+              </a:gsLst>
+              <a:lin ang="13500000" scaled="1"/>
+              <a:tileRect/>
+            </a:gradFill>
+            <a:ln w="57150">
+              <a:solidFill>
+                <a:schemeClr val="tx1"/>
+              </a:solidFill>
+            </a:ln>
+          </p:spPr>
+          <p:style>
+            <a:lnRef idx="2">
+              <a:schemeClr val="accent1">
+                <a:shade val="15000"/>
+              </a:schemeClr>
+            </a:lnRef>
+            <a:fillRef idx="1">
+              <a:schemeClr val="accent1"/>
+            </a:fillRef>
+            <a:effectRef idx="0">
+              <a:schemeClr val="accent1"/>
+            </a:effectRef>
+            <a:fontRef idx="minor">
+              <a:schemeClr val="lt1"/>
+            </a:fontRef>
+          </p:style>
+          <p:txBody>
+            <a:bodyPr rtlCol="0" anchor="ctr"/>
+            <a:lstStyle/>
+            <a:p>
+              <a:pPr algn="ctr"/>
+              <a:endParaRPr lang="en-IE"/>
+            </a:p>
+          </p:txBody>
+        </p:sp>
+        <p:sp>
+          <p:nvSpPr>
+            <p:cNvPr id="93" name="Arrow: Right 92">
+              <a:extLst>
+                <a:ext uri="{FF2B5EF4-FFF2-40B4-BE49-F238E27FC236}">
+                  <a16:creationId xmlns:a16="http://schemas.microsoft.com/office/drawing/2014/main" id="{9A92287C-9ADC-C5E8-F927-2ABB19F06159}"/>
+                </a:ext>
+              </a:extLst>
+            </p:cNvPr>
+            <p:cNvSpPr/>
+            <p:nvPr/>
+          </p:nvSpPr>
+          <p:spPr>
+            <a:xfrm>
+              <a:off x="18640529" y="18100710"/>
+              <a:ext cx="2242312" cy="1440594"/>
+            </a:xfrm>
+            <a:prstGeom prst="rightArrow">
+              <a:avLst/>
+            </a:prstGeom>
+            <a:gradFill flip="none" rotWithShape="1">
+              <a:gsLst>
+                <a:gs pos="0">
+                  <a:schemeClr val="accent1">
+                    <a:shade val="30000"/>
+                    <a:satMod val="115000"/>
+                  </a:schemeClr>
+                </a:gs>
+                <a:gs pos="50000">
+                  <a:schemeClr val="accent1">
+                    <a:shade val="67500"/>
+                    <a:satMod val="115000"/>
+                  </a:schemeClr>
+                </a:gs>
+                <a:gs pos="100000">
+                  <a:schemeClr val="accent1">
+                    <a:shade val="100000"/>
+                    <a:satMod val="115000"/>
+                  </a:schemeClr>
+                </a:gs>
+              </a:gsLst>
+              <a:lin ang="13500000" scaled="1"/>
+              <a:tileRect/>
+            </a:gradFill>
+            <a:ln w="57150">
+              <a:solidFill>
+                <a:schemeClr val="tx1"/>
+              </a:solidFill>
+            </a:ln>
+          </p:spPr>
+          <p:style>
+            <a:lnRef idx="2">
+              <a:schemeClr val="accent1">
+                <a:shade val="15000"/>
+              </a:schemeClr>
+            </a:lnRef>
+            <a:fillRef idx="1">
+              <a:schemeClr val="accent1"/>
+            </a:fillRef>
+            <a:effectRef idx="0">
+              <a:schemeClr val="accent1"/>
+            </a:effectRef>
+            <a:fontRef idx="minor">
+              <a:schemeClr val="lt1"/>
+            </a:fontRef>
+          </p:style>
+          <p:txBody>
+            <a:bodyPr rtlCol="0" anchor="ctr"/>
+            <a:lstStyle/>
+            <a:p>
+              <a:pPr algn="ctr"/>
+              <a:endParaRPr lang="en-IE"/>
+            </a:p>
+          </p:txBody>
+        </p:sp>
+        <p:sp>
+          <p:nvSpPr>
+            <p:cNvPr id="94" name="TextBox 93">
+              <a:extLst>
+                <a:ext uri="{FF2B5EF4-FFF2-40B4-BE49-F238E27FC236}">
+                  <a16:creationId xmlns:a16="http://schemas.microsoft.com/office/drawing/2014/main" id="{DC31B3FA-AD41-3E67-4907-5195F0A775AF}"/>
+                </a:ext>
+              </a:extLst>
+            </p:cNvPr>
+            <p:cNvSpPr txBox="1"/>
+            <p:nvPr/>
+          </p:nvSpPr>
+          <p:spPr>
+            <a:xfrm>
+              <a:off x="22365661" y="15798918"/>
+              <a:ext cx="6657975" cy="830997"/>
+            </a:xfrm>
+            <a:prstGeom prst="rect">
+              <a:avLst/>
+            </a:prstGeom>
+            <a:noFill/>
+          </p:spPr>
+          <p:txBody>
+            <a:bodyPr wrap="square" rtlCol="0">
+              <a:spAutoFit/>
+            </a:bodyPr>
+            <a:lstStyle/>
+            <a:p>
+              <a:pPr algn="ctr"/>
+              <a:r>
+                <a:rPr lang="en-IE" sz="4800" b="1" i="1" dirty="0"/>
+                <a:t>6). Dequeue Mutex</a:t>
+              </a:r>
+            </a:p>
+          </p:txBody>
+        </p:sp>
+        <p:grpSp>
+          <p:nvGrpSpPr>
+            <p:cNvPr id="96" name="Group 95">
+              <a:extLst>
+                <a:ext uri="{FF2B5EF4-FFF2-40B4-BE49-F238E27FC236}">
+                  <a16:creationId xmlns:a16="http://schemas.microsoft.com/office/drawing/2014/main" id="{BEB964F5-01B5-3919-71C3-72F33580F0AB}"/>
+                </a:ext>
+              </a:extLst>
+            </p:cNvPr>
+            <p:cNvGrpSpPr/>
+            <p:nvPr/>
+          </p:nvGrpSpPr>
+          <p:grpSpPr>
+            <a:xfrm>
+              <a:off x="21325242" y="16779966"/>
+              <a:ext cx="8392038" cy="4236049"/>
+              <a:chOff x="12363450" y="4232467"/>
+              <a:chExt cx="9277350" cy="5044882"/>
+            </a:xfrm>
+          </p:grpSpPr>
+          <p:sp>
+            <p:nvSpPr>
+              <p:cNvPr id="100" name="Rectangle: Rounded Corners 99">
+                <a:extLst>
+                  <a:ext uri="{FF2B5EF4-FFF2-40B4-BE49-F238E27FC236}">
+                    <a16:creationId xmlns:a16="http://schemas.microsoft.com/office/drawing/2014/main" id="{D1D4EDCD-A5D1-874D-2060-507433C888D5}"/>
+                  </a:ext>
+                </a:extLst>
+              </p:cNvPr>
+              <p:cNvSpPr/>
+              <p:nvPr/>
+            </p:nvSpPr>
+            <p:spPr>
+              <a:xfrm>
+                <a:off x="12363450" y="4232467"/>
+                <a:ext cx="9277350" cy="5044882"/>
+              </a:xfrm>
+              <a:prstGeom prst="roundRect">
+                <a:avLst/>
+              </a:prstGeom>
+              <a:gradFill flip="none" rotWithShape="1">
+                <a:gsLst>
+                  <a:gs pos="0">
+                    <a:schemeClr val="accent1">
+                      <a:shade val="30000"/>
+                      <a:satMod val="115000"/>
+                    </a:schemeClr>
+                  </a:gs>
+                  <a:gs pos="50000">
+                    <a:schemeClr val="accent1">
+                      <a:shade val="67500"/>
+                      <a:satMod val="115000"/>
+                    </a:schemeClr>
+                  </a:gs>
+                  <a:gs pos="100000">
+                    <a:schemeClr val="accent1">
+                      <a:shade val="100000"/>
+                      <a:satMod val="115000"/>
+                    </a:schemeClr>
+                  </a:gs>
+                </a:gsLst>
+                <a:lin ang="13500000" scaled="1"/>
+                <a:tileRect/>
+              </a:gradFill>
+              <a:ln w="57150">
+                <a:solidFill>
+                  <a:schemeClr val="tx1"/>
+                </a:solidFill>
+              </a:ln>
+            </p:spPr>
+            <p:style>
+              <a:lnRef idx="2">
+                <a:schemeClr val="accent1">
+                  <a:shade val="15000"/>
+                </a:schemeClr>
+              </a:lnRef>
+              <a:fillRef idx="1">
+                <a:schemeClr val="accent1"/>
+              </a:fillRef>
+              <a:effectRef idx="0">
+                <a:schemeClr val="accent1"/>
+              </a:effectRef>
+              <a:fontRef idx="minor">
+                <a:schemeClr val="lt1"/>
+              </a:fontRef>
+            </p:style>
+            <p:txBody>
+              <a:bodyPr rtlCol="0" anchor="ctr"/>
+              <a:lstStyle/>
+              <a:p>
+                <a:pPr algn="ctr"/>
+                <a:endParaRPr lang="en-IE" sz="3200" b="1" dirty="0"/>
+              </a:p>
+            </p:txBody>
+          </p:sp>
+          <p:grpSp>
+            <p:nvGrpSpPr>
+              <p:cNvPr id="101" name="Group 100">
+                <a:extLst>
+                  <a:ext uri="{FF2B5EF4-FFF2-40B4-BE49-F238E27FC236}">
+                    <a16:creationId xmlns:a16="http://schemas.microsoft.com/office/drawing/2014/main" id="{0C38E234-E7AC-FB28-218C-CCAB9770B5A1}"/>
+                  </a:ext>
+                </a:extLst>
+              </p:cNvPr>
+              <p:cNvGrpSpPr/>
+              <p:nvPr/>
+            </p:nvGrpSpPr>
+            <p:grpSpPr>
+              <a:xfrm>
+                <a:off x="12515850" y="4385666"/>
+                <a:ext cx="9048750" cy="680484"/>
+                <a:chOff x="914400" y="4442816"/>
+                <a:chExt cx="9048750" cy="680484"/>
+              </a:xfrm>
+            </p:grpSpPr>
+            <p:sp>
+              <p:nvSpPr>
+                <p:cNvPr id="102" name="TextBox 101">
+                  <a:extLst>
+                    <a:ext uri="{FF2B5EF4-FFF2-40B4-BE49-F238E27FC236}">
+                      <a16:creationId xmlns:a16="http://schemas.microsoft.com/office/drawing/2014/main" id="{6D892C4A-C8B2-E3B3-2102-90A87CEA6E3D}"/>
+                    </a:ext>
+                  </a:extLst>
+                </p:cNvPr>
+                <p:cNvSpPr txBox="1"/>
+                <p:nvPr/>
+              </p:nvSpPr>
+              <p:spPr>
+                <a:xfrm>
+                  <a:off x="914400" y="4442816"/>
+                  <a:ext cx="9048750" cy="554636"/>
+                </a:xfrm>
+                <a:prstGeom prst="rect">
+                  <a:avLst/>
+                </a:prstGeom>
+                <a:noFill/>
+              </p:spPr>
+              <p:txBody>
+                <a:bodyPr wrap="square">
+                  <a:spAutoFit/>
+                </a:bodyPr>
+                <a:lstStyle/>
+                <a:p>
+                  <a:pPr algn="ctr"/>
+                  <a:r>
+                    <a:rPr lang="en-IE" sz="2800" b="1" dirty="0">
+                      <a:solidFill>
+                        <a:schemeClr val="bg1"/>
+                      </a:solidFill>
+                    </a:rPr>
+                    <a:t>Clear Central then Election Lock</a:t>
+                  </a:r>
+                </a:p>
+              </p:txBody>
+            </p:sp>
+            <p:cxnSp>
+              <p:nvCxnSpPr>
+                <p:cNvPr id="103" name="Straight Connector 102">
+                  <a:extLst>
+                    <a:ext uri="{FF2B5EF4-FFF2-40B4-BE49-F238E27FC236}">
+                      <a16:creationId xmlns:a16="http://schemas.microsoft.com/office/drawing/2014/main" id="{8F177FCE-694E-26FC-3BDF-DA48A7D41C49}"/>
+                    </a:ext>
+                  </a:extLst>
+                </p:cNvPr>
+                <p:cNvCxnSpPr>
+                  <a:cxnSpLocks/>
+                </p:cNvCxnSpPr>
+                <p:nvPr/>
+              </p:nvCxnSpPr>
+              <p:spPr>
+                <a:xfrm>
+                  <a:off x="1412270" y="5123300"/>
+                  <a:ext cx="8112730" cy="0"/>
+                </a:xfrm>
+                <a:prstGeom prst="line">
+                  <a:avLst/>
+                </a:prstGeom>
+                <a:ln w="19050" cap="flat" cmpd="sng" algn="ctr">
+                  <a:solidFill>
+                    <a:schemeClr val="bg1"/>
+                  </a:solidFill>
+                  <a:prstDash val="dash"/>
+                  <a:round/>
+                  <a:headEnd type="none" w="med" len="med"/>
+                  <a:tailEnd type="none" w="med" len="med"/>
+                </a:ln>
+              </p:spPr>
+              <p:style>
+                <a:lnRef idx="0">
+                  <a:scrgbClr r="0" g="0" b="0"/>
+                </a:lnRef>
+                <a:fillRef idx="0">
+                  <a:scrgbClr r="0" g="0" b="0"/>
+                </a:fillRef>
+                <a:effectRef idx="0">
+                  <a:scrgbClr r="0" g="0" b="0"/>
+                </a:effectRef>
+                <a:fontRef idx="minor">
+                  <a:schemeClr val="tx1"/>
+                </a:fontRef>
+              </p:style>
+            </p:cxnSp>
+          </p:grpSp>
+        </p:grpSp>
+        <p:sp>
+          <p:nvSpPr>
+            <p:cNvPr id="113" name="Arrow: Right 112">
+              <a:extLst>
+                <a:ext uri="{FF2B5EF4-FFF2-40B4-BE49-F238E27FC236}">
+                  <a16:creationId xmlns:a16="http://schemas.microsoft.com/office/drawing/2014/main" id="{5235A552-AB28-96C9-9D25-FE98C601670A}"/>
+                </a:ext>
+              </a:extLst>
+            </p:cNvPr>
+            <p:cNvSpPr/>
+            <p:nvPr/>
+          </p:nvSpPr>
+          <p:spPr>
+            <a:xfrm rot="5400000">
+              <a:off x="13797988" y="12011264"/>
+              <a:ext cx="2656859" cy="1619250"/>
+            </a:xfrm>
+            <a:prstGeom prst="rightArrow">
+              <a:avLst/>
+            </a:prstGeom>
+            <a:gradFill flip="none" rotWithShape="1">
+              <a:gsLst>
+                <a:gs pos="0">
+                  <a:schemeClr val="accent1">
+                    <a:shade val="30000"/>
+                    <a:satMod val="115000"/>
+                  </a:schemeClr>
+                </a:gs>
+                <a:gs pos="50000">
+                  <a:schemeClr val="accent1">
+                    <a:shade val="67500"/>
+                    <a:satMod val="115000"/>
+                  </a:schemeClr>
+                </a:gs>
+                <a:gs pos="100000">
+                  <a:schemeClr val="accent1">
+                    <a:shade val="100000"/>
+                    <a:satMod val="115000"/>
+                  </a:schemeClr>
+                </a:gs>
+              </a:gsLst>
+              <a:lin ang="13500000" scaled="1"/>
+              <a:tileRect/>
+            </a:gradFill>
+            <a:ln w="57150">
+              <a:solidFill>
+                <a:schemeClr val="tx1"/>
+              </a:solidFill>
+            </a:ln>
+          </p:spPr>
+          <p:style>
+            <a:lnRef idx="2">
+              <a:schemeClr val="accent1">
+                <a:shade val="15000"/>
+              </a:schemeClr>
+            </a:lnRef>
+            <a:fillRef idx="1">
+              <a:schemeClr val="accent1"/>
+            </a:fillRef>
+            <a:effectRef idx="0">
+              <a:schemeClr val="accent1"/>
+            </a:effectRef>
+            <a:fontRef idx="minor">
+              <a:schemeClr val="lt1"/>
+            </a:fontRef>
+          </p:style>
+          <p:txBody>
+            <a:bodyPr rtlCol="0" anchor="ctr"/>
+            <a:lstStyle/>
+            <a:p>
+              <a:pPr algn="ctr"/>
+              <a:endParaRPr lang="en-IE"/>
+            </a:p>
+          </p:txBody>
+        </p:sp>
+        <p:grpSp>
+          <p:nvGrpSpPr>
+            <p:cNvPr id="89" name="Group 88">
+              <a:extLst>
+                <a:ext uri="{FF2B5EF4-FFF2-40B4-BE49-F238E27FC236}">
+                  <a16:creationId xmlns:a16="http://schemas.microsoft.com/office/drawing/2014/main" id="{3824AFED-603D-7D8E-5651-3778581935FE}"/>
+                </a:ext>
+              </a:extLst>
+            </p:cNvPr>
+            <p:cNvGrpSpPr/>
+            <p:nvPr/>
+          </p:nvGrpSpPr>
+          <p:grpSpPr>
+            <a:xfrm>
+              <a:off x="734291" y="16906275"/>
+              <a:ext cx="7521575" cy="3842943"/>
+              <a:chOff x="609600" y="4232468"/>
+              <a:chExt cx="9277350" cy="5044882"/>
+            </a:xfrm>
+          </p:grpSpPr>
+          <p:sp>
+            <p:nvSpPr>
+              <p:cNvPr id="108" name="Rectangle: Rounded Corners 107">
+                <a:extLst>
+                  <a:ext uri="{FF2B5EF4-FFF2-40B4-BE49-F238E27FC236}">
+                    <a16:creationId xmlns:a16="http://schemas.microsoft.com/office/drawing/2014/main" id="{63642D35-62E7-4F25-2914-F20F10C76A8C}"/>
+                  </a:ext>
+                </a:extLst>
+              </p:cNvPr>
+              <p:cNvSpPr/>
+              <p:nvPr/>
+            </p:nvSpPr>
+            <p:spPr>
+              <a:xfrm>
+                <a:off x="609600" y="4232468"/>
+                <a:ext cx="9277350" cy="5044882"/>
+              </a:xfrm>
+              <a:prstGeom prst="roundRect">
+                <a:avLst/>
+              </a:prstGeom>
+              <a:gradFill flip="none" rotWithShape="1">
+                <a:gsLst>
+                  <a:gs pos="0">
+                    <a:schemeClr val="accent1">
+                      <a:shade val="30000"/>
+                      <a:satMod val="115000"/>
+                    </a:schemeClr>
+                  </a:gs>
+                  <a:gs pos="50000">
+                    <a:schemeClr val="accent1">
+                      <a:shade val="67500"/>
+                      <a:satMod val="115000"/>
+                    </a:schemeClr>
+                  </a:gs>
+                  <a:gs pos="100000">
+                    <a:schemeClr val="accent1">
+                      <a:shade val="100000"/>
+                      <a:satMod val="115000"/>
+                    </a:schemeClr>
+                  </a:gs>
+                </a:gsLst>
+                <a:lin ang="13500000" scaled="1"/>
+                <a:tileRect/>
+              </a:gradFill>
+              <a:ln w="57150">
+                <a:solidFill>
+                  <a:schemeClr val="tx1"/>
+                </a:solidFill>
+              </a:ln>
+            </p:spPr>
+            <p:style>
+              <a:lnRef idx="2">
+                <a:schemeClr val="accent1">
+                  <a:shade val="15000"/>
+                </a:schemeClr>
+              </a:lnRef>
+              <a:fillRef idx="1">
+                <a:schemeClr val="accent1"/>
+              </a:fillRef>
+              <a:effectRef idx="0">
+                <a:schemeClr val="accent1"/>
+              </a:effectRef>
+              <a:fontRef idx="minor">
+                <a:schemeClr val="lt1"/>
+              </a:fontRef>
+            </p:style>
+            <p:txBody>
+              <a:bodyPr rtlCol="0" anchor="ctr"/>
+              <a:lstStyle/>
+              <a:p>
+                <a:endParaRPr lang="en-IE" sz="3200" b="1" dirty="0"/>
+              </a:p>
+            </p:txBody>
+          </p:sp>
+          <p:grpSp>
+            <p:nvGrpSpPr>
+              <p:cNvPr id="109" name="Group 108">
+                <a:extLst>
+                  <a:ext uri="{FF2B5EF4-FFF2-40B4-BE49-F238E27FC236}">
+                    <a16:creationId xmlns:a16="http://schemas.microsoft.com/office/drawing/2014/main" id="{4C706FEC-6D43-6EF3-8962-CE9C89EDB1A5}"/>
+                  </a:ext>
+                </a:extLst>
+              </p:cNvPr>
+              <p:cNvGrpSpPr/>
+              <p:nvPr/>
+            </p:nvGrpSpPr>
+            <p:grpSpPr>
+              <a:xfrm>
+                <a:off x="609600" y="4385666"/>
+                <a:ext cx="9048750" cy="689940"/>
+                <a:chOff x="914400" y="4442816"/>
+                <a:chExt cx="9048750" cy="689940"/>
+              </a:xfrm>
+            </p:grpSpPr>
+            <p:sp>
+              <p:nvSpPr>
+                <p:cNvPr id="110" name="TextBox 109">
+                  <a:extLst>
+                    <a:ext uri="{FF2B5EF4-FFF2-40B4-BE49-F238E27FC236}">
+                      <a16:creationId xmlns:a16="http://schemas.microsoft.com/office/drawing/2014/main" id="{5FB26764-FE71-E2BA-81BD-1A41BC916065}"/>
+                    </a:ext>
+                  </a:extLst>
+                </p:cNvPr>
+                <p:cNvSpPr txBox="1"/>
+                <p:nvPr/>
+              </p:nvSpPr>
+              <p:spPr>
+                <a:xfrm>
+                  <a:off x="914400" y="4442816"/>
+                  <a:ext cx="9048750" cy="523220"/>
+                </a:xfrm>
+                <a:prstGeom prst="rect">
+                  <a:avLst/>
+                </a:prstGeom>
+                <a:noFill/>
+              </p:spPr>
+              <p:txBody>
+                <a:bodyPr wrap="square">
+                  <a:spAutoFit/>
+                </a:bodyPr>
+                <a:lstStyle/>
+                <a:p>
+                  <a:pPr algn="ctr"/>
+                  <a:r>
+                    <a:rPr lang="en-IE" sz="2800" b="1" dirty="0">
+                      <a:solidFill>
+                        <a:schemeClr val="bg1"/>
+                      </a:solidFill>
+                    </a:rPr>
+                    <a:t>FileChannel Lock on Central LockFile</a:t>
+                  </a:r>
+                </a:p>
+              </p:txBody>
+            </p:sp>
+            <p:cxnSp>
+              <p:nvCxnSpPr>
+                <p:cNvPr id="111" name="Straight Connector 110">
+                  <a:extLst>
+                    <a:ext uri="{FF2B5EF4-FFF2-40B4-BE49-F238E27FC236}">
+                      <a16:creationId xmlns:a16="http://schemas.microsoft.com/office/drawing/2014/main" id="{D438D6CE-796E-F0D7-2297-DD9F25BC0390}"/>
+                    </a:ext>
+                  </a:extLst>
+                </p:cNvPr>
+                <p:cNvCxnSpPr>
+                  <a:cxnSpLocks/>
+                </p:cNvCxnSpPr>
+                <p:nvPr/>
+              </p:nvCxnSpPr>
+              <p:spPr>
+                <a:xfrm>
+                  <a:off x="1497160" y="5132756"/>
+                  <a:ext cx="8032762" cy="0"/>
+                </a:xfrm>
+                <a:prstGeom prst="line">
+                  <a:avLst/>
+                </a:prstGeom>
+                <a:ln w="19050" cap="flat" cmpd="sng" algn="ctr">
+                  <a:solidFill>
+                    <a:schemeClr val="bg1"/>
+                  </a:solidFill>
+                  <a:prstDash val="dash"/>
+                  <a:round/>
+                  <a:headEnd type="none" w="med" len="med"/>
+                  <a:tailEnd type="none" w="med" len="med"/>
+                </a:ln>
+              </p:spPr>
+              <p:style>
+                <a:lnRef idx="0">
+                  <a:scrgbClr r="0" g="0" b="0"/>
+                </a:lnRef>
+                <a:fillRef idx="0">
+                  <a:scrgbClr r="0" g="0" b="0"/>
+                </a:fillRef>
+                <a:effectRef idx="0">
+                  <a:scrgbClr r="0" g="0" b="0"/>
+                </a:effectRef>
+                <a:fontRef idx="minor">
+                  <a:schemeClr val="tx1"/>
+                </a:fontRef>
+              </p:style>
+            </p:cxnSp>
+          </p:grpSp>
+        </p:grpSp>
+        <p:grpSp>
+          <p:nvGrpSpPr>
+            <p:cNvPr id="122" name="Group 121">
+              <a:extLst>
+                <a:ext uri="{FF2B5EF4-FFF2-40B4-BE49-F238E27FC236}">
+                  <a16:creationId xmlns:a16="http://schemas.microsoft.com/office/drawing/2014/main" id="{2E5359AA-2A23-D204-F4FF-03D4CC2A86B1}"/>
+                </a:ext>
+              </a:extLst>
+            </p:cNvPr>
+            <p:cNvGrpSpPr/>
+            <p:nvPr/>
+          </p:nvGrpSpPr>
+          <p:grpSpPr>
+            <a:xfrm>
+              <a:off x="2801215" y="17754707"/>
+              <a:ext cx="3140911" cy="2301407"/>
+              <a:chOff x="1939924" y="18109350"/>
               <a:chExt cx="3573819" cy="2536825"/>
             </a:xfrm>
           </p:grpSpPr>
           <p:pic>
             <p:nvPicPr>
-              <p:cNvPr id="133" name="Graphic 132" descr="Lock outline">
+              <p:cNvPr id="120" name="Graphic 119" descr="Lock outline">
                 <a:extLst>
                   <a:ext uri="{FF2B5EF4-FFF2-40B4-BE49-F238E27FC236}">
-                    <a16:creationId xmlns:a16="http://schemas.microsoft.com/office/drawing/2014/main" id="{A193D7A6-EA2C-4556-C775-0E301B707948}"/>
+                    <a16:creationId xmlns:a16="http://schemas.microsoft.com/office/drawing/2014/main" id="{7B630FEC-92E0-4756-D730-8992B212194C}"/>
                   </a:ext>
                 </a:extLst>
               </p:cNvPr>
@@ -28208,7 +27704,7 @@
             </p:blipFill>
             <p:spPr>
               <a:xfrm>
-                <a:off x="28272839" y="18405511"/>
+                <a:off x="3836986" y="18584802"/>
                 <a:ext cx="1676757" cy="1676757"/>
               </a:xfrm>
               <a:prstGeom prst="rect">
@@ -28218,10 +27714,10 @@
           </p:pic>
           <p:pic>
             <p:nvPicPr>
-              <p:cNvPr id="134" name="Graphic 133" descr="Document with solid fill">
+              <p:cNvPr id="121" name="Graphic 120" descr="Document with solid fill">
                 <a:extLst>
                   <a:ext uri="{FF2B5EF4-FFF2-40B4-BE49-F238E27FC236}">
-                    <a16:creationId xmlns:a16="http://schemas.microsoft.com/office/drawing/2014/main" id="{45B2C3B3-84ED-56A1-57A4-39CBF959ED92}"/>
+                    <a16:creationId xmlns:a16="http://schemas.microsoft.com/office/drawing/2014/main" id="{9A7FF259-FA79-C04A-27C7-5666BA552DE4}"/>
                   </a:ext>
                 </a:extLst>
               </p:cNvPr>
@@ -28244,7 +27740,7 @@
             </p:blipFill>
             <p:spPr>
               <a:xfrm>
-                <a:off x="26375777" y="17930059"/>
+                <a:off x="1939924" y="18109350"/>
                 <a:ext cx="2536825" cy="2536825"/>
               </a:xfrm>
               <a:prstGeom prst="rect">
@@ -28253,48 +27749,309 @@
             </p:spPr>
           </p:pic>
         </p:grpSp>
-        <p:pic>
-          <p:nvPicPr>
-            <p:cNvPr id="97" name="Graphic 96" descr="Alarm Ringing outline">
+        <p:grpSp>
+          <p:nvGrpSpPr>
+            <p:cNvPr id="91" name="Group 90">
               <a:extLst>
                 <a:ext uri="{FF2B5EF4-FFF2-40B4-BE49-F238E27FC236}">
-                  <a16:creationId xmlns:a16="http://schemas.microsoft.com/office/drawing/2014/main" id="{7DD1699D-8A5C-2C89-E485-D1DE7EA636B5}"/>
+                  <a16:creationId xmlns:a16="http://schemas.microsoft.com/office/drawing/2014/main" id="{58AADD96-942D-E95B-B1E7-25F4E2905E02}"/>
                 </a:ext>
               </a:extLst>
             </p:cNvPr>
-            <p:cNvPicPr>
-              <a:picLocks noChangeAspect="1"/>
-            </p:cNvPicPr>
+            <p:cNvGrpSpPr/>
             <p:nvPr/>
-          </p:nvPicPr>
-          <p:blipFill>
-            <a:blip r:embed="rId3">
+          </p:nvGrpSpPr>
+          <p:grpSpPr>
+            <a:xfrm>
+              <a:off x="11122891" y="16906275"/>
+              <a:ext cx="7023100" cy="3919143"/>
+              <a:chOff x="12363450" y="4232467"/>
+              <a:chExt cx="9277350" cy="5044882"/>
+            </a:xfrm>
+          </p:grpSpPr>
+          <p:sp>
+            <p:nvSpPr>
+              <p:cNvPr id="104" name="Rectangle: Rounded Corners 103">
+                <a:extLst>
+                  <a:ext uri="{FF2B5EF4-FFF2-40B4-BE49-F238E27FC236}">
+                    <a16:creationId xmlns:a16="http://schemas.microsoft.com/office/drawing/2014/main" id="{8CE5F9D7-906C-B109-E9C5-E0D38401E58F}"/>
+                  </a:ext>
+                </a:extLst>
+              </p:cNvPr>
+              <p:cNvSpPr/>
+              <p:nvPr/>
+            </p:nvSpPr>
+            <p:spPr>
+              <a:xfrm>
+                <a:off x="12363450" y="4232467"/>
+                <a:ext cx="9277350" cy="5044882"/>
+              </a:xfrm>
+              <a:prstGeom prst="roundRect">
+                <a:avLst/>
+              </a:prstGeom>
+              <a:gradFill flip="none" rotWithShape="1">
+                <a:gsLst>
+                  <a:gs pos="0">
+                    <a:schemeClr val="accent1">
+                      <a:shade val="30000"/>
+                      <a:satMod val="115000"/>
+                    </a:schemeClr>
+                  </a:gs>
+                  <a:gs pos="50000">
+                    <a:schemeClr val="accent1">
+                      <a:shade val="67500"/>
+                      <a:satMod val="115000"/>
+                    </a:schemeClr>
+                  </a:gs>
+                  <a:gs pos="100000">
+                    <a:schemeClr val="accent1">
+                      <a:shade val="100000"/>
+                      <a:satMod val="115000"/>
+                    </a:schemeClr>
+                  </a:gs>
+                </a:gsLst>
+                <a:lin ang="13500000" scaled="1"/>
+                <a:tileRect/>
+              </a:gradFill>
+              <a:ln w="57150">
+                <a:solidFill>
+                  <a:schemeClr val="tx1"/>
+                </a:solidFill>
+              </a:ln>
+            </p:spPr>
+            <p:style>
+              <a:lnRef idx="2">
+                <a:schemeClr val="accent1">
+                  <a:shade val="15000"/>
+                </a:schemeClr>
+              </a:lnRef>
+              <a:fillRef idx="1">
+                <a:schemeClr val="accent1"/>
+              </a:fillRef>
+              <a:effectRef idx="0">
+                <a:schemeClr val="accent1"/>
+              </a:effectRef>
+              <a:fontRef idx="minor">
+                <a:schemeClr val="lt1"/>
+              </a:fontRef>
+            </p:style>
+            <p:txBody>
+              <a:bodyPr rtlCol="0" anchor="ctr"/>
+              <a:lstStyle/>
+              <a:p>
+                <a:pPr algn="ctr"/>
+                <a:endParaRPr lang="en-IE" sz="3200" b="1" dirty="0"/>
+              </a:p>
+            </p:txBody>
+          </p:sp>
+          <p:grpSp>
+            <p:nvGrpSpPr>
+              <p:cNvPr id="105" name="Group 104">
+                <a:extLst>
+                  <a:ext uri="{FF2B5EF4-FFF2-40B4-BE49-F238E27FC236}">
+                    <a16:creationId xmlns:a16="http://schemas.microsoft.com/office/drawing/2014/main" id="{EFB25828-2711-D2B1-17B2-15EC5A261F83}"/>
+                  </a:ext>
+                </a:extLst>
+              </p:cNvPr>
+              <p:cNvGrpSpPr/>
+              <p:nvPr/>
+            </p:nvGrpSpPr>
+            <p:grpSpPr>
+              <a:xfrm>
+                <a:off x="12515850" y="4385666"/>
+                <a:ext cx="9048750" cy="692714"/>
+                <a:chOff x="914400" y="4442816"/>
+                <a:chExt cx="9048750" cy="692714"/>
+              </a:xfrm>
+            </p:grpSpPr>
+            <p:sp>
+              <p:nvSpPr>
+                <p:cNvPr id="106" name="TextBox 105">
+                  <a:extLst>
+                    <a:ext uri="{FF2B5EF4-FFF2-40B4-BE49-F238E27FC236}">
+                      <a16:creationId xmlns:a16="http://schemas.microsoft.com/office/drawing/2014/main" id="{401BD3F1-B161-5045-06D8-A48535812444}"/>
+                    </a:ext>
+                  </a:extLst>
+                </p:cNvPr>
+                <p:cNvSpPr txBox="1"/>
+                <p:nvPr/>
+              </p:nvSpPr>
+              <p:spPr>
+                <a:xfrm>
+                  <a:off x="914400" y="4442816"/>
+                  <a:ext cx="9048750" cy="554636"/>
+                </a:xfrm>
+                <a:prstGeom prst="rect">
+                  <a:avLst/>
+                </a:prstGeom>
+                <a:noFill/>
+              </p:spPr>
+              <p:txBody>
+                <a:bodyPr wrap="square">
+                  <a:spAutoFit/>
+                </a:bodyPr>
+                <a:lstStyle/>
+                <a:p>
+                  <a:pPr algn="ctr"/>
+                  <a:r>
+                    <a:rPr lang="en-IE" sz="2800" b="1" dirty="0">
+                      <a:solidFill>
+                        <a:schemeClr val="bg1"/>
+                      </a:solidFill>
+                    </a:rPr>
+                    <a:t>Run Job</a:t>
+                  </a:r>
+                </a:p>
+              </p:txBody>
+            </p:sp>
+            <p:cxnSp>
+              <p:nvCxnSpPr>
+                <p:cNvPr id="107" name="Straight Connector 106">
+                  <a:extLst>
+                    <a:ext uri="{FF2B5EF4-FFF2-40B4-BE49-F238E27FC236}">
+                      <a16:creationId xmlns:a16="http://schemas.microsoft.com/office/drawing/2014/main" id="{F6133D7E-94E1-7137-40DE-0C6131EF1123}"/>
+                    </a:ext>
+                  </a:extLst>
+                </p:cNvPr>
+                <p:cNvCxnSpPr>
+                  <a:cxnSpLocks/>
+                </p:cNvCxnSpPr>
+                <p:nvPr/>
+              </p:nvCxnSpPr>
+              <p:spPr>
+                <a:xfrm>
+                  <a:off x="1412269" y="5135530"/>
+                  <a:ext cx="8112730" cy="0"/>
+                </a:xfrm>
+                <a:prstGeom prst="line">
+                  <a:avLst/>
+                </a:prstGeom>
+                <a:ln w="19050" cap="flat" cmpd="sng" algn="ctr">
+                  <a:solidFill>
+                    <a:schemeClr val="bg1"/>
+                  </a:solidFill>
+                  <a:prstDash val="dash"/>
+                  <a:round/>
+                  <a:headEnd type="none" w="med" len="med"/>
+                  <a:tailEnd type="none" w="med" len="med"/>
+                </a:ln>
+              </p:spPr>
+              <p:style>
+                <a:lnRef idx="0">
+                  <a:scrgbClr r="0" g="0" b="0"/>
+                </a:lnRef>
+                <a:fillRef idx="0">
+                  <a:scrgbClr r="0" g="0" b="0"/>
+                </a:fillRef>
+                <a:effectRef idx="0">
+                  <a:scrgbClr r="0" g="0" b="0"/>
+                </a:effectRef>
+                <a:fontRef idx="minor">
+                  <a:schemeClr val="tx1"/>
+                </a:fontRef>
+              </p:style>
+            </p:cxnSp>
+          </p:grpSp>
+        </p:grpSp>
+        <p:grpSp>
+          <p:nvGrpSpPr>
+            <p:cNvPr id="132" name="Group 131">
               <a:extLst>
-                <a:ext uri="{96DAC541-7B7A-43D3-8B79-37D633B846F1}">
-                  <asvg:svgBlip xmlns:asvg="http://schemas.microsoft.com/office/drawing/2016/SVG/main" r:embed="rId15"/>
+                <a:ext uri="{FF2B5EF4-FFF2-40B4-BE49-F238E27FC236}">
+                  <a16:creationId xmlns:a16="http://schemas.microsoft.com/office/drawing/2014/main" id="{5D7E449F-558E-2A82-83D0-0DD18C718BCB}"/>
                 </a:ext>
               </a:extLst>
-            </a:blip>
-            <a:stretch>
-              <a:fillRect/>
-            </a:stretch>
-          </p:blipFill>
-          <p:spPr>
+            </p:cNvPr>
+            <p:cNvGrpSpPr/>
+            <p:nvPr/>
+          </p:nvGrpSpPr>
+          <p:grpSpPr>
             <a:xfrm>
-              <a:off x="27066786" y="17681571"/>
-              <a:ext cx="2105025" cy="2105025"/>
+              <a:off x="12985467" y="17592118"/>
+              <a:ext cx="4074674" cy="2638970"/>
+              <a:chOff x="15089626" y="18117665"/>
+              <a:chExt cx="2911547" cy="2214581"/>
             </a:xfrm>
-            <a:prstGeom prst="rect">
-              <a:avLst/>
-            </a:prstGeom>
-          </p:spPr>
-        </p:pic>
+          </p:grpSpPr>
+          <p:pic>
+            <p:nvPicPr>
+              <p:cNvPr id="130" name="Graphic 129" descr="Database outline">
+                <a:extLst>
+                  <a:ext uri="{FF2B5EF4-FFF2-40B4-BE49-F238E27FC236}">
+                    <a16:creationId xmlns:a16="http://schemas.microsoft.com/office/drawing/2014/main" id="{A1B2ADF8-6F5C-75F1-C094-9E6AE9F71215}"/>
+                  </a:ext>
+                </a:extLst>
+              </p:cNvPr>
+              <p:cNvPicPr>
+                <a:picLocks noChangeAspect="1"/>
+              </p:cNvPicPr>
+              <p:nvPr/>
+            </p:nvPicPr>
+            <p:blipFill>
+              <a:blip r:embed="rId11">
+                <a:extLst>
+                  <a:ext uri="{96DAC541-7B7A-43D3-8B79-37D633B846F1}">
+                    <asvg:svgBlip xmlns:asvg="http://schemas.microsoft.com/office/drawing/2016/SVG/main" r:embed="rId12"/>
+                  </a:ext>
+                </a:extLst>
+              </a:blip>
+              <a:stretch>
+                <a:fillRect/>
+              </a:stretch>
+            </p:blipFill>
+            <p:spPr>
+              <a:xfrm>
+                <a:off x="15089626" y="18117665"/>
+                <a:ext cx="2214581" cy="2214581"/>
+              </a:xfrm>
+              <a:prstGeom prst="rect">
+                <a:avLst/>
+              </a:prstGeom>
+            </p:spPr>
+          </p:pic>
+          <p:pic>
+            <p:nvPicPr>
+              <p:cNvPr id="131" name="Graphic 130" descr="Gears outline">
+                <a:extLst>
+                  <a:ext uri="{FF2B5EF4-FFF2-40B4-BE49-F238E27FC236}">
+                    <a16:creationId xmlns:a16="http://schemas.microsoft.com/office/drawing/2014/main" id="{728D8DAC-7377-4510-7121-8CD0C52F6925}"/>
+                  </a:ext>
+                </a:extLst>
+              </p:cNvPr>
+              <p:cNvPicPr>
+                <a:picLocks noChangeAspect="1"/>
+              </p:cNvPicPr>
+              <p:nvPr/>
+            </p:nvPicPr>
+            <p:blipFill>
+              <a:blip r:embed="rId13">
+                <a:extLst>
+                  <a:ext uri="{96DAC541-7B7A-43D3-8B79-37D633B846F1}">
+                    <asvg:svgBlip xmlns:asvg="http://schemas.microsoft.com/office/drawing/2016/SVG/main" r:embed="rId14"/>
+                  </a:ext>
+                </a:extLst>
+              </a:blip>
+              <a:stretch>
+                <a:fillRect/>
+              </a:stretch>
+            </p:blipFill>
+            <p:spPr>
+              <a:xfrm>
+                <a:off x="16511777" y="18356709"/>
+                <a:ext cx="1489396" cy="1489396"/>
+              </a:xfrm>
+              <a:prstGeom prst="rect">
+                <a:avLst/>
+              </a:prstGeom>
+            </p:spPr>
+          </p:pic>
+        </p:grpSp>
         <p:sp>
           <p:nvSpPr>
-            <p:cNvPr id="141" name="Minus Sign 140">
+            <p:cNvPr id="138" name="Minus Sign 137">
               <a:extLst>
                 <a:ext uri="{FF2B5EF4-FFF2-40B4-BE49-F238E27FC236}">
-                  <a16:creationId xmlns:a16="http://schemas.microsoft.com/office/drawing/2014/main" id="{D1BB6AE0-ED32-E388-CB7C-69E78586C5B7}"/>
+                  <a16:creationId xmlns:a16="http://schemas.microsoft.com/office/drawing/2014/main" id="{C48D16BE-8A2E-3ACD-419B-BB62C0A67363}"/>
                 </a:ext>
               </a:extLst>
             </p:cNvPr>
@@ -28303,7 +28060,7 @@
           </p:nvSpPr>
           <p:spPr>
             <a:xfrm rot="2461338">
-              <a:off x="20920154" y="18264330"/>
+              <a:off x="25800995" y="18645329"/>
               <a:ext cx="4601827" cy="763631"/>
             </a:xfrm>
             <a:prstGeom prst="mathMinus">
@@ -28349,271 +28106,535 @@
             </a:p>
           </p:txBody>
         </p:sp>
-      </p:grpSp>
-      <p:sp>
-        <p:nvSpPr>
-          <p:cNvPr id="143" name="TextBox 142">
-            <a:extLst>
-              <a:ext uri="{FF2B5EF4-FFF2-40B4-BE49-F238E27FC236}">
-                <a16:creationId xmlns:a16="http://schemas.microsoft.com/office/drawing/2014/main" id="{779D6EF5-6E71-750C-C968-275F246CB369}"/>
-              </a:ext>
-            </a:extLst>
-          </p:cNvPr>
-          <p:cNvSpPr txBox="1"/>
-          <p:nvPr/>
-        </p:nvSpPr>
-        <p:spPr>
-          <a:xfrm>
-            <a:off x="13082300" y="20255632"/>
-            <a:ext cx="3099279" cy="400110"/>
-          </a:xfrm>
-          <a:prstGeom prst="rect">
-            <a:avLst/>
-          </a:prstGeom>
-          <a:noFill/>
-        </p:spPr>
-        <p:txBody>
-          <a:bodyPr wrap="square">
-            <a:spAutoFit/>
-          </a:bodyPr>
-          <a:lstStyle/>
-          <a:p>
-            <a:pPr algn="ctr"/>
-            <a:r>
-              <a:rPr lang="en-IE" sz="2000" b="1" dirty="0">
+        <p:grpSp>
+          <p:nvGrpSpPr>
+            <p:cNvPr id="148" name="Group 147">
+              <a:extLst>
+                <a:ext uri="{FF2B5EF4-FFF2-40B4-BE49-F238E27FC236}">
+                  <a16:creationId xmlns:a16="http://schemas.microsoft.com/office/drawing/2014/main" id="{FE2729AB-7D31-09EC-B6D4-DD02446E99F7}"/>
+                </a:ext>
+              </a:extLst>
+            </p:cNvPr>
+            <p:cNvGrpSpPr/>
+            <p:nvPr/>
+          </p:nvGrpSpPr>
+          <p:grpSpPr>
+            <a:xfrm>
+              <a:off x="20892445" y="18037170"/>
+              <a:ext cx="8251657" cy="2105025"/>
+              <a:chOff x="20920154" y="17681571"/>
+              <a:chExt cx="8251657" cy="2105025"/>
+            </a:xfrm>
+          </p:grpSpPr>
+          <p:sp>
+            <p:nvSpPr>
+              <p:cNvPr id="99" name="Arrow: Right 98">
+                <a:extLst>
+                  <a:ext uri="{FF2B5EF4-FFF2-40B4-BE49-F238E27FC236}">
+                    <a16:creationId xmlns:a16="http://schemas.microsoft.com/office/drawing/2014/main" id="{9BFB6834-0C7D-E9A4-ED0F-4C588162AC49}"/>
+                  </a:ext>
+                </a:extLst>
+              </p:cNvPr>
+              <p:cNvSpPr/>
+              <p:nvPr/>
+            </p:nvSpPr>
+            <p:spPr>
+              <a:xfrm>
+                <a:off x="24851915" y="18210209"/>
+                <a:ext cx="1828800" cy="981939"/>
+              </a:xfrm>
+              <a:prstGeom prst="rightArrow">
+                <a:avLst/>
+              </a:prstGeom>
+              <a:solidFill>
+                <a:schemeClr val="accent2"/>
+              </a:solidFill>
+              <a:ln w="57150">
+                <a:solidFill>
+                  <a:schemeClr val="tx1"/>
+                </a:solidFill>
+              </a:ln>
+            </p:spPr>
+            <p:style>
+              <a:lnRef idx="2">
+                <a:schemeClr val="accent1">
+                  <a:shade val="15000"/>
+                </a:schemeClr>
+              </a:lnRef>
+              <a:fillRef idx="1">
+                <a:schemeClr val="accent1"/>
+              </a:fillRef>
+              <a:effectRef idx="0">
+                <a:schemeClr val="accent1"/>
+              </a:effectRef>
+              <a:fontRef idx="minor">
+                <a:schemeClr val="lt1"/>
+              </a:fontRef>
+            </p:style>
+            <p:txBody>
+              <a:bodyPr rtlCol="0" anchor="ctr"/>
+              <a:lstStyle/>
+              <a:p>
+                <a:pPr algn="ctr"/>
+                <a:endParaRPr lang="en-IE"/>
+              </a:p>
+            </p:txBody>
+          </p:sp>
+          <p:grpSp>
+            <p:nvGrpSpPr>
+              <p:cNvPr id="135" name="Group 134">
+                <a:extLst>
+                  <a:ext uri="{FF2B5EF4-FFF2-40B4-BE49-F238E27FC236}">
+                    <a16:creationId xmlns:a16="http://schemas.microsoft.com/office/drawing/2014/main" id="{8D3338D0-9143-5ED2-2FAA-962AD88F8957}"/>
+                  </a:ext>
+                </a:extLst>
+              </p:cNvPr>
+              <p:cNvGrpSpPr/>
+              <p:nvPr/>
+            </p:nvGrpSpPr>
+            <p:grpSpPr>
+              <a:xfrm>
+                <a:off x="21995031" y="17702978"/>
+                <a:ext cx="2427822" cy="1996402"/>
+                <a:chOff x="26375777" y="17930059"/>
+                <a:chExt cx="3573819" cy="2536825"/>
+              </a:xfrm>
+            </p:grpSpPr>
+            <p:pic>
+              <p:nvPicPr>
+                <p:cNvPr id="133" name="Graphic 132" descr="Lock outline">
+                  <a:extLst>
+                    <a:ext uri="{FF2B5EF4-FFF2-40B4-BE49-F238E27FC236}">
+                      <a16:creationId xmlns:a16="http://schemas.microsoft.com/office/drawing/2014/main" id="{A193D7A6-EA2C-4556-C775-0E301B707948}"/>
+                    </a:ext>
+                  </a:extLst>
+                </p:cNvPr>
+                <p:cNvPicPr>
+                  <a:picLocks noChangeAspect="1"/>
+                </p:cNvPicPr>
+                <p:nvPr/>
+              </p:nvPicPr>
+              <p:blipFill>
+                <a:blip r:embed="rId7">
+                  <a:extLst>
+                    <a:ext uri="{96DAC541-7B7A-43D3-8B79-37D633B846F1}">
+                      <asvg:svgBlip xmlns:asvg="http://schemas.microsoft.com/office/drawing/2016/SVG/main" r:embed="rId8"/>
+                    </a:ext>
+                  </a:extLst>
+                </a:blip>
+                <a:stretch>
+                  <a:fillRect/>
+                </a:stretch>
+              </p:blipFill>
+              <p:spPr>
+                <a:xfrm>
+                  <a:off x="28272839" y="18405511"/>
+                  <a:ext cx="1676757" cy="1676757"/>
+                </a:xfrm>
+                <a:prstGeom prst="rect">
+                  <a:avLst/>
+                </a:prstGeom>
+              </p:spPr>
+            </p:pic>
+            <p:pic>
+              <p:nvPicPr>
+                <p:cNvPr id="134" name="Graphic 133" descr="Document with solid fill">
+                  <a:extLst>
+                    <a:ext uri="{FF2B5EF4-FFF2-40B4-BE49-F238E27FC236}">
+                      <a16:creationId xmlns:a16="http://schemas.microsoft.com/office/drawing/2014/main" id="{45B2C3B3-84ED-56A1-57A4-39CBF959ED92}"/>
+                    </a:ext>
+                  </a:extLst>
+                </p:cNvPr>
+                <p:cNvPicPr>
+                  <a:picLocks noChangeAspect="1"/>
+                </p:cNvPicPr>
+                <p:nvPr/>
+              </p:nvPicPr>
+              <p:blipFill>
+                <a:blip r:embed="rId9">
+                  <a:extLst>
+                    <a:ext uri="{96DAC541-7B7A-43D3-8B79-37D633B846F1}">
+                      <asvg:svgBlip xmlns:asvg="http://schemas.microsoft.com/office/drawing/2016/SVG/main" r:embed="rId10"/>
+                    </a:ext>
+                  </a:extLst>
+                </a:blip>
+                <a:stretch>
+                  <a:fillRect/>
+                </a:stretch>
+              </p:blipFill>
+              <p:spPr>
+                <a:xfrm>
+                  <a:off x="26375777" y="17930059"/>
+                  <a:ext cx="2536825" cy="2536825"/>
+                </a:xfrm>
+                <a:prstGeom prst="rect">
+                  <a:avLst/>
+                </a:prstGeom>
+              </p:spPr>
+            </p:pic>
+          </p:grpSp>
+          <p:pic>
+            <p:nvPicPr>
+              <p:cNvPr id="97" name="Graphic 96" descr="Alarm Ringing outline">
+                <a:extLst>
+                  <a:ext uri="{FF2B5EF4-FFF2-40B4-BE49-F238E27FC236}">
+                    <a16:creationId xmlns:a16="http://schemas.microsoft.com/office/drawing/2014/main" id="{7DD1699D-8A5C-2C89-E485-D1DE7EA636B5}"/>
+                  </a:ext>
+                </a:extLst>
+              </p:cNvPr>
+              <p:cNvPicPr>
+                <a:picLocks noChangeAspect="1"/>
+              </p:cNvPicPr>
+              <p:nvPr/>
+            </p:nvPicPr>
+            <p:blipFill>
+              <a:blip r:embed="rId3">
+                <a:extLst>
+                  <a:ext uri="{96DAC541-7B7A-43D3-8B79-37D633B846F1}">
+                    <asvg:svgBlip xmlns:asvg="http://schemas.microsoft.com/office/drawing/2016/SVG/main" r:embed="rId15"/>
+                  </a:ext>
+                </a:extLst>
+              </a:blip>
+              <a:stretch>
+                <a:fillRect/>
+              </a:stretch>
+            </p:blipFill>
+            <p:spPr>
+              <a:xfrm>
+                <a:off x="27066786" y="17681571"/>
+                <a:ext cx="2105025" cy="2105025"/>
+              </a:xfrm>
+              <a:prstGeom prst="rect">
+                <a:avLst/>
+              </a:prstGeom>
+            </p:spPr>
+          </p:pic>
+          <p:sp>
+            <p:nvSpPr>
+              <p:cNvPr id="141" name="Minus Sign 140">
+                <a:extLst>
+                  <a:ext uri="{FF2B5EF4-FFF2-40B4-BE49-F238E27FC236}">
+                    <a16:creationId xmlns:a16="http://schemas.microsoft.com/office/drawing/2014/main" id="{D1BB6AE0-ED32-E388-CB7C-69E78586C5B7}"/>
+                  </a:ext>
+                </a:extLst>
+              </p:cNvPr>
+              <p:cNvSpPr/>
+              <p:nvPr/>
+            </p:nvSpPr>
+            <p:spPr>
+              <a:xfrm rot="2461338">
+                <a:off x="20920154" y="18264330"/>
+                <a:ext cx="4601827" cy="763631"/>
+              </a:xfrm>
+              <a:prstGeom prst="mathMinus">
+                <a:avLst/>
+              </a:prstGeom>
+              <a:solidFill>
+                <a:schemeClr val="accent6">
+                  <a:lumMod val="60000"/>
+                  <a:lumOff val="40000"/>
+                </a:schemeClr>
+              </a:solidFill>
+              <a:ln>
+                <a:solidFill>
+                  <a:schemeClr val="accent6">
+                    <a:lumMod val="60000"/>
+                    <a:lumOff val="40000"/>
+                  </a:schemeClr>
+                </a:solidFill>
+              </a:ln>
+            </p:spPr>
+            <p:style>
+              <a:lnRef idx="2">
+                <a:schemeClr val="accent1">
+                  <a:shade val="15000"/>
+                </a:schemeClr>
+              </a:lnRef>
+              <a:fillRef idx="1">
+                <a:schemeClr val="accent1"/>
+              </a:fillRef>
+              <a:effectRef idx="0">
+                <a:schemeClr val="accent1"/>
+              </a:effectRef>
+              <a:fontRef idx="minor">
+                <a:schemeClr val="lt1"/>
+              </a:fontRef>
+            </p:style>
+            <p:txBody>
+              <a:bodyPr rtlCol="0" anchor="ctr"/>
+              <a:lstStyle/>
+              <a:p>
+                <a:pPr algn="ctr"/>
+                <a:endParaRPr lang="en-IE"/>
+              </a:p>
+            </p:txBody>
+          </p:sp>
+        </p:grpSp>
+        <p:sp>
+          <p:nvSpPr>
+            <p:cNvPr id="143" name="TextBox 142">
+              <a:extLst>
+                <a:ext uri="{FF2B5EF4-FFF2-40B4-BE49-F238E27FC236}">
+                  <a16:creationId xmlns:a16="http://schemas.microsoft.com/office/drawing/2014/main" id="{779D6EF5-6E71-750C-C968-275F246CB369}"/>
+                </a:ext>
+              </a:extLst>
+            </p:cNvPr>
+            <p:cNvSpPr txBox="1"/>
+            <p:nvPr/>
+          </p:nvSpPr>
+          <p:spPr>
+            <a:xfrm>
+              <a:off x="13082300" y="20255632"/>
+              <a:ext cx="3099279" cy="400110"/>
+            </a:xfrm>
+            <a:prstGeom prst="rect">
+              <a:avLst/>
+            </a:prstGeom>
+            <a:noFill/>
+          </p:spPr>
+          <p:txBody>
+            <a:bodyPr wrap="square">
+              <a:spAutoFit/>
+            </a:bodyPr>
+            <a:lstStyle/>
+            <a:p>
+              <a:pPr algn="ctr"/>
+              <a:r>
+                <a:rPr lang="en-IE" sz="2000" b="1" dirty="0">
+                  <a:solidFill>
+                    <a:schemeClr val="bg1"/>
+                  </a:solidFill>
+                </a:rPr>
+                <a:t>Read/Write ItemStore</a:t>
+              </a:r>
+              <a:endParaRPr lang="en-IE" sz="2800" b="1" dirty="0">
                 <a:solidFill>
                   <a:schemeClr val="bg1"/>
                 </a:solidFill>
-              </a:rPr>
-              <a:t>Read/Write ItemStore</a:t>
-            </a:r>
-            <a:endParaRPr lang="en-IE" sz="2800" b="1" dirty="0">
-              <a:solidFill>
-                <a:schemeClr val="bg1"/>
-              </a:solidFill>
-            </a:endParaRPr>
-          </a:p>
-        </p:txBody>
-      </p:sp>
-      <p:sp>
-        <p:nvSpPr>
-          <p:cNvPr id="144" name="TextBox 143">
-            <a:extLst>
-              <a:ext uri="{FF2B5EF4-FFF2-40B4-BE49-F238E27FC236}">
-                <a16:creationId xmlns:a16="http://schemas.microsoft.com/office/drawing/2014/main" id="{0163D558-D9CF-EB15-A543-67E9B490F9E6}"/>
-              </a:ext>
-            </a:extLst>
-          </p:cNvPr>
-          <p:cNvSpPr txBox="1"/>
-          <p:nvPr/>
-        </p:nvSpPr>
-        <p:spPr>
-          <a:xfrm>
-            <a:off x="24093343" y="8745858"/>
-            <a:ext cx="3099279" cy="400110"/>
-          </a:xfrm>
-          <a:prstGeom prst="rect">
-            <a:avLst/>
-          </a:prstGeom>
-          <a:noFill/>
-        </p:spPr>
-        <p:txBody>
-          <a:bodyPr wrap="square">
-            <a:spAutoFit/>
-          </a:bodyPr>
-          <a:lstStyle/>
-          <a:p>
-            <a:pPr algn="ctr"/>
-            <a:r>
-              <a:rPr lang="en-IE" sz="2000" b="1" dirty="0">
+              </a:endParaRPr>
+            </a:p>
+          </p:txBody>
+        </p:sp>
+        <p:sp>
+          <p:nvSpPr>
+            <p:cNvPr id="144" name="TextBox 143">
+              <a:extLst>
+                <a:ext uri="{FF2B5EF4-FFF2-40B4-BE49-F238E27FC236}">
+                  <a16:creationId xmlns:a16="http://schemas.microsoft.com/office/drawing/2014/main" id="{0163D558-D9CF-EB15-A543-67E9B490F9E6}"/>
+                </a:ext>
+              </a:extLst>
+            </p:cNvPr>
+            <p:cNvSpPr txBox="1"/>
+            <p:nvPr/>
+          </p:nvSpPr>
+          <p:spPr>
+            <a:xfrm>
+              <a:off x="24093343" y="8745858"/>
+              <a:ext cx="3099279" cy="400110"/>
+            </a:xfrm>
+            <a:prstGeom prst="rect">
+              <a:avLst/>
+            </a:prstGeom>
+            <a:noFill/>
+          </p:spPr>
+          <p:txBody>
+            <a:bodyPr wrap="square">
+              <a:spAutoFit/>
+            </a:bodyPr>
+            <a:lstStyle/>
+            <a:p>
+              <a:pPr algn="ctr"/>
+              <a:r>
+                <a:rPr lang="en-IE" sz="2000" b="1" dirty="0">
+                  <a:solidFill>
+                    <a:schemeClr val="bg1"/>
+                  </a:solidFill>
+                </a:rPr>
+                <a:t>Commits HostLock File</a:t>
+              </a:r>
+              <a:endParaRPr lang="en-IE" sz="2800" b="1" dirty="0">
                 <a:solidFill>
                   <a:schemeClr val="bg1"/>
                 </a:solidFill>
-              </a:rPr>
-              <a:t>Commits HostLock File</a:t>
-            </a:r>
-            <a:endParaRPr lang="en-IE" sz="2800" b="1" dirty="0">
-              <a:solidFill>
-                <a:schemeClr val="bg1"/>
-              </a:solidFill>
-            </a:endParaRPr>
-          </a:p>
-        </p:txBody>
-      </p:sp>
-      <p:sp>
-        <p:nvSpPr>
-          <p:cNvPr id="145" name="TextBox 144">
-            <a:extLst>
-              <a:ext uri="{FF2B5EF4-FFF2-40B4-BE49-F238E27FC236}">
-                <a16:creationId xmlns:a16="http://schemas.microsoft.com/office/drawing/2014/main" id="{488BA0E4-2698-AA4F-33BC-437205A939A7}"/>
-              </a:ext>
-            </a:extLst>
-          </p:cNvPr>
-          <p:cNvSpPr txBox="1"/>
-          <p:nvPr/>
-        </p:nvSpPr>
-        <p:spPr>
-          <a:xfrm>
-            <a:off x="22975262" y="20443592"/>
-            <a:ext cx="5526310" cy="400110"/>
-          </a:xfrm>
-          <a:prstGeom prst="rect">
-            <a:avLst/>
-          </a:prstGeom>
-          <a:noFill/>
-        </p:spPr>
-        <p:txBody>
-          <a:bodyPr wrap="square">
-            <a:spAutoFit/>
-          </a:bodyPr>
-          <a:lstStyle/>
-          <a:p>
-            <a:pPr algn="ctr"/>
-            <a:r>
-              <a:rPr lang="en-IE" sz="2000" b="1" dirty="0">
+              </a:endParaRPr>
+            </a:p>
+          </p:txBody>
+        </p:sp>
+        <p:sp>
+          <p:nvSpPr>
+            <p:cNvPr id="145" name="TextBox 144">
+              <a:extLst>
+                <a:ext uri="{FF2B5EF4-FFF2-40B4-BE49-F238E27FC236}">
+                  <a16:creationId xmlns:a16="http://schemas.microsoft.com/office/drawing/2014/main" id="{488BA0E4-2698-AA4F-33BC-437205A939A7}"/>
+                </a:ext>
+              </a:extLst>
+            </p:cNvPr>
+            <p:cNvSpPr txBox="1"/>
+            <p:nvPr/>
+          </p:nvSpPr>
+          <p:spPr>
+            <a:xfrm>
+              <a:off x="22975262" y="20443592"/>
+              <a:ext cx="5526310" cy="400110"/>
+            </a:xfrm>
+            <a:prstGeom prst="rect">
+              <a:avLst/>
+            </a:prstGeom>
+            <a:noFill/>
+          </p:spPr>
+          <p:txBody>
+            <a:bodyPr wrap="square">
+              <a:spAutoFit/>
+            </a:bodyPr>
+            <a:lstStyle/>
+            <a:p>
+              <a:pPr algn="ctr"/>
+              <a:r>
+                <a:rPr lang="en-IE" sz="2000" b="1" dirty="0">
+                  <a:solidFill>
+                    <a:schemeClr val="bg1"/>
+                  </a:solidFill>
+                </a:rPr>
+                <a:t>Clears lock files for the next elected leader</a:t>
+              </a:r>
+              <a:endParaRPr lang="en-IE" sz="2800" b="1" dirty="0">
                 <a:solidFill>
                   <a:schemeClr val="bg1"/>
                 </a:solidFill>
-              </a:rPr>
-              <a:t>Clears lock files for the next elected leader</a:t>
-            </a:r>
-            <a:endParaRPr lang="en-IE" sz="2800" b="1" dirty="0">
-              <a:solidFill>
-                <a:schemeClr val="bg1"/>
-              </a:solidFill>
-            </a:endParaRPr>
-          </a:p>
-        </p:txBody>
-      </p:sp>
-      <p:sp>
-        <p:nvSpPr>
-          <p:cNvPr id="146" name="TextBox 145">
-            <a:extLst>
-              <a:ext uri="{FF2B5EF4-FFF2-40B4-BE49-F238E27FC236}">
-                <a16:creationId xmlns:a16="http://schemas.microsoft.com/office/drawing/2014/main" id="{3B8E43E1-7436-194E-48AB-E1CA8307367E}"/>
-              </a:ext>
-            </a:extLst>
-          </p:cNvPr>
-          <p:cNvSpPr txBox="1"/>
-          <p:nvPr/>
-        </p:nvSpPr>
-        <p:spPr>
-          <a:xfrm>
-            <a:off x="2527706" y="20119124"/>
-            <a:ext cx="3099279" cy="400110"/>
-          </a:xfrm>
-          <a:prstGeom prst="rect">
-            <a:avLst/>
-          </a:prstGeom>
-          <a:noFill/>
-        </p:spPr>
-        <p:txBody>
-          <a:bodyPr wrap="square">
-            <a:spAutoFit/>
-          </a:bodyPr>
-          <a:lstStyle/>
-          <a:p>
-            <a:pPr algn="ctr"/>
-            <a:r>
-              <a:rPr lang="en-IE" sz="2000" b="1" dirty="0">
+              </a:endParaRPr>
+            </a:p>
+          </p:txBody>
+        </p:sp>
+        <p:sp>
+          <p:nvSpPr>
+            <p:cNvPr id="146" name="TextBox 145">
+              <a:extLst>
+                <a:ext uri="{FF2B5EF4-FFF2-40B4-BE49-F238E27FC236}">
+                  <a16:creationId xmlns:a16="http://schemas.microsoft.com/office/drawing/2014/main" id="{3B8E43E1-7436-194E-48AB-E1CA8307367E}"/>
+                </a:ext>
+              </a:extLst>
+            </p:cNvPr>
+            <p:cNvSpPr txBox="1"/>
+            <p:nvPr/>
+          </p:nvSpPr>
+          <p:spPr>
+            <a:xfrm>
+              <a:off x="2527706" y="20119124"/>
+              <a:ext cx="3099279" cy="400110"/>
+            </a:xfrm>
+            <a:prstGeom prst="rect">
+              <a:avLst/>
+            </a:prstGeom>
+            <a:noFill/>
+          </p:spPr>
+          <p:txBody>
+            <a:bodyPr wrap="square">
+              <a:spAutoFit/>
+            </a:bodyPr>
+            <a:lstStyle/>
+            <a:p>
+              <a:pPr algn="ctr"/>
+              <a:r>
+                <a:rPr lang="en-IE" sz="2000" b="1" dirty="0">
+                  <a:solidFill>
+                    <a:schemeClr val="bg1"/>
+                  </a:solidFill>
+                </a:rPr>
+                <a:t>Host holds OS lock</a:t>
+              </a:r>
+              <a:endParaRPr lang="en-IE" sz="2800" b="1" dirty="0">
                 <a:solidFill>
                   <a:schemeClr val="bg1"/>
                 </a:solidFill>
-              </a:rPr>
-              <a:t>Host holds OS lock</a:t>
-            </a:r>
-            <a:endParaRPr lang="en-IE" sz="2800" b="1" dirty="0">
-              <a:solidFill>
-                <a:schemeClr val="bg1"/>
-              </a:solidFill>
-            </a:endParaRPr>
-          </a:p>
-        </p:txBody>
-      </p:sp>
-      <p:sp>
-        <p:nvSpPr>
-          <p:cNvPr id="147" name="TextBox 146">
-            <a:extLst>
-              <a:ext uri="{FF2B5EF4-FFF2-40B4-BE49-F238E27FC236}">
-                <a16:creationId xmlns:a16="http://schemas.microsoft.com/office/drawing/2014/main" id="{D60B3236-5E5F-740E-7BF1-6307428B9C13}"/>
-              </a:ext>
-            </a:extLst>
-          </p:cNvPr>
-          <p:cNvSpPr txBox="1"/>
-          <p:nvPr/>
-        </p:nvSpPr>
-        <p:spPr>
-          <a:xfrm>
-            <a:off x="12017069" y="6417953"/>
-            <a:ext cx="7519788" cy="2708434"/>
-          </a:xfrm>
-          <a:prstGeom prst="rect">
-            <a:avLst/>
-          </a:prstGeom>
-          <a:noFill/>
-        </p:spPr>
-        <p:txBody>
-          <a:bodyPr wrap="square" rtlCol="0">
-            <a:spAutoFit/>
-          </a:bodyPr>
-          <a:lstStyle/>
-          <a:p>
-            <a:pPr algn="ctr"/>
-            <a:r>
-              <a:rPr lang="en-IE" sz="3400" b="1" dirty="0">
-                <a:solidFill>
-                  <a:schemeClr val="bg1"/>
-                </a:solidFill>
-              </a:rPr>
-              <a:t>1769689749.HostA-InstanceA.json</a:t>
-            </a:r>
-          </a:p>
-          <a:p>
-            <a:pPr algn="ctr"/>
-            <a:r>
-              <a:rPr lang="en-IE" sz="3400" b="1" dirty="0">
-                <a:solidFill>
-                  <a:schemeClr val="bg1"/>
-                </a:solidFill>
-              </a:rPr>
-              <a:t>1769689809.HostA-InstanceB.json</a:t>
-            </a:r>
-          </a:p>
-          <a:p>
-            <a:pPr algn="ctr"/>
-            <a:r>
-              <a:rPr lang="en-IE" sz="3400" b="1" dirty="0">
-                <a:solidFill>
-                  <a:schemeClr val="bg1"/>
-                </a:solidFill>
-              </a:rPr>
-              <a:t>1769689869.HostB-InstanceZ.json</a:t>
-            </a:r>
-          </a:p>
-          <a:p>
-            <a:pPr algn="ctr"/>
-            <a:r>
-              <a:rPr lang="en-IE" sz="3400" b="1" dirty="0">
-                <a:solidFill>
-                  <a:schemeClr val="bg1"/>
-                </a:solidFill>
-              </a:rPr>
-              <a:t>1769689929.HostR-InstanceG.json</a:t>
-            </a:r>
-          </a:p>
-          <a:p>
-            <a:pPr algn="ctr"/>
-            <a:r>
-              <a:rPr lang="en-IE" sz="3400" b="1" dirty="0">
-                <a:solidFill>
-                  <a:schemeClr val="bg1"/>
-                </a:solidFill>
-              </a:rPr>
-              <a:t>1769689989.HostA-InstanceF.json</a:t>
-            </a:r>
-          </a:p>
-        </p:txBody>
-      </p:sp>
+              </a:endParaRPr>
+            </a:p>
+          </p:txBody>
+        </p:sp>
+        <p:sp>
+          <p:nvSpPr>
+            <p:cNvPr id="147" name="TextBox 146">
+              <a:extLst>
+                <a:ext uri="{FF2B5EF4-FFF2-40B4-BE49-F238E27FC236}">
+                  <a16:creationId xmlns:a16="http://schemas.microsoft.com/office/drawing/2014/main" id="{D60B3236-5E5F-740E-7BF1-6307428B9C13}"/>
+                </a:ext>
+              </a:extLst>
+            </p:cNvPr>
+            <p:cNvSpPr txBox="1"/>
+            <p:nvPr/>
+          </p:nvSpPr>
+          <p:spPr>
+            <a:xfrm>
+              <a:off x="12017069" y="6417953"/>
+              <a:ext cx="7519788" cy="2708434"/>
+            </a:xfrm>
+            <a:prstGeom prst="rect">
+              <a:avLst/>
+            </a:prstGeom>
+            <a:noFill/>
+          </p:spPr>
+          <p:txBody>
+            <a:bodyPr wrap="square" rtlCol="0">
+              <a:spAutoFit/>
+            </a:bodyPr>
+            <a:lstStyle/>
+            <a:p>
+              <a:pPr algn="ctr"/>
+              <a:r>
+                <a:rPr lang="en-IE" sz="3400" b="1" dirty="0">
+                  <a:solidFill>
+                    <a:schemeClr val="bg1"/>
+                  </a:solidFill>
+                </a:rPr>
+                <a:t>1769689749.HostA-InstanceA.json</a:t>
+              </a:r>
+            </a:p>
+            <a:p>
+              <a:pPr algn="ctr"/>
+              <a:r>
+                <a:rPr lang="en-IE" sz="3400" b="1" dirty="0">
+                  <a:solidFill>
+                    <a:schemeClr val="bg1"/>
+                  </a:solidFill>
+                </a:rPr>
+                <a:t>1769689809.HostA-InstanceB.json</a:t>
+              </a:r>
+            </a:p>
+            <a:p>
+              <a:pPr algn="ctr"/>
+              <a:r>
+                <a:rPr lang="en-IE" sz="3400" b="1" dirty="0">
+                  <a:solidFill>
+                    <a:schemeClr val="bg1"/>
+                  </a:solidFill>
+                </a:rPr>
+                <a:t>1769689869.HostB-InstanceZ.json</a:t>
+              </a:r>
+            </a:p>
+            <a:p>
+              <a:pPr algn="ctr"/>
+              <a:r>
+                <a:rPr lang="en-IE" sz="3400" b="1" dirty="0">
+                  <a:solidFill>
+                    <a:schemeClr val="bg1"/>
+                  </a:solidFill>
+                </a:rPr>
+                <a:t>1769689929.HostR-InstanceG.json</a:t>
+              </a:r>
+            </a:p>
+            <a:p>
+              <a:pPr algn="ctr"/>
+              <a:r>
+                <a:rPr lang="en-IE" sz="3400" b="1" dirty="0">
+                  <a:solidFill>
+                    <a:schemeClr val="bg1"/>
+                  </a:solidFill>
+                </a:rPr>
+                <a:t>1769689989.HostA-InstanceF.json</a:t>
+              </a:r>
+            </a:p>
+          </p:txBody>
+        </p:sp>
+      </p:grpSp>
     </p:spTree>
     <p:extLst>
       <p:ext uri="{BB962C8B-B14F-4D97-AF65-F5344CB8AC3E}">

--- a/tasktide/docs/Diagrams/Diagrams.pptx
+++ b/tasktide/docs/Diagrams/Diagrams.pptx
@@ -9010,7 +9010,7 @@
           <a:p>
             <a:fld id="{CB18BCE7-0017-4B0C-A2FB-E6F7885367AC}" type="datetimeFigureOut">
               <a:rPr lang="en-IE" smtClean="0"/>
-              <a:t>12/02/2026</a:t>
+              <a:t>13/02/2026</a:t>
             </a:fld>
             <a:endParaRPr lang="en-IE"/>
           </a:p>
@@ -9514,7 +9514,7 @@
           <a:p>
             <a:fld id="{79C0705B-4870-4470-A32F-307AEE1697AB}" type="datetimeFigureOut">
               <a:rPr lang="en-IE" smtClean="0"/>
-              <a:t>12/02/2026</a:t>
+              <a:t>13/02/2026</a:t>
             </a:fld>
             <a:endParaRPr lang="en-IE"/>
           </a:p>
@@ -9684,7 +9684,7 @@
           <a:p>
             <a:fld id="{79C0705B-4870-4470-A32F-307AEE1697AB}" type="datetimeFigureOut">
               <a:rPr lang="en-IE" smtClean="0"/>
-              <a:t>12/02/2026</a:t>
+              <a:t>13/02/2026</a:t>
             </a:fld>
             <a:endParaRPr lang="en-IE"/>
           </a:p>
@@ -9864,7 +9864,7 @@
           <a:p>
             <a:fld id="{79C0705B-4870-4470-A32F-307AEE1697AB}" type="datetimeFigureOut">
               <a:rPr lang="en-IE" smtClean="0"/>
-              <a:t>12/02/2026</a:t>
+              <a:t>13/02/2026</a:t>
             </a:fld>
             <a:endParaRPr lang="en-IE"/>
           </a:p>
@@ -10034,7 +10034,7 @@
           <a:p>
             <a:fld id="{79C0705B-4870-4470-A32F-307AEE1697AB}" type="datetimeFigureOut">
               <a:rPr lang="en-IE" smtClean="0"/>
-              <a:t>12/02/2026</a:t>
+              <a:t>13/02/2026</a:t>
             </a:fld>
             <a:endParaRPr lang="en-IE"/>
           </a:p>
@@ -10280,7 +10280,7 @@
           <a:p>
             <a:fld id="{79C0705B-4870-4470-A32F-307AEE1697AB}" type="datetimeFigureOut">
               <a:rPr lang="en-IE" smtClean="0"/>
-              <a:t>12/02/2026</a:t>
+              <a:t>13/02/2026</a:t>
             </a:fld>
             <a:endParaRPr lang="en-IE"/>
           </a:p>
@@ -10512,7 +10512,7 @@
           <a:p>
             <a:fld id="{79C0705B-4870-4470-A32F-307AEE1697AB}" type="datetimeFigureOut">
               <a:rPr lang="en-IE" smtClean="0"/>
-              <a:t>12/02/2026</a:t>
+              <a:t>13/02/2026</a:t>
             </a:fld>
             <a:endParaRPr lang="en-IE"/>
           </a:p>
@@ -10879,7 +10879,7 @@
           <a:p>
             <a:fld id="{79C0705B-4870-4470-A32F-307AEE1697AB}" type="datetimeFigureOut">
               <a:rPr lang="en-IE" smtClean="0"/>
-              <a:t>12/02/2026</a:t>
+              <a:t>13/02/2026</a:t>
             </a:fld>
             <a:endParaRPr lang="en-IE"/>
           </a:p>
@@ -10997,7 +10997,7 @@
           <a:p>
             <a:fld id="{79C0705B-4870-4470-A32F-307AEE1697AB}" type="datetimeFigureOut">
               <a:rPr lang="en-IE" smtClean="0"/>
-              <a:t>12/02/2026</a:t>
+              <a:t>13/02/2026</a:t>
             </a:fld>
             <a:endParaRPr lang="en-IE"/>
           </a:p>
@@ -11092,7 +11092,7 @@
           <a:p>
             <a:fld id="{79C0705B-4870-4470-A32F-307AEE1697AB}" type="datetimeFigureOut">
               <a:rPr lang="en-IE" smtClean="0"/>
-              <a:t>12/02/2026</a:t>
+              <a:t>13/02/2026</a:t>
             </a:fld>
             <a:endParaRPr lang="en-IE"/>
           </a:p>
@@ -11369,7 +11369,7 @@
           <a:p>
             <a:fld id="{79C0705B-4870-4470-A32F-307AEE1697AB}" type="datetimeFigureOut">
               <a:rPr lang="en-IE" smtClean="0"/>
-              <a:t>12/02/2026</a:t>
+              <a:t>13/02/2026</a:t>
             </a:fld>
             <a:endParaRPr lang="en-IE"/>
           </a:p>
@@ -11626,7 +11626,7 @@
           <a:p>
             <a:fld id="{79C0705B-4870-4470-A32F-307AEE1697AB}" type="datetimeFigureOut">
               <a:rPr lang="en-IE" smtClean="0"/>
-              <a:t>12/02/2026</a:t>
+              <a:t>13/02/2026</a:t>
             </a:fld>
             <a:endParaRPr lang="en-IE"/>
           </a:p>
@@ -11839,7 +11839,7 @@
           <a:p>
             <a:fld id="{79C0705B-4870-4470-A32F-307AEE1697AB}" type="datetimeFigureOut">
               <a:rPr lang="en-IE" smtClean="0"/>
-              <a:t>12/02/2026</a:t>
+              <a:t>13/02/2026</a:t>
             </a:fld>
             <a:endParaRPr lang="en-IE"/>
           </a:p>
@@ -13464,10 +13464,10 @@
       </p:grpSpPr>
       <p:pic>
         <p:nvPicPr>
-          <p:cNvPr id="54" name="Picture 53" descr="A logo with waves and text&#10;&#10;AI-generated content may be incorrect.">
+          <p:cNvPr id="4" name="Picture 3" descr="A logo of a white tooth with a red ball and bow and arrow&#10;&#10;AI-generated content may be incorrect.">
             <a:extLst>
               <a:ext uri="{FF2B5EF4-FFF2-40B4-BE49-F238E27FC236}">
-                <a16:creationId xmlns:a16="http://schemas.microsoft.com/office/drawing/2014/main" id="{B7C66763-4707-DC3A-EEC9-C73E278DD295}"/>
+                <a16:creationId xmlns:a16="http://schemas.microsoft.com/office/drawing/2014/main" id="{E1FE6B74-6CAE-A5DB-C447-6DF730DC7628}"/>
               </a:ext>
             </a:extLst>
           </p:cNvPr>
@@ -13490,2340 +13490,7 @@
         </p:blipFill>
         <p:spPr>
           <a:xfrm>
-            <a:off x="18859501" y="362011"/>
-            <a:ext cx="10949586" cy="9736592"/>
-          </a:xfrm>
-          <a:prstGeom prst="rect">
-            <a:avLst/>
-          </a:prstGeom>
-        </p:spPr>
-      </p:pic>
-      <p:grpSp>
-        <p:nvGrpSpPr>
-          <p:cNvPr id="62" name="Group 61">
-            <a:extLst>
-              <a:ext uri="{FF2B5EF4-FFF2-40B4-BE49-F238E27FC236}">
-                <a16:creationId xmlns:a16="http://schemas.microsoft.com/office/drawing/2014/main" id="{B03D69C6-5AB3-8C83-953D-9F38BECE9452}"/>
-              </a:ext>
-            </a:extLst>
-          </p:cNvPr>
-          <p:cNvGrpSpPr/>
-          <p:nvPr/>
-        </p:nvGrpSpPr>
-        <p:grpSpPr>
-          <a:xfrm>
-            <a:off x="457200" y="3674793"/>
-            <a:ext cx="29664648" cy="15504268"/>
-            <a:chOff x="457200" y="3674793"/>
-            <a:chExt cx="29664648" cy="15504268"/>
-          </a:xfrm>
-        </p:grpSpPr>
-        <p:sp>
-          <p:nvSpPr>
-            <p:cNvPr id="67" name="Flowchart: Alternate Process 66">
-              <a:extLst>
-                <a:ext uri="{FF2B5EF4-FFF2-40B4-BE49-F238E27FC236}">
-                  <a16:creationId xmlns:a16="http://schemas.microsoft.com/office/drawing/2014/main" id="{6D46A4F6-A6E6-EEDD-9DAA-C85003898CD6}"/>
-                </a:ext>
-              </a:extLst>
-            </p:cNvPr>
-            <p:cNvSpPr/>
-            <p:nvPr/>
-          </p:nvSpPr>
-          <p:spPr>
-            <a:xfrm>
-              <a:off x="4938117" y="3674793"/>
-              <a:ext cx="6201238" cy="1263908"/>
-            </a:xfrm>
-            <a:prstGeom prst="flowChartAlternateProcess">
-              <a:avLst/>
-            </a:prstGeom>
-            <a:gradFill flip="none" rotWithShape="1">
-              <a:gsLst>
-                <a:gs pos="0">
-                  <a:schemeClr val="accent1">
-                    <a:shade val="30000"/>
-                    <a:satMod val="115000"/>
-                  </a:schemeClr>
-                </a:gs>
-                <a:gs pos="50000">
-                  <a:schemeClr val="accent1">
-                    <a:shade val="67500"/>
-                    <a:satMod val="115000"/>
-                  </a:schemeClr>
-                </a:gs>
-                <a:gs pos="100000">
-                  <a:schemeClr val="accent1">
-                    <a:shade val="100000"/>
-                    <a:satMod val="115000"/>
-                  </a:schemeClr>
-                </a:gs>
-              </a:gsLst>
-              <a:lin ang="5400000" scaled="1"/>
-              <a:tileRect/>
-            </a:gradFill>
-            <a:ln w="57150">
-              <a:solidFill>
-                <a:schemeClr val="tx1"/>
-              </a:solidFill>
-            </a:ln>
-          </p:spPr>
-          <p:style>
-            <a:lnRef idx="2">
-              <a:schemeClr val="accent1">
-                <a:shade val="15000"/>
-              </a:schemeClr>
-            </a:lnRef>
-            <a:fillRef idx="1">
-              <a:schemeClr val="accent1"/>
-            </a:fillRef>
-            <a:effectRef idx="0">
-              <a:schemeClr val="accent1"/>
-            </a:effectRef>
-            <a:fontRef idx="minor">
-              <a:schemeClr val="lt1"/>
-            </a:fontRef>
-          </p:style>
-          <p:txBody>
-            <a:bodyPr rtlCol="0" anchor="ctr"/>
-            <a:lstStyle/>
-            <a:p>
-              <a:pPr algn="ctr"/>
-              <a:r>
-                <a:rPr lang="en-IE" sz="5000" b="1" dirty="0"/>
-                <a:t>TaskTide Client</a:t>
-              </a:r>
-            </a:p>
-          </p:txBody>
-        </p:sp>
-        <p:sp>
-          <p:nvSpPr>
-            <p:cNvPr id="69" name="Flowchart: Alternate Process 68">
-              <a:extLst>
-                <a:ext uri="{FF2B5EF4-FFF2-40B4-BE49-F238E27FC236}">
-                  <a16:creationId xmlns:a16="http://schemas.microsoft.com/office/drawing/2014/main" id="{483EFC43-8D08-EDDA-C48D-B19EF8145547}"/>
-                </a:ext>
-              </a:extLst>
-            </p:cNvPr>
-            <p:cNvSpPr/>
-            <p:nvPr/>
-          </p:nvSpPr>
-          <p:spPr>
-            <a:xfrm>
-              <a:off x="1689690" y="6136439"/>
-              <a:ext cx="4585982" cy="1343146"/>
-            </a:xfrm>
-            <a:prstGeom prst="flowChartAlternateProcess">
-              <a:avLst/>
-            </a:prstGeom>
-            <a:gradFill flip="none" rotWithShape="1">
-              <a:gsLst>
-                <a:gs pos="0">
-                  <a:schemeClr val="accent1">
-                    <a:shade val="30000"/>
-                    <a:satMod val="115000"/>
-                  </a:schemeClr>
-                </a:gs>
-                <a:gs pos="50000">
-                  <a:schemeClr val="accent1">
-                    <a:shade val="67500"/>
-                    <a:satMod val="115000"/>
-                  </a:schemeClr>
-                </a:gs>
-                <a:gs pos="100000">
-                  <a:schemeClr val="accent1">
-                    <a:shade val="100000"/>
-                    <a:satMod val="115000"/>
-                  </a:schemeClr>
-                </a:gs>
-              </a:gsLst>
-              <a:lin ang="5400000" scaled="1"/>
-              <a:tileRect/>
-            </a:gradFill>
-            <a:ln w="57150">
-              <a:solidFill>
-                <a:schemeClr val="tx1"/>
-              </a:solidFill>
-            </a:ln>
-          </p:spPr>
-          <p:style>
-            <a:lnRef idx="2">
-              <a:schemeClr val="accent1">
-                <a:shade val="15000"/>
-              </a:schemeClr>
-            </a:lnRef>
-            <a:fillRef idx="1">
-              <a:schemeClr val="accent1"/>
-            </a:fillRef>
-            <a:effectRef idx="0">
-              <a:schemeClr val="accent1"/>
-            </a:effectRef>
-            <a:fontRef idx="minor">
-              <a:schemeClr val="lt1"/>
-            </a:fontRef>
-          </p:style>
-          <p:txBody>
-            <a:bodyPr rtlCol="0" anchor="ctr"/>
-            <a:lstStyle/>
-            <a:p>
-              <a:pPr algn="ctr"/>
-              <a:r>
-                <a:rPr lang="en-IE" sz="5000" b="1" dirty="0"/>
-                <a:t>ManagerClient</a:t>
-              </a:r>
-            </a:p>
-          </p:txBody>
-        </p:sp>
-        <p:sp>
-          <p:nvSpPr>
-            <p:cNvPr id="70" name="Flowchart: Alternate Process 69">
-              <a:extLst>
-                <a:ext uri="{FF2B5EF4-FFF2-40B4-BE49-F238E27FC236}">
-                  <a16:creationId xmlns:a16="http://schemas.microsoft.com/office/drawing/2014/main" id="{BF743EF5-BB08-F701-6DF6-8EA8AAB63398}"/>
-                </a:ext>
-              </a:extLst>
-            </p:cNvPr>
-            <p:cNvSpPr/>
-            <p:nvPr/>
-          </p:nvSpPr>
-          <p:spPr>
-            <a:xfrm>
-              <a:off x="8868193" y="6149460"/>
-              <a:ext cx="4352343" cy="1335648"/>
-            </a:xfrm>
-            <a:prstGeom prst="flowChartAlternateProcess">
-              <a:avLst/>
-            </a:prstGeom>
-            <a:gradFill flip="none" rotWithShape="1">
-              <a:gsLst>
-                <a:gs pos="0">
-                  <a:schemeClr val="accent1">
-                    <a:shade val="30000"/>
-                    <a:satMod val="115000"/>
-                  </a:schemeClr>
-                </a:gs>
-                <a:gs pos="50000">
-                  <a:schemeClr val="accent1">
-                    <a:shade val="67500"/>
-                    <a:satMod val="115000"/>
-                  </a:schemeClr>
-                </a:gs>
-                <a:gs pos="100000">
-                  <a:schemeClr val="accent1">
-                    <a:shade val="100000"/>
-                    <a:satMod val="115000"/>
-                  </a:schemeClr>
-                </a:gs>
-              </a:gsLst>
-              <a:lin ang="5400000" scaled="1"/>
-              <a:tileRect/>
-            </a:gradFill>
-            <a:ln w="57150">
-              <a:solidFill>
-                <a:schemeClr val="tx1"/>
-              </a:solidFill>
-            </a:ln>
-          </p:spPr>
-          <p:style>
-            <a:lnRef idx="2">
-              <a:schemeClr val="accent1">
-                <a:shade val="15000"/>
-              </a:schemeClr>
-            </a:lnRef>
-            <a:fillRef idx="1">
-              <a:schemeClr val="accent1"/>
-            </a:fillRef>
-            <a:effectRef idx="0">
-              <a:schemeClr val="accent1"/>
-            </a:effectRef>
-            <a:fontRef idx="minor">
-              <a:schemeClr val="lt1"/>
-            </a:fontRef>
-          </p:style>
-          <p:txBody>
-            <a:bodyPr rtlCol="0" anchor="ctr"/>
-            <a:lstStyle/>
-            <a:p>
-              <a:pPr algn="ctr"/>
-              <a:r>
-                <a:rPr lang="en-IE" sz="5000" b="1" dirty="0"/>
-                <a:t>EngineClient</a:t>
-              </a:r>
-            </a:p>
-          </p:txBody>
-        </p:sp>
-        <p:sp>
-          <p:nvSpPr>
-            <p:cNvPr id="71" name="Flowchart: Alternate Process 70">
-              <a:extLst>
-                <a:ext uri="{FF2B5EF4-FFF2-40B4-BE49-F238E27FC236}">
-                  <a16:creationId xmlns:a16="http://schemas.microsoft.com/office/drawing/2014/main" id="{A60E3390-6BDF-75B0-676A-C81444615F2C}"/>
-                </a:ext>
-              </a:extLst>
-            </p:cNvPr>
-            <p:cNvSpPr/>
-            <p:nvPr/>
-          </p:nvSpPr>
-          <p:spPr>
-            <a:xfrm>
-              <a:off x="4608183" y="8358626"/>
-              <a:ext cx="6531163" cy="1343146"/>
-            </a:xfrm>
-            <a:prstGeom prst="flowChartAlternateProcess">
-              <a:avLst/>
-            </a:prstGeom>
-            <a:gradFill flip="none" rotWithShape="1">
-              <a:gsLst>
-                <a:gs pos="0">
-                  <a:schemeClr val="accent1">
-                    <a:shade val="30000"/>
-                    <a:satMod val="115000"/>
-                  </a:schemeClr>
-                </a:gs>
-                <a:gs pos="50000">
-                  <a:schemeClr val="accent1">
-                    <a:shade val="67500"/>
-                    <a:satMod val="115000"/>
-                  </a:schemeClr>
-                </a:gs>
-                <a:gs pos="100000">
-                  <a:schemeClr val="accent1">
-                    <a:shade val="100000"/>
-                    <a:satMod val="115000"/>
-                  </a:schemeClr>
-                </a:gs>
-              </a:gsLst>
-              <a:lin ang="5400000" scaled="1"/>
-              <a:tileRect/>
-            </a:gradFill>
-            <a:ln w="57150">
-              <a:solidFill>
-                <a:schemeClr val="tx1"/>
-              </a:solidFill>
-            </a:ln>
-          </p:spPr>
-          <p:style>
-            <a:lnRef idx="2">
-              <a:schemeClr val="accent1">
-                <a:shade val="15000"/>
-              </a:schemeClr>
-            </a:lnRef>
-            <a:fillRef idx="1">
-              <a:schemeClr val="accent1"/>
-            </a:fillRef>
-            <a:effectRef idx="0">
-              <a:schemeClr val="accent1"/>
-            </a:effectRef>
-            <a:fontRef idx="minor">
-              <a:schemeClr val="lt1"/>
-            </a:fontRef>
-          </p:style>
-          <p:txBody>
-            <a:bodyPr rtlCol="0" anchor="ctr"/>
-            <a:lstStyle/>
-            <a:p>
-              <a:pPr algn="ctr"/>
-              <a:r>
-                <a:rPr lang="en-IE" sz="5000" b="1" dirty="0"/>
-                <a:t>TaskTideService</a:t>
-              </a:r>
-            </a:p>
-          </p:txBody>
-        </p:sp>
-        <p:sp>
-          <p:nvSpPr>
-            <p:cNvPr id="72" name="Flowchart: Alternate Process 71">
-              <a:extLst>
-                <a:ext uri="{FF2B5EF4-FFF2-40B4-BE49-F238E27FC236}">
-                  <a16:creationId xmlns:a16="http://schemas.microsoft.com/office/drawing/2014/main" id="{761A1A9A-FBA2-221A-ED5A-8397CBBF7091}"/>
-                </a:ext>
-              </a:extLst>
-            </p:cNvPr>
-            <p:cNvSpPr/>
-            <p:nvPr/>
-          </p:nvSpPr>
-          <p:spPr>
-            <a:xfrm>
-              <a:off x="4608183" y="10503996"/>
-              <a:ext cx="6418772" cy="1182201"/>
-            </a:xfrm>
-            <a:prstGeom prst="flowChartAlternateProcess">
-              <a:avLst/>
-            </a:prstGeom>
-            <a:gradFill flip="none" rotWithShape="1">
-              <a:gsLst>
-                <a:gs pos="0">
-                  <a:schemeClr val="accent1">
-                    <a:shade val="30000"/>
-                    <a:satMod val="115000"/>
-                  </a:schemeClr>
-                </a:gs>
-                <a:gs pos="50000">
-                  <a:schemeClr val="accent1">
-                    <a:shade val="67500"/>
-                    <a:satMod val="115000"/>
-                  </a:schemeClr>
-                </a:gs>
-                <a:gs pos="100000">
-                  <a:schemeClr val="accent1">
-                    <a:shade val="100000"/>
-                    <a:satMod val="115000"/>
-                  </a:schemeClr>
-                </a:gs>
-              </a:gsLst>
-              <a:lin ang="5400000" scaled="1"/>
-              <a:tileRect/>
-            </a:gradFill>
-            <a:ln w="57150">
-              <a:solidFill>
-                <a:schemeClr val="tx1"/>
-              </a:solidFill>
-            </a:ln>
-          </p:spPr>
-          <p:style>
-            <a:lnRef idx="2">
-              <a:schemeClr val="accent1">
-                <a:shade val="15000"/>
-              </a:schemeClr>
-            </a:lnRef>
-            <a:fillRef idx="1">
-              <a:schemeClr val="accent1"/>
-            </a:fillRef>
-            <a:effectRef idx="0">
-              <a:schemeClr val="accent1"/>
-            </a:effectRef>
-            <a:fontRef idx="minor">
-              <a:schemeClr val="lt1"/>
-            </a:fontRef>
-          </p:style>
-          <p:txBody>
-            <a:bodyPr rtlCol="0" anchor="ctr"/>
-            <a:lstStyle/>
-            <a:p>
-              <a:pPr algn="ctr"/>
-              <a:r>
-                <a:rPr lang="en-IE" sz="5000" b="1" dirty="0"/>
-                <a:t>TaskTideRepository</a:t>
-              </a:r>
-            </a:p>
-          </p:txBody>
-        </p:sp>
-        <p:sp>
-          <p:nvSpPr>
-            <p:cNvPr id="73" name="Flowchart: Alternate Process 72">
-              <a:extLst>
-                <a:ext uri="{FF2B5EF4-FFF2-40B4-BE49-F238E27FC236}">
-                  <a16:creationId xmlns:a16="http://schemas.microsoft.com/office/drawing/2014/main" id="{6CF3679C-A42B-BB1A-89A6-3779A8CAC4B0}"/>
-                </a:ext>
-              </a:extLst>
-            </p:cNvPr>
-            <p:cNvSpPr/>
-            <p:nvPr/>
-          </p:nvSpPr>
-          <p:spPr>
-            <a:xfrm>
-              <a:off x="457200" y="13383399"/>
-              <a:ext cx="6163026" cy="1270617"/>
-            </a:xfrm>
-            <a:prstGeom prst="flowChartAlternateProcess">
-              <a:avLst/>
-            </a:prstGeom>
-            <a:gradFill flip="none" rotWithShape="1">
-              <a:gsLst>
-                <a:gs pos="0">
-                  <a:schemeClr val="accent1">
-                    <a:shade val="30000"/>
-                    <a:satMod val="115000"/>
-                  </a:schemeClr>
-                </a:gs>
-                <a:gs pos="50000">
-                  <a:schemeClr val="accent1">
-                    <a:shade val="67500"/>
-                    <a:satMod val="115000"/>
-                  </a:schemeClr>
-                </a:gs>
-                <a:gs pos="100000">
-                  <a:schemeClr val="accent1">
-                    <a:shade val="100000"/>
-                    <a:satMod val="115000"/>
-                  </a:schemeClr>
-                </a:gs>
-              </a:gsLst>
-              <a:lin ang="5400000" scaled="1"/>
-              <a:tileRect/>
-            </a:gradFill>
-            <a:ln w="57150">
-              <a:solidFill>
-                <a:schemeClr val="tx1"/>
-              </a:solidFill>
-            </a:ln>
-          </p:spPr>
-          <p:style>
-            <a:lnRef idx="2">
-              <a:schemeClr val="accent1">
-                <a:shade val="15000"/>
-              </a:schemeClr>
-            </a:lnRef>
-            <a:fillRef idx="1">
-              <a:schemeClr val="accent1"/>
-            </a:fillRef>
-            <a:effectRef idx="0">
-              <a:schemeClr val="accent1"/>
-            </a:effectRef>
-            <a:fontRef idx="minor">
-              <a:schemeClr val="lt1"/>
-            </a:fontRef>
-          </p:style>
-          <p:txBody>
-            <a:bodyPr rtlCol="0" anchor="ctr"/>
-            <a:lstStyle/>
-            <a:p>
-              <a:pPr algn="ctr"/>
-              <a:r>
-                <a:rPr lang="en-IE" sz="5000" b="1" dirty="0"/>
-                <a:t>TemplateRepository</a:t>
-              </a:r>
-            </a:p>
-          </p:txBody>
-        </p:sp>
-        <p:sp>
-          <p:nvSpPr>
-            <p:cNvPr id="74" name="Flowchart: Alternate Process 73">
-              <a:extLst>
-                <a:ext uri="{FF2B5EF4-FFF2-40B4-BE49-F238E27FC236}">
-                  <a16:creationId xmlns:a16="http://schemas.microsoft.com/office/drawing/2014/main" id="{A9DF68DD-9327-AAF2-6D6A-40C7FF82282B}"/>
-                </a:ext>
-              </a:extLst>
-            </p:cNvPr>
-            <p:cNvSpPr/>
-            <p:nvPr/>
-          </p:nvSpPr>
-          <p:spPr>
-            <a:xfrm>
-              <a:off x="12727103" y="14281671"/>
-              <a:ext cx="6440138" cy="1270455"/>
-            </a:xfrm>
-            <a:prstGeom prst="flowChartAlternateProcess">
-              <a:avLst/>
-            </a:prstGeom>
-            <a:gradFill flip="none" rotWithShape="1">
-              <a:gsLst>
-                <a:gs pos="0">
-                  <a:schemeClr val="accent1">
-                    <a:shade val="30000"/>
-                    <a:satMod val="115000"/>
-                  </a:schemeClr>
-                </a:gs>
-                <a:gs pos="50000">
-                  <a:schemeClr val="accent1">
-                    <a:shade val="67500"/>
-                    <a:satMod val="115000"/>
-                  </a:schemeClr>
-                </a:gs>
-                <a:gs pos="100000">
-                  <a:schemeClr val="accent1">
-                    <a:shade val="100000"/>
-                    <a:satMod val="115000"/>
-                  </a:schemeClr>
-                </a:gs>
-              </a:gsLst>
-              <a:lin ang="5400000" scaled="1"/>
-              <a:tileRect/>
-            </a:gradFill>
-            <a:ln w="57150">
-              <a:solidFill>
-                <a:schemeClr val="tx1"/>
-              </a:solidFill>
-            </a:ln>
-          </p:spPr>
-          <p:style>
-            <a:lnRef idx="2">
-              <a:schemeClr val="accent1">
-                <a:shade val="15000"/>
-              </a:schemeClr>
-            </a:lnRef>
-            <a:fillRef idx="1">
-              <a:schemeClr val="accent1"/>
-            </a:fillRef>
-            <a:effectRef idx="0">
-              <a:schemeClr val="accent1"/>
-            </a:effectRef>
-            <a:fontRef idx="minor">
-              <a:schemeClr val="lt1"/>
-            </a:fontRef>
-          </p:style>
-          <p:txBody>
-            <a:bodyPr rtlCol="0" anchor="ctr"/>
-            <a:lstStyle/>
-            <a:p>
-              <a:pPr algn="ctr"/>
-              <a:r>
-                <a:rPr lang="en-IE" sz="5000" b="1" dirty="0"/>
-                <a:t>ItemStoreRepository</a:t>
-              </a:r>
-            </a:p>
-          </p:txBody>
-        </p:sp>
-        <p:sp>
-          <p:nvSpPr>
-            <p:cNvPr id="75" name="Flowchart: Alternate Process 74">
-              <a:extLst>
-                <a:ext uri="{FF2B5EF4-FFF2-40B4-BE49-F238E27FC236}">
-                  <a16:creationId xmlns:a16="http://schemas.microsoft.com/office/drawing/2014/main" id="{70F9B6C0-7A11-5126-A2F9-62210095E61E}"/>
-                </a:ext>
-              </a:extLst>
-            </p:cNvPr>
-            <p:cNvSpPr/>
-            <p:nvPr/>
-          </p:nvSpPr>
-          <p:spPr>
-            <a:xfrm>
-              <a:off x="7084142" y="12584775"/>
-              <a:ext cx="4831346" cy="1092937"/>
-            </a:xfrm>
-            <a:prstGeom prst="flowChartAlternateProcess">
-              <a:avLst/>
-            </a:prstGeom>
-            <a:gradFill flip="none" rotWithShape="1">
-              <a:gsLst>
-                <a:gs pos="0">
-                  <a:schemeClr val="accent1">
-                    <a:shade val="30000"/>
-                    <a:satMod val="115000"/>
-                  </a:schemeClr>
-                </a:gs>
-                <a:gs pos="50000">
-                  <a:schemeClr val="accent1">
-                    <a:shade val="67500"/>
-                    <a:satMod val="115000"/>
-                  </a:schemeClr>
-                </a:gs>
-                <a:gs pos="100000">
-                  <a:schemeClr val="accent1">
-                    <a:shade val="100000"/>
-                    <a:satMod val="115000"/>
-                  </a:schemeClr>
-                </a:gs>
-              </a:gsLst>
-              <a:lin ang="5400000" scaled="1"/>
-              <a:tileRect/>
-            </a:gradFill>
-            <a:ln w="57150">
-              <a:solidFill>
-                <a:schemeClr val="tx1"/>
-              </a:solidFill>
-            </a:ln>
-          </p:spPr>
-          <p:style>
-            <a:lnRef idx="2">
-              <a:schemeClr val="accent1">
-                <a:shade val="15000"/>
-              </a:schemeClr>
-            </a:lnRef>
-            <a:fillRef idx="1">
-              <a:schemeClr val="accent1"/>
-            </a:fillRef>
-            <a:effectRef idx="0">
-              <a:schemeClr val="accent1"/>
-            </a:effectRef>
-            <a:fontRef idx="minor">
-              <a:schemeClr val="lt1"/>
-            </a:fontRef>
-          </p:style>
-          <p:txBody>
-            <a:bodyPr rtlCol="0" anchor="ctr"/>
-            <a:lstStyle/>
-            <a:p>
-              <a:pPr algn="ctr"/>
-              <a:r>
-                <a:rPr lang="en-IE" sz="5000" b="1" dirty="0"/>
-                <a:t>JpaRepository</a:t>
-              </a:r>
-            </a:p>
-          </p:txBody>
-        </p:sp>
-        <p:grpSp>
-          <p:nvGrpSpPr>
-            <p:cNvPr id="76" name="Group 75">
-              <a:extLst>
-                <a:ext uri="{FF2B5EF4-FFF2-40B4-BE49-F238E27FC236}">
-                  <a16:creationId xmlns:a16="http://schemas.microsoft.com/office/drawing/2014/main" id="{CA40A20D-07AA-3C29-B525-8F054EB395CE}"/>
-                </a:ext>
-              </a:extLst>
-            </p:cNvPr>
-            <p:cNvGrpSpPr/>
-            <p:nvPr/>
-          </p:nvGrpSpPr>
-          <p:grpSpPr>
-            <a:xfrm>
-              <a:off x="13719534" y="16387062"/>
-              <a:ext cx="5208788" cy="2791999"/>
-              <a:chOff x="8471368" y="11395622"/>
-              <a:chExt cx="3773483" cy="1545522"/>
-            </a:xfrm>
-          </p:grpSpPr>
-          <p:pic>
-            <p:nvPicPr>
-              <p:cNvPr id="110" name="Picture 109" descr="A logo with a feather&#10;&#10;AI-generated content may be incorrect.">
-                <a:extLst>
-                  <a:ext uri="{FF2B5EF4-FFF2-40B4-BE49-F238E27FC236}">
-                    <a16:creationId xmlns:a16="http://schemas.microsoft.com/office/drawing/2014/main" id="{A0EBE8F0-852C-9D44-C282-192E01930216}"/>
-                  </a:ext>
-                </a:extLst>
-              </p:cNvPr>
-              <p:cNvPicPr>
-                <a:picLocks noChangeAspect="1"/>
-              </p:cNvPicPr>
-              <p:nvPr/>
-            </p:nvPicPr>
-            <p:blipFill>
-              <a:blip r:embed="rId3">
-                <a:extLst>
-                  <a:ext uri="{28A0092B-C50C-407E-A947-70E740481C1C}">
-                    <a14:useLocalDpi xmlns:a14="http://schemas.microsoft.com/office/drawing/2010/main" val="0"/>
-                  </a:ext>
-                </a:extLst>
-              </a:blip>
-              <a:stretch>
-                <a:fillRect/>
-              </a:stretch>
-            </p:blipFill>
-            <p:spPr>
-              <a:xfrm>
-                <a:off x="8471368" y="11395622"/>
-                <a:ext cx="1552575" cy="733425"/>
-              </a:xfrm>
-              <a:prstGeom prst="rect">
-                <a:avLst/>
-              </a:prstGeom>
-            </p:spPr>
-          </p:pic>
-          <p:pic>
-            <p:nvPicPr>
-              <p:cNvPr id="111" name="Picture 110" descr="A yellow leopard jumping in a folder&#10;&#10;AI-generated content may be incorrect.">
-                <a:extLst>
-                  <a:ext uri="{FF2B5EF4-FFF2-40B4-BE49-F238E27FC236}">
-                    <a16:creationId xmlns:a16="http://schemas.microsoft.com/office/drawing/2014/main" id="{E6A01908-3616-64D6-439C-842D10A4FB14}"/>
-                  </a:ext>
-                </a:extLst>
-              </p:cNvPr>
-              <p:cNvPicPr>
-                <a:picLocks noChangeAspect="1"/>
-              </p:cNvPicPr>
-              <p:nvPr/>
-            </p:nvPicPr>
-            <p:blipFill>
-              <a:blip r:embed="rId4">
-                <a:extLst>
-                  <a:ext uri="{28A0092B-C50C-407E-A947-70E740481C1C}">
-                    <a14:useLocalDpi xmlns:a14="http://schemas.microsoft.com/office/drawing/2010/main" val="0"/>
-                  </a:ext>
-                </a:extLst>
-              </a:blip>
-              <a:stretch>
-                <a:fillRect/>
-              </a:stretch>
-            </p:blipFill>
-            <p:spPr>
-              <a:xfrm>
-                <a:off x="10410768" y="12024102"/>
-                <a:ext cx="1834083" cy="917042"/>
-              </a:xfrm>
-              <a:prstGeom prst="rect">
-                <a:avLst/>
-              </a:prstGeom>
-            </p:spPr>
-          </p:pic>
-          <p:cxnSp>
-            <p:nvCxnSpPr>
-              <p:cNvPr id="112" name="Straight Connector 111">
-                <a:extLst>
-                  <a:ext uri="{FF2B5EF4-FFF2-40B4-BE49-F238E27FC236}">
-                    <a16:creationId xmlns:a16="http://schemas.microsoft.com/office/drawing/2014/main" id="{87161502-6450-2C74-3220-821B827C17C8}"/>
-                  </a:ext>
-                </a:extLst>
-              </p:cNvPr>
-              <p:cNvCxnSpPr/>
-              <p:nvPr/>
-            </p:nvCxnSpPr>
-            <p:spPr>
-              <a:xfrm flipH="1">
-                <a:off x="9449163" y="11416068"/>
-                <a:ext cx="1765738" cy="1525076"/>
-              </a:xfrm>
-              <a:prstGeom prst="line">
-                <a:avLst/>
-              </a:prstGeom>
-              <a:ln w="38100"/>
-            </p:spPr>
-            <p:style>
-              <a:lnRef idx="2">
-                <a:schemeClr val="dk1"/>
-              </a:lnRef>
-              <a:fillRef idx="0">
-                <a:schemeClr val="dk1"/>
-              </a:fillRef>
-              <a:effectRef idx="1">
-                <a:schemeClr val="dk1"/>
-              </a:effectRef>
-              <a:fontRef idx="minor">
-                <a:schemeClr val="tx1"/>
-              </a:fontRef>
-            </p:style>
-          </p:cxnSp>
-        </p:grpSp>
-        <p:cxnSp>
-          <p:nvCxnSpPr>
-            <p:cNvPr id="77" name="Straight Arrow Connector 76">
-              <a:extLst>
-                <a:ext uri="{FF2B5EF4-FFF2-40B4-BE49-F238E27FC236}">
-                  <a16:creationId xmlns:a16="http://schemas.microsoft.com/office/drawing/2014/main" id="{7A954414-47EC-2512-D52F-172903F25B80}"/>
-                </a:ext>
-              </a:extLst>
-            </p:cNvPr>
-            <p:cNvCxnSpPr>
-              <a:cxnSpLocks/>
-            </p:cNvCxnSpPr>
-            <p:nvPr/>
-          </p:nvCxnSpPr>
-          <p:spPr>
-            <a:xfrm>
-              <a:off x="5449344" y="4973011"/>
-              <a:ext cx="0" cy="1077900"/>
-            </a:xfrm>
-            <a:prstGeom prst="straightConnector1">
-              <a:avLst/>
-            </a:prstGeom>
-            <a:ln w="76200">
-              <a:tailEnd type="triangle"/>
-            </a:ln>
-          </p:spPr>
-          <p:style>
-            <a:lnRef idx="3">
-              <a:schemeClr val="accent6"/>
-            </a:lnRef>
-            <a:fillRef idx="0">
-              <a:schemeClr val="accent6"/>
-            </a:fillRef>
-            <a:effectRef idx="2">
-              <a:schemeClr val="accent6"/>
-            </a:effectRef>
-            <a:fontRef idx="minor">
-              <a:schemeClr val="tx1"/>
-            </a:fontRef>
-          </p:style>
-        </p:cxnSp>
-        <p:cxnSp>
-          <p:nvCxnSpPr>
-            <p:cNvPr id="78" name="Straight Arrow Connector 77">
-              <a:extLst>
-                <a:ext uri="{FF2B5EF4-FFF2-40B4-BE49-F238E27FC236}">
-                  <a16:creationId xmlns:a16="http://schemas.microsoft.com/office/drawing/2014/main" id="{0B7E84AA-4EFD-742C-FCF6-2A230C4ECCBB}"/>
-                </a:ext>
-              </a:extLst>
-            </p:cNvPr>
-            <p:cNvCxnSpPr>
-              <a:cxnSpLocks/>
-            </p:cNvCxnSpPr>
-            <p:nvPr/>
-          </p:nvCxnSpPr>
-          <p:spPr>
-            <a:xfrm>
-              <a:off x="9489467" y="11733924"/>
-              <a:ext cx="0" cy="806090"/>
-            </a:xfrm>
-            <a:prstGeom prst="straightConnector1">
-              <a:avLst/>
-            </a:prstGeom>
-            <a:ln w="76200">
-              <a:tailEnd type="triangle"/>
-            </a:ln>
-          </p:spPr>
-          <p:style>
-            <a:lnRef idx="3">
-              <a:schemeClr val="accent6"/>
-            </a:lnRef>
-            <a:fillRef idx="0">
-              <a:schemeClr val="accent6"/>
-            </a:fillRef>
-            <a:effectRef idx="2">
-              <a:schemeClr val="accent6"/>
-            </a:effectRef>
-            <a:fontRef idx="minor">
-              <a:schemeClr val="tx1"/>
-            </a:fontRef>
-          </p:style>
-        </p:cxnSp>
-        <p:cxnSp>
-          <p:nvCxnSpPr>
-            <p:cNvPr id="79" name="Straight Arrow Connector 78">
-              <a:extLst>
-                <a:ext uri="{FF2B5EF4-FFF2-40B4-BE49-F238E27FC236}">
-                  <a16:creationId xmlns:a16="http://schemas.microsoft.com/office/drawing/2014/main" id="{119E524B-4AAF-85A1-2D4B-FCC8F7BBC7CD}"/>
-                </a:ext>
-              </a:extLst>
-            </p:cNvPr>
-            <p:cNvCxnSpPr>
-              <a:cxnSpLocks/>
-            </p:cNvCxnSpPr>
-            <p:nvPr/>
-          </p:nvCxnSpPr>
-          <p:spPr>
-            <a:xfrm>
-              <a:off x="15740075" y="15608030"/>
-              <a:ext cx="0" cy="710255"/>
-            </a:xfrm>
-            <a:prstGeom prst="straightConnector1">
-              <a:avLst/>
-            </a:prstGeom>
-            <a:ln w="76200">
-              <a:tailEnd type="triangle"/>
-            </a:ln>
-          </p:spPr>
-          <p:style>
-            <a:lnRef idx="3">
-              <a:schemeClr val="accent6"/>
-            </a:lnRef>
-            <a:fillRef idx="0">
-              <a:schemeClr val="accent6"/>
-            </a:fillRef>
-            <a:effectRef idx="2">
-              <a:schemeClr val="accent6"/>
-            </a:effectRef>
-            <a:fontRef idx="minor">
-              <a:schemeClr val="tx1"/>
-            </a:fontRef>
-          </p:style>
-        </p:cxnSp>
-        <p:sp>
-          <p:nvSpPr>
-            <p:cNvPr id="80" name="Flowchart: Alternate Process 79">
-              <a:extLst>
-                <a:ext uri="{FF2B5EF4-FFF2-40B4-BE49-F238E27FC236}">
-                  <a16:creationId xmlns:a16="http://schemas.microsoft.com/office/drawing/2014/main" id="{8E134E11-C649-29A8-88F0-663EA7E359EC}"/>
-                </a:ext>
-              </a:extLst>
-            </p:cNvPr>
-            <p:cNvSpPr/>
-            <p:nvPr/>
-          </p:nvSpPr>
-          <p:spPr>
-            <a:xfrm>
-              <a:off x="14197080" y="6113072"/>
-              <a:ext cx="4775687" cy="1405977"/>
-            </a:xfrm>
-            <a:prstGeom prst="flowChartAlternateProcess">
-              <a:avLst/>
-            </a:prstGeom>
-            <a:gradFill flip="none" rotWithShape="1">
-              <a:gsLst>
-                <a:gs pos="0">
-                  <a:schemeClr val="accent1">
-                    <a:shade val="30000"/>
-                    <a:satMod val="115000"/>
-                  </a:schemeClr>
-                </a:gs>
-                <a:gs pos="50000">
-                  <a:schemeClr val="accent1">
-                    <a:shade val="67500"/>
-                    <a:satMod val="115000"/>
-                  </a:schemeClr>
-                </a:gs>
-                <a:gs pos="100000">
-                  <a:schemeClr val="accent1">
-                    <a:shade val="100000"/>
-                    <a:satMod val="115000"/>
-                  </a:schemeClr>
-                </a:gs>
-              </a:gsLst>
-              <a:lin ang="5400000" scaled="1"/>
-              <a:tileRect/>
-            </a:gradFill>
-            <a:ln w="57150">
-              <a:solidFill>
-                <a:schemeClr val="tx1"/>
-              </a:solidFill>
-            </a:ln>
-          </p:spPr>
-          <p:style>
-            <a:lnRef idx="2">
-              <a:schemeClr val="accent1">
-                <a:shade val="15000"/>
-              </a:schemeClr>
-            </a:lnRef>
-            <a:fillRef idx="1">
-              <a:schemeClr val="accent1"/>
-            </a:fillRef>
-            <a:effectRef idx="0">
-              <a:schemeClr val="accent1"/>
-            </a:effectRef>
-            <a:fontRef idx="minor">
-              <a:schemeClr val="lt1"/>
-            </a:fontRef>
-          </p:style>
-          <p:txBody>
-            <a:bodyPr rtlCol="0" anchor="ctr"/>
-            <a:lstStyle/>
-            <a:p>
-              <a:pPr algn="ctr"/>
-              <a:r>
-                <a:rPr lang="en-IE" sz="5000" b="1" dirty="0"/>
-                <a:t>TaskTideEngine</a:t>
-              </a:r>
-            </a:p>
-          </p:txBody>
-        </p:sp>
-        <p:cxnSp>
-          <p:nvCxnSpPr>
-            <p:cNvPr id="81" name="Straight Arrow Connector 80">
-              <a:extLst>
-                <a:ext uri="{FF2B5EF4-FFF2-40B4-BE49-F238E27FC236}">
-                  <a16:creationId xmlns:a16="http://schemas.microsoft.com/office/drawing/2014/main" id="{8D7A76D2-A199-24BC-3649-24E384805F0D}"/>
-                </a:ext>
-              </a:extLst>
-            </p:cNvPr>
-            <p:cNvCxnSpPr>
-              <a:cxnSpLocks/>
-            </p:cNvCxnSpPr>
-            <p:nvPr/>
-          </p:nvCxnSpPr>
-          <p:spPr>
-            <a:xfrm>
-              <a:off x="11056675" y="11219299"/>
-              <a:ext cx="647546" cy="0"/>
-            </a:xfrm>
-            <a:prstGeom prst="straightConnector1">
-              <a:avLst/>
-            </a:prstGeom>
-            <a:ln w="76200">
-              <a:tailEnd type="triangle"/>
-            </a:ln>
-          </p:spPr>
-          <p:style>
-            <a:lnRef idx="3">
-              <a:schemeClr val="accent6"/>
-            </a:lnRef>
-            <a:fillRef idx="0">
-              <a:schemeClr val="accent6"/>
-            </a:fillRef>
-            <a:effectRef idx="2">
-              <a:schemeClr val="accent6"/>
-            </a:effectRef>
-            <a:fontRef idx="minor">
-              <a:schemeClr val="tx1"/>
-            </a:fontRef>
-          </p:style>
-        </p:cxnSp>
-        <p:sp>
-          <p:nvSpPr>
-            <p:cNvPr id="82" name="Flowchart: Alternate Process 81">
-              <a:extLst>
-                <a:ext uri="{FF2B5EF4-FFF2-40B4-BE49-F238E27FC236}">
-                  <a16:creationId xmlns:a16="http://schemas.microsoft.com/office/drawing/2014/main" id="{B8214C4E-DB36-C2ED-34D2-EDA3242C2D92}"/>
-                </a:ext>
-              </a:extLst>
-            </p:cNvPr>
-            <p:cNvSpPr/>
-            <p:nvPr/>
-          </p:nvSpPr>
-          <p:spPr>
-            <a:xfrm>
-              <a:off x="11704220" y="10519272"/>
-              <a:ext cx="4775698" cy="1219121"/>
-            </a:xfrm>
-            <a:prstGeom prst="flowChartAlternateProcess">
-              <a:avLst/>
-            </a:prstGeom>
-            <a:gradFill flip="none" rotWithShape="1">
-              <a:gsLst>
-                <a:gs pos="0">
-                  <a:schemeClr val="accent1">
-                    <a:shade val="30000"/>
-                    <a:satMod val="115000"/>
-                  </a:schemeClr>
-                </a:gs>
-                <a:gs pos="50000">
-                  <a:schemeClr val="accent1">
-                    <a:shade val="67500"/>
-                    <a:satMod val="115000"/>
-                  </a:schemeClr>
-                </a:gs>
-                <a:gs pos="100000">
-                  <a:schemeClr val="accent1">
-                    <a:shade val="100000"/>
-                    <a:satMod val="115000"/>
-                  </a:schemeClr>
-                </a:gs>
-              </a:gsLst>
-              <a:lin ang="5400000" scaled="1"/>
-              <a:tileRect/>
-            </a:gradFill>
-            <a:ln w="57150">
-              <a:solidFill>
-                <a:schemeClr val="tx1"/>
-              </a:solidFill>
-            </a:ln>
-          </p:spPr>
-          <p:style>
-            <a:lnRef idx="2">
-              <a:schemeClr val="accent1">
-                <a:shade val="15000"/>
-              </a:schemeClr>
-            </a:lnRef>
-            <a:fillRef idx="1">
-              <a:schemeClr val="accent1"/>
-            </a:fillRef>
-            <a:effectRef idx="0">
-              <a:schemeClr val="accent1"/>
-            </a:effectRef>
-            <a:fontRef idx="minor">
-              <a:schemeClr val="lt1"/>
-            </a:fontRef>
-          </p:style>
-          <p:txBody>
-            <a:bodyPr rtlCol="0" anchor="ctr"/>
-            <a:lstStyle/>
-            <a:p>
-              <a:pPr algn="ctr"/>
-              <a:r>
-                <a:rPr lang="en-IE" sz="5000" b="1" dirty="0"/>
-                <a:t>TaskTideModel</a:t>
-              </a:r>
-            </a:p>
-          </p:txBody>
-        </p:sp>
-        <p:sp>
-          <p:nvSpPr>
-            <p:cNvPr id="83" name="Flowchart: Alternate Process 82">
-              <a:extLst>
-                <a:ext uri="{FF2B5EF4-FFF2-40B4-BE49-F238E27FC236}">
-                  <a16:creationId xmlns:a16="http://schemas.microsoft.com/office/drawing/2014/main" id="{8AB1BA33-846B-71CB-C4E6-E037EFA3C024}"/>
-                </a:ext>
-              </a:extLst>
-            </p:cNvPr>
-            <p:cNvSpPr/>
-            <p:nvPr/>
-          </p:nvSpPr>
-          <p:spPr>
-            <a:xfrm>
-              <a:off x="17804717" y="9102243"/>
-              <a:ext cx="3937683" cy="1150977"/>
-            </a:xfrm>
-            <a:prstGeom prst="flowChartAlternateProcess">
-              <a:avLst/>
-            </a:prstGeom>
-            <a:gradFill flip="none" rotWithShape="1">
-              <a:gsLst>
-                <a:gs pos="0">
-                  <a:schemeClr val="accent1">
-                    <a:shade val="30000"/>
-                    <a:satMod val="115000"/>
-                  </a:schemeClr>
-                </a:gs>
-                <a:gs pos="50000">
-                  <a:schemeClr val="accent1">
-                    <a:shade val="67500"/>
-                    <a:satMod val="115000"/>
-                  </a:schemeClr>
-                </a:gs>
-                <a:gs pos="100000">
-                  <a:schemeClr val="accent1">
-                    <a:shade val="100000"/>
-                    <a:satMod val="115000"/>
-                  </a:schemeClr>
-                </a:gs>
-              </a:gsLst>
-              <a:lin ang="5400000" scaled="1"/>
-              <a:tileRect/>
-            </a:gradFill>
-            <a:ln w="57150">
-              <a:solidFill>
-                <a:schemeClr val="tx1"/>
-              </a:solidFill>
-            </a:ln>
-          </p:spPr>
-          <p:style>
-            <a:lnRef idx="2">
-              <a:schemeClr val="accent1">
-                <a:shade val="15000"/>
-              </a:schemeClr>
-            </a:lnRef>
-            <a:fillRef idx="1">
-              <a:schemeClr val="accent1"/>
-            </a:fillRef>
-            <a:effectRef idx="0">
-              <a:schemeClr val="accent1"/>
-            </a:effectRef>
-            <a:fontRef idx="minor">
-              <a:schemeClr val="lt1"/>
-            </a:fontRef>
-          </p:style>
-          <p:txBody>
-            <a:bodyPr rtlCol="0" anchor="ctr"/>
-            <a:lstStyle/>
-            <a:p>
-              <a:pPr algn="ctr"/>
-              <a:r>
-                <a:rPr lang="en-IE" sz="5000" b="1" dirty="0"/>
-                <a:t>Workflow</a:t>
-              </a:r>
-            </a:p>
-          </p:txBody>
-        </p:sp>
-        <p:sp>
-          <p:nvSpPr>
-            <p:cNvPr id="84" name="Flowchart: Alternate Process 83">
-              <a:extLst>
-                <a:ext uri="{FF2B5EF4-FFF2-40B4-BE49-F238E27FC236}">
-                  <a16:creationId xmlns:a16="http://schemas.microsoft.com/office/drawing/2014/main" id="{5C067697-A9CE-7092-38B5-DE6CF63938F7}"/>
-                </a:ext>
-              </a:extLst>
-            </p:cNvPr>
-            <p:cNvSpPr/>
-            <p:nvPr/>
-          </p:nvSpPr>
-          <p:spPr>
-            <a:xfrm>
-              <a:off x="17802164" y="10657887"/>
-              <a:ext cx="3937683" cy="1150977"/>
-            </a:xfrm>
-            <a:prstGeom prst="flowChartAlternateProcess">
-              <a:avLst/>
-            </a:prstGeom>
-            <a:gradFill flip="none" rotWithShape="1">
-              <a:gsLst>
-                <a:gs pos="0">
-                  <a:schemeClr val="accent1">
-                    <a:shade val="30000"/>
-                    <a:satMod val="115000"/>
-                  </a:schemeClr>
-                </a:gs>
-                <a:gs pos="50000">
-                  <a:schemeClr val="accent1">
-                    <a:shade val="67500"/>
-                    <a:satMod val="115000"/>
-                  </a:schemeClr>
-                </a:gs>
-                <a:gs pos="100000">
-                  <a:schemeClr val="accent1">
-                    <a:shade val="100000"/>
-                    <a:satMod val="115000"/>
-                  </a:schemeClr>
-                </a:gs>
-              </a:gsLst>
-              <a:lin ang="5400000" scaled="1"/>
-              <a:tileRect/>
-            </a:gradFill>
-            <a:ln w="57150">
-              <a:solidFill>
-                <a:schemeClr val="tx1"/>
-              </a:solidFill>
-            </a:ln>
-          </p:spPr>
-          <p:style>
-            <a:lnRef idx="2">
-              <a:schemeClr val="accent1">
-                <a:shade val="15000"/>
-              </a:schemeClr>
-            </a:lnRef>
-            <a:fillRef idx="1">
-              <a:schemeClr val="accent1"/>
-            </a:fillRef>
-            <a:effectRef idx="0">
-              <a:schemeClr val="accent1"/>
-            </a:effectRef>
-            <a:fontRef idx="minor">
-              <a:schemeClr val="lt1"/>
-            </a:fontRef>
-          </p:style>
-          <p:txBody>
-            <a:bodyPr rtlCol="0" anchor="ctr"/>
-            <a:lstStyle/>
-            <a:p>
-              <a:pPr algn="ctr"/>
-              <a:r>
-                <a:rPr lang="en-IE" sz="5000" b="1" dirty="0"/>
-                <a:t>Step</a:t>
-              </a:r>
-            </a:p>
-          </p:txBody>
-        </p:sp>
-        <p:sp>
-          <p:nvSpPr>
-            <p:cNvPr id="85" name="Flowchart: Alternate Process 84">
-              <a:extLst>
-                <a:ext uri="{FF2B5EF4-FFF2-40B4-BE49-F238E27FC236}">
-                  <a16:creationId xmlns:a16="http://schemas.microsoft.com/office/drawing/2014/main" id="{CBAA4AFC-3354-A870-0D27-6D1FA8EB9501}"/>
-                </a:ext>
-              </a:extLst>
-            </p:cNvPr>
-            <p:cNvSpPr/>
-            <p:nvPr/>
-          </p:nvSpPr>
-          <p:spPr>
-            <a:xfrm>
-              <a:off x="17786660" y="12195028"/>
-              <a:ext cx="3937683" cy="1206278"/>
-            </a:xfrm>
-            <a:prstGeom prst="flowChartAlternateProcess">
-              <a:avLst/>
-            </a:prstGeom>
-            <a:gradFill flip="none" rotWithShape="1">
-              <a:gsLst>
-                <a:gs pos="0">
-                  <a:schemeClr val="accent1">
-                    <a:shade val="30000"/>
-                    <a:satMod val="115000"/>
-                  </a:schemeClr>
-                </a:gs>
-                <a:gs pos="50000">
-                  <a:schemeClr val="accent1">
-                    <a:shade val="67500"/>
-                    <a:satMod val="115000"/>
-                  </a:schemeClr>
-                </a:gs>
-                <a:gs pos="100000">
-                  <a:schemeClr val="accent1">
-                    <a:shade val="100000"/>
-                    <a:satMod val="115000"/>
-                  </a:schemeClr>
-                </a:gs>
-              </a:gsLst>
-              <a:lin ang="5400000" scaled="1"/>
-              <a:tileRect/>
-            </a:gradFill>
-            <a:ln w="57150">
-              <a:solidFill>
-                <a:schemeClr val="tx1"/>
-              </a:solidFill>
-            </a:ln>
-          </p:spPr>
-          <p:style>
-            <a:lnRef idx="2">
-              <a:schemeClr val="accent1">
-                <a:shade val="15000"/>
-              </a:schemeClr>
-            </a:lnRef>
-            <a:fillRef idx="1">
-              <a:schemeClr val="accent1"/>
-            </a:fillRef>
-            <a:effectRef idx="0">
-              <a:schemeClr val="accent1"/>
-            </a:effectRef>
-            <a:fontRef idx="minor">
-              <a:schemeClr val="lt1"/>
-            </a:fontRef>
-          </p:style>
-          <p:txBody>
-            <a:bodyPr rtlCol="0" anchor="ctr"/>
-            <a:lstStyle/>
-            <a:p>
-              <a:pPr algn="ctr"/>
-              <a:r>
-                <a:rPr lang="en-IE" sz="5000" b="1" dirty="0"/>
-                <a:t>WorkItem</a:t>
-              </a:r>
-            </a:p>
-          </p:txBody>
-        </p:sp>
-        <p:cxnSp>
-          <p:nvCxnSpPr>
-            <p:cNvPr id="86" name="Straight Arrow Connector 85">
-              <a:extLst>
-                <a:ext uri="{FF2B5EF4-FFF2-40B4-BE49-F238E27FC236}">
-                  <a16:creationId xmlns:a16="http://schemas.microsoft.com/office/drawing/2014/main" id="{8DCEE48F-962D-A3C4-8DC4-E8DDC6842978}"/>
-                </a:ext>
-              </a:extLst>
-            </p:cNvPr>
-            <p:cNvCxnSpPr>
-              <a:cxnSpLocks/>
-            </p:cNvCxnSpPr>
-            <p:nvPr/>
-          </p:nvCxnSpPr>
-          <p:spPr>
-            <a:xfrm>
-              <a:off x="10365710" y="4975401"/>
-              <a:ext cx="0" cy="1075509"/>
-            </a:xfrm>
-            <a:prstGeom prst="straightConnector1">
-              <a:avLst/>
-            </a:prstGeom>
-            <a:ln w="76200">
-              <a:tailEnd type="triangle"/>
-            </a:ln>
-          </p:spPr>
-          <p:style>
-            <a:lnRef idx="3">
-              <a:schemeClr val="accent6"/>
-            </a:lnRef>
-            <a:fillRef idx="0">
-              <a:schemeClr val="accent6"/>
-            </a:fillRef>
-            <a:effectRef idx="2">
-              <a:schemeClr val="accent6"/>
-            </a:effectRef>
-            <a:fontRef idx="minor">
-              <a:schemeClr val="tx1"/>
-            </a:fontRef>
-          </p:style>
-        </p:cxnSp>
-        <p:cxnSp>
-          <p:nvCxnSpPr>
-            <p:cNvPr id="87" name="Straight Arrow Connector 86">
-              <a:extLst>
-                <a:ext uri="{FF2B5EF4-FFF2-40B4-BE49-F238E27FC236}">
-                  <a16:creationId xmlns:a16="http://schemas.microsoft.com/office/drawing/2014/main" id="{0811605E-2E77-4721-BB6A-D96BCA1BBA30}"/>
-                </a:ext>
-              </a:extLst>
-            </p:cNvPr>
-            <p:cNvCxnSpPr>
-              <a:cxnSpLocks/>
-            </p:cNvCxnSpPr>
-            <p:nvPr/>
-          </p:nvCxnSpPr>
-          <p:spPr>
-            <a:xfrm>
-              <a:off x="5449344" y="7528630"/>
-              <a:ext cx="0" cy="764759"/>
-            </a:xfrm>
-            <a:prstGeom prst="straightConnector1">
-              <a:avLst/>
-            </a:prstGeom>
-            <a:ln w="76200">
-              <a:tailEnd type="triangle"/>
-            </a:ln>
-          </p:spPr>
-          <p:style>
-            <a:lnRef idx="3">
-              <a:schemeClr val="accent6"/>
-            </a:lnRef>
-            <a:fillRef idx="0">
-              <a:schemeClr val="accent6"/>
-            </a:fillRef>
-            <a:effectRef idx="2">
-              <a:schemeClr val="accent6"/>
-            </a:effectRef>
-            <a:fontRef idx="minor">
-              <a:schemeClr val="tx1"/>
-            </a:fontRef>
-          </p:style>
-        </p:cxnSp>
-        <p:cxnSp>
-          <p:nvCxnSpPr>
-            <p:cNvPr id="88" name="Straight Arrow Connector 87">
-              <a:extLst>
-                <a:ext uri="{FF2B5EF4-FFF2-40B4-BE49-F238E27FC236}">
-                  <a16:creationId xmlns:a16="http://schemas.microsoft.com/office/drawing/2014/main" id="{069DBF85-D0D1-E9E2-C786-B27C86649C59}"/>
-                </a:ext>
-              </a:extLst>
-            </p:cNvPr>
-            <p:cNvCxnSpPr>
-              <a:cxnSpLocks/>
-            </p:cNvCxnSpPr>
-            <p:nvPr/>
-          </p:nvCxnSpPr>
-          <p:spPr>
-            <a:xfrm>
-              <a:off x="10421248" y="7532324"/>
-              <a:ext cx="0" cy="781419"/>
-            </a:xfrm>
-            <a:prstGeom prst="straightConnector1">
-              <a:avLst/>
-            </a:prstGeom>
-            <a:ln w="76200">
-              <a:tailEnd type="triangle"/>
-            </a:ln>
-          </p:spPr>
-          <p:style>
-            <a:lnRef idx="3">
-              <a:schemeClr val="accent6"/>
-            </a:lnRef>
-            <a:fillRef idx="0">
-              <a:schemeClr val="accent6"/>
-            </a:fillRef>
-            <a:effectRef idx="2">
-              <a:schemeClr val="accent6"/>
-            </a:effectRef>
-            <a:fontRef idx="minor">
-              <a:schemeClr val="tx1"/>
-            </a:fontRef>
-          </p:style>
-        </p:cxnSp>
-        <p:cxnSp>
-          <p:nvCxnSpPr>
-            <p:cNvPr id="89" name="Straight Arrow Connector 88">
-              <a:extLst>
-                <a:ext uri="{FF2B5EF4-FFF2-40B4-BE49-F238E27FC236}">
-                  <a16:creationId xmlns:a16="http://schemas.microsoft.com/office/drawing/2014/main" id="{6DFB149C-0D70-4CAD-66D8-E7D9869E7E35}"/>
-                </a:ext>
-              </a:extLst>
-            </p:cNvPr>
-            <p:cNvCxnSpPr>
-              <a:cxnSpLocks/>
-            </p:cNvCxnSpPr>
-            <p:nvPr/>
-          </p:nvCxnSpPr>
-          <p:spPr>
-            <a:xfrm>
-              <a:off x="7813527" y="9751735"/>
-              <a:ext cx="0" cy="768420"/>
-            </a:xfrm>
-            <a:prstGeom prst="straightConnector1">
-              <a:avLst/>
-            </a:prstGeom>
-            <a:ln w="76200">
-              <a:tailEnd type="triangle"/>
-            </a:ln>
-          </p:spPr>
-          <p:style>
-            <a:lnRef idx="3">
-              <a:schemeClr val="accent6"/>
-            </a:lnRef>
-            <a:fillRef idx="0">
-              <a:schemeClr val="accent6"/>
-            </a:fillRef>
-            <a:effectRef idx="2">
-              <a:schemeClr val="accent6"/>
-            </a:effectRef>
-            <a:fontRef idx="minor">
-              <a:schemeClr val="tx1"/>
-            </a:fontRef>
-          </p:style>
-        </p:cxnSp>
-        <p:cxnSp>
-          <p:nvCxnSpPr>
-            <p:cNvPr id="90" name="Straight Arrow Connector 89">
-              <a:extLst>
-                <a:ext uri="{FF2B5EF4-FFF2-40B4-BE49-F238E27FC236}">
-                  <a16:creationId xmlns:a16="http://schemas.microsoft.com/office/drawing/2014/main" id="{68585F70-3D6B-A57D-56B6-98A008D06323}"/>
-                </a:ext>
-              </a:extLst>
-            </p:cNvPr>
-            <p:cNvCxnSpPr>
-              <a:cxnSpLocks/>
-            </p:cNvCxnSpPr>
-            <p:nvPr/>
-          </p:nvCxnSpPr>
-          <p:spPr>
-            <a:xfrm>
-              <a:off x="13246757" y="6854692"/>
-              <a:ext cx="898631" cy="0"/>
-            </a:xfrm>
-            <a:prstGeom prst="straightConnector1">
-              <a:avLst/>
-            </a:prstGeom>
-            <a:ln w="76200">
-              <a:tailEnd type="triangle"/>
-            </a:ln>
-          </p:spPr>
-          <p:style>
-            <a:lnRef idx="3">
-              <a:schemeClr val="accent6"/>
-            </a:lnRef>
-            <a:fillRef idx="0">
-              <a:schemeClr val="accent6"/>
-            </a:fillRef>
-            <a:effectRef idx="2">
-              <a:schemeClr val="accent6"/>
-            </a:effectRef>
-            <a:fontRef idx="minor">
-              <a:schemeClr val="tx1"/>
-            </a:fontRef>
-          </p:style>
-        </p:cxnSp>
-        <p:cxnSp>
-          <p:nvCxnSpPr>
-            <p:cNvPr id="91" name="Straight Arrow Connector 90">
-              <a:extLst>
-                <a:ext uri="{FF2B5EF4-FFF2-40B4-BE49-F238E27FC236}">
-                  <a16:creationId xmlns:a16="http://schemas.microsoft.com/office/drawing/2014/main" id="{D5D7C695-DFC6-67D0-DD12-31F6A0348BA4}"/>
-                </a:ext>
-              </a:extLst>
-            </p:cNvPr>
-            <p:cNvCxnSpPr>
-              <a:cxnSpLocks/>
-            </p:cNvCxnSpPr>
-            <p:nvPr/>
-          </p:nvCxnSpPr>
-          <p:spPr>
-            <a:xfrm>
-              <a:off x="16581272" y="11243383"/>
-              <a:ext cx="1124069" cy="0"/>
-            </a:xfrm>
-            <a:prstGeom prst="straightConnector1">
-              <a:avLst/>
-            </a:prstGeom>
-            <a:ln w="76200">
-              <a:tailEnd type="triangle"/>
-            </a:ln>
-          </p:spPr>
-          <p:style>
-            <a:lnRef idx="3">
-              <a:schemeClr val="accent6"/>
-            </a:lnRef>
-            <a:fillRef idx="0">
-              <a:schemeClr val="accent6"/>
-            </a:fillRef>
-            <a:effectRef idx="2">
-              <a:schemeClr val="accent6"/>
-            </a:effectRef>
-            <a:fontRef idx="minor">
-              <a:schemeClr val="tx1"/>
-            </a:fontRef>
-          </p:style>
-        </p:cxnSp>
-        <p:cxnSp>
-          <p:nvCxnSpPr>
-            <p:cNvPr id="92" name="Straight Arrow Connector 91">
-              <a:extLst>
-                <a:ext uri="{FF2B5EF4-FFF2-40B4-BE49-F238E27FC236}">
-                  <a16:creationId xmlns:a16="http://schemas.microsoft.com/office/drawing/2014/main" id="{E5F967A5-B59E-7B7D-5E64-512341FD7AD1}"/>
-                </a:ext>
-              </a:extLst>
-            </p:cNvPr>
-            <p:cNvCxnSpPr>
-              <a:cxnSpLocks/>
-            </p:cNvCxnSpPr>
-            <p:nvPr/>
-          </p:nvCxnSpPr>
-          <p:spPr>
-            <a:xfrm flipV="1">
-              <a:off x="16530981" y="9986086"/>
-              <a:ext cx="1220257" cy="1270455"/>
-            </a:xfrm>
-            <a:prstGeom prst="straightConnector1">
-              <a:avLst/>
-            </a:prstGeom>
-            <a:ln w="76200">
-              <a:tailEnd type="triangle"/>
-            </a:ln>
-          </p:spPr>
-          <p:style>
-            <a:lnRef idx="3">
-              <a:schemeClr val="accent6"/>
-            </a:lnRef>
-            <a:fillRef idx="0">
-              <a:schemeClr val="accent6"/>
-            </a:fillRef>
-            <a:effectRef idx="2">
-              <a:schemeClr val="accent6"/>
-            </a:effectRef>
-            <a:fontRef idx="minor">
-              <a:schemeClr val="tx1"/>
-            </a:fontRef>
-          </p:style>
-        </p:cxnSp>
-        <p:cxnSp>
-          <p:nvCxnSpPr>
-            <p:cNvPr id="93" name="Straight Arrow Connector 92">
-              <a:extLst>
-                <a:ext uri="{FF2B5EF4-FFF2-40B4-BE49-F238E27FC236}">
-                  <a16:creationId xmlns:a16="http://schemas.microsoft.com/office/drawing/2014/main" id="{C5069E0D-C152-2D33-9149-D8FB64B0BEE0}"/>
-                </a:ext>
-              </a:extLst>
-            </p:cNvPr>
-            <p:cNvCxnSpPr>
-              <a:cxnSpLocks/>
-            </p:cNvCxnSpPr>
-            <p:nvPr/>
-          </p:nvCxnSpPr>
-          <p:spPr>
-            <a:xfrm rot="5400000" flipV="1">
-              <a:off x="16526845" y="11328926"/>
-              <a:ext cx="1307588" cy="1185604"/>
-            </a:xfrm>
-            <a:prstGeom prst="straightConnector1">
-              <a:avLst/>
-            </a:prstGeom>
-            <a:ln w="76200">
-              <a:tailEnd type="triangle"/>
-            </a:ln>
-          </p:spPr>
-          <p:style>
-            <a:lnRef idx="3">
-              <a:schemeClr val="accent6"/>
-            </a:lnRef>
-            <a:fillRef idx="0">
-              <a:schemeClr val="accent6"/>
-            </a:fillRef>
-            <a:effectRef idx="2">
-              <a:schemeClr val="accent6"/>
-            </a:effectRef>
-            <a:fontRef idx="minor">
-              <a:schemeClr val="tx1"/>
-            </a:fontRef>
-          </p:style>
-        </p:cxnSp>
-        <p:cxnSp>
-          <p:nvCxnSpPr>
-            <p:cNvPr id="94" name="Straight Arrow Connector 93">
-              <a:extLst>
-                <a:ext uri="{FF2B5EF4-FFF2-40B4-BE49-F238E27FC236}">
-                  <a16:creationId xmlns:a16="http://schemas.microsoft.com/office/drawing/2014/main" id="{AD83134F-275B-B0ED-A2DA-C0BE6509A268}"/>
-                </a:ext>
-              </a:extLst>
-            </p:cNvPr>
-            <p:cNvCxnSpPr>
-              <a:cxnSpLocks/>
-            </p:cNvCxnSpPr>
-            <p:nvPr/>
-          </p:nvCxnSpPr>
-          <p:spPr>
-            <a:xfrm flipH="1">
-              <a:off x="5449344" y="11736029"/>
-              <a:ext cx="234" cy="1628765"/>
-            </a:xfrm>
-            <a:prstGeom prst="straightConnector1">
-              <a:avLst/>
-            </a:prstGeom>
-            <a:ln w="76200">
-              <a:tailEnd type="triangle"/>
-            </a:ln>
-          </p:spPr>
-          <p:style>
-            <a:lnRef idx="3">
-              <a:schemeClr val="accent6"/>
-            </a:lnRef>
-            <a:fillRef idx="0">
-              <a:schemeClr val="accent6"/>
-            </a:fillRef>
-            <a:effectRef idx="2">
-              <a:schemeClr val="accent6"/>
-            </a:effectRef>
-            <a:fontRef idx="minor">
-              <a:schemeClr val="tx1"/>
-            </a:fontRef>
-          </p:style>
-        </p:cxnSp>
-        <p:cxnSp>
-          <p:nvCxnSpPr>
-            <p:cNvPr id="95" name="Straight Arrow Connector 94">
-              <a:extLst>
-                <a:ext uri="{FF2B5EF4-FFF2-40B4-BE49-F238E27FC236}">
-                  <a16:creationId xmlns:a16="http://schemas.microsoft.com/office/drawing/2014/main" id="{7110645D-7449-3CAF-2FB2-5789C07DA1BC}"/>
-                </a:ext>
-              </a:extLst>
-            </p:cNvPr>
-            <p:cNvCxnSpPr>
-              <a:cxnSpLocks/>
-            </p:cNvCxnSpPr>
-            <p:nvPr/>
-          </p:nvCxnSpPr>
-          <p:spPr>
-            <a:xfrm>
-              <a:off x="10976156" y="11608493"/>
-              <a:ext cx="4528699" cy="2588015"/>
-            </a:xfrm>
-            <a:prstGeom prst="straightConnector1">
-              <a:avLst/>
-            </a:prstGeom>
-            <a:ln w="76200">
-              <a:tailEnd type="triangle"/>
-            </a:ln>
-          </p:spPr>
-          <p:style>
-            <a:lnRef idx="3">
-              <a:schemeClr val="accent6"/>
-            </a:lnRef>
-            <a:fillRef idx="0">
-              <a:schemeClr val="accent6"/>
-            </a:fillRef>
-            <a:effectRef idx="2">
-              <a:schemeClr val="accent6"/>
-            </a:effectRef>
-            <a:fontRef idx="minor">
-              <a:schemeClr val="tx1"/>
-            </a:fontRef>
-          </p:style>
-        </p:cxnSp>
-        <p:cxnSp>
-          <p:nvCxnSpPr>
-            <p:cNvPr id="96" name="Straight Arrow Connector 95">
-              <a:extLst>
-                <a:ext uri="{FF2B5EF4-FFF2-40B4-BE49-F238E27FC236}">
-                  <a16:creationId xmlns:a16="http://schemas.microsoft.com/office/drawing/2014/main" id="{B63FC61A-B064-0C71-D47B-6087923E9AA1}"/>
-                </a:ext>
-              </a:extLst>
-            </p:cNvPr>
-            <p:cNvCxnSpPr>
-              <a:cxnSpLocks/>
-            </p:cNvCxnSpPr>
-            <p:nvPr/>
-          </p:nvCxnSpPr>
-          <p:spPr>
-            <a:xfrm>
-              <a:off x="9470736" y="13736074"/>
-              <a:ext cx="0" cy="1177446"/>
-            </a:xfrm>
-            <a:prstGeom prst="straightConnector1">
-              <a:avLst/>
-            </a:prstGeom>
-            <a:ln w="76200">
-              <a:tailEnd type="triangle"/>
-            </a:ln>
-          </p:spPr>
-          <p:style>
-            <a:lnRef idx="3">
-              <a:schemeClr val="accent6"/>
-            </a:lnRef>
-            <a:fillRef idx="0">
-              <a:schemeClr val="accent6"/>
-            </a:fillRef>
-            <a:effectRef idx="2">
-              <a:schemeClr val="accent6"/>
-            </a:effectRef>
-            <a:fontRef idx="minor">
-              <a:schemeClr val="tx1"/>
-            </a:fontRef>
-          </p:style>
-        </p:cxnSp>
-        <p:cxnSp>
-          <p:nvCxnSpPr>
-            <p:cNvPr id="98" name="Straight Arrow Connector 97">
-              <a:extLst>
-                <a:ext uri="{FF2B5EF4-FFF2-40B4-BE49-F238E27FC236}">
-                  <a16:creationId xmlns:a16="http://schemas.microsoft.com/office/drawing/2014/main" id="{79DC3E09-C608-48EF-34B8-A8C2CC14E4C6}"/>
-                </a:ext>
-              </a:extLst>
-            </p:cNvPr>
-            <p:cNvCxnSpPr>
-              <a:cxnSpLocks/>
-            </p:cNvCxnSpPr>
-            <p:nvPr/>
-          </p:nvCxnSpPr>
-          <p:spPr>
-            <a:xfrm>
-              <a:off x="3306701" y="14705408"/>
-              <a:ext cx="0" cy="710255"/>
-            </a:xfrm>
-            <a:prstGeom prst="straightConnector1">
-              <a:avLst/>
-            </a:prstGeom>
-            <a:ln w="76200">
-              <a:tailEnd type="triangle"/>
-            </a:ln>
-          </p:spPr>
-          <p:style>
-            <a:lnRef idx="3">
-              <a:schemeClr val="accent6"/>
-            </a:lnRef>
-            <a:fillRef idx="0">
-              <a:schemeClr val="accent6"/>
-            </a:fillRef>
-            <a:effectRef idx="2">
-              <a:schemeClr val="accent6"/>
-            </a:effectRef>
-            <a:fontRef idx="minor">
-              <a:schemeClr val="tx1"/>
-            </a:fontRef>
-          </p:style>
-        </p:cxnSp>
-        <p:cxnSp>
-          <p:nvCxnSpPr>
-            <p:cNvPr id="99" name="Straight Arrow Connector 98">
-              <a:extLst>
-                <a:ext uri="{FF2B5EF4-FFF2-40B4-BE49-F238E27FC236}">
-                  <a16:creationId xmlns:a16="http://schemas.microsoft.com/office/drawing/2014/main" id="{2782CEDF-48E0-DC6D-4FDE-A93D25E4CB66}"/>
-                </a:ext>
-              </a:extLst>
-            </p:cNvPr>
-            <p:cNvCxnSpPr>
-              <a:cxnSpLocks/>
-            </p:cNvCxnSpPr>
-            <p:nvPr/>
-          </p:nvCxnSpPr>
-          <p:spPr>
-            <a:xfrm>
-              <a:off x="19184156" y="14937831"/>
-              <a:ext cx="787245" cy="0"/>
-            </a:xfrm>
-            <a:prstGeom prst="straightConnector1">
-              <a:avLst/>
-            </a:prstGeom>
-            <a:ln w="76200">
-              <a:tailEnd type="triangle"/>
-            </a:ln>
-          </p:spPr>
-          <p:style>
-            <a:lnRef idx="3">
-              <a:schemeClr val="accent6"/>
-            </a:lnRef>
-            <a:fillRef idx="0">
-              <a:schemeClr val="accent6"/>
-            </a:fillRef>
-            <a:effectRef idx="2">
-              <a:schemeClr val="accent6"/>
-            </a:effectRef>
-            <a:fontRef idx="minor">
-              <a:schemeClr val="tx1"/>
-            </a:fontRef>
-          </p:style>
-        </p:cxnSp>
-        <p:sp>
-          <p:nvSpPr>
-            <p:cNvPr id="100" name="Flowchart: Alternate Process 99">
-              <a:extLst>
-                <a:ext uri="{FF2B5EF4-FFF2-40B4-BE49-F238E27FC236}">
-                  <a16:creationId xmlns:a16="http://schemas.microsoft.com/office/drawing/2014/main" id="{379E5716-44F9-217D-7057-25472C17C9CB}"/>
-                </a:ext>
-              </a:extLst>
-            </p:cNvPr>
-            <p:cNvSpPr/>
-            <p:nvPr/>
-          </p:nvSpPr>
-          <p:spPr>
-            <a:xfrm>
-              <a:off x="19962385" y="14210364"/>
-              <a:ext cx="4918550" cy="1445848"/>
-            </a:xfrm>
-            <a:prstGeom prst="flowChartAlternateProcess">
-              <a:avLst/>
-            </a:prstGeom>
-            <a:gradFill flip="none" rotWithShape="1">
-              <a:gsLst>
-                <a:gs pos="0">
-                  <a:schemeClr val="accent1">
-                    <a:shade val="30000"/>
-                    <a:satMod val="115000"/>
-                  </a:schemeClr>
-                </a:gs>
-                <a:gs pos="50000">
-                  <a:schemeClr val="accent1">
-                    <a:shade val="67500"/>
-                    <a:satMod val="115000"/>
-                  </a:schemeClr>
-                </a:gs>
-                <a:gs pos="100000">
-                  <a:schemeClr val="accent1">
-                    <a:shade val="100000"/>
-                    <a:satMod val="115000"/>
-                  </a:schemeClr>
-                </a:gs>
-              </a:gsLst>
-              <a:lin ang="5400000" scaled="1"/>
-              <a:tileRect/>
-            </a:gradFill>
-            <a:ln w="57150">
-              <a:solidFill>
-                <a:schemeClr val="tx1"/>
-              </a:solidFill>
-            </a:ln>
-          </p:spPr>
-          <p:style>
-            <a:lnRef idx="2">
-              <a:schemeClr val="accent1">
-                <a:shade val="15000"/>
-              </a:schemeClr>
-            </a:lnRef>
-            <a:fillRef idx="1">
-              <a:schemeClr val="accent1"/>
-            </a:fillRef>
-            <a:effectRef idx="0">
-              <a:schemeClr val="accent1"/>
-            </a:effectRef>
-            <a:fontRef idx="minor">
-              <a:schemeClr val="lt1"/>
-            </a:fontRef>
-          </p:style>
-          <p:txBody>
-            <a:bodyPr rtlCol="0" anchor="ctr"/>
-            <a:lstStyle/>
-            <a:p>
-              <a:pPr algn="ctr"/>
-              <a:r>
-                <a:rPr lang="en-IE" sz="4200" b="1" dirty="0"/>
-                <a:t>MutexOrchestrator</a:t>
-              </a:r>
-            </a:p>
-          </p:txBody>
-        </p:sp>
-        <p:sp>
-          <p:nvSpPr>
-            <p:cNvPr id="101" name="Flowchart: Alternate Process 100">
-              <a:extLst>
-                <a:ext uri="{FF2B5EF4-FFF2-40B4-BE49-F238E27FC236}">
-                  <a16:creationId xmlns:a16="http://schemas.microsoft.com/office/drawing/2014/main" id="{3FC73BDB-F6A4-9715-6012-AB532D7F75A2}"/>
-                </a:ext>
-              </a:extLst>
-            </p:cNvPr>
-            <p:cNvSpPr/>
-            <p:nvPr/>
-          </p:nvSpPr>
-          <p:spPr>
-            <a:xfrm>
-              <a:off x="26186718" y="12861443"/>
-              <a:ext cx="3935130" cy="1150977"/>
-            </a:xfrm>
-            <a:prstGeom prst="flowChartAlternateProcess">
-              <a:avLst/>
-            </a:prstGeom>
-            <a:gradFill flip="none" rotWithShape="1">
-              <a:gsLst>
-                <a:gs pos="0">
-                  <a:schemeClr val="accent1">
-                    <a:shade val="30000"/>
-                    <a:satMod val="115000"/>
-                  </a:schemeClr>
-                </a:gs>
-                <a:gs pos="50000">
-                  <a:schemeClr val="accent1">
-                    <a:shade val="67500"/>
-                    <a:satMod val="115000"/>
-                  </a:schemeClr>
-                </a:gs>
-                <a:gs pos="100000">
-                  <a:schemeClr val="accent1">
-                    <a:shade val="100000"/>
-                    <a:satMod val="115000"/>
-                  </a:schemeClr>
-                </a:gs>
-              </a:gsLst>
-              <a:lin ang="5400000" scaled="1"/>
-              <a:tileRect/>
-            </a:gradFill>
-            <a:ln w="57150">
-              <a:solidFill>
-                <a:schemeClr val="tx1"/>
-              </a:solidFill>
-            </a:ln>
-          </p:spPr>
-          <p:style>
-            <a:lnRef idx="2">
-              <a:schemeClr val="accent1">
-                <a:shade val="15000"/>
-              </a:schemeClr>
-            </a:lnRef>
-            <a:fillRef idx="1">
-              <a:schemeClr val="accent1"/>
-            </a:fillRef>
-            <a:effectRef idx="0">
-              <a:schemeClr val="accent1"/>
-            </a:effectRef>
-            <a:fontRef idx="minor">
-              <a:schemeClr val="lt1"/>
-            </a:fontRef>
-          </p:style>
-          <p:txBody>
-            <a:bodyPr rtlCol="0" anchor="ctr"/>
-            <a:lstStyle/>
-            <a:p>
-              <a:pPr algn="ctr"/>
-              <a:r>
-                <a:rPr lang="en-IE" sz="5000" b="1" dirty="0"/>
-                <a:t>MutexModel</a:t>
-              </a:r>
-            </a:p>
-          </p:txBody>
-        </p:sp>
-        <p:sp>
-          <p:nvSpPr>
-            <p:cNvPr id="102" name="Flowchart: Alternate Process 101">
-              <a:extLst>
-                <a:ext uri="{FF2B5EF4-FFF2-40B4-BE49-F238E27FC236}">
-                  <a16:creationId xmlns:a16="http://schemas.microsoft.com/office/drawing/2014/main" id="{D29C3517-468F-9D6D-C10E-7C6B81F1385A}"/>
-                </a:ext>
-              </a:extLst>
-            </p:cNvPr>
-            <p:cNvSpPr/>
-            <p:nvPr/>
-          </p:nvSpPr>
-          <p:spPr>
-            <a:xfrm>
-              <a:off x="26184164" y="14417087"/>
-              <a:ext cx="3937683" cy="1150977"/>
-            </a:xfrm>
-            <a:prstGeom prst="flowChartAlternateProcess">
-              <a:avLst/>
-            </a:prstGeom>
-            <a:gradFill flip="none" rotWithShape="1">
-              <a:gsLst>
-                <a:gs pos="0">
-                  <a:schemeClr val="accent1">
-                    <a:shade val="30000"/>
-                    <a:satMod val="115000"/>
-                  </a:schemeClr>
-                </a:gs>
-                <a:gs pos="50000">
-                  <a:schemeClr val="accent1">
-                    <a:shade val="67500"/>
-                    <a:satMod val="115000"/>
-                  </a:schemeClr>
-                </a:gs>
-                <a:gs pos="100000">
-                  <a:schemeClr val="accent1">
-                    <a:shade val="100000"/>
-                    <a:satMod val="115000"/>
-                  </a:schemeClr>
-                </a:gs>
-              </a:gsLst>
-              <a:lin ang="5400000" scaled="1"/>
-              <a:tileRect/>
-            </a:gradFill>
-            <a:ln w="57150">
-              <a:solidFill>
-                <a:schemeClr val="tx1"/>
-              </a:solidFill>
-            </a:ln>
-          </p:spPr>
-          <p:style>
-            <a:lnRef idx="2">
-              <a:schemeClr val="accent1">
-                <a:shade val="15000"/>
-              </a:schemeClr>
-            </a:lnRef>
-            <a:fillRef idx="1">
-              <a:schemeClr val="accent1"/>
-            </a:fillRef>
-            <a:effectRef idx="0">
-              <a:schemeClr val="accent1"/>
-            </a:effectRef>
-            <a:fontRef idx="minor">
-              <a:schemeClr val="lt1"/>
-            </a:fontRef>
-          </p:style>
-          <p:txBody>
-            <a:bodyPr rtlCol="0" anchor="ctr"/>
-            <a:lstStyle/>
-            <a:p>
-              <a:pPr algn="ctr"/>
-              <a:r>
-                <a:rPr lang="en-IE" sz="5000" b="1" dirty="0"/>
-                <a:t>MutexActor</a:t>
-              </a:r>
-            </a:p>
-          </p:txBody>
-        </p:sp>
-        <p:sp>
-          <p:nvSpPr>
-            <p:cNvPr id="103" name="Flowchart: Alternate Process 102">
-              <a:extLst>
-                <a:ext uri="{FF2B5EF4-FFF2-40B4-BE49-F238E27FC236}">
-                  <a16:creationId xmlns:a16="http://schemas.microsoft.com/office/drawing/2014/main" id="{29563104-C295-F9B5-0754-757E84BF7BA5}"/>
-                </a:ext>
-              </a:extLst>
-            </p:cNvPr>
-            <p:cNvSpPr/>
-            <p:nvPr/>
-          </p:nvSpPr>
-          <p:spPr>
-            <a:xfrm>
-              <a:off x="26168660" y="15954228"/>
-              <a:ext cx="3937683" cy="1206278"/>
-            </a:xfrm>
-            <a:prstGeom prst="flowChartAlternateProcess">
-              <a:avLst/>
-            </a:prstGeom>
-            <a:gradFill flip="none" rotWithShape="1">
-              <a:gsLst>
-                <a:gs pos="0">
-                  <a:schemeClr val="accent1">
-                    <a:shade val="30000"/>
-                    <a:satMod val="115000"/>
-                  </a:schemeClr>
-                </a:gs>
-                <a:gs pos="50000">
-                  <a:schemeClr val="accent1">
-                    <a:shade val="67500"/>
-                    <a:satMod val="115000"/>
-                  </a:schemeClr>
-                </a:gs>
-                <a:gs pos="100000">
-                  <a:schemeClr val="accent1">
-                    <a:shade val="100000"/>
-                    <a:satMod val="115000"/>
-                  </a:schemeClr>
-                </a:gs>
-              </a:gsLst>
-              <a:lin ang="5400000" scaled="1"/>
-              <a:tileRect/>
-            </a:gradFill>
-            <a:ln w="57150">
-              <a:solidFill>
-                <a:schemeClr val="tx1"/>
-              </a:solidFill>
-            </a:ln>
-          </p:spPr>
-          <p:style>
-            <a:lnRef idx="2">
-              <a:schemeClr val="accent1">
-                <a:shade val="15000"/>
-              </a:schemeClr>
-            </a:lnRef>
-            <a:fillRef idx="1">
-              <a:schemeClr val="accent1"/>
-            </a:fillRef>
-            <a:effectRef idx="0">
-              <a:schemeClr val="accent1"/>
-            </a:effectRef>
-            <a:fontRef idx="minor">
-              <a:schemeClr val="lt1"/>
-            </a:fontRef>
-          </p:style>
-          <p:txBody>
-            <a:bodyPr rtlCol="0" anchor="ctr"/>
-            <a:lstStyle/>
-            <a:p>
-              <a:pPr algn="ctr"/>
-              <a:r>
-                <a:rPr lang="en-IE" sz="4200" b="1" dirty="0"/>
-                <a:t>MutexStrategy</a:t>
-              </a:r>
-            </a:p>
-          </p:txBody>
-        </p:sp>
-        <p:cxnSp>
-          <p:nvCxnSpPr>
-            <p:cNvPr id="104" name="Straight Arrow Connector 103">
-              <a:extLst>
-                <a:ext uri="{FF2B5EF4-FFF2-40B4-BE49-F238E27FC236}">
-                  <a16:creationId xmlns:a16="http://schemas.microsoft.com/office/drawing/2014/main" id="{1C367444-4EAB-AF64-AD89-C048A3291A51}"/>
-                </a:ext>
-              </a:extLst>
-            </p:cNvPr>
-            <p:cNvCxnSpPr>
-              <a:cxnSpLocks/>
-            </p:cNvCxnSpPr>
-            <p:nvPr/>
-          </p:nvCxnSpPr>
-          <p:spPr>
-            <a:xfrm flipV="1">
-              <a:off x="24912981" y="13677712"/>
-              <a:ext cx="1204359" cy="1338029"/>
-            </a:xfrm>
-            <a:prstGeom prst="straightConnector1">
-              <a:avLst/>
-            </a:prstGeom>
-            <a:ln w="76200">
-              <a:tailEnd type="triangle"/>
-            </a:ln>
-          </p:spPr>
-          <p:style>
-            <a:lnRef idx="3">
-              <a:schemeClr val="accent6"/>
-            </a:lnRef>
-            <a:fillRef idx="0">
-              <a:schemeClr val="accent6"/>
-            </a:fillRef>
-            <a:effectRef idx="2">
-              <a:schemeClr val="accent6"/>
-            </a:effectRef>
-            <a:fontRef idx="minor">
-              <a:schemeClr val="tx1"/>
-            </a:fontRef>
-          </p:style>
-        </p:cxnSp>
-        <p:cxnSp>
-          <p:nvCxnSpPr>
-            <p:cNvPr id="105" name="Straight Arrow Connector 104">
-              <a:extLst>
-                <a:ext uri="{FF2B5EF4-FFF2-40B4-BE49-F238E27FC236}">
-                  <a16:creationId xmlns:a16="http://schemas.microsoft.com/office/drawing/2014/main" id="{E4093E88-63DC-8284-7DB4-514FFD260FD4}"/>
-                </a:ext>
-              </a:extLst>
-            </p:cNvPr>
-            <p:cNvCxnSpPr>
-              <a:cxnSpLocks/>
-            </p:cNvCxnSpPr>
-            <p:nvPr/>
-          </p:nvCxnSpPr>
-          <p:spPr>
-            <a:xfrm>
-              <a:off x="24931736" y="14978147"/>
-              <a:ext cx="1185604" cy="1445851"/>
-            </a:xfrm>
-            <a:prstGeom prst="straightConnector1">
-              <a:avLst/>
-            </a:prstGeom>
-            <a:ln w="76200">
-              <a:tailEnd type="triangle"/>
-            </a:ln>
-          </p:spPr>
-          <p:style>
-            <a:lnRef idx="3">
-              <a:schemeClr val="accent6"/>
-            </a:lnRef>
-            <a:fillRef idx="0">
-              <a:schemeClr val="accent6"/>
-            </a:fillRef>
-            <a:effectRef idx="2">
-              <a:schemeClr val="accent6"/>
-            </a:effectRef>
-            <a:fontRef idx="minor">
-              <a:schemeClr val="tx1"/>
-            </a:fontRef>
-          </p:style>
-        </p:cxnSp>
-        <p:cxnSp>
-          <p:nvCxnSpPr>
-            <p:cNvPr id="106" name="Straight Arrow Connector 105">
-              <a:extLst>
-                <a:ext uri="{FF2B5EF4-FFF2-40B4-BE49-F238E27FC236}">
-                  <a16:creationId xmlns:a16="http://schemas.microsoft.com/office/drawing/2014/main" id="{6449A0EC-92C6-A8EA-A811-7DCBAF93A55A}"/>
-                </a:ext>
-              </a:extLst>
-            </p:cNvPr>
-            <p:cNvCxnSpPr>
-              <a:cxnSpLocks/>
-            </p:cNvCxnSpPr>
-            <p:nvPr/>
-          </p:nvCxnSpPr>
-          <p:spPr>
-            <a:xfrm>
-              <a:off x="24956012" y="14997140"/>
-              <a:ext cx="1161328" cy="0"/>
-            </a:xfrm>
-            <a:prstGeom prst="straightConnector1">
-              <a:avLst/>
-            </a:prstGeom>
-            <a:ln w="76200">
-              <a:tailEnd type="triangle"/>
-            </a:ln>
-          </p:spPr>
-          <p:style>
-            <a:lnRef idx="3">
-              <a:schemeClr val="accent6"/>
-            </a:lnRef>
-            <a:fillRef idx="0">
-              <a:schemeClr val="accent6"/>
-            </a:fillRef>
-            <a:effectRef idx="2">
-              <a:schemeClr val="accent6"/>
-            </a:effectRef>
-            <a:fontRef idx="minor">
-              <a:schemeClr val="tx1"/>
-            </a:fontRef>
-          </p:style>
-        </p:cxnSp>
-      </p:grpSp>
-      <p:pic>
-        <p:nvPicPr>
-          <p:cNvPr id="4" name="Picture 3" descr="A logo of a white tooth with a red ball and bow and arrow&#10;&#10;AI-generated content may be incorrect.">
-            <a:extLst>
-              <a:ext uri="{FF2B5EF4-FFF2-40B4-BE49-F238E27FC236}">
-                <a16:creationId xmlns:a16="http://schemas.microsoft.com/office/drawing/2014/main" id="{E1FE6B74-6CAE-A5DB-C447-6DF730DC7628}"/>
-              </a:ext>
-            </a:extLst>
-          </p:cNvPr>
-          <p:cNvPicPr>
-            <a:picLocks noChangeAspect="1"/>
-          </p:cNvPicPr>
-          <p:nvPr/>
-        </p:nvPicPr>
-        <p:blipFill>
-          <a:blip r:embed="rId5">
-            <a:extLst>
-              <a:ext uri="{28A0092B-C50C-407E-A947-70E740481C1C}">
-                <a14:useLocalDpi xmlns:a14="http://schemas.microsoft.com/office/drawing/2010/main" val="0"/>
-              </a:ext>
-            </a:extLst>
-          </a:blip>
-          <a:stretch>
-            <a:fillRect/>
-          </a:stretch>
-        </p:blipFill>
-        <p:spPr>
-          <a:xfrm>
-            <a:off x="878577" y="15529103"/>
+            <a:off x="624577" y="16265703"/>
             <a:ext cx="5328880" cy="3351074"/>
           </a:xfrm>
           <a:prstGeom prst="rect">
@@ -15846,7 +13513,7 @@
           <p:nvPr/>
         </p:nvPicPr>
         <p:blipFill>
-          <a:blip r:embed="rId6">
+          <a:blip r:embed="rId3">
             <a:extLst>
               <a:ext uri="{28A0092B-C50C-407E-A947-70E740481C1C}">
                 <a14:useLocalDpi xmlns:a14="http://schemas.microsoft.com/office/drawing/2010/main" val="0"/>
@@ -15859,7 +13526,7 @@
         </p:blipFill>
         <p:spPr>
           <a:xfrm>
-            <a:off x="6940664" y="15060535"/>
+            <a:off x="6839064" y="15949535"/>
             <a:ext cx="5019858" cy="2775882"/>
           </a:xfrm>
           <a:prstGeom prst="rect">
@@ -15867,6 +13534,2550 @@
           </a:prstGeom>
         </p:spPr>
       </p:pic>
+      <p:pic>
+        <p:nvPicPr>
+          <p:cNvPr id="2" name="Picture 1">
+            <a:extLst>
+              <a:ext uri="{FF2B5EF4-FFF2-40B4-BE49-F238E27FC236}">
+                <a16:creationId xmlns:a16="http://schemas.microsoft.com/office/drawing/2014/main" id="{82F67664-A795-DBE9-AA52-79FEBF89267D}"/>
+              </a:ext>
+            </a:extLst>
+          </p:cNvPr>
+          <p:cNvPicPr>
+            <a:picLocks noChangeAspect="1"/>
+          </p:cNvPicPr>
+          <p:nvPr/>
+        </p:nvPicPr>
+        <p:blipFill>
+          <a:blip r:embed="rId4"/>
+          <a:stretch>
+            <a:fillRect/>
+          </a:stretch>
+        </p:blipFill>
+        <p:spPr>
+          <a:xfrm>
+            <a:off x="22290666" y="1106687"/>
+            <a:ext cx="7968078" cy="7152674"/>
+          </a:xfrm>
+          <a:prstGeom prst="rect">
+            <a:avLst/>
+          </a:prstGeom>
+        </p:spPr>
+      </p:pic>
+      <p:sp>
+        <p:nvSpPr>
+          <p:cNvPr id="5" name="Flowchart: Alternate Process 4">
+            <a:extLst>
+              <a:ext uri="{FF2B5EF4-FFF2-40B4-BE49-F238E27FC236}">
+                <a16:creationId xmlns:a16="http://schemas.microsoft.com/office/drawing/2014/main" id="{697A1408-FC0C-100B-FE0E-B1F767175B93}"/>
+              </a:ext>
+            </a:extLst>
+          </p:cNvPr>
+          <p:cNvSpPr/>
+          <p:nvPr/>
+        </p:nvSpPr>
+        <p:spPr>
+          <a:xfrm>
+            <a:off x="4671417" y="4551093"/>
+            <a:ext cx="6201238" cy="1263908"/>
+          </a:xfrm>
+          <a:prstGeom prst="flowChartAlternateProcess">
+            <a:avLst/>
+          </a:prstGeom>
+          <a:gradFill flip="none" rotWithShape="1">
+            <a:gsLst>
+              <a:gs pos="0">
+                <a:schemeClr val="accent1">
+                  <a:shade val="30000"/>
+                  <a:satMod val="115000"/>
+                </a:schemeClr>
+              </a:gs>
+              <a:gs pos="50000">
+                <a:schemeClr val="accent1">
+                  <a:shade val="67500"/>
+                  <a:satMod val="115000"/>
+                </a:schemeClr>
+              </a:gs>
+              <a:gs pos="100000">
+                <a:schemeClr val="accent1">
+                  <a:shade val="100000"/>
+                  <a:satMod val="115000"/>
+                </a:schemeClr>
+              </a:gs>
+            </a:gsLst>
+            <a:lin ang="5400000" scaled="1"/>
+            <a:tileRect/>
+          </a:gradFill>
+          <a:ln w="57150">
+            <a:solidFill>
+              <a:schemeClr val="tx1"/>
+            </a:solidFill>
+          </a:ln>
+        </p:spPr>
+        <p:style>
+          <a:lnRef idx="2">
+            <a:schemeClr val="accent1">
+              <a:shade val="15000"/>
+            </a:schemeClr>
+          </a:lnRef>
+          <a:fillRef idx="1">
+            <a:schemeClr val="accent1"/>
+          </a:fillRef>
+          <a:effectRef idx="0">
+            <a:schemeClr val="accent1"/>
+          </a:effectRef>
+          <a:fontRef idx="minor">
+            <a:schemeClr val="lt1"/>
+          </a:fontRef>
+        </p:style>
+        <p:txBody>
+          <a:bodyPr rtlCol="0" anchor="ctr"/>
+          <a:lstStyle/>
+          <a:p>
+            <a:pPr algn="ctr"/>
+            <a:r>
+              <a:rPr lang="en-IE" sz="5000" b="1" dirty="0"/>
+              <a:t>TaskTide Client</a:t>
+            </a:r>
+          </a:p>
+        </p:txBody>
+      </p:sp>
+      <p:sp>
+        <p:nvSpPr>
+          <p:cNvPr id="6" name="Flowchart: Alternate Process 5">
+            <a:extLst>
+              <a:ext uri="{FF2B5EF4-FFF2-40B4-BE49-F238E27FC236}">
+                <a16:creationId xmlns:a16="http://schemas.microsoft.com/office/drawing/2014/main" id="{ACCD8FFD-F9AD-D60F-3E5E-5246062D1849}"/>
+              </a:ext>
+            </a:extLst>
+          </p:cNvPr>
+          <p:cNvSpPr/>
+          <p:nvPr/>
+        </p:nvSpPr>
+        <p:spPr>
+          <a:xfrm>
+            <a:off x="1422990" y="7012739"/>
+            <a:ext cx="4585982" cy="1343146"/>
+          </a:xfrm>
+          <a:prstGeom prst="flowChartAlternateProcess">
+            <a:avLst/>
+          </a:prstGeom>
+          <a:gradFill flip="none" rotWithShape="1">
+            <a:gsLst>
+              <a:gs pos="0">
+                <a:schemeClr val="accent1">
+                  <a:shade val="30000"/>
+                  <a:satMod val="115000"/>
+                </a:schemeClr>
+              </a:gs>
+              <a:gs pos="50000">
+                <a:schemeClr val="accent1">
+                  <a:shade val="67500"/>
+                  <a:satMod val="115000"/>
+                </a:schemeClr>
+              </a:gs>
+              <a:gs pos="100000">
+                <a:schemeClr val="accent1">
+                  <a:shade val="100000"/>
+                  <a:satMod val="115000"/>
+                </a:schemeClr>
+              </a:gs>
+            </a:gsLst>
+            <a:lin ang="5400000" scaled="1"/>
+            <a:tileRect/>
+          </a:gradFill>
+          <a:ln w="57150">
+            <a:solidFill>
+              <a:schemeClr val="tx1"/>
+            </a:solidFill>
+          </a:ln>
+        </p:spPr>
+        <p:style>
+          <a:lnRef idx="2">
+            <a:schemeClr val="accent1">
+              <a:shade val="15000"/>
+            </a:schemeClr>
+          </a:lnRef>
+          <a:fillRef idx="1">
+            <a:schemeClr val="accent1"/>
+          </a:fillRef>
+          <a:effectRef idx="0">
+            <a:schemeClr val="accent1"/>
+          </a:effectRef>
+          <a:fontRef idx="minor">
+            <a:schemeClr val="lt1"/>
+          </a:fontRef>
+        </p:style>
+        <p:txBody>
+          <a:bodyPr rtlCol="0" anchor="ctr"/>
+          <a:lstStyle/>
+          <a:p>
+            <a:pPr algn="ctr"/>
+            <a:r>
+              <a:rPr lang="en-IE" sz="5000" b="1" dirty="0"/>
+              <a:t>ManagerClient</a:t>
+            </a:r>
+          </a:p>
+        </p:txBody>
+      </p:sp>
+      <p:sp>
+        <p:nvSpPr>
+          <p:cNvPr id="7" name="Flowchart: Alternate Process 6">
+            <a:extLst>
+              <a:ext uri="{FF2B5EF4-FFF2-40B4-BE49-F238E27FC236}">
+                <a16:creationId xmlns:a16="http://schemas.microsoft.com/office/drawing/2014/main" id="{F2F64F30-091D-BDAD-27FC-2AD93288F974}"/>
+              </a:ext>
+            </a:extLst>
+          </p:cNvPr>
+          <p:cNvSpPr/>
+          <p:nvPr/>
+        </p:nvSpPr>
+        <p:spPr>
+          <a:xfrm>
+            <a:off x="8601493" y="7025760"/>
+            <a:ext cx="4352343" cy="1335648"/>
+          </a:xfrm>
+          <a:prstGeom prst="flowChartAlternateProcess">
+            <a:avLst/>
+          </a:prstGeom>
+          <a:gradFill flip="none" rotWithShape="1">
+            <a:gsLst>
+              <a:gs pos="0">
+                <a:schemeClr val="accent1">
+                  <a:shade val="30000"/>
+                  <a:satMod val="115000"/>
+                </a:schemeClr>
+              </a:gs>
+              <a:gs pos="50000">
+                <a:schemeClr val="accent1">
+                  <a:shade val="67500"/>
+                  <a:satMod val="115000"/>
+                </a:schemeClr>
+              </a:gs>
+              <a:gs pos="100000">
+                <a:schemeClr val="accent1">
+                  <a:shade val="100000"/>
+                  <a:satMod val="115000"/>
+                </a:schemeClr>
+              </a:gs>
+            </a:gsLst>
+            <a:lin ang="5400000" scaled="1"/>
+            <a:tileRect/>
+          </a:gradFill>
+          <a:ln w="57150">
+            <a:solidFill>
+              <a:schemeClr val="tx1"/>
+            </a:solidFill>
+          </a:ln>
+        </p:spPr>
+        <p:style>
+          <a:lnRef idx="2">
+            <a:schemeClr val="accent1">
+              <a:shade val="15000"/>
+            </a:schemeClr>
+          </a:lnRef>
+          <a:fillRef idx="1">
+            <a:schemeClr val="accent1"/>
+          </a:fillRef>
+          <a:effectRef idx="0">
+            <a:schemeClr val="accent1"/>
+          </a:effectRef>
+          <a:fontRef idx="minor">
+            <a:schemeClr val="lt1"/>
+          </a:fontRef>
+        </p:style>
+        <p:txBody>
+          <a:bodyPr rtlCol="0" anchor="ctr"/>
+          <a:lstStyle/>
+          <a:p>
+            <a:pPr algn="ctr"/>
+            <a:r>
+              <a:rPr lang="en-IE" sz="5000" b="1" dirty="0"/>
+              <a:t>EngineClient</a:t>
+            </a:r>
+          </a:p>
+        </p:txBody>
+      </p:sp>
+      <p:sp>
+        <p:nvSpPr>
+          <p:cNvPr id="8" name="Flowchart: Alternate Process 7">
+            <a:extLst>
+              <a:ext uri="{FF2B5EF4-FFF2-40B4-BE49-F238E27FC236}">
+                <a16:creationId xmlns:a16="http://schemas.microsoft.com/office/drawing/2014/main" id="{61387D95-CBF1-A502-8EE4-0E6B5D2F80B0}"/>
+              </a:ext>
+            </a:extLst>
+          </p:cNvPr>
+          <p:cNvSpPr/>
+          <p:nvPr/>
+        </p:nvSpPr>
+        <p:spPr>
+          <a:xfrm>
+            <a:off x="4341483" y="9234926"/>
+            <a:ext cx="6531163" cy="1343146"/>
+          </a:xfrm>
+          <a:prstGeom prst="flowChartAlternateProcess">
+            <a:avLst/>
+          </a:prstGeom>
+          <a:gradFill flip="none" rotWithShape="1">
+            <a:gsLst>
+              <a:gs pos="0">
+                <a:schemeClr val="accent1">
+                  <a:shade val="30000"/>
+                  <a:satMod val="115000"/>
+                </a:schemeClr>
+              </a:gs>
+              <a:gs pos="50000">
+                <a:schemeClr val="accent1">
+                  <a:shade val="67500"/>
+                  <a:satMod val="115000"/>
+                </a:schemeClr>
+              </a:gs>
+              <a:gs pos="100000">
+                <a:schemeClr val="accent1">
+                  <a:shade val="100000"/>
+                  <a:satMod val="115000"/>
+                </a:schemeClr>
+              </a:gs>
+            </a:gsLst>
+            <a:lin ang="5400000" scaled="1"/>
+            <a:tileRect/>
+          </a:gradFill>
+          <a:ln w="57150">
+            <a:solidFill>
+              <a:schemeClr val="tx1"/>
+            </a:solidFill>
+          </a:ln>
+        </p:spPr>
+        <p:style>
+          <a:lnRef idx="2">
+            <a:schemeClr val="accent1">
+              <a:shade val="15000"/>
+            </a:schemeClr>
+          </a:lnRef>
+          <a:fillRef idx="1">
+            <a:schemeClr val="accent1"/>
+          </a:fillRef>
+          <a:effectRef idx="0">
+            <a:schemeClr val="accent1"/>
+          </a:effectRef>
+          <a:fontRef idx="minor">
+            <a:schemeClr val="lt1"/>
+          </a:fontRef>
+        </p:style>
+        <p:txBody>
+          <a:bodyPr rtlCol="0" anchor="ctr"/>
+          <a:lstStyle/>
+          <a:p>
+            <a:pPr algn="ctr"/>
+            <a:r>
+              <a:rPr lang="en-IE" sz="5000" b="1" dirty="0"/>
+              <a:t>TaskTideService</a:t>
+            </a:r>
+          </a:p>
+        </p:txBody>
+      </p:sp>
+      <p:sp>
+        <p:nvSpPr>
+          <p:cNvPr id="9" name="Flowchart: Alternate Process 8">
+            <a:extLst>
+              <a:ext uri="{FF2B5EF4-FFF2-40B4-BE49-F238E27FC236}">
+                <a16:creationId xmlns:a16="http://schemas.microsoft.com/office/drawing/2014/main" id="{5E049925-F34A-EFE4-90E2-0AB2F5FF52F3}"/>
+              </a:ext>
+            </a:extLst>
+          </p:cNvPr>
+          <p:cNvSpPr/>
+          <p:nvPr/>
+        </p:nvSpPr>
+        <p:spPr>
+          <a:xfrm>
+            <a:off x="4341483" y="11380296"/>
+            <a:ext cx="6418772" cy="1182201"/>
+          </a:xfrm>
+          <a:prstGeom prst="flowChartAlternateProcess">
+            <a:avLst/>
+          </a:prstGeom>
+          <a:gradFill flip="none" rotWithShape="1">
+            <a:gsLst>
+              <a:gs pos="0">
+                <a:schemeClr val="accent1">
+                  <a:shade val="30000"/>
+                  <a:satMod val="115000"/>
+                </a:schemeClr>
+              </a:gs>
+              <a:gs pos="50000">
+                <a:schemeClr val="accent1">
+                  <a:shade val="67500"/>
+                  <a:satMod val="115000"/>
+                </a:schemeClr>
+              </a:gs>
+              <a:gs pos="100000">
+                <a:schemeClr val="accent1">
+                  <a:shade val="100000"/>
+                  <a:satMod val="115000"/>
+                </a:schemeClr>
+              </a:gs>
+            </a:gsLst>
+            <a:lin ang="5400000" scaled="1"/>
+            <a:tileRect/>
+          </a:gradFill>
+          <a:ln w="57150">
+            <a:solidFill>
+              <a:schemeClr val="tx1"/>
+            </a:solidFill>
+          </a:ln>
+        </p:spPr>
+        <p:style>
+          <a:lnRef idx="2">
+            <a:schemeClr val="accent1">
+              <a:shade val="15000"/>
+            </a:schemeClr>
+          </a:lnRef>
+          <a:fillRef idx="1">
+            <a:schemeClr val="accent1"/>
+          </a:fillRef>
+          <a:effectRef idx="0">
+            <a:schemeClr val="accent1"/>
+          </a:effectRef>
+          <a:fontRef idx="minor">
+            <a:schemeClr val="lt1"/>
+          </a:fontRef>
+        </p:style>
+        <p:txBody>
+          <a:bodyPr rtlCol="0" anchor="ctr"/>
+          <a:lstStyle/>
+          <a:p>
+            <a:pPr algn="ctr"/>
+            <a:r>
+              <a:rPr lang="en-IE" sz="5000" b="1" dirty="0"/>
+              <a:t>TaskTideRepository</a:t>
+            </a:r>
+          </a:p>
+        </p:txBody>
+      </p:sp>
+      <p:sp>
+        <p:nvSpPr>
+          <p:cNvPr id="10" name="Flowchart: Alternate Process 9">
+            <a:extLst>
+              <a:ext uri="{FF2B5EF4-FFF2-40B4-BE49-F238E27FC236}">
+                <a16:creationId xmlns:a16="http://schemas.microsoft.com/office/drawing/2014/main" id="{67D27A5C-1A54-F813-BE69-7A5942C35929}"/>
+              </a:ext>
+            </a:extLst>
+          </p:cNvPr>
+          <p:cNvSpPr/>
+          <p:nvPr/>
+        </p:nvSpPr>
+        <p:spPr>
+          <a:xfrm>
+            <a:off x="190500" y="14259699"/>
+            <a:ext cx="6163026" cy="1270617"/>
+          </a:xfrm>
+          <a:prstGeom prst="flowChartAlternateProcess">
+            <a:avLst/>
+          </a:prstGeom>
+          <a:gradFill flip="none" rotWithShape="1">
+            <a:gsLst>
+              <a:gs pos="0">
+                <a:schemeClr val="accent1">
+                  <a:shade val="30000"/>
+                  <a:satMod val="115000"/>
+                </a:schemeClr>
+              </a:gs>
+              <a:gs pos="50000">
+                <a:schemeClr val="accent1">
+                  <a:shade val="67500"/>
+                  <a:satMod val="115000"/>
+                </a:schemeClr>
+              </a:gs>
+              <a:gs pos="100000">
+                <a:schemeClr val="accent1">
+                  <a:shade val="100000"/>
+                  <a:satMod val="115000"/>
+                </a:schemeClr>
+              </a:gs>
+            </a:gsLst>
+            <a:lin ang="5400000" scaled="1"/>
+            <a:tileRect/>
+          </a:gradFill>
+          <a:ln w="57150">
+            <a:solidFill>
+              <a:schemeClr val="tx1"/>
+            </a:solidFill>
+          </a:ln>
+        </p:spPr>
+        <p:style>
+          <a:lnRef idx="2">
+            <a:schemeClr val="accent1">
+              <a:shade val="15000"/>
+            </a:schemeClr>
+          </a:lnRef>
+          <a:fillRef idx="1">
+            <a:schemeClr val="accent1"/>
+          </a:fillRef>
+          <a:effectRef idx="0">
+            <a:schemeClr val="accent1"/>
+          </a:effectRef>
+          <a:fontRef idx="minor">
+            <a:schemeClr val="lt1"/>
+          </a:fontRef>
+        </p:style>
+        <p:txBody>
+          <a:bodyPr rtlCol="0" anchor="ctr"/>
+          <a:lstStyle/>
+          <a:p>
+            <a:pPr algn="ctr"/>
+            <a:r>
+              <a:rPr lang="en-IE" sz="5000" b="1" dirty="0"/>
+              <a:t>TemplateRepository</a:t>
+            </a:r>
+          </a:p>
+        </p:txBody>
+      </p:sp>
+      <p:sp>
+        <p:nvSpPr>
+          <p:cNvPr id="11" name="Flowchart: Alternate Process 10">
+            <a:extLst>
+              <a:ext uri="{FF2B5EF4-FFF2-40B4-BE49-F238E27FC236}">
+                <a16:creationId xmlns:a16="http://schemas.microsoft.com/office/drawing/2014/main" id="{2F2D9D02-3A56-54CB-6191-882B3D76141B}"/>
+              </a:ext>
+            </a:extLst>
+          </p:cNvPr>
+          <p:cNvSpPr/>
+          <p:nvPr/>
+        </p:nvSpPr>
+        <p:spPr>
+          <a:xfrm>
+            <a:off x="12460403" y="15157971"/>
+            <a:ext cx="6440138" cy="1270455"/>
+          </a:xfrm>
+          <a:prstGeom prst="flowChartAlternateProcess">
+            <a:avLst/>
+          </a:prstGeom>
+          <a:gradFill flip="none" rotWithShape="1">
+            <a:gsLst>
+              <a:gs pos="0">
+                <a:schemeClr val="accent1">
+                  <a:shade val="30000"/>
+                  <a:satMod val="115000"/>
+                </a:schemeClr>
+              </a:gs>
+              <a:gs pos="50000">
+                <a:schemeClr val="accent1">
+                  <a:shade val="67500"/>
+                  <a:satMod val="115000"/>
+                </a:schemeClr>
+              </a:gs>
+              <a:gs pos="100000">
+                <a:schemeClr val="accent1">
+                  <a:shade val="100000"/>
+                  <a:satMod val="115000"/>
+                </a:schemeClr>
+              </a:gs>
+            </a:gsLst>
+            <a:lin ang="5400000" scaled="1"/>
+            <a:tileRect/>
+          </a:gradFill>
+          <a:ln w="57150">
+            <a:solidFill>
+              <a:schemeClr val="tx1"/>
+            </a:solidFill>
+          </a:ln>
+        </p:spPr>
+        <p:style>
+          <a:lnRef idx="2">
+            <a:schemeClr val="accent1">
+              <a:shade val="15000"/>
+            </a:schemeClr>
+          </a:lnRef>
+          <a:fillRef idx="1">
+            <a:schemeClr val="accent1"/>
+          </a:fillRef>
+          <a:effectRef idx="0">
+            <a:schemeClr val="accent1"/>
+          </a:effectRef>
+          <a:fontRef idx="minor">
+            <a:schemeClr val="lt1"/>
+          </a:fontRef>
+        </p:style>
+        <p:txBody>
+          <a:bodyPr rtlCol="0" anchor="ctr"/>
+          <a:lstStyle/>
+          <a:p>
+            <a:pPr algn="ctr"/>
+            <a:r>
+              <a:rPr lang="en-IE" sz="5000" b="1" dirty="0"/>
+              <a:t>ItemStoreRepository</a:t>
+            </a:r>
+          </a:p>
+        </p:txBody>
+      </p:sp>
+      <p:sp>
+        <p:nvSpPr>
+          <p:cNvPr id="12" name="Flowchart: Alternate Process 11">
+            <a:extLst>
+              <a:ext uri="{FF2B5EF4-FFF2-40B4-BE49-F238E27FC236}">
+                <a16:creationId xmlns:a16="http://schemas.microsoft.com/office/drawing/2014/main" id="{30A00E42-787A-9CBE-661B-74828FB13D8F}"/>
+              </a:ext>
+            </a:extLst>
+          </p:cNvPr>
+          <p:cNvSpPr/>
+          <p:nvPr/>
+        </p:nvSpPr>
+        <p:spPr>
+          <a:xfrm>
+            <a:off x="6817442" y="13461075"/>
+            <a:ext cx="4831346" cy="1092937"/>
+          </a:xfrm>
+          <a:prstGeom prst="flowChartAlternateProcess">
+            <a:avLst/>
+          </a:prstGeom>
+          <a:gradFill flip="none" rotWithShape="1">
+            <a:gsLst>
+              <a:gs pos="0">
+                <a:schemeClr val="accent1">
+                  <a:shade val="30000"/>
+                  <a:satMod val="115000"/>
+                </a:schemeClr>
+              </a:gs>
+              <a:gs pos="50000">
+                <a:schemeClr val="accent1">
+                  <a:shade val="67500"/>
+                  <a:satMod val="115000"/>
+                </a:schemeClr>
+              </a:gs>
+              <a:gs pos="100000">
+                <a:schemeClr val="accent1">
+                  <a:shade val="100000"/>
+                  <a:satMod val="115000"/>
+                </a:schemeClr>
+              </a:gs>
+            </a:gsLst>
+            <a:lin ang="5400000" scaled="1"/>
+            <a:tileRect/>
+          </a:gradFill>
+          <a:ln w="57150">
+            <a:solidFill>
+              <a:schemeClr val="tx1"/>
+            </a:solidFill>
+          </a:ln>
+        </p:spPr>
+        <p:style>
+          <a:lnRef idx="2">
+            <a:schemeClr val="accent1">
+              <a:shade val="15000"/>
+            </a:schemeClr>
+          </a:lnRef>
+          <a:fillRef idx="1">
+            <a:schemeClr val="accent1"/>
+          </a:fillRef>
+          <a:effectRef idx="0">
+            <a:schemeClr val="accent1"/>
+          </a:effectRef>
+          <a:fontRef idx="minor">
+            <a:schemeClr val="lt1"/>
+          </a:fontRef>
+        </p:style>
+        <p:txBody>
+          <a:bodyPr rtlCol="0" anchor="ctr"/>
+          <a:lstStyle/>
+          <a:p>
+            <a:pPr algn="ctr"/>
+            <a:r>
+              <a:rPr lang="en-IE" sz="5000" b="1" dirty="0"/>
+              <a:t>JpaRepository</a:t>
+            </a:r>
+          </a:p>
+        </p:txBody>
+      </p:sp>
+      <p:grpSp>
+        <p:nvGrpSpPr>
+          <p:cNvPr id="13" name="Group 12">
+            <a:extLst>
+              <a:ext uri="{FF2B5EF4-FFF2-40B4-BE49-F238E27FC236}">
+                <a16:creationId xmlns:a16="http://schemas.microsoft.com/office/drawing/2014/main" id="{95740114-8DA1-2E55-2D12-F68B41B5E29D}"/>
+              </a:ext>
+            </a:extLst>
+          </p:cNvPr>
+          <p:cNvGrpSpPr/>
+          <p:nvPr/>
+        </p:nvGrpSpPr>
+        <p:grpSpPr>
+          <a:xfrm>
+            <a:off x="13452834" y="17263362"/>
+            <a:ext cx="5208788" cy="2791999"/>
+            <a:chOff x="8471368" y="11395622"/>
+            <a:chExt cx="3773483" cy="1545522"/>
+          </a:xfrm>
+        </p:grpSpPr>
+        <p:pic>
+          <p:nvPicPr>
+            <p:cNvPr id="52" name="Picture 51" descr="A logo with a feather&#10;&#10;AI-generated content may be incorrect.">
+              <a:extLst>
+                <a:ext uri="{FF2B5EF4-FFF2-40B4-BE49-F238E27FC236}">
+                  <a16:creationId xmlns:a16="http://schemas.microsoft.com/office/drawing/2014/main" id="{D7F1693E-7025-8467-D2E1-D07425C7DD85}"/>
+                </a:ext>
+              </a:extLst>
+            </p:cNvPr>
+            <p:cNvPicPr>
+              <a:picLocks noChangeAspect="1"/>
+            </p:cNvPicPr>
+            <p:nvPr/>
+          </p:nvPicPr>
+          <p:blipFill>
+            <a:blip r:embed="rId5">
+              <a:extLst>
+                <a:ext uri="{28A0092B-C50C-407E-A947-70E740481C1C}">
+                  <a14:useLocalDpi xmlns:a14="http://schemas.microsoft.com/office/drawing/2010/main" val="0"/>
+                </a:ext>
+              </a:extLst>
+            </a:blip>
+            <a:stretch>
+              <a:fillRect/>
+            </a:stretch>
+          </p:blipFill>
+          <p:spPr>
+            <a:xfrm>
+              <a:off x="8471368" y="11395622"/>
+              <a:ext cx="1552575" cy="733425"/>
+            </a:xfrm>
+            <a:prstGeom prst="rect">
+              <a:avLst/>
+            </a:prstGeom>
+          </p:spPr>
+        </p:pic>
+        <p:pic>
+          <p:nvPicPr>
+            <p:cNvPr id="53" name="Picture 52" descr="A yellow leopard jumping in a folder&#10;&#10;AI-generated content may be incorrect.">
+              <a:extLst>
+                <a:ext uri="{FF2B5EF4-FFF2-40B4-BE49-F238E27FC236}">
+                  <a16:creationId xmlns:a16="http://schemas.microsoft.com/office/drawing/2014/main" id="{9EFB5294-5299-6F2D-4B44-3D4954D1315D}"/>
+                </a:ext>
+              </a:extLst>
+            </p:cNvPr>
+            <p:cNvPicPr>
+              <a:picLocks noChangeAspect="1"/>
+            </p:cNvPicPr>
+            <p:nvPr/>
+          </p:nvPicPr>
+          <p:blipFill>
+            <a:blip r:embed="rId6">
+              <a:extLst>
+                <a:ext uri="{28A0092B-C50C-407E-A947-70E740481C1C}">
+                  <a14:useLocalDpi xmlns:a14="http://schemas.microsoft.com/office/drawing/2010/main" val="0"/>
+                </a:ext>
+              </a:extLst>
+            </a:blip>
+            <a:stretch>
+              <a:fillRect/>
+            </a:stretch>
+          </p:blipFill>
+          <p:spPr>
+            <a:xfrm>
+              <a:off x="10410768" y="12024102"/>
+              <a:ext cx="1834083" cy="917042"/>
+            </a:xfrm>
+            <a:prstGeom prst="rect">
+              <a:avLst/>
+            </a:prstGeom>
+          </p:spPr>
+        </p:pic>
+        <p:cxnSp>
+          <p:nvCxnSpPr>
+            <p:cNvPr id="55" name="Straight Connector 54">
+              <a:extLst>
+                <a:ext uri="{FF2B5EF4-FFF2-40B4-BE49-F238E27FC236}">
+                  <a16:creationId xmlns:a16="http://schemas.microsoft.com/office/drawing/2014/main" id="{0136711D-DAEB-DC8C-BC12-5937C6AD3D43}"/>
+                </a:ext>
+              </a:extLst>
+            </p:cNvPr>
+            <p:cNvCxnSpPr/>
+            <p:nvPr/>
+          </p:nvCxnSpPr>
+          <p:spPr>
+            <a:xfrm flipH="1">
+              <a:off x="9449163" y="11416068"/>
+              <a:ext cx="1765738" cy="1525076"/>
+            </a:xfrm>
+            <a:prstGeom prst="line">
+              <a:avLst/>
+            </a:prstGeom>
+            <a:ln w="38100"/>
+          </p:spPr>
+          <p:style>
+            <a:lnRef idx="2">
+              <a:schemeClr val="dk1"/>
+            </a:lnRef>
+            <a:fillRef idx="0">
+              <a:schemeClr val="dk1"/>
+            </a:fillRef>
+            <a:effectRef idx="1">
+              <a:schemeClr val="dk1"/>
+            </a:effectRef>
+            <a:fontRef idx="minor">
+              <a:schemeClr val="tx1"/>
+            </a:fontRef>
+          </p:style>
+        </p:cxnSp>
+      </p:grpSp>
+      <p:cxnSp>
+        <p:nvCxnSpPr>
+          <p:cNvPr id="14" name="Straight Arrow Connector 13">
+            <a:extLst>
+              <a:ext uri="{FF2B5EF4-FFF2-40B4-BE49-F238E27FC236}">
+                <a16:creationId xmlns:a16="http://schemas.microsoft.com/office/drawing/2014/main" id="{7F41C21B-1002-5F40-E2C4-A60CF6060AA1}"/>
+              </a:ext>
+            </a:extLst>
+          </p:cNvPr>
+          <p:cNvCxnSpPr>
+            <a:cxnSpLocks/>
+          </p:cNvCxnSpPr>
+          <p:nvPr/>
+        </p:nvCxnSpPr>
+        <p:spPr>
+          <a:xfrm>
+            <a:off x="5182644" y="5849311"/>
+            <a:ext cx="0" cy="1077900"/>
+          </a:xfrm>
+          <a:prstGeom prst="straightConnector1">
+            <a:avLst/>
+          </a:prstGeom>
+          <a:ln w="76200">
+            <a:tailEnd type="triangle"/>
+          </a:ln>
+        </p:spPr>
+        <p:style>
+          <a:lnRef idx="3">
+            <a:schemeClr val="accent6"/>
+          </a:lnRef>
+          <a:fillRef idx="0">
+            <a:schemeClr val="accent6"/>
+          </a:fillRef>
+          <a:effectRef idx="2">
+            <a:schemeClr val="accent6"/>
+          </a:effectRef>
+          <a:fontRef idx="minor">
+            <a:schemeClr val="tx1"/>
+          </a:fontRef>
+        </p:style>
+      </p:cxnSp>
+      <p:cxnSp>
+        <p:nvCxnSpPr>
+          <p:cNvPr id="16" name="Straight Arrow Connector 15">
+            <a:extLst>
+              <a:ext uri="{FF2B5EF4-FFF2-40B4-BE49-F238E27FC236}">
+                <a16:creationId xmlns:a16="http://schemas.microsoft.com/office/drawing/2014/main" id="{6CD3992E-2D12-1079-1D8F-2679C1B936EA}"/>
+              </a:ext>
+            </a:extLst>
+          </p:cNvPr>
+          <p:cNvCxnSpPr>
+            <a:cxnSpLocks/>
+          </p:cNvCxnSpPr>
+          <p:nvPr/>
+        </p:nvCxnSpPr>
+        <p:spPr>
+          <a:xfrm>
+            <a:off x="9222767" y="12610224"/>
+            <a:ext cx="0" cy="806090"/>
+          </a:xfrm>
+          <a:prstGeom prst="straightConnector1">
+            <a:avLst/>
+          </a:prstGeom>
+          <a:ln w="76200">
+            <a:tailEnd type="triangle"/>
+          </a:ln>
+        </p:spPr>
+        <p:style>
+          <a:lnRef idx="3">
+            <a:schemeClr val="accent6"/>
+          </a:lnRef>
+          <a:fillRef idx="0">
+            <a:schemeClr val="accent6"/>
+          </a:fillRef>
+          <a:effectRef idx="2">
+            <a:schemeClr val="accent6"/>
+          </a:effectRef>
+          <a:fontRef idx="minor">
+            <a:schemeClr val="tx1"/>
+          </a:fontRef>
+        </p:style>
+      </p:cxnSp>
+      <p:cxnSp>
+        <p:nvCxnSpPr>
+          <p:cNvPr id="17" name="Straight Arrow Connector 16">
+            <a:extLst>
+              <a:ext uri="{FF2B5EF4-FFF2-40B4-BE49-F238E27FC236}">
+                <a16:creationId xmlns:a16="http://schemas.microsoft.com/office/drawing/2014/main" id="{2CC21341-3094-3950-D147-7182BEF424D4}"/>
+              </a:ext>
+            </a:extLst>
+          </p:cNvPr>
+          <p:cNvCxnSpPr>
+            <a:cxnSpLocks/>
+          </p:cNvCxnSpPr>
+          <p:nvPr/>
+        </p:nvCxnSpPr>
+        <p:spPr>
+          <a:xfrm>
+            <a:off x="15473375" y="16484330"/>
+            <a:ext cx="0" cy="710255"/>
+          </a:xfrm>
+          <a:prstGeom prst="straightConnector1">
+            <a:avLst/>
+          </a:prstGeom>
+          <a:ln w="76200">
+            <a:tailEnd type="triangle"/>
+          </a:ln>
+        </p:spPr>
+        <p:style>
+          <a:lnRef idx="3">
+            <a:schemeClr val="accent6"/>
+          </a:lnRef>
+          <a:fillRef idx="0">
+            <a:schemeClr val="accent6"/>
+          </a:fillRef>
+          <a:effectRef idx="2">
+            <a:schemeClr val="accent6"/>
+          </a:effectRef>
+          <a:fontRef idx="minor">
+            <a:schemeClr val="tx1"/>
+          </a:fontRef>
+        </p:style>
+      </p:cxnSp>
+      <p:sp>
+        <p:nvSpPr>
+          <p:cNvPr id="18" name="Flowchart: Alternate Process 17">
+            <a:extLst>
+              <a:ext uri="{FF2B5EF4-FFF2-40B4-BE49-F238E27FC236}">
+                <a16:creationId xmlns:a16="http://schemas.microsoft.com/office/drawing/2014/main" id="{1865516B-2C47-FA60-6E82-ED0871B6619A}"/>
+              </a:ext>
+            </a:extLst>
+          </p:cNvPr>
+          <p:cNvSpPr/>
+          <p:nvPr/>
+        </p:nvSpPr>
+        <p:spPr>
+          <a:xfrm>
+            <a:off x="13930380" y="6989372"/>
+            <a:ext cx="4775687" cy="1405977"/>
+          </a:xfrm>
+          <a:prstGeom prst="flowChartAlternateProcess">
+            <a:avLst/>
+          </a:prstGeom>
+          <a:gradFill flip="none" rotWithShape="1">
+            <a:gsLst>
+              <a:gs pos="0">
+                <a:schemeClr val="accent1">
+                  <a:shade val="30000"/>
+                  <a:satMod val="115000"/>
+                </a:schemeClr>
+              </a:gs>
+              <a:gs pos="50000">
+                <a:schemeClr val="accent1">
+                  <a:shade val="67500"/>
+                  <a:satMod val="115000"/>
+                </a:schemeClr>
+              </a:gs>
+              <a:gs pos="100000">
+                <a:schemeClr val="accent1">
+                  <a:shade val="100000"/>
+                  <a:satMod val="115000"/>
+                </a:schemeClr>
+              </a:gs>
+            </a:gsLst>
+            <a:lin ang="5400000" scaled="1"/>
+            <a:tileRect/>
+          </a:gradFill>
+          <a:ln w="57150">
+            <a:solidFill>
+              <a:schemeClr val="tx1"/>
+            </a:solidFill>
+          </a:ln>
+        </p:spPr>
+        <p:style>
+          <a:lnRef idx="2">
+            <a:schemeClr val="accent1">
+              <a:shade val="15000"/>
+            </a:schemeClr>
+          </a:lnRef>
+          <a:fillRef idx="1">
+            <a:schemeClr val="accent1"/>
+          </a:fillRef>
+          <a:effectRef idx="0">
+            <a:schemeClr val="accent1"/>
+          </a:effectRef>
+          <a:fontRef idx="minor">
+            <a:schemeClr val="lt1"/>
+          </a:fontRef>
+        </p:style>
+        <p:txBody>
+          <a:bodyPr rtlCol="0" anchor="ctr"/>
+          <a:lstStyle/>
+          <a:p>
+            <a:pPr algn="ctr"/>
+            <a:r>
+              <a:rPr lang="en-IE" sz="5000" b="1" dirty="0"/>
+              <a:t>TaskTideEngine</a:t>
+            </a:r>
+          </a:p>
+        </p:txBody>
+      </p:sp>
+      <p:cxnSp>
+        <p:nvCxnSpPr>
+          <p:cNvPr id="19" name="Straight Arrow Connector 18">
+            <a:extLst>
+              <a:ext uri="{FF2B5EF4-FFF2-40B4-BE49-F238E27FC236}">
+                <a16:creationId xmlns:a16="http://schemas.microsoft.com/office/drawing/2014/main" id="{15BA4962-DA4F-F14B-60D7-1FE7882114F8}"/>
+              </a:ext>
+            </a:extLst>
+          </p:cNvPr>
+          <p:cNvCxnSpPr>
+            <a:cxnSpLocks/>
+          </p:cNvCxnSpPr>
+          <p:nvPr/>
+        </p:nvCxnSpPr>
+        <p:spPr>
+          <a:xfrm>
+            <a:off x="10789975" y="12095599"/>
+            <a:ext cx="647546" cy="0"/>
+          </a:xfrm>
+          <a:prstGeom prst="straightConnector1">
+            <a:avLst/>
+          </a:prstGeom>
+          <a:ln w="76200">
+            <a:tailEnd type="triangle"/>
+          </a:ln>
+        </p:spPr>
+        <p:style>
+          <a:lnRef idx="3">
+            <a:schemeClr val="accent6"/>
+          </a:lnRef>
+          <a:fillRef idx="0">
+            <a:schemeClr val="accent6"/>
+          </a:fillRef>
+          <a:effectRef idx="2">
+            <a:schemeClr val="accent6"/>
+          </a:effectRef>
+          <a:fontRef idx="minor">
+            <a:schemeClr val="tx1"/>
+          </a:fontRef>
+        </p:style>
+      </p:cxnSp>
+      <p:sp>
+        <p:nvSpPr>
+          <p:cNvPr id="20" name="Flowchart: Alternate Process 19">
+            <a:extLst>
+              <a:ext uri="{FF2B5EF4-FFF2-40B4-BE49-F238E27FC236}">
+                <a16:creationId xmlns:a16="http://schemas.microsoft.com/office/drawing/2014/main" id="{A061BCB1-8FE1-4A80-0D0B-D65883EE0925}"/>
+              </a:ext>
+            </a:extLst>
+          </p:cNvPr>
+          <p:cNvSpPr/>
+          <p:nvPr/>
+        </p:nvSpPr>
+        <p:spPr>
+          <a:xfrm>
+            <a:off x="11437520" y="11395572"/>
+            <a:ext cx="4775698" cy="1219121"/>
+          </a:xfrm>
+          <a:prstGeom prst="flowChartAlternateProcess">
+            <a:avLst/>
+          </a:prstGeom>
+          <a:gradFill flip="none" rotWithShape="1">
+            <a:gsLst>
+              <a:gs pos="0">
+                <a:schemeClr val="accent1">
+                  <a:shade val="30000"/>
+                  <a:satMod val="115000"/>
+                </a:schemeClr>
+              </a:gs>
+              <a:gs pos="50000">
+                <a:schemeClr val="accent1">
+                  <a:shade val="67500"/>
+                  <a:satMod val="115000"/>
+                </a:schemeClr>
+              </a:gs>
+              <a:gs pos="100000">
+                <a:schemeClr val="accent1">
+                  <a:shade val="100000"/>
+                  <a:satMod val="115000"/>
+                </a:schemeClr>
+              </a:gs>
+            </a:gsLst>
+            <a:lin ang="5400000" scaled="1"/>
+            <a:tileRect/>
+          </a:gradFill>
+          <a:ln w="57150">
+            <a:solidFill>
+              <a:schemeClr val="tx1"/>
+            </a:solidFill>
+          </a:ln>
+        </p:spPr>
+        <p:style>
+          <a:lnRef idx="2">
+            <a:schemeClr val="accent1">
+              <a:shade val="15000"/>
+            </a:schemeClr>
+          </a:lnRef>
+          <a:fillRef idx="1">
+            <a:schemeClr val="accent1"/>
+          </a:fillRef>
+          <a:effectRef idx="0">
+            <a:schemeClr val="accent1"/>
+          </a:effectRef>
+          <a:fontRef idx="minor">
+            <a:schemeClr val="lt1"/>
+          </a:fontRef>
+        </p:style>
+        <p:txBody>
+          <a:bodyPr rtlCol="0" anchor="ctr"/>
+          <a:lstStyle/>
+          <a:p>
+            <a:pPr algn="ctr"/>
+            <a:r>
+              <a:rPr lang="en-IE" sz="5000" b="1" dirty="0"/>
+              <a:t>TaskTideModel</a:t>
+            </a:r>
+          </a:p>
+        </p:txBody>
+      </p:sp>
+      <p:sp>
+        <p:nvSpPr>
+          <p:cNvPr id="21" name="Flowchart: Alternate Process 20">
+            <a:extLst>
+              <a:ext uri="{FF2B5EF4-FFF2-40B4-BE49-F238E27FC236}">
+                <a16:creationId xmlns:a16="http://schemas.microsoft.com/office/drawing/2014/main" id="{A0181391-FDAE-83C0-4446-6EDBC6942091}"/>
+              </a:ext>
+            </a:extLst>
+          </p:cNvPr>
+          <p:cNvSpPr/>
+          <p:nvPr/>
+        </p:nvSpPr>
+        <p:spPr>
+          <a:xfrm>
+            <a:off x="17538017" y="9978543"/>
+            <a:ext cx="3937683" cy="1150977"/>
+          </a:xfrm>
+          <a:prstGeom prst="flowChartAlternateProcess">
+            <a:avLst/>
+          </a:prstGeom>
+          <a:gradFill flip="none" rotWithShape="1">
+            <a:gsLst>
+              <a:gs pos="0">
+                <a:schemeClr val="accent1">
+                  <a:shade val="30000"/>
+                  <a:satMod val="115000"/>
+                </a:schemeClr>
+              </a:gs>
+              <a:gs pos="50000">
+                <a:schemeClr val="accent1">
+                  <a:shade val="67500"/>
+                  <a:satMod val="115000"/>
+                </a:schemeClr>
+              </a:gs>
+              <a:gs pos="100000">
+                <a:schemeClr val="accent1">
+                  <a:shade val="100000"/>
+                  <a:satMod val="115000"/>
+                </a:schemeClr>
+              </a:gs>
+            </a:gsLst>
+            <a:lin ang="5400000" scaled="1"/>
+            <a:tileRect/>
+          </a:gradFill>
+          <a:ln w="57150">
+            <a:solidFill>
+              <a:schemeClr val="tx1"/>
+            </a:solidFill>
+          </a:ln>
+        </p:spPr>
+        <p:style>
+          <a:lnRef idx="2">
+            <a:schemeClr val="accent1">
+              <a:shade val="15000"/>
+            </a:schemeClr>
+          </a:lnRef>
+          <a:fillRef idx="1">
+            <a:schemeClr val="accent1"/>
+          </a:fillRef>
+          <a:effectRef idx="0">
+            <a:schemeClr val="accent1"/>
+          </a:effectRef>
+          <a:fontRef idx="minor">
+            <a:schemeClr val="lt1"/>
+          </a:fontRef>
+        </p:style>
+        <p:txBody>
+          <a:bodyPr rtlCol="0" anchor="ctr"/>
+          <a:lstStyle/>
+          <a:p>
+            <a:pPr algn="ctr"/>
+            <a:r>
+              <a:rPr lang="en-IE" sz="5000" b="1" dirty="0"/>
+              <a:t>Workflow</a:t>
+            </a:r>
+          </a:p>
+        </p:txBody>
+      </p:sp>
+      <p:sp>
+        <p:nvSpPr>
+          <p:cNvPr id="22" name="Flowchart: Alternate Process 21">
+            <a:extLst>
+              <a:ext uri="{FF2B5EF4-FFF2-40B4-BE49-F238E27FC236}">
+                <a16:creationId xmlns:a16="http://schemas.microsoft.com/office/drawing/2014/main" id="{D5B57F85-30C3-BE1B-FA95-6F3E52596542}"/>
+              </a:ext>
+            </a:extLst>
+          </p:cNvPr>
+          <p:cNvSpPr/>
+          <p:nvPr/>
+        </p:nvSpPr>
+        <p:spPr>
+          <a:xfrm>
+            <a:off x="17535464" y="11534187"/>
+            <a:ext cx="3937683" cy="1150977"/>
+          </a:xfrm>
+          <a:prstGeom prst="flowChartAlternateProcess">
+            <a:avLst/>
+          </a:prstGeom>
+          <a:gradFill flip="none" rotWithShape="1">
+            <a:gsLst>
+              <a:gs pos="0">
+                <a:schemeClr val="accent1">
+                  <a:shade val="30000"/>
+                  <a:satMod val="115000"/>
+                </a:schemeClr>
+              </a:gs>
+              <a:gs pos="50000">
+                <a:schemeClr val="accent1">
+                  <a:shade val="67500"/>
+                  <a:satMod val="115000"/>
+                </a:schemeClr>
+              </a:gs>
+              <a:gs pos="100000">
+                <a:schemeClr val="accent1">
+                  <a:shade val="100000"/>
+                  <a:satMod val="115000"/>
+                </a:schemeClr>
+              </a:gs>
+            </a:gsLst>
+            <a:lin ang="5400000" scaled="1"/>
+            <a:tileRect/>
+          </a:gradFill>
+          <a:ln w="57150">
+            <a:solidFill>
+              <a:schemeClr val="tx1"/>
+            </a:solidFill>
+          </a:ln>
+        </p:spPr>
+        <p:style>
+          <a:lnRef idx="2">
+            <a:schemeClr val="accent1">
+              <a:shade val="15000"/>
+            </a:schemeClr>
+          </a:lnRef>
+          <a:fillRef idx="1">
+            <a:schemeClr val="accent1"/>
+          </a:fillRef>
+          <a:effectRef idx="0">
+            <a:schemeClr val="accent1"/>
+          </a:effectRef>
+          <a:fontRef idx="minor">
+            <a:schemeClr val="lt1"/>
+          </a:fontRef>
+        </p:style>
+        <p:txBody>
+          <a:bodyPr rtlCol="0" anchor="ctr"/>
+          <a:lstStyle/>
+          <a:p>
+            <a:pPr algn="ctr"/>
+            <a:r>
+              <a:rPr lang="en-IE" sz="5000" b="1" dirty="0"/>
+              <a:t>Step</a:t>
+            </a:r>
+          </a:p>
+        </p:txBody>
+      </p:sp>
+      <p:sp>
+        <p:nvSpPr>
+          <p:cNvPr id="23" name="Flowchart: Alternate Process 22">
+            <a:extLst>
+              <a:ext uri="{FF2B5EF4-FFF2-40B4-BE49-F238E27FC236}">
+                <a16:creationId xmlns:a16="http://schemas.microsoft.com/office/drawing/2014/main" id="{C73AFC73-F548-D403-D88D-2AD70C0AD41F}"/>
+              </a:ext>
+            </a:extLst>
+          </p:cNvPr>
+          <p:cNvSpPr/>
+          <p:nvPr/>
+        </p:nvSpPr>
+        <p:spPr>
+          <a:xfrm>
+            <a:off x="17519960" y="13071328"/>
+            <a:ext cx="3937683" cy="1206278"/>
+          </a:xfrm>
+          <a:prstGeom prst="flowChartAlternateProcess">
+            <a:avLst/>
+          </a:prstGeom>
+          <a:gradFill flip="none" rotWithShape="1">
+            <a:gsLst>
+              <a:gs pos="0">
+                <a:schemeClr val="accent1">
+                  <a:shade val="30000"/>
+                  <a:satMod val="115000"/>
+                </a:schemeClr>
+              </a:gs>
+              <a:gs pos="50000">
+                <a:schemeClr val="accent1">
+                  <a:shade val="67500"/>
+                  <a:satMod val="115000"/>
+                </a:schemeClr>
+              </a:gs>
+              <a:gs pos="100000">
+                <a:schemeClr val="accent1">
+                  <a:shade val="100000"/>
+                  <a:satMod val="115000"/>
+                </a:schemeClr>
+              </a:gs>
+            </a:gsLst>
+            <a:lin ang="5400000" scaled="1"/>
+            <a:tileRect/>
+          </a:gradFill>
+          <a:ln w="57150">
+            <a:solidFill>
+              <a:schemeClr val="tx1"/>
+            </a:solidFill>
+          </a:ln>
+        </p:spPr>
+        <p:style>
+          <a:lnRef idx="2">
+            <a:schemeClr val="accent1">
+              <a:shade val="15000"/>
+            </a:schemeClr>
+          </a:lnRef>
+          <a:fillRef idx="1">
+            <a:schemeClr val="accent1"/>
+          </a:fillRef>
+          <a:effectRef idx="0">
+            <a:schemeClr val="accent1"/>
+          </a:effectRef>
+          <a:fontRef idx="minor">
+            <a:schemeClr val="lt1"/>
+          </a:fontRef>
+        </p:style>
+        <p:txBody>
+          <a:bodyPr rtlCol="0" anchor="ctr"/>
+          <a:lstStyle/>
+          <a:p>
+            <a:pPr algn="ctr"/>
+            <a:r>
+              <a:rPr lang="en-IE" sz="5000" b="1" dirty="0"/>
+              <a:t>WorkItem</a:t>
+            </a:r>
+          </a:p>
+        </p:txBody>
+      </p:sp>
+      <p:cxnSp>
+        <p:nvCxnSpPr>
+          <p:cNvPr id="24" name="Straight Arrow Connector 23">
+            <a:extLst>
+              <a:ext uri="{FF2B5EF4-FFF2-40B4-BE49-F238E27FC236}">
+                <a16:creationId xmlns:a16="http://schemas.microsoft.com/office/drawing/2014/main" id="{35B77FBD-F0A9-C9AF-FE66-42E43E3F8969}"/>
+              </a:ext>
+            </a:extLst>
+          </p:cNvPr>
+          <p:cNvCxnSpPr>
+            <a:cxnSpLocks/>
+          </p:cNvCxnSpPr>
+          <p:nvPr/>
+        </p:nvCxnSpPr>
+        <p:spPr>
+          <a:xfrm>
+            <a:off x="10099010" y="5851701"/>
+            <a:ext cx="0" cy="1075509"/>
+          </a:xfrm>
+          <a:prstGeom prst="straightConnector1">
+            <a:avLst/>
+          </a:prstGeom>
+          <a:ln w="76200">
+            <a:tailEnd type="triangle"/>
+          </a:ln>
+        </p:spPr>
+        <p:style>
+          <a:lnRef idx="3">
+            <a:schemeClr val="accent6"/>
+          </a:lnRef>
+          <a:fillRef idx="0">
+            <a:schemeClr val="accent6"/>
+          </a:fillRef>
+          <a:effectRef idx="2">
+            <a:schemeClr val="accent6"/>
+          </a:effectRef>
+          <a:fontRef idx="minor">
+            <a:schemeClr val="tx1"/>
+          </a:fontRef>
+        </p:style>
+      </p:cxnSp>
+      <p:cxnSp>
+        <p:nvCxnSpPr>
+          <p:cNvPr id="25" name="Straight Arrow Connector 24">
+            <a:extLst>
+              <a:ext uri="{FF2B5EF4-FFF2-40B4-BE49-F238E27FC236}">
+                <a16:creationId xmlns:a16="http://schemas.microsoft.com/office/drawing/2014/main" id="{268628CA-3690-D0AB-F0B1-D24B98C3E2E4}"/>
+              </a:ext>
+            </a:extLst>
+          </p:cNvPr>
+          <p:cNvCxnSpPr>
+            <a:cxnSpLocks/>
+          </p:cNvCxnSpPr>
+          <p:nvPr/>
+        </p:nvCxnSpPr>
+        <p:spPr>
+          <a:xfrm>
+            <a:off x="5182644" y="8404930"/>
+            <a:ext cx="0" cy="764759"/>
+          </a:xfrm>
+          <a:prstGeom prst="straightConnector1">
+            <a:avLst/>
+          </a:prstGeom>
+          <a:ln w="76200">
+            <a:tailEnd type="triangle"/>
+          </a:ln>
+        </p:spPr>
+        <p:style>
+          <a:lnRef idx="3">
+            <a:schemeClr val="accent6"/>
+          </a:lnRef>
+          <a:fillRef idx="0">
+            <a:schemeClr val="accent6"/>
+          </a:fillRef>
+          <a:effectRef idx="2">
+            <a:schemeClr val="accent6"/>
+          </a:effectRef>
+          <a:fontRef idx="minor">
+            <a:schemeClr val="tx1"/>
+          </a:fontRef>
+        </p:style>
+      </p:cxnSp>
+      <p:cxnSp>
+        <p:nvCxnSpPr>
+          <p:cNvPr id="26" name="Straight Arrow Connector 25">
+            <a:extLst>
+              <a:ext uri="{FF2B5EF4-FFF2-40B4-BE49-F238E27FC236}">
+                <a16:creationId xmlns:a16="http://schemas.microsoft.com/office/drawing/2014/main" id="{C2A86C12-51C1-0736-C3F2-4E1F911E7A6B}"/>
+              </a:ext>
+            </a:extLst>
+          </p:cNvPr>
+          <p:cNvCxnSpPr>
+            <a:cxnSpLocks/>
+          </p:cNvCxnSpPr>
+          <p:nvPr/>
+        </p:nvCxnSpPr>
+        <p:spPr>
+          <a:xfrm>
+            <a:off x="10154548" y="8408624"/>
+            <a:ext cx="0" cy="781419"/>
+          </a:xfrm>
+          <a:prstGeom prst="straightConnector1">
+            <a:avLst/>
+          </a:prstGeom>
+          <a:ln w="76200">
+            <a:tailEnd type="triangle"/>
+          </a:ln>
+        </p:spPr>
+        <p:style>
+          <a:lnRef idx="3">
+            <a:schemeClr val="accent6"/>
+          </a:lnRef>
+          <a:fillRef idx="0">
+            <a:schemeClr val="accent6"/>
+          </a:fillRef>
+          <a:effectRef idx="2">
+            <a:schemeClr val="accent6"/>
+          </a:effectRef>
+          <a:fontRef idx="minor">
+            <a:schemeClr val="tx1"/>
+          </a:fontRef>
+        </p:style>
+      </p:cxnSp>
+      <p:cxnSp>
+        <p:nvCxnSpPr>
+          <p:cNvPr id="27" name="Straight Arrow Connector 26">
+            <a:extLst>
+              <a:ext uri="{FF2B5EF4-FFF2-40B4-BE49-F238E27FC236}">
+                <a16:creationId xmlns:a16="http://schemas.microsoft.com/office/drawing/2014/main" id="{7BA6A289-C8CE-AB78-DFC9-EF8717C9EEBE}"/>
+              </a:ext>
+            </a:extLst>
+          </p:cNvPr>
+          <p:cNvCxnSpPr>
+            <a:cxnSpLocks/>
+          </p:cNvCxnSpPr>
+          <p:nvPr/>
+        </p:nvCxnSpPr>
+        <p:spPr>
+          <a:xfrm>
+            <a:off x="7546827" y="10628035"/>
+            <a:ext cx="0" cy="768420"/>
+          </a:xfrm>
+          <a:prstGeom prst="straightConnector1">
+            <a:avLst/>
+          </a:prstGeom>
+          <a:ln w="76200">
+            <a:tailEnd type="triangle"/>
+          </a:ln>
+        </p:spPr>
+        <p:style>
+          <a:lnRef idx="3">
+            <a:schemeClr val="accent6"/>
+          </a:lnRef>
+          <a:fillRef idx="0">
+            <a:schemeClr val="accent6"/>
+          </a:fillRef>
+          <a:effectRef idx="2">
+            <a:schemeClr val="accent6"/>
+          </a:effectRef>
+          <a:fontRef idx="minor">
+            <a:schemeClr val="tx1"/>
+          </a:fontRef>
+        </p:style>
+      </p:cxnSp>
+      <p:cxnSp>
+        <p:nvCxnSpPr>
+          <p:cNvPr id="28" name="Straight Arrow Connector 27">
+            <a:extLst>
+              <a:ext uri="{FF2B5EF4-FFF2-40B4-BE49-F238E27FC236}">
+                <a16:creationId xmlns:a16="http://schemas.microsoft.com/office/drawing/2014/main" id="{AA5C7856-1F9B-CB58-54A2-5AD49111829B}"/>
+              </a:ext>
+            </a:extLst>
+          </p:cNvPr>
+          <p:cNvCxnSpPr>
+            <a:cxnSpLocks/>
+          </p:cNvCxnSpPr>
+          <p:nvPr/>
+        </p:nvCxnSpPr>
+        <p:spPr>
+          <a:xfrm>
+            <a:off x="12980057" y="7730992"/>
+            <a:ext cx="898631" cy="0"/>
+          </a:xfrm>
+          <a:prstGeom prst="straightConnector1">
+            <a:avLst/>
+          </a:prstGeom>
+          <a:ln w="76200">
+            <a:tailEnd type="triangle"/>
+          </a:ln>
+        </p:spPr>
+        <p:style>
+          <a:lnRef idx="3">
+            <a:schemeClr val="accent6"/>
+          </a:lnRef>
+          <a:fillRef idx="0">
+            <a:schemeClr val="accent6"/>
+          </a:fillRef>
+          <a:effectRef idx="2">
+            <a:schemeClr val="accent6"/>
+          </a:effectRef>
+          <a:fontRef idx="minor">
+            <a:schemeClr val="tx1"/>
+          </a:fontRef>
+        </p:style>
+      </p:cxnSp>
+      <p:cxnSp>
+        <p:nvCxnSpPr>
+          <p:cNvPr id="29" name="Straight Arrow Connector 28">
+            <a:extLst>
+              <a:ext uri="{FF2B5EF4-FFF2-40B4-BE49-F238E27FC236}">
+                <a16:creationId xmlns:a16="http://schemas.microsoft.com/office/drawing/2014/main" id="{32894676-A062-0D25-A978-A09474FFC8F4}"/>
+              </a:ext>
+            </a:extLst>
+          </p:cNvPr>
+          <p:cNvCxnSpPr>
+            <a:cxnSpLocks/>
+          </p:cNvCxnSpPr>
+          <p:nvPr/>
+        </p:nvCxnSpPr>
+        <p:spPr>
+          <a:xfrm>
+            <a:off x="16314572" y="12119683"/>
+            <a:ext cx="1124069" cy="0"/>
+          </a:xfrm>
+          <a:prstGeom prst="straightConnector1">
+            <a:avLst/>
+          </a:prstGeom>
+          <a:ln w="76200">
+            <a:tailEnd type="triangle"/>
+          </a:ln>
+        </p:spPr>
+        <p:style>
+          <a:lnRef idx="3">
+            <a:schemeClr val="accent6"/>
+          </a:lnRef>
+          <a:fillRef idx="0">
+            <a:schemeClr val="accent6"/>
+          </a:fillRef>
+          <a:effectRef idx="2">
+            <a:schemeClr val="accent6"/>
+          </a:effectRef>
+          <a:fontRef idx="minor">
+            <a:schemeClr val="tx1"/>
+          </a:fontRef>
+        </p:style>
+      </p:cxnSp>
+      <p:cxnSp>
+        <p:nvCxnSpPr>
+          <p:cNvPr id="30" name="Straight Arrow Connector 29">
+            <a:extLst>
+              <a:ext uri="{FF2B5EF4-FFF2-40B4-BE49-F238E27FC236}">
+                <a16:creationId xmlns:a16="http://schemas.microsoft.com/office/drawing/2014/main" id="{DD9BE884-26F1-4A91-7FFC-4EED34B19924}"/>
+              </a:ext>
+            </a:extLst>
+          </p:cNvPr>
+          <p:cNvCxnSpPr>
+            <a:cxnSpLocks/>
+          </p:cNvCxnSpPr>
+          <p:nvPr/>
+        </p:nvCxnSpPr>
+        <p:spPr>
+          <a:xfrm flipV="1">
+            <a:off x="16264281" y="10862386"/>
+            <a:ext cx="1220257" cy="1270455"/>
+          </a:xfrm>
+          <a:prstGeom prst="straightConnector1">
+            <a:avLst/>
+          </a:prstGeom>
+          <a:ln w="76200">
+            <a:tailEnd type="triangle"/>
+          </a:ln>
+        </p:spPr>
+        <p:style>
+          <a:lnRef idx="3">
+            <a:schemeClr val="accent6"/>
+          </a:lnRef>
+          <a:fillRef idx="0">
+            <a:schemeClr val="accent6"/>
+          </a:fillRef>
+          <a:effectRef idx="2">
+            <a:schemeClr val="accent6"/>
+          </a:effectRef>
+          <a:fontRef idx="minor">
+            <a:schemeClr val="tx1"/>
+          </a:fontRef>
+        </p:style>
+      </p:cxnSp>
+      <p:cxnSp>
+        <p:nvCxnSpPr>
+          <p:cNvPr id="31" name="Straight Arrow Connector 30">
+            <a:extLst>
+              <a:ext uri="{FF2B5EF4-FFF2-40B4-BE49-F238E27FC236}">
+                <a16:creationId xmlns:a16="http://schemas.microsoft.com/office/drawing/2014/main" id="{9AF6ADCA-B7DA-0810-51D8-0DBEEFCAB473}"/>
+              </a:ext>
+            </a:extLst>
+          </p:cNvPr>
+          <p:cNvCxnSpPr>
+            <a:cxnSpLocks/>
+          </p:cNvCxnSpPr>
+          <p:nvPr/>
+        </p:nvCxnSpPr>
+        <p:spPr>
+          <a:xfrm rot="5400000" flipV="1">
+            <a:off x="16260145" y="12205226"/>
+            <a:ext cx="1307588" cy="1185604"/>
+          </a:xfrm>
+          <a:prstGeom prst="straightConnector1">
+            <a:avLst/>
+          </a:prstGeom>
+          <a:ln w="76200">
+            <a:tailEnd type="triangle"/>
+          </a:ln>
+        </p:spPr>
+        <p:style>
+          <a:lnRef idx="3">
+            <a:schemeClr val="accent6"/>
+          </a:lnRef>
+          <a:fillRef idx="0">
+            <a:schemeClr val="accent6"/>
+          </a:fillRef>
+          <a:effectRef idx="2">
+            <a:schemeClr val="accent6"/>
+          </a:effectRef>
+          <a:fontRef idx="minor">
+            <a:schemeClr val="tx1"/>
+          </a:fontRef>
+        </p:style>
+      </p:cxnSp>
+      <p:cxnSp>
+        <p:nvCxnSpPr>
+          <p:cNvPr id="32" name="Straight Arrow Connector 31">
+            <a:extLst>
+              <a:ext uri="{FF2B5EF4-FFF2-40B4-BE49-F238E27FC236}">
+                <a16:creationId xmlns:a16="http://schemas.microsoft.com/office/drawing/2014/main" id="{E9C63B5C-2238-027C-615F-44B0217A2BB0}"/>
+              </a:ext>
+            </a:extLst>
+          </p:cNvPr>
+          <p:cNvCxnSpPr>
+            <a:cxnSpLocks/>
+          </p:cNvCxnSpPr>
+          <p:nvPr/>
+        </p:nvCxnSpPr>
+        <p:spPr>
+          <a:xfrm flipH="1">
+            <a:off x="5182644" y="12612329"/>
+            <a:ext cx="234" cy="1628765"/>
+          </a:xfrm>
+          <a:prstGeom prst="straightConnector1">
+            <a:avLst/>
+          </a:prstGeom>
+          <a:ln w="76200">
+            <a:tailEnd type="triangle"/>
+          </a:ln>
+        </p:spPr>
+        <p:style>
+          <a:lnRef idx="3">
+            <a:schemeClr val="accent6"/>
+          </a:lnRef>
+          <a:fillRef idx="0">
+            <a:schemeClr val="accent6"/>
+          </a:fillRef>
+          <a:effectRef idx="2">
+            <a:schemeClr val="accent6"/>
+          </a:effectRef>
+          <a:fontRef idx="minor">
+            <a:schemeClr val="tx1"/>
+          </a:fontRef>
+        </p:style>
+      </p:cxnSp>
+      <p:cxnSp>
+        <p:nvCxnSpPr>
+          <p:cNvPr id="33" name="Straight Arrow Connector 32">
+            <a:extLst>
+              <a:ext uri="{FF2B5EF4-FFF2-40B4-BE49-F238E27FC236}">
+                <a16:creationId xmlns:a16="http://schemas.microsoft.com/office/drawing/2014/main" id="{44D6A6C3-E337-21A9-1C16-75F98CA5DD56}"/>
+              </a:ext>
+            </a:extLst>
+          </p:cNvPr>
+          <p:cNvCxnSpPr>
+            <a:cxnSpLocks/>
+          </p:cNvCxnSpPr>
+          <p:nvPr/>
+        </p:nvCxnSpPr>
+        <p:spPr>
+          <a:xfrm>
+            <a:off x="10709456" y="12484793"/>
+            <a:ext cx="4528699" cy="2588015"/>
+          </a:xfrm>
+          <a:prstGeom prst="straightConnector1">
+            <a:avLst/>
+          </a:prstGeom>
+          <a:ln w="76200">
+            <a:tailEnd type="triangle"/>
+          </a:ln>
+        </p:spPr>
+        <p:style>
+          <a:lnRef idx="3">
+            <a:schemeClr val="accent6"/>
+          </a:lnRef>
+          <a:fillRef idx="0">
+            <a:schemeClr val="accent6"/>
+          </a:fillRef>
+          <a:effectRef idx="2">
+            <a:schemeClr val="accent6"/>
+          </a:effectRef>
+          <a:fontRef idx="minor">
+            <a:schemeClr val="tx1"/>
+          </a:fontRef>
+        </p:style>
+      </p:cxnSp>
+      <p:cxnSp>
+        <p:nvCxnSpPr>
+          <p:cNvPr id="34" name="Straight Arrow Connector 33">
+            <a:extLst>
+              <a:ext uri="{FF2B5EF4-FFF2-40B4-BE49-F238E27FC236}">
+                <a16:creationId xmlns:a16="http://schemas.microsoft.com/office/drawing/2014/main" id="{D395422B-528F-3AE2-3CFD-CEFE2FEB7B25}"/>
+              </a:ext>
+            </a:extLst>
+          </p:cNvPr>
+          <p:cNvCxnSpPr>
+            <a:cxnSpLocks/>
+          </p:cNvCxnSpPr>
+          <p:nvPr/>
+        </p:nvCxnSpPr>
+        <p:spPr>
+          <a:xfrm>
+            <a:off x="9204036" y="14612374"/>
+            <a:ext cx="0" cy="1177446"/>
+          </a:xfrm>
+          <a:prstGeom prst="straightConnector1">
+            <a:avLst/>
+          </a:prstGeom>
+          <a:ln w="76200">
+            <a:tailEnd type="triangle"/>
+          </a:ln>
+        </p:spPr>
+        <p:style>
+          <a:lnRef idx="3">
+            <a:schemeClr val="accent6"/>
+          </a:lnRef>
+          <a:fillRef idx="0">
+            <a:schemeClr val="accent6"/>
+          </a:fillRef>
+          <a:effectRef idx="2">
+            <a:schemeClr val="accent6"/>
+          </a:effectRef>
+          <a:fontRef idx="minor">
+            <a:schemeClr val="tx1"/>
+          </a:fontRef>
+        </p:style>
+      </p:cxnSp>
+      <p:cxnSp>
+        <p:nvCxnSpPr>
+          <p:cNvPr id="35" name="Straight Arrow Connector 34">
+            <a:extLst>
+              <a:ext uri="{FF2B5EF4-FFF2-40B4-BE49-F238E27FC236}">
+                <a16:creationId xmlns:a16="http://schemas.microsoft.com/office/drawing/2014/main" id="{FE811A4E-72B7-EF21-7806-6477EADFF5C1}"/>
+              </a:ext>
+            </a:extLst>
+          </p:cNvPr>
+          <p:cNvCxnSpPr>
+            <a:cxnSpLocks/>
+          </p:cNvCxnSpPr>
+          <p:nvPr/>
+        </p:nvCxnSpPr>
+        <p:spPr>
+          <a:xfrm>
+            <a:off x="3040001" y="15581708"/>
+            <a:ext cx="0" cy="710255"/>
+          </a:xfrm>
+          <a:prstGeom prst="straightConnector1">
+            <a:avLst/>
+          </a:prstGeom>
+          <a:ln w="76200">
+            <a:tailEnd type="triangle"/>
+          </a:ln>
+        </p:spPr>
+        <p:style>
+          <a:lnRef idx="3">
+            <a:schemeClr val="accent6"/>
+          </a:lnRef>
+          <a:fillRef idx="0">
+            <a:schemeClr val="accent6"/>
+          </a:fillRef>
+          <a:effectRef idx="2">
+            <a:schemeClr val="accent6"/>
+          </a:effectRef>
+          <a:fontRef idx="minor">
+            <a:schemeClr val="tx1"/>
+          </a:fontRef>
+        </p:style>
+      </p:cxnSp>
+      <p:cxnSp>
+        <p:nvCxnSpPr>
+          <p:cNvPr id="36" name="Straight Arrow Connector 35">
+            <a:extLst>
+              <a:ext uri="{FF2B5EF4-FFF2-40B4-BE49-F238E27FC236}">
+                <a16:creationId xmlns:a16="http://schemas.microsoft.com/office/drawing/2014/main" id="{1C4FEB49-A31F-5D0E-8D51-BD86366EBB89}"/>
+              </a:ext>
+            </a:extLst>
+          </p:cNvPr>
+          <p:cNvCxnSpPr>
+            <a:cxnSpLocks/>
+          </p:cNvCxnSpPr>
+          <p:nvPr/>
+        </p:nvCxnSpPr>
+        <p:spPr>
+          <a:xfrm>
+            <a:off x="18917456" y="15814131"/>
+            <a:ext cx="787245" cy="0"/>
+          </a:xfrm>
+          <a:prstGeom prst="straightConnector1">
+            <a:avLst/>
+          </a:prstGeom>
+          <a:ln w="76200">
+            <a:tailEnd type="triangle"/>
+          </a:ln>
+        </p:spPr>
+        <p:style>
+          <a:lnRef idx="3">
+            <a:schemeClr val="accent6"/>
+          </a:lnRef>
+          <a:fillRef idx="0">
+            <a:schemeClr val="accent6"/>
+          </a:fillRef>
+          <a:effectRef idx="2">
+            <a:schemeClr val="accent6"/>
+          </a:effectRef>
+          <a:fontRef idx="minor">
+            <a:schemeClr val="tx1"/>
+          </a:fontRef>
+        </p:style>
+      </p:cxnSp>
+      <p:sp>
+        <p:nvSpPr>
+          <p:cNvPr id="37" name="Flowchart: Alternate Process 36">
+            <a:extLst>
+              <a:ext uri="{FF2B5EF4-FFF2-40B4-BE49-F238E27FC236}">
+                <a16:creationId xmlns:a16="http://schemas.microsoft.com/office/drawing/2014/main" id="{9FC76920-6E56-9111-1942-70A9DA759DD0}"/>
+              </a:ext>
+            </a:extLst>
+          </p:cNvPr>
+          <p:cNvSpPr/>
+          <p:nvPr/>
+        </p:nvSpPr>
+        <p:spPr>
+          <a:xfrm>
+            <a:off x="19695685" y="15086664"/>
+            <a:ext cx="4918550" cy="1445848"/>
+          </a:xfrm>
+          <a:prstGeom prst="flowChartAlternateProcess">
+            <a:avLst/>
+          </a:prstGeom>
+          <a:gradFill flip="none" rotWithShape="1">
+            <a:gsLst>
+              <a:gs pos="0">
+                <a:schemeClr val="accent1">
+                  <a:shade val="30000"/>
+                  <a:satMod val="115000"/>
+                </a:schemeClr>
+              </a:gs>
+              <a:gs pos="50000">
+                <a:schemeClr val="accent1">
+                  <a:shade val="67500"/>
+                  <a:satMod val="115000"/>
+                </a:schemeClr>
+              </a:gs>
+              <a:gs pos="100000">
+                <a:schemeClr val="accent1">
+                  <a:shade val="100000"/>
+                  <a:satMod val="115000"/>
+                </a:schemeClr>
+              </a:gs>
+            </a:gsLst>
+            <a:lin ang="5400000" scaled="1"/>
+            <a:tileRect/>
+          </a:gradFill>
+          <a:ln w="57150">
+            <a:solidFill>
+              <a:schemeClr val="tx1"/>
+            </a:solidFill>
+          </a:ln>
+        </p:spPr>
+        <p:style>
+          <a:lnRef idx="2">
+            <a:schemeClr val="accent1">
+              <a:shade val="15000"/>
+            </a:schemeClr>
+          </a:lnRef>
+          <a:fillRef idx="1">
+            <a:schemeClr val="accent1"/>
+          </a:fillRef>
+          <a:effectRef idx="0">
+            <a:schemeClr val="accent1"/>
+          </a:effectRef>
+          <a:fontRef idx="minor">
+            <a:schemeClr val="lt1"/>
+          </a:fontRef>
+        </p:style>
+        <p:txBody>
+          <a:bodyPr rtlCol="0" anchor="ctr"/>
+          <a:lstStyle/>
+          <a:p>
+            <a:pPr algn="ctr"/>
+            <a:r>
+              <a:rPr lang="en-IE" sz="4200" b="1" dirty="0"/>
+              <a:t>MutexOrchestrator</a:t>
+            </a:r>
+          </a:p>
+        </p:txBody>
+      </p:sp>
+      <p:sp>
+        <p:nvSpPr>
+          <p:cNvPr id="38" name="Flowchart: Alternate Process 37">
+            <a:extLst>
+              <a:ext uri="{FF2B5EF4-FFF2-40B4-BE49-F238E27FC236}">
+                <a16:creationId xmlns:a16="http://schemas.microsoft.com/office/drawing/2014/main" id="{F6315447-3B31-9C1E-2037-7FAE6E0DC1C3}"/>
+              </a:ext>
+            </a:extLst>
+          </p:cNvPr>
+          <p:cNvSpPr/>
+          <p:nvPr/>
+        </p:nvSpPr>
+        <p:spPr>
+          <a:xfrm>
+            <a:off x="25920018" y="13737743"/>
+            <a:ext cx="3935130" cy="1150977"/>
+          </a:xfrm>
+          <a:prstGeom prst="flowChartAlternateProcess">
+            <a:avLst/>
+          </a:prstGeom>
+          <a:gradFill flip="none" rotWithShape="1">
+            <a:gsLst>
+              <a:gs pos="0">
+                <a:schemeClr val="accent1">
+                  <a:shade val="30000"/>
+                  <a:satMod val="115000"/>
+                </a:schemeClr>
+              </a:gs>
+              <a:gs pos="50000">
+                <a:schemeClr val="accent1">
+                  <a:shade val="67500"/>
+                  <a:satMod val="115000"/>
+                </a:schemeClr>
+              </a:gs>
+              <a:gs pos="100000">
+                <a:schemeClr val="accent1">
+                  <a:shade val="100000"/>
+                  <a:satMod val="115000"/>
+                </a:schemeClr>
+              </a:gs>
+            </a:gsLst>
+            <a:lin ang="5400000" scaled="1"/>
+            <a:tileRect/>
+          </a:gradFill>
+          <a:ln w="57150">
+            <a:solidFill>
+              <a:schemeClr val="tx1"/>
+            </a:solidFill>
+          </a:ln>
+        </p:spPr>
+        <p:style>
+          <a:lnRef idx="2">
+            <a:schemeClr val="accent1">
+              <a:shade val="15000"/>
+            </a:schemeClr>
+          </a:lnRef>
+          <a:fillRef idx="1">
+            <a:schemeClr val="accent1"/>
+          </a:fillRef>
+          <a:effectRef idx="0">
+            <a:schemeClr val="accent1"/>
+          </a:effectRef>
+          <a:fontRef idx="minor">
+            <a:schemeClr val="lt1"/>
+          </a:fontRef>
+        </p:style>
+        <p:txBody>
+          <a:bodyPr rtlCol="0" anchor="ctr"/>
+          <a:lstStyle/>
+          <a:p>
+            <a:pPr algn="ctr"/>
+            <a:r>
+              <a:rPr lang="en-IE" sz="5000" b="1" dirty="0"/>
+              <a:t>MutexModel</a:t>
+            </a:r>
+          </a:p>
+        </p:txBody>
+      </p:sp>
+      <p:sp>
+        <p:nvSpPr>
+          <p:cNvPr id="39" name="Flowchart: Alternate Process 38">
+            <a:extLst>
+              <a:ext uri="{FF2B5EF4-FFF2-40B4-BE49-F238E27FC236}">
+                <a16:creationId xmlns:a16="http://schemas.microsoft.com/office/drawing/2014/main" id="{1F5AD0F6-902B-BC91-A1BF-B1C1FFA3A532}"/>
+              </a:ext>
+            </a:extLst>
+          </p:cNvPr>
+          <p:cNvSpPr/>
+          <p:nvPr/>
+        </p:nvSpPr>
+        <p:spPr>
+          <a:xfrm>
+            <a:off x="25917464" y="15293387"/>
+            <a:ext cx="3937683" cy="1150977"/>
+          </a:xfrm>
+          <a:prstGeom prst="flowChartAlternateProcess">
+            <a:avLst/>
+          </a:prstGeom>
+          <a:gradFill flip="none" rotWithShape="1">
+            <a:gsLst>
+              <a:gs pos="0">
+                <a:schemeClr val="accent1">
+                  <a:shade val="30000"/>
+                  <a:satMod val="115000"/>
+                </a:schemeClr>
+              </a:gs>
+              <a:gs pos="50000">
+                <a:schemeClr val="accent1">
+                  <a:shade val="67500"/>
+                  <a:satMod val="115000"/>
+                </a:schemeClr>
+              </a:gs>
+              <a:gs pos="100000">
+                <a:schemeClr val="accent1">
+                  <a:shade val="100000"/>
+                  <a:satMod val="115000"/>
+                </a:schemeClr>
+              </a:gs>
+            </a:gsLst>
+            <a:lin ang="5400000" scaled="1"/>
+            <a:tileRect/>
+          </a:gradFill>
+          <a:ln w="57150">
+            <a:solidFill>
+              <a:schemeClr val="tx1"/>
+            </a:solidFill>
+          </a:ln>
+        </p:spPr>
+        <p:style>
+          <a:lnRef idx="2">
+            <a:schemeClr val="accent1">
+              <a:shade val="15000"/>
+            </a:schemeClr>
+          </a:lnRef>
+          <a:fillRef idx="1">
+            <a:schemeClr val="accent1"/>
+          </a:fillRef>
+          <a:effectRef idx="0">
+            <a:schemeClr val="accent1"/>
+          </a:effectRef>
+          <a:fontRef idx="minor">
+            <a:schemeClr val="lt1"/>
+          </a:fontRef>
+        </p:style>
+        <p:txBody>
+          <a:bodyPr rtlCol="0" anchor="ctr"/>
+          <a:lstStyle/>
+          <a:p>
+            <a:pPr algn="ctr"/>
+            <a:r>
+              <a:rPr lang="en-IE" sz="5000" b="1" dirty="0"/>
+              <a:t>MutexActor</a:t>
+            </a:r>
+          </a:p>
+        </p:txBody>
+      </p:sp>
+      <p:sp>
+        <p:nvSpPr>
+          <p:cNvPr id="40" name="Flowchart: Alternate Process 39">
+            <a:extLst>
+              <a:ext uri="{FF2B5EF4-FFF2-40B4-BE49-F238E27FC236}">
+                <a16:creationId xmlns:a16="http://schemas.microsoft.com/office/drawing/2014/main" id="{496076F2-D8F5-2D61-D76B-0017910D5D4A}"/>
+              </a:ext>
+            </a:extLst>
+          </p:cNvPr>
+          <p:cNvSpPr/>
+          <p:nvPr/>
+        </p:nvSpPr>
+        <p:spPr>
+          <a:xfrm>
+            <a:off x="25901960" y="16830528"/>
+            <a:ext cx="3937683" cy="1206278"/>
+          </a:xfrm>
+          <a:prstGeom prst="flowChartAlternateProcess">
+            <a:avLst/>
+          </a:prstGeom>
+          <a:gradFill flip="none" rotWithShape="1">
+            <a:gsLst>
+              <a:gs pos="0">
+                <a:schemeClr val="accent1">
+                  <a:shade val="30000"/>
+                  <a:satMod val="115000"/>
+                </a:schemeClr>
+              </a:gs>
+              <a:gs pos="50000">
+                <a:schemeClr val="accent1">
+                  <a:shade val="67500"/>
+                  <a:satMod val="115000"/>
+                </a:schemeClr>
+              </a:gs>
+              <a:gs pos="100000">
+                <a:schemeClr val="accent1">
+                  <a:shade val="100000"/>
+                  <a:satMod val="115000"/>
+                </a:schemeClr>
+              </a:gs>
+            </a:gsLst>
+            <a:lin ang="5400000" scaled="1"/>
+            <a:tileRect/>
+          </a:gradFill>
+          <a:ln w="57150">
+            <a:solidFill>
+              <a:schemeClr val="tx1"/>
+            </a:solidFill>
+          </a:ln>
+        </p:spPr>
+        <p:style>
+          <a:lnRef idx="2">
+            <a:schemeClr val="accent1">
+              <a:shade val="15000"/>
+            </a:schemeClr>
+          </a:lnRef>
+          <a:fillRef idx="1">
+            <a:schemeClr val="accent1"/>
+          </a:fillRef>
+          <a:effectRef idx="0">
+            <a:schemeClr val="accent1"/>
+          </a:effectRef>
+          <a:fontRef idx="minor">
+            <a:schemeClr val="lt1"/>
+          </a:fontRef>
+        </p:style>
+        <p:txBody>
+          <a:bodyPr rtlCol="0" anchor="ctr"/>
+          <a:lstStyle/>
+          <a:p>
+            <a:pPr algn="ctr"/>
+            <a:r>
+              <a:rPr lang="en-IE" sz="4200" b="1" dirty="0"/>
+              <a:t>MutexStrategy</a:t>
+            </a:r>
+          </a:p>
+        </p:txBody>
+      </p:sp>
+      <p:cxnSp>
+        <p:nvCxnSpPr>
+          <p:cNvPr id="41" name="Straight Arrow Connector 40">
+            <a:extLst>
+              <a:ext uri="{FF2B5EF4-FFF2-40B4-BE49-F238E27FC236}">
+                <a16:creationId xmlns:a16="http://schemas.microsoft.com/office/drawing/2014/main" id="{6C1300B4-5166-ABF5-DC56-EF182A20D891}"/>
+              </a:ext>
+            </a:extLst>
+          </p:cNvPr>
+          <p:cNvCxnSpPr>
+            <a:cxnSpLocks/>
+          </p:cNvCxnSpPr>
+          <p:nvPr/>
+        </p:nvCxnSpPr>
+        <p:spPr>
+          <a:xfrm flipV="1">
+            <a:off x="24646281" y="14554012"/>
+            <a:ext cx="1204359" cy="1338029"/>
+          </a:xfrm>
+          <a:prstGeom prst="straightConnector1">
+            <a:avLst/>
+          </a:prstGeom>
+          <a:ln w="76200">
+            <a:tailEnd type="triangle"/>
+          </a:ln>
+        </p:spPr>
+        <p:style>
+          <a:lnRef idx="3">
+            <a:schemeClr val="accent6"/>
+          </a:lnRef>
+          <a:fillRef idx="0">
+            <a:schemeClr val="accent6"/>
+          </a:fillRef>
+          <a:effectRef idx="2">
+            <a:schemeClr val="accent6"/>
+          </a:effectRef>
+          <a:fontRef idx="minor">
+            <a:schemeClr val="tx1"/>
+          </a:fontRef>
+        </p:style>
+      </p:cxnSp>
+      <p:cxnSp>
+        <p:nvCxnSpPr>
+          <p:cNvPr id="42" name="Straight Arrow Connector 41">
+            <a:extLst>
+              <a:ext uri="{FF2B5EF4-FFF2-40B4-BE49-F238E27FC236}">
+                <a16:creationId xmlns:a16="http://schemas.microsoft.com/office/drawing/2014/main" id="{05093687-F272-0F74-0C78-BC1C77E89BC1}"/>
+              </a:ext>
+            </a:extLst>
+          </p:cNvPr>
+          <p:cNvCxnSpPr>
+            <a:cxnSpLocks/>
+          </p:cNvCxnSpPr>
+          <p:nvPr/>
+        </p:nvCxnSpPr>
+        <p:spPr>
+          <a:xfrm>
+            <a:off x="24665036" y="15854447"/>
+            <a:ext cx="1185604" cy="1445851"/>
+          </a:xfrm>
+          <a:prstGeom prst="straightConnector1">
+            <a:avLst/>
+          </a:prstGeom>
+          <a:ln w="76200">
+            <a:tailEnd type="triangle"/>
+          </a:ln>
+        </p:spPr>
+        <p:style>
+          <a:lnRef idx="3">
+            <a:schemeClr val="accent6"/>
+          </a:lnRef>
+          <a:fillRef idx="0">
+            <a:schemeClr val="accent6"/>
+          </a:fillRef>
+          <a:effectRef idx="2">
+            <a:schemeClr val="accent6"/>
+          </a:effectRef>
+          <a:fontRef idx="minor">
+            <a:schemeClr val="tx1"/>
+          </a:fontRef>
+        </p:style>
+      </p:cxnSp>
+      <p:cxnSp>
+        <p:nvCxnSpPr>
+          <p:cNvPr id="43" name="Straight Arrow Connector 42">
+            <a:extLst>
+              <a:ext uri="{FF2B5EF4-FFF2-40B4-BE49-F238E27FC236}">
+                <a16:creationId xmlns:a16="http://schemas.microsoft.com/office/drawing/2014/main" id="{8DFDE449-31C0-0675-A577-A7F69668B32A}"/>
+              </a:ext>
+            </a:extLst>
+          </p:cNvPr>
+          <p:cNvCxnSpPr>
+            <a:cxnSpLocks/>
+          </p:cNvCxnSpPr>
+          <p:nvPr/>
+        </p:nvCxnSpPr>
+        <p:spPr>
+          <a:xfrm>
+            <a:off x="24689312" y="15873440"/>
+            <a:ext cx="1161328" cy="0"/>
+          </a:xfrm>
+          <a:prstGeom prst="straightConnector1">
+            <a:avLst/>
+          </a:prstGeom>
+          <a:ln w="76200">
+            <a:tailEnd type="triangle"/>
+          </a:ln>
+        </p:spPr>
+        <p:style>
+          <a:lnRef idx="3">
+            <a:schemeClr val="accent6"/>
+          </a:lnRef>
+          <a:fillRef idx="0">
+            <a:schemeClr val="accent6"/>
+          </a:fillRef>
+          <a:effectRef idx="2">
+            <a:schemeClr val="accent6"/>
+          </a:effectRef>
+          <a:fontRef idx="minor">
+            <a:schemeClr val="tx1"/>
+          </a:fontRef>
+        </p:style>
+      </p:cxnSp>
+      <p:sp>
+        <p:nvSpPr>
+          <p:cNvPr id="48" name="Flowchart: Alternate Process 47">
+            <a:extLst>
+              <a:ext uri="{FF2B5EF4-FFF2-40B4-BE49-F238E27FC236}">
+                <a16:creationId xmlns:a16="http://schemas.microsoft.com/office/drawing/2014/main" id="{DF56FC6F-F379-CAE9-C4C2-EF3588FCD34F}"/>
+              </a:ext>
+            </a:extLst>
+          </p:cNvPr>
+          <p:cNvSpPr/>
+          <p:nvPr/>
+        </p:nvSpPr>
+        <p:spPr>
+          <a:xfrm>
+            <a:off x="11867700" y="4545802"/>
+            <a:ext cx="4352343" cy="1335648"/>
+          </a:xfrm>
+          <a:prstGeom prst="flowChartAlternateProcess">
+            <a:avLst/>
+          </a:prstGeom>
+          <a:gradFill flip="none" rotWithShape="1">
+            <a:gsLst>
+              <a:gs pos="0">
+                <a:schemeClr val="accent1">
+                  <a:shade val="30000"/>
+                  <a:satMod val="115000"/>
+                </a:schemeClr>
+              </a:gs>
+              <a:gs pos="50000">
+                <a:schemeClr val="accent1">
+                  <a:shade val="67500"/>
+                  <a:satMod val="115000"/>
+                </a:schemeClr>
+              </a:gs>
+              <a:gs pos="100000">
+                <a:schemeClr val="accent1">
+                  <a:shade val="100000"/>
+                  <a:satMod val="115000"/>
+                </a:schemeClr>
+              </a:gs>
+            </a:gsLst>
+            <a:lin ang="5400000" scaled="1"/>
+            <a:tileRect/>
+          </a:gradFill>
+          <a:ln w="57150">
+            <a:solidFill>
+              <a:schemeClr val="tx1"/>
+            </a:solidFill>
+          </a:ln>
+        </p:spPr>
+        <p:style>
+          <a:lnRef idx="2">
+            <a:schemeClr val="accent1">
+              <a:shade val="15000"/>
+            </a:schemeClr>
+          </a:lnRef>
+          <a:fillRef idx="1">
+            <a:schemeClr val="accent1"/>
+          </a:fillRef>
+          <a:effectRef idx="0">
+            <a:schemeClr val="accent1"/>
+          </a:effectRef>
+          <a:fontRef idx="minor">
+            <a:schemeClr val="lt1"/>
+          </a:fontRef>
+        </p:style>
+        <p:txBody>
+          <a:bodyPr rtlCol="0" anchor="ctr"/>
+          <a:lstStyle/>
+          <a:p>
+            <a:pPr algn="ctr"/>
+            <a:r>
+              <a:rPr lang="en-IE" sz="4400" b="1" dirty="0"/>
+              <a:t>TaskTideConfig</a:t>
+            </a:r>
+          </a:p>
+        </p:txBody>
+      </p:sp>
+      <p:sp>
+        <p:nvSpPr>
+          <p:cNvPr id="49" name="Flowchart: Alternate Process 48">
+            <a:extLst>
+              <a:ext uri="{FF2B5EF4-FFF2-40B4-BE49-F238E27FC236}">
+                <a16:creationId xmlns:a16="http://schemas.microsoft.com/office/drawing/2014/main" id="{AD5BAC29-B482-CE00-8889-D5E91ECB58D3}"/>
+              </a:ext>
+            </a:extLst>
+          </p:cNvPr>
+          <p:cNvSpPr/>
+          <p:nvPr/>
+        </p:nvSpPr>
+        <p:spPr>
+          <a:xfrm>
+            <a:off x="17196587" y="4509414"/>
+            <a:ext cx="4775687" cy="1405977"/>
+          </a:xfrm>
+          <a:prstGeom prst="flowChartAlternateProcess">
+            <a:avLst/>
+          </a:prstGeom>
+          <a:gradFill flip="none" rotWithShape="1">
+            <a:gsLst>
+              <a:gs pos="0">
+                <a:schemeClr val="accent1">
+                  <a:shade val="30000"/>
+                  <a:satMod val="115000"/>
+                </a:schemeClr>
+              </a:gs>
+              <a:gs pos="50000">
+                <a:schemeClr val="accent1">
+                  <a:shade val="67500"/>
+                  <a:satMod val="115000"/>
+                </a:schemeClr>
+              </a:gs>
+              <a:gs pos="100000">
+                <a:schemeClr val="accent1">
+                  <a:shade val="100000"/>
+                  <a:satMod val="115000"/>
+                </a:schemeClr>
+              </a:gs>
+            </a:gsLst>
+            <a:lin ang="5400000" scaled="1"/>
+            <a:tileRect/>
+          </a:gradFill>
+          <a:ln w="57150">
+            <a:solidFill>
+              <a:schemeClr val="tx1"/>
+            </a:solidFill>
+          </a:ln>
+        </p:spPr>
+        <p:style>
+          <a:lnRef idx="2">
+            <a:schemeClr val="accent1">
+              <a:shade val="15000"/>
+            </a:schemeClr>
+          </a:lnRef>
+          <a:fillRef idx="1">
+            <a:schemeClr val="accent1"/>
+          </a:fillRef>
+          <a:effectRef idx="0">
+            <a:schemeClr val="accent1"/>
+          </a:effectRef>
+          <a:fontRef idx="minor">
+            <a:schemeClr val="lt1"/>
+          </a:fontRef>
+        </p:style>
+        <p:txBody>
+          <a:bodyPr rtlCol="0" anchor="ctr"/>
+          <a:lstStyle/>
+          <a:p>
+            <a:pPr algn="ctr"/>
+            <a:r>
+              <a:rPr lang="en-IE" sz="4400" b="1" dirty="0"/>
+              <a:t>ArgumentTree</a:t>
+            </a:r>
+          </a:p>
+        </p:txBody>
+      </p:sp>
+      <p:cxnSp>
+        <p:nvCxnSpPr>
+          <p:cNvPr id="50" name="Straight Arrow Connector 49">
+            <a:extLst>
+              <a:ext uri="{FF2B5EF4-FFF2-40B4-BE49-F238E27FC236}">
+                <a16:creationId xmlns:a16="http://schemas.microsoft.com/office/drawing/2014/main" id="{4C6FAB01-E177-07B8-A412-F0419F5EF0CF}"/>
+              </a:ext>
+            </a:extLst>
+          </p:cNvPr>
+          <p:cNvCxnSpPr>
+            <a:cxnSpLocks/>
+          </p:cNvCxnSpPr>
+          <p:nvPr/>
+        </p:nvCxnSpPr>
+        <p:spPr>
+          <a:xfrm>
+            <a:off x="16246264" y="5251034"/>
+            <a:ext cx="898631" cy="0"/>
+          </a:xfrm>
+          <a:prstGeom prst="straightConnector1">
+            <a:avLst/>
+          </a:prstGeom>
+          <a:ln w="76200">
+            <a:tailEnd type="triangle"/>
+          </a:ln>
+        </p:spPr>
+        <p:style>
+          <a:lnRef idx="3">
+            <a:schemeClr val="accent6"/>
+          </a:lnRef>
+          <a:fillRef idx="0">
+            <a:schemeClr val="accent6"/>
+          </a:fillRef>
+          <a:effectRef idx="2">
+            <a:schemeClr val="accent6"/>
+          </a:effectRef>
+          <a:fontRef idx="minor">
+            <a:schemeClr val="tx1"/>
+          </a:fontRef>
+        </p:style>
+      </p:cxnSp>
+      <p:cxnSp>
+        <p:nvCxnSpPr>
+          <p:cNvPr id="51" name="Straight Arrow Connector 50">
+            <a:extLst>
+              <a:ext uri="{FF2B5EF4-FFF2-40B4-BE49-F238E27FC236}">
+                <a16:creationId xmlns:a16="http://schemas.microsoft.com/office/drawing/2014/main" id="{13D98B52-48DF-7BA6-2C60-11A7BD5308E6}"/>
+              </a:ext>
+            </a:extLst>
+          </p:cNvPr>
+          <p:cNvCxnSpPr>
+            <a:cxnSpLocks/>
+          </p:cNvCxnSpPr>
+          <p:nvPr/>
+        </p:nvCxnSpPr>
+        <p:spPr>
+          <a:xfrm>
+            <a:off x="10942744" y="5247726"/>
+            <a:ext cx="898631" cy="0"/>
+          </a:xfrm>
+          <a:prstGeom prst="straightConnector1">
+            <a:avLst/>
+          </a:prstGeom>
+          <a:ln w="76200">
+            <a:tailEnd type="triangle"/>
+          </a:ln>
+        </p:spPr>
+        <p:style>
+          <a:lnRef idx="3">
+            <a:schemeClr val="accent6"/>
+          </a:lnRef>
+          <a:fillRef idx="0">
+            <a:schemeClr val="accent6"/>
+          </a:fillRef>
+          <a:effectRef idx="2">
+            <a:schemeClr val="accent6"/>
+          </a:effectRef>
+          <a:fontRef idx="minor">
+            <a:schemeClr val="tx1"/>
+          </a:fontRef>
+        </p:style>
+      </p:cxnSp>
     </p:spTree>
     <p:extLst>
       <p:ext uri="{BB962C8B-B14F-4D97-AF65-F5344CB8AC3E}">
@@ -18831,12 +19042,42 @@
           <a:chExt cx="0" cy="0"/>
         </a:xfrm>
       </p:grpSpPr>
+      <p:pic>
+        <p:nvPicPr>
+          <p:cNvPr id="6" name="Picture 5">
+            <a:extLst>
+              <a:ext uri="{FF2B5EF4-FFF2-40B4-BE49-F238E27FC236}">
+                <a16:creationId xmlns:a16="http://schemas.microsoft.com/office/drawing/2014/main" id="{5442C53B-82B7-2AD8-D924-9DF52C633D7B}"/>
+              </a:ext>
+            </a:extLst>
+          </p:cNvPr>
+          <p:cNvPicPr>
+            <a:picLocks noChangeAspect="1"/>
+          </p:cNvPicPr>
+          <p:nvPr/>
+        </p:nvPicPr>
+        <p:blipFill>
+          <a:blip r:embed="rId2"/>
+          <a:stretch>
+            <a:fillRect/>
+          </a:stretch>
+        </p:blipFill>
+        <p:spPr>
+          <a:xfrm>
+            <a:off x="22290666" y="1106687"/>
+            <a:ext cx="7968078" cy="7152674"/>
+          </a:xfrm>
+          <a:prstGeom prst="rect">
+            <a:avLst/>
+          </a:prstGeom>
+        </p:spPr>
+      </p:pic>
       <p:grpSp>
         <p:nvGrpSpPr>
-          <p:cNvPr id="171" name="Group 170">
+          <p:cNvPr id="8" name="Group 7">
             <a:extLst>
               <a:ext uri="{FF2B5EF4-FFF2-40B4-BE49-F238E27FC236}">
-                <a16:creationId xmlns:a16="http://schemas.microsoft.com/office/drawing/2014/main" id="{9A6AE425-9872-F1C6-EAAB-C9ED727953A3}"/>
+                <a16:creationId xmlns:a16="http://schemas.microsoft.com/office/drawing/2014/main" id="{56C33F0F-4EC8-6417-475A-ADE518857DA8}"/>
               </a:ext>
             </a:extLst>
           </p:cNvPr>
@@ -18845,48 +19086,12 @@
         </p:nvGrpSpPr>
         <p:grpSpPr>
           <a:xfrm>
-            <a:off x="457200" y="362011"/>
-            <a:ext cx="29664648" cy="19134346"/>
-            <a:chOff x="457200" y="362011"/>
-            <a:chExt cx="29664648" cy="19134346"/>
+            <a:off x="190500" y="4509414"/>
+            <a:ext cx="29664648" cy="15863243"/>
+            <a:chOff x="304800" y="3633114"/>
+            <a:chExt cx="29664648" cy="15863243"/>
           </a:xfrm>
         </p:grpSpPr>
-        <p:pic>
-          <p:nvPicPr>
-            <p:cNvPr id="119" name="Picture 118" descr="A logo with waves and text&#10;&#10;AI-generated content may be incorrect.">
-              <a:extLst>
-                <a:ext uri="{FF2B5EF4-FFF2-40B4-BE49-F238E27FC236}">
-                  <a16:creationId xmlns:a16="http://schemas.microsoft.com/office/drawing/2014/main" id="{667751E9-C6D0-556D-339F-45AF8CEDBDE8}"/>
-                </a:ext>
-              </a:extLst>
-            </p:cNvPr>
-            <p:cNvPicPr>
-              <a:picLocks noChangeAspect="1"/>
-            </p:cNvPicPr>
-            <p:nvPr/>
-          </p:nvPicPr>
-          <p:blipFill>
-            <a:blip r:embed="rId2">
-              <a:extLst>
-                <a:ext uri="{28A0092B-C50C-407E-A947-70E740481C1C}">
-                  <a14:useLocalDpi xmlns:a14="http://schemas.microsoft.com/office/drawing/2010/main" val="0"/>
-                </a:ext>
-              </a:extLst>
-            </a:blip>
-            <a:stretch>
-              <a:fillRect/>
-            </a:stretch>
-          </p:blipFill>
-          <p:spPr>
-            <a:xfrm>
-              <a:off x="18859501" y="362011"/>
-              <a:ext cx="10949586" cy="9736592"/>
-            </a:xfrm>
-            <a:prstGeom prst="rect">
-              <a:avLst/>
-            </a:prstGeom>
-          </p:spPr>
-        </p:pic>
         <p:sp>
           <p:nvSpPr>
             <p:cNvPr id="121" name="Flowchart: Alternate Process 120">
@@ -18901,7 +19106,7 @@
           </p:nvSpPr>
           <p:spPr>
             <a:xfrm>
-              <a:off x="4938117" y="3674793"/>
+              <a:off x="4785717" y="3674793"/>
               <a:ext cx="6201238" cy="1263908"/>
             </a:xfrm>
             <a:prstGeom prst="flowChartAlternateProcess">
@@ -18979,7 +19184,7 @@
           </p:nvSpPr>
           <p:spPr>
             <a:xfrm>
-              <a:off x="1689690" y="6136439"/>
+              <a:off x="1537290" y="6136439"/>
               <a:ext cx="4585982" cy="1343146"/>
             </a:xfrm>
             <a:prstGeom prst="flowChartAlternateProcess">
@@ -19057,7 +19262,7 @@
           </p:nvSpPr>
           <p:spPr>
             <a:xfrm>
-              <a:off x="8868193" y="6149460"/>
+              <a:off x="8715793" y="6149460"/>
               <a:ext cx="4352343" cy="1335648"/>
             </a:xfrm>
             <a:prstGeom prst="flowChartAlternateProcess">
@@ -19135,7 +19340,7 @@
           </p:nvSpPr>
           <p:spPr>
             <a:xfrm>
-              <a:off x="4608183" y="8358626"/>
+              <a:off x="4455783" y="8358626"/>
               <a:ext cx="6531163" cy="1343146"/>
             </a:xfrm>
             <a:prstGeom prst="flowChartAlternateProcess">
@@ -19213,7 +19418,7 @@
           </p:nvSpPr>
           <p:spPr>
             <a:xfrm>
-              <a:off x="4608183" y="10503996"/>
+              <a:off x="4455783" y="10503996"/>
               <a:ext cx="6418772" cy="1182201"/>
             </a:xfrm>
             <a:prstGeom prst="flowChartAlternateProcess">
@@ -19291,7 +19496,7 @@
           </p:nvSpPr>
           <p:spPr>
             <a:xfrm>
-              <a:off x="457200" y="13383399"/>
+              <a:off x="304800" y="13383399"/>
               <a:ext cx="6163026" cy="1270617"/>
             </a:xfrm>
             <a:prstGeom prst="flowChartAlternateProcess">
@@ -19369,7 +19574,7 @@
           </p:nvSpPr>
           <p:spPr>
             <a:xfrm>
-              <a:off x="12727103" y="14281671"/>
+              <a:off x="12574703" y="14281671"/>
               <a:ext cx="6440138" cy="1270455"/>
             </a:xfrm>
             <a:prstGeom prst="flowChartAlternateProcess">
@@ -19447,7 +19652,7 @@
           </p:nvSpPr>
           <p:spPr>
             <a:xfrm>
-              <a:off x="7084142" y="12584775"/>
+              <a:off x="6931742" y="12584775"/>
               <a:ext cx="4831346" cy="1092937"/>
             </a:xfrm>
             <a:prstGeom prst="flowChartAlternateProcess">
@@ -19525,7 +19730,7 @@
           </p:nvGrpSpPr>
           <p:grpSpPr>
             <a:xfrm>
-              <a:off x="13719534" y="16387062"/>
+              <a:off x="13567134" y="16387062"/>
               <a:ext cx="5208788" cy="2791999"/>
               <a:chOff x="8471368" y="11395622"/>
               <a:chExt cx="3773483" cy="1545522"/>
@@ -19657,7 +19862,7 @@
           </p:nvCxnSpPr>
           <p:spPr>
             <a:xfrm>
-              <a:off x="5449344" y="4973011"/>
+              <a:off x="5296944" y="4973011"/>
               <a:ext cx="0" cy="1077900"/>
             </a:xfrm>
             <a:prstGeom prst="straightConnector1">
@@ -19698,7 +19903,7 @@
           </p:nvCxnSpPr>
           <p:spPr>
             <a:xfrm>
-              <a:off x="9489467" y="11733924"/>
+              <a:off x="9337067" y="11733924"/>
               <a:ext cx="0" cy="806090"/>
             </a:xfrm>
             <a:prstGeom prst="straightConnector1">
@@ -19739,7 +19944,7 @@
           </p:nvCxnSpPr>
           <p:spPr>
             <a:xfrm>
-              <a:off x="15740075" y="15608030"/>
+              <a:off x="15587675" y="15608030"/>
               <a:ext cx="0" cy="710255"/>
             </a:xfrm>
             <a:prstGeom prst="straightConnector1">
@@ -19778,7 +19983,7 @@
           </p:nvSpPr>
           <p:spPr>
             <a:xfrm>
-              <a:off x="14197080" y="6113072"/>
+              <a:off x="14044680" y="6113072"/>
               <a:ext cx="4775687" cy="1405977"/>
             </a:xfrm>
             <a:prstGeom prst="flowChartAlternateProcess">
@@ -19858,7 +20063,7 @@
           </p:nvCxnSpPr>
           <p:spPr>
             <a:xfrm>
-              <a:off x="11056675" y="11219299"/>
+              <a:off x="10904275" y="11219299"/>
               <a:ext cx="647546" cy="0"/>
             </a:xfrm>
             <a:prstGeom prst="straightConnector1">
@@ -19897,7 +20102,7 @@
           </p:nvSpPr>
           <p:spPr>
             <a:xfrm>
-              <a:off x="11704220" y="10519272"/>
+              <a:off x="11551820" y="10519272"/>
               <a:ext cx="4775698" cy="1219121"/>
             </a:xfrm>
             <a:prstGeom prst="flowChartAlternateProcess">
@@ -19975,7 +20180,7 @@
           </p:nvSpPr>
           <p:spPr>
             <a:xfrm>
-              <a:off x="17804717" y="9102243"/>
+              <a:off x="17652317" y="9102243"/>
               <a:ext cx="3937683" cy="1150977"/>
             </a:xfrm>
             <a:prstGeom prst="flowChartAlternateProcess">
@@ -20053,7 +20258,7 @@
           </p:nvSpPr>
           <p:spPr>
             <a:xfrm>
-              <a:off x="17802164" y="10657887"/>
+              <a:off x="17649764" y="10657887"/>
               <a:ext cx="3937683" cy="1150977"/>
             </a:xfrm>
             <a:prstGeom prst="flowChartAlternateProcess">
@@ -20131,7 +20336,7 @@
           </p:nvSpPr>
           <p:spPr>
             <a:xfrm>
-              <a:off x="17786660" y="12195028"/>
+              <a:off x="17634260" y="12195028"/>
               <a:ext cx="3937683" cy="1206278"/>
             </a:xfrm>
             <a:prstGeom prst="flowChartAlternateProcess">
@@ -20211,7 +20416,7 @@
           </p:nvCxnSpPr>
           <p:spPr>
             <a:xfrm>
-              <a:off x="10365710" y="4975401"/>
+              <a:off x="10213310" y="4975401"/>
               <a:ext cx="0" cy="1075509"/>
             </a:xfrm>
             <a:prstGeom prst="straightConnector1">
@@ -20252,7 +20457,7 @@
           </p:nvCxnSpPr>
           <p:spPr>
             <a:xfrm>
-              <a:off x="5449344" y="7528630"/>
+              <a:off x="5296944" y="7528630"/>
               <a:ext cx="0" cy="764759"/>
             </a:xfrm>
             <a:prstGeom prst="straightConnector1">
@@ -20293,7 +20498,7 @@
           </p:nvCxnSpPr>
           <p:spPr>
             <a:xfrm>
-              <a:off x="10421248" y="7532324"/>
+              <a:off x="10268848" y="7532324"/>
               <a:ext cx="0" cy="781419"/>
             </a:xfrm>
             <a:prstGeom prst="straightConnector1">
@@ -20334,7 +20539,7 @@
           </p:nvCxnSpPr>
           <p:spPr>
             <a:xfrm>
-              <a:off x="7813527" y="9751735"/>
+              <a:off x="7661127" y="9751735"/>
               <a:ext cx="0" cy="768420"/>
             </a:xfrm>
             <a:prstGeom prst="straightConnector1">
@@ -20375,7 +20580,7 @@
           </p:nvCxnSpPr>
           <p:spPr>
             <a:xfrm>
-              <a:off x="13246757" y="6854692"/>
+              <a:off x="13094357" y="6854692"/>
               <a:ext cx="898631" cy="0"/>
             </a:xfrm>
             <a:prstGeom prst="straightConnector1">
@@ -20416,7 +20621,7 @@
           </p:nvCxnSpPr>
           <p:spPr>
             <a:xfrm>
-              <a:off x="16581272" y="11243383"/>
+              <a:off x="16428872" y="11243383"/>
               <a:ext cx="1124069" cy="0"/>
             </a:xfrm>
             <a:prstGeom prst="straightConnector1">
@@ -20457,7 +20662,7 @@
           </p:nvCxnSpPr>
           <p:spPr>
             <a:xfrm flipV="1">
-              <a:off x="16530981" y="9986086"/>
+              <a:off x="16378581" y="9986086"/>
               <a:ext cx="1220257" cy="1270455"/>
             </a:xfrm>
             <a:prstGeom prst="straightConnector1">
@@ -20498,7 +20703,7 @@
           </p:nvCxnSpPr>
           <p:spPr>
             <a:xfrm rot="5400000" flipV="1">
-              <a:off x="16526845" y="11328926"/>
+              <a:off x="16374445" y="11328926"/>
               <a:ext cx="1307588" cy="1185604"/>
             </a:xfrm>
             <a:prstGeom prst="straightConnector1">
@@ -20539,7 +20744,7 @@
           </p:nvCxnSpPr>
           <p:spPr>
             <a:xfrm flipH="1">
-              <a:off x="5449344" y="11736029"/>
+              <a:off x="5296944" y="11736029"/>
               <a:ext cx="234" cy="1628765"/>
             </a:xfrm>
             <a:prstGeom prst="straightConnector1">
@@ -20580,7 +20785,7 @@
           </p:nvCxnSpPr>
           <p:spPr>
             <a:xfrm>
-              <a:off x="10976156" y="11608493"/>
+              <a:off x="10823756" y="11608493"/>
               <a:ext cx="4528699" cy="2588015"/>
             </a:xfrm>
             <a:prstGeom prst="straightConnector1">
@@ -20621,7 +20826,7 @@
           </p:nvCxnSpPr>
           <p:spPr>
             <a:xfrm>
-              <a:off x="9470736" y="13736074"/>
+              <a:off x="9318336" y="13736074"/>
               <a:ext cx="0" cy="1177446"/>
             </a:xfrm>
             <a:prstGeom prst="straightConnector1">
@@ -20662,7 +20867,7 @@
           </p:nvCxnSpPr>
           <p:spPr>
             <a:xfrm>
-              <a:off x="3306701" y="14705408"/>
+              <a:off x="3154301" y="14705408"/>
               <a:ext cx="0" cy="710255"/>
             </a:xfrm>
             <a:prstGeom prst="straightConnector1">
@@ -20703,7 +20908,7 @@
           </p:nvCxnSpPr>
           <p:spPr>
             <a:xfrm>
-              <a:off x="19184156" y="14937831"/>
+              <a:off x="19031756" y="14937831"/>
               <a:ext cx="787245" cy="0"/>
             </a:xfrm>
             <a:prstGeom prst="straightConnector1">
@@ -20742,7 +20947,7 @@
           </p:nvSpPr>
           <p:spPr>
             <a:xfrm>
-              <a:off x="19962385" y="14210364"/>
+              <a:off x="19809985" y="14210364"/>
               <a:ext cx="4918550" cy="1445848"/>
             </a:xfrm>
             <a:prstGeom prst="flowChartAlternateProcess">
@@ -20820,7 +21025,7 @@
           </p:nvSpPr>
           <p:spPr>
             <a:xfrm>
-              <a:off x="26186718" y="12861443"/>
+              <a:off x="26034318" y="12861443"/>
               <a:ext cx="3935130" cy="1150977"/>
             </a:xfrm>
             <a:prstGeom prst="flowChartAlternateProcess">
@@ -20898,7 +21103,7 @@
           </p:nvSpPr>
           <p:spPr>
             <a:xfrm>
-              <a:off x="26184164" y="14417087"/>
+              <a:off x="26031764" y="14417087"/>
               <a:ext cx="3937683" cy="1150977"/>
             </a:xfrm>
             <a:prstGeom prst="flowChartAlternateProcess">
@@ -20976,7 +21181,7 @@
           </p:nvSpPr>
           <p:spPr>
             <a:xfrm>
-              <a:off x="26168660" y="15954228"/>
+              <a:off x="26016260" y="15954228"/>
               <a:ext cx="3937683" cy="1206278"/>
             </a:xfrm>
             <a:prstGeom prst="flowChartAlternateProcess">
@@ -21056,7 +21261,7 @@
           </p:nvCxnSpPr>
           <p:spPr>
             <a:xfrm flipV="1">
-              <a:off x="24912981" y="13677712"/>
+              <a:off x="24760581" y="13677712"/>
               <a:ext cx="1204359" cy="1338029"/>
             </a:xfrm>
             <a:prstGeom prst="straightConnector1">
@@ -21097,7 +21302,7 @@
           </p:nvCxnSpPr>
           <p:spPr>
             <a:xfrm>
-              <a:off x="24931736" y="14978147"/>
+              <a:off x="24779336" y="14978147"/>
               <a:ext cx="1185604" cy="1445851"/>
             </a:xfrm>
             <a:prstGeom prst="straightConnector1">
@@ -21138,7 +21343,7 @@
           </p:nvCxnSpPr>
           <p:spPr>
             <a:xfrm>
-              <a:off x="24956012" y="14997140"/>
+              <a:off x="24803612" y="14997140"/>
               <a:ext cx="1161328" cy="0"/>
             </a:xfrm>
             <a:prstGeom prst="straightConnector1">
@@ -21191,7 +21396,7 @@
           </p:blipFill>
           <p:spPr>
             <a:xfrm>
-              <a:off x="465361" y="15602943"/>
+              <a:off x="312961" y="15602943"/>
               <a:ext cx="6408295" cy="3893414"/>
             </a:xfrm>
             <a:prstGeom prst="rect">
@@ -21227,7 +21432,7 @@
           </p:blipFill>
           <p:spPr>
             <a:xfrm>
-              <a:off x="7403027" y="15005680"/>
+              <a:off x="7250627" y="15005680"/>
               <a:ext cx="1892307" cy="1887632"/>
             </a:xfrm>
             <a:prstGeom prst="rect">
@@ -21263,7 +21468,7 @@
           </p:blipFill>
           <p:spPr>
             <a:xfrm>
-              <a:off x="8644536" y="17291252"/>
+              <a:off x="8492136" y="17291252"/>
               <a:ext cx="2134577" cy="1607842"/>
             </a:xfrm>
             <a:prstGeom prst="rect">
@@ -21299,7 +21504,7 @@
           </p:blipFill>
           <p:spPr>
             <a:xfrm>
-              <a:off x="10041987" y="15084021"/>
+              <a:off x="9889587" y="15084021"/>
               <a:ext cx="1813772" cy="1809291"/>
             </a:xfrm>
             <a:prstGeom prst="rect">
@@ -21307,6 +21512,244 @@
             </a:prstGeom>
           </p:spPr>
         </p:pic>
+        <p:sp>
+          <p:nvSpPr>
+            <p:cNvPr id="2" name="Flowchart: Alternate Process 1">
+              <a:extLst>
+                <a:ext uri="{FF2B5EF4-FFF2-40B4-BE49-F238E27FC236}">
+                  <a16:creationId xmlns:a16="http://schemas.microsoft.com/office/drawing/2014/main" id="{DAA38740-EB7E-6063-6E44-3447601C6AF6}"/>
+                </a:ext>
+              </a:extLst>
+            </p:cNvPr>
+            <p:cNvSpPr/>
+            <p:nvPr/>
+          </p:nvSpPr>
+          <p:spPr>
+            <a:xfrm>
+              <a:off x="11982000" y="3669502"/>
+              <a:ext cx="4352343" cy="1335648"/>
+            </a:xfrm>
+            <a:prstGeom prst="flowChartAlternateProcess">
+              <a:avLst/>
+            </a:prstGeom>
+            <a:gradFill flip="none" rotWithShape="1">
+              <a:gsLst>
+                <a:gs pos="0">
+                  <a:schemeClr val="accent1">
+                    <a:shade val="30000"/>
+                    <a:satMod val="115000"/>
+                  </a:schemeClr>
+                </a:gs>
+                <a:gs pos="50000">
+                  <a:schemeClr val="accent1">
+                    <a:shade val="67500"/>
+                    <a:satMod val="115000"/>
+                  </a:schemeClr>
+                </a:gs>
+                <a:gs pos="100000">
+                  <a:schemeClr val="accent1">
+                    <a:shade val="100000"/>
+                    <a:satMod val="115000"/>
+                  </a:schemeClr>
+                </a:gs>
+              </a:gsLst>
+              <a:lin ang="5400000" scaled="1"/>
+              <a:tileRect/>
+            </a:gradFill>
+            <a:ln w="57150">
+              <a:solidFill>
+                <a:schemeClr val="tx1"/>
+              </a:solidFill>
+            </a:ln>
+          </p:spPr>
+          <p:style>
+            <a:lnRef idx="2">
+              <a:schemeClr val="accent1">
+                <a:shade val="15000"/>
+              </a:schemeClr>
+            </a:lnRef>
+            <a:fillRef idx="1">
+              <a:schemeClr val="accent1"/>
+            </a:fillRef>
+            <a:effectRef idx="0">
+              <a:schemeClr val="accent1"/>
+            </a:effectRef>
+            <a:fontRef idx="minor">
+              <a:schemeClr val="lt1"/>
+            </a:fontRef>
+          </p:style>
+          <p:txBody>
+            <a:bodyPr rtlCol="0" anchor="ctr"/>
+            <a:lstStyle/>
+            <a:p>
+              <a:pPr algn="ctr"/>
+              <a:r>
+                <a:rPr lang="en-IE" sz="4400" b="1" dirty="0"/>
+                <a:t>TaskTideConfig</a:t>
+              </a:r>
+            </a:p>
+          </p:txBody>
+        </p:sp>
+        <p:sp>
+          <p:nvSpPr>
+            <p:cNvPr id="3" name="Flowchart: Alternate Process 2">
+              <a:extLst>
+                <a:ext uri="{FF2B5EF4-FFF2-40B4-BE49-F238E27FC236}">
+                  <a16:creationId xmlns:a16="http://schemas.microsoft.com/office/drawing/2014/main" id="{092DB492-17FF-F483-542D-F95E35ACFC08}"/>
+                </a:ext>
+              </a:extLst>
+            </p:cNvPr>
+            <p:cNvSpPr/>
+            <p:nvPr/>
+          </p:nvSpPr>
+          <p:spPr>
+            <a:xfrm>
+              <a:off x="17310887" y="3633114"/>
+              <a:ext cx="4775687" cy="1405977"/>
+            </a:xfrm>
+            <a:prstGeom prst="flowChartAlternateProcess">
+              <a:avLst/>
+            </a:prstGeom>
+            <a:gradFill flip="none" rotWithShape="1">
+              <a:gsLst>
+                <a:gs pos="0">
+                  <a:schemeClr val="accent1">
+                    <a:shade val="30000"/>
+                    <a:satMod val="115000"/>
+                  </a:schemeClr>
+                </a:gs>
+                <a:gs pos="50000">
+                  <a:schemeClr val="accent1">
+                    <a:shade val="67500"/>
+                    <a:satMod val="115000"/>
+                  </a:schemeClr>
+                </a:gs>
+                <a:gs pos="100000">
+                  <a:schemeClr val="accent1">
+                    <a:shade val="100000"/>
+                    <a:satMod val="115000"/>
+                  </a:schemeClr>
+                </a:gs>
+              </a:gsLst>
+              <a:lin ang="5400000" scaled="1"/>
+              <a:tileRect/>
+            </a:gradFill>
+            <a:ln w="57150">
+              <a:solidFill>
+                <a:schemeClr val="tx1"/>
+              </a:solidFill>
+            </a:ln>
+          </p:spPr>
+          <p:style>
+            <a:lnRef idx="2">
+              <a:schemeClr val="accent1">
+                <a:shade val="15000"/>
+              </a:schemeClr>
+            </a:lnRef>
+            <a:fillRef idx="1">
+              <a:schemeClr val="accent1"/>
+            </a:fillRef>
+            <a:effectRef idx="0">
+              <a:schemeClr val="accent1"/>
+            </a:effectRef>
+            <a:fontRef idx="minor">
+              <a:schemeClr val="lt1"/>
+            </a:fontRef>
+          </p:style>
+          <p:txBody>
+            <a:bodyPr rtlCol="0" anchor="ctr"/>
+            <a:lstStyle/>
+            <a:p>
+              <a:pPr algn="ctr"/>
+              <a:r>
+                <a:rPr lang="en-IE" sz="4400" b="1" dirty="0"/>
+                <a:t>ArgumentTree</a:t>
+              </a:r>
+            </a:p>
+          </p:txBody>
+        </p:sp>
+        <p:cxnSp>
+          <p:nvCxnSpPr>
+            <p:cNvPr id="4" name="Straight Arrow Connector 3">
+              <a:extLst>
+                <a:ext uri="{FF2B5EF4-FFF2-40B4-BE49-F238E27FC236}">
+                  <a16:creationId xmlns:a16="http://schemas.microsoft.com/office/drawing/2014/main" id="{E768F65B-E34A-1C74-042D-C57467530EEB}"/>
+                </a:ext>
+              </a:extLst>
+            </p:cNvPr>
+            <p:cNvCxnSpPr>
+              <a:cxnSpLocks/>
+            </p:cNvCxnSpPr>
+            <p:nvPr/>
+          </p:nvCxnSpPr>
+          <p:spPr>
+            <a:xfrm>
+              <a:off x="16360564" y="4374734"/>
+              <a:ext cx="898631" cy="0"/>
+            </a:xfrm>
+            <a:prstGeom prst="straightConnector1">
+              <a:avLst/>
+            </a:prstGeom>
+            <a:ln w="76200">
+              <a:tailEnd type="triangle"/>
+            </a:ln>
+          </p:spPr>
+          <p:style>
+            <a:lnRef idx="3">
+              <a:schemeClr val="accent6"/>
+            </a:lnRef>
+            <a:fillRef idx="0">
+              <a:schemeClr val="accent6"/>
+            </a:fillRef>
+            <a:effectRef idx="2">
+              <a:schemeClr val="accent6"/>
+            </a:effectRef>
+            <a:fontRef idx="minor">
+              <a:schemeClr val="tx1"/>
+            </a:fontRef>
+          </p:style>
+        </p:cxnSp>
+        <p:cxnSp>
+          <p:nvCxnSpPr>
+            <p:cNvPr id="7" name="Straight Arrow Connector 6">
+              <a:extLst>
+                <a:ext uri="{FF2B5EF4-FFF2-40B4-BE49-F238E27FC236}">
+                  <a16:creationId xmlns:a16="http://schemas.microsoft.com/office/drawing/2014/main" id="{9D222F81-E2E4-B931-D940-BE6CC8036F68}"/>
+                </a:ext>
+              </a:extLst>
+            </p:cNvPr>
+            <p:cNvCxnSpPr>
+              <a:cxnSpLocks/>
+            </p:cNvCxnSpPr>
+            <p:nvPr/>
+          </p:nvCxnSpPr>
+          <p:spPr>
+            <a:xfrm>
+              <a:off x="11057044" y="4371426"/>
+              <a:ext cx="898631" cy="0"/>
+            </a:xfrm>
+            <a:prstGeom prst="straightConnector1">
+              <a:avLst/>
+            </a:prstGeom>
+            <a:ln w="76200">
+              <a:tailEnd type="triangle"/>
+            </a:ln>
+          </p:spPr>
+          <p:style>
+            <a:lnRef idx="3">
+              <a:schemeClr val="accent6"/>
+            </a:lnRef>
+            <a:fillRef idx="0">
+              <a:schemeClr val="accent6"/>
+            </a:fillRef>
+            <a:effectRef idx="2">
+              <a:schemeClr val="accent6"/>
+            </a:effectRef>
+            <a:fontRef idx="minor">
+              <a:schemeClr val="tx1"/>
+            </a:fontRef>
+          </p:style>
+        </p:cxnSp>
       </p:grpSp>
     </p:spTree>
     <p:extLst>

--- a/tasktide/docs/Diagrams/Diagrams.pptx
+++ b/tasktide/docs/Diagrams/Diagrams.pptx
@@ -9010,7 +9010,7 @@
           <a:p>
             <a:fld id="{CB18BCE7-0017-4B0C-A2FB-E6F7885367AC}" type="datetimeFigureOut">
               <a:rPr lang="en-IE" smtClean="0"/>
-              <a:t>13/02/2026</a:t>
+              <a:t>27/04/2026</a:t>
             </a:fld>
             <a:endParaRPr lang="en-IE"/>
           </a:p>
@@ -9514,7 +9514,7 @@
           <a:p>
             <a:fld id="{79C0705B-4870-4470-A32F-307AEE1697AB}" type="datetimeFigureOut">
               <a:rPr lang="en-IE" smtClean="0"/>
-              <a:t>13/02/2026</a:t>
+              <a:t>27/04/2026</a:t>
             </a:fld>
             <a:endParaRPr lang="en-IE"/>
           </a:p>
@@ -9684,7 +9684,7 @@
           <a:p>
             <a:fld id="{79C0705B-4870-4470-A32F-307AEE1697AB}" type="datetimeFigureOut">
               <a:rPr lang="en-IE" smtClean="0"/>
-              <a:t>13/02/2026</a:t>
+              <a:t>27/04/2026</a:t>
             </a:fld>
             <a:endParaRPr lang="en-IE"/>
           </a:p>
@@ -9864,7 +9864,7 @@
           <a:p>
             <a:fld id="{79C0705B-4870-4470-A32F-307AEE1697AB}" type="datetimeFigureOut">
               <a:rPr lang="en-IE" smtClean="0"/>
-              <a:t>13/02/2026</a:t>
+              <a:t>27/04/2026</a:t>
             </a:fld>
             <a:endParaRPr lang="en-IE"/>
           </a:p>
@@ -10034,7 +10034,7 @@
           <a:p>
             <a:fld id="{79C0705B-4870-4470-A32F-307AEE1697AB}" type="datetimeFigureOut">
               <a:rPr lang="en-IE" smtClean="0"/>
-              <a:t>13/02/2026</a:t>
+              <a:t>27/04/2026</a:t>
             </a:fld>
             <a:endParaRPr lang="en-IE"/>
           </a:p>
@@ -10280,7 +10280,7 @@
           <a:p>
             <a:fld id="{79C0705B-4870-4470-A32F-307AEE1697AB}" type="datetimeFigureOut">
               <a:rPr lang="en-IE" smtClean="0"/>
-              <a:t>13/02/2026</a:t>
+              <a:t>27/04/2026</a:t>
             </a:fld>
             <a:endParaRPr lang="en-IE"/>
           </a:p>
@@ -10512,7 +10512,7 @@
           <a:p>
             <a:fld id="{79C0705B-4870-4470-A32F-307AEE1697AB}" type="datetimeFigureOut">
               <a:rPr lang="en-IE" smtClean="0"/>
-              <a:t>13/02/2026</a:t>
+              <a:t>27/04/2026</a:t>
             </a:fld>
             <a:endParaRPr lang="en-IE"/>
           </a:p>
@@ -10879,7 +10879,7 @@
           <a:p>
             <a:fld id="{79C0705B-4870-4470-A32F-307AEE1697AB}" type="datetimeFigureOut">
               <a:rPr lang="en-IE" smtClean="0"/>
-              <a:t>13/02/2026</a:t>
+              <a:t>27/04/2026</a:t>
             </a:fld>
             <a:endParaRPr lang="en-IE"/>
           </a:p>
@@ -10997,7 +10997,7 @@
           <a:p>
             <a:fld id="{79C0705B-4870-4470-A32F-307AEE1697AB}" type="datetimeFigureOut">
               <a:rPr lang="en-IE" smtClean="0"/>
-              <a:t>13/02/2026</a:t>
+              <a:t>27/04/2026</a:t>
             </a:fld>
             <a:endParaRPr lang="en-IE"/>
           </a:p>
@@ -11092,7 +11092,7 @@
           <a:p>
             <a:fld id="{79C0705B-4870-4470-A32F-307AEE1697AB}" type="datetimeFigureOut">
               <a:rPr lang="en-IE" smtClean="0"/>
-              <a:t>13/02/2026</a:t>
+              <a:t>27/04/2026</a:t>
             </a:fld>
             <a:endParaRPr lang="en-IE"/>
           </a:p>
@@ -11369,7 +11369,7 @@
           <a:p>
             <a:fld id="{79C0705B-4870-4470-A32F-307AEE1697AB}" type="datetimeFigureOut">
               <a:rPr lang="en-IE" smtClean="0"/>
-              <a:t>13/02/2026</a:t>
+              <a:t>27/04/2026</a:t>
             </a:fld>
             <a:endParaRPr lang="en-IE"/>
           </a:p>
@@ -11626,7 +11626,7 @@
           <a:p>
             <a:fld id="{79C0705B-4870-4470-A32F-307AEE1697AB}" type="datetimeFigureOut">
               <a:rPr lang="en-IE" smtClean="0"/>
-              <a:t>13/02/2026</a:t>
+              <a:t>27/04/2026</a:t>
             </a:fld>
             <a:endParaRPr lang="en-IE"/>
           </a:p>
@@ -11839,7 +11839,7 @@
           <a:p>
             <a:fld id="{79C0705B-4870-4470-A32F-307AEE1697AB}" type="datetimeFigureOut">
               <a:rPr lang="en-IE" smtClean="0"/>
-              <a:t>13/02/2026</a:t>
+              <a:t>27/04/2026</a:t>
             </a:fld>
             <a:endParaRPr lang="en-IE"/>
           </a:p>
@@ -17327,10 +17327,10 @@
                 <p:nvPr/>
               </p:nvPicPr>
               <p:blipFill>
-                <a:blip r:embed="rId2">
+                <a:blip>
                   <a:extLst>
                     <a:ext uri="{96DAC541-7B7A-43D3-8B79-37D633B846F1}">
-                      <asvg:svgBlip xmlns:asvg="http://schemas.microsoft.com/office/drawing/2016/SVG/main" r:embed="rId3"/>
+                      <asvg:svgBlip xmlns:asvg="http://schemas.microsoft.com/office/drawing/2016/SVG/main" r:embed="rId2"/>
                     </a:ext>
                   </a:extLst>
                 </a:blip>
@@ -17433,10 +17433,10 @@
               <p:nvPr/>
             </p:nvPicPr>
             <p:blipFill>
-              <a:blip r:embed="rId4">
+              <a:blip>
                 <a:extLst>
                   <a:ext uri="{96DAC541-7B7A-43D3-8B79-37D633B846F1}">
-                    <asvg:svgBlip xmlns:asvg="http://schemas.microsoft.com/office/drawing/2016/SVG/main" r:embed="rId5"/>
+                    <asvg:svgBlip xmlns:asvg="http://schemas.microsoft.com/office/drawing/2016/SVG/main" r:embed="rId3"/>
                   </a:ext>
                 </a:extLst>
               </a:blip>
@@ -17884,10 +17884,10 @@
             <p:nvPr/>
           </p:nvPicPr>
           <p:blipFill>
-            <a:blip r:embed="rId6">
+            <a:blip>
               <a:extLst>
                 <a:ext uri="{96DAC541-7B7A-43D3-8B79-37D633B846F1}">
-                  <asvg:svgBlip xmlns:asvg="http://schemas.microsoft.com/office/drawing/2016/SVG/main" r:embed="rId7"/>
+                  <asvg:svgBlip xmlns:asvg="http://schemas.microsoft.com/office/drawing/2016/SVG/main" r:embed="rId4"/>
                 </a:ext>
               </a:extLst>
             </a:blip>
@@ -17991,14 +17991,14 @@
           <p:nvPr>
             <p:extLst>
               <p:ext uri="{D42A27DB-BD31-4B8C-83A1-F6EECF244321}">
-                <p14:modId xmlns:p14="http://schemas.microsoft.com/office/powerpoint/2010/main" val="1064419877"/>
+                <p14:modId xmlns:p14="http://schemas.microsoft.com/office/powerpoint/2010/main" val="739151026"/>
               </p:ext>
             </p:extLst>
           </p:nvPr>
         </p:nvGraphicFramePr>
         <p:xfrm>
-          <a:off x="124851" y="5462717"/>
-          <a:ext cx="29988439" cy="12157741"/>
+          <a:off x="125924" y="3740727"/>
+          <a:ext cx="29988439" cy="15722884"/>
         </p:xfrm>
         <a:graphic>
           <a:graphicData uri="http://schemas.openxmlformats.org/drawingml/2006/table">
@@ -18036,7 +18036,7 @@
                   </a:extLst>
                 </a:gridCol>
               </a:tblGrid>
-              <a:tr h="1897062">
+              <a:tr h="1967346">
                 <a:tc gridSpan="4">
                   <a:txBody>
                     <a:bodyPr/>
@@ -18207,10 +18207,9 @@
                     <a:p>
                       <a:pPr algn="ctr"/>
                       <a:r>
-                        <a:rPr lang="en-IE" sz="6000" b="1"/>
+                        <a:rPr lang="en-IE" sz="6000" b="1" dirty="0"/>
                         <a:t>Purpose</a:t>
                       </a:r>
-                      <a:endParaRPr lang="en-IE" sz="6000" b="1" dirty="0"/>
                     </a:p>
                   </a:txBody>
                   <a:tcPr anchor="ctr">
@@ -18794,6 +18793,217 @@
                 <a:extLst>
                   <a:ext uri="{0D108BD9-81ED-4DB2-BD59-A6C34878D82A}">
                     <a16:rowId xmlns:a16="http://schemas.microsoft.com/office/drawing/2014/main" val="705916412"/>
+                  </a:ext>
+                </a:extLst>
+              </a:tr>
+              <a:tr h="3494859">
+                <a:tc>
+                  <a:txBody>
+                    <a:bodyPr/>
+                    <a:lstStyle/>
+                    <a:p>
+                      <a:pPr algn="ctr"/>
+                      <a:r>
+                        <a:rPr lang="en-IE" sz="5600" b="1" dirty="0"/>
+                        <a:t>Web API</a:t>
+                      </a:r>
+                    </a:p>
+                  </a:txBody>
+                  <a:tcPr anchor="ctr">
+                    <a:lnL w="76200" cap="flat" cmpd="sng" algn="ctr">
+                      <a:solidFill>
+                        <a:schemeClr val="tx1"/>
+                      </a:solidFill>
+                      <a:prstDash val="solid"/>
+                      <a:round/>
+                      <a:headEnd type="none" w="med" len="med"/>
+                      <a:tailEnd type="none" w="med" len="med"/>
+                    </a:lnL>
+                    <a:lnR w="76200" cap="flat" cmpd="sng" algn="ctr">
+                      <a:solidFill>
+                        <a:schemeClr val="tx1"/>
+                      </a:solidFill>
+                      <a:prstDash val="solid"/>
+                      <a:round/>
+                      <a:headEnd type="none" w="med" len="med"/>
+                      <a:tailEnd type="none" w="med" len="med"/>
+                    </a:lnR>
+                    <a:lnT w="76200" cap="flat" cmpd="sng" algn="ctr">
+                      <a:solidFill>
+                        <a:schemeClr val="tx1"/>
+                      </a:solidFill>
+                      <a:prstDash val="solid"/>
+                      <a:round/>
+                      <a:headEnd type="none" w="med" len="med"/>
+                      <a:tailEnd type="none" w="med" len="med"/>
+                    </a:lnT>
+                    <a:lnB w="76200" cap="flat" cmpd="sng" algn="ctr">
+                      <a:solidFill>
+                        <a:schemeClr val="tx1"/>
+                      </a:solidFill>
+                      <a:prstDash val="solid"/>
+                      <a:round/>
+                      <a:headEnd type="none" w="med" len="med"/>
+                      <a:tailEnd type="none" w="med" len="med"/>
+                    </a:lnB>
+                  </a:tcPr>
+                </a:tc>
+                <a:tc>
+                  <a:txBody>
+                    <a:bodyPr/>
+                    <a:lstStyle/>
+                    <a:p>
+                      <a:pPr lvl="0" algn="ctr"/>
+                      <a:r>
+                        <a:rPr lang="en-IE" sz="3600" dirty="0"/>
+                        <a:t>Defines RESTful &amp; GraphQL interfaces for interacting with TaskTide services</a:t>
+                      </a:r>
+                    </a:p>
+                  </a:txBody>
+                  <a:tcPr anchor="ctr">
+                    <a:lnL w="76200" cap="flat" cmpd="sng" algn="ctr">
+                      <a:solidFill>
+                        <a:schemeClr val="tx1"/>
+                      </a:solidFill>
+                      <a:prstDash val="solid"/>
+                      <a:round/>
+                      <a:headEnd type="none" w="med" len="med"/>
+                      <a:tailEnd type="none" w="med" len="med"/>
+                    </a:lnL>
+                    <a:lnR w="76200" cap="flat" cmpd="sng" algn="ctr">
+                      <a:solidFill>
+                        <a:schemeClr val="tx1"/>
+                      </a:solidFill>
+                      <a:prstDash val="solid"/>
+                      <a:round/>
+                      <a:headEnd type="none" w="med" len="med"/>
+                      <a:tailEnd type="none" w="med" len="med"/>
+                    </a:lnR>
+                    <a:lnT w="76200" cap="flat" cmpd="sng" algn="ctr">
+                      <a:solidFill>
+                        <a:schemeClr val="tx1"/>
+                      </a:solidFill>
+                      <a:prstDash val="solid"/>
+                      <a:round/>
+                      <a:headEnd type="none" w="med" len="med"/>
+                      <a:tailEnd type="none" w="med" len="med"/>
+                    </a:lnT>
+                    <a:lnB w="76200" cap="flat" cmpd="sng" algn="ctr">
+                      <a:solidFill>
+                        <a:schemeClr val="tx1"/>
+                      </a:solidFill>
+                      <a:prstDash val="solid"/>
+                      <a:round/>
+                      <a:headEnd type="none" w="med" len="med"/>
+                      <a:tailEnd type="none" w="med" len="med"/>
+                    </a:lnB>
+                  </a:tcPr>
+                </a:tc>
+                <a:tc>
+                  <a:txBody>
+                    <a:bodyPr/>
+                    <a:lstStyle/>
+                    <a:p>
+                      <a:pPr lvl="0" algn="ctr"/>
+                      <a:r>
+                        <a:rPr lang="en-IE" sz="3600" dirty="0"/>
+                        <a:t>Unified access layer for workflow management; Supports programmatic task registration, querying, and monitoring; Enables integration with external systems &amp; services</a:t>
+                      </a:r>
+                    </a:p>
+                  </a:txBody>
+                  <a:tcPr anchor="ctr">
+                    <a:lnL w="76200" cap="flat" cmpd="sng" algn="ctr">
+                      <a:solidFill>
+                        <a:schemeClr val="tx1"/>
+                      </a:solidFill>
+                      <a:prstDash val="solid"/>
+                      <a:round/>
+                      <a:headEnd type="none" w="med" len="med"/>
+                      <a:tailEnd type="none" w="med" len="med"/>
+                    </a:lnL>
+                    <a:lnR w="76200" cap="flat" cmpd="sng" algn="ctr">
+                      <a:solidFill>
+                        <a:schemeClr val="tx1"/>
+                      </a:solidFill>
+                      <a:prstDash val="solid"/>
+                      <a:round/>
+                      <a:headEnd type="none" w="med" len="med"/>
+                      <a:tailEnd type="none" w="med" len="med"/>
+                    </a:lnR>
+                    <a:lnT w="76200" cap="flat" cmpd="sng" algn="ctr">
+                      <a:solidFill>
+                        <a:schemeClr val="tx1"/>
+                      </a:solidFill>
+                      <a:prstDash val="solid"/>
+                      <a:round/>
+                      <a:headEnd type="none" w="med" len="med"/>
+                      <a:tailEnd type="none" w="med" len="med"/>
+                    </a:lnT>
+                    <a:lnB w="76200" cap="flat" cmpd="sng" algn="ctr">
+                      <a:solidFill>
+                        <a:schemeClr val="tx1"/>
+                      </a:solidFill>
+                      <a:prstDash val="solid"/>
+                      <a:round/>
+                      <a:headEnd type="none" w="med" len="med"/>
+                      <a:tailEnd type="none" w="med" len="med"/>
+                    </a:lnB>
+                  </a:tcPr>
+                </a:tc>
+                <a:tc>
+                  <a:txBody>
+                    <a:bodyPr/>
+                    <a:lstStyle/>
+                    <a:p>
+                      <a:pPr lvl="0" algn="ctr"/>
+                      <a:r>
+                        <a:rPr lang="en-IE" sz="3600" dirty="0"/>
+                        <a:t>Enables deployment as a service within distributed architectures; Supports web-based dashboarding and multi-user access</a:t>
+                      </a:r>
+                    </a:p>
+                  </a:txBody>
+                  <a:tcPr anchor="ctr">
+                    <a:lnL w="76200" cap="flat" cmpd="sng" algn="ctr">
+                      <a:solidFill>
+                        <a:schemeClr val="tx1"/>
+                      </a:solidFill>
+                      <a:prstDash val="solid"/>
+                      <a:round/>
+                      <a:headEnd type="none" w="med" len="med"/>
+                      <a:tailEnd type="none" w="med" len="med"/>
+                    </a:lnL>
+                    <a:lnR w="76200" cap="flat" cmpd="sng" algn="ctr">
+                      <a:solidFill>
+                        <a:schemeClr val="tx1"/>
+                      </a:solidFill>
+                      <a:prstDash val="solid"/>
+                      <a:round/>
+                      <a:headEnd type="none" w="med" len="med"/>
+                      <a:tailEnd type="none" w="med" len="med"/>
+                    </a:lnR>
+                    <a:lnT w="76200" cap="flat" cmpd="sng" algn="ctr">
+                      <a:solidFill>
+                        <a:schemeClr val="tx1"/>
+                      </a:solidFill>
+                      <a:prstDash val="solid"/>
+                      <a:round/>
+                      <a:headEnd type="none" w="med" len="med"/>
+                      <a:tailEnd type="none" w="med" len="med"/>
+                    </a:lnT>
+                    <a:lnB w="76200" cap="flat" cmpd="sng" algn="ctr">
+                      <a:solidFill>
+                        <a:schemeClr val="tx1"/>
+                      </a:solidFill>
+                      <a:prstDash val="solid"/>
+                      <a:round/>
+                      <a:headEnd type="none" w="med" len="med"/>
+                      <a:tailEnd type="none" w="med" len="med"/>
+                    </a:lnB>
+                  </a:tcPr>
+                </a:tc>
+                <a:extLst>
+                  <a:ext uri="{0D108BD9-81ED-4DB2-BD59-A6C34878D82A}">
+                    <a16:rowId xmlns:a16="http://schemas.microsoft.com/office/drawing/2014/main" val="370735797"/>
                   </a:ext>
                 </a:extLst>
               </a:tr>
@@ -22316,7 +22526,7 @@
                 <a:pPr algn="ctr"/>
                 <a:r>
                   <a:rPr lang="en-IE" sz="4400" b="1" dirty="0"/>
-                  <a:t>Receives      Tasks</a:t>
+                  <a:t>Fetches      Tasks</a:t>
                 </a:r>
               </a:p>
             </p:txBody>
@@ -22411,7 +22621,7 @@
                 <a:pPr algn="ctr"/>
                 <a:r>
                   <a:rPr lang="en-IE" sz="4400" b="1" dirty="0"/>
-                  <a:t>Processor distributes over threads</a:t>
+                  <a:t>Traverser distributes over threads</a:t>
                 </a:r>
               </a:p>
             </p:txBody>
@@ -22934,8 +23144,8 @@
             </p:nvSpPr>
             <p:spPr>
               <a:xfrm>
-                <a:off x="14424026" y="7528430"/>
-                <a:ext cx="4521191" cy="448298"/>
+                <a:off x="14702464" y="7549673"/>
+                <a:ext cx="3835958" cy="448298"/>
               </a:xfrm>
               <a:prstGeom prst="rect">
                 <a:avLst/>
@@ -23037,7 +23247,7 @@
               <a:p>
                 <a:r>
                   <a:rPr lang="en-IE" sz="3200" b="1" i="1" dirty="0"/>
-                  <a:t>TaskTide Processor</a:t>
+                  <a:t>TaskTide Worker</a:t>
                 </a:r>
               </a:p>
             </p:txBody>
@@ -26972,10 +27182,10 @@
             <p:nvPr/>
           </p:nvPicPr>
           <p:blipFill>
-            <a:blip r:embed="rId3">
+            <a:blip>
               <a:extLst>
                 <a:ext uri="{96DAC541-7B7A-43D3-8B79-37D633B846F1}">
-                  <asvg:svgBlip xmlns:asvg="http://schemas.microsoft.com/office/drawing/2016/SVG/main" r:embed="rId4"/>
+                  <asvg:svgBlip xmlns:asvg="http://schemas.microsoft.com/office/drawing/2016/SVG/main" r:embed="rId3"/>
                 </a:ext>
               </a:extLst>
             </a:blip>
@@ -27008,10 +27218,10 @@
             <p:nvPr/>
           </p:nvPicPr>
           <p:blipFill>
-            <a:blip r:embed="rId5">
+            <a:blip>
               <a:extLst>
                 <a:ext uri="{96DAC541-7B7A-43D3-8B79-37D633B846F1}">
-                  <asvg:svgBlip xmlns:asvg="http://schemas.microsoft.com/office/drawing/2016/SVG/main" r:embed="rId6"/>
+                  <asvg:svgBlip xmlns:asvg="http://schemas.microsoft.com/office/drawing/2016/SVG/main" r:embed="rId4"/>
                 </a:ext>
               </a:extLst>
             </a:blip>
@@ -28134,10 +28344,10 @@
               <p:nvPr/>
             </p:nvPicPr>
             <p:blipFill>
-              <a:blip r:embed="rId7">
+              <a:blip>
                 <a:extLst>
                   <a:ext uri="{96DAC541-7B7A-43D3-8B79-37D633B846F1}">
-                    <asvg:svgBlip xmlns:asvg="http://schemas.microsoft.com/office/drawing/2016/SVG/main" r:embed="rId8"/>
+                    <asvg:svgBlip xmlns:asvg="http://schemas.microsoft.com/office/drawing/2016/SVG/main" r:embed="rId5"/>
                   </a:ext>
                 </a:extLst>
               </a:blip>
@@ -28170,10 +28380,10 @@
               <p:nvPr/>
             </p:nvPicPr>
             <p:blipFill>
-              <a:blip r:embed="rId9">
+              <a:blip>
                 <a:extLst>
                   <a:ext uri="{96DAC541-7B7A-43D3-8B79-37D633B846F1}">
-                    <asvg:svgBlip xmlns:asvg="http://schemas.microsoft.com/office/drawing/2016/SVG/main" r:embed="rId10"/>
+                    <asvg:svgBlip xmlns:asvg="http://schemas.microsoft.com/office/drawing/2016/SVG/main" r:embed="rId6"/>
                   </a:ext>
                 </a:extLst>
               </a:blip>
@@ -28431,10 +28641,10 @@
               <p:nvPr/>
             </p:nvPicPr>
             <p:blipFill>
-              <a:blip r:embed="rId11">
+              <a:blip>
                 <a:extLst>
                   <a:ext uri="{96DAC541-7B7A-43D3-8B79-37D633B846F1}">
-                    <asvg:svgBlip xmlns:asvg="http://schemas.microsoft.com/office/drawing/2016/SVG/main" r:embed="rId12"/>
+                    <asvg:svgBlip xmlns:asvg="http://schemas.microsoft.com/office/drawing/2016/SVG/main" r:embed="rId7"/>
                   </a:ext>
                 </a:extLst>
               </a:blip>
@@ -28467,10 +28677,10 @@
               <p:nvPr/>
             </p:nvPicPr>
             <p:blipFill>
-              <a:blip r:embed="rId13">
+              <a:blip>
                 <a:extLst>
                   <a:ext uri="{96DAC541-7B7A-43D3-8B79-37D633B846F1}">
-                    <asvg:svgBlip xmlns:asvg="http://schemas.microsoft.com/office/drawing/2016/SVG/main" r:embed="rId14"/>
+                    <asvg:svgBlip xmlns:asvg="http://schemas.microsoft.com/office/drawing/2016/SVG/main" r:embed="rId8"/>
                   </a:ext>
                 </a:extLst>
               </a:blip>
@@ -28658,10 +28868,10 @@
                 <p:nvPr/>
               </p:nvPicPr>
               <p:blipFill>
-                <a:blip r:embed="rId7">
+                <a:blip>
                   <a:extLst>
                     <a:ext uri="{96DAC541-7B7A-43D3-8B79-37D633B846F1}">
-                      <asvg:svgBlip xmlns:asvg="http://schemas.microsoft.com/office/drawing/2016/SVG/main" r:embed="rId8"/>
+                      <asvg:svgBlip xmlns:asvg="http://schemas.microsoft.com/office/drawing/2016/SVG/main" r:embed="rId5"/>
                     </a:ext>
                   </a:extLst>
                 </a:blip>
@@ -28694,10 +28904,10 @@
                 <p:nvPr/>
               </p:nvPicPr>
               <p:blipFill>
-                <a:blip r:embed="rId9">
+                <a:blip>
                   <a:extLst>
                     <a:ext uri="{96DAC541-7B7A-43D3-8B79-37D633B846F1}">
-                      <asvg:svgBlip xmlns:asvg="http://schemas.microsoft.com/office/drawing/2016/SVG/main" r:embed="rId10"/>
+                      <asvg:svgBlip xmlns:asvg="http://schemas.microsoft.com/office/drawing/2016/SVG/main" r:embed="rId6"/>
                     </a:ext>
                   </a:extLst>
                 </a:blip>
@@ -28731,10 +28941,10 @@
               <p:nvPr/>
             </p:nvPicPr>
             <p:blipFill>
-              <a:blip r:embed="rId3">
+              <a:blip>
                 <a:extLst>
                   <a:ext uri="{96DAC541-7B7A-43D3-8B79-37D633B846F1}">
-                    <asvg:svgBlip xmlns:asvg="http://schemas.microsoft.com/office/drawing/2016/SVG/main" r:embed="rId15"/>
+                    <asvg:svgBlip xmlns:asvg="http://schemas.microsoft.com/office/drawing/2016/SVG/main" r:embed="rId9"/>
                   </a:ext>
                 </a:extLst>
               </a:blip>

--- a/tasktide/docs/Diagrams/Diagrams.pptx
+++ b/tasktide/docs/Diagrams/Diagrams.pptx
@@ -2,7 +2,7 @@
 <file path=ppt/presentation.xml><?xml version="1.0" encoding="utf-8"?>
 <p:presentation xmlns:a="http://schemas.openxmlformats.org/drawingml/2006/main" xmlns:r="http://schemas.openxmlformats.org/officeDocument/2006/relationships" xmlns:p="http://schemas.openxmlformats.org/presentationml/2006/main" saveSubsetFonts="1">
   <p:sldMasterIdLst>
-    <p:sldMasterId id="2147483792" r:id="rId1"/>
+    <p:sldMasterId id="2147483816" r:id="rId1"/>
   </p:sldMasterIdLst>
   <p:notesMasterIdLst>
     <p:notesMasterId r:id="rId13"/>
@@ -20,7 +20,7 @@
     <p:sldId id="260" r:id="rId11"/>
     <p:sldId id="258" r:id="rId12"/>
   </p:sldIdLst>
-  <p:sldSz cx="30240288" cy="23399750"/>
+  <p:sldSz cx="32399288" cy="23399750"/>
   <p:notesSz cx="6858000" cy="9144000"/>
   <p:defaultTextStyle>
     <a:defPPr>
@@ -9010,7 +9010,7 @@
           <a:p>
             <a:fld id="{CB18BCE7-0017-4B0C-A2FB-E6F7885367AC}" type="datetimeFigureOut">
               <a:rPr lang="en-IE" smtClean="0"/>
-              <a:t>27/04/2026</a:t>
+              <a:t>15/08/2026</a:t>
             </a:fld>
             <a:endParaRPr lang="en-IE"/>
           </a:p>
@@ -9028,8 +9028,8 @@
         </p:nvSpPr>
         <p:spPr>
           <a:xfrm>
-            <a:off x="1435100" y="1143000"/>
-            <a:ext cx="3987800" cy="3086100"/>
+            <a:off x="1293813" y="1143000"/>
+            <a:ext cx="4270375" cy="3086100"/>
           </a:xfrm>
           <a:prstGeom prst="rect">
             <a:avLst/>
@@ -9307,8 +9307,8 @@
         </p:nvSpPr>
         <p:spPr>
           <a:xfrm>
-            <a:off x="1435100" y="1143000"/>
-            <a:ext cx="3987800" cy="3086100"/>
+            <a:off x="1293813" y="1143000"/>
+            <a:ext cx="4270375" cy="3086100"/>
           </a:xfrm>
         </p:spPr>
         <p:txBody>
@@ -9412,15 +9412,15 @@
         </p:nvSpPr>
         <p:spPr>
           <a:xfrm>
-            <a:off x="2268022" y="3829544"/>
-            <a:ext cx="25704245" cy="8146580"/>
+            <a:off x="2429947" y="3829544"/>
+            <a:ext cx="27539395" cy="8146580"/>
           </a:xfrm>
         </p:spPr>
         <p:txBody>
           <a:bodyPr anchor="b"/>
           <a:lstStyle>
             <a:lvl1pPr algn="ctr">
-              <a:defRPr sz="19843"/>
+              <a:defRPr sz="20472"/>
             </a:lvl1pPr>
           </a:lstStyle>
           <a:p>
@@ -9444,8 +9444,8 @@
         </p:nvSpPr>
         <p:spPr>
           <a:xfrm>
-            <a:off x="3780036" y="12290287"/>
-            <a:ext cx="22680216" cy="5649521"/>
+            <a:off x="4049911" y="12290287"/>
+            <a:ext cx="24299466" cy="5649521"/>
           </a:xfrm>
         </p:spPr>
         <p:txBody>
@@ -9453,39 +9453,39 @@
           <a:lstStyle>
             <a:lvl1pPr marL="0" indent="0" algn="ctr">
               <a:buNone/>
-              <a:defRPr sz="7937"/>
+              <a:defRPr sz="8189"/>
             </a:lvl1pPr>
-            <a:lvl2pPr marL="1512006" indent="0" algn="ctr">
+            <a:lvl2pPr marL="1559966" indent="0" algn="ctr">
               <a:buNone/>
-              <a:defRPr sz="6614"/>
+              <a:defRPr sz="6824"/>
             </a:lvl2pPr>
-            <a:lvl3pPr marL="3024012" indent="0" algn="ctr">
+            <a:lvl3pPr marL="3119933" indent="0" algn="ctr">
               <a:buNone/>
-              <a:defRPr sz="5953"/>
+              <a:defRPr sz="6142"/>
             </a:lvl3pPr>
-            <a:lvl4pPr marL="4536018" indent="0" algn="ctr">
+            <a:lvl4pPr marL="4679899" indent="0" algn="ctr">
               <a:buNone/>
-              <a:defRPr sz="5291"/>
+              <a:defRPr sz="5459"/>
             </a:lvl4pPr>
-            <a:lvl5pPr marL="6048024" indent="0" algn="ctr">
+            <a:lvl5pPr marL="6239866" indent="0" algn="ctr">
               <a:buNone/>
-              <a:defRPr sz="5291"/>
+              <a:defRPr sz="5459"/>
             </a:lvl5pPr>
-            <a:lvl6pPr marL="7560031" indent="0" algn="ctr">
+            <a:lvl6pPr marL="7799832" indent="0" algn="ctr">
               <a:buNone/>
-              <a:defRPr sz="5291"/>
+              <a:defRPr sz="5459"/>
             </a:lvl6pPr>
-            <a:lvl7pPr marL="9072037" indent="0" algn="ctr">
+            <a:lvl7pPr marL="9359798" indent="0" algn="ctr">
               <a:buNone/>
-              <a:defRPr sz="5291"/>
+              <a:defRPr sz="5459"/>
             </a:lvl7pPr>
-            <a:lvl8pPr marL="10584043" indent="0" algn="ctr">
+            <a:lvl8pPr marL="10919765" indent="0" algn="ctr">
               <a:buNone/>
-              <a:defRPr sz="5291"/>
+              <a:defRPr sz="5459"/>
             </a:lvl8pPr>
-            <a:lvl9pPr marL="12096049" indent="0" algn="ctr">
+            <a:lvl9pPr marL="12479731" indent="0" algn="ctr">
               <a:buNone/>
-              <a:defRPr sz="5291"/>
+              <a:defRPr sz="5459"/>
             </a:lvl9pPr>
           </a:lstStyle>
           <a:p>
@@ -9514,7 +9514,7 @@
           <a:p>
             <a:fld id="{79C0705B-4870-4470-A32F-307AEE1697AB}" type="datetimeFigureOut">
               <a:rPr lang="en-IE" smtClean="0"/>
-              <a:t>27/04/2026</a:t>
+              <a:t>15/08/2026</a:t>
             </a:fld>
             <a:endParaRPr lang="en-IE"/>
           </a:p>
@@ -9565,7 +9565,7 @@
     </p:spTree>
     <p:extLst>
       <p:ext uri="{BB962C8B-B14F-4D97-AF65-F5344CB8AC3E}">
-        <p14:creationId xmlns:p14="http://schemas.microsoft.com/office/powerpoint/2010/main" val="2431198491"/>
+        <p14:creationId xmlns:p14="http://schemas.microsoft.com/office/powerpoint/2010/main" val="1077134892"/>
       </p:ext>
     </p:extLst>
   </p:cSld>
@@ -9684,7 +9684,7 @@
           <a:p>
             <a:fld id="{79C0705B-4870-4470-A32F-307AEE1697AB}" type="datetimeFigureOut">
               <a:rPr lang="en-IE" smtClean="0"/>
-              <a:t>27/04/2026</a:t>
+              <a:t>15/08/2026</a:t>
             </a:fld>
             <a:endParaRPr lang="en-IE"/>
           </a:p>
@@ -9735,7 +9735,7 @@
     </p:spTree>
     <p:extLst>
       <p:ext uri="{BB962C8B-B14F-4D97-AF65-F5344CB8AC3E}">
-        <p14:creationId xmlns:p14="http://schemas.microsoft.com/office/powerpoint/2010/main" val="2033804883"/>
+        <p14:creationId xmlns:p14="http://schemas.microsoft.com/office/powerpoint/2010/main" val="3924939594"/>
       </p:ext>
     </p:extLst>
   </p:cSld>
@@ -9774,8 +9774,8 @@
         </p:nvSpPr>
         <p:spPr>
           <a:xfrm>
-            <a:off x="21640708" y="1245820"/>
-            <a:ext cx="6520562" cy="19830207"/>
+            <a:off x="23185742" y="1245820"/>
+            <a:ext cx="6986096" cy="19830207"/>
           </a:xfrm>
         </p:spPr>
         <p:txBody>
@@ -9802,8 +9802,8 @@
         </p:nvSpPr>
         <p:spPr>
           <a:xfrm>
-            <a:off x="2079021" y="1245820"/>
-            <a:ext cx="19183683" cy="19830207"/>
+            <a:off x="2227453" y="1245820"/>
+            <a:ext cx="20553298" cy="19830207"/>
           </a:xfrm>
         </p:spPr>
         <p:txBody>
@@ -9864,7 +9864,7 @@
           <a:p>
             <a:fld id="{79C0705B-4870-4470-A32F-307AEE1697AB}" type="datetimeFigureOut">
               <a:rPr lang="en-IE" smtClean="0"/>
-              <a:t>27/04/2026</a:t>
+              <a:t>15/08/2026</a:t>
             </a:fld>
             <a:endParaRPr lang="en-IE"/>
           </a:p>
@@ -9915,7 +9915,7 @@
     </p:spTree>
     <p:extLst>
       <p:ext uri="{BB962C8B-B14F-4D97-AF65-F5344CB8AC3E}">
-        <p14:creationId xmlns:p14="http://schemas.microsoft.com/office/powerpoint/2010/main" val="76672276"/>
+        <p14:creationId xmlns:p14="http://schemas.microsoft.com/office/powerpoint/2010/main" val="1510463014"/>
       </p:ext>
     </p:extLst>
   </p:cSld>
@@ -10034,7 +10034,7 @@
           <a:p>
             <a:fld id="{79C0705B-4870-4470-A32F-307AEE1697AB}" type="datetimeFigureOut">
               <a:rPr lang="en-IE" smtClean="0"/>
-              <a:t>27/04/2026</a:t>
+              <a:t>15/08/2026</a:t>
             </a:fld>
             <a:endParaRPr lang="en-IE"/>
           </a:p>
@@ -10085,7 +10085,7 @@
     </p:spTree>
     <p:extLst>
       <p:ext uri="{BB962C8B-B14F-4D97-AF65-F5344CB8AC3E}">
-        <p14:creationId xmlns:p14="http://schemas.microsoft.com/office/powerpoint/2010/main" val="525453984"/>
+        <p14:creationId xmlns:p14="http://schemas.microsoft.com/office/powerpoint/2010/main" val="262147410"/>
       </p:ext>
     </p:extLst>
   </p:cSld>
@@ -10124,15 +10124,15 @@
         </p:nvSpPr>
         <p:spPr>
           <a:xfrm>
-            <a:off x="2063272" y="5833695"/>
-            <a:ext cx="26082248" cy="9733644"/>
+            <a:off x="2210578" y="5833695"/>
+            <a:ext cx="27944386" cy="9733644"/>
           </a:xfrm>
         </p:spPr>
         <p:txBody>
           <a:bodyPr anchor="b"/>
           <a:lstStyle>
             <a:lvl1pPr>
-              <a:defRPr sz="19843"/>
+              <a:defRPr sz="20472"/>
             </a:lvl1pPr>
           </a:lstStyle>
           <a:p>
@@ -10156,8 +10156,8 @@
         </p:nvSpPr>
         <p:spPr>
           <a:xfrm>
-            <a:off x="2063272" y="15659423"/>
-            <a:ext cx="26082248" cy="5118694"/>
+            <a:off x="2210578" y="15659423"/>
+            <a:ext cx="27944386" cy="5118694"/>
           </a:xfrm>
         </p:spPr>
         <p:txBody>
@@ -10165,7 +10165,7 @@
           <a:lstStyle>
             <a:lvl1pPr marL="0" indent="0">
               <a:buNone/>
-              <a:defRPr sz="7937">
+              <a:defRPr sz="8189">
                 <a:solidFill>
                   <a:schemeClr val="tx1">
                     <a:tint val="82000"/>
@@ -10173,9 +10173,9 @@
                 </a:solidFill>
               </a:defRPr>
             </a:lvl1pPr>
-            <a:lvl2pPr marL="1512006" indent="0">
+            <a:lvl2pPr marL="1559966" indent="0">
               <a:buNone/>
-              <a:defRPr sz="6614">
+              <a:defRPr sz="6824">
                 <a:solidFill>
                   <a:schemeClr val="tx1">
                     <a:tint val="82000"/>
@@ -10183,9 +10183,9 @@
                 </a:solidFill>
               </a:defRPr>
             </a:lvl2pPr>
-            <a:lvl3pPr marL="3024012" indent="0">
+            <a:lvl3pPr marL="3119933" indent="0">
               <a:buNone/>
-              <a:defRPr sz="5953">
+              <a:defRPr sz="6142">
                 <a:solidFill>
                   <a:schemeClr val="tx1">
                     <a:tint val="82000"/>
@@ -10193,9 +10193,9 @@
                 </a:solidFill>
               </a:defRPr>
             </a:lvl3pPr>
-            <a:lvl4pPr marL="4536018" indent="0">
+            <a:lvl4pPr marL="4679899" indent="0">
               <a:buNone/>
-              <a:defRPr sz="5291">
+              <a:defRPr sz="5459">
                 <a:solidFill>
                   <a:schemeClr val="tx1">
                     <a:tint val="82000"/>
@@ -10203,9 +10203,9 @@
                 </a:solidFill>
               </a:defRPr>
             </a:lvl4pPr>
-            <a:lvl5pPr marL="6048024" indent="0">
+            <a:lvl5pPr marL="6239866" indent="0">
               <a:buNone/>
-              <a:defRPr sz="5291">
+              <a:defRPr sz="5459">
                 <a:solidFill>
                   <a:schemeClr val="tx1">
                     <a:tint val="82000"/>
@@ -10213,9 +10213,9 @@
                 </a:solidFill>
               </a:defRPr>
             </a:lvl5pPr>
-            <a:lvl6pPr marL="7560031" indent="0">
+            <a:lvl6pPr marL="7799832" indent="0">
               <a:buNone/>
-              <a:defRPr sz="5291">
+              <a:defRPr sz="5459">
                 <a:solidFill>
                   <a:schemeClr val="tx1">
                     <a:tint val="82000"/>
@@ -10223,9 +10223,9 @@
                 </a:solidFill>
               </a:defRPr>
             </a:lvl6pPr>
-            <a:lvl7pPr marL="9072037" indent="0">
+            <a:lvl7pPr marL="9359798" indent="0">
               <a:buNone/>
-              <a:defRPr sz="5291">
+              <a:defRPr sz="5459">
                 <a:solidFill>
                   <a:schemeClr val="tx1">
                     <a:tint val="82000"/>
@@ -10233,9 +10233,9 @@
                 </a:solidFill>
               </a:defRPr>
             </a:lvl7pPr>
-            <a:lvl8pPr marL="10584043" indent="0">
+            <a:lvl8pPr marL="10919765" indent="0">
               <a:buNone/>
-              <a:defRPr sz="5291">
+              <a:defRPr sz="5459">
                 <a:solidFill>
                   <a:schemeClr val="tx1">
                     <a:tint val="82000"/>
@@ -10243,9 +10243,9 @@
                 </a:solidFill>
               </a:defRPr>
             </a:lvl8pPr>
-            <a:lvl9pPr marL="12096049" indent="0">
+            <a:lvl9pPr marL="12479731" indent="0">
               <a:buNone/>
-              <a:defRPr sz="5291">
+              <a:defRPr sz="5459">
                 <a:solidFill>
                   <a:schemeClr val="tx1">
                     <a:tint val="82000"/>
@@ -10280,7 +10280,7 @@
           <a:p>
             <a:fld id="{79C0705B-4870-4470-A32F-307AEE1697AB}" type="datetimeFigureOut">
               <a:rPr lang="en-IE" smtClean="0"/>
-              <a:t>27/04/2026</a:t>
+              <a:t>15/08/2026</a:t>
             </a:fld>
             <a:endParaRPr lang="en-IE"/>
           </a:p>
@@ -10331,7 +10331,7 @@
     </p:spTree>
     <p:extLst>
       <p:ext uri="{BB962C8B-B14F-4D97-AF65-F5344CB8AC3E}">
-        <p14:creationId xmlns:p14="http://schemas.microsoft.com/office/powerpoint/2010/main" val="4163403327"/>
+        <p14:creationId xmlns:p14="http://schemas.microsoft.com/office/powerpoint/2010/main" val="3844132747"/>
       </p:ext>
     </p:extLst>
   </p:cSld>
@@ -10393,8 +10393,8 @@
         </p:nvSpPr>
         <p:spPr>
           <a:xfrm>
-            <a:off x="2079020" y="6229100"/>
-            <a:ext cx="12852122" cy="14846926"/>
+            <a:off x="2227451" y="6229100"/>
+            <a:ext cx="13769697" cy="14846926"/>
           </a:xfrm>
         </p:spPr>
         <p:txBody>
@@ -10450,8 +10450,8 @@
         </p:nvSpPr>
         <p:spPr>
           <a:xfrm>
-            <a:off x="15309146" y="6229100"/>
-            <a:ext cx="12852122" cy="14846926"/>
+            <a:off x="16402140" y="6229100"/>
+            <a:ext cx="13769697" cy="14846926"/>
           </a:xfrm>
         </p:spPr>
         <p:txBody>
@@ -10512,7 +10512,7 @@
           <a:p>
             <a:fld id="{79C0705B-4870-4470-A32F-307AEE1697AB}" type="datetimeFigureOut">
               <a:rPr lang="en-IE" smtClean="0"/>
-              <a:t>27/04/2026</a:t>
+              <a:t>15/08/2026</a:t>
             </a:fld>
             <a:endParaRPr lang="en-IE"/>
           </a:p>
@@ -10563,7 +10563,7 @@
     </p:spTree>
     <p:extLst>
       <p:ext uri="{BB962C8B-B14F-4D97-AF65-F5344CB8AC3E}">
-        <p14:creationId xmlns:p14="http://schemas.microsoft.com/office/powerpoint/2010/main" val="455347430"/>
+        <p14:creationId xmlns:p14="http://schemas.microsoft.com/office/powerpoint/2010/main" val="1075550597"/>
       </p:ext>
     </p:extLst>
   </p:cSld>
@@ -10602,8 +10602,8 @@
         </p:nvSpPr>
         <p:spPr>
           <a:xfrm>
-            <a:off x="2082959" y="1245825"/>
-            <a:ext cx="26082248" cy="4522870"/>
+            <a:off x="2231671" y="1245825"/>
+            <a:ext cx="27944386" cy="4522870"/>
           </a:xfrm>
         </p:spPr>
         <p:txBody>
@@ -10630,8 +10630,8 @@
         </p:nvSpPr>
         <p:spPr>
           <a:xfrm>
-            <a:off x="2082962" y="5736191"/>
-            <a:ext cx="12793057" cy="2811218"/>
+            <a:off x="2231675" y="5736191"/>
+            <a:ext cx="13706415" cy="2811218"/>
           </a:xfrm>
         </p:spPr>
         <p:txBody>
@@ -10639,39 +10639,39 @@
           <a:lstStyle>
             <a:lvl1pPr marL="0" indent="0">
               <a:buNone/>
-              <a:defRPr sz="7937" b="1"/>
+              <a:defRPr sz="8189" b="1"/>
             </a:lvl1pPr>
-            <a:lvl2pPr marL="1512006" indent="0">
+            <a:lvl2pPr marL="1559966" indent="0">
               <a:buNone/>
-              <a:defRPr sz="6614" b="1"/>
+              <a:defRPr sz="6824" b="1"/>
             </a:lvl2pPr>
-            <a:lvl3pPr marL="3024012" indent="0">
+            <a:lvl3pPr marL="3119933" indent="0">
               <a:buNone/>
-              <a:defRPr sz="5953" b="1"/>
+              <a:defRPr sz="6142" b="1"/>
             </a:lvl3pPr>
-            <a:lvl4pPr marL="4536018" indent="0">
+            <a:lvl4pPr marL="4679899" indent="0">
               <a:buNone/>
-              <a:defRPr sz="5291" b="1"/>
+              <a:defRPr sz="5459" b="1"/>
             </a:lvl4pPr>
-            <a:lvl5pPr marL="6048024" indent="0">
+            <a:lvl5pPr marL="6239866" indent="0">
               <a:buNone/>
-              <a:defRPr sz="5291" b="1"/>
+              <a:defRPr sz="5459" b="1"/>
             </a:lvl5pPr>
-            <a:lvl6pPr marL="7560031" indent="0">
+            <a:lvl6pPr marL="7799832" indent="0">
               <a:buNone/>
-              <a:defRPr sz="5291" b="1"/>
+              <a:defRPr sz="5459" b="1"/>
             </a:lvl6pPr>
-            <a:lvl7pPr marL="9072037" indent="0">
+            <a:lvl7pPr marL="9359798" indent="0">
               <a:buNone/>
-              <a:defRPr sz="5291" b="1"/>
+              <a:defRPr sz="5459" b="1"/>
             </a:lvl7pPr>
-            <a:lvl8pPr marL="10584043" indent="0">
+            <a:lvl8pPr marL="10919765" indent="0">
               <a:buNone/>
-              <a:defRPr sz="5291" b="1"/>
+              <a:defRPr sz="5459" b="1"/>
             </a:lvl8pPr>
-            <a:lvl9pPr marL="12096049" indent="0">
+            <a:lvl9pPr marL="12479731" indent="0">
               <a:buNone/>
-              <a:defRPr sz="5291" b="1"/>
+              <a:defRPr sz="5459" b="1"/>
             </a:lvl9pPr>
           </a:lstStyle>
           <a:p>
@@ -10695,8 +10695,8 @@
         </p:nvSpPr>
         <p:spPr>
           <a:xfrm>
-            <a:off x="2082962" y="8547409"/>
-            <a:ext cx="12793057" cy="12571951"/>
+            <a:off x="2231675" y="8547409"/>
+            <a:ext cx="13706415" cy="12571951"/>
           </a:xfrm>
         </p:spPr>
         <p:txBody>
@@ -10752,8 +10752,8 @@
         </p:nvSpPr>
         <p:spPr>
           <a:xfrm>
-            <a:off x="15309148" y="5736191"/>
-            <a:ext cx="12856061" cy="2811218"/>
+            <a:off x="16402142" y="5736191"/>
+            <a:ext cx="13773917" cy="2811218"/>
           </a:xfrm>
         </p:spPr>
         <p:txBody>
@@ -10761,39 +10761,39 @@
           <a:lstStyle>
             <a:lvl1pPr marL="0" indent="0">
               <a:buNone/>
-              <a:defRPr sz="7937" b="1"/>
+              <a:defRPr sz="8189" b="1"/>
             </a:lvl1pPr>
-            <a:lvl2pPr marL="1512006" indent="0">
+            <a:lvl2pPr marL="1559966" indent="0">
               <a:buNone/>
-              <a:defRPr sz="6614" b="1"/>
+              <a:defRPr sz="6824" b="1"/>
             </a:lvl2pPr>
-            <a:lvl3pPr marL="3024012" indent="0">
+            <a:lvl3pPr marL="3119933" indent="0">
               <a:buNone/>
-              <a:defRPr sz="5953" b="1"/>
+              <a:defRPr sz="6142" b="1"/>
             </a:lvl3pPr>
-            <a:lvl4pPr marL="4536018" indent="0">
+            <a:lvl4pPr marL="4679899" indent="0">
               <a:buNone/>
-              <a:defRPr sz="5291" b="1"/>
+              <a:defRPr sz="5459" b="1"/>
             </a:lvl4pPr>
-            <a:lvl5pPr marL="6048024" indent="0">
+            <a:lvl5pPr marL="6239866" indent="0">
               <a:buNone/>
-              <a:defRPr sz="5291" b="1"/>
+              <a:defRPr sz="5459" b="1"/>
             </a:lvl5pPr>
-            <a:lvl6pPr marL="7560031" indent="0">
+            <a:lvl6pPr marL="7799832" indent="0">
               <a:buNone/>
-              <a:defRPr sz="5291" b="1"/>
+              <a:defRPr sz="5459" b="1"/>
             </a:lvl6pPr>
-            <a:lvl7pPr marL="9072037" indent="0">
+            <a:lvl7pPr marL="9359798" indent="0">
               <a:buNone/>
-              <a:defRPr sz="5291" b="1"/>
+              <a:defRPr sz="5459" b="1"/>
             </a:lvl7pPr>
-            <a:lvl8pPr marL="10584043" indent="0">
+            <a:lvl8pPr marL="10919765" indent="0">
               <a:buNone/>
-              <a:defRPr sz="5291" b="1"/>
+              <a:defRPr sz="5459" b="1"/>
             </a:lvl8pPr>
-            <a:lvl9pPr marL="12096049" indent="0">
+            <a:lvl9pPr marL="12479731" indent="0">
               <a:buNone/>
-              <a:defRPr sz="5291" b="1"/>
+              <a:defRPr sz="5459" b="1"/>
             </a:lvl9pPr>
           </a:lstStyle>
           <a:p>
@@ -10817,8 +10817,8 @@
         </p:nvSpPr>
         <p:spPr>
           <a:xfrm>
-            <a:off x="15309148" y="8547409"/>
-            <a:ext cx="12856061" cy="12571951"/>
+            <a:off x="16402142" y="8547409"/>
+            <a:ext cx="13773917" cy="12571951"/>
           </a:xfrm>
         </p:spPr>
         <p:txBody>
@@ -10879,7 +10879,7 @@
           <a:p>
             <a:fld id="{79C0705B-4870-4470-A32F-307AEE1697AB}" type="datetimeFigureOut">
               <a:rPr lang="en-IE" smtClean="0"/>
-              <a:t>27/04/2026</a:t>
+              <a:t>15/08/2026</a:t>
             </a:fld>
             <a:endParaRPr lang="en-IE"/>
           </a:p>
@@ -10930,7 +10930,7 @@
     </p:spTree>
     <p:extLst>
       <p:ext uri="{BB962C8B-B14F-4D97-AF65-F5344CB8AC3E}">
-        <p14:creationId xmlns:p14="http://schemas.microsoft.com/office/powerpoint/2010/main" val="489652630"/>
+        <p14:creationId xmlns:p14="http://schemas.microsoft.com/office/powerpoint/2010/main" val="3250486321"/>
       </p:ext>
     </p:extLst>
   </p:cSld>
@@ -10997,7 +10997,7 @@
           <a:p>
             <a:fld id="{79C0705B-4870-4470-A32F-307AEE1697AB}" type="datetimeFigureOut">
               <a:rPr lang="en-IE" smtClean="0"/>
-              <a:t>27/04/2026</a:t>
+              <a:t>15/08/2026</a:t>
             </a:fld>
             <a:endParaRPr lang="en-IE"/>
           </a:p>
@@ -11048,7 +11048,7 @@
     </p:spTree>
     <p:extLst>
       <p:ext uri="{BB962C8B-B14F-4D97-AF65-F5344CB8AC3E}">
-        <p14:creationId xmlns:p14="http://schemas.microsoft.com/office/powerpoint/2010/main" val="314400458"/>
+        <p14:creationId xmlns:p14="http://schemas.microsoft.com/office/powerpoint/2010/main" val="1050339449"/>
       </p:ext>
     </p:extLst>
   </p:cSld>
@@ -11092,7 +11092,7 @@
           <a:p>
             <a:fld id="{79C0705B-4870-4470-A32F-307AEE1697AB}" type="datetimeFigureOut">
               <a:rPr lang="en-IE" smtClean="0"/>
-              <a:t>27/04/2026</a:t>
+              <a:t>15/08/2026</a:t>
             </a:fld>
             <a:endParaRPr lang="en-IE"/>
           </a:p>
@@ -11143,7 +11143,7 @@
     </p:spTree>
     <p:extLst>
       <p:ext uri="{BB962C8B-B14F-4D97-AF65-F5344CB8AC3E}">
-        <p14:creationId xmlns:p14="http://schemas.microsoft.com/office/powerpoint/2010/main" val="2912556126"/>
+        <p14:creationId xmlns:p14="http://schemas.microsoft.com/office/powerpoint/2010/main" val="3542979371"/>
       </p:ext>
     </p:extLst>
   </p:cSld>
@@ -11182,15 +11182,15 @@
         </p:nvSpPr>
         <p:spPr>
           <a:xfrm>
-            <a:off x="2082959" y="1559983"/>
-            <a:ext cx="9753280" cy="5459942"/>
+            <a:off x="2231671" y="1559983"/>
+            <a:ext cx="10449614" cy="5459942"/>
           </a:xfrm>
         </p:spPr>
         <p:txBody>
           <a:bodyPr anchor="b"/>
           <a:lstStyle>
             <a:lvl1pPr>
-              <a:defRPr sz="10583"/>
+              <a:defRPr sz="10918"/>
             </a:lvl1pPr>
           </a:lstStyle>
           <a:p>
@@ -11214,39 +11214,39 @@
         </p:nvSpPr>
         <p:spPr>
           <a:xfrm>
-            <a:off x="12856061" y="3369136"/>
-            <a:ext cx="15309146" cy="16628989"/>
+            <a:off x="13773917" y="3369136"/>
+            <a:ext cx="16402140" cy="16628989"/>
           </a:xfrm>
         </p:spPr>
         <p:txBody>
           <a:bodyPr/>
           <a:lstStyle>
             <a:lvl1pPr>
-              <a:defRPr sz="10583"/>
+              <a:defRPr sz="10918"/>
             </a:lvl1pPr>
             <a:lvl2pPr>
-              <a:defRPr sz="9260"/>
+              <a:defRPr sz="9554"/>
             </a:lvl2pPr>
             <a:lvl3pPr>
-              <a:defRPr sz="7937"/>
+              <a:defRPr sz="8189"/>
             </a:lvl3pPr>
             <a:lvl4pPr>
-              <a:defRPr sz="6614"/>
+              <a:defRPr sz="6824"/>
             </a:lvl4pPr>
             <a:lvl5pPr>
-              <a:defRPr sz="6614"/>
+              <a:defRPr sz="6824"/>
             </a:lvl5pPr>
             <a:lvl6pPr>
-              <a:defRPr sz="6614"/>
+              <a:defRPr sz="6824"/>
             </a:lvl6pPr>
             <a:lvl7pPr>
-              <a:defRPr sz="6614"/>
+              <a:defRPr sz="6824"/>
             </a:lvl7pPr>
             <a:lvl8pPr>
-              <a:defRPr sz="6614"/>
+              <a:defRPr sz="6824"/>
             </a:lvl8pPr>
             <a:lvl9pPr>
-              <a:defRPr sz="6614"/>
+              <a:defRPr sz="6824"/>
             </a:lvl9pPr>
           </a:lstStyle>
           <a:p>
@@ -11299,8 +11299,8 @@
         </p:nvSpPr>
         <p:spPr>
           <a:xfrm>
-            <a:off x="2082959" y="7019925"/>
-            <a:ext cx="9753280" cy="13005279"/>
+            <a:off x="2231671" y="7019925"/>
+            <a:ext cx="10449614" cy="13005279"/>
           </a:xfrm>
         </p:spPr>
         <p:txBody>
@@ -11308,39 +11308,39 @@
           <a:lstStyle>
             <a:lvl1pPr marL="0" indent="0">
               <a:buNone/>
-              <a:defRPr sz="5291"/>
+              <a:defRPr sz="5459"/>
             </a:lvl1pPr>
-            <a:lvl2pPr marL="1512006" indent="0">
+            <a:lvl2pPr marL="1559966" indent="0">
               <a:buNone/>
-              <a:defRPr sz="4630"/>
+              <a:defRPr sz="4777"/>
             </a:lvl2pPr>
-            <a:lvl3pPr marL="3024012" indent="0">
+            <a:lvl3pPr marL="3119933" indent="0">
               <a:buNone/>
-              <a:defRPr sz="3969"/>
+              <a:defRPr sz="4094"/>
             </a:lvl3pPr>
-            <a:lvl4pPr marL="4536018" indent="0">
+            <a:lvl4pPr marL="4679899" indent="0">
               <a:buNone/>
-              <a:defRPr sz="3307"/>
+              <a:defRPr sz="3412"/>
             </a:lvl4pPr>
-            <a:lvl5pPr marL="6048024" indent="0">
+            <a:lvl5pPr marL="6239866" indent="0">
               <a:buNone/>
-              <a:defRPr sz="3307"/>
+              <a:defRPr sz="3412"/>
             </a:lvl5pPr>
-            <a:lvl6pPr marL="7560031" indent="0">
+            <a:lvl6pPr marL="7799832" indent="0">
               <a:buNone/>
-              <a:defRPr sz="3307"/>
+              <a:defRPr sz="3412"/>
             </a:lvl6pPr>
-            <a:lvl7pPr marL="9072037" indent="0">
+            <a:lvl7pPr marL="9359798" indent="0">
               <a:buNone/>
-              <a:defRPr sz="3307"/>
+              <a:defRPr sz="3412"/>
             </a:lvl7pPr>
-            <a:lvl8pPr marL="10584043" indent="0">
+            <a:lvl8pPr marL="10919765" indent="0">
               <a:buNone/>
-              <a:defRPr sz="3307"/>
+              <a:defRPr sz="3412"/>
             </a:lvl8pPr>
-            <a:lvl9pPr marL="12096049" indent="0">
+            <a:lvl9pPr marL="12479731" indent="0">
               <a:buNone/>
-              <a:defRPr sz="3307"/>
+              <a:defRPr sz="3412"/>
             </a:lvl9pPr>
           </a:lstStyle>
           <a:p>
@@ -11369,7 +11369,7 @@
           <a:p>
             <a:fld id="{79C0705B-4870-4470-A32F-307AEE1697AB}" type="datetimeFigureOut">
               <a:rPr lang="en-IE" smtClean="0"/>
-              <a:t>27/04/2026</a:t>
+              <a:t>15/08/2026</a:t>
             </a:fld>
             <a:endParaRPr lang="en-IE"/>
           </a:p>
@@ -11420,7 +11420,7 @@
     </p:spTree>
     <p:extLst>
       <p:ext uri="{BB962C8B-B14F-4D97-AF65-F5344CB8AC3E}">
-        <p14:creationId xmlns:p14="http://schemas.microsoft.com/office/powerpoint/2010/main" val="1924624946"/>
+        <p14:creationId xmlns:p14="http://schemas.microsoft.com/office/powerpoint/2010/main" val="1141732055"/>
       </p:ext>
     </p:extLst>
   </p:cSld>
@@ -11459,15 +11459,15 @@
         </p:nvSpPr>
         <p:spPr>
           <a:xfrm>
-            <a:off x="2082959" y="1559983"/>
-            <a:ext cx="9753280" cy="5459942"/>
+            <a:off x="2231671" y="1559983"/>
+            <a:ext cx="10449614" cy="5459942"/>
           </a:xfrm>
         </p:spPr>
         <p:txBody>
           <a:bodyPr anchor="b"/>
           <a:lstStyle>
             <a:lvl1pPr>
-              <a:defRPr sz="10583"/>
+              <a:defRPr sz="10918"/>
             </a:lvl1pPr>
           </a:lstStyle>
           <a:p>
@@ -11491,8 +11491,8 @@
         </p:nvSpPr>
         <p:spPr>
           <a:xfrm>
-            <a:off x="12856061" y="3369136"/>
-            <a:ext cx="15309146" cy="16628989"/>
+            <a:off x="13773917" y="3369136"/>
+            <a:ext cx="16402140" cy="16628989"/>
           </a:xfrm>
         </p:spPr>
         <p:txBody>
@@ -11500,39 +11500,39 @@
           <a:lstStyle>
             <a:lvl1pPr marL="0" indent="0">
               <a:buNone/>
-              <a:defRPr sz="10583"/>
+              <a:defRPr sz="10918"/>
             </a:lvl1pPr>
-            <a:lvl2pPr marL="1512006" indent="0">
+            <a:lvl2pPr marL="1559966" indent="0">
               <a:buNone/>
-              <a:defRPr sz="9260"/>
+              <a:defRPr sz="9554"/>
             </a:lvl2pPr>
-            <a:lvl3pPr marL="3024012" indent="0">
+            <a:lvl3pPr marL="3119933" indent="0">
               <a:buNone/>
-              <a:defRPr sz="7937"/>
+              <a:defRPr sz="8189"/>
             </a:lvl3pPr>
-            <a:lvl4pPr marL="4536018" indent="0">
+            <a:lvl4pPr marL="4679899" indent="0">
               <a:buNone/>
-              <a:defRPr sz="6614"/>
+              <a:defRPr sz="6824"/>
             </a:lvl4pPr>
-            <a:lvl5pPr marL="6048024" indent="0">
+            <a:lvl5pPr marL="6239866" indent="0">
               <a:buNone/>
-              <a:defRPr sz="6614"/>
+              <a:defRPr sz="6824"/>
             </a:lvl5pPr>
-            <a:lvl6pPr marL="7560031" indent="0">
+            <a:lvl6pPr marL="7799832" indent="0">
               <a:buNone/>
-              <a:defRPr sz="6614"/>
+              <a:defRPr sz="6824"/>
             </a:lvl6pPr>
-            <a:lvl7pPr marL="9072037" indent="0">
+            <a:lvl7pPr marL="9359798" indent="0">
               <a:buNone/>
-              <a:defRPr sz="6614"/>
+              <a:defRPr sz="6824"/>
             </a:lvl7pPr>
-            <a:lvl8pPr marL="10584043" indent="0">
+            <a:lvl8pPr marL="10919765" indent="0">
               <a:buNone/>
-              <a:defRPr sz="6614"/>
+              <a:defRPr sz="6824"/>
             </a:lvl8pPr>
-            <a:lvl9pPr marL="12096049" indent="0">
+            <a:lvl9pPr marL="12479731" indent="0">
               <a:buNone/>
-              <a:defRPr sz="6614"/>
+              <a:defRPr sz="6824"/>
             </a:lvl9pPr>
           </a:lstStyle>
           <a:p>
@@ -11556,8 +11556,8 @@
         </p:nvSpPr>
         <p:spPr>
           <a:xfrm>
-            <a:off x="2082959" y="7019925"/>
-            <a:ext cx="9753280" cy="13005279"/>
+            <a:off x="2231671" y="7019925"/>
+            <a:ext cx="10449614" cy="13005279"/>
           </a:xfrm>
         </p:spPr>
         <p:txBody>
@@ -11565,39 +11565,39 @@
           <a:lstStyle>
             <a:lvl1pPr marL="0" indent="0">
               <a:buNone/>
-              <a:defRPr sz="5291"/>
+              <a:defRPr sz="5459"/>
             </a:lvl1pPr>
-            <a:lvl2pPr marL="1512006" indent="0">
+            <a:lvl2pPr marL="1559966" indent="0">
               <a:buNone/>
-              <a:defRPr sz="4630"/>
+              <a:defRPr sz="4777"/>
             </a:lvl2pPr>
-            <a:lvl3pPr marL="3024012" indent="0">
+            <a:lvl3pPr marL="3119933" indent="0">
               <a:buNone/>
-              <a:defRPr sz="3969"/>
+              <a:defRPr sz="4094"/>
             </a:lvl3pPr>
-            <a:lvl4pPr marL="4536018" indent="0">
+            <a:lvl4pPr marL="4679899" indent="0">
               <a:buNone/>
-              <a:defRPr sz="3307"/>
+              <a:defRPr sz="3412"/>
             </a:lvl4pPr>
-            <a:lvl5pPr marL="6048024" indent="0">
+            <a:lvl5pPr marL="6239866" indent="0">
               <a:buNone/>
-              <a:defRPr sz="3307"/>
+              <a:defRPr sz="3412"/>
             </a:lvl5pPr>
-            <a:lvl6pPr marL="7560031" indent="0">
+            <a:lvl6pPr marL="7799832" indent="0">
               <a:buNone/>
-              <a:defRPr sz="3307"/>
+              <a:defRPr sz="3412"/>
             </a:lvl6pPr>
-            <a:lvl7pPr marL="9072037" indent="0">
+            <a:lvl7pPr marL="9359798" indent="0">
               <a:buNone/>
-              <a:defRPr sz="3307"/>
+              <a:defRPr sz="3412"/>
             </a:lvl7pPr>
-            <a:lvl8pPr marL="10584043" indent="0">
+            <a:lvl8pPr marL="10919765" indent="0">
               <a:buNone/>
-              <a:defRPr sz="3307"/>
+              <a:defRPr sz="3412"/>
             </a:lvl8pPr>
-            <a:lvl9pPr marL="12096049" indent="0">
+            <a:lvl9pPr marL="12479731" indent="0">
               <a:buNone/>
-              <a:defRPr sz="3307"/>
+              <a:defRPr sz="3412"/>
             </a:lvl9pPr>
           </a:lstStyle>
           <a:p>
@@ -11626,7 +11626,7 @@
           <a:p>
             <a:fld id="{79C0705B-4870-4470-A32F-307AEE1697AB}" type="datetimeFigureOut">
               <a:rPr lang="en-IE" smtClean="0"/>
-              <a:t>27/04/2026</a:t>
+              <a:t>15/08/2026</a:t>
             </a:fld>
             <a:endParaRPr lang="en-IE"/>
           </a:p>
@@ -11677,7 +11677,7 @@
     </p:spTree>
     <p:extLst>
       <p:ext uri="{BB962C8B-B14F-4D97-AF65-F5344CB8AC3E}">
-        <p14:creationId xmlns:p14="http://schemas.microsoft.com/office/powerpoint/2010/main" val="1911520353"/>
+        <p14:creationId xmlns:p14="http://schemas.microsoft.com/office/powerpoint/2010/main" val="2815519375"/>
       </p:ext>
     </p:extLst>
   </p:cSld>
@@ -11721,8 +11721,8 @@
         </p:nvSpPr>
         <p:spPr>
           <a:xfrm>
-            <a:off x="2079020" y="1245825"/>
-            <a:ext cx="26082248" cy="4522870"/>
+            <a:off x="2227451" y="1245825"/>
+            <a:ext cx="27944386" cy="4522870"/>
           </a:xfrm>
           <a:prstGeom prst="rect">
             <a:avLst/>
@@ -11754,8 +11754,8 @@
         </p:nvSpPr>
         <p:spPr>
           <a:xfrm>
-            <a:off x="2079020" y="6229100"/>
-            <a:ext cx="26082248" cy="14846926"/>
+            <a:off x="2227451" y="6229100"/>
+            <a:ext cx="27944386" cy="14846926"/>
           </a:xfrm>
           <a:prstGeom prst="rect">
             <a:avLst/>
@@ -11816,8 +11816,8 @@
         </p:nvSpPr>
         <p:spPr>
           <a:xfrm>
-            <a:off x="2079020" y="21688107"/>
-            <a:ext cx="6804065" cy="1245820"/>
+            <a:off x="2227451" y="21688107"/>
+            <a:ext cx="7289840" cy="1245820"/>
           </a:xfrm>
           <a:prstGeom prst="rect">
             <a:avLst/>
@@ -11827,7 +11827,7 @@
           <a:bodyPr vert="horz" lIns="91440" tIns="45720" rIns="91440" bIns="45720" rtlCol="0" anchor="ctr"/>
           <a:lstStyle>
             <a:lvl1pPr algn="l">
-              <a:defRPr sz="3969">
+              <a:defRPr sz="4094">
                 <a:solidFill>
                   <a:schemeClr val="tx1">
                     <a:tint val="82000"/>
@@ -11839,7 +11839,7 @@
           <a:p>
             <a:fld id="{79C0705B-4870-4470-A32F-307AEE1697AB}" type="datetimeFigureOut">
               <a:rPr lang="en-IE" smtClean="0"/>
-              <a:t>27/04/2026</a:t>
+              <a:t>15/08/2026</a:t>
             </a:fld>
             <a:endParaRPr lang="en-IE"/>
           </a:p>
@@ -11857,8 +11857,8 @@
         </p:nvSpPr>
         <p:spPr>
           <a:xfrm>
-            <a:off x="10017096" y="21688107"/>
-            <a:ext cx="10206097" cy="1245820"/>
+            <a:off x="10732264" y="21688107"/>
+            <a:ext cx="10934760" cy="1245820"/>
           </a:xfrm>
           <a:prstGeom prst="rect">
             <a:avLst/>
@@ -11868,7 +11868,7 @@
           <a:bodyPr vert="horz" lIns="91440" tIns="45720" rIns="91440" bIns="45720" rtlCol="0" anchor="ctr"/>
           <a:lstStyle>
             <a:lvl1pPr algn="ctr">
-              <a:defRPr sz="3969">
+              <a:defRPr sz="4094">
                 <a:solidFill>
                   <a:schemeClr val="tx1">
                     <a:tint val="82000"/>
@@ -11894,8 +11894,8 @@
         </p:nvSpPr>
         <p:spPr>
           <a:xfrm>
-            <a:off x="21357203" y="21688107"/>
-            <a:ext cx="6804065" cy="1245820"/>
+            <a:off x="22881997" y="21688107"/>
+            <a:ext cx="7289840" cy="1245820"/>
           </a:xfrm>
           <a:prstGeom prst="rect">
             <a:avLst/>
@@ -11905,7 +11905,7 @@
           <a:bodyPr vert="horz" lIns="91440" tIns="45720" rIns="91440" bIns="45720" rtlCol="0" anchor="ctr"/>
           <a:lstStyle>
             <a:lvl1pPr algn="r">
-              <a:defRPr sz="3969">
+              <a:defRPr sz="4094">
                 <a:solidFill>
                   <a:schemeClr val="tx1">
                     <a:tint val="82000"/>
@@ -11926,27 +11926,27 @@
     </p:spTree>
     <p:extLst>
       <p:ext uri="{BB962C8B-B14F-4D97-AF65-F5344CB8AC3E}">
-        <p14:creationId xmlns:p14="http://schemas.microsoft.com/office/powerpoint/2010/main" val="302102168"/>
+        <p14:creationId xmlns:p14="http://schemas.microsoft.com/office/powerpoint/2010/main" val="2568338641"/>
       </p:ext>
     </p:extLst>
   </p:cSld>
   <p:clrMap bg1="lt1" tx1="dk1" bg2="lt2" tx2="dk2" accent1="accent1" accent2="accent2" accent3="accent3" accent4="accent4" accent5="accent5" accent6="accent6" hlink="hlink" folHlink="folHlink"/>
   <p:sldLayoutIdLst>
-    <p:sldLayoutId id="2147483793" r:id="rId1"/>
-    <p:sldLayoutId id="2147483794" r:id="rId2"/>
-    <p:sldLayoutId id="2147483795" r:id="rId3"/>
-    <p:sldLayoutId id="2147483796" r:id="rId4"/>
-    <p:sldLayoutId id="2147483797" r:id="rId5"/>
-    <p:sldLayoutId id="2147483798" r:id="rId6"/>
-    <p:sldLayoutId id="2147483799" r:id="rId7"/>
-    <p:sldLayoutId id="2147483800" r:id="rId8"/>
-    <p:sldLayoutId id="2147483801" r:id="rId9"/>
-    <p:sldLayoutId id="2147483802" r:id="rId10"/>
-    <p:sldLayoutId id="2147483803" r:id="rId11"/>
+    <p:sldLayoutId id="2147483817" r:id="rId1"/>
+    <p:sldLayoutId id="2147483818" r:id="rId2"/>
+    <p:sldLayoutId id="2147483819" r:id="rId3"/>
+    <p:sldLayoutId id="2147483820" r:id="rId4"/>
+    <p:sldLayoutId id="2147483821" r:id="rId5"/>
+    <p:sldLayoutId id="2147483822" r:id="rId6"/>
+    <p:sldLayoutId id="2147483823" r:id="rId7"/>
+    <p:sldLayoutId id="2147483824" r:id="rId8"/>
+    <p:sldLayoutId id="2147483825" r:id="rId9"/>
+    <p:sldLayoutId id="2147483826" r:id="rId10"/>
+    <p:sldLayoutId id="2147483827" r:id="rId11"/>
   </p:sldLayoutIdLst>
   <p:txStyles>
     <p:titleStyle>
-      <a:lvl1pPr algn="l" defTabSz="3024012" rtl="0" eaLnBrk="1" latinLnBrk="0" hangingPunct="1">
+      <a:lvl1pPr algn="l" defTabSz="3119933" rtl="0" eaLnBrk="1" latinLnBrk="0" hangingPunct="1">
         <a:lnSpc>
           <a:spcPct val="90000"/>
         </a:lnSpc>
@@ -11954,7 +11954,7 @@
           <a:spcPct val="0"/>
         </a:spcBef>
         <a:buNone/>
-        <a:defRPr sz="14551" kern="1200">
+        <a:defRPr sz="15013" kern="1200">
           <a:solidFill>
             <a:schemeClr val="tx1"/>
           </a:solidFill>
@@ -11965,16 +11965,16 @@
       </a:lvl1pPr>
     </p:titleStyle>
     <p:bodyStyle>
-      <a:lvl1pPr marL="756003" indent="-756003" algn="l" defTabSz="3024012" rtl="0" eaLnBrk="1" latinLnBrk="0" hangingPunct="1">
+      <a:lvl1pPr marL="779983" indent="-779983" algn="l" defTabSz="3119933" rtl="0" eaLnBrk="1" latinLnBrk="0" hangingPunct="1">
         <a:lnSpc>
           <a:spcPct val="90000"/>
         </a:lnSpc>
         <a:spcBef>
-          <a:spcPts val="3307"/>
+          <a:spcPts val="3412"/>
         </a:spcBef>
         <a:buFont typeface="Arial" panose="020B0604020202020204" pitchFamily="34" charset="0"/>
         <a:buChar char="•"/>
-        <a:defRPr sz="9260" kern="1200">
+        <a:defRPr sz="9554" kern="1200">
           <a:solidFill>
             <a:schemeClr val="tx1"/>
           </a:solidFill>
@@ -11983,16 +11983,16 @@
           <a:cs typeface="+mn-cs"/>
         </a:defRPr>
       </a:lvl1pPr>
-      <a:lvl2pPr marL="2268009" indent="-756003" algn="l" defTabSz="3024012" rtl="0" eaLnBrk="1" latinLnBrk="0" hangingPunct="1">
+      <a:lvl2pPr marL="2339950" indent="-779983" algn="l" defTabSz="3119933" rtl="0" eaLnBrk="1" latinLnBrk="0" hangingPunct="1">
         <a:lnSpc>
           <a:spcPct val="90000"/>
         </a:lnSpc>
         <a:spcBef>
-          <a:spcPts val="1654"/>
+          <a:spcPts val="1706"/>
         </a:spcBef>
         <a:buFont typeface="Arial" panose="020B0604020202020204" pitchFamily="34" charset="0"/>
         <a:buChar char="•"/>
-        <a:defRPr sz="7937" kern="1200">
+        <a:defRPr sz="8189" kern="1200">
           <a:solidFill>
             <a:schemeClr val="tx1"/>
           </a:solidFill>
@@ -12001,16 +12001,16 @@
           <a:cs typeface="+mn-cs"/>
         </a:defRPr>
       </a:lvl2pPr>
-      <a:lvl3pPr marL="3780015" indent="-756003" algn="l" defTabSz="3024012" rtl="0" eaLnBrk="1" latinLnBrk="0" hangingPunct="1">
+      <a:lvl3pPr marL="3899916" indent="-779983" algn="l" defTabSz="3119933" rtl="0" eaLnBrk="1" latinLnBrk="0" hangingPunct="1">
         <a:lnSpc>
           <a:spcPct val="90000"/>
         </a:lnSpc>
         <a:spcBef>
-          <a:spcPts val="1654"/>
+          <a:spcPts val="1706"/>
         </a:spcBef>
         <a:buFont typeface="Arial" panose="020B0604020202020204" pitchFamily="34" charset="0"/>
         <a:buChar char="•"/>
-        <a:defRPr sz="6614" kern="1200">
+        <a:defRPr sz="6824" kern="1200">
           <a:solidFill>
             <a:schemeClr val="tx1"/>
           </a:solidFill>
@@ -12019,16 +12019,16 @@
           <a:cs typeface="+mn-cs"/>
         </a:defRPr>
       </a:lvl3pPr>
-      <a:lvl4pPr marL="5292021" indent="-756003" algn="l" defTabSz="3024012" rtl="0" eaLnBrk="1" latinLnBrk="0" hangingPunct="1">
+      <a:lvl4pPr marL="5459882" indent="-779983" algn="l" defTabSz="3119933" rtl="0" eaLnBrk="1" latinLnBrk="0" hangingPunct="1">
         <a:lnSpc>
           <a:spcPct val="90000"/>
         </a:lnSpc>
         <a:spcBef>
-          <a:spcPts val="1654"/>
+          <a:spcPts val="1706"/>
         </a:spcBef>
         <a:buFont typeface="Arial" panose="020B0604020202020204" pitchFamily="34" charset="0"/>
         <a:buChar char="•"/>
-        <a:defRPr sz="5953" kern="1200">
+        <a:defRPr sz="6142" kern="1200">
           <a:solidFill>
             <a:schemeClr val="tx1"/>
           </a:solidFill>
@@ -12037,16 +12037,16 @@
           <a:cs typeface="+mn-cs"/>
         </a:defRPr>
       </a:lvl4pPr>
-      <a:lvl5pPr marL="6804028" indent="-756003" algn="l" defTabSz="3024012" rtl="0" eaLnBrk="1" latinLnBrk="0" hangingPunct="1">
+      <a:lvl5pPr marL="7019849" indent="-779983" algn="l" defTabSz="3119933" rtl="0" eaLnBrk="1" latinLnBrk="0" hangingPunct="1">
         <a:lnSpc>
           <a:spcPct val="90000"/>
         </a:lnSpc>
         <a:spcBef>
-          <a:spcPts val="1654"/>
+          <a:spcPts val="1706"/>
         </a:spcBef>
         <a:buFont typeface="Arial" panose="020B0604020202020204" pitchFamily="34" charset="0"/>
         <a:buChar char="•"/>
-        <a:defRPr sz="5953" kern="1200">
+        <a:defRPr sz="6142" kern="1200">
           <a:solidFill>
             <a:schemeClr val="tx1"/>
           </a:solidFill>
@@ -12055,16 +12055,16 @@
           <a:cs typeface="+mn-cs"/>
         </a:defRPr>
       </a:lvl5pPr>
-      <a:lvl6pPr marL="8316034" indent="-756003" algn="l" defTabSz="3024012" rtl="0" eaLnBrk="1" latinLnBrk="0" hangingPunct="1">
+      <a:lvl6pPr marL="8579815" indent="-779983" algn="l" defTabSz="3119933" rtl="0" eaLnBrk="1" latinLnBrk="0" hangingPunct="1">
         <a:lnSpc>
           <a:spcPct val="90000"/>
         </a:lnSpc>
         <a:spcBef>
-          <a:spcPts val="1654"/>
+          <a:spcPts val="1706"/>
         </a:spcBef>
         <a:buFont typeface="Arial" panose="020B0604020202020204" pitchFamily="34" charset="0"/>
         <a:buChar char="•"/>
-        <a:defRPr sz="5953" kern="1200">
+        <a:defRPr sz="6142" kern="1200">
           <a:solidFill>
             <a:schemeClr val="tx1"/>
           </a:solidFill>
@@ -12073,16 +12073,16 @@
           <a:cs typeface="+mn-cs"/>
         </a:defRPr>
       </a:lvl6pPr>
-      <a:lvl7pPr marL="9828040" indent="-756003" algn="l" defTabSz="3024012" rtl="0" eaLnBrk="1" latinLnBrk="0" hangingPunct="1">
+      <a:lvl7pPr marL="10139782" indent="-779983" algn="l" defTabSz="3119933" rtl="0" eaLnBrk="1" latinLnBrk="0" hangingPunct="1">
         <a:lnSpc>
           <a:spcPct val="90000"/>
         </a:lnSpc>
         <a:spcBef>
-          <a:spcPts val="1654"/>
+          <a:spcPts val="1706"/>
         </a:spcBef>
         <a:buFont typeface="Arial" panose="020B0604020202020204" pitchFamily="34" charset="0"/>
         <a:buChar char="•"/>
-        <a:defRPr sz="5953" kern="1200">
+        <a:defRPr sz="6142" kern="1200">
           <a:solidFill>
             <a:schemeClr val="tx1"/>
           </a:solidFill>
@@ -12091,16 +12091,16 @@
           <a:cs typeface="+mn-cs"/>
         </a:defRPr>
       </a:lvl7pPr>
-      <a:lvl8pPr marL="11340046" indent="-756003" algn="l" defTabSz="3024012" rtl="0" eaLnBrk="1" latinLnBrk="0" hangingPunct="1">
+      <a:lvl8pPr marL="11699748" indent="-779983" algn="l" defTabSz="3119933" rtl="0" eaLnBrk="1" latinLnBrk="0" hangingPunct="1">
         <a:lnSpc>
           <a:spcPct val="90000"/>
         </a:lnSpc>
         <a:spcBef>
-          <a:spcPts val="1654"/>
+          <a:spcPts val="1706"/>
         </a:spcBef>
         <a:buFont typeface="Arial" panose="020B0604020202020204" pitchFamily="34" charset="0"/>
         <a:buChar char="•"/>
-        <a:defRPr sz="5953" kern="1200">
+        <a:defRPr sz="6142" kern="1200">
           <a:solidFill>
             <a:schemeClr val="tx1"/>
           </a:solidFill>
@@ -12109,16 +12109,16 @@
           <a:cs typeface="+mn-cs"/>
         </a:defRPr>
       </a:lvl8pPr>
-      <a:lvl9pPr marL="12852052" indent="-756003" algn="l" defTabSz="3024012" rtl="0" eaLnBrk="1" latinLnBrk="0" hangingPunct="1">
+      <a:lvl9pPr marL="13259714" indent="-779983" algn="l" defTabSz="3119933" rtl="0" eaLnBrk="1" latinLnBrk="0" hangingPunct="1">
         <a:lnSpc>
           <a:spcPct val="90000"/>
         </a:lnSpc>
         <a:spcBef>
-          <a:spcPts val="1654"/>
+          <a:spcPts val="1706"/>
         </a:spcBef>
         <a:buFont typeface="Arial" panose="020B0604020202020204" pitchFamily="34" charset="0"/>
         <a:buChar char="•"/>
-        <a:defRPr sz="5953" kern="1200">
+        <a:defRPr sz="6142" kern="1200">
           <a:solidFill>
             <a:schemeClr val="tx1"/>
           </a:solidFill>
@@ -12132,8 +12132,8 @@
       <a:defPPr>
         <a:defRPr lang="en-US"/>
       </a:defPPr>
-      <a:lvl1pPr marL="0" algn="l" defTabSz="3024012" rtl="0" eaLnBrk="1" latinLnBrk="0" hangingPunct="1">
-        <a:defRPr sz="5953" kern="1200">
+      <a:lvl1pPr marL="0" algn="l" defTabSz="3119933" rtl="0" eaLnBrk="1" latinLnBrk="0" hangingPunct="1">
+        <a:defRPr sz="6142" kern="1200">
           <a:solidFill>
             <a:schemeClr val="tx1"/>
           </a:solidFill>
@@ -12142,8 +12142,8 @@
           <a:cs typeface="+mn-cs"/>
         </a:defRPr>
       </a:lvl1pPr>
-      <a:lvl2pPr marL="1512006" algn="l" defTabSz="3024012" rtl="0" eaLnBrk="1" latinLnBrk="0" hangingPunct="1">
-        <a:defRPr sz="5953" kern="1200">
+      <a:lvl2pPr marL="1559966" algn="l" defTabSz="3119933" rtl="0" eaLnBrk="1" latinLnBrk="0" hangingPunct="1">
+        <a:defRPr sz="6142" kern="1200">
           <a:solidFill>
             <a:schemeClr val="tx1"/>
           </a:solidFill>
@@ -12152,8 +12152,8 @@
           <a:cs typeface="+mn-cs"/>
         </a:defRPr>
       </a:lvl2pPr>
-      <a:lvl3pPr marL="3024012" algn="l" defTabSz="3024012" rtl="0" eaLnBrk="1" latinLnBrk="0" hangingPunct="1">
-        <a:defRPr sz="5953" kern="1200">
+      <a:lvl3pPr marL="3119933" algn="l" defTabSz="3119933" rtl="0" eaLnBrk="1" latinLnBrk="0" hangingPunct="1">
+        <a:defRPr sz="6142" kern="1200">
           <a:solidFill>
             <a:schemeClr val="tx1"/>
           </a:solidFill>
@@ -12162,8 +12162,8 @@
           <a:cs typeface="+mn-cs"/>
         </a:defRPr>
       </a:lvl3pPr>
-      <a:lvl4pPr marL="4536018" algn="l" defTabSz="3024012" rtl="0" eaLnBrk="1" latinLnBrk="0" hangingPunct="1">
-        <a:defRPr sz="5953" kern="1200">
+      <a:lvl4pPr marL="4679899" algn="l" defTabSz="3119933" rtl="0" eaLnBrk="1" latinLnBrk="0" hangingPunct="1">
+        <a:defRPr sz="6142" kern="1200">
           <a:solidFill>
             <a:schemeClr val="tx1"/>
           </a:solidFill>
@@ -12172,8 +12172,8 @@
           <a:cs typeface="+mn-cs"/>
         </a:defRPr>
       </a:lvl4pPr>
-      <a:lvl5pPr marL="6048024" algn="l" defTabSz="3024012" rtl="0" eaLnBrk="1" latinLnBrk="0" hangingPunct="1">
-        <a:defRPr sz="5953" kern="1200">
+      <a:lvl5pPr marL="6239866" algn="l" defTabSz="3119933" rtl="0" eaLnBrk="1" latinLnBrk="0" hangingPunct="1">
+        <a:defRPr sz="6142" kern="1200">
           <a:solidFill>
             <a:schemeClr val="tx1"/>
           </a:solidFill>
@@ -12182,8 +12182,8 @@
           <a:cs typeface="+mn-cs"/>
         </a:defRPr>
       </a:lvl5pPr>
-      <a:lvl6pPr marL="7560031" algn="l" defTabSz="3024012" rtl="0" eaLnBrk="1" latinLnBrk="0" hangingPunct="1">
-        <a:defRPr sz="5953" kern="1200">
+      <a:lvl6pPr marL="7799832" algn="l" defTabSz="3119933" rtl="0" eaLnBrk="1" latinLnBrk="0" hangingPunct="1">
+        <a:defRPr sz="6142" kern="1200">
           <a:solidFill>
             <a:schemeClr val="tx1"/>
           </a:solidFill>
@@ -12192,8 +12192,8 @@
           <a:cs typeface="+mn-cs"/>
         </a:defRPr>
       </a:lvl6pPr>
-      <a:lvl7pPr marL="9072037" algn="l" defTabSz="3024012" rtl="0" eaLnBrk="1" latinLnBrk="0" hangingPunct="1">
-        <a:defRPr sz="5953" kern="1200">
+      <a:lvl7pPr marL="9359798" algn="l" defTabSz="3119933" rtl="0" eaLnBrk="1" latinLnBrk="0" hangingPunct="1">
+        <a:defRPr sz="6142" kern="1200">
           <a:solidFill>
             <a:schemeClr val="tx1"/>
           </a:solidFill>
@@ -12202,8 +12202,8 @@
           <a:cs typeface="+mn-cs"/>
         </a:defRPr>
       </a:lvl7pPr>
-      <a:lvl8pPr marL="10584043" algn="l" defTabSz="3024012" rtl="0" eaLnBrk="1" latinLnBrk="0" hangingPunct="1">
-        <a:defRPr sz="5953" kern="1200">
+      <a:lvl8pPr marL="10919765" algn="l" defTabSz="3119933" rtl="0" eaLnBrk="1" latinLnBrk="0" hangingPunct="1">
+        <a:defRPr sz="6142" kern="1200">
           <a:solidFill>
             <a:schemeClr val="tx1"/>
           </a:solidFill>
@@ -12212,8 +12212,8 @@
           <a:cs typeface="+mn-cs"/>
         </a:defRPr>
       </a:lvl8pPr>
-      <a:lvl9pPr marL="12096049" algn="l" defTabSz="3024012" rtl="0" eaLnBrk="1" latinLnBrk="0" hangingPunct="1">
-        <a:defRPr sz="5953" kern="1200">
+      <a:lvl9pPr marL="12479731" algn="l" defTabSz="3119933" rtl="0" eaLnBrk="1" latinLnBrk="0" hangingPunct="1">
+        <a:defRPr sz="6142" kern="1200">
           <a:solidFill>
             <a:schemeClr val="tx1"/>
           </a:solidFill>
@@ -12268,7 +12268,7 @@
         </p:nvSpPr>
         <p:spPr>
           <a:xfrm>
-            <a:off x="2247900" y="928256"/>
+            <a:off x="3327400" y="928258"/>
             <a:ext cx="25641300" cy="4670205"/>
           </a:xfrm>
         </p:spPr>
@@ -12300,7 +12300,7 @@
         </p:nvGrpSpPr>
         <p:grpSpPr>
           <a:xfrm>
-            <a:off x="5689601" y="7520075"/>
+            <a:off x="6769101" y="7520077"/>
             <a:ext cx="19380200" cy="13771473"/>
             <a:chOff x="8222933" y="7291476"/>
             <a:chExt cx="13380721" cy="10027921"/>
@@ -12689,13 +12689,13 @@
         </p:nvSpPr>
         <p:spPr>
           <a:xfrm>
-            <a:off x="1333501" y="245921"/>
+            <a:off x="2413001" y="245921"/>
             <a:ext cx="27203400" cy="5914990"/>
           </a:xfrm>
         </p:spPr>
         <p:txBody>
           <a:bodyPr>
-            <a:normAutofit/>
+            <a:normAutofit fontScale="90000"/>
           </a:bodyPr>
           <a:lstStyle/>
           <a:p>
@@ -12728,7 +12728,7 @@
         </p:nvGrpSpPr>
         <p:grpSpPr>
           <a:xfrm>
-            <a:off x="2362200" y="6446996"/>
+            <a:off x="3441700" y="6446996"/>
             <a:ext cx="26022300" cy="15612904"/>
             <a:chOff x="6404293" y="7551896"/>
             <a:chExt cx="17414240" cy="11257280"/>
@@ -13490,7 +13490,7 @@
         </p:blipFill>
         <p:spPr>
           <a:xfrm>
-            <a:off x="624577" y="16265703"/>
+            <a:off x="1704077" y="16265703"/>
             <a:ext cx="5328880" cy="3351074"/>
           </a:xfrm>
           <a:prstGeom prst="rect">
@@ -13526,7 +13526,7 @@
         </p:blipFill>
         <p:spPr>
           <a:xfrm>
-            <a:off x="6839064" y="15949535"/>
+            <a:off x="7918564" y="15949535"/>
             <a:ext cx="5019858" cy="2775882"/>
           </a:xfrm>
           <a:prstGeom prst="rect">
@@ -13556,7 +13556,7 @@
         </p:blipFill>
         <p:spPr>
           <a:xfrm>
-            <a:off x="22290666" y="1106687"/>
+            <a:off x="23370166" y="1106687"/>
             <a:ext cx="7968078" cy="7152674"/>
           </a:xfrm>
           <a:prstGeom prst="rect">
@@ -13578,7 +13578,7 @@
         </p:nvSpPr>
         <p:spPr>
           <a:xfrm>
-            <a:off x="4671417" y="4551093"/>
+            <a:off x="5750917" y="4551093"/>
             <a:ext cx="6201238" cy="1263908"/>
           </a:xfrm>
           <a:prstGeom prst="flowChartAlternateProcess">
@@ -13656,7 +13656,7 @@
         </p:nvSpPr>
         <p:spPr>
           <a:xfrm>
-            <a:off x="1422990" y="7012739"/>
+            <a:off x="2502490" y="7012739"/>
             <a:ext cx="4585982" cy="1343146"/>
           </a:xfrm>
           <a:prstGeom prst="flowChartAlternateProcess">
@@ -13734,7 +13734,7 @@
         </p:nvSpPr>
         <p:spPr>
           <a:xfrm>
-            <a:off x="8601493" y="7025760"/>
+            <a:off x="9680995" y="7025760"/>
             <a:ext cx="4352343" cy="1335648"/>
           </a:xfrm>
           <a:prstGeom prst="flowChartAlternateProcess">
@@ -13812,7 +13812,7 @@
         </p:nvSpPr>
         <p:spPr>
           <a:xfrm>
-            <a:off x="4341483" y="9234926"/>
+            <a:off x="5420985" y="9234926"/>
             <a:ext cx="6531163" cy="1343146"/>
           </a:xfrm>
           <a:prstGeom prst="flowChartAlternateProcess">
@@ -13890,7 +13890,7 @@
         </p:nvSpPr>
         <p:spPr>
           <a:xfrm>
-            <a:off x="4341483" y="11380296"/>
+            <a:off x="5420983" y="11380298"/>
             <a:ext cx="6418772" cy="1182201"/>
           </a:xfrm>
           <a:prstGeom prst="flowChartAlternateProcess">
@@ -13968,7 +13968,7 @@
         </p:nvSpPr>
         <p:spPr>
           <a:xfrm>
-            <a:off x="190500" y="14259699"/>
+            <a:off x="1270000" y="14259701"/>
             <a:ext cx="6163026" cy="1270617"/>
           </a:xfrm>
           <a:prstGeom prst="flowChartAlternateProcess">
@@ -14046,7 +14046,7 @@
         </p:nvSpPr>
         <p:spPr>
           <a:xfrm>
-            <a:off x="12460403" y="15157971"/>
+            <a:off x="13539903" y="15157973"/>
             <a:ext cx="6440138" cy="1270455"/>
           </a:xfrm>
           <a:prstGeom prst="flowChartAlternateProcess">
@@ -14124,7 +14124,7 @@
         </p:nvSpPr>
         <p:spPr>
           <a:xfrm>
-            <a:off x="6817442" y="13461075"/>
+            <a:off x="7896942" y="13461077"/>
             <a:ext cx="4831346" cy="1092937"/>
           </a:xfrm>
           <a:prstGeom prst="flowChartAlternateProcess">
@@ -14202,7 +14202,7 @@
         </p:nvGrpSpPr>
         <p:grpSpPr>
           <a:xfrm>
-            <a:off x="13452834" y="17263362"/>
+            <a:off x="14532334" y="17263364"/>
             <a:ext cx="5208788" cy="2791999"/>
             <a:chOff x="8471368" y="11395622"/>
             <a:chExt cx="3773483" cy="1545522"/>
@@ -14334,7 +14334,7 @@
         </p:nvCxnSpPr>
         <p:spPr>
           <a:xfrm>
-            <a:off x="5182644" y="5849311"/>
+            <a:off x="6262144" y="5849311"/>
             <a:ext cx="0" cy="1077900"/>
           </a:xfrm>
           <a:prstGeom prst="straightConnector1">
@@ -14375,7 +14375,7 @@
         </p:nvCxnSpPr>
         <p:spPr>
           <a:xfrm>
-            <a:off x="9222767" y="12610224"/>
+            <a:off x="10302267" y="12610224"/>
             <a:ext cx="0" cy="806090"/>
           </a:xfrm>
           <a:prstGeom prst="straightConnector1">
@@ -14416,7 +14416,7 @@
         </p:nvCxnSpPr>
         <p:spPr>
           <a:xfrm>
-            <a:off x="15473375" y="16484330"/>
+            <a:off x="16552875" y="16484332"/>
             <a:ext cx="0" cy="710255"/>
           </a:xfrm>
           <a:prstGeom prst="straightConnector1">
@@ -14455,7 +14455,7 @@
         </p:nvSpPr>
         <p:spPr>
           <a:xfrm>
-            <a:off x="13930380" y="6989372"/>
+            <a:off x="15009882" y="6989374"/>
             <a:ext cx="4775687" cy="1405977"/>
           </a:xfrm>
           <a:prstGeom prst="flowChartAlternateProcess">
@@ -14535,7 +14535,7 @@
         </p:nvCxnSpPr>
         <p:spPr>
           <a:xfrm>
-            <a:off x="10789975" y="12095599"/>
+            <a:off x="11869475" y="12095599"/>
             <a:ext cx="647546" cy="0"/>
           </a:xfrm>
           <a:prstGeom prst="straightConnector1">
@@ -14574,7 +14574,7 @@
         </p:nvSpPr>
         <p:spPr>
           <a:xfrm>
-            <a:off x="11437520" y="11395572"/>
+            <a:off x="12517020" y="11395574"/>
             <a:ext cx="4775698" cy="1219121"/>
           </a:xfrm>
           <a:prstGeom prst="flowChartAlternateProcess">
@@ -14652,7 +14652,7 @@
         </p:nvSpPr>
         <p:spPr>
           <a:xfrm>
-            <a:off x="17538017" y="9978543"/>
+            <a:off x="18617519" y="9978545"/>
             <a:ext cx="3937683" cy="1150977"/>
           </a:xfrm>
           <a:prstGeom prst="flowChartAlternateProcess">
@@ -14730,7 +14730,7 @@
         </p:nvSpPr>
         <p:spPr>
           <a:xfrm>
-            <a:off x="17535464" y="11534187"/>
+            <a:off x="18614966" y="11534189"/>
             <a:ext cx="3937683" cy="1150977"/>
           </a:xfrm>
           <a:prstGeom prst="flowChartAlternateProcess">
@@ -14808,7 +14808,7 @@
         </p:nvSpPr>
         <p:spPr>
           <a:xfrm>
-            <a:off x="17519960" y="13071328"/>
+            <a:off x="18599462" y="13071328"/>
             <a:ext cx="3937683" cy="1206278"/>
           </a:xfrm>
           <a:prstGeom prst="flowChartAlternateProcess">
@@ -14888,7 +14888,7 @@
         </p:nvCxnSpPr>
         <p:spPr>
           <a:xfrm>
-            <a:off x="10099010" y="5851701"/>
+            <a:off x="11178510" y="5851703"/>
             <a:ext cx="0" cy="1075509"/>
           </a:xfrm>
           <a:prstGeom prst="straightConnector1">
@@ -14929,7 +14929,7 @@
         </p:nvCxnSpPr>
         <p:spPr>
           <a:xfrm>
-            <a:off x="5182644" y="8404930"/>
+            <a:off x="6262144" y="8404932"/>
             <a:ext cx="0" cy="764759"/>
           </a:xfrm>
           <a:prstGeom prst="straightConnector1">
@@ -14970,7 +14970,7 @@
         </p:nvCxnSpPr>
         <p:spPr>
           <a:xfrm>
-            <a:off x="10154548" y="8408624"/>
+            <a:off x="11234048" y="8408626"/>
             <a:ext cx="0" cy="781419"/>
           </a:xfrm>
           <a:prstGeom prst="straightConnector1">
@@ -15011,7 +15011,7 @@
         </p:nvCxnSpPr>
         <p:spPr>
           <a:xfrm>
-            <a:off x="7546827" y="10628035"/>
+            <a:off x="8626327" y="10628035"/>
             <a:ext cx="0" cy="768420"/>
           </a:xfrm>
           <a:prstGeom prst="straightConnector1">
@@ -15052,7 +15052,7 @@
         </p:nvCxnSpPr>
         <p:spPr>
           <a:xfrm>
-            <a:off x="12980057" y="7730992"/>
+            <a:off x="14059559" y="7730992"/>
             <a:ext cx="898631" cy="0"/>
           </a:xfrm>
           <a:prstGeom prst="straightConnector1">
@@ -15093,7 +15093,7 @@
         </p:nvCxnSpPr>
         <p:spPr>
           <a:xfrm>
-            <a:off x="16314572" y="12119683"/>
+            <a:off x="17394074" y="12119683"/>
             <a:ext cx="1124069" cy="0"/>
           </a:xfrm>
           <a:prstGeom prst="straightConnector1">
@@ -15134,7 +15134,7 @@
         </p:nvCxnSpPr>
         <p:spPr>
           <a:xfrm flipV="1">
-            <a:off x="16264281" y="10862386"/>
+            <a:off x="17343783" y="10862388"/>
             <a:ext cx="1220257" cy="1270455"/>
           </a:xfrm>
           <a:prstGeom prst="straightConnector1">
@@ -15175,7 +15175,7 @@
         </p:nvCxnSpPr>
         <p:spPr>
           <a:xfrm rot="5400000" flipV="1">
-            <a:off x="16260145" y="12205226"/>
+            <a:off x="17339645" y="12205226"/>
             <a:ext cx="1307588" cy="1185604"/>
           </a:xfrm>
           <a:prstGeom prst="straightConnector1">
@@ -15216,7 +15216,7 @@
         </p:nvCxnSpPr>
         <p:spPr>
           <a:xfrm flipH="1">
-            <a:off x="5182644" y="12612329"/>
+            <a:off x="6262144" y="12612331"/>
             <a:ext cx="234" cy="1628765"/>
           </a:xfrm>
           <a:prstGeom prst="straightConnector1">
@@ -15257,7 +15257,7 @@
         </p:nvCxnSpPr>
         <p:spPr>
           <a:xfrm>
-            <a:off x="10709456" y="12484793"/>
+            <a:off x="11788958" y="12484795"/>
             <a:ext cx="4528699" cy="2588015"/>
           </a:xfrm>
           <a:prstGeom prst="straightConnector1">
@@ -15298,7 +15298,7 @@
         </p:nvCxnSpPr>
         <p:spPr>
           <a:xfrm>
-            <a:off x="9204036" y="14612374"/>
+            <a:off x="10283536" y="14612374"/>
             <a:ext cx="0" cy="1177446"/>
           </a:xfrm>
           <a:prstGeom prst="straightConnector1">
@@ -15339,7 +15339,7 @@
         </p:nvCxnSpPr>
         <p:spPr>
           <a:xfrm>
-            <a:off x="3040001" y="15581708"/>
+            <a:off x="4119501" y="15581710"/>
             <a:ext cx="0" cy="710255"/>
           </a:xfrm>
           <a:prstGeom prst="straightConnector1">
@@ -15380,7 +15380,7 @@
         </p:nvCxnSpPr>
         <p:spPr>
           <a:xfrm>
-            <a:off x="18917456" y="15814131"/>
+            <a:off x="19996958" y="15814131"/>
             <a:ext cx="787245" cy="0"/>
           </a:xfrm>
           <a:prstGeom prst="straightConnector1">
@@ -15419,7 +15419,7 @@
         </p:nvSpPr>
         <p:spPr>
           <a:xfrm>
-            <a:off x="19695685" y="15086664"/>
+            <a:off x="20775185" y="15086664"/>
             <a:ext cx="4918550" cy="1445848"/>
           </a:xfrm>
           <a:prstGeom prst="flowChartAlternateProcess">
@@ -15497,7 +15497,7 @@
         </p:nvSpPr>
         <p:spPr>
           <a:xfrm>
-            <a:off x="25920018" y="13737743"/>
+            <a:off x="26999518" y="13737745"/>
             <a:ext cx="3935130" cy="1150977"/>
           </a:xfrm>
           <a:prstGeom prst="flowChartAlternateProcess">
@@ -15575,7 +15575,7 @@
         </p:nvSpPr>
         <p:spPr>
           <a:xfrm>
-            <a:off x="25917464" y="15293387"/>
+            <a:off x="26996966" y="15293389"/>
             <a:ext cx="3937683" cy="1150977"/>
           </a:xfrm>
           <a:prstGeom prst="flowChartAlternateProcess">
@@ -15653,7 +15653,7 @@
         </p:nvSpPr>
         <p:spPr>
           <a:xfrm>
-            <a:off x="25901960" y="16830528"/>
+            <a:off x="26981462" y="16830528"/>
             <a:ext cx="3937683" cy="1206278"/>
           </a:xfrm>
           <a:prstGeom prst="flowChartAlternateProcess">
@@ -15733,7 +15733,7 @@
         </p:nvCxnSpPr>
         <p:spPr>
           <a:xfrm flipV="1">
-            <a:off x="24646281" y="14554012"/>
+            <a:off x="25725783" y="14554014"/>
             <a:ext cx="1204359" cy="1338029"/>
           </a:xfrm>
           <a:prstGeom prst="straightConnector1">
@@ -15774,7 +15774,7 @@
         </p:nvCxnSpPr>
         <p:spPr>
           <a:xfrm>
-            <a:off x="24665036" y="15854447"/>
+            <a:off x="25744536" y="15854449"/>
             <a:ext cx="1185604" cy="1445851"/>
           </a:xfrm>
           <a:prstGeom prst="straightConnector1">
@@ -15815,7 +15815,7 @@
         </p:nvCxnSpPr>
         <p:spPr>
           <a:xfrm>
-            <a:off x="24689312" y="15873440"/>
+            <a:off x="25768812" y="15873440"/>
             <a:ext cx="1161328" cy="0"/>
           </a:xfrm>
           <a:prstGeom prst="straightConnector1">
@@ -15854,7 +15854,7 @@
         </p:nvSpPr>
         <p:spPr>
           <a:xfrm>
-            <a:off x="11867700" y="4545802"/>
+            <a:off x="12947202" y="4545802"/>
             <a:ext cx="4352343" cy="1335648"/>
           </a:xfrm>
           <a:prstGeom prst="flowChartAlternateProcess">
@@ -15932,7 +15932,7 @@
         </p:nvSpPr>
         <p:spPr>
           <a:xfrm>
-            <a:off x="17196587" y="4509414"/>
+            <a:off x="18276089" y="4509416"/>
             <a:ext cx="4775687" cy="1405977"/>
           </a:xfrm>
           <a:prstGeom prst="flowChartAlternateProcess">
@@ -16012,7 +16012,7 @@
         </p:nvCxnSpPr>
         <p:spPr>
           <a:xfrm>
-            <a:off x="16246264" y="5251034"/>
+            <a:off x="17325766" y="5251034"/>
             <a:ext cx="898631" cy="0"/>
           </a:xfrm>
           <a:prstGeom prst="straightConnector1">
@@ -16053,7 +16053,126 @@
         </p:nvCxnSpPr>
         <p:spPr>
           <a:xfrm>
-            <a:off x="10942744" y="5247726"/>
+            <a:off x="12022246" y="5247726"/>
+            <a:ext cx="898631" cy="0"/>
+          </a:xfrm>
+          <a:prstGeom prst="straightConnector1">
+            <a:avLst/>
+          </a:prstGeom>
+          <a:ln w="76200">
+            <a:tailEnd type="triangle"/>
+          </a:ln>
+        </p:spPr>
+        <p:style>
+          <a:lnRef idx="3">
+            <a:schemeClr val="accent6"/>
+          </a:lnRef>
+          <a:fillRef idx="0">
+            <a:schemeClr val="accent6"/>
+          </a:fillRef>
+          <a:effectRef idx="2">
+            <a:schemeClr val="accent6"/>
+          </a:effectRef>
+          <a:fontRef idx="minor">
+            <a:schemeClr val="tx1"/>
+          </a:fontRef>
+        </p:style>
+      </p:cxnSp>
+      <p:sp>
+        <p:nvSpPr>
+          <p:cNvPr id="3" name="Flowchart: Alternate Process 2">
+            <a:extLst>
+              <a:ext uri="{FF2B5EF4-FFF2-40B4-BE49-F238E27FC236}">
+                <a16:creationId xmlns:a16="http://schemas.microsoft.com/office/drawing/2014/main" id="{61ABEC6E-AF8D-C833-0860-E9E6C575F926}"/>
+              </a:ext>
+            </a:extLst>
+          </p:cNvPr>
+          <p:cNvSpPr/>
+          <p:nvPr/>
+        </p:nvSpPr>
+        <p:spPr>
+          <a:xfrm>
+            <a:off x="443341" y="4515225"/>
+            <a:ext cx="4352343" cy="1335648"/>
+          </a:xfrm>
+          <a:prstGeom prst="flowChartAlternateProcess">
+            <a:avLst/>
+          </a:prstGeom>
+          <a:gradFill flip="none" rotWithShape="1">
+            <a:gsLst>
+              <a:gs pos="0">
+                <a:schemeClr val="accent1">
+                  <a:shade val="30000"/>
+                  <a:satMod val="115000"/>
+                </a:schemeClr>
+              </a:gs>
+              <a:gs pos="50000">
+                <a:schemeClr val="accent1">
+                  <a:shade val="67500"/>
+                  <a:satMod val="115000"/>
+                </a:schemeClr>
+              </a:gs>
+              <a:gs pos="100000">
+                <a:schemeClr val="accent1">
+                  <a:shade val="100000"/>
+                  <a:satMod val="115000"/>
+                </a:schemeClr>
+              </a:gs>
+            </a:gsLst>
+            <a:lin ang="5400000" scaled="1"/>
+            <a:tileRect/>
+          </a:gradFill>
+          <a:ln w="57150">
+            <a:solidFill>
+              <a:schemeClr val="tx1"/>
+            </a:solidFill>
+          </a:ln>
+        </p:spPr>
+        <p:style>
+          <a:lnRef idx="2">
+            <a:schemeClr val="accent1">
+              <a:shade val="15000"/>
+            </a:schemeClr>
+          </a:lnRef>
+          <a:fillRef idx="1">
+            <a:schemeClr val="accent1"/>
+          </a:fillRef>
+          <a:effectRef idx="0">
+            <a:schemeClr val="accent1"/>
+          </a:effectRef>
+          <a:fontRef idx="minor">
+            <a:schemeClr val="lt1"/>
+          </a:fontRef>
+        </p:style>
+        <p:txBody>
+          <a:bodyPr rtlCol="0" anchor="ctr"/>
+          <a:lstStyle/>
+          <a:p>
+            <a:pPr algn="ctr"/>
+            <a:r>
+              <a:rPr lang="en-IE" sz="5000" b="1" dirty="0"/>
+              <a:t>WebAPI</a:t>
+            </a:r>
+          </a:p>
+        </p:txBody>
+      </p:sp>
+      <p:cxnSp>
+        <p:nvCxnSpPr>
+          <p:cNvPr id="44" name="Straight Arrow Connector 43">
+            <a:extLst>
+              <a:ext uri="{FF2B5EF4-FFF2-40B4-BE49-F238E27FC236}">
+                <a16:creationId xmlns:a16="http://schemas.microsoft.com/office/drawing/2014/main" id="{BCE0B039-7FB9-A34A-9885-04BAEE8577BD}"/>
+              </a:ext>
+            </a:extLst>
+          </p:cNvPr>
+          <p:cNvCxnSpPr>
+            <a:cxnSpLocks/>
+          </p:cNvCxnSpPr>
+          <p:nvPr/>
+        </p:nvCxnSpPr>
+        <p:spPr>
+          <a:xfrm rot="10800000" flipV="1">
+            <a:off x="4874059" y="5226359"/>
             <a:ext cx="898631" cy="0"/>
           </a:xfrm>
           <a:prstGeom prst="straightConnector1">
@@ -16122,7 +16241,7 @@
         </p:nvGrpSpPr>
         <p:grpSpPr>
           <a:xfrm>
-            <a:off x="1201154" y="922334"/>
+            <a:off x="2280654" y="922334"/>
             <a:ext cx="26992846" cy="21480466"/>
             <a:chOff x="6855210" y="3843496"/>
             <a:chExt cx="16922683" cy="15675181"/>
@@ -16905,7 +17024,7 @@
         </p:nvSpPr>
         <p:spPr>
           <a:xfrm>
-            <a:off x="2840183" y="787897"/>
+            <a:off x="3919685" y="787897"/>
             <a:ext cx="25184099" cy="2688090"/>
           </a:xfrm>
         </p:spPr>
@@ -16937,7 +17056,7 @@
         </p:nvGrpSpPr>
         <p:grpSpPr>
           <a:xfrm>
-            <a:off x="3030683" y="4562598"/>
+            <a:off x="4110183" y="4562598"/>
             <a:ext cx="23964900" cy="17603804"/>
             <a:chOff x="6181099" y="6093585"/>
             <a:chExt cx="17621480" cy="13327077"/>
@@ -17997,7 +18116,7 @@
           </p:nvPr>
         </p:nvGraphicFramePr>
         <p:xfrm>
-          <a:off x="125924" y="3740727"/>
+          <a:off x="1205426" y="3740727"/>
           <a:ext cx="29988439" cy="15722884"/>
         </p:xfrm>
         <a:graphic>
@@ -19274,7 +19393,7 @@
         </p:blipFill>
         <p:spPr>
           <a:xfrm>
-            <a:off x="22290666" y="1106687"/>
+            <a:off x="23751166" y="1106687"/>
             <a:ext cx="7968078" cy="7152674"/>
           </a:xfrm>
           <a:prstGeom prst="rect">
@@ -19296,7 +19415,7 @@
         </p:nvGrpSpPr>
         <p:grpSpPr>
           <a:xfrm>
-            <a:off x="190500" y="4509414"/>
+            <a:off x="1651000" y="4509416"/>
             <a:ext cx="29664648" cy="15863243"/>
             <a:chOff x="304800" y="3633114"/>
             <a:chExt cx="29664648" cy="15863243"/>
@@ -21961,6 +22080,125 @@
           </p:style>
         </p:cxnSp>
       </p:grpSp>
+      <p:sp>
+        <p:nvSpPr>
+          <p:cNvPr id="5" name="Flowchart: Alternate Process 4">
+            <a:extLst>
+              <a:ext uri="{FF2B5EF4-FFF2-40B4-BE49-F238E27FC236}">
+                <a16:creationId xmlns:a16="http://schemas.microsoft.com/office/drawing/2014/main" id="{EB1BCEC7-3F5F-CB4B-A38D-AD75FFAFF3EC}"/>
+              </a:ext>
+            </a:extLst>
+          </p:cNvPr>
+          <p:cNvSpPr/>
+          <p:nvPr/>
+        </p:nvSpPr>
+        <p:spPr>
+          <a:xfrm>
+            <a:off x="802568" y="4515225"/>
+            <a:ext cx="4352343" cy="1335648"/>
+          </a:xfrm>
+          <a:prstGeom prst="flowChartAlternateProcess">
+            <a:avLst/>
+          </a:prstGeom>
+          <a:gradFill flip="none" rotWithShape="1">
+            <a:gsLst>
+              <a:gs pos="0">
+                <a:schemeClr val="accent1">
+                  <a:shade val="30000"/>
+                  <a:satMod val="115000"/>
+                </a:schemeClr>
+              </a:gs>
+              <a:gs pos="50000">
+                <a:schemeClr val="accent1">
+                  <a:shade val="67500"/>
+                  <a:satMod val="115000"/>
+                </a:schemeClr>
+              </a:gs>
+              <a:gs pos="100000">
+                <a:schemeClr val="accent1">
+                  <a:shade val="100000"/>
+                  <a:satMod val="115000"/>
+                </a:schemeClr>
+              </a:gs>
+            </a:gsLst>
+            <a:lin ang="5400000" scaled="1"/>
+            <a:tileRect/>
+          </a:gradFill>
+          <a:ln w="57150">
+            <a:solidFill>
+              <a:schemeClr val="tx1"/>
+            </a:solidFill>
+          </a:ln>
+        </p:spPr>
+        <p:style>
+          <a:lnRef idx="2">
+            <a:schemeClr val="accent1">
+              <a:shade val="15000"/>
+            </a:schemeClr>
+          </a:lnRef>
+          <a:fillRef idx="1">
+            <a:schemeClr val="accent1"/>
+          </a:fillRef>
+          <a:effectRef idx="0">
+            <a:schemeClr val="accent1"/>
+          </a:effectRef>
+          <a:fontRef idx="minor">
+            <a:schemeClr val="lt1"/>
+          </a:fontRef>
+        </p:style>
+        <p:txBody>
+          <a:bodyPr rtlCol="0" anchor="ctr"/>
+          <a:lstStyle/>
+          <a:p>
+            <a:pPr algn="ctr"/>
+            <a:r>
+              <a:rPr lang="en-IE" sz="5000" b="1" dirty="0"/>
+              <a:t>WebAPI</a:t>
+            </a:r>
+          </a:p>
+        </p:txBody>
+      </p:sp>
+      <p:cxnSp>
+        <p:nvCxnSpPr>
+          <p:cNvPr id="10" name="Straight Arrow Connector 9">
+            <a:extLst>
+              <a:ext uri="{FF2B5EF4-FFF2-40B4-BE49-F238E27FC236}">
+                <a16:creationId xmlns:a16="http://schemas.microsoft.com/office/drawing/2014/main" id="{A13AE9F3-FFF9-0A66-E1B1-454F654EEA6F}"/>
+              </a:ext>
+            </a:extLst>
+          </p:cNvPr>
+          <p:cNvCxnSpPr>
+            <a:cxnSpLocks/>
+          </p:cNvCxnSpPr>
+          <p:nvPr/>
+        </p:nvCxnSpPr>
+        <p:spPr>
+          <a:xfrm rot="10800000" flipV="1">
+            <a:off x="5233286" y="5226359"/>
+            <a:ext cx="898631" cy="0"/>
+          </a:xfrm>
+          <a:prstGeom prst="straightConnector1">
+            <a:avLst/>
+          </a:prstGeom>
+          <a:ln w="76200">
+            <a:tailEnd type="triangle"/>
+          </a:ln>
+        </p:spPr>
+        <p:style>
+          <a:lnRef idx="3">
+            <a:schemeClr val="accent6"/>
+          </a:lnRef>
+          <a:fillRef idx="0">
+            <a:schemeClr val="accent6"/>
+          </a:fillRef>
+          <a:effectRef idx="2">
+            <a:schemeClr val="accent6"/>
+          </a:effectRef>
+          <a:fontRef idx="minor">
+            <a:schemeClr val="tx1"/>
+          </a:fontRef>
+        </p:style>
+      </p:cxnSp>
     </p:spTree>
     <p:extLst>
       <p:ext uri="{BB962C8B-B14F-4D97-AF65-F5344CB8AC3E}">
@@ -22005,7 +22243,7 @@
         </p:nvGrpSpPr>
         <p:grpSpPr>
           <a:xfrm>
-            <a:off x="495300" y="2324100"/>
+            <a:off x="1574800" y="2324100"/>
             <a:ext cx="28651200" cy="19011900"/>
             <a:chOff x="2954252" y="4412464"/>
             <a:chExt cx="22146609" cy="14574831"/>
@@ -22095,7 +22333,7 @@
           <p:spPr>
             <a:xfrm>
               <a:off x="4546472" y="4412464"/>
-              <a:ext cx="17035943" cy="1015663"/>
+              <a:ext cx="17035943" cy="778624"/>
             </a:xfrm>
             <a:prstGeom prst="rect">
               <a:avLst/>
@@ -23386,14 +23624,14 @@
           <p:nvPr>
             <p:extLst>
               <p:ext uri="{D42A27DB-BD31-4B8C-83A1-F6EECF244321}">
-                <p14:modId xmlns:p14="http://schemas.microsoft.com/office/powerpoint/2010/main" val="1756627178"/>
+                <p14:modId xmlns:p14="http://schemas.microsoft.com/office/powerpoint/2010/main" val="3742264284"/>
               </p:ext>
             </p:extLst>
           </p:nvPr>
         </p:nvGraphicFramePr>
         <p:xfrm>
-          <a:off x="152400" y="2057400"/>
-          <a:ext cx="29935487" cy="19316700"/>
+          <a:off x="1231902" y="293076"/>
+          <a:ext cx="29935487" cy="22783802"/>
         </p:xfrm>
         <a:graphic>
           <a:graphicData uri="http://schemas.openxmlformats.org/drawingml/2006/table">
@@ -25553,6 +25791,505 @@
                 <a:extLst>
                   <a:ext uri="{0D108BD9-81ED-4DB2-BD59-A6C34878D82A}">
                     <a16:rowId xmlns:a16="http://schemas.microsoft.com/office/drawing/2014/main" val="1080304840"/>
+                  </a:ext>
+                </a:extLst>
+              </a:tr>
+              <a:tr h="1733551">
+                <a:tc rowSpan="2">
+                  <a:txBody>
+                    <a:bodyPr/>
+                    <a:lstStyle/>
+                    <a:p>
+                      <a:pPr algn="ctr"/>
+                      <a:r>
+                        <a:rPr lang="en-IE" sz="6000" b="1" dirty="0"/>
+                        <a:t>Web-API</a:t>
+                      </a:r>
+                    </a:p>
+                  </a:txBody>
+                  <a:tcPr anchor="ctr">
+                    <a:lnL w="57150" cap="flat" cmpd="sng" algn="ctr">
+                      <a:solidFill>
+                        <a:schemeClr val="tx1"/>
+                      </a:solidFill>
+                      <a:prstDash val="solid"/>
+                      <a:round/>
+                      <a:headEnd type="none" w="med" len="med"/>
+                      <a:tailEnd type="none" w="med" len="med"/>
+                    </a:lnL>
+                    <a:lnR w="57150" cap="flat" cmpd="sng" algn="ctr">
+                      <a:solidFill>
+                        <a:schemeClr val="tx1"/>
+                      </a:solidFill>
+                      <a:prstDash val="solid"/>
+                      <a:round/>
+                      <a:headEnd type="none" w="med" len="med"/>
+                      <a:tailEnd type="none" w="med" len="med"/>
+                    </a:lnR>
+                    <a:lnT w="57150" cap="flat" cmpd="sng" algn="ctr">
+                      <a:solidFill>
+                        <a:schemeClr val="tx1"/>
+                      </a:solidFill>
+                      <a:prstDash val="solid"/>
+                      <a:round/>
+                      <a:headEnd type="none" w="med" len="med"/>
+                      <a:tailEnd type="none" w="med" len="med"/>
+                    </a:lnT>
+                    <a:lnB w="57150" cap="flat" cmpd="sng" algn="ctr">
+                      <a:solidFill>
+                        <a:schemeClr val="tx1"/>
+                      </a:solidFill>
+                      <a:prstDash val="solid"/>
+                      <a:round/>
+                      <a:headEnd type="none" w="med" len="med"/>
+                      <a:tailEnd type="none" w="med" len="med"/>
+                    </a:lnB>
+                  </a:tcPr>
+                </a:tc>
+                <a:tc>
+                  <a:txBody>
+                    <a:bodyPr/>
+                    <a:lstStyle/>
+                    <a:p>
+                      <a:pPr algn="ctr"/>
+                      <a:r>
+                        <a:rPr lang="en-IE" sz="4400" b="1" dirty="0"/>
+                        <a:t>Port</a:t>
+                      </a:r>
+                    </a:p>
+                  </a:txBody>
+                  <a:tcPr anchor="ctr">
+                    <a:lnL w="57150" cap="flat" cmpd="sng" algn="ctr">
+                      <a:solidFill>
+                        <a:schemeClr val="tx1"/>
+                      </a:solidFill>
+                      <a:prstDash val="solid"/>
+                      <a:round/>
+                      <a:headEnd type="none" w="med" len="med"/>
+                      <a:tailEnd type="none" w="med" len="med"/>
+                    </a:lnL>
+                    <a:lnR w="57150" cap="flat" cmpd="sng" algn="ctr">
+                      <a:solidFill>
+                        <a:schemeClr val="tx1"/>
+                      </a:solidFill>
+                      <a:prstDash val="solid"/>
+                      <a:round/>
+                      <a:headEnd type="none" w="med" len="med"/>
+                      <a:tailEnd type="none" w="med" len="med"/>
+                    </a:lnR>
+                    <a:lnT w="57150" cap="flat" cmpd="sng" algn="ctr">
+                      <a:solidFill>
+                        <a:schemeClr val="tx1"/>
+                      </a:solidFill>
+                      <a:prstDash val="solid"/>
+                      <a:round/>
+                      <a:headEnd type="none" w="med" len="med"/>
+                      <a:tailEnd type="none" w="med" len="med"/>
+                    </a:lnT>
+                    <a:lnB w="57150" cap="flat" cmpd="sng" algn="ctr">
+                      <a:solidFill>
+                        <a:schemeClr val="tx1"/>
+                      </a:solidFill>
+                      <a:prstDash val="solid"/>
+                      <a:round/>
+                      <a:headEnd type="none" w="med" len="med"/>
+                      <a:tailEnd type="none" w="med" len="med"/>
+                    </a:lnB>
+                  </a:tcPr>
+                </a:tc>
+                <a:tc>
+                  <a:txBody>
+                    <a:bodyPr/>
+                    <a:lstStyle/>
+                    <a:p>
+                      <a:pPr algn="ctr"/>
+                      <a:r>
+                        <a:rPr lang="en-IE" sz="4400" dirty="0"/>
+                        <a:t>tasktide web-api server  port</a:t>
+                      </a:r>
+                    </a:p>
+                  </a:txBody>
+                  <a:tcPr anchor="ctr">
+                    <a:lnL w="57150" cap="flat" cmpd="sng" algn="ctr">
+                      <a:solidFill>
+                        <a:schemeClr val="tx1"/>
+                      </a:solidFill>
+                      <a:prstDash val="solid"/>
+                      <a:round/>
+                      <a:headEnd type="none" w="med" len="med"/>
+                      <a:tailEnd type="none" w="med" len="med"/>
+                    </a:lnL>
+                    <a:lnR w="57150" cap="flat" cmpd="sng" algn="ctr">
+                      <a:solidFill>
+                        <a:schemeClr val="tx1"/>
+                      </a:solidFill>
+                      <a:prstDash val="solid"/>
+                      <a:round/>
+                      <a:headEnd type="none" w="med" len="med"/>
+                      <a:tailEnd type="none" w="med" len="med"/>
+                    </a:lnR>
+                    <a:lnT w="57150" cap="flat" cmpd="sng" algn="ctr">
+                      <a:solidFill>
+                        <a:schemeClr val="tx1"/>
+                      </a:solidFill>
+                      <a:prstDash val="solid"/>
+                      <a:round/>
+                      <a:headEnd type="none" w="med" len="med"/>
+                      <a:tailEnd type="none" w="med" len="med"/>
+                    </a:lnT>
+                    <a:lnB w="57150" cap="flat" cmpd="sng" algn="ctr">
+                      <a:solidFill>
+                        <a:schemeClr val="tx1"/>
+                      </a:solidFill>
+                      <a:prstDash val="solid"/>
+                      <a:round/>
+                      <a:headEnd type="none" w="med" len="med"/>
+                      <a:tailEnd type="none" w="med" len="med"/>
+                    </a:lnB>
+                  </a:tcPr>
+                </a:tc>
+                <a:tc>
+                  <a:txBody>
+                    <a:bodyPr/>
+                    <a:lstStyle/>
+                    <a:p>
+                      <a:pPr algn="ctr"/>
+                      <a:r>
+                        <a:rPr lang="en-IE" sz="4400" dirty="0"/>
+                        <a:t>8080</a:t>
+                      </a:r>
+                    </a:p>
+                  </a:txBody>
+                  <a:tcPr anchor="ctr">
+                    <a:lnL w="57150" cap="flat" cmpd="sng" algn="ctr">
+                      <a:solidFill>
+                        <a:schemeClr val="tx1"/>
+                      </a:solidFill>
+                      <a:prstDash val="solid"/>
+                      <a:round/>
+                      <a:headEnd type="none" w="med" len="med"/>
+                      <a:tailEnd type="none" w="med" len="med"/>
+                    </a:lnL>
+                    <a:lnR w="57150" cap="flat" cmpd="sng" algn="ctr">
+                      <a:solidFill>
+                        <a:schemeClr val="tx1"/>
+                      </a:solidFill>
+                      <a:prstDash val="solid"/>
+                      <a:round/>
+                      <a:headEnd type="none" w="med" len="med"/>
+                      <a:tailEnd type="none" w="med" len="med"/>
+                    </a:lnR>
+                    <a:lnT w="57150" cap="flat" cmpd="sng" algn="ctr">
+                      <a:solidFill>
+                        <a:schemeClr val="tx1"/>
+                      </a:solidFill>
+                      <a:prstDash val="solid"/>
+                      <a:round/>
+                      <a:headEnd type="none" w="med" len="med"/>
+                      <a:tailEnd type="none" w="med" len="med"/>
+                    </a:lnT>
+                    <a:lnB w="57150" cap="flat" cmpd="sng" algn="ctr">
+                      <a:solidFill>
+                        <a:schemeClr val="tx1"/>
+                      </a:solidFill>
+                      <a:prstDash val="solid"/>
+                      <a:round/>
+                      <a:headEnd type="none" w="med" len="med"/>
+                      <a:tailEnd type="none" w="med" len="med"/>
+                    </a:lnB>
+                  </a:tcPr>
+                </a:tc>
+                <a:tc>
+                  <a:txBody>
+                    <a:bodyPr/>
+                    <a:lstStyle/>
+                    <a:p>
+                      <a:pPr algn="ctr"/>
+                      <a:r>
+                        <a:rPr lang="en-IE" sz="4400" dirty="0"/>
+                        <a:t>Port of web server</a:t>
+                      </a:r>
+                    </a:p>
+                  </a:txBody>
+                  <a:tcPr anchor="ctr">
+                    <a:lnL w="57150" cap="flat" cmpd="sng" algn="ctr">
+                      <a:solidFill>
+                        <a:schemeClr val="tx1"/>
+                      </a:solidFill>
+                      <a:prstDash val="solid"/>
+                      <a:round/>
+                      <a:headEnd type="none" w="med" len="med"/>
+                      <a:tailEnd type="none" w="med" len="med"/>
+                    </a:lnL>
+                    <a:lnR w="57150" cap="flat" cmpd="sng" algn="ctr">
+                      <a:solidFill>
+                        <a:schemeClr val="tx1"/>
+                      </a:solidFill>
+                      <a:prstDash val="solid"/>
+                      <a:round/>
+                      <a:headEnd type="none" w="med" len="med"/>
+                      <a:tailEnd type="none" w="med" len="med"/>
+                    </a:lnR>
+                    <a:lnT w="57150" cap="flat" cmpd="sng" algn="ctr">
+                      <a:solidFill>
+                        <a:schemeClr val="tx1"/>
+                      </a:solidFill>
+                      <a:prstDash val="solid"/>
+                      <a:round/>
+                      <a:headEnd type="none" w="med" len="med"/>
+                      <a:tailEnd type="none" w="med" len="med"/>
+                    </a:lnT>
+                    <a:lnB w="57150" cap="flat" cmpd="sng" algn="ctr">
+                      <a:solidFill>
+                        <a:schemeClr val="tx1"/>
+                      </a:solidFill>
+                      <a:prstDash val="solid"/>
+                      <a:round/>
+                      <a:headEnd type="none" w="med" len="med"/>
+                      <a:tailEnd type="none" w="med" len="med"/>
+                    </a:lnB>
+                  </a:tcPr>
+                </a:tc>
+                <a:extLst>
+                  <a:ext uri="{0D108BD9-81ED-4DB2-BD59-A6C34878D82A}">
+                    <a16:rowId xmlns:a16="http://schemas.microsoft.com/office/drawing/2014/main" val="1181758954"/>
+                  </a:ext>
+                </a:extLst>
+              </a:tr>
+              <a:tr h="1733551">
+                <a:tc vMerge="1">
+                  <a:txBody>
+                    <a:bodyPr/>
+                    <a:lstStyle/>
+                    <a:p>
+                      <a:endParaRPr lang="en-IE"/>
+                    </a:p>
+                  </a:txBody>
+                  <a:tcPr/>
+                </a:tc>
+                <a:tc>
+                  <a:txBody>
+                    <a:bodyPr/>
+                    <a:lstStyle/>
+                    <a:p>
+                      <a:pPr algn="ctr"/>
+                      <a:r>
+                        <a:rPr lang="en-IE" sz="4400" b="1" dirty="0"/>
+                        <a:t>Base Path</a:t>
+                      </a:r>
+                    </a:p>
+                  </a:txBody>
+                  <a:tcPr anchor="ctr">
+                    <a:lnL w="57150" cap="flat" cmpd="sng" algn="ctr">
+                      <a:solidFill>
+                        <a:schemeClr val="tx1"/>
+                      </a:solidFill>
+                      <a:prstDash val="solid"/>
+                      <a:round/>
+                      <a:headEnd type="none" w="med" len="med"/>
+                      <a:tailEnd type="none" w="med" len="med"/>
+                    </a:lnL>
+                    <a:lnR w="57150" cap="flat" cmpd="sng" algn="ctr">
+                      <a:solidFill>
+                        <a:schemeClr val="tx1"/>
+                      </a:solidFill>
+                      <a:prstDash val="solid"/>
+                      <a:round/>
+                      <a:headEnd type="none" w="med" len="med"/>
+                      <a:tailEnd type="none" w="med" len="med"/>
+                    </a:lnR>
+                    <a:lnT w="57150" cap="flat" cmpd="sng" algn="ctr">
+                      <a:solidFill>
+                        <a:schemeClr val="tx1"/>
+                      </a:solidFill>
+                      <a:prstDash val="solid"/>
+                      <a:round/>
+                      <a:headEnd type="none" w="med" len="med"/>
+                      <a:tailEnd type="none" w="med" len="med"/>
+                    </a:lnT>
+                    <a:lnB w="57150" cap="flat" cmpd="sng" algn="ctr">
+                      <a:solidFill>
+                        <a:schemeClr val="tx1"/>
+                      </a:solidFill>
+                      <a:prstDash val="solid"/>
+                      <a:round/>
+                      <a:headEnd type="none" w="med" len="med"/>
+                      <a:tailEnd type="none" w="med" len="med"/>
+                    </a:lnB>
+                  </a:tcPr>
+                </a:tc>
+                <a:tc>
+                  <a:txBody>
+                    <a:bodyPr/>
+                    <a:lstStyle/>
+                    <a:p>
+                      <a:pPr algn="ctr"/>
+                      <a:r>
+                        <a:rPr lang="en-IE" sz="4400" dirty="0"/>
+                        <a:t>tasktide web-api server base-path</a:t>
+                      </a:r>
+                    </a:p>
+                  </a:txBody>
+                  <a:tcPr anchor="ctr">
+                    <a:lnL w="57150" cap="flat" cmpd="sng" algn="ctr">
+                      <a:solidFill>
+                        <a:schemeClr val="tx1"/>
+                      </a:solidFill>
+                      <a:prstDash val="solid"/>
+                      <a:round/>
+                      <a:headEnd type="none" w="med" len="med"/>
+                      <a:tailEnd type="none" w="med" len="med"/>
+                    </a:lnL>
+                    <a:lnR w="57150" cap="flat" cmpd="sng" algn="ctr">
+                      <a:solidFill>
+                        <a:schemeClr val="tx1"/>
+                      </a:solidFill>
+                      <a:prstDash val="solid"/>
+                      <a:round/>
+                      <a:headEnd type="none" w="med" len="med"/>
+                      <a:tailEnd type="none" w="med" len="med"/>
+                    </a:lnR>
+                    <a:lnT w="57150" cap="flat" cmpd="sng" algn="ctr">
+                      <a:solidFill>
+                        <a:schemeClr val="tx1"/>
+                      </a:solidFill>
+                      <a:prstDash val="solid"/>
+                      <a:round/>
+                      <a:headEnd type="none" w="med" len="med"/>
+                      <a:tailEnd type="none" w="med" len="med"/>
+                    </a:lnT>
+                    <a:lnB w="57150" cap="flat" cmpd="sng" algn="ctr">
+                      <a:solidFill>
+                        <a:schemeClr val="tx1"/>
+                      </a:solidFill>
+                      <a:prstDash val="solid"/>
+                      <a:round/>
+                      <a:headEnd type="none" w="med" len="med"/>
+                      <a:tailEnd type="none" w="med" len="med"/>
+                    </a:lnB>
+                  </a:tcPr>
+                </a:tc>
+                <a:tc>
+                  <a:txBody>
+                    <a:bodyPr/>
+                    <a:lstStyle/>
+                    <a:p>
+                      <a:pPr algn="ctr"/>
+                      <a:r>
+                        <a:rPr lang="en-IE" sz="4400" dirty="0"/>
+                        <a:t>tasktide</a:t>
+                      </a:r>
+                    </a:p>
+                  </a:txBody>
+                  <a:tcPr anchor="ctr">
+                    <a:lnL w="57150" cap="flat" cmpd="sng" algn="ctr">
+                      <a:solidFill>
+                        <a:schemeClr val="tx1"/>
+                      </a:solidFill>
+                      <a:prstDash val="solid"/>
+                      <a:round/>
+                      <a:headEnd type="none" w="med" len="med"/>
+                      <a:tailEnd type="none" w="med" len="med"/>
+                    </a:lnL>
+                    <a:lnR w="57150" cap="flat" cmpd="sng" algn="ctr">
+                      <a:solidFill>
+                        <a:schemeClr val="tx1"/>
+                      </a:solidFill>
+                      <a:prstDash val="solid"/>
+                      <a:round/>
+                      <a:headEnd type="none" w="med" len="med"/>
+                      <a:tailEnd type="none" w="med" len="med"/>
+                    </a:lnR>
+                    <a:lnT w="57150" cap="flat" cmpd="sng" algn="ctr">
+                      <a:solidFill>
+                        <a:schemeClr val="tx1"/>
+                      </a:solidFill>
+                      <a:prstDash val="solid"/>
+                      <a:round/>
+                      <a:headEnd type="none" w="med" len="med"/>
+                      <a:tailEnd type="none" w="med" len="med"/>
+                    </a:lnT>
+                    <a:lnB w="57150" cap="flat" cmpd="sng" algn="ctr">
+                      <a:solidFill>
+                        <a:schemeClr val="tx1"/>
+                      </a:solidFill>
+                      <a:prstDash val="solid"/>
+                      <a:round/>
+                      <a:headEnd type="none" w="med" len="med"/>
+                      <a:tailEnd type="none" w="med" len="med"/>
+                    </a:lnB>
+                  </a:tcPr>
+                </a:tc>
+                <a:tc>
+                  <a:txBody>
+                    <a:bodyPr/>
+                    <a:lstStyle/>
+                    <a:p>
+                      <a:pPr marL="0" marR="0" lvl="0" indent="0" algn="ctr" defTabSz="3024012" rtl="0" eaLnBrk="1" fontAlgn="auto" latinLnBrk="0" hangingPunct="1">
+                        <a:lnSpc>
+                          <a:spcPct val="100000"/>
+                        </a:lnSpc>
+                        <a:spcBef>
+                          <a:spcPts val="0"/>
+                        </a:spcBef>
+                        <a:spcAft>
+                          <a:spcPts val="0"/>
+                        </a:spcAft>
+                        <a:buClrTx/>
+                        <a:buSzTx/>
+                        <a:buFontTx/>
+                        <a:buNone/>
+                        <a:tabLst/>
+                        <a:defRPr/>
+                      </a:pPr>
+                      <a:r>
+                        <a:rPr lang="en-IE" sz="4400" dirty="0"/>
+                        <a:t>Path of web server</a:t>
+                      </a:r>
+                    </a:p>
+                  </a:txBody>
+                  <a:tcPr anchor="ctr">
+                    <a:lnL w="57150" cap="flat" cmpd="sng" algn="ctr">
+                      <a:solidFill>
+                        <a:schemeClr val="tx1"/>
+                      </a:solidFill>
+                      <a:prstDash val="solid"/>
+                      <a:round/>
+                      <a:headEnd type="none" w="med" len="med"/>
+                      <a:tailEnd type="none" w="med" len="med"/>
+                    </a:lnL>
+                    <a:lnR w="57150" cap="flat" cmpd="sng" algn="ctr">
+                      <a:solidFill>
+                        <a:schemeClr val="tx1"/>
+                      </a:solidFill>
+                      <a:prstDash val="solid"/>
+                      <a:round/>
+                      <a:headEnd type="none" w="med" len="med"/>
+                      <a:tailEnd type="none" w="med" len="med"/>
+                    </a:lnR>
+                    <a:lnT w="57150" cap="flat" cmpd="sng" algn="ctr">
+                      <a:solidFill>
+                        <a:schemeClr val="tx1"/>
+                      </a:solidFill>
+                      <a:prstDash val="solid"/>
+                      <a:round/>
+                      <a:headEnd type="none" w="med" len="med"/>
+                      <a:tailEnd type="none" w="med" len="med"/>
+                    </a:lnT>
+                    <a:lnB w="57150" cap="flat" cmpd="sng" algn="ctr">
+                      <a:solidFill>
+                        <a:schemeClr val="tx1"/>
+                      </a:solidFill>
+                      <a:prstDash val="solid"/>
+                      <a:round/>
+                      <a:headEnd type="none" w="med" len="med"/>
+                      <a:tailEnd type="none" w="med" len="med"/>
+                    </a:lnB>
+                  </a:tcPr>
+                </a:tc>
+                <a:extLst>
+                  <a:ext uri="{0D108BD9-81ED-4DB2-BD59-A6C34878D82A}">
+                    <a16:rowId xmlns:a16="http://schemas.microsoft.com/office/drawing/2014/main" val="4119587811"/>
                   </a:ext>
                 </a:extLst>
               </a:tr>
@@ -26091,7 +26828,7 @@
         </p:nvSpPr>
         <p:spPr>
           <a:xfrm>
-            <a:off x="1333500" y="495301"/>
+            <a:off x="2413000" y="495301"/>
             <a:ext cx="26860500" cy="4384842"/>
           </a:xfrm>
         </p:spPr>
@@ -26128,7 +26865,7 @@
           </p:nvPr>
         </p:nvGraphicFramePr>
         <p:xfrm>
-          <a:off x="3009900" y="5718343"/>
+          <a:off x="4089400" y="5718343"/>
           <a:ext cx="24841200" cy="16347906"/>
         </p:xfrm>
         <a:graphic>
@@ -26185,7 +26922,7 @@
         </p:nvSpPr>
         <p:spPr>
           <a:xfrm>
-            <a:off x="2116326" y="522668"/>
+            <a:off x="3195826" y="522668"/>
             <a:ext cx="26082248" cy="1674936"/>
           </a:xfrm>
         </p:spPr>
@@ -26217,7 +26954,7 @@
         </p:nvGrpSpPr>
         <p:grpSpPr>
           <a:xfrm>
-            <a:off x="-289708" y="3104860"/>
+            <a:off x="789792" y="3104860"/>
             <a:ext cx="30692530" cy="19006988"/>
             <a:chOff x="-289708" y="2633807"/>
             <a:chExt cx="30692530" cy="19006988"/>
@@ -26683,10 +27420,10 @@
           </p:nvGrpSpPr>
           <p:grpSpPr>
             <a:xfrm>
-              <a:off x="12017069" y="5651408"/>
-              <a:ext cx="7710947" cy="499728"/>
+              <a:off x="12017069" y="5651409"/>
+              <a:ext cx="7710947" cy="523220"/>
               <a:chOff x="914400" y="4442816"/>
-              <a:chExt cx="9048750" cy="624453"/>
+              <a:chExt cx="9048750" cy="653808"/>
             </a:xfrm>
           </p:grpSpPr>
           <p:sp>
@@ -26704,7 +27441,7 @@
             <p:spPr>
               <a:xfrm>
                 <a:off x="914400" y="4442816"/>
-                <a:ext cx="9048750" cy="554636"/>
+                <a:ext cx="9048750" cy="653808"/>
               </a:xfrm>
               <a:prstGeom prst="rect">
                 <a:avLst/>
@@ -27073,9 +27810,9 @@
             <p:grpSpPr>
               <a:xfrm>
                 <a:off x="12515850" y="4385666"/>
-                <a:ext cx="9048750" cy="665187"/>
+                <a:ext cx="9048750" cy="700125"/>
                 <a:chOff x="914400" y="4442816"/>
-                <a:chExt cx="9048750" cy="665187"/>
+                <a:chExt cx="9048750" cy="700125"/>
               </a:xfrm>
             </p:grpSpPr>
             <p:sp>
@@ -27093,7 +27830,7 @@
               <p:spPr>
                 <a:xfrm>
                   <a:off x="914400" y="4442816"/>
-                  <a:ext cx="9048750" cy="554636"/>
+                  <a:ext cx="9048750" cy="700125"/>
                 </a:xfrm>
                 <a:prstGeom prst="rect">
                   <a:avLst/>
@@ -27957,7 +28694,7 @@
               <p:spPr>
                 <a:xfrm>
                   <a:off x="914400" y="4442816"/>
-                  <a:ext cx="9048750" cy="554636"/>
+                  <a:ext cx="9048750" cy="623124"/>
                 </a:xfrm>
                 <a:prstGeom prst="rect">
                   <a:avLst/>
@@ -28235,7 +28972,7 @@
               <p:spPr>
                 <a:xfrm>
                   <a:off x="914400" y="4442816"/>
-                  <a:ext cx="9048750" cy="523220"/>
+                  <a:ext cx="9048750" cy="686866"/>
                 </a:xfrm>
                 <a:prstGeom prst="rect">
                   <a:avLst/>
@@ -28532,7 +29269,7 @@
               <p:spPr>
                 <a:xfrm>
                   <a:off x="914400" y="4442816"/>
-                  <a:ext cx="9048750" cy="554636"/>
+                  <a:ext cx="9048750" cy="673511"/>
                 </a:xfrm>
                 <a:prstGeom prst="rect">
                   <a:avLst/>

--- a/tasktide/docs/Diagrams/Diagrams.pptx
+++ b/tasktide/docs/Diagrams/Diagrams.pptx
@@ -9010,7 +9010,7 @@
           <a:p>
             <a:fld id="{CB18BCE7-0017-4B0C-A2FB-E6F7885367AC}" type="datetimeFigureOut">
               <a:rPr lang="en-IE" smtClean="0"/>
-              <a:t>15/08/2026</a:t>
+              <a:t>20/08/2026</a:t>
             </a:fld>
             <a:endParaRPr lang="en-IE"/>
           </a:p>
@@ -9514,7 +9514,7 @@
           <a:p>
             <a:fld id="{79C0705B-4870-4470-A32F-307AEE1697AB}" type="datetimeFigureOut">
               <a:rPr lang="en-IE" smtClean="0"/>
-              <a:t>15/08/2026</a:t>
+              <a:t>20/08/2026</a:t>
             </a:fld>
             <a:endParaRPr lang="en-IE"/>
           </a:p>
@@ -9684,7 +9684,7 @@
           <a:p>
             <a:fld id="{79C0705B-4870-4470-A32F-307AEE1697AB}" type="datetimeFigureOut">
               <a:rPr lang="en-IE" smtClean="0"/>
-              <a:t>15/08/2026</a:t>
+              <a:t>20/08/2026</a:t>
             </a:fld>
             <a:endParaRPr lang="en-IE"/>
           </a:p>
@@ -9864,7 +9864,7 @@
           <a:p>
             <a:fld id="{79C0705B-4870-4470-A32F-307AEE1697AB}" type="datetimeFigureOut">
               <a:rPr lang="en-IE" smtClean="0"/>
-              <a:t>15/08/2026</a:t>
+              <a:t>20/08/2026</a:t>
             </a:fld>
             <a:endParaRPr lang="en-IE"/>
           </a:p>
@@ -10034,7 +10034,7 @@
           <a:p>
             <a:fld id="{79C0705B-4870-4470-A32F-307AEE1697AB}" type="datetimeFigureOut">
               <a:rPr lang="en-IE" smtClean="0"/>
-              <a:t>15/08/2026</a:t>
+              <a:t>20/08/2026</a:t>
             </a:fld>
             <a:endParaRPr lang="en-IE"/>
           </a:p>
@@ -10280,7 +10280,7 @@
           <a:p>
             <a:fld id="{79C0705B-4870-4470-A32F-307AEE1697AB}" type="datetimeFigureOut">
               <a:rPr lang="en-IE" smtClean="0"/>
-              <a:t>15/08/2026</a:t>
+              <a:t>20/08/2026</a:t>
             </a:fld>
             <a:endParaRPr lang="en-IE"/>
           </a:p>
@@ -10512,7 +10512,7 @@
           <a:p>
             <a:fld id="{79C0705B-4870-4470-A32F-307AEE1697AB}" type="datetimeFigureOut">
               <a:rPr lang="en-IE" smtClean="0"/>
-              <a:t>15/08/2026</a:t>
+              <a:t>20/08/2026</a:t>
             </a:fld>
             <a:endParaRPr lang="en-IE"/>
           </a:p>
@@ -10879,7 +10879,7 @@
           <a:p>
             <a:fld id="{79C0705B-4870-4470-A32F-307AEE1697AB}" type="datetimeFigureOut">
               <a:rPr lang="en-IE" smtClean="0"/>
-              <a:t>15/08/2026</a:t>
+              <a:t>20/08/2026</a:t>
             </a:fld>
             <a:endParaRPr lang="en-IE"/>
           </a:p>
@@ -10997,7 +10997,7 @@
           <a:p>
             <a:fld id="{79C0705B-4870-4470-A32F-307AEE1697AB}" type="datetimeFigureOut">
               <a:rPr lang="en-IE" smtClean="0"/>
-              <a:t>15/08/2026</a:t>
+              <a:t>20/08/2026</a:t>
             </a:fld>
             <a:endParaRPr lang="en-IE"/>
           </a:p>
@@ -11092,7 +11092,7 @@
           <a:p>
             <a:fld id="{79C0705B-4870-4470-A32F-307AEE1697AB}" type="datetimeFigureOut">
               <a:rPr lang="en-IE" smtClean="0"/>
-              <a:t>15/08/2026</a:t>
+              <a:t>20/08/2026</a:t>
             </a:fld>
             <a:endParaRPr lang="en-IE"/>
           </a:p>
@@ -11369,7 +11369,7 @@
           <a:p>
             <a:fld id="{79C0705B-4870-4470-A32F-307AEE1697AB}" type="datetimeFigureOut">
               <a:rPr lang="en-IE" smtClean="0"/>
-              <a:t>15/08/2026</a:t>
+              <a:t>20/08/2026</a:t>
             </a:fld>
             <a:endParaRPr lang="en-IE"/>
           </a:p>
@@ -11626,7 +11626,7 @@
           <a:p>
             <a:fld id="{79C0705B-4870-4470-A32F-307AEE1697AB}" type="datetimeFigureOut">
               <a:rPr lang="en-IE" smtClean="0"/>
-              <a:t>15/08/2026</a:t>
+              <a:t>20/08/2026</a:t>
             </a:fld>
             <a:endParaRPr lang="en-IE"/>
           </a:p>
@@ -11839,7 +11839,7 @@
           <a:p>
             <a:fld id="{79C0705B-4870-4470-A32F-307AEE1697AB}" type="datetimeFigureOut">
               <a:rPr lang="en-IE" smtClean="0"/>
-              <a:t>15/08/2026</a:t>
+              <a:t>20/08/2026</a:t>
             </a:fld>
             <a:endParaRPr lang="en-IE"/>
           </a:p>
@@ -26935,7 +26935,7 @@
             <a:pPr algn="ctr"/>
             <a:r>
               <a:rPr lang="en-IE" b="1" i="1" dirty="0"/>
-              <a:t>Distributed Mutex Workflow</a:t>
+              <a:t>De-centralized Mutex Workflow</a:t>
             </a:r>
           </a:p>
         </p:txBody>

--- a/tasktide/docs/Diagrams/Diagrams.pptx
+++ b/tasktide/docs/Diagrams/Diagrams.pptx
@@ -5,20 +5,21 @@
     <p:sldMasterId id="2147483816" r:id="rId1"/>
   </p:sldMasterIdLst>
   <p:notesMasterIdLst>
-    <p:notesMasterId r:id="rId13"/>
+    <p:notesMasterId r:id="rId14"/>
   </p:notesMasterIdLst>
   <p:sldIdLst>
     <p:sldId id="264" r:id="rId2"/>
     <p:sldId id="262" r:id="rId3"/>
     <p:sldId id="259" r:id="rId4"/>
     <p:sldId id="266" r:id="rId5"/>
-    <p:sldId id="256" r:id="rId6"/>
-    <p:sldId id="261" r:id="rId7"/>
-    <p:sldId id="265" r:id="rId8"/>
-    <p:sldId id="263" r:id="rId9"/>
-    <p:sldId id="267" r:id="rId10"/>
-    <p:sldId id="260" r:id="rId11"/>
-    <p:sldId id="258" r:id="rId12"/>
+    <p:sldId id="268" r:id="rId6"/>
+    <p:sldId id="256" r:id="rId7"/>
+    <p:sldId id="261" r:id="rId8"/>
+    <p:sldId id="265" r:id="rId9"/>
+    <p:sldId id="263" r:id="rId10"/>
+    <p:sldId id="267" r:id="rId11"/>
+    <p:sldId id="260" r:id="rId12"/>
+    <p:sldId id="258" r:id="rId13"/>
   </p:sldIdLst>
   <p:sldSz cx="32399288" cy="23399750"/>
   <p:notesSz cx="6858000" cy="9144000"/>
@@ -126,7 +127,7 @@
 </file>
 
 <file path=ppt/diagrams/colors1.xml><?xml version="1.0" encoding="utf-8"?>
-<dgm:colorsDef xmlns:dgm="http://schemas.openxmlformats.org/drawingml/2006/diagram" xmlns:a="http://schemas.openxmlformats.org/drawingml/2006/main" uniqueId="urn:microsoft.com/office/officeart/2005/8/colors/colorful1">
+<dgm:colorsDef xmlns:dgm="http://schemas.openxmlformats.org/drawingml/2006/diagram" xmlns:a="http://schemas.openxmlformats.org/drawingml/2006/main" uniqueId="urn:microsoft.com/office/officeart/2005/8/colors/colorful1#1">
   <dgm:title val=""/>
   <dgm:desc val=""/>
   <dgm:catLst>
@@ -1045,7 +1046,7 @@
 </file>
 
 <file path=ppt/diagrams/colors2.xml><?xml version="1.0" encoding="utf-8"?>
-<dgm:colorsDef xmlns:dgm="http://schemas.openxmlformats.org/drawingml/2006/diagram" xmlns:a="http://schemas.openxmlformats.org/drawingml/2006/main" uniqueId="urn:microsoft.com/office/officeart/2005/8/colors/accent1_2">
+<dgm:colorsDef xmlns:dgm="http://schemas.openxmlformats.org/drawingml/2006/diagram" xmlns:a="http://schemas.openxmlformats.org/drawingml/2006/main" uniqueId="urn:microsoft.com/office/officeart/2005/8/colors/accent1_2#1">
   <dgm:title val=""/>
   <dgm:desc val=""/>
   <dgm:catLst>
@@ -1795,7 +1796,7 @@
 <dgm:dataModel xmlns:dgm="http://schemas.openxmlformats.org/drawingml/2006/diagram" xmlns:a="http://schemas.openxmlformats.org/drawingml/2006/main">
   <dgm:ptLst>
     <dgm:pt modelId="{AD77AFE8-5B80-4FD9-ACBE-C7D752115AD9}" type="doc">
-      <dgm:prSet loTypeId="urn:microsoft.com/office/officeart/2009/layout/CircleArrowProcess" loCatId="cycle" qsTypeId="urn:microsoft.com/office/officeart/2005/8/quickstyle/3d1" qsCatId="3D" csTypeId="urn:microsoft.com/office/officeart/2005/8/colors/colorful1" csCatId="colorful" phldr="1"/>
+      <dgm:prSet loTypeId="urn:microsoft.com/office/officeart/2009/layout/CircleArrowProcess" loCatId="cycle" qsTypeId="urn:microsoft.com/office/officeart/2005/8/quickstyle/3d1#1" qsCatId="3D" csTypeId="urn:microsoft.com/office/officeart/2005/8/colors/colorful1#1" csCatId="colorful" phldr="1"/>
       <dgm:spPr/>
       <dgm:t>
         <a:bodyPr/>
@@ -2031,7 +2032,7 @@
 <dgm:dataModel xmlns:dgm="http://schemas.openxmlformats.org/drawingml/2006/diagram" xmlns:a="http://schemas.openxmlformats.org/drawingml/2006/main">
   <dgm:ptLst>
     <dgm:pt modelId="{7536D2AB-18D2-4540-86EF-97DAA68F47BD}" type="doc">
-      <dgm:prSet loTypeId="urn:microsoft.com/office/officeart/2005/8/layout/process4" loCatId="process" qsTypeId="urn:microsoft.com/office/officeart/2005/8/quickstyle/3d1" qsCatId="3D" csTypeId="urn:microsoft.com/office/officeart/2005/8/colors/accent1_2" csCatId="accent1" phldr="1"/>
+      <dgm:prSet loTypeId="urn:microsoft.com/office/officeart/2005/8/layout/process4" loCatId="process" qsTypeId="urn:microsoft.com/office/officeart/2005/8/quickstyle/3d1#2" qsCatId="3D" csTypeId="urn:microsoft.com/office/officeart/2005/8/colors/accent1_2#1" csCatId="accent1" phldr="1"/>
       <dgm:spPr/>
       <dgm:t>
         <a:bodyPr/>
@@ -2098,7 +2099,7 @@
         <a:p>
           <a:r>
             <a:rPr lang="en-IE" sz="4400" b="1" dirty="0"/>
-            <a:t>Bioinformatic workflows</a:t>
+            <a:t>Batch computing</a:t>
           </a:r>
         </a:p>
       </dgm:t>
@@ -2140,7 +2141,7 @@
         <a:p>
           <a:r>
             <a:rPr lang="en-IE" sz="4400" b="1" dirty="0"/>
-            <a:t>Validates workflow orchestration across pilots</a:t>
+            <a:t>Validates task orchestration across pilots</a:t>
           </a:r>
         </a:p>
       </dgm:t>
@@ -2435,7 +2436,7 @@
         <a:p>
           <a:r>
             <a:rPr lang="en-IE" sz="4400" b="1" dirty="0"/>
-            <a:t>Job environment               attached to tasks</a:t>
+            <a:t>Service operation execution</a:t>
           </a:r>
         </a:p>
       </dgm:t>
@@ -2477,7 +2478,7 @@
         <a:p>
           <a:r>
             <a:rPr lang="en-IE" sz="4400" b="1" dirty="0"/>
-            <a:t>Node label constraints</a:t>
+            <a:t>Workflow acquisition policy and REST integration</a:t>
           </a:r>
         </a:p>
       </dgm:t>
@@ -3554,7 +3555,7 @@
           </a:pPr>
           <a:r>
             <a:rPr lang="en-IE" sz="4400" b="1" kern="1200" dirty="0"/>
-            <a:t>Node label constraints</a:t>
+            <a:t>Workflow acquisition policy and REST integration</a:t>
           </a:r>
         </a:p>
       </dsp:txBody>
@@ -3903,7 +3904,7 @@
           </a:pPr>
           <a:r>
             <a:rPr lang="en-IE" sz="4400" b="1" kern="1200" dirty="0"/>
-            <a:t>Job environment               attached to tasks</a:t>
+            <a:t>Service operation execution</a:t>
           </a:r>
         </a:p>
       </dsp:txBody>
@@ -4092,7 +4093,7 @@
           </a:pPr>
           <a:r>
             <a:rPr lang="en-IE" sz="4400" b="1" kern="1200" dirty="0"/>
-            <a:t>Bioinformatic workflows</a:t>
+            <a:t>Batch computing</a:t>
           </a:r>
         </a:p>
       </dsp:txBody>
@@ -4172,7 +4173,7 @@
           </a:pPr>
           <a:r>
             <a:rPr lang="en-IE" sz="4400" b="1" kern="1200" dirty="0"/>
-            <a:t>Validates workflow orchestration across pilots</a:t>
+            <a:t>Validates task orchestration across pilots</a:t>
           </a:r>
         </a:p>
       </dsp:txBody>
@@ -6695,7 +6696,7 @@
 </file>
 
 <file path=ppt/diagrams/quickStyle1.xml><?xml version="1.0" encoding="utf-8"?>
-<dgm:styleDef xmlns:dgm="http://schemas.openxmlformats.org/drawingml/2006/diagram" xmlns:a="http://schemas.openxmlformats.org/drawingml/2006/main" uniqueId="urn:microsoft.com/office/officeart/2005/8/quickstyle/3d1">
+<dgm:styleDef xmlns:dgm="http://schemas.openxmlformats.org/drawingml/2006/diagram" xmlns:a="http://schemas.openxmlformats.org/drawingml/2006/main" uniqueId="urn:microsoft.com/office/officeart/2005/8/quickstyle/3d1#1">
   <dgm:title val=""/>
   <dgm:desc val=""/>
   <dgm:catLst>
@@ -7812,7 +7813,7 @@
 </file>
 
 <file path=ppt/diagrams/quickStyle2.xml><?xml version="1.0" encoding="utf-8"?>
-<dgm:styleDef xmlns:dgm="http://schemas.openxmlformats.org/drawingml/2006/diagram" xmlns:a="http://schemas.openxmlformats.org/drawingml/2006/main" uniqueId="urn:microsoft.com/office/officeart/2005/8/quickstyle/3d1">
+<dgm:styleDef xmlns:dgm="http://schemas.openxmlformats.org/drawingml/2006/diagram" xmlns:a="http://schemas.openxmlformats.org/drawingml/2006/main" uniqueId="urn:microsoft.com/office/officeart/2005/8/quickstyle/3d1#2">
   <dgm:title val=""/>
   <dgm:desc val=""/>
   <dgm:catLst>
@@ -9010,7 +9011,7 @@
           <a:p>
             <a:fld id="{CB18BCE7-0017-4B0C-A2FB-E6F7885367AC}" type="datetimeFigureOut">
               <a:rPr lang="en-IE" smtClean="0"/>
-              <a:t>20/08/2026</a:t>
+              <a:t>25/08/2026</a:t>
             </a:fld>
             <a:endParaRPr lang="en-IE"/>
           </a:p>
@@ -9364,7 +9365,7 @@
           <a:p>
             <a:fld id="{CA4F6FBF-C1CE-4F54-B4F6-DD96A3A70649}" type="slidenum">
               <a:rPr lang="en-IE" smtClean="0"/>
-              <a:t>9</a:t>
+              <a:t>10</a:t>
             </a:fld>
             <a:endParaRPr lang="en-IE"/>
           </a:p>
@@ -9514,7 +9515,7 @@
           <a:p>
             <a:fld id="{79C0705B-4870-4470-A32F-307AEE1697AB}" type="datetimeFigureOut">
               <a:rPr lang="en-IE" smtClean="0"/>
-              <a:t>20/08/2026</a:t>
+              <a:t>25/08/2026</a:t>
             </a:fld>
             <a:endParaRPr lang="en-IE"/>
           </a:p>
@@ -9684,7 +9685,7 @@
           <a:p>
             <a:fld id="{79C0705B-4870-4470-A32F-307AEE1697AB}" type="datetimeFigureOut">
               <a:rPr lang="en-IE" smtClean="0"/>
-              <a:t>20/08/2026</a:t>
+              <a:t>25/08/2026</a:t>
             </a:fld>
             <a:endParaRPr lang="en-IE"/>
           </a:p>
@@ -9864,7 +9865,7 @@
           <a:p>
             <a:fld id="{79C0705B-4870-4470-A32F-307AEE1697AB}" type="datetimeFigureOut">
               <a:rPr lang="en-IE" smtClean="0"/>
-              <a:t>20/08/2026</a:t>
+              <a:t>25/08/2026</a:t>
             </a:fld>
             <a:endParaRPr lang="en-IE"/>
           </a:p>
@@ -10034,7 +10035,7 @@
           <a:p>
             <a:fld id="{79C0705B-4870-4470-A32F-307AEE1697AB}" type="datetimeFigureOut">
               <a:rPr lang="en-IE" smtClean="0"/>
-              <a:t>20/08/2026</a:t>
+              <a:t>25/08/2026</a:t>
             </a:fld>
             <a:endParaRPr lang="en-IE"/>
           </a:p>
@@ -10280,7 +10281,7 @@
           <a:p>
             <a:fld id="{79C0705B-4870-4470-A32F-307AEE1697AB}" type="datetimeFigureOut">
               <a:rPr lang="en-IE" smtClean="0"/>
-              <a:t>20/08/2026</a:t>
+              <a:t>25/08/2026</a:t>
             </a:fld>
             <a:endParaRPr lang="en-IE"/>
           </a:p>
@@ -10512,7 +10513,7 @@
           <a:p>
             <a:fld id="{79C0705B-4870-4470-A32F-307AEE1697AB}" type="datetimeFigureOut">
               <a:rPr lang="en-IE" smtClean="0"/>
-              <a:t>20/08/2026</a:t>
+              <a:t>25/08/2026</a:t>
             </a:fld>
             <a:endParaRPr lang="en-IE"/>
           </a:p>
@@ -10879,7 +10880,7 @@
           <a:p>
             <a:fld id="{79C0705B-4870-4470-A32F-307AEE1697AB}" type="datetimeFigureOut">
               <a:rPr lang="en-IE" smtClean="0"/>
-              <a:t>20/08/2026</a:t>
+              <a:t>25/08/2026</a:t>
             </a:fld>
             <a:endParaRPr lang="en-IE"/>
           </a:p>
@@ -10997,7 +10998,7 @@
           <a:p>
             <a:fld id="{79C0705B-4870-4470-A32F-307AEE1697AB}" type="datetimeFigureOut">
               <a:rPr lang="en-IE" smtClean="0"/>
-              <a:t>20/08/2026</a:t>
+              <a:t>25/08/2026</a:t>
             </a:fld>
             <a:endParaRPr lang="en-IE"/>
           </a:p>
@@ -11092,7 +11093,7 @@
           <a:p>
             <a:fld id="{79C0705B-4870-4470-A32F-307AEE1697AB}" type="datetimeFigureOut">
               <a:rPr lang="en-IE" smtClean="0"/>
-              <a:t>20/08/2026</a:t>
+              <a:t>25/08/2026</a:t>
             </a:fld>
             <a:endParaRPr lang="en-IE"/>
           </a:p>
@@ -11369,7 +11370,7 @@
           <a:p>
             <a:fld id="{79C0705B-4870-4470-A32F-307AEE1697AB}" type="datetimeFigureOut">
               <a:rPr lang="en-IE" smtClean="0"/>
-              <a:t>20/08/2026</a:t>
+              <a:t>25/08/2026</a:t>
             </a:fld>
             <a:endParaRPr lang="en-IE"/>
           </a:p>
@@ -11626,7 +11627,7 @@
           <a:p>
             <a:fld id="{79C0705B-4870-4470-A32F-307AEE1697AB}" type="datetimeFigureOut">
               <a:rPr lang="en-IE" smtClean="0"/>
-              <a:t>20/08/2026</a:t>
+              <a:t>25/08/2026</a:t>
             </a:fld>
             <a:endParaRPr lang="en-IE"/>
           </a:p>
@@ -11839,7 +11840,7 @@
           <a:p>
             <a:fld id="{79C0705B-4870-4470-A32F-307AEE1697AB}" type="datetimeFigureOut">
               <a:rPr lang="en-IE" smtClean="0"/>
-              <a:t>20/08/2026</a:t>
+              <a:t>25/08/2026</a:t>
             </a:fld>
             <a:endParaRPr lang="en-IE"/>
           </a:p>
@@ -12673,6 +12674,3157 @@
       </p:grpSpPr>
       <p:sp>
         <p:nvSpPr>
+          <p:cNvPr id="2" name="Title 1">
+            <a:extLst>
+              <a:ext uri="{FF2B5EF4-FFF2-40B4-BE49-F238E27FC236}">
+                <a16:creationId xmlns:a16="http://schemas.microsoft.com/office/drawing/2014/main" id="{CF74D0AD-7D60-F80E-532B-CE9F849C1363}"/>
+              </a:ext>
+            </a:extLst>
+          </p:cNvPr>
+          <p:cNvSpPr>
+            <a:spLocks noGrp="1"/>
+          </p:cNvSpPr>
+          <p:nvPr>
+            <p:ph type="title"/>
+          </p:nvPr>
+        </p:nvSpPr>
+        <p:spPr>
+          <a:xfrm>
+            <a:off x="3195826" y="522668"/>
+            <a:ext cx="26082248" cy="1674936"/>
+          </a:xfrm>
+        </p:spPr>
+        <p:txBody>
+          <a:bodyPr>
+            <a:normAutofit fontScale="90000"/>
+          </a:bodyPr>
+          <a:lstStyle/>
+          <a:p>
+            <a:pPr algn="ctr"/>
+            <a:r>
+              <a:rPr lang="en-IE" b="1" i="1" dirty="0"/>
+              <a:t>De-centralized Mutex Workflow</a:t>
+            </a:r>
+          </a:p>
+        </p:txBody>
+      </p:sp>
+      <p:grpSp>
+        <p:nvGrpSpPr>
+          <p:cNvPr id="3" name="Group 2">
+            <a:extLst>
+              <a:ext uri="{FF2B5EF4-FFF2-40B4-BE49-F238E27FC236}">
+                <a16:creationId xmlns:a16="http://schemas.microsoft.com/office/drawing/2014/main" id="{E8319FDD-F96C-C6AC-4001-C3929F1ADE3A}"/>
+              </a:ext>
+            </a:extLst>
+          </p:cNvPr>
+          <p:cNvGrpSpPr/>
+          <p:nvPr/>
+        </p:nvGrpSpPr>
+        <p:grpSpPr>
+          <a:xfrm>
+            <a:off x="789792" y="3104860"/>
+            <a:ext cx="30692530" cy="19006988"/>
+            <a:chOff x="-289708" y="2633807"/>
+            <a:chExt cx="30692530" cy="19006988"/>
+          </a:xfrm>
+        </p:grpSpPr>
+        <p:sp>
+          <p:nvSpPr>
+            <p:cNvPr id="4" name="Rectangle: Rounded Corners 3">
+              <a:extLst>
+                <a:ext uri="{FF2B5EF4-FFF2-40B4-BE49-F238E27FC236}">
+                  <a16:creationId xmlns:a16="http://schemas.microsoft.com/office/drawing/2014/main" id="{6C7AF9FA-7438-5E00-C10B-5BDCEAA71E27}"/>
+                </a:ext>
+              </a:extLst>
+            </p:cNvPr>
+            <p:cNvSpPr/>
+            <p:nvPr/>
+          </p:nvSpPr>
+          <p:spPr>
+            <a:xfrm>
+              <a:off x="190500" y="3853678"/>
+              <a:ext cx="29851350" cy="6923211"/>
+            </a:xfrm>
+            <a:prstGeom prst="roundRect">
+              <a:avLst/>
+            </a:prstGeom>
+            <a:solidFill>
+              <a:srgbClr val="E6EAED"/>
+            </a:solidFill>
+            <a:ln w="57150">
+              <a:solidFill>
+                <a:schemeClr val="tx1"/>
+              </a:solidFill>
+            </a:ln>
+          </p:spPr>
+          <p:style>
+            <a:lnRef idx="2">
+              <a:schemeClr val="accent1">
+                <a:shade val="15000"/>
+              </a:schemeClr>
+            </a:lnRef>
+            <a:fillRef idx="1">
+              <a:schemeClr val="accent1"/>
+            </a:fillRef>
+            <a:effectRef idx="0">
+              <a:schemeClr val="accent1"/>
+            </a:effectRef>
+            <a:fontRef idx="minor">
+              <a:schemeClr val="lt1"/>
+            </a:fontRef>
+          </p:style>
+          <p:txBody>
+            <a:bodyPr rtlCol="0" anchor="ctr"/>
+            <a:lstStyle/>
+            <a:p>
+              <a:pPr algn="ctr"/>
+              <a:endParaRPr lang="en-IE" b="1" dirty="0"/>
+            </a:p>
+          </p:txBody>
+        </p:sp>
+        <p:sp>
+          <p:nvSpPr>
+            <p:cNvPr id="7" name="TextBox 6">
+              <a:extLst>
+                <a:ext uri="{FF2B5EF4-FFF2-40B4-BE49-F238E27FC236}">
+                  <a16:creationId xmlns:a16="http://schemas.microsoft.com/office/drawing/2014/main" id="{D9CDF24C-6E41-99FF-7335-D2539468AD92}"/>
+                </a:ext>
+              </a:extLst>
+            </p:cNvPr>
+            <p:cNvSpPr txBox="1"/>
+            <p:nvPr/>
+          </p:nvSpPr>
+          <p:spPr>
+            <a:xfrm>
+              <a:off x="423801" y="4004083"/>
+              <a:ext cx="9277350" cy="830997"/>
+            </a:xfrm>
+            <a:prstGeom prst="rect">
+              <a:avLst/>
+            </a:prstGeom>
+            <a:noFill/>
+          </p:spPr>
+          <p:txBody>
+            <a:bodyPr wrap="square" rtlCol="0">
+              <a:spAutoFit/>
+            </a:bodyPr>
+            <a:lstStyle/>
+            <a:p>
+              <a:pPr algn="ctr"/>
+              <a:r>
+                <a:rPr lang="en-IE" sz="4800" b="1" i="1" dirty="0"/>
+                <a:t>1). Enqueue Election Ballot</a:t>
+              </a:r>
+            </a:p>
+          </p:txBody>
+        </p:sp>
+        <p:grpSp>
+          <p:nvGrpSpPr>
+            <p:cNvPr id="22" name="Group 21">
+              <a:extLst>
+                <a:ext uri="{FF2B5EF4-FFF2-40B4-BE49-F238E27FC236}">
+                  <a16:creationId xmlns:a16="http://schemas.microsoft.com/office/drawing/2014/main" id="{10E05E10-B54C-55AA-F4C5-B5805511BA2C}"/>
+                </a:ext>
+              </a:extLst>
+            </p:cNvPr>
+            <p:cNvGrpSpPr/>
+            <p:nvPr/>
+          </p:nvGrpSpPr>
+          <p:grpSpPr>
+            <a:xfrm>
+              <a:off x="495300" y="5160508"/>
+              <a:ext cx="9277350" cy="5044882"/>
+              <a:chOff x="609600" y="4232468"/>
+              <a:chExt cx="9277350" cy="5044882"/>
+            </a:xfrm>
+          </p:grpSpPr>
+          <p:sp>
+            <p:nvSpPr>
+              <p:cNvPr id="6" name="Rectangle: Rounded Corners 5">
+                <a:extLst>
+                  <a:ext uri="{FF2B5EF4-FFF2-40B4-BE49-F238E27FC236}">
+                    <a16:creationId xmlns:a16="http://schemas.microsoft.com/office/drawing/2014/main" id="{A98F1016-6507-D524-42D1-7AB16F226F63}"/>
+                  </a:ext>
+                </a:extLst>
+              </p:cNvPr>
+              <p:cNvSpPr/>
+              <p:nvPr/>
+            </p:nvSpPr>
+            <p:spPr>
+              <a:xfrm>
+                <a:off x="609600" y="4232468"/>
+                <a:ext cx="9277350" cy="5044882"/>
+              </a:xfrm>
+              <a:prstGeom prst="roundRect">
+                <a:avLst/>
+              </a:prstGeom>
+              <a:gradFill flip="none" rotWithShape="1">
+                <a:gsLst>
+                  <a:gs pos="0">
+                    <a:schemeClr val="accent1">
+                      <a:shade val="30000"/>
+                      <a:satMod val="115000"/>
+                    </a:schemeClr>
+                  </a:gs>
+                  <a:gs pos="50000">
+                    <a:schemeClr val="accent1">
+                      <a:shade val="67500"/>
+                      <a:satMod val="115000"/>
+                    </a:schemeClr>
+                  </a:gs>
+                  <a:gs pos="100000">
+                    <a:schemeClr val="accent1">
+                      <a:shade val="100000"/>
+                      <a:satMod val="115000"/>
+                    </a:schemeClr>
+                  </a:gs>
+                </a:gsLst>
+                <a:lin ang="13500000" scaled="1"/>
+                <a:tileRect/>
+              </a:gradFill>
+              <a:ln w="57150">
+                <a:solidFill>
+                  <a:schemeClr val="tx1"/>
+                </a:solidFill>
+              </a:ln>
+            </p:spPr>
+            <p:style>
+              <a:lnRef idx="2">
+                <a:schemeClr val="accent1">
+                  <a:shade val="15000"/>
+                </a:schemeClr>
+              </a:lnRef>
+              <a:fillRef idx="1">
+                <a:schemeClr val="accent1"/>
+              </a:fillRef>
+              <a:effectRef idx="0">
+                <a:schemeClr val="accent1"/>
+              </a:effectRef>
+              <a:fontRef idx="minor">
+                <a:schemeClr val="lt1"/>
+              </a:fontRef>
+            </p:style>
+            <p:txBody>
+              <a:bodyPr rtlCol="0" anchor="ctr"/>
+              <a:lstStyle/>
+              <a:p>
+                <a:endParaRPr lang="en-IE" sz="3200" b="1" dirty="0"/>
+              </a:p>
+              <a:p>
+                <a:r>
+                  <a:rPr lang="en-IE" sz="3200" b="1" dirty="0"/>
+                  <a:t>  Mutex {</a:t>
+                </a:r>
+              </a:p>
+              <a:p>
+                <a:r>
+                  <a:rPr lang="en-IE" sz="3200" b="1" dirty="0"/>
+                  <a:t>         Id: &lt;Random UUID&gt;,</a:t>
+                </a:r>
+              </a:p>
+              <a:p>
+                <a:r>
+                  <a:rPr lang="en-IE" sz="3200" b="1" dirty="0"/>
+                  <a:t>         Time Stamp: &lt; EPOCH Time&gt;,</a:t>
+                </a:r>
+              </a:p>
+              <a:p>
+                <a:r>
+                  <a:rPr lang="en-IE" sz="3200" b="1" dirty="0"/>
+                  <a:t>         Lock File: &lt;Full File Path&gt;,</a:t>
+                </a:r>
+              </a:p>
+              <a:p>
+                <a:r>
+                  <a:rPr lang="en-IE" sz="3200" b="1" dirty="0"/>
+                  <a:t>         Election File: &lt;Full File Path&gt;,</a:t>
+                </a:r>
+              </a:p>
+              <a:p>
+                <a:r>
+                  <a:rPr lang="en-IE" sz="3200" b="1" dirty="0"/>
+                  <a:t>         Mutex State: &lt;INIT | WAIT | LOCKED&gt;</a:t>
+                </a:r>
+              </a:p>
+              <a:p>
+                <a:r>
+                  <a:rPr lang="en-IE" sz="3200" b="1" dirty="0"/>
+                  <a:t>  }</a:t>
+                </a:r>
+              </a:p>
+            </p:txBody>
+          </p:sp>
+          <p:grpSp>
+            <p:nvGrpSpPr>
+              <p:cNvPr id="13" name="Group 12">
+                <a:extLst>
+                  <a:ext uri="{FF2B5EF4-FFF2-40B4-BE49-F238E27FC236}">
+                    <a16:creationId xmlns:a16="http://schemas.microsoft.com/office/drawing/2014/main" id="{865AB9DE-E928-5C65-E445-AC34F60D20B4}"/>
+                  </a:ext>
+                </a:extLst>
+              </p:cNvPr>
+              <p:cNvGrpSpPr/>
+              <p:nvPr/>
+            </p:nvGrpSpPr>
+            <p:grpSpPr>
+              <a:xfrm>
+                <a:off x="609600" y="4385666"/>
+                <a:ext cx="9048750" cy="529234"/>
+                <a:chOff x="914400" y="4442816"/>
+                <a:chExt cx="9048750" cy="529234"/>
+              </a:xfrm>
+            </p:grpSpPr>
+            <p:sp>
+              <p:nvSpPr>
+                <p:cNvPr id="9" name="TextBox 8">
+                  <a:extLst>
+                    <a:ext uri="{FF2B5EF4-FFF2-40B4-BE49-F238E27FC236}">
+                      <a16:creationId xmlns:a16="http://schemas.microsoft.com/office/drawing/2014/main" id="{9D526A3C-335E-5F13-5100-FB52658BE261}"/>
+                    </a:ext>
+                  </a:extLst>
+                </p:cNvPr>
+                <p:cNvSpPr txBox="1"/>
+                <p:nvPr/>
+              </p:nvSpPr>
+              <p:spPr>
+                <a:xfrm>
+                  <a:off x="914400" y="4442816"/>
+                  <a:ext cx="9048750" cy="523220"/>
+                </a:xfrm>
+                <a:prstGeom prst="rect">
+                  <a:avLst/>
+                </a:prstGeom>
+                <a:noFill/>
+              </p:spPr>
+              <p:txBody>
+                <a:bodyPr wrap="square">
+                  <a:spAutoFit/>
+                </a:bodyPr>
+                <a:lstStyle/>
+                <a:p>
+                  <a:pPr algn="ctr"/>
+                  <a:r>
+                    <a:rPr lang="en-IE" sz="2800" b="1" dirty="0">
+                      <a:solidFill>
+                        <a:schemeClr val="bg1"/>
+                      </a:solidFill>
+                    </a:rPr>
+                    <a:t>1769689749-HostA-InstanceA.json</a:t>
+                  </a:r>
+                </a:p>
+              </p:txBody>
+            </p:sp>
+            <p:cxnSp>
+              <p:nvCxnSpPr>
+                <p:cNvPr id="11" name="Straight Connector 10">
+                  <a:extLst>
+                    <a:ext uri="{FF2B5EF4-FFF2-40B4-BE49-F238E27FC236}">
+                      <a16:creationId xmlns:a16="http://schemas.microsoft.com/office/drawing/2014/main" id="{794C1588-459B-325B-CB2C-AF92EF1C09F6}"/>
+                    </a:ext>
+                  </a:extLst>
+                </p:cNvPr>
+                <p:cNvCxnSpPr>
+                  <a:cxnSpLocks/>
+                </p:cNvCxnSpPr>
+                <p:nvPr/>
+              </p:nvCxnSpPr>
+              <p:spPr>
+                <a:xfrm>
+                  <a:off x="1412270" y="4972050"/>
+                  <a:ext cx="8112730" cy="0"/>
+                </a:xfrm>
+                <a:prstGeom prst="line">
+                  <a:avLst/>
+                </a:prstGeom>
+                <a:ln w="19050" cap="flat" cmpd="sng" algn="ctr">
+                  <a:solidFill>
+                    <a:schemeClr val="bg1"/>
+                  </a:solidFill>
+                  <a:prstDash val="dash"/>
+                  <a:round/>
+                  <a:headEnd type="none" w="med" len="med"/>
+                  <a:tailEnd type="none" w="med" len="med"/>
+                </a:ln>
+              </p:spPr>
+              <p:style>
+                <a:lnRef idx="0">
+                  <a:scrgbClr r="0" g="0" b="0"/>
+                </a:lnRef>
+                <a:fillRef idx="0">
+                  <a:scrgbClr r="0" g="0" b="0"/>
+                </a:fillRef>
+                <a:effectRef idx="0">
+                  <a:scrgbClr r="0" g="0" b="0"/>
+                </a:effectRef>
+                <a:fontRef idx="minor">
+                  <a:schemeClr val="tx1"/>
+                </a:fontRef>
+              </p:style>
+            </p:cxnSp>
+          </p:grpSp>
+        </p:grpSp>
+        <p:sp>
+          <p:nvSpPr>
+            <p:cNvPr id="15" name="TextBox 14">
+              <a:extLst>
+                <a:ext uri="{FF2B5EF4-FFF2-40B4-BE49-F238E27FC236}">
+                  <a16:creationId xmlns:a16="http://schemas.microsoft.com/office/drawing/2014/main" id="{BBF690E4-2BAC-371E-4F36-F3BB9D5CB4E8}"/>
+                </a:ext>
+              </a:extLst>
+            </p:cNvPr>
+            <p:cNvSpPr txBox="1"/>
+            <p:nvPr/>
+          </p:nvSpPr>
+          <p:spPr>
+            <a:xfrm>
+              <a:off x="11316463" y="3976374"/>
+              <a:ext cx="9277350" cy="830997"/>
+            </a:xfrm>
+            <a:prstGeom prst="rect">
+              <a:avLst/>
+            </a:prstGeom>
+            <a:noFill/>
+          </p:spPr>
+          <p:txBody>
+            <a:bodyPr wrap="square" rtlCol="0">
+              <a:spAutoFit/>
+            </a:bodyPr>
+            <a:lstStyle/>
+            <a:p>
+              <a:pPr algn="ctr"/>
+              <a:r>
+                <a:rPr lang="en-IE" sz="4800" b="1" i="1" dirty="0"/>
+                <a:t>2). Discover FIFO Position</a:t>
+              </a:r>
+            </a:p>
+          </p:txBody>
+        </p:sp>
+        <p:sp>
+          <p:nvSpPr>
+            <p:cNvPr id="14" name="Rectangle: Rounded Corners 13">
+              <a:extLst>
+                <a:ext uri="{FF2B5EF4-FFF2-40B4-BE49-F238E27FC236}">
+                  <a16:creationId xmlns:a16="http://schemas.microsoft.com/office/drawing/2014/main" id="{6C6F972B-C4A3-ADE2-9B28-D6F6A4C141B6}"/>
+                </a:ext>
+              </a:extLst>
+            </p:cNvPr>
+            <p:cNvSpPr/>
+            <p:nvPr/>
+          </p:nvSpPr>
+          <p:spPr>
+            <a:xfrm>
+              <a:off x="11887200" y="5528808"/>
+              <a:ext cx="7905750" cy="4037241"/>
+            </a:xfrm>
+            <a:prstGeom prst="roundRect">
+              <a:avLst/>
+            </a:prstGeom>
+            <a:gradFill flip="none" rotWithShape="1">
+              <a:gsLst>
+                <a:gs pos="0">
+                  <a:schemeClr val="accent1">
+                    <a:shade val="30000"/>
+                    <a:satMod val="115000"/>
+                  </a:schemeClr>
+                </a:gs>
+                <a:gs pos="50000">
+                  <a:schemeClr val="accent1">
+                    <a:shade val="67500"/>
+                    <a:satMod val="115000"/>
+                  </a:schemeClr>
+                </a:gs>
+                <a:gs pos="100000">
+                  <a:schemeClr val="accent1">
+                    <a:shade val="100000"/>
+                    <a:satMod val="115000"/>
+                  </a:schemeClr>
+                </a:gs>
+              </a:gsLst>
+              <a:lin ang="13500000" scaled="1"/>
+              <a:tileRect/>
+            </a:gradFill>
+            <a:ln w="57150">
+              <a:solidFill>
+                <a:schemeClr val="tx1"/>
+              </a:solidFill>
+            </a:ln>
+          </p:spPr>
+          <p:style>
+            <a:lnRef idx="2">
+              <a:schemeClr val="accent1">
+                <a:shade val="15000"/>
+              </a:schemeClr>
+            </a:lnRef>
+            <a:fillRef idx="1">
+              <a:schemeClr val="accent1"/>
+            </a:fillRef>
+            <a:effectRef idx="0">
+              <a:schemeClr val="accent1"/>
+            </a:effectRef>
+            <a:fontRef idx="minor">
+              <a:schemeClr val="lt1"/>
+            </a:fontRef>
+          </p:style>
+          <p:txBody>
+            <a:bodyPr rtlCol="0" anchor="ctr"/>
+            <a:lstStyle/>
+            <a:p>
+              <a:pPr algn="ctr"/>
+              <a:endParaRPr lang="en-IE" sz="3200" b="1" dirty="0"/>
+            </a:p>
+          </p:txBody>
+        </p:sp>
+        <p:grpSp>
+          <p:nvGrpSpPr>
+            <p:cNvPr id="16" name="Group 15">
+              <a:extLst>
+                <a:ext uri="{FF2B5EF4-FFF2-40B4-BE49-F238E27FC236}">
+                  <a16:creationId xmlns:a16="http://schemas.microsoft.com/office/drawing/2014/main" id="{64CC6A90-C0EB-A4B6-BC65-86380C1FB3C9}"/>
+                </a:ext>
+              </a:extLst>
+            </p:cNvPr>
+            <p:cNvGrpSpPr/>
+            <p:nvPr/>
+          </p:nvGrpSpPr>
+          <p:grpSpPr>
+            <a:xfrm>
+              <a:off x="12017069" y="5651409"/>
+              <a:ext cx="7710947" cy="523220"/>
+              <a:chOff x="914400" y="4442816"/>
+              <a:chExt cx="9048750" cy="653808"/>
+            </a:xfrm>
+          </p:grpSpPr>
+          <p:sp>
+            <p:nvSpPr>
+              <p:cNvPr id="17" name="TextBox 16">
+                <a:extLst>
+                  <a:ext uri="{FF2B5EF4-FFF2-40B4-BE49-F238E27FC236}">
+                    <a16:creationId xmlns:a16="http://schemas.microsoft.com/office/drawing/2014/main" id="{69019241-98B9-86DF-7A70-BAC7C03C6376}"/>
+                  </a:ext>
+                </a:extLst>
+              </p:cNvPr>
+              <p:cNvSpPr txBox="1"/>
+              <p:nvPr/>
+            </p:nvSpPr>
+            <p:spPr>
+              <a:xfrm>
+                <a:off x="914400" y="4442816"/>
+                <a:ext cx="9048750" cy="653808"/>
+              </a:xfrm>
+              <a:prstGeom prst="rect">
+                <a:avLst/>
+              </a:prstGeom>
+              <a:noFill/>
+            </p:spPr>
+            <p:txBody>
+              <a:bodyPr wrap="square">
+                <a:spAutoFit/>
+              </a:bodyPr>
+              <a:lstStyle/>
+              <a:p>
+                <a:pPr algn="ctr"/>
+                <a:r>
+                  <a:rPr lang="en-IE" sz="2800" b="1" dirty="0">
+                    <a:solidFill>
+                      <a:schemeClr val="bg1"/>
+                    </a:solidFill>
+                  </a:rPr>
+                  <a:t>Configured Election Directory</a:t>
+                </a:r>
+              </a:p>
+            </p:txBody>
+          </p:sp>
+          <p:cxnSp>
+            <p:nvCxnSpPr>
+              <p:cNvPr id="18" name="Straight Connector 17">
+                <a:extLst>
+                  <a:ext uri="{FF2B5EF4-FFF2-40B4-BE49-F238E27FC236}">
+                    <a16:creationId xmlns:a16="http://schemas.microsoft.com/office/drawing/2014/main" id="{B1DE96AB-CD56-E5FA-7030-6F555209E755}"/>
+                  </a:ext>
+                </a:extLst>
+              </p:cNvPr>
+              <p:cNvCxnSpPr>
+                <a:cxnSpLocks/>
+              </p:cNvCxnSpPr>
+              <p:nvPr/>
+            </p:nvCxnSpPr>
+            <p:spPr>
+              <a:xfrm>
+                <a:off x="1412270" y="5067269"/>
+                <a:ext cx="8112730" cy="0"/>
+              </a:xfrm>
+              <a:prstGeom prst="line">
+                <a:avLst/>
+              </a:prstGeom>
+              <a:ln w="19050" cap="flat" cmpd="sng" algn="ctr">
+                <a:solidFill>
+                  <a:schemeClr val="bg1"/>
+                </a:solidFill>
+                <a:prstDash val="dash"/>
+                <a:round/>
+                <a:headEnd type="none" w="med" len="med"/>
+                <a:tailEnd type="none" w="med" len="med"/>
+              </a:ln>
+            </p:spPr>
+            <p:style>
+              <a:lnRef idx="0">
+                <a:scrgbClr r="0" g="0" b="0"/>
+              </a:lnRef>
+              <a:fillRef idx="0">
+                <a:scrgbClr r="0" g="0" b="0"/>
+              </a:fillRef>
+              <a:effectRef idx="0">
+                <a:scrgbClr r="0" g="0" b="0"/>
+              </a:effectRef>
+              <a:fontRef idx="minor">
+                <a:schemeClr val="tx1"/>
+              </a:fontRef>
+            </p:style>
+          </p:cxnSp>
+        </p:grpSp>
+        <p:sp>
+          <p:nvSpPr>
+            <p:cNvPr id="19" name="Arrow: Right 18">
+              <a:extLst>
+                <a:ext uri="{FF2B5EF4-FFF2-40B4-BE49-F238E27FC236}">
+                  <a16:creationId xmlns:a16="http://schemas.microsoft.com/office/drawing/2014/main" id="{B34B9CB4-2681-327E-1546-41998D4C06E8}"/>
+                </a:ext>
+              </a:extLst>
+            </p:cNvPr>
+            <p:cNvSpPr/>
+            <p:nvPr/>
+          </p:nvSpPr>
+          <p:spPr>
+            <a:xfrm>
+              <a:off x="10063163" y="6819984"/>
+              <a:ext cx="1619250" cy="1413703"/>
+            </a:xfrm>
+            <a:prstGeom prst="rightArrow">
+              <a:avLst/>
+            </a:prstGeom>
+            <a:gradFill flip="none" rotWithShape="1">
+              <a:gsLst>
+                <a:gs pos="0">
+                  <a:schemeClr val="accent1">
+                    <a:shade val="30000"/>
+                    <a:satMod val="115000"/>
+                  </a:schemeClr>
+                </a:gs>
+                <a:gs pos="50000">
+                  <a:schemeClr val="accent1">
+                    <a:shade val="67500"/>
+                    <a:satMod val="115000"/>
+                  </a:schemeClr>
+                </a:gs>
+                <a:gs pos="100000">
+                  <a:schemeClr val="accent1">
+                    <a:shade val="100000"/>
+                    <a:satMod val="115000"/>
+                  </a:schemeClr>
+                </a:gs>
+              </a:gsLst>
+              <a:lin ang="13500000" scaled="1"/>
+              <a:tileRect/>
+            </a:gradFill>
+            <a:ln w="57150">
+              <a:solidFill>
+                <a:schemeClr val="tx1"/>
+              </a:solidFill>
+            </a:ln>
+          </p:spPr>
+          <p:style>
+            <a:lnRef idx="2">
+              <a:schemeClr val="accent1">
+                <a:shade val="15000"/>
+              </a:schemeClr>
+            </a:lnRef>
+            <a:fillRef idx="1">
+              <a:schemeClr val="accent1"/>
+            </a:fillRef>
+            <a:effectRef idx="0">
+              <a:schemeClr val="accent1"/>
+            </a:effectRef>
+            <a:fontRef idx="minor">
+              <a:schemeClr val="lt1"/>
+            </a:fontRef>
+          </p:style>
+          <p:txBody>
+            <a:bodyPr rtlCol="0" anchor="ctr"/>
+            <a:lstStyle/>
+            <a:p>
+              <a:pPr algn="ctr"/>
+              <a:endParaRPr lang="en-IE"/>
+            </a:p>
+          </p:txBody>
+        </p:sp>
+        <p:sp>
+          <p:nvSpPr>
+            <p:cNvPr id="20" name="Arrow: Right 19">
+              <a:extLst>
+                <a:ext uri="{FF2B5EF4-FFF2-40B4-BE49-F238E27FC236}">
+                  <a16:creationId xmlns:a16="http://schemas.microsoft.com/office/drawing/2014/main" id="{0A4E8B60-330B-1FB5-0943-17C11E0380CE}"/>
+                </a:ext>
+              </a:extLst>
+            </p:cNvPr>
+            <p:cNvSpPr/>
+            <p:nvPr/>
+          </p:nvSpPr>
+          <p:spPr>
+            <a:xfrm>
+              <a:off x="20059650" y="6793093"/>
+              <a:ext cx="1619250" cy="1440594"/>
+            </a:xfrm>
+            <a:prstGeom prst="rightArrow">
+              <a:avLst/>
+            </a:prstGeom>
+            <a:gradFill flip="none" rotWithShape="1">
+              <a:gsLst>
+                <a:gs pos="0">
+                  <a:schemeClr val="accent1">
+                    <a:shade val="30000"/>
+                    <a:satMod val="115000"/>
+                  </a:schemeClr>
+                </a:gs>
+                <a:gs pos="50000">
+                  <a:schemeClr val="accent1">
+                    <a:shade val="67500"/>
+                    <a:satMod val="115000"/>
+                  </a:schemeClr>
+                </a:gs>
+                <a:gs pos="100000">
+                  <a:schemeClr val="accent1">
+                    <a:shade val="100000"/>
+                    <a:satMod val="115000"/>
+                  </a:schemeClr>
+                </a:gs>
+              </a:gsLst>
+              <a:lin ang="13500000" scaled="1"/>
+              <a:tileRect/>
+            </a:gradFill>
+            <a:ln w="57150">
+              <a:solidFill>
+                <a:schemeClr val="tx1"/>
+              </a:solidFill>
+            </a:ln>
+          </p:spPr>
+          <p:style>
+            <a:lnRef idx="2">
+              <a:schemeClr val="accent1">
+                <a:shade val="15000"/>
+              </a:schemeClr>
+            </a:lnRef>
+            <a:fillRef idx="1">
+              <a:schemeClr val="accent1"/>
+            </a:fillRef>
+            <a:effectRef idx="0">
+              <a:schemeClr val="accent1"/>
+            </a:effectRef>
+            <a:fontRef idx="minor">
+              <a:schemeClr val="lt1"/>
+            </a:fontRef>
+          </p:style>
+          <p:txBody>
+            <a:bodyPr rtlCol="0" anchor="ctr"/>
+            <a:lstStyle/>
+            <a:p>
+              <a:pPr algn="ctr"/>
+              <a:endParaRPr lang="en-IE"/>
+            </a:p>
+          </p:txBody>
+        </p:sp>
+        <p:sp>
+          <p:nvSpPr>
+            <p:cNvPr id="23" name="TextBox 22">
+              <a:extLst>
+                <a:ext uri="{FF2B5EF4-FFF2-40B4-BE49-F238E27FC236}">
+                  <a16:creationId xmlns:a16="http://schemas.microsoft.com/office/drawing/2014/main" id="{5E2DD160-6B4C-56D8-D2E7-C83E10664427}"/>
+                </a:ext>
+              </a:extLst>
+            </p:cNvPr>
+            <p:cNvSpPr txBox="1"/>
+            <p:nvPr/>
+          </p:nvSpPr>
+          <p:spPr>
+            <a:xfrm>
+              <a:off x="22412325" y="3995424"/>
+              <a:ext cx="6657975" cy="830997"/>
+            </a:xfrm>
+            <a:prstGeom prst="rect">
+              <a:avLst/>
+            </a:prstGeom>
+            <a:noFill/>
+          </p:spPr>
+          <p:txBody>
+            <a:bodyPr wrap="square" rtlCol="0">
+              <a:spAutoFit/>
+            </a:bodyPr>
+            <a:lstStyle/>
+            <a:p>
+              <a:pPr algn="ctr"/>
+              <a:r>
+                <a:rPr lang="en-IE" sz="4800" b="1" i="1" dirty="0"/>
+                <a:t>3). Wait Until Leader</a:t>
+              </a:r>
+            </a:p>
+          </p:txBody>
+        </p:sp>
+        <p:grpSp>
+          <p:nvGrpSpPr>
+            <p:cNvPr id="29" name="Group 28">
+              <a:extLst>
+                <a:ext uri="{FF2B5EF4-FFF2-40B4-BE49-F238E27FC236}">
+                  <a16:creationId xmlns:a16="http://schemas.microsoft.com/office/drawing/2014/main" id="{4A6E0309-BA76-2C37-BF97-83DA109EC708}"/>
+                </a:ext>
+              </a:extLst>
+            </p:cNvPr>
+            <p:cNvGrpSpPr/>
+            <p:nvPr/>
+          </p:nvGrpSpPr>
+          <p:grpSpPr>
+            <a:xfrm>
+              <a:off x="21839238" y="5567707"/>
+              <a:ext cx="7905750" cy="3770158"/>
+              <a:chOff x="12363450" y="4232467"/>
+              <a:chExt cx="9277350" cy="5044882"/>
+            </a:xfrm>
+          </p:grpSpPr>
+          <p:sp>
+            <p:nvSpPr>
+              <p:cNvPr id="30" name="Rectangle: Rounded Corners 29">
+                <a:extLst>
+                  <a:ext uri="{FF2B5EF4-FFF2-40B4-BE49-F238E27FC236}">
+                    <a16:creationId xmlns:a16="http://schemas.microsoft.com/office/drawing/2014/main" id="{62E450F5-1EAF-54A9-2874-39442B8A056D}"/>
+                  </a:ext>
+                </a:extLst>
+              </p:cNvPr>
+              <p:cNvSpPr/>
+              <p:nvPr/>
+            </p:nvSpPr>
+            <p:spPr>
+              <a:xfrm>
+                <a:off x="12363450" y="4232467"/>
+                <a:ext cx="9277350" cy="5044882"/>
+              </a:xfrm>
+              <a:prstGeom prst="roundRect">
+                <a:avLst/>
+              </a:prstGeom>
+              <a:gradFill flip="none" rotWithShape="1">
+                <a:gsLst>
+                  <a:gs pos="0">
+                    <a:schemeClr val="accent1">
+                      <a:shade val="30000"/>
+                      <a:satMod val="115000"/>
+                    </a:schemeClr>
+                  </a:gs>
+                  <a:gs pos="50000">
+                    <a:schemeClr val="accent1">
+                      <a:shade val="67500"/>
+                      <a:satMod val="115000"/>
+                    </a:schemeClr>
+                  </a:gs>
+                  <a:gs pos="100000">
+                    <a:schemeClr val="accent1">
+                      <a:shade val="100000"/>
+                      <a:satMod val="115000"/>
+                    </a:schemeClr>
+                  </a:gs>
+                </a:gsLst>
+                <a:lin ang="13500000" scaled="1"/>
+                <a:tileRect/>
+              </a:gradFill>
+              <a:ln w="57150">
+                <a:solidFill>
+                  <a:schemeClr val="tx1"/>
+                </a:solidFill>
+              </a:ln>
+            </p:spPr>
+            <p:style>
+              <a:lnRef idx="2">
+                <a:schemeClr val="accent1">
+                  <a:shade val="15000"/>
+                </a:schemeClr>
+              </a:lnRef>
+              <a:fillRef idx="1">
+                <a:schemeClr val="accent1"/>
+              </a:fillRef>
+              <a:effectRef idx="0">
+                <a:schemeClr val="accent1"/>
+              </a:effectRef>
+              <a:fontRef idx="minor">
+                <a:schemeClr val="lt1"/>
+              </a:fontRef>
+            </p:style>
+            <p:txBody>
+              <a:bodyPr rtlCol="0" anchor="ctr"/>
+              <a:lstStyle/>
+              <a:p>
+                <a:pPr algn="ctr"/>
+                <a:endParaRPr lang="en-IE" sz="3200" b="1" dirty="0"/>
+              </a:p>
+            </p:txBody>
+          </p:sp>
+          <p:grpSp>
+            <p:nvGrpSpPr>
+              <p:cNvPr id="31" name="Group 30">
+                <a:extLst>
+                  <a:ext uri="{FF2B5EF4-FFF2-40B4-BE49-F238E27FC236}">
+                    <a16:creationId xmlns:a16="http://schemas.microsoft.com/office/drawing/2014/main" id="{1E3BF374-E77C-233B-E92F-4758AAD130B1}"/>
+                  </a:ext>
+                </a:extLst>
+              </p:cNvPr>
+              <p:cNvGrpSpPr/>
+              <p:nvPr/>
+            </p:nvGrpSpPr>
+            <p:grpSpPr>
+              <a:xfrm>
+                <a:off x="12515850" y="4385666"/>
+                <a:ext cx="9048750" cy="700125"/>
+                <a:chOff x="914400" y="4442816"/>
+                <a:chExt cx="9048750" cy="700125"/>
+              </a:xfrm>
+            </p:grpSpPr>
+            <p:sp>
+              <p:nvSpPr>
+                <p:cNvPr id="32" name="TextBox 31">
+                  <a:extLst>
+                    <a:ext uri="{FF2B5EF4-FFF2-40B4-BE49-F238E27FC236}">
+                      <a16:creationId xmlns:a16="http://schemas.microsoft.com/office/drawing/2014/main" id="{6381B058-26BE-BAB2-79EA-A327C72E9DF2}"/>
+                    </a:ext>
+                  </a:extLst>
+                </p:cNvPr>
+                <p:cNvSpPr txBox="1"/>
+                <p:nvPr/>
+              </p:nvSpPr>
+              <p:spPr>
+                <a:xfrm>
+                  <a:off x="914400" y="4442816"/>
+                  <a:ext cx="9048750" cy="700125"/>
+                </a:xfrm>
+                <a:prstGeom prst="rect">
+                  <a:avLst/>
+                </a:prstGeom>
+                <a:noFill/>
+              </p:spPr>
+              <p:txBody>
+                <a:bodyPr wrap="square">
+                  <a:spAutoFit/>
+                </a:bodyPr>
+                <a:lstStyle/>
+                <a:p>
+                  <a:pPr algn="ctr"/>
+                  <a:r>
+                    <a:rPr lang="en-IE" sz="2800" b="1" dirty="0">
+                      <a:solidFill>
+                        <a:schemeClr val="bg1"/>
+                      </a:solidFill>
+                    </a:rPr>
+                    <a:t>Wait &amp; Retry</a:t>
+                  </a:r>
+                </a:p>
+              </p:txBody>
+            </p:sp>
+            <p:cxnSp>
+              <p:nvCxnSpPr>
+                <p:cNvPr id="33" name="Straight Connector 32">
+                  <a:extLst>
+                    <a:ext uri="{FF2B5EF4-FFF2-40B4-BE49-F238E27FC236}">
+                      <a16:creationId xmlns:a16="http://schemas.microsoft.com/office/drawing/2014/main" id="{69B4F2D9-FA43-58DF-241A-59FC646CE50B}"/>
+                    </a:ext>
+                  </a:extLst>
+                </p:cNvPr>
+                <p:cNvCxnSpPr>
+                  <a:cxnSpLocks/>
+                </p:cNvCxnSpPr>
+                <p:nvPr/>
+              </p:nvCxnSpPr>
+              <p:spPr>
+                <a:xfrm>
+                  <a:off x="1412270" y="5108003"/>
+                  <a:ext cx="8112730" cy="0"/>
+                </a:xfrm>
+                <a:prstGeom prst="line">
+                  <a:avLst/>
+                </a:prstGeom>
+                <a:ln w="19050" cap="flat" cmpd="sng" algn="ctr">
+                  <a:solidFill>
+                    <a:schemeClr val="bg1"/>
+                  </a:solidFill>
+                  <a:prstDash val="dash"/>
+                  <a:round/>
+                  <a:headEnd type="none" w="med" len="med"/>
+                  <a:tailEnd type="none" w="med" len="med"/>
+                </a:ln>
+              </p:spPr>
+              <p:style>
+                <a:lnRef idx="0">
+                  <a:scrgbClr r="0" g="0" b="0"/>
+                </a:lnRef>
+                <a:fillRef idx="0">
+                  <a:scrgbClr r="0" g="0" b="0"/>
+                </a:fillRef>
+                <a:effectRef idx="0">
+                  <a:scrgbClr r="0" g="0" b="0"/>
+                </a:effectRef>
+                <a:fontRef idx="minor">
+                  <a:schemeClr val="tx1"/>
+                </a:fontRef>
+              </p:style>
+            </p:cxnSp>
+          </p:grpSp>
+        </p:grpSp>
+        <p:pic>
+          <p:nvPicPr>
+            <p:cNvPr id="39" name="Graphic 38" descr="Alarm Ringing outline">
+              <a:extLst>
+                <a:ext uri="{FF2B5EF4-FFF2-40B4-BE49-F238E27FC236}">
+                  <a16:creationId xmlns:a16="http://schemas.microsoft.com/office/drawing/2014/main" id="{A06521CE-5F19-1FCB-0285-A48FE6ADAEA9}"/>
+                </a:ext>
+              </a:extLst>
+            </p:cNvPr>
+            <p:cNvPicPr>
+              <a:picLocks noChangeAspect="1"/>
+            </p:cNvPicPr>
+            <p:nvPr/>
+          </p:nvPicPr>
+          <p:blipFill>
+            <a:blip>
+              <a:extLst>
+                <a:ext uri="{96DAC541-7B7A-43D3-8B79-37D633B846F1}">
+                  <asvg:svgBlip xmlns:asvg="http://schemas.microsoft.com/office/drawing/2016/SVG/main" r:embed="rId3"/>
+                </a:ext>
+              </a:extLst>
+            </a:blip>
+            <a:stretch>
+              <a:fillRect/>
+            </a:stretch>
+          </p:blipFill>
+          <p:spPr>
+            <a:xfrm>
+              <a:off x="27117170" y="6665603"/>
+              <a:ext cx="2105025" cy="2105025"/>
+            </a:xfrm>
+            <a:prstGeom prst="rect">
+              <a:avLst/>
+            </a:prstGeom>
+          </p:spPr>
+        </p:pic>
+        <p:pic>
+          <p:nvPicPr>
+            <p:cNvPr id="41" name="Graphic 40" descr="Snooze outline">
+              <a:extLst>
+                <a:ext uri="{FF2B5EF4-FFF2-40B4-BE49-F238E27FC236}">
+                  <a16:creationId xmlns:a16="http://schemas.microsoft.com/office/drawing/2014/main" id="{05D21A47-FEE5-33CD-5150-CCD8C98322C0}"/>
+                </a:ext>
+              </a:extLst>
+            </p:cNvPr>
+            <p:cNvPicPr>
+              <a:picLocks noChangeAspect="1"/>
+            </p:cNvPicPr>
+            <p:nvPr/>
+          </p:nvPicPr>
+          <p:blipFill>
+            <a:blip>
+              <a:extLst>
+                <a:ext uri="{96DAC541-7B7A-43D3-8B79-37D633B846F1}">
+                  <asvg:svgBlip xmlns:asvg="http://schemas.microsoft.com/office/drawing/2016/SVG/main" r:embed="rId4"/>
+                </a:ext>
+              </a:extLst>
+            </a:blip>
+            <a:stretch>
+              <a:fillRect/>
+            </a:stretch>
+          </p:blipFill>
+          <p:spPr>
+            <a:xfrm>
+              <a:off x="22468970" y="6417953"/>
+              <a:ext cx="2105025" cy="2105025"/>
+            </a:xfrm>
+            <a:prstGeom prst="rect">
+              <a:avLst/>
+            </a:prstGeom>
+          </p:spPr>
+        </p:pic>
+        <p:sp>
+          <p:nvSpPr>
+            <p:cNvPr id="43" name="Arrow: Right 42">
+              <a:extLst>
+                <a:ext uri="{FF2B5EF4-FFF2-40B4-BE49-F238E27FC236}">
+                  <a16:creationId xmlns:a16="http://schemas.microsoft.com/office/drawing/2014/main" id="{A2F234AD-9CCE-B2A5-133D-DF97E9659C03}"/>
+                </a:ext>
+              </a:extLst>
+            </p:cNvPr>
+            <p:cNvSpPr/>
+            <p:nvPr/>
+          </p:nvSpPr>
+          <p:spPr>
+            <a:xfrm>
+              <a:off x="24806275" y="7169995"/>
+              <a:ext cx="1828800" cy="981939"/>
+            </a:xfrm>
+            <a:prstGeom prst="rightArrow">
+              <a:avLst/>
+            </a:prstGeom>
+            <a:solidFill>
+              <a:schemeClr val="accent2"/>
+            </a:solidFill>
+            <a:ln w="57150">
+              <a:solidFill>
+                <a:schemeClr val="tx1"/>
+              </a:solidFill>
+            </a:ln>
+          </p:spPr>
+          <p:style>
+            <a:lnRef idx="2">
+              <a:schemeClr val="accent1">
+                <a:shade val="15000"/>
+              </a:schemeClr>
+            </a:lnRef>
+            <a:fillRef idx="1">
+              <a:schemeClr val="accent1"/>
+            </a:fillRef>
+            <a:effectRef idx="0">
+              <a:schemeClr val="accent1"/>
+            </a:effectRef>
+            <a:fontRef idx="minor">
+              <a:schemeClr val="lt1"/>
+            </a:fontRef>
+          </p:style>
+          <p:txBody>
+            <a:bodyPr rtlCol="0" anchor="ctr"/>
+            <a:lstStyle/>
+            <a:p>
+              <a:pPr algn="ctr"/>
+              <a:endParaRPr lang="en-IE"/>
+            </a:p>
+          </p:txBody>
+        </p:sp>
+        <p:grpSp>
+          <p:nvGrpSpPr>
+            <p:cNvPr id="55" name="Group 54">
+              <a:extLst>
+                <a:ext uri="{FF2B5EF4-FFF2-40B4-BE49-F238E27FC236}">
+                  <a16:creationId xmlns:a16="http://schemas.microsoft.com/office/drawing/2014/main" id="{8438DC7B-472C-B3E3-A01D-765CC1D09460}"/>
+                </a:ext>
+              </a:extLst>
+            </p:cNvPr>
+            <p:cNvGrpSpPr/>
+            <p:nvPr/>
+          </p:nvGrpSpPr>
+          <p:grpSpPr>
+            <a:xfrm>
+              <a:off x="5122141" y="2633807"/>
+              <a:ext cx="20817737" cy="1143120"/>
+              <a:chOff x="4899243" y="2108980"/>
+              <a:chExt cx="18821400" cy="1107996"/>
+            </a:xfrm>
+          </p:grpSpPr>
+          <p:cxnSp>
+            <p:nvCxnSpPr>
+              <p:cNvPr id="50" name="Straight Connector 49">
+                <a:extLst>
+                  <a:ext uri="{FF2B5EF4-FFF2-40B4-BE49-F238E27FC236}">
+                    <a16:creationId xmlns:a16="http://schemas.microsoft.com/office/drawing/2014/main" id="{4F17CA91-6386-7A67-939A-4EBB6125772E}"/>
+                  </a:ext>
+                </a:extLst>
+              </p:cNvPr>
+              <p:cNvCxnSpPr>
+                <a:cxnSpLocks/>
+              </p:cNvCxnSpPr>
+              <p:nvPr/>
+            </p:nvCxnSpPr>
+            <p:spPr>
+              <a:xfrm>
+                <a:off x="4953000" y="3108744"/>
+                <a:ext cx="18649794" cy="0"/>
+              </a:xfrm>
+              <a:prstGeom prst="line">
+                <a:avLst/>
+              </a:prstGeom>
+              <a:ln w="57150">
+                <a:solidFill>
+                  <a:schemeClr val="tx1">
+                    <a:lumMod val="65000"/>
+                    <a:lumOff val="35000"/>
+                  </a:schemeClr>
+                </a:solidFill>
+                <a:prstDash val="dash"/>
+              </a:ln>
+            </p:spPr>
+            <p:style>
+              <a:lnRef idx="2">
+                <a:schemeClr val="dk1"/>
+              </a:lnRef>
+              <a:fillRef idx="0">
+                <a:schemeClr val="dk1"/>
+              </a:fillRef>
+              <a:effectRef idx="1">
+                <a:schemeClr val="dk1"/>
+              </a:effectRef>
+              <a:fontRef idx="minor">
+                <a:schemeClr val="tx1"/>
+              </a:fontRef>
+            </p:style>
+          </p:cxnSp>
+          <p:sp>
+            <p:nvSpPr>
+              <p:cNvPr id="54" name="TextBox 53">
+                <a:extLst>
+                  <a:ext uri="{FF2B5EF4-FFF2-40B4-BE49-F238E27FC236}">
+                    <a16:creationId xmlns:a16="http://schemas.microsoft.com/office/drawing/2014/main" id="{914435C2-F2C9-4CB1-DFE2-178BD5F92F20}"/>
+                  </a:ext>
+                </a:extLst>
+              </p:cNvPr>
+              <p:cNvSpPr txBox="1"/>
+              <p:nvPr/>
+            </p:nvSpPr>
+            <p:spPr>
+              <a:xfrm>
+                <a:off x="4899243" y="2108980"/>
+                <a:ext cx="18821400" cy="1107996"/>
+              </a:xfrm>
+              <a:prstGeom prst="rect">
+                <a:avLst/>
+              </a:prstGeom>
+              <a:noFill/>
+            </p:spPr>
+            <p:txBody>
+              <a:bodyPr wrap="square" rtlCol="0">
+                <a:spAutoFit/>
+              </a:bodyPr>
+              <a:lstStyle/>
+              <a:p>
+                <a:pPr algn="ctr"/>
+                <a:r>
+                  <a:rPr lang="en-IE" sz="6600" b="1" i="1" dirty="0">
+                    <a:solidFill>
+                      <a:schemeClr val="tx1">
+                        <a:lumMod val="65000"/>
+                        <a:lumOff val="35000"/>
+                      </a:schemeClr>
+                    </a:solidFill>
+                  </a:rPr>
+                  <a:t>i). Leader Election Coordinated Across HPC Jobs</a:t>
+                </a:r>
+              </a:p>
+            </p:txBody>
+          </p:sp>
+        </p:grpSp>
+        <p:grpSp>
+          <p:nvGrpSpPr>
+            <p:cNvPr id="56" name="Group 55">
+              <a:extLst>
+                <a:ext uri="{FF2B5EF4-FFF2-40B4-BE49-F238E27FC236}">
+                  <a16:creationId xmlns:a16="http://schemas.microsoft.com/office/drawing/2014/main" id="{B415DE28-1A6C-8362-F4F8-741555000F08}"/>
+                </a:ext>
+              </a:extLst>
+            </p:cNvPr>
+            <p:cNvGrpSpPr/>
+            <p:nvPr/>
+          </p:nvGrpSpPr>
+          <p:grpSpPr>
+            <a:xfrm>
+              <a:off x="5280891" y="14525624"/>
+              <a:ext cx="18859500" cy="1107996"/>
+              <a:chOff x="4953000" y="2082800"/>
+              <a:chExt cx="18859500" cy="1107996"/>
+            </a:xfrm>
+          </p:grpSpPr>
+          <p:cxnSp>
+            <p:nvCxnSpPr>
+              <p:cNvPr id="57" name="Straight Connector 56">
+                <a:extLst>
+                  <a:ext uri="{FF2B5EF4-FFF2-40B4-BE49-F238E27FC236}">
+                    <a16:creationId xmlns:a16="http://schemas.microsoft.com/office/drawing/2014/main" id="{2A8FEBA9-B1C8-76B3-0138-002F653CAB81}"/>
+                  </a:ext>
+                </a:extLst>
+              </p:cNvPr>
+              <p:cNvCxnSpPr>
+                <a:cxnSpLocks/>
+              </p:cNvCxnSpPr>
+              <p:nvPr/>
+            </p:nvCxnSpPr>
+            <p:spPr>
+              <a:xfrm>
+                <a:off x="4953000" y="3108744"/>
+                <a:ext cx="18649794" cy="0"/>
+              </a:xfrm>
+              <a:prstGeom prst="line">
+                <a:avLst/>
+              </a:prstGeom>
+              <a:ln w="57150">
+                <a:solidFill>
+                  <a:schemeClr val="tx1">
+                    <a:lumMod val="65000"/>
+                    <a:lumOff val="35000"/>
+                  </a:schemeClr>
+                </a:solidFill>
+                <a:prstDash val="dash"/>
+              </a:ln>
+            </p:spPr>
+            <p:style>
+              <a:lnRef idx="2">
+                <a:schemeClr val="dk1"/>
+              </a:lnRef>
+              <a:fillRef idx="0">
+                <a:schemeClr val="dk1"/>
+              </a:fillRef>
+              <a:effectRef idx="1">
+                <a:schemeClr val="dk1"/>
+              </a:effectRef>
+              <a:fontRef idx="minor">
+                <a:schemeClr val="tx1"/>
+              </a:fontRef>
+            </p:style>
+          </p:cxnSp>
+          <p:sp>
+            <p:nvSpPr>
+              <p:cNvPr id="58" name="TextBox 57">
+                <a:extLst>
+                  <a:ext uri="{FF2B5EF4-FFF2-40B4-BE49-F238E27FC236}">
+                    <a16:creationId xmlns:a16="http://schemas.microsoft.com/office/drawing/2014/main" id="{FC04D604-5EE5-1D96-7D9A-76504BC438EE}"/>
+                  </a:ext>
+                </a:extLst>
+              </p:cNvPr>
+              <p:cNvSpPr txBox="1"/>
+              <p:nvPr/>
+            </p:nvSpPr>
+            <p:spPr>
+              <a:xfrm>
+                <a:off x="4991100" y="2082800"/>
+                <a:ext cx="18821400" cy="1107996"/>
+              </a:xfrm>
+              <a:prstGeom prst="rect">
+                <a:avLst/>
+              </a:prstGeom>
+              <a:noFill/>
+            </p:spPr>
+            <p:txBody>
+              <a:bodyPr wrap="square" rtlCol="0">
+                <a:spAutoFit/>
+              </a:bodyPr>
+              <a:lstStyle/>
+              <a:p>
+                <a:pPr algn="ctr"/>
+                <a:r>
+                  <a:rPr lang="en-IE" sz="6600" b="1" i="1" dirty="0">
+                    <a:solidFill>
+                      <a:schemeClr val="tx1">
+                        <a:lumMod val="65000"/>
+                        <a:lumOff val="35000"/>
+                      </a:schemeClr>
+                    </a:solidFill>
+                  </a:rPr>
+                  <a:t>ii). Hosting Node of Leader Owns the OS Lock</a:t>
+                </a:r>
+              </a:p>
+            </p:txBody>
+          </p:sp>
+        </p:grpSp>
+        <p:sp>
+          <p:nvSpPr>
+            <p:cNvPr id="87" name="Rectangle: Rounded Corners 86">
+              <a:extLst>
+                <a:ext uri="{FF2B5EF4-FFF2-40B4-BE49-F238E27FC236}">
+                  <a16:creationId xmlns:a16="http://schemas.microsoft.com/office/drawing/2014/main" id="{9F6B5165-62F2-45C5-C2B0-48352441AE46}"/>
+                </a:ext>
+              </a:extLst>
+            </p:cNvPr>
+            <p:cNvSpPr/>
+            <p:nvPr/>
+          </p:nvSpPr>
+          <p:spPr>
+            <a:xfrm>
+              <a:off x="188191" y="15722603"/>
+              <a:ext cx="29851350" cy="5918192"/>
+            </a:xfrm>
+            <a:prstGeom prst="roundRect">
+              <a:avLst/>
+            </a:prstGeom>
+            <a:solidFill>
+              <a:srgbClr val="E6EAED"/>
+            </a:solidFill>
+            <a:ln w="57150">
+              <a:solidFill>
+                <a:schemeClr val="tx1"/>
+              </a:solidFill>
+            </a:ln>
+          </p:spPr>
+          <p:style>
+            <a:lnRef idx="2">
+              <a:schemeClr val="accent1">
+                <a:shade val="15000"/>
+              </a:schemeClr>
+            </a:lnRef>
+            <a:fillRef idx="1">
+              <a:schemeClr val="accent1"/>
+            </a:fillRef>
+            <a:effectRef idx="0">
+              <a:schemeClr val="accent1"/>
+            </a:effectRef>
+            <a:fontRef idx="minor">
+              <a:schemeClr val="lt1"/>
+            </a:fontRef>
+          </p:style>
+          <p:txBody>
+            <a:bodyPr rtlCol="0" anchor="ctr"/>
+            <a:lstStyle/>
+            <a:p>
+              <a:pPr algn="ctr"/>
+              <a:endParaRPr lang="en-IE" b="1" dirty="0"/>
+            </a:p>
+          </p:txBody>
+        </p:sp>
+        <p:sp>
+          <p:nvSpPr>
+            <p:cNvPr id="88" name="TextBox 87">
+              <a:extLst>
+                <a:ext uri="{FF2B5EF4-FFF2-40B4-BE49-F238E27FC236}">
+                  <a16:creationId xmlns:a16="http://schemas.microsoft.com/office/drawing/2014/main" id="{1A58CC51-694B-6303-6B7E-1DE40BCD20AB}"/>
+                </a:ext>
+              </a:extLst>
+            </p:cNvPr>
+            <p:cNvSpPr txBox="1"/>
+            <p:nvPr/>
+          </p:nvSpPr>
+          <p:spPr>
+            <a:xfrm>
+              <a:off x="-289708" y="15798918"/>
+              <a:ext cx="9277350" cy="830997"/>
+            </a:xfrm>
+            <a:prstGeom prst="rect">
+              <a:avLst/>
+            </a:prstGeom>
+            <a:noFill/>
+          </p:spPr>
+          <p:txBody>
+            <a:bodyPr wrap="square" rtlCol="0">
+              <a:spAutoFit/>
+            </a:bodyPr>
+            <a:lstStyle/>
+            <a:p>
+              <a:pPr algn="ctr"/>
+              <a:r>
+                <a:rPr lang="en-IE" sz="4800" b="1" i="1" dirty="0"/>
+                <a:t>4). Acquire File Lock</a:t>
+              </a:r>
+            </a:p>
+          </p:txBody>
+        </p:sp>
+        <p:sp>
+          <p:nvSpPr>
+            <p:cNvPr id="90" name="TextBox 89">
+              <a:extLst>
+                <a:ext uri="{FF2B5EF4-FFF2-40B4-BE49-F238E27FC236}">
+                  <a16:creationId xmlns:a16="http://schemas.microsoft.com/office/drawing/2014/main" id="{3304CF6E-B326-E521-B77C-B4D210C04B06}"/>
+                </a:ext>
+              </a:extLst>
+            </p:cNvPr>
+            <p:cNvSpPr txBox="1"/>
+            <p:nvPr/>
+          </p:nvSpPr>
+          <p:spPr>
+            <a:xfrm>
+              <a:off x="10337075" y="15798918"/>
+              <a:ext cx="9277350" cy="830997"/>
+            </a:xfrm>
+            <a:prstGeom prst="rect">
+              <a:avLst/>
+            </a:prstGeom>
+            <a:noFill/>
+          </p:spPr>
+          <p:txBody>
+            <a:bodyPr wrap="square" rtlCol="0">
+              <a:spAutoFit/>
+            </a:bodyPr>
+            <a:lstStyle/>
+            <a:p>
+              <a:pPr algn="ctr"/>
+              <a:r>
+                <a:rPr lang="en-IE" sz="4800" b="1" i="1" dirty="0"/>
+                <a:t>5). Execute Work Under Lock</a:t>
+              </a:r>
+            </a:p>
+          </p:txBody>
+        </p:sp>
+        <p:sp>
+          <p:nvSpPr>
+            <p:cNvPr id="92" name="Arrow: Right 91">
+              <a:extLst>
+                <a:ext uri="{FF2B5EF4-FFF2-40B4-BE49-F238E27FC236}">
+                  <a16:creationId xmlns:a16="http://schemas.microsoft.com/office/drawing/2014/main" id="{AE345429-4113-2B59-9FBD-F7FEC818DA28}"/>
+                </a:ext>
+              </a:extLst>
+            </p:cNvPr>
+            <p:cNvSpPr/>
+            <p:nvPr/>
+          </p:nvSpPr>
+          <p:spPr>
+            <a:xfrm>
+              <a:off x="8768936" y="18207958"/>
+              <a:ext cx="1979305" cy="1413703"/>
+            </a:xfrm>
+            <a:prstGeom prst="rightArrow">
+              <a:avLst/>
+            </a:prstGeom>
+            <a:gradFill flip="none" rotWithShape="1">
+              <a:gsLst>
+                <a:gs pos="0">
+                  <a:schemeClr val="accent1">
+                    <a:shade val="30000"/>
+                    <a:satMod val="115000"/>
+                  </a:schemeClr>
+                </a:gs>
+                <a:gs pos="50000">
+                  <a:schemeClr val="accent1">
+                    <a:shade val="67500"/>
+                    <a:satMod val="115000"/>
+                  </a:schemeClr>
+                </a:gs>
+                <a:gs pos="100000">
+                  <a:schemeClr val="accent1">
+                    <a:shade val="100000"/>
+                    <a:satMod val="115000"/>
+                  </a:schemeClr>
+                </a:gs>
+              </a:gsLst>
+              <a:lin ang="13500000" scaled="1"/>
+              <a:tileRect/>
+            </a:gradFill>
+            <a:ln w="57150">
+              <a:solidFill>
+                <a:schemeClr val="tx1"/>
+              </a:solidFill>
+            </a:ln>
+          </p:spPr>
+          <p:style>
+            <a:lnRef idx="2">
+              <a:schemeClr val="accent1">
+                <a:shade val="15000"/>
+              </a:schemeClr>
+            </a:lnRef>
+            <a:fillRef idx="1">
+              <a:schemeClr val="accent1"/>
+            </a:fillRef>
+            <a:effectRef idx="0">
+              <a:schemeClr val="accent1"/>
+            </a:effectRef>
+            <a:fontRef idx="minor">
+              <a:schemeClr val="lt1"/>
+            </a:fontRef>
+          </p:style>
+          <p:txBody>
+            <a:bodyPr rtlCol="0" anchor="ctr"/>
+            <a:lstStyle/>
+            <a:p>
+              <a:pPr algn="ctr"/>
+              <a:endParaRPr lang="en-IE"/>
+            </a:p>
+          </p:txBody>
+        </p:sp>
+        <p:sp>
+          <p:nvSpPr>
+            <p:cNvPr id="93" name="Arrow: Right 92">
+              <a:extLst>
+                <a:ext uri="{FF2B5EF4-FFF2-40B4-BE49-F238E27FC236}">
+                  <a16:creationId xmlns:a16="http://schemas.microsoft.com/office/drawing/2014/main" id="{9A92287C-9ADC-C5E8-F927-2ABB19F06159}"/>
+                </a:ext>
+              </a:extLst>
+            </p:cNvPr>
+            <p:cNvSpPr/>
+            <p:nvPr/>
+          </p:nvSpPr>
+          <p:spPr>
+            <a:xfrm>
+              <a:off x="18640529" y="18100710"/>
+              <a:ext cx="2242312" cy="1440594"/>
+            </a:xfrm>
+            <a:prstGeom prst="rightArrow">
+              <a:avLst/>
+            </a:prstGeom>
+            <a:gradFill flip="none" rotWithShape="1">
+              <a:gsLst>
+                <a:gs pos="0">
+                  <a:schemeClr val="accent1">
+                    <a:shade val="30000"/>
+                    <a:satMod val="115000"/>
+                  </a:schemeClr>
+                </a:gs>
+                <a:gs pos="50000">
+                  <a:schemeClr val="accent1">
+                    <a:shade val="67500"/>
+                    <a:satMod val="115000"/>
+                  </a:schemeClr>
+                </a:gs>
+                <a:gs pos="100000">
+                  <a:schemeClr val="accent1">
+                    <a:shade val="100000"/>
+                    <a:satMod val="115000"/>
+                  </a:schemeClr>
+                </a:gs>
+              </a:gsLst>
+              <a:lin ang="13500000" scaled="1"/>
+              <a:tileRect/>
+            </a:gradFill>
+            <a:ln w="57150">
+              <a:solidFill>
+                <a:schemeClr val="tx1"/>
+              </a:solidFill>
+            </a:ln>
+          </p:spPr>
+          <p:style>
+            <a:lnRef idx="2">
+              <a:schemeClr val="accent1">
+                <a:shade val="15000"/>
+              </a:schemeClr>
+            </a:lnRef>
+            <a:fillRef idx="1">
+              <a:schemeClr val="accent1"/>
+            </a:fillRef>
+            <a:effectRef idx="0">
+              <a:schemeClr val="accent1"/>
+            </a:effectRef>
+            <a:fontRef idx="minor">
+              <a:schemeClr val="lt1"/>
+            </a:fontRef>
+          </p:style>
+          <p:txBody>
+            <a:bodyPr rtlCol="0" anchor="ctr"/>
+            <a:lstStyle/>
+            <a:p>
+              <a:pPr algn="ctr"/>
+              <a:endParaRPr lang="en-IE"/>
+            </a:p>
+          </p:txBody>
+        </p:sp>
+        <p:sp>
+          <p:nvSpPr>
+            <p:cNvPr id="94" name="TextBox 93">
+              <a:extLst>
+                <a:ext uri="{FF2B5EF4-FFF2-40B4-BE49-F238E27FC236}">
+                  <a16:creationId xmlns:a16="http://schemas.microsoft.com/office/drawing/2014/main" id="{DC31B3FA-AD41-3E67-4907-5195F0A775AF}"/>
+                </a:ext>
+              </a:extLst>
+            </p:cNvPr>
+            <p:cNvSpPr txBox="1"/>
+            <p:nvPr/>
+          </p:nvSpPr>
+          <p:spPr>
+            <a:xfrm>
+              <a:off x="22365661" y="15798918"/>
+              <a:ext cx="6657975" cy="830997"/>
+            </a:xfrm>
+            <a:prstGeom prst="rect">
+              <a:avLst/>
+            </a:prstGeom>
+            <a:noFill/>
+          </p:spPr>
+          <p:txBody>
+            <a:bodyPr wrap="square" rtlCol="0">
+              <a:spAutoFit/>
+            </a:bodyPr>
+            <a:lstStyle/>
+            <a:p>
+              <a:pPr algn="ctr"/>
+              <a:r>
+                <a:rPr lang="en-IE" sz="4800" b="1" i="1" dirty="0"/>
+                <a:t>6). Dequeue Mutex</a:t>
+              </a:r>
+            </a:p>
+          </p:txBody>
+        </p:sp>
+        <p:grpSp>
+          <p:nvGrpSpPr>
+            <p:cNvPr id="96" name="Group 95">
+              <a:extLst>
+                <a:ext uri="{FF2B5EF4-FFF2-40B4-BE49-F238E27FC236}">
+                  <a16:creationId xmlns:a16="http://schemas.microsoft.com/office/drawing/2014/main" id="{BEB964F5-01B5-3919-71C3-72F33580F0AB}"/>
+                </a:ext>
+              </a:extLst>
+            </p:cNvPr>
+            <p:cNvGrpSpPr/>
+            <p:nvPr/>
+          </p:nvGrpSpPr>
+          <p:grpSpPr>
+            <a:xfrm>
+              <a:off x="21325242" y="16779966"/>
+              <a:ext cx="8392038" cy="4236049"/>
+              <a:chOff x="12363450" y="4232467"/>
+              <a:chExt cx="9277350" cy="5044882"/>
+            </a:xfrm>
+          </p:grpSpPr>
+          <p:sp>
+            <p:nvSpPr>
+              <p:cNvPr id="100" name="Rectangle: Rounded Corners 99">
+                <a:extLst>
+                  <a:ext uri="{FF2B5EF4-FFF2-40B4-BE49-F238E27FC236}">
+                    <a16:creationId xmlns:a16="http://schemas.microsoft.com/office/drawing/2014/main" id="{D1D4EDCD-A5D1-874D-2060-507433C888D5}"/>
+                  </a:ext>
+                </a:extLst>
+              </p:cNvPr>
+              <p:cNvSpPr/>
+              <p:nvPr/>
+            </p:nvSpPr>
+            <p:spPr>
+              <a:xfrm>
+                <a:off x="12363450" y="4232467"/>
+                <a:ext cx="9277350" cy="5044882"/>
+              </a:xfrm>
+              <a:prstGeom prst="roundRect">
+                <a:avLst/>
+              </a:prstGeom>
+              <a:gradFill flip="none" rotWithShape="1">
+                <a:gsLst>
+                  <a:gs pos="0">
+                    <a:schemeClr val="accent1">
+                      <a:shade val="30000"/>
+                      <a:satMod val="115000"/>
+                    </a:schemeClr>
+                  </a:gs>
+                  <a:gs pos="50000">
+                    <a:schemeClr val="accent1">
+                      <a:shade val="67500"/>
+                      <a:satMod val="115000"/>
+                    </a:schemeClr>
+                  </a:gs>
+                  <a:gs pos="100000">
+                    <a:schemeClr val="accent1">
+                      <a:shade val="100000"/>
+                      <a:satMod val="115000"/>
+                    </a:schemeClr>
+                  </a:gs>
+                </a:gsLst>
+                <a:lin ang="13500000" scaled="1"/>
+                <a:tileRect/>
+              </a:gradFill>
+              <a:ln w="57150">
+                <a:solidFill>
+                  <a:schemeClr val="tx1"/>
+                </a:solidFill>
+              </a:ln>
+            </p:spPr>
+            <p:style>
+              <a:lnRef idx="2">
+                <a:schemeClr val="accent1">
+                  <a:shade val="15000"/>
+                </a:schemeClr>
+              </a:lnRef>
+              <a:fillRef idx="1">
+                <a:schemeClr val="accent1"/>
+              </a:fillRef>
+              <a:effectRef idx="0">
+                <a:schemeClr val="accent1"/>
+              </a:effectRef>
+              <a:fontRef idx="minor">
+                <a:schemeClr val="lt1"/>
+              </a:fontRef>
+            </p:style>
+            <p:txBody>
+              <a:bodyPr rtlCol="0" anchor="ctr"/>
+              <a:lstStyle/>
+              <a:p>
+                <a:pPr algn="ctr"/>
+                <a:endParaRPr lang="en-IE" sz="3200" b="1" dirty="0"/>
+              </a:p>
+            </p:txBody>
+          </p:sp>
+          <p:grpSp>
+            <p:nvGrpSpPr>
+              <p:cNvPr id="101" name="Group 100">
+                <a:extLst>
+                  <a:ext uri="{FF2B5EF4-FFF2-40B4-BE49-F238E27FC236}">
+                    <a16:creationId xmlns:a16="http://schemas.microsoft.com/office/drawing/2014/main" id="{0C38E234-E7AC-FB28-218C-CCAB9770B5A1}"/>
+                  </a:ext>
+                </a:extLst>
+              </p:cNvPr>
+              <p:cNvGrpSpPr/>
+              <p:nvPr/>
+            </p:nvGrpSpPr>
+            <p:grpSpPr>
+              <a:xfrm>
+                <a:off x="12515850" y="4385666"/>
+                <a:ext cx="9048750" cy="680484"/>
+                <a:chOff x="914400" y="4442816"/>
+                <a:chExt cx="9048750" cy="680484"/>
+              </a:xfrm>
+            </p:grpSpPr>
+            <p:sp>
+              <p:nvSpPr>
+                <p:cNvPr id="102" name="TextBox 101">
+                  <a:extLst>
+                    <a:ext uri="{FF2B5EF4-FFF2-40B4-BE49-F238E27FC236}">
+                      <a16:creationId xmlns:a16="http://schemas.microsoft.com/office/drawing/2014/main" id="{6D892C4A-C8B2-E3B3-2102-90A87CEA6E3D}"/>
+                    </a:ext>
+                  </a:extLst>
+                </p:cNvPr>
+                <p:cNvSpPr txBox="1"/>
+                <p:nvPr/>
+              </p:nvSpPr>
+              <p:spPr>
+                <a:xfrm>
+                  <a:off x="914400" y="4442816"/>
+                  <a:ext cx="9048750" cy="623124"/>
+                </a:xfrm>
+                <a:prstGeom prst="rect">
+                  <a:avLst/>
+                </a:prstGeom>
+                <a:noFill/>
+              </p:spPr>
+              <p:txBody>
+                <a:bodyPr wrap="square">
+                  <a:spAutoFit/>
+                </a:bodyPr>
+                <a:lstStyle/>
+                <a:p>
+                  <a:pPr algn="ctr"/>
+                  <a:r>
+                    <a:rPr lang="en-IE" sz="2800" b="1" dirty="0">
+                      <a:solidFill>
+                        <a:schemeClr val="bg1"/>
+                      </a:solidFill>
+                    </a:rPr>
+                    <a:t>Clear Central then Election Lock</a:t>
+                  </a:r>
+                </a:p>
+              </p:txBody>
+            </p:sp>
+            <p:cxnSp>
+              <p:nvCxnSpPr>
+                <p:cNvPr id="103" name="Straight Connector 102">
+                  <a:extLst>
+                    <a:ext uri="{FF2B5EF4-FFF2-40B4-BE49-F238E27FC236}">
+                      <a16:creationId xmlns:a16="http://schemas.microsoft.com/office/drawing/2014/main" id="{8F177FCE-694E-26FC-3BDF-DA48A7D41C49}"/>
+                    </a:ext>
+                  </a:extLst>
+                </p:cNvPr>
+                <p:cNvCxnSpPr>
+                  <a:cxnSpLocks/>
+                </p:cNvCxnSpPr>
+                <p:nvPr/>
+              </p:nvCxnSpPr>
+              <p:spPr>
+                <a:xfrm>
+                  <a:off x="1412270" y="5123300"/>
+                  <a:ext cx="8112730" cy="0"/>
+                </a:xfrm>
+                <a:prstGeom prst="line">
+                  <a:avLst/>
+                </a:prstGeom>
+                <a:ln w="19050" cap="flat" cmpd="sng" algn="ctr">
+                  <a:solidFill>
+                    <a:schemeClr val="bg1"/>
+                  </a:solidFill>
+                  <a:prstDash val="dash"/>
+                  <a:round/>
+                  <a:headEnd type="none" w="med" len="med"/>
+                  <a:tailEnd type="none" w="med" len="med"/>
+                </a:ln>
+              </p:spPr>
+              <p:style>
+                <a:lnRef idx="0">
+                  <a:scrgbClr r="0" g="0" b="0"/>
+                </a:lnRef>
+                <a:fillRef idx="0">
+                  <a:scrgbClr r="0" g="0" b="0"/>
+                </a:fillRef>
+                <a:effectRef idx="0">
+                  <a:scrgbClr r="0" g="0" b="0"/>
+                </a:effectRef>
+                <a:fontRef idx="minor">
+                  <a:schemeClr val="tx1"/>
+                </a:fontRef>
+              </p:style>
+            </p:cxnSp>
+          </p:grpSp>
+        </p:grpSp>
+        <p:sp>
+          <p:nvSpPr>
+            <p:cNvPr id="113" name="Arrow: Right 112">
+              <a:extLst>
+                <a:ext uri="{FF2B5EF4-FFF2-40B4-BE49-F238E27FC236}">
+                  <a16:creationId xmlns:a16="http://schemas.microsoft.com/office/drawing/2014/main" id="{5235A552-AB28-96C9-9D25-FE98C601670A}"/>
+                </a:ext>
+              </a:extLst>
+            </p:cNvPr>
+            <p:cNvSpPr/>
+            <p:nvPr/>
+          </p:nvSpPr>
+          <p:spPr>
+            <a:xfrm rot="5400000">
+              <a:off x="13797988" y="12011264"/>
+              <a:ext cx="2656859" cy="1619250"/>
+            </a:xfrm>
+            <a:prstGeom prst="rightArrow">
+              <a:avLst/>
+            </a:prstGeom>
+            <a:gradFill flip="none" rotWithShape="1">
+              <a:gsLst>
+                <a:gs pos="0">
+                  <a:schemeClr val="accent1">
+                    <a:shade val="30000"/>
+                    <a:satMod val="115000"/>
+                  </a:schemeClr>
+                </a:gs>
+                <a:gs pos="50000">
+                  <a:schemeClr val="accent1">
+                    <a:shade val="67500"/>
+                    <a:satMod val="115000"/>
+                  </a:schemeClr>
+                </a:gs>
+                <a:gs pos="100000">
+                  <a:schemeClr val="accent1">
+                    <a:shade val="100000"/>
+                    <a:satMod val="115000"/>
+                  </a:schemeClr>
+                </a:gs>
+              </a:gsLst>
+              <a:lin ang="13500000" scaled="1"/>
+              <a:tileRect/>
+            </a:gradFill>
+            <a:ln w="57150">
+              <a:solidFill>
+                <a:schemeClr val="tx1"/>
+              </a:solidFill>
+            </a:ln>
+          </p:spPr>
+          <p:style>
+            <a:lnRef idx="2">
+              <a:schemeClr val="accent1">
+                <a:shade val="15000"/>
+              </a:schemeClr>
+            </a:lnRef>
+            <a:fillRef idx="1">
+              <a:schemeClr val="accent1"/>
+            </a:fillRef>
+            <a:effectRef idx="0">
+              <a:schemeClr val="accent1"/>
+            </a:effectRef>
+            <a:fontRef idx="minor">
+              <a:schemeClr val="lt1"/>
+            </a:fontRef>
+          </p:style>
+          <p:txBody>
+            <a:bodyPr rtlCol="0" anchor="ctr"/>
+            <a:lstStyle/>
+            <a:p>
+              <a:pPr algn="ctr"/>
+              <a:endParaRPr lang="en-IE"/>
+            </a:p>
+          </p:txBody>
+        </p:sp>
+        <p:grpSp>
+          <p:nvGrpSpPr>
+            <p:cNvPr id="89" name="Group 88">
+              <a:extLst>
+                <a:ext uri="{FF2B5EF4-FFF2-40B4-BE49-F238E27FC236}">
+                  <a16:creationId xmlns:a16="http://schemas.microsoft.com/office/drawing/2014/main" id="{3824AFED-603D-7D8E-5651-3778581935FE}"/>
+                </a:ext>
+              </a:extLst>
+            </p:cNvPr>
+            <p:cNvGrpSpPr/>
+            <p:nvPr/>
+          </p:nvGrpSpPr>
+          <p:grpSpPr>
+            <a:xfrm>
+              <a:off x="734291" y="16906275"/>
+              <a:ext cx="7521575" cy="3842943"/>
+              <a:chOff x="609600" y="4232468"/>
+              <a:chExt cx="9277350" cy="5044882"/>
+            </a:xfrm>
+          </p:grpSpPr>
+          <p:sp>
+            <p:nvSpPr>
+              <p:cNvPr id="108" name="Rectangle: Rounded Corners 107">
+                <a:extLst>
+                  <a:ext uri="{FF2B5EF4-FFF2-40B4-BE49-F238E27FC236}">
+                    <a16:creationId xmlns:a16="http://schemas.microsoft.com/office/drawing/2014/main" id="{63642D35-62E7-4F25-2914-F20F10C76A8C}"/>
+                  </a:ext>
+                </a:extLst>
+              </p:cNvPr>
+              <p:cNvSpPr/>
+              <p:nvPr/>
+            </p:nvSpPr>
+            <p:spPr>
+              <a:xfrm>
+                <a:off x="609600" y="4232468"/>
+                <a:ext cx="9277350" cy="5044882"/>
+              </a:xfrm>
+              <a:prstGeom prst="roundRect">
+                <a:avLst/>
+              </a:prstGeom>
+              <a:gradFill flip="none" rotWithShape="1">
+                <a:gsLst>
+                  <a:gs pos="0">
+                    <a:schemeClr val="accent1">
+                      <a:shade val="30000"/>
+                      <a:satMod val="115000"/>
+                    </a:schemeClr>
+                  </a:gs>
+                  <a:gs pos="50000">
+                    <a:schemeClr val="accent1">
+                      <a:shade val="67500"/>
+                      <a:satMod val="115000"/>
+                    </a:schemeClr>
+                  </a:gs>
+                  <a:gs pos="100000">
+                    <a:schemeClr val="accent1">
+                      <a:shade val="100000"/>
+                      <a:satMod val="115000"/>
+                    </a:schemeClr>
+                  </a:gs>
+                </a:gsLst>
+                <a:lin ang="13500000" scaled="1"/>
+                <a:tileRect/>
+              </a:gradFill>
+              <a:ln w="57150">
+                <a:solidFill>
+                  <a:schemeClr val="tx1"/>
+                </a:solidFill>
+              </a:ln>
+            </p:spPr>
+            <p:style>
+              <a:lnRef idx="2">
+                <a:schemeClr val="accent1">
+                  <a:shade val="15000"/>
+                </a:schemeClr>
+              </a:lnRef>
+              <a:fillRef idx="1">
+                <a:schemeClr val="accent1"/>
+              </a:fillRef>
+              <a:effectRef idx="0">
+                <a:schemeClr val="accent1"/>
+              </a:effectRef>
+              <a:fontRef idx="minor">
+                <a:schemeClr val="lt1"/>
+              </a:fontRef>
+            </p:style>
+            <p:txBody>
+              <a:bodyPr rtlCol="0" anchor="ctr"/>
+              <a:lstStyle/>
+              <a:p>
+                <a:endParaRPr lang="en-IE" sz="3200" b="1" dirty="0"/>
+              </a:p>
+            </p:txBody>
+          </p:sp>
+          <p:grpSp>
+            <p:nvGrpSpPr>
+              <p:cNvPr id="109" name="Group 108">
+                <a:extLst>
+                  <a:ext uri="{FF2B5EF4-FFF2-40B4-BE49-F238E27FC236}">
+                    <a16:creationId xmlns:a16="http://schemas.microsoft.com/office/drawing/2014/main" id="{4C706FEC-6D43-6EF3-8962-CE9C89EDB1A5}"/>
+                  </a:ext>
+                </a:extLst>
+              </p:cNvPr>
+              <p:cNvGrpSpPr/>
+              <p:nvPr/>
+            </p:nvGrpSpPr>
+            <p:grpSpPr>
+              <a:xfrm>
+                <a:off x="609600" y="4385666"/>
+                <a:ext cx="9048750" cy="689940"/>
+                <a:chOff x="914400" y="4442816"/>
+                <a:chExt cx="9048750" cy="689940"/>
+              </a:xfrm>
+            </p:grpSpPr>
+            <p:sp>
+              <p:nvSpPr>
+                <p:cNvPr id="110" name="TextBox 109">
+                  <a:extLst>
+                    <a:ext uri="{FF2B5EF4-FFF2-40B4-BE49-F238E27FC236}">
+                      <a16:creationId xmlns:a16="http://schemas.microsoft.com/office/drawing/2014/main" id="{5FB26764-FE71-E2BA-81BD-1A41BC916065}"/>
+                    </a:ext>
+                  </a:extLst>
+                </p:cNvPr>
+                <p:cNvSpPr txBox="1"/>
+                <p:nvPr/>
+              </p:nvSpPr>
+              <p:spPr>
+                <a:xfrm>
+                  <a:off x="914400" y="4442816"/>
+                  <a:ext cx="9048750" cy="686866"/>
+                </a:xfrm>
+                <a:prstGeom prst="rect">
+                  <a:avLst/>
+                </a:prstGeom>
+                <a:noFill/>
+              </p:spPr>
+              <p:txBody>
+                <a:bodyPr wrap="square">
+                  <a:spAutoFit/>
+                </a:bodyPr>
+                <a:lstStyle/>
+                <a:p>
+                  <a:pPr algn="ctr"/>
+                  <a:r>
+                    <a:rPr lang="en-IE" sz="2800" b="1" dirty="0">
+                      <a:solidFill>
+                        <a:schemeClr val="bg1"/>
+                      </a:solidFill>
+                    </a:rPr>
+                    <a:t>FileChannel Lock on Central LockFile</a:t>
+                  </a:r>
+                </a:p>
+              </p:txBody>
+            </p:sp>
+            <p:cxnSp>
+              <p:nvCxnSpPr>
+                <p:cNvPr id="111" name="Straight Connector 110">
+                  <a:extLst>
+                    <a:ext uri="{FF2B5EF4-FFF2-40B4-BE49-F238E27FC236}">
+                      <a16:creationId xmlns:a16="http://schemas.microsoft.com/office/drawing/2014/main" id="{D438D6CE-796E-F0D7-2297-DD9F25BC0390}"/>
+                    </a:ext>
+                  </a:extLst>
+                </p:cNvPr>
+                <p:cNvCxnSpPr>
+                  <a:cxnSpLocks/>
+                </p:cNvCxnSpPr>
+                <p:nvPr/>
+              </p:nvCxnSpPr>
+              <p:spPr>
+                <a:xfrm>
+                  <a:off x="1497160" y="5132756"/>
+                  <a:ext cx="8032762" cy="0"/>
+                </a:xfrm>
+                <a:prstGeom prst="line">
+                  <a:avLst/>
+                </a:prstGeom>
+                <a:ln w="19050" cap="flat" cmpd="sng" algn="ctr">
+                  <a:solidFill>
+                    <a:schemeClr val="bg1"/>
+                  </a:solidFill>
+                  <a:prstDash val="dash"/>
+                  <a:round/>
+                  <a:headEnd type="none" w="med" len="med"/>
+                  <a:tailEnd type="none" w="med" len="med"/>
+                </a:ln>
+              </p:spPr>
+              <p:style>
+                <a:lnRef idx="0">
+                  <a:scrgbClr r="0" g="0" b="0"/>
+                </a:lnRef>
+                <a:fillRef idx="0">
+                  <a:scrgbClr r="0" g="0" b="0"/>
+                </a:fillRef>
+                <a:effectRef idx="0">
+                  <a:scrgbClr r="0" g="0" b="0"/>
+                </a:effectRef>
+                <a:fontRef idx="minor">
+                  <a:schemeClr val="tx1"/>
+                </a:fontRef>
+              </p:style>
+            </p:cxnSp>
+          </p:grpSp>
+        </p:grpSp>
+        <p:grpSp>
+          <p:nvGrpSpPr>
+            <p:cNvPr id="122" name="Group 121">
+              <a:extLst>
+                <a:ext uri="{FF2B5EF4-FFF2-40B4-BE49-F238E27FC236}">
+                  <a16:creationId xmlns:a16="http://schemas.microsoft.com/office/drawing/2014/main" id="{2E5359AA-2A23-D204-F4FF-03D4CC2A86B1}"/>
+                </a:ext>
+              </a:extLst>
+            </p:cNvPr>
+            <p:cNvGrpSpPr/>
+            <p:nvPr/>
+          </p:nvGrpSpPr>
+          <p:grpSpPr>
+            <a:xfrm>
+              <a:off x="2801215" y="17754707"/>
+              <a:ext cx="3140911" cy="2301407"/>
+              <a:chOff x="1939924" y="18109350"/>
+              <a:chExt cx="3573819" cy="2536825"/>
+            </a:xfrm>
+          </p:grpSpPr>
+          <p:pic>
+            <p:nvPicPr>
+              <p:cNvPr id="120" name="Graphic 119" descr="Lock outline">
+                <a:extLst>
+                  <a:ext uri="{FF2B5EF4-FFF2-40B4-BE49-F238E27FC236}">
+                    <a16:creationId xmlns:a16="http://schemas.microsoft.com/office/drawing/2014/main" id="{7B630FEC-92E0-4756-D730-8992B212194C}"/>
+                  </a:ext>
+                </a:extLst>
+              </p:cNvPr>
+              <p:cNvPicPr>
+                <a:picLocks noChangeAspect="1"/>
+              </p:cNvPicPr>
+              <p:nvPr/>
+            </p:nvPicPr>
+            <p:blipFill>
+              <a:blip>
+                <a:extLst>
+                  <a:ext uri="{96DAC541-7B7A-43D3-8B79-37D633B846F1}">
+                    <asvg:svgBlip xmlns:asvg="http://schemas.microsoft.com/office/drawing/2016/SVG/main" r:embed="rId5"/>
+                  </a:ext>
+                </a:extLst>
+              </a:blip>
+              <a:stretch>
+                <a:fillRect/>
+              </a:stretch>
+            </p:blipFill>
+            <p:spPr>
+              <a:xfrm>
+                <a:off x="3836986" y="18584802"/>
+                <a:ext cx="1676757" cy="1676757"/>
+              </a:xfrm>
+              <a:prstGeom prst="rect">
+                <a:avLst/>
+              </a:prstGeom>
+            </p:spPr>
+          </p:pic>
+          <p:pic>
+            <p:nvPicPr>
+              <p:cNvPr id="121" name="Graphic 120" descr="Document with solid fill">
+                <a:extLst>
+                  <a:ext uri="{FF2B5EF4-FFF2-40B4-BE49-F238E27FC236}">
+                    <a16:creationId xmlns:a16="http://schemas.microsoft.com/office/drawing/2014/main" id="{9A7FF259-FA79-C04A-27C7-5666BA552DE4}"/>
+                  </a:ext>
+                </a:extLst>
+              </p:cNvPr>
+              <p:cNvPicPr>
+                <a:picLocks noChangeAspect="1"/>
+              </p:cNvPicPr>
+              <p:nvPr/>
+            </p:nvPicPr>
+            <p:blipFill>
+              <a:blip>
+                <a:extLst>
+                  <a:ext uri="{96DAC541-7B7A-43D3-8B79-37D633B846F1}">
+                    <asvg:svgBlip xmlns:asvg="http://schemas.microsoft.com/office/drawing/2016/SVG/main" r:embed="rId6"/>
+                  </a:ext>
+                </a:extLst>
+              </a:blip>
+              <a:stretch>
+                <a:fillRect/>
+              </a:stretch>
+            </p:blipFill>
+            <p:spPr>
+              <a:xfrm>
+                <a:off x="1939924" y="18109350"/>
+                <a:ext cx="2536825" cy="2536825"/>
+              </a:xfrm>
+              <a:prstGeom prst="rect">
+                <a:avLst/>
+              </a:prstGeom>
+            </p:spPr>
+          </p:pic>
+        </p:grpSp>
+        <p:grpSp>
+          <p:nvGrpSpPr>
+            <p:cNvPr id="91" name="Group 90">
+              <a:extLst>
+                <a:ext uri="{FF2B5EF4-FFF2-40B4-BE49-F238E27FC236}">
+                  <a16:creationId xmlns:a16="http://schemas.microsoft.com/office/drawing/2014/main" id="{58AADD96-942D-E95B-B1E7-25F4E2905E02}"/>
+                </a:ext>
+              </a:extLst>
+            </p:cNvPr>
+            <p:cNvGrpSpPr/>
+            <p:nvPr/>
+          </p:nvGrpSpPr>
+          <p:grpSpPr>
+            <a:xfrm>
+              <a:off x="11122891" y="16906275"/>
+              <a:ext cx="7023100" cy="3919143"/>
+              <a:chOff x="12363450" y="4232467"/>
+              <a:chExt cx="9277350" cy="5044882"/>
+            </a:xfrm>
+          </p:grpSpPr>
+          <p:sp>
+            <p:nvSpPr>
+              <p:cNvPr id="104" name="Rectangle: Rounded Corners 103">
+                <a:extLst>
+                  <a:ext uri="{FF2B5EF4-FFF2-40B4-BE49-F238E27FC236}">
+                    <a16:creationId xmlns:a16="http://schemas.microsoft.com/office/drawing/2014/main" id="{8CE5F9D7-906C-B109-E9C5-E0D38401E58F}"/>
+                  </a:ext>
+                </a:extLst>
+              </p:cNvPr>
+              <p:cNvSpPr/>
+              <p:nvPr/>
+            </p:nvSpPr>
+            <p:spPr>
+              <a:xfrm>
+                <a:off x="12363450" y="4232467"/>
+                <a:ext cx="9277350" cy="5044882"/>
+              </a:xfrm>
+              <a:prstGeom prst="roundRect">
+                <a:avLst/>
+              </a:prstGeom>
+              <a:gradFill flip="none" rotWithShape="1">
+                <a:gsLst>
+                  <a:gs pos="0">
+                    <a:schemeClr val="accent1">
+                      <a:shade val="30000"/>
+                      <a:satMod val="115000"/>
+                    </a:schemeClr>
+                  </a:gs>
+                  <a:gs pos="50000">
+                    <a:schemeClr val="accent1">
+                      <a:shade val="67500"/>
+                      <a:satMod val="115000"/>
+                    </a:schemeClr>
+                  </a:gs>
+                  <a:gs pos="100000">
+                    <a:schemeClr val="accent1">
+                      <a:shade val="100000"/>
+                      <a:satMod val="115000"/>
+                    </a:schemeClr>
+                  </a:gs>
+                </a:gsLst>
+                <a:lin ang="13500000" scaled="1"/>
+                <a:tileRect/>
+              </a:gradFill>
+              <a:ln w="57150">
+                <a:solidFill>
+                  <a:schemeClr val="tx1"/>
+                </a:solidFill>
+              </a:ln>
+            </p:spPr>
+            <p:style>
+              <a:lnRef idx="2">
+                <a:schemeClr val="accent1">
+                  <a:shade val="15000"/>
+                </a:schemeClr>
+              </a:lnRef>
+              <a:fillRef idx="1">
+                <a:schemeClr val="accent1"/>
+              </a:fillRef>
+              <a:effectRef idx="0">
+                <a:schemeClr val="accent1"/>
+              </a:effectRef>
+              <a:fontRef idx="minor">
+                <a:schemeClr val="lt1"/>
+              </a:fontRef>
+            </p:style>
+            <p:txBody>
+              <a:bodyPr rtlCol="0" anchor="ctr"/>
+              <a:lstStyle/>
+              <a:p>
+                <a:pPr algn="ctr"/>
+                <a:endParaRPr lang="en-IE" sz="3200" b="1" dirty="0"/>
+              </a:p>
+            </p:txBody>
+          </p:sp>
+          <p:grpSp>
+            <p:nvGrpSpPr>
+              <p:cNvPr id="105" name="Group 104">
+                <a:extLst>
+                  <a:ext uri="{FF2B5EF4-FFF2-40B4-BE49-F238E27FC236}">
+                    <a16:creationId xmlns:a16="http://schemas.microsoft.com/office/drawing/2014/main" id="{EFB25828-2711-D2B1-17B2-15EC5A261F83}"/>
+                  </a:ext>
+                </a:extLst>
+              </p:cNvPr>
+              <p:cNvGrpSpPr/>
+              <p:nvPr/>
+            </p:nvGrpSpPr>
+            <p:grpSpPr>
+              <a:xfrm>
+                <a:off x="12515850" y="4385666"/>
+                <a:ext cx="9048750" cy="692714"/>
+                <a:chOff x="914400" y="4442816"/>
+                <a:chExt cx="9048750" cy="692714"/>
+              </a:xfrm>
+            </p:grpSpPr>
+            <p:sp>
+              <p:nvSpPr>
+                <p:cNvPr id="106" name="TextBox 105">
+                  <a:extLst>
+                    <a:ext uri="{FF2B5EF4-FFF2-40B4-BE49-F238E27FC236}">
+                      <a16:creationId xmlns:a16="http://schemas.microsoft.com/office/drawing/2014/main" id="{401BD3F1-B161-5045-06D8-A48535812444}"/>
+                    </a:ext>
+                  </a:extLst>
+                </p:cNvPr>
+                <p:cNvSpPr txBox="1"/>
+                <p:nvPr/>
+              </p:nvSpPr>
+              <p:spPr>
+                <a:xfrm>
+                  <a:off x="914400" y="4442816"/>
+                  <a:ext cx="9048750" cy="673511"/>
+                </a:xfrm>
+                <a:prstGeom prst="rect">
+                  <a:avLst/>
+                </a:prstGeom>
+                <a:noFill/>
+              </p:spPr>
+              <p:txBody>
+                <a:bodyPr wrap="square">
+                  <a:spAutoFit/>
+                </a:bodyPr>
+                <a:lstStyle/>
+                <a:p>
+                  <a:pPr algn="ctr"/>
+                  <a:r>
+                    <a:rPr lang="en-IE" sz="2800" b="1" dirty="0">
+                      <a:solidFill>
+                        <a:schemeClr val="bg1"/>
+                      </a:solidFill>
+                    </a:rPr>
+                    <a:t>Run Job</a:t>
+                  </a:r>
+                </a:p>
+              </p:txBody>
+            </p:sp>
+            <p:cxnSp>
+              <p:nvCxnSpPr>
+                <p:cNvPr id="107" name="Straight Connector 106">
+                  <a:extLst>
+                    <a:ext uri="{FF2B5EF4-FFF2-40B4-BE49-F238E27FC236}">
+                      <a16:creationId xmlns:a16="http://schemas.microsoft.com/office/drawing/2014/main" id="{F6133D7E-94E1-7137-40DE-0C6131EF1123}"/>
+                    </a:ext>
+                  </a:extLst>
+                </p:cNvPr>
+                <p:cNvCxnSpPr>
+                  <a:cxnSpLocks/>
+                </p:cNvCxnSpPr>
+                <p:nvPr/>
+              </p:nvCxnSpPr>
+              <p:spPr>
+                <a:xfrm>
+                  <a:off x="1412269" y="5135530"/>
+                  <a:ext cx="8112730" cy="0"/>
+                </a:xfrm>
+                <a:prstGeom prst="line">
+                  <a:avLst/>
+                </a:prstGeom>
+                <a:ln w="19050" cap="flat" cmpd="sng" algn="ctr">
+                  <a:solidFill>
+                    <a:schemeClr val="bg1"/>
+                  </a:solidFill>
+                  <a:prstDash val="dash"/>
+                  <a:round/>
+                  <a:headEnd type="none" w="med" len="med"/>
+                  <a:tailEnd type="none" w="med" len="med"/>
+                </a:ln>
+              </p:spPr>
+              <p:style>
+                <a:lnRef idx="0">
+                  <a:scrgbClr r="0" g="0" b="0"/>
+                </a:lnRef>
+                <a:fillRef idx="0">
+                  <a:scrgbClr r="0" g="0" b="0"/>
+                </a:fillRef>
+                <a:effectRef idx="0">
+                  <a:scrgbClr r="0" g="0" b="0"/>
+                </a:effectRef>
+                <a:fontRef idx="minor">
+                  <a:schemeClr val="tx1"/>
+                </a:fontRef>
+              </p:style>
+            </p:cxnSp>
+          </p:grpSp>
+        </p:grpSp>
+        <p:grpSp>
+          <p:nvGrpSpPr>
+            <p:cNvPr id="132" name="Group 131">
+              <a:extLst>
+                <a:ext uri="{FF2B5EF4-FFF2-40B4-BE49-F238E27FC236}">
+                  <a16:creationId xmlns:a16="http://schemas.microsoft.com/office/drawing/2014/main" id="{5D7E449F-558E-2A82-83D0-0DD18C718BCB}"/>
+                </a:ext>
+              </a:extLst>
+            </p:cNvPr>
+            <p:cNvGrpSpPr/>
+            <p:nvPr/>
+          </p:nvGrpSpPr>
+          <p:grpSpPr>
+            <a:xfrm>
+              <a:off x="12985467" y="17592118"/>
+              <a:ext cx="4074674" cy="2638970"/>
+              <a:chOff x="15089626" y="18117665"/>
+              <a:chExt cx="2911547" cy="2214581"/>
+            </a:xfrm>
+          </p:grpSpPr>
+          <p:pic>
+            <p:nvPicPr>
+              <p:cNvPr id="130" name="Graphic 129" descr="Database outline">
+                <a:extLst>
+                  <a:ext uri="{FF2B5EF4-FFF2-40B4-BE49-F238E27FC236}">
+                    <a16:creationId xmlns:a16="http://schemas.microsoft.com/office/drawing/2014/main" id="{A1B2ADF8-6F5C-75F1-C094-9E6AE9F71215}"/>
+                  </a:ext>
+                </a:extLst>
+              </p:cNvPr>
+              <p:cNvPicPr>
+                <a:picLocks noChangeAspect="1"/>
+              </p:cNvPicPr>
+              <p:nvPr/>
+            </p:nvPicPr>
+            <p:blipFill>
+              <a:blip>
+                <a:extLst>
+                  <a:ext uri="{96DAC541-7B7A-43D3-8B79-37D633B846F1}">
+                    <asvg:svgBlip xmlns:asvg="http://schemas.microsoft.com/office/drawing/2016/SVG/main" r:embed="rId7"/>
+                  </a:ext>
+                </a:extLst>
+              </a:blip>
+              <a:stretch>
+                <a:fillRect/>
+              </a:stretch>
+            </p:blipFill>
+            <p:spPr>
+              <a:xfrm>
+                <a:off x="15089626" y="18117665"/>
+                <a:ext cx="2214581" cy="2214581"/>
+              </a:xfrm>
+              <a:prstGeom prst="rect">
+                <a:avLst/>
+              </a:prstGeom>
+            </p:spPr>
+          </p:pic>
+          <p:pic>
+            <p:nvPicPr>
+              <p:cNvPr id="131" name="Graphic 130" descr="Gears outline">
+                <a:extLst>
+                  <a:ext uri="{FF2B5EF4-FFF2-40B4-BE49-F238E27FC236}">
+                    <a16:creationId xmlns:a16="http://schemas.microsoft.com/office/drawing/2014/main" id="{728D8DAC-7377-4510-7121-8CD0C52F6925}"/>
+                  </a:ext>
+                </a:extLst>
+              </p:cNvPr>
+              <p:cNvPicPr>
+                <a:picLocks noChangeAspect="1"/>
+              </p:cNvPicPr>
+              <p:nvPr/>
+            </p:nvPicPr>
+            <p:blipFill>
+              <a:blip>
+                <a:extLst>
+                  <a:ext uri="{96DAC541-7B7A-43D3-8B79-37D633B846F1}">
+                    <asvg:svgBlip xmlns:asvg="http://schemas.microsoft.com/office/drawing/2016/SVG/main" r:embed="rId8"/>
+                  </a:ext>
+                </a:extLst>
+              </a:blip>
+              <a:stretch>
+                <a:fillRect/>
+              </a:stretch>
+            </p:blipFill>
+            <p:spPr>
+              <a:xfrm>
+                <a:off x="16511777" y="18356709"/>
+                <a:ext cx="1489396" cy="1489396"/>
+              </a:xfrm>
+              <a:prstGeom prst="rect">
+                <a:avLst/>
+              </a:prstGeom>
+            </p:spPr>
+          </p:pic>
+        </p:grpSp>
+        <p:sp>
+          <p:nvSpPr>
+            <p:cNvPr id="138" name="Minus Sign 137">
+              <a:extLst>
+                <a:ext uri="{FF2B5EF4-FFF2-40B4-BE49-F238E27FC236}">
+                  <a16:creationId xmlns:a16="http://schemas.microsoft.com/office/drawing/2014/main" id="{C48D16BE-8A2E-3ACD-419B-BB62C0A67363}"/>
+                </a:ext>
+              </a:extLst>
+            </p:cNvPr>
+            <p:cNvSpPr/>
+            <p:nvPr/>
+          </p:nvSpPr>
+          <p:spPr>
+            <a:xfrm rot="2461338">
+              <a:off x="25800995" y="18645329"/>
+              <a:ext cx="4601827" cy="763631"/>
+            </a:xfrm>
+            <a:prstGeom prst="mathMinus">
+              <a:avLst/>
+            </a:prstGeom>
+            <a:solidFill>
+              <a:schemeClr val="accent6">
+                <a:lumMod val="60000"/>
+                <a:lumOff val="40000"/>
+              </a:schemeClr>
+            </a:solidFill>
+            <a:ln>
+              <a:solidFill>
+                <a:schemeClr val="accent6">
+                  <a:lumMod val="60000"/>
+                  <a:lumOff val="40000"/>
+                </a:schemeClr>
+              </a:solidFill>
+            </a:ln>
+          </p:spPr>
+          <p:style>
+            <a:lnRef idx="2">
+              <a:schemeClr val="accent1">
+                <a:shade val="15000"/>
+              </a:schemeClr>
+            </a:lnRef>
+            <a:fillRef idx="1">
+              <a:schemeClr val="accent1"/>
+            </a:fillRef>
+            <a:effectRef idx="0">
+              <a:schemeClr val="accent1"/>
+            </a:effectRef>
+            <a:fontRef idx="minor">
+              <a:schemeClr val="lt1"/>
+            </a:fontRef>
+          </p:style>
+          <p:txBody>
+            <a:bodyPr rtlCol="0" anchor="ctr"/>
+            <a:lstStyle/>
+            <a:p>
+              <a:pPr algn="ctr"/>
+              <a:endParaRPr lang="en-IE"/>
+            </a:p>
+          </p:txBody>
+        </p:sp>
+        <p:grpSp>
+          <p:nvGrpSpPr>
+            <p:cNvPr id="148" name="Group 147">
+              <a:extLst>
+                <a:ext uri="{FF2B5EF4-FFF2-40B4-BE49-F238E27FC236}">
+                  <a16:creationId xmlns:a16="http://schemas.microsoft.com/office/drawing/2014/main" id="{FE2729AB-7D31-09EC-B6D4-DD02446E99F7}"/>
+                </a:ext>
+              </a:extLst>
+            </p:cNvPr>
+            <p:cNvGrpSpPr/>
+            <p:nvPr/>
+          </p:nvGrpSpPr>
+          <p:grpSpPr>
+            <a:xfrm>
+              <a:off x="20892445" y="18037170"/>
+              <a:ext cx="8251657" cy="2105025"/>
+              <a:chOff x="20920154" y="17681571"/>
+              <a:chExt cx="8251657" cy="2105025"/>
+            </a:xfrm>
+          </p:grpSpPr>
+          <p:sp>
+            <p:nvSpPr>
+              <p:cNvPr id="99" name="Arrow: Right 98">
+                <a:extLst>
+                  <a:ext uri="{FF2B5EF4-FFF2-40B4-BE49-F238E27FC236}">
+                    <a16:creationId xmlns:a16="http://schemas.microsoft.com/office/drawing/2014/main" id="{9BFB6834-0C7D-E9A4-ED0F-4C588162AC49}"/>
+                  </a:ext>
+                </a:extLst>
+              </p:cNvPr>
+              <p:cNvSpPr/>
+              <p:nvPr/>
+            </p:nvSpPr>
+            <p:spPr>
+              <a:xfrm>
+                <a:off x="24851915" y="18210209"/>
+                <a:ext cx="1828800" cy="981939"/>
+              </a:xfrm>
+              <a:prstGeom prst="rightArrow">
+                <a:avLst/>
+              </a:prstGeom>
+              <a:solidFill>
+                <a:schemeClr val="accent2"/>
+              </a:solidFill>
+              <a:ln w="57150">
+                <a:solidFill>
+                  <a:schemeClr val="tx1"/>
+                </a:solidFill>
+              </a:ln>
+            </p:spPr>
+            <p:style>
+              <a:lnRef idx="2">
+                <a:schemeClr val="accent1">
+                  <a:shade val="15000"/>
+                </a:schemeClr>
+              </a:lnRef>
+              <a:fillRef idx="1">
+                <a:schemeClr val="accent1"/>
+              </a:fillRef>
+              <a:effectRef idx="0">
+                <a:schemeClr val="accent1"/>
+              </a:effectRef>
+              <a:fontRef idx="minor">
+                <a:schemeClr val="lt1"/>
+              </a:fontRef>
+            </p:style>
+            <p:txBody>
+              <a:bodyPr rtlCol="0" anchor="ctr"/>
+              <a:lstStyle/>
+              <a:p>
+                <a:pPr algn="ctr"/>
+                <a:endParaRPr lang="en-IE"/>
+              </a:p>
+            </p:txBody>
+          </p:sp>
+          <p:grpSp>
+            <p:nvGrpSpPr>
+              <p:cNvPr id="135" name="Group 134">
+                <a:extLst>
+                  <a:ext uri="{FF2B5EF4-FFF2-40B4-BE49-F238E27FC236}">
+                    <a16:creationId xmlns:a16="http://schemas.microsoft.com/office/drawing/2014/main" id="{8D3338D0-9143-5ED2-2FAA-962AD88F8957}"/>
+                  </a:ext>
+                </a:extLst>
+              </p:cNvPr>
+              <p:cNvGrpSpPr/>
+              <p:nvPr/>
+            </p:nvGrpSpPr>
+            <p:grpSpPr>
+              <a:xfrm>
+                <a:off x="21995031" y="17702978"/>
+                <a:ext cx="2427822" cy="1996402"/>
+                <a:chOff x="26375777" y="17930059"/>
+                <a:chExt cx="3573819" cy="2536825"/>
+              </a:xfrm>
+            </p:grpSpPr>
+            <p:pic>
+              <p:nvPicPr>
+                <p:cNvPr id="133" name="Graphic 132" descr="Lock outline">
+                  <a:extLst>
+                    <a:ext uri="{FF2B5EF4-FFF2-40B4-BE49-F238E27FC236}">
+                      <a16:creationId xmlns:a16="http://schemas.microsoft.com/office/drawing/2014/main" id="{A193D7A6-EA2C-4556-C775-0E301B707948}"/>
+                    </a:ext>
+                  </a:extLst>
+                </p:cNvPr>
+                <p:cNvPicPr>
+                  <a:picLocks noChangeAspect="1"/>
+                </p:cNvPicPr>
+                <p:nvPr/>
+              </p:nvPicPr>
+              <p:blipFill>
+                <a:blip>
+                  <a:extLst>
+                    <a:ext uri="{96DAC541-7B7A-43D3-8B79-37D633B846F1}">
+                      <asvg:svgBlip xmlns:asvg="http://schemas.microsoft.com/office/drawing/2016/SVG/main" r:embed="rId5"/>
+                    </a:ext>
+                  </a:extLst>
+                </a:blip>
+                <a:stretch>
+                  <a:fillRect/>
+                </a:stretch>
+              </p:blipFill>
+              <p:spPr>
+                <a:xfrm>
+                  <a:off x="28272839" y="18405511"/>
+                  <a:ext cx="1676757" cy="1676757"/>
+                </a:xfrm>
+                <a:prstGeom prst="rect">
+                  <a:avLst/>
+                </a:prstGeom>
+              </p:spPr>
+            </p:pic>
+            <p:pic>
+              <p:nvPicPr>
+                <p:cNvPr id="134" name="Graphic 133" descr="Document with solid fill">
+                  <a:extLst>
+                    <a:ext uri="{FF2B5EF4-FFF2-40B4-BE49-F238E27FC236}">
+                      <a16:creationId xmlns:a16="http://schemas.microsoft.com/office/drawing/2014/main" id="{45B2C3B3-84ED-56A1-57A4-39CBF959ED92}"/>
+                    </a:ext>
+                  </a:extLst>
+                </p:cNvPr>
+                <p:cNvPicPr>
+                  <a:picLocks noChangeAspect="1"/>
+                </p:cNvPicPr>
+                <p:nvPr/>
+              </p:nvPicPr>
+              <p:blipFill>
+                <a:blip>
+                  <a:extLst>
+                    <a:ext uri="{96DAC541-7B7A-43D3-8B79-37D633B846F1}">
+                      <asvg:svgBlip xmlns:asvg="http://schemas.microsoft.com/office/drawing/2016/SVG/main" r:embed="rId6"/>
+                    </a:ext>
+                  </a:extLst>
+                </a:blip>
+                <a:stretch>
+                  <a:fillRect/>
+                </a:stretch>
+              </p:blipFill>
+              <p:spPr>
+                <a:xfrm>
+                  <a:off x="26375777" y="17930059"/>
+                  <a:ext cx="2536825" cy="2536825"/>
+                </a:xfrm>
+                <a:prstGeom prst="rect">
+                  <a:avLst/>
+                </a:prstGeom>
+              </p:spPr>
+            </p:pic>
+          </p:grpSp>
+          <p:pic>
+            <p:nvPicPr>
+              <p:cNvPr id="97" name="Graphic 96" descr="Alarm Ringing outline">
+                <a:extLst>
+                  <a:ext uri="{FF2B5EF4-FFF2-40B4-BE49-F238E27FC236}">
+                    <a16:creationId xmlns:a16="http://schemas.microsoft.com/office/drawing/2014/main" id="{7DD1699D-8A5C-2C89-E485-D1DE7EA636B5}"/>
+                  </a:ext>
+                </a:extLst>
+              </p:cNvPr>
+              <p:cNvPicPr>
+                <a:picLocks noChangeAspect="1"/>
+              </p:cNvPicPr>
+              <p:nvPr/>
+            </p:nvPicPr>
+            <p:blipFill>
+              <a:blip>
+                <a:extLst>
+                  <a:ext uri="{96DAC541-7B7A-43D3-8B79-37D633B846F1}">
+                    <asvg:svgBlip xmlns:asvg="http://schemas.microsoft.com/office/drawing/2016/SVG/main" r:embed="rId9"/>
+                  </a:ext>
+                </a:extLst>
+              </a:blip>
+              <a:stretch>
+                <a:fillRect/>
+              </a:stretch>
+            </p:blipFill>
+            <p:spPr>
+              <a:xfrm>
+                <a:off x="27066786" y="17681571"/>
+                <a:ext cx="2105025" cy="2105025"/>
+              </a:xfrm>
+              <a:prstGeom prst="rect">
+                <a:avLst/>
+              </a:prstGeom>
+            </p:spPr>
+          </p:pic>
+          <p:sp>
+            <p:nvSpPr>
+              <p:cNvPr id="141" name="Minus Sign 140">
+                <a:extLst>
+                  <a:ext uri="{FF2B5EF4-FFF2-40B4-BE49-F238E27FC236}">
+                    <a16:creationId xmlns:a16="http://schemas.microsoft.com/office/drawing/2014/main" id="{D1BB6AE0-ED32-E388-CB7C-69E78586C5B7}"/>
+                  </a:ext>
+                </a:extLst>
+              </p:cNvPr>
+              <p:cNvSpPr/>
+              <p:nvPr/>
+            </p:nvSpPr>
+            <p:spPr>
+              <a:xfrm rot="2461338">
+                <a:off x="20920154" y="18264330"/>
+                <a:ext cx="4601827" cy="763631"/>
+              </a:xfrm>
+              <a:prstGeom prst="mathMinus">
+                <a:avLst/>
+              </a:prstGeom>
+              <a:solidFill>
+                <a:schemeClr val="accent6">
+                  <a:lumMod val="60000"/>
+                  <a:lumOff val="40000"/>
+                </a:schemeClr>
+              </a:solidFill>
+              <a:ln>
+                <a:solidFill>
+                  <a:schemeClr val="accent6">
+                    <a:lumMod val="60000"/>
+                    <a:lumOff val="40000"/>
+                  </a:schemeClr>
+                </a:solidFill>
+              </a:ln>
+            </p:spPr>
+            <p:style>
+              <a:lnRef idx="2">
+                <a:schemeClr val="accent1">
+                  <a:shade val="15000"/>
+                </a:schemeClr>
+              </a:lnRef>
+              <a:fillRef idx="1">
+                <a:schemeClr val="accent1"/>
+              </a:fillRef>
+              <a:effectRef idx="0">
+                <a:schemeClr val="accent1"/>
+              </a:effectRef>
+              <a:fontRef idx="minor">
+                <a:schemeClr val="lt1"/>
+              </a:fontRef>
+            </p:style>
+            <p:txBody>
+              <a:bodyPr rtlCol="0" anchor="ctr"/>
+              <a:lstStyle/>
+              <a:p>
+                <a:pPr algn="ctr"/>
+                <a:endParaRPr lang="en-IE"/>
+              </a:p>
+            </p:txBody>
+          </p:sp>
+        </p:grpSp>
+        <p:sp>
+          <p:nvSpPr>
+            <p:cNvPr id="143" name="TextBox 142">
+              <a:extLst>
+                <a:ext uri="{FF2B5EF4-FFF2-40B4-BE49-F238E27FC236}">
+                  <a16:creationId xmlns:a16="http://schemas.microsoft.com/office/drawing/2014/main" id="{779D6EF5-6E71-750C-C968-275F246CB369}"/>
+                </a:ext>
+              </a:extLst>
+            </p:cNvPr>
+            <p:cNvSpPr txBox="1"/>
+            <p:nvPr/>
+          </p:nvSpPr>
+          <p:spPr>
+            <a:xfrm>
+              <a:off x="13082300" y="20255632"/>
+              <a:ext cx="3099279" cy="400110"/>
+            </a:xfrm>
+            <a:prstGeom prst="rect">
+              <a:avLst/>
+            </a:prstGeom>
+            <a:noFill/>
+          </p:spPr>
+          <p:txBody>
+            <a:bodyPr wrap="square">
+              <a:spAutoFit/>
+            </a:bodyPr>
+            <a:lstStyle/>
+            <a:p>
+              <a:pPr algn="ctr"/>
+              <a:r>
+                <a:rPr lang="en-IE" sz="2000" b="1" dirty="0">
+                  <a:solidFill>
+                    <a:schemeClr val="bg1"/>
+                  </a:solidFill>
+                </a:rPr>
+                <a:t>Read/Write ItemStore</a:t>
+              </a:r>
+              <a:endParaRPr lang="en-IE" sz="2800" b="1" dirty="0">
+                <a:solidFill>
+                  <a:schemeClr val="bg1"/>
+                </a:solidFill>
+              </a:endParaRPr>
+            </a:p>
+          </p:txBody>
+        </p:sp>
+        <p:sp>
+          <p:nvSpPr>
+            <p:cNvPr id="144" name="TextBox 143">
+              <a:extLst>
+                <a:ext uri="{FF2B5EF4-FFF2-40B4-BE49-F238E27FC236}">
+                  <a16:creationId xmlns:a16="http://schemas.microsoft.com/office/drawing/2014/main" id="{0163D558-D9CF-EB15-A543-67E9B490F9E6}"/>
+                </a:ext>
+              </a:extLst>
+            </p:cNvPr>
+            <p:cNvSpPr txBox="1"/>
+            <p:nvPr/>
+          </p:nvSpPr>
+          <p:spPr>
+            <a:xfrm>
+              <a:off x="24093343" y="8745858"/>
+              <a:ext cx="3099279" cy="400110"/>
+            </a:xfrm>
+            <a:prstGeom prst="rect">
+              <a:avLst/>
+            </a:prstGeom>
+            <a:noFill/>
+          </p:spPr>
+          <p:txBody>
+            <a:bodyPr wrap="square">
+              <a:spAutoFit/>
+            </a:bodyPr>
+            <a:lstStyle/>
+            <a:p>
+              <a:pPr algn="ctr"/>
+              <a:r>
+                <a:rPr lang="en-IE" sz="2000" b="1" dirty="0">
+                  <a:solidFill>
+                    <a:schemeClr val="bg1"/>
+                  </a:solidFill>
+                </a:rPr>
+                <a:t>Commits HostLock File</a:t>
+              </a:r>
+              <a:endParaRPr lang="en-IE" sz="2800" b="1" dirty="0">
+                <a:solidFill>
+                  <a:schemeClr val="bg1"/>
+                </a:solidFill>
+              </a:endParaRPr>
+            </a:p>
+          </p:txBody>
+        </p:sp>
+        <p:sp>
+          <p:nvSpPr>
+            <p:cNvPr id="145" name="TextBox 144">
+              <a:extLst>
+                <a:ext uri="{FF2B5EF4-FFF2-40B4-BE49-F238E27FC236}">
+                  <a16:creationId xmlns:a16="http://schemas.microsoft.com/office/drawing/2014/main" id="{488BA0E4-2698-AA4F-33BC-437205A939A7}"/>
+                </a:ext>
+              </a:extLst>
+            </p:cNvPr>
+            <p:cNvSpPr txBox="1"/>
+            <p:nvPr/>
+          </p:nvSpPr>
+          <p:spPr>
+            <a:xfrm>
+              <a:off x="22975262" y="20443592"/>
+              <a:ext cx="5526310" cy="400110"/>
+            </a:xfrm>
+            <a:prstGeom prst="rect">
+              <a:avLst/>
+            </a:prstGeom>
+            <a:noFill/>
+          </p:spPr>
+          <p:txBody>
+            <a:bodyPr wrap="square">
+              <a:spAutoFit/>
+            </a:bodyPr>
+            <a:lstStyle/>
+            <a:p>
+              <a:pPr algn="ctr"/>
+              <a:r>
+                <a:rPr lang="en-IE" sz="2000" b="1" dirty="0">
+                  <a:solidFill>
+                    <a:schemeClr val="bg1"/>
+                  </a:solidFill>
+                </a:rPr>
+                <a:t>Clears lock files for the next elected leader</a:t>
+              </a:r>
+              <a:endParaRPr lang="en-IE" sz="2800" b="1" dirty="0">
+                <a:solidFill>
+                  <a:schemeClr val="bg1"/>
+                </a:solidFill>
+              </a:endParaRPr>
+            </a:p>
+          </p:txBody>
+        </p:sp>
+        <p:sp>
+          <p:nvSpPr>
+            <p:cNvPr id="146" name="TextBox 145">
+              <a:extLst>
+                <a:ext uri="{FF2B5EF4-FFF2-40B4-BE49-F238E27FC236}">
+                  <a16:creationId xmlns:a16="http://schemas.microsoft.com/office/drawing/2014/main" id="{3B8E43E1-7436-194E-48AB-E1CA8307367E}"/>
+                </a:ext>
+              </a:extLst>
+            </p:cNvPr>
+            <p:cNvSpPr txBox="1"/>
+            <p:nvPr/>
+          </p:nvSpPr>
+          <p:spPr>
+            <a:xfrm>
+              <a:off x="2527706" y="20119124"/>
+              <a:ext cx="3099279" cy="400110"/>
+            </a:xfrm>
+            <a:prstGeom prst="rect">
+              <a:avLst/>
+            </a:prstGeom>
+            <a:noFill/>
+          </p:spPr>
+          <p:txBody>
+            <a:bodyPr wrap="square">
+              <a:spAutoFit/>
+            </a:bodyPr>
+            <a:lstStyle/>
+            <a:p>
+              <a:pPr algn="ctr"/>
+              <a:r>
+                <a:rPr lang="en-IE" sz="2000" b="1" dirty="0">
+                  <a:solidFill>
+                    <a:schemeClr val="bg1"/>
+                  </a:solidFill>
+                </a:rPr>
+                <a:t>Host holds OS lock</a:t>
+              </a:r>
+              <a:endParaRPr lang="en-IE" sz="2800" b="1" dirty="0">
+                <a:solidFill>
+                  <a:schemeClr val="bg1"/>
+                </a:solidFill>
+              </a:endParaRPr>
+            </a:p>
+          </p:txBody>
+        </p:sp>
+        <p:sp>
+          <p:nvSpPr>
+            <p:cNvPr id="147" name="TextBox 146">
+              <a:extLst>
+                <a:ext uri="{FF2B5EF4-FFF2-40B4-BE49-F238E27FC236}">
+                  <a16:creationId xmlns:a16="http://schemas.microsoft.com/office/drawing/2014/main" id="{D60B3236-5E5F-740E-7BF1-6307428B9C13}"/>
+                </a:ext>
+              </a:extLst>
+            </p:cNvPr>
+            <p:cNvSpPr txBox="1"/>
+            <p:nvPr/>
+          </p:nvSpPr>
+          <p:spPr>
+            <a:xfrm>
+              <a:off x="12017069" y="6417953"/>
+              <a:ext cx="7519788" cy="2708434"/>
+            </a:xfrm>
+            <a:prstGeom prst="rect">
+              <a:avLst/>
+            </a:prstGeom>
+            <a:noFill/>
+          </p:spPr>
+          <p:txBody>
+            <a:bodyPr wrap="square" rtlCol="0">
+              <a:spAutoFit/>
+            </a:bodyPr>
+            <a:lstStyle/>
+            <a:p>
+              <a:pPr algn="ctr"/>
+              <a:r>
+                <a:rPr lang="en-IE" sz="3400" b="1" dirty="0">
+                  <a:solidFill>
+                    <a:schemeClr val="bg1"/>
+                  </a:solidFill>
+                </a:rPr>
+                <a:t>1769689749.HostA-InstanceA.json</a:t>
+              </a:r>
+            </a:p>
+            <a:p>
+              <a:pPr algn="ctr"/>
+              <a:r>
+                <a:rPr lang="en-IE" sz="3400" b="1" dirty="0">
+                  <a:solidFill>
+                    <a:schemeClr val="bg1"/>
+                  </a:solidFill>
+                </a:rPr>
+                <a:t>1769689809.HostA-InstanceB.json</a:t>
+              </a:r>
+            </a:p>
+            <a:p>
+              <a:pPr algn="ctr"/>
+              <a:r>
+                <a:rPr lang="en-IE" sz="3400" b="1" dirty="0">
+                  <a:solidFill>
+                    <a:schemeClr val="bg1"/>
+                  </a:solidFill>
+                </a:rPr>
+                <a:t>1769689869.HostB-InstanceZ.json</a:t>
+              </a:r>
+            </a:p>
+            <a:p>
+              <a:pPr algn="ctr"/>
+              <a:r>
+                <a:rPr lang="en-IE" sz="3400" b="1" dirty="0">
+                  <a:solidFill>
+                    <a:schemeClr val="bg1"/>
+                  </a:solidFill>
+                </a:rPr>
+                <a:t>1769689929.HostR-InstanceG.json</a:t>
+              </a:r>
+            </a:p>
+            <a:p>
+              <a:pPr algn="ctr"/>
+              <a:r>
+                <a:rPr lang="en-IE" sz="3400" b="1" dirty="0">
+                  <a:solidFill>
+                    <a:schemeClr val="bg1"/>
+                  </a:solidFill>
+                </a:rPr>
+                <a:t>1769689989.HostA-InstanceF.json</a:t>
+              </a:r>
+            </a:p>
+          </p:txBody>
+        </p:sp>
+      </p:grpSp>
+    </p:spTree>
+    <p:extLst>
+      <p:ext uri="{BB962C8B-B14F-4D97-AF65-F5344CB8AC3E}">
+        <p14:creationId xmlns:p14="http://schemas.microsoft.com/office/powerpoint/2010/main" val="4175615422"/>
+      </p:ext>
+    </p:extLst>
+  </p:cSld>
+  <p:clrMapOvr>
+    <a:masterClrMapping/>
+  </p:clrMapOvr>
+</p:sld>
+</file>
+
+<file path=ppt/slides/slide11.xml><?xml version="1.0" encoding="utf-8"?>
+<p:sld xmlns:a="http://schemas.openxmlformats.org/drawingml/2006/main" xmlns:r="http://schemas.openxmlformats.org/officeDocument/2006/relationships" xmlns:p="http://schemas.openxmlformats.org/presentationml/2006/main">
+  <p:cSld>
+    <p:spTree>
+      <p:nvGrpSpPr>
+        <p:cNvPr id="1" name=""/>
+        <p:cNvGrpSpPr/>
+        <p:nvPr/>
+      </p:nvGrpSpPr>
+      <p:grpSpPr>
+        <a:xfrm>
+          <a:off x="0" y="0"/>
+          <a:ext cx="0" cy="0"/>
+          <a:chOff x="0" y="0"/>
+          <a:chExt cx="0" cy="0"/>
+        </a:xfrm>
+      </p:grpSpPr>
+      <p:sp>
+        <p:nvSpPr>
           <p:cNvPr id="4" name="Title 1">
             <a:extLst>
               <a:ext uri="{FF2B5EF4-FFF2-40B4-BE49-F238E27FC236}">
@@ -13439,7 +16591,7 @@
 </p:sld>
 </file>
 
-<file path=ppt/slides/slide11.xml><?xml version="1.0" encoding="utf-8"?>
+<file path=ppt/slides/slide12.xml><?xml version="1.0" encoding="utf-8"?>
 <p:sld xmlns:a="http://schemas.openxmlformats.org/drawingml/2006/main" xmlns:r="http://schemas.openxmlformats.org/officeDocument/2006/relationships" xmlns:p="http://schemas.openxmlformats.org/presentationml/2006/main">
   <p:cSld>
     <p:spTree>
@@ -18110,7 +21262,7 @@
           <p:nvPr>
             <p:extLst>
               <p:ext uri="{D42A27DB-BD31-4B8C-83A1-F6EECF244321}">
-                <p14:modId xmlns:p14="http://schemas.microsoft.com/office/powerpoint/2010/main" val="739151026"/>
+                <p14:modId xmlns:p14="http://schemas.microsoft.com/office/powerpoint/2010/main" val="577759542"/>
               </p:ext>
             </p:extLst>
           </p:nvPr>
@@ -18975,7 +22127,7 @@
                       <a:pPr lvl="0" algn="ctr"/>
                       <a:r>
                         <a:rPr lang="en-IE" sz="3600" dirty="0"/>
-                        <a:t>Defines RESTful &amp; GraphQL interfaces for interacting with TaskTide services</a:t>
+                        <a:t>Defines RESTful interface for interacting with TaskTide services</a:t>
                       </a:r>
                     </a:p>
                   </a:txBody>
@@ -19355,6 +22507,947 @@
 </file>
 
 <file path=ppt/slides/slide5.xml><?xml version="1.0" encoding="utf-8"?>
+<p:sld xmlns:a="http://schemas.openxmlformats.org/drawingml/2006/main" xmlns:r="http://schemas.openxmlformats.org/officeDocument/2006/relationships" xmlns:p="http://schemas.openxmlformats.org/presentationml/2006/main">
+  <p:cSld>
+    <p:spTree>
+      <p:nvGrpSpPr>
+        <p:cNvPr id="1" name="">
+          <a:extLst>
+            <a:ext uri="{FF2B5EF4-FFF2-40B4-BE49-F238E27FC236}">
+              <a16:creationId xmlns:a16="http://schemas.microsoft.com/office/drawing/2014/main" id="{0302BFA5-0373-6222-4BE2-32A21E2037B9}"/>
+            </a:ext>
+          </a:extLst>
+        </p:cNvPr>
+        <p:cNvGrpSpPr/>
+        <p:nvPr/>
+      </p:nvGrpSpPr>
+      <p:grpSpPr>
+        <a:xfrm>
+          <a:off x="0" y="0"/>
+          <a:ext cx="0" cy="0"/>
+          <a:chOff x="0" y="0"/>
+          <a:chExt cx="0" cy="0"/>
+        </a:xfrm>
+      </p:grpSpPr>
+      <p:graphicFrame>
+        <p:nvGraphicFramePr>
+          <p:cNvPr id="8" name="Table 7">
+            <a:extLst>
+              <a:ext uri="{FF2B5EF4-FFF2-40B4-BE49-F238E27FC236}">
+                <a16:creationId xmlns:a16="http://schemas.microsoft.com/office/drawing/2014/main" id="{90B5A48C-49CA-996C-3E76-205C2EA8E78C}"/>
+              </a:ext>
+            </a:extLst>
+          </p:cNvPr>
+          <p:cNvGraphicFramePr>
+            <a:graphicFrameLocks noGrp="1"/>
+          </p:cNvGraphicFramePr>
+          <p:nvPr>
+            <p:extLst>
+              <p:ext uri="{D42A27DB-BD31-4B8C-83A1-F6EECF244321}">
+                <p14:modId xmlns:p14="http://schemas.microsoft.com/office/powerpoint/2010/main" val="3452222421"/>
+              </p:ext>
+            </p:extLst>
+          </p:nvPr>
+        </p:nvGraphicFramePr>
+        <p:xfrm>
+          <a:off x="1626833" y="4212383"/>
+          <a:ext cx="29744120" cy="12538875"/>
+        </p:xfrm>
+        <a:graphic>
+          <a:graphicData uri="http://schemas.openxmlformats.org/drawingml/2006/table">
+            <a:tbl>
+              <a:tblPr firstRow="1" bandRow="1">
+                <a:tableStyleId>{5C22544A-7EE6-4342-B048-85BDC9FD1C3A}</a:tableStyleId>
+              </a:tblPr>
+              <a:tblGrid>
+                <a:gridCol w="14366493">
+                  <a:extLst>
+                    <a:ext uri="{9D8B030D-6E8A-4147-A177-3AD203B41FA5}">
+                      <a16:colId xmlns:a16="http://schemas.microsoft.com/office/drawing/2014/main" val="1828399440"/>
+                    </a:ext>
+                  </a:extLst>
+                </a:gridCol>
+                <a:gridCol w="15377627">
+                  <a:extLst>
+                    <a:ext uri="{9D8B030D-6E8A-4147-A177-3AD203B41FA5}">
+                      <a16:colId xmlns:a16="http://schemas.microsoft.com/office/drawing/2014/main" val="2244831700"/>
+                    </a:ext>
+                  </a:extLst>
+                </a:gridCol>
+              </a:tblGrid>
+              <a:tr h="1766386">
+                <a:tc gridSpan="2">
+                  <a:txBody>
+                    <a:bodyPr/>
+                    <a:lstStyle/>
+                    <a:p>
+                      <a:pPr algn="ctr"/>
+                      <a:r>
+                        <a:rPr lang="en-IE" sz="8800" dirty="0"/>
+                        <a:t>TaskTide Resources</a:t>
+                      </a:r>
+                    </a:p>
+                  </a:txBody>
+                  <a:tcPr anchor="ctr">
+                    <a:lnL w="76200" cap="flat" cmpd="sng" algn="ctr">
+                      <a:solidFill>
+                        <a:schemeClr val="tx1"/>
+                      </a:solidFill>
+                      <a:prstDash val="solid"/>
+                      <a:round/>
+                      <a:headEnd type="none" w="med" len="med"/>
+                      <a:tailEnd type="none" w="med" len="med"/>
+                    </a:lnL>
+                    <a:lnR w="76200" cap="flat" cmpd="sng" algn="ctr">
+                      <a:solidFill>
+                        <a:schemeClr val="tx1"/>
+                      </a:solidFill>
+                      <a:prstDash val="solid"/>
+                      <a:round/>
+                      <a:headEnd type="none" w="med" len="med"/>
+                      <a:tailEnd type="none" w="med" len="med"/>
+                    </a:lnR>
+                    <a:lnT w="76200" cap="flat" cmpd="sng" algn="ctr">
+                      <a:solidFill>
+                        <a:schemeClr val="tx1"/>
+                      </a:solidFill>
+                      <a:prstDash val="solid"/>
+                      <a:round/>
+                      <a:headEnd type="none" w="med" len="med"/>
+                      <a:tailEnd type="none" w="med" len="med"/>
+                    </a:lnT>
+                    <a:lnB w="76200" cap="flat" cmpd="sng" algn="ctr">
+                      <a:solidFill>
+                        <a:schemeClr val="tx1"/>
+                      </a:solidFill>
+                      <a:prstDash val="solid"/>
+                      <a:round/>
+                      <a:headEnd type="none" w="med" len="med"/>
+                      <a:tailEnd type="none" w="med" len="med"/>
+                    </a:lnB>
+                    <a:gradFill flip="none" rotWithShape="1">
+                      <a:gsLst>
+                        <a:gs pos="0">
+                          <a:schemeClr val="accent1">
+                            <a:shade val="30000"/>
+                            <a:satMod val="115000"/>
+                          </a:schemeClr>
+                        </a:gs>
+                        <a:gs pos="50000">
+                          <a:schemeClr val="accent1">
+                            <a:shade val="67500"/>
+                            <a:satMod val="115000"/>
+                          </a:schemeClr>
+                        </a:gs>
+                        <a:gs pos="100000">
+                          <a:schemeClr val="accent1">
+                            <a:shade val="100000"/>
+                            <a:satMod val="115000"/>
+                          </a:schemeClr>
+                        </a:gs>
+                      </a:gsLst>
+                      <a:lin ang="2700000" scaled="1"/>
+                      <a:tileRect/>
+                    </a:gradFill>
+                  </a:tcPr>
+                </a:tc>
+                <a:tc hMerge="1">
+                  <a:txBody>
+                    <a:bodyPr/>
+                    <a:lstStyle/>
+                    <a:p>
+                      <a:endParaRPr lang="en-IE"/>
+                    </a:p>
+                  </a:txBody>
+                  <a:tcPr/>
+                </a:tc>
+                <a:extLst>
+                  <a:ext uri="{0D108BD9-81ED-4DB2-BD59-A6C34878D82A}">
+                    <a16:rowId xmlns:a16="http://schemas.microsoft.com/office/drawing/2014/main" val="1577161320"/>
+                  </a:ext>
+                </a:extLst>
+              </a:tr>
+              <a:tr h="1538927">
+                <a:tc>
+                  <a:txBody>
+                    <a:bodyPr/>
+                    <a:lstStyle/>
+                    <a:p>
+                      <a:pPr algn="ctr"/>
+                      <a:r>
+                        <a:rPr lang="en-IE" sz="7600" b="1" dirty="0"/>
+                        <a:t>Resource</a:t>
+                      </a:r>
+                    </a:p>
+                  </a:txBody>
+                  <a:tcPr anchor="ctr">
+                    <a:lnL w="76200" cap="flat" cmpd="sng" algn="ctr">
+                      <a:solidFill>
+                        <a:schemeClr val="tx1"/>
+                      </a:solidFill>
+                      <a:prstDash val="solid"/>
+                      <a:round/>
+                      <a:headEnd type="none" w="med" len="med"/>
+                      <a:tailEnd type="none" w="med" len="med"/>
+                    </a:lnL>
+                    <a:lnR w="76200" cap="flat" cmpd="sng" algn="ctr">
+                      <a:solidFill>
+                        <a:schemeClr val="tx1"/>
+                      </a:solidFill>
+                      <a:prstDash val="solid"/>
+                      <a:round/>
+                      <a:headEnd type="none" w="med" len="med"/>
+                      <a:tailEnd type="none" w="med" len="med"/>
+                    </a:lnR>
+                    <a:lnT w="76200" cap="flat" cmpd="sng" algn="ctr">
+                      <a:solidFill>
+                        <a:schemeClr val="tx1"/>
+                      </a:solidFill>
+                      <a:prstDash val="solid"/>
+                      <a:round/>
+                      <a:headEnd type="none" w="med" len="med"/>
+                      <a:tailEnd type="none" w="med" len="med"/>
+                    </a:lnT>
+                    <a:lnB w="76200" cap="flat" cmpd="sng" algn="ctr">
+                      <a:solidFill>
+                        <a:schemeClr val="tx1"/>
+                      </a:solidFill>
+                      <a:prstDash val="solid"/>
+                      <a:round/>
+                      <a:headEnd type="none" w="med" len="med"/>
+                      <a:tailEnd type="none" w="med" len="med"/>
+                    </a:lnB>
+                  </a:tcPr>
+                </a:tc>
+                <a:tc>
+                  <a:txBody>
+                    <a:bodyPr/>
+                    <a:lstStyle/>
+                    <a:p>
+                      <a:pPr algn="ctr"/>
+                      <a:r>
+                        <a:rPr lang="en-IE" sz="7600" b="1" dirty="0"/>
+                        <a:t>Location</a:t>
+                      </a:r>
+                    </a:p>
+                  </a:txBody>
+                  <a:tcPr anchor="ctr">
+                    <a:lnL w="76200" cap="flat" cmpd="sng" algn="ctr">
+                      <a:solidFill>
+                        <a:schemeClr val="tx1"/>
+                      </a:solidFill>
+                      <a:prstDash val="solid"/>
+                      <a:round/>
+                      <a:headEnd type="none" w="med" len="med"/>
+                      <a:tailEnd type="none" w="med" len="med"/>
+                    </a:lnL>
+                    <a:lnR w="76200" cap="flat" cmpd="sng" algn="ctr">
+                      <a:solidFill>
+                        <a:schemeClr val="tx1"/>
+                      </a:solidFill>
+                      <a:prstDash val="solid"/>
+                      <a:round/>
+                      <a:headEnd type="none" w="med" len="med"/>
+                      <a:tailEnd type="none" w="med" len="med"/>
+                    </a:lnR>
+                    <a:lnT w="76200" cap="flat" cmpd="sng" algn="ctr">
+                      <a:solidFill>
+                        <a:schemeClr val="tx1"/>
+                      </a:solidFill>
+                      <a:prstDash val="solid"/>
+                      <a:round/>
+                      <a:headEnd type="none" w="med" len="med"/>
+                      <a:tailEnd type="none" w="med" len="med"/>
+                    </a:lnT>
+                    <a:lnB w="76200" cap="flat" cmpd="sng" algn="ctr">
+                      <a:solidFill>
+                        <a:schemeClr val="tx1"/>
+                      </a:solidFill>
+                      <a:prstDash val="solid"/>
+                      <a:round/>
+                      <a:headEnd type="none" w="med" len="med"/>
+                      <a:tailEnd type="none" w="med" len="med"/>
+                    </a:lnB>
+                  </a:tcPr>
+                </a:tc>
+                <a:extLst>
+                  <a:ext uri="{0D108BD9-81ED-4DB2-BD59-A6C34878D82A}">
+                    <a16:rowId xmlns:a16="http://schemas.microsoft.com/office/drawing/2014/main" val="2223659651"/>
+                  </a:ext>
+                </a:extLst>
+              </a:tr>
+              <a:tr h="1538927">
+                <a:tc>
+                  <a:txBody>
+                    <a:bodyPr/>
+                    <a:lstStyle/>
+                    <a:p>
+                      <a:pPr algn="ctr"/>
+                      <a:r>
+                        <a:rPr lang="en-IE" sz="6600" b="1" dirty="0"/>
+                        <a:t>Project Website</a:t>
+                      </a:r>
+                    </a:p>
+                  </a:txBody>
+                  <a:tcPr anchor="ctr">
+                    <a:lnL w="76200" cap="flat" cmpd="sng" algn="ctr">
+                      <a:solidFill>
+                        <a:schemeClr val="tx1"/>
+                      </a:solidFill>
+                      <a:prstDash val="solid"/>
+                      <a:round/>
+                      <a:headEnd type="none" w="med" len="med"/>
+                      <a:tailEnd type="none" w="med" len="med"/>
+                    </a:lnL>
+                    <a:lnR w="76200" cap="flat" cmpd="sng" algn="ctr">
+                      <a:solidFill>
+                        <a:schemeClr val="tx1"/>
+                      </a:solidFill>
+                      <a:prstDash val="solid"/>
+                      <a:round/>
+                      <a:headEnd type="none" w="med" len="med"/>
+                      <a:tailEnd type="none" w="med" len="med"/>
+                    </a:lnR>
+                    <a:lnT w="76200" cap="flat" cmpd="sng" algn="ctr">
+                      <a:solidFill>
+                        <a:schemeClr val="tx1"/>
+                      </a:solidFill>
+                      <a:prstDash val="solid"/>
+                      <a:round/>
+                      <a:headEnd type="none" w="med" len="med"/>
+                      <a:tailEnd type="none" w="med" len="med"/>
+                    </a:lnT>
+                    <a:lnB w="76200" cap="flat" cmpd="sng" algn="ctr">
+                      <a:solidFill>
+                        <a:schemeClr val="tx1"/>
+                      </a:solidFill>
+                      <a:prstDash val="solid"/>
+                      <a:round/>
+                      <a:headEnd type="none" w="med" len="med"/>
+                      <a:tailEnd type="none" w="med" len="med"/>
+                    </a:lnB>
+                  </a:tcPr>
+                </a:tc>
+                <a:tc>
+                  <a:txBody>
+                    <a:bodyPr/>
+                    <a:lstStyle/>
+                    <a:p>
+                      <a:pPr lvl="0" algn="ctr"/>
+                      <a:r>
+                        <a:rPr lang="en-IE" sz="5800" dirty="0"/>
+                        <a:t>tasktide.org</a:t>
+                      </a:r>
+                    </a:p>
+                  </a:txBody>
+                  <a:tcPr anchor="ctr">
+                    <a:lnL w="76200" cap="flat" cmpd="sng" algn="ctr">
+                      <a:solidFill>
+                        <a:schemeClr val="tx1"/>
+                      </a:solidFill>
+                      <a:prstDash val="solid"/>
+                      <a:round/>
+                      <a:headEnd type="none" w="med" len="med"/>
+                      <a:tailEnd type="none" w="med" len="med"/>
+                    </a:lnL>
+                    <a:lnR w="76200" cap="flat" cmpd="sng" algn="ctr">
+                      <a:solidFill>
+                        <a:schemeClr val="tx1"/>
+                      </a:solidFill>
+                      <a:prstDash val="solid"/>
+                      <a:round/>
+                      <a:headEnd type="none" w="med" len="med"/>
+                      <a:tailEnd type="none" w="med" len="med"/>
+                    </a:lnR>
+                    <a:lnT w="76200" cap="flat" cmpd="sng" algn="ctr">
+                      <a:solidFill>
+                        <a:schemeClr val="tx1"/>
+                      </a:solidFill>
+                      <a:prstDash val="solid"/>
+                      <a:round/>
+                      <a:headEnd type="none" w="med" len="med"/>
+                      <a:tailEnd type="none" w="med" len="med"/>
+                    </a:lnT>
+                    <a:lnB w="76200" cap="flat" cmpd="sng" algn="ctr">
+                      <a:solidFill>
+                        <a:schemeClr val="tx1"/>
+                      </a:solidFill>
+                      <a:prstDash val="solid"/>
+                      <a:round/>
+                      <a:headEnd type="none" w="med" len="med"/>
+                      <a:tailEnd type="none" w="med" len="med"/>
+                    </a:lnB>
+                  </a:tcPr>
+                </a:tc>
+                <a:extLst>
+                  <a:ext uri="{0D108BD9-81ED-4DB2-BD59-A6C34878D82A}">
+                    <a16:rowId xmlns:a16="http://schemas.microsoft.com/office/drawing/2014/main" val="401310343"/>
+                  </a:ext>
+                </a:extLst>
+              </a:tr>
+              <a:tr h="1538927">
+                <a:tc>
+                  <a:txBody>
+                    <a:bodyPr/>
+                    <a:lstStyle/>
+                    <a:p>
+                      <a:pPr algn="ctr"/>
+                      <a:r>
+                        <a:rPr lang="en-IE" sz="6600" b="1" dirty="0"/>
+                        <a:t>Use Cases</a:t>
+                      </a:r>
+                    </a:p>
+                  </a:txBody>
+                  <a:tcPr anchor="ctr">
+                    <a:lnL w="76200" cap="flat" cmpd="sng" algn="ctr">
+                      <a:solidFill>
+                        <a:schemeClr val="tx1"/>
+                      </a:solidFill>
+                      <a:prstDash val="solid"/>
+                      <a:round/>
+                      <a:headEnd type="none" w="med" len="med"/>
+                      <a:tailEnd type="none" w="med" len="med"/>
+                    </a:lnL>
+                    <a:lnR w="76200" cap="flat" cmpd="sng" algn="ctr">
+                      <a:solidFill>
+                        <a:schemeClr val="tx1"/>
+                      </a:solidFill>
+                      <a:prstDash val="solid"/>
+                      <a:round/>
+                      <a:headEnd type="none" w="med" len="med"/>
+                      <a:tailEnd type="none" w="med" len="med"/>
+                    </a:lnR>
+                    <a:lnT w="76200" cap="flat" cmpd="sng" algn="ctr">
+                      <a:solidFill>
+                        <a:schemeClr val="tx1"/>
+                      </a:solidFill>
+                      <a:prstDash val="solid"/>
+                      <a:round/>
+                      <a:headEnd type="none" w="med" len="med"/>
+                      <a:tailEnd type="none" w="med" len="med"/>
+                    </a:lnT>
+                    <a:lnB w="76200" cap="flat" cmpd="sng" algn="ctr">
+                      <a:solidFill>
+                        <a:schemeClr val="tx1"/>
+                      </a:solidFill>
+                      <a:prstDash val="solid"/>
+                      <a:round/>
+                      <a:headEnd type="none" w="med" len="med"/>
+                      <a:tailEnd type="none" w="med" len="med"/>
+                    </a:lnB>
+                  </a:tcPr>
+                </a:tc>
+                <a:tc>
+                  <a:txBody>
+                    <a:bodyPr/>
+                    <a:lstStyle/>
+                    <a:p>
+                      <a:pPr lvl="0" algn="ctr"/>
+                      <a:r>
+                        <a:rPr lang="en-IE" sz="5800" dirty="0"/>
+                        <a:t>tasktide.org/use-cases</a:t>
+                      </a:r>
+                    </a:p>
+                  </a:txBody>
+                  <a:tcPr anchor="ctr">
+                    <a:lnL w="76200" cap="flat" cmpd="sng" algn="ctr">
+                      <a:solidFill>
+                        <a:schemeClr val="tx1"/>
+                      </a:solidFill>
+                      <a:prstDash val="solid"/>
+                      <a:round/>
+                      <a:headEnd type="none" w="med" len="med"/>
+                      <a:tailEnd type="none" w="med" len="med"/>
+                    </a:lnL>
+                    <a:lnR w="76200" cap="flat" cmpd="sng" algn="ctr">
+                      <a:solidFill>
+                        <a:schemeClr val="tx1"/>
+                      </a:solidFill>
+                      <a:prstDash val="solid"/>
+                      <a:round/>
+                      <a:headEnd type="none" w="med" len="med"/>
+                      <a:tailEnd type="none" w="med" len="med"/>
+                    </a:lnR>
+                    <a:lnT w="76200" cap="flat" cmpd="sng" algn="ctr">
+                      <a:solidFill>
+                        <a:schemeClr val="tx1"/>
+                      </a:solidFill>
+                      <a:prstDash val="solid"/>
+                      <a:round/>
+                      <a:headEnd type="none" w="med" len="med"/>
+                      <a:tailEnd type="none" w="med" len="med"/>
+                    </a:lnT>
+                    <a:lnB w="76200" cap="flat" cmpd="sng" algn="ctr">
+                      <a:solidFill>
+                        <a:schemeClr val="tx1"/>
+                      </a:solidFill>
+                      <a:prstDash val="solid"/>
+                      <a:round/>
+                      <a:headEnd type="none" w="med" len="med"/>
+                      <a:tailEnd type="none" w="med" len="med"/>
+                    </a:lnB>
+                  </a:tcPr>
+                </a:tc>
+                <a:extLst>
+                  <a:ext uri="{0D108BD9-81ED-4DB2-BD59-A6C34878D82A}">
+                    <a16:rowId xmlns:a16="http://schemas.microsoft.com/office/drawing/2014/main" val="705916412"/>
+                  </a:ext>
+                </a:extLst>
+              </a:tr>
+              <a:tr h="1538927">
+                <a:tc>
+                  <a:txBody>
+                    <a:bodyPr/>
+                    <a:lstStyle/>
+                    <a:p>
+                      <a:pPr algn="ctr"/>
+                      <a:r>
+                        <a:rPr lang="en-IE" sz="6600" b="1" dirty="0"/>
+                        <a:t>Source Code</a:t>
+                      </a:r>
+                    </a:p>
+                  </a:txBody>
+                  <a:tcPr anchor="ctr">
+                    <a:lnL w="76200" cap="flat" cmpd="sng" algn="ctr">
+                      <a:solidFill>
+                        <a:schemeClr val="tx1"/>
+                      </a:solidFill>
+                      <a:prstDash val="solid"/>
+                      <a:round/>
+                      <a:headEnd type="none" w="med" len="med"/>
+                      <a:tailEnd type="none" w="med" len="med"/>
+                    </a:lnL>
+                    <a:lnR w="76200" cap="flat" cmpd="sng" algn="ctr">
+                      <a:solidFill>
+                        <a:schemeClr val="tx1"/>
+                      </a:solidFill>
+                      <a:prstDash val="solid"/>
+                      <a:round/>
+                      <a:headEnd type="none" w="med" len="med"/>
+                      <a:tailEnd type="none" w="med" len="med"/>
+                    </a:lnR>
+                    <a:lnT w="76200" cap="flat" cmpd="sng" algn="ctr">
+                      <a:solidFill>
+                        <a:schemeClr val="tx1"/>
+                      </a:solidFill>
+                      <a:prstDash val="solid"/>
+                      <a:round/>
+                      <a:headEnd type="none" w="med" len="med"/>
+                      <a:tailEnd type="none" w="med" len="med"/>
+                    </a:lnT>
+                    <a:lnB w="76200" cap="flat" cmpd="sng" algn="ctr">
+                      <a:solidFill>
+                        <a:schemeClr val="tx1"/>
+                      </a:solidFill>
+                      <a:prstDash val="solid"/>
+                      <a:round/>
+                      <a:headEnd type="none" w="med" len="med"/>
+                      <a:tailEnd type="none" w="med" len="med"/>
+                    </a:lnB>
+                  </a:tcPr>
+                </a:tc>
+                <a:tc>
+                  <a:txBody>
+                    <a:bodyPr/>
+                    <a:lstStyle/>
+                    <a:p>
+                      <a:pPr lvl="0" algn="ctr"/>
+                      <a:r>
+                        <a:rPr lang="en-IE" sz="5800" dirty="0"/>
+                        <a:t>github.tasktide.org</a:t>
+                      </a:r>
+                    </a:p>
+                  </a:txBody>
+                  <a:tcPr anchor="ctr">
+                    <a:lnL w="76200" cap="flat" cmpd="sng" algn="ctr">
+                      <a:solidFill>
+                        <a:schemeClr val="tx1"/>
+                      </a:solidFill>
+                      <a:prstDash val="solid"/>
+                      <a:round/>
+                      <a:headEnd type="none" w="med" len="med"/>
+                      <a:tailEnd type="none" w="med" len="med"/>
+                    </a:lnL>
+                    <a:lnR w="76200" cap="flat" cmpd="sng" algn="ctr">
+                      <a:solidFill>
+                        <a:schemeClr val="tx1"/>
+                      </a:solidFill>
+                      <a:prstDash val="solid"/>
+                      <a:round/>
+                      <a:headEnd type="none" w="med" len="med"/>
+                      <a:tailEnd type="none" w="med" len="med"/>
+                    </a:lnR>
+                    <a:lnT w="76200" cap="flat" cmpd="sng" algn="ctr">
+                      <a:solidFill>
+                        <a:schemeClr val="tx1"/>
+                      </a:solidFill>
+                      <a:prstDash val="solid"/>
+                      <a:round/>
+                      <a:headEnd type="none" w="med" len="med"/>
+                      <a:tailEnd type="none" w="med" len="med"/>
+                    </a:lnT>
+                    <a:lnB w="76200" cap="flat" cmpd="sng" algn="ctr">
+                      <a:solidFill>
+                        <a:schemeClr val="tx1"/>
+                      </a:solidFill>
+                      <a:prstDash val="solid"/>
+                      <a:round/>
+                      <a:headEnd type="none" w="med" len="med"/>
+                      <a:tailEnd type="none" w="med" len="med"/>
+                    </a:lnB>
+                  </a:tcPr>
+                </a:tc>
+                <a:extLst>
+                  <a:ext uri="{0D108BD9-81ED-4DB2-BD59-A6C34878D82A}">
+                    <a16:rowId xmlns:a16="http://schemas.microsoft.com/office/drawing/2014/main" val="370735797"/>
+                  </a:ext>
+                </a:extLst>
+              </a:tr>
+              <a:tr h="1538927">
+                <a:tc>
+                  <a:txBody>
+                    <a:bodyPr/>
+                    <a:lstStyle/>
+                    <a:p>
+                      <a:pPr algn="ctr"/>
+                      <a:r>
+                        <a:rPr lang="en-IE" sz="6600" b="1" dirty="0"/>
+                        <a:t>Maven Packages</a:t>
+                      </a:r>
+                    </a:p>
+                  </a:txBody>
+                  <a:tcPr anchor="ctr">
+                    <a:lnL w="76200" cap="flat" cmpd="sng" algn="ctr">
+                      <a:solidFill>
+                        <a:schemeClr val="tx1"/>
+                      </a:solidFill>
+                      <a:prstDash val="solid"/>
+                      <a:round/>
+                      <a:headEnd type="none" w="med" len="med"/>
+                      <a:tailEnd type="none" w="med" len="med"/>
+                    </a:lnL>
+                    <a:lnR w="76200" cap="flat" cmpd="sng" algn="ctr">
+                      <a:solidFill>
+                        <a:schemeClr val="tx1"/>
+                      </a:solidFill>
+                      <a:prstDash val="solid"/>
+                      <a:round/>
+                      <a:headEnd type="none" w="med" len="med"/>
+                      <a:tailEnd type="none" w="med" len="med"/>
+                    </a:lnR>
+                    <a:lnT w="76200" cap="flat" cmpd="sng" algn="ctr">
+                      <a:solidFill>
+                        <a:schemeClr val="tx1"/>
+                      </a:solidFill>
+                      <a:prstDash val="solid"/>
+                      <a:round/>
+                      <a:headEnd type="none" w="med" len="med"/>
+                      <a:tailEnd type="none" w="med" len="med"/>
+                    </a:lnT>
+                    <a:lnB w="76200" cap="flat" cmpd="sng" algn="ctr">
+                      <a:solidFill>
+                        <a:schemeClr val="tx1"/>
+                      </a:solidFill>
+                      <a:prstDash val="solid"/>
+                      <a:round/>
+                      <a:headEnd type="none" w="med" len="med"/>
+                      <a:tailEnd type="none" w="med" len="med"/>
+                    </a:lnB>
+                  </a:tcPr>
+                </a:tc>
+                <a:tc>
+                  <a:txBody>
+                    <a:bodyPr/>
+                    <a:lstStyle/>
+                    <a:p>
+                      <a:pPr lvl="0" algn="ctr"/>
+                      <a:r>
+                        <a:rPr lang="en-IE" sz="5800" dirty="0"/>
+                        <a:t>maven.tasktide.org</a:t>
+                      </a:r>
+                    </a:p>
+                  </a:txBody>
+                  <a:tcPr anchor="ctr">
+                    <a:lnL w="76200" cap="flat" cmpd="sng" algn="ctr">
+                      <a:solidFill>
+                        <a:schemeClr val="tx1"/>
+                      </a:solidFill>
+                      <a:prstDash val="solid"/>
+                      <a:round/>
+                      <a:headEnd type="none" w="med" len="med"/>
+                      <a:tailEnd type="none" w="med" len="med"/>
+                    </a:lnL>
+                    <a:lnR w="76200" cap="flat" cmpd="sng" algn="ctr">
+                      <a:solidFill>
+                        <a:schemeClr val="tx1"/>
+                      </a:solidFill>
+                      <a:prstDash val="solid"/>
+                      <a:round/>
+                      <a:headEnd type="none" w="med" len="med"/>
+                      <a:tailEnd type="none" w="med" len="med"/>
+                    </a:lnR>
+                    <a:lnT w="76200" cap="flat" cmpd="sng" algn="ctr">
+                      <a:solidFill>
+                        <a:schemeClr val="tx1"/>
+                      </a:solidFill>
+                      <a:prstDash val="solid"/>
+                      <a:round/>
+                      <a:headEnd type="none" w="med" len="med"/>
+                      <a:tailEnd type="none" w="med" len="med"/>
+                    </a:lnT>
+                    <a:lnB w="76200" cap="flat" cmpd="sng" algn="ctr">
+                      <a:solidFill>
+                        <a:schemeClr val="tx1"/>
+                      </a:solidFill>
+                      <a:prstDash val="solid"/>
+                      <a:round/>
+                      <a:headEnd type="none" w="med" len="med"/>
+                      <a:tailEnd type="none" w="med" len="med"/>
+                    </a:lnB>
+                  </a:tcPr>
+                </a:tc>
+                <a:extLst>
+                  <a:ext uri="{0D108BD9-81ED-4DB2-BD59-A6C34878D82A}">
+                    <a16:rowId xmlns:a16="http://schemas.microsoft.com/office/drawing/2014/main" val="13870308"/>
+                  </a:ext>
+                </a:extLst>
+              </a:tr>
+              <a:tr h="1538927">
+                <a:tc>
+                  <a:txBody>
+                    <a:bodyPr/>
+                    <a:lstStyle/>
+                    <a:p>
+                      <a:pPr algn="ctr"/>
+                      <a:r>
+                        <a:rPr lang="en-IE" sz="6600" b="1" dirty="0"/>
+                        <a:t>Documentation</a:t>
+                      </a:r>
+                    </a:p>
+                  </a:txBody>
+                  <a:tcPr anchor="ctr">
+                    <a:lnL w="76200" cap="flat" cmpd="sng" algn="ctr">
+                      <a:solidFill>
+                        <a:schemeClr val="tx1"/>
+                      </a:solidFill>
+                      <a:prstDash val="solid"/>
+                      <a:round/>
+                      <a:headEnd type="none" w="med" len="med"/>
+                      <a:tailEnd type="none" w="med" len="med"/>
+                    </a:lnL>
+                    <a:lnR w="76200" cap="flat" cmpd="sng" algn="ctr">
+                      <a:solidFill>
+                        <a:schemeClr val="tx1"/>
+                      </a:solidFill>
+                      <a:prstDash val="solid"/>
+                      <a:round/>
+                      <a:headEnd type="none" w="med" len="med"/>
+                      <a:tailEnd type="none" w="med" len="med"/>
+                    </a:lnR>
+                    <a:lnT w="76200" cap="flat" cmpd="sng" algn="ctr">
+                      <a:solidFill>
+                        <a:schemeClr val="tx1"/>
+                      </a:solidFill>
+                      <a:prstDash val="solid"/>
+                      <a:round/>
+                      <a:headEnd type="none" w="med" len="med"/>
+                      <a:tailEnd type="none" w="med" len="med"/>
+                    </a:lnT>
+                    <a:lnB w="76200" cap="flat" cmpd="sng" algn="ctr">
+                      <a:solidFill>
+                        <a:schemeClr val="tx1"/>
+                      </a:solidFill>
+                      <a:prstDash val="solid"/>
+                      <a:round/>
+                      <a:headEnd type="none" w="med" len="med"/>
+                      <a:tailEnd type="none" w="med" len="med"/>
+                    </a:lnB>
+                  </a:tcPr>
+                </a:tc>
+                <a:tc>
+                  <a:txBody>
+                    <a:bodyPr/>
+                    <a:lstStyle/>
+                    <a:p>
+                      <a:pPr lvl="0" algn="ctr"/>
+                      <a:r>
+                        <a:rPr lang="en-IE" sz="5800" dirty="0"/>
+                        <a:t>docs.tasktide.org</a:t>
+                      </a:r>
+                    </a:p>
+                  </a:txBody>
+                  <a:tcPr anchor="ctr">
+                    <a:lnL w="76200" cap="flat" cmpd="sng" algn="ctr">
+                      <a:solidFill>
+                        <a:schemeClr val="tx1"/>
+                      </a:solidFill>
+                      <a:prstDash val="solid"/>
+                      <a:round/>
+                      <a:headEnd type="none" w="med" len="med"/>
+                      <a:tailEnd type="none" w="med" len="med"/>
+                    </a:lnL>
+                    <a:lnR w="76200" cap="flat" cmpd="sng" algn="ctr">
+                      <a:solidFill>
+                        <a:schemeClr val="tx1"/>
+                      </a:solidFill>
+                      <a:prstDash val="solid"/>
+                      <a:round/>
+                      <a:headEnd type="none" w="med" len="med"/>
+                      <a:tailEnd type="none" w="med" len="med"/>
+                    </a:lnR>
+                    <a:lnT w="76200" cap="flat" cmpd="sng" algn="ctr">
+                      <a:solidFill>
+                        <a:schemeClr val="tx1"/>
+                      </a:solidFill>
+                      <a:prstDash val="solid"/>
+                      <a:round/>
+                      <a:headEnd type="none" w="med" len="med"/>
+                      <a:tailEnd type="none" w="med" len="med"/>
+                    </a:lnT>
+                    <a:lnB w="76200" cap="flat" cmpd="sng" algn="ctr">
+                      <a:solidFill>
+                        <a:schemeClr val="tx1"/>
+                      </a:solidFill>
+                      <a:prstDash val="solid"/>
+                      <a:round/>
+                      <a:headEnd type="none" w="med" len="med"/>
+                      <a:tailEnd type="none" w="med" len="med"/>
+                    </a:lnB>
+                  </a:tcPr>
+                </a:tc>
+                <a:extLst>
+                  <a:ext uri="{0D108BD9-81ED-4DB2-BD59-A6C34878D82A}">
+                    <a16:rowId xmlns:a16="http://schemas.microsoft.com/office/drawing/2014/main" val="3376162430"/>
+                  </a:ext>
+                </a:extLst>
+              </a:tr>
+              <a:tr h="1538927">
+                <a:tc>
+                  <a:txBody>
+                    <a:bodyPr/>
+                    <a:lstStyle/>
+                    <a:p>
+                      <a:pPr algn="ctr"/>
+                      <a:r>
+                        <a:rPr lang="en-IE" sz="6600" b="1" dirty="0"/>
+                        <a:t>API Documentation</a:t>
+                      </a:r>
+                    </a:p>
+                  </a:txBody>
+                  <a:tcPr anchor="ctr">
+                    <a:lnL w="76200" cap="flat" cmpd="sng" algn="ctr">
+                      <a:solidFill>
+                        <a:schemeClr val="tx1"/>
+                      </a:solidFill>
+                      <a:prstDash val="solid"/>
+                      <a:round/>
+                      <a:headEnd type="none" w="med" len="med"/>
+                      <a:tailEnd type="none" w="med" len="med"/>
+                    </a:lnL>
+                    <a:lnR w="76200" cap="flat" cmpd="sng" algn="ctr">
+                      <a:solidFill>
+                        <a:schemeClr val="tx1"/>
+                      </a:solidFill>
+                      <a:prstDash val="solid"/>
+                      <a:round/>
+                      <a:headEnd type="none" w="med" len="med"/>
+                      <a:tailEnd type="none" w="med" len="med"/>
+                    </a:lnR>
+                    <a:lnT w="76200" cap="flat" cmpd="sng" algn="ctr">
+                      <a:solidFill>
+                        <a:schemeClr val="tx1"/>
+                      </a:solidFill>
+                      <a:prstDash val="solid"/>
+                      <a:round/>
+                      <a:headEnd type="none" w="med" len="med"/>
+                      <a:tailEnd type="none" w="med" len="med"/>
+                    </a:lnT>
+                    <a:lnB w="76200" cap="flat" cmpd="sng" algn="ctr">
+                      <a:solidFill>
+                        <a:schemeClr val="tx1"/>
+                      </a:solidFill>
+                      <a:prstDash val="solid"/>
+                      <a:round/>
+                      <a:headEnd type="none" w="med" len="med"/>
+                      <a:tailEnd type="none" w="med" len="med"/>
+                    </a:lnB>
+                  </a:tcPr>
+                </a:tc>
+                <a:tc>
+                  <a:txBody>
+                    <a:bodyPr/>
+                    <a:lstStyle/>
+                    <a:p>
+                      <a:pPr lvl="0" algn="ctr"/>
+                      <a:r>
+                        <a:rPr lang="en-IE" sz="5800" dirty="0"/>
+                        <a:t>api-docs.tasktide.org</a:t>
+                      </a:r>
+                    </a:p>
+                  </a:txBody>
+                  <a:tcPr anchor="ctr">
+                    <a:lnL w="76200" cap="flat" cmpd="sng" algn="ctr">
+                      <a:solidFill>
+                        <a:schemeClr val="tx1"/>
+                      </a:solidFill>
+                      <a:prstDash val="solid"/>
+                      <a:round/>
+                      <a:headEnd type="none" w="med" len="med"/>
+                      <a:tailEnd type="none" w="med" len="med"/>
+                    </a:lnL>
+                    <a:lnR w="76200" cap="flat" cmpd="sng" algn="ctr">
+                      <a:solidFill>
+                        <a:schemeClr val="tx1"/>
+                      </a:solidFill>
+                      <a:prstDash val="solid"/>
+                      <a:round/>
+                      <a:headEnd type="none" w="med" len="med"/>
+                      <a:tailEnd type="none" w="med" len="med"/>
+                    </a:lnR>
+                    <a:lnT w="76200" cap="flat" cmpd="sng" algn="ctr">
+                      <a:solidFill>
+                        <a:schemeClr val="tx1"/>
+                      </a:solidFill>
+                      <a:prstDash val="solid"/>
+                      <a:round/>
+                      <a:headEnd type="none" w="med" len="med"/>
+                      <a:tailEnd type="none" w="med" len="med"/>
+                    </a:lnT>
+                    <a:lnB w="76200" cap="flat" cmpd="sng" algn="ctr">
+                      <a:solidFill>
+                        <a:schemeClr val="tx1"/>
+                      </a:solidFill>
+                      <a:prstDash val="solid"/>
+                      <a:round/>
+                      <a:headEnd type="none" w="med" len="med"/>
+                      <a:tailEnd type="none" w="med" len="med"/>
+                    </a:lnB>
+                  </a:tcPr>
+                </a:tc>
+                <a:extLst>
+                  <a:ext uri="{0D108BD9-81ED-4DB2-BD59-A6C34878D82A}">
+                    <a16:rowId xmlns:a16="http://schemas.microsoft.com/office/drawing/2014/main" val="945498542"/>
+                  </a:ext>
+                </a:extLst>
+              </a:tr>
+            </a:tbl>
+          </a:graphicData>
+        </a:graphic>
+      </p:graphicFrame>
+    </p:spTree>
+    <p:extLst>
+      <p:ext uri="{BB962C8B-B14F-4D97-AF65-F5344CB8AC3E}">
+        <p14:creationId xmlns:p14="http://schemas.microsoft.com/office/powerpoint/2010/main" val="1664840533"/>
+      </p:ext>
+    </p:extLst>
+  </p:cSld>
+  <p:clrMapOvr>
+    <a:masterClrMapping/>
+  </p:clrMapOvr>
+</p:sld>
+</file>
+
+<file path=ppt/slides/slide6.xml><?xml version="1.0" encoding="utf-8"?>
 <p:sld xmlns:a="http://schemas.openxmlformats.org/drawingml/2006/main" xmlns:r="http://schemas.openxmlformats.org/officeDocument/2006/relationships" xmlns:p="http://schemas.openxmlformats.org/presentationml/2006/main">
   <p:cSld>
     <p:spTree>
@@ -22212,7 +26305,7 @@
 </p:sld>
 </file>
 
-<file path=ppt/slides/slide6.xml><?xml version="1.0" encoding="utf-8"?>
+<file path=ppt/slides/slide7.xml><?xml version="1.0" encoding="utf-8"?>
 <p:sld xmlns:a="http://schemas.openxmlformats.org/drawingml/2006/main" xmlns:r="http://schemas.openxmlformats.org/officeDocument/2006/relationships" xmlns:p="http://schemas.openxmlformats.org/presentationml/2006/main">
   <p:cSld>
     <p:spTree>
@@ -23592,7 +27685,7 @@
 </p:sld>
 </file>
 
-<file path=ppt/slides/slide7.xml><?xml version="1.0" encoding="utf-8"?>
+<file path=ppt/slides/slide8.xml><?xml version="1.0" encoding="utf-8"?>
 <p:sld xmlns:a="http://schemas.openxmlformats.org/drawingml/2006/main" xmlns:r="http://schemas.openxmlformats.org/officeDocument/2006/relationships" xmlns:p="http://schemas.openxmlformats.org/presentationml/2006/main">
   <p:cSld>
     <p:spTree>
@@ -23624,7 +27717,7 @@
           <p:nvPr>
             <p:extLst>
               <p:ext uri="{D42A27DB-BD31-4B8C-83A1-F6EECF244321}">
-                <p14:modId xmlns:p14="http://schemas.microsoft.com/office/powerpoint/2010/main" val="3742264284"/>
+                <p14:modId xmlns:p14="http://schemas.microsoft.com/office/powerpoint/2010/main" val="3021877522"/>
               </p:ext>
             </p:extLst>
           </p:nvPr>
@@ -26727,7 +30820,7 @@
                       <a:pPr algn="ctr"/>
                       <a:r>
                         <a:rPr lang="en-IE" sz="4400" dirty="0"/>
-                        <a:t>How many milliseconds to flag as stagnant</a:t>
+                        <a:t>Elapsed milliseconds flagging stagnancy</a:t>
                       </a:r>
                     </a:p>
                   </a:txBody>
@@ -26793,7 +30886,7 @@
 </p:sld>
 </file>
 
-<file path=ppt/slides/slide8.xml><?xml version="1.0" encoding="utf-8"?>
+<file path=ppt/slides/slide9.xml><?xml version="1.0" encoding="utf-8"?>
 <p:sld xmlns:a="http://schemas.openxmlformats.org/drawingml/2006/main" xmlns:r="http://schemas.openxmlformats.org/officeDocument/2006/relationships" xmlns:p="http://schemas.openxmlformats.org/presentationml/2006/main">
   <p:cSld>
     <p:spTree>
@@ -26859,7 +30952,7 @@
           <p:nvPr>
             <p:extLst>
               <p:ext uri="{D42A27DB-BD31-4B8C-83A1-F6EECF244321}">
-                <p14:modId xmlns:p14="http://schemas.microsoft.com/office/powerpoint/2010/main" val="810590461"/>
+                <p14:modId xmlns:p14="http://schemas.microsoft.com/office/powerpoint/2010/main" val="2529954873"/>
               </p:ext>
             </p:extLst>
           </p:nvPr>
@@ -26878,3157 +30971,6 @@
     <p:extLst>
       <p:ext uri="{BB962C8B-B14F-4D97-AF65-F5344CB8AC3E}">
         <p14:creationId xmlns:p14="http://schemas.microsoft.com/office/powerpoint/2010/main" val="813586131"/>
-      </p:ext>
-    </p:extLst>
-  </p:cSld>
-  <p:clrMapOvr>
-    <a:masterClrMapping/>
-  </p:clrMapOvr>
-</p:sld>
-</file>
-
-<file path=ppt/slides/slide9.xml><?xml version="1.0" encoding="utf-8"?>
-<p:sld xmlns:a="http://schemas.openxmlformats.org/drawingml/2006/main" xmlns:r="http://schemas.openxmlformats.org/officeDocument/2006/relationships" xmlns:p="http://schemas.openxmlformats.org/presentationml/2006/main">
-  <p:cSld>
-    <p:spTree>
-      <p:nvGrpSpPr>
-        <p:cNvPr id="1" name=""/>
-        <p:cNvGrpSpPr/>
-        <p:nvPr/>
-      </p:nvGrpSpPr>
-      <p:grpSpPr>
-        <a:xfrm>
-          <a:off x="0" y="0"/>
-          <a:ext cx="0" cy="0"/>
-          <a:chOff x="0" y="0"/>
-          <a:chExt cx="0" cy="0"/>
-        </a:xfrm>
-      </p:grpSpPr>
-      <p:sp>
-        <p:nvSpPr>
-          <p:cNvPr id="2" name="Title 1">
-            <a:extLst>
-              <a:ext uri="{FF2B5EF4-FFF2-40B4-BE49-F238E27FC236}">
-                <a16:creationId xmlns:a16="http://schemas.microsoft.com/office/drawing/2014/main" id="{CF74D0AD-7D60-F80E-532B-CE9F849C1363}"/>
-              </a:ext>
-            </a:extLst>
-          </p:cNvPr>
-          <p:cNvSpPr>
-            <a:spLocks noGrp="1"/>
-          </p:cNvSpPr>
-          <p:nvPr>
-            <p:ph type="title"/>
-          </p:nvPr>
-        </p:nvSpPr>
-        <p:spPr>
-          <a:xfrm>
-            <a:off x="3195826" y="522668"/>
-            <a:ext cx="26082248" cy="1674936"/>
-          </a:xfrm>
-        </p:spPr>
-        <p:txBody>
-          <a:bodyPr>
-            <a:normAutofit fontScale="90000"/>
-          </a:bodyPr>
-          <a:lstStyle/>
-          <a:p>
-            <a:pPr algn="ctr"/>
-            <a:r>
-              <a:rPr lang="en-IE" b="1" i="1" dirty="0"/>
-              <a:t>De-centralized Mutex Workflow</a:t>
-            </a:r>
-          </a:p>
-        </p:txBody>
-      </p:sp>
-      <p:grpSp>
-        <p:nvGrpSpPr>
-          <p:cNvPr id="3" name="Group 2">
-            <a:extLst>
-              <a:ext uri="{FF2B5EF4-FFF2-40B4-BE49-F238E27FC236}">
-                <a16:creationId xmlns:a16="http://schemas.microsoft.com/office/drawing/2014/main" id="{E8319FDD-F96C-C6AC-4001-C3929F1ADE3A}"/>
-              </a:ext>
-            </a:extLst>
-          </p:cNvPr>
-          <p:cNvGrpSpPr/>
-          <p:nvPr/>
-        </p:nvGrpSpPr>
-        <p:grpSpPr>
-          <a:xfrm>
-            <a:off x="789792" y="3104860"/>
-            <a:ext cx="30692530" cy="19006988"/>
-            <a:chOff x="-289708" y="2633807"/>
-            <a:chExt cx="30692530" cy="19006988"/>
-          </a:xfrm>
-        </p:grpSpPr>
-        <p:sp>
-          <p:nvSpPr>
-            <p:cNvPr id="4" name="Rectangle: Rounded Corners 3">
-              <a:extLst>
-                <a:ext uri="{FF2B5EF4-FFF2-40B4-BE49-F238E27FC236}">
-                  <a16:creationId xmlns:a16="http://schemas.microsoft.com/office/drawing/2014/main" id="{6C7AF9FA-7438-5E00-C10B-5BDCEAA71E27}"/>
-                </a:ext>
-              </a:extLst>
-            </p:cNvPr>
-            <p:cNvSpPr/>
-            <p:nvPr/>
-          </p:nvSpPr>
-          <p:spPr>
-            <a:xfrm>
-              <a:off x="190500" y="3853678"/>
-              <a:ext cx="29851350" cy="6923211"/>
-            </a:xfrm>
-            <a:prstGeom prst="roundRect">
-              <a:avLst/>
-            </a:prstGeom>
-            <a:solidFill>
-              <a:srgbClr val="E6EAED"/>
-            </a:solidFill>
-            <a:ln w="57150">
-              <a:solidFill>
-                <a:schemeClr val="tx1"/>
-              </a:solidFill>
-            </a:ln>
-          </p:spPr>
-          <p:style>
-            <a:lnRef idx="2">
-              <a:schemeClr val="accent1">
-                <a:shade val="15000"/>
-              </a:schemeClr>
-            </a:lnRef>
-            <a:fillRef idx="1">
-              <a:schemeClr val="accent1"/>
-            </a:fillRef>
-            <a:effectRef idx="0">
-              <a:schemeClr val="accent1"/>
-            </a:effectRef>
-            <a:fontRef idx="minor">
-              <a:schemeClr val="lt1"/>
-            </a:fontRef>
-          </p:style>
-          <p:txBody>
-            <a:bodyPr rtlCol="0" anchor="ctr"/>
-            <a:lstStyle/>
-            <a:p>
-              <a:pPr algn="ctr"/>
-              <a:endParaRPr lang="en-IE" b="1" dirty="0"/>
-            </a:p>
-          </p:txBody>
-        </p:sp>
-        <p:sp>
-          <p:nvSpPr>
-            <p:cNvPr id="7" name="TextBox 6">
-              <a:extLst>
-                <a:ext uri="{FF2B5EF4-FFF2-40B4-BE49-F238E27FC236}">
-                  <a16:creationId xmlns:a16="http://schemas.microsoft.com/office/drawing/2014/main" id="{D9CDF24C-6E41-99FF-7335-D2539468AD92}"/>
-                </a:ext>
-              </a:extLst>
-            </p:cNvPr>
-            <p:cNvSpPr txBox="1"/>
-            <p:nvPr/>
-          </p:nvSpPr>
-          <p:spPr>
-            <a:xfrm>
-              <a:off x="423801" y="4004083"/>
-              <a:ext cx="9277350" cy="830997"/>
-            </a:xfrm>
-            <a:prstGeom prst="rect">
-              <a:avLst/>
-            </a:prstGeom>
-            <a:noFill/>
-          </p:spPr>
-          <p:txBody>
-            <a:bodyPr wrap="square" rtlCol="0">
-              <a:spAutoFit/>
-            </a:bodyPr>
-            <a:lstStyle/>
-            <a:p>
-              <a:pPr algn="ctr"/>
-              <a:r>
-                <a:rPr lang="en-IE" sz="4800" b="1" i="1" dirty="0"/>
-                <a:t>1). Enqueue Election Ballot</a:t>
-              </a:r>
-            </a:p>
-          </p:txBody>
-        </p:sp>
-        <p:grpSp>
-          <p:nvGrpSpPr>
-            <p:cNvPr id="22" name="Group 21">
-              <a:extLst>
-                <a:ext uri="{FF2B5EF4-FFF2-40B4-BE49-F238E27FC236}">
-                  <a16:creationId xmlns:a16="http://schemas.microsoft.com/office/drawing/2014/main" id="{10E05E10-B54C-55AA-F4C5-B5805511BA2C}"/>
-                </a:ext>
-              </a:extLst>
-            </p:cNvPr>
-            <p:cNvGrpSpPr/>
-            <p:nvPr/>
-          </p:nvGrpSpPr>
-          <p:grpSpPr>
-            <a:xfrm>
-              <a:off x="495300" y="5160508"/>
-              <a:ext cx="9277350" cy="5044882"/>
-              <a:chOff x="609600" y="4232468"/>
-              <a:chExt cx="9277350" cy="5044882"/>
-            </a:xfrm>
-          </p:grpSpPr>
-          <p:sp>
-            <p:nvSpPr>
-              <p:cNvPr id="6" name="Rectangle: Rounded Corners 5">
-                <a:extLst>
-                  <a:ext uri="{FF2B5EF4-FFF2-40B4-BE49-F238E27FC236}">
-                    <a16:creationId xmlns:a16="http://schemas.microsoft.com/office/drawing/2014/main" id="{A98F1016-6507-D524-42D1-7AB16F226F63}"/>
-                  </a:ext>
-                </a:extLst>
-              </p:cNvPr>
-              <p:cNvSpPr/>
-              <p:nvPr/>
-            </p:nvSpPr>
-            <p:spPr>
-              <a:xfrm>
-                <a:off x="609600" y="4232468"/>
-                <a:ext cx="9277350" cy="5044882"/>
-              </a:xfrm>
-              <a:prstGeom prst="roundRect">
-                <a:avLst/>
-              </a:prstGeom>
-              <a:gradFill flip="none" rotWithShape="1">
-                <a:gsLst>
-                  <a:gs pos="0">
-                    <a:schemeClr val="accent1">
-                      <a:shade val="30000"/>
-                      <a:satMod val="115000"/>
-                    </a:schemeClr>
-                  </a:gs>
-                  <a:gs pos="50000">
-                    <a:schemeClr val="accent1">
-                      <a:shade val="67500"/>
-                      <a:satMod val="115000"/>
-                    </a:schemeClr>
-                  </a:gs>
-                  <a:gs pos="100000">
-                    <a:schemeClr val="accent1">
-                      <a:shade val="100000"/>
-                      <a:satMod val="115000"/>
-                    </a:schemeClr>
-                  </a:gs>
-                </a:gsLst>
-                <a:lin ang="13500000" scaled="1"/>
-                <a:tileRect/>
-              </a:gradFill>
-              <a:ln w="57150">
-                <a:solidFill>
-                  <a:schemeClr val="tx1"/>
-                </a:solidFill>
-              </a:ln>
-            </p:spPr>
-            <p:style>
-              <a:lnRef idx="2">
-                <a:schemeClr val="accent1">
-                  <a:shade val="15000"/>
-                </a:schemeClr>
-              </a:lnRef>
-              <a:fillRef idx="1">
-                <a:schemeClr val="accent1"/>
-              </a:fillRef>
-              <a:effectRef idx="0">
-                <a:schemeClr val="accent1"/>
-              </a:effectRef>
-              <a:fontRef idx="minor">
-                <a:schemeClr val="lt1"/>
-              </a:fontRef>
-            </p:style>
-            <p:txBody>
-              <a:bodyPr rtlCol="0" anchor="ctr"/>
-              <a:lstStyle/>
-              <a:p>
-                <a:endParaRPr lang="en-IE" sz="3200" b="1" dirty="0"/>
-              </a:p>
-              <a:p>
-                <a:r>
-                  <a:rPr lang="en-IE" sz="3200" b="1" dirty="0"/>
-                  <a:t>  Mutex {</a:t>
-                </a:r>
-              </a:p>
-              <a:p>
-                <a:r>
-                  <a:rPr lang="en-IE" sz="3200" b="1" dirty="0"/>
-                  <a:t>         Id: &lt;Random UUID&gt;,</a:t>
-                </a:r>
-              </a:p>
-              <a:p>
-                <a:r>
-                  <a:rPr lang="en-IE" sz="3200" b="1" dirty="0"/>
-                  <a:t>         Time Stamp: &lt; EPOCH Time&gt;,</a:t>
-                </a:r>
-              </a:p>
-              <a:p>
-                <a:r>
-                  <a:rPr lang="en-IE" sz="3200" b="1" dirty="0"/>
-                  <a:t>         Lock File: &lt;Full File Path&gt;,</a:t>
-                </a:r>
-              </a:p>
-              <a:p>
-                <a:r>
-                  <a:rPr lang="en-IE" sz="3200" b="1" dirty="0"/>
-                  <a:t>         Election File: &lt;Full File Path&gt;,</a:t>
-                </a:r>
-              </a:p>
-              <a:p>
-                <a:r>
-                  <a:rPr lang="en-IE" sz="3200" b="1" dirty="0"/>
-                  <a:t>         Mutex State: &lt;INIT | WAIT | LOCKED&gt;</a:t>
-                </a:r>
-              </a:p>
-              <a:p>
-                <a:r>
-                  <a:rPr lang="en-IE" sz="3200" b="1" dirty="0"/>
-                  <a:t>  }</a:t>
-                </a:r>
-              </a:p>
-            </p:txBody>
-          </p:sp>
-          <p:grpSp>
-            <p:nvGrpSpPr>
-              <p:cNvPr id="13" name="Group 12">
-                <a:extLst>
-                  <a:ext uri="{FF2B5EF4-FFF2-40B4-BE49-F238E27FC236}">
-                    <a16:creationId xmlns:a16="http://schemas.microsoft.com/office/drawing/2014/main" id="{865AB9DE-E928-5C65-E445-AC34F60D20B4}"/>
-                  </a:ext>
-                </a:extLst>
-              </p:cNvPr>
-              <p:cNvGrpSpPr/>
-              <p:nvPr/>
-            </p:nvGrpSpPr>
-            <p:grpSpPr>
-              <a:xfrm>
-                <a:off x="609600" y="4385666"/>
-                <a:ext cx="9048750" cy="529234"/>
-                <a:chOff x="914400" y="4442816"/>
-                <a:chExt cx="9048750" cy="529234"/>
-              </a:xfrm>
-            </p:grpSpPr>
-            <p:sp>
-              <p:nvSpPr>
-                <p:cNvPr id="9" name="TextBox 8">
-                  <a:extLst>
-                    <a:ext uri="{FF2B5EF4-FFF2-40B4-BE49-F238E27FC236}">
-                      <a16:creationId xmlns:a16="http://schemas.microsoft.com/office/drawing/2014/main" id="{9D526A3C-335E-5F13-5100-FB52658BE261}"/>
-                    </a:ext>
-                  </a:extLst>
-                </p:cNvPr>
-                <p:cNvSpPr txBox="1"/>
-                <p:nvPr/>
-              </p:nvSpPr>
-              <p:spPr>
-                <a:xfrm>
-                  <a:off x="914400" y="4442816"/>
-                  <a:ext cx="9048750" cy="523220"/>
-                </a:xfrm>
-                <a:prstGeom prst="rect">
-                  <a:avLst/>
-                </a:prstGeom>
-                <a:noFill/>
-              </p:spPr>
-              <p:txBody>
-                <a:bodyPr wrap="square">
-                  <a:spAutoFit/>
-                </a:bodyPr>
-                <a:lstStyle/>
-                <a:p>
-                  <a:pPr algn="ctr"/>
-                  <a:r>
-                    <a:rPr lang="en-IE" sz="2800" b="1" dirty="0">
-                      <a:solidFill>
-                        <a:schemeClr val="bg1"/>
-                      </a:solidFill>
-                    </a:rPr>
-                    <a:t>1769689749-HostA-InstanceA.json</a:t>
-                  </a:r>
-                </a:p>
-              </p:txBody>
-            </p:sp>
-            <p:cxnSp>
-              <p:nvCxnSpPr>
-                <p:cNvPr id="11" name="Straight Connector 10">
-                  <a:extLst>
-                    <a:ext uri="{FF2B5EF4-FFF2-40B4-BE49-F238E27FC236}">
-                      <a16:creationId xmlns:a16="http://schemas.microsoft.com/office/drawing/2014/main" id="{794C1588-459B-325B-CB2C-AF92EF1C09F6}"/>
-                    </a:ext>
-                  </a:extLst>
-                </p:cNvPr>
-                <p:cNvCxnSpPr>
-                  <a:cxnSpLocks/>
-                </p:cNvCxnSpPr>
-                <p:nvPr/>
-              </p:nvCxnSpPr>
-              <p:spPr>
-                <a:xfrm>
-                  <a:off x="1412270" y="4972050"/>
-                  <a:ext cx="8112730" cy="0"/>
-                </a:xfrm>
-                <a:prstGeom prst="line">
-                  <a:avLst/>
-                </a:prstGeom>
-                <a:ln w="19050" cap="flat" cmpd="sng" algn="ctr">
-                  <a:solidFill>
-                    <a:schemeClr val="bg1"/>
-                  </a:solidFill>
-                  <a:prstDash val="dash"/>
-                  <a:round/>
-                  <a:headEnd type="none" w="med" len="med"/>
-                  <a:tailEnd type="none" w="med" len="med"/>
-                </a:ln>
-              </p:spPr>
-              <p:style>
-                <a:lnRef idx="0">
-                  <a:scrgbClr r="0" g="0" b="0"/>
-                </a:lnRef>
-                <a:fillRef idx="0">
-                  <a:scrgbClr r="0" g="0" b="0"/>
-                </a:fillRef>
-                <a:effectRef idx="0">
-                  <a:scrgbClr r="0" g="0" b="0"/>
-                </a:effectRef>
-                <a:fontRef idx="minor">
-                  <a:schemeClr val="tx1"/>
-                </a:fontRef>
-              </p:style>
-            </p:cxnSp>
-          </p:grpSp>
-        </p:grpSp>
-        <p:sp>
-          <p:nvSpPr>
-            <p:cNvPr id="15" name="TextBox 14">
-              <a:extLst>
-                <a:ext uri="{FF2B5EF4-FFF2-40B4-BE49-F238E27FC236}">
-                  <a16:creationId xmlns:a16="http://schemas.microsoft.com/office/drawing/2014/main" id="{BBF690E4-2BAC-371E-4F36-F3BB9D5CB4E8}"/>
-                </a:ext>
-              </a:extLst>
-            </p:cNvPr>
-            <p:cNvSpPr txBox="1"/>
-            <p:nvPr/>
-          </p:nvSpPr>
-          <p:spPr>
-            <a:xfrm>
-              <a:off x="11316463" y="3976374"/>
-              <a:ext cx="9277350" cy="830997"/>
-            </a:xfrm>
-            <a:prstGeom prst="rect">
-              <a:avLst/>
-            </a:prstGeom>
-            <a:noFill/>
-          </p:spPr>
-          <p:txBody>
-            <a:bodyPr wrap="square" rtlCol="0">
-              <a:spAutoFit/>
-            </a:bodyPr>
-            <a:lstStyle/>
-            <a:p>
-              <a:pPr algn="ctr"/>
-              <a:r>
-                <a:rPr lang="en-IE" sz="4800" b="1" i="1" dirty="0"/>
-                <a:t>2). Discover FIFO Position</a:t>
-              </a:r>
-            </a:p>
-          </p:txBody>
-        </p:sp>
-        <p:sp>
-          <p:nvSpPr>
-            <p:cNvPr id="14" name="Rectangle: Rounded Corners 13">
-              <a:extLst>
-                <a:ext uri="{FF2B5EF4-FFF2-40B4-BE49-F238E27FC236}">
-                  <a16:creationId xmlns:a16="http://schemas.microsoft.com/office/drawing/2014/main" id="{6C6F972B-C4A3-ADE2-9B28-D6F6A4C141B6}"/>
-                </a:ext>
-              </a:extLst>
-            </p:cNvPr>
-            <p:cNvSpPr/>
-            <p:nvPr/>
-          </p:nvSpPr>
-          <p:spPr>
-            <a:xfrm>
-              <a:off x="11887200" y="5528808"/>
-              <a:ext cx="7905750" cy="4037241"/>
-            </a:xfrm>
-            <a:prstGeom prst="roundRect">
-              <a:avLst/>
-            </a:prstGeom>
-            <a:gradFill flip="none" rotWithShape="1">
-              <a:gsLst>
-                <a:gs pos="0">
-                  <a:schemeClr val="accent1">
-                    <a:shade val="30000"/>
-                    <a:satMod val="115000"/>
-                  </a:schemeClr>
-                </a:gs>
-                <a:gs pos="50000">
-                  <a:schemeClr val="accent1">
-                    <a:shade val="67500"/>
-                    <a:satMod val="115000"/>
-                  </a:schemeClr>
-                </a:gs>
-                <a:gs pos="100000">
-                  <a:schemeClr val="accent1">
-                    <a:shade val="100000"/>
-                    <a:satMod val="115000"/>
-                  </a:schemeClr>
-                </a:gs>
-              </a:gsLst>
-              <a:lin ang="13500000" scaled="1"/>
-              <a:tileRect/>
-            </a:gradFill>
-            <a:ln w="57150">
-              <a:solidFill>
-                <a:schemeClr val="tx1"/>
-              </a:solidFill>
-            </a:ln>
-          </p:spPr>
-          <p:style>
-            <a:lnRef idx="2">
-              <a:schemeClr val="accent1">
-                <a:shade val="15000"/>
-              </a:schemeClr>
-            </a:lnRef>
-            <a:fillRef idx="1">
-              <a:schemeClr val="accent1"/>
-            </a:fillRef>
-            <a:effectRef idx="0">
-              <a:schemeClr val="accent1"/>
-            </a:effectRef>
-            <a:fontRef idx="minor">
-              <a:schemeClr val="lt1"/>
-            </a:fontRef>
-          </p:style>
-          <p:txBody>
-            <a:bodyPr rtlCol="0" anchor="ctr"/>
-            <a:lstStyle/>
-            <a:p>
-              <a:pPr algn="ctr"/>
-              <a:endParaRPr lang="en-IE" sz="3200" b="1" dirty="0"/>
-            </a:p>
-          </p:txBody>
-        </p:sp>
-        <p:grpSp>
-          <p:nvGrpSpPr>
-            <p:cNvPr id="16" name="Group 15">
-              <a:extLst>
-                <a:ext uri="{FF2B5EF4-FFF2-40B4-BE49-F238E27FC236}">
-                  <a16:creationId xmlns:a16="http://schemas.microsoft.com/office/drawing/2014/main" id="{64CC6A90-C0EB-A4B6-BC65-86380C1FB3C9}"/>
-                </a:ext>
-              </a:extLst>
-            </p:cNvPr>
-            <p:cNvGrpSpPr/>
-            <p:nvPr/>
-          </p:nvGrpSpPr>
-          <p:grpSpPr>
-            <a:xfrm>
-              <a:off x="12017069" y="5651409"/>
-              <a:ext cx="7710947" cy="523220"/>
-              <a:chOff x="914400" y="4442816"/>
-              <a:chExt cx="9048750" cy="653808"/>
-            </a:xfrm>
-          </p:grpSpPr>
-          <p:sp>
-            <p:nvSpPr>
-              <p:cNvPr id="17" name="TextBox 16">
-                <a:extLst>
-                  <a:ext uri="{FF2B5EF4-FFF2-40B4-BE49-F238E27FC236}">
-                    <a16:creationId xmlns:a16="http://schemas.microsoft.com/office/drawing/2014/main" id="{69019241-98B9-86DF-7A70-BAC7C03C6376}"/>
-                  </a:ext>
-                </a:extLst>
-              </p:cNvPr>
-              <p:cNvSpPr txBox="1"/>
-              <p:nvPr/>
-            </p:nvSpPr>
-            <p:spPr>
-              <a:xfrm>
-                <a:off x="914400" y="4442816"/>
-                <a:ext cx="9048750" cy="653808"/>
-              </a:xfrm>
-              <a:prstGeom prst="rect">
-                <a:avLst/>
-              </a:prstGeom>
-              <a:noFill/>
-            </p:spPr>
-            <p:txBody>
-              <a:bodyPr wrap="square">
-                <a:spAutoFit/>
-              </a:bodyPr>
-              <a:lstStyle/>
-              <a:p>
-                <a:pPr algn="ctr"/>
-                <a:r>
-                  <a:rPr lang="en-IE" sz="2800" b="1" dirty="0">
-                    <a:solidFill>
-                      <a:schemeClr val="bg1"/>
-                    </a:solidFill>
-                  </a:rPr>
-                  <a:t>Configured Election Directory</a:t>
-                </a:r>
-              </a:p>
-            </p:txBody>
-          </p:sp>
-          <p:cxnSp>
-            <p:nvCxnSpPr>
-              <p:cNvPr id="18" name="Straight Connector 17">
-                <a:extLst>
-                  <a:ext uri="{FF2B5EF4-FFF2-40B4-BE49-F238E27FC236}">
-                    <a16:creationId xmlns:a16="http://schemas.microsoft.com/office/drawing/2014/main" id="{B1DE96AB-CD56-E5FA-7030-6F555209E755}"/>
-                  </a:ext>
-                </a:extLst>
-              </p:cNvPr>
-              <p:cNvCxnSpPr>
-                <a:cxnSpLocks/>
-              </p:cNvCxnSpPr>
-              <p:nvPr/>
-            </p:nvCxnSpPr>
-            <p:spPr>
-              <a:xfrm>
-                <a:off x="1412270" y="5067269"/>
-                <a:ext cx="8112730" cy="0"/>
-              </a:xfrm>
-              <a:prstGeom prst="line">
-                <a:avLst/>
-              </a:prstGeom>
-              <a:ln w="19050" cap="flat" cmpd="sng" algn="ctr">
-                <a:solidFill>
-                  <a:schemeClr val="bg1"/>
-                </a:solidFill>
-                <a:prstDash val="dash"/>
-                <a:round/>
-                <a:headEnd type="none" w="med" len="med"/>
-                <a:tailEnd type="none" w="med" len="med"/>
-              </a:ln>
-            </p:spPr>
-            <p:style>
-              <a:lnRef idx="0">
-                <a:scrgbClr r="0" g="0" b="0"/>
-              </a:lnRef>
-              <a:fillRef idx="0">
-                <a:scrgbClr r="0" g="0" b="0"/>
-              </a:fillRef>
-              <a:effectRef idx="0">
-                <a:scrgbClr r="0" g="0" b="0"/>
-              </a:effectRef>
-              <a:fontRef idx="minor">
-                <a:schemeClr val="tx1"/>
-              </a:fontRef>
-            </p:style>
-          </p:cxnSp>
-        </p:grpSp>
-        <p:sp>
-          <p:nvSpPr>
-            <p:cNvPr id="19" name="Arrow: Right 18">
-              <a:extLst>
-                <a:ext uri="{FF2B5EF4-FFF2-40B4-BE49-F238E27FC236}">
-                  <a16:creationId xmlns:a16="http://schemas.microsoft.com/office/drawing/2014/main" id="{B34B9CB4-2681-327E-1546-41998D4C06E8}"/>
-                </a:ext>
-              </a:extLst>
-            </p:cNvPr>
-            <p:cNvSpPr/>
-            <p:nvPr/>
-          </p:nvSpPr>
-          <p:spPr>
-            <a:xfrm>
-              <a:off x="10063163" y="6819984"/>
-              <a:ext cx="1619250" cy="1413703"/>
-            </a:xfrm>
-            <a:prstGeom prst="rightArrow">
-              <a:avLst/>
-            </a:prstGeom>
-            <a:gradFill flip="none" rotWithShape="1">
-              <a:gsLst>
-                <a:gs pos="0">
-                  <a:schemeClr val="accent1">
-                    <a:shade val="30000"/>
-                    <a:satMod val="115000"/>
-                  </a:schemeClr>
-                </a:gs>
-                <a:gs pos="50000">
-                  <a:schemeClr val="accent1">
-                    <a:shade val="67500"/>
-                    <a:satMod val="115000"/>
-                  </a:schemeClr>
-                </a:gs>
-                <a:gs pos="100000">
-                  <a:schemeClr val="accent1">
-                    <a:shade val="100000"/>
-                    <a:satMod val="115000"/>
-                  </a:schemeClr>
-                </a:gs>
-              </a:gsLst>
-              <a:lin ang="13500000" scaled="1"/>
-              <a:tileRect/>
-            </a:gradFill>
-            <a:ln w="57150">
-              <a:solidFill>
-                <a:schemeClr val="tx1"/>
-              </a:solidFill>
-            </a:ln>
-          </p:spPr>
-          <p:style>
-            <a:lnRef idx="2">
-              <a:schemeClr val="accent1">
-                <a:shade val="15000"/>
-              </a:schemeClr>
-            </a:lnRef>
-            <a:fillRef idx="1">
-              <a:schemeClr val="accent1"/>
-            </a:fillRef>
-            <a:effectRef idx="0">
-              <a:schemeClr val="accent1"/>
-            </a:effectRef>
-            <a:fontRef idx="minor">
-              <a:schemeClr val="lt1"/>
-            </a:fontRef>
-          </p:style>
-          <p:txBody>
-            <a:bodyPr rtlCol="0" anchor="ctr"/>
-            <a:lstStyle/>
-            <a:p>
-              <a:pPr algn="ctr"/>
-              <a:endParaRPr lang="en-IE"/>
-            </a:p>
-          </p:txBody>
-        </p:sp>
-        <p:sp>
-          <p:nvSpPr>
-            <p:cNvPr id="20" name="Arrow: Right 19">
-              <a:extLst>
-                <a:ext uri="{FF2B5EF4-FFF2-40B4-BE49-F238E27FC236}">
-                  <a16:creationId xmlns:a16="http://schemas.microsoft.com/office/drawing/2014/main" id="{0A4E8B60-330B-1FB5-0943-17C11E0380CE}"/>
-                </a:ext>
-              </a:extLst>
-            </p:cNvPr>
-            <p:cNvSpPr/>
-            <p:nvPr/>
-          </p:nvSpPr>
-          <p:spPr>
-            <a:xfrm>
-              <a:off x="20059650" y="6793093"/>
-              <a:ext cx="1619250" cy="1440594"/>
-            </a:xfrm>
-            <a:prstGeom prst="rightArrow">
-              <a:avLst/>
-            </a:prstGeom>
-            <a:gradFill flip="none" rotWithShape="1">
-              <a:gsLst>
-                <a:gs pos="0">
-                  <a:schemeClr val="accent1">
-                    <a:shade val="30000"/>
-                    <a:satMod val="115000"/>
-                  </a:schemeClr>
-                </a:gs>
-                <a:gs pos="50000">
-                  <a:schemeClr val="accent1">
-                    <a:shade val="67500"/>
-                    <a:satMod val="115000"/>
-                  </a:schemeClr>
-                </a:gs>
-                <a:gs pos="100000">
-                  <a:schemeClr val="accent1">
-                    <a:shade val="100000"/>
-                    <a:satMod val="115000"/>
-                  </a:schemeClr>
-                </a:gs>
-              </a:gsLst>
-              <a:lin ang="13500000" scaled="1"/>
-              <a:tileRect/>
-            </a:gradFill>
-            <a:ln w="57150">
-              <a:solidFill>
-                <a:schemeClr val="tx1"/>
-              </a:solidFill>
-            </a:ln>
-          </p:spPr>
-          <p:style>
-            <a:lnRef idx="2">
-              <a:schemeClr val="accent1">
-                <a:shade val="15000"/>
-              </a:schemeClr>
-            </a:lnRef>
-            <a:fillRef idx="1">
-              <a:schemeClr val="accent1"/>
-            </a:fillRef>
-            <a:effectRef idx="0">
-              <a:schemeClr val="accent1"/>
-            </a:effectRef>
-            <a:fontRef idx="minor">
-              <a:schemeClr val="lt1"/>
-            </a:fontRef>
-          </p:style>
-          <p:txBody>
-            <a:bodyPr rtlCol="0" anchor="ctr"/>
-            <a:lstStyle/>
-            <a:p>
-              <a:pPr algn="ctr"/>
-              <a:endParaRPr lang="en-IE"/>
-            </a:p>
-          </p:txBody>
-        </p:sp>
-        <p:sp>
-          <p:nvSpPr>
-            <p:cNvPr id="23" name="TextBox 22">
-              <a:extLst>
-                <a:ext uri="{FF2B5EF4-FFF2-40B4-BE49-F238E27FC236}">
-                  <a16:creationId xmlns:a16="http://schemas.microsoft.com/office/drawing/2014/main" id="{5E2DD160-6B4C-56D8-D2E7-C83E10664427}"/>
-                </a:ext>
-              </a:extLst>
-            </p:cNvPr>
-            <p:cNvSpPr txBox="1"/>
-            <p:nvPr/>
-          </p:nvSpPr>
-          <p:spPr>
-            <a:xfrm>
-              <a:off x="22412325" y="3995424"/>
-              <a:ext cx="6657975" cy="830997"/>
-            </a:xfrm>
-            <a:prstGeom prst="rect">
-              <a:avLst/>
-            </a:prstGeom>
-            <a:noFill/>
-          </p:spPr>
-          <p:txBody>
-            <a:bodyPr wrap="square" rtlCol="0">
-              <a:spAutoFit/>
-            </a:bodyPr>
-            <a:lstStyle/>
-            <a:p>
-              <a:pPr algn="ctr"/>
-              <a:r>
-                <a:rPr lang="en-IE" sz="4800" b="1" i="1" dirty="0"/>
-                <a:t>3). Wait Until Leader</a:t>
-              </a:r>
-            </a:p>
-          </p:txBody>
-        </p:sp>
-        <p:grpSp>
-          <p:nvGrpSpPr>
-            <p:cNvPr id="29" name="Group 28">
-              <a:extLst>
-                <a:ext uri="{FF2B5EF4-FFF2-40B4-BE49-F238E27FC236}">
-                  <a16:creationId xmlns:a16="http://schemas.microsoft.com/office/drawing/2014/main" id="{4A6E0309-BA76-2C37-BF97-83DA109EC708}"/>
-                </a:ext>
-              </a:extLst>
-            </p:cNvPr>
-            <p:cNvGrpSpPr/>
-            <p:nvPr/>
-          </p:nvGrpSpPr>
-          <p:grpSpPr>
-            <a:xfrm>
-              <a:off x="21839238" y="5567707"/>
-              <a:ext cx="7905750" cy="3770158"/>
-              <a:chOff x="12363450" y="4232467"/>
-              <a:chExt cx="9277350" cy="5044882"/>
-            </a:xfrm>
-          </p:grpSpPr>
-          <p:sp>
-            <p:nvSpPr>
-              <p:cNvPr id="30" name="Rectangle: Rounded Corners 29">
-                <a:extLst>
-                  <a:ext uri="{FF2B5EF4-FFF2-40B4-BE49-F238E27FC236}">
-                    <a16:creationId xmlns:a16="http://schemas.microsoft.com/office/drawing/2014/main" id="{62E450F5-1EAF-54A9-2874-39442B8A056D}"/>
-                  </a:ext>
-                </a:extLst>
-              </p:cNvPr>
-              <p:cNvSpPr/>
-              <p:nvPr/>
-            </p:nvSpPr>
-            <p:spPr>
-              <a:xfrm>
-                <a:off x="12363450" y="4232467"/>
-                <a:ext cx="9277350" cy="5044882"/>
-              </a:xfrm>
-              <a:prstGeom prst="roundRect">
-                <a:avLst/>
-              </a:prstGeom>
-              <a:gradFill flip="none" rotWithShape="1">
-                <a:gsLst>
-                  <a:gs pos="0">
-                    <a:schemeClr val="accent1">
-                      <a:shade val="30000"/>
-                      <a:satMod val="115000"/>
-                    </a:schemeClr>
-                  </a:gs>
-                  <a:gs pos="50000">
-                    <a:schemeClr val="accent1">
-                      <a:shade val="67500"/>
-                      <a:satMod val="115000"/>
-                    </a:schemeClr>
-                  </a:gs>
-                  <a:gs pos="100000">
-                    <a:schemeClr val="accent1">
-                      <a:shade val="100000"/>
-                      <a:satMod val="115000"/>
-                    </a:schemeClr>
-                  </a:gs>
-                </a:gsLst>
-                <a:lin ang="13500000" scaled="1"/>
-                <a:tileRect/>
-              </a:gradFill>
-              <a:ln w="57150">
-                <a:solidFill>
-                  <a:schemeClr val="tx1"/>
-                </a:solidFill>
-              </a:ln>
-            </p:spPr>
-            <p:style>
-              <a:lnRef idx="2">
-                <a:schemeClr val="accent1">
-                  <a:shade val="15000"/>
-                </a:schemeClr>
-              </a:lnRef>
-              <a:fillRef idx="1">
-                <a:schemeClr val="accent1"/>
-              </a:fillRef>
-              <a:effectRef idx="0">
-                <a:schemeClr val="accent1"/>
-              </a:effectRef>
-              <a:fontRef idx="minor">
-                <a:schemeClr val="lt1"/>
-              </a:fontRef>
-            </p:style>
-            <p:txBody>
-              <a:bodyPr rtlCol="0" anchor="ctr"/>
-              <a:lstStyle/>
-              <a:p>
-                <a:pPr algn="ctr"/>
-                <a:endParaRPr lang="en-IE" sz="3200" b="1" dirty="0"/>
-              </a:p>
-            </p:txBody>
-          </p:sp>
-          <p:grpSp>
-            <p:nvGrpSpPr>
-              <p:cNvPr id="31" name="Group 30">
-                <a:extLst>
-                  <a:ext uri="{FF2B5EF4-FFF2-40B4-BE49-F238E27FC236}">
-                    <a16:creationId xmlns:a16="http://schemas.microsoft.com/office/drawing/2014/main" id="{1E3BF374-E77C-233B-E92F-4758AAD130B1}"/>
-                  </a:ext>
-                </a:extLst>
-              </p:cNvPr>
-              <p:cNvGrpSpPr/>
-              <p:nvPr/>
-            </p:nvGrpSpPr>
-            <p:grpSpPr>
-              <a:xfrm>
-                <a:off x="12515850" y="4385666"/>
-                <a:ext cx="9048750" cy="700125"/>
-                <a:chOff x="914400" y="4442816"/>
-                <a:chExt cx="9048750" cy="700125"/>
-              </a:xfrm>
-            </p:grpSpPr>
-            <p:sp>
-              <p:nvSpPr>
-                <p:cNvPr id="32" name="TextBox 31">
-                  <a:extLst>
-                    <a:ext uri="{FF2B5EF4-FFF2-40B4-BE49-F238E27FC236}">
-                      <a16:creationId xmlns:a16="http://schemas.microsoft.com/office/drawing/2014/main" id="{6381B058-26BE-BAB2-79EA-A327C72E9DF2}"/>
-                    </a:ext>
-                  </a:extLst>
-                </p:cNvPr>
-                <p:cNvSpPr txBox="1"/>
-                <p:nvPr/>
-              </p:nvSpPr>
-              <p:spPr>
-                <a:xfrm>
-                  <a:off x="914400" y="4442816"/>
-                  <a:ext cx="9048750" cy="700125"/>
-                </a:xfrm>
-                <a:prstGeom prst="rect">
-                  <a:avLst/>
-                </a:prstGeom>
-                <a:noFill/>
-              </p:spPr>
-              <p:txBody>
-                <a:bodyPr wrap="square">
-                  <a:spAutoFit/>
-                </a:bodyPr>
-                <a:lstStyle/>
-                <a:p>
-                  <a:pPr algn="ctr"/>
-                  <a:r>
-                    <a:rPr lang="en-IE" sz="2800" b="1" dirty="0">
-                      <a:solidFill>
-                        <a:schemeClr val="bg1"/>
-                      </a:solidFill>
-                    </a:rPr>
-                    <a:t>Wait &amp; Retry</a:t>
-                  </a:r>
-                </a:p>
-              </p:txBody>
-            </p:sp>
-            <p:cxnSp>
-              <p:nvCxnSpPr>
-                <p:cNvPr id="33" name="Straight Connector 32">
-                  <a:extLst>
-                    <a:ext uri="{FF2B5EF4-FFF2-40B4-BE49-F238E27FC236}">
-                      <a16:creationId xmlns:a16="http://schemas.microsoft.com/office/drawing/2014/main" id="{69B4F2D9-FA43-58DF-241A-59FC646CE50B}"/>
-                    </a:ext>
-                  </a:extLst>
-                </p:cNvPr>
-                <p:cNvCxnSpPr>
-                  <a:cxnSpLocks/>
-                </p:cNvCxnSpPr>
-                <p:nvPr/>
-              </p:nvCxnSpPr>
-              <p:spPr>
-                <a:xfrm>
-                  <a:off x="1412270" y="5108003"/>
-                  <a:ext cx="8112730" cy="0"/>
-                </a:xfrm>
-                <a:prstGeom prst="line">
-                  <a:avLst/>
-                </a:prstGeom>
-                <a:ln w="19050" cap="flat" cmpd="sng" algn="ctr">
-                  <a:solidFill>
-                    <a:schemeClr val="bg1"/>
-                  </a:solidFill>
-                  <a:prstDash val="dash"/>
-                  <a:round/>
-                  <a:headEnd type="none" w="med" len="med"/>
-                  <a:tailEnd type="none" w="med" len="med"/>
-                </a:ln>
-              </p:spPr>
-              <p:style>
-                <a:lnRef idx="0">
-                  <a:scrgbClr r="0" g="0" b="0"/>
-                </a:lnRef>
-                <a:fillRef idx="0">
-                  <a:scrgbClr r="0" g="0" b="0"/>
-                </a:fillRef>
-                <a:effectRef idx="0">
-                  <a:scrgbClr r="0" g="0" b="0"/>
-                </a:effectRef>
-                <a:fontRef idx="minor">
-                  <a:schemeClr val="tx1"/>
-                </a:fontRef>
-              </p:style>
-            </p:cxnSp>
-          </p:grpSp>
-        </p:grpSp>
-        <p:pic>
-          <p:nvPicPr>
-            <p:cNvPr id="39" name="Graphic 38" descr="Alarm Ringing outline">
-              <a:extLst>
-                <a:ext uri="{FF2B5EF4-FFF2-40B4-BE49-F238E27FC236}">
-                  <a16:creationId xmlns:a16="http://schemas.microsoft.com/office/drawing/2014/main" id="{A06521CE-5F19-1FCB-0285-A48FE6ADAEA9}"/>
-                </a:ext>
-              </a:extLst>
-            </p:cNvPr>
-            <p:cNvPicPr>
-              <a:picLocks noChangeAspect="1"/>
-            </p:cNvPicPr>
-            <p:nvPr/>
-          </p:nvPicPr>
-          <p:blipFill>
-            <a:blip>
-              <a:extLst>
-                <a:ext uri="{96DAC541-7B7A-43D3-8B79-37D633B846F1}">
-                  <asvg:svgBlip xmlns:asvg="http://schemas.microsoft.com/office/drawing/2016/SVG/main" r:embed="rId3"/>
-                </a:ext>
-              </a:extLst>
-            </a:blip>
-            <a:stretch>
-              <a:fillRect/>
-            </a:stretch>
-          </p:blipFill>
-          <p:spPr>
-            <a:xfrm>
-              <a:off x="27117170" y="6665603"/>
-              <a:ext cx="2105025" cy="2105025"/>
-            </a:xfrm>
-            <a:prstGeom prst="rect">
-              <a:avLst/>
-            </a:prstGeom>
-          </p:spPr>
-        </p:pic>
-        <p:pic>
-          <p:nvPicPr>
-            <p:cNvPr id="41" name="Graphic 40" descr="Snooze outline">
-              <a:extLst>
-                <a:ext uri="{FF2B5EF4-FFF2-40B4-BE49-F238E27FC236}">
-                  <a16:creationId xmlns:a16="http://schemas.microsoft.com/office/drawing/2014/main" id="{05D21A47-FEE5-33CD-5150-CCD8C98322C0}"/>
-                </a:ext>
-              </a:extLst>
-            </p:cNvPr>
-            <p:cNvPicPr>
-              <a:picLocks noChangeAspect="1"/>
-            </p:cNvPicPr>
-            <p:nvPr/>
-          </p:nvPicPr>
-          <p:blipFill>
-            <a:blip>
-              <a:extLst>
-                <a:ext uri="{96DAC541-7B7A-43D3-8B79-37D633B846F1}">
-                  <asvg:svgBlip xmlns:asvg="http://schemas.microsoft.com/office/drawing/2016/SVG/main" r:embed="rId4"/>
-                </a:ext>
-              </a:extLst>
-            </a:blip>
-            <a:stretch>
-              <a:fillRect/>
-            </a:stretch>
-          </p:blipFill>
-          <p:spPr>
-            <a:xfrm>
-              <a:off x="22468970" y="6417953"/>
-              <a:ext cx="2105025" cy="2105025"/>
-            </a:xfrm>
-            <a:prstGeom prst="rect">
-              <a:avLst/>
-            </a:prstGeom>
-          </p:spPr>
-        </p:pic>
-        <p:sp>
-          <p:nvSpPr>
-            <p:cNvPr id="43" name="Arrow: Right 42">
-              <a:extLst>
-                <a:ext uri="{FF2B5EF4-FFF2-40B4-BE49-F238E27FC236}">
-                  <a16:creationId xmlns:a16="http://schemas.microsoft.com/office/drawing/2014/main" id="{A2F234AD-9CCE-B2A5-133D-DF97E9659C03}"/>
-                </a:ext>
-              </a:extLst>
-            </p:cNvPr>
-            <p:cNvSpPr/>
-            <p:nvPr/>
-          </p:nvSpPr>
-          <p:spPr>
-            <a:xfrm>
-              <a:off x="24806275" y="7169995"/>
-              <a:ext cx="1828800" cy="981939"/>
-            </a:xfrm>
-            <a:prstGeom prst="rightArrow">
-              <a:avLst/>
-            </a:prstGeom>
-            <a:solidFill>
-              <a:schemeClr val="accent2"/>
-            </a:solidFill>
-            <a:ln w="57150">
-              <a:solidFill>
-                <a:schemeClr val="tx1"/>
-              </a:solidFill>
-            </a:ln>
-          </p:spPr>
-          <p:style>
-            <a:lnRef idx="2">
-              <a:schemeClr val="accent1">
-                <a:shade val="15000"/>
-              </a:schemeClr>
-            </a:lnRef>
-            <a:fillRef idx="1">
-              <a:schemeClr val="accent1"/>
-            </a:fillRef>
-            <a:effectRef idx="0">
-              <a:schemeClr val="accent1"/>
-            </a:effectRef>
-            <a:fontRef idx="minor">
-              <a:schemeClr val="lt1"/>
-            </a:fontRef>
-          </p:style>
-          <p:txBody>
-            <a:bodyPr rtlCol="0" anchor="ctr"/>
-            <a:lstStyle/>
-            <a:p>
-              <a:pPr algn="ctr"/>
-              <a:endParaRPr lang="en-IE"/>
-            </a:p>
-          </p:txBody>
-        </p:sp>
-        <p:grpSp>
-          <p:nvGrpSpPr>
-            <p:cNvPr id="55" name="Group 54">
-              <a:extLst>
-                <a:ext uri="{FF2B5EF4-FFF2-40B4-BE49-F238E27FC236}">
-                  <a16:creationId xmlns:a16="http://schemas.microsoft.com/office/drawing/2014/main" id="{8438DC7B-472C-B3E3-A01D-765CC1D09460}"/>
-                </a:ext>
-              </a:extLst>
-            </p:cNvPr>
-            <p:cNvGrpSpPr/>
-            <p:nvPr/>
-          </p:nvGrpSpPr>
-          <p:grpSpPr>
-            <a:xfrm>
-              <a:off x="5122141" y="2633807"/>
-              <a:ext cx="20817737" cy="1143120"/>
-              <a:chOff x="4899243" y="2108980"/>
-              <a:chExt cx="18821400" cy="1107996"/>
-            </a:xfrm>
-          </p:grpSpPr>
-          <p:cxnSp>
-            <p:nvCxnSpPr>
-              <p:cNvPr id="50" name="Straight Connector 49">
-                <a:extLst>
-                  <a:ext uri="{FF2B5EF4-FFF2-40B4-BE49-F238E27FC236}">
-                    <a16:creationId xmlns:a16="http://schemas.microsoft.com/office/drawing/2014/main" id="{4F17CA91-6386-7A67-939A-4EBB6125772E}"/>
-                  </a:ext>
-                </a:extLst>
-              </p:cNvPr>
-              <p:cNvCxnSpPr>
-                <a:cxnSpLocks/>
-              </p:cNvCxnSpPr>
-              <p:nvPr/>
-            </p:nvCxnSpPr>
-            <p:spPr>
-              <a:xfrm>
-                <a:off x="4953000" y="3108744"/>
-                <a:ext cx="18649794" cy="0"/>
-              </a:xfrm>
-              <a:prstGeom prst="line">
-                <a:avLst/>
-              </a:prstGeom>
-              <a:ln w="57150">
-                <a:solidFill>
-                  <a:schemeClr val="tx1">
-                    <a:lumMod val="65000"/>
-                    <a:lumOff val="35000"/>
-                  </a:schemeClr>
-                </a:solidFill>
-                <a:prstDash val="dash"/>
-              </a:ln>
-            </p:spPr>
-            <p:style>
-              <a:lnRef idx="2">
-                <a:schemeClr val="dk1"/>
-              </a:lnRef>
-              <a:fillRef idx="0">
-                <a:schemeClr val="dk1"/>
-              </a:fillRef>
-              <a:effectRef idx="1">
-                <a:schemeClr val="dk1"/>
-              </a:effectRef>
-              <a:fontRef idx="minor">
-                <a:schemeClr val="tx1"/>
-              </a:fontRef>
-            </p:style>
-          </p:cxnSp>
-          <p:sp>
-            <p:nvSpPr>
-              <p:cNvPr id="54" name="TextBox 53">
-                <a:extLst>
-                  <a:ext uri="{FF2B5EF4-FFF2-40B4-BE49-F238E27FC236}">
-                    <a16:creationId xmlns:a16="http://schemas.microsoft.com/office/drawing/2014/main" id="{914435C2-F2C9-4CB1-DFE2-178BD5F92F20}"/>
-                  </a:ext>
-                </a:extLst>
-              </p:cNvPr>
-              <p:cNvSpPr txBox="1"/>
-              <p:nvPr/>
-            </p:nvSpPr>
-            <p:spPr>
-              <a:xfrm>
-                <a:off x="4899243" y="2108980"/>
-                <a:ext cx="18821400" cy="1107996"/>
-              </a:xfrm>
-              <a:prstGeom prst="rect">
-                <a:avLst/>
-              </a:prstGeom>
-              <a:noFill/>
-            </p:spPr>
-            <p:txBody>
-              <a:bodyPr wrap="square" rtlCol="0">
-                <a:spAutoFit/>
-              </a:bodyPr>
-              <a:lstStyle/>
-              <a:p>
-                <a:pPr algn="ctr"/>
-                <a:r>
-                  <a:rPr lang="en-IE" sz="6600" b="1" i="1" dirty="0">
-                    <a:solidFill>
-                      <a:schemeClr val="tx1">
-                        <a:lumMod val="65000"/>
-                        <a:lumOff val="35000"/>
-                      </a:schemeClr>
-                    </a:solidFill>
-                  </a:rPr>
-                  <a:t>i). Leader Election Coordinated Across HPC Jobs</a:t>
-                </a:r>
-              </a:p>
-            </p:txBody>
-          </p:sp>
-        </p:grpSp>
-        <p:grpSp>
-          <p:nvGrpSpPr>
-            <p:cNvPr id="56" name="Group 55">
-              <a:extLst>
-                <a:ext uri="{FF2B5EF4-FFF2-40B4-BE49-F238E27FC236}">
-                  <a16:creationId xmlns:a16="http://schemas.microsoft.com/office/drawing/2014/main" id="{B415DE28-1A6C-8362-F4F8-741555000F08}"/>
-                </a:ext>
-              </a:extLst>
-            </p:cNvPr>
-            <p:cNvGrpSpPr/>
-            <p:nvPr/>
-          </p:nvGrpSpPr>
-          <p:grpSpPr>
-            <a:xfrm>
-              <a:off x="5280891" y="14525624"/>
-              <a:ext cx="18859500" cy="1107996"/>
-              <a:chOff x="4953000" y="2082800"/>
-              <a:chExt cx="18859500" cy="1107996"/>
-            </a:xfrm>
-          </p:grpSpPr>
-          <p:cxnSp>
-            <p:nvCxnSpPr>
-              <p:cNvPr id="57" name="Straight Connector 56">
-                <a:extLst>
-                  <a:ext uri="{FF2B5EF4-FFF2-40B4-BE49-F238E27FC236}">
-                    <a16:creationId xmlns:a16="http://schemas.microsoft.com/office/drawing/2014/main" id="{2A8FEBA9-B1C8-76B3-0138-002F653CAB81}"/>
-                  </a:ext>
-                </a:extLst>
-              </p:cNvPr>
-              <p:cNvCxnSpPr>
-                <a:cxnSpLocks/>
-              </p:cNvCxnSpPr>
-              <p:nvPr/>
-            </p:nvCxnSpPr>
-            <p:spPr>
-              <a:xfrm>
-                <a:off x="4953000" y="3108744"/>
-                <a:ext cx="18649794" cy="0"/>
-              </a:xfrm>
-              <a:prstGeom prst="line">
-                <a:avLst/>
-              </a:prstGeom>
-              <a:ln w="57150">
-                <a:solidFill>
-                  <a:schemeClr val="tx1">
-                    <a:lumMod val="65000"/>
-                    <a:lumOff val="35000"/>
-                  </a:schemeClr>
-                </a:solidFill>
-                <a:prstDash val="dash"/>
-              </a:ln>
-            </p:spPr>
-            <p:style>
-              <a:lnRef idx="2">
-                <a:schemeClr val="dk1"/>
-              </a:lnRef>
-              <a:fillRef idx="0">
-                <a:schemeClr val="dk1"/>
-              </a:fillRef>
-              <a:effectRef idx="1">
-                <a:schemeClr val="dk1"/>
-              </a:effectRef>
-              <a:fontRef idx="minor">
-                <a:schemeClr val="tx1"/>
-              </a:fontRef>
-            </p:style>
-          </p:cxnSp>
-          <p:sp>
-            <p:nvSpPr>
-              <p:cNvPr id="58" name="TextBox 57">
-                <a:extLst>
-                  <a:ext uri="{FF2B5EF4-FFF2-40B4-BE49-F238E27FC236}">
-                    <a16:creationId xmlns:a16="http://schemas.microsoft.com/office/drawing/2014/main" id="{FC04D604-5EE5-1D96-7D9A-76504BC438EE}"/>
-                  </a:ext>
-                </a:extLst>
-              </p:cNvPr>
-              <p:cNvSpPr txBox="1"/>
-              <p:nvPr/>
-            </p:nvSpPr>
-            <p:spPr>
-              <a:xfrm>
-                <a:off x="4991100" y="2082800"/>
-                <a:ext cx="18821400" cy="1107996"/>
-              </a:xfrm>
-              <a:prstGeom prst="rect">
-                <a:avLst/>
-              </a:prstGeom>
-              <a:noFill/>
-            </p:spPr>
-            <p:txBody>
-              <a:bodyPr wrap="square" rtlCol="0">
-                <a:spAutoFit/>
-              </a:bodyPr>
-              <a:lstStyle/>
-              <a:p>
-                <a:pPr algn="ctr"/>
-                <a:r>
-                  <a:rPr lang="en-IE" sz="6600" b="1" i="1" dirty="0">
-                    <a:solidFill>
-                      <a:schemeClr val="tx1">
-                        <a:lumMod val="65000"/>
-                        <a:lumOff val="35000"/>
-                      </a:schemeClr>
-                    </a:solidFill>
-                  </a:rPr>
-                  <a:t>ii). Hosting Node of Leader Owns the OS Lock</a:t>
-                </a:r>
-              </a:p>
-            </p:txBody>
-          </p:sp>
-        </p:grpSp>
-        <p:sp>
-          <p:nvSpPr>
-            <p:cNvPr id="87" name="Rectangle: Rounded Corners 86">
-              <a:extLst>
-                <a:ext uri="{FF2B5EF4-FFF2-40B4-BE49-F238E27FC236}">
-                  <a16:creationId xmlns:a16="http://schemas.microsoft.com/office/drawing/2014/main" id="{9F6B5165-62F2-45C5-C2B0-48352441AE46}"/>
-                </a:ext>
-              </a:extLst>
-            </p:cNvPr>
-            <p:cNvSpPr/>
-            <p:nvPr/>
-          </p:nvSpPr>
-          <p:spPr>
-            <a:xfrm>
-              <a:off x="188191" y="15722603"/>
-              <a:ext cx="29851350" cy="5918192"/>
-            </a:xfrm>
-            <a:prstGeom prst="roundRect">
-              <a:avLst/>
-            </a:prstGeom>
-            <a:solidFill>
-              <a:srgbClr val="E6EAED"/>
-            </a:solidFill>
-            <a:ln w="57150">
-              <a:solidFill>
-                <a:schemeClr val="tx1"/>
-              </a:solidFill>
-            </a:ln>
-          </p:spPr>
-          <p:style>
-            <a:lnRef idx="2">
-              <a:schemeClr val="accent1">
-                <a:shade val="15000"/>
-              </a:schemeClr>
-            </a:lnRef>
-            <a:fillRef idx="1">
-              <a:schemeClr val="accent1"/>
-            </a:fillRef>
-            <a:effectRef idx="0">
-              <a:schemeClr val="accent1"/>
-            </a:effectRef>
-            <a:fontRef idx="minor">
-              <a:schemeClr val="lt1"/>
-            </a:fontRef>
-          </p:style>
-          <p:txBody>
-            <a:bodyPr rtlCol="0" anchor="ctr"/>
-            <a:lstStyle/>
-            <a:p>
-              <a:pPr algn="ctr"/>
-              <a:endParaRPr lang="en-IE" b="1" dirty="0"/>
-            </a:p>
-          </p:txBody>
-        </p:sp>
-        <p:sp>
-          <p:nvSpPr>
-            <p:cNvPr id="88" name="TextBox 87">
-              <a:extLst>
-                <a:ext uri="{FF2B5EF4-FFF2-40B4-BE49-F238E27FC236}">
-                  <a16:creationId xmlns:a16="http://schemas.microsoft.com/office/drawing/2014/main" id="{1A58CC51-694B-6303-6B7E-1DE40BCD20AB}"/>
-                </a:ext>
-              </a:extLst>
-            </p:cNvPr>
-            <p:cNvSpPr txBox="1"/>
-            <p:nvPr/>
-          </p:nvSpPr>
-          <p:spPr>
-            <a:xfrm>
-              <a:off x="-289708" y="15798918"/>
-              <a:ext cx="9277350" cy="830997"/>
-            </a:xfrm>
-            <a:prstGeom prst="rect">
-              <a:avLst/>
-            </a:prstGeom>
-            <a:noFill/>
-          </p:spPr>
-          <p:txBody>
-            <a:bodyPr wrap="square" rtlCol="0">
-              <a:spAutoFit/>
-            </a:bodyPr>
-            <a:lstStyle/>
-            <a:p>
-              <a:pPr algn="ctr"/>
-              <a:r>
-                <a:rPr lang="en-IE" sz="4800" b="1" i="1" dirty="0"/>
-                <a:t>4). Acquire File Lock</a:t>
-              </a:r>
-            </a:p>
-          </p:txBody>
-        </p:sp>
-        <p:sp>
-          <p:nvSpPr>
-            <p:cNvPr id="90" name="TextBox 89">
-              <a:extLst>
-                <a:ext uri="{FF2B5EF4-FFF2-40B4-BE49-F238E27FC236}">
-                  <a16:creationId xmlns:a16="http://schemas.microsoft.com/office/drawing/2014/main" id="{3304CF6E-B326-E521-B77C-B4D210C04B06}"/>
-                </a:ext>
-              </a:extLst>
-            </p:cNvPr>
-            <p:cNvSpPr txBox="1"/>
-            <p:nvPr/>
-          </p:nvSpPr>
-          <p:spPr>
-            <a:xfrm>
-              <a:off x="10337075" y="15798918"/>
-              <a:ext cx="9277350" cy="830997"/>
-            </a:xfrm>
-            <a:prstGeom prst="rect">
-              <a:avLst/>
-            </a:prstGeom>
-            <a:noFill/>
-          </p:spPr>
-          <p:txBody>
-            <a:bodyPr wrap="square" rtlCol="0">
-              <a:spAutoFit/>
-            </a:bodyPr>
-            <a:lstStyle/>
-            <a:p>
-              <a:pPr algn="ctr"/>
-              <a:r>
-                <a:rPr lang="en-IE" sz="4800" b="1" i="1" dirty="0"/>
-                <a:t>5). Execute Work Under Lock</a:t>
-              </a:r>
-            </a:p>
-          </p:txBody>
-        </p:sp>
-        <p:sp>
-          <p:nvSpPr>
-            <p:cNvPr id="92" name="Arrow: Right 91">
-              <a:extLst>
-                <a:ext uri="{FF2B5EF4-FFF2-40B4-BE49-F238E27FC236}">
-                  <a16:creationId xmlns:a16="http://schemas.microsoft.com/office/drawing/2014/main" id="{AE345429-4113-2B59-9FBD-F7FEC818DA28}"/>
-                </a:ext>
-              </a:extLst>
-            </p:cNvPr>
-            <p:cNvSpPr/>
-            <p:nvPr/>
-          </p:nvSpPr>
-          <p:spPr>
-            <a:xfrm>
-              <a:off x="8768936" y="18207958"/>
-              <a:ext cx="1979305" cy="1413703"/>
-            </a:xfrm>
-            <a:prstGeom prst="rightArrow">
-              <a:avLst/>
-            </a:prstGeom>
-            <a:gradFill flip="none" rotWithShape="1">
-              <a:gsLst>
-                <a:gs pos="0">
-                  <a:schemeClr val="accent1">
-                    <a:shade val="30000"/>
-                    <a:satMod val="115000"/>
-                  </a:schemeClr>
-                </a:gs>
-                <a:gs pos="50000">
-                  <a:schemeClr val="accent1">
-                    <a:shade val="67500"/>
-                    <a:satMod val="115000"/>
-                  </a:schemeClr>
-                </a:gs>
-                <a:gs pos="100000">
-                  <a:schemeClr val="accent1">
-                    <a:shade val="100000"/>
-                    <a:satMod val="115000"/>
-                  </a:schemeClr>
-                </a:gs>
-              </a:gsLst>
-              <a:lin ang="13500000" scaled="1"/>
-              <a:tileRect/>
-            </a:gradFill>
-            <a:ln w="57150">
-              <a:solidFill>
-                <a:schemeClr val="tx1"/>
-              </a:solidFill>
-            </a:ln>
-          </p:spPr>
-          <p:style>
-            <a:lnRef idx="2">
-              <a:schemeClr val="accent1">
-                <a:shade val="15000"/>
-              </a:schemeClr>
-            </a:lnRef>
-            <a:fillRef idx="1">
-              <a:schemeClr val="accent1"/>
-            </a:fillRef>
-            <a:effectRef idx="0">
-              <a:schemeClr val="accent1"/>
-            </a:effectRef>
-            <a:fontRef idx="minor">
-              <a:schemeClr val="lt1"/>
-            </a:fontRef>
-          </p:style>
-          <p:txBody>
-            <a:bodyPr rtlCol="0" anchor="ctr"/>
-            <a:lstStyle/>
-            <a:p>
-              <a:pPr algn="ctr"/>
-              <a:endParaRPr lang="en-IE"/>
-            </a:p>
-          </p:txBody>
-        </p:sp>
-        <p:sp>
-          <p:nvSpPr>
-            <p:cNvPr id="93" name="Arrow: Right 92">
-              <a:extLst>
-                <a:ext uri="{FF2B5EF4-FFF2-40B4-BE49-F238E27FC236}">
-                  <a16:creationId xmlns:a16="http://schemas.microsoft.com/office/drawing/2014/main" id="{9A92287C-9ADC-C5E8-F927-2ABB19F06159}"/>
-                </a:ext>
-              </a:extLst>
-            </p:cNvPr>
-            <p:cNvSpPr/>
-            <p:nvPr/>
-          </p:nvSpPr>
-          <p:spPr>
-            <a:xfrm>
-              <a:off x="18640529" y="18100710"/>
-              <a:ext cx="2242312" cy="1440594"/>
-            </a:xfrm>
-            <a:prstGeom prst="rightArrow">
-              <a:avLst/>
-            </a:prstGeom>
-            <a:gradFill flip="none" rotWithShape="1">
-              <a:gsLst>
-                <a:gs pos="0">
-                  <a:schemeClr val="accent1">
-                    <a:shade val="30000"/>
-                    <a:satMod val="115000"/>
-                  </a:schemeClr>
-                </a:gs>
-                <a:gs pos="50000">
-                  <a:schemeClr val="accent1">
-                    <a:shade val="67500"/>
-                    <a:satMod val="115000"/>
-                  </a:schemeClr>
-                </a:gs>
-                <a:gs pos="100000">
-                  <a:schemeClr val="accent1">
-                    <a:shade val="100000"/>
-                    <a:satMod val="115000"/>
-                  </a:schemeClr>
-                </a:gs>
-              </a:gsLst>
-              <a:lin ang="13500000" scaled="1"/>
-              <a:tileRect/>
-            </a:gradFill>
-            <a:ln w="57150">
-              <a:solidFill>
-                <a:schemeClr val="tx1"/>
-              </a:solidFill>
-            </a:ln>
-          </p:spPr>
-          <p:style>
-            <a:lnRef idx="2">
-              <a:schemeClr val="accent1">
-                <a:shade val="15000"/>
-              </a:schemeClr>
-            </a:lnRef>
-            <a:fillRef idx="1">
-              <a:schemeClr val="accent1"/>
-            </a:fillRef>
-            <a:effectRef idx="0">
-              <a:schemeClr val="accent1"/>
-            </a:effectRef>
-            <a:fontRef idx="minor">
-              <a:schemeClr val="lt1"/>
-            </a:fontRef>
-          </p:style>
-          <p:txBody>
-            <a:bodyPr rtlCol="0" anchor="ctr"/>
-            <a:lstStyle/>
-            <a:p>
-              <a:pPr algn="ctr"/>
-              <a:endParaRPr lang="en-IE"/>
-            </a:p>
-          </p:txBody>
-        </p:sp>
-        <p:sp>
-          <p:nvSpPr>
-            <p:cNvPr id="94" name="TextBox 93">
-              <a:extLst>
-                <a:ext uri="{FF2B5EF4-FFF2-40B4-BE49-F238E27FC236}">
-                  <a16:creationId xmlns:a16="http://schemas.microsoft.com/office/drawing/2014/main" id="{DC31B3FA-AD41-3E67-4907-5195F0A775AF}"/>
-                </a:ext>
-              </a:extLst>
-            </p:cNvPr>
-            <p:cNvSpPr txBox="1"/>
-            <p:nvPr/>
-          </p:nvSpPr>
-          <p:spPr>
-            <a:xfrm>
-              <a:off x="22365661" y="15798918"/>
-              <a:ext cx="6657975" cy="830997"/>
-            </a:xfrm>
-            <a:prstGeom prst="rect">
-              <a:avLst/>
-            </a:prstGeom>
-            <a:noFill/>
-          </p:spPr>
-          <p:txBody>
-            <a:bodyPr wrap="square" rtlCol="0">
-              <a:spAutoFit/>
-            </a:bodyPr>
-            <a:lstStyle/>
-            <a:p>
-              <a:pPr algn="ctr"/>
-              <a:r>
-                <a:rPr lang="en-IE" sz="4800" b="1" i="1" dirty="0"/>
-                <a:t>6). Dequeue Mutex</a:t>
-              </a:r>
-            </a:p>
-          </p:txBody>
-        </p:sp>
-        <p:grpSp>
-          <p:nvGrpSpPr>
-            <p:cNvPr id="96" name="Group 95">
-              <a:extLst>
-                <a:ext uri="{FF2B5EF4-FFF2-40B4-BE49-F238E27FC236}">
-                  <a16:creationId xmlns:a16="http://schemas.microsoft.com/office/drawing/2014/main" id="{BEB964F5-01B5-3919-71C3-72F33580F0AB}"/>
-                </a:ext>
-              </a:extLst>
-            </p:cNvPr>
-            <p:cNvGrpSpPr/>
-            <p:nvPr/>
-          </p:nvGrpSpPr>
-          <p:grpSpPr>
-            <a:xfrm>
-              <a:off x="21325242" y="16779966"/>
-              <a:ext cx="8392038" cy="4236049"/>
-              <a:chOff x="12363450" y="4232467"/>
-              <a:chExt cx="9277350" cy="5044882"/>
-            </a:xfrm>
-          </p:grpSpPr>
-          <p:sp>
-            <p:nvSpPr>
-              <p:cNvPr id="100" name="Rectangle: Rounded Corners 99">
-                <a:extLst>
-                  <a:ext uri="{FF2B5EF4-FFF2-40B4-BE49-F238E27FC236}">
-                    <a16:creationId xmlns:a16="http://schemas.microsoft.com/office/drawing/2014/main" id="{D1D4EDCD-A5D1-874D-2060-507433C888D5}"/>
-                  </a:ext>
-                </a:extLst>
-              </p:cNvPr>
-              <p:cNvSpPr/>
-              <p:nvPr/>
-            </p:nvSpPr>
-            <p:spPr>
-              <a:xfrm>
-                <a:off x="12363450" y="4232467"/>
-                <a:ext cx="9277350" cy="5044882"/>
-              </a:xfrm>
-              <a:prstGeom prst="roundRect">
-                <a:avLst/>
-              </a:prstGeom>
-              <a:gradFill flip="none" rotWithShape="1">
-                <a:gsLst>
-                  <a:gs pos="0">
-                    <a:schemeClr val="accent1">
-                      <a:shade val="30000"/>
-                      <a:satMod val="115000"/>
-                    </a:schemeClr>
-                  </a:gs>
-                  <a:gs pos="50000">
-                    <a:schemeClr val="accent1">
-                      <a:shade val="67500"/>
-                      <a:satMod val="115000"/>
-                    </a:schemeClr>
-                  </a:gs>
-                  <a:gs pos="100000">
-                    <a:schemeClr val="accent1">
-                      <a:shade val="100000"/>
-                      <a:satMod val="115000"/>
-                    </a:schemeClr>
-                  </a:gs>
-                </a:gsLst>
-                <a:lin ang="13500000" scaled="1"/>
-                <a:tileRect/>
-              </a:gradFill>
-              <a:ln w="57150">
-                <a:solidFill>
-                  <a:schemeClr val="tx1"/>
-                </a:solidFill>
-              </a:ln>
-            </p:spPr>
-            <p:style>
-              <a:lnRef idx="2">
-                <a:schemeClr val="accent1">
-                  <a:shade val="15000"/>
-                </a:schemeClr>
-              </a:lnRef>
-              <a:fillRef idx="1">
-                <a:schemeClr val="accent1"/>
-              </a:fillRef>
-              <a:effectRef idx="0">
-                <a:schemeClr val="accent1"/>
-              </a:effectRef>
-              <a:fontRef idx="minor">
-                <a:schemeClr val="lt1"/>
-              </a:fontRef>
-            </p:style>
-            <p:txBody>
-              <a:bodyPr rtlCol="0" anchor="ctr"/>
-              <a:lstStyle/>
-              <a:p>
-                <a:pPr algn="ctr"/>
-                <a:endParaRPr lang="en-IE" sz="3200" b="1" dirty="0"/>
-              </a:p>
-            </p:txBody>
-          </p:sp>
-          <p:grpSp>
-            <p:nvGrpSpPr>
-              <p:cNvPr id="101" name="Group 100">
-                <a:extLst>
-                  <a:ext uri="{FF2B5EF4-FFF2-40B4-BE49-F238E27FC236}">
-                    <a16:creationId xmlns:a16="http://schemas.microsoft.com/office/drawing/2014/main" id="{0C38E234-E7AC-FB28-218C-CCAB9770B5A1}"/>
-                  </a:ext>
-                </a:extLst>
-              </p:cNvPr>
-              <p:cNvGrpSpPr/>
-              <p:nvPr/>
-            </p:nvGrpSpPr>
-            <p:grpSpPr>
-              <a:xfrm>
-                <a:off x="12515850" y="4385666"/>
-                <a:ext cx="9048750" cy="680484"/>
-                <a:chOff x="914400" y="4442816"/>
-                <a:chExt cx="9048750" cy="680484"/>
-              </a:xfrm>
-            </p:grpSpPr>
-            <p:sp>
-              <p:nvSpPr>
-                <p:cNvPr id="102" name="TextBox 101">
-                  <a:extLst>
-                    <a:ext uri="{FF2B5EF4-FFF2-40B4-BE49-F238E27FC236}">
-                      <a16:creationId xmlns:a16="http://schemas.microsoft.com/office/drawing/2014/main" id="{6D892C4A-C8B2-E3B3-2102-90A87CEA6E3D}"/>
-                    </a:ext>
-                  </a:extLst>
-                </p:cNvPr>
-                <p:cNvSpPr txBox="1"/>
-                <p:nvPr/>
-              </p:nvSpPr>
-              <p:spPr>
-                <a:xfrm>
-                  <a:off x="914400" y="4442816"/>
-                  <a:ext cx="9048750" cy="623124"/>
-                </a:xfrm>
-                <a:prstGeom prst="rect">
-                  <a:avLst/>
-                </a:prstGeom>
-                <a:noFill/>
-              </p:spPr>
-              <p:txBody>
-                <a:bodyPr wrap="square">
-                  <a:spAutoFit/>
-                </a:bodyPr>
-                <a:lstStyle/>
-                <a:p>
-                  <a:pPr algn="ctr"/>
-                  <a:r>
-                    <a:rPr lang="en-IE" sz="2800" b="1" dirty="0">
-                      <a:solidFill>
-                        <a:schemeClr val="bg1"/>
-                      </a:solidFill>
-                    </a:rPr>
-                    <a:t>Clear Central then Election Lock</a:t>
-                  </a:r>
-                </a:p>
-              </p:txBody>
-            </p:sp>
-            <p:cxnSp>
-              <p:nvCxnSpPr>
-                <p:cNvPr id="103" name="Straight Connector 102">
-                  <a:extLst>
-                    <a:ext uri="{FF2B5EF4-FFF2-40B4-BE49-F238E27FC236}">
-                      <a16:creationId xmlns:a16="http://schemas.microsoft.com/office/drawing/2014/main" id="{8F177FCE-694E-26FC-3BDF-DA48A7D41C49}"/>
-                    </a:ext>
-                  </a:extLst>
-                </p:cNvPr>
-                <p:cNvCxnSpPr>
-                  <a:cxnSpLocks/>
-                </p:cNvCxnSpPr>
-                <p:nvPr/>
-              </p:nvCxnSpPr>
-              <p:spPr>
-                <a:xfrm>
-                  <a:off x="1412270" y="5123300"/>
-                  <a:ext cx="8112730" cy="0"/>
-                </a:xfrm>
-                <a:prstGeom prst="line">
-                  <a:avLst/>
-                </a:prstGeom>
-                <a:ln w="19050" cap="flat" cmpd="sng" algn="ctr">
-                  <a:solidFill>
-                    <a:schemeClr val="bg1"/>
-                  </a:solidFill>
-                  <a:prstDash val="dash"/>
-                  <a:round/>
-                  <a:headEnd type="none" w="med" len="med"/>
-                  <a:tailEnd type="none" w="med" len="med"/>
-                </a:ln>
-              </p:spPr>
-              <p:style>
-                <a:lnRef idx="0">
-                  <a:scrgbClr r="0" g="0" b="0"/>
-                </a:lnRef>
-                <a:fillRef idx="0">
-                  <a:scrgbClr r="0" g="0" b="0"/>
-                </a:fillRef>
-                <a:effectRef idx="0">
-                  <a:scrgbClr r="0" g="0" b="0"/>
-                </a:effectRef>
-                <a:fontRef idx="minor">
-                  <a:schemeClr val="tx1"/>
-                </a:fontRef>
-              </p:style>
-            </p:cxnSp>
-          </p:grpSp>
-        </p:grpSp>
-        <p:sp>
-          <p:nvSpPr>
-            <p:cNvPr id="113" name="Arrow: Right 112">
-              <a:extLst>
-                <a:ext uri="{FF2B5EF4-FFF2-40B4-BE49-F238E27FC236}">
-                  <a16:creationId xmlns:a16="http://schemas.microsoft.com/office/drawing/2014/main" id="{5235A552-AB28-96C9-9D25-FE98C601670A}"/>
-                </a:ext>
-              </a:extLst>
-            </p:cNvPr>
-            <p:cNvSpPr/>
-            <p:nvPr/>
-          </p:nvSpPr>
-          <p:spPr>
-            <a:xfrm rot="5400000">
-              <a:off x="13797988" y="12011264"/>
-              <a:ext cx="2656859" cy="1619250"/>
-            </a:xfrm>
-            <a:prstGeom prst="rightArrow">
-              <a:avLst/>
-            </a:prstGeom>
-            <a:gradFill flip="none" rotWithShape="1">
-              <a:gsLst>
-                <a:gs pos="0">
-                  <a:schemeClr val="accent1">
-                    <a:shade val="30000"/>
-                    <a:satMod val="115000"/>
-                  </a:schemeClr>
-                </a:gs>
-                <a:gs pos="50000">
-                  <a:schemeClr val="accent1">
-                    <a:shade val="67500"/>
-                    <a:satMod val="115000"/>
-                  </a:schemeClr>
-                </a:gs>
-                <a:gs pos="100000">
-                  <a:schemeClr val="accent1">
-                    <a:shade val="100000"/>
-                    <a:satMod val="115000"/>
-                  </a:schemeClr>
-                </a:gs>
-              </a:gsLst>
-              <a:lin ang="13500000" scaled="1"/>
-              <a:tileRect/>
-            </a:gradFill>
-            <a:ln w="57150">
-              <a:solidFill>
-                <a:schemeClr val="tx1"/>
-              </a:solidFill>
-            </a:ln>
-          </p:spPr>
-          <p:style>
-            <a:lnRef idx="2">
-              <a:schemeClr val="accent1">
-                <a:shade val="15000"/>
-              </a:schemeClr>
-            </a:lnRef>
-            <a:fillRef idx="1">
-              <a:schemeClr val="accent1"/>
-            </a:fillRef>
-            <a:effectRef idx="0">
-              <a:schemeClr val="accent1"/>
-            </a:effectRef>
-            <a:fontRef idx="minor">
-              <a:schemeClr val="lt1"/>
-            </a:fontRef>
-          </p:style>
-          <p:txBody>
-            <a:bodyPr rtlCol="0" anchor="ctr"/>
-            <a:lstStyle/>
-            <a:p>
-              <a:pPr algn="ctr"/>
-              <a:endParaRPr lang="en-IE"/>
-            </a:p>
-          </p:txBody>
-        </p:sp>
-        <p:grpSp>
-          <p:nvGrpSpPr>
-            <p:cNvPr id="89" name="Group 88">
-              <a:extLst>
-                <a:ext uri="{FF2B5EF4-FFF2-40B4-BE49-F238E27FC236}">
-                  <a16:creationId xmlns:a16="http://schemas.microsoft.com/office/drawing/2014/main" id="{3824AFED-603D-7D8E-5651-3778581935FE}"/>
-                </a:ext>
-              </a:extLst>
-            </p:cNvPr>
-            <p:cNvGrpSpPr/>
-            <p:nvPr/>
-          </p:nvGrpSpPr>
-          <p:grpSpPr>
-            <a:xfrm>
-              <a:off x="734291" y="16906275"/>
-              <a:ext cx="7521575" cy="3842943"/>
-              <a:chOff x="609600" y="4232468"/>
-              <a:chExt cx="9277350" cy="5044882"/>
-            </a:xfrm>
-          </p:grpSpPr>
-          <p:sp>
-            <p:nvSpPr>
-              <p:cNvPr id="108" name="Rectangle: Rounded Corners 107">
-                <a:extLst>
-                  <a:ext uri="{FF2B5EF4-FFF2-40B4-BE49-F238E27FC236}">
-                    <a16:creationId xmlns:a16="http://schemas.microsoft.com/office/drawing/2014/main" id="{63642D35-62E7-4F25-2914-F20F10C76A8C}"/>
-                  </a:ext>
-                </a:extLst>
-              </p:cNvPr>
-              <p:cNvSpPr/>
-              <p:nvPr/>
-            </p:nvSpPr>
-            <p:spPr>
-              <a:xfrm>
-                <a:off x="609600" y="4232468"/>
-                <a:ext cx="9277350" cy="5044882"/>
-              </a:xfrm>
-              <a:prstGeom prst="roundRect">
-                <a:avLst/>
-              </a:prstGeom>
-              <a:gradFill flip="none" rotWithShape="1">
-                <a:gsLst>
-                  <a:gs pos="0">
-                    <a:schemeClr val="accent1">
-                      <a:shade val="30000"/>
-                      <a:satMod val="115000"/>
-                    </a:schemeClr>
-                  </a:gs>
-                  <a:gs pos="50000">
-                    <a:schemeClr val="accent1">
-                      <a:shade val="67500"/>
-                      <a:satMod val="115000"/>
-                    </a:schemeClr>
-                  </a:gs>
-                  <a:gs pos="100000">
-                    <a:schemeClr val="accent1">
-                      <a:shade val="100000"/>
-                      <a:satMod val="115000"/>
-                    </a:schemeClr>
-                  </a:gs>
-                </a:gsLst>
-                <a:lin ang="13500000" scaled="1"/>
-                <a:tileRect/>
-              </a:gradFill>
-              <a:ln w="57150">
-                <a:solidFill>
-                  <a:schemeClr val="tx1"/>
-                </a:solidFill>
-              </a:ln>
-            </p:spPr>
-            <p:style>
-              <a:lnRef idx="2">
-                <a:schemeClr val="accent1">
-                  <a:shade val="15000"/>
-                </a:schemeClr>
-              </a:lnRef>
-              <a:fillRef idx="1">
-                <a:schemeClr val="accent1"/>
-              </a:fillRef>
-              <a:effectRef idx="0">
-                <a:schemeClr val="accent1"/>
-              </a:effectRef>
-              <a:fontRef idx="minor">
-                <a:schemeClr val="lt1"/>
-              </a:fontRef>
-            </p:style>
-            <p:txBody>
-              <a:bodyPr rtlCol="0" anchor="ctr"/>
-              <a:lstStyle/>
-              <a:p>
-                <a:endParaRPr lang="en-IE" sz="3200" b="1" dirty="0"/>
-              </a:p>
-            </p:txBody>
-          </p:sp>
-          <p:grpSp>
-            <p:nvGrpSpPr>
-              <p:cNvPr id="109" name="Group 108">
-                <a:extLst>
-                  <a:ext uri="{FF2B5EF4-FFF2-40B4-BE49-F238E27FC236}">
-                    <a16:creationId xmlns:a16="http://schemas.microsoft.com/office/drawing/2014/main" id="{4C706FEC-6D43-6EF3-8962-CE9C89EDB1A5}"/>
-                  </a:ext>
-                </a:extLst>
-              </p:cNvPr>
-              <p:cNvGrpSpPr/>
-              <p:nvPr/>
-            </p:nvGrpSpPr>
-            <p:grpSpPr>
-              <a:xfrm>
-                <a:off x="609600" y="4385666"/>
-                <a:ext cx="9048750" cy="689940"/>
-                <a:chOff x="914400" y="4442816"/>
-                <a:chExt cx="9048750" cy="689940"/>
-              </a:xfrm>
-            </p:grpSpPr>
-            <p:sp>
-              <p:nvSpPr>
-                <p:cNvPr id="110" name="TextBox 109">
-                  <a:extLst>
-                    <a:ext uri="{FF2B5EF4-FFF2-40B4-BE49-F238E27FC236}">
-                      <a16:creationId xmlns:a16="http://schemas.microsoft.com/office/drawing/2014/main" id="{5FB26764-FE71-E2BA-81BD-1A41BC916065}"/>
-                    </a:ext>
-                  </a:extLst>
-                </p:cNvPr>
-                <p:cNvSpPr txBox="1"/>
-                <p:nvPr/>
-              </p:nvSpPr>
-              <p:spPr>
-                <a:xfrm>
-                  <a:off x="914400" y="4442816"/>
-                  <a:ext cx="9048750" cy="686866"/>
-                </a:xfrm>
-                <a:prstGeom prst="rect">
-                  <a:avLst/>
-                </a:prstGeom>
-                <a:noFill/>
-              </p:spPr>
-              <p:txBody>
-                <a:bodyPr wrap="square">
-                  <a:spAutoFit/>
-                </a:bodyPr>
-                <a:lstStyle/>
-                <a:p>
-                  <a:pPr algn="ctr"/>
-                  <a:r>
-                    <a:rPr lang="en-IE" sz="2800" b="1" dirty="0">
-                      <a:solidFill>
-                        <a:schemeClr val="bg1"/>
-                      </a:solidFill>
-                    </a:rPr>
-                    <a:t>FileChannel Lock on Central LockFile</a:t>
-                  </a:r>
-                </a:p>
-              </p:txBody>
-            </p:sp>
-            <p:cxnSp>
-              <p:nvCxnSpPr>
-                <p:cNvPr id="111" name="Straight Connector 110">
-                  <a:extLst>
-                    <a:ext uri="{FF2B5EF4-FFF2-40B4-BE49-F238E27FC236}">
-                      <a16:creationId xmlns:a16="http://schemas.microsoft.com/office/drawing/2014/main" id="{D438D6CE-796E-F0D7-2297-DD9F25BC0390}"/>
-                    </a:ext>
-                  </a:extLst>
-                </p:cNvPr>
-                <p:cNvCxnSpPr>
-                  <a:cxnSpLocks/>
-                </p:cNvCxnSpPr>
-                <p:nvPr/>
-              </p:nvCxnSpPr>
-              <p:spPr>
-                <a:xfrm>
-                  <a:off x="1497160" y="5132756"/>
-                  <a:ext cx="8032762" cy="0"/>
-                </a:xfrm>
-                <a:prstGeom prst="line">
-                  <a:avLst/>
-                </a:prstGeom>
-                <a:ln w="19050" cap="flat" cmpd="sng" algn="ctr">
-                  <a:solidFill>
-                    <a:schemeClr val="bg1"/>
-                  </a:solidFill>
-                  <a:prstDash val="dash"/>
-                  <a:round/>
-                  <a:headEnd type="none" w="med" len="med"/>
-                  <a:tailEnd type="none" w="med" len="med"/>
-                </a:ln>
-              </p:spPr>
-              <p:style>
-                <a:lnRef idx="0">
-                  <a:scrgbClr r="0" g="0" b="0"/>
-                </a:lnRef>
-                <a:fillRef idx="0">
-                  <a:scrgbClr r="0" g="0" b="0"/>
-                </a:fillRef>
-                <a:effectRef idx="0">
-                  <a:scrgbClr r="0" g="0" b="0"/>
-                </a:effectRef>
-                <a:fontRef idx="minor">
-                  <a:schemeClr val="tx1"/>
-                </a:fontRef>
-              </p:style>
-            </p:cxnSp>
-          </p:grpSp>
-        </p:grpSp>
-        <p:grpSp>
-          <p:nvGrpSpPr>
-            <p:cNvPr id="122" name="Group 121">
-              <a:extLst>
-                <a:ext uri="{FF2B5EF4-FFF2-40B4-BE49-F238E27FC236}">
-                  <a16:creationId xmlns:a16="http://schemas.microsoft.com/office/drawing/2014/main" id="{2E5359AA-2A23-D204-F4FF-03D4CC2A86B1}"/>
-                </a:ext>
-              </a:extLst>
-            </p:cNvPr>
-            <p:cNvGrpSpPr/>
-            <p:nvPr/>
-          </p:nvGrpSpPr>
-          <p:grpSpPr>
-            <a:xfrm>
-              <a:off x="2801215" y="17754707"/>
-              <a:ext cx="3140911" cy="2301407"/>
-              <a:chOff x="1939924" y="18109350"/>
-              <a:chExt cx="3573819" cy="2536825"/>
-            </a:xfrm>
-          </p:grpSpPr>
-          <p:pic>
-            <p:nvPicPr>
-              <p:cNvPr id="120" name="Graphic 119" descr="Lock outline">
-                <a:extLst>
-                  <a:ext uri="{FF2B5EF4-FFF2-40B4-BE49-F238E27FC236}">
-                    <a16:creationId xmlns:a16="http://schemas.microsoft.com/office/drawing/2014/main" id="{7B630FEC-92E0-4756-D730-8992B212194C}"/>
-                  </a:ext>
-                </a:extLst>
-              </p:cNvPr>
-              <p:cNvPicPr>
-                <a:picLocks noChangeAspect="1"/>
-              </p:cNvPicPr>
-              <p:nvPr/>
-            </p:nvPicPr>
-            <p:blipFill>
-              <a:blip>
-                <a:extLst>
-                  <a:ext uri="{96DAC541-7B7A-43D3-8B79-37D633B846F1}">
-                    <asvg:svgBlip xmlns:asvg="http://schemas.microsoft.com/office/drawing/2016/SVG/main" r:embed="rId5"/>
-                  </a:ext>
-                </a:extLst>
-              </a:blip>
-              <a:stretch>
-                <a:fillRect/>
-              </a:stretch>
-            </p:blipFill>
-            <p:spPr>
-              <a:xfrm>
-                <a:off x="3836986" y="18584802"/>
-                <a:ext cx="1676757" cy="1676757"/>
-              </a:xfrm>
-              <a:prstGeom prst="rect">
-                <a:avLst/>
-              </a:prstGeom>
-            </p:spPr>
-          </p:pic>
-          <p:pic>
-            <p:nvPicPr>
-              <p:cNvPr id="121" name="Graphic 120" descr="Document with solid fill">
-                <a:extLst>
-                  <a:ext uri="{FF2B5EF4-FFF2-40B4-BE49-F238E27FC236}">
-                    <a16:creationId xmlns:a16="http://schemas.microsoft.com/office/drawing/2014/main" id="{9A7FF259-FA79-C04A-27C7-5666BA552DE4}"/>
-                  </a:ext>
-                </a:extLst>
-              </p:cNvPr>
-              <p:cNvPicPr>
-                <a:picLocks noChangeAspect="1"/>
-              </p:cNvPicPr>
-              <p:nvPr/>
-            </p:nvPicPr>
-            <p:blipFill>
-              <a:blip>
-                <a:extLst>
-                  <a:ext uri="{96DAC541-7B7A-43D3-8B79-37D633B846F1}">
-                    <asvg:svgBlip xmlns:asvg="http://schemas.microsoft.com/office/drawing/2016/SVG/main" r:embed="rId6"/>
-                  </a:ext>
-                </a:extLst>
-              </a:blip>
-              <a:stretch>
-                <a:fillRect/>
-              </a:stretch>
-            </p:blipFill>
-            <p:spPr>
-              <a:xfrm>
-                <a:off x="1939924" y="18109350"/>
-                <a:ext cx="2536825" cy="2536825"/>
-              </a:xfrm>
-              <a:prstGeom prst="rect">
-                <a:avLst/>
-              </a:prstGeom>
-            </p:spPr>
-          </p:pic>
-        </p:grpSp>
-        <p:grpSp>
-          <p:nvGrpSpPr>
-            <p:cNvPr id="91" name="Group 90">
-              <a:extLst>
-                <a:ext uri="{FF2B5EF4-FFF2-40B4-BE49-F238E27FC236}">
-                  <a16:creationId xmlns:a16="http://schemas.microsoft.com/office/drawing/2014/main" id="{58AADD96-942D-E95B-B1E7-25F4E2905E02}"/>
-                </a:ext>
-              </a:extLst>
-            </p:cNvPr>
-            <p:cNvGrpSpPr/>
-            <p:nvPr/>
-          </p:nvGrpSpPr>
-          <p:grpSpPr>
-            <a:xfrm>
-              <a:off x="11122891" y="16906275"/>
-              <a:ext cx="7023100" cy="3919143"/>
-              <a:chOff x="12363450" y="4232467"/>
-              <a:chExt cx="9277350" cy="5044882"/>
-            </a:xfrm>
-          </p:grpSpPr>
-          <p:sp>
-            <p:nvSpPr>
-              <p:cNvPr id="104" name="Rectangle: Rounded Corners 103">
-                <a:extLst>
-                  <a:ext uri="{FF2B5EF4-FFF2-40B4-BE49-F238E27FC236}">
-                    <a16:creationId xmlns:a16="http://schemas.microsoft.com/office/drawing/2014/main" id="{8CE5F9D7-906C-B109-E9C5-E0D38401E58F}"/>
-                  </a:ext>
-                </a:extLst>
-              </p:cNvPr>
-              <p:cNvSpPr/>
-              <p:nvPr/>
-            </p:nvSpPr>
-            <p:spPr>
-              <a:xfrm>
-                <a:off x="12363450" y="4232467"/>
-                <a:ext cx="9277350" cy="5044882"/>
-              </a:xfrm>
-              <a:prstGeom prst="roundRect">
-                <a:avLst/>
-              </a:prstGeom>
-              <a:gradFill flip="none" rotWithShape="1">
-                <a:gsLst>
-                  <a:gs pos="0">
-                    <a:schemeClr val="accent1">
-                      <a:shade val="30000"/>
-                      <a:satMod val="115000"/>
-                    </a:schemeClr>
-                  </a:gs>
-                  <a:gs pos="50000">
-                    <a:schemeClr val="accent1">
-                      <a:shade val="67500"/>
-                      <a:satMod val="115000"/>
-                    </a:schemeClr>
-                  </a:gs>
-                  <a:gs pos="100000">
-                    <a:schemeClr val="accent1">
-                      <a:shade val="100000"/>
-                      <a:satMod val="115000"/>
-                    </a:schemeClr>
-                  </a:gs>
-                </a:gsLst>
-                <a:lin ang="13500000" scaled="1"/>
-                <a:tileRect/>
-              </a:gradFill>
-              <a:ln w="57150">
-                <a:solidFill>
-                  <a:schemeClr val="tx1"/>
-                </a:solidFill>
-              </a:ln>
-            </p:spPr>
-            <p:style>
-              <a:lnRef idx="2">
-                <a:schemeClr val="accent1">
-                  <a:shade val="15000"/>
-                </a:schemeClr>
-              </a:lnRef>
-              <a:fillRef idx="1">
-                <a:schemeClr val="accent1"/>
-              </a:fillRef>
-              <a:effectRef idx="0">
-                <a:schemeClr val="accent1"/>
-              </a:effectRef>
-              <a:fontRef idx="minor">
-                <a:schemeClr val="lt1"/>
-              </a:fontRef>
-            </p:style>
-            <p:txBody>
-              <a:bodyPr rtlCol="0" anchor="ctr"/>
-              <a:lstStyle/>
-              <a:p>
-                <a:pPr algn="ctr"/>
-                <a:endParaRPr lang="en-IE" sz="3200" b="1" dirty="0"/>
-              </a:p>
-            </p:txBody>
-          </p:sp>
-          <p:grpSp>
-            <p:nvGrpSpPr>
-              <p:cNvPr id="105" name="Group 104">
-                <a:extLst>
-                  <a:ext uri="{FF2B5EF4-FFF2-40B4-BE49-F238E27FC236}">
-                    <a16:creationId xmlns:a16="http://schemas.microsoft.com/office/drawing/2014/main" id="{EFB25828-2711-D2B1-17B2-15EC5A261F83}"/>
-                  </a:ext>
-                </a:extLst>
-              </p:cNvPr>
-              <p:cNvGrpSpPr/>
-              <p:nvPr/>
-            </p:nvGrpSpPr>
-            <p:grpSpPr>
-              <a:xfrm>
-                <a:off x="12515850" y="4385666"/>
-                <a:ext cx="9048750" cy="692714"/>
-                <a:chOff x="914400" y="4442816"/>
-                <a:chExt cx="9048750" cy="692714"/>
-              </a:xfrm>
-            </p:grpSpPr>
-            <p:sp>
-              <p:nvSpPr>
-                <p:cNvPr id="106" name="TextBox 105">
-                  <a:extLst>
-                    <a:ext uri="{FF2B5EF4-FFF2-40B4-BE49-F238E27FC236}">
-                      <a16:creationId xmlns:a16="http://schemas.microsoft.com/office/drawing/2014/main" id="{401BD3F1-B161-5045-06D8-A48535812444}"/>
-                    </a:ext>
-                  </a:extLst>
-                </p:cNvPr>
-                <p:cNvSpPr txBox="1"/>
-                <p:nvPr/>
-              </p:nvSpPr>
-              <p:spPr>
-                <a:xfrm>
-                  <a:off x="914400" y="4442816"/>
-                  <a:ext cx="9048750" cy="673511"/>
-                </a:xfrm>
-                <a:prstGeom prst="rect">
-                  <a:avLst/>
-                </a:prstGeom>
-                <a:noFill/>
-              </p:spPr>
-              <p:txBody>
-                <a:bodyPr wrap="square">
-                  <a:spAutoFit/>
-                </a:bodyPr>
-                <a:lstStyle/>
-                <a:p>
-                  <a:pPr algn="ctr"/>
-                  <a:r>
-                    <a:rPr lang="en-IE" sz="2800" b="1" dirty="0">
-                      <a:solidFill>
-                        <a:schemeClr val="bg1"/>
-                      </a:solidFill>
-                    </a:rPr>
-                    <a:t>Run Job</a:t>
-                  </a:r>
-                </a:p>
-              </p:txBody>
-            </p:sp>
-            <p:cxnSp>
-              <p:nvCxnSpPr>
-                <p:cNvPr id="107" name="Straight Connector 106">
-                  <a:extLst>
-                    <a:ext uri="{FF2B5EF4-FFF2-40B4-BE49-F238E27FC236}">
-                      <a16:creationId xmlns:a16="http://schemas.microsoft.com/office/drawing/2014/main" id="{F6133D7E-94E1-7137-40DE-0C6131EF1123}"/>
-                    </a:ext>
-                  </a:extLst>
-                </p:cNvPr>
-                <p:cNvCxnSpPr>
-                  <a:cxnSpLocks/>
-                </p:cNvCxnSpPr>
-                <p:nvPr/>
-              </p:nvCxnSpPr>
-              <p:spPr>
-                <a:xfrm>
-                  <a:off x="1412269" y="5135530"/>
-                  <a:ext cx="8112730" cy="0"/>
-                </a:xfrm>
-                <a:prstGeom prst="line">
-                  <a:avLst/>
-                </a:prstGeom>
-                <a:ln w="19050" cap="flat" cmpd="sng" algn="ctr">
-                  <a:solidFill>
-                    <a:schemeClr val="bg1"/>
-                  </a:solidFill>
-                  <a:prstDash val="dash"/>
-                  <a:round/>
-                  <a:headEnd type="none" w="med" len="med"/>
-                  <a:tailEnd type="none" w="med" len="med"/>
-                </a:ln>
-              </p:spPr>
-              <p:style>
-                <a:lnRef idx="0">
-                  <a:scrgbClr r="0" g="0" b="0"/>
-                </a:lnRef>
-                <a:fillRef idx="0">
-                  <a:scrgbClr r="0" g="0" b="0"/>
-                </a:fillRef>
-                <a:effectRef idx="0">
-                  <a:scrgbClr r="0" g="0" b="0"/>
-                </a:effectRef>
-                <a:fontRef idx="minor">
-                  <a:schemeClr val="tx1"/>
-                </a:fontRef>
-              </p:style>
-            </p:cxnSp>
-          </p:grpSp>
-        </p:grpSp>
-        <p:grpSp>
-          <p:nvGrpSpPr>
-            <p:cNvPr id="132" name="Group 131">
-              <a:extLst>
-                <a:ext uri="{FF2B5EF4-FFF2-40B4-BE49-F238E27FC236}">
-                  <a16:creationId xmlns:a16="http://schemas.microsoft.com/office/drawing/2014/main" id="{5D7E449F-558E-2A82-83D0-0DD18C718BCB}"/>
-                </a:ext>
-              </a:extLst>
-            </p:cNvPr>
-            <p:cNvGrpSpPr/>
-            <p:nvPr/>
-          </p:nvGrpSpPr>
-          <p:grpSpPr>
-            <a:xfrm>
-              <a:off x="12985467" y="17592118"/>
-              <a:ext cx="4074674" cy="2638970"/>
-              <a:chOff x="15089626" y="18117665"/>
-              <a:chExt cx="2911547" cy="2214581"/>
-            </a:xfrm>
-          </p:grpSpPr>
-          <p:pic>
-            <p:nvPicPr>
-              <p:cNvPr id="130" name="Graphic 129" descr="Database outline">
-                <a:extLst>
-                  <a:ext uri="{FF2B5EF4-FFF2-40B4-BE49-F238E27FC236}">
-                    <a16:creationId xmlns:a16="http://schemas.microsoft.com/office/drawing/2014/main" id="{A1B2ADF8-6F5C-75F1-C094-9E6AE9F71215}"/>
-                  </a:ext>
-                </a:extLst>
-              </p:cNvPr>
-              <p:cNvPicPr>
-                <a:picLocks noChangeAspect="1"/>
-              </p:cNvPicPr>
-              <p:nvPr/>
-            </p:nvPicPr>
-            <p:blipFill>
-              <a:blip>
-                <a:extLst>
-                  <a:ext uri="{96DAC541-7B7A-43D3-8B79-37D633B846F1}">
-                    <asvg:svgBlip xmlns:asvg="http://schemas.microsoft.com/office/drawing/2016/SVG/main" r:embed="rId7"/>
-                  </a:ext>
-                </a:extLst>
-              </a:blip>
-              <a:stretch>
-                <a:fillRect/>
-              </a:stretch>
-            </p:blipFill>
-            <p:spPr>
-              <a:xfrm>
-                <a:off x="15089626" y="18117665"/>
-                <a:ext cx="2214581" cy="2214581"/>
-              </a:xfrm>
-              <a:prstGeom prst="rect">
-                <a:avLst/>
-              </a:prstGeom>
-            </p:spPr>
-          </p:pic>
-          <p:pic>
-            <p:nvPicPr>
-              <p:cNvPr id="131" name="Graphic 130" descr="Gears outline">
-                <a:extLst>
-                  <a:ext uri="{FF2B5EF4-FFF2-40B4-BE49-F238E27FC236}">
-                    <a16:creationId xmlns:a16="http://schemas.microsoft.com/office/drawing/2014/main" id="{728D8DAC-7377-4510-7121-8CD0C52F6925}"/>
-                  </a:ext>
-                </a:extLst>
-              </p:cNvPr>
-              <p:cNvPicPr>
-                <a:picLocks noChangeAspect="1"/>
-              </p:cNvPicPr>
-              <p:nvPr/>
-            </p:nvPicPr>
-            <p:blipFill>
-              <a:blip>
-                <a:extLst>
-                  <a:ext uri="{96DAC541-7B7A-43D3-8B79-37D633B846F1}">
-                    <asvg:svgBlip xmlns:asvg="http://schemas.microsoft.com/office/drawing/2016/SVG/main" r:embed="rId8"/>
-                  </a:ext>
-                </a:extLst>
-              </a:blip>
-              <a:stretch>
-                <a:fillRect/>
-              </a:stretch>
-            </p:blipFill>
-            <p:spPr>
-              <a:xfrm>
-                <a:off x="16511777" y="18356709"/>
-                <a:ext cx="1489396" cy="1489396"/>
-              </a:xfrm>
-              <a:prstGeom prst="rect">
-                <a:avLst/>
-              </a:prstGeom>
-            </p:spPr>
-          </p:pic>
-        </p:grpSp>
-        <p:sp>
-          <p:nvSpPr>
-            <p:cNvPr id="138" name="Minus Sign 137">
-              <a:extLst>
-                <a:ext uri="{FF2B5EF4-FFF2-40B4-BE49-F238E27FC236}">
-                  <a16:creationId xmlns:a16="http://schemas.microsoft.com/office/drawing/2014/main" id="{C48D16BE-8A2E-3ACD-419B-BB62C0A67363}"/>
-                </a:ext>
-              </a:extLst>
-            </p:cNvPr>
-            <p:cNvSpPr/>
-            <p:nvPr/>
-          </p:nvSpPr>
-          <p:spPr>
-            <a:xfrm rot="2461338">
-              <a:off x="25800995" y="18645329"/>
-              <a:ext cx="4601827" cy="763631"/>
-            </a:xfrm>
-            <a:prstGeom prst="mathMinus">
-              <a:avLst/>
-            </a:prstGeom>
-            <a:solidFill>
-              <a:schemeClr val="accent6">
-                <a:lumMod val="60000"/>
-                <a:lumOff val="40000"/>
-              </a:schemeClr>
-            </a:solidFill>
-            <a:ln>
-              <a:solidFill>
-                <a:schemeClr val="accent6">
-                  <a:lumMod val="60000"/>
-                  <a:lumOff val="40000"/>
-                </a:schemeClr>
-              </a:solidFill>
-            </a:ln>
-          </p:spPr>
-          <p:style>
-            <a:lnRef idx="2">
-              <a:schemeClr val="accent1">
-                <a:shade val="15000"/>
-              </a:schemeClr>
-            </a:lnRef>
-            <a:fillRef idx="1">
-              <a:schemeClr val="accent1"/>
-            </a:fillRef>
-            <a:effectRef idx="0">
-              <a:schemeClr val="accent1"/>
-            </a:effectRef>
-            <a:fontRef idx="minor">
-              <a:schemeClr val="lt1"/>
-            </a:fontRef>
-          </p:style>
-          <p:txBody>
-            <a:bodyPr rtlCol="0" anchor="ctr"/>
-            <a:lstStyle/>
-            <a:p>
-              <a:pPr algn="ctr"/>
-              <a:endParaRPr lang="en-IE"/>
-            </a:p>
-          </p:txBody>
-        </p:sp>
-        <p:grpSp>
-          <p:nvGrpSpPr>
-            <p:cNvPr id="148" name="Group 147">
-              <a:extLst>
-                <a:ext uri="{FF2B5EF4-FFF2-40B4-BE49-F238E27FC236}">
-                  <a16:creationId xmlns:a16="http://schemas.microsoft.com/office/drawing/2014/main" id="{FE2729AB-7D31-09EC-B6D4-DD02446E99F7}"/>
-                </a:ext>
-              </a:extLst>
-            </p:cNvPr>
-            <p:cNvGrpSpPr/>
-            <p:nvPr/>
-          </p:nvGrpSpPr>
-          <p:grpSpPr>
-            <a:xfrm>
-              <a:off x="20892445" y="18037170"/>
-              <a:ext cx="8251657" cy="2105025"/>
-              <a:chOff x="20920154" y="17681571"/>
-              <a:chExt cx="8251657" cy="2105025"/>
-            </a:xfrm>
-          </p:grpSpPr>
-          <p:sp>
-            <p:nvSpPr>
-              <p:cNvPr id="99" name="Arrow: Right 98">
-                <a:extLst>
-                  <a:ext uri="{FF2B5EF4-FFF2-40B4-BE49-F238E27FC236}">
-                    <a16:creationId xmlns:a16="http://schemas.microsoft.com/office/drawing/2014/main" id="{9BFB6834-0C7D-E9A4-ED0F-4C588162AC49}"/>
-                  </a:ext>
-                </a:extLst>
-              </p:cNvPr>
-              <p:cNvSpPr/>
-              <p:nvPr/>
-            </p:nvSpPr>
-            <p:spPr>
-              <a:xfrm>
-                <a:off x="24851915" y="18210209"/>
-                <a:ext cx="1828800" cy="981939"/>
-              </a:xfrm>
-              <a:prstGeom prst="rightArrow">
-                <a:avLst/>
-              </a:prstGeom>
-              <a:solidFill>
-                <a:schemeClr val="accent2"/>
-              </a:solidFill>
-              <a:ln w="57150">
-                <a:solidFill>
-                  <a:schemeClr val="tx1"/>
-                </a:solidFill>
-              </a:ln>
-            </p:spPr>
-            <p:style>
-              <a:lnRef idx="2">
-                <a:schemeClr val="accent1">
-                  <a:shade val="15000"/>
-                </a:schemeClr>
-              </a:lnRef>
-              <a:fillRef idx="1">
-                <a:schemeClr val="accent1"/>
-              </a:fillRef>
-              <a:effectRef idx="0">
-                <a:schemeClr val="accent1"/>
-              </a:effectRef>
-              <a:fontRef idx="minor">
-                <a:schemeClr val="lt1"/>
-              </a:fontRef>
-            </p:style>
-            <p:txBody>
-              <a:bodyPr rtlCol="0" anchor="ctr"/>
-              <a:lstStyle/>
-              <a:p>
-                <a:pPr algn="ctr"/>
-                <a:endParaRPr lang="en-IE"/>
-              </a:p>
-            </p:txBody>
-          </p:sp>
-          <p:grpSp>
-            <p:nvGrpSpPr>
-              <p:cNvPr id="135" name="Group 134">
-                <a:extLst>
-                  <a:ext uri="{FF2B5EF4-FFF2-40B4-BE49-F238E27FC236}">
-                    <a16:creationId xmlns:a16="http://schemas.microsoft.com/office/drawing/2014/main" id="{8D3338D0-9143-5ED2-2FAA-962AD88F8957}"/>
-                  </a:ext>
-                </a:extLst>
-              </p:cNvPr>
-              <p:cNvGrpSpPr/>
-              <p:nvPr/>
-            </p:nvGrpSpPr>
-            <p:grpSpPr>
-              <a:xfrm>
-                <a:off x="21995031" y="17702978"/>
-                <a:ext cx="2427822" cy="1996402"/>
-                <a:chOff x="26375777" y="17930059"/>
-                <a:chExt cx="3573819" cy="2536825"/>
-              </a:xfrm>
-            </p:grpSpPr>
-            <p:pic>
-              <p:nvPicPr>
-                <p:cNvPr id="133" name="Graphic 132" descr="Lock outline">
-                  <a:extLst>
-                    <a:ext uri="{FF2B5EF4-FFF2-40B4-BE49-F238E27FC236}">
-                      <a16:creationId xmlns:a16="http://schemas.microsoft.com/office/drawing/2014/main" id="{A193D7A6-EA2C-4556-C775-0E301B707948}"/>
-                    </a:ext>
-                  </a:extLst>
-                </p:cNvPr>
-                <p:cNvPicPr>
-                  <a:picLocks noChangeAspect="1"/>
-                </p:cNvPicPr>
-                <p:nvPr/>
-              </p:nvPicPr>
-              <p:blipFill>
-                <a:blip>
-                  <a:extLst>
-                    <a:ext uri="{96DAC541-7B7A-43D3-8B79-37D633B846F1}">
-                      <asvg:svgBlip xmlns:asvg="http://schemas.microsoft.com/office/drawing/2016/SVG/main" r:embed="rId5"/>
-                    </a:ext>
-                  </a:extLst>
-                </a:blip>
-                <a:stretch>
-                  <a:fillRect/>
-                </a:stretch>
-              </p:blipFill>
-              <p:spPr>
-                <a:xfrm>
-                  <a:off x="28272839" y="18405511"/>
-                  <a:ext cx="1676757" cy="1676757"/>
-                </a:xfrm>
-                <a:prstGeom prst="rect">
-                  <a:avLst/>
-                </a:prstGeom>
-              </p:spPr>
-            </p:pic>
-            <p:pic>
-              <p:nvPicPr>
-                <p:cNvPr id="134" name="Graphic 133" descr="Document with solid fill">
-                  <a:extLst>
-                    <a:ext uri="{FF2B5EF4-FFF2-40B4-BE49-F238E27FC236}">
-                      <a16:creationId xmlns:a16="http://schemas.microsoft.com/office/drawing/2014/main" id="{45B2C3B3-84ED-56A1-57A4-39CBF959ED92}"/>
-                    </a:ext>
-                  </a:extLst>
-                </p:cNvPr>
-                <p:cNvPicPr>
-                  <a:picLocks noChangeAspect="1"/>
-                </p:cNvPicPr>
-                <p:nvPr/>
-              </p:nvPicPr>
-              <p:blipFill>
-                <a:blip>
-                  <a:extLst>
-                    <a:ext uri="{96DAC541-7B7A-43D3-8B79-37D633B846F1}">
-                      <asvg:svgBlip xmlns:asvg="http://schemas.microsoft.com/office/drawing/2016/SVG/main" r:embed="rId6"/>
-                    </a:ext>
-                  </a:extLst>
-                </a:blip>
-                <a:stretch>
-                  <a:fillRect/>
-                </a:stretch>
-              </p:blipFill>
-              <p:spPr>
-                <a:xfrm>
-                  <a:off x="26375777" y="17930059"/>
-                  <a:ext cx="2536825" cy="2536825"/>
-                </a:xfrm>
-                <a:prstGeom prst="rect">
-                  <a:avLst/>
-                </a:prstGeom>
-              </p:spPr>
-            </p:pic>
-          </p:grpSp>
-          <p:pic>
-            <p:nvPicPr>
-              <p:cNvPr id="97" name="Graphic 96" descr="Alarm Ringing outline">
-                <a:extLst>
-                  <a:ext uri="{FF2B5EF4-FFF2-40B4-BE49-F238E27FC236}">
-                    <a16:creationId xmlns:a16="http://schemas.microsoft.com/office/drawing/2014/main" id="{7DD1699D-8A5C-2C89-E485-D1DE7EA636B5}"/>
-                  </a:ext>
-                </a:extLst>
-              </p:cNvPr>
-              <p:cNvPicPr>
-                <a:picLocks noChangeAspect="1"/>
-              </p:cNvPicPr>
-              <p:nvPr/>
-            </p:nvPicPr>
-            <p:blipFill>
-              <a:blip>
-                <a:extLst>
-                  <a:ext uri="{96DAC541-7B7A-43D3-8B79-37D633B846F1}">
-                    <asvg:svgBlip xmlns:asvg="http://schemas.microsoft.com/office/drawing/2016/SVG/main" r:embed="rId9"/>
-                  </a:ext>
-                </a:extLst>
-              </a:blip>
-              <a:stretch>
-                <a:fillRect/>
-              </a:stretch>
-            </p:blipFill>
-            <p:spPr>
-              <a:xfrm>
-                <a:off x="27066786" y="17681571"/>
-                <a:ext cx="2105025" cy="2105025"/>
-              </a:xfrm>
-              <a:prstGeom prst="rect">
-                <a:avLst/>
-              </a:prstGeom>
-            </p:spPr>
-          </p:pic>
-          <p:sp>
-            <p:nvSpPr>
-              <p:cNvPr id="141" name="Minus Sign 140">
-                <a:extLst>
-                  <a:ext uri="{FF2B5EF4-FFF2-40B4-BE49-F238E27FC236}">
-                    <a16:creationId xmlns:a16="http://schemas.microsoft.com/office/drawing/2014/main" id="{D1BB6AE0-ED32-E388-CB7C-69E78586C5B7}"/>
-                  </a:ext>
-                </a:extLst>
-              </p:cNvPr>
-              <p:cNvSpPr/>
-              <p:nvPr/>
-            </p:nvSpPr>
-            <p:spPr>
-              <a:xfrm rot="2461338">
-                <a:off x="20920154" y="18264330"/>
-                <a:ext cx="4601827" cy="763631"/>
-              </a:xfrm>
-              <a:prstGeom prst="mathMinus">
-                <a:avLst/>
-              </a:prstGeom>
-              <a:solidFill>
-                <a:schemeClr val="accent6">
-                  <a:lumMod val="60000"/>
-                  <a:lumOff val="40000"/>
-                </a:schemeClr>
-              </a:solidFill>
-              <a:ln>
-                <a:solidFill>
-                  <a:schemeClr val="accent6">
-                    <a:lumMod val="60000"/>
-                    <a:lumOff val="40000"/>
-                  </a:schemeClr>
-                </a:solidFill>
-              </a:ln>
-            </p:spPr>
-            <p:style>
-              <a:lnRef idx="2">
-                <a:schemeClr val="accent1">
-                  <a:shade val="15000"/>
-                </a:schemeClr>
-              </a:lnRef>
-              <a:fillRef idx="1">
-                <a:schemeClr val="accent1"/>
-              </a:fillRef>
-              <a:effectRef idx="0">
-                <a:schemeClr val="accent1"/>
-              </a:effectRef>
-              <a:fontRef idx="minor">
-                <a:schemeClr val="lt1"/>
-              </a:fontRef>
-            </p:style>
-            <p:txBody>
-              <a:bodyPr rtlCol="0" anchor="ctr"/>
-              <a:lstStyle/>
-              <a:p>
-                <a:pPr algn="ctr"/>
-                <a:endParaRPr lang="en-IE"/>
-              </a:p>
-            </p:txBody>
-          </p:sp>
-        </p:grpSp>
-        <p:sp>
-          <p:nvSpPr>
-            <p:cNvPr id="143" name="TextBox 142">
-              <a:extLst>
-                <a:ext uri="{FF2B5EF4-FFF2-40B4-BE49-F238E27FC236}">
-                  <a16:creationId xmlns:a16="http://schemas.microsoft.com/office/drawing/2014/main" id="{779D6EF5-6E71-750C-C968-275F246CB369}"/>
-                </a:ext>
-              </a:extLst>
-            </p:cNvPr>
-            <p:cNvSpPr txBox="1"/>
-            <p:nvPr/>
-          </p:nvSpPr>
-          <p:spPr>
-            <a:xfrm>
-              <a:off x="13082300" y="20255632"/>
-              <a:ext cx="3099279" cy="400110"/>
-            </a:xfrm>
-            <a:prstGeom prst="rect">
-              <a:avLst/>
-            </a:prstGeom>
-            <a:noFill/>
-          </p:spPr>
-          <p:txBody>
-            <a:bodyPr wrap="square">
-              <a:spAutoFit/>
-            </a:bodyPr>
-            <a:lstStyle/>
-            <a:p>
-              <a:pPr algn="ctr"/>
-              <a:r>
-                <a:rPr lang="en-IE" sz="2000" b="1" dirty="0">
-                  <a:solidFill>
-                    <a:schemeClr val="bg1"/>
-                  </a:solidFill>
-                </a:rPr>
-                <a:t>Read/Write ItemStore</a:t>
-              </a:r>
-              <a:endParaRPr lang="en-IE" sz="2800" b="1" dirty="0">
-                <a:solidFill>
-                  <a:schemeClr val="bg1"/>
-                </a:solidFill>
-              </a:endParaRPr>
-            </a:p>
-          </p:txBody>
-        </p:sp>
-        <p:sp>
-          <p:nvSpPr>
-            <p:cNvPr id="144" name="TextBox 143">
-              <a:extLst>
-                <a:ext uri="{FF2B5EF4-FFF2-40B4-BE49-F238E27FC236}">
-                  <a16:creationId xmlns:a16="http://schemas.microsoft.com/office/drawing/2014/main" id="{0163D558-D9CF-EB15-A543-67E9B490F9E6}"/>
-                </a:ext>
-              </a:extLst>
-            </p:cNvPr>
-            <p:cNvSpPr txBox="1"/>
-            <p:nvPr/>
-          </p:nvSpPr>
-          <p:spPr>
-            <a:xfrm>
-              <a:off x="24093343" y="8745858"/>
-              <a:ext cx="3099279" cy="400110"/>
-            </a:xfrm>
-            <a:prstGeom prst="rect">
-              <a:avLst/>
-            </a:prstGeom>
-            <a:noFill/>
-          </p:spPr>
-          <p:txBody>
-            <a:bodyPr wrap="square">
-              <a:spAutoFit/>
-            </a:bodyPr>
-            <a:lstStyle/>
-            <a:p>
-              <a:pPr algn="ctr"/>
-              <a:r>
-                <a:rPr lang="en-IE" sz="2000" b="1" dirty="0">
-                  <a:solidFill>
-                    <a:schemeClr val="bg1"/>
-                  </a:solidFill>
-                </a:rPr>
-                <a:t>Commits HostLock File</a:t>
-              </a:r>
-              <a:endParaRPr lang="en-IE" sz="2800" b="1" dirty="0">
-                <a:solidFill>
-                  <a:schemeClr val="bg1"/>
-                </a:solidFill>
-              </a:endParaRPr>
-            </a:p>
-          </p:txBody>
-        </p:sp>
-        <p:sp>
-          <p:nvSpPr>
-            <p:cNvPr id="145" name="TextBox 144">
-              <a:extLst>
-                <a:ext uri="{FF2B5EF4-FFF2-40B4-BE49-F238E27FC236}">
-                  <a16:creationId xmlns:a16="http://schemas.microsoft.com/office/drawing/2014/main" id="{488BA0E4-2698-AA4F-33BC-437205A939A7}"/>
-                </a:ext>
-              </a:extLst>
-            </p:cNvPr>
-            <p:cNvSpPr txBox="1"/>
-            <p:nvPr/>
-          </p:nvSpPr>
-          <p:spPr>
-            <a:xfrm>
-              <a:off x="22975262" y="20443592"/>
-              <a:ext cx="5526310" cy="400110"/>
-            </a:xfrm>
-            <a:prstGeom prst="rect">
-              <a:avLst/>
-            </a:prstGeom>
-            <a:noFill/>
-          </p:spPr>
-          <p:txBody>
-            <a:bodyPr wrap="square">
-              <a:spAutoFit/>
-            </a:bodyPr>
-            <a:lstStyle/>
-            <a:p>
-              <a:pPr algn="ctr"/>
-              <a:r>
-                <a:rPr lang="en-IE" sz="2000" b="1" dirty="0">
-                  <a:solidFill>
-                    <a:schemeClr val="bg1"/>
-                  </a:solidFill>
-                </a:rPr>
-                <a:t>Clears lock files for the next elected leader</a:t>
-              </a:r>
-              <a:endParaRPr lang="en-IE" sz="2800" b="1" dirty="0">
-                <a:solidFill>
-                  <a:schemeClr val="bg1"/>
-                </a:solidFill>
-              </a:endParaRPr>
-            </a:p>
-          </p:txBody>
-        </p:sp>
-        <p:sp>
-          <p:nvSpPr>
-            <p:cNvPr id="146" name="TextBox 145">
-              <a:extLst>
-                <a:ext uri="{FF2B5EF4-FFF2-40B4-BE49-F238E27FC236}">
-                  <a16:creationId xmlns:a16="http://schemas.microsoft.com/office/drawing/2014/main" id="{3B8E43E1-7436-194E-48AB-E1CA8307367E}"/>
-                </a:ext>
-              </a:extLst>
-            </p:cNvPr>
-            <p:cNvSpPr txBox="1"/>
-            <p:nvPr/>
-          </p:nvSpPr>
-          <p:spPr>
-            <a:xfrm>
-              <a:off x="2527706" y="20119124"/>
-              <a:ext cx="3099279" cy="400110"/>
-            </a:xfrm>
-            <a:prstGeom prst="rect">
-              <a:avLst/>
-            </a:prstGeom>
-            <a:noFill/>
-          </p:spPr>
-          <p:txBody>
-            <a:bodyPr wrap="square">
-              <a:spAutoFit/>
-            </a:bodyPr>
-            <a:lstStyle/>
-            <a:p>
-              <a:pPr algn="ctr"/>
-              <a:r>
-                <a:rPr lang="en-IE" sz="2000" b="1" dirty="0">
-                  <a:solidFill>
-                    <a:schemeClr val="bg1"/>
-                  </a:solidFill>
-                </a:rPr>
-                <a:t>Host holds OS lock</a:t>
-              </a:r>
-              <a:endParaRPr lang="en-IE" sz="2800" b="1" dirty="0">
-                <a:solidFill>
-                  <a:schemeClr val="bg1"/>
-                </a:solidFill>
-              </a:endParaRPr>
-            </a:p>
-          </p:txBody>
-        </p:sp>
-        <p:sp>
-          <p:nvSpPr>
-            <p:cNvPr id="147" name="TextBox 146">
-              <a:extLst>
-                <a:ext uri="{FF2B5EF4-FFF2-40B4-BE49-F238E27FC236}">
-                  <a16:creationId xmlns:a16="http://schemas.microsoft.com/office/drawing/2014/main" id="{D60B3236-5E5F-740E-7BF1-6307428B9C13}"/>
-                </a:ext>
-              </a:extLst>
-            </p:cNvPr>
-            <p:cNvSpPr txBox="1"/>
-            <p:nvPr/>
-          </p:nvSpPr>
-          <p:spPr>
-            <a:xfrm>
-              <a:off x="12017069" y="6417953"/>
-              <a:ext cx="7519788" cy="2708434"/>
-            </a:xfrm>
-            <a:prstGeom prst="rect">
-              <a:avLst/>
-            </a:prstGeom>
-            <a:noFill/>
-          </p:spPr>
-          <p:txBody>
-            <a:bodyPr wrap="square" rtlCol="0">
-              <a:spAutoFit/>
-            </a:bodyPr>
-            <a:lstStyle/>
-            <a:p>
-              <a:pPr algn="ctr"/>
-              <a:r>
-                <a:rPr lang="en-IE" sz="3400" b="1" dirty="0">
-                  <a:solidFill>
-                    <a:schemeClr val="bg1"/>
-                  </a:solidFill>
-                </a:rPr>
-                <a:t>1769689749.HostA-InstanceA.json</a:t>
-              </a:r>
-            </a:p>
-            <a:p>
-              <a:pPr algn="ctr"/>
-              <a:r>
-                <a:rPr lang="en-IE" sz="3400" b="1" dirty="0">
-                  <a:solidFill>
-                    <a:schemeClr val="bg1"/>
-                  </a:solidFill>
-                </a:rPr>
-                <a:t>1769689809.HostA-InstanceB.json</a:t>
-              </a:r>
-            </a:p>
-            <a:p>
-              <a:pPr algn="ctr"/>
-              <a:r>
-                <a:rPr lang="en-IE" sz="3400" b="1" dirty="0">
-                  <a:solidFill>
-                    <a:schemeClr val="bg1"/>
-                  </a:solidFill>
-                </a:rPr>
-                <a:t>1769689869.HostB-InstanceZ.json</a:t>
-              </a:r>
-            </a:p>
-            <a:p>
-              <a:pPr algn="ctr"/>
-              <a:r>
-                <a:rPr lang="en-IE" sz="3400" b="1" dirty="0">
-                  <a:solidFill>
-                    <a:schemeClr val="bg1"/>
-                  </a:solidFill>
-                </a:rPr>
-                <a:t>1769689929.HostR-InstanceG.json</a:t>
-              </a:r>
-            </a:p>
-            <a:p>
-              <a:pPr algn="ctr"/>
-              <a:r>
-                <a:rPr lang="en-IE" sz="3400" b="1" dirty="0">
-                  <a:solidFill>
-                    <a:schemeClr val="bg1"/>
-                  </a:solidFill>
-                </a:rPr>
-                <a:t>1769689989.HostA-InstanceF.json</a:t>
-              </a:r>
-            </a:p>
-          </p:txBody>
-        </p:sp>
-      </p:grpSp>
-    </p:spTree>
-    <p:extLst>
-      <p:ext uri="{BB962C8B-B14F-4D97-AF65-F5344CB8AC3E}">
-        <p14:creationId xmlns:p14="http://schemas.microsoft.com/office/powerpoint/2010/main" val="4175615422"/>
       </p:ext>
     </p:extLst>
   </p:cSld>
